--- a/SFN/2023_SFN_trust.pptx
+++ b/SFN/2023_SFN_trust.pptx
@@ -293,7 +293,7 @@
             <a:fld id="{A12439DB-88A9-47CB-8306-24653602898A}" type="datetimeFigureOut">
               <a:rPr lang="en-US" altLang="en-US"/>
               <a:pPr/>
-              <a:t>10/26/23</a:t>
+              <a:t>11/6/23</a:t>
             </a:fld>
             <a:endParaRPr lang="en-US" altLang="en-US"/>
           </a:p>
@@ -4404,7 +4404,7 @@
           <p:nvPr/>
         </p:nvPicPr>
         <p:blipFill rotWithShape="1">
-          <a:blip r:embed="rId3"/>
+          <a:blip/>
           <a:srcRect r="15362"/>
           <a:stretch/>
         </p:blipFill>
@@ -4433,7 +4433,7 @@
           <p:nvPr/>
         </p:nvPicPr>
         <p:blipFill>
-          <a:blip r:embed="rId4">
+          <a:blip>
             <a:extLst>
               <a:ext uri="{28A0092B-C50C-407E-A947-70E740481C1C}">
                 <a14:useLocalDpi xmlns:a14="http://schemas.microsoft.com/office/drawing/2010/main" val="0"/>
@@ -5641,7 +5641,7 @@
           <p:nvPr/>
         </p:nvPicPr>
         <p:blipFill>
-          <a:blip r:embed="rId5">
+          <a:blip>
             <a:extLst>
               <a:ext uri="{28A0092B-C50C-407E-A947-70E740481C1C}">
                 <a14:useLocalDpi xmlns:a14="http://schemas.microsoft.com/office/drawing/2010/main" val="0"/>
@@ -8116,7 +8116,7 @@
           <p:nvPr/>
         </p:nvPicPr>
         <p:blipFill>
-          <a:blip r:embed="rId6">
+          <a:blip>
             <a:extLst>
               <a:ext uri="{28A0092B-C50C-407E-A947-70E740481C1C}">
                 <a14:useLocalDpi xmlns:a14="http://schemas.microsoft.com/office/drawing/2010/main" val="0"/>
@@ -8925,13 +8925,7 @@
           <p:nvPr/>
         </p:nvPicPr>
         <p:blipFill>
-          <a:blip r:embed="rId7">
-            <a:extLst>
-              <a:ext uri="{96DAC541-7B7A-43D3-8B79-37D633B846F1}">
-                <asvg:svgBlip xmlns:asvg="http://schemas.microsoft.com/office/drawing/2016/SVG/main" r:embed="rId8"/>
-              </a:ext>
-            </a:extLst>
-          </a:blip>
+          <a:blip/>
           <a:stretch>
             <a:fillRect/>
           </a:stretch>
@@ -9047,7 +9041,7 @@
           <p:nvPr/>
         </p:nvPicPr>
         <p:blipFill>
-          <a:blip r:embed="rId9"/>
+          <a:blip/>
           <a:stretch>
             <a:fillRect/>
           </a:stretch>
@@ -9077,7 +9071,7 @@
           <p:nvPr/>
         </p:nvPicPr>
         <p:blipFill>
-          <a:blip r:embed="rId10"/>
+          <a:blip/>
           <a:stretch>
             <a:fillRect/>
           </a:stretch>
@@ -9726,7 +9720,7 @@
           <p:nvPr/>
         </p:nvPicPr>
         <p:blipFill>
-          <a:blip r:embed="rId11"/>
+          <a:blip/>
           <a:stretch>
             <a:fillRect/>
           </a:stretch>
@@ -9756,7 +9750,7 @@
           <p:nvPr/>
         </p:nvPicPr>
         <p:blipFill>
-          <a:blip r:embed="rId12"/>
+          <a:blip/>
           <a:stretch>
             <a:fillRect/>
           </a:stretch>
@@ -10468,7 +10462,7 @@
           <p:nvPr/>
         </p:nvPicPr>
         <p:blipFill>
-          <a:blip r:embed="rId13"/>
+          <a:blip/>
           <a:stretch>
             <a:fillRect/>
           </a:stretch>
@@ -10498,7 +10492,7 @@
           <p:nvPr/>
         </p:nvPicPr>
         <p:blipFill>
-          <a:blip r:embed="rId14"/>
+          <a:blip/>
           <a:stretch>
             <a:fillRect/>
           </a:stretch>
@@ -10528,9 +10522,9 @@
         <p:grpSpPr>
           <a:xfrm>
             <a:off x="9652951" y="17772995"/>
-            <a:ext cx="4026474" cy="2211315"/>
+            <a:ext cx="4137746" cy="1716829"/>
             <a:chOff x="9671298" y="17666601"/>
-            <a:chExt cx="4026474" cy="2211315"/>
+            <a:chExt cx="4137746" cy="1716829"/>
           </a:xfrm>
         </p:grpSpPr>
         <p:cxnSp>
@@ -10549,12 +10543,12 @@
           </p:nvCxnSpPr>
           <p:spPr bwMode="auto">
             <a:xfrm rot="16200000" flipH="1">
-              <a:off x="12740761" y="18920906"/>
-              <a:ext cx="1352903" cy="561118"/>
+              <a:off x="13057930" y="18587512"/>
+              <a:ext cx="785486" cy="716743"/>
             </a:xfrm>
             <a:prstGeom prst="bentConnector3">
               <a:avLst>
-                <a:gd name="adj1" fmla="val 2438"/>
+                <a:gd name="adj1" fmla="val -5434"/>
               </a:avLst>
             </a:prstGeom>
             <a:solidFill>
@@ -10818,7 +10812,7 @@
           <p:nvPr/>
         </p:nvPicPr>
         <p:blipFill>
-          <a:blip r:embed="rId15">
+          <a:blip>
             <a:extLst>
               <a:ext uri="{28A0092B-C50C-407E-A947-70E740481C1C}">
                 <a14:useLocalDpi xmlns:a14="http://schemas.microsoft.com/office/drawing/2010/main" val="0"/>
@@ -11790,7 +11784,7 @@
           <p:nvPr/>
         </p:nvPicPr>
         <p:blipFill rotWithShape="1">
-          <a:blip r:embed="rId16"/>
+          <a:blip/>
           <a:srcRect r="10312"/>
           <a:stretch/>
         </p:blipFill>
@@ -11819,7 +11813,7 @@
           <p:nvPr/>
         </p:nvPicPr>
         <p:blipFill>
-          <a:blip r:embed="rId17"/>
+          <a:blip/>
           <a:stretch>
             <a:fillRect/>
           </a:stretch>
@@ -12474,7 +12468,7 @@
           <p:nvPr/>
         </p:nvPicPr>
         <p:blipFill rotWithShape="1">
-          <a:blip r:embed="rId18"/>
+          <a:blip/>
           <a:srcRect r="7280"/>
           <a:stretch/>
         </p:blipFill>
@@ -12503,7 +12497,7 @@
           <p:nvPr/>
         </p:nvPicPr>
         <p:blipFill>
-          <a:blip r:embed="rId19"/>
+          <a:blip/>
           <a:stretch>
             <a:fillRect/>
           </a:stretch>
@@ -13572,6 +13566,36 @@
           </a:p>
         </p:txBody>
       </p:sp>
+      <p:pic>
+        <p:nvPicPr>
+          <p:cNvPr id="7" name="Picture 6">
+            <a:extLst>
+              <a:ext uri="{FF2B5EF4-FFF2-40B4-BE49-F238E27FC236}">
+                <a16:creationId xmlns:a16="http://schemas.microsoft.com/office/drawing/2014/main" id="{E5B61256-0745-91A9-AD49-FA138651C227}"/>
+              </a:ext>
+            </a:extLst>
+          </p:cNvPr>
+          <p:cNvPicPr>
+            <a:picLocks noChangeAspect="1"/>
+          </p:cNvPicPr>
+          <p:nvPr/>
+        </p:nvPicPr>
+        <p:blipFill>
+          <a:blip r:embed="rId3"/>
+          <a:stretch>
+            <a:fillRect/>
+          </a:stretch>
+        </p:blipFill>
+        <p:spPr>
+          <a:xfrm>
+            <a:off x="12485319" y="19632612"/>
+            <a:ext cx="2419305" cy="2411132"/>
+          </a:xfrm>
+          <a:prstGeom prst="rect">
+            <a:avLst/>
+          </a:prstGeom>
+        </p:spPr>
+      </p:pic>
     </p:spTree>
   </p:cSld>
   <p:clrMapOvr>

--- a/SFN/2023_SFN_trust.pptx
+++ b/SFN/2023_SFN_trust.pptx
@@ -4389,71 +4389,6 @@
           <a:chExt cx="0" cy="0"/>
         </a:xfrm>
       </p:grpSpPr>
-      <p:pic>
-        <p:nvPicPr>
-          <p:cNvPr id="15419" name="Picture 15418">
-            <a:extLst>
-              <a:ext uri="{FF2B5EF4-FFF2-40B4-BE49-F238E27FC236}">
-                <a16:creationId xmlns:a16="http://schemas.microsoft.com/office/drawing/2014/main" id="{3DEE09E8-3642-9692-62D9-025C5C2AC14D}"/>
-              </a:ext>
-            </a:extLst>
-          </p:cNvPr>
-          <p:cNvPicPr>
-            <a:picLocks noChangeAspect="1"/>
-          </p:cNvPicPr>
-          <p:nvPr/>
-        </p:nvPicPr>
-        <p:blipFill rotWithShape="1">
-          <a:blip/>
-          <a:srcRect r="15362"/>
-          <a:stretch/>
-        </p:blipFill>
-        <p:spPr>
-          <a:xfrm>
-            <a:off x="16219381" y="15121672"/>
-            <a:ext cx="7118354" cy="6719107"/>
-          </a:xfrm>
-          <a:prstGeom prst="rect">
-            <a:avLst/>
-          </a:prstGeom>
-        </p:spPr>
-      </p:pic>
-      <p:pic>
-        <p:nvPicPr>
-          <p:cNvPr id="22" name="Picture 21" descr="A screenshot of a computer&#10;&#10;Description automatically generated">
-            <a:extLst>
-              <a:ext uri="{FF2B5EF4-FFF2-40B4-BE49-F238E27FC236}">
-                <a16:creationId xmlns:a16="http://schemas.microsoft.com/office/drawing/2014/main" id="{DF7DFA05-762D-8284-675A-28B8724DB10C}"/>
-              </a:ext>
-            </a:extLst>
-          </p:cNvPr>
-          <p:cNvPicPr>
-            <a:picLocks noChangeAspect="1"/>
-          </p:cNvPicPr>
-          <p:nvPr/>
-        </p:nvPicPr>
-        <p:blipFill>
-          <a:blip>
-            <a:extLst>
-              <a:ext uri="{28A0092B-C50C-407E-A947-70E740481C1C}">
-                <a14:useLocalDpi xmlns:a14="http://schemas.microsoft.com/office/drawing/2010/main" val="0"/>
-              </a:ext>
-            </a:extLst>
-          </a:blip>
-          <a:stretch>
-            <a:fillRect/>
-          </a:stretch>
-        </p:blipFill>
-        <p:spPr>
-          <a:xfrm>
-            <a:off x="1698732" y="15539354"/>
-            <a:ext cx="12933929" cy="10506200"/>
-          </a:xfrm>
-          <a:prstGeom prst="rect">
-            <a:avLst/>
-          </a:prstGeom>
-        </p:spPr>
-      </p:pic>
       <p:sp>
         <p:nvSpPr>
           <p:cNvPr id="15362" name="TextBox 189"/>
@@ -6333,7 +6268,7 @@
                 </a:solidFill>
                 <a:latin typeface="Trebuchet MS" panose="020B0603020202020204" pitchFamily="34" charset="0"/>
               </a:rPr>
-              <a:t>3. Behavioral Results Indicate Subjects Act Strategically </a:t>
+              <a:t>3. Subjects Are Closer With Friends than With Strangers</a:t>
             </a:r>
           </a:p>
         </p:txBody>
@@ -7714,7 +7649,7 @@
                 <a:latin typeface="Trebuchet MS"/>
                 <a:ea typeface="MS PGothic"/>
               </a:rPr>
-              <a:t>4. Activation during Strategic Decisions </a:t>
+              <a:t>4. Activation during Outcome Phase</a:t>
             </a:r>
             <a:endParaRPr lang="en-US" altLang="en-US" sz="4267" b="1" dirty="0">
               <a:solidFill>
@@ -7799,7 +7734,7 @@
         <p:spPr>
           <a:xfrm>
             <a:off x="15724394" y="14746184"/>
-            <a:ext cx="14650695" cy="3046988"/>
+            <a:ext cx="14650695" cy="584775"/>
           </a:xfrm>
           <a:prstGeom prst="rect">
             <a:avLst/>
@@ -7825,38 +7760,8 @@
                 <a:ea typeface="MS PGothic"/>
                 <a:cs typeface="Helvetica"/>
               </a:rPr>
-              <a:t>We replicated previous findings (Spitzer et al., 2007) during strategic decisions.</a:t>
-            </a:r>
-            <a:br>
-              <a:rPr lang="en-US" sz="3200" b="0" i="1" dirty="0">
-                <a:effectLst/>
-                <a:cs typeface="Helvetica" panose="020B0604020202020204" pitchFamily="34" charset="0"/>
-              </a:rPr>
-            </a:br>
-            <a:br>
-              <a:rPr lang="en-US" sz="3200" b="0" i="1" dirty="0">
-                <a:effectLst/>
-                <a:cs typeface="Helvetica" panose="020B0604020202020204" pitchFamily="34" charset="0"/>
-              </a:rPr>
-            </a:br>
-            <a:br>
-              <a:rPr lang="en-US" sz="3200" b="0" i="1" dirty="0">
-                <a:effectLst/>
-                <a:cs typeface="Helvetica" panose="020B0604020202020204" pitchFamily="34" charset="0"/>
-              </a:rPr>
-            </a:br>
-            <a:br>
-              <a:rPr lang="en-US" sz="3200" b="0" i="1" dirty="0">
-                <a:effectLst/>
-                <a:cs typeface="Helvetica" panose="020B0604020202020204" pitchFamily="34" charset="0"/>
-              </a:rPr>
-            </a:br>
-            <a:br>
-              <a:rPr lang="en-US" sz="3200" b="0" i="1" dirty="0">
-                <a:effectLst/>
-                <a:cs typeface="Helvetica" panose="020B0604020202020204" pitchFamily="34" charset="0"/>
-              </a:rPr>
-            </a:br>
+              <a:t>We found VS activation for Reciprocate &gt; Defect outcomes</a:t>
+            </a:r>
             <a:endParaRPr lang="en-US" sz="3200" i="1" dirty="0">
               <a:cs typeface="Helvetica" panose="020B0604020202020204" pitchFamily="34" charset="0"/>
             </a:endParaRPr>
@@ -8910,36 +8815,6 @@
           </a:p>
         </p:txBody>
       </p:sp>
-      <p:pic>
-        <p:nvPicPr>
-          <p:cNvPr id="34" name="Graphic 33">
-            <a:extLst>
-              <a:ext uri="{FF2B5EF4-FFF2-40B4-BE49-F238E27FC236}">
-                <a16:creationId xmlns:a16="http://schemas.microsoft.com/office/drawing/2014/main" id="{7F39EFD2-EC6F-E30A-AF41-D09C2F79B59D}"/>
-              </a:ext>
-            </a:extLst>
-          </p:cNvPr>
-          <p:cNvPicPr>
-            <a:picLocks noChangeAspect="1"/>
-          </p:cNvPicPr>
-          <p:nvPr/>
-        </p:nvPicPr>
-        <p:blipFill>
-          <a:blip/>
-          <a:stretch>
-            <a:fillRect/>
-          </a:stretch>
-        </p:blipFill>
-        <p:spPr>
-          <a:xfrm flipH="1">
-            <a:off x="21398225" y="16008317"/>
-            <a:ext cx="470321" cy="1423362"/>
-          </a:xfrm>
-          <a:prstGeom prst="rect">
-            <a:avLst/>
-          </a:prstGeom>
-        </p:spPr>
-      </p:pic>
       <p:sp>
         <p:nvSpPr>
           <p:cNvPr id="35" name="TextBox 34">
@@ -8954,8 +8829,8 @@
         </p:nvSpPr>
         <p:spPr>
           <a:xfrm>
-            <a:off x="21656929" y="15472026"/>
-            <a:ext cx="1817883" cy="584775"/>
+            <a:off x="21821456" y="15519657"/>
+            <a:ext cx="1133197" cy="584775"/>
           </a:xfrm>
           <a:prstGeom prst="rect">
             <a:avLst/>
@@ -8973,7 +8848,7 @@
                 <a:latin typeface="Helvetica"/>
                 <a:ea typeface="MS PGothic"/>
               </a:rPr>
-              <a:t>IFG</a:t>
+              <a:t>VS</a:t>
             </a:r>
             <a:endParaRPr lang="en-US" sz="3200" b="1" dirty="0">
               <a:latin typeface="Helvetica"/>
@@ -8995,7 +8870,7 @@
         </p:nvSpPr>
         <p:spPr>
           <a:xfrm>
-            <a:off x="20840738" y="20412559"/>
+            <a:off x="21094087" y="20438064"/>
             <a:ext cx="2660825" cy="954107"/>
           </a:xfrm>
           <a:prstGeom prst="rect">
@@ -9015,7 +8890,7 @@
                 <a:latin typeface="Helvetica"/>
                 <a:ea typeface="MS PGothic"/>
               </a:rPr>
-              <a:t>X=54</a:t>
+              <a:t>Y=9</a:t>
             </a:r>
           </a:p>
           <a:p>
@@ -9026,66 +8901,6 @@
           </a:p>
         </p:txBody>
       </p:sp>
-      <p:pic>
-        <p:nvPicPr>
-          <p:cNvPr id="41" name="Picture 40">
-            <a:extLst>
-              <a:ext uri="{FF2B5EF4-FFF2-40B4-BE49-F238E27FC236}">
-                <a16:creationId xmlns:a16="http://schemas.microsoft.com/office/drawing/2014/main" id="{3C942EA9-A4AA-7EC7-CB18-DD300F54A4F5}"/>
-              </a:ext>
-            </a:extLst>
-          </p:cNvPr>
-          <p:cNvPicPr>
-            <a:picLocks noChangeAspect="1"/>
-          </p:cNvPicPr>
-          <p:nvPr/>
-        </p:nvPicPr>
-        <p:blipFill>
-          <a:blip/>
-          <a:stretch>
-            <a:fillRect/>
-          </a:stretch>
-        </p:blipFill>
-        <p:spPr>
-          <a:xfrm>
-            <a:off x="15814320" y="26870218"/>
-            <a:ext cx="8920689" cy="4178935"/>
-          </a:xfrm>
-          <a:prstGeom prst="rect">
-            <a:avLst/>
-          </a:prstGeom>
-        </p:spPr>
-      </p:pic>
-      <p:pic>
-        <p:nvPicPr>
-          <p:cNvPr id="43" name="Picture 42">
-            <a:extLst>
-              <a:ext uri="{FF2B5EF4-FFF2-40B4-BE49-F238E27FC236}">
-                <a16:creationId xmlns:a16="http://schemas.microsoft.com/office/drawing/2014/main" id="{AAC5D960-CDB0-EC34-2A20-BB42B0562EEF}"/>
-              </a:ext>
-            </a:extLst>
-          </p:cNvPr>
-          <p:cNvPicPr>
-            <a:picLocks noChangeAspect="1"/>
-          </p:cNvPicPr>
-          <p:nvPr/>
-        </p:nvPicPr>
-        <p:blipFill>
-          <a:blip/>
-          <a:stretch>
-            <a:fillRect/>
-          </a:stretch>
-        </p:blipFill>
-        <p:spPr>
-          <a:xfrm>
-            <a:off x="26760574" y="25642927"/>
-            <a:ext cx="3138113" cy="5054526"/>
-          </a:xfrm>
-          <a:prstGeom prst="rect">
-            <a:avLst/>
-          </a:prstGeom>
-        </p:spPr>
-      </p:pic>
       <p:sp>
         <p:nvSpPr>
           <p:cNvPr id="47" name="TextBox 46">
@@ -9705,66 +9520,6 @@
           </a:p>
         </p:txBody>
       </p:sp>
-      <p:pic>
-        <p:nvPicPr>
-          <p:cNvPr id="86" name="Picture 85">
-            <a:extLst>
-              <a:ext uri="{FF2B5EF4-FFF2-40B4-BE49-F238E27FC236}">
-                <a16:creationId xmlns:a16="http://schemas.microsoft.com/office/drawing/2014/main" id="{E573EADA-30C2-3A64-D8A6-17A8202D8868}"/>
-              </a:ext>
-            </a:extLst>
-          </p:cNvPr>
-          <p:cNvPicPr>
-            <a:picLocks noChangeAspect="1"/>
-          </p:cNvPicPr>
-          <p:nvPr/>
-        </p:nvPicPr>
-        <p:blipFill>
-          <a:blip/>
-          <a:stretch>
-            <a:fillRect/>
-          </a:stretch>
-        </p:blipFill>
-        <p:spPr>
-          <a:xfrm>
-            <a:off x="24078661" y="5660814"/>
-            <a:ext cx="6106112" cy="5158921"/>
-          </a:xfrm>
-          <a:prstGeom prst="rect">
-            <a:avLst/>
-          </a:prstGeom>
-        </p:spPr>
-      </p:pic>
-      <p:pic>
-        <p:nvPicPr>
-          <p:cNvPr id="89" name="Picture 88">
-            <a:extLst>
-              <a:ext uri="{FF2B5EF4-FFF2-40B4-BE49-F238E27FC236}">
-                <a16:creationId xmlns:a16="http://schemas.microsoft.com/office/drawing/2014/main" id="{E684E0F0-91B9-C649-829B-E3B24E052782}"/>
-              </a:ext>
-            </a:extLst>
-          </p:cNvPr>
-          <p:cNvPicPr>
-            <a:picLocks noChangeAspect="1"/>
-          </p:cNvPicPr>
-          <p:nvPr/>
-        </p:nvPicPr>
-        <p:blipFill>
-          <a:blip/>
-          <a:stretch>
-            <a:fillRect/>
-          </a:stretch>
-        </p:blipFill>
-        <p:spPr>
-          <a:xfrm>
-            <a:off x="16706497" y="5647661"/>
-            <a:ext cx="6124575" cy="5172075"/>
-          </a:xfrm>
-          <a:prstGeom prst="rect">
-            <a:avLst/>
-          </a:prstGeom>
-        </p:spPr>
-      </p:pic>
       <p:sp>
         <p:nvSpPr>
           <p:cNvPr id="90" name="TextBox 89">
@@ -10390,13 +10145,13 @@
           <a:p>
             <a:pPr algn="ctr"/>
             <a:r>
-              <a:rPr lang="en-US" sz="3600" b="1">
+              <a:rPr lang="en-US" sz="3600" b="1" dirty="0">
                 <a:latin typeface="Helvetica"/>
                 <a:ea typeface="MS PGothic"/>
               </a:rPr>
               <a:t>Proposer Conditions</a:t>
             </a:r>
-            <a:endParaRPr lang="en-US" sz="3600" b="1">
+            <a:endParaRPr lang="en-US" sz="3600" b="1" dirty="0">
               <a:latin typeface="Helvetica"/>
             </a:endParaRPr>
           </a:p>
@@ -10447,66 +10202,6 @@
           </a:p>
         </p:txBody>
       </p:sp>
-      <p:pic>
-        <p:nvPicPr>
-          <p:cNvPr id="117" name="Picture 116">
-            <a:extLst>
-              <a:ext uri="{FF2B5EF4-FFF2-40B4-BE49-F238E27FC236}">
-                <a16:creationId xmlns:a16="http://schemas.microsoft.com/office/drawing/2014/main" id="{1AA6DF01-059A-4F02-C030-B755B3F77CBE}"/>
-              </a:ext>
-            </a:extLst>
-          </p:cNvPr>
-          <p:cNvPicPr>
-            <a:picLocks noChangeAspect="1"/>
-          </p:cNvPicPr>
-          <p:nvPr/>
-        </p:nvPicPr>
-        <p:blipFill>
-          <a:blip/>
-          <a:stretch>
-            <a:fillRect/>
-          </a:stretch>
-        </p:blipFill>
-        <p:spPr>
-          <a:xfrm>
-            <a:off x="25507636" y="15420862"/>
-            <a:ext cx="4703423" cy="5407688"/>
-          </a:xfrm>
-          <a:prstGeom prst="rect">
-            <a:avLst/>
-          </a:prstGeom>
-        </p:spPr>
-      </p:pic>
-      <p:pic>
-        <p:nvPicPr>
-          <p:cNvPr id="123" name="Picture 122">
-            <a:extLst>
-              <a:ext uri="{FF2B5EF4-FFF2-40B4-BE49-F238E27FC236}">
-                <a16:creationId xmlns:a16="http://schemas.microsoft.com/office/drawing/2014/main" id="{196AE785-0F3C-F161-A966-A7BE5EDE0EA3}"/>
-              </a:ext>
-            </a:extLst>
-          </p:cNvPr>
-          <p:cNvPicPr>
-            <a:picLocks noChangeAspect="1"/>
-          </p:cNvPicPr>
-          <p:nvPr/>
-        </p:nvPicPr>
-        <p:blipFill>
-          <a:blip/>
-          <a:stretch>
-            <a:fillRect/>
-          </a:stretch>
-        </p:blipFill>
-        <p:spPr>
-          <a:xfrm>
-            <a:off x="1689014" y="28784346"/>
-            <a:ext cx="5386732" cy="2861134"/>
-          </a:xfrm>
-          <a:prstGeom prst="rect">
-            <a:avLst/>
-          </a:prstGeom>
-        </p:spPr>
-      </p:pic>
       <p:grpSp>
         <p:nvGrpSpPr>
           <p:cNvPr id="71" name="Group 70">
@@ -11212,338 +10907,6 @@
       </p:sp>
       <p:sp>
         <p:nvSpPr>
-          <p:cNvPr id="15392" name="TextBox 15391">
-            <a:extLst>
-              <a:ext uri="{FF2B5EF4-FFF2-40B4-BE49-F238E27FC236}">
-                <a16:creationId xmlns:a16="http://schemas.microsoft.com/office/drawing/2014/main" id="{0AF23D3A-AAE3-02E5-5BE6-2692D788A1B0}"/>
-              </a:ext>
-            </a:extLst>
-          </p:cNvPr>
-          <p:cNvSpPr txBox="1"/>
-          <p:nvPr/>
-        </p:nvSpPr>
-        <p:spPr>
-          <a:xfrm>
-            <a:off x="698960" y="28784346"/>
-            <a:ext cx="677108" cy="3166262"/>
-          </a:xfrm>
-          <a:prstGeom prst="rect">
-            <a:avLst/>
-          </a:prstGeom>
-          <a:noFill/>
-        </p:spPr>
-        <p:txBody>
-          <a:bodyPr rot="0" spcFirstLastPara="0" vertOverflow="overflow" horzOverflow="overflow" vert="vert270" wrap="square" lIns="91440" tIns="45720" rIns="91440" bIns="45720" numCol="1" spcCol="0" rtlCol="0" fromWordArt="0" anchor="t" anchorCtr="0" forceAA="0" compatLnSpc="1">
-            <a:prstTxWarp prst="textNoShape">
-              <a:avLst/>
-            </a:prstTxWarp>
-            <a:spAutoFit/>
-          </a:bodyPr>
-          <a:lstStyle/>
-          <a:p>
-            <a:pPr algn="ctr"/>
-            <a:r>
-              <a:rPr lang="en-US" sz="3200">
-                <a:latin typeface="Helvetica"/>
-                <a:ea typeface="MS PGothic"/>
-              </a:rPr>
-              <a:t>Frequency</a:t>
-            </a:r>
-            <a:endParaRPr lang="en-US" sz="3200">
-              <a:latin typeface="Helvetica"/>
-            </a:endParaRPr>
-          </a:p>
-        </p:txBody>
-      </p:sp>
-      <p:sp>
-        <p:nvSpPr>
-          <p:cNvPr id="15393" name="TextBox 15392">
-            <a:extLst>
-              <a:ext uri="{FF2B5EF4-FFF2-40B4-BE49-F238E27FC236}">
-                <a16:creationId xmlns:a16="http://schemas.microsoft.com/office/drawing/2014/main" id="{9EEF0278-9B75-8A8B-A32C-70F4A55522D7}"/>
-              </a:ext>
-            </a:extLst>
-          </p:cNvPr>
-          <p:cNvSpPr txBox="1"/>
-          <p:nvPr/>
-        </p:nvSpPr>
-        <p:spPr>
-          <a:xfrm>
-            <a:off x="1470408" y="31994150"/>
-            <a:ext cx="5764484" cy="584775"/>
-          </a:xfrm>
-          <a:prstGeom prst="rect">
-            <a:avLst/>
-          </a:prstGeom>
-          <a:noFill/>
-        </p:spPr>
-        <p:txBody>
-          <a:bodyPr wrap="square">
-            <a:spAutoFit/>
-          </a:bodyPr>
-          <a:lstStyle/>
-          <a:p>
-            <a:pPr algn="ctr"/>
-            <a:r>
-              <a:rPr lang="en-US" sz="3200">
-                <a:effectLst/>
-                <a:ea typeface="Times New Roman" panose="02020603050405020304" pitchFamily="18" charset="0"/>
-                <a:cs typeface="Helvetica" panose="020B0604020202020204" pitchFamily="34" charset="0"/>
-              </a:rPr>
-              <a:t>Composite Reward Sensitivity</a:t>
-            </a:r>
-            <a:endParaRPr lang="en-US" sz="3200"/>
-          </a:p>
-        </p:txBody>
-      </p:sp>
-      <p:sp>
-        <p:nvSpPr>
-          <p:cNvPr id="15408" name="TextBox 15407">
-            <a:extLst>
-              <a:ext uri="{FF2B5EF4-FFF2-40B4-BE49-F238E27FC236}">
-                <a16:creationId xmlns:a16="http://schemas.microsoft.com/office/drawing/2014/main" id="{C4B7DEE0-B862-89E8-0A74-CF0E391E07A5}"/>
-              </a:ext>
-            </a:extLst>
-          </p:cNvPr>
-          <p:cNvSpPr txBox="1"/>
-          <p:nvPr/>
-        </p:nvSpPr>
-        <p:spPr>
-          <a:xfrm>
-            <a:off x="1411414" y="31351810"/>
-            <a:ext cx="1817883" cy="523220"/>
-          </a:xfrm>
-          <a:prstGeom prst="rect">
-            <a:avLst/>
-          </a:prstGeom>
-          <a:noFill/>
-        </p:spPr>
-        <p:txBody>
-          <a:bodyPr wrap="square">
-            <a:spAutoFit/>
-          </a:bodyPr>
-          <a:lstStyle/>
-          <a:p>
-            <a:r>
-              <a:rPr lang="en-US" sz="2800" dirty="0">
-                <a:latin typeface="Helvetica"/>
-                <a:ea typeface="MS PGothic"/>
-              </a:rPr>
-              <a:t>0</a:t>
-            </a:r>
-            <a:endParaRPr lang="en-US" sz="2800" dirty="0">
-              <a:latin typeface="Helvetica"/>
-            </a:endParaRPr>
-          </a:p>
-        </p:txBody>
-      </p:sp>
-      <p:sp>
-        <p:nvSpPr>
-          <p:cNvPr id="15409" name="TextBox 15408">
-            <a:extLst>
-              <a:ext uri="{FF2B5EF4-FFF2-40B4-BE49-F238E27FC236}">
-                <a16:creationId xmlns:a16="http://schemas.microsoft.com/office/drawing/2014/main" id="{3A3C92D9-C2BD-9B53-6549-0E9C44A4593B}"/>
-              </a:ext>
-            </a:extLst>
-          </p:cNvPr>
-          <p:cNvSpPr txBox="1"/>
-          <p:nvPr/>
-        </p:nvSpPr>
-        <p:spPr>
-          <a:xfrm>
-            <a:off x="1396613" y="28677341"/>
-            <a:ext cx="1817883" cy="523220"/>
-          </a:xfrm>
-          <a:prstGeom prst="rect">
-            <a:avLst/>
-          </a:prstGeom>
-          <a:noFill/>
-        </p:spPr>
-        <p:txBody>
-          <a:bodyPr wrap="square">
-            <a:spAutoFit/>
-          </a:bodyPr>
-          <a:lstStyle/>
-          <a:p>
-            <a:r>
-              <a:rPr lang="en-US" sz="2800">
-                <a:latin typeface="Helvetica"/>
-                <a:ea typeface="MS PGothic"/>
-              </a:rPr>
-              <a:t>6</a:t>
-            </a:r>
-            <a:endParaRPr lang="en-US" sz="2800">
-              <a:latin typeface="Helvetica"/>
-            </a:endParaRPr>
-          </a:p>
-        </p:txBody>
-      </p:sp>
-      <p:sp>
-        <p:nvSpPr>
-          <p:cNvPr id="15410" name="TextBox 15409">
-            <a:extLst>
-              <a:ext uri="{FF2B5EF4-FFF2-40B4-BE49-F238E27FC236}">
-                <a16:creationId xmlns:a16="http://schemas.microsoft.com/office/drawing/2014/main" id="{051A78CA-DE0C-B426-A4B3-CE764F9D70B2}"/>
-              </a:ext>
-            </a:extLst>
-          </p:cNvPr>
-          <p:cNvSpPr txBox="1"/>
-          <p:nvPr/>
-        </p:nvSpPr>
-        <p:spPr>
-          <a:xfrm>
-            <a:off x="1396613" y="30030339"/>
-            <a:ext cx="1817883" cy="523220"/>
-          </a:xfrm>
-          <a:prstGeom prst="rect">
-            <a:avLst/>
-          </a:prstGeom>
-          <a:noFill/>
-        </p:spPr>
-        <p:txBody>
-          <a:bodyPr wrap="square">
-            <a:spAutoFit/>
-          </a:bodyPr>
-          <a:lstStyle/>
-          <a:p>
-            <a:r>
-              <a:rPr lang="en-US" sz="2800" dirty="0">
-                <a:latin typeface="Helvetica"/>
-                <a:ea typeface="MS PGothic"/>
-              </a:rPr>
-              <a:t>3</a:t>
-            </a:r>
-            <a:endParaRPr lang="en-US" sz="2800" dirty="0">
-              <a:latin typeface="Helvetica"/>
-            </a:endParaRPr>
-          </a:p>
-        </p:txBody>
-      </p:sp>
-      <p:sp>
-        <p:nvSpPr>
-          <p:cNvPr id="15411" name="TextBox 15410">
-            <a:extLst>
-              <a:ext uri="{FF2B5EF4-FFF2-40B4-BE49-F238E27FC236}">
-                <a16:creationId xmlns:a16="http://schemas.microsoft.com/office/drawing/2014/main" id="{F77AE9F3-D5AD-65E6-3D1F-F4AEFEA5944E}"/>
-              </a:ext>
-            </a:extLst>
-          </p:cNvPr>
-          <p:cNvSpPr txBox="1"/>
-          <p:nvPr/>
-        </p:nvSpPr>
-        <p:spPr>
-          <a:xfrm>
-            <a:off x="6411156" y="31531614"/>
-            <a:ext cx="1817883" cy="523220"/>
-          </a:xfrm>
-          <a:prstGeom prst="rect">
-            <a:avLst/>
-          </a:prstGeom>
-          <a:noFill/>
-        </p:spPr>
-        <p:txBody>
-          <a:bodyPr wrap="square">
-            <a:spAutoFit/>
-          </a:bodyPr>
-          <a:lstStyle/>
-          <a:p>
-            <a:r>
-              <a:rPr lang="en-US" sz="2800">
-                <a:latin typeface="Helvetica"/>
-                <a:ea typeface="MS PGothic"/>
-              </a:rPr>
-              <a:t>5</a:t>
-            </a:r>
-            <a:endParaRPr lang="en-US" sz="2800">
-              <a:latin typeface="Helvetica"/>
-            </a:endParaRPr>
-          </a:p>
-        </p:txBody>
-      </p:sp>
-      <p:sp>
-        <p:nvSpPr>
-          <p:cNvPr id="15412" name="TextBox 15411">
-            <a:extLst>
-              <a:ext uri="{FF2B5EF4-FFF2-40B4-BE49-F238E27FC236}">
-                <a16:creationId xmlns:a16="http://schemas.microsoft.com/office/drawing/2014/main" id="{89AE3856-3093-564E-D942-309D2DB9C2F1}"/>
-              </a:ext>
-            </a:extLst>
-          </p:cNvPr>
-          <p:cNvSpPr txBox="1"/>
-          <p:nvPr/>
-        </p:nvSpPr>
-        <p:spPr>
-          <a:xfrm>
-            <a:off x="1983825" y="31557487"/>
-            <a:ext cx="1817883" cy="523220"/>
-          </a:xfrm>
-          <a:prstGeom prst="rect">
-            <a:avLst/>
-          </a:prstGeom>
-          <a:noFill/>
-        </p:spPr>
-        <p:txBody>
-          <a:bodyPr wrap="square">
-            <a:spAutoFit/>
-          </a:bodyPr>
-          <a:lstStyle/>
-          <a:p>
-            <a:r>
-              <a:rPr lang="en-US" sz="2800">
-                <a:latin typeface="Helvetica"/>
-                <a:ea typeface="MS PGothic"/>
-              </a:rPr>
-              <a:t>-5</a:t>
-            </a:r>
-            <a:endParaRPr lang="en-US" sz="2800">
-              <a:latin typeface="Helvetica"/>
-            </a:endParaRPr>
-          </a:p>
-        </p:txBody>
-      </p:sp>
-      <p:sp>
-        <p:nvSpPr>
-          <p:cNvPr id="15413" name="TextBox 15412">
-            <a:extLst>
-              <a:ext uri="{FF2B5EF4-FFF2-40B4-BE49-F238E27FC236}">
-                <a16:creationId xmlns:a16="http://schemas.microsoft.com/office/drawing/2014/main" id="{FE481461-FC45-2471-3452-383C635F7584}"/>
-              </a:ext>
-            </a:extLst>
-          </p:cNvPr>
-          <p:cNvSpPr txBox="1"/>
-          <p:nvPr/>
-        </p:nvSpPr>
-        <p:spPr>
-          <a:xfrm>
-            <a:off x="4243393" y="31557487"/>
-            <a:ext cx="1817883" cy="523220"/>
-          </a:xfrm>
-          <a:prstGeom prst="rect">
-            <a:avLst/>
-          </a:prstGeom>
-          <a:noFill/>
-        </p:spPr>
-        <p:txBody>
-          <a:bodyPr wrap="square">
-            <a:spAutoFit/>
-          </a:bodyPr>
-          <a:lstStyle/>
-          <a:p>
-            <a:r>
-              <a:rPr lang="en-US" sz="2800">
-                <a:latin typeface="Helvetica"/>
-                <a:ea typeface="MS PGothic"/>
-              </a:rPr>
-              <a:t>0</a:t>
-            </a:r>
-            <a:endParaRPr lang="en-US" sz="2800">
-              <a:latin typeface="Helvetica"/>
-            </a:endParaRPr>
-          </a:p>
-        </p:txBody>
-      </p:sp>
-      <p:sp>
-        <p:nvSpPr>
           <p:cNvPr id="15415" name="TextBox 86">
             <a:extLst>
               <a:ext uri="{FF2B5EF4-FFF2-40B4-BE49-F238E27FC236}">
@@ -11769,65 +11132,6 @@
           </a:p>
         </p:txBody>
       </p:sp>
-      <p:pic>
-        <p:nvPicPr>
-          <p:cNvPr id="15425" name="Picture 15424">
-            <a:extLst>
-              <a:ext uri="{FF2B5EF4-FFF2-40B4-BE49-F238E27FC236}">
-                <a16:creationId xmlns:a16="http://schemas.microsoft.com/office/drawing/2014/main" id="{41E6EE32-8586-1A6C-0642-4C65CE040DE6}"/>
-              </a:ext>
-            </a:extLst>
-          </p:cNvPr>
-          <p:cNvPicPr>
-            <a:picLocks noChangeAspect="1"/>
-          </p:cNvPicPr>
-          <p:nvPr/>
-        </p:nvPicPr>
-        <p:blipFill rotWithShape="1">
-          <a:blip/>
-          <a:srcRect r="10312"/>
-          <a:stretch/>
-        </p:blipFill>
-        <p:spPr>
-          <a:xfrm>
-            <a:off x="30769234" y="7543125"/>
-            <a:ext cx="8759930" cy="4397805"/>
-          </a:xfrm>
-          <a:prstGeom prst="rect">
-            <a:avLst/>
-          </a:prstGeom>
-        </p:spPr>
-      </p:pic>
-      <p:pic>
-        <p:nvPicPr>
-          <p:cNvPr id="15427" name="Picture 15426">
-            <a:extLst>
-              <a:ext uri="{FF2B5EF4-FFF2-40B4-BE49-F238E27FC236}">
-                <a16:creationId xmlns:a16="http://schemas.microsoft.com/office/drawing/2014/main" id="{3AA2EAA7-8EF3-E258-853A-1E3FFEC72591}"/>
-              </a:ext>
-            </a:extLst>
-          </p:cNvPr>
-          <p:cNvPicPr>
-            <a:picLocks noChangeAspect="1"/>
-          </p:cNvPicPr>
-          <p:nvPr/>
-        </p:nvPicPr>
-        <p:blipFill>
-          <a:blip/>
-          <a:stretch>
-            <a:fillRect/>
-          </a:stretch>
-        </p:blipFill>
-        <p:spPr>
-          <a:xfrm>
-            <a:off x="41001778" y="6768422"/>
-            <a:ext cx="2437018" cy="4483488"/>
-          </a:xfrm>
-          <a:prstGeom prst="rect">
-            <a:avLst/>
-          </a:prstGeom>
-        </p:spPr>
-      </p:pic>
       <p:sp>
         <p:nvSpPr>
           <p:cNvPr id="15430" name="TextBox 15429">
@@ -12453,65 +11757,6 @@
           </a:p>
         </p:txBody>
       </p:sp>
-      <p:pic>
-        <p:nvPicPr>
-          <p:cNvPr id="15448" name="Picture 15447">
-            <a:extLst>
-              <a:ext uri="{FF2B5EF4-FFF2-40B4-BE49-F238E27FC236}">
-                <a16:creationId xmlns:a16="http://schemas.microsoft.com/office/drawing/2014/main" id="{81766F6E-65B6-18E3-F22C-AF2D8B5E62BB}"/>
-              </a:ext>
-            </a:extLst>
-          </p:cNvPr>
-          <p:cNvPicPr>
-            <a:picLocks noChangeAspect="1"/>
-          </p:cNvPicPr>
-          <p:nvPr/>
-        </p:nvPicPr>
-        <p:blipFill rotWithShape="1">
-          <a:blip/>
-          <a:srcRect r="7280"/>
-          <a:stretch/>
-        </p:blipFill>
-        <p:spPr>
-          <a:xfrm>
-            <a:off x="30816804" y="17644390"/>
-            <a:ext cx="7789455" cy="4379416"/>
-          </a:xfrm>
-          <a:prstGeom prst="rect">
-            <a:avLst/>
-          </a:prstGeom>
-        </p:spPr>
-      </p:pic>
-      <p:pic>
-        <p:nvPicPr>
-          <p:cNvPr id="15450" name="Picture 15449">
-            <a:extLst>
-              <a:ext uri="{FF2B5EF4-FFF2-40B4-BE49-F238E27FC236}">
-                <a16:creationId xmlns:a16="http://schemas.microsoft.com/office/drawing/2014/main" id="{FE0B9D97-2D2D-AA93-6F5F-FC0FFE58C800}"/>
-              </a:ext>
-            </a:extLst>
-          </p:cNvPr>
-          <p:cNvPicPr>
-            <a:picLocks noChangeAspect="1"/>
-          </p:cNvPicPr>
-          <p:nvPr/>
-        </p:nvPicPr>
-        <p:blipFill>
-          <a:blip/>
-          <a:stretch>
-            <a:fillRect/>
-          </a:stretch>
-        </p:blipFill>
-        <p:spPr>
-          <a:xfrm>
-            <a:off x="40187382" y="17398961"/>
-            <a:ext cx="3393142" cy="3577552"/>
-          </a:xfrm>
-          <a:prstGeom prst="rect">
-            <a:avLst/>
-          </a:prstGeom>
-        </p:spPr>
-      </p:pic>
       <p:sp>
         <p:nvSpPr>
           <p:cNvPr id="15453" name="TextBox 15452">
@@ -13059,146 +12304,6 @@
             <a:pPr algn="ctr"/>
             <a:endParaRPr lang="en-US" sz="2800" dirty="0">
               <a:latin typeface="Helvetica"/>
-            </a:endParaRPr>
-          </a:p>
-        </p:txBody>
-      </p:sp>
-      <p:sp>
-        <p:nvSpPr>
-          <p:cNvPr id="15472" name="Oval 15471">
-            <a:extLst>
-              <a:ext uri="{FF2B5EF4-FFF2-40B4-BE49-F238E27FC236}">
-                <a16:creationId xmlns:a16="http://schemas.microsoft.com/office/drawing/2014/main" id="{B6A323FA-B232-A8B9-1DEF-DAE42CEECB5E}"/>
-              </a:ext>
-            </a:extLst>
-          </p:cNvPr>
-          <p:cNvSpPr/>
-          <p:nvPr/>
-        </p:nvSpPr>
-        <p:spPr bwMode="auto">
-          <a:xfrm>
-            <a:off x="36935876" y="19048761"/>
-            <a:ext cx="493486" cy="438402"/>
-          </a:xfrm>
-          <a:prstGeom prst="ellipse">
-            <a:avLst/>
-          </a:prstGeom>
-          <a:noFill/>
-          <a:ln w="57150" cap="flat" cmpd="sng" algn="ctr">
-            <a:solidFill>
-              <a:srgbClr val="FFCC00"/>
-            </a:solidFill>
-            <a:prstDash val="solid"/>
-            <a:round/>
-            <a:headEnd type="none" w="med" len="med"/>
-            <a:tailEnd type="none" w="med" len="med"/>
-          </a:ln>
-          <a:effectLst/>
-        </p:spPr>
-        <p:txBody>
-          <a:bodyPr vert="horz" wrap="square" lIns="91440" tIns="45720" rIns="91440" bIns="45720" numCol="1" rtlCol="0" anchor="t" anchorCtr="0" compatLnSpc="1">
-            <a:prstTxWarp prst="textNoShape">
-              <a:avLst/>
-            </a:prstTxWarp>
-          </a:bodyPr>
-          <a:lstStyle/>
-          <a:p>
-            <a:pPr marL="0" marR="0" indent="0" algn="l" defTabSz="4389438" rtl="0" eaLnBrk="1" fontAlgn="base" latinLnBrk="0" hangingPunct="1">
-              <a:lnSpc>
-                <a:spcPct val="100000"/>
-              </a:lnSpc>
-              <a:spcBef>
-                <a:spcPct val="0"/>
-              </a:spcBef>
-              <a:spcAft>
-                <a:spcPct val="0"/>
-              </a:spcAft>
-              <a:buClrTx/>
-              <a:buSzTx/>
-              <a:buFontTx/>
-              <a:buNone/>
-              <a:tabLst/>
-            </a:pPr>
-            <a:endParaRPr kumimoji="0" lang="en-US" sz="1800" b="0" i="0" u="none" strike="noStrike" cap="none" normalizeH="0" baseline="0">
-              <a:ln>
-                <a:noFill/>
-              </a:ln>
-              <a:solidFill>
-                <a:schemeClr val="tx1"/>
-              </a:solidFill>
-              <a:effectLst/>
-              <a:latin typeface="Arial" charset="0"/>
-              <a:cs typeface="Arial" charset="0"/>
-            </a:endParaRPr>
-          </a:p>
-        </p:txBody>
-      </p:sp>
-      <p:sp>
-        <p:nvSpPr>
-          <p:cNvPr id="15473" name="Oval 15472">
-            <a:extLst>
-              <a:ext uri="{FF2B5EF4-FFF2-40B4-BE49-F238E27FC236}">
-                <a16:creationId xmlns:a16="http://schemas.microsoft.com/office/drawing/2014/main" id="{23DE8B73-D33E-6A7F-B49B-A701C39EFCCA}"/>
-              </a:ext>
-            </a:extLst>
-          </p:cNvPr>
-          <p:cNvSpPr/>
-          <p:nvPr/>
-        </p:nvSpPr>
-        <p:spPr bwMode="auto">
-          <a:xfrm>
-            <a:off x="35672654" y="9042659"/>
-            <a:ext cx="759267" cy="679965"/>
-          </a:xfrm>
-          <a:prstGeom prst="ellipse">
-            <a:avLst/>
-          </a:prstGeom>
-          <a:noFill/>
-          <a:ln w="57150" cap="flat" cmpd="sng" algn="ctr">
-            <a:solidFill>
-              <a:srgbClr val="FFCC00"/>
-            </a:solidFill>
-            <a:prstDash val="solid"/>
-            <a:round/>
-            <a:headEnd type="none" w="med" len="med"/>
-            <a:tailEnd type="none" w="med" len="med"/>
-          </a:ln>
-          <a:effectLst/>
-        </p:spPr>
-        <p:txBody>
-          <a:bodyPr vert="horz" wrap="square" lIns="91440" tIns="45720" rIns="91440" bIns="45720" numCol="1" rtlCol="0" anchor="t" anchorCtr="0" compatLnSpc="1">
-            <a:prstTxWarp prst="textNoShape">
-              <a:avLst/>
-            </a:prstTxWarp>
-          </a:bodyPr>
-          <a:lstStyle/>
-          <a:p>
-            <a:pPr marL="0" marR="0" indent="0" algn="l" defTabSz="4389438" rtl="0" eaLnBrk="1" fontAlgn="base" latinLnBrk="0" hangingPunct="1">
-              <a:lnSpc>
-                <a:spcPct val="100000"/>
-              </a:lnSpc>
-              <a:spcBef>
-                <a:spcPct val="0"/>
-              </a:spcBef>
-              <a:spcAft>
-                <a:spcPct val="0"/>
-              </a:spcAft>
-              <a:buClrTx/>
-              <a:buSzTx/>
-              <a:buFontTx/>
-              <a:buNone/>
-              <a:tabLst/>
-            </a:pPr>
-            <a:endParaRPr kumimoji="0" lang="en-US" sz="1800" b="0" i="0" u="none" strike="noStrike" cap="none" normalizeH="0" baseline="0">
-              <a:ln>
-                <a:noFill/>
-              </a:ln>
-              <a:solidFill>
-                <a:schemeClr val="tx1"/>
-              </a:solidFill>
-              <a:effectLst/>
-              <a:latin typeface="Arial" charset="0"/>
-              <a:cs typeface="Arial" charset="0"/>
             </a:endParaRPr>
           </a:p>
         </p:txBody>
@@ -13590,6 +12695,72 @@
           <a:xfrm>
             <a:off x="12485319" y="19632612"/>
             <a:ext cx="2419305" cy="2411132"/>
+          </a:xfrm>
+          <a:prstGeom prst="rect">
+            <a:avLst/>
+          </a:prstGeom>
+        </p:spPr>
+      </p:pic>
+      <p:pic>
+        <p:nvPicPr>
+          <p:cNvPr id="16" name="Picture 15" descr="A screenshot of a computer&#10;&#10;Description automatically generated">
+            <a:extLst>
+              <a:ext uri="{FF2B5EF4-FFF2-40B4-BE49-F238E27FC236}">
+                <a16:creationId xmlns:a16="http://schemas.microsoft.com/office/drawing/2014/main" id="{B07BD813-AE34-D73D-AC53-EFCB279F97D1}"/>
+              </a:ext>
+            </a:extLst>
+          </p:cNvPr>
+          <p:cNvPicPr>
+            <a:picLocks noChangeAspect="1"/>
+          </p:cNvPicPr>
+          <p:nvPr/>
+        </p:nvPicPr>
+        <p:blipFill>
+          <a:blip r:embed="rId4">
+            <a:extLst>
+              <a:ext uri="{28A0092B-C50C-407E-A947-70E740481C1C}">
+                <a14:useLocalDpi xmlns:a14="http://schemas.microsoft.com/office/drawing/2010/main" val="0"/>
+              </a:ext>
+            </a:extLst>
+          </a:blip>
+          <a:stretch>
+            <a:fillRect/>
+          </a:stretch>
+        </p:blipFill>
+        <p:spPr>
+          <a:xfrm>
+            <a:off x="1867911" y="15759794"/>
+            <a:ext cx="12396375" cy="10069546"/>
+          </a:xfrm>
+          <a:prstGeom prst="rect">
+            <a:avLst/>
+          </a:prstGeom>
+        </p:spPr>
+      </p:pic>
+      <p:pic>
+        <p:nvPicPr>
+          <p:cNvPr id="17" name="Picture 16">
+            <a:extLst>
+              <a:ext uri="{FF2B5EF4-FFF2-40B4-BE49-F238E27FC236}">
+                <a16:creationId xmlns:a16="http://schemas.microsoft.com/office/drawing/2014/main" id="{428FE8E4-EF11-44C2-C242-0D3749E5303B}"/>
+              </a:ext>
+            </a:extLst>
+          </p:cNvPr>
+          <p:cNvPicPr>
+            <a:picLocks noChangeAspect="1"/>
+          </p:cNvPicPr>
+          <p:nvPr/>
+        </p:nvPicPr>
+        <p:blipFill>
+          <a:blip r:embed="rId5"/>
+          <a:stretch>
+            <a:fillRect/>
+          </a:stretch>
+        </p:blipFill>
+        <p:spPr>
+          <a:xfrm>
+            <a:off x="15705595" y="15406813"/>
+            <a:ext cx="6082076" cy="6071098"/>
           </a:xfrm>
           <a:prstGeom prst="rect">
             <a:avLst/>
@@ -14994,15 +14165,6 @@
 </file>
 
 <file path=customXml/item1.xml><?xml version="1.0" encoding="utf-8"?>
-<?mso-contentType ?>
-<FormTemplates xmlns="http://schemas.microsoft.com/sharepoint/v3/contenttype/forms">
-  <Display>DocumentLibraryForm</Display>
-  <Edit>DocumentLibraryForm</Edit>
-  <New>DocumentLibraryForm</New>
-</FormTemplates>
-</file>
-
-<file path=customXml/item2.xml><?xml version="1.0" encoding="utf-8"?>
 <ct:contentTypeSchema xmlns:ct="http://schemas.microsoft.com/office/2006/metadata/contentType" xmlns:ma="http://schemas.microsoft.com/office/2006/metadata/properties/metaAttributes" ct:_="" ma:_="" ma:contentTypeName="Document" ma:contentTypeID="0x01010080DE0AC601CE7945A16C28BE7D604718" ma:contentTypeVersion="16" ma:contentTypeDescription="Create a new document." ma:contentTypeScope="" ma:versionID="7200742d51933ad5859751156d985908">
   <xsd:schema xmlns:xsd="http://www.w3.org/2001/XMLSchema" xmlns:xs="http://www.w3.org/2001/XMLSchema" xmlns:p="http://schemas.microsoft.com/office/2006/metadata/properties" xmlns:ns2="068132b6-27af-4cc5-9624-46e0bc309f9c" xmlns:ns3="1ec1d487-840c-40ff-aca1-00ff13008544" targetNamespace="http://schemas.microsoft.com/office/2006/metadata/properties" ma:root="true" ma:fieldsID="ef3bb859774f4d5f12e6e11e5f5551df" ns2:_="" ns3:_="">
     <xsd:import namespace="068132b6-27af-4cc5-9624-46e0bc309f9c"/>
@@ -15245,15 +14407,16 @@
 </ct:contentTypeSchema>
 </file>
 
-<file path=customXml/itemProps1.xml><?xml version="1.0" encoding="utf-8"?>
-<ds:datastoreItem xmlns:ds="http://schemas.openxmlformats.org/officeDocument/2006/customXml" ds:itemID="{D5CAE7E8-1A3A-4A91-86FB-BA9E1762341A}">
-  <ds:schemaRefs>
-    <ds:schemaRef ds:uri="http://schemas.microsoft.com/sharepoint/v3/contenttype/forms"/>
-  </ds:schemaRefs>
-</ds:datastoreItem>
+<file path=customXml/item2.xml><?xml version="1.0" encoding="utf-8"?>
+<?mso-contentType ?>
+<FormTemplates xmlns="http://schemas.microsoft.com/sharepoint/v3/contenttype/forms">
+  <Display>DocumentLibraryForm</Display>
+  <Edit>DocumentLibraryForm</Edit>
+  <New>DocumentLibraryForm</New>
+</FormTemplates>
 </file>
 
-<file path=customXml/itemProps2.xml><?xml version="1.0" encoding="utf-8"?>
+<file path=customXml/itemProps1.xml><?xml version="1.0" encoding="utf-8"?>
 <ds:datastoreItem xmlns:ds="http://schemas.openxmlformats.org/officeDocument/2006/customXml" ds:itemID="{36138A07-987C-4A73-AAED-022482DDD0A4}">
   <ds:schemaRefs>
     <ds:schemaRef ds:uri="068132b6-27af-4cc5-9624-46e0bc309f9c"/>
@@ -15270,4 +14433,12 @@
     <ds:schemaRef ds:uri="http://www.w3.org/2001/XMLSchema"/>
   </ds:schemaRefs>
 </ds:datastoreItem>
+</file>
+
+<file path=customXml/itemProps2.xml><?xml version="1.0" encoding="utf-8"?>
+<ds:datastoreItem xmlns:ds="http://schemas.openxmlformats.org/officeDocument/2006/customXml" ds:itemID="{D5CAE7E8-1A3A-4A91-86FB-BA9E1762341A}">
+  <ds:schemaRefs>
+    <ds:schemaRef ds:uri="http://schemas.microsoft.com/sharepoint/v3/contenttype/forms"/>
+  </ds:schemaRefs>
+</ds:datastoreItem>
 </file>
--- a/SFN/2023_SFN_trust.pptx
+++ b/SFN/2023_SFN_trust.pptx
@@ -5,13 +5,14 @@
     <p:sldMasterId id="2147483648" r:id="rId3"/>
   </p:sldMasterIdLst>
   <p:notesMasterIdLst>
-    <p:notesMasterId r:id="rId5"/>
+    <p:notesMasterId r:id="rId6"/>
   </p:notesMasterIdLst>
   <p:handoutMasterIdLst>
-    <p:handoutMasterId r:id="rId6"/>
+    <p:handoutMasterId r:id="rId7"/>
   </p:handoutMasterIdLst>
   <p:sldIdLst>
     <p:sldId id="256" r:id="rId4"/>
+    <p:sldId id="257" r:id="rId5"/>
   </p:sldIdLst>
   <p:sldSz cx="43891200" cy="32918400"/>
   <p:notesSz cx="7023100" cy="9309100"/>
@@ -4391,6 +4392,80 @@
       </p:grpSpPr>
       <p:sp>
         <p:nvSpPr>
+          <p:cNvPr id="15399" name="Rectangle 15398">
+            <a:extLst>
+              <a:ext uri="{FF2B5EF4-FFF2-40B4-BE49-F238E27FC236}">
+                <a16:creationId xmlns:a16="http://schemas.microsoft.com/office/drawing/2014/main" id="{3F2A222B-AB92-97CD-B2BC-B9C12D404AB1}"/>
+              </a:ext>
+            </a:extLst>
+          </p:cNvPr>
+          <p:cNvSpPr/>
+          <p:nvPr/>
+        </p:nvSpPr>
+        <p:spPr bwMode="auto">
+          <a:xfrm>
+            <a:off x="15752261" y="4761579"/>
+            <a:ext cx="6497345" cy="7245387"/>
+          </a:xfrm>
+          <a:prstGeom prst="rect">
+            <a:avLst/>
+          </a:prstGeom>
+          <a:solidFill>
+            <a:srgbClr val="FAF86D">
+              <a:alpha val="54118"/>
+            </a:srgbClr>
+          </a:solidFill>
+          <a:ln w="50800" cap="flat" cmpd="sng" algn="ctr">
+            <a:solidFill>
+              <a:schemeClr val="tx1"/>
+            </a:solidFill>
+            <a:prstDash val="solid"/>
+            <a:round/>
+            <a:headEnd type="none" w="med" len="med"/>
+            <a:tailEnd type="none" w="med" len="med"/>
+          </a:ln>
+          <a:effectLst/>
+        </p:spPr>
+        <p:txBody>
+          <a:bodyPr vert="horz" wrap="square" lIns="91440" tIns="45720" rIns="91440" bIns="45720" numCol="1" rtlCol="0" anchor="t" anchorCtr="0" compatLnSpc="1">
+            <a:prstTxWarp prst="textNoShape">
+              <a:avLst/>
+            </a:prstTxWarp>
+          </a:bodyPr>
+          <a:lstStyle/>
+          <a:p>
+            <a:pPr marL="0" marR="0" indent="0" algn="l" defTabSz="4389438" rtl="0" eaLnBrk="1" fontAlgn="base" latinLnBrk="0" hangingPunct="1">
+              <a:lnSpc>
+                <a:spcPct val="100000"/>
+              </a:lnSpc>
+              <a:spcBef>
+                <a:spcPct val="0"/>
+              </a:spcBef>
+              <a:spcAft>
+                <a:spcPct val="0"/>
+              </a:spcAft>
+              <a:buClrTx/>
+              <a:buSzTx/>
+              <a:buFontTx/>
+              <a:buNone/>
+              <a:tabLst/>
+            </a:pPr>
+            <a:endParaRPr kumimoji="0" lang="en-US" sz="1800" b="0" i="0" u="none" strike="noStrike" cap="none" normalizeH="0" baseline="0" dirty="0">
+              <a:ln>
+                <a:noFill/>
+              </a:ln>
+              <a:solidFill>
+                <a:schemeClr val="tx1"/>
+              </a:solidFill>
+              <a:effectLst/>
+              <a:latin typeface="Arial" charset="0"/>
+              <a:cs typeface="Arial" charset="0"/>
+            </a:endParaRPr>
+          </a:p>
+        </p:txBody>
+      </p:sp>
+      <p:sp>
+        <p:nvSpPr>
           <p:cNvPr id="15362" name="TextBox 189"/>
           <p:cNvSpPr txBox="1">
             <a:spLocks noChangeArrowheads="1"/>
@@ -5781,7 +5856,7 @@
         </p:nvSpPr>
         <p:spPr>
           <a:xfrm>
-            <a:off x="4914676" y="503969"/>
+            <a:off x="4838490" y="925150"/>
             <a:ext cx="33151930" cy="1353960"/>
           </a:xfrm>
           <a:prstGeom prst="rect">
@@ -7266,77 +7341,13 @@
                 <a:latin typeface="Trebuchet MS"/>
                 <a:ea typeface="MS PGothic"/>
               </a:rPr>
-              <a:t>6. </a:t>
-            </a:r>
-            <a:r>
-              <a:rPr lang="en-US" altLang="en-US" sz="4250" b="1" dirty="0" err="1">
-                <a:solidFill>
-                  <a:srgbClr val="C00000"/>
-                </a:solidFill>
-                <a:latin typeface="Trebuchet MS"/>
-                <a:ea typeface="MS PGothic"/>
-              </a:rPr>
-              <a:t>Corticostriatal</a:t>
-            </a:r>
-            <a:r>
-              <a:rPr lang="en-US" altLang="en-US" sz="4250" b="1" dirty="0">
-                <a:solidFill>
-                  <a:srgbClr val="C00000"/>
-                </a:solidFill>
-                <a:latin typeface="Trebuchet MS"/>
-                <a:ea typeface="MS PGothic"/>
-              </a:rPr>
-              <a:t> Connectivity Underlying Strategic Behavior</a:t>
+              <a:t>6. Age Related Increase in Precuneus Activation </a:t>
             </a:r>
             <a:endParaRPr lang="en-US" altLang="en-US" sz="4250" b="1" dirty="0">
               <a:solidFill>
                 <a:srgbClr val="C00000"/>
               </a:solidFill>
               <a:latin typeface="Trebuchet MS"/>
-            </a:endParaRPr>
-          </a:p>
-        </p:txBody>
-      </p:sp>
-      <p:sp>
-        <p:nvSpPr>
-          <p:cNvPr id="64" name="Rectangle 63">
-            <a:extLst>
-              <a:ext uri="{FF2B5EF4-FFF2-40B4-BE49-F238E27FC236}">
-                <a16:creationId xmlns:a16="http://schemas.microsoft.com/office/drawing/2014/main" id="{4A3E022D-37CE-084F-8459-C39A496F8F91}"/>
-              </a:ext>
-            </a:extLst>
-          </p:cNvPr>
-          <p:cNvSpPr/>
-          <p:nvPr/>
-        </p:nvSpPr>
-        <p:spPr>
-          <a:xfrm>
-            <a:off x="30578131" y="12540404"/>
-            <a:ext cx="12850408" cy="1569660"/>
-          </a:xfrm>
-          <a:prstGeom prst="rect">
-            <a:avLst/>
-          </a:prstGeom>
-        </p:spPr>
-        <p:txBody>
-          <a:bodyPr wrap="square" lIns="91440" tIns="45720" rIns="91440" bIns="45720" anchor="t">
-            <a:spAutoFit/>
-          </a:bodyPr>
-          <a:lstStyle/>
-          <a:p>
-            <a:pPr algn="ctr"/>
-            <a:r>
-              <a:rPr lang="en-US" sz="3200" spc="15" dirty="0">
-                <a:latin typeface="Helvetica"/>
-                <a:ea typeface="MS PGothic"/>
-                <a:cs typeface="Helvetica"/>
-              </a:rPr>
-              <a:t>As participants made fairer offers while making strategic decisions (UG &gt; DG), we found enhanced effective connectivity between a VS seed and Posterior Cingulate Cortex (PCC) target.</a:t>
-            </a:r>
-            <a:endParaRPr lang="en-US" sz="3200" dirty="0">
-              <a:latin typeface="Helvetica"/>
-              <a:ea typeface="MS PGothic"/>
-              <a:cs typeface="Helvetica"/>
             </a:endParaRPr>
           </a:p>
         </p:txBody>
@@ -7857,7 +7868,7 @@
         <p:spPr>
           <a:xfrm>
             <a:off x="30692751" y="5397447"/>
-            <a:ext cx="12756880" cy="1077218"/>
+            <a:ext cx="12756880" cy="584775"/>
           </a:xfrm>
           <a:prstGeom prst="rect">
             <a:avLst/>
@@ -7870,58 +7881,8 @@
           <a:lstStyle/>
           <a:p>
             <a:pPr algn="ctr"/>
-            <a:r>
-              <a:rPr lang="en-US" sz="3200" i="1" spc="15" dirty="0">
-                <a:latin typeface="Helvetica"/>
-                <a:ea typeface="MS PGothic"/>
-              </a:rPr>
-              <a:t>We investigated connectivity between a VS seed and other possible target regions during strategic behavior.</a:t>
-            </a:r>
             <a:endParaRPr lang="en-US" sz="3200" i="1" spc="15" dirty="0">
               <a:latin typeface="Helvetica" pitchFamily="2" charset="0"/>
-            </a:endParaRPr>
-          </a:p>
-        </p:txBody>
-      </p:sp>
-      <p:sp>
-        <p:nvSpPr>
-          <p:cNvPr id="51" name="Rectangle 50">
-            <a:extLst>
-              <a:ext uri="{FF2B5EF4-FFF2-40B4-BE49-F238E27FC236}">
-                <a16:creationId xmlns:a16="http://schemas.microsoft.com/office/drawing/2014/main" id="{B7EA6B8E-31C1-4977-AB6F-3CEB3BE564DF}"/>
-              </a:ext>
-            </a:extLst>
-          </p:cNvPr>
-          <p:cNvSpPr/>
-          <p:nvPr/>
-        </p:nvSpPr>
-        <p:spPr>
-          <a:xfrm>
-            <a:off x="15519865" y="12287600"/>
-            <a:ext cx="14861925" cy="1077218"/>
-          </a:xfrm>
-          <a:prstGeom prst="rect">
-            <a:avLst/>
-          </a:prstGeom>
-        </p:spPr>
-        <p:txBody>
-          <a:bodyPr wrap="square" lIns="91440" tIns="45720" rIns="91440" bIns="45720" anchor="t">
-            <a:spAutoFit/>
-          </a:bodyPr>
-          <a:lstStyle/>
-          <a:p>
-            <a:pPr algn="ctr"/>
-            <a:r>
-              <a:rPr lang="en-US" sz="3200" dirty="0">
-                <a:latin typeface="Helvetica"/>
-                <a:ea typeface="MS PGothic"/>
-              </a:rPr>
-              <a:t>Using a mixed effects model, we found that task as a proposer predicts decisions. A binary logistic regression showed that participants reject more with lower offers. </a:t>
-            </a:r>
-            <a:endParaRPr lang="en-US" sz="3200" dirty="0">
-              <a:latin typeface="Helvetica"/>
-              <a:ea typeface="MS PGothic"/>
-              <a:cs typeface="Helvetica"/>
             </a:endParaRPr>
           </a:p>
         </p:txBody>
@@ -7960,7 +7921,7 @@
                 <a:latin typeface="Helvetica"/>
                 <a:ea typeface="MS PGothic"/>
               </a:rPr>
-              <a:t>As participants proposed fairer offers during strategic decisions (DG-P &gt; UG-P), we found increasing activation in the Inferior Frontal Gyrus (IFG).</a:t>
+              <a:t>We found increasing activation in the Ventral Stratum (VS) when participants were presented with a reciprocate outcome as opposed to a defect outcome.</a:t>
             </a:r>
           </a:p>
         </p:txBody>
@@ -8100,51 +8061,6 @@
       </p:sp>
       <p:sp>
         <p:nvSpPr>
-          <p:cNvPr id="104" name="TextBox 103">
-            <a:extLst>
-              <a:ext uri="{FF2B5EF4-FFF2-40B4-BE49-F238E27FC236}">
-                <a16:creationId xmlns:a16="http://schemas.microsoft.com/office/drawing/2014/main" id="{2FAB1541-73A6-4ECD-9FD7-5103A9935C34}"/>
-              </a:ext>
-            </a:extLst>
-          </p:cNvPr>
-          <p:cNvSpPr txBox="1"/>
-          <p:nvPr/>
-        </p:nvSpPr>
-        <p:spPr>
-          <a:xfrm>
-            <a:off x="15984278" y="4706069"/>
-            <a:ext cx="14436268" cy="523220"/>
-          </a:xfrm>
-          <a:prstGeom prst="rect">
-            <a:avLst/>
-          </a:prstGeom>
-          <a:noFill/>
-        </p:spPr>
-        <p:txBody>
-          <a:bodyPr wrap="square">
-            <a:spAutoFit/>
-          </a:bodyPr>
-          <a:lstStyle/>
-          <a:p>
-            <a:r>
-              <a:rPr lang="en-US" sz="2800" i="1" dirty="0">
-                <a:solidFill>
-                  <a:srgbClr val="1D1C1D"/>
-                </a:solidFill>
-                <a:effectLst/>
-                <a:ea typeface="Times New Roman" panose="02020603050405020304" pitchFamily="18" charset="0"/>
-                <a:cs typeface="Helvetica" panose="020B0604020202020204" pitchFamily="34" charset="0"/>
-              </a:rPr>
-              <a:t>To assess if people behaved strategically as proposers, we used a mixed effects model. </a:t>
-            </a:r>
-            <a:endParaRPr lang="en-US" sz="2800" i="1" dirty="0">
-              <a:cs typeface="Helvetica" panose="020B0604020202020204" pitchFamily="34" charset="0"/>
-            </a:endParaRPr>
-          </a:p>
-        </p:txBody>
-      </p:sp>
-      <p:sp>
-        <p:nvSpPr>
           <p:cNvPr id="127" name="Rectangle 54">
             <a:extLst>
               <a:ext uri="{FF2B5EF4-FFF2-40B4-BE49-F238E27FC236}">
@@ -8370,138 +8286,6 @@
       </p:sp>
       <p:sp>
         <p:nvSpPr>
-          <p:cNvPr id="10" name="TextBox 9">
-            <a:extLst>
-              <a:ext uri="{FF2B5EF4-FFF2-40B4-BE49-F238E27FC236}">
-                <a16:creationId xmlns:a16="http://schemas.microsoft.com/office/drawing/2014/main" id="{4AB407E9-BEB3-D218-CD83-988A678E0B05}"/>
-              </a:ext>
-            </a:extLst>
-          </p:cNvPr>
-          <p:cNvSpPr txBox="1"/>
-          <p:nvPr/>
-        </p:nvSpPr>
-        <p:spPr>
-          <a:xfrm>
-            <a:off x="25967104" y="20815752"/>
-            <a:ext cx="1407381" cy="584775"/>
-          </a:xfrm>
-          <a:prstGeom prst="rect">
-            <a:avLst/>
-          </a:prstGeom>
-          <a:noFill/>
-        </p:spPr>
-        <p:txBody>
-          <a:bodyPr rot="0" spcFirstLastPara="0" vertOverflow="overflow" horzOverflow="overflow" vert="horz" wrap="square" lIns="91440" tIns="45720" rIns="91440" bIns="45720" numCol="1" spcCol="0" rtlCol="0" fromWordArt="0" anchor="t" anchorCtr="0" forceAA="0" compatLnSpc="1">
-            <a:prstTxWarp prst="textNoShape">
-              <a:avLst/>
-            </a:prstTxWarp>
-            <a:spAutoFit/>
-          </a:bodyPr>
-          <a:lstStyle/>
-          <a:p>
-            <a:r>
-              <a:rPr lang="en-US" sz="3200" b="1" dirty="0">
-                <a:latin typeface="Helvetica"/>
-                <a:ea typeface="MS PGothic"/>
-              </a:rPr>
-              <a:t>DG-P</a:t>
-            </a:r>
-            <a:endParaRPr lang="en-US" sz="3200" b="1" dirty="0">
-              <a:latin typeface="Helvetica"/>
-            </a:endParaRPr>
-          </a:p>
-        </p:txBody>
-      </p:sp>
-      <p:sp>
-        <p:nvSpPr>
-          <p:cNvPr id="11" name="TextBox 10">
-            <a:extLst>
-              <a:ext uri="{FF2B5EF4-FFF2-40B4-BE49-F238E27FC236}">
-                <a16:creationId xmlns:a16="http://schemas.microsoft.com/office/drawing/2014/main" id="{15A9E228-6973-C2ED-2ED9-68A8827A34A1}"/>
-              </a:ext>
-            </a:extLst>
-          </p:cNvPr>
-          <p:cNvSpPr txBox="1"/>
-          <p:nvPr/>
-        </p:nvSpPr>
-        <p:spPr>
-          <a:xfrm>
-            <a:off x="27179133" y="20813843"/>
-            <a:ext cx="1407381" cy="584775"/>
-          </a:xfrm>
-          <a:prstGeom prst="rect">
-            <a:avLst/>
-          </a:prstGeom>
-          <a:noFill/>
-        </p:spPr>
-        <p:txBody>
-          <a:bodyPr rot="0" spcFirstLastPara="0" vertOverflow="overflow" horzOverflow="overflow" vert="horz" wrap="square" lIns="91440" tIns="45720" rIns="91440" bIns="45720" numCol="1" spcCol="0" rtlCol="0" fromWordArt="0" anchor="t" anchorCtr="0" forceAA="0" compatLnSpc="1">
-            <a:prstTxWarp prst="textNoShape">
-              <a:avLst/>
-            </a:prstTxWarp>
-            <a:spAutoFit/>
-          </a:bodyPr>
-          <a:lstStyle/>
-          <a:p>
-            <a:r>
-              <a:rPr lang="en-US" sz="3200" b="1" dirty="0">
-                <a:latin typeface="Helvetica"/>
-                <a:ea typeface="MS PGothic"/>
-              </a:rPr>
-              <a:t>UG-P</a:t>
-            </a:r>
-            <a:endParaRPr lang="en-US" sz="3200" b="1" dirty="0">
-              <a:latin typeface="Helvetica"/>
-            </a:endParaRPr>
-          </a:p>
-        </p:txBody>
-      </p:sp>
-      <p:sp>
-        <p:nvSpPr>
-          <p:cNvPr id="12" name="TextBox 11">
-            <a:extLst>
-              <a:ext uri="{FF2B5EF4-FFF2-40B4-BE49-F238E27FC236}">
-                <a16:creationId xmlns:a16="http://schemas.microsoft.com/office/drawing/2014/main" id="{44DDB010-6601-97C7-5461-EE51937A697B}"/>
-              </a:ext>
-            </a:extLst>
-          </p:cNvPr>
-          <p:cNvSpPr txBox="1"/>
-          <p:nvPr/>
-        </p:nvSpPr>
-        <p:spPr>
-          <a:xfrm>
-            <a:off x="28395010" y="20818239"/>
-            <a:ext cx="1407381" cy="584775"/>
-          </a:xfrm>
-          <a:prstGeom prst="rect">
-            <a:avLst/>
-          </a:prstGeom>
-          <a:noFill/>
-        </p:spPr>
-        <p:txBody>
-          <a:bodyPr rot="0" spcFirstLastPara="0" vertOverflow="overflow" horzOverflow="overflow" vert="horz" wrap="square" lIns="91440" tIns="45720" rIns="91440" bIns="45720" numCol="1" spcCol="0" rtlCol="0" fromWordArt="0" anchor="t" anchorCtr="0" forceAA="0" compatLnSpc="1">
-            <a:prstTxWarp prst="textNoShape">
-              <a:avLst/>
-            </a:prstTxWarp>
-            <a:spAutoFit/>
-          </a:bodyPr>
-          <a:lstStyle/>
-          <a:p>
-            <a:r>
-              <a:rPr lang="en-US" sz="3200" b="1" dirty="0">
-                <a:latin typeface="Helvetica"/>
-                <a:ea typeface="MS PGothic"/>
-              </a:rPr>
-              <a:t>UG-R</a:t>
-            </a:r>
-            <a:endParaRPr lang="en-US" sz="3200" b="1" dirty="0">
-              <a:latin typeface="Helvetica"/>
-            </a:endParaRPr>
-          </a:p>
-        </p:txBody>
-      </p:sp>
-      <p:sp>
-        <p:nvSpPr>
           <p:cNvPr id="4" name="TextBox 3">
             <a:extLst>
               <a:ext uri="{FF2B5EF4-FFF2-40B4-BE49-F238E27FC236}">
@@ -8514,7 +8298,7 @@
         </p:nvSpPr>
         <p:spPr>
           <a:xfrm>
-            <a:off x="23869686" y="15662664"/>
+            <a:off x="23768566" y="15123319"/>
             <a:ext cx="1046440" cy="5697861"/>
           </a:xfrm>
           <a:prstGeom prst="rect">
@@ -8569,252 +8353,273 @@
           </a:p>
         </p:txBody>
       </p:sp>
-      <p:sp>
-        <p:nvSpPr>
-          <p:cNvPr id="23" name="TextBox 22">
+      <p:grpSp>
+        <p:nvGrpSpPr>
+          <p:cNvPr id="15403" name="Group 15402">
             <a:extLst>
               <a:ext uri="{FF2B5EF4-FFF2-40B4-BE49-F238E27FC236}">
-                <a16:creationId xmlns:a16="http://schemas.microsoft.com/office/drawing/2014/main" id="{2146309B-EED2-981B-5C01-7DC5AD3210E9}"/>
+                <a16:creationId xmlns:a16="http://schemas.microsoft.com/office/drawing/2014/main" id="{B7BF0CFC-8AA6-1A2A-BCC0-DB1E8AE5001C}"/>
               </a:ext>
             </a:extLst>
           </p:cNvPr>
-          <p:cNvSpPr txBox="1"/>
+          <p:cNvGrpSpPr/>
           <p:nvPr/>
-        </p:nvSpPr>
-        <p:spPr>
+        </p:nvGrpSpPr>
+        <p:grpSpPr>
           <a:xfrm>
-            <a:off x="25146473" y="17983729"/>
-            <a:ext cx="1817883" cy="523220"/>
+            <a:off x="24881694" y="15535353"/>
+            <a:ext cx="2283565" cy="4846089"/>
+            <a:chOff x="24680791" y="15399832"/>
+            <a:chExt cx="2283565" cy="4846089"/>
           </a:xfrm>
-          <a:prstGeom prst="rect">
-            <a:avLst/>
-          </a:prstGeom>
-          <a:noFill/>
-        </p:spPr>
-        <p:txBody>
-          <a:bodyPr wrap="square">
-            <a:spAutoFit/>
-          </a:bodyPr>
-          <a:lstStyle/>
-          <a:p>
-            <a:r>
-              <a:rPr lang="en-US" sz="2800">
+        </p:grpSpPr>
+        <p:sp>
+          <p:nvSpPr>
+            <p:cNvPr id="23" name="TextBox 22">
+              <a:extLst>
+                <a:ext uri="{FF2B5EF4-FFF2-40B4-BE49-F238E27FC236}">
+                  <a16:creationId xmlns:a16="http://schemas.microsoft.com/office/drawing/2014/main" id="{2146309B-EED2-981B-5C01-7DC5AD3210E9}"/>
+                </a:ext>
+              </a:extLst>
+            </p:cNvPr>
+            <p:cNvSpPr txBox="1"/>
+            <p:nvPr/>
+          </p:nvSpPr>
+          <p:spPr>
+            <a:xfrm>
+              <a:off x="25146473" y="17983729"/>
+              <a:ext cx="1817883" cy="523220"/>
+            </a:xfrm>
+            <a:prstGeom prst="rect">
+              <a:avLst/>
+            </a:prstGeom>
+            <a:noFill/>
+          </p:spPr>
+          <p:txBody>
+            <a:bodyPr wrap="square">
+              <a:spAutoFit/>
+            </a:bodyPr>
+            <a:lstStyle/>
+            <a:p>
+              <a:r>
+                <a:rPr lang="en-US" sz="2800">
+                  <a:latin typeface="Helvetica"/>
+                  <a:ea typeface="MS PGothic"/>
+                </a:rPr>
+                <a:t>0</a:t>
+              </a:r>
+              <a:endParaRPr lang="en-US" sz="2800">
                 <a:latin typeface="Helvetica"/>
-                <a:ea typeface="MS PGothic"/>
-              </a:rPr>
-              <a:t>0</a:t>
-            </a:r>
-            <a:endParaRPr lang="en-US" sz="2800">
-              <a:latin typeface="Helvetica"/>
-            </a:endParaRPr>
-          </a:p>
-        </p:txBody>
-      </p:sp>
-      <p:sp>
-        <p:nvSpPr>
-          <p:cNvPr id="27" name="TextBox 26">
-            <a:extLst>
-              <a:ext uri="{FF2B5EF4-FFF2-40B4-BE49-F238E27FC236}">
-                <a16:creationId xmlns:a16="http://schemas.microsoft.com/office/drawing/2014/main" id="{9AD52618-BC17-B99E-F4EF-72C7B533E574}"/>
-              </a:ext>
-            </a:extLst>
-          </p:cNvPr>
-          <p:cNvSpPr txBox="1"/>
-          <p:nvPr/>
-        </p:nvSpPr>
-        <p:spPr>
-          <a:xfrm>
-            <a:off x="24816037" y="16219186"/>
-            <a:ext cx="1817883" cy="523220"/>
-          </a:xfrm>
-          <a:prstGeom prst="rect">
-            <a:avLst/>
-          </a:prstGeom>
-          <a:noFill/>
-        </p:spPr>
-        <p:txBody>
-          <a:bodyPr wrap="square">
-            <a:spAutoFit/>
-          </a:bodyPr>
-          <a:lstStyle/>
-          <a:p>
-            <a:r>
-              <a:rPr lang="en-US" sz="2800">
+              </a:endParaRPr>
+            </a:p>
+          </p:txBody>
+        </p:sp>
+        <p:sp>
+          <p:nvSpPr>
+            <p:cNvPr id="27" name="TextBox 26">
+              <a:extLst>
+                <a:ext uri="{FF2B5EF4-FFF2-40B4-BE49-F238E27FC236}">
+                  <a16:creationId xmlns:a16="http://schemas.microsoft.com/office/drawing/2014/main" id="{9AD52618-BC17-B99E-F4EF-72C7B533E574}"/>
+                </a:ext>
+              </a:extLst>
+            </p:cNvPr>
+            <p:cNvSpPr txBox="1"/>
+            <p:nvPr/>
+          </p:nvSpPr>
+          <p:spPr>
+            <a:xfrm>
+              <a:off x="24816037" y="16219186"/>
+              <a:ext cx="1817883" cy="523220"/>
+            </a:xfrm>
+            <a:prstGeom prst="rect">
+              <a:avLst/>
+            </a:prstGeom>
+            <a:noFill/>
+          </p:spPr>
+          <p:txBody>
+            <a:bodyPr wrap="square">
+              <a:spAutoFit/>
+            </a:bodyPr>
+            <a:lstStyle/>
+            <a:p>
+              <a:r>
+                <a:rPr lang="en-US" sz="2800">
+                  <a:latin typeface="Helvetica"/>
+                  <a:ea typeface="MS PGothic"/>
+                </a:rPr>
+                <a:t>100</a:t>
+              </a:r>
+              <a:endParaRPr lang="en-US" sz="2800">
                 <a:latin typeface="Helvetica"/>
-                <a:ea typeface="MS PGothic"/>
-              </a:rPr>
-              <a:t>100</a:t>
-            </a:r>
-            <a:endParaRPr lang="en-US" sz="2800">
-              <a:latin typeface="Helvetica"/>
-            </a:endParaRPr>
-          </a:p>
-        </p:txBody>
-      </p:sp>
-      <p:sp>
-        <p:nvSpPr>
-          <p:cNvPr id="28" name="TextBox 27">
-            <a:extLst>
-              <a:ext uri="{FF2B5EF4-FFF2-40B4-BE49-F238E27FC236}">
-                <a16:creationId xmlns:a16="http://schemas.microsoft.com/office/drawing/2014/main" id="{9A8BD43D-8317-7797-CEB5-A56981AF26E1}"/>
-              </a:ext>
-            </a:extLst>
-          </p:cNvPr>
-          <p:cNvSpPr txBox="1"/>
-          <p:nvPr/>
-        </p:nvSpPr>
-        <p:spPr>
-          <a:xfrm>
-            <a:off x="24680791" y="19722701"/>
-            <a:ext cx="1817883" cy="523220"/>
-          </a:xfrm>
-          <a:prstGeom prst="rect">
-            <a:avLst/>
-          </a:prstGeom>
-          <a:noFill/>
-        </p:spPr>
-        <p:txBody>
-          <a:bodyPr wrap="square">
-            <a:spAutoFit/>
-          </a:bodyPr>
-          <a:lstStyle/>
-          <a:p>
-            <a:r>
-              <a:rPr lang="en-US" sz="2800">
+              </a:endParaRPr>
+            </a:p>
+          </p:txBody>
+        </p:sp>
+        <p:sp>
+          <p:nvSpPr>
+            <p:cNvPr id="28" name="TextBox 27">
+              <a:extLst>
+                <a:ext uri="{FF2B5EF4-FFF2-40B4-BE49-F238E27FC236}">
+                  <a16:creationId xmlns:a16="http://schemas.microsoft.com/office/drawing/2014/main" id="{9A8BD43D-8317-7797-CEB5-A56981AF26E1}"/>
+                </a:ext>
+              </a:extLst>
+            </p:cNvPr>
+            <p:cNvSpPr txBox="1"/>
+            <p:nvPr/>
+          </p:nvSpPr>
+          <p:spPr>
+            <a:xfrm>
+              <a:off x="24680791" y="19722701"/>
+              <a:ext cx="1817883" cy="523220"/>
+            </a:xfrm>
+            <a:prstGeom prst="rect">
+              <a:avLst/>
+            </a:prstGeom>
+            <a:noFill/>
+          </p:spPr>
+          <p:txBody>
+            <a:bodyPr wrap="square">
+              <a:spAutoFit/>
+            </a:bodyPr>
+            <a:lstStyle/>
+            <a:p>
+              <a:r>
+                <a:rPr lang="en-US" sz="2800">
+                  <a:latin typeface="Helvetica"/>
+                  <a:ea typeface="MS PGothic"/>
+                </a:rPr>
+                <a:t>-100</a:t>
+              </a:r>
+              <a:endParaRPr lang="en-US" sz="2800">
                 <a:latin typeface="Helvetica"/>
-                <a:ea typeface="MS PGothic"/>
-              </a:rPr>
-              <a:t>-100</a:t>
-            </a:r>
-            <a:endParaRPr lang="en-US" sz="2800">
-              <a:latin typeface="Helvetica"/>
-            </a:endParaRPr>
-          </a:p>
-        </p:txBody>
-      </p:sp>
-      <p:sp>
-        <p:nvSpPr>
-          <p:cNvPr id="29" name="TextBox 28">
-            <a:extLst>
-              <a:ext uri="{FF2B5EF4-FFF2-40B4-BE49-F238E27FC236}">
-                <a16:creationId xmlns:a16="http://schemas.microsoft.com/office/drawing/2014/main" id="{CC2C4C7D-F3DE-C76E-6FFA-7D21377D6A49}"/>
-              </a:ext>
-            </a:extLst>
-          </p:cNvPr>
-          <p:cNvSpPr txBox="1"/>
-          <p:nvPr/>
-        </p:nvSpPr>
-        <p:spPr>
-          <a:xfrm>
-            <a:off x="24805015" y="15399832"/>
-            <a:ext cx="1817883" cy="523220"/>
-          </a:xfrm>
-          <a:prstGeom prst="rect">
-            <a:avLst/>
-          </a:prstGeom>
-          <a:noFill/>
-        </p:spPr>
-        <p:txBody>
-          <a:bodyPr wrap="square">
-            <a:spAutoFit/>
-          </a:bodyPr>
-          <a:lstStyle/>
-          <a:p>
-            <a:r>
-              <a:rPr lang="en-US" sz="2800">
+              </a:endParaRPr>
+            </a:p>
+          </p:txBody>
+        </p:sp>
+        <p:sp>
+          <p:nvSpPr>
+            <p:cNvPr id="29" name="TextBox 28">
+              <a:extLst>
+                <a:ext uri="{FF2B5EF4-FFF2-40B4-BE49-F238E27FC236}">
+                  <a16:creationId xmlns:a16="http://schemas.microsoft.com/office/drawing/2014/main" id="{CC2C4C7D-F3DE-C76E-6FFA-7D21377D6A49}"/>
+                </a:ext>
+              </a:extLst>
+            </p:cNvPr>
+            <p:cNvSpPr txBox="1"/>
+            <p:nvPr/>
+          </p:nvSpPr>
+          <p:spPr>
+            <a:xfrm>
+              <a:off x="24805015" y="15399832"/>
+              <a:ext cx="1817883" cy="523220"/>
+            </a:xfrm>
+            <a:prstGeom prst="rect">
+              <a:avLst/>
+            </a:prstGeom>
+            <a:noFill/>
+          </p:spPr>
+          <p:txBody>
+            <a:bodyPr wrap="square">
+              <a:spAutoFit/>
+            </a:bodyPr>
+            <a:lstStyle/>
+            <a:p>
+              <a:r>
+                <a:rPr lang="en-US" sz="2800">
+                  <a:latin typeface="Helvetica"/>
+                  <a:ea typeface="MS PGothic"/>
+                </a:rPr>
+                <a:t>150</a:t>
+              </a:r>
+              <a:endParaRPr lang="en-US" sz="2800">
                 <a:latin typeface="Helvetica"/>
-                <a:ea typeface="MS PGothic"/>
-              </a:rPr>
-              <a:t>150</a:t>
-            </a:r>
-            <a:endParaRPr lang="en-US" sz="2800">
-              <a:latin typeface="Helvetica"/>
-            </a:endParaRPr>
-          </a:p>
-        </p:txBody>
-      </p:sp>
-      <p:sp>
-        <p:nvSpPr>
-          <p:cNvPr id="31" name="TextBox 30">
-            <a:extLst>
-              <a:ext uri="{FF2B5EF4-FFF2-40B4-BE49-F238E27FC236}">
-                <a16:creationId xmlns:a16="http://schemas.microsoft.com/office/drawing/2014/main" id="{8A60D2C5-9283-4BB3-5E8A-7369BE925F8A}"/>
-              </a:ext>
-            </a:extLst>
-          </p:cNvPr>
-          <p:cNvSpPr txBox="1"/>
-          <p:nvPr/>
-        </p:nvSpPr>
-        <p:spPr>
-          <a:xfrm>
-            <a:off x="25003081" y="17073419"/>
-            <a:ext cx="1817883" cy="523220"/>
-          </a:xfrm>
-          <a:prstGeom prst="rect">
-            <a:avLst/>
-          </a:prstGeom>
-          <a:noFill/>
-        </p:spPr>
-        <p:txBody>
-          <a:bodyPr wrap="square">
-            <a:spAutoFit/>
-          </a:bodyPr>
-          <a:lstStyle/>
-          <a:p>
-            <a:r>
-              <a:rPr lang="en-US" sz="2800">
+              </a:endParaRPr>
+            </a:p>
+          </p:txBody>
+        </p:sp>
+        <p:sp>
+          <p:nvSpPr>
+            <p:cNvPr id="31" name="TextBox 30">
+              <a:extLst>
+                <a:ext uri="{FF2B5EF4-FFF2-40B4-BE49-F238E27FC236}">
+                  <a16:creationId xmlns:a16="http://schemas.microsoft.com/office/drawing/2014/main" id="{8A60D2C5-9283-4BB3-5E8A-7369BE925F8A}"/>
+                </a:ext>
+              </a:extLst>
+            </p:cNvPr>
+            <p:cNvSpPr txBox="1"/>
+            <p:nvPr/>
+          </p:nvSpPr>
+          <p:spPr>
+            <a:xfrm>
+              <a:off x="25003081" y="17073419"/>
+              <a:ext cx="1817883" cy="523220"/>
+            </a:xfrm>
+            <a:prstGeom prst="rect">
+              <a:avLst/>
+            </a:prstGeom>
+            <a:noFill/>
+          </p:spPr>
+          <p:txBody>
+            <a:bodyPr wrap="square">
+              <a:spAutoFit/>
+            </a:bodyPr>
+            <a:lstStyle/>
+            <a:p>
+              <a:r>
+                <a:rPr lang="en-US" sz="2800">
+                  <a:latin typeface="Helvetica"/>
+                  <a:ea typeface="MS PGothic"/>
+                </a:rPr>
+                <a:t>50</a:t>
+              </a:r>
+              <a:endParaRPr lang="en-US" sz="2800">
                 <a:latin typeface="Helvetica"/>
-                <a:ea typeface="MS PGothic"/>
-              </a:rPr>
-              <a:t>50</a:t>
-            </a:r>
-            <a:endParaRPr lang="en-US" sz="2800">
-              <a:latin typeface="Helvetica"/>
-            </a:endParaRPr>
-          </a:p>
-        </p:txBody>
-      </p:sp>
-      <p:sp>
-        <p:nvSpPr>
-          <p:cNvPr id="32" name="TextBox 31">
-            <a:extLst>
-              <a:ext uri="{FF2B5EF4-FFF2-40B4-BE49-F238E27FC236}">
-                <a16:creationId xmlns:a16="http://schemas.microsoft.com/office/drawing/2014/main" id="{355ACB0D-EFFD-1F04-EB5F-17E97CC051AF}"/>
-              </a:ext>
-            </a:extLst>
-          </p:cNvPr>
-          <p:cNvSpPr txBox="1"/>
-          <p:nvPr/>
-        </p:nvSpPr>
-        <p:spPr>
-          <a:xfrm>
-            <a:off x="24891181" y="18832596"/>
-            <a:ext cx="1817883" cy="523220"/>
-          </a:xfrm>
-          <a:prstGeom prst="rect">
-            <a:avLst/>
-          </a:prstGeom>
-          <a:noFill/>
-        </p:spPr>
-        <p:txBody>
-          <a:bodyPr wrap="square">
-            <a:spAutoFit/>
-          </a:bodyPr>
-          <a:lstStyle/>
-          <a:p>
-            <a:r>
-              <a:rPr lang="en-US" sz="2800">
+              </a:endParaRPr>
+            </a:p>
+          </p:txBody>
+        </p:sp>
+        <p:sp>
+          <p:nvSpPr>
+            <p:cNvPr id="32" name="TextBox 31">
+              <a:extLst>
+                <a:ext uri="{FF2B5EF4-FFF2-40B4-BE49-F238E27FC236}">
+                  <a16:creationId xmlns:a16="http://schemas.microsoft.com/office/drawing/2014/main" id="{355ACB0D-EFFD-1F04-EB5F-17E97CC051AF}"/>
+                </a:ext>
+              </a:extLst>
+            </p:cNvPr>
+            <p:cNvSpPr txBox="1"/>
+            <p:nvPr/>
+          </p:nvSpPr>
+          <p:spPr>
+            <a:xfrm>
+              <a:off x="24891181" y="18832596"/>
+              <a:ext cx="1817883" cy="523220"/>
+            </a:xfrm>
+            <a:prstGeom prst="rect">
+              <a:avLst/>
+            </a:prstGeom>
+            <a:noFill/>
+          </p:spPr>
+          <p:txBody>
+            <a:bodyPr wrap="square">
+              <a:spAutoFit/>
+            </a:bodyPr>
+            <a:lstStyle/>
+            <a:p>
+              <a:r>
+                <a:rPr lang="en-US" sz="2800">
+                  <a:latin typeface="Helvetica"/>
+                  <a:ea typeface="MS PGothic"/>
+                </a:rPr>
+                <a:t>-50</a:t>
+              </a:r>
+              <a:endParaRPr lang="en-US" sz="2800">
                 <a:latin typeface="Helvetica"/>
-                <a:ea typeface="MS PGothic"/>
-              </a:rPr>
-              <a:t>-50</a:t>
-            </a:r>
-            <a:endParaRPr lang="en-US" sz="2800">
-              <a:latin typeface="Helvetica"/>
-            </a:endParaRPr>
-          </a:p>
-        </p:txBody>
-      </p:sp>
+              </a:endParaRPr>
+            </a:p>
+          </p:txBody>
+        </p:sp>
+      </p:grpSp>
       <p:sp>
         <p:nvSpPr>
           <p:cNvPr id="35" name="TextBox 34">
@@ -8896,94 +8701,6 @@
           <a:p>
             <a:pPr algn="ctr"/>
             <a:endParaRPr lang="en-US" sz="2800" dirty="0">
-              <a:latin typeface="Helvetica"/>
-            </a:endParaRPr>
-          </a:p>
-        </p:txBody>
-      </p:sp>
-      <p:sp>
-        <p:nvSpPr>
-          <p:cNvPr id="47" name="TextBox 46">
-            <a:extLst>
-              <a:ext uri="{FF2B5EF4-FFF2-40B4-BE49-F238E27FC236}">
-                <a16:creationId xmlns:a16="http://schemas.microsoft.com/office/drawing/2014/main" id="{5900B96E-BCA6-755E-5EDC-6280C35A3352}"/>
-              </a:ext>
-            </a:extLst>
-          </p:cNvPr>
-          <p:cNvSpPr txBox="1"/>
-          <p:nvPr/>
-        </p:nvSpPr>
-        <p:spPr>
-          <a:xfrm>
-            <a:off x="27055962" y="30668040"/>
-            <a:ext cx="1407381" cy="584775"/>
-          </a:xfrm>
-          <a:prstGeom prst="rect">
-            <a:avLst/>
-          </a:prstGeom>
-          <a:noFill/>
-        </p:spPr>
-        <p:txBody>
-          <a:bodyPr rot="0" spcFirstLastPara="0" vertOverflow="overflow" horzOverflow="overflow" vert="horz" wrap="square" lIns="91440" tIns="45720" rIns="91440" bIns="45720" numCol="1" spcCol="0" rtlCol="0" fromWordArt="0" anchor="t" anchorCtr="0" forceAA="0" compatLnSpc="1">
-            <a:prstTxWarp prst="textNoShape">
-              <a:avLst/>
-            </a:prstTxWarp>
-            <a:spAutoFit/>
-          </a:bodyPr>
-          <a:lstStyle/>
-          <a:p>
-            <a:r>
-              <a:rPr lang="en-US" sz="3200" b="1" dirty="0">
-                <a:latin typeface="Helvetica"/>
-                <a:ea typeface="MS PGothic"/>
-              </a:rPr>
-              <a:t>DG-P</a:t>
-            </a:r>
-            <a:endParaRPr lang="en-US" sz="3200" b="1" dirty="0">
-              <a:latin typeface="Helvetica"/>
-            </a:endParaRPr>
-          </a:p>
-        </p:txBody>
-      </p:sp>
-      <p:sp>
-        <p:nvSpPr>
-          <p:cNvPr id="48" name="TextBox 47">
-            <a:extLst>
-              <a:ext uri="{FF2B5EF4-FFF2-40B4-BE49-F238E27FC236}">
-                <a16:creationId xmlns:a16="http://schemas.microsoft.com/office/drawing/2014/main" id="{CF376929-1D20-7DFA-12FD-79DC709EE305}"/>
-              </a:ext>
-            </a:extLst>
-          </p:cNvPr>
-          <p:cNvSpPr txBox="1"/>
-          <p:nvPr/>
-        </p:nvSpPr>
-        <p:spPr>
-          <a:xfrm>
-            <a:off x="28376140" y="30668039"/>
-            <a:ext cx="1407381" cy="584775"/>
-          </a:xfrm>
-          <a:prstGeom prst="rect">
-            <a:avLst/>
-          </a:prstGeom>
-          <a:noFill/>
-        </p:spPr>
-        <p:txBody>
-          <a:bodyPr rot="0" spcFirstLastPara="0" vertOverflow="overflow" horzOverflow="overflow" vert="horz" wrap="square" lIns="91440" tIns="45720" rIns="91440" bIns="45720" numCol="1" spcCol="0" rtlCol="0" fromWordArt="0" anchor="t" anchorCtr="0" forceAA="0" compatLnSpc="1">
-            <a:prstTxWarp prst="textNoShape">
-              <a:avLst/>
-            </a:prstTxWarp>
-            <a:spAutoFit/>
-          </a:bodyPr>
-          <a:lstStyle/>
-          <a:p>
-            <a:r>
-              <a:rPr lang="en-US" sz="3200" b="1" dirty="0">
-                <a:latin typeface="Helvetica"/>
-                <a:ea typeface="MS PGothic"/>
-              </a:rPr>
-              <a:t>UG-P</a:t>
-            </a:r>
-            <a:endParaRPr lang="en-US" sz="3200" b="1" dirty="0">
               <a:latin typeface="Helvetica"/>
             </a:endParaRPr>
           </a:p>
@@ -9515,688 +9232,6 @@
           <a:p>
             <a:pPr algn="ctr"/>
             <a:endParaRPr lang="en-US" sz="2800">
-              <a:latin typeface="Helvetica"/>
-            </a:endParaRPr>
-          </a:p>
-        </p:txBody>
-      </p:sp>
-      <p:sp>
-        <p:nvSpPr>
-          <p:cNvPr id="90" name="TextBox 89">
-            <a:extLst>
-              <a:ext uri="{FF2B5EF4-FFF2-40B4-BE49-F238E27FC236}">
-                <a16:creationId xmlns:a16="http://schemas.microsoft.com/office/drawing/2014/main" id="{9423D2D3-0C9E-E28A-9C32-476C547B0E0D}"/>
-              </a:ext>
-            </a:extLst>
-          </p:cNvPr>
-          <p:cNvSpPr txBox="1"/>
-          <p:nvPr/>
-        </p:nvSpPr>
-        <p:spPr>
-          <a:xfrm>
-            <a:off x="24916126" y="10998177"/>
-            <a:ext cx="2357283" cy="646331"/>
-          </a:xfrm>
-          <a:prstGeom prst="rect">
-            <a:avLst/>
-          </a:prstGeom>
-          <a:noFill/>
-        </p:spPr>
-        <p:txBody>
-          <a:bodyPr rot="0" spcFirstLastPara="0" vertOverflow="overflow" horzOverflow="overflow" vert="horz" wrap="square" lIns="91440" tIns="45720" rIns="91440" bIns="45720" numCol="1" spcCol="0" rtlCol="0" fromWordArt="0" anchor="t" anchorCtr="0" forceAA="0" compatLnSpc="1">
-            <a:prstTxWarp prst="textNoShape">
-              <a:avLst/>
-            </a:prstTxWarp>
-            <a:spAutoFit/>
-          </a:bodyPr>
-          <a:lstStyle/>
-          <a:p>
-            <a:r>
-              <a:rPr lang="en-US" sz="3600" b="1" dirty="0">
-                <a:latin typeface="Helvetica"/>
-                <a:ea typeface="MS PGothic"/>
-              </a:rPr>
-              <a:t>Accept</a:t>
-            </a:r>
-            <a:endParaRPr lang="en-US" sz="3600" b="1" dirty="0">
-              <a:latin typeface="Helvetica"/>
-            </a:endParaRPr>
-          </a:p>
-        </p:txBody>
-      </p:sp>
-      <p:sp>
-        <p:nvSpPr>
-          <p:cNvPr id="91" name="TextBox 90">
-            <a:extLst>
-              <a:ext uri="{FF2B5EF4-FFF2-40B4-BE49-F238E27FC236}">
-                <a16:creationId xmlns:a16="http://schemas.microsoft.com/office/drawing/2014/main" id="{0F9B3295-0257-132C-F2E5-B66280D1D176}"/>
-              </a:ext>
-            </a:extLst>
-          </p:cNvPr>
-          <p:cNvSpPr txBox="1"/>
-          <p:nvPr/>
-        </p:nvSpPr>
-        <p:spPr>
-          <a:xfrm>
-            <a:off x="27633887" y="10971622"/>
-            <a:ext cx="4763079" cy="646331"/>
-          </a:xfrm>
-          <a:prstGeom prst="rect">
-            <a:avLst/>
-          </a:prstGeom>
-          <a:noFill/>
-        </p:spPr>
-        <p:txBody>
-          <a:bodyPr rot="0" spcFirstLastPara="0" vertOverflow="overflow" horzOverflow="overflow" vert="horz" wrap="square" lIns="91440" tIns="45720" rIns="91440" bIns="45720" numCol="1" spcCol="0" rtlCol="0" fromWordArt="0" anchor="t" anchorCtr="0" forceAA="0" compatLnSpc="1">
-            <a:prstTxWarp prst="textNoShape">
-              <a:avLst/>
-            </a:prstTxWarp>
-            <a:spAutoFit/>
-          </a:bodyPr>
-          <a:lstStyle/>
-          <a:p>
-            <a:r>
-              <a:rPr lang="en-US" sz="3600" b="1" dirty="0">
-                <a:latin typeface="Helvetica"/>
-                <a:ea typeface="MS PGothic"/>
-              </a:rPr>
-              <a:t>Reject</a:t>
-            </a:r>
-            <a:endParaRPr lang="en-US" sz="3600" b="1" dirty="0">
-              <a:latin typeface="Helvetica"/>
-            </a:endParaRPr>
-          </a:p>
-        </p:txBody>
-      </p:sp>
-      <p:sp>
-        <p:nvSpPr>
-          <p:cNvPr id="93" name="TextBox 92">
-            <a:extLst>
-              <a:ext uri="{FF2B5EF4-FFF2-40B4-BE49-F238E27FC236}">
-                <a16:creationId xmlns:a16="http://schemas.microsoft.com/office/drawing/2014/main" id="{F1DFC545-7F08-C79C-CAF5-AE6325C65C62}"/>
-              </a:ext>
-            </a:extLst>
-          </p:cNvPr>
-          <p:cNvSpPr txBox="1"/>
-          <p:nvPr/>
-        </p:nvSpPr>
-        <p:spPr>
-          <a:xfrm>
-            <a:off x="17348239" y="10960844"/>
-            <a:ext cx="2357283" cy="1200329"/>
-          </a:xfrm>
-          <a:prstGeom prst="rect">
-            <a:avLst/>
-          </a:prstGeom>
-          <a:noFill/>
-        </p:spPr>
-        <p:txBody>
-          <a:bodyPr rot="0" spcFirstLastPara="0" vertOverflow="overflow" horzOverflow="overflow" vert="horz" wrap="square" lIns="91440" tIns="45720" rIns="91440" bIns="45720" numCol="1" spcCol="0" rtlCol="0" fromWordArt="0" anchor="t" anchorCtr="0" forceAA="0" compatLnSpc="1">
-            <a:prstTxWarp prst="textNoShape">
-              <a:avLst/>
-            </a:prstTxWarp>
-            <a:spAutoFit/>
-          </a:bodyPr>
-          <a:lstStyle/>
-          <a:p>
-            <a:pPr algn="ctr"/>
-            <a:r>
-              <a:rPr lang="en-US" sz="3600" b="1" dirty="0">
-                <a:latin typeface="Helvetica"/>
-                <a:ea typeface="MS PGothic"/>
-              </a:rPr>
-              <a:t>Dictator Game</a:t>
-            </a:r>
-            <a:endParaRPr lang="en-US" sz="3600" b="1" dirty="0">
-              <a:latin typeface="Helvetica"/>
-            </a:endParaRPr>
-          </a:p>
-        </p:txBody>
-      </p:sp>
-      <p:sp>
-        <p:nvSpPr>
-          <p:cNvPr id="94" name="TextBox 93">
-            <a:extLst>
-              <a:ext uri="{FF2B5EF4-FFF2-40B4-BE49-F238E27FC236}">
-                <a16:creationId xmlns:a16="http://schemas.microsoft.com/office/drawing/2014/main" id="{44956700-BC52-8EE1-3309-9A6C96BD931D}"/>
-              </a:ext>
-            </a:extLst>
-          </p:cNvPr>
-          <p:cNvSpPr txBox="1"/>
-          <p:nvPr/>
-        </p:nvSpPr>
-        <p:spPr>
-          <a:xfrm>
-            <a:off x="19393758" y="10960843"/>
-            <a:ext cx="3036542" cy="1200329"/>
-          </a:xfrm>
-          <a:prstGeom prst="rect">
-            <a:avLst/>
-          </a:prstGeom>
-          <a:noFill/>
-        </p:spPr>
-        <p:txBody>
-          <a:bodyPr rot="0" spcFirstLastPara="0" vertOverflow="overflow" horzOverflow="overflow" vert="horz" wrap="square" lIns="91440" tIns="45720" rIns="91440" bIns="45720" numCol="1" spcCol="0" rtlCol="0" fromWordArt="0" anchor="t" anchorCtr="0" forceAA="0" compatLnSpc="1">
-            <a:prstTxWarp prst="textNoShape">
-              <a:avLst/>
-            </a:prstTxWarp>
-            <a:spAutoFit/>
-          </a:bodyPr>
-          <a:lstStyle/>
-          <a:p>
-            <a:pPr algn="ctr"/>
-            <a:r>
-              <a:rPr lang="en-US" sz="3600" b="1" dirty="0">
-                <a:latin typeface="Helvetica"/>
-                <a:ea typeface="MS PGothic"/>
-              </a:rPr>
-              <a:t>Ultimatum Game</a:t>
-            </a:r>
-            <a:endParaRPr lang="en-US" sz="3600" b="1" dirty="0">
-              <a:latin typeface="Helvetica"/>
-            </a:endParaRPr>
-          </a:p>
-        </p:txBody>
-      </p:sp>
-      <p:sp>
-        <p:nvSpPr>
-          <p:cNvPr id="96" name="TextBox 95">
-            <a:extLst>
-              <a:ext uri="{FF2B5EF4-FFF2-40B4-BE49-F238E27FC236}">
-                <a16:creationId xmlns:a16="http://schemas.microsoft.com/office/drawing/2014/main" id="{D700C43A-8116-A383-86C5-66A49D723886}"/>
-              </a:ext>
-            </a:extLst>
-          </p:cNvPr>
-          <p:cNvSpPr txBox="1"/>
-          <p:nvPr/>
-        </p:nvSpPr>
-        <p:spPr>
-          <a:xfrm>
-            <a:off x="22954653" y="4735753"/>
-            <a:ext cx="615553" cy="7433855"/>
-          </a:xfrm>
-          <a:prstGeom prst="rect">
-            <a:avLst/>
-          </a:prstGeom>
-          <a:noFill/>
-        </p:spPr>
-        <p:txBody>
-          <a:bodyPr rot="0" spcFirstLastPara="0" vertOverflow="overflow" horzOverflow="overflow" vert="vert270" wrap="square" lIns="91440" tIns="45720" rIns="91440" bIns="45720" numCol="1" spcCol="0" rtlCol="0" fromWordArt="0" anchor="t" anchorCtr="0" forceAA="0" compatLnSpc="1">
-            <a:prstTxWarp prst="textNoShape">
-              <a:avLst/>
-            </a:prstTxWarp>
-            <a:spAutoFit/>
-          </a:bodyPr>
-          <a:lstStyle/>
-          <a:p>
-            <a:pPr algn="ctr"/>
-            <a:r>
-              <a:rPr lang="en-US" sz="2800" dirty="0">
-                <a:latin typeface="Helvetica"/>
-                <a:ea typeface="MS PGothic"/>
-              </a:rPr>
-              <a:t>Proportion of Endowment Offered (0-1)</a:t>
-            </a:r>
-            <a:endParaRPr lang="en-US" sz="2800" dirty="0">
-              <a:latin typeface="Helvetica"/>
-            </a:endParaRPr>
-          </a:p>
-        </p:txBody>
-      </p:sp>
-      <p:sp>
-        <p:nvSpPr>
-          <p:cNvPr id="99" name="TextBox 98">
-            <a:extLst>
-              <a:ext uri="{FF2B5EF4-FFF2-40B4-BE49-F238E27FC236}">
-                <a16:creationId xmlns:a16="http://schemas.microsoft.com/office/drawing/2014/main" id="{0EC7C372-E726-B3AE-72CB-E6DC8B9E6B60}"/>
-              </a:ext>
-            </a:extLst>
-          </p:cNvPr>
-          <p:cNvSpPr txBox="1"/>
-          <p:nvPr/>
-        </p:nvSpPr>
-        <p:spPr>
-          <a:xfrm>
-            <a:off x="16386345" y="10433948"/>
-            <a:ext cx="1817883" cy="523220"/>
-          </a:xfrm>
-          <a:prstGeom prst="rect">
-            <a:avLst/>
-          </a:prstGeom>
-          <a:noFill/>
-        </p:spPr>
-        <p:txBody>
-          <a:bodyPr wrap="square">
-            <a:spAutoFit/>
-          </a:bodyPr>
-          <a:lstStyle/>
-          <a:p>
-            <a:r>
-              <a:rPr lang="en-US" sz="2800" dirty="0">
-                <a:latin typeface="Helvetica"/>
-                <a:ea typeface="MS PGothic"/>
-              </a:rPr>
-              <a:t>0</a:t>
-            </a:r>
-            <a:endParaRPr lang="en-US" sz="2800" dirty="0">
-              <a:latin typeface="Helvetica"/>
-            </a:endParaRPr>
-          </a:p>
-        </p:txBody>
-      </p:sp>
-      <p:sp>
-        <p:nvSpPr>
-          <p:cNvPr id="101" name="TextBox 100">
-            <a:extLst>
-              <a:ext uri="{FF2B5EF4-FFF2-40B4-BE49-F238E27FC236}">
-                <a16:creationId xmlns:a16="http://schemas.microsoft.com/office/drawing/2014/main" id="{352CD731-0A31-C39E-3986-4C7BAE418058}"/>
-              </a:ext>
-            </a:extLst>
-          </p:cNvPr>
-          <p:cNvSpPr txBox="1"/>
-          <p:nvPr/>
-        </p:nvSpPr>
-        <p:spPr>
-          <a:xfrm>
-            <a:off x="16149427" y="8928783"/>
-            <a:ext cx="1817883" cy="523220"/>
-          </a:xfrm>
-          <a:prstGeom prst="rect">
-            <a:avLst/>
-          </a:prstGeom>
-          <a:noFill/>
-        </p:spPr>
-        <p:txBody>
-          <a:bodyPr wrap="square">
-            <a:spAutoFit/>
-          </a:bodyPr>
-          <a:lstStyle/>
-          <a:p>
-            <a:r>
-              <a:rPr lang="en-US" sz="2800" dirty="0">
-                <a:latin typeface="Helvetica"/>
-                <a:ea typeface="MS PGothic"/>
-              </a:rPr>
-              <a:t>0.1</a:t>
-            </a:r>
-            <a:endParaRPr lang="en-US" sz="2800" dirty="0">
-              <a:latin typeface="Helvetica"/>
-            </a:endParaRPr>
-          </a:p>
-        </p:txBody>
-      </p:sp>
-      <p:sp>
-        <p:nvSpPr>
-          <p:cNvPr id="102" name="TextBox 101">
-            <a:extLst>
-              <a:ext uri="{FF2B5EF4-FFF2-40B4-BE49-F238E27FC236}">
-                <a16:creationId xmlns:a16="http://schemas.microsoft.com/office/drawing/2014/main" id="{A0B12FD1-045A-E8E7-6566-088307F7069D}"/>
-              </a:ext>
-            </a:extLst>
-          </p:cNvPr>
-          <p:cNvSpPr txBox="1"/>
-          <p:nvPr/>
-        </p:nvSpPr>
-        <p:spPr>
-          <a:xfrm>
-            <a:off x="16130377" y="7651527"/>
-            <a:ext cx="1817883" cy="523220"/>
-          </a:xfrm>
-          <a:prstGeom prst="rect">
-            <a:avLst/>
-          </a:prstGeom>
-          <a:noFill/>
-        </p:spPr>
-        <p:txBody>
-          <a:bodyPr wrap="square">
-            <a:spAutoFit/>
-          </a:bodyPr>
-          <a:lstStyle/>
-          <a:p>
-            <a:r>
-              <a:rPr lang="en-US" sz="2800" dirty="0">
-                <a:latin typeface="Helvetica"/>
-                <a:ea typeface="MS PGothic"/>
-              </a:rPr>
-              <a:t>0.2</a:t>
-            </a:r>
-            <a:endParaRPr lang="en-US" sz="2800" dirty="0">
-              <a:latin typeface="Helvetica"/>
-            </a:endParaRPr>
-          </a:p>
-        </p:txBody>
-      </p:sp>
-      <p:sp>
-        <p:nvSpPr>
-          <p:cNvPr id="103" name="TextBox 102">
-            <a:extLst>
-              <a:ext uri="{FF2B5EF4-FFF2-40B4-BE49-F238E27FC236}">
-                <a16:creationId xmlns:a16="http://schemas.microsoft.com/office/drawing/2014/main" id="{E0A59D14-E0F4-0E4C-E778-C09B9F6709D7}"/>
-              </a:ext>
-            </a:extLst>
-          </p:cNvPr>
-          <p:cNvSpPr txBox="1"/>
-          <p:nvPr/>
-        </p:nvSpPr>
-        <p:spPr>
-          <a:xfrm>
-            <a:off x="16149426" y="6258657"/>
-            <a:ext cx="1817883" cy="523220"/>
-          </a:xfrm>
-          <a:prstGeom prst="rect">
-            <a:avLst/>
-          </a:prstGeom>
-          <a:noFill/>
-        </p:spPr>
-        <p:txBody>
-          <a:bodyPr wrap="square">
-            <a:spAutoFit/>
-          </a:bodyPr>
-          <a:lstStyle/>
-          <a:p>
-            <a:r>
-              <a:rPr lang="en-US" sz="2800" dirty="0">
-                <a:latin typeface="Helvetica"/>
-                <a:ea typeface="MS PGothic"/>
-              </a:rPr>
-              <a:t>0.3</a:t>
-            </a:r>
-            <a:endParaRPr lang="en-US" sz="2800" dirty="0">
-              <a:latin typeface="Helvetica"/>
-            </a:endParaRPr>
-          </a:p>
-        </p:txBody>
-      </p:sp>
-      <p:sp>
-        <p:nvSpPr>
-          <p:cNvPr id="105" name="TextBox 104">
-            <a:extLst>
-              <a:ext uri="{FF2B5EF4-FFF2-40B4-BE49-F238E27FC236}">
-                <a16:creationId xmlns:a16="http://schemas.microsoft.com/office/drawing/2014/main" id="{FD3F7893-1792-538C-F399-D2C0D940A284}"/>
-              </a:ext>
-            </a:extLst>
-          </p:cNvPr>
-          <p:cNvSpPr txBox="1"/>
-          <p:nvPr/>
-        </p:nvSpPr>
-        <p:spPr>
-          <a:xfrm>
-            <a:off x="23699990" y="10282900"/>
-            <a:ext cx="1817883" cy="523220"/>
-          </a:xfrm>
-          <a:prstGeom prst="rect">
-            <a:avLst/>
-          </a:prstGeom>
-          <a:noFill/>
-        </p:spPr>
-        <p:txBody>
-          <a:bodyPr wrap="square">
-            <a:spAutoFit/>
-          </a:bodyPr>
-          <a:lstStyle/>
-          <a:p>
-            <a:r>
-              <a:rPr lang="en-US" sz="2800">
-                <a:latin typeface="Helvetica"/>
-                <a:ea typeface="MS PGothic"/>
-              </a:rPr>
-              <a:t>0</a:t>
-            </a:r>
-            <a:endParaRPr lang="en-US" sz="2800">
-              <a:latin typeface="Helvetica"/>
-            </a:endParaRPr>
-          </a:p>
-        </p:txBody>
-      </p:sp>
-      <p:sp>
-        <p:nvSpPr>
-          <p:cNvPr id="106" name="TextBox 105">
-            <a:extLst>
-              <a:ext uri="{FF2B5EF4-FFF2-40B4-BE49-F238E27FC236}">
-                <a16:creationId xmlns:a16="http://schemas.microsoft.com/office/drawing/2014/main" id="{AC6F7B51-B63B-037E-C078-B001D07947EE}"/>
-              </a:ext>
-            </a:extLst>
-          </p:cNvPr>
-          <p:cNvSpPr txBox="1"/>
-          <p:nvPr/>
-        </p:nvSpPr>
-        <p:spPr>
-          <a:xfrm>
-            <a:off x="23483337" y="5479300"/>
-            <a:ext cx="1817883" cy="523220"/>
-          </a:xfrm>
-          <a:prstGeom prst="rect">
-            <a:avLst/>
-          </a:prstGeom>
-          <a:noFill/>
-        </p:spPr>
-        <p:txBody>
-          <a:bodyPr wrap="square">
-            <a:spAutoFit/>
-          </a:bodyPr>
-          <a:lstStyle/>
-          <a:p>
-            <a:r>
-              <a:rPr lang="en-US" sz="2800">
-                <a:latin typeface="Helvetica"/>
-                <a:ea typeface="MS PGothic"/>
-              </a:rPr>
-              <a:t>0.4</a:t>
-            </a:r>
-            <a:endParaRPr lang="en-US" sz="2800">
-              <a:latin typeface="Helvetica"/>
-            </a:endParaRPr>
-          </a:p>
-        </p:txBody>
-      </p:sp>
-      <p:sp>
-        <p:nvSpPr>
-          <p:cNvPr id="107" name="TextBox 106">
-            <a:extLst>
-              <a:ext uri="{FF2B5EF4-FFF2-40B4-BE49-F238E27FC236}">
-                <a16:creationId xmlns:a16="http://schemas.microsoft.com/office/drawing/2014/main" id="{66987275-F712-8C2D-BC6D-55CEACEEBA56}"/>
-              </a:ext>
-            </a:extLst>
-          </p:cNvPr>
-          <p:cNvSpPr txBox="1"/>
-          <p:nvPr/>
-        </p:nvSpPr>
-        <p:spPr>
-          <a:xfrm>
-            <a:off x="23460259" y="7769060"/>
-            <a:ext cx="1817883" cy="523220"/>
-          </a:xfrm>
-          <a:prstGeom prst="rect">
-            <a:avLst/>
-          </a:prstGeom>
-          <a:noFill/>
-        </p:spPr>
-        <p:txBody>
-          <a:bodyPr wrap="square">
-            <a:spAutoFit/>
-          </a:bodyPr>
-          <a:lstStyle/>
-          <a:p>
-            <a:r>
-              <a:rPr lang="en-US" sz="2800" dirty="0">
-                <a:latin typeface="Helvetica"/>
-                <a:ea typeface="MS PGothic"/>
-              </a:rPr>
-              <a:t>0.2</a:t>
-            </a:r>
-            <a:endParaRPr lang="en-US" sz="2800" dirty="0">
-              <a:latin typeface="Helvetica"/>
-            </a:endParaRPr>
-          </a:p>
-        </p:txBody>
-      </p:sp>
-      <p:sp>
-        <p:nvSpPr>
-          <p:cNvPr id="108" name="TextBox 107">
-            <a:extLst>
-              <a:ext uri="{FF2B5EF4-FFF2-40B4-BE49-F238E27FC236}">
-                <a16:creationId xmlns:a16="http://schemas.microsoft.com/office/drawing/2014/main" id="{96C0B954-F7DA-580D-2D50-40EC59AD2768}"/>
-              </a:ext>
-            </a:extLst>
-          </p:cNvPr>
-          <p:cNvSpPr txBox="1"/>
-          <p:nvPr/>
-        </p:nvSpPr>
-        <p:spPr>
-          <a:xfrm>
-            <a:off x="23483115" y="6647804"/>
-            <a:ext cx="1817883" cy="523220"/>
-          </a:xfrm>
-          <a:prstGeom prst="rect">
-            <a:avLst/>
-          </a:prstGeom>
-          <a:noFill/>
-        </p:spPr>
-        <p:txBody>
-          <a:bodyPr wrap="square">
-            <a:spAutoFit/>
-          </a:bodyPr>
-          <a:lstStyle/>
-          <a:p>
-            <a:r>
-              <a:rPr lang="en-US" sz="2800" dirty="0">
-                <a:latin typeface="Helvetica"/>
-                <a:ea typeface="MS PGothic"/>
-              </a:rPr>
-              <a:t>0.3</a:t>
-            </a:r>
-            <a:endParaRPr lang="en-US" sz="2800" dirty="0">
-              <a:latin typeface="Helvetica"/>
-            </a:endParaRPr>
-          </a:p>
-        </p:txBody>
-      </p:sp>
-      <p:sp>
-        <p:nvSpPr>
-          <p:cNvPr id="109" name="TextBox 108">
-            <a:extLst>
-              <a:ext uri="{FF2B5EF4-FFF2-40B4-BE49-F238E27FC236}">
-                <a16:creationId xmlns:a16="http://schemas.microsoft.com/office/drawing/2014/main" id="{2E742941-8495-D2EF-9C15-FE49828B1F16}"/>
-              </a:ext>
-            </a:extLst>
-          </p:cNvPr>
-          <p:cNvSpPr txBox="1"/>
-          <p:nvPr/>
-        </p:nvSpPr>
-        <p:spPr>
-          <a:xfrm>
-            <a:off x="23482823" y="8965007"/>
-            <a:ext cx="1817883" cy="523220"/>
-          </a:xfrm>
-          <a:prstGeom prst="rect">
-            <a:avLst/>
-          </a:prstGeom>
-          <a:noFill/>
-        </p:spPr>
-        <p:txBody>
-          <a:bodyPr wrap="square">
-            <a:spAutoFit/>
-          </a:bodyPr>
-          <a:lstStyle/>
-          <a:p>
-            <a:r>
-              <a:rPr lang="en-US" sz="2800" dirty="0">
-                <a:latin typeface="Helvetica"/>
-                <a:ea typeface="MS PGothic"/>
-              </a:rPr>
-              <a:t>0.1</a:t>
-            </a:r>
-            <a:endParaRPr lang="en-US" sz="2800" dirty="0">
-              <a:latin typeface="Helvetica"/>
-            </a:endParaRPr>
-          </a:p>
-        </p:txBody>
-      </p:sp>
-      <p:sp>
-        <p:nvSpPr>
-          <p:cNvPr id="110" name="TextBox 109">
-            <a:extLst>
-              <a:ext uri="{FF2B5EF4-FFF2-40B4-BE49-F238E27FC236}">
-                <a16:creationId xmlns:a16="http://schemas.microsoft.com/office/drawing/2014/main" id="{5A79AFF0-CE8A-7BBE-AAFC-B04F28956552}"/>
-              </a:ext>
-            </a:extLst>
-          </p:cNvPr>
-          <p:cNvSpPr txBox="1"/>
-          <p:nvPr/>
-        </p:nvSpPr>
-        <p:spPr>
-          <a:xfrm>
-            <a:off x="17100435" y="5711814"/>
-            <a:ext cx="5270561" cy="646331"/>
-          </a:xfrm>
-          <a:prstGeom prst="rect">
-            <a:avLst/>
-          </a:prstGeom>
-          <a:noFill/>
-        </p:spPr>
-        <p:txBody>
-          <a:bodyPr rot="0" spcFirstLastPara="0" vertOverflow="overflow" horzOverflow="overflow" vert="horz" wrap="square" lIns="91440" tIns="45720" rIns="91440" bIns="45720" numCol="1" spcCol="0" rtlCol="0" fromWordArt="0" anchor="t" anchorCtr="0" forceAA="0" compatLnSpc="1">
-            <a:prstTxWarp prst="textNoShape">
-              <a:avLst/>
-            </a:prstTxWarp>
-            <a:spAutoFit/>
-          </a:bodyPr>
-          <a:lstStyle/>
-          <a:p>
-            <a:pPr algn="ctr"/>
-            <a:r>
-              <a:rPr lang="en-US" sz="3600" b="1" dirty="0">
-                <a:latin typeface="Helvetica"/>
-                <a:ea typeface="MS PGothic"/>
-              </a:rPr>
-              <a:t>Proposer Conditions</a:t>
-            </a:r>
-            <a:endParaRPr lang="en-US" sz="3600" b="1" dirty="0">
-              <a:latin typeface="Helvetica"/>
-            </a:endParaRPr>
-          </a:p>
-        </p:txBody>
-      </p:sp>
-      <p:sp>
-        <p:nvSpPr>
-          <p:cNvPr id="113" name="TextBox 112">
-            <a:extLst>
-              <a:ext uri="{FF2B5EF4-FFF2-40B4-BE49-F238E27FC236}">
-                <a16:creationId xmlns:a16="http://schemas.microsoft.com/office/drawing/2014/main" id="{3E67F4B1-3E32-DC3E-6314-095C5E6BBEDE}"/>
-              </a:ext>
-            </a:extLst>
-          </p:cNvPr>
-          <p:cNvSpPr txBox="1"/>
-          <p:nvPr/>
-        </p:nvSpPr>
-        <p:spPr>
-          <a:xfrm>
-            <a:off x="24628126" y="5711814"/>
-            <a:ext cx="5270561" cy="646331"/>
-          </a:xfrm>
-          <a:prstGeom prst="rect">
-            <a:avLst/>
-          </a:prstGeom>
-          <a:noFill/>
-        </p:spPr>
-        <p:txBody>
-          <a:bodyPr rot="0" spcFirstLastPara="0" vertOverflow="overflow" horzOverflow="overflow" vert="horz" wrap="square" lIns="91440" tIns="45720" rIns="91440" bIns="45720" numCol="1" spcCol="0" rtlCol="0" fromWordArt="0" anchor="t" anchorCtr="0" forceAA="0" compatLnSpc="1">
-            <a:prstTxWarp prst="textNoShape">
-              <a:avLst/>
-            </a:prstTxWarp>
-            <a:spAutoFit/>
-          </a:bodyPr>
-          <a:lstStyle/>
-          <a:p>
-            <a:pPr algn="ctr"/>
-            <a:r>
-              <a:rPr lang="en-US" sz="3600" b="1" dirty="0">
-                <a:latin typeface="Helvetica"/>
-                <a:ea typeface="MS PGothic"/>
-              </a:rPr>
-              <a:t>Recipient Conditions</a:t>
-            </a:r>
-            <a:endParaRPr lang="en-US" sz="3600" b="1" dirty="0">
               <a:latin typeface="Helvetica"/>
             </a:endParaRPr>
           </a:p>
@@ -10635,76 +9670,6 @@
       </p:sp>
       <p:sp>
         <p:nvSpPr>
-          <p:cNvPr id="2" name="Rectangle 1">
-            <a:extLst>
-              <a:ext uri="{FF2B5EF4-FFF2-40B4-BE49-F238E27FC236}">
-                <a16:creationId xmlns:a16="http://schemas.microsoft.com/office/drawing/2014/main" id="{7DF677AF-CCA7-3603-6675-25A047C2E384}"/>
-              </a:ext>
-            </a:extLst>
-          </p:cNvPr>
-          <p:cNvSpPr/>
-          <p:nvPr/>
-        </p:nvSpPr>
-        <p:spPr bwMode="auto">
-          <a:xfrm>
-            <a:off x="569101" y="26252269"/>
-            <a:ext cx="7710086" cy="2271116"/>
-          </a:xfrm>
-          <a:prstGeom prst="rect">
-            <a:avLst/>
-          </a:prstGeom>
-          <a:noFill/>
-          <a:ln w="57150" cap="flat" cmpd="sng" algn="ctr">
-            <a:solidFill>
-              <a:schemeClr val="tx1"/>
-            </a:solidFill>
-            <a:prstDash val="solid"/>
-            <a:round/>
-            <a:headEnd type="none" w="med" len="med"/>
-            <a:tailEnd type="none" w="med" len="med"/>
-          </a:ln>
-          <a:effectLst/>
-        </p:spPr>
-        <p:txBody>
-          <a:bodyPr vert="horz" wrap="square" lIns="91440" tIns="45720" rIns="91440" bIns="45720" numCol="1" rtlCol="0" anchor="t" anchorCtr="0" compatLnSpc="1">
-            <a:prstTxWarp prst="textNoShape">
-              <a:avLst/>
-            </a:prstTxWarp>
-          </a:bodyPr>
-          <a:lstStyle/>
-          <a:p>
-            <a:pPr marL="0" marR="0" indent="0" algn="l" defTabSz="4389438" rtl="0" eaLnBrk="1" fontAlgn="base" latinLnBrk="0" hangingPunct="1">
-              <a:lnSpc>
-                <a:spcPct val="100000"/>
-              </a:lnSpc>
-              <a:spcBef>
-                <a:spcPct val="0"/>
-              </a:spcBef>
-              <a:spcAft>
-                <a:spcPct val="0"/>
-              </a:spcAft>
-              <a:buClrTx/>
-              <a:buSzTx/>
-              <a:buFontTx/>
-              <a:buNone/>
-              <a:tabLst/>
-            </a:pPr>
-            <a:endParaRPr kumimoji="0" lang="en-US" sz="1800" b="0" i="0" u="none" strike="noStrike" cap="none" normalizeH="0" baseline="0">
-              <a:ln>
-                <a:noFill/>
-              </a:ln>
-              <a:solidFill>
-                <a:schemeClr val="tx1"/>
-              </a:solidFill>
-              <a:effectLst/>
-              <a:latin typeface="Arial" charset="0"/>
-              <a:cs typeface="Arial" charset="0"/>
-            </a:endParaRPr>
-          </a:p>
-        </p:txBody>
-      </p:sp>
-      <p:sp>
-        <p:nvSpPr>
           <p:cNvPr id="52" name="TextBox 51">
             <a:extLst>
               <a:ext uri="{FF2B5EF4-FFF2-40B4-BE49-F238E27FC236}">
@@ -10812,99 +9777,190 @@
           </a:p>
         </p:txBody>
       </p:sp>
-      <p:sp>
-        <p:nvSpPr>
-          <p:cNvPr id="15387" name="TextBox 15386">
+      <p:grpSp>
+        <p:nvGrpSpPr>
+          <p:cNvPr id="15402" name="Group 15401">
             <a:extLst>
               <a:ext uri="{FF2B5EF4-FFF2-40B4-BE49-F238E27FC236}">
-                <a16:creationId xmlns:a16="http://schemas.microsoft.com/office/drawing/2014/main" id="{05E5766B-3559-5152-42B4-205546A1ED5E}"/>
+                <a16:creationId xmlns:a16="http://schemas.microsoft.com/office/drawing/2014/main" id="{4E348B4E-8C13-0FE0-DCD0-FB762FA1FDBA}"/>
               </a:ext>
             </a:extLst>
           </p:cNvPr>
-          <p:cNvSpPr txBox="1"/>
+          <p:cNvGrpSpPr/>
           <p:nvPr/>
-        </p:nvSpPr>
-        <p:spPr>
+        </p:nvGrpSpPr>
+        <p:grpSpPr>
           <a:xfrm>
-            <a:off x="555450" y="26315066"/>
-            <a:ext cx="7636528" cy="1569660"/>
+            <a:off x="675947" y="26800696"/>
+            <a:ext cx="6854956" cy="2277700"/>
+            <a:chOff x="569101" y="26252269"/>
+            <a:chExt cx="6854956" cy="2277700"/>
           </a:xfrm>
-          <a:prstGeom prst="rect">
-            <a:avLst/>
-          </a:prstGeom>
-          <a:noFill/>
-        </p:spPr>
-        <p:txBody>
-          <a:bodyPr wrap="square" lIns="91440" tIns="45720" rIns="91440" bIns="45720" anchor="t">
-            <a:spAutoFit/>
-          </a:bodyPr>
-          <a:lstStyle/>
-          <a:p>
-            <a:r>
-              <a:rPr lang="en-US" sz="3200" dirty="0">
+        </p:grpSpPr>
+        <p:sp>
+          <p:nvSpPr>
+            <p:cNvPr id="2" name="Rectangle 1">
+              <a:extLst>
+                <a:ext uri="{FF2B5EF4-FFF2-40B4-BE49-F238E27FC236}">
+                  <a16:creationId xmlns:a16="http://schemas.microsoft.com/office/drawing/2014/main" id="{7DF677AF-CCA7-3603-6675-25A047C2E384}"/>
+                </a:ext>
+              </a:extLst>
+            </p:cNvPr>
+            <p:cNvSpPr/>
+            <p:nvPr/>
+          </p:nvSpPr>
+          <p:spPr bwMode="auto">
+            <a:xfrm>
+              <a:off x="569101" y="26252269"/>
+              <a:ext cx="6854956" cy="2277700"/>
+            </a:xfrm>
+            <a:prstGeom prst="rect">
+              <a:avLst/>
+            </a:prstGeom>
+            <a:noFill/>
+            <a:ln w="57150" cap="flat" cmpd="sng" algn="ctr">
+              <a:solidFill>
+                <a:schemeClr val="tx1"/>
+              </a:solidFill>
+              <a:prstDash val="solid"/>
+              <a:round/>
+              <a:headEnd type="none" w="med" len="med"/>
+              <a:tailEnd type="none" w="med" len="med"/>
+            </a:ln>
+            <a:effectLst/>
+          </p:spPr>
+          <p:txBody>
+            <a:bodyPr vert="horz" wrap="square" lIns="91440" tIns="45720" rIns="91440" bIns="45720" numCol="1" rtlCol="0" anchor="t" anchorCtr="0" compatLnSpc="1">
+              <a:prstTxWarp prst="textNoShape">
+                <a:avLst/>
+              </a:prstTxWarp>
+            </a:bodyPr>
+            <a:lstStyle/>
+            <a:p>
+              <a:pPr marL="0" marR="0" indent="0" algn="l" defTabSz="4389438" rtl="0" eaLnBrk="1" fontAlgn="base" latinLnBrk="0" hangingPunct="1">
+                <a:lnSpc>
+                  <a:spcPct val="100000"/>
+                </a:lnSpc>
+                <a:spcBef>
+                  <a:spcPct val="0"/>
+                </a:spcBef>
+                <a:spcAft>
+                  <a:spcPct val="0"/>
+                </a:spcAft>
+                <a:buClrTx/>
+                <a:buSzTx/>
+                <a:buFontTx/>
+                <a:buNone/>
+                <a:tabLst/>
+              </a:pPr>
+              <a:endParaRPr kumimoji="0" lang="en-US" sz="1800" b="0" i="0" u="none" strike="noStrike" cap="none" normalizeH="0" baseline="0">
+                <a:ln>
+                  <a:noFill/>
+                </a:ln>
+                <a:solidFill>
+                  <a:schemeClr val="tx1"/>
+                </a:solidFill>
+                <a:effectLst/>
+                <a:latin typeface="Arial" charset="0"/>
+                <a:cs typeface="Arial" charset="0"/>
+              </a:endParaRPr>
+            </a:p>
+          </p:txBody>
+        </p:sp>
+        <p:sp>
+          <p:nvSpPr>
+            <p:cNvPr id="15387" name="TextBox 15386">
+              <a:extLst>
+                <a:ext uri="{FF2B5EF4-FFF2-40B4-BE49-F238E27FC236}">
+                  <a16:creationId xmlns:a16="http://schemas.microsoft.com/office/drawing/2014/main" id="{05E5766B-3559-5152-42B4-205546A1ED5E}"/>
+                </a:ext>
+              </a:extLst>
+            </p:cNvPr>
+            <p:cNvSpPr txBox="1"/>
+            <p:nvPr/>
+          </p:nvSpPr>
+          <p:spPr>
+            <a:xfrm>
+              <a:off x="1097130" y="26573709"/>
+              <a:ext cx="6326927" cy="1569660"/>
+            </a:xfrm>
+            <a:prstGeom prst="rect">
+              <a:avLst/>
+            </a:prstGeom>
+            <a:noFill/>
+          </p:spPr>
+          <p:txBody>
+            <a:bodyPr wrap="square" lIns="91440" tIns="45720" rIns="91440" bIns="45720" anchor="t">
+              <a:spAutoFit/>
+            </a:bodyPr>
+            <a:lstStyle/>
+            <a:p>
+              <a:r>
+                <a:rPr lang="en-US" sz="3200" dirty="0">
+                  <a:effectLst/>
+                  <a:latin typeface="Helvetica"/>
+                  <a:ea typeface="Times New Roman" panose="02020603050405020304" pitchFamily="18" charset="0"/>
+                  <a:cs typeface="Helvetica"/>
+                </a:rPr>
+                <a:t>N =</a:t>
+              </a:r>
+              <a:r>
+                <a:rPr lang="en-US" sz="3200" dirty="0">
+                  <a:latin typeface="Helvetica"/>
+                  <a:ea typeface="Times New Roman" panose="02020603050405020304" pitchFamily="18" charset="0"/>
+                  <a:cs typeface="Helvetica"/>
+                </a:rPr>
+                <a:t> 62</a:t>
+              </a:r>
+              <a:r>
+                <a:rPr lang="en-US" sz="3200" dirty="0">
+                  <a:effectLst/>
+                  <a:latin typeface="Helvetica"/>
+                  <a:ea typeface="Times New Roman" panose="02020603050405020304" pitchFamily="18" charset="0"/>
+                  <a:cs typeface="Helvetica"/>
+                </a:rPr>
+                <a:t> </a:t>
+              </a:r>
+              <a:r>
+                <a:rPr lang="en-US" sz="3200" dirty="0">
+                  <a:effectLst/>
+                  <a:latin typeface="Helvetica" pitchFamily="2" charset="0"/>
+                  <a:ea typeface="Times New Roman" panose="02020603050405020304" pitchFamily="18" charset="0"/>
+                  <a:cs typeface="Helvetica"/>
+                </a:rPr>
+                <a:t>completed the </a:t>
+              </a:r>
+              <a:r>
+                <a:rPr lang="en-US" sz="3200" b="0" i="0" dirty="0">
+                  <a:effectLst/>
+                  <a:latin typeface="Helvetica" pitchFamily="2" charset="0"/>
+                </a:rPr>
+                <a:t>Financial Exploitation Vulnerability Scale</a:t>
+              </a:r>
+              <a:r>
+                <a:rPr lang="en-US" sz="3200" dirty="0">
+                  <a:latin typeface="Calibri" panose="020F0502020204030204" pitchFamily="34" charset="0"/>
+                </a:rPr>
+                <a:t> </a:t>
+              </a:r>
+              <a:r>
+                <a:rPr lang="en-US" sz="3200" dirty="0">
+                  <a:latin typeface="Helvetica"/>
+                  <a:ea typeface="Times New Roman" panose="02020603050405020304" pitchFamily="18" charset="0"/>
+                  <a:cs typeface="Helvetica"/>
+                </a:rPr>
+                <a:t>(Lichtenberg et al., 2020a)</a:t>
+              </a:r>
+              <a:endParaRPr lang="en-US" sz="3200" dirty="0">
                 <a:effectLst/>
                 <a:latin typeface="Helvetica"/>
                 <a:ea typeface="Times New Roman" panose="02020603050405020304" pitchFamily="18" charset="0"/>
                 <a:cs typeface="Helvetica"/>
-              </a:rPr>
-              <a:t>N =</a:t>
-            </a:r>
-            <a:r>
-              <a:rPr lang="en-US" sz="3200" dirty="0">
-                <a:latin typeface="Helvetica"/>
-                <a:ea typeface="Times New Roman" panose="02020603050405020304" pitchFamily="18" charset="0"/>
-                <a:cs typeface="Helvetica"/>
-              </a:rPr>
-              <a:t> 62</a:t>
-            </a:r>
-            <a:r>
-              <a:rPr lang="en-US" sz="3200" dirty="0">
-                <a:effectLst/>
-                <a:latin typeface="Helvetica"/>
-                <a:ea typeface="Times New Roman" panose="02020603050405020304" pitchFamily="18" charset="0"/>
-                <a:cs typeface="Helvetica"/>
-              </a:rPr>
-              <a:t> </a:t>
-            </a:r>
-            <a:r>
-              <a:rPr lang="en-US" sz="3200" dirty="0">
-                <a:effectLst/>
-                <a:latin typeface="Helvetica" pitchFamily="2" charset="0"/>
-                <a:ea typeface="Times New Roman" panose="02020603050405020304" pitchFamily="18" charset="0"/>
-                <a:cs typeface="Helvetica"/>
-              </a:rPr>
-              <a:t>completed the </a:t>
-            </a:r>
-            <a:r>
-              <a:rPr lang="en-US" sz="3200" b="0" i="0" dirty="0">
-                <a:effectLst/>
-                <a:latin typeface="Helvetica" pitchFamily="2" charset="0"/>
-              </a:rPr>
-              <a:t>Financial Exploitation Vulnerability Scale</a:t>
-            </a:r>
-            <a:r>
-              <a:rPr lang="en-US" sz="3200" dirty="0">
-                <a:latin typeface="Calibri" panose="020F0502020204030204" pitchFamily="34" charset="0"/>
-              </a:rPr>
-              <a:t> </a:t>
-            </a:r>
-            <a:r>
-              <a:rPr lang="en-US" sz="3200" dirty="0">
-                <a:latin typeface="Helvetica"/>
-                <a:ea typeface="Times New Roman" panose="02020603050405020304" pitchFamily="18" charset="0"/>
-                <a:cs typeface="Helvetica"/>
-              </a:rPr>
-              <a:t>(Lichtenberg et al., 2020a)</a:t>
-            </a:r>
-            <a:endParaRPr lang="en-US" sz="3200" dirty="0">
-              <a:effectLst/>
-              <a:latin typeface="Helvetica"/>
-              <a:ea typeface="Times New Roman" panose="02020603050405020304" pitchFamily="18" charset="0"/>
-              <a:cs typeface="Helvetica"/>
-            </a:endParaRPr>
-          </a:p>
-        </p:txBody>
-      </p:sp>
+              </a:endParaRPr>
+            </a:p>
+          </p:txBody>
+        </p:sp>
+      </p:grpSp>
       <p:sp>
         <p:nvSpPr>
           <p:cNvPr id="15415" name="TextBox 86">
@@ -11134,94 +10190,6 @@
       </p:sp>
       <p:sp>
         <p:nvSpPr>
-          <p:cNvPr id="15430" name="TextBox 15429">
-            <a:extLst>
-              <a:ext uri="{FF2B5EF4-FFF2-40B4-BE49-F238E27FC236}">
-                <a16:creationId xmlns:a16="http://schemas.microsoft.com/office/drawing/2014/main" id="{EFA792C8-B452-9B85-65F6-6A5F05B88A13}"/>
-              </a:ext>
-            </a:extLst>
-          </p:cNvPr>
-          <p:cNvSpPr txBox="1"/>
-          <p:nvPr/>
-        </p:nvSpPr>
-        <p:spPr>
-          <a:xfrm>
-            <a:off x="41122508" y="11368706"/>
-            <a:ext cx="1407381" cy="584775"/>
-          </a:xfrm>
-          <a:prstGeom prst="rect">
-            <a:avLst/>
-          </a:prstGeom>
-          <a:noFill/>
-        </p:spPr>
-        <p:txBody>
-          <a:bodyPr rot="0" spcFirstLastPara="0" vertOverflow="overflow" horzOverflow="overflow" vert="horz" wrap="square" lIns="91440" tIns="45720" rIns="91440" bIns="45720" numCol="1" spcCol="0" rtlCol="0" fromWordArt="0" anchor="t" anchorCtr="0" forceAA="0" compatLnSpc="1">
-            <a:prstTxWarp prst="textNoShape">
-              <a:avLst/>
-            </a:prstTxWarp>
-            <a:spAutoFit/>
-          </a:bodyPr>
-          <a:lstStyle/>
-          <a:p>
-            <a:r>
-              <a:rPr lang="en-US" sz="3200" b="1" dirty="0">
-                <a:latin typeface="Helvetica"/>
-                <a:ea typeface="MS PGothic"/>
-              </a:rPr>
-              <a:t>DG-P</a:t>
-            </a:r>
-            <a:endParaRPr lang="en-US" sz="3200" b="1" dirty="0">
-              <a:latin typeface="Helvetica"/>
-            </a:endParaRPr>
-          </a:p>
-        </p:txBody>
-      </p:sp>
-      <p:sp>
-        <p:nvSpPr>
-          <p:cNvPr id="15431" name="TextBox 15430">
-            <a:extLst>
-              <a:ext uri="{FF2B5EF4-FFF2-40B4-BE49-F238E27FC236}">
-                <a16:creationId xmlns:a16="http://schemas.microsoft.com/office/drawing/2014/main" id="{18CDDB8A-F7CA-4251-3403-5381FA3BA0D0}"/>
-              </a:ext>
-            </a:extLst>
-          </p:cNvPr>
-          <p:cNvSpPr txBox="1"/>
-          <p:nvPr/>
-        </p:nvSpPr>
-        <p:spPr>
-          <a:xfrm>
-            <a:off x="42333911" y="11355880"/>
-            <a:ext cx="1407381" cy="584775"/>
-          </a:xfrm>
-          <a:prstGeom prst="rect">
-            <a:avLst/>
-          </a:prstGeom>
-          <a:noFill/>
-        </p:spPr>
-        <p:txBody>
-          <a:bodyPr rot="0" spcFirstLastPara="0" vertOverflow="overflow" horzOverflow="overflow" vert="horz" wrap="square" lIns="91440" tIns="45720" rIns="91440" bIns="45720" numCol="1" spcCol="0" rtlCol="0" fromWordArt="0" anchor="t" anchorCtr="0" forceAA="0" compatLnSpc="1">
-            <a:prstTxWarp prst="textNoShape">
-              <a:avLst/>
-            </a:prstTxWarp>
-            <a:spAutoFit/>
-          </a:bodyPr>
-          <a:lstStyle/>
-          <a:p>
-            <a:r>
-              <a:rPr lang="en-US" sz="3200" b="1" dirty="0">
-                <a:latin typeface="Helvetica"/>
-                <a:ea typeface="MS PGothic"/>
-              </a:rPr>
-              <a:t>UG-P</a:t>
-            </a:r>
-            <a:endParaRPr lang="en-US" sz="3200" b="1" dirty="0">
-              <a:latin typeface="Helvetica"/>
-            </a:endParaRPr>
-          </a:p>
-        </p:txBody>
-      </p:sp>
-      <p:sp>
-        <p:nvSpPr>
           <p:cNvPr id="15434" name="TextBox 15433">
             <a:extLst>
               <a:ext uri="{FF2B5EF4-FFF2-40B4-BE49-F238E27FC236}">
@@ -11234,7 +10202,7 @@
         </p:nvSpPr>
         <p:spPr>
           <a:xfrm>
-            <a:off x="39465643" y="6178839"/>
+            <a:off x="36449078" y="5987195"/>
             <a:ext cx="1046440" cy="6220601"/>
           </a:xfrm>
           <a:prstGeom prst="rect">
@@ -11254,291 +10222,7 @@
                 <a:latin typeface="Helvetica"/>
                 <a:ea typeface="MS PGothic"/>
               </a:rPr>
-              <a:t>VS-PCC Connectivity (</a:t>
-            </a:r>
-            <a:r>
-              <a:rPr lang="el-GR" sz="2800" dirty="0">
-                <a:latin typeface="Helvetica"/>
-                <a:ea typeface="MS PGothic"/>
-              </a:rPr>
-              <a:t>β) </a:t>
-            </a:r>
-            <a:endParaRPr lang="en-US" sz="2800" dirty="0">
-              <a:latin typeface="Helvetica"/>
-              <a:ea typeface="MS PGothic"/>
-            </a:endParaRPr>
-          </a:p>
-          <a:p>
-            <a:pPr algn="ctr"/>
-            <a:r>
-              <a:rPr lang="en-US" sz="2800" dirty="0">
-                <a:latin typeface="Helvetica"/>
-                <a:ea typeface="MS PGothic"/>
-              </a:rPr>
-              <a:t>Parametric Effect of Fairness</a:t>
-            </a:r>
-            <a:endParaRPr lang="en-US" sz="2800" dirty="0">
-              <a:latin typeface="Helvetica"/>
-            </a:endParaRPr>
-          </a:p>
-        </p:txBody>
-      </p:sp>
-      <p:sp>
-        <p:nvSpPr>
-          <p:cNvPr id="15436" name="TextBox 15435">
-            <a:extLst>
-              <a:ext uri="{FF2B5EF4-FFF2-40B4-BE49-F238E27FC236}">
-                <a16:creationId xmlns:a16="http://schemas.microsoft.com/office/drawing/2014/main" id="{AA2A6186-6088-E61B-A525-4AEC54236EAF}"/>
-              </a:ext>
-            </a:extLst>
-          </p:cNvPr>
-          <p:cNvSpPr txBox="1"/>
-          <p:nvPr/>
-        </p:nvSpPr>
-        <p:spPr>
-          <a:xfrm>
-            <a:off x="40327093" y="10363719"/>
-            <a:ext cx="1817883" cy="523220"/>
-          </a:xfrm>
-          <a:prstGeom prst="rect">
-            <a:avLst/>
-          </a:prstGeom>
-          <a:noFill/>
-        </p:spPr>
-        <p:txBody>
-          <a:bodyPr wrap="square">
-            <a:spAutoFit/>
-          </a:bodyPr>
-          <a:lstStyle/>
-          <a:p>
-            <a:r>
-              <a:rPr lang="en-US" sz="2800">
-                <a:latin typeface="Helvetica"/>
-                <a:ea typeface="MS PGothic"/>
-              </a:rPr>
-              <a:t>-2.0</a:t>
-            </a:r>
-            <a:endParaRPr lang="en-US" sz="2800">
-              <a:latin typeface="Helvetica"/>
-            </a:endParaRPr>
-          </a:p>
-        </p:txBody>
-      </p:sp>
-      <p:sp>
-        <p:nvSpPr>
-          <p:cNvPr id="15437" name="TextBox 15436">
-            <a:extLst>
-              <a:ext uri="{FF2B5EF4-FFF2-40B4-BE49-F238E27FC236}">
-                <a16:creationId xmlns:a16="http://schemas.microsoft.com/office/drawing/2014/main" id="{7832693E-BD6C-1AD3-B37D-BAAE7717155E}"/>
-              </a:ext>
-            </a:extLst>
-          </p:cNvPr>
-          <p:cNvSpPr txBox="1"/>
-          <p:nvPr/>
-        </p:nvSpPr>
-        <p:spPr>
-          <a:xfrm>
-            <a:off x="40395725" y="6676745"/>
-            <a:ext cx="1817883" cy="523220"/>
-          </a:xfrm>
-          <a:prstGeom prst="rect">
-            <a:avLst/>
-          </a:prstGeom>
-          <a:noFill/>
-        </p:spPr>
-        <p:txBody>
-          <a:bodyPr wrap="square">
-            <a:spAutoFit/>
-          </a:bodyPr>
-          <a:lstStyle/>
-          <a:p>
-            <a:r>
-              <a:rPr lang="en-US" sz="2800">
-                <a:latin typeface="Helvetica"/>
-                <a:ea typeface="MS PGothic"/>
-              </a:rPr>
-              <a:t>2.0</a:t>
-            </a:r>
-            <a:endParaRPr lang="en-US" sz="2800">
-              <a:latin typeface="Helvetica"/>
-            </a:endParaRPr>
-          </a:p>
-        </p:txBody>
-      </p:sp>
-      <p:sp>
-        <p:nvSpPr>
-          <p:cNvPr id="15438" name="TextBox 15437">
-            <a:extLst>
-              <a:ext uri="{FF2B5EF4-FFF2-40B4-BE49-F238E27FC236}">
-                <a16:creationId xmlns:a16="http://schemas.microsoft.com/office/drawing/2014/main" id="{E9A9AA80-AFAF-6B65-AAD2-AFD58A35294C}"/>
-              </a:ext>
-            </a:extLst>
-          </p:cNvPr>
-          <p:cNvSpPr txBox="1"/>
-          <p:nvPr/>
-        </p:nvSpPr>
-        <p:spPr>
-          <a:xfrm>
-            <a:off x="40692729" y="8571051"/>
-            <a:ext cx="1817883" cy="523220"/>
-          </a:xfrm>
-          <a:prstGeom prst="rect">
-            <a:avLst/>
-          </a:prstGeom>
-          <a:noFill/>
-        </p:spPr>
-        <p:txBody>
-          <a:bodyPr wrap="square">
-            <a:spAutoFit/>
-          </a:bodyPr>
-          <a:lstStyle/>
-          <a:p>
-            <a:r>
-              <a:rPr lang="en-US" sz="2800">
-                <a:latin typeface="Helvetica"/>
-                <a:ea typeface="MS PGothic"/>
-              </a:rPr>
-              <a:t>0</a:t>
-            </a:r>
-            <a:endParaRPr lang="en-US" sz="2800">
-              <a:latin typeface="Helvetica"/>
-            </a:endParaRPr>
-          </a:p>
-        </p:txBody>
-      </p:sp>
-      <p:sp>
-        <p:nvSpPr>
-          <p:cNvPr id="15439" name="TextBox 15438">
-            <a:extLst>
-              <a:ext uri="{FF2B5EF4-FFF2-40B4-BE49-F238E27FC236}">
-                <a16:creationId xmlns:a16="http://schemas.microsoft.com/office/drawing/2014/main" id="{D68EBFA3-6A4D-DADE-19FD-AAAA2BD6CD6A}"/>
-              </a:ext>
-            </a:extLst>
-          </p:cNvPr>
-          <p:cNvSpPr txBox="1"/>
-          <p:nvPr/>
-        </p:nvSpPr>
-        <p:spPr>
-          <a:xfrm>
-            <a:off x="40341073" y="9424007"/>
-            <a:ext cx="1817883" cy="523220"/>
-          </a:xfrm>
-          <a:prstGeom prst="rect">
-            <a:avLst/>
-          </a:prstGeom>
-          <a:noFill/>
-        </p:spPr>
-        <p:txBody>
-          <a:bodyPr wrap="square">
-            <a:spAutoFit/>
-          </a:bodyPr>
-          <a:lstStyle/>
-          <a:p>
-            <a:r>
-              <a:rPr lang="en-US" sz="2800">
-                <a:latin typeface="Helvetica"/>
-                <a:ea typeface="MS PGothic"/>
-              </a:rPr>
-              <a:t>-1.0</a:t>
-            </a:r>
-            <a:endParaRPr lang="en-US" sz="2800">
-              <a:latin typeface="Helvetica"/>
-            </a:endParaRPr>
-          </a:p>
-        </p:txBody>
-      </p:sp>
-      <p:sp>
-        <p:nvSpPr>
-          <p:cNvPr id="15440" name="TextBox 15439">
-            <a:extLst>
-              <a:ext uri="{FF2B5EF4-FFF2-40B4-BE49-F238E27FC236}">
-                <a16:creationId xmlns:a16="http://schemas.microsoft.com/office/drawing/2014/main" id="{4095C4F3-B201-0B06-6593-AA44A3FEB92E}"/>
-              </a:ext>
-            </a:extLst>
-          </p:cNvPr>
-          <p:cNvSpPr txBox="1"/>
-          <p:nvPr/>
-        </p:nvSpPr>
-        <p:spPr>
-          <a:xfrm>
-            <a:off x="40422405" y="7609149"/>
-            <a:ext cx="1817883" cy="523220"/>
-          </a:xfrm>
-          <a:prstGeom prst="rect">
-            <a:avLst/>
-          </a:prstGeom>
-          <a:noFill/>
-        </p:spPr>
-        <p:txBody>
-          <a:bodyPr wrap="square">
-            <a:spAutoFit/>
-          </a:bodyPr>
-          <a:lstStyle/>
-          <a:p>
-            <a:r>
-              <a:rPr lang="en-US" sz="2800">
-                <a:latin typeface="Helvetica"/>
-                <a:ea typeface="MS PGothic"/>
-              </a:rPr>
-              <a:t>1.0</a:t>
-            </a:r>
-            <a:endParaRPr lang="en-US" sz="2800">
-              <a:latin typeface="Helvetica"/>
-            </a:endParaRPr>
-          </a:p>
-        </p:txBody>
-      </p:sp>
-      <p:sp>
-        <p:nvSpPr>
-          <p:cNvPr id="15443" name="TextBox 15442">
-            <a:extLst>
-              <a:ext uri="{FF2B5EF4-FFF2-40B4-BE49-F238E27FC236}">
-                <a16:creationId xmlns:a16="http://schemas.microsoft.com/office/drawing/2014/main" id="{B82B59E1-A452-0E40-28EE-53E6ACEBCBC6}"/>
-              </a:ext>
-            </a:extLst>
-          </p:cNvPr>
-          <p:cNvSpPr txBox="1"/>
-          <p:nvPr/>
-        </p:nvSpPr>
-        <p:spPr>
-          <a:xfrm>
-            <a:off x="34893845" y="6761176"/>
-            <a:ext cx="4584887" cy="1077218"/>
-          </a:xfrm>
-          <a:prstGeom prst="rect">
-            <a:avLst/>
-          </a:prstGeom>
-          <a:noFill/>
-        </p:spPr>
-        <p:txBody>
-          <a:bodyPr rot="0" spcFirstLastPara="0" vertOverflow="overflow" horzOverflow="overflow" vert="horz" wrap="square" lIns="91440" tIns="45720" rIns="91440" bIns="45720" numCol="1" spcCol="0" rtlCol="0" fromWordArt="0" anchor="t" anchorCtr="0" forceAA="0" compatLnSpc="1">
-            <a:prstTxWarp prst="textNoShape">
-              <a:avLst/>
-            </a:prstTxWarp>
-            <a:spAutoFit/>
-          </a:bodyPr>
-          <a:lstStyle/>
-          <a:p>
-            <a:pPr algn="ctr"/>
-            <a:r>
-              <a:rPr lang="en-US" sz="3200" b="1" dirty="0">
-                <a:latin typeface="Helvetica"/>
-                <a:ea typeface="MS PGothic"/>
-              </a:rPr>
-              <a:t>Target Region:</a:t>
-            </a:r>
-            <a:br>
-              <a:rPr lang="en-US" sz="3200" b="1" dirty="0">
-                <a:latin typeface="Helvetica"/>
-                <a:ea typeface="MS PGothic"/>
-              </a:rPr>
-            </a:br>
-            <a:r>
-              <a:rPr lang="en-US" sz="3200" b="1" dirty="0">
-                <a:latin typeface="Helvetica"/>
-                <a:ea typeface="MS PGothic"/>
-              </a:rPr>
-              <a:t>PCC</a:t>
+              <a:t>Precuneus Activation Plotted against age</a:t>
             </a:r>
           </a:p>
         </p:txBody>
@@ -11608,151 +10292,6 @@
             <a:endParaRPr lang="en-US" sz="3200" dirty="0">
               <a:ea typeface="MS PGothic"/>
               <a:cs typeface="Helvetica"/>
-            </a:endParaRPr>
-          </a:p>
-        </p:txBody>
-      </p:sp>
-      <p:sp>
-        <p:nvSpPr>
-          <p:cNvPr id="15444" name="TextBox 15443">
-            <a:extLst>
-              <a:ext uri="{FF2B5EF4-FFF2-40B4-BE49-F238E27FC236}">
-                <a16:creationId xmlns:a16="http://schemas.microsoft.com/office/drawing/2014/main" id="{02E532E1-793E-E9DC-B7B7-AEBDAAB37CEC}"/>
-              </a:ext>
-            </a:extLst>
-          </p:cNvPr>
-          <p:cNvSpPr txBox="1"/>
-          <p:nvPr/>
-        </p:nvSpPr>
-        <p:spPr>
-          <a:xfrm>
-            <a:off x="30459342" y="6777195"/>
-            <a:ext cx="4584887" cy="1077218"/>
-          </a:xfrm>
-          <a:prstGeom prst="rect">
-            <a:avLst/>
-          </a:prstGeom>
-          <a:noFill/>
-        </p:spPr>
-        <p:txBody>
-          <a:bodyPr rot="0" spcFirstLastPara="0" vertOverflow="overflow" horzOverflow="overflow" vert="horz" wrap="square" lIns="91440" tIns="45720" rIns="91440" bIns="45720" numCol="1" spcCol="0" rtlCol="0" fromWordArt="0" anchor="t" anchorCtr="0" forceAA="0" compatLnSpc="1">
-            <a:prstTxWarp prst="textNoShape">
-              <a:avLst/>
-            </a:prstTxWarp>
-            <a:spAutoFit/>
-          </a:bodyPr>
-          <a:lstStyle/>
-          <a:p>
-            <a:pPr algn="ctr"/>
-            <a:r>
-              <a:rPr lang="en-US" sz="3200" b="1" dirty="0">
-                <a:latin typeface="Helvetica"/>
-                <a:ea typeface="MS PGothic"/>
-              </a:rPr>
-              <a:t>Seed Region:</a:t>
-            </a:r>
-            <a:br>
-              <a:rPr lang="en-US" sz="3200" b="1" dirty="0">
-                <a:latin typeface="Helvetica"/>
-                <a:ea typeface="MS PGothic"/>
-              </a:rPr>
-            </a:br>
-            <a:r>
-              <a:rPr lang="en-US" sz="3200" b="1" dirty="0">
-                <a:latin typeface="Helvetica"/>
-                <a:ea typeface="MS PGothic"/>
-              </a:rPr>
-              <a:t>Ventral Striatum</a:t>
-            </a:r>
-          </a:p>
-        </p:txBody>
-      </p:sp>
-      <p:sp>
-        <p:nvSpPr>
-          <p:cNvPr id="15445" name="TextBox 15444">
-            <a:extLst>
-              <a:ext uri="{FF2B5EF4-FFF2-40B4-BE49-F238E27FC236}">
-                <a16:creationId xmlns:a16="http://schemas.microsoft.com/office/drawing/2014/main" id="{5F9767C7-9148-0338-0338-1E5922D38D49}"/>
-              </a:ext>
-            </a:extLst>
-          </p:cNvPr>
-          <p:cNvSpPr txBox="1"/>
-          <p:nvPr/>
-        </p:nvSpPr>
-        <p:spPr>
-          <a:xfrm>
-            <a:off x="30685516" y="11683360"/>
-            <a:ext cx="4068810" cy="954107"/>
-          </a:xfrm>
-          <a:prstGeom prst="rect">
-            <a:avLst/>
-          </a:prstGeom>
-          <a:noFill/>
-        </p:spPr>
-        <p:txBody>
-          <a:bodyPr wrap="square" lIns="91440" tIns="45720" rIns="91440" bIns="45720" anchor="t">
-            <a:spAutoFit/>
-          </a:bodyPr>
-          <a:lstStyle/>
-          <a:p>
-            <a:pPr algn="ctr"/>
-            <a:r>
-              <a:rPr lang="en-US" sz="2800" dirty="0">
-                <a:latin typeface="Helvetica"/>
-                <a:ea typeface="MS PGothic"/>
-              </a:rPr>
-              <a:t>Y=12</a:t>
-            </a:r>
-          </a:p>
-          <a:p>
-            <a:pPr algn="ctr"/>
-            <a:endParaRPr lang="en-US" sz="2800" dirty="0">
-              <a:latin typeface="Helvetica"/>
-            </a:endParaRPr>
-          </a:p>
-        </p:txBody>
-      </p:sp>
-      <p:sp>
-        <p:nvSpPr>
-          <p:cNvPr id="15446" name="TextBox 15445">
-            <a:extLst>
-              <a:ext uri="{FF2B5EF4-FFF2-40B4-BE49-F238E27FC236}">
-                <a16:creationId xmlns:a16="http://schemas.microsoft.com/office/drawing/2014/main" id="{915A9CF4-93AF-1DFB-FA20-09D374B0635B}"/>
-              </a:ext>
-            </a:extLst>
-          </p:cNvPr>
-          <p:cNvSpPr txBox="1"/>
-          <p:nvPr/>
-        </p:nvSpPr>
-        <p:spPr>
-          <a:xfrm>
-            <a:off x="36220357" y="11545724"/>
-            <a:ext cx="2660825" cy="954107"/>
-          </a:xfrm>
-          <a:prstGeom prst="rect">
-            <a:avLst/>
-          </a:prstGeom>
-          <a:noFill/>
-        </p:spPr>
-        <p:txBody>
-          <a:bodyPr wrap="square" lIns="91440" tIns="45720" rIns="91440" bIns="45720" anchor="t">
-            <a:spAutoFit/>
-          </a:bodyPr>
-          <a:lstStyle/>
-          <a:p>
-            <a:pPr algn="ctr"/>
-            <a:r>
-              <a:rPr lang="en-US" sz="2800" dirty="0">
-                <a:latin typeface="Helvetica"/>
-                <a:ea typeface="MS PGothic"/>
-              </a:rPr>
-              <a:t>X=4</a:t>
-            </a:r>
-          </a:p>
-          <a:p>
-            <a:pPr algn="ctr"/>
-            <a:endParaRPr lang="en-US" sz="2800" dirty="0">
-              <a:latin typeface="Helvetica"/>
             </a:endParaRPr>
           </a:p>
         </p:txBody>
@@ -12767,7 +11306,2648 @@
           </a:prstGeom>
         </p:spPr>
       </p:pic>
+      <p:grpSp>
+        <p:nvGrpSpPr>
+          <p:cNvPr id="84" name="Group 83">
+            <a:extLst>
+              <a:ext uri="{FF2B5EF4-FFF2-40B4-BE49-F238E27FC236}">
+                <a16:creationId xmlns:a16="http://schemas.microsoft.com/office/drawing/2014/main" id="{F6598829-9A56-37ED-DD15-373A4F64219F}"/>
+              </a:ext>
+            </a:extLst>
+          </p:cNvPr>
+          <p:cNvGrpSpPr/>
+          <p:nvPr/>
+        </p:nvGrpSpPr>
+        <p:grpSpPr>
+          <a:xfrm>
+            <a:off x="16266708" y="5102620"/>
+            <a:ext cx="5346874" cy="6245250"/>
+            <a:chOff x="24606262" y="5087612"/>
+            <a:chExt cx="5346874" cy="6245250"/>
+          </a:xfrm>
+        </p:grpSpPr>
+        <p:grpSp>
+          <p:nvGrpSpPr>
+            <p:cNvPr id="73" name="Group 72">
+              <a:extLst>
+                <a:ext uri="{FF2B5EF4-FFF2-40B4-BE49-F238E27FC236}">
+                  <a16:creationId xmlns:a16="http://schemas.microsoft.com/office/drawing/2014/main" id="{9D0AD672-5D1A-CAD6-160C-701B0E0AC49D}"/>
+                </a:ext>
+              </a:extLst>
+            </p:cNvPr>
+            <p:cNvGrpSpPr/>
+            <p:nvPr/>
+          </p:nvGrpSpPr>
+          <p:grpSpPr>
+            <a:xfrm>
+              <a:off x="24606262" y="5087612"/>
+              <a:ext cx="5346874" cy="2981162"/>
+              <a:chOff x="24230508" y="5420973"/>
+              <a:chExt cx="5346874" cy="2981162"/>
+            </a:xfrm>
+          </p:grpSpPr>
+          <p:sp>
+            <p:nvSpPr>
+              <p:cNvPr id="38" name="Oval 37">
+                <a:extLst>
+                  <a:ext uri="{FF2B5EF4-FFF2-40B4-BE49-F238E27FC236}">
+                    <a16:creationId xmlns:a16="http://schemas.microsoft.com/office/drawing/2014/main" id="{9AB3227B-605C-47B6-D499-E01120A27BC6}"/>
+                  </a:ext>
+                </a:extLst>
+              </p:cNvPr>
+              <p:cNvSpPr/>
+              <p:nvPr/>
+            </p:nvSpPr>
+            <p:spPr bwMode="auto">
+              <a:xfrm>
+                <a:off x="24230508" y="5440590"/>
+                <a:ext cx="2961545" cy="2961545"/>
+              </a:xfrm>
+              <a:prstGeom prst="ellipse">
+                <a:avLst/>
+              </a:prstGeom>
+              <a:noFill/>
+              <a:ln w="50800" cap="flat" cmpd="sng" algn="ctr">
+                <a:solidFill>
+                  <a:schemeClr val="tx1"/>
+                </a:solidFill>
+                <a:prstDash val="solid"/>
+                <a:round/>
+                <a:headEnd type="none" w="med" len="med"/>
+                <a:tailEnd type="none" w="med" len="med"/>
+              </a:ln>
+              <a:effectLst/>
+            </p:spPr>
+            <p:txBody>
+              <a:bodyPr vert="horz" wrap="square" lIns="91440" tIns="45720" rIns="91440" bIns="45720" numCol="1" rtlCol="0" anchor="t" anchorCtr="0" compatLnSpc="1">
+                <a:prstTxWarp prst="textNoShape">
+                  <a:avLst/>
+                </a:prstTxWarp>
+              </a:bodyPr>
+              <a:lstStyle/>
+              <a:p>
+                <a:pPr marL="0" marR="0" indent="0" algn="ctr" defTabSz="4389438" rtl="0" eaLnBrk="1" fontAlgn="base" latinLnBrk="0" hangingPunct="1">
+                  <a:lnSpc>
+                    <a:spcPct val="100000"/>
+                  </a:lnSpc>
+                  <a:spcBef>
+                    <a:spcPct val="0"/>
+                  </a:spcBef>
+                  <a:spcAft>
+                    <a:spcPct val="0"/>
+                  </a:spcAft>
+                  <a:buClrTx/>
+                  <a:buSzTx/>
+                  <a:buFontTx/>
+                  <a:buNone/>
+                  <a:tabLst/>
+                </a:pPr>
+                <a:r>
+                  <a:rPr lang="en-US" sz="3000" dirty="0">
+                    <a:latin typeface="Arial" charset="0"/>
+                    <a:cs typeface="Arial" charset="0"/>
+                  </a:rPr>
+                  <a:t>Other</a:t>
+                </a:r>
+                <a:endParaRPr kumimoji="0" lang="en-US" sz="3000" b="0" i="0" u="none" strike="noStrike" cap="none" normalizeH="0" baseline="0" dirty="0">
+                  <a:ln>
+                    <a:noFill/>
+                  </a:ln>
+                  <a:solidFill>
+                    <a:schemeClr val="tx1"/>
+                  </a:solidFill>
+                  <a:effectLst/>
+                  <a:latin typeface="Arial" charset="0"/>
+                  <a:cs typeface="Arial" charset="0"/>
+                </a:endParaRPr>
+              </a:p>
+            </p:txBody>
+          </p:sp>
+          <p:sp>
+            <p:nvSpPr>
+              <p:cNvPr id="44" name="Oval 43">
+                <a:extLst>
+                  <a:ext uri="{FF2B5EF4-FFF2-40B4-BE49-F238E27FC236}">
+                    <a16:creationId xmlns:a16="http://schemas.microsoft.com/office/drawing/2014/main" id="{38C7AA76-A69B-6790-2AF3-21F88F089433}"/>
+                  </a:ext>
+                </a:extLst>
+              </p:cNvPr>
+              <p:cNvSpPr/>
+              <p:nvPr/>
+            </p:nvSpPr>
+            <p:spPr bwMode="auto">
+              <a:xfrm>
+                <a:off x="26615837" y="5420973"/>
+                <a:ext cx="2961545" cy="2961545"/>
+              </a:xfrm>
+              <a:prstGeom prst="ellipse">
+                <a:avLst/>
+              </a:prstGeom>
+              <a:noFill/>
+              <a:ln w="50800" cap="flat" cmpd="sng" algn="ctr">
+                <a:solidFill>
+                  <a:schemeClr val="tx1"/>
+                </a:solidFill>
+                <a:prstDash val="solid"/>
+                <a:round/>
+                <a:headEnd type="none" w="med" len="med"/>
+                <a:tailEnd type="none" w="med" len="med"/>
+              </a:ln>
+              <a:effectLst/>
+            </p:spPr>
+            <p:txBody>
+              <a:bodyPr vert="horz" wrap="square" lIns="91440" tIns="45720" rIns="91440" bIns="45720" numCol="1" rtlCol="0" anchor="t" anchorCtr="0" compatLnSpc="1">
+                <a:prstTxWarp prst="textNoShape">
+                  <a:avLst/>
+                </a:prstTxWarp>
+              </a:bodyPr>
+              <a:lstStyle/>
+              <a:p>
+                <a:pPr marL="0" marR="0" indent="0" algn="ctr" defTabSz="4389438" rtl="0" eaLnBrk="1" fontAlgn="base" latinLnBrk="0" hangingPunct="1">
+                  <a:lnSpc>
+                    <a:spcPct val="100000"/>
+                  </a:lnSpc>
+                  <a:spcBef>
+                    <a:spcPct val="0"/>
+                  </a:spcBef>
+                  <a:spcAft>
+                    <a:spcPct val="0"/>
+                  </a:spcAft>
+                  <a:buClrTx/>
+                  <a:buSzTx/>
+                  <a:buFontTx/>
+                  <a:buNone/>
+                  <a:tabLst/>
+                </a:pPr>
+                <a:r>
+                  <a:rPr kumimoji="0" lang="en-US" sz="3000" b="0" i="0" u="none" strike="noStrike" cap="none" normalizeH="0" baseline="0" dirty="0">
+                    <a:ln>
+                      <a:noFill/>
+                    </a:ln>
+                    <a:solidFill>
+                      <a:schemeClr val="tx1"/>
+                    </a:solidFill>
+                    <a:effectLst/>
+                    <a:latin typeface="Arial" charset="0"/>
+                    <a:cs typeface="Arial" charset="0"/>
+                  </a:rPr>
+                  <a:t>Self</a:t>
+                </a:r>
+              </a:p>
+            </p:txBody>
+          </p:sp>
+        </p:grpSp>
+        <p:grpSp>
+          <p:nvGrpSpPr>
+            <p:cNvPr id="81" name="Group 80">
+              <a:extLst>
+                <a:ext uri="{FF2B5EF4-FFF2-40B4-BE49-F238E27FC236}">
+                  <a16:creationId xmlns:a16="http://schemas.microsoft.com/office/drawing/2014/main" id="{A502EBA9-4A64-B731-4721-E93BC2C0B38E}"/>
+                </a:ext>
+              </a:extLst>
+            </p:cNvPr>
+            <p:cNvGrpSpPr/>
+            <p:nvPr/>
+          </p:nvGrpSpPr>
+          <p:grpSpPr>
+            <a:xfrm>
+              <a:off x="25411939" y="8348344"/>
+              <a:ext cx="3925091" cy="2984518"/>
+              <a:chOff x="25130667" y="8968962"/>
+              <a:chExt cx="3925091" cy="2984518"/>
+            </a:xfrm>
+          </p:grpSpPr>
+          <p:sp>
+            <p:nvSpPr>
+              <p:cNvPr id="46" name="Oval 45">
+                <a:extLst>
+                  <a:ext uri="{FF2B5EF4-FFF2-40B4-BE49-F238E27FC236}">
+                    <a16:creationId xmlns:a16="http://schemas.microsoft.com/office/drawing/2014/main" id="{73E66EF6-812F-CEC2-83FA-171A41C69916}"/>
+                  </a:ext>
+                </a:extLst>
+              </p:cNvPr>
+              <p:cNvSpPr/>
+              <p:nvPr/>
+            </p:nvSpPr>
+            <p:spPr bwMode="auto">
+              <a:xfrm>
+                <a:off x="25130667" y="8968962"/>
+                <a:ext cx="2961545" cy="2961545"/>
+              </a:xfrm>
+              <a:prstGeom prst="ellipse">
+                <a:avLst/>
+              </a:prstGeom>
+              <a:noFill/>
+              <a:ln w="50800" cap="flat" cmpd="sng" algn="ctr">
+                <a:solidFill>
+                  <a:schemeClr val="tx1"/>
+                </a:solidFill>
+                <a:prstDash val="solid"/>
+                <a:round/>
+                <a:headEnd type="none" w="med" len="med"/>
+                <a:tailEnd type="none" w="med" len="med"/>
+              </a:ln>
+              <a:effectLst/>
+            </p:spPr>
+            <p:txBody>
+              <a:bodyPr vert="horz" wrap="square" lIns="91440" tIns="45720" rIns="91440" bIns="45720" numCol="1" rtlCol="0" anchor="t" anchorCtr="0" compatLnSpc="1">
+                <a:prstTxWarp prst="textNoShape">
+                  <a:avLst/>
+                </a:prstTxWarp>
+              </a:bodyPr>
+              <a:lstStyle/>
+              <a:p>
+                <a:pPr marL="0" marR="0" indent="0" algn="l" defTabSz="4389438" rtl="0" eaLnBrk="1" fontAlgn="base" latinLnBrk="0" hangingPunct="1">
+                  <a:lnSpc>
+                    <a:spcPct val="100000"/>
+                  </a:lnSpc>
+                  <a:spcBef>
+                    <a:spcPct val="0"/>
+                  </a:spcBef>
+                  <a:spcAft>
+                    <a:spcPct val="0"/>
+                  </a:spcAft>
+                  <a:buClrTx/>
+                  <a:buSzTx/>
+                  <a:buFontTx/>
+                  <a:buNone/>
+                  <a:tabLst/>
+                </a:pPr>
+                <a:endParaRPr kumimoji="0" lang="en-US" sz="1800" b="0" i="0" u="none" strike="noStrike" cap="none" normalizeH="0" baseline="0" dirty="0">
+                  <a:ln>
+                    <a:noFill/>
+                  </a:ln>
+                  <a:solidFill>
+                    <a:schemeClr val="tx1"/>
+                  </a:solidFill>
+                  <a:effectLst/>
+                  <a:latin typeface="Arial" charset="0"/>
+                  <a:cs typeface="Arial" charset="0"/>
+                </a:endParaRPr>
+              </a:p>
+            </p:txBody>
+          </p:sp>
+          <p:sp>
+            <p:nvSpPr>
+              <p:cNvPr id="53" name="Oval 52">
+                <a:extLst>
+                  <a:ext uri="{FF2B5EF4-FFF2-40B4-BE49-F238E27FC236}">
+                    <a16:creationId xmlns:a16="http://schemas.microsoft.com/office/drawing/2014/main" id="{B9FF4C20-98BA-72A9-FBA3-ADE2BE7AB857}"/>
+                  </a:ext>
+                </a:extLst>
+              </p:cNvPr>
+              <p:cNvSpPr/>
+              <p:nvPr/>
+            </p:nvSpPr>
+            <p:spPr bwMode="auto">
+              <a:xfrm>
+                <a:off x="26094213" y="8991935"/>
+                <a:ext cx="2961545" cy="2961545"/>
+              </a:xfrm>
+              <a:prstGeom prst="ellipse">
+                <a:avLst/>
+              </a:prstGeom>
+              <a:noFill/>
+              <a:ln w="50800" cap="flat" cmpd="sng" algn="ctr">
+                <a:solidFill>
+                  <a:schemeClr val="tx1"/>
+                </a:solidFill>
+                <a:prstDash val="solid"/>
+                <a:round/>
+                <a:headEnd type="none" w="med" len="med"/>
+                <a:tailEnd type="none" w="med" len="med"/>
+              </a:ln>
+              <a:effectLst/>
+            </p:spPr>
+            <p:txBody>
+              <a:bodyPr vert="horz" wrap="square" lIns="91440" tIns="45720" rIns="91440" bIns="45720" numCol="1" rtlCol="0" anchor="t" anchorCtr="0" compatLnSpc="1">
+                <a:prstTxWarp prst="textNoShape">
+                  <a:avLst/>
+                </a:prstTxWarp>
+              </a:bodyPr>
+              <a:lstStyle/>
+              <a:p>
+                <a:pPr marL="0" marR="0" indent="0" algn="l" defTabSz="4389438" rtl="0" eaLnBrk="1" fontAlgn="base" latinLnBrk="0" hangingPunct="1">
+                  <a:lnSpc>
+                    <a:spcPct val="100000"/>
+                  </a:lnSpc>
+                  <a:spcBef>
+                    <a:spcPct val="0"/>
+                  </a:spcBef>
+                  <a:spcAft>
+                    <a:spcPct val="0"/>
+                  </a:spcAft>
+                  <a:buClrTx/>
+                  <a:buSzTx/>
+                  <a:buFontTx/>
+                  <a:buNone/>
+                  <a:tabLst/>
+                </a:pPr>
+                <a:endParaRPr kumimoji="0" lang="en-US" sz="1800" b="0" i="0" u="none" strike="noStrike" cap="none" normalizeH="0" baseline="0" dirty="0">
+                  <a:ln>
+                    <a:noFill/>
+                  </a:ln>
+                  <a:solidFill>
+                    <a:schemeClr val="tx1"/>
+                  </a:solidFill>
+                  <a:effectLst/>
+                  <a:latin typeface="Arial" charset="0"/>
+                  <a:cs typeface="Arial" charset="0"/>
+                </a:endParaRPr>
+              </a:p>
+            </p:txBody>
+          </p:sp>
+        </p:grpSp>
+      </p:grpSp>
+      <p:grpSp>
+        <p:nvGrpSpPr>
+          <p:cNvPr id="15363" name="Group 15362">
+            <a:extLst>
+              <a:ext uri="{FF2B5EF4-FFF2-40B4-BE49-F238E27FC236}">
+                <a16:creationId xmlns:a16="http://schemas.microsoft.com/office/drawing/2014/main" id="{5342AA36-A614-FA38-AAEB-B01CE5DEE554}"/>
+              </a:ext>
+            </a:extLst>
+          </p:cNvPr>
+          <p:cNvGrpSpPr/>
+          <p:nvPr/>
+        </p:nvGrpSpPr>
+        <p:grpSpPr>
+          <a:xfrm>
+            <a:off x="22892672" y="5355290"/>
+            <a:ext cx="6622052" cy="6167135"/>
+            <a:chOff x="17267302" y="5300010"/>
+            <a:chExt cx="15233772" cy="14187253"/>
+          </a:xfrm>
+        </p:grpSpPr>
+        <p:grpSp>
+          <p:nvGrpSpPr>
+            <p:cNvPr id="15368" name="Group 15367">
+              <a:extLst>
+                <a:ext uri="{FF2B5EF4-FFF2-40B4-BE49-F238E27FC236}">
+                  <a16:creationId xmlns:a16="http://schemas.microsoft.com/office/drawing/2014/main" id="{EF61B636-3DAB-BD36-5E77-AF660B90CB6D}"/>
+                </a:ext>
+              </a:extLst>
+            </p:cNvPr>
+            <p:cNvGrpSpPr/>
+            <p:nvPr/>
+          </p:nvGrpSpPr>
+          <p:grpSpPr>
+            <a:xfrm>
+              <a:off x="17267302" y="5300010"/>
+              <a:ext cx="15233772" cy="14187253"/>
+              <a:chOff x="17267302" y="5300010"/>
+              <a:chExt cx="15233772" cy="14187253"/>
+            </a:xfrm>
+          </p:grpSpPr>
+          <p:grpSp>
+            <p:nvGrpSpPr>
+              <p:cNvPr id="15374" name="Group 15373">
+                <a:extLst>
+                  <a:ext uri="{FF2B5EF4-FFF2-40B4-BE49-F238E27FC236}">
+                    <a16:creationId xmlns:a16="http://schemas.microsoft.com/office/drawing/2014/main" id="{9D074445-318C-EC5C-B299-FABC718AB741}"/>
+                  </a:ext>
+                </a:extLst>
+              </p:cNvPr>
+              <p:cNvGrpSpPr/>
+              <p:nvPr/>
+            </p:nvGrpSpPr>
+            <p:grpSpPr>
+              <a:xfrm>
+                <a:off x="17267302" y="5300010"/>
+                <a:ext cx="15233772" cy="12987990"/>
+                <a:chOff x="17267302" y="5300010"/>
+                <a:chExt cx="15233772" cy="12987990"/>
+              </a:xfrm>
+            </p:grpSpPr>
+            <p:sp>
+              <p:nvSpPr>
+                <p:cNvPr id="15378" name="Rectangle 15377">
+                  <a:extLst>
+                    <a:ext uri="{FF2B5EF4-FFF2-40B4-BE49-F238E27FC236}">
+                      <a16:creationId xmlns:a16="http://schemas.microsoft.com/office/drawing/2014/main" id="{D3C6FA6C-63E2-D9C7-11C3-F549FAE89481}"/>
+                    </a:ext>
+                  </a:extLst>
+                </p:cNvPr>
+                <p:cNvSpPr/>
+                <p:nvPr/>
+              </p:nvSpPr>
+              <p:spPr bwMode="auto">
+                <a:xfrm>
+                  <a:off x="17267302" y="5300010"/>
+                  <a:ext cx="2814638" cy="6500813"/>
+                </a:xfrm>
+                <a:prstGeom prst="rect">
+                  <a:avLst/>
+                </a:prstGeom>
+                <a:solidFill>
+                  <a:schemeClr val="accent1">
+                    <a:lumMod val="50000"/>
+                  </a:schemeClr>
+                </a:solidFill>
+                <a:ln w="50800" cap="flat" cmpd="sng" algn="ctr">
+                  <a:solidFill>
+                    <a:schemeClr val="tx1"/>
+                  </a:solidFill>
+                  <a:prstDash val="solid"/>
+                  <a:round/>
+                  <a:headEnd type="none" w="med" len="med"/>
+                  <a:tailEnd type="none" w="med" len="med"/>
+                </a:ln>
+                <a:effectLst/>
+              </p:spPr>
+              <p:txBody>
+                <a:bodyPr vert="horz" wrap="square" lIns="91440" tIns="45720" rIns="91440" bIns="45720" numCol="1" rtlCol="0" anchor="t" anchorCtr="0" compatLnSpc="1">
+                  <a:prstTxWarp prst="textNoShape">
+                    <a:avLst/>
+                  </a:prstTxWarp>
+                </a:bodyPr>
+                <a:lstStyle/>
+                <a:p>
+                  <a:pPr marL="0" marR="0" indent="0" algn="l" defTabSz="4389438" rtl="0" eaLnBrk="1" fontAlgn="base" latinLnBrk="0" hangingPunct="1">
+                    <a:lnSpc>
+                      <a:spcPct val="100000"/>
+                    </a:lnSpc>
+                    <a:spcBef>
+                      <a:spcPct val="0"/>
+                    </a:spcBef>
+                    <a:spcAft>
+                      <a:spcPct val="0"/>
+                    </a:spcAft>
+                    <a:buClrTx/>
+                    <a:buSzTx/>
+                    <a:buFontTx/>
+                    <a:buNone/>
+                    <a:tabLst/>
+                  </a:pPr>
+                  <a:endParaRPr kumimoji="0" lang="en-US" sz="1800" b="0" i="0" u="none" strike="noStrike" cap="none" normalizeH="0" baseline="0" dirty="0">
+                    <a:ln>
+                      <a:noFill/>
+                    </a:ln>
+                    <a:solidFill>
+                      <a:schemeClr val="tx1"/>
+                    </a:solidFill>
+                    <a:effectLst/>
+                    <a:latin typeface="Arial" charset="0"/>
+                    <a:cs typeface="Arial" charset="0"/>
+                  </a:endParaRPr>
+                </a:p>
+              </p:txBody>
+            </p:sp>
+            <p:sp>
+              <p:nvSpPr>
+                <p:cNvPr id="15379" name="Rectangle 15378">
+                  <a:extLst>
+                    <a:ext uri="{FF2B5EF4-FFF2-40B4-BE49-F238E27FC236}">
+                      <a16:creationId xmlns:a16="http://schemas.microsoft.com/office/drawing/2014/main" id="{82DBA69E-FE31-66D5-1ACE-25BF6D5A8306}"/>
+                    </a:ext>
+                  </a:extLst>
+                </p:cNvPr>
+                <p:cNvSpPr/>
+                <p:nvPr/>
+              </p:nvSpPr>
+              <p:spPr bwMode="auto">
+                <a:xfrm>
+                  <a:off x="23482859" y="16121903"/>
+                  <a:ext cx="2814638" cy="2166097"/>
+                </a:xfrm>
+                <a:prstGeom prst="rect">
+                  <a:avLst/>
+                </a:prstGeom>
+                <a:solidFill>
+                  <a:schemeClr val="accent1">
+                    <a:lumMod val="25000"/>
+                  </a:schemeClr>
+                </a:solidFill>
+                <a:ln w="50800" cap="flat" cmpd="sng" algn="ctr">
+                  <a:solidFill>
+                    <a:schemeClr val="tx1"/>
+                  </a:solidFill>
+                  <a:prstDash val="solid"/>
+                  <a:round/>
+                  <a:headEnd type="none" w="med" len="med"/>
+                  <a:tailEnd type="none" w="med" len="med"/>
+                </a:ln>
+                <a:effectLst/>
+              </p:spPr>
+              <p:txBody>
+                <a:bodyPr vert="horz" wrap="square" lIns="91440" tIns="45720" rIns="91440" bIns="45720" numCol="1" rtlCol="0" anchor="t" anchorCtr="0" compatLnSpc="1">
+                  <a:prstTxWarp prst="textNoShape">
+                    <a:avLst/>
+                  </a:prstTxWarp>
+                </a:bodyPr>
+                <a:lstStyle/>
+                <a:p>
+                  <a:pPr marL="0" marR="0" indent="0" algn="l" defTabSz="4389438" rtl="0" eaLnBrk="1" fontAlgn="base" latinLnBrk="0" hangingPunct="1">
+                    <a:lnSpc>
+                      <a:spcPct val="100000"/>
+                    </a:lnSpc>
+                    <a:spcBef>
+                      <a:spcPct val="0"/>
+                    </a:spcBef>
+                    <a:spcAft>
+                      <a:spcPct val="0"/>
+                    </a:spcAft>
+                    <a:buClrTx/>
+                    <a:buSzTx/>
+                    <a:buFontTx/>
+                    <a:buNone/>
+                    <a:tabLst/>
+                  </a:pPr>
+                  <a:endParaRPr kumimoji="0" lang="en-US" sz="1800" b="0" i="0" u="none" strike="noStrike" cap="none" normalizeH="0" baseline="0" dirty="0">
+                    <a:ln>
+                      <a:noFill/>
+                    </a:ln>
+                    <a:solidFill>
+                      <a:schemeClr val="tx1"/>
+                    </a:solidFill>
+                    <a:effectLst/>
+                    <a:latin typeface="Arial" charset="0"/>
+                    <a:cs typeface="Arial" charset="0"/>
+                  </a:endParaRPr>
+                </a:p>
+              </p:txBody>
+            </p:sp>
+            <p:sp>
+              <p:nvSpPr>
+                <p:cNvPr id="15380" name="Rectangle 15379">
+                  <a:extLst>
+                    <a:ext uri="{FF2B5EF4-FFF2-40B4-BE49-F238E27FC236}">
+                      <a16:creationId xmlns:a16="http://schemas.microsoft.com/office/drawing/2014/main" id="{738FF911-E63F-5D21-C096-62EDAFDCF6D9}"/>
+                    </a:ext>
+                  </a:extLst>
+                </p:cNvPr>
+                <p:cNvSpPr/>
+                <p:nvPr/>
+              </p:nvSpPr>
+              <p:spPr bwMode="auto">
+                <a:xfrm>
+                  <a:off x="29686436" y="16121903"/>
+                  <a:ext cx="2814638" cy="2166097"/>
+                </a:xfrm>
+                <a:prstGeom prst="rect">
+                  <a:avLst/>
+                </a:prstGeom>
+                <a:solidFill>
+                  <a:schemeClr val="accent1">
+                    <a:lumMod val="75000"/>
+                  </a:schemeClr>
+                </a:solidFill>
+                <a:ln w="50800" cap="flat" cmpd="sng" algn="ctr">
+                  <a:solidFill>
+                    <a:schemeClr val="tx1"/>
+                  </a:solidFill>
+                  <a:prstDash val="solid"/>
+                  <a:round/>
+                  <a:headEnd type="none" w="med" len="med"/>
+                  <a:tailEnd type="none" w="med" len="med"/>
+                </a:ln>
+                <a:effectLst/>
+              </p:spPr>
+              <p:txBody>
+                <a:bodyPr vert="horz" wrap="square" lIns="91440" tIns="45720" rIns="91440" bIns="45720" numCol="1" rtlCol="0" anchor="t" anchorCtr="0" compatLnSpc="1">
+                  <a:prstTxWarp prst="textNoShape">
+                    <a:avLst/>
+                  </a:prstTxWarp>
+                </a:bodyPr>
+                <a:lstStyle/>
+                <a:p>
+                  <a:pPr marL="0" marR="0" indent="0" algn="l" defTabSz="4389438" rtl="0" eaLnBrk="1" fontAlgn="base" latinLnBrk="0" hangingPunct="1">
+                    <a:lnSpc>
+                      <a:spcPct val="100000"/>
+                    </a:lnSpc>
+                    <a:spcBef>
+                      <a:spcPct val="0"/>
+                    </a:spcBef>
+                    <a:spcAft>
+                      <a:spcPct val="0"/>
+                    </a:spcAft>
+                    <a:buClrTx/>
+                    <a:buSzTx/>
+                    <a:buFontTx/>
+                    <a:buNone/>
+                    <a:tabLst/>
+                  </a:pPr>
+                  <a:endParaRPr kumimoji="0" lang="en-US" sz="1800" b="0" i="0" u="none" strike="noStrike" cap="none" normalizeH="0" baseline="0" dirty="0">
+                    <a:ln>
+                      <a:noFill/>
+                    </a:ln>
+                    <a:solidFill>
+                      <a:schemeClr val="tx1"/>
+                    </a:solidFill>
+                    <a:effectLst/>
+                    <a:latin typeface="Arial" charset="0"/>
+                    <a:cs typeface="Arial" charset="0"/>
+                  </a:endParaRPr>
+                </a:p>
+              </p:txBody>
+            </p:sp>
+            <p:cxnSp>
+              <p:nvCxnSpPr>
+                <p:cNvPr id="15381" name="Straight Connector 15380">
+                  <a:extLst>
+                    <a:ext uri="{FF2B5EF4-FFF2-40B4-BE49-F238E27FC236}">
+                      <a16:creationId xmlns:a16="http://schemas.microsoft.com/office/drawing/2014/main" id="{A5C14B6B-74F8-907A-F38C-9B44E05A9296}"/>
+                    </a:ext>
+                  </a:extLst>
+                </p:cNvPr>
+                <p:cNvCxnSpPr>
+                  <a:cxnSpLocks/>
+                  <a:stCxn id="15378" idx="2"/>
+                </p:cNvCxnSpPr>
+                <p:nvPr/>
+              </p:nvCxnSpPr>
+              <p:spPr bwMode="auto">
+                <a:xfrm>
+                  <a:off x="18674621" y="11800823"/>
+                  <a:ext cx="0" cy="4306140"/>
+                </a:xfrm>
+                <a:prstGeom prst="line">
+                  <a:avLst/>
+                </a:prstGeom>
+                <a:solidFill>
+                  <a:schemeClr val="accent1"/>
+                </a:solidFill>
+                <a:ln w="50800" cap="flat" cmpd="sng" algn="ctr">
+                  <a:solidFill>
+                    <a:schemeClr val="tx1"/>
+                  </a:solidFill>
+                  <a:prstDash val="dash"/>
+                  <a:round/>
+                  <a:headEnd type="none" w="med" len="med"/>
+                  <a:tailEnd type="none" w="med" len="med"/>
+                </a:ln>
+                <a:effectLst/>
+              </p:spPr>
+            </p:cxnSp>
+            <p:cxnSp>
+              <p:nvCxnSpPr>
+                <p:cNvPr id="15382" name="Straight Connector 15381">
+                  <a:extLst>
+                    <a:ext uri="{FF2B5EF4-FFF2-40B4-BE49-F238E27FC236}">
+                      <a16:creationId xmlns:a16="http://schemas.microsoft.com/office/drawing/2014/main" id="{D38EEA3F-AEFD-B37D-71DF-A268776436C2}"/>
+                    </a:ext>
+                  </a:extLst>
+                </p:cNvPr>
+                <p:cNvCxnSpPr>
+                  <a:cxnSpLocks/>
+                </p:cNvCxnSpPr>
+                <p:nvPr/>
+              </p:nvCxnSpPr>
+              <p:spPr bwMode="auto">
+                <a:xfrm>
+                  <a:off x="24890178" y="13968833"/>
+                  <a:ext cx="0" cy="2153070"/>
+                </a:xfrm>
+                <a:prstGeom prst="line">
+                  <a:avLst/>
+                </a:prstGeom>
+                <a:solidFill>
+                  <a:schemeClr val="accent1"/>
+                </a:solidFill>
+                <a:ln w="50800" cap="flat" cmpd="sng" algn="ctr">
+                  <a:solidFill>
+                    <a:schemeClr val="tx1"/>
+                  </a:solidFill>
+                  <a:prstDash val="dash"/>
+                  <a:round/>
+                  <a:headEnd type="none" w="med" len="med"/>
+                  <a:tailEnd type="none" w="med" len="med"/>
+                </a:ln>
+                <a:effectLst/>
+              </p:spPr>
+            </p:cxnSp>
+            <p:cxnSp>
+              <p:nvCxnSpPr>
+                <p:cNvPr id="15383" name="Straight Connector 15382">
+                  <a:extLst>
+                    <a:ext uri="{FF2B5EF4-FFF2-40B4-BE49-F238E27FC236}">
+                      <a16:creationId xmlns:a16="http://schemas.microsoft.com/office/drawing/2014/main" id="{EED90813-D59C-3A49-5E0A-AA6B93E3E5AB}"/>
+                    </a:ext>
+                  </a:extLst>
+                </p:cNvPr>
+                <p:cNvCxnSpPr>
+                  <a:cxnSpLocks/>
+                </p:cNvCxnSpPr>
+                <p:nvPr/>
+              </p:nvCxnSpPr>
+              <p:spPr bwMode="auto">
+                <a:xfrm>
+                  <a:off x="31104633" y="13968833"/>
+                  <a:ext cx="0" cy="2153070"/>
+                </a:xfrm>
+                <a:prstGeom prst="line">
+                  <a:avLst/>
+                </a:prstGeom>
+                <a:solidFill>
+                  <a:schemeClr val="accent1"/>
+                </a:solidFill>
+                <a:ln w="50800" cap="flat" cmpd="sng" algn="ctr">
+                  <a:solidFill>
+                    <a:schemeClr val="tx1"/>
+                  </a:solidFill>
+                  <a:prstDash val="dash"/>
+                  <a:round/>
+                  <a:headEnd type="none" w="med" len="med"/>
+                  <a:tailEnd type="none" w="med" len="med"/>
+                </a:ln>
+                <a:effectLst/>
+              </p:spPr>
+            </p:cxnSp>
+            <p:cxnSp>
+              <p:nvCxnSpPr>
+                <p:cNvPr id="15384" name="Straight Connector 15383">
+                  <a:extLst>
+                    <a:ext uri="{FF2B5EF4-FFF2-40B4-BE49-F238E27FC236}">
+                      <a16:creationId xmlns:a16="http://schemas.microsoft.com/office/drawing/2014/main" id="{6AE61E0A-E4D7-DF87-9189-E92187D744F5}"/>
+                    </a:ext>
+                  </a:extLst>
+                </p:cNvPr>
+                <p:cNvCxnSpPr/>
+                <p:nvPr/>
+              </p:nvCxnSpPr>
+              <p:spPr bwMode="auto">
+                <a:xfrm>
+                  <a:off x="18010414" y="16121903"/>
+                  <a:ext cx="1306286" cy="0"/>
+                </a:xfrm>
+                <a:prstGeom prst="line">
+                  <a:avLst/>
+                </a:prstGeom>
+                <a:solidFill>
+                  <a:schemeClr val="accent1"/>
+                </a:solidFill>
+                <a:ln w="50800" cap="flat" cmpd="sng" algn="ctr">
+                  <a:solidFill>
+                    <a:schemeClr val="tx1"/>
+                  </a:solidFill>
+                  <a:prstDash val="solid"/>
+                  <a:round/>
+                  <a:headEnd type="none" w="med" len="med"/>
+                  <a:tailEnd type="none" w="med" len="med"/>
+                </a:ln>
+                <a:effectLst/>
+              </p:spPr>
+            </p:cxnSp>
+            <p:cxnSp>
+              <p:nvCxnSpPr>
+                <p:cNvPr id="15386" name="Straight Connector 15385">
+                  <a:extLst>
+                    <a:ext uri="{FF2B5EF4-FFF2-40B4-BE49-F238E27FC236}">
+                      <a16:creationId xmlns:a16="http://schemas.microsoft.com/office/drawing/2014/main" id="{CDBA45C3-8908-8CA9-EDF5-DAFDAC1E2734}"/>
+                    </a:ext>
+                  </a:extLst>
+                </p:cNvPr>
+                <p:cNvCxnSpPr/>
+                <p:nvPr/>
+              </p:nvCxnSpPr>
+              <p:spPr bwMode="auto">
+                <a:xfrm>
+                  <a:off x="24237035" y="13968833"/>
+                  <a:ext cx="1306286" cy="0"/>
+                </a:xfrm>
+                <a:prstGeom prst="line">
+                  <a:avLst/>
+                </a:prstGeom>
+                <a:solidFill>
+                  <a:schemeClr val="accent1"/>
+                </a:solidFill>
+                <a:ln w="50800" cap="flat" cmpd="sng" algn="ctr">
+                  <a:solidFill>
+                    <a:schemeClr val="tx1"/>
+                  </a:solidFill>
+                  <a:prstDash val="solid"/>
+                  <a:round/>
+                  <a:headEnd type="none" w="med" len="med"/>
+                  <a:tailEnd type="none" w="med" len="med"/>
+                </a:ln>
+                <a:effectLst/>
+              </p:spPr>
+            </p:cxnSp>
+            <p:cxnSp>
+              <p:nvCxnSpPr>
+                <p:cNvPr id="15390" name="Straight Connector 15389">
+                  <a:extLst>
+                    <a:ext uri="{FF2B5EF4-FFF2-40B4-BE49-F238E27FC236}">
+                      <a16:creationId xmlns:a16="http://schemas.microsoft.com/office/drawing/2014/main" id="{0300AC7D-06E5-5E4F-0700-D6A7930474C3}"/>
+                    </a:ext>
+                  </a:extLst>
+                </p:cNvPr>
+                <p:cNvCxnSpPr/>
+                <p:nvPr/>
+              </p:nvCxnSpPr>
+              <p:spPr bwMode="auto">
+                <a:xfrm>
+                  <a:off x="30451490" y="13968833"/>
+                  <a:ext cx="1306286" cy="0"/>
+                </a:xfrm>
+                <a:prstGeom prst="line">
+                  <a:avLst/>
+                </a:prstGeom>
+                <a:solidFill>
+                  <a:schemeClr val="accent1"/>
+                </a:solidFill>
+                <a:ln w="50800" cap="flat" cmpd="sng" algn="ctr">
+                  <a:solidFill>
+                    <a:schemeClr val="tx1"/>
+                  </a:solidFill>
+                  <a:prstDash val="solid"/>
+                  <a:round/>
+                  <a:headEnd type="none" w="med" len="med"/>
+                  <a:tailEnd type="none" w="med" len="med"/>
+                </a:ln>
+                <a:effectLst/>
+              </p:spPr>
+            </p:cxnSp>
+            <p:sp>
+              <p:nvSpPr>
+                <p:cNvPr id="15391" name="Multiply 15390">
+                  <a:extLst>
+                    <a:ext uri="{FF2B5EF4-FFF2-40B4-BE49-F238E27FC236}">
+                      <a16:creationId xmlns:a16="http://schemas.microsoft.com/office/drawing/2014/main" id="{7958EA54-9A29-7CA7-7975-8A83FD94016A}"/>
+                    </a:ext>
+                  </a:extLst>
+                </p:cNvPr>
+                <p:cNvSpPr/>
+                <p:nvPr/>
+              </p:nvSpPr>
+              <p:spPr bwMode="auto">
+                <a:xfrm>
+                  <a:off x="30860534" y="11343623"/>
+                  <a:ext cx="457200" cy="457200"/>
+                </a:xfrm>
+                <a:prstGeom prst="mathMultiply">
+                  <a:avLst/>
+                </a:prstGeom>
+                <a:solidFill>
+                  <a:srgbClr val="72BFC5"/>
+                </a:solidFill>
+                <a:ln w="9525" cap="flat" cmpd="sng" algn="ctr">
+                  <a:solidFill>
+                    <a:schemeClr val="tx1"/>
+                  </a:solidFill>
+                  <a:prstDash val="solid"/>
+                  <a:round/>
+                  <a:headEnd type="none" w="med" len="med"/>
+                  <a:tailEnd type="none" w="med" len="med"/>
+                </a:ln>
+                <a:effectLst/>
+              </p:spPr>
+              <p:txBody>
+                <a:bodyPr vert="horz" wrap="square" lIns="91440" tIns="45720" rIns="91440" bIns="45720" numCol="1" rtlCol="0" anchor="t" anchorCtr="0" compatLnSpc="1">
+                  <a:prstTxWarp prst="textNoShape">
+                    <a:avLst/>
+                  </a:prstTxWarp>
+                </a:bodyPr>
+                <a:lstStyle/>
+                <a:p>
+                  <a:pPr marL="0" marR="0" indent="0" algn="l" defTabSz="4389438" rtl="0" eaLnBrk="1" fontAlgn="base" latinLnBrk="0" hangingPunct="1">
+                    <a:lnSpc>
+                      <a:spcPct val="100000"/>
+                    </a:lnSpc>
+                    <a:spcBef>
+                      <a:spcPct val="0"/>
+                    </a:spcBef>
+                    <a:spcAft>
+                      <a:spcPct val="0"/>
+                    </a:spcAft>
+                    <a:buClrTx/>
+                    <a:buSzTx/>
+                    <a:buFontTx/>
+                    <a:buNone/>
+                    <a:tabLst/>
+                  </a:pPr>
+                  <a:endParaRPr kumimoji="0" lang="en-US" sz="1800" b="0" i="0" u="none" strike="noStrike" cap="none" normalizeH="0" baseline="0" dirty="0">
+                    <a:ln>
+                      <a:noFill/>
+                    </a:ln>
+                    <a:solidFill>
+                      <a:schemeClr val="tx1"/>
+                    </a:solidFill>
+                    <a:effectLst/>
+                    <a:latin typeface="Arial" charset="0"/>
+                    <a:cs typeface="Arial" charset="0"/>
+                  </a:endParaRPr>
+                </a:p>
+              </p:txBody>
+            </p:sp>
+            <p:cxnSp>
+              <p:nvCxnSpPr>
+                <p:cNvPr id="15394" name="Straight Connector 15393">
+                  <a:extLst>
+                    <a:ext uri="{FF2B5EF4-FFF2-40B4-BE49-F238E27FC236}">
+                      <a16:creationId xmlns:a16="http://schemas.microsoft.com/office/drawing/2014/main" id="{54674706-B3BE-AE0E-67F6-02AC5532DCFC}"/>
+                    </a:ext>
+                  </a:extLst>
+                </p:cNvPr>
+                <p:cNvCxnSpPr/>
+                <p:nvPr/>
+              </p:nvCxnSpPr>
+              <p:spPr bwMode="auto">
+                <a:xfrm>
+                  <a:off x="17301874" y="9627476"/>
+                  <a:ext cx="2764221" cy="0"/>
+                </a:xfrm>
+                <a:prstGeom prst="line">
+                  <a:avLst/>
+                </a:prstGeom>
+                <a:solidFill>
+                  <a:schemeClr val="accent1"/>
+                </a:solidFill>
+                <a:ln w="101600" cap="flat" cmpd="sng" algn="ctr">
+                  <a:solidFill>
+                    <a:srgbClr val="D54C43"/>
+                  </a:solidFill>
+                  <a:prstDash val="solid"/>
+                  <a:round/>
+                  <a:headEnd type="none" w="med" len="med"/>
+                  <a:tailEnd type="none" w="med" len="med"/>
+                </a:ln>
+                <a:effectLst/>
+              </p:spPr>
+            </p:cxnSp>
+            <p:cxnSp>
+              <p:nvCxnSpPr>
+                <p:cNvPr id="15395" name="Straight Connector 15394">
+                  <a:extLst>
+                    <a:ext uri="{FF2B5EF4-FFF2-40B4-BE49-F238E27FC236}">
+                      <a16:creationId xmlns:a16="http://schemas.microsoft.com/office/drawing/2014/main" id="{E7D53ED5-EB1B-BF5F-67A1-A644E9215197}"/>
+                    </a:ext>
+                  </a:extLst>
+                </p:cNvPr>
+                <p:cNvCxnSpPr/>
+                <p:nvPr/>
+              </p:nvCxnSpPr>
+              <p:spPr bwMode="auto">
+                <a:xfrm>
+                  <a:off x="23513855" y="18210955"/>
+                  <a:ext cx="2764221" cy="0"/>
+                </a:xfrm>
+                <a:prstGeom prst="line">
+                  <a:avLst/>
+                </a:prstGeom>
+                <a:solidFill>
+                  <a:schemeClr val="accent1"/>
+                </a:solidFill>
+                <a:ln w="101600" cap="flat" cmpd="sng" algn="ctr">
+                  <a:solidFill>
+                    <a:srgbClr val="BB423A"/>
+                  </a:solidFill>
+                  <a:prstDash val="solid"/>
+                  <a:round/>
+                  <a:headEnd type="none" w="med" len="med"/>
+                  <a:tailEnd type="none" w="med" len="med"/>
+                </a:ln>
+                <a:effectLst/>
+              </p:spPr>
+            </p:cxnSp>
+            <p:cxnSp>
+              <p:nvCxnSpPr>
+                <p:cNvPr id="15396" name="Straight Connector 15395">
+                  <a:extLst>
+                    <a:ext uri="{FF2B5EF4-FFF2-40B4-BE49-F238E27FC236}">
+                      <a16:creationId xmlns:a16="http://schemas.microsoft.com/office/drawing/2014/main" id="{2E4D4A52-9D38-12EB-42B4-266D1CB829FB}"/>
+                    </a:ext>
+                  </a:extLst>
+                </p:cNvPr>
+                <p:cNvCxnSpPr/>
+                <p:nvPr/>
+              </p:nvCxnSpPr>
+              <p:spPr bwMode="auto">
+                <a:xfrm>
+                  <a:off x="29707024" y="18210954"/>
+                  <a:ext cx="2764221" cy="0"/>
+                </a:xfrm>
+                <a:prstGeom prst="line">
+                  <a:avLst/>
+                </a:prstGeom>
+                <a:solidFill>
+                  <a:schemeClr val="accent1"/>
+                </a:solidFill>
+                <a:ln w="101600" cap="flat" cmpd="sng" algn="ctr">
+                  <a:solidFill>
+                    <a:srgbClr val="EF544A"/>
+                  </a:solidFill>
+                  <a:prstDash val="solid"/>
+                  <a:round/>
+                  <a:headEnd type="none" w="med" len="med"/>
+                  <a:tailEnd type="none" w="med" len="med"/>
+                </a:ln>
+                <a:effectLst/>
+              </p:spPr>
+            </p:cxnSp>
+          </p:grpSp>
+          <p:sp>
+            <p:nvSpPr>
+              <p:cNvPr id="15375" name="TextBox 15374">
+                <a:extLst>
+                  <a:ext uri="{FF2B5EF4-FFF2-40B4-BE49-F238E27FC236}">
+                    <a16:creationId xmlns:a16="http://schemas.microsoft.com/office/drawing/2014/main" id="{0BC64C63-F78A-F04C-FE4C-A4D80531BC92}"/>
+                  </a:ext>
+                </a:extLst>
+              </p:cNvPr>
+              <p:cNvSpPr txBox="1"/>
+              <p:nvPr/>
+            </p:nvSpPr>
+            <p:spPr>
+              <a:xfrm>
+                <a:off x="18047432" y="18801292"/>
+                <a:ext cx="1273104" cy="553998"/>
+              </a:xfrm>
+              <a:prstGeom prst="rect">
+                <a:avLst/>
+              </a:prstGeom>
+              <a:noFill/>
+            </p:spPr>
+            <p:txBody>
+              <a:bodyPr wrap="none" rtlCol="0">
+                <a:spAutoFit/>
+              </a:bodyPr>
+              <a:lstStyle/>
+              <a:p>
+                <a:pPr algn="ctr"/>
+                <a:r>
+                  <a:rPr lang="en-US" sz="3000" dirty="0"/>
+                  <a:t>Friend</a:t>
+                </a:r>
+              </a:p>
+            </p:txBody>
+          </p:sp>
+          <p:sp>
+            <p:nvSpPr>
+              <p:cNvPr id="15376" name="TextBox 15375">
+                <a:extLst>
+                  <a:ext uri="{FF2B5EF4-FFF2-40B4-BE49-F238E27FC236}">
+                    <a16:creationId xmlns:a16="http://schemas.microsoft.com/office/drawing/2014/main" id="{FBEF236D-522B-2628-F975-CA94AF1884DB}"/>
+                  </a:ext>
+                </a:extLst>
+              </p:cNvPr>
+              <p:cNvSpPr txBox="1"/>
+              <p:nvPr/>
+            </p:nvSpPr>
+            <p:spPr>
+              <a:xfrm>
+                <a:off x="24016659" y="18801291"/>
+                <a:ext cx="1657826" cy="553998"/>
+              </a:xfrm>
+              <a:prstGeom prst="rect">
+                <a:avLst/>
+              </a:prstGeom>
+              <a:noFill/>
+            </p:spPr>
+            <p:txBody>
+              <a:bodyPr wrap="none" rtlCol="0">
+                <a:spAutoFit/>
+              </a:bodyPr>
+              <a:lstStyle/>
+              <a:p>
+                <a:pPr algn="ctr"/>
+                <a:r>
+                  <a:rPr lang="en-US" sz="3000" dirty="0"/>
+                  <a:t>Stranger</a:t>
+                </a:r>
+              </a:p>
+            </p:txBody>
+          </p:sp>
+          <p:sp>
+            <p:nvSpPr>
+              <p:cNvPr id="15377" name="TextBox 15376">
+                <a:extLst>
+                  <a:ext uri="{FF2B5EF4-FFF2-40B4-BE49-F238E27FC236}">
+                    <a16:creationId xmlns:a16="http://schemas.microsoft.com/office/drawing/2014/main" id="{CF3C8066-596C-D6E7-00D6-81439E767F87}"/>
+                  </a:ext>
+                </a:extLst>
+              </p:cNvPr>
+              <p:cNvSpPr txBox="1"/>
+              <p:nvPr/>
+            </p:nvSpPr>
+            <p:spPr>
+              <a:xfrm>
+                <a:off x="30153622" y="18933265"/>
+                <a:ext cx="1871025" cy="553998"/>
+              </a:xfrm>
+              <a:prstGeom prst="rect">
+                <a:avLst/>
+              </a:prstGeom>
+              <a:noFill/>
+            </p:spPr>
+            <p:txBody>
+              <a:bodyPr wrap="none" rtlCol="0">
+                <a:spAutoFit/>
+              </a:bodyPr>
+              <a:lstStyle/>
+              <a:p>
+                <a:pPr algn="ctr"/>
+                <a:r>
+                  <a:rPr lang="en-US" sz="3000" dirty="0"/>
+                  <a:t>Computer</a:t>
+                </a:r>
+              </a:p>
+            </p:txBody>
+          </p:sp>
+        </p:grpSp>
+        <p:sp>
+          <p:nvSpPr>
+            <p:cNvPr id="15370" name="Multiply 15369">
+              <a:extLst>
+                <a:ext uri="{FF2B5EF4-FFF2-40B4-BE49-F238E27FC236}">
+                  <a16:creationId xmlns:a16="http://schemas.microsoft.com/office/drawing/2014/main" id="{DA358199-D1DD-7679-4B19-9342C8CB9A71}"/>
+                </a:ext>
+              </a:extLst>
+            </p:cNvPr>
+            <p:cNvSpPr/>
+            <p:nvPr/>
+          </p:nvSpPr>
+          <p:spPr bwMode="auto">
+            <a:xfrm>
+              <a:off x="30860534" y="9433297"/>
+              <a:ext cx="457200" cy="457200"/>
+            </a:xfrm>
+            <a:prstGeom prst="mathMultiply">
+              <a:avLst/>
+            </a:prstGeom>
+            <a:solidFill>
+              <a:srgbClr val="72BFC5"/>
+            </a:solidFill>
+            <a:ln w="9525" cap="flat" cmpd="sng" algn="ctr">
+              <a:solidFill>
+                <a:schemeClr val="tx1"/>
+              </a:solidFill>
+              <a:prstDash val="solid"/>
+              <a:round/>
+              <a:headEnd type="none" w="med" len="med"/>
+              <a:tailEnd type="none" w="med" len="med"/>
+            </a:ln>
+            <a:effectLst/>
+          </p:spPr>
+          <p:txBody>
+            <a:bodyPr vert="horz" wrap="square" lIns="91440" tIns="45720" rIns="91440" bIns="45720" numCol="1" rtlCol="0" anchor="t" anchorCtr="0" compatLnSpc="1">
+              <a:prstTxWarp prst="textNoShape">
+                <a:avLst/>
+              </a:prstTxWarp>
+            </a:bodyPr>
+            <a:lstStyle/>
+            <a:p>
+              <a:pPr marL="0" marR="0" indent="0" algn="l" defTabSz="4389438" rtl="0" eaLnBrk="1" fontAlgn="base" latinLnBrk="0" hangingPunct="1">
+                <a:lnSpc>
+                  <a:spcPct val="100000"/>
+                </a:lnSpc>
+                <a:spcBef>
+                  <a:spcPct val="0"/>
+                </a:spcBef>
+                <a:spcAft>
+                  <a:spcPct val="0"/>
+                </a:spcAft>
+                <a:buClrTx/>
+                <a:buSzTx/>
+                <a:buFontTx/>
+                <a:buNone/>
+                <a:tabLst/>
+              </a:pPr>
+              <a:endParaRPr kumimoji="0" lang="en-US" sz="1800" b="0" i="0" u="none" strike="noStrike" cap="none" normalizeH="0" baseline="0" dirty="0">
+                <a:ln>
+                  <a:noFill/>
+                </a:ln>
+                <a:solidFill>
+                  <a:schemeClr val="tx1"/>
+                </a:solidFill>
+                <a:effectLst/>
+                <a:latin typeface="Arial" charset="0"/>
+                <a:cs typeface="Arial" charset="0"/>
+              </a:endParaRPr>
+            </a:p>
+          </p:txBody>
+        </p:sp>
+        <p:sp>
+          <p:nvSpPr>
+            <p:cNvPr id="15372" name="Multiply 15371">
+              <a:extLst>
+                <a:ext uri="{FF2B5EF4-FFF2-40B4-BE49-F238E27FC236}">
+                  <a16:creationId xmlns:a16="http://schemas.microsoft.com/office/drawing/2014/main" id="{4E9EE586-5835-F885-83DF-014FFC51F3BA}"/>
+                </a:ext>
+              </a:extLst>
+            </p:cNvPr>
+            <p:cNvSpPr/>
+            <p:nvPr/>
+          </p:nvSpPr>
+          <p:spPr bwMode="auto">
+            <a:xfrm>
+              <a:off x="24661578" y="11557807"/>
+              <a:ext cx="457200" cy="457200"/>
+            </a:xfrm>
+            <a:prstGeom prst="mathMultiply">
+              <a:avLst/>
+            </a:prstGeom>
+            <a:solidFill>
+              <a:srgbClr val="1D4647"/>
+            </a:solidFill>
+            <a:ln w="9525" cap="flat" cmpd="sng" algn="ctr">
+              <a:solidFill>
+                <a:schemeClr val="tx1"/>
+              </a:solidFill>
+              <a:prstDash val="solid"/>
+              <a:round/>
+              <a:headEnd type="none" w="med" len="med"/>
+              <a:tailEnd type="none" w="med" len="med"/>
+            </a:ln>
+            <a:effectLst/>
+          </p:spPr>
+          <p:txBody>
+            <a:bodyPr vert="horz" wrap="square" lIns="91440" tIns="45720" rIns="91440" bIns="45720" numCol="1" rtlCol="0" anchor="t" anchorCtr="0" compatLnSpc="1">
+              <a:prstTxWarp prst="textNoShape">
+                <a:avLst/>
+              </a:prstTxWarp>
+            </a:bodyPr>
+            <a:lstStyle/>
+            <a:p>
+              <a:pPr marL="0" marR="0" indent="0" algn="l" defTabSz="4389438" rtl="0" eaLnBrk="1" fontAlgn="base" latinLnBrk="0" hangingPunct="1">
+                <a:lnSpc>
+                  <a:spcPct val="100000"/>
+                </a:lnSpc>
+                <a:spcBef>
+                  <a:spcPct val="0"/>
+                </a:spcBef>
+                <a:spcAft>
+                  <a:spcPct val="0"/>
+                </a:spcAft>
+                <a:buClrTx/>
+                <a:buSzTx/>
+                <a:buFontTx/>
+                <a:buNone/>
+                <a:tabLst/>
+              </a:pPr>
+              <a:endParaRPr kumimoji="0" lang="en-US" sz="1800" b="0" i="0" u="none" strike="noStrike" cap="none" normalizeH="0" baseline="0" dirty="0">
+                <a:ln>
+                  <a:noFill/>
+                </a:ln>
+                <a:solidFill>
+                  <a:schemeClr val="tx1"/>
+                </a:solidFill>
+                <a:effectLst/>
+                <a:latin typeface="Arial" charset="0"/>
+                <a:cs typeface="Arial" charset="0"/>
+              </a:endParaRPr>
+            </a:p>
+          </p:txBody>
+        </p:sp>
+        <p:sp>
+          <p:nvSpPr>
+            <p:cNvPr id="15373" name="Multiply 15372">
+              <a:extLst>
+                <a:ext uri="{FF2B5EF4-FFF2-40B4-BE49-F238E27FC236}">
+                  <a16:creationId xmlns:a16="http://schemas.microsoft.com/office/drawing/2014/main" id="{9592DB17-062F-9AC2-E17E-BCFBD00FD8EC}"/>
+                </a:ext>
+              </a:extLst>
+            </p:cNvPr>
+            <p:cNvSpPr/>
+            <p:nvPr/>
+          </p:nvSpPr>
+          <p:spPr bwMode="auto">
+            <a:xfrm>
+              <a:off x="24661578" y="9433297"/>
+              <a:ext cx="457200" cy="457200"/>
+            </a:xfrm>
+            <a:prstGeom prst="mathMultiply">
+              <a:avLst/>
+            </a:prstGeom>
+            <a:solidFill>
+              <a:srgbClr val="1D4647"/>
+            </a:solidFill>
+            <a:ln w="9525" cap="flat" cmpd="sng" algn="ctr">
+              <a:solidFill>
+                <a:schemeClr val="tx1"/>
+              </a:solidFill>
+              <a:prstDash val="solid"/>
+              <a:round/>
+              <a:headEnd type="none" w="med" len="med"/>
+              <a:tailEnd type="none" w="med" len="med"/>
+            </a:ln>
+            <a:effectLst/>
+          </p:spPr>
+          <p:txBody>
+            <a:bodyPr vert="horz" wrap="square" lIns="91440" tIns="45720" rIns="91440" bIns="45720" numCol="1" rtlCol="0" anchor="t" anchorCtr="0" compatLnSpc="1">
+              <a:prstTxWarp prst="textNoShape">
+                <a:avLst/>
+              </a:prstTxWarp>
+            </a:bodyPr>
+            <a:lstStyle/>
+            <a:p>
+              <a:pPr marL="0" marR="0" indent="0" algn="l" defTabSz="4389438" rtl="0" eaLnBrk="1" fontAlgn="base" latinLnBrk="0" hangingPunct="1">
+                <a:lnSpc>
+                  <a:spcPct val="100000"/>
+                </a:lnSpc>
+                <a:spcBef>
+                  <a:spcPct val="0"/>
+                </a:spcBef>
+                <a:spcAft>
+                  <a:spcPct val="0"/>
+                </a:spcAft>
+                <a:buClrTx/>
+                <a:buSzTx/>
+                <a:buFontTx/>
+                <a:buNone/>
+                <a:tabLst/>
+              </a:pPr>
+              <a:endParaRPr kumimoji="0" lang="en-US" sz="1800" b="0" i="0" u="none" strike="noStrike" cap="none" normalizeH="0" baseline="0" dirty="0">
+                <a:ln>
+                  <a:noFill/>
+                </a:ln>
+                <a:solidFill>
+                  <a:schemeClr val="tx1"/>
+                </a:solidFill>
+                <a:effectLst/>
+                <a:latin typeface="Arial" charset="0"/>
+                <a:cs typeface="Arial" charset="0"/>
+              </a:endParaRPr>
+            </a:p>
+          </p:txBody>
+        </p:sp>
+      </p:grpSp>
+      <p:sp>
+        <p:nvSpPr>
+          <p:cNvPr id="15398" name="TextBox 15397">
+            <a:extLst>
+              <a:ext uri="{FF2B5EF4-FFF2-40B4-BE49-F238E27FC236}">
+                <a16:creationId xmlns:a16="http://schemas.microsoft.com/office/drawing/2014/main" id="{525D5E19-4B3C-AFF6-A95E-21518D8D505D}"/>
+              </a:ext>
+            </a:extLst>
+          </p:cNvPr>
+          <p:cNvSpPr txBox="1"/>
+          <p:nvPr/>
+        </p:nvSpPr>
+        <p:spPr>
+          <a:xfrm>
+            <a:off x="16332717" y="12097669"/>
+            <a:ext cx="12598832" cy="1077218"/>
+          </a:xfrm>
+          <a:prstGeom prst="rect">
+            <a:avLst/>
+          </a:prstGeom>
+          <a:noFill/>
+        </p:spPr>
+        <p:txBody>
+          <a:bodyPr wrap="square" lIns="91440" tIns="45720" rIns="91440" bIns="45720" anchor="t">
+            <a:spAutoFit/>
+          </a:bodyPr>
+          <a:lstStyle/>
+          <a:p>
+            <a:pPr algn="ctr"/>
+            <a:r>
+              <a:rPr lang="en-US" altLang="en-US" sz="3200" dirty="0">
+                <a:latin typeface="Helvetica"/>
+                <a:ea typeface="MS PGothic"/>
+              </a:rPr>
+              <a:t>Participants were asked to rate their closeness with the three partners on a 7-point Leichardt scale of overlapping circles </a:t>
+            </a:r>
+          </a:p>
+        </p:txBody>
+      </p:sp>
+      <p:sp>
+        <p:nvSpPr>
+          <p:cNvPr id="15404" name="TextBox 15403">
+            <a:extLst>
+              <a:ext uri="{FF2B5EF4-FFF2-40B4-BE49-F238E27FC236}">
+                <a16:creationId xmlns:a16="http://schemas.microsoft.com/office/drawing/2014/main" id="{BD337C5F-52FF-AD9F-5D33-EBF01D6419CF}"/>
+              </a:ext>
+            </a:extLst>
+          </p:cNvPr>
+          <p:cNvSpPr txBox="1"/>
+          <p:nvPr/>
+        </p:nvSpPr>
+        <p:spPr>
+          <a:xfrm>
+            <a:off x="15906068" y="11363259"/>
+            <a:ext cx="4965130" cy="553998"/>
+          </a:xfrm>
+          <a:prstGeom prst="rect">
+            <a:avLst/>
+          </a:prstGeom>
+          <a:noFill/>
+        </p:spPr>
+        <p:txBody>
+          <a:bodyPr wrap="square" lIns="91440" tIns="45720" rIns="91440" bIns="45720" anchor="t">
+            <a:spAutoFit/>
+          </a:bodyPr>
+          <a:lstStyle/>
+          <a:p>
+            <a:r>
+              <a:rPr lang="en-US" altLang="en-US" sz="1500" dirty="0">
+                <a:latin typeface="Helvetica"/>
+                <a:ea typeface="MS PGothic"/>
+              </a:rPr>
+              <a:t>Kyle M. </a:t>
+            </a:r>
+            <a:r>
+              <a:rPr lang="en-US" altLang="en-US" sz="1500" dirty="0" err="1">
+                <a:latin typeface="Helvetica"/>
+                <a:ea typeface="MS PGothic"/>
+              </a:rPr>
+              <a:t>Woosnam</a:t>
+            </a:r>
+            <a:r>
+              <a:rPr lang="en-US" altLang="en-US" sz="1500" dirty="0">
+                <a:latin typeface="Helvetica"/>
+                <a:ea typeface="MS PGothic"/>
+              </a:rPr>
+              <a:t>,</a:t>
+            </a:r>
+          </a:p>
+          <a:p>
+            <a:r>
+              <a:rPr lang="en-US" altLang="en-US" sz="1500" dirty="0">
+                <a:latin typeface="Helvetica"/>
+                <a:ea typeface="MS PGothic"/>
+              </a:rPr>
+              <a:t>The inclusion of other in the self (</a:t>
+            </a:r>
+            <a:r>
+              <a:rPr lang="en-US" altLang="en-US" sz="1500" dirty="0" err="1">
+                <a:latin typeface="Helvetica"/>
+                <a:ea typeface="MS PGothic"/>
+              </a:rPr>
+              <a:t>ios</a:t>
+            </a:r>
+            <a:r>
+              <a:rPr lang="en-US" altLang="en-US" sz="1500" dirty="0">
+                <a:latin typeface="Helvetica"/>
+                <a:ea typeface="MS PGothic"/>
+              </a:rPr>
+              <a:t>) scale,</a:t>
+            </a:r>
+          </a:p>
+        </p:txBody>
+      </p:sp>
+      <p:pic>
+        <p:nvPicPr>
+          <p:cNvPr id="15406" name="Picture 15405" descr="A brain with red and green arrows&#10;&#10;Description automatically generated">
+            <a:extLst>
+              <a:ext uri="{FF2B5EF4-FFF2-40B4-BE49-F238E27FC236}">
+                <a16:creationId xmlns:a16="http://schemas.microsoft.com/office/drawing/2014/main" id="{E3B38FA0-F543-267E-327B-2987860A8B8B}"/>
+              </a:ext>
+            </a:extLst>
+          </p:cNvPr>
+          <p:cNvPicPr>
+            <a:picLocks noChangeAspect="1"/>
+          </p:cNvPicPr>
+          <p:nvPr/>
+        </p:nvPicPr>
+        <p:blipFill>
+          <a:blip r:embed="rId6">
+            <a:extLst>
+              <a:ext uri="{28A0092B-C50C-407E-A947-70E740481C1C}">
+                <a14:useLocalDpi xmlns:a14="http://schemas.microsoft.com/office/drawing/2010/main" val="0"/>
+              </a:ext>
+            </a:extLst>
+          </a:blip>
+          <a:stretch>
+            <a:fillRect/>
+          </a:stretch>
+        </p:blipFill>
+        <p:spPr>
+          <a:xfrm>
+            <a:off x="31495021" y="5969483"/>
+            <a:ext cx="4495800" cy="5003800"/>
+          </a:xfrm>
+          <a:prstGeom prst="rect">
+            <a:avLst/>
+          </a:prstGeom>
+        </p:spPr>
+      </p:pic>
+      <p:pic>
+        <p:nvPicPr>
+          <p:cNvPr id="15418" name="Picture 15417" descr="A graph with red dots&#10;&#10;Description automatically generated">
+            <a:extLst>
+              <a:ext uri="{FF2B5EF4-FFF2-40B4-BE49-F238E27FC236}">
+                <a16:creationId xmlns:a16="http://schemas.microsoft.com/office/drawing/2014/main" id="{7AE9EF6F-6375-47A1-D536-FAF3F473B789}"/>
+              </a:ext>
+            </a:extLst>
+          </p:cNvPr>
+          <p:cNvPicPr>
+            <a:picLocks noChangeAspect="1"/>
+          </p:cNvPicPr>
+          <p:nvPr/>
+        </p:nvPicPr>
+        <p:blipFill rotWithShape="1">
+          <a:blip r:embed="rId7">
+            <a:extLst>
+              <a:ext uri="{28A0092B-C50C-407E-A947-70E740481C1C}">
+                <a14:useLocalDpi xmlns:a14="http://schemas.microsoft.com/office/drawing/2010/main" val="0"/>
+              </a:ext>
+            </a:extLst>
+          </a:blip>
+          <a:srcRect l="3131"/>
+          <a:stretch/>
+        </p:blipFill>
+        <p:spPr>
+          <a:xfrm>
+            <a:off x="37850303" y="6924524"/>
+            <a:ext cx="5314627" cy="4025900"/>
+          </a:xfrm>
+          <a:prstGeom prst="rect">
+            <a:avLst/>
+          </a:prstGeom>
+        </p:spPr>
+      </p:pic>
+      <p:sp>
+        <p:nvSpPr>
+          <p:cNvPr id="15420" name="TextBox 15419">
+            <a:extLst>
+              <a:ext uri="{FF2B5EF4-FFF2-40B4-BE49-F238E27FC236}">
+                <a16:creationId xmlns:a16="http://schemas.microsoft.com/office/drawing/2014/main" id="{069F462D-BFA5-DA6C-F8A4-6704B438B9AA}"/>
+              </a:ext>
+            </a:extLst>
+          </p:cNvPr>
+          <p:cNvSpPr txBox="1"/>
+          <p:nvPr/>
+        </p:nvSpPr>
+        <p:spPr>
+          <a:xfrm>
+            <a:off x="40013832" y="11300491"/>
+            <a:ext cx="867545" cy="553998"/>
+          </a:xfrm>
+          <a:prstGeom prst="rect">
+            <a:avLst/>
+          </a:prstGeom>
+          <a:noFill/>
+        </p:spPr>
+        <p:txBody>
+          <a:bodyPr wrap="none" rtlCol="0">
+            <a:spAutoFit/>
+          </a:bodyPr>
+          <a:lstStyle/>
+          <a:p>
+            <a:r>
+              <a:rPr lang="en-US" sz="3000" dirty="0"/>
+              <a:t>Age</a:t>
+            </a:r>
+          </a:p>
+        </p:txBody>
+      </p:sp>
+      <p:sp>
+        <p:nvSpPr>
+          <p:cNvPr id="15421" name="TextBox 15420">
+            <a:extLst>
+              <a:ext uri="{FF2B5EF4-FFF2-40B4-BE49-F238E27FC236}">
+                <a16:creationId xmlns:a16="http://schemas.microsoft.com/office/drawing/2014/main" id="{59CD90FF-DE48-3105-3B98-B005986E4B75}"/>
+              </a:ext>
+            </a:extLst>
+          </p:cNvPr>
+          <p:cNvSpPr txBox="1"/>
+          <p:nvPr/>
+        </p:nvSpPr>
+        <p:spPr>
+          <a:xfrm>
+            <a:off x="38571055" y="5735782"/>
+            <a:ext cx="184731" cy="369332"/>
+          </a:xfrm>
+          <a:prstGeom prst="rect">
+            <a:avLst/>
+          </a:prstGeom>
+          <a:noFill/>
+        </p:spPr>
+        <p:txBody>
+          <a:bodyPr wrap="none" rtlCol="0">
+            <a:spAutoFit/>
+          </a:bodyPr>
+          <a:lstStyle/>
+          <a:p>
+            <a:endParaRPr lang="en-US" dirty="0"/>
+          </a:p>
+        </p:txBody>
+      </p:sp>
     </p:spTree>
+  </p:cSld>
+  <p:clrMapOvr>
+    <a:masterClrMapping/>
+  </p:clrMapOvr>
+</p:sld>
+</file>
+
+<file path=ppt/slides/slide2.xml><?xml version="1.0" encoding="utf-8"?>
+<p:sld xmlns:a="http://schemas.openxmlformats.org/drawingml/2006/main" xmlns:r="http://schemas.openxmlformats.org/officeDocument/2006/relationships" xmlns:p="http://schemas.openxmlformats.org/presentationml/2006/main">
+  <p:cSld>
+    <p:spTree>
+      <p:nvGrpSpPr>
+        <p:cNvPr id="1" name=""/>
+        <p:cNvGrpSpPr/>
+        <p:nvPr/>
+      </p:nvGrpSpPr>
+      <p:grpSpPr>
+        <a:xfrm>
+          <a:off x="0" y="0"/>
+          <a:ext cx="0" cy="0"/>
+          <a:chOff x="0" y="0"/>
+          <a:chExt cx="0" cy="0"/>
+        </a:xfrm>
+      </p:grpSpPr>
+      <p:grpSp>
+        <p:nvGrpSpPr>
+          <p:cNvPr id="32" name="Group 31">
+            <a:extLst>
+              <a:ext uri="{FF2B5EF4-FFF2-40B4-BE49-F238E27FC236}">
+                <a16:creationId xmlns:a16="http://schemas.microsoft.com/office/drawing/2014/main" id="{0EBE959C-E76F-26F5-3977-7B65ACC54BDB}"/>
+              </a:ext>
+            </a:extLst>
+          </p:cNvPr>
+          <p:cNvGrpSpPr/>
+          <p:nvPr/>
+        </p:nvGrpSpPr>
+        <p:grpSpPr>
+          <a:xfrm>
+            <a:off x="17267302" y="5300010"/>
+            <a:ext cx="15233772" cy="14187253"/>
+            <a:chOff x="17267302" y="5300010"/>
+            <a:chExt cx="15233772" cy="14187253"/>
+          </a:xfrm>
+        </p:grpSpPr>
+        <p:grpSp>
+          <p:nvGrpSpPr>
+            <p:cNvPr id="28" name="Group 27">
+              <a:extLst>
+                <a:ext uri="{FF2B5EF4-FFF2-40B4-BE49-F238E27FC236}">
+                  <a16:creationId xmlns:a16="http://schemas.microsoft.com/office/drawing/2014/main" id="{ACEBC02A-D17E-C673-FF14-B2A7299CD29C}"/>
+                </a:ext>
+              </a:extLst>
+            </p:cNvPr>
+            <p:cNvGrpSpPr/>
+            <p:nvPr/>
+          </p:nvGrpSpPr>
+          <p:grpSpPr>
+            <a:xfrm>
+              <a:off x="17267302" y="5300010"/>
+              <a:ext cx="15233772" cy="14187253"/>
+              <a:chOff x="17267302" y="5300010"/>
+              <a:chExt cx="15233772" cy="14187253"/>
+            </a:xfrm>
+          </p:grpSpPr>
+          <p:grpSp>
+            <p:nvGrpSpPr>
+              <p:cNvPr id="24" name="Group 23">
+                <a:extLst>
+                  <a:ext uri="{FF2B5EF4-FFF2-40B4-BE49-F238E27FC236}">
+                    <a16:creationId xmlns:a16="http://schemas.microsoft.com/office/drawing/2014/main" id="{E7764D22-FEE2-29D5-77DA-B49907121EA6}"/>
+                  </a:ext>
+                </a:extLst>
+              </p:cNvPr>
+              <p:cNvGrpSpPr/>
+              <p:nvPr/>
+            </p:nvGrpSpPr>
+            <p:grpSpPr>
+              <a:xfrm>
+                <a:off x="17267302" y="5300010"/>
+                <a:ext cx="15233772" cy="12987990"/>
+                <a:chOff x="17267302" y="5300010"/>
+                <a:chExt cx="15233772" cy="12987990"/>
+              </a:xfrm>
+            </p:grpSpPr>
+            <p:sp>
+              <p:nvSpPr>
+                <p:cNvPr id="3" name="Rectangle 2">
+                  <a:extLst>
+                    <a:ext uri="{FF2B5EF4-FFF2-40B4-BE49-F238E27FC236}">
+                      <a16:creationId xmlns:a16="http://schemas.microsoft.com/office/drawing/2014/main" id="{34AFE783-B325-8261-217E-BB4718A01EFE}"/>
+                    </a:ext>
+                  </a:extLst>
+                </p:cNvPr>
+                <p:cNvSpPr/>
+                <p:nvPr/>
+              </p:nvSpPr>
+              <p:spPr bwMode="auto">
+                <a:xfrm>
+                  <a:off x="17267302" y="5300010"/>
+                  <a:ext cx="2814638" cy="6500813"/>
+                </a:xfrm>
+                <a:prstGeom prst="rect">
+                  <a:avLst/>
+                </a:prstGeom>
+                <a:solidFill>
+                  <a:schemeClr val="accent1">
+                    <a:lumMod val="50000"/>
+                  </a:schemeClr>
+                </a:solidFill>
+                <a:ln w="50800" cap="flat" cmpd="sng" algn="ctr">
+                  <a:solidFill>
+                    <a:schemeClr val="tx1"/>
+                  </a:solidFill>
+                  <a:prstDash val="solid"/>
+                  <a:round/>
+                  <a:headEnd type="none" w="med" len="med"/>
+                  <a:tailEnd type="none" w="med" len="med"/>
+                </a:ln>
+                <a:effectLst/>
+              </p:spPr>
+              <p:txBody>
+                <a:bodyPr vert="horz" wrap="square" lIns="91440" tIns="45720" rIns="91440" bIns="45720" numCol="1" rtlCol="0" anchor="t" anchorCtr="0" compatLnSpc="1">
+                  <a:prstTxWarp prst="textNoShape">
+                    <a:avLst/>
+                  </a:prstTxWarp>
+                </a:bodyPr>
+                <a:lstStyle/>
+                <a:p>
+                  <a:pPr marL="0" marR="0" indent="0" algn="l" defTabSz="4389438" rtl="0" eaLnBrk="1" fontAlgn="base" latinLnBrk="0" hangingPunct="1">
+                    <a:lnSpc>
+                      <a:spcPct val="100000"/>
+                    </a:lnSpc>
+                    <a:spcBef>
+                      <a:spcPct val="0"/>
+                    </a:spcBef>
+                    <a:spcAft>
+                      <a:spcPct val="0"/>
+                    </a:spcAft>
+                    <a:buClrTx/>
+                    <a:buSzTx/>
+                    <a:buFontTx/>
+                    <a:buNone/>
+                    <a:tabLst/>
+                  </a:pPr>
+                  <a:endParaRPr kumimoji="0" lang="en-US" sz="1800" b="0" i="0" u="none" strike="noStrike" cap="none" normalizeH="0" baseline="0" dirty="0">
+                    <a:ln>
+                      <a:noFill/>
+                    </a:ln>
+                    <a:solidFill>
+                      <a:schemeClr val="tx1"/>
+                    </a:solidFill>
+                    <a:effectLst/>
+                    <a:latin typeface="Arial" charset="0"/>
+                    <a:cs typeface="Arial" charset="0"/>
+                  </a:endParaRPr>
+                </a:p>
+              </p:txBody>
+            </p:sp>
+            <p:sp>
+              <p:nvSpPr>
+                <p:cNvPr id="4" name="Rectangle 3">
+                  <a:extLst>
+                    <a:ext uri="{FF2B5EF4-FFF2-40B4-BE49-F238E27FC236}">
+                      <a16:creationId xmlns:a16="http://schemas.microsoft.com/office/drawing/2014/main" id="{D50A6255-10BD-F4E5-2627-B4138E01A997}"/>
+                    </a:ext>
+                  </a:extLst>
+                </p:cNvPr>
+                <p:cNvSpPr/>
+                <p:nvPr/>
+              </p:nvSpPr>
+              <p:spPr bwMode="auto">
+                <a:xfrm>
+                  <a:off x="23482859" y="16121903"/>
+                  <a:ext cx="2814638" cy="2166097"/>
+                </a:xfrm>
+                <a:prstGeom prst="rect">
+                  <a:avLst/>
+                </a:prstGeom>
+                <a:solidFill>
+                  <a:schemeClr val="accent1">
+                    <a:lumMod val="25000"/>
+                  </a:schemeClr>
+                </a:solidFill>
+                <a:ln w="50800" cap="flat" cmpd="sng" algn="ctr">
+                  <a:solidFill>
+                    <a:schemeClr val="tx1"/>
+                  </a:solidFill>
+                  <a:prstDash val="solid"/>
+                  <a:round/>
+                  <a:headEnd type="none" w="med" len="med"/>
+                  <a:tailEnd type="none" w="med" len="med"/>
+                </a:ln>
+                <a:effectLst/>
+              </p:spPr>
+              <p:txBody>
+                <a:bodyPr vert="horz" wrap="square" lIns="91440" tIns="45720" rIns="91440" bIns="45720" numCol="1" rtlCol="0" anchor="t" anchorCtr="0" compatLnSpc="1">
+                  <a:prstTxWarp prst="textNoShape">
+                    <a:avLst/>
+                  </a:prstTxWarp>
+                </a:bodyPr>
+                <a:lstStyle/>
+                <a:p>
+                  <a:pPr marL="0" marR="0" indent="0" algn="l" defTabSz="4389438" rtl="0" eaLnBrk="1" fontAlgn="base" latinLnBrk="0" hangingPunct="1">
+                    <a:lnSpc>
+                      <a:spcPct val="100000"/>
+                    </a:lnSpc>
+                    <a:spcBef>
+                      <a:spcPct val="0"/>
+                    </a:spcBef>
+                    <a:spcAft>
+                      <a:spcPct val="0"/>
+                    </a:spcAft>
+                    <a:buClrTx/>
+                    <a:buSzTx/>
+                    <a:buFontTx/>
+                    <a:buNone/>
+                    <a:tabLst/>
+                  </a:pPr>
+                  <a:endParaRPr kumimoji="0" lang="en-US" sz="1800" b="0" i="0" u="none" strike="noStrike" cap="none" normalizeH="0" baseline="0" dirty="0">
+                    <a:ln>
+                      <a:noFill/>
+                    </a:ln>
+                    <a:solidFill>
+                      <a:schemeClr val="tx1"/>
+                    </a:solidFill>
+                    <a:effectLst/>
+                    <a:latin typeface="Arial" charset="0"/>
+                    <a:cs typeface="Arial" charset="0"/>
+                  </a:endParaRPr>
+                </a:p>
+              </p:txBody>
+            </p:sp>
+            <p:sp>
+              <p:nvSpPr>
+                <p:cNvPr id="5" name="Rectangle 4">
+                  <a:extLst>
+                    <a:ext uri="{FF2B5EF4-FFF2-40B4-BE49-F238E27FC236}">
+                      <a16:creationId xmlns:a16="http://schemas.microsoft.com/office/drawing/2014/main" id="{D5E1BAF2-0B1B-D6EB-D2FA-146E5C5CA6F3}"/>
+                    </a:ext>
+                  </a:extLst>
+                </p:cNvPr>
+                <p:cNvSpPr/>
+                <p:nvPr/>
+              </p:nvSpPr>
+              <p:spPr bwMode="auto">
+                <a:xfrm>
+                  <a:off x="29686436" y="16121903"/>
+                  <a:ext cx="2814638" cy="2166097"/>
+                </a:xfrm>
+                <a:prstGeom prst="rect">
+                  <a:avLst/>
+                </a:prstGeom>
+                <a:solidFill>
+                  <a:schemeClr val="accent1">
+                    <a:lumMod val="75000"/>
+                  </a:schemeClr>
+                </a:solidFill>
+                <a:ln w="50800" cap="flat" cmpd="sng" algn="ctr">
+                  <a:solidFill>
+                    <a:schemeClr val="tx1"/>
+                  </a:solidFill>
+                  <a:prstDash val="solid"/>
+                  <a:round/>
+                  <a:headEnd type="none" w="med" len="med"/>
+                  <a:tailEnd type="none" w="med" len="med"/>
+                </a:ln>
+                <a:effectLst/>
+              </p:spPr>
+              <p:txBody>
+                <a:bodyPr vert="horz" wrap="square" lIns="91440" tIns="45720" rIns="91440" bIns="45720" numCol="1" rtlCol="0" anchor="t" anchorCtr="0" compatLnSpc="1">
+                  <a:prstTxWarp prst="textNoShape">
+                    <a:avLst/>
+                  </a:prstTxWarp>
+                </a:bodyPr>
+                <a:lstStyle/>
+                <a:p>
+                  <a:pPr marL="0" marR="0" indent="0" algn="l" defTabSz="4389438" rtl="0" eaLnBrk="1" fontAlgn="base" latinLnBrk="0" hangingPunct="1">
+                    <a:lnSpc>
+                      <a:spcPct val="100000"/>
+                    </a:lnSpc>
+                    <a:spcBef>
+                      <a:spcPct val="0"/>
+                    </a:spcBef>
+                    <a:spcAft>
+                      <a:spcPct val="0"/>
+                    </a:spcAft>
+                    <a:buClrTx/>
+                    <a:buSzTx/>
+                    <a:buFontTx/>
+                    <a:buNone/>
+                    <a:tabLst/>
+                  </a:pPr>
+                  <a:endParaRPr kumimoji="0" lang="en-US" sz="1800" b="0" i="0" u="none" strike="noStrike" cap="none" normalizeH="0" baseline="0" dirty="0">
+                    <a:ln>
+                      <a:noFill/>
+                    </a:ln>
+                    <a:solidFill>
+                      <a:schemeClr val="tx1"/>
+                    </a:solidFill>
+                    <a:effectLst/>
+                    <a:latin typeface="Arial" charset="0"/>
+                    <a:cs typeface="Arial" charset="0"/>
+                  </a:endParaRPr>
+                </a:p>
+              </p:txBody>
+            </p:sp>
+            <p:cxnSp>
+              <p:nvCxnSpPr>
+                <p:cNvPr id="7" name="Straight Connector 6">
+                  <a:extLst>
+                    <a:ext uri="{FF2B5EF4-FFF2-40B4-BE49-F238E27FC236}">
+                      <a16:creationId xmlns:a16="http://schemas.microsoft.com/office/drawing/2014/main" id="{BC5D78FB-3804-D93A-C859-BB3859DEF4C8}"/>
+                    </a:ext>
+                  </a:extLst>
+                </p:cNvPr>
+                <p:cNvCxnSpPr>
+                  <a:cxnSpLocks/>
+                  <a:stCxn id="3" idx="2"/>
+                </p:cNvCxnSpPr>
+                <p:nvPr/>
+              </p:nvCxnSpPr>
+              <p:spPr bwMode="auto">
+                <a:xfrm>
+                  <a:off x="18674621" y="11800823"/>
+                  <a:ext cx="0" cy="4306140"/>
+                </a:xfrm>
+                <a:prstGeom prst="line">
+                  <a:avLst/>
+                </a:prstGeom>
+                <a:solidFill>
+                  <a:schemeClr val="accent1"/>
+                </a:solidFill>
+                <a:ln w="50800" cap="flat" cmpd="sng" algn="ctr">
+                  <a:solidFill>
+                    <a:schemeClr val="tx1"/>
+                  </a:solidFill>
+                  <a:prstDash val="dash"/>
+                  <a:round/>
+                  <a:headEnd type="none" w="med" len="med"/>
+                  <a:tailEnd type="none" w="med" len="med"/>
+                </a:ln>
+                <a:effectLst/>
+              </p:spPr>
+            </p:cxnSp>
+            <p:cxnSp>
+              <p:nvCxnSpPr>
+                <p:cNvPr id="9" name="Straight Connector 8">
+                  <a:extLst>
+                    <a:ext uri="{FF2B5EF4-FFF2-40B4-BE49-F238E27FC236}">
+                      <a16:creationId xmlns:a16="http://schemas.microsoft.com/office/drawing/2014/main" id="{3323A30F-EB0B-0BC4-120E-17A180965A1E}"/>
+                    </a:ext>
+                  </a:extLst>
+                </p:cNvPr>
+                <p:cNvCxnSpPr>
+                  <a:cxnSpLocks/>
+                </p:cNvCxnSpPr>
+                <p:nvPr/>
+              </p:nvCxnSpPr>
+              <p:spPr bwMode="auto">
+                <a:xfrm>
+                  <a:off x="24890178" y="13968833"/>
+                  <a:ext cx="0" cy="2153070"/>
+                </a:xfrm>
+                <a:prstGeom prst="line">
+                  <a:avLst/>
+                </a:prstGeom>
+                <a:solidFill>
+                  <a:schemeClr val="accent1"/>
+                </a:solidFill>
+                <a:ln w="50800" cap="flat" cmpd="sng" algn="ctr">
+                  <a:solidFill>
+                    <a:schemeClr val="tx1"/>
+                  </a:solidFill>
+                  <a:prstDash val="dash"/>
+                  <a:round/>
+                  <a:headEnd type="none" w="med" len="med"/>
+                  <a:tailEnd type="none" w="med" len="med"/>
+                </a:ln>
+                <a:effectLst/>
+              </p:spPr>
+            </p:cxnSp>
+            <p:cxnSp>
+              <p:nvCxnSpPr>
+                <p:cNvPr id="11" name="Straight Connector 10">
+                  <a:extLst>
+                    <a:ext uri="{FF2B5EF4-FFF2-40B4-BE49-F238E27FC236}">
+                      <a16:creationId xmlns:a16="http://schemas.microsoft.com/office/drawing/2014/main" id="{094A9A13-7EB7-FB0C-327F-5A30EB7CA157}"/>
+                    </a:ext>
+                  </a:extLst>
+                </p:cNvPr>
+                <p:cNvCxnSpPr>
+                  <a:cxnSpLocks/>
+                </p:cNvCxnSpPr>
+                <p:nvPr/>
+              </p:nvCxnSpPr>
+              <p:spPr bwMode="auto">
+                <a:xfrm>
+                  <a:off x="31104633" y="13968833"/>
+                  <a:ext cx="0" cy="2153070"/>
+                </a:xfrm>
+                <a:prstGeom prst="line">
+                  <a:avLst/>
+                </a:prstGeom>
+                <a:solidFill>
+                  <a:schemeClr val="accent1"/>
+                </a:solidFill>
+                <a:ln w="50800" cap="flat" cmpd="sng" algn="ctr">
+                  <a:solidFill>
+                    <a:schemeClr val="tx1"/>
+                  </a:solidFill>
+                  <a:prstDash val="dash"/>
+                  <a:round/>
+                  <a:headEnd type="none" w="med" len="med"/>
+                  <a:tailEnd type="none" w="med" len="med"/>
+                </a:ln>
+                <a:effectLst/>
+              </p:spPr>
+            </p:cxnSp>
+            <p:cxnSp>
+              <p:nvCxnSpPr>
+                <p:cNvPr id="13" name="Straight Connector 12">
+                  <a:extLst>
+                    <a:ext uri="{FF2B5EF4-FFF2-40B4-BE49-F238E27FC236}">
+                      <a16:creationId xmlns:a16="http://schemas.microsoft.com/office/drawing/2014/main" id="{E6E28200-C2D5-D487-234B-026AA92A5BE8}"/>
+                    </a:ext>
+                  </a:extLst>
+                </p:cNvPr>
+                <p:cNvCxnSpPr/>
+                <p:nvPr/>
+              </p:nvCxnSpPr>
+              <p:spPr bwMode="auto">
+                <a:xfrm>
+                  <a:off x="18010414" y="16121903"/>
+                  <a:ext cx="1306286" cy="0"/>
+                </a:xfrm>
+                <a:prstGeom prst="line">
+                  <a:avLst/>
+                </a:prstGeom>
+                <a:solidFill>
+                  <a:schemeClr val="accent1"/>
+                </a:solidFill>
+                <a:ln w="50800" cap="flat" cmpd="sng" algn="ctr">
+                  <a:solidFill>
+                    <a:schemeClr val="tx1"/>
+                  </a:solidFill>
+                  <a:prstDash val="solid"/>
+                  <a:round/>
+                  <a:headEnd type="none" w="med" len="med"/>
+                  <a:tailEnd type="none" w="med" len="med"/>
+                </a:ln>
+                <a:effectLst/>
+              </p:spPr>
+            </p:cxnSp>
+            <p:cxnSp>
+              <p:nvCxnSpPr>
+                <p:cNvPr id="14" name="Straight Connector 13">
+                  <a:extLst>
+                    <a:ext uri="{FF2B5EF4-FFF2-40B4-BE49-F238E27FC236}">
+                      <a16:creationId xmlns:a16="http://schemas.microsoft.com/office/drawing/2014/main" id="{F1CF9C76-ADBF-601C-5AB7-771E0AFB6314}"/>
+                    </a:ext>
+                  </a:extLst>
+                </p:cNvPr>
+                <p:cNvCxnSpPr/>
+                <p:nvPr/>
+              </p:nvCxnSpPr>
+              <p:spPr bwMode="auto">
+                <a:xfrm>
+                  <a:off x="24237035" y="13968833"/>
+                  <a:ext cx="1306286" cy="0"/>
+                </a:xfrm>
+                <a:prstGeom prst="line">
+                  <a:avLst/>
+                </a:prstGeom>
+                <a:solidFill>
+                  <a:schemeClr val="accent1"/>
+                </a:solidFill>
+                <a:ln w="50800" cap="flat" cmpd="sng" algn="ctr">
+                  <a:solidFill>
+                    <a:schemeClr val="tx1"/>
+                  </a:solidFill>
+                  <a:prstDash val="solid"/>
+                  <a:round/>
+                  <a:headEnd type="none" w="med" len="med"/>
+                  <a:tailEnd type="none" w="med" len="med"/>
+                </a:ln>
+                <a:effectLst/>
+              </p:spPr>
+            </p:cxnSp>
+            <p:cxnSp>
+              <p:nvCxnSpPr>
+                <p:cNvPr id="15" name="Straight Connector 14">
+                  <a:extLst>
+                    <a:ext uri="{FF2B5EF4-FFF2-40B4-BE49-F238E27FC236}">
+                      <a16:creationId xmlns:a16="http://schemas.microsoft.com/office/drawing/2014/main" id="{00D94689-F8BC-3D65-2CD3-9F5CE68EF435}"/>
+                    </a:ext>
+                  </a:extLst>
+                </p:cNvPr>
+                <p:cNvCxnSpPr/>
+                <p:nvPr/>
+              </p:nvCxnSpPr>
+              <p:spPr bwMode="auto">
+                <a:xfrm>
+                  <a:off x="30451490" y="13968833"/>
+                  <a:ext cx="1306286" cy="0"/>
+                </a:xfrm>
+                <a:prstGeom prst="line">
+                  <a:avLst/>
+                </a:prstGeom>
+                <a:solidFill>
+                  <a:schemeClr val="accent1"/>
+                </a:solidFill>
+                <a:ln w="50800" cap="flat" cmpd="sng" algn="ctr">
+                  <a:solidFill>
+                    <a:schemeClr val="tx1"/>
+                  </a:solidFill>
+                  <a:prstDash val="solid"/>
+                  <a:round/>
+                  <a:headEnd type="none" w="med" len="med"/>
+                  <a:tailEnd type="none" w="med" len="med"/>
+                </a:ln>
+                <a:effectLst/>
+              </p:spPr>
+            </p:cxnSp>
+            <p:sp>
+              <p:nvSpPr>
+                <p:cNvPr id="18" name="Multiply 17">
+                  <a:extLst>
+                    <a:ext uri="{FF2B5EF4-FFF2-40B4-BE49-F238E27FC236}">
+                      <a16:creationId xmlns:a16="http://schemas.microsoft.com/office/drawing/2014/main" id="{B86E0230-0B5B-2336-900D-8F8ED1CB2692}"/>
+                    </a:ext>
+                  </a:extLst>
+                </p:cNvPr>
+                <p:cNvSpPr/>
+                <p:nvPr/>
+              </p:nvSpPr>
+              <p:spPr bwMode="auto">
+                <a:xfrm>
+                  <a:off x="30860534" y="11343623"/>
+                  <a:ext cx="457200" cy="457200"/>
+                </a:xfrm>
+                <a:prstGeom prst="mathMultiply">
+                  <a:avLst/>
+                </a:prstGeom>
+                <a:solidFill>
+                  <a:srgbClr val="72BFC5"/>
+                </a:solidFill>
+                <a:ln w="9525" cap="flat" cmpd="sng" algn="ctr">
+                  <a:solidFill>
+                    <a:schemeClr val="tx1"/>
+                  </a:solidFill>
+                  <a:prstDash val="solid"/>
+                  <a:round/>
+                  <a:headEnd type="none" w="med" len="med"/>
+                  <a:tailEnd type="none" w="med" len="med"/>
+                </a:ln>
+                <a:effectLst/>
+              </p:spPr>
+              <p:txBody>
+                <a:bodyPr vert="horz" wrap="square" lIns="91440" tIns="45720" rIns="91440" bIns="45720" numCol="1" rtlCol="0" anchor="t" anchorCtr="0" compatLnSpc="1">
+                  <a:prstTxWarp prst="textNoShape">
+                    <a:avLst/>
+                  </a:prstTxWarp>
+                </a:bodyPr>
+                <a:lstStyle/>
+                <a:p>
+                  <a:pPr marL="0" marR="0" indent="0" algn="l" defTabSz="4389438" rtl="0" eaLnBrk="1" fontAlgn="base" latinLnBrk="0" hangingPunct="1">
+                    <a:lnSpc>
+                      <a:spcPct val="100000"/>
+                    </a:lnSpc>
+                    <a:spcBef>
+                      <a:spcPct val="0"/>
+                    </a:spcBef>
+                    <a:spcAft>
+                      <a:spcPct val="0"/>
+                    </a:spcAft>
+                    <a:buClrTx/>
+                    <a:buSzTx/>
+                    <a:buFontTx/>
+                    <a:buNone/>
+                    <a:tabLst/>
+                  </a:pPr>
+                  <a:endParaRPr kumimoji="0" lang="en-US" sz="1800" b="0" i="0" u="none" strike="noStrike" cap="none" normalizeH="0" baseline="0" dirty="0">
+                    <a:ln>
+                      <a:noFill/>
+                    </a:ln>
+                    <a:solidFill>
+                      <a:schemeClr val="tx1"/>
+                    </a:solidFill>
+                    <a:effectLst/>
+                    <a:latin typeface="Arial" charset="0"/>
+                    <a:cs typeface="Arial" charset="0"/>
+                  </a:endParaRPr>
+                </a:p>
+              </p:txBody>
+            </p:sp>
+            <p:cxnSp>
+              <p:nvCxnSpPr>
+                <p:cNvPr id="21" name="Straight Connector 20">
+                  <a:extLst>
+                    <a:ext uri="{FF2B5EF4-FFF2-40B4-BE49-F238E27FC236}">
+                      <a16:creationId xmlns:a16="http://schemas.microsoft.com/office/drawing/2014/main" id="{3DC4BE0B-55CC-21CC-228D-4D58C6F81768}"/>
+                    </a:ext>
+                  </a:extLst>
+                </p:cNvPr>
+                <p:cNvCxnSpPr/>
+                <p:nvPr/>
+              </p:nvCxnSpPr>
+              <p:spPr bwMode="auto">
+                <a:xfrm>
+                  <a:off x="17301874" y="9627476"/>
+                  <a:ext cx="2764221" cy="0"/>
+                </a:xfrm>
+                <a:prstGeom prst="line">
+                  <a:avLst/>
+                </a:prstGeom>
+                <a:solidFill>
+                  <a:schemeClr val="accent1"/>
+                </a:solidFill>
+                <a:ln w="101600" cap="flat" cmpd="sng" algn="ctr">
+                  <a:solidFill>
+                    <a:srgbClr val="D54C43"/>
+                  </a:solidFill>
+                  <a:prstDash val="solid"/>
+                  <a:round/>
+                  <a:headEnd type="none" w="med" len="med"/>
+                  <a:tailEnd type="none" w="med" len="med"/>
+                </a:ln>
+                <a:effectLst/>
+              </p:spPr>
+            </p:cxnSp>
+            <p:cxnSp>
+              <p:nvCxnSpPr>
+                <p:cNvPr id="22" name="Straight Connector 21">
+                  <a:extLst>
+                    <a:ext uri="{FF2B5EF4-FFF2-40B4-BE49-F238E27FC236}">
+                      <a16:creationId xmlns:a16="http://schemas.microsoft.com/office/drawing/2014/main" id="{A1CE6A5D-1BCC-6244-27A6-2E6271A4DF81}"/>
+                    </a:ext>
+                  </a:extLst>
+                </p:cNvPr>
+                <p:cNvCxnSpPr/>
+                <p:nvPr/>
+              </p:nvCxnSpPr>
+              <p:spPr bwMode="auto">
+                <a:xfrm>
+                  <a:off x="23513855" y="18210955"/>
+                  <a:ext cx="2764221" cy="0"/>
+                </a:xfrm>
+                <a:prstGeom prst="line">
+                  <a:avLst/>
+                </a:prstGeom>
+                <a:solidFill>
+                  <a:schemeClr val="accent1"/>
+                </a:solidFill>
+                <a:ln w="101600" cap="flat" cmpd="sng" algn="ctr">
+                  <a:solidFill>
+                    <a:srgbClr val="BB423A"/>
+                  </a:solidFill>
+                  <a:prstDash val="solid"/>
+                  <a:round/>
+                  <a:headEnd type="none" w="med" len="med"/>
+                  <a:tailEnd type="none" w="med" len="med"/>
+                </a:ln>
+                <a:effectLst/>
+              </p:spPr>
+            </p:cxnSp>
+            <p:cxnSp>
+              <p:nvCxnSpPr>
+                <p:cNvPr id="23" name="Straight Connector 22">
+                  <a:extLst>
+                    <a:ext uri="{FF2B5EF4-FFF2-40B4-BE49-F238E27FC236}">
+                      <a16:creationId xmlns:a16="http://schemas.microsoft.com/office/drawing/2014/main" id="{ABE1D573-BA3F-6844-0338-2311984CF2CB}"/>
+                    </a:ext>
+                  </a:extLst>
+                </p:cNvPr>
+                <p:cNvCxnSpPr/>
+                <p:nvPr/>
+              </p:nvCxnSpPr>
+              <p:spPr bwMode="auto">
+                <a:xfrm>
+                  <a:off x="29707024" y="18210954"/>
+                  <a:ext cx="2764221" cy="0"/>
+                </a:xfrm>
+                <a:prstGeom prst="line">
+                  <a:avLst/>
+                </a:prstGeom>
+                <a:solidFill>
+                  <a:schemeClr val="accent1"/>
+                </a:solidFill>
+                <a:ln w="101600" cap="flat" cmpd="sng" algn="ctr">
+                  <a:solidFill>
+                    <a:srgbClr val="EF544A"/>
+                  </a:solidFill>
+                  <a:prstDash val="solid"/>
+                  <a:round/>
+                  <a:headEnd type="none" w="med" len="med"/>
+                  <a:tailEnd type="none" w="med" len="med"/>
+                </a:ln>
+                <a:effectLst/>
+              </p:spPr>
+            </p:cxnSp>
+          </p:grpSp>
+          <p:sp>
+            <p:nvSpPr>
+              <p:cNvPr id="25" name="TextBox 24">
+                <a:extLst>
+                  <a:ext uri="{FF2B5EF4-FFF2-40B4-BE49-F238E27FC236}">
+                    <a16:creationId xmlns:a16="http://schemas.microsoft.com/office/drawing/2014/main" id="{E82CD6FC-4197-B0F5-EB5E-7B8778E1D9B9}"/>
+                  </a:ext>
+                </a:extLst>
+              </p:cNvPr>
+              <p:cNvSpPr txBox="1"/>
+              <p:nvPr/>
+            </p:nvSpPr>
+            <p:spPr>
+              <a:xfrm>
+                <a:off x="18047432" y="18801292"/>
+                <a:ext cx="1273104" cy="553998"/>
+              </a:xfrm>
+              <a:prstGeom prst="rect">
+                <a:avLst/>
+              </a:prstGeom>
+              <a:noFill/>
+            </p:spPr>
+            <p:txBody>
+              <a:bodyPr wrap="none" rtlCol="0">
+                <a:spAutoFit/>
+              </a:bodyPr>
+              <a:lstStyle/>
+              <a:p>
+                <a:pPr algn="ctr"/>
+                <a:r>
+                  <a:rPr lang="en-US" sz="3000" dirty="0"/>
+                  <a:t>Friend</a:t>
+                </a:r>
+              </a:p>
+            </p:txBody>
+          </p:sp>
+          <p:sp>
+            <p:nvSpPr>
+              <p:cNvPr id="26" name="TextBox 25">
+                <a:extLst>
+                  <a:ext uri="{FF2B5EF4-FFF2-40B4-BE49-F238E27FC236}">
+                    <a16:creationId xmlns:a16="http://schemas.microsoft.com/office/drawing/2014/main" id="{5FEAD576-740F-E665-EA00-7C83C68CAF0A}"/>
+                  </a:ext>
+                </a:extLst>
+              </p:cNvPr>
+              <p:cNvSpPr txBox="1"/>
+              <p:nvPr/>
+            </p:nvSpPr>
+            <p:spPr>
+              <a:xfrm>
+                <a:off x="24016659" y="18801291"/>
+                <a:ext cx="1657826" cy="553998"/>
+              </a:xfrm>
+              <a:prstGeom prst="rect">
+                <a:avLst/>
+              </a:prstGeom>
+              <a:noFill/>
+            </p:spPr>
+            <p:txBody>
+              <a:bodyPr wrap="none" rtlCol="0">
+                <a:spAutoFit/>
+              </a:bodyPr>
+              <a:lstStyle/>
+              <a:p>
+                <a:pPr algn="ctr"/>
+                <a:r>
+                  <a:rPr lang="en-US" sz="3000" dirty="0"/>
+                  <a:t>Stranger</a:t>
+                </a:r>
+              </a:p>
+            </p:txBody>
+          </p:sp>
+          <p:sp>
+            <p:nvSpPr>
+              <p:cNvPr id="27" name="TextBox 26">
+                <a:extLst>
+                  <a:ext uri="{FF2B5EF4-FFF2-40B4-BE49-F238E27FC236}">
+                    <a16:creationId xmlns:a16="http://schemas.microsoft.com/office/drawing/2014/main" id="{484B7075-BCE9-5433-D5D4-988B3A796C17}"/>
+                  </a:ext>
+                </a:extLst>
+              </p:cNvPr>
+              <p:cNvSpPr txBox="1"/>
+              <p:nvPr/>
+            </p:nvSpPr>
+            <p:spPr>
+              <a:xfrm>
+                <a:off x="30153622" y="18933265"/>
+                <a:ext cx="1871025" cy="553998"/>
+              </a:xfrm>
+              <a:prstGeom prst="rect">
+                <a:avLst/>
+              </a:prstGeom>
+              <a:noFill/>
+            </p:spPr>
+            <p:txBody>
+              <a:bodyPr wrap="none" rtlCol="0">
+                <a:spAutoFit/>
+              </a:bodyPr>
+              <a:lstStyle/>
+              <a:p>
+                <a:pPr algn="ctr"/>
+                <a:r>
+                  <a:rPr lang="en-US" sz="3000" dirty="0"/>
+                  <a:t>Computer</a:t>
+                </a:r>
+              </a:p>
+            </p:txBody>
+          </p:sp>
+        </p:grpSp>
+        <p:sp>
+          <p:nvSpPr>
+            <p:cNvPr id="29" name="Multiply 28">
+              <a:extLst>
+                <a:ext uri="{FF2B5EF4-FFF2-40B4-BE49-F238E27FC236}">
+                  <a16:creationId xmlns:a16="http://schemas.microsoft.com/office/drawing/2014/main" id="{E2544558-A55A-31AE-362C-DC229ED9A5F8}"/>
+                </a:ext>
+              </a:extLst>
+            </p:cNvPr>
+            <p:cNvSpPr/>
+            <p:nvPr/>
+          </p:nvSpPr>
+          <p:spPr bwMode="auto">
+            <a:xfrm>
+              <a:off x="30860534" y="9433297"/>
+              <a:ext cx="457200" cy="457200"/>
+            </a:xfrm>
+            <a:prstGeom prst="mathMultiply">
+              <a:avLst/>
+            </a:prstGeom>
+            <a:solidFill>
+              <a:srgbClr val="72BFC5"/>
+            </a:solidFill>
+            <a:ln w="9525" cap="flat" cmpd="sng" algn="ctr">
+              <a:solidFill>
+                <a:schemeClr val="tx1"/>
+              </a:solidFill>
+              <a:prstDash val="solid"/>
+              <a:round/>
+              <a:headEnd type="none" w="med" len="med"/>
+              <a:tailEnd type="none" w="med" len="med"/>
+            </a:ln>
+            <a:effectLst/>
+          </p:spPr>
+          <p:txBody>
+            <a:bodyPr vert="horz" wrap="square" lIns="91440" tIns="45720" rIns="91440" bIns="45720" numCol="1" rtlCol="0" anchor="t" anchorCtr="0" compatLnSpc="1">
+              <a:prstTxWarp prst="textNoShape">
+                <a:avLst/>
+              </a:prstTxWarp>
+            </a:bodyPr>
+            <a:lstStyle/>
+            <a:p>
+              <a:pPr marL="0" marR="0" indent="0" algn="l" defTabSz="4389438" rtl="0" eaLnBrk="1" fontAlgn="base" latinLnBrk="0" hangingPunct="1">
+                <a:lnSpc>
+                  <a:spcPct val="100000"/>
+                </a:lnSpc>
+                <a:spcBef>
+                  <a:spcPct val="0"/>
+                </a:spcBef>
+                <a:spcAft>
+                  <a:spcPct val="0"/>
+                </a:spcAft>
+                <a:buClrTx/>
+                <a:buSzTx/>
+                <a:buFontTx/>
+                <a:buNone/>
+                <a:tabLst/>
+              </a:pPr>
+              <a:endParaRPr kumimoji="0" lang="en-US" sz="1800" b="0" i="0" u="none" strike="noStrike" cap="none" normalizeH="0" baseline="0" dirty="0">
+                <a:ln>
+                  <a:noFill/>
+                </a:ln>
+                <a:solidFill>
+                  <a:schemeClr val="tx1"/>
+                </a:solidFill>
+                <a:effectLst/>
+                <a:latin typeface="Arial" charset="0"/>
+                <a:cs typeface="Arial" charset="0"/>
+              </a:endParaRPr>
+            </a:p>
+          </p:txBody>
+        </p:sp>
+        <p:sp>
+          <p:nvSpPr>
+            <p:cNvPr id="30" name="Multiply 29">
+              <a:extLst>
+                <a:ext uri="{FF2B5EF4-FFF2-40B4-BE49-F238E27FC236}">
+                  <a16:creationId xmlns:a16="http://schemas.microsoft.com/office/drawing/2014/main" id="{49EFB42A-BDC5-EDFE-30E2-3E0854186CEB}"/>
+                </a:ext>
+              </a:extLst>
+            </p:cNvPr>
+            <p:cNvSpPr/>
+            <p:nvPr/>
+          </p:nvSpPr>
+          <p:spPr bwMode="auto">
+            <a:xfrm>
+              <a:off x="24661578" y="11557807"/>
+              <a:ext cx="457200" cy="457200"/>
+            </a:xfrm>
+            <a:prstGeom prst="mathMultiply">
+              <a:avLst/>
+            </a:prstGeom>
+            <a:solidFill>
+              <a:srgbClr val="1D4647"/>
+            </a:solidFill>
+            <a:ln w="9525" cap="flat" cmpd="sng" algn="ctr">
+              <a:solidFill>
+                <a:schemeClr val="tx1"/>
+              </a:solidFill>
+              <a:prstDash val="solid"/>
+              <a:round/>
+              <a:headEnd type="none" w="med" len="med"/>
+              <a:tailEnd type="none" w="med" len="med"/>
+            </a:ln>
+            <a:effectLst/>
+          </p:spPr>
+          <p:txBody>
+            <a:bodyPr vert="horz" wrap="square" lIns="91440" tIns="45720" rIns="91440" bIns="45720" numCol="1" rtlCol="0" anchor="t" anchorCtr="0" compatLnSpc="1">
+              <a:prstTxWarp prst="textNoShape">
+                <a:avLst/>
+              </a:prstTxWarp>
+            </a:bodyPr>
+            <a:lstStyle/>
+            <a:p>
+              <a:pPr marL="0" marR="0" indent="0" algn="l" defTabSz="4389438" rtl="0" eaLnBrk="1" fontAlgn="base" latinLnBrk="0" hangingPunct="1">
+                <a:lnSpc>
+                  <a:spcPct val="100000"/>
+                </a:lnSpc>
+                <a:spcBef>
+                  <a:spcPct val="0"/>
+                </a:spcBef>
+                <a:spcAft>
+                  <a:spcPct val="0"/>
+                </a:spcAft>
+                <a:buClrTx/>
+                <a:buSzTx/>
+                <a:buFontTx/>
+                <a:buNone/>
+                <a:tabLst/>
+              </a:pPr>
+              <a:endParaRPr kumimoji="0" lang="en-US" sz="1800" b="0" i="0" u="none" strike="noStrike" cap="none" normalizeH="0" baseline="0" dirty="0">
+                <a:ln>
+                  <a:noFill/>
+                </a:ln>
+                <a:solidFill>
+                  <a:schemeClr val="tx1"/>
+                </a:solidFill>
+                <a:effectLst/>
+                <a:latin typeface="Arial" charset="0"/>
+                <a:cs typeface="Arial" charset="0"/>
+              </a:endParaRPr>
+            </a:p>
+          </p:txBody>
+        </p:sp>
+        <p:sp>
+          <p:nvSpPr>
+            <p:cNvPr id="31" name="Multiply 30">
+              <a:extLst>
+                <a:ext uri="{FF2B5EF4-FFF2-40B4-BE49-F238E27FC236}">
+                  <a16:creationId xmlns:a16="http://schemas.microsoft.com/office/drawing/2014/main" id="{1F137DB2-67E6-E506-A500-26336390C594}"/>
+                </a:ext>
+              </a:extLst>
+            </p:cNvPr>
+            <p:cNvSpPr/>
+            <p:nvPr/>
+          </p:nvSpPr>
+          <p:spPr bwMode="auto">
+            <a:xfrm>
+              <a:off x="24661578" y="9433297"/>
+              <a:ext cx="457200" cy="457200"/>
+            </a:xfrm>
+            <a:prstGeom prst="mathMultiply">
+              <a:avLst/>
+            </a:prstGeom>
+            <a:solidFill>
+              <a:srgbClr val="1D4647"/>
+            </a:solidFill>
+            <a:ln w="9525" cap="flat" cmpd="sng" algn="ctr">
+              <a:solidFill>
+                <a:schemeClr val="tx1"/>
+              </a:solidFill>
+              <a:prstDash val="solid"/>
+              <a:round/>
+              <a:headEnd type="none" w="med" len="med"/>
+              <a:tailEnd type="none" w="med" len="med"/>
+            </a:ln>
+            <a:effectLst/>
+          </p:spPr>
+          <p:txBody>
+            <a:bodyPr vert="horz" wrap="square" lIns="91440" tIns="45720" rIns="91440" bIns="45720" numCol="1" rtlCol="0" anchor="t" anchorCtr="0" compatLnSpc="1">
+              <a:prstTxWarp prst="textNoShape">
+                <a:avLst/>
+              </a:prstTxWarp>
+            </a:bodyPr>
+            <a:lstStyle/>
+            <a:p>
+              <a:pPr marL="0" marR="0" indent="0" algn="l" defTabSz="4389438" rtl="0" eaLnBrk="1" fontAlgn="base" latinLnBrk="0" hangingPunct="1">
+                <a:lnSpc>
+                  <a:spcPct val="100000"/>
+                </a:lnSpc>
+                <a:spcBef>
+                  <a:spcPct val="0"/>
+                </a:spcBef>
+                <a:spcAft>
+                  <a:spcPct val="0"/>
+                </a:spcAft>
+                <a:buClrTx/>
+                <a:buSzTx/>
+                <a:buFontTx/>
+                <a:buNone/>
+                <a:tabLst/>
+              </a:pPr>
+              <a:endParaRPr kumimoji="0" lang="en-US" sz="1800" b="0" i="0" u="none" strike="noStrike" cap="none" normalizeH="0" baseline="0" dirty="0">
+                <a:ln>
+                  <a:noFill/>
+                </a:ln>
+                <a:solidFill>
+                  <a:schemeClr val="tx1"/>
+                </a:solidFill>
+                <a:effectLst/>
+                <a:latin typeface="Arial" charset="0"/>
+                <a:cs typeface="Arial" charset="0"/>
+              </a:endParaRPr>
+            </a:p>
+          </p:txBody>
+        </p:sp>
+      </p:grpSp>
+    </p:spTree>
+    <p:extLst>
+      <p:ext uri="{BB962C8B-B14F-4D97-AF65-F5344CB8AC3E}">
+        <p14:creationId xmlns:p14="http://schemas.microsoft.com/office/powerpoint/2010/main" val="2447354785"/>
+      </p:ext>
+    </p:extLst>
   </p:cSld>
   <p:clrMapOvr>
     <a:masterClrMapping/>

--- a/SFN/2023_SFN_trust.pptx
+++ b/SFN/2023_SFN_trust.pptx
@@ -4390,6 +4390,42 @@
           <a:chExt cx="0" cy="0"/>
         </a:xfrm>
       </p:grpSpPr>
+      <p:pic>
+        <p:nvPicPr>
+          <p:cNvPr id="15424" name="Picture 15423" descr="A close-up of a brain&#10;&#10;Description automatically generated">
+            <a:extLst>
+              <a:ext uri="{FF2B5EF4-FFF2-40B4-BE49-F238E27FC236}">
+                <a16:creationId xmlns:a16="http://schemas.microsoft.com/office/drawing/2014/main" id="{CC6419D2-DC29-B910-B6FA-A6DAC7775AD7}"/>
+              </a:ext>
+            </a:extLst>
+          </p:cNvPr>
+          <p:cNvPicPr>
+            <a:picLocks noChangeAspect="1"/>
+          </p:cNvPicPr>
+          <p:nvPr/>
+        </p:nvPicPr>
+        <p:blipFill>
+          <a:blip r:embed="rId3">
+            <a:extLst>
+              <a:ext uri="{28A0092B-C50C-407E-A947-70E740481C1C}">
+                <a14:useLocalDpi xmlns:a14="http://schemas.microsoft.com/office/drawing/2010/main" val="0"/>
+              </a:ext>
+            </a:extLst>
+          </a:blip>
+          <a:stretch>
+            <a:fillRect/>
+          </a:stretch>
+        </p:blipFill>
+        <p:spPr>
+          <a:xfrm>
+            <a:off x="23357979" y="25006432"/>
+            <a:ext cx="6457795" cy="5596080"/>
+          </a:xfrm>
+          <a:prstGeom prst="rect">
+            <a:avLst/>
+          </a:prstGeom>
+        </p:spPr>
+      </p:pic>
       <p:sp>
         <p:nvSpPr>
           <p:cNvPr id="15399" name="Rectangle 15398">
@@ -5642,212 +5678,6 @@
           </a:p>
         </p:txBody>
       </p:sp>
-      <p:pic>
-        <p:nvPicPr>
-          <p:cNvPr id="15389" name="Picture 10060"/>
-          <p:cNvPicPr>
-            <a:picLocks noChangeAspect="1" noChangeArrowheads="1"/>
-          </p:cNvPicPr>
-          <p:nvPr/>
-        </p:nvPicPr>
-        <p:blipFill>
-          <a:blip>
-            <a:extLst>
-              <a:ext uri="{28A0092B-C50C-407E-A947-70E740481C1C}">
-                <a14:useLocalDpi xmlns:a14="http://schemas.microsoft.com/office/drawing/2010/main" val="0"/>
-              </a:ext>
-            </a:extLst>
-          </a:blip>
-          <a:srcRect/>
-          <a:stretch>
-            <a:fillRect/>
-          </a:stretch>
-        </p:blipFill>
-        <p:spPr bwMode="auto">
-          <a:xfrm>
-            <a:off x="494755" y="252918"/>
-            <a:ext cx="3037143" cy="3396805"/>
-          </a:xfrm>
-          <a:prstGeom prst="rect">
-            <a:avLst/>
-          </a:prstGeom>
-          <a:noFill/>
-          <a:ln>
-            <a:noFill/>
-          </a:ln>
-          <a:extLst>
-            <a:ext uri="{909E8E84-426E-40DD-AFC4-6F175D3DCCD1}">
-              <a14:hiddenFill xmlns:a14="http://schemas.microsoft.com/office/drawing/2010/main">
-                <a:solidFill>
-                  <a:srgbClr val="FFFFFF"/>
-                </a:solidFill>
-              </a14:hiddenFill>
-            </a:ext>
-            <a:ext uri="{91240B29-F687-4F45-9708-019B960494DF}">
-              <a14:hiddenLine xmlns:a14="http://schemas.microsoft.com/office/drawing/2010/main" w="9525">
-                <a:solidFill>
-                  <a:srgbClr val="000000"/>
-                </a:solidFill>
-                <a:miter lim="800000"/>
-                <a:headEnd/>
-                <a:tailEnd/>
-              </a14:hiddenLine>
-            </a:ext>
-          </a:extLst>
-        </p:spPr>
-      </p:pic>
-      <p:sp>
-        <p:nvSpPr>
-          <p:cNvPr id="15400" name="Rectangle 54"/>
-          <p:cNvSpPr>
-            <a:spLocks noChangeArrowheads="1"/>
-          </p:cNvSpPr>
-          <p:nvPr/>
-        </p:nvSpPr>
-        <p:spPr bwMode="auto">
-          <a:xfrm>
-            <a:off x="30676645" y="24531321"/>
-            <a:ext cx="12928282" cy="6994361"/>
-          </a:xfrm>
-          <a:prstGeom prst="rect">
-            <a:avLst/>
-          </a:prstGeom>
-          <a:noFill/>
-          <a:ln w="76200">
-            <a:solidFill>
-              <a:srgbClr val="C00000"/>
-            </a:solidFill>
-            <a:miter lim="800000"/>
-            <a:headEnd/>
-            <a:tailEnd/>
-          </a:ln>
-          <a:extLst>
-            <a:ext uri="{909E8E84-426E-40DD-AFC4-6F175D3DCCD1}">
-              <a14:hiddenFill xmlns:a14="http://schemas.microsoft.com/office/drawing/2010/main">
-                <a:solidFill>
-                  <a:srgbClr val="FFFFFF"/>
-                </a:solidFill>
-              </a14:hiddenFill>
-            </a:ext>
-          </a:extLst>
-        </p:spPr>
-        <p:txBody>
-          <a:bodyPr wrap="none" lIns="81274" tIns="40638" rIns="81274" bIns="40638" anchor="ctr"/>
-          <a:lstStyle>
-            <a:lvl1pPr>
-              <a:defRPr sz="2400">
-                <a:solidFill>
-                  <a:schemeClr val="tx1"/>
-                </a:solidFill>
-                <a:latin typeface="Helvetica" panose="020B0604020202020204" pitchFamily="34" charset="0"/>
-                <a:ea typeface="MS PGothic" panose="020B0600070205080204" pitchFamily="34" charset="-128"/>
-              </a:defRPr>
-            </a:lvl1pPr>
-            <a:lvl2pPr marL="742950" indent="-285750">
-              <a:defRPr sz="2400">
-                <a:solidFill>
-                  <a:schemeClr val="tx1"/>
-                </a:solidFill>
-                <a:latin typeface="Helvetica" panose="020B0604020202020204" pitchFamily="34" charset="0"/>
-                <a:ea typeface="MS PGothic" panose="020B0600070205080204" pitchFamily="34" charset="-128"/>
-              </a:defRPr>
-            </a:lvl2pPr>
-            <a:lvl3pPr marL="1143000" indent="-228600">
-              <a:defRPr sz="2400">
-                <a:solidFill>
-                  <a:schemeClr val="tx1"/>
-                </a:solidFill>
-                <a:latin typeface="Helvetica" panose="020B0604020202020204" pitchFamily="34" charset="0"/>
-                <a:ea typeface="MS PGothic" panose="020B0600070205080204" pitchFamily="34" charset="-128"/>
-              </a:defRPr>
-            </a:lvl3pPr>
-            <a:lvl4pPr marL="1600200" indent="-228600">
-              <a:defRPr sz="2400">
-                <a:solidFill>
-                  <a:schemeClr val="tx1"/>
-                </a:solidFill>
-                <a:latin typeface="Helvetica" panose="020B0604020202020204" pitchFamily="34" charset="0"/>
-                <a:ea typeface="MS PGothic" panose="020B0600070205080204" pitchFamily="34" charset="-128"/>
-              </a:defRPr>
-            </a:lvl4pPr>
-            <a:lvl5pPr marL="2057400" indent="-228600">
-              <a:defRPr sz="2400">
-                <a:solidFill>
-                  <a:schemeClr val="tx1"/>
-                </a:solidFill>
-                <a:latin typeface="Helvetica" panose="020B0604020202020204" pitchFamily="34" charset="0"/>
-                <a:ea typeface="MS PGothic" panose="020B0600070205080204" pitchFamily="34" charset="-128"/>
-              </a:defRPr>
-            </a:lvl5pPr>
-            <a:lvl6pPr marL="2514600" indent="-228600" eaLnBrk="0" fontAlgn="base" hangingPunct="0">
-              <a:spcBef>
-                <a:spcPct val="0"/>
-              </a:spcBef>
-              <a:spcAft>
-                <a:spcPct val="0"/>
-              </a:spcAft>
-              <a:defRPr sz="2400">
-                <a:solidFill>
-                  <a:schemeClr val="tx1"/>
-                </a:solidFill>
-                <a:latin typeface="Helvetica" panose="020B0604020202020204" pitchFamily="34" charset="0"/>
-                <a:ea typeface="MS PGothic" panose="020B0600070205080204" pitchFamily="34" charset="-128"/>
-              </a:defRPr>
-            </a:lvl6pPr>
-            <a:lvl7pPr marL="2971800" indent="-228600" eaLnBrk="0" fontAlgn="base" hangingPunct="0">
-              <a:spcBef>
-                <a:spcPct val="0"/>
-              </a:spcBef>
-              <a:spcAft>
-                <a:spcPct val="0"/>
-              </a:spcAft>
-              <a:defRPr sz="2400">
-                <a:solidFill>
-                  <a:schemeClr val="tx1"/>
-                </a:solidFill>
-                <a:latin typeface="Helvetica" panose="020B0604020202020204" pitchFamily="34" charset="0"/>
-                <a:ea typeface="MS PGothic" panose="020B0600070205080204" pitchFamily="34" charset="-128"/>
-              </a:defRPr>
-            </a:lvl7pPr>
-            <a:lvl8pPr marL="3429000" indent="-228600" eaLnBrk="0" fontAlgn="base" hangingPunct="0">
-              <a:spcBef>
-                <a:spcPct val="0"/>
-              </a:spcBef>
-              <a:spcAft>
-                <a:spcPct val="0"/>
-              </a:spcAft>
-              <a:defRPr sz="2400">
-                <a:solidFill>
-                  <a:schemeClr val="tx1"/>
-                </a:solidFill>
-                <a:latin typeface="Helvetica" panose="020B0604020202020204" pitchFamily="34" charset="0"/>
-                <a:ea typeface="MS PGothic" panose="020B0600070205080204" pitchFamily="34" charset="-128"/>
-              </a:defRPr>
-            </a:lvl8pPr>
-            <a:lvl9pPr marL="3886200" indent="-228600" eaLnBrk="0" fontAlgn="base" hangingPunct="0">
-              <a:spcBef>
-                <a:spcPct val="0"/>
-              </a:spcBef>
-              <a:spcAft>
-                <a:spcPct val="0"/>
-              </a:spcAft>
-              <a:defRPr sz="2400">
-                <a:solidFill>
-                  <a:schemeClr val="tx1"/>
-                </a:solidFill>
-                <a:latin typeface="Helvetica" panose="020B0604020202020204" pitchFamily="34" charset="0"/>
-                <a:ea typeface="MS PGothic" panose="020B0600070205080204" pitchFamily="34" charset="-128"/>
-              </a:defRPr>
-            </a:lvl9pPr>
-          </a:lstStyle>
-          <a:p>
-            <a:pPr eaLnBrk="1" hangingPunct="1"/>
-            <a:endParaRPr lang="en-US" altLang="en-US" sz="1245">
-              <a:latin typeface="Trebuchet MS" panose="020B0603020202020204" pitchFamily="34" charset="0"/>
-            </a:endParaRPr>
-          </a:p>
-        </p:txBody>
-      </p:sp>
       <p:sp>
         <p:nvSpPr>
           <p:cNvPr id="15371" name="TextBox 15370"/>
@@ -6350,6 +6180,49 @@
       </p:sp>
       <p:sp>
         <p:nvSpPr>
+          <p:cNvPr id="83" name="Rectangle 82">
+            <a:extLst>
+              <a:ext uri="{FF2B5EF4-FFF2-40B4-BE49-F238E27FC236}">
+                <a16:creationId xmlns:a16="http://schemas.microsoft.com/office/drawing/2014/main" id="{AF629186-1EF0-4042-8881-0E3C5287458A}"/>
+              </a:ext>
+            </a:extLst>
+          </p:cNvPr>
+          <p:cNvSpPr/>
+          <p:nvPr/>
+        </p:nvSpPr>
+        <p:spPr>
+          <a:xfrm>
+            <a:off x="15599737" y="31508836"/>
+            <a:ext cx="14699076" cy="584775"/>
+          </a:xfrm>
+          <a:prstGeom prst="rect">
+            <a:avLst/>
+          </a:prstGeom>
+        </p:spPr>
+        <p:txBody>
+          <a:bodyPr wrap="square" lIns="91440" tIns="45720" rIns="91440" bIns="45720" anchor="t">
+            <a:spAutoFit/>
+          </a:bodyPr>
+          <a:lstStyle/>
+          <a:p>
+            <a:pPr algn="ctr"/>
+            <a:r>
+              <a:rPr lang="en-US" sz="3200" spc="15" dirty="0">
+                <a:latin typeface="Helvetica"/>
+                <a:ea typeface="MS PGothic"/>
+                <a:cs typeface="Helvetica"/>
+              </a:rPr>
+              <a:t>…</a:t>
+            </a:r>
+            <a:endParaRPr lang="en-US" sz="3200" dirty="0">
+              <a:ea typeface="MS PGothic"/>
+              <a:cs typeface="Helvetica"/>
+            </a:endParaRPr>
+          </a:p>
+        </p:txBody>
+      </p:sp>
+      <p:sp>
+        <p:nvSpPr>
           <p:cNvPr id="59" name="Rectangle 162"/>
           <p:cNvSpPr>
             <a:spLocks noChangeArrowheads="1"/>
@@ -6517,7 +6390,7 @@
         <p:spPr bwMode="auto">
           <a:xfrm>
             <a:off x="16115146" y="23250026"/>
-            <a:ext cx="13562675" cy="746358"/>
+            <a:ext cx="13562675" cy="1400383"/>
           </a:xfrm>
           <a:prstGeom prst="rect">
             <a:avLst/>
@@ -6643,357 +6516,15 @@
           <a:p>
             <a:pPr algn="ctr"/>
             <a:r>
-              <a:rPr lang="en-US" altLang="en-US" sz="4250" b="1">
+              <a:rPr lang="en-US" altLang="en-US" sz="4250" b="1" dirty="0">
                 <a:solidFill>
                   <a:srgbClr val="C00000"/>
                 </a:solidFill>
                 <a:latin typeface="Trebuchet MS"/>
                 <a:ea typeface="MS PGothic"/>
               </a:rPr>
-              <a:t>5. </a:t>
-            </a:r>
-            <a:r>
-              <a:rPr lang="en-US" sz="4250" b="1" i="0">
-                <a:solidFill>
-                  <a:srgbClr val="C00000"/>
-                </a:solidFill>
-                <a:effectLst/>
-                <a:latin typeface="Trebuchet MS"/>
-                <a:ea typeface="MS PGothic"/>
-              </a:rPr>
-              <a:t>Strategic Decisions Enhance VS-</a:t>
-            </a:r>
-            <a:r>
-              <a:rPr lang="en-US" sz="4250" b="1" i="0" err="1">
-                <a:solidFill>
-                  <a:srgbClr val="C00000"/>
-                </a:solidFill>
-                <a:effectLst/>
-                <a:latin typeface="Trebuchet MS"/>
-                <a:ea typeface="MS PGothic"/>
-              </a:rPr>
-              <a:t>pTPJ</a:t>
-            </a:r>
-            <a:r>
-              <a:rPr lang="en-US" sz="4250" b="1">
-                <a:solidFill>
-                  <a:srgbClr val="C00000"/>
-                </a:solidFill>
-                <a:latin typeface="Trebuchet MS"/>
-                <a:ea typeface="MS PGothic"/>
-              </a:rPr>
-              <a:t> Connectivity</a:t>
-            </a:r>
-            <a:endParaRPr lang="en-US" altLang="en-US" sz="4250" b="1">
-              <a:solidFill>
-                <a:srgbClr val="C00000"/>
-              </a:solidFill>
-              <a:latin typeface="Trebuchet MS"/>
-              <a:ea typeface="MS PGothic"/>
-            </a:endParaRPr>
-          </a:p>
-        </p:txBody>
-      </p:sp>
-      <p:sp>
-        <p:nvSpPr>
-          <p:cNvPr id="72" name="TextBox 86">
-            <a:extLst>
-              <a:ext uri="{FF2B5EF4-FFF2-40B4-BE49-F238E27FC236}">
-                <a16:creationId xmlns:a16="http://schemas.microsoft.com/office/drawing/2014/main" id="{7876542B-4364-4FD7-BCA2-651EBF34C355}"/>
-              </a:ext>
-            </a:extLst>
-          </p:cNvPr>
-          <p:cNvSpPr txBox="1">
-            <a:spLocks noChangeArrowheads="1"/>
-          </p:cNvSpPr>
-          <p:nvPr/>
-        </p:nvSpPr>
-        <p:spPr bwMode="auto">
-          <a:xfrm>
-            <a:off x="32230620" y="24371337"/>
-            <a:ext cx="9797258" cy="748988"/>
-          </a:xfrm>
-          <a:prstGeom prst="rect">
-            <a:avLst/>
-          </a:prstGeom>
-          <a:solidFill>
-            <a:schemeClr val="bg1"/>
-          </a:solidFill>
-          <a:ln>
-            <a:noFill/>
-          </a:ln>
-        </p:spPr>
-        <p:txBody>
-          <a:bodyPr wrap="square">
-            <a:spAutoFit/>
-          </a:bodyPr>
-          <a:lstStyle>
-            <a:lvl1pPr>
-              <a:defRPr sz="2400">
-                <a:solidFill>
-                  <a:schemeClr val="tx1"/>
-                </a:solidFill>
-                <a:latin typeface="Helvetica" panose="020B0604020202020204" pitchFamily="34" charset="0"/>
-                <a:ea typeface="MS PGothic" panose="020B0600070205080204" pitchFamily="34" charset="-128"/>
-              </a:defRPr>
-            </a:lvl1pPr>
-            <a:lvl2pPr marL="742950" indent="-285750">
-              <a:defRPr sz="2400">
-                <a:solidFill>
-                  <a:schemeClr val="tx1"/>
-                </a:solidFill>
-                <a:latin typeface="Helvetica" panose="020B0604020202020204" pitchFamily="34" charset="0"/>
-                <a:ea typeface="MS PGothic" panose="020B0600070205080204" pitchFamily="34" charset="-128"/>
-              </a:defRPr>
-            </a:lvl2pPr>
-            <a:lvl3pPr marL="1143000" indent="-228600">
-              <a:defRPr sz="2400">
-                <a:solidFill>
-                  <a:schemeClr val="tx1"/>
-                </a:solidFill>
-                <a:latin typeface="Helvetica" panose="020B0604020202020204" pitchFamily="34" charset="0"/>
-                <a:ea typeface="MS PGothic" panose="020B0600070205080204" pitchFamily="34" charset="-128"/>
-              </a:defRPr>
-            </a:lvl3pPr>
-            <a:lvl4pPr marL="1600200" indent="-228600">
-              <a:defRPr sz="2400">
-                <a:solidFill>
-                  <a:schemeClr val="tx1"/>
-                </a:solidFill>
-                <a:latin typeface="Helvetica" panose="020B0604020202020204" pitchFamily="34" charset="0"/>
-                <a:ea typeface="MS PGothic" panose="020B0600070205080204" pitchFamily="34" charset="-128"/>
-              </a:defRPr>
-            </a:lvl4pPr>
-            <a:lvl5pPr marL="2057400" indent="-228600">
-              <a:defRPr sz="2400">
-                <a:solidFill>
-                  <a:schemeClr val="tx1"/>
-                </a:solidFill>
-                <a:latin typeface="Helvetica" panose="020B0604020202020204" pitchFamily="34" charset="0"/>
-                <a:ea typeface="MS PGothic" panose="020B0600070205080204" pitchFamily="34" charset="-128"/>
-              </a:defRPr>
-            </a:lvl5pPr>
-            <a:lvl6pPr marL="2514600" indent="-228600" eaLnBrk="0" fontAlgn="base" hangingPunct="0">
-              <a:spcBef>
-                <a:spcPct val="0"/>
-              </a:spcBef>
-              <a:spcAft>
-                <a:spcPct val="0"/>
-              </a:spcAft>
-              <a:defRPr sz="2400">
-                <a:solidFill>
-                  <a:schemeClr val="tx1"/>
-                </a:solidFill>
-                <a:latin typeface="Helvetica" panose="020B0604020202020204" pitchFamily="34" charset="0"/>
-                <a:ea typeface="MS PGothic" panose="020B0600070205080204" pitchFamily="34" charset="-128"/>
-              </a:defRPr>
-            </a:lvl6pPr>
-            <a:lvl7pPr marL="2971800" indent="-228600" eaLnBrk="0" fontAlgn="base" hangingPunct="0">
-              <a:spcBef>
-                <a:spcPct val="0"/>
-              </a:spcBef>
-              <a:spcAft>
-                <a:spcPct val="0"/>
-              </a:spcAft>
-              <a:defRPr sz="2400">
-                <a:solidFill>
-                  <a:schemeClr val="tx1"/>
-                </a:solidFill>
-                <a:latin typeface="Helvetica" panose="020B0604020202020204" pitchFamily="34" charset="0"/>
-                <a:ea typeface="MS PGothic" panose="020B0600070205080204" pitchFamily="34" charset="-128"/>
-              </a:defRPr>
-            </a:lvl7pPr>
-            <a:lvl8pPr marL="3429000" indent="-228600" eaLnBrk="0" fontAlgn="base" hangingPunct="0">
-              <a:spcBef>
-                <a:spcPct val="0"/>
-              </a:spcBef>
-              <a:spcAft>
-                <a:spcPct val="0"/>
-              </a:spcAft>
-              <a:defRPr sz="2400">
-                <a:solidFill>
-                  <a:schemeClr val="tx1"/>
-                </a:solidFill>
-                <a:latin typeface="Helvetica" panose="020B0604020202020204" pitchFamily="34" charset="0"/>
-                <a:ea typeface="MS PGothic" panose="020B0600070205080204" pitchFamily="34" charset="-128"/>
-              </a:defRPr>
-            </a:lvl8pPr>
-            <a:lvl9pPr marL="3886200" indent="-228600" eaLnBrk="0" fontAlgn="base" hangingPunct="0">
-              <a:spcBef>
-                <a:spcPct val="0"/>
-              </a:spcBef>
-              <a:spcAft>
-                <a:spcPct val="0"/>
-              </a:spcAft>
-              <a:defRPr sz="2400">
-                <a:solidFill>
-                  <a:schemeClr val="tx1"/>
-                </a:solidFill>
-                <a:latin typeface="Helvetica" panose="020B0604020202020204" pitchFamily="34" charset="0"/>
-                <a:ea typeface="MS PGothic" panose="020B0600070205080204" pitchFamily="34" charset="-128"/>
-              </a:defRPr>
-            </a:lvl9pPr>
-          </a:lstStyle>
-          <a:p>
-            <a:pPr algn="ctr"/>
-            <a:r>
-              <a:rPr lang="en-US" altLang="en-US" sz="4267" b="1" dirty="0">
-                <a:solidFill>
-                  <a:srgbClr val="C00000"/>
-                </a:solidFill>
-                <a:latin typeface="Trebuchet MS" panose="020B0603020202020204" pitchFamily="34" charset="0"/>
-              </a:rPr>
-              <a:t>8. Conclusions and Future Directions</a:t>
-            </a:r>
-          </a:p>
-        </p:txBody>
-      </p:sp>
-      <p:sp>
-        <p:nvSpPr>
-          <p:cNvPr id="5" name="Rectangle 4">
-            <a:extLst>
-              <a:ext uri="{FF2B5EF4-FFF2-40B4-BE49-F238E27FC236}">
-                <a16:creationId xmlns:a16="http://schemas.microsoft.com/office/drawing/2014/main" id="{F27FB003-669C-6748-AC0B-0C13B0734BA6}"/>
-              </a:ext>
-            </a:extLst>
-          </p:cNvPr>
-          <p:cNvSpPr/>
-          <p:nvPr/>
-        </p:nvSpPr>
-        <p:spPr>
-          <a:xfrm>
-            <a:off x="30912367" y="25351882"/>
-            <a:ext cx="12914399" cy="4555093"/>
-          </a:xfrm>
-          <a:prstGeom prst="rect">
-            <a:avLst/>
-          </a:prstGeom>
-        </p:spPr>
-        <p:txBody>
-          <a:bodyPr wrap="square" lIns="91440" tIns="45720" rIns="91440" bIns="45720" anchor="t">
-            <a:spAutoFit/>
-          </a:bodyPr>
-          <a:lstStyle/>
-          <a:p>
-            <a:pPr>
-              <a:spcBef>
-                <a:spcPts val="360"/>
-              </a:spcBef>
-              <a:spcAft>
-                <a:spcPts val="0"/>
-              </a:spcAft>
-              <a:buFont typeface="Arial" panose="020B0604020202020204" pitchFamily="34" charset="0"/>
-              <a:buChar char="•"/>
-            </a:pPr>
-            <a:r>
-              <a:rPr lang="en-US" sz="4000" dirty="0">
-                <a:latin typeface="Helvetica"/>
-                <a:ea typeface="MS PGothic"/>
-                <a:cs typeface="Helvetica"/>
-              </a:rPr>
-              <a:t> We found that the VS has stronger connectivity with the </a:t>
-            </a:r>
-            <a:r>
-              <a:rPr lang="en-US" sz="4000" dirty="0" err="1">
-                <a:latin typeface="Helvetica"/>
-                <a:ea typeface="MS PGothic"/>
-                <a:cs typeface="Helvetica"/>
-              </a:rPr>
-              <a:t>pTPJ</a:t>
-            </a:r>
-            <a:r>
-              <a:rPr lang="en-US" sz="4000" dirty="0">
-                <a:latin typeface="Helvetica"/>
-                <a:ea typeface="MS PGothic"/>
-                <a:cs typeface="Helvetica"/>
-              </a:rPr>
-              <a:t> and PCC while making strategic decisions.</a:t>
-            </a:r>
-            <a:endParaRPr lang="en-US" dirty="0">
-              <a:cs typeface="Arial"/>
-            </a:endParaRPr>
-          </a:p>
-          <a:p>
-            <a:pPr>
-              <a:spcBef>
-                <a:spcPts val="360"/>
-              </a:spcBef>
-              <a:spcAft>
-                <a:spcPts val="0"/>
-              </a:spcAft>
-              <a:buFont typeface="Arial" panose="020B0604020202020204" pitchFamily="34" charset="0"/>
-              <a:buChar char="•"/>
-            </a:pPr>
-            <a:r>
-              <a:rPr lang="en-US" sz="4000" b="1" dirty="0">
-                <a:latin typeface="Helvetica"/>
-                <a:ea typeface="MS PGothic"/>
-                <a:cs typeface="Helvetica"/>
-              </a:rPr>
-              <a:t> </a:t>
-            </a:r>
-            <a:r>
-              <a:rPr lang="en-US" sz="4000" dirty="0">
-                <a:latin typeface="Helvetica"/>
-                <a:ea typeface="MS PGothic"/>
-                <a:cs typeface="Helvetica"/>
-              </a:rPr>
-              <a:t>Effective connectivity between the VS and ACC tracks fairness, modulated by reward sensitivity. </a:t>
-            </a:r>
-            <a:endParaRPr lang="en-US" sz="4000" dirty="0">
-              <a:cs typeface="Helvetica"/>
-            </a:endParaRPr>
-          </a:p>
-          <a:p>
-            <a:pPr>
-              <a:spcBef>
-                <a:spcPts val="360"/>
-              </a:spcBef>
-              <a:spcAft>
-                <a:spcPts val="0"/>
-              </a:spcAft>
-              <a:buFont typeface="Arial" panose="020B0604020202020204" pitchFamily="34" charset="0"/>
-              <a:buChar char="•"/>
-            </a:pPr>
-            <a:r>
-              <a:rPr lang="en-US" sz="4000" dirty="0">
-                <a:latin typeface="Helvetica"/>
-                <a:ea typeface="MS PGothic"/>
-                <a:cs typeface="Helvetica"/>
-              </a:rPr>
-              <a:t> Future investigations could assess </a:t>
-            </a:r>
-            <a:r>
-              <a:rPr lang="en-US" sz="4000" dirty="0" err="1">
-                <a:latin typeface="Helvetica"/>
-                <a:ea typeface="MS PGothic"/>
-                <a:cs typeface="Helvetica"/>
-              </a:rPr>
-              <a:t>corticostriatal</a:t>
-            </a:r>
-            <a:r>
-              <a:rPr lang="en-US" sz="4000" dirty="0">
-                <a:latin typeface="Helvetica"/>
-                <a:ea typeface="MS PGothic"/>
-                <a:cs typeface="Helvetica"/>
-              </a:rPr>
-              <a:t> connectivity and substance use in a clinical population.</a:t>
-            </a:r>
-          </a:p>
-          <a:p>
-            <a:pPr>
-              <a:spcBef>
-                <a:spcPts val="360"/>
-              </a:spcBef>
-              <a:spcAft>
-                <a:spcPts val="0"/>
-              </a:spcAft>
-            </a:pPr>
-            <a:endParaRPr lang="en-US" sz="4000" b="1" dirty="0">
-              <a:latin typeface="Helvetica"/>
-              <a:ea typeface="MS PGothic"/>
-              <a:cs typeface="Helvetica"/>
-            </a:endParaRPr>
+              <a:t>5. Neural Activation in the ACC is Associated with IOS Scores</a:t>
+            </a:r>
           </a:p>
         </p:txBody>
       </p:sp>
@@ -7685,8 +7216,8 @@
         </p:nvSpPr>
         <p:spPr>
           <a:xfrm>
-            <a:off x="15519258" y="24092634"/>
-            <a:ext cx="14625853" cy="1569660"/>
+            <a:off x="15426443" y="24805358"/>
+            <a:ext cx="14625853" cy="584775"/>
           </a:xfrm>
           <a:prstGeom prst="rect">
             <a:avLst/>
@@ -7700,30 +7231,14 @@
           <a:p>
             <a:pPr algn="ctr"/>
             <a:r>
-              <a:rPr lang="en-US" sz="3200" i="1">
+              <a:rPr lang="en-US" sz="3200" i="1" dirty="0">
                 <a:latin typeface="Helvetica"/>
                 <a:ea typeface="MS PGothic"/>
                 <a:cs typeface="Helvetica"/>
               </a:rPr>
-              <a:t> During strategic decisions (DG-P &gt; UG-P), we expected that elevated ventral striatal (VS) responses will be associated with enhanced effective connectivity in the posterior temporoparietal junction (</a:t>
-            </a:r>
-            <a:r>
-              <a:rPr lang="en-US" sz="3200" i="1" err="1">
-                <a:latin typeface="Helvetica"/>
-                <a:ea typeface="MS PGothic"/>
-                <a:cs typeface="Helvetica"/>
-              </a:rPr>
-              <a:t>pTPJ</a:t>
-            </a:r>
-            <a:r>
-              <a:rPr lang="en-US" sz="3200" i="1">
-                <a:latin typeface="Helvetica"/>
-                <a:ea typeface="MS PGothic"/>
-                <a:cs typeface="Helvetica"/>
-              </a:rPr>
-              <a:t>).</a:t>
-            </a:r>
-            <a:endParaRPr lang="en-US" sz="3200" i="1">
+              <a:t>…</a:t>
+            </a:r>
+            <a:endParaRPr lang="en-US" sz="3200" i="1" dirty="0">
               <a:latin typeface="Helvetica"/>
               <a:cs typeface="Helvetica"/>
             </a:endParaRPr>
@@ -7775,114 +7290,6 @@
             </a:r>
             <a:endParaRPr lang="en-US" sz="3200" i="1" dirty="0">
               <a:cs typeface="Helvetica" panose="020B0604020202020204" pitchFamily="34" charset="0"/>
-            </a:endParaRPr>
-          </a:p>
-        </p:txBody>
-      </p:sp>
-      <p:sp>
-        <p:nvSpPr>
-          <p:cNvPr id="83" name="Rectangle 82">
-            <a:extLst>
-              <a:ext uri="{FF2B5EF4-FFF2-40B4-BE49-F238E27FC236}">
-                <a16:creationId xmlns:a16="http://schemas.microsoft.com/office/drawing/2014/main" id="{AF629186-1EF0-4042-8881-0E3C5287458A}"/>
-              </a:ext>
-            </a:extLst>
-          </p:cNvPr>
-          <p:cNvSpPr/>
-          <p:nvPr/>
-        </p:nvSpPr>
-        <p:spPr>
-          <a:xfrm>
-            <a:off x="15599737" y="31508836"/>
-            <a:ext cx="14699076" cy="1077218"/>
-          </a:xfrm>
-          <a:prstGeom prst="rect">
-            <a:avLst/>
-          </a:prstGeom>
-        </p:spPr>
-        <p:txBody>
-          <a:bodyPr wrap="square" lIns="91440" tIns="45720" rIns="91440" bIns="45720" anchor="t">
-            <a:spAutoFit/>
-          </a:bodyPr>
-          <a:lstStyle/>
-          <a:p>
-            <a:pPr algn="ctr"/>
-            <a:r>
-              <a:rPr lang="en-US" sz="3200" spc="15" dirty="0">
-                <a:latin typeface="Helvetica"/>
-                <a:ea typeface="MS PGothic"/>
-                <a:cs typeface="Helvetica"/>
-              </a:rPr>
-              <a:t>As participants made fairer offers while making strategic decisions (UG &gt; DG)</a:t>
-            </a:r>
-            <a:r>
-              <a:rPr lang="en-US" altLang="en-US" sz="3200" dirty="0">
-                <a:latin typeface="Helvetica"/>
-                <a:ea typeface="MS PGothic"/>
-              </a:rPr>
-              <a:t>, we found enhanced VS</a:t>
-            </a:r>
-            <a:r>
-              <a:rPr lang="en-US" sz="3200" dirty="0">
-                <a:latin typeface="Helvetica"/>
-                <a:ea typeface="MS PGothic"/>
-                <a:cs typeface="Helvetica"/>
-              </a:rPr>
-              <a:t> effective connectivity with the </a:t>
-            </a:r>
-            <a:r>
-              <a:rPr lang="en-US" sz="3200" dirty="0" err="1">
-                <a:latin typeface="Helvetica"/>
-                <a:ea typeface="MS PGothic"/>
-                <a:cs typeface="Helvetica"/>
-              </a:rPr>
-              <a:t>pTPJ</a:t>
-            </a:r>
-            <a:r>
-              <a:rPr lang="en-US" sz="3200" dirty="0">
-                <a:latin typeface="Helvetica"/>
-                <a:ea typeface="MS PGothic"/>
-                <a:cs typeface="Helvetica"/>
-              </a:rPr>
-              <a:t>.</a:t>
-            </a:r>
-            <a:endParaRPr lang="en-US" sz="3200" dirty="0">
-              <a:ea typeface="MS PGothic"/>
-              <a:cs typeface="Helvetica"/>
-            </a:endParaRPr>
-          </a:p>
-        </p:txBody>
-      </p:sp>
-      <p:sp>
-        <p:nvSpPr>
-          <p:cNvPr id="62" name="Rectangle 61">
-            <a:extLst>
-              <a:ext uri="{FF2B5EF4-FFF2-40B4-BE49-F238E27FC236}">
-                <a16:creationId xmlns:a16="http://schemas.microsoft.com/office/drawing/2014/main" id="{FD9986E8-E0AD-DE42-B169-F6823087703D}"/>
-              </a:ext>
-            </a:extLst>
-          </p:cNvPr>
-          <p:cNvSpPr/>
-          <p:nvPr/>
-        </p:nvSpPr>
-        <p:spPr>
-          <a:xfrm>
-            <a:off x="30692751" y="5397447"/>
-            <a:ext cx="12756880" cy="584775"/>
-          </a:xfrm>
-          <a:prstGeom prst="rect">
-            <a:avLst/>
-          </a:prstGeom>
-        </p:spPr>
-        <p:txBody>
-          <a:bodyPr wrap="square" lIns="91440" tIns="45720" rIns="91440" bIns="45720" anchor="t">
-            <a:spAutoFit/>
-          </a:bodyPr>
-          <a:lstStyle/>
-          <a:p>
-            <a:pPr algn="ctr"/>
-            <a:endParaRPr lang="en-US" sz="3200" i="1" spc="15" dirty="0">
-              <a:latin typeface="Helvetica" pitchFamily="2" charset="0"/>
             </a:endParaRPr>
           </a:p>
         </p:txBody>
@@ -7928,94 +7335,6 @@
       </p:sp>
       <p:sp>
         <p:nvSpPr>
-          <p:cNvPr id="74" name="TextBox 73">
-            <a:extLst>
-              <a:ext uri="{FF2B5EF4-FFF2-40B4-BE49-F238E27FC236}">
-                <a16:creationId xmlns:a16="http://schemas.microsoft.com/office/drawing/2014/main" id="{DEEE4F8F-8A70-494E-B38E-CD75EC41499F}"/>
-              </a:ext>
-            </a:extLst>
-          </p:cNvPr>
-          <p:cNvSpPr txBox="1"/>
-          <p:nvPr/>
-        </p:nvSpPr>
-        <p:spPr>
-          <a:xfrm>
-            <a:off x="30721197" y="22389707"/>
-            <a:ext cx="12773897" cy="1569660"/>
-          </a:xfrm>
-          <a:prstGeom prst="rect">
-            <a:avLst/>
-          </a:prstGeom>
-          <a:noFill/>
-        </p:spPr>
-        <p:txBody>
-          <a:bodyPr wrap="square" lIns="91440" tIns="45720" rIns="91440" bIns="45720" anchor="t">
-            <a:spAutoFit/>
-          </a:bodyPr>
-          <a:lstStyle/>
-          <a:p>
-            <a:pPr algn="ctr"/>
-            <a:r>
-              <a:rPr lang="en-US" sz="3200" spc="15" dirty="0">
-                <a:latin typeface="Helvetica"/>
-                <a:ea typeface="MS PGothic"/>
-                <a:cs typeface="Helvetica"/>
-              </a:rPr>
-              <a:t>As participants with aberrant reward sensitivity made fairer offers, they expressed stronger effective connectivity between a VS seed and an Anterior Cingulate Cortex (ACC) target.</a:t>
-            </a:r>
-            <a:endParaRPr lang="en-US" sz="3200" dirty="0"/>
-          </a:p>
-        </p:txBody>
-      </p:sp>
-      <p:pic>
-        <p:nvPicPr>
-          <p:cNvPr id="82" name="Picture 2" descr="Image result for adelphi university">
-            <a:extLst>
-              <a:ext uri="{FF2B5EF4-FFF2-40B4-BE49-F238E27FC236}">
-                <a16:creationId xmlns:a16="http://schemas.microsoft.com/office/drawing/2014/main" id="{28154B0C-9082-4664-BE4E-292BAAFD349C}"/>
-              </a:ext>
-            </a:extLst>
-          </p:cNvPr>
-          <p:cNvPicPr>
-            <a:picLocks noChangeAspect="1" noChangeArrowheads="1"/>
-          </p:cNvPicPr>
-          <p:nvPr/>
-        </p:nvPicPr>
-        <p:blipFill>
-          <a:blip>
-            <a:extLst>
-              <a:ext uri="{28A0092B-C50C-407E-A947-70E740481C1C}">
-                <a14:useLocalDpi xmlns:a14="http://schemas.microsoft.com/office/drawing/2010/main" val="0"/>
-              </a:ext>
-            </a:extLst>
-          </a:blip>
-          <a:srcRect/>
-          <a:stretch>
-            <a:fillRect/>
-          </a:stretch>
-        </p:blipFill>
-        <p:spPr bwMode="auto">
-          <a:xfrm>
-            <a:off x="41331346" y="1633353"/>
-            <a:ext cx="1986759" cy="1986759"/>
-          </a:xfrm>
-          <a:prstGeom prst="rect">
-            <a:avLst/>
-          </a:prstGeom>
-          <a:noFill/>
-          <a:extLst>
-            <a:ext uri="{909E8E84-426E-40DD-AFC4-6F175D3DCCD1}">
-              <a14:hiddenFill xmlns:a14="http://schemas.microsoft.com/office/drawing/2010/main">
-                <a:solidFill>
-                  <a:srgbClr val="FFFFFF"/>
-                </a:solidFill>
-              </a14:hiddenFill>
-            </a:ext>
-          </a:extLst>
-        </p:spPr>
-      </p:pic>
-      <p:sp>
-        <p:nvSpPr>
           <p:cNvPr id="88" name="TextBox 87">
             <a:extLst>
               <a:ext uri="{FF2B5EF4-FFF2-40B4-BE49-F238E27FC236}">
@@ -8055,164 +7374,6 @@
             </a:r>
             <a:endParaRPr lang="en-US" sz="2800" dirty="0">
               <a:cs typeface="Helvetica" panose="020B0604020202020204" pitchFamily="34" charset="0"/>
-            </a:endParaRPr>
-          </a:p>
-        </p:txBody>
-      </p:sp>
-      <p:sp>
-        <p:nvSpPr>
-          <p:cNvPr id="127" name="Rectangle 54">
-            <a:extLst>
-              <a:ext uri="{FF2B5EF4-FFF2-40B4-BE49-F238E27FC236}">
-                <a16:creationId xmlns:a16="http://schemas.microsoft.com/office/drawing/2014/main" id="{CCC8C574-2C37-4FF8-83CC-02DE2FB92E37}"/>
-              </a:ext>
-            </a:extLst>
-          </p:cNvPr>
-          <p:cNvSpPr>
-            <a:spLocks noChangeArrowheads="1"/>
-          </p:cNvSpPr>
-          <p:nvPr/>
-        </p:nvSpPr>
-        <p:spPr bwMode="auto">
-          <a:xfrm>
-            <a:off x="30667546" y="31846944"/>
-            <a:ext cx="12923262" cy="813380"/>
-          </a:xfrm>
-          <a:prstGeom prst="rect">
-            <a:avLst/>
-          </a:prstGeom>
-          <a:noFill/>
-          <a:ln w="76200">
-            <a:solidFill>
-              <a:srgbClr val="C00000"/>
-            </a:solidFill>
-            <a:miter lim="800000"/>
-            <a:headEnd/>
-            <a:tailEnd/>
-          </a:ln>
-          <a:extLst>
-            <a:ext uri="{909E8E84-426E-40DD-AFC4-6F175D3DCCD1}">
-              <a14:hiddenFill xmlns:a14="http://schemas.microsoft.com/office/drawing/2010/main">
-                <a:solidFill>
-                  <a:srgbClr val="FFFFFF"/>
-                </a:solidFill>
-              </a14:hiddenFill>
-            </a:ext>
-          </a:extLst>
-        </p:spPr>
-        <p:txBody>
-          <a:bodyPr wrap="none" lIns="81274" tIns="40638" rIns="81274" bIns="40638" anchor="ctr"/>
-          <a:lstStyle>
-            <a:lvl1pPr>
-              <a:defRPr sz="2400">
-                <a:solidFill>
-                  <a:schemeClr val="tx1"/>
-                </a:solidFill>
-                <a:latin typeface="Helvetica" panose="020B0604020202020204" pitchFamily="34" charset="0"/>
-                <a:ea typeface="MS PGothic" panose="020B0600070205080204" pitchFamily="34" charset="-128"/>
-              </a:defRPr>
-            </a:lvl1pPr>
-            <a:lvl2pPr marL="742950" indent="-285750">
-              <a:defRPr sz="2400">
-                <a:solidFill>
-                  <a:schemeClr val="tx1"/>
-                </a:solidFill>
-                <a:latin typeface="Helvetica" panose="020B0604020202020204" pitchFamily="34" charset="0"/>
-                <a:ea typeface="MS PGothic" panose="020B0600070205080204" pitchFamily="34" charset="-128"/>
-              </a:defRPr>
-            </a:lvl2pPr>
-            <a:lvl3pPr marL="1143000" indent="-228600">
-              <a:defRPr sz="2400">
-                <a:solidFill>
-                  <a:schemeClr val="tx1"/>
-                </a:solidFill>
-                <a:latin typeface="Helvetica" panose="020B0604020202020204" pitchFamily="34" charset="0"/>
-                <a:ea typeface="MS PGothic" panose="020B0600070205080204" pitchFamily="34" charset="-128"/>
-              </a:defRPr>
-            </a:lvl3pPr>
-            <a:lvl4pPr marL="1600200" indent="-228600">
-              <a:defRPr sz="2400">
-                <a:solidFill>
-                  <a:schemeClr val="tx1"/>
-                </a:solidFill>
-                <a:latin typeface="Helvetica" panose="020B0604020202020204" pitchFamily="34" charset="0"/>
-                <a:ea typeface="MS PGothic" panose="020B0600070205080204" pitchFamily="34" charset="-128"/>
-              </a:defRPr>
-            </a:lvl4pPr>
-            <a:lvl5pPr marL="2057400" indent="-228600">
-              <a:defRPr sz="2400">
-                <a:solidFill>
-                  <a:schemeClr val="tx1"/>
-                </a:solidFill>
-                <a:latin typeface="Helvetica" panose="020B0604020202020204" pitchFamily="34" charset="0"/>
-                <a:ea typeface="MS PGothic" panose="020B0600070205080204" pitchFamily="34" charset="-128"/>
-              </a:defRPr>
-            </a:lvl5pPr>
-            <a:lvl6pPr marL="2514600" indent="-228600" eaLnBrk="0" fontAlgn="base" hangingPunct="0">
-              <a:spcBef>
-                <a:spcPct val="0"/>
-              </a:spcBef>
-              <a:spcAft>
-                <a:spcPct val="0"/>
-              </a:spcAft>
-              <a:defRPr sz="2400">
-                <a:solidFill>
-                  <a:schemeClr val="tx1"/>
-                </a:solidFill>
-                <a:latin typeface="Helvetica" panose="020B0604020202020204" pitchFamily="34" charset="0"/>
-                <a:ea typeface="MS PGothic" panose="020B0600070205080204" pitchFamily="34" charset="-128"/>
-              </a:defRPr>
-            </a:lvl6pPr>
-            <a:lvl7pPr marL="2971800" indent="-228600" eaLnBrk="0" fontAlgn="base" hangingPunct="0">
-              <a:spcBef>
-                <a:spcPct val="0"/>
-              </a:spcBef>
-              <a:spcAft>
-                <a:spcPct val="0"/>
-              </a:spcAft>
-              <a:defRPr sz="2400">
-                <a:solidFill>
-                  <a:schemeClr val="tx1"/>
-                </a:solidFill>
-                <a:latin typeface="Helvetica" panose="020B0604020202020204" pitchFamily="34" charset="0"/>
-                <a:ea typeface="MS PGothic" panose="020B0600070205080204" pitchFamily="34" charset="-128"/>
-              </a:defRPr>
-            </a:lvl7pPr>
-            <a:lvl8pPr marL="3429000" indent="-228600" eaLnBrk="0" fontAlgn="base" hangingPunct="0">
-              <a:spcBef>
-                <a:spcPct val="0"/>
-              </a:spcBef>
-              <a:spcAft>
-                <a:spcPct val="0"/>
-              </a:spcAft>
-              <a:defRPr sz="2400">
-                <a:solidFill>
-                  <a:schemeClr val="tx1"/>
-                </a:solidFill>
-                <a:latin typeface="Helvetica" panose="020B0604020202020204" pitchFamily="34" charset="0"/>
-                <a:ea typeface="MS PGothic" panose="020B0600070205080204" pitchFamily="34" charset="-128"/>
-              </a:defRPr>
-            </a:lvl8pPr>
-            <a:lvl9pPr marL="3886200" indent="-228600" eaLnBrk="0" fontAlgn="base" hangingPunct="0">
-              <a:spcBef>
-                <a:spcPct val="0"/>
-              </a:spcBef>
-              <a:spcAft>
-                <a:spcPct val="0"/>
-              </a:spcAft>
-              <a:defRPr sz="2400">
-                <a:solidFill>
-                  <a:schemeClr val="tx1"/>
-                </a:solidFill>
-                <a:latin typeface="Helvetica" panose="020B0604020202020204" pitchFamily="34" charset="0"/>
-                <a:ea typeface="MS PGothic" panose="020B0600070205080204" pitchFamily="34" charset="-128"/>
-              </a:defRPr>
-            </a:lvl9pPr>
-          </a:lstStyle>
-          <a:p>
-            <a:pPr eaLnBrk="1" hangingPunct="1"/>
-            <a:endParaRPr lang="en-US" altLang="en-US" sz="1245">
-              <a:latin typeface="Trebuchet MS" panose="020B0603020202020204" pitchFamily="34" charset="0"/>
             </a:endParaRPr>
           </a:p>
         </p:txBody>
@@ -8286,342 +7447,6 @@
       </p:sp>
       <p:sp>
         <p:nvSpPr>
-          <p:cNvPr id="4" name="TextBox 3">
-            <a:extLst>
-              <a:ext uri="{FF2B5EF4-FFF2-40B4-BE49-F238E27FC236}">
-                <a16:creationId xmlns:a16="http://schemas.microsoft.com/office/drawing/2014/main" id="{C2E936D7-9AF3-F0C1-388A-40D4AD6F87D3}"/>
-              </a:ext>
-            </a:extLst>
-          </p:cNvPr>
-          <p:cNvSpPr txBox="1"/>
-          <p:nvPr/>
-        </p:nvSpPr>
-        <p:spPr>
-          <a:xfrm>
-            <a:off x="23768566" y="15123319"/>
-            <a:ext cx="1046440" cy="5697861"/>
-          </a:xfrm>
-          <a:prstGeom prst="rect">
-            <a:avLst/>
-          </a:prstGeom>
-          <a:noFill/>
-        </p:spPr>
-        <p:txBody>
-          <a:bodyPr rot="0" spcFirstLastPara="0" vertOverflow="overflow" horzOverflow="overflow" vert="vert270" wrap="square" lIns="91440" tIns="45720" rIns="91440" bIns="45720" numCol="1" spcCol="0" rtlCol="0" fromWordArt="0" anchor="t" anchorCtr="0" forceAA="0" compatLnSpc="1">
-            <a:prstTxWarp prst="textNoShape">
-              <a:avLst/>
-            </a:prstTxWarp>
-            <a:spAutoFit/>
-          </a:bodyPr>
-          <a:lstStyle/>
-          <a:p>
-            <a:pPr algn="ctr"/>
-            <a:r>
-              <a:rPr lang="en-US" sz="2800" dirty="0">
-                <a:latin typeface="Helvetica"/>
-                <a:ea typeface="MS PGothic"/>
-              </a:rPr>
-              <a:t>IFG Activation (</a:t>
-            </a:r>
-            <a:r>
-              <a:rPr lang="el-GR" sz="2800" dirty="0">
-                <a:latin typeface="Helvetica"/>
-                <a:ea typeface="MS PGothic"/>
-              </a:rPr>
-              <a:t>β)</a:t>
-            </a:r>
-            <a:r>
-              <a:rPr lang="en-US" sz="2800" dirty="0">
-                <a:latin typeface="Helvetica"/>
-                <a:ea typeface="MS PGothic"/>
-              </a:rPr>
-              <a:t> </a:t>
-            </a:r>
-          </a:p>
-          <a:p>
-            <a:pPr algn="ctr"/>
-            <a:r>
-              <a:rPr lang="en-US" sz="2800" dirty="0">
-                <a:latin typeface="Helvetica"/>
-                <a:ea typeface="MS PGothic"/>
-              </a:rPr>
-              <a:t>Parametric Effect of Fairness</a:t>
-            </a:r>
-            <a:endParaRPr lang="en-US" sz="2800" dirty="0">
-              <a:latin typeface="Helvetica"/>
-            </a:endParaRPr>
-          </a:p>
-        </p:txBody>
-      </p:sp>
-      <p:grpSp>
-        <p:nvGrpSpPr>
-          <p:cNvPr id="15403" name="Group 15402">
-            <a:extLst>
-              <a:ext uri="{FF2B5EF4-FFF2-40B4-BE49-F238E27FC236}">
-                <a16:creationId xmlns:a16="http://schemas.microsoft.com/office/drawing/2014/main" id="{B7BF0CFC-8AA6-1A2A-BCC0-DB1E8AE5001C}"/>
-              </a:ext>
-            </a:extLst>
-          </p:cNvPr>
-          <p:cNvGrpSpPr/>
-          <p:nvPr/>
-        </p:nvGrpSpPr>
-        <p:grpSpPr>
-          <a:xfrm>
-            <a:off x="24881694" y="15535353"/>
-            <a:ext cx="2283565" cy="4846089"/>
-            <a:chOff x="24680791" y="15399832"/>
-            <a:chExt cx="2283565" cy="4846089"/>
-          </a:xfrm>
-        </p:grpSpPr>
-        <p:sp>
-          <p:nvSpPr>
-            <p:cNvPr id="23" name="TextBox 22">
-              <a:extLst>
-                <a:ext uri="{FF2B5EF4-FFF2-40B4-BE49-F238E27FC236}">
-                  <a16:creationId xmlns:a16="http://schemas.microsoft.com/office/drawing/2014/main" id="{2146309B-EED2-981B-5C01-7DC5AD3210E9}"/>
-                </a:ext>
-              </a:extLst>
-            </p:cNvPr>
-            <p:cNvSpPr txBox="1"/>
-            <p:nvPr/>
-          </p:nvSpPr>
-          <p:spPr>
-            <a:xfrm>
-              <a:off x="25146473" y="17983729"/>
-              <a:ext cx="1817883" cy="523220"/>
-            </a:xfrm>
-            <a:prstGeom prst="rect">
-              <a:avLst/>
-            </a:prstGeom>
-            <a:noFill/>
-          </p:spPr>
-          <p:txBody>
-            <a:bodyPr wrap="square">
-              <a:spAutoFit/>
-            </a:bodyPr>
-            <a:lstStyle/>
-            <a:p>
-              <a:r>
-                <a:rPr lang="en-US" sz="2800">
-                  <a:latin typeface="Helvetica"/>
-                  <a:ea typeface="MS PGothic"/>
-                </a:rPr>
-                <a:t>0</a:t>
-              </a:r>
-              <a:endParaRPr lang="en-US" sz="2800">
-                <a:latin typeface="Helvetica"/>
-              </a:endParaRPr>
-            </a:p>
-          </p:txBody>
-        </p:sp>
-        <p:sp>
-          <p:nvSpPr>
-            <p:cNvPr id="27" name="TextBox 26">
-              <a:extLst>
-                <a:ext uri="{FF2B5EF4-FFF2-40B4-BE49-F238E27FC236}">
-                  <a16:creationId xmlns:a16="http://schemas.microsoft.com/office/drawing/2014/main" id="{9AD52618-BC17-B99E-F4EF-72C7B533E574}"/>
-                </a:ext>
-              </a:extLst>
-            </p:cNvPr>
-            <p:cNvSpPr txBox="1"/>
-            <p:nvPr/>
-          </p:nvSpPr>
-          <p:spPr>
-            <a:xfrm>
-              <a:off x="24816037" y="16219186"/>
-              <a:ext cx="1817883" cy="523220"/>
-            </a:xfrm>
-            <a:prstGeom prst="rect">
-              <a:avLst/>
-            </a:prstGeom>
-            <a:noFill/>
-          </p:spPr>
-          <p:txBody>
-            <a:bodyPr wrap="square">
-              <a:spAutoFit/>
-            </a:bodyPr>
-            <a:lstStyle/>
-            <a:p>
-              <a:r>
-                <a:rPr lang="en-US" sz="2800">
-                  <a:latin typeface="Helvetica"/>
-                  <a:ea typeface="MS PGothic"/>
-                </a:rPr>
-                <a:t>100</a:t>
-              </a:r>
-              <a:endParaRPr lang="en-US" sz="2800">
-                <a:latin typeface="Helvetica"/>
-              </a:endParaRPr>
-            </a:p>
-          </p:txBody>
-        </p:sp>
-        <p:sp>
-          <p:nvSpPr>
-            <p:cNvPr id="28" name="TextBox 27">
-              <a:extLst>
-                <a:ext uri="{FF2B5EF4-FFF2-40B4-BE49-F238E27FC236}">
-                  <a16:creationId xmlns:a16="http://schemas.microsoft.com/office/drawing/2014/main" id="{9A8BD43D-8317-7797-CEB5-A56981AF26E1}"/>
-                </a:ext>
-              </a:extLst>
-            </p:cNvPr>
-            <p:cNvSpPr txBox="1"/>
-            <p:nvPr/>
-          </p:nvSpPr>
-          <p:spPr>
-            <a:xfrm>
-              <a:off x="24680791" y="19722701"/>
-              <a:ext cx="1817883" cy="523220"/>
-            </a:xfrm>
-            <a:prstGeom prst="rect">
-              <a:avLst/>
-            </a:prstGeom>
-            <a:noFill/>
-          </p:spPr>
-          <p:txBody>
-            <a:bodyPr wrap="square">
-              <a:spAutoFit/>
-            </a:bodyPr>
-            <a:lstStyle/>
-            <a:p>
-              <a:r>
-                <a:rPr lang="en-US" sz="2800">
-                  <a:latin typeface="Helvetica"/>
-                  <a:ea typeface="MS PGothic"/>
-                </a:rPr>
-                <a:t>-100</a:t>
-              </a:r>
-              <a:endParaRPr lang="en-US" sz="2800">
-                <a:latin typeface="Helvetica"/>
-              </a:endParaRPr>
-            </a:p>
-          </p:txBody>
-        </p:sp>
-        <p:sp>
-          <p:nvSpPr>
-            <p:cNvPr id="29" name="TextBox 28">
-              <a:extLst>
-                <a:ext uri="{FF2B5EF4-FFF2-40B4-BE49-F238E27FC236}">
-                  <a16:creationId xmlns:a16="http://schemas.microsoft.com/office/drawing/2014/main" id="{CC2C4C7D-F3DE-C76E-6FFA-7D21377D6A49}"/>
-                </a:ext>
-              </a:extLst>
-            </p:cNvPr>
-            <p:cNvSpPr txBox="1"/>
-            <p:nvPr/>
-          </p:nvSpPr>
-          <p:spPr>
-            <a:xfrm>
-              <a:off x="24805015" y="15399832"/>
-              <a:ext cx="1817883" cy="523220"/>
-            </a:xfrm>
-            <a:prstGeom prst="rect">
-              <a:avLst/>
-            </a:prstGeom>
-            <a:noFill/>
-          </p:spPr>
-          <p:txBody>
-            <a:bodyPr wrap="square">
-              <a:spAutoFit/>
-            </a:bodyPr>
-            <a:lstStyle/>
-            <a:p>
-              <a:r>
-                <a:rPr lang="en-US" sz="2800">
-                  <a:latin typeface="Helvetica"/>
-                  <a:ea typeface="MS PGothic"/>
-                </a:rPr>
-                <a:t>150</a:t>
-              </a:r>
-              <a:endParaRPr lang="en-US" sz="2800">
-                <a:latin typeface="Helvetica"/>
-              </a:endParaRPr>
-            </a:p>
-          </p:txBody>
-        </p:sp>
-        <p:sp>
-          <p:nvSpPr>
-            <p:cNvPr id="31" name="TextBox 30">
-              <a:extLst>
-                <a:ext uri="{FF2B5EF4-FFF2-40B4-BE49-F238E27FC236}">
-                  <a16:creationId xmlns:a16="http://schemas.microsoft.com/office/drawing/2014/main" id="{8A60D2C5-9283-4BB3-5E8A-7369BE925F8A}"/>
-                </a:ext>
-              </a:extLst>
-            </p:cNvPr>
-            <p:cNvSpPr txBox="1"/>
-            <p:nvPr/>
-          </p:nvSpPr>
-          <p:spPr>
-            <a:xfrm>
-              <a:off x="25003081" y="17073419"/>
-              <a:ext cx="1817883" cy="523220"/>
-            </a:xfrm>
-            <a:prstGeom prst="rect">
-              <a:avLst/>
-            </a:prstGeom>
-            <a:noFill/>
-          </p:spPr>
-          <p:txBody>
-            <a:bodyPr wrap="square">
-              <a:spAutoFit/>
-            </a:bodyPr>
-            <a:lstStyle/>
-            <a:p>
-              <a:r>
-                <a:rPr lang="en-US" sz="2800">
-                  <a:latin typeface="Helvetica"/>
-                  <a:ea typeface="MS PGothic"/>
-                </a:rPr>
-                <a:t>50</a:t>
-              </a:r>
-              <a:endParaRPr lang="en-US" sz="2800">
-                <a:latin typeface="Helvetica"/>
-              </a:endParaRPr>
-            </a:p>
-          </p:txBody>
-        </p:sp>
-        <p:sp>
-          <p:nvSpPr>
-            <p:cNvPr id="32" name="TextBox 31">
-              <a:extLst>
-                <a:ext uri="{FF2B5EF4-FFF2-40B4-BE49-F238E27FC236}">
-                  <a16:creationId xmlns:a16="http://schemas.microsoft.com/office/drawing/2014/main" id="{355ACB0D-EFFD-1F04-EB5F-17E97CC051AF}"/>
-                </a:ext>
-              </a:extLst>
-            </p:cNvPr>
-            <p:cNvSpPr txBox="1"/>
-            <p:nvPr/>
-          </p:nvSpPr>
-          <p:spPr>
-            <a:xfrm>
-              <a:off x="24891181" y="18832596"/>
-              <a:ext cx="1817883" cy="523220"/>
-            </a:xfrm>
-            <a:prstGeom prst="rect">
-              <a:avLst/>
-            </a:prstGeom>
-            <a:noFill/>
-          </p:spPr>
-          <p:txBody>
-            <a:bodyPr wrap="square">
-              <a:spAutoFit/>
-            </a:bodyPr>
-            <a:lstStyle/>
-            <a:p>
-              <a:r>
-                <a:rPr lang="en-US" sz="2800">
-                  <a:latin typeface="Helvetica"/>
-                  <a:ea typeface="MS PGothic"/>
-                </a:rPr>
-                <a:t>-50</a:t>
-              </a:r>
-              <a:endParaRPr lang="en-US" sz="2800">
-                <a:latin typeface="Helvetica"/>
-              </a:endParaRPr>
-            </a:p>
-          </p:txBody>
-        </p:sp>
-      </p:grpSp>
-      <p:sp>
-        <p:nvSpPr>
           <p:cNvPr id="35" name="TextBox 34">
             <a:extLst>
               <a:ext uri="{FF2B5EF4-FFF2-40B4-BE49-F238E27FC236}">
@@ -8720,7 +7545,7 @@
         </p:nvSpPr>
         <p:spPr>
           <a:xfrm>
-            <a:off x="25100581" y="25168250"/>
+            <a:off x="16257885" y="24711152"/>
             <a:ext cx="1046440" cy="6220601"/>
           </a:xfrm>
           <a:prstGeom prst="rect">
@@ -8780,415 +7605,6 @@
             <a:endParaRPr lang="en-US" sz="2800" dirty="0">
               <a:latin typeface="Helvetica"/>
             </a:endParaRPr>
-          </a:p>
-        </p:txBody>
-      </p:sp>
-      <p:sp>
-        <p:nvSpPr>
-          <p:cNvPr id="58" name="TextBox 57">
-            <a:extLst>
-              <a:ext uri="{FF2B5EF4-FFF2-40B4-BE49-F238E27FC236}">
-                <a16:creationId xmlns:a16="http://schemas.microsoft.com/office/drawing/2014/main" id="{CF8F959E-0952-02EF-7EAF-5D5E65A0EC8B}"/>
-              </a:ext>
-            </a:extLst>
-          </p:cNvPr>
-          <p:cNvSpPr txBox="1"/>
-          <p:nvPr/>
-        </p:nvSpPr>
-        <p:spPr>
-          <a:xfrm>
-            <a:off x="26019365" y="30226433"/>
-            <a:ext cx="1817883" cy="523220"/>
-          </a:xfrm>
-          <a:prstGeom prst="rect">
-            <a:avLst/>
-          </a:prstGeom>
-          <a:noFill/>
-        </p:spPr>
-        <p:txBody>
-          <a:bodyPr wrap="square">
-            <a:spAutoFit/>
-          </a:bodyPr>
-          <a:lstStyle/>
-          <a:p>
-            <a:r>
-              <a:rPr lang="en-US" sz="2800">
-                <a:latin typeface="Helvetica"/>
-                <a:ea typeface="MS PGothic"/>
-              </a:rPr>
-              <a:t>-1.2</a:t>
-            </a:r>
-            <a:endParaRPr lang="en-US" sz="2800">
-              <a:latin typeface="Helvetica"/>
-            </a:endParaRPr>
-          </a:p>
-        </p:txBody>
-      </p:sp>
-      <p:sp>
-        <p:nvSpPr>
-          <p:cNvPr id="60" name="TextBox 59">
-            <a:extLst>
-              <a:ext uri="{FF2B5EF4-FFF2-40B4-BE49-F238E27FC236}">
-                <a16:creationId xmlns:a16="http://schemas.microsoft.com/office/drawing/2014/main" id="{E3BA5B0D-B1AC-644C-79D7-BC70641DADED}"/>
-              </a:ext>
-            </a:extLst>
-          </p:cNvPr>
-          <p:cNvSpPr txBox="1"/>
-          <p:nvPr/>
-        </p:nvSpPr>
-        <p:spPr>
-          <a:xfrm>
-            <a:off x="26147021" y="26687545"/>
-            <a:ext cx="1817883" cy="523220"/>
-          </a:xfrm>
-          <a:prstGeom prst="rect">
-            <a:avLst/>
-          </a:prstGeom>
-          <a:noFill/>
-        </p:spPr>
-        <p:txBody>
-          <a:bodyPr wrap="square">
-            <a:spAutoFit/>
-          </a:bodyPr>
-          <a:lstStyle/>
-          <a:p>
-            <a:r>
-              <a:rPr lang="en-US" sz="2800">
-                <a:latin typeface="Helvetica"/>
-                <a:ea typeface="MS PGothic"/>
-              </a:rPr>
-              <a:t>0.4</a:t>
-            </a:r>
-            <a:endParaRPr lang="en-US" sz="2800">
-              <a:latin typeface="Helvetica"/>
-            </a:endParaRPr>
-          </a:p>
-        </p:txBody>
-      </p:sp>
-      <p:sp>
-        <p:nvSpPr>
-          <p:cNvPr id="61" name="TextBox 60">
-            <a:extLst>
-              <a:ext uri="{FF2B5EF4-FFF2-40B4-BE49-F238E27FC236}">
-                <a16:creationId xmlns:a16="http://schemas.microsoft.com/office/drawing/2014/main" id="{9A5C9908-4E1F-77B3-0715-66DB554C7C7A}"/>
-              </a:ext>
-            </a:extLst>
-          </p:cNvPr>
-          <p:cNvSpPr txBox="1"/>
-          <p:nvPr/>
-        </p:nvSpPr>
-        <p:spPr>
-          <a:xfrm>
-            <a:off x="26380686" y="27536397"/>
-            <a:ext cx="1817883" cy="523220"/>
-          </a:xfrm>
-          <a:prstGeom prst="rect">
-            <a:avLst/>
-          </a:prstGeom>
-          <a:noFill/>
-        </p:spPr>
-        <p:txBody>
-          <a:bodyPr wrap="square">
-            <a:spAutoFit/>
-          </a:bodyPr>
-          <a:lstStyle/>
-          <a:p>
-            <a:r>
-              <a:rPr lang="en-US" sz="2800">
-                <a:latin typeface="Helvetica"/>
-                <a:ea typeface="MS PGothic"/>
-              </a:rPr>
-              <a:t>0</a:t>
-            </a:r>
-            <a:endParaRPr lang="en-US" sz="2800">
-              <a:latin typeface="Helvetica"/>
-            </a:endParaRPr>
-          </a:p>
-        </p:txBody>
-      </p:sp>
-      <p:sp>
-        <p:nvSpPr>
-          <p:cNvPr id="67" name="TextBox 66">
-            <a:extLst>
-              <a:ext uri="{FF2B5EF4-FFF2-40B4-BE49-F238E27FC236}">
-                <a16:creationId xmlns:a16="http://schemas.microsoft.com/office/drawing/2014/main" id="{1DAE6AE4-74C8-D8FC-8129-FF3D04D3A2CD}"/>
-              </a:ext>
-            </a:extLst>
-          </p:cNvPr>
-          <p:cNvSpPr txBox="1"/>
-          <p:nvPr/>
-        </p:nvSpPr>
-        <p:spPr>
-          <a:xfrm>
-            <a:off x="26055551" y="29295977"/>
-            <a:ext cx="1817883" cy="523220"/>
-          </a:xfrm>
-          <a:prstGeom prst="rect">
-            <a:avLst/>
-          </a:prstGeom>
-          <a:noFill/>
-        </p:spPr>
-        <p:txBody>
-          <a:bodyPr wrap="square">
-            <a:spAutoFit/>
-          </a:bodyPr>
-          <a:lstStyle/>
-          <a:p>
-            <a:r>
-              <a:rPr lang="en-US" sz="2800">
-                <a:latin typeface="Helvetica"/>
-                <a:ea typeface="MS PGothic"/>
-              </a:rPr>
-              <a:t>-0.8</a:t>
-            </a:r>
-            <a:endParaRPr lang="en-US" sz="2800">
-              <a:latin typeface="Helvetica"/>
-            </a:endParaRPr>
-          </a:p>
-        </p:txBody>
-      </p:sp>
-      <p:sp>
-        <p:nvSpPr>
-          <p:cNvPr id="75" name="TextBox 74">
-            <a:extLst>
-              <a:ext uri="{FF2B5EF4-FFF2-40B4-BE49-F238E27FC236}">
-                <a16:creationId xmlns:a16="http://schemas.microsoft.com/office/drawing/2014/main" id="{CF19FF0D-8F2A-7FE3-57AA-717C50B39DBD}"/>
-              </a:ext>
-            </a:extLst>
-          </p:cNvPr>
-          <p:cNvSpPr txBox="1"/>
-          <p:nvPr/>
-        </p:nvSpPr>
-        <p:spPr>
-          <a:xfrm>
-            <a:off x="26177518" y="25839671"/>
-            <a:ext cx="1817883" cy="523220"/>
-          </a:xfrm>
-          <a:prstGeom prst="rect">
-            <a:avLst/>
-          </a:prstGeom>
-          <a:noFill/>
-        </p:spPr>
-        <p:txBody>
-          <a:bodyPr wrap="square">
-            <a:spAutoFit/>
-          </a:bodyPr>
-          <a:lstStyle/>
-          <a:p>
-            <a:r>
-              <a:rPr lang="en-US" sz="2800">
-                <a:latin typeface="Helvetica"/>
-                <a:ea typeface="MS PGothic"/>
-              </a:rPr>
-              <a:t>0.8</a:t>
-            </a:r>
-            <a:endParaRPr lang="en-US" sz="2800">
-              <a:latin typeface="Helvetica"/>
-            </a:endParaRPr>
-          </a:p>
-        </p:txBody>
-      </p:sp>
-      <p:sp>
-        <p:nvSpPr>
-          <p:cNvPr id="76" name="TextBox 75">
-            <a:extLst>
-              <a:ext uri="{FF2B5EF4-FFF2-40B4-BE49-F238E27FC236}">
-                <a16:creationId xmlns:a16="http://schemas.microsoft.com/office/drawing/2014/main" id="{768A634B-F98A-84A5-06C5-1A7352586B5B}"/>
-              </a:ext>
-            </a:extLst>
-          </p:cNvPr>
-          <p:cNvSpPr txBox="1"/>
-          <p:nvPr/>
-        </p:nvSpPr>
-        <p:spPr>
-          <a:xfrm>
-            <a:off x="26060705" y="28400723"/>
-            <a:ext cx="1817883" cy="523220"/>
-          </a:xfrm>
-          <a:prstGeom prst="rect">
-            <a:avLst/>
-          </a:prstGeom>
-          <a:noFill/>
-        </p:spPr>
-        <p:txBody>
-          <a:bodyPr wrap="square">
-            <a:spAutoFit/>
-          </a:bodyPr>
-          <a:lstStyle/>
-          <a:p>
-            <a:r>
-              <a:rPr lang="en-US" sz="2800">
-                <a:latin typeface="Helvetica"/>
-                <a:ea typeface="MS PGothic"/>
-              </a:rPr>
-              <a:t>-0.4</a:t>
-            </a:r>
-            <a:endParaRPr lang="en-US" sz="2800">
-              <a:latin typeface="Helvetica"/>
-            </a:endParaRPr>
-          </a:p>
-        </p:txBody>
-      </p:sp>
-      <p:sp>
-        <p:nvSpPr>
-          <p:cNvPr id="77" name="TextBox 76">
-            <a:extLst>
-              <a:ext uri="{FF2B5EF4-FFF2-40B4-BE49-F238E27FC236}">
-                <a16:creationId xmlns:a16="http://schemas.microsoft.com/office/drawing/2014/main" id="{B15BBA0A-DD67-6B9C-B5BB-76CF43AFFA0A}"/>
-              </a:ext>
-            </a:extLst>
-          </p:cNvPr>
-          <p:cNvSpPr txBox="1"/>
-          <p:nvPr/>
-        </p:nvSpPr>
-        <p:spPr>
-          <a:xfrm>
-            <a:off x="19957299" y="25908025"/>
-            <a:ext cx="4584887" cy="1077218"/>
-          </a:xfrm>
-          <a:prstGeom prst="rect">
-            <a:avLst/>
-          </a:prstGeom>
-          <a:noFill/>
-        </p:spPr>
-        <p:txBody>
-          <a:bodyPr rot="0" spcFirstLastPara="0" vertOverflow="overflow" horzOverflow="overflow" vert="horz" wrap="square" lIns="91440" tIns="45720" rIns="91440" bIns="45720" numCol="1" spcCol="0" rtlCol="0" fromWordArt="0" anchor="t" anchorCtr="0" forceAA="0" compatLnSpc="1">
-            <a:prstTxWarp prst="textNoShape">
-              <a:avLst/>
-            </a:prstTxWarp>
-            <a:spAutoFit/>
-          </a:bodyPr>
-          <a:lstStyle/>
-          <a:p>
-            <a:pPr algn="ctr"/>
-            <a:r>
-              <a:rPr lang="en-US" sz="3200" b="1" dirty="0">
-                <a:latin typeface="Helvetica"/>
-                <a:ea typeface="MS PGothic"/>
-              </a:rPr>
-              <a:t>A Priori ROI</a:t>
-            </a:r>
-          </a:p>
-          <a:p>
-            <a:pPr algn="ctr"/>
-            <a:r>
-              <a:rPr lang="en-US" sz="3200" b="1" dirty="0">
-                <a:latin typeface="Helvetica"/>
-                <a:ea typeface="MS PGothic"/>
-              </a:rPr>
-              <a:t>Target: </a:t>
-            </a:r>
-            <a:r>
-              <a:rPr lang="en-US" sz="3200" b="1" dirty="0" err="1">
-                <a:latin typeface="Helvetica"/>
-                <a:ea typeface="MS PGothic"/>
-              </a:rPr>
-              <a:t>pTPJ</a:t>
-            </a:r>
-            <a:endParaRPr lang="en-US" sz="3200" b="1" dirty="0">
-              <a:latin typeface="Helvetica"/>
-              <a:ea typeface="MS PGothic"/>
-            </a:endParaRPr>
-          </a:p>
-        </p:txBody>
-      </p:sp>
-      <p:sp>
-        <p:nvSpPr>
-          <p:cNvPr id="78" name="TextBox 77">
-            <a:extLst>
-              <a:ext uri="{FF2B5EF4-FFF2-40B4-BE49-F238E27FC236}">
-                <a16:creationId xmlns:a16="http://schemas.microsoft.com/office/drawing/2014/main" id="{DE8BE16A-2A4F-200C-4E2D-E5657714A5B0}"/>
-              </a:ext>
-            </a:extLst>
-          </p:cNvPr>
-          <p:cNvSpPr txBox="1"/>
-          <p:nvPr/>
-        </p:nvSpPr>
-        <p:spPr>
-          <a:xfrm>
-            <a:off x="20785502" y="30697453"/>
-            <a:ext cx="2771296" cy="954107"/>
-          </a:xfrm>
-          <a:prstGeom prst="rect">
-            <a:avLst/>
-          </a:prstGeom>
-          <a:noFill/>
-        </p:spPr>
-        <p:txBody>
-          <a:bodyPr wrap="square" lIns="91440" tIns="45720" rIns="91440" bIns="45720" anchor="t">
-            <a:spAutoFit/>
-          </a:bodyPr>
-          <a:lstStyle/>
-          <a:p>
-            <a:pPr algn="ctr"/>
-            <a:r>
-              <a:rPr lang="en-US" sz="2800" dirty="0">
-                <a:latin typeface="Helvetica"/>
-                <a:ea typeface="MS PGothic"/>
-              </a:rPr>
-              <a:t>X=50</a:t>
-            </a:r>
-          </a:p>
-          <a:p>
-            <a:pPr algn="ctr"/>
-            <a:endParaRPr lang="en-US" sz="2800" dirty="0">
-              <a:latin typeface="Helvetica"/>
-            </a:endParaRPr>
-          </a:p>
-        </p:txBody>
-      </p:sp>
-      <p:sp>
-        <p:nvSpPr>
-          <p:cNvPr id="79" name="TextBox 78">
-            <a:extLst>
-              <a:ext uri="{FF2B5EF4-FFF2-40B4-BE49-F238E27FC236}">
-                <a16:creationId xmlns:a16="http://schemas.microsoft.com/office/drawing/2014/main" id="{4787F7ED-B77A-D580-B1DD-ED37BB4E8ECF}"/>
-              </a:ext>
-            </a:extLst>
-          </p:cNvPr>
-          <p:cNvSpPr txBox="1"/>
-          <p:nvPr/>
-        </p:nvSpPr>
-        <p:spPr>
-          <a:xfrm>
-            <a:off x="15671037" y="25910689"/>
-            <a:ext cx="4584887" cy="1077218"/>
-          </a:xfrm>
-          <a:prstGeom prst="rect">
-            <a:avLst/>
-          </a:prstGeom>
-          <a:noFill/>
-        </p:spPr>
-        <p:txBody>
-          <a:bodyPr rot="0" spcFirstLastPara="0" vertOverflow="overflow" horzOverflow="overflow" vert="horz" wrap="square" lIns="91440" tIns="45720" rIns="91440" bIns="45720" numCol="1" spcCol="0" rtlCol="0" fromWordArt="0" anchor="t" anchorCtr="0" forceAA="0" compatLnSpc="1">
-            <a:prstTxWarp prst="textNoShape">
-              <a:avLst/>
-            </a:prstTxWarp>
-            <a:spAutoFit/>
-          </a:bodyPr>
-          <a:lstStyle/>
-          <a:p>
-            <a:pPr algn="ctr"/>
-            <a:r>
-              <a:rPr lang="en-US" sz="3200" b="1" dirty="0">
-                <a:latin typeface="Helvetica"/>
-                <a:ea typeface="MS PGothic"/>
-              </a:rPr>
-              <a:t>Seed Region:</a:t>
-            </a:r>
-            <a:br>
-              <a:rPr lang="en-US" sz="3200" b="1" dirty="0">
-                <a:latin typeface="Helvetica"/>
-                <a:ea typeface="MS PGothic"/>
-              </a:rPr>
-            </a:br>
-            <a:r>
-              <a:rPr lang="en-US" sz="3200" b="1" dirty="0">
-                <a:latin typeface="Helvetica"/>
-                <a:ea typeface="MS PGothic"/>
-              </a:rPr>
-              <a:t>Ventral Striatum</a:t>
-            </a:r>
           </a:p>
         </p:txBody>
       </p:sp>
@@ -9206,8 +7622,8 @@
         </p:nvSpPr>
         <p:spPr>
           <a:xfrm>
-            <a:off x="15886074" y="30749653"/>
-            <a:ext cx="4068810" cy="954107"/>
+            <a:off x="26561482" y="29968178"/>
+            <a:ext cx="2664868" cy="954107"/>
           </a:xfrm>
           <a:prstGeom prst="rect">
             <a:avLst/>
@@ -9222,557 +7638,17 @@
           <a:p>
             <a:pPr algn="ctr"/>
             <a:r>
-              <a:rPr lang="en-US" sz="2800">
+              <a:rPr lang="en-US" sz="2800" dirty="0">
                 <a:latin typeface="Helvetica"/>
                 <a:ea typeface="MS PGothic"/>
               </a:rPr>
-              <a:t>Y=12</a:t>
+              <a:t>X=5</a:t>
             </a:r>
           </a:p>
           <a:p>
             <a:pPr algn="ctr"/>
-            <a:endParaRPr lang="en-US" sz="2800">
+            <a:endParaRPr lang="en-US" sz="2800" dirty="0">
               <a:latin typeface="Helvetica"/>
-            </a:endParaRPr>
-          </a:p>
-        </p:txBody>
-      </p:sp>
-      <p:grpSp>
-        <p:nvGrpSpPr>
-          <p:cNvPr id="71" name="Group 70">
-            <a:extLst>
-              <a:ext uri="{FF2B5EF4-FFF2-40B4-BE49-F238E27FC236}">
-                <a16:creationId xmlns:a16="http://schemas.microsoft.com/office/drawing/2014/main" id="{814CA469-7657-DBE5-12BC-BAA454599468}"/>
-              </a:ext>
-            </a:extLst>
-          </p:cNvPr>
-          <p:cNvGrpSpPr/>
-          <p:nvPr/>
-        </p:nvGrpSpPr>
-        <p:grpSpPr>
-          <a:xfrm>
-            <a:off x="9652951" y="17772995"/>
-            <a:ext cx="4137746" cy="1716829"/>
-            <a:chOff x="9671298" y="17666601"/>
-            <a:chExt cx="4137746" cy="1716829"/>
-          </a:xfrm>
-        </p:grpSpPr>
-        <p:cxnSp>
-          <p:nvCxnSpPr>
-            <p:cNvPr id="20" name="Connector: Elbow 19">
-              <a:extLst>
-                <a:ext uri="{FF2B5EF4-FFF2-40B4-BE49-F238E27FC236}">
-                  <a16:creationId xmlns:a16="http://schemas.microsoft.com/office/drawing/2014/main" id="{4C9C54D6-8639-996D-7EDB-4A5B70577FDF}"/>
-                </a:ext>
-              </a:extLst>
-            </p:cNvPr>
-            <p:cNvCxnSpPr>
-              <a:cxnSpLocks/>
-            </p:cNvCxnSpPr>
-            <p:nvPr/>
-          </p:nvCxnSpPr>
-          <p:spPr bwMode="auto">
-            <a:xfrm rot="16200000" flipH="1">
-              <a:off x="13057930" y="18587512"/>
-              <a:ext cx="785486" cy="716743"/>
-            </a:xfrm>
-            <a:prstGeom prst="bentConnector3">
-              <a:avLst>
-                <a:gd name="adj1" fmla="val -5434"/>
-              </a:avLst>
-            </a:prstGeom>
-            <a:solidFill>
-              <a:schemeClr val="accent1"/>
-            </a:solidFill>
-            <a:ln w="76200" cap="flat" cmpd="sng" algn="ctr">
-              <a:solidFill>
-                <a:schemeClr val="tx1"/>
-              </a:solidFill>
-              <a:prstDash val="dash"/>
-              <a:round/>
-              <a:headEnd type="none" w="med" len="med"/>
-              <a:tailEnd type="triangle"/>
-            </a:ln>
-            <a:effectLst/>
-          </p:spPr>
-        </p:cxnSp>
-        <p:grpSp>
-          <p:nvGrpSpPr>
-            <p:cNvPr id="65" name="Group 64">
-              <a:extLst>
-                <a:ext uri="{FF2B5EF4-FFF2-40B4-BE49-F238E27FC236}">
-                  <a16:creationId xmlns:a16="http://schemas.microsoft.com/office/drawing/2014/main" id="{89055108-BE18-C2C5-0FF5-A55BEBB4A05F}"/>
-                </a:ext>
-              </a:extLst>
-            </p:cNvPr>
-            <p:cNvGrpSpPr/>
-            <p:nvPr/>
-          </p:nvGrpSpPr>
-          <p:grpSpPr>
-            <a:xfrm>
-              <a:off x="9671298" y="17666601"/>
-              <a:ext cx="3434963" cy="1716829"/>
-              <a:chOff x="9671298" y="17666601"/>
-              <a:chExt cx="3434963" cy="1716829"/>
-            </a:xfrm>
-          </p:grpSpPr>
-          <p:sp>
-            <p:nvSpPr>
-              <p:cNvPr id="8" name="TextBox 7">
-                <a:extLst>
-                  <a:ext uri="{FF2B5EF4-FFF2-40B4-BE49-F238E27FC236}">
-                    <a16:creationId xmlns:a16="http://schemas.microsoft.com/office/drawing/2014/main" id="{8F94C34F-C114-09E7-7592-2C68A047774A}"/>
-                  </a:ext>
-                </a:extLst>
-              </p:cNvPr>
-              <p:cNvSpPr txBox="1"/>
-              <p:nvPr/>
-            </p:nvSpPr>
-            <p:spPr>
-              <a:xfrm>
-                <a:off x="9671298" y="17740837"/>
-                <a:ext cx="3434963" cy="1569660"/>
-              </a:xfrm>
-              <a:prstGeom prst="rect">
-                <a:avLst/>
-              </a:prstGeom>
-              <a:noFill/>
-            </p:spPr>
-            <p:txBody>
-              <a:bodyPr rot="0" spcFirstLastPara="0" vertOverflow="overflow" horzOverflow="overflow" vert="horz" wrap="square" lIns="91440" tIns="45720" rIns="91440" bIns="45720" numCol="1" spcCol="0" rtlCol="0" fromWordArt="0" anchor="t" anchorCtr="0" forceAA="0" compatLnSpc="1">
-                <a:prstTxWarp prst="textNoShape">
-                  <a:avLst/>
-                </a:prstTxWarp>
-                <a:spAutoFit/>
-              </a:bodyPr>
-              <a:lstStyle/>
-              <a:p>
-                <a:pPr algn="ctr"/>
-                <a:r>
-                  <a:rPr lang="en-US" sz="3200" b="1" dirty="0">
-                    <a:latin typeface="Helvetica"/>
-                    <a:ea typeface="MS PGothic"/>
-                  </a:rPr>
-                  <a:t>Scan the QR code to see the</a:t>
-                </a:r>
-                <a:endParaRPr lang="en-US" sz="3200" b="1" dirty="0"/>
-              </a:p>
-              <a:p>
-                <a:pPr algn="ctr"/>
-                <a:r>
-                  <a:rPr lang="en-US" sz="3200" b="1" u="sng" dirty="0">
-                    <a:latin typeface="Helvetica"/>
-                    <a:ea typeface="MS PGothic"/>
-                  </a:rPr>
-                  <a:t>Pre-registration!</a:t>
-                </a:r>
-                <a:endParaRPr lang="en-US" sz="3200" b="1" u="sng" dirty="0"/>
-              </a:p>
-            </p:txBody>
-          </p:sp>
-          <p:sp>
-            <p:nvSpPr>
-              <p:cNvPr id="15" name="Rectangle 14">
-                <a:extLst>
-                  <a:ext uri="{FF2B5EF4-FFF2-40B4-BE49-F238E27FC236}">
-                    <a16:creationId xmlns:a16="http://schemas.microsoft.com/office/drawing/2014/main" id="{353421B0-7681-A37B-CA3F-986E07C1DB77}"/>
-                  </a:ext>
-                </a:extLst>
-              </p:cNvPr>
-              <p:cNvSpPr/>
-              <p:nvPr/>
-            </p:nvSpPr>
-            <p:spPr bwMode="auto">
-              <a:xfrm>
-                <a:off x="9719468" y="17666601"/>
-                <a:ext cx="3375557" cy="1716829"/>
-              </a:xfrm>
-              <a:prstGeom prst="rect">
-                <a:avLst/>
-              </a:prstGeom>
-              <a:noFill/>
-              <a:ln w="57150" cap="flat" cmpd="sng" algn="ctr">
-                <a:solidFill>
-                  <a:schemeClr val="tx1"/>
-                </a:solidFill>
-                <a:prstDash val="solid"/>
-                <a:round/>
-                <a:headEnd type="none" w="med" len="med"/>
-                <a:tailEnd type="none" w="med" len="med"/>
-              </a:ln>
-              <a:effectLst/>
-            </p:spPr>
-            <p:txBody>
-              <a:bodyPr vert="horz" wrap="square" lIns="91440" tIns="45720" rIns="91440" bIns="45720" numCol="1" rtlCol="0" anchor="t" anchorCtr="0" compatLnSpc="1">
-                <a:prstTxWarp prst="textNoShape">
-                  <a:avLst/>
-                </a:prstTxWarp>
-              </a:bodyPr>
-              <a:lstStyle/>
-              <a:p>
-                <a:pPr marL="0" marR="0" indent="0" algn="l" defTabSz="4389438" rtl="0" eaLnBrk="1" fontAlgn="base" latinLnBrk="0" hangingPunct="1">
-                  <a:lnSpc>
-                    <a:spcPct val="100000"/>
-                  </a:lnSpc>
-                  <a:spcBef>
-                    <a:spcPct val="0"/>
-                  </a:spcBef>
-                  <a:spcAft>
-                    <a:spcPct val="0"/>
-                  </a:spcAft>
-                  <a:buClrTx/>
-                  <a:buSzTx/>
-                  <a:buFontTx/>
-                  <a:buNone/>
-                  <a:tabLst/>
-                </a:pPr>
-                <a:endParaRPr kumimoji="0" lang="en-US" sz="1800" b="0" i="0" u="none" strike="noStrike" cap="none" normalizeH="0" baseline="0">
-                  <a:ln>
-                    <a:noFill/>
-                  </a:ln>
-                  <a:solidFill>
-                    <a:schemeClr val="tx1"/>
-                  </a:solidFill>
-                  <a:effectLst/>
-                  <a:latin typeface="Arial" charset="0"/>
-                  <a:cs typeface="Arial" charset="0"/>
-                </a:endParaRPr>
-              </a:p>
-            </p:txBody>
-          </p:sp>
-        </p:grpSp>
-      </p:grpSp>
-      <p:sp>
-        <p:nvSpPr>
-          <p:cNvPr id="6" name="TextBox 5">
-            <a:extLst>
-              <a:ext uri="{FF2B5EF4-FFF2-40B4-BE49-F238E27FC236}">
-                <a16:creationId xmlns:a16="http://schemas.microsoft.com/office/drawing/2014/main" id="{70FD3937-717B-30F1-EF0F-1BE3A44A9629}"/>
-              </a:ext>
-            </a:extLst>
-          </p:cNvPr>
-          <p:cNvSpPr txBox="1"/>
-          <p:nvPr/>
-        </p:nvSpPr>
-        <p:spPr>
-          <a:xfrm>
-            <a:off x="30912367" y="29293095"/>
-            <a:ext cx="12442911" cy="2146231"/>
-          </a:xfrm>
-          <a:prstGeom prst="rect">
-            <a:avLst/>
-          </a:prstGeom>
-          <a:noFill/>
-        </p:spPr>
-        <p:txBody>
-          <a:bodyPr wrap="square" lIns="91440" tIns="45720" rIns="91440" bIns="45720" anchor="t">
-            <a:spAutoFit/>
-          </a:bodyPr>
-          <a:lstStyle/>
-          <a:p>
-            <a:pPr algn="ctr">
-              <a:spcBef>
-                <a:spcPts val="360"/>
-              </a:spcBef>
-              <a:spcAft>
-                <a:spcPts val="0"/>
-              </a:spcAft>
-            </a:pPr>
-            <a:r>
-              <a:rPr lang="en-US" sz="4200" b="1" dirty="0">
-                <a:latin typeface="Helvetica"/>
-                <a:ea typeface="MS PGothic"/>
-                <a:cs typeface="Helvetica"/>
-              </a:rPr>
-              <a:t>Our findings help to characterize the role of </a:t>
-            </a:r>
-            <a:r>
-              <a:rPr lang="en-US" sz="4200" b="1" dirty="0" err="1">
-                <a:latin typeface="Helvetica"/>
-                <a:ea typeface="MS PGothic"/>
-                <a:cs typeface="Helvetica"/>
-              </a:rPr>
-              <a:t>corticostriatal</a:t>
-            </a:r>
-            <a:r>
-              <a:rPr lang="en-US" sz="4200" b="1" dirty="0">
-                <a:latin typeface="Helvetica"/>
-                <a:ea typeface="MS PGothic"/>
-                <a:cs typeface="Helvetica"/>
-              </a:rPr>
-              <a:t> connectivity in </a:t>
-            </a:r>
-            <a:endParaRPr lang="en-US" sz="4200" dirty="0">
-              <a:cs typeface="Arial"/>
-            </a:endParaRPr>
-          </a:p>
-          <a:p>
-            <a:pPr algn="ctr">
-              <a:spcBef>
-                <a:spcPts val="360"/>
-              </a:spcBef>
-              <a:spcAft>
-                <a:spcPts val="0"/>
-              </a:spcAft>
-            </a:pPr>
-            <a:r>
-              <a:rPr lang="en-US" sz="4200" b="1" dirty="0">
-                <a:latin typeface="Helvetica"/>
-                <a:ea typeface="MS PGothic"/>
-                <a:cs typeface="Helvetica"/>
-              </a:rPr>
-              <a:t>social decision making.</a:t>
-            </a:r>
-            <a:endParaRPr lang="en-US" sz="4200" dirty="0"/>
-          </a:p>
-        </p:txBody>
-      </p:sp>
-      <p:pic>
-        <p:nvPicPr>
-          <p:cNvPr id="14" name="Picture 13" descr="A logo of a university&#10;&#10;Description automatically generated">
-            <a:extLst>
-              <a:ext uri="{FF2B5EF4-FFF2-40B4-BE49-F238E27FC236}">
-                <a16:creationId xmlns:a16="http://schemas.microsoft.com/office/drawing/2014/main" id="{9F423328-9A02-A5CE-6F48-CAD10A8AF80B}"/>
-              </a:ext>
-            </a:extLst>
-          </p:cNvPr>
-          <p:cNvPicPr>
-            <a:picLocks noChangeAspect="1"/>
-          </p:cNvPicPr>
-          <p:nvPr/>
-        </p:nvPicPr>
-        <p:blipFill>
-          <a:blip>
-            <a:extLst>
-              <a:ext uri="{28A0092B-C50C-407E-A947-70E740481C1C}">
-                <a14:useLocalDpi xmlns:a14="http://schemas.microsoft.com/office/drawing/2010/main" val="0"/>
-              </a:ext>
-            </a:extLst>
-          </a:blip>
-          <a:stretch>
-            <a:fillRect/>
-          </a:stretch>
-        </p:blipFill>
-        <p:spPr>
-          <a:xfrm>
-            <a:off x="39148879" y="321878"/>
-            <a:ext cx="1819284" cy="2067919"/>
-          </a:xfrm>
-          <a:prstGeom prst="rect">
-            <a:avLst/>
-          </a:prstGeom>
-        </p:spPr>
-      </p:pic>
-      <p:sp>
-        <p:nvSpPr>
-          <p:cNvPr id="40" name="TextBox 39">
-            <a:extLst>
-              <a:ext uri="{FF2B5EF4-FFF2-40B4-BE49-F238E27FC236}">
-                <a16:creationId xmlns:a16="http://schemas.microsoft.com/office/drawing/2014/main" id="{105FE8E2-660F-0FCD-7078-BE702F17E8D4}"/>
-              </a:ext>
-            </a:extLst>
-          </p:cNvPr>
-          <p:cNvSpPr txBox="1"/>
-          <p:nvPr/>
-        </p:nvSpPr>
-        <p:spPr>
-          <a:xfrm>
-            <a:off x="478734" y="14931027"/>
-            <a:ext cx="3248775" cy="707886"/>
-          </a:xfrm>
-          <a:prstGeom prst="rect">
-            <a:avLst/>
-          </a:prstGeom>
-          <a:noFill/>
-        </p:spPr>
-        <p:txBody>
-          <a:bodyPr wrap="square" rtlCol="0">
-            <a:spAutoFit/>
-          </a:bodyPr>
-          <a:lstStyle/>
-          <a:p>
-            <a:r>
-              <a:rPr lang="en-US" sz="2000" dirty="0"/>
-              <a:t>Participant is given $8 for the trial. </a:t>
-            </a:r>
-          </a:p>
-        </p:txBody>
-      </p:sp>
-      <p:sp>
-        <p:nvSpPr>
-          <p:cNvPr id="42" name="TextBox 41">
-            <a:extLst>
-              <a:ext uri="{FF2B5EF4-FFF2-40B4-BE49-F238E27FC236}">
-                <a16:creationId xmlns:a16="http://schemas.microsoft.com/office/drawing/2014/main" id="{A61EB949-3138-6F4C-B1F2-A32F37FBDEBC}"/>
-              </a:ext>
-            </a:extLst>
-          </p:cNvPr>
-          <p:cNvSpPr txBox="1"/>
-          <p:nvPr/>
-        </p:nvSpPr>
-        <p:spPr>
-          <a:xfrm>
-            <a:off x="486702" y="19079740"/>
-            <a:ext cx="3434963" cy="1631216"/>
-          </a:xfrm>
-          <a:prstGeom prst="rect">
-            <a:avLst/>
-          </a:prstGeom>
-          <a:noFill/>
-        </p:spPr>
-        <p:txBody>
-          <a:bodyPr wrap="square" rtlCol="0">
-            <a:spAutoFit/>
-          </a:bodyPr>
-          <a:lstStyle/>
-          <a:p>
-            <a:r>
-              <a:rPr lang="en-US" sz="2000" dirty="0"/>
-              <a:t>Participant is asked to choose a greater or lesser amount to share with the partner displayed at the top of the screen.</a:t>
-            </a:r>
-          </a:p>
-        </p:txBody>
-      </p:sp>
-      <p:sp>
-        <p:nvSpPr>
-          <p:cNvPr id="49" name="TextBox 48">
-            <a:extLst>
-              <a:ext uri="{FF2B5EF4-FFF2-40B4-BE49-F238E27FC236}">
-                <a16:creationId xmlns:a16="http://schemas.microsoft.com/office/drawing/2014/main" id="{1513B533-7149-02DB-F571-D0FBD0F6FBA7}"/>
-              </a:ext>
-            </a:extLst>
-          </p:cNvPr>
-          <p:cNvSpPr txBox="1"/>
-          <p:nvPr/>
-        </p:nvSpPr>
-        <p:spPr>
-          <a:xfrm>
-            <a:off x="3161735" y="21448568"/>
-            <a:ext cx="1508172" cy="707886"/>
-          </a:xfrm>
-          <a:prstGeom prst="rect">
-            <a:avLst/>
-          </a:prstGeom>
-          <a:noFill/>
-        </p:spPr>
-        <p:txBody>
-          <a:bodyPr wrap="square" rtlCol="0">
-            <a:spAutoFit/>
-          </a:bodyPr>
-          <a:lstStyle/>
-          <a:p>
-            <a:r>
-              <a:rPr lang="en-US" sz="2000" dirty="0"/>
-              <a:t>Money sent is tripled</a:t>
-            </a:r>
-          </a:p>
-        </p:txBody>
-      </p:sp>
-      <p:sp>
-        <p:nvSpPr>
-          <p:cNvPr id="52" name="TextBox 51">
-            <a:extLst>
-              <a:ext uri="{FF2B5EF4-FFF2-40B4-BE49-F238E27FC236}">
-                <a16:creationId xmlns:a16="http://schemas.microsoft.com/office/drawing/2014/main" id="{4707B45F-027B-576B-4808-66F0A5D95489}"/>
-              </a:ext>
-            </a:extLst>
-          </p:cNvPr>
-          <p:cNvSpPr txBox="1"/>
-          <p:nvPr/>
-        </p:nvSpPr>
-        <p:spPr>
-          <a:xfrm>
-            <a:off x="4609305" y="21151595"/>
-            <a:ext cx="1439818" cy="1323439"/>
-          </a:xfrm>
-          <a:prstGeom prst="rect">
-            <a:avLst/>
-          </a:prstGeom>
-          <a:noFill/>
-        </p:spPr>
-        <p:txBody>
-          <a:bodyPr wrap="none" rtlCol="0">
-            <a:spAutoFit/>
-          </a:bodyPr>
-          <a:lstStyle/>
-          <a:p>
-            <a:r>
-              <a:rPr lang="en-US" sz="8000" b="1" dirty="0">
-                <a:solidFill>
-                  <a:srgbClr val="03DF04"/>
-                </a:solidFill>
-              </a:rPr>
-              <a:t>X3</a:t>
-            </a:r>
-          </a:p>
-        </p:txBody>
-      </p:sp>
-      <p:sp>
-        <p:nvSpPr>
-          <p:cNvPr id="15385" name="Rectangle 15384">
-            <a:extLst>
-              <a:ext uri="{FF2B5EF4-FFF2-40B4-BE49-F238E27FC236}">
-                <a16:creationId xmlns:a16="http://schemas.microsoft.com/office/drawing/2014/main" id="{3285C709-B618-5904-7A31-44E8D825CD5B}"/>
-              </a:ext>
-            </a:extLst>
-          </p:cNvPr>
-          <p:cNvSpPr/>
-          <p:nvPr/>
-        </p:nvSpPr>
-        <p:spPr bwMode="auto">
-          <a:xfrm>
-            <a:off x="7964033" y="29192296"/>
-            <a:ext cx="6652707" cy="2732092"/>
-          </a:xfrm>
-          <a:prstGeom prst="rect">
-            <a:avLst/>
-          </a:prstGeom>
-          <a:noFill/>
-          <a:ln w="57150" cap="flat" cmpd="sng" algn="ctr">
-            <a:solidFill>
-              <a:schemeClr val="tx1"/>
-            </a:solidFill>
-            <a:prstDash val="solid"/>
-            <a:round/>
-            <a:headEnd type="none" w="med" len="med"/>
-            <a:tailEnd type="none" w="med" len="med"/>
-          </a:ln>
-          <a:effectLst/>
-        </p:spPr>
-        <p:txBody>
-          <a:bodyPr vert="horz" wrap="square" lIns="91440" tIns="45720" rIns="91440" bIns="45720" numCol="1" rtlCol="0" anchor="t" anchorCtr="0" compatLnSpc="1">
-            <a:prstTxWarp prst="textNoShape">
-              <a:avLst/>
-            </a:prstTxWarp>
-          </a:bodyPr>
-          <a:lstStyle/>
-          <a:p>
-            <a:pPr marL="0" marR="0" indent="0" algn="l" defTabSz="4389438" rtl="0" eaLnBrk="1" fontAlgn="base" latinLnBrk="0" hangingPunct="1">
-              <a:lnSpc>
-                <a:spcPct val="100000"/>
-              </a:lnSpc>
-              <a:spcBef>
-                <a:spcPct val="0"/>
-              </a:spcBef>
-              <a:spcAft>
-                <a:spcPct val="0"/>
-              </a:spcAft>
-              <a:buClrTx/>
-              <a:buSzTx/>
-              <a:buFontTx/>
-              <a:buNone/>
-              <a:tabLst/>
-            </a:pPr>
-            <a:endParaRPr kumimoji="0" lang="en-US" sz="1800" b="0" i="0" u="none" strike="noStrike" cap="none" normalizeH="0" baseline="0">
-              <a:ln>
-                <a:noFill/>
-              </a:ln>
-              <a:solidFill>
-                <a:schemeClr val="tx1"/>
-              </a:solidFill>
-              <a:effectLst/>
-              <a:latin typeface="Arial" charset="0"/>
-              <a:cs typeface="Arial" charset="0"/>
             </a:endParaRPr>
           </a:p>
         </p:txBody>
@@ -9791,7 +7667,7 @@
         </p:nvGrpSpPr>
         <p:grpSpPr>
           <a:xfrm>
-            <a:off x="675947" y="26800696"/>
+            <a:off x="724818" y="29192296"/>
             <a:ext cx="6854956" cy="2277700"/>
             <a:chOff x="569101" y="26252269"/>
             <a:chExt cx="6854956" cy="2277700"/>
@@ -9963,233 +7839,6 @@
       </p:grpSp>
       <p:sp>
         <p:nvSpPr>
-          <p:cNvPr id="15415" name="TextBox 86">
-            <a:extLst>
-              <a:ext uri="{FF2B5EF4-FFF2-40B4-BE49-F238E27FC236}">
-                <a16:creationId xmlns:a16="http://schemas.microsoft.com/office/drawing/2014/main" id="{B1E3A897-53DA-649F-39B9-6F4056C35336}"/>
-              </a:ext>
-            </a:extLst>
-          </p:cNvPr>
-          <p:cNvSpPr txBox="1">
-            <a:spLocks noChangeArrowheads="1"/>
-          </p:cNvSpPr>
-          <p:nvPr/>
-        </p:nvSpPr>
-        <p:spPr bwMode="auto">
-          <a:xfrm>
-            <a:off x="31057107" y="14623506"/>
-            <a:ext cx="12355359" cy="1406539"/>
-          </a:xfrm>
-          <a:prstGeom prst="rect">
-            <a:avLst/>
-          </a:prstGeom>
-          <a:solidFill>
-            <a:schemeClr val="bg1"/>
-          </a:solidFill>
-          <a:ln>
-            <a:noFill/>
-          </a:ln>
-        </p:spPr>
-        <p:txBody>
-          <a:bodyPr wrap="square" lIns="91440" tIns="45720" rIns="91440" bIns="45720" anchor="t">
-            <a:spAutoFit/>
-          </a:bodyPr>
-          <a:lstStyle>
-            <a:lvl1pPr>
-              <a:defRPr sz="2400">
-                <a:solidFill>
-                  <a:schemeClr val="tx1"/>
-                </a:solidFill>
-                <a:latin typeface="Helvetica" panose="020B0604020202020204" pitchFamily="34" charset="0"/>
-                <a:ea typeface="MS PGothic" panose="020B0600070205080204" pitchFamily="34" charset="-128"/>
-              </a:defRPr>
-            </a:lvl1pPr>
-            <a:lvl2pPr marL="742950" indent="-285750">
-              <a:defRPr sz="2400">
-                <a:solidFill>
-                  <a:schemeClr val="tx1"/>
-                </a:solidFill>
-                <a:latin typeface="Helvetica" panose="020B0604020202020204" pitchFamily="34" charset="0"/>
-                <a:ea typeface="MS PGothic" panose="020B0600070205080204" pitchFamily="34" charset="-128"/>
-              </a:defRPr>
-            </a:lvl2pPr>
-            <a:lvl3pPr marL="1143000" indent="-228600">
-              <a:defRPr sz="2400">
-                <a:solidFill>
-                  <a:schemeClr val="tx1"/>
-                </a:solidFill>
-                <a:latin typeface="Helvetica" panose="020B0604020202020204" pitchFamily="34" charset="0"/>
-                <a:ea typeface="MS PGothic" panose="020B0600070205080204" pitchFamily="34" charset="-128"/>
-              </a:defRPr>
-            </a:lvl3pPr>
-            <a:lvl4pPr marL="1600200" indent="-228600">
-              <a:defRPr sz="2400">
-                <a:solidFill>
-                  <a:schemeClr val="tx1"/>
-                </a:solidFill>
-                <a:latin typeface="Helvetica" panose="020B0604020202020204" pitchFamily="34" charset="0"/>
-                <a:ea typeface="MS PGothic" panose="020B0600070205080204" pitchFamily="34" charset="-128"/>
-              </a:defRPr>
-            </a:lvl4pPr>
-            <a:lvl5pPr marL="2057400" indent="-228600">
-              <a:defRPr sz="2400">
-                <a:solidFill>
-                  <a:schemeClr val="tx1"/>
-                </a:solidFill>
-                <a:latin typeface="Helvetica" panose="020B0604020202020204" pitchFamily="34" charset="0"/>
-                <a:ea typeface="MS PGothic" panose="020B0600070205080204" pitchFamily="34" charset="-128"/>
-              </a:defRPr>
-            </a:lvl5pPr>
-            <a:lvl6pPr marL="2514600" indent="-228600" eaLnBrk="0" fontAlgn="base" hangingPunct="0">
-              <a:spcBef>
-                <a:spcPct val="0"/>
-              </a:spcBef>
-              <a:spcAft>
-                <a:spcPct val="0"/>
-              </a:spcAft>
-              <a:defRPr sz="2400">
-                <a:solidFill>
-                  <a:schemeClr val="tx1"/>
-                </a:solidFill>
-                <a:latin typeface="Helvetica" panose="020B0604020202020204" pitchFamily="34" charset="0"/>
-                <a:ea typeface="MS PGothic" panose="020B0600070205080204" pitchFamily="34" charset="-128"/>
-              </a:defRPr>
-            </a:lvl6pPr>
-            <a:lvl7pPr marL="2971800" indent="-228600" eaLnBrk="0" fontAlgn="base" hangingPunct="0">
-              <a:spcBef>
-                <a:spcPct val="0"/>
-              </a:spcBef>
-              <a:spcAft>
-                <a:spcPct val="0"/>
-              </a:spcAft>
-              <a:defRPr sz="2400">
-                <a:solidFill>
-                  <a:schemeClr val="tx1"/>
-                </a:solidFill>
-                <a:latin typeface="Helvetica" panose="020B0604020202020204" pitchFamily="34" charset="0"/>
-                <a:ea typeface="MS PGothic" panose="020B0600070205080204" pitchFamily="34" charset="-128"/>
-              </a:defRPr>
-            </a:lvl7pPr>
-            <a:lvl8pPr marL="3429000" indent="-228600" eaLnBrk="0" fontAlgn="base" hangingPunct="0">
-              <a:spcBef>
-                <a:spcPct val="0"/>
-              </a:spcBef>
-              <a:spcAft>
-                <a:spcPct val="0"/>
-              </a:spcAft>
-              <a:defRPr sz="2400">
-                <a:solidFill>
-                  <a:schemeClr val="tx1"/>
-                </a:solidFill>
-                <a:latin typeface="Helvetica" panose="020B0604020202020204" pitchFamily="34" charset="0"/>
-                <a:ea typeface="MS PGothic" panose="020B0600070205080204" pitchFamily="34" charset="-128"/>
-              </a:defRPr>
-            </a:lvl8pPr>
-            <a:lvl9pPr marL="3886200" indent="-228600" eaLnBrk="0" fontAlgn="base" hangingPunct="0">
-              <a:spcBef>
-                <a:spcPct val="0"/>
-              </a:spcBef>
-              <a:spcAft>
-                <a:spcPct val="0"/>
-              </a:spcAft>
-              <a:defRPr sz="2400">
-                <a:solidFill>
-                  <a:schemeClr val="tx1"/>
-                </a:solidFill>
-                <a:latin typeface="Helvetica" panose="020B0604020202020204" pitchFamily="34" charset="0"/>
-                <a:ea typeface="MS PGothic" panose="020B0600070205080204" pitchFamily="34" charset="-128"/>
-              </a:defRPr>
-            </a:lvl9pPr>
-          </a:lstStyle>
-          <a:p>
-            <a:pPr algn="ctr"/>
-            <a:r>
-              <a:rPr lang="en-US" altLang="en-US" sz="4270" b="1" dirty="0">
-                <a:solidFill>
-                  <a:srgbClr val="C00000"/>
-                </a:solidFill>
-                <a:latin typeface="Trebuchet MS"/>
-                <a:ea typeface="MS PGothic"/>
-              </a:rPr>
-              <a:t>7. Aberrant Reward Sensitivity Modulates </a:t>
-            </a:r>
-            <a:r>
-              <a:rPr lang="en-US" altLang="en-US" sz="4270" b="1" dirty="0" err="1">
-                <a:solidFill>
-                  <a:srgbClr val="C00000"/>
-                </a:solidFill>
-                <a:latin typeface="Trebuchet MS"/>
-                <a:ea typeface="MS PGothic"/>
-              </a:rPr>
-              <a:t>Corticostriatal</a:t>
-            </a:r>
-            <a:r>
-              <a:rPr lang="en-US" altLang="en-US" sz="4270" b="1" dirty="0">
-                <a:solidFill>
-                  <a:srgbClr val="C00000"/>
-                </a:solidFill>
-                <a:latin typeface="Trebuchet MS"/>
-                <a:ea typeface="MS PGothic"/>
-              </a:rPr>
-              <a:t> Connectivity Underlying Fairness</a:t>
-            </a:r>
-            <a:endParaRPr lang="en-US" altLang="en-US" sz="4270" b="1" dirty="0">
-              <a:solidFill>
-                <a:srgbClr val="C00000"/>
-              </a:solidFill>
-              <a:latin typeface="Trebuchet MS" panose="020B0603020202020204" pitchFamily="34" charset="0"/>
-            </a:endParaRPr>
-          </a:p>
-        </p:txBody>
-      </p:sp>
-      <p:sp>
-        <p:nvSpPr>
-          <p:cNvPr id="15417" name="TextBox 15416">
-            <a:extLst>
-              <a:ext uri="{FF2B5EF4-FFF2-40B4-BE49-F238E27FC236}">
-                <a16:creationId xmlns:a16="http://schemas.microsoft.com/office/drawing/2014/main" id="{67AF8949-755A-E964-685E-DF2A5F35BDE8}"/>
-              </a:ext>
-            </a:extLst>
-          </p:cNvPr>
-          <p:cNvSpPr txBox="1"/>
-          <p:nvPr/>
-        </p:nvSpPr>
-        <p:spPr>
-          <a:xfrm>
-            <a:off x="30805042" y="31928090"/>
-            <a:ext cx="12648270" cy="646331"/>
-          </a:xfrm>
-          <a:prstGeom prst="rect">
-            <a:avLst/>
-          </a:prstGeom>
-          <a:noFill/>
-        </p:spPr>
-        <p:txBody>
-          <a:bodyPr wrap="square">
-            <a:spAutoFit/>
-          </a:bodyPr>
-          <a:lstStyle/>
-          <a:p>
-            <a:r>
-              <a:rPr lang="en-US" sz="1800" i="1"/>
-              <a:t>This study was supported by a grant from the National Institutes of Health (R03-DA046733 (DVS). Contact information for Daniel Sazhin: daniel.sazhin@temple.edu.</a:t>
-            </a:r>
-            <a:r>
-              <a:rPr lang="en-US" sz="1800" b="0" i="0">
-                <a:solidFill>
-                  <a:srgbClr val="000000"/>
-                </a:solidFill>
-                <a:effectLst/>
-                <a:latin typeface="Times New Roman" panose="02020603050405020304" pitchFamily="18" charset="0"/>
-              </a:rPr>
-              <a:t> </a:t>
-            </a:r>
-            <a:endParaRPr lang="en-US" sz="1800" i="1"/>
-          </a:p>
-        </p:txBody>
-      </p:sp>
-      <p:sp>
-        <p:nvSpPr>
           <p:cNvPr id="15434" name="TextBox 15433">
             <a:extLst>
               <a:ext uri="{FF2B5EF4-FFF2-40B4-BE49-F238E27FC236}">
@@ -10202,8 +7851,8 @@
         </p:nvSpPr>
         <p:spPr>
           <a:xfrm>
-            <a:off x="36449078" y="5987195"/>
-            <a:ext cx="1046440" cy="6220601"/>
+            <a:off x="37051877" y="6753009"/>
+            <a:ext cx="615553" cy="4368929"/>
           </a:xfrm>
           <a:prstGeom prst="rect">
             <a:avLst/>
@@ -10222,1060 +7871,171 @@
                 <a:latin typeface="Helvetica"/>
                 <a:ea typeface="MS PGothic"/>
               </a:rPr>
-              <a:t>Precuneus Activation Plotted against age</a:t>
+              <a:t>Precuneus Activation</a:t>
             </a:r>
           </a:p>
         </p:txBody>
       </p:sp>
-      <p:sp>
-        <p:nvSpPr>
-          <p:cNvPr id="3" name="TextBox 2">
+      <p:grpSp>
+        <p:nvGrpSpPr>
+          <p:cNvPr id="15426" name="Group 15425">
             <a:extLst>
               <a:ext uri="{FF2B5EF4-FFF2-40B4-BE49-F238E27FC236}">
-                <a16:creationId xmlns:a16="http://schemas.microsoft.com/office/drawing/2014/main" id="{D0B0B240-43AB-5B1F-C75F-FEA7463EE9F3}"/>
+                <a16:creationId xmlns:a16="http://schemas.microsoft.com/office/drawing/2014/main" id="{7261B70B-11A8-74A1-AA73-CF4BB2AED55A}"/>
               </a:ext>
             </a:extLst>
           </p:cNvPr>
-          <p:cNvSpPr txBox="1"/>
+          <p:cNvGrpSpPr/>
           <p:nvPr/>
-        </p:nvSpPr>
-        <p:spPr>
+        </p:nvGrpSpPr>
+        <p:grpSpPr>
           <a:xfrm>
-            <a:off x="8051909" y="29301311"/>
-            <a:ext cx="6775918" cy="2554545"/>
+            <a:off x="8164021" y="29079185"/>
+            <a:ext cx="6812529" cy="2732092"/>
+            <a:chOff x="8015298" y="29141496"/>
+            <a:chExt cx="6812529" cy="2732092"/>
           </a:xfrm>
-          <a:prstGeom prst="rect">
-            <a:avLst/>
-          </a:prstGeom>
-          <a:noFill/>
-        </p:spPr>
-        <p:txBody>
-          <a:bodyPr wrap="square" lIns="91440" tIns="45720" rIns="91440" bIns="45720" anchor="t">
-            <a:spAutoFit/>
-          </a:bodyPr>
-          <a:lstStyle/>
-          <a:p>
-            <a:r>
-              <a:rPr lang="en-US" sz="3200" dirty="0">
-                <a:latin typeface="Helvetica"/>
+        </p:grpSpPr>
+        <p:sp>
+          <p:nvSpPr>
+            <p:cNvPr id="15385" name="Rectangle 15384">
+              <a:extLst>
+                <a:ext uri="{FF2B5EF4-FFF2-40B4-BE49-F238E27FC236}">
+                  <a16:creationId xmlns:a16="http://schemas.microsoft.com/office/drawing/2014/main" id="{3285C709-B618-5904-7A31-44E8D825CD5B}"/>
+                </a:ext>
+              </a:extLst>
+            </p:cNvPr>
+            <p:cNvSpPr/>
+            <p:nvPr/>
+          </p:nvSpPr>
+          <p:spPr bwMode="auto">
+            <a:xfrm>
+              <a:off x="8015298" y="29141496"/>
+              <a:ext cx="6652707" cy="2732092"/>
+            </a:xfrm>
+            <a:prstGeom prst="rect">
+              <a:avLst/>
+            </a:prstGeom>
+            <a:noFill/>
+            <a:ln w="57150" cap="flat" cmpd="sng" algn="ctr">
+              <a:solidFill>
+                <a:schemeClr val="tx1"/>
+              </a:solidFill>
+              <a:prstDash val="solid"/>
+              <a:round/>
+              <a:headEnd type="none" w="med" len="med"/>
+              <a:tailEnd type="none" w="med" len="med"/>
+            </a:ln>
+            <a:effectLst/>
+          </p:spPr>
+          <p:txBody>
+            <a:bodyPr vert="horz" wrap="square" lIns="91440" tIns="45720" rIns="91440" bIns="45720" numCol="1" rtlCol="0" anchor="t" anchorCtr="0" compatLnSpc="1">
+              <a:prstTxWarp prst="textNoShape">
+                <a:avLst/>
+              </a:prstTxWarp>
+            </a:bodyPr>
+            <a:lstStyle/>
+            <a:p>
+              <a:pPr marL="0" marR="0" indent="0" algn="l" defTabSz="4389438" rtl="0" eaLnBrk="1" fontAlgn="base" latinLnBrk="0" hangingPunct="1">
+                <a:lnSpc>
+                  <a:spcPct val="100000"/>
+                </a:lnSpc>
+                <a:spcBef>
+                  <a:spcPct val="0"/>
+                </a:spcBef>
+                <a:spcAft>
+                  <a:spcPct val="0"/>
+                </a:spcAft>
+                <a:buClrTx/>
+                <a:buSzTx/>
+                <a:buFontTx/>
+                <a:buNone/>
+                <a:tabLst/>
+              </a:pPr>
+              <a:endParaRPr kumimoji="0" lang="en-US" sz="1800" b="0" i="0" u="none" strike="noStrike" cap="none" normalizeH="0" baseline="0">
+                <a:ln>
+                  <a:noFill/>
+                </a:ln>
+                <a:solidFill>
+                  <a:schemeClr val="tx1"/>
+                </a:solidFill>
+                <a:effectLst/>
+                <a:latin typeface="Arial" charset="0"/>
+                <a:cs typeface="Arial" charset="0"/>
+              </a:endParaRPr>
+            </a:p>
+          </p:txBody>
+        </p:sp>
+        <p:sp>
+          <p:nvSpPr>
+            <p:cNvPr id="3" name="TextBox 2">
+              <a:extLst>
+                <a:ext uri="{FF2B5EF4-FFF2-40B4-BE49-F238E27FC236}">
+                  <a16:creationId xmlns:a16="http://schemas.microsoft.com/office/drawing/2014/main" id="{D0B0B240-43AB-5B1F-C75F-FEA7463EE9F3}"/>
+                </a:ext>
+              </a:extLst>
+            </p:cNvPr>
+            <p:cNvSpPr txBox="1"/>
+            <p:nvPr/>
+          </p:nvSpPr>
+          <p:spPr>
+            <a:xfrm>
+              <a:off x="8051909" y="29301311"/>
+              <a:ext cx="6775918" cy="2554545"/>
+            </a:xfrm>
+            <a:prstGeom prst="rect">
+              <a:avLst/>
+            </a:prstGeom>
+            <a:noFill/>
+          </p:spPr>
+          <p:txBody>
+            <a:bodyPr wrap="square" lIns="91440" tIns="45720" rIns="91440" bIns="45720" anchor="t">
+              <a:spAutoFit/>
+            </a:bodyPr>
+            <a:lstStyle/>
+            <a:p>
+              <a:r>
+                <a:rPr lang="en-US" sz="3200" dirty="0">
+                  <a:latin typeface="Helvetica"/>
+                  <a:ea typeface="MS PGothic"/>
+                  <a:cs typeface="Helvetica"/>
+                </a:rPr>
+                <a:t>Whole brain results were </a:t>
+              </a:r>
+              <a:r>
+                <a:rPr lang="en-US" sz="3200" dirty="0" err="1">
+                  <a:latin typeface="Helvetica"/>
+                  <a:ea typeface="MS PGothic"/>
+                  <a:cs typeface="Helvetica"/>
+                </a:rPr>
+                <a:t>thresholded</a:t>
+              </a:r>
+              <a:r>
+                <a:rPr lang="en-US" sz="3200" dirty="0">
+                  <a:latin typeface="Helvetica"/>
+                  <a:ea typeface="MS PGothic"/>
+                  <a:cs typeface="Helvetica"/>
+                </a:rPr>
+                <a:t> at Z &gt; 3.1 and Family Wise Error corrected at p &gt; .05</a:t>
+              </a:r>
+            </a:p>
+            <a:p>
+              <a:r>
+                <a:rPr lang="en-US" sz="3200" dirty="0">
+                  <a:latin typeface="Helvetica"/>
+                  <a:ea typeface="MS PGothic"/>
+                  <a:cs typeface="Helvetica"/>
+                </a:rPr>
+                <a:t>Masks were extracted from Harvard–Oxford and Mars atlases. </a:t>
+              </a:r>
+              <a:endParaRPr lang="en-US" sz="3200" dirty="0">
                 <a:ea typeface="MS PGothic"/>
                 <a:cs typeface="Helvetica"/>
-              </a:rPr>
-              <a:t>Whole brain results were </a:t>
-            </a:r>
-            <a:r>
-              <a:rPr lang="en-US" sz="3200" dirty="0" err="1">
-                <a:latin typeface="Helvetica"/>
-                <a:ea typeface="MS PGothic"/>
-                <a:cs typeface="Helvetica"/>
-              </a:rPr>
-              <a:t>thresholded</a:t>
-            </a:r>
-            <a:r>
-              <a:rPr lang="en-US" sz="3200" dirty="0">
-                <a:latin typeface="Helvetica"/>
-                <a:ea typeface="MS PGothic"/>
-                <a:cs typeface="Helvetica"/>
-              </a:rPr>
-              <a:t> at Z &gt; 3.1 and Family Wise Error corrected at p &gt; .05</a:t>
-            </a:r>
-          </a:p>
-          <a:p>
-            <a:r>
-              <a:rPr lang="en-US" sz="3200" dirty="0">
-                <a:latin typeface="Helvetica"/>
-                <a:ea typeface="MS PGothic"/>
-                <a:cs typeface="Helvetica"/>
-              </a:rPr>
-              <a:t>Masks were extracted from Harvard–Oxford and Mars atlases. </a:t>
-            </a:r>
-            <a:endParaRPr lang="en-US" sz="3200" dirty="0">
-              <a:ea typeface="MS PGothic"/>
-              <a:cs typeface="Helvetica"/>
-            </a:endParaRPr>
-          </a:p>
-        </p:txBody>
-      </p:sp>
-      <p:sp>
-        <p:nvSpPr>
-          <p:cNvPr id="15453" name="TextBox 15452">
-            <a:extLst>
-              <a:ext uri="{FF2B5EF4-FFF2-40B4-BE49-F238E27FC236}">
-                <a16:creationId xmlns:a16="http://schemas.microsoft.com/office/drawing/2014/main" id="{54253D06-A27E-D304-5A43-9CE683DD93BC}"/>
-              </a:ext>
-            </a:extLst>
-          </p:cNvPr>
-          <p:cNvSpPr txBox="1"/>
-          <p:nvPr/>
-        </p:nvSpPr>
-        <p:spPr>
-          <a:xfrm>
-            <a:off x="38658757" y="16524759"/>
-            <a:ext cx="1046440" cy="6220601"/>
-          </a:xfrm>
-          <a:prstGeom prst="rect">
-            <a:avLst/>
-          </a:prstGeom>
-          <a:noFill/>
-        </p:spPr>
-        <p:txBody>
-          <a:bodyPr vert="vert270" wrap="square">
-            <a:spAutoFit/>
-          </a:bodyPr>
-          <a:lstStyle/>
-          <a:p>
-            <a:pPr algn="ctr"/>
-            <a:r>
-              <a:rPr lang="en-US" sz="2800" dirty="0">
-                <a:latin typeface="Helvetica"/>
-                <a:ea typeface="MS PGothic"/>
-              </a:rPr>
-              <a:t>VS-ACC Connectivity (</a:t>
-            </a:r>
-            <a:r>
-              <a:rPr lang="el-GR" sz="2800" dirty="0">
-                <a:latin typeface="Helvetica"/>
-                <a:ea typeface="MS PGothic"/>
-              </a:rPr>
-              <a:t>β) </a:t>
-            </a:r>
-            <a:endParaRPr lang="en-US" sz="2800" dirty="0">
-              <a:latin typeface="Helvetica"/>
-              <a:ea typeface="MS PGothic"/>
-            </a:endParaRPr>
-          </a:p>
-          <a:p>
-            <a:pPr algn="ctr"/>
-            <a:r>
-              <a:rPr lang="en-US" sz="2800" dirty="0">
-                <a:latin typeface="Helvetica"/>
-                <a:ea typeface="MS PGothic"/>
-              </a:rPr>
-              <a:t>Parametric Effect of Fairness</a:t>
-            </a:r>
-            <a:endParaRPr lang="en-US" sz="2800" dirty="0">
-              <a:latin typeface="Helvetica"/>
-            </a:endParaRPr>
-          </a:p>
-        </p:txBody>
-      </p:sp>
-      <p:sp>
-        <p:nvSpPr>
-          <p:cNvPr id="15454" name="TextBox 15453">
-            <a:extLst>
-              <a:ext uri="{FF2B5EF4-FFF2-40B4-BE49-F238E27FC236}">
-                <a16:creationId xmlns:a16="http://schemas.microsoft.com/office/drawing/2014/main" id="{13B2FFDE-8D7C-898B-769D-CAF01351FCBA}"/>
-              </a:ext>
-            </a:extLst>
-          </p:cNvPr>
-          <p:cNvSpPr txBox="1"/>
-          <p:nvPr/>
-        </p:nvSpPr>
-        <p:spPr>
-          <a:xfrm>
-            <a:off x="40013181" y="21477911"/>
-            <a:ext cx="3784646" cy="523220"/>
-          </a:xfrm>
-          <a:prstGeom prst="rect">
-            <a:avLst/>
-          </a:prstGeom>
-          <a:noFill/>
-        </p:spPr>
-        <p:txBody>
-          <a:bodyPr wrap="square">
-            <a:spAutoFit/>
-          </a:bodyPr>
-          <a:lstStyle/>
-          <a:p>
-            <a:pPr algn="ctr"/>
-            <a:r>
-              <a:rPr lang="en-US" sz="2800" dirty="0">
-                <a:latin typeface="Helvetica"/>
-                <a:ea typeface="MS PGothic"/>
-              </a:rPr>
-              <a:t>Composite Reward</a:t>
-            </a:r>
-            <a:endParaRPr lang="en-US" sz="2800" dirty="0">
-              <a:latin typeface="Helvetica"/>
-            </a:endParaRPr>
-          </a:p>
-        </p:txBody>
-      </p:sp>
-      <p:sp>
-        <p:nvSpPr>
-          <p:cNvPr id="15457" name="TextBox 15456">
-            <a:extLst>
-              <a:ext uri="{FF2B5EF4-FFF2-40B4-BE49-F238E27FC236}">
-                <a16:creationId xmlns:a16="http://schemas.microsoft.com/office/drawing/2014/main" id="{7047C9F1-0A08-A766-A606-E61021C59749}"/>
-              </a:ext>
-            </a:extLst>
-          </p:cNvPr>
-          <p:cNvSpPr txBox="1"/>
-          <p:nvPr/>
-        </p:nvSpPr>
-        <p:spPr>
-          <a:xfrm>
-            <a:off x="40492162" y="20897618"/>
-            <a:ext cx="554647" cy="523221"/>
-          </a:xfrm>
-          <a:prstGeom prst="rect">
-            <a:avLst/>
-          </a:prstGeom>
-          <a:noFill/>
-        </p:spPr>
-        <p:txBody>
-          <a:bodyPr wrap="square">
-            <a:spAutoFit/>
-          </a:bodyPr>
-          <a:lstStyle/>
-          <a:p>
-            <a:r>
-              <a:rPr lang="en-US" sz="2800">
-                <a:latin typeface="Helvetica"/>
-                <a:ea typeface="MS PGothic"/>
-              </a:rPr>
-              <a:t>-4</a:t>
-            </a:r>
-            <a:endParaRPr lang="en-US" sz="2800">
-              <a:latin typeface="Helvetica"/>
-            </a:endParaRPr>
-          </a:p>
-        </p:txBody>
-      </p:sp>
-      <p:sp>
-        <p:nvSpPr>
-          <p:cNvPr id="15458" name="TextBox 15457">
-            <a:extLst>
-              <a:ext uri="{FF2B5EF4-FFF2-40B4-BE49-F238E27FC236}">
-                <a16:creationId xmlns:a16="http://schemas.microsoft.com/office/drawing/2014/main" id="{BDE46ECC-E24E-9171-BED0-499BFDD880B7}"/>
-              </a:ext>
-            </a:extLst>
-          </p:cNvPr>
-          <p:cNvSpPr txBox="1"/>
-          <p:nvPr/>
-        </p:nvSpPr>
-        <p:spPr>
-          <a:xfrm>
-            <a:off x="42958651" y="20882411"/>
-            <a:ext cx="1046440" cy="523221"/>
-          </a:xfrm>
-          <a:prstGeom prst="rect">
-            <a:avLst/>
-          </a:prstGeom>
-          <a:noFill/>
-        </p:spPr>
-        <p:txBody>
-          <a:bodyPr wrap="square">
-            <a:spAutoFit/>
-          </a:bodyPr>
-          <a:lstStyle/>
-          <a:p>
-            <a:r>
-              <a:rPr lang="en-US" sz="2800">
-                <a:latin typeface="Helvetica"/>
-                <a:ea typeface="MS PGothic"/>
-              </a:rPr>
-              <a:t>4</a:t>
-            </a:r>
-            <a:endParaRPr lang="en-US" sz="2800">
-              <a:latin typeface="Helvetica"/>
-            </a:endParaRPr>
-          </a:p>
-        </p:txBody>
-      </p:sp>
-      <p:sp>
-        <p:nvSpPr>
-          <p:cNvPr id="15459" name="TextBox 15458">
-            <a:extLst>
-              <a:ext uri="{FF2B5EF4-FFF2-40B4-BE49-F238E27FC236}">
-                <a16:creationId xmlns:a16="http://schemas.microsoft.com/office/drawing/2014/main" id="{275FD36E-9E3F-0887-77B3-FB36970A4F59}"/>
-              </a:ext>
-            </a:extLst>
-          </p:cNvPr>
-          <p:cNvSpPr txBox="1"/>
-          <p:nvPr/>
-        </p:nvSpPr>
-        <p:spPr>
-          <a:xfrm>
-            <a:off x="41783055" y="20898469"/>
-            <a:ext cx="567400" cy="523220"/>
-          </a:xfrm>
-          <a:prstGeom prst="rect">
-            <a:avLst/>
-          </a:prstGeom>
-          <a:noFill/>
-        </p:spPr>
-        <p:txBody>
-          <a:bodyPr wrap="square">
-            <a:spAutoFit/>
-          </a:bodyPr>
-          <a:lstStyle/>
-          <a:p>
-            <a:r>
-              <a:rPr lang="en-US" sz="2800">
-                <a:latin typeface="Helvetica"/>
-                <a:ea typeface="MS PGothic"/>
-              </a:rPr>
-              <a:t>0</a:t>
-            </a:r>
-            <a:endParaRPr lang="en-US" sz="2800">
-              <a:latin typeface="Helvetica"/>
-            </a:endParaRPr>
-          </a:p>
-        </p:txBody>
-      </p:sp>
-      <p:sp>
-        <p:nvSpPr>
-          <p:cNvPr id="15460" name="TextBox 15459">
-            <a:extLst>
-              <a:ext uri="{FF2B5EF4-FFF2-40B4-BE49-F238E27FC236}">
-                <a16:creationId xmlns:a16="http://schemas.microsoft.com/office/drawing/2014/main" id="{FA852DDA-CB11-26BF-258E-65D09D7465FA}"/>
-              </a:ext>
-            </a:extLst>
-          </p:cNvPr>
-          <p:cNvSpPr txBox="1"/>
-          <p:nvPr/>
-        </p:nvSpPr>
-        <p:spPr>
-          <a:xfrm>
-            <a:off x="39578758" y="20495512"/>
-            <a:ext cx="868847" cy="523220"/>
-          </a:xfrm>
-          <a:prstGeom prst="rect">
-            <a:avLst/>
-          </a:prstGeom>
-          <a:noFill/>
-        </p:spPr>
-        <p:txBody>
-          <a:bodyPr wrap="square">
-            <a:spAutoFit/>
-          </a:bodyPr>
-          <a:lstStyle/>
-          <a:p>
-            <a:r>
-              <a:rPr lang="en-US" sz="2800">
-                <a:latin typeface="Helvetica"/>
-                <a:ea typeface="MS PGothic"/>
-              </a:rPr>
-              <a:t>-10</a:t>
-            </a:r>
-            <a:endParaRPr lang="en-US" sz="2800">
-              <a:latin typeface="Helvetica"/>
-            </a:endParaRPr>
-          </a:p>
-        </p:txBody>
-      </p:sp>
-      <p:sp>
-        <p:nvSpPr>
-          <p:cNvPr id="15462" name="TextBox 15461">
-            <a:extLst>
-              <a:ext uri="{FF2B5EF4-FFF2-40B4-BE49-F238E27FC236}">
-                <a16:creationId xmlns:a16="http://schemas.microsoft.com/office/drawing/2014/main" id="{20ADA0E0-7D3C-7D25-1314-4E22FF094079}"/>
-              </a:ext>
-            </a:extLst>
-          </p:cNvPr>
-          <p:cNvSpPr txBox="1"/>
-          <p:nvPr/>
-        </p:nvSpPr>
-        <p:spPr>
-          <a:xfrm>
-            <a:off x="39700550" y="17249775"/>
-            <a:ext cx="715942" cy="523220"/>
-          </a:xfrm>
-          <a:prstGeom prst="rect">
-            <a:avLst/>
-          </a:prstGeom>
-          <a:noFill/>
-        </p:spPr>
-        <p:txBody>
-          <a:bodyPr wrap="square">
-            <a:spAutoFit/>
-          </a:bodyPr>
-          <a:lstStyle/>
-          <a:p>
-            <a:r>
-              <a:rPr lang="en-US" sz="2800">
-                <a:latin typeface="Helvetica"/>
-                <a:ea typeface="MS PGothic"/>
-              </a:rPr>
-              <a:t>10</a:t>
-            </a:r>
-            <a:endParaRPr lang="en-US" sz="2800">
-              <a:latin typeface="Helvetica"/>
-            </a:endParaRPr>
-          </a:p>
-        </p:txBody>
-      </p:sp>
-      <p:sp>
-        <p:nvSpPr>
-          <p:cNvPr id="15463" name="TextBox 15462">
-            <a:extLst>
-              <a:ext uri="{FF2B5EF4-FFF2-40B4-BE49-F238E27FC236}">
-                <a16:creationId xmlns:a16="http://schemas.microsoft.com/office/drawing/2014/main" id="{2DB69747-DCE2-F966-FC03-9A51A0E07B63}"/>
-              </a:ext>
-            </a:extLst>
-          </p:cNvPr>
-          <p:cNvSpPr txBox="1"/>
-          <p:nvPr/>
-        </p:nvSpPr>
-        <p:spPr>
-          <a:xfrm>
-            <a:off x="39874322" y="18954769"/>
-            <a:ext cx="1817883" cy="523220"/>
-          </a:xfrm>
-          <a:prstGeom prst="rect">
-            <a:avLst/>
-          </a:prstGeom>
-          <a:noFill/>
-        </p:spPr>
-        <p:txBody>
-          <a:bodyPr wrap="square">
-            <a:spAutoFit/>
-          </a:bodyPr>
-          <a:lstStyle/>
-          <a:p>
-            <a:r>
-              <a:rPr lang="en-US" sz="2800">
-                <a:latin typeface="Helvetica"/>
-                <a:ea typeface="MS PGothic"/>
-              </a:rPr>
-              <a:t>0</a:t>
-            </a:r>
-            <a:endParaRPr lang="en-US" sz="2800">
-              <a:latin typeface="Helvetica"/>
-            </a:endParaRPr>
-          </a:p>
-        </p:txBody>
-      </p:sp>
-      <p:sp>
-        <p:nvSpPr>
-          <p:cNvPr id="15466" name="TextBox 15465">
-            <a:extLst>
-              <a:ext uri="{FF2B5EF4-FFF2-40B4-BE49-F238E27FC236}">
-                <a16:creationId xmlns:a16="http://schemas.microsoft.com/office/drawing/2014/main" id="{70363750-115C-CF78-EAF3-D77F6325BD99}"/>
-              </a:ext>
-            </a:extLst>
-          </p:cNvPr>
-          <p:cNvSpPr txBox="1"/>
-          <p:nvPr/>
-        </p:nvSpPr>
-        <p:spPr>
-          <a:xfrm>
-            <a:off x="34229066" y="17212491"/>
-            <a:ext cx="4584887" cy="1077218"/>
-          </a:xfrm>
-          <a:prstGeom prst="rect">
-            <a:avLst/>
-          </a:prstGeom>
-          <a:noFill/>
-        </p:spPr>
-        <p:txBody>
-          <a:bodyPr rot="0" spcFirstLastPara="0" vertOverflow="overflow" horzOverflow="overflow" vert="horz" wrap="square" lIns="91440" tIns="45720" rIns="91440" bIns="45720" numCol="1" spcCol="0" rtlCol="0" fromWordArt="0" anchor="t" anchorCtr="0" forceAA="0" compatLnSpc="1">
-            <a:prstTxWarp prst="textNoShape">
-              <a:avLst/>
-            </a:prstTxWarp>
-            <a:spAutoFit/>
-          </a:bodyPr>
-          <a:lstStyle/>
-          <a:p>
-            <a:pPr algn="ctr"/>
-            <a:r>
-              <a:rPr lang="en-US" sz="3200" b="1" dirty="0">
-                <a:latin typeface="Helvetica"/>
-                <a:ea typeface="MS PGothic"/>
-              </a:rPr>
-              <a:t>Target Region:</a:t>
-            </a:r>
-            <a:br>
-              <a:rPr lang="en-US" sz="3200" b="1" dirty="0">
-                <a:latin typeface="Helvetica"/>
-                <a:ea typeface="MS PGothic"/>
-              </a:rPr>
-            </a:br>
-            <a:r>
-              <a:rPr lang="en-US" sz="3200" b="1" dirty="0">
-                <a:latin typeface="Helvetica"/>
-                <a:ea typeface="MS PGothic"/>
-              </a:rPr>
-              <a:t>ACC</a:t>
-            </a:r>
-          </a:p>
-        </p:txBody>
-      </p:sp>
-      <p:sp>
-        <p:nvSpPr>
-          <p:cNvPr id="15467" name="TextBox 15466">
-            <a:extLst>
-              <a:ext uri="{FF2B5EF4-FFF2-40B4-BE49-F238E27FC236}">
-                <a16:creationId xmlns:a16="http://schemas.microsoft.com/office/drawing/2014/main" id="{BEB82280-E375-8679-3A8D-2B094831BB76}"/>
-              </a:ext>
-            </a:extLst>
-          </p:cNvPr>
-          <p:cNvSpPr txBox="1"/>
-          <p:nvPr/>
-        </p:nvSpPr>
-        <p:spPr>
-          <a:xfrm>
-            <a:off x="30386007" y="17175669"/>
-            <a:ext cx="4584887" cy="1077218"/>
-          </a:xfrm>
-          <a:prstGeom prst="rect">
-            <a:avLst/>
-          </a:prstGeom>
-          <a:noFill/>
-        </p:spPr>
-        <p:txBody>
-          <a:bodyPr rot="0" spcFirstLastPara="0" vertOverflow="overflow" horzOverflow="overflow" vert="horz" wrap="square" lIns="91440" tIns="45720" rIns="91440" bIns="45720" numCol="1" spcCol="0" rtlCol="0" fromWordArt="0" anchor="t" anchorCtr="0" forceAA="0" compatLnSpc="1">
-            <a:prstTxWarp prst="textNoShape">
-              <a:avLst/>
-            </a:prstTxWarp>
-            <a:spAutoFit/>
-          </a:bodyPr>
-          <a:lstStyle/>
-          <a:p>
-            <a:pPr algn="ctr"/>
-            <a:r>
-              <a:rPr lang="en-US" sz="3200" b="1" dirty="0">
-                <a:latin typeface="Helvetica"/>
-                <a:ea typeface="MS PGothic"/>
-              </a:rPr>
-              <a:t>Seed Region:</a:t>
-            </a:r>
-            <a:br>
-              <a:rPr lang="en-US" sz="3200" b="1" dirty="0">
-                <a:latin typeface="Helvetica"/>
-                <a:ea typeface="MS PGothic"/>
-              </a:rPr>
-            </a:br>
-            <a:r>
-              <a:rPr lang="en-US" sz="3200" b="1" dirty="0">
-                <a:latin typeface="Helvetica"/>
-                <a:ea typeface="MS PGothic"/>
-              </a:rPr>
-              <a:t>Ventral Striatum</a:t>
-            </a:r>
-          </a:p>
-        </p:txBody>
-      </p:sp>
-      <p:sp>
-        <p:nvSpPr>
-          <p:cNvPr id="15468" name="TextBox 15467">
-            <a:extLst>
-              <a:ext uri="{FF2B5EF4-FFF2-40B4-BE49-F238E27FC236}">
-                <a16:creationId xmlns:a16="http://schemas.microsoft.com/office/drawing/2014/main" id="{A3DE3076-1461-4C7F-37FB-1937AD59C065}"/>
-              </a:ext>
-            </a:extLst>
-          </p:cNvPr>
-          <p:cNvSpPr txBox="1"/>
-          <p:nvPr/>
-        </p:nvSpPr>
-        <p:spPr>
-          <a:xfrm>
-            <a:off x="30573711" y="21679401"/>
-            <a:ext cx="4068810" cy="954107"/>
-          </a:xfrm>
-          <a:prstGeom prst="rect">
-            <a:avLst/>
-          </a:prstGeom>
-          <a:noFill/>
-        </p:spPr>
-        <p:txBody>
-          <a:bodyPr wrap="square" lIns="91440" tIns="45720" rIns="91440" bIns="45720" anchor="t">
-            <a:spAutoFit/>
-          </a:bodyPr>
-          <a:lstStyle/>
-          <a:p>
-            <a:pPr algn="ctr"/>
-            <a:r>
-              <a:rPr lang="en-US" sz="2800" dirty="0">
-                <a:latin typeface="Helvetica"/>
-                <a:ea typeface="MS PGothic"/>
-              </a:rPr>
-              <a:t>Y=12</a:t>
-            </a:r>
-          </a:p>
-          <a:p>
-            <a:pPr algn="ctr"/>
-            <a:endParaRPr lang="en-US" sz="2800" dirty="0">
-              <a:latin typeface="Helvetica"/>
-            </a:endParaRPr>
-          </a:p>
-        </p:txBody>
-      </p:sp>
-      <p:sp>
-        <p:nvSpPr>
-          <p:cNvPr id="15471" name="TextBox 15470">
-            <a:extLst>
-              <a:ext uri="{FF2B5EF4-FFF2-40B4-BE49-F238E27FC236}">
-                <a16:creationId xmlns:a16="http://schemas.microsoft.com/office/drawing/2014/main" id="{097F6FA0-A312-AB6A-B5D8-97D0988F5173}"/>
-              </a:ext>
-            </a:extLst>
-          </p:cNvPr>
-          <p:cNvSpPr txBox="1"/>
-          <p:nvPr/>
-        </p:nvSpPr>
-        <p:spPr>
-          <a:xfrm>
-            <a:off x="35746762" y="21546752"/>
-            <a:ext cx="2660825" cy="954107"/>
-          </a:xfrm>
-          <a:prstGeom prst="rect">
-            <a:avLst/>
-          </a:prstGeom>
-          <a:noFill/>
-        </p:spPr>
-        <p:txBody>
-          <a:bodyPr wrap="square" lIns="91440" tIns="45720" rIns="91440" bIns="45720" anchor="t">
-            <a:spAutoFit/>
-          </a:bodyPr>
-          <a:lstStyle/>
-          <a:p>
-            <a:pPr algn="ctr"/>
-            <a:r>
-              <a:rPr lang="en-US" sz="2800" dirty="0">
-                <a:latin typeface="Helvetica"/>
-                <a:ea typeface="MS PGothic"/>
-              </a:rPr>
-              <a:t>X=-3</a:t>
-            </a:r>
-          </a:p>
-          <a:p>
-            <a:pPr algn="ctr"/>
-            <a:endParaRPr lang="en-US" sz="2800" dirty="0">
-              <a:latin typeface="Helvetica"/>
-            </a:endParaRPr>
-          </a:p>
-        </p:txBody>
-      </p:sp>
-      <p:sp>
-        <p:nvSpPr>
-          <p:cNvPr id="15475" name="Rectangle 15474">
-            <a:extLst>
-              <a:ext uri="{FF2B5EF4-FFF2-40B4-BE49-F238E27FC236}">
-                <a16:creationId xmlns:a16="http://schemas.microsoft.com/office/drawing/2014/main" id="{DB14D97E-82FC-43D2-795A-F10EEC10EBE9}"/>
-              </a:ext>
-            </a:extLst>
-          </p:cNvPr>
-          <p:cNvSpPr/>
-          <p:nvPr/>
-        </p:nvSpPr>
-        <p:spPr>
-          <a:xfrm>
-            <a:off x="30750737" y="15945804"/>
-            <a:ext cx="12756880" cy="1077218"/>
-          </a:xfrm>
-          <a:prstGeom prst="rect">
-            <a:avLst/>
-          </a:prstGeom>
-        </p:spPr>
-        <p:txBody>
-          <a:bodyPr wrap="square" lIns="91440" tIns="45720" rIns="91440" bIns="45720" anchor="t">
-            <a:spAutoFit/>
-          </a:bodyPr>
-          <a:lstStyle/>
-          <a:p>
-            <a:pPr algn="ctr"/>
-            <a:r>
-              <a:rPr lang="en-US" sz="3200" i="1" spc="15" dirty="0">
-                <a:latin typeface="Helvetica"/>
-                <a:ea typeface="MS PGothic"/>
-              </a:rPr>
-              <a:t>We investigated associations between reward sensitivity, fairness, and connectivity between a VS seed and possible target regions.</a:t>
-            </a:r>
-            <a:endParaRPr lang="en-US" sz="3200" i="1" spc="15" dirty="0">
-              <a:latin typeface="Helvetica" pitchFamily="2" charset="0"/>
-            </a:endParaRPr>
-          </a:p>
-        </p:txBody>
-      </p:sp>
-      <p:sp>
-        <p:nvSpPr>
-          <p:cNvPr id="15476" name="TextBox 15475">
-            <a:extLst>
-              <a:ext uri="{FF2B5EF4-FFF2-40B4-BE49-F238E27FC236}">
-                <a16:creationId xmlns:a16="http://schemas.microsoft.com/office/drawing/2014/main" id="{72DC8A03-760C-7895-4FC9-787BC0308294}"/>
-              </a:ext>
-            </a:extLst>
-          </p:cNvPr>
-          <p:cNvSpPr txBox="1"/>
-          <p:nvPr/>
-        </p:nvSpPr>
-        <p:spPr>
-          <a:xfrm>
-            <a:off x="39759924" y="19700558"/>
-            <a:ext cx="868847" cy="523220"/>
-          </a:xfrm>
-          <a:prstGeom prst="rect">
-            <a:avLst/>
-          </a:prstGeom>
-          <a:noFill/>
-        </p:spPr>
-        <p:txBody>
-          <a:bodyPr wrap="square">
-            <a:spAutoFit/>
-          </a:bodyPr>
-          <a:lstStyle/>
-          <a:p>
-            <a:r>
-              <a:rPr lang="en-US" sz="2800">
-                <a:latin typeface="Helvetica"/>
-                <a:ea typeface="MS PGothic"/>
-              </a:rPr>
-              <a:t>-5</a:t>
-            </a:r>
-            <a:endParaRPr lang="en-US" sz="2800">
-              <a:latin typeface="Helvetica"/>
-            </a:endParaRPr>
-          </a:p>
-        </p:txBody>
-      </p:sp>
-      <p:sp>
-        <p:nvSpPr>
-          <p:cNvPr id="15477" name="TextBox 15476">
-            <a:extLst>
-              <a:ext uri="{FF2B5EF4-FFF2-40B4-BE49-F238E27FC236}">
-                <a16:creationId xmlns:a16="http://schemas.microsoft.com/office/drawing/2014/main" id="{DF1C50BB-53F1-20DD-33AC-225EC7AB4493}"/>
-              </a:ext>
-            </a:extLst>
-          </p:cNvPr>
-          <p:cNvSpPr txBox="1"/>
-          <p:nvPr/>
-        </p:nvSpPr>
-        <p:spPr>
-          <a:xfrm>
-            <a:off x="39874322" y="18136314"/>
-            <a:ext cx="1817883" cy="523220"/>
-          </a:xfrm>
-          <a:prstGeom prst="rect">
-            <a:avLst/>
-          </a:prstGeom>
-          <a:noFill/>
-        </p:spPr>
-        <p:txBody>
-          <a:bodyPr wrap="square">
-            <a:spAutoFit/>
-          </a:bodyPr>
-          <a:lstStyle/>
-          <a:p>
-            <a:r>
-              <a:rPr lang="en-US" sz="2800">
-                <a:latin typeface="Helvetica"/>
-                <a:ea typeface="MS PGothic"/>
-              </a:rPr>
-              <a:t>5</a:t>
-            </a:r>
-            <a:endParaRPr lang="en-US" sz="2800">
-              <a:latin typeface="Helvetica"/>
-            </a:endParaRPr>
-          </a:p>
-        </p:txBody>
-      </p:sp>
-      <p:sp>
-        <p:nvSpPr>
-          <p:cNvPr id="15478" name="TextBox 15477">
-            <a:extLst>
-              <a:ext uri="{FF2B5EF4-FFF2-40B4-BE49-F238E27FC236}">
-                <a16:creationId xmlns:a16="http://schemas.microsoft.com/office/drawing/2014/main" id="{697779DE-EC8F-1D36-5346-4D0291FAB01C}"/>
-              </a:ext>
-            </a:extLst>
-          </p:cNvPr>
-          <p:cNvSpPr txBox="1"/>
-          <p:nvPr/>
-        </p:nvSpPr>
-        <p:spPr>
-          <a:xfrm>
-            <a:off x="41085006" y="20897521"/>
-            <a:ext cx="813441" cy="523220"/>
-          </a:xfrm>
-          <a:prstGeom prst="rect">
-            <a:avLst/>
-          </a:prstGeom>
-          <a:noFill/>
-        </p:spPr>
-        <p:txBody>
-          <a:bodyPr wrap="square">
-            <a:spAutoFit/>
-          </a:bodyPr>
-          <a:lstStyle/>
-          <a:p>
-            <a:r>
-              <a:rPr lang="en-US" sz="2800">
-                <a:latin typeface="Helvetica"/>
-                <a:ea typeface="MS PGothic"/>
-              </a:rPr>
-              <a:t>-2</a:t>
-            </a:r>
-            <a:endParaRPr lang="en-US" sz="2800">
-              <a:latin typeface="Helvetica"/>
-            </a:endParaRPr>
-          </a:p>
-        </p:txBody>
-      </p:sp>
-      <p:sp>
-        <p:nvSpPr>
-          <p:cNvPr id="15481" name="TextBox 15480">
-            <a:extLst>
-              <a:ext uri="{FF2B5EF4-FFF2-40B4-BE49-F238E27FC236}">
-                <a16:creationId xmlns:a16="http://schemas.microsoft.com/office/drawing/2014/main" id="{7E571E20-3EFA-2A74-295F-D205BE76E974}"/>
-              </a:ext>
-            </a:extLst>
-          </p:cNvPr>
-          <p:cNvSpPr txBox="1"/>
-          <p:nvPr/>
-        </p:nvSpPr>
-        <p:spPr>
-          <a:xfrm>
-            <a:off x="42363306" y="20898469"/>
-            <a:ext cx="480571" cy="523220"/>
-          </a:xfrm>
-          <a:prstGeom prst="rect">
-            <a:avLst/>
-          </a:prstGeom>
-          <a:noFill/>
-        </p:spPr>
-        <p:txBody>
-          <a:bodyPr wrap="square">
-            <a:spAutoFit/>
-          </a:bodyPr>
-          <a:lstStyle/>
-          <a:p>
-            <a:r>
-              <a:rPr lang="en-US" sz="2800">
-                <a:latin typeface="Helvetica"/>
-                <a:ea typeface="MS PGothic"/>
-              </a:rPr>
-              <a:t>2</a:t>
-            </a:r>
-            <a:endParaRPr lang="en-US" sz="2800">
-              <a:latin typeface="Helvetica"/>
-            </a:endParaRPr>
-          </a:p>
-        </p:txBody>
-      </p:sp>
-      <p:sp>
-        <p:nvSpPr>
-          <p:cNvPr id="15414" name="Rectangle 162">
-            <a:extLst>
-              <a:ext uri="{FF2B5EF4-FFF2-40B4-BE49-F238E27FC236}">
-                <a16:creationId xmlns:a16="http://schemas.microsoft.com/office/drawing/2014/main" id="{25A230EB-5F32-4224-56A1-756BF91CCD15}"/>
-              </a:ext>
-            </a:extLst>
-          </p:cNvPr>
-          <p:cNvSpPr>
-            <a:spLocks noChangeArrowheads="1"/>
-          </p:cNvSpPr>
-          <p:nvPr/>
-        </p:nvSpPr>
-        <p:spPr bwMode="auto">
-          <a:xfrm>
-            <a:off x="30683073" y="14695105"/>
-            <a:ext cx="12967320" cy="9369710"/>
-          </a:xfrm>
-          <a:prstGeom prst="rect">
-            <a:avLst/>
-          </a:prstGeom>
-          <a:noFill/>
-          <a:ln w="76200">
-            <a:solidFill>
-              <a:srgbClr val="C00000"/>
-            </a:solidFill>
-            <a:miter lim="800000"/>
-            <a:headEnd/>
-            <a:tailEnd/>
-          </a:ln>
-          <a:extLst>
-            <a:ext uri="{909E8E84-426E-40DD-AFC4-6F175D3DCCD1}">
-              <a14:hiddenFill xmlns:a14="http://schemas.microsoft.com/office/drawing/2010/main">
-                <a:solidFill>
-                  <a:srgbClr val="FFFFFF"/>
-                </a:solidFill>
-              </a14:hiddenFill>
-            </a:ext>
-          </a:extLst>
-        </p:spPr>
-        <p:txBody>
-          <a:bodyPr wrap="none" lIns="81274" tIns="40638" rIns="81274" bIns="40638" anchor="ctr"/>
-          <a:lstStyle>
-            <a:lvl1pPr>
-              <a:defRPr sz="2400">
-                <a:solidFill>
-                  <a:schemeClr val="tx1"/>
-                </a:solidFill>
-                <a:latin typeface="Helvetica" panose="020B0604020202020204" pitchFamily="34" charset="0"/>
-                <a:ea typeface="MS PGothic" panose="020B0600070205080204" pitchFamily="34" charset="-128"/>
-              </a:defRPr>
-            </a:lvl1pPr>
-            <a:lvl2pPr marL="742950" indent="-285750">
-              <a:defRPr sz="2400">
-                <a:solidFill>
-                  <a:schemeClr val="tx1"/>
-                </a:solidFill>
-                <a:latin typeface="Helvetica" panose="020B0604020202020204" pitchFamily="34" charset="0"/>
-                <a:ea typeface="MS PGothic" panose="020B0600070205080204" pitchFamily="34" charset="-128"/>
-              </a:defRPr>
-            </a:lvl2pPr>
-            <a:lvl3pPr marL="1143000" indent="-228600">
-              <a:defRPr sz="2400">
-                <a:solidFill>
-                  <a:schemeClr val="tx1"/>
-                </a:solidFill>
-                <a:latin typeface="Helvetica" panose="020B0604020202020204" pitchFamily="34" charset="0"/>
-                <a:ea typeface="MS PGothic" panose="020B0600070205080204" pitchFamily="34" charset="-128"/>
-              </a:defRPr>
-            </a:lvl3pPr>
-            <a:lvl4pPr marL="1600200" indent="-228600">
-              <a:defRPr sz="2400">
-                <a:solidFill>
-                  <a:schemeClr val="tx1"/>
-                </a:solidFill>
-                <a:latin typeface="Helvetica" panose="020B0604020202020204" pitchFamily="34" charset="0"/>
-                <a:ea typeface="MS PGothic" panose="020B0600070205080204" pitchFamily="34" charset="-128"/>
-              </a:defRPr>
-            </a:lvl4pPr>
-            <a:lvl5pPr marL="2057400" indent="-228600">
-              <a:defRPr sz="2400">
-                <a:solidFill>
-                  <a:schemeClr val="tx1"/>
-                </a:solidFill>
-                <a:latin typeface="Helvetica" panose="020B0604020202020204" pitchFamily="34" charset="0"/>
-                <a:ea typeface="MS PGothic" panose="020B0600070205080204" pitchFamily="34" charset="-128"/>
-              </a:defRPr>
-            </a:lvl5pPr>
-            <a:lvl6pPr marL="2514600" indent="-228600" eaLnBrk="0" fontAlgn="base" hangingPunct="0">
-              <a:spcBef>
-                <a:spcPct val="0"/>
-              </a:spcBef>
-              <a:spcAft>
-                <a:spcPct val="0"/>
-              </a:spcAft>
-              <a:defRPr sz="2400">
-                <a:solidFill>
-                  <a:schemeClr val="tx1"/>
-                </a:solidFill>
-                <a:latin typeface="Helvetica" panose="020B0604020202020204" pitchFamily="34" charset="0"/>
-                <a:ea typeface="MS PGothic" panose="020B0600070205080204" pitchFamily="34" charset="-128"/>
-              </a:defRPr>
-            </a:lvl6pPr>
-            <a:lvl7pPr marL="2971800" indent="-228600" eaLnBrk="0" fontAlgn="base" hangingPunct="0">
-              <a:spcBef>
-                <a:spcPct val="0"/>
-              </a:spcBef>
-              <a:spcAft>
-                <a:spcPct val="0"/>
-              </a:spcAft>
-              <a:defRPr sz="2400">
-                <a:solidFill>
-                  <a:schemeClr val="tx1"/>
-                </a:solidFill>
-                <a:latin typeface="Helvetica" panose="020B0604020202020204" pitchFamily="34" charset="0"/>
-                <a:ea typeface="MS PGothic" panose="020B0600070205080204" pitchFamily="34" charset="-128"/>
-              </a:defRPr>
-            </a:lvl7pPr>
-            <a:lvl8pPr marL="3429000" indent="-228600" eaLnBrk="0" fontAlgn="base" hangingPunct="0">
-              <a:spcBef>
-                <a:spcPct val="0"/>
-              </a:spcBef>
-              <a:spcAft>
-                <a:spcPct val="0"/>
-              </a:spcAft>
-              <a:defRPr sz="2400">
-                <a:solidFill>
-                  <a:schemeClr val="tx1"/>
-                </a:solidFill>
-                <a:latin typeface="Helvetica" panose="020B0604020202020204" pitchFamily="34" charset="0"/>
-                <a:ea typeface="MS PGothic" panose="020B0600070205080204" pitchFamily="34" charset="-128"/>
-              </a:defRPr>
-            </a:lvl8pPr>
-            <a:lvl9pPr marL="3886200" indent="-228600" eaLnBrk="0" fontAlgn="base" hangingPunct="0">
-              <a:spcBef>
-                <a:spcPct val="0"/>
-              </a:spcBef>
-              <a:spcAft>
-                <a:spcPct val="0"/>
-              </a:spcAft>
-              <a:defRPr sz="2400">
-                <a:solidFill>
-                  <a:schemeClr val="tx1"/>
-                </a:solidFill>
-                <a:latin typeface="Helvetica" panose="020B0604020202020204" pitchFamily="34" charset="0"/>
-                <a:ea typeface="MS PGothic" panose="020B0600070205080204" pitchFamily="34" charset="-128"/>
-              </a:defRPr>
-            </a:lvl9pPr>
-          </a:lstStyle>
-          <a:p>
-            <a:pPr eaLnBrk="1" hangingPunct="1"/>
-            <a:endParaRPr lang="en-US" altLang="en-US" sz="1245">
-              <a:latin typeface="Trebuchet MS" panose="020B0603020202020204" pitchFamily="34" charset="0"/>
-            </a:endParaRPr>
-          </a:p>
-        </p:txBody>
-      </p:sp>
-      <p:pic>
-        <p:nvPicPr>
-          <p:cNvPr id="7" name="Picture 6">
-            <a:extLst>
-              <a:ext uri="{FF2B5EF4-FFF2-40B4-BE49-F238E27FC236}">
-                <a16:creationId xmlns:a16="http://schemas.microsoft.com/office/drawing/2014/main" id="{E5B61256-0745-91A9-AD49-FA138651C227}"/>
-              </a:ext>
-            </a:extLst>
-          </p:cNvPr>
-          <p:cNvPicPr>
-            <a:picLocks noChangeAspect="1"/>
-          </p:cNvPicPr>
-          <p:nvPr/>
-        </p:nvPicPr>
-        <p:blipFill>
-          <a:blip r:embed="rId3"/>
-          <a:stretch>
-            <a:fillRect/>
-          </a:stretch>
-        </p:blipFill>
-        <p:spPr>
-          <a:xfrm>
-            <a:off x="12485319" y="19632612"/>
-            <a:ext cx="2419305" cy="2411132"/>
-          </a:xfrm>
-          <a:prstGeom prst="rect">
-            <a:avLst/>
-          </a:prstGeom>
-        </p:spPr>
-      </p:pic>
-      <p:pic>
-        <p:nvPicPr>
-          <p:cNvPr id="16" name="Picture 15" descr="A screenshot of a computer&#10;&#10;Description automatically generated">
-            <a:extLst>
-              <a:ext uri="{FF2B5EF4-FFF2-40B4-BE49-F238E27FC236}">
-                <a16:creationId xmlns:a16="http://schemas.microsoft.com/office/drawing/2014/main" id="{B07BD813-AE34-D73D-AC53-EFCB279F97D1}"/>
-              </a:ext>
-            </a:extLst>
-          </p:cNvPr>
-          <p:cNvPicPr>
-            <a:picLocks noChangeAspect="1"/>
-          </p:cNvPicPr>
-          <p:nvPr/>
-        </p:nvPicPr>
-        <p:blipFill>
-          <a:blip r:embed="rId4">
-            <a:extLst>
-              <a:ext uri="{28A0092B-C50C-407E-A947-70E740481C1C}">
-                <a14:useLocalDpi xmlns:a14="http://schemas.microsoft.com/office/drawing/2010/main" val="0"/>
-              </a:ext>
-            </a:extLst>
-          </a:blip>
-          <a:stretch>
-            <a:fillRect/>
-          </a:stretch>
-        </p:blipFill>
-        <p:spPr>
-          <a:xfrm>
-            <a:off x="1867911" y="15759794"/>
-            <a:ext cx="12396375" cy="10069546"/>
-          </a:xfrm>
-          <a:prstGeom prst="rect">
-            <a:avLst/>
-          </a:prstGeom>
-        </p:spPr>
-      </p:pic>
+              </a:endParaRPr>
+            </a:p>
+          </p:txBody>
+        </p:sp>
+      </p:grpSp>
       <p:pic>
         <p:nvPicPr>
           <p:cNvPr id="17" name="Picture 16">
@@ -11291,7 +8051,7 @@
           <p:nvPr/>
         </p:nvPicPr>
         <p:blipFill>
-          <a:blip r:embed="rId5"/>
+          <a:blip r:embed="rId4"/>
           <a:stretch>
             <a:fillRect/>
           </a:stretch>
@@ -12791,7 +9551,7 @@
           <p:nvPr/>
         </p:nvPicPr>
         <p:blipFill>
-          <a:blip r:embed="rId6">
+          <a:blip r:embed="rId5">
             <a:extLst>
               <a:ext uri="{28A0092B-C50C-407E-A947-70E740481C1C}">
                 <a14:useLocalDpi xmlns:a14="http://schemas.microsoft.com/office/drawing/2010/main" val="0"/>
@@ -12827,7 +9587,7 @@
           <p:nvPr/>
         </p:nvPicPr>
         <p:blipFill rotWithShape="1">
-          <a:blip r:embed="rId7">
+          <a:blip r:embed="rId6">
             <a:extLst>
               <a:ext uri="{28A0092B-C50C-407E-A947-70E740481C1C}">
                 <a14:useLocalDpi xmlns:a14="http://schemas.microsoft.com/office/drawing/2010/main" val="0"/>
@@ -12882,12 +9642,640 @@
           </a:p>
         </p:txBody>
       </p:sp>
+      <p:pic>
+        <p:nvPicPr>
+          <p:cNvPr id="15389" name="Picture 10060"/>
+          <p:cNvPicPr>
+            <a:picLocks noChangeAspect="1" noChangeArrowheads="1"/>
+          </p:cNvPicPr>
+          <p:nvPr/>
+        </p:nvPicPr>
+        <p:blipFill>
+          <a:blip>
+            <a:extLst>
+              <a:ext uri="{28A0092B-C50C-407E-A947-70E740481C1C}">
+                <a14:useLocalDpi xmlns:a14="http://schemas.microsoft.com/office/drawing/2010/main" val="0"/>
+              </a:ext>
+            </a:extLst>
+          </a:blip>
+          <a:srcRect/>
+          <a:stretch>
+            <a:fillRect/>
+          </a:stretch>
+        </p:blipFill>
+        <p:spPr bwMode="auto">
+          <a:xfrm>
+            <a:off x="494755" y="252918"/>
+            <a:ext cx="3037143" cy="3396805"/>
+          </a:xfrm>
+          <a:prstGeom prst="rect">
+            <a:avLst/>
+          </a:prstGeom>
+          <a:noFill/>
+          <a:ln>
+            <a:noFill/>
+          </a:ln>
+          <a:extLst>
+            <a:ext uri="{909E8E84-426E-40DD-AFC4-6F175D3DCCD1}">
+              <a14:hiddenFill xmlns:a14="http://schemas.microsoft.com/office/drawing/2010/main">
+                <a:solidFill>
+                  <a:srgbClr val="FFFFFF"/>
+                </a:solidFill>
+              </a14:hiddenFill>
+            </a:ext>
+            <a:ext uri="{91240B29-F687-4F45-9708-019B960494DF}">
+              <a14:hiddenLine xmlns:a14="http://schemas.microsoft.com/office/drawing/2010/main" w="9525">
+                <a:solidFill>
+                  <a:srgbClr val="000000"/>
+                </a:solidFill>
+                <a:miter lim="800000"/>
+                <a:headEnd/>
+                <a:tailEnd/>
+              </a14:hiddenLine>
+            </a:ext>
+          </a:extLst>
+        </p:spPr>
+      </p:pic>
       <p:sp>
         <p:nvSpPr>
-          <p:cNvPr id="15421" name="TextBox 15420">
+          <p:cNvPr id="15400" name="Rectangle 54"/>
+          <p:cNvSpPr>
+            <a:spLocks noChangeArrowheads="1"/>
+          </p:cNvSpPr>
+          <p:nvPr/>
+        </p:nvSpPr>
+        <p:spPr bwMode="auto">
+          <a:xfrm>
+            <a:off x="30676645" y="24531321"/>
+            <a:ext cx="12928282" cy="6994361"/>
+          </a:xfrm>
+          <a:prstGeom prst="rect">
+            <a:avLst/>
+          </a:prstGeom>
+          <a:noFill/>
+          <a:ln w="76200">
+            <a:solidFill>
+              <a:srgbClr val="C00000"/>
+            </a:solidFill>
+            <a:miter lim="800000"/>
+            <a:headEnd/>
+            <a:tailEnd/>
+          </a:ln>
+          <a:extLst>
+            <a:ext uri="{909E8E84-426E-40DD-AFC4-6F175D3DCCD1}">
+              <a14:hiddenFill xmlns:a14="http://schemas.microsoft.com/office/drawing/2010/main">
+                <a:solidFill>
+                  <a:srgbClr val="FFFFFF"/>
+                </a:solidFill>
+              </a14:hiddenFill>
+            </a:ext>
+          </a:extLst>
+        </p:spPr>
+        <p:txBody>
+          <a:bodyPr wrap="none" lIns="81274" tIns="40638" rIns="81274" bIns="40638" anchor="ctr"/>
+          <a:lstStyle>
+            <a:lvl1pPr>
+              <a:defRPr sz="2400">
+                <a:solidFill>
+                  <a:schemeClr val="tx1"/>
+                </a:solidFill>
+                <a:latin typeface="Helvetica" panose="020B0604020202020204" pitchFamily="34" charset="0"/>
+                <a:ea typeface="MS PGothic" panose="020B0600070205080204" pitchFamily="34" charset="-128"/>
+              </a:defRPr>
+            </a:lvl1pPr>
+            <a:lvl2pPr marL="742950" indent="-285750">
+              <a:defRPr sz="2400">
+                <a:solidFill>
+                  <a:schemeClr val="tx1"/>
+                </a:solidFill>
+                <a:latin typeface="Helvetica" panose="020B0604020202020204" pitchFamily="34" charset="0"/>
+                <a:ea typeface="MS PGothic" panose="020B0600070205080204" pitchFamily="34" charset="-128"/>
+              </a:defRPr>
+            </a:lvl2pPr>
+            <a:lvl3pPr marL="1143000" indent="-228600">
+              <a:defRPr sz="2400">
+                <a:solidFill>
+                  <a:schemeClr val="tx1"/>
+                </a:solidFill>
+                <a:latin typeface="Helvetica" panose="020B0604020202020204" pitchFamily="34" charset="0"/>
+                <a:ea typeface="MS PGothic" panose="020B0600070205080204" pitchFamily="34" charset="-128"/>
+              </a:defRPr>
+            </a:lvl3pPr>
+            <a:lvl4pPr marL="1600200" indent="-228600">
+              <a:defRPr sz="2400">
+                <a:solidFill>
+                  <a:schemeClr val="tx1"/>
+                </a:solidFill>
+                <a:latin typeface="Helvetica" panose="020B0604020202020204" pitchFamily="34" charset="0"/>
+                <a:ea typeface="MS PGothic" panose="020B0600070205080204" pitchFamily="34" charset="-128"/>
+              </a:defRPr>
+            </a:lvl4pPr>
+            <a:lvl5pPr marL="2057400" indent="-228600">
+              <a:defRPr sz="2400">
+                <a:solidFill>
+                  <a:schemeClr val="tx1"/>
+                </a:solidFill>
+                <a:latin typeface="Helvetica" panose="020B0604020202020204" pitchFamily="34" charset="0"/>
+                <a:ea typeface="MS PGothic" panose="020B0600070205080204" pitchFamily="34" charset="-128"/>
+              </a:defRPr>
+            </a:lvl5pPr>
+            <a:lvl6pPr marL="2514600" indent="-228600" eaLnBrk="0" fontAlgn="base" hangingPunct="0">
+              <a:spcBef>
+                <a:spcPct val="0"/>
+              </a:spcBef>
+              <a:spcAft>
+                <a:spcPct val="0"/>
+              </a:spcAft>
+              <a:defRPr sz="2400">
+                <a:solidFill>
+                  <a:schemeClr val="tx1"/>
+                </a:solidFill>
+                <a:latin typeface="Helvetica" panose="020B0604020202020204" pitchFamily="34" charset="0"/>
+                <a:ea typeface="MS PGothic" panose="020B0600070205080204" pitchFamily="34" charset="-128"/>
+              </a:defRPr>
+            </a:lvl6pPr>
+            <a:lvl7pPr marL="2971800" indent="-228600" eaLnBrk="0" fontAlgn="base" hangingPunct="0">
+              <a:spcBef>
+                <a:spcPct val="0"/>
+              </a:spcBef>
+              <a:spcAft>
+                <a:spcPct val="0"/>
+              </a:spcAft>
+              <a:defRPr sz="2400">
+                <a:solidFill>
+                  <a:schemeClr val="tx1"/>
+                </a:solidFill>
+                <a:latin typeface="Helvetica" panose="020B0604020202020204" pitchFamily="34" charset="0"/>
+                <a:ea typeface="MS PGothic" panose="020B0600070205080204" pitchFamily="34" charset="-128"/>
+              </a:defRPr>
+            </a:lvl7pPr>
+            <a:lvl8pPr marL="3429000" indent="-228600" eaLnBrk="0" fontAlgn="base" hangingPunct="0">
+              <a:spcBef>
+                <a:spcPct val="0"/>
+              </a:spcBef>
+              <a:spcAft>
+                <a:spcPct val="0"/>
+              </a:spcAft>
+              <a:defRPr sz="2400">
+                <a:solidFill>
+                  <a:schemeClr val="tx1"/>
+                </a:solidFill>
+                <a:latin typeface="Helvetica" panose="020B0604020202020204" pitchFamily="34" charset="0"/>
+                <a:ea typeface="MS PGothic" panose="020B0600070205080204" pitchFamily="34" charset="-128"/>
+              </a:defRPr>
+            </a:lvl8pPr>
+            <a:lvl9pPr marL="3886200" indent="-228600" eaLnBrk="0" fontAlgn="base" hangingPunct="0">
+              <a:spcBef>
+                <a:spcPct val="0"/>
+              </a:spcBef>
+              <a:spcAft>
+                <a:spcPct val="0"/>
+              </a:spcAft>
+              <a:defRPr sz="2400">
+                <a:solidFill>
+                  <a:schemeClr val="tx1"/>
+                </a:solidFill>
+                <a:latin typeface="Helvetica" panose="020B0604020202020204" pitchFamily="34" charset="0"/>
+                <a:ea typeface="MS PGothic" panose="020B0600070205080204" pitchFamily="34" charset="-128"/>
+              </a:defRPr>
+            </a:lvl9pPr>
+          </a:lstStyle>
+          <a:p>
+            <a:pPr eaLnBrk="1" hangingPunct="1"/>
+            <a:endParaRPr lang="en-US" altLang="en-US" sz="1245">
+              <a:latin typeface="Trebuchet MS" panose="020B0603020202020204" pitchFamily="34" charset="0"/>
+            </a:endParaRPr>
+          </a:p>
+        </p:txBody>
+      </p:sp>
+      <p:sp>
+        <p:nvSpPr>
+          <p:cNvPr id="72" name="TextBox 86">
             <a:extLst>
               <a:ext uri="{FF2B5EF4-FFF2-40B4-BE49-F238E27FC236}">
-                <a16:creationId xmlns:a16="http://schemas.microsoft.com/office/drawing/2014/main" id="{59CD90FF-DE48-3105-3B98-B005986E4B75}"/>
+                <a16:creationId xmlns:a16="http://schemas.microsoft.com/office/drawing/2014/main" id="{7876542B-4364-4FD7-BCA2-651EBF34C355}"/>
+              </a:ext>
+            </a:extLst>
+          </p:cNvPr>
+          <p:cNvSpPr txBox="1">
+            <a:spLocks noChangeArrowheads="1"/>
+          </p:cNvSpPr>
+          <p:nvPr/>
+        </p:nvSpPr>
+        <p:spPr bwMode="auto">
+          <a:xfrm>
+            <a:off x="32230620" y="24371337"/>
+            <a:ext cx="9797258" cy="748988"/>
+          </a:xfrm>
+          <a:prstGeom prst="rect">
+            <a:avLst/>
+          </a:prstGeom>
+          <a:solidFill>
+            <a:schemeClr val="bg1"/>
+          </a:solidFill>
+          <a:ln>
+            <a:noFill/>
+          </a:ln>
+        </p:spPr>
+        <p:txBody>
+          <a:bodyPr wrap="square">
+            <a:spAutoFit/>
+          </a:bodyPr>
+          <a:lstStyle>
+            <a:lvl1pPr>
+              <a:defRPr sz="2400">
+                <a:solidFill>
+                  <a:schemeClr val="tx1"/>
+                </a:solidFill>
+                <a:latin typeface="Helvetica" panose="020B0604020202020204" pitchFamily="34" charset="0"/>
+                <a:ea typeface="MS PGothic" panose="020B0600070205080204" pitchFamily="34" charset="-128"/>
+              </a:defRPr>
+            </a:lvl1pPr>
+            <a:lvl2pPr marL="742950" indent="-285750">
+              <a:defRPr sz="2400">
+                <a:solidFill>
+                  <a:schemeClr val="tx1"/>
+                </a:solidFill>
+                <a:latin typeface="Helvetica" panose="020B0604020202020204" pitchFamily="34" charset="0"/>
+                <a:ea typeface="MS PGothic" panose="020B0600070205080204" pitchFamily="34" charset="-128"/>
+              </a:defRPr>
+            </a:lvl2pPr>
+            <a:lvl3pPr marL="1143000" indent="-228600">
+              <a:defRPr sz="2400">
+                <a:solidFill>
+                  <a:schemeClr val="tx1"/>
+                </a:solidFill>
+                <a:latin typeface="Helvetica" panose="020B0604020202020204" pitchFamily="34" charset="0"/>
+                <a:ea typeface="MS PGothic" panose="020B0600070205080204" pitchFamily="34" charset="-128"/>
+              </a:defRPr>
+            </a:lvl3pPr>
+            <a:lvl4pPr marL="1600200" indent="-228600">
+              <a:defRPr sz="2400">
+                <a:solidFill>
+                  <a:schemeClr val="tx1"/>
+                </a:solidFill>
+                <a:latin typeface="Helvetica" panose="020B0604020202020204" pitchFamily="34" charset="0"/>
+                <a:ea typeface="MS PGothic" panose="020B0600070205080204" pitchFamily="34" charset="-128"/>
+              </a:defRPr>
+            </a:lvl4pPr>
+            <a:lvl5pPr marL="2057400" indent="-228600">
+              <a:defRPr sz="2400">
+                <a:solidFill>
+                  <a:schemeClr val="tx1"/>
+                </a:solidFill>
+                <a:latin typeface="Helvetica" panose="020B0604020202020204" pitchFamily="34" charset="0"/>
+                <a:ea typeface="MS PGothic" panose="020B0600070205080204" pitchFamily="34" charset="-128"/>
+              </a:defRPr>
+            </a:lvl5pPr>
+            <a:lvl6pPr marL="2514600" indent="-228600" eaLnBrk="0" fontAlgn="base" hangingPunct="0">
+              <a:spcBef>
+                <a:spcPct val="0"/>
+              </a:spcBef>
+              <a:spcAft>
+                <a:spcPct val="0"/>
+              </a:spcAft>
+              <a:defRPr sz="2400">
+                <a:solidFill>
+                  <a:schemeClr val="tx1"/>
+                </a:solidFill>
+                <a:latin typeface="Helvetica" panose="020B0604020202020204" pitchFamily="34" charset="0"/>
+                <a:ea typeface="MS PGothic" panose="020B0600070205080204" pitchFamily="34" charset="-128"/>
+              </a:defRPr>
+            </a:lvl6pPr>
+            <a:lvl7pPr marL="2971800" indent="-228600" eaLnBrk="0" fontAlgn="base" hangingPunct="0">
+              <a:spcBef>
+                <a:spcPct val="0"/>
+              </a:spcBef>
+              <a:spcAft>
+                <a:spcPct val="0"/>
+              </a:spcAft>
+              <a:defRPr sz="2400">
+                <a:solidFill>
+                  <a:schemeClr val="tx1"/>
+                </a:solidFill>
+                <a:latin typeface="Helvetica" panose="020B0604020202020204" pitchFamily="34" charset="0"/>
+                <a:ea typeface="MS PGothic" panose="020B0600070205080204" pitchFamily="34" charset="-128"/>
+              </a:defRPr>
+            </a:lvl7pPr>
+            <a:lvl8pPr marL="3429000" indent="-228600" eaLnBrk="0" fontAlgn="base" hangingPunct="0">
+              <a:spcBef>
+                <a:spcPct val="0"/>
+              </a:spcBef>
+              <a:spcAft>
+                <a:spcPct val="0"/>
+              </a:spcAft>
+              <a:defRPr sz="2400">
+                <a:solidFill>
+                  <a:schemeClr val="tx1"/>
+                </a:solidFill>
+                <a:latin typeface="Helvetica" panose="020B0604020202020204" pitchFamily="34" charset="0"/>
+                <a:ea typeface="MS PGothic" panose="020B0600070205080204" pitchFamily="34" charset="-128"/>
+              </a:defRPr>
+            </a:lvl8pPr>
+            <a:lvl9pPr marL="3886200" indent="-228600" eaLnBrk="0" fontAlgn="base" hangingPunct="0">
+              <a:spcBef>
+                <a:spcPct val="0"/>
+              </a:spcBef>
+              <a:spcAft>
+                <a:spcPct val="0"/>
+              </a:spcAft>
+              <a:defRPr sz="2400">
+                <a:solidFill>
+                  <a:schemeClr val="tx1"/>
+                </a:solidFill>
+                <a:latin typeface="Helvetica" panose="020B0604020202020204" pitchFamily="34" charset="0"/>
+                <a:ea typeface="MS PGothic" panose="020B0600070205080204" pitchFamily="34" charset="-128"/>
+              </a:defRPr>
+            </a:lvl9pPr>
+          </a:lstStyle>
+          <a:p>
+            <a:pPr algn="ctr"/>
+            <a:r>
+              <a:rPr lang="en-US" altLang="en-US" sz="4267" b="1" dirty="0">
+                <a:solidFill>
+                  <a:srgbClr val="C00000"/>
+                </a:solidFill>
+                <a:latin typeface="Trebuchet MS" panose="020B0603020202020204" pitchFamily="34" charset="0"/>
+              </a:rPr>
+              <a:t>8. Conclusions and Future Directions</a:t>
+            </a:r>
+          </a:p>
+        </p:txBody>
+      </p:sp>
+      <p:sp>
+        <p:nvSpPr>
+          <p:cNvPr id="5" name="Rectangle 4">
+            <a:extLst>
+              <a:ext uri="{FF2B5EF4-FFF2-40B4-BE49-F238E27FC236}">
+                <a16:creationId xmlns:a16="http://schemas.microsoft.com/office/drawing/2014/main" id="{F27FB003-669C-6748-AC0B-0C13B0734BA6}"/>
+              </a:ext>
+            </a:extLst>
+          </p:cNvPr>
+          <p:cNvSpPr/>
+          <p:nvPr/>
+        </p:nvSpPr>
+        <p:spPr>
+          <a:xfrm>
+            <a:off x="30912367" y="25351882"/>
+            <a:ext cx="12914399" cy="1374735"/>
+          </a:xfrm>
+          <a:prstGeom prst="rect">
+            <a:avLst/>
+          </a:prstGeom>
+        </p:spPr>
+        <p:txBody>
+          <a:bodyPr wrap="square" lIns="91440" tIns="45720" rIns="91440" bIns="45720" anchor="t">
+            <a:spAutoFit/>
+          </a:bodyPr>
+          <a:lstStyle/>
+          <a:p>
+            <a:pPr>
+              <a:spcBef>
+                <a:spcPts val="360"/>
+              </a:spcBef>
+              <a:spcAft>
+                <a:spcPts val="0"/>
+              </a:spcAft>
+              <a:buFont typeface="Arial" panose="020B0604020202020204" pitchFamily="34" charset="0"/>
+              <a:buChar char="•"/>
+            </a:pPr>
+            <a:r>
+              <a:rPr lang="en-US" sz="4000" dirty="0">
+                <a:latin typeface="Helvetica"/>
+                <a:ea typeface="MS PGothic"/>
+                <a:cs typeface="Helvetica"/>
+              </a:rPr>
+              <a:t> .</a:t>
+            </a:r>
+          </a:p>
+          <a:p>
+            <a:pPr>
+              <a:spcBef>
+                <a:spcPts val="360"/>
+              </a:spcBef>
+              <a:spcAft>
+                <a:spcPts val="0"/>
+              </a:spcAft>
+            </a:pPr>
+            <a:endParaRPr lang="en-US" sz="4000" b="1" dirty="0">
+              <a:latin typeface="Helvetica"/>
+              <a:ea typeface="MS PGothic"/>
+              <a:cs typeface="Helvetica"/>
+            </a:endParaRPr>
+          </a:p>
+        </p:txBody>
+      </p:sp>
+      <p:pic>
+        <p:nvPicPr>
+          <p:cNvPr id="82" name="Picture 2" descr="Image result for adelphi university">
+            <a:extLst>
+              <a:ext uri="{FF2B5EF4-FFF2-40B4-BE49-F238E27FC236}">
+                <a16:creationId xmlns:a16="http://schemas.microsoft.com/office/drawing/2014/main" id="{28154B0C-9082-4664-BE4E-292BAAFD349C}"/>
+              </a:ext>
+            </a:extLst>
+          </p:cNvPr>
+          <p:cNvPicPr>
+            <a:picLocks noChangeAspect="1" noChangeArrowheads="1"/>
+          </p:cNvPicPr>
+          <p:nvPr/>
+        </p:nvPicPr>
+        <p:blipFill>
+          <a:blip>
+            <a:extLst>
+              <a:ext uri="{28A0092B-C50C-407E-A947-70E740481C1C}">
+                <a14:useLocalDpi xmlns:a14="http://schemas.microsoft.com/office/drawing/2010/main" val="0"/>
+              </a:ext>
+            </a:extLst>
+          </a:blip>
+          <a:srcRect/>
+          <a:stretch>
+            <a:fillRect/>
+          </a:stretch>
+        </p:blipFill>
+        <p:spPr bwMode="auto">
+          <a:xfrm>
+            <a:off x="41331346" y="1633353"/>
+            <a:ext cx="1986759" cy="1986759"/>
+          </a:xfrm>
+          <a:prstGeom prst="rect">
+            <a:avLst/>
+          </a:prstGeom>
+          <a:noFill/>
+          <a:extLst>
+            <a:ext uri="{909E8E84-426E-40DD-AFC4-6F175D3DCCD1}">
+              <a14:hiddenFill xmlns:a14="http://schemas.microsoft.com/office/drawing/2010/main">
+                <a:solidFill>
+                  <a:srgbClr val="FFFFFF"/>
+                </a:solidFill>
+              </a14:hiddenFill>
+            </a:ext>
+          </a:extLst>
+        </p:spPr>
+      </p:pic>
+      <p:sp>
+        <p:nvSpPr>
+          <p:cNvPr id="127" name="Rectangle 54">
+            <a:extLst>
+              <a:ext uri="{FF2B5EF4-FFF2-40B4-BE49-F238E27FC236}">
+                <a16:creationId xmlns:a16="http://schemas.microsoft.com/office/drawing/2014/main" id="{CCC8C574-2C37-4FF8-83CC-02DE2FB92E37}"/>
+              </a:ext>
+            </a:extLst>
+          </p:cNvPr>
+          <p:cNvSpPr>
+            <a:spLocks noChangeArrowheads="1"/>
+          </p:cNvSpPr>
+          <p:nvPr/>
+        </p:nvSpPr>
+        <p:spPr bwMode="auto">
+          <a:xfrm>
+            <a:off x="30667546" y="31846944"/>
+            <a:ext cx="12923262" cy="813380"/>
+          </a:xfrm>
+          <a:prstGeom prst="rect">
+            <a:avLst/>
+          </a:prstGeom>
+          <a:noFill/>
+          <a:ln w="76200">
+            <a:solidFill>
+              <a:srgbClr val="C00000"/>
+            </a:solidFill>
+            <a:miter lim="800000"/>
+            <a:headEnd/>
+            <a:tailEnd/>
+          </a:ln>
+          <a:extLst>
+            <a:ext uri="{909E8E84-426E-40DD-AFC4-6F175D3DCCD1}">
+              <a14:hiddenFill xmlns:a14="http://schemas.microsoft.com/office/drawing/2010/main">
+                <a:solidFill>
+                  <a:srgbClr val="FFFFFF"/>
+                </a:solidFill>
+              </a14:hiddenFill>
+            </a:ext>
+          </a:extLst>
+        </p:spPr>
+        <p:txBody>
+          <a:bodyPr wrap="none" lIns="81274" tIns="40638" rIns="81274" bIns="40638" anchor="ctr"/>
+          <a:lstStyle>
+            <a:lvl1pPr>
+              <a:defRPr sz="2400">
+                <a:solidFill>
+                  <a:schemeClr val="tx1"/>
+                </a:solidFill>
+                <a:latin typeface="Helvetica" panose="020B0604020202020204" pitchFamily="34" charset="0"/>
+                <a:ea typeface="MS PGothic" panose="020B0600070205080204" pitchFamily="34" charset="-128"/>
+              </a:defRPr>
+            </a:lvl1pPr>
+            <a:lvl2pPr marL="742950" indent="-285750">
+              <a:defRPr sz="2400">
+                <a:solidFill>
+                  <a:schemeClr val="tx1"/>
+                </a:solidFill>
+                <a:latin typeface="Helvetica" panose="020B0604020202020204" pitchFamily="34" charset="0"/>
+                <a:ea typeface="MS PGothic" panose="020B0600070205080204" pitchFamily="34" charset="-128"/>
+              </a:defRPr>
+            </a:lvl2pPr>
+            <a:lvl3pPr marL="1143000" indent="-228600">
+              <a:defRPr sz="2400">
+                <a:solidFill>
+                  <a:schemeClr val="tx1"/>
+                </a:solidFill>
+                <a:latin typeface="Helvetica" panose="020B0604020202020204" pitchFamily="34" charset="0"/>
+                <a:ea typeface="MS PGothic" panose="020B0600070205080204" pitchFamily="34" charset="-128"/>
+              </a:defRPr>
+            </a:lvl3pPr>
+            <a:lvl4pPr marL="1600200" indent="-228600">
+              <a:defRPr sz="2400">
+                <a:solidFill>
+                  <a:schemeClr val="tx1"/>
+                </a:solidFill>
+                <a:latin typeface="Helvetica" panose="020B0604020202020204" pitchFamily="34" charset="0"/>
+                <a:ea typeface="MS PGothic" panose="020B0600070205080204" pitchFamily="34" charset="-128"/>
+              </a:defRPr>
+            </a:lvl4pPr>
+            <a:lvl5pPr marL="2057400" indent="-228600">
+              <a:defRPr sz="2400">
+                <a:solidFill>
+                  <a:schemeClr val="tx1"/>
+                </a:solidFill>
+                <a:latin typeface="Helvetica" panose="020B0604020202020204" pitchFamily="34" charset="0"/>
+                <a:ea typeface="MS PGothic" panose="020B0600070205080204" pitchFamily="34" charset="-128"/>
+              </a:defRPr>
+            </a:lvl5pPr>
+            <a:lvl6pPr marL="2514600" indent="-228600" eaLnBrk="0" fontAlgn="base" hangingPunct="0">
+              <a:spcBef>
+                <a:spcPct val="0"/>
+              </a:spcBef>
+              <a:spcAft>
+                <a:spcPct val="0"/>
+              </a:spcAft>
+              <a:defRPr sz="2400">
+                <a:solidFill>
+                  <a:schemeClr val="tx1"/>
+                </a:solidFill>
+                <a:latin typeface="Helvetica" panose="020B0604020202020204" pitchFamily="34" charset="0"/>
+                <a:ea typeface="MS PGothic" panose="020B0600070205080204" pitchFamily="34" charset="-128"/>
+              </a:defRPr>
+            </a:lvl6pPr>
+            <a:lvl7pPr marL="2971800" indent="-228600" eaLnBrk="0" fontAlgn="base" hangingPunct="0">
+              <a:spcBef>
+                <a:spcPct val="0"/>
+              </a:spcBef>
+              <a:spcAft>
+                <a:spcPct val="0"/>
+              </a:spcAft>
+              <a:defRPr sz="2400">
+                <a:solidFill>
+                  <a:schemeClr val="tx1"/>
+                </a:solidFill>
+                <a:latin typeface="Helvetica" panose="020B0604020202020204" pitchFamily="34" charset="0"/>
+                <a:ea typeface="MS PGothic" panose="020B0600070205080204" pitchFamily="34" charset="-128"/>
+              </a:defRPr>
+            </a:lvl7pPr>
+            <a:lvl8pPr marL="3429000" indent="-228600" eaLnBrk="0" fontAlgn="base" hangingPunct="0">
+              <a:spcBef>
+                <a:spcPct val="0"/>
+              </a:spcBef>
+              <a:spcAft>
+                <a:spcPct val="0"/>
+              </a:spcAft>
+              <a:defRPr sz="2400">
+                <a:solidFill>
+                  <a:schemeClr val="tx1"/>
+                </a:solidFill>
+                <a:latin typeface="Helvetica" panose="020B0604020202020204" pitchFamily="34" charset="0"/>
+                <a:ea typeface="MS PGothic" panose="020B0600070205080204" pitchFamily="34" charset="-128"/>
+              </a:defRPr>
+            </a:lvl8pPr>
+            <a:lvl9pPr marL="3886200" indent="-228600" eaLnBrk="0" fontAlgn="base" hangingPunct="0">
+              <a:spcBef>
+                <a:spcPct val="0"/>
+              </a:spcBef>
+              <a:spcAft>
+                <a:spcPct val="0"/>
+              </a:spcAft>
+              <a:defRPr sz="2400">
+                <a:solidFill>
+                  <a:schemeClr val="tx1"/>
+                </a:solidFill>
+                <a:latin typeface="Helvetica" panose="020B0604020202020204" pitchFamily="34" charset="0"/>
+                <a:ea typeface="MS PGothic" panose="020B0600070205080204" pitchFamily="34" charset="-128"/>
+              </a:defRPr>
+            </a:lvl9pPr>
+          </a:lstStyle>
+          <a:p>
+            <a:pPr eaLnBrk="1" hangingPunct="1"/>
+            <a:endParaRPr lang="en-US" altLang="en-US" sz="1245">
+              <a:latin typeface="Trebuchet MS" panose="020B0603020202020204" pitchFamily="34" charset="0"/>
+            </a:endParaRPr>
+          </a:p>
+        </p:txBody>
+      </p:sp>
+      <p:sp>
+        <p:nvSpPr>
+          <p:cNvPr id="6" name="TextBox 5">
+            <a:extLst>
+              <a:ext uri="{FF2B5EF4-FFF2-40B4-BE49-F238E27FC236}">
+                <a16:creationId xmlns:a16="http://schemas.microsoft.com/office/drawing/2014/main" id="{70FD3937-717B-30F1-EF0F-1BE3A44A9629}"/>
               </a:ext>
             </a:extLst>
           </p:cNvPr>
@@ -12896,8 +10284,8 @@
         </p:nvSpPr>
         <p:spPr>
           <a:xfrm>
-            <a:off x="38571055" y="5735782"/>
-            <a:ext cx="184731" cy="369332"/>
+            <a:off x="30912367" y="29293095"/>
+            <a:ext cx="12442911" cy="2146231"/>
           </a:xfrm>
           <a:prstGeom prst="rect">
             <a:avLst/>
@@ -12905,15 +10293,1362 @@
           <a:noFill/>
         </p:spPr>
         <p:txBody>
-          <a:bodyPr wrap="none" rtlCol="0">
+          <a:bodyPr wrap="square" lIns="91440" tIns="45720" rIns="91440" bIns="45720" anchor="t">
             <a:spAutoFit/>
           </a:bodyPr>
           <a:lstStyle/>
           <a:p>
-            <a:endParaRPr lang="en-US" dirty="0"/>
+            <a:pPr algn="ctr">
+              <a:spcBef>
+                <a:spcPts val="360"/>
+              </a:spcBef>
+              <a:spcAft>
+                <a:spcPts val="0"/>
+              </a:spcAft>
+            </a:pPr>
+            <a:r>
+              <a:rPr lang="en-US" sz="4200" b="1" dirty="0">
+                <a:latin typeface="Helvetica"/>
+                <a:ea typeface="MS PGothic"/>
+                <a:cs typeface="Helvetica"/>
+              </a:rPr>
+              <a:t>Our findings help to characterize the role of </a:t>
+            </a:r>
+            <a:r>
+              <a:rPr lang="en-US" sz="4200" b="1" dirty="0" err="1">
+                <a:latin typeface="Helvetica"/>
+                <a:ea typeface="MS PGothic"/>
+                <a:cs typeface="Helvetica"/>
+              </a:rPr>
+              <a:t>corticostriatal</a:t>
+            </a:r>
+            <a:r>
+              <a:rPr lang="en-US" sz="4200" b="1" dirty="0">
+                <a:latin typeface="Helvetica"/>
+                <a:ea typeface="MS PGothic"/>
+                <a:cs typeface="Helvetica"/>
+              </a:rPr>
+              <a:t> connectivity in </a:t>
+            </a:r>
+            <a:endParaRPr lang="en-US" sz="4200" dirty="0">
+              <a:cs typeface="Arial"/>
+            </a:endParaRPr>
+          </a:p>
+          <a:p>
+            <a:pPr algn="ctr">
+              <a:spcBef>
+                <a:spcPts val="360"/>
+              </a:spcBef>
+              <a:spcAft>
+                <a:spcPts val="0"/>
+              </a:spcAft>
+            </a:pPr>
+            <a:r>
+              <a:rPr lang="en-US" sz="4200" b="1" dirty="0">
+                <a:latin typeface="Helvetica"/>
+                <a:ea typeface="MS PGothic"/>
+                <a:cs typeface="Helvetica"/>
+              </a:rPr>
+              <a:t>social decision making.</a:t>
+            </a:r>
+            <a:endParaRPr lang="en-US" sz="4200" dirty="0"/>
           </a:p>
         </p:txBody>
       </p:sp>
+      <p:pic>
+        <p:nvPicPr>
+          <p:cNvPr id="14" name="Picture 13" descr="A logo of a university&#10;&#10;Description automatically generated">
+            <a:extLst>
+              <a:ext uri="{FF2B5EF4-FFF2-40B4-BE49-F238E27FC236}">
+                <a16:creationId xmlns:a16="http://schemas.microsoft.com/office/drawing/2014/main" id="{9F423328-9A02-A5CE-6F48-CAD10A8AF80B}"/>
+              </a:ext>
+            </a:extLst>
+          </p:cNvPr>
+          <p:cNvPicPr>
+            <a:picLocks noChangeAspect="1"/>
+          </p:cNvPicPr>
+          <p:nvPr/>
+        </p:nvPicPr>
+        <p:blipFill>
+          <a:blip>
+            <a:extLst>
+              <a:ext uri="{28A0092B-C50C-407E-A947-70E740481C1C}">
+                <a14:useLocalDpi xmlns:a14="http://schemas.microsoft.com/office/drawing/2010/main" val="0"/>
+              </a:ext>
+            </a:extLst>
+          </a:blip>
+          <a:stretch>
+            <a:fillRect/>
+          </a:stretch>
+        </p:blipFill>
+        <p:spPr>
+          <a:xfrm>
+            <a:off x="39148879" y="321878"/>
+            <a:ext cx="1819284" cy="2067919"/>
+          </a:xfrm>
+          <a:prstGeom prst="rect">
+            <a:avLst/>
+          </a:prstGeom>
+        </p:spPr>
+      </p:pic>
+      <p:sp>
+        <p:nvSpPr>
+          <p:cNvPr id="15415" name="TextBox 86">
+            <a:extLst>
+              <a:ext uri="{FF2B5EF4-FFF2-40B4-BE49-F238E27FC236}">
+                <a16:creationId xmlns:a16="http://schemas.microsoft.com/office/drawing/2014/main" id="{B1E3A897-53DA-649F-39B9-6F4056C35336}"/>
+              </a:ext>
+            </a:extLst>
+          </p:cNvPr>
+          <p:cNvSpPr txBox="1">
+            <a:spLocks noChangeArrowheads="1"/>
+          </p:cNvSpPr>
+          <p:nvPr/>
+        </p:nvSpPr>
+        <p:spPr bwMode="auto">
+          <a:xfrm>
+            <a:off x="31057107" y="14623506"/>
+            <a:ext cx="12355359" cy="749436"/>
+          </a:xfrm>
+          <a:prstGeom prst="rect">
+            <a:avLst/>
+          </a:prstGeom>
+          <a:solidFill>
+            <a:schemeClr val="bg1"/>
+          </a:solidFill>
+          <a:ln>
+            <a:noFill/>
+          </a:ln>
+        </p:spPr>
+        <p:txBody>
+          <a:bodyPr wrap="square" lIns="91440" tIns="45720" rIns="91440" bIns="45720" anchor="t">
+            <a:spAutoFit/>
+          </a:bodyPr>
+          <a:lstStyle>
+            <a:lvl1pPr>
+              <a:defRPr sz="2400">
+                <a:solidFill>
+                  <a:schemeClr val="tx1"/>
+                </a:solidFill>
+                <a:latin typeface="Helvetica" panose="020B0604020202020204" pitchFamily="34" charset="0"/>
+                <a:ea typeface="MS PGothic" panose="020B0600070205080204" pitchFamily="34" charset="-128"/>
+              </a:defRPr>
+            </a:lvl1pPr>
+            <a:lvl2pPr marL="742950" indent="-285750">
+              <a:defRPr sz="2400">
+                <a:solidFill>
+                  <a:schemeClr val="tx1"/>
+                </a:solidFill>
+                <a:latin typeface="Helvetica" panose="020B0604020202020204" pitchFamily="34" charset="0"/>
+                <a:ea typeface="MS PGothic" panose="020B0600070205080204" pitchFamily="34" charset="-128"/>
+              </a:defRPr>
+            </a:lvl2pPr>
+            <a:lvl3pPr marL="1143000" indent="-228600">
+              <a:defRPr sz="2400">
+                <a:solidFill>
+                  <a:schemeClr val="tx1"/>
+                </a:solidFill>
+                <a:latin typeface="Helvetica" panose="020B0604020202020204" pitchFamily="34" charset="0"/>
+                <a:ea typeface="MS PGothic" panose="020B0600070205080204" pitchFamily="34" charset="-128"/>
+              </a:defRPr>
+            </a:lvl3pPr>
+            <a:lvl4pPr marL="1600200" indent="-228600">
+              <a:defRPr sz="2400">
+                <a:solidFill>
+                  <a:schemeClr val="tx1"/>
+                </a:solidFill>
+                <a:latin typeface="Helvetica" panose="020B0604020202020204" pitchFamily="34" charset="0"/>
+                <a:ea typeface="MS PGothic" panose="020B0600070205080204" pitchFamily="34" charset="-128"/>
+              </a:defRPr>
+            </a:lvl4pPr>
+            <a:lvl5pPr marL="2057400" indent="-228600">
+              <a:defRPr sz="2400">
+                <a:solidFill>
+                  <a:schemeClr val="tx1"/>
+                </a:solidFill>
+                <a:latin typeface="Helvetica" panose="020B0604020202020204" pitchFamily="34" charset="0"/>
+                <a:ea typeface="MS PGothic" panose="020B0600070205080204" pitchFamily="34" charset="-128"/>
+              </a:defRPr>
+            </a:lvl5pPr>
+            <a:lvl6pPr marL="2514600" indent="-228600" eaLnBrk="0" fontAlgn="base" hangingPunct="0">
+              <a:spcBef>
+                <a:spcPct val="0"/>
+              </a:spcBef>
+              <a:spcAft>
+                <a:spcPct val="0"/>
+              </a:spcAft>
+              <a:defRPr sz="2400">
+                <a:solidFill>
+                  <a:schemeClr val="tx1"/>
+                </a:solidFill>
+                <a:latin typeface="Helvetica" panose="020B0604020202020204" pitchFamily="34" charset="0"/>
+                <a:ea typeface="MS PGothic" panose="020B0600070205080204" pitchFamily="34" charset="-128"/>
+              </a:defRPr>
+            </a:lvl6pPr>
+            <a:lvl7pPr marL="2971800" indent="-228600" eaLnBrk="0" fontAlgn="base" hangingPunct="0">
+              <a:spcBef>
+                <a:spcPct val="0"/>
+              </a:spcBef>
+              <a:spcAft>
+                <a:spcPct val="0"/>
+              </a:spcAft>
+              <a:defRPr sz="2400">
+                <a:solidFill>
+                  <a:schemeClr val="tx1"/>
+                </a:solidFill>
+                <a:latin typeface="Helvetica" panose="020B0604020202020204" pitchFamily="34" charset="0"/>
+                <a:ea typeface="MS PGothic" panose="020B0600070205080204" pitchFamily="34" charset="-128"/>
+              </a:defRPr>
+            </a:lvl7pPr>
+            <a:lvl8pPr marL="3429000" indent="-228600" eaLnBrk="0" fontAlgn="base" hangingPunct="0">
+              <a:spcBef>
+                <a:spcPct val="0"/>
+              </a:spcBef>
+              <a:spcAft>
+                <a:spcPct val="0"/>
+              </a:spcAft>
+              <a:defRPr sz="2400">
+                <a:solidFill>
+                  <a:schemeClr val="tx1"/>
+                </a:solidFill>
+                <a:latin typeface="Helvetica" panose="020B0604020202020204" pitchFamily="34" charset="0"/>
+                <a:ea typeface="MS PGothic" panose="020B0600070205080204" pitchFamily="34" charset="-128"/>
+              </a:defRPr>
+            </a:lvl8pPr>
+            <a:lvl9pPr marL="3886200" indent="-228600" eaLnBrk="0" fontAlgn="base" hangingPunct="0">
+              <a:spcBef>
+                <a:spcPct val="0"/>
+              </a:spcBef>
+              <a:spcAft>
+                <a:spcPct val="0"/>
+              </a:spcAft>
+              <a:defRPr sz="2400">
+                <a:solidFill>
+                  <a:schemeClr val="tx1"/>
+                </a:solidFill>
+                <a:latin typeface="Helvetica" panose="020B0604020202020204" pitchFamily="34" charset="0"/>
+                <a:ea typeface="MS PGothic" panose="020B0600070205080204" pitchFamily="34" charset="-128"/>
+              </a:defRPr>
+            </a:lvl9pPr>
+          </a:lstStyle>
+          <a:p>
+            <a:pPr algn="ctr"/>
+            <a:r>
+              <a:rPr lang="en-US" altLang="en-US" sz="4270" b="1" dirty="0">
+                <a:solidFill>
+                  <a:srgbClr val="C00000"/>
+                </a:solidFill>
+                <a:latin typeface="Trebuchet MS"/>
+                <a:ea typeface="MS PGothic"/>
+              </a:rPr>
+              <a:t>7. </a:t>
+            </a:r>
+            <a:endParaRPr lang="en-US" altLang="en-US" sz="4270" b="1" dirty="0">
+              <a:solidFill>
+                <a:srgbClr val="C00000"/>
+              </a:solidFill>
+              <a:latin typeface="Trebuchet MS" panose="020B0603020202020204" pitchFamily="34" charset="0"/>
+            </a:endParaRPr>
+          </a:p>
+        </p:txBody>
+      </p:sp>
+      <p:sp>
+        <p:nvSpPr>
+          <p:cNvPr id="15417" name="TextBox 15416">
+            <a:extLst>
+              <a:ext uri="{FF2B5EF4-FFF2-40B4-BE49-F238E27FC236}">
+                <a16:creationId xmlns:a16="http://schemas.microsoft.com/office/drawing/2014/main" id="{67AF8949-755A-E964-685E-DF2A5F35BDE8}"/>
+              </a:ext>
+            </a:extLst>
+          </p:cNvPr>
+          <p:cNvSpPr txBox="1"/>
+          <p:nvPr/>
+        </p:nvSpPr>
+        <p:spPr>
+          <a:xfrm>
+            <a:off x="30805042" y="31928090"/>
+            <a:ext cx="12648270" cy="646331"/>
+          </a:xfrm>
+          <a:prstGeom prst="rect">
+            <a:avLst/>
+          </a:prstGeom>
+          <a:noFill/>
+        </p:spPr>
+        <p:txBody>
+          <a:bodyPr wrap="square">
+            <a:spAutoFit/>
+          </a:bodyPr>
+          <a:lstStyle/>
+          <a:p>
+            <a:r>
+              <a:rPr lang="en-US" sz="1800" i="1"/>
+              <a:t>This study was supported by a grant from the National Institutes of Health (R03-DA046733 (DVS). Contact information for Daniel Sazhin: daniel.sazhin@temple.edu.</a:t>
+            </a:r>
+            <a:r>
+              <a:rPr lang="en-US" sz="1800" b="0" i="0">
+                <a:solidFill>
+                  <a:srgbClr val="000000"/>
+                </a:solidFill>
+                <a:effectLst/>
+                <a:latin typeface="Times New Roman" panose="02020603050405020304" pitchFamily="18" charset="0"/>
+              </a:rPr>
+              <a:t> </a:t>
+            </a:r>
+            <a:endParaRPr lang="en-US" sz="1800" i="1"/>
+          </a:p>
+        </p:txBody>
+      </p:sp>
+      <p:sp>
+        <p:nvSpPr>
+          <p:cNvPr id="15453" name="TextBox 15452">
+            <a:extLst>
+              <a:ext uri="{FF2B5EF4-FFF2-40B4-BE49-F238E27FC236}">
+                <a16:creationId xmlns:a16="http://schemas.microsoft.com/office/drawing/2014/main" id="{54253D06-A27E-D304-5A43-9CE683DD93BC}"/>
+              </a:ext>
+            </a:extLst>
+          </p:cNvPr>
+          <p:cNvSpPr txBox="1"/>
+          <p:nvPr/>
+        </p:nvSpPr>
+        <p:spPr>
+          <a:xfrm>
+            <a:off x="38658757" y="16524759"/>
+            <a:ext cx="1046440" cy="6220601"/>
+          </a:xfrm>
+          <a:prstGeom prst="rect">
+            <a:avLst/>
+          </a:prstGeom>
+          <a:noFill/>
+        </p:spPr>
+        <p:txBody>
+          <a:bodyPr vert="vert270" wrap="square">
+            <a:spAutoFit/>
+          </a:bodyPr>
+          <a:lstStyle/>
+          <a:p>
+            <a:pPr algn="ctr"/>
+            <a:r>
+              <a:rPr lang="en-US" sz="2800" dirty="0">
+                <a:latin typeface="Helvetica"/>
+                <a:ea typeface="MS PGothic"/>
+              </a:rPr>
+              <a:t>VS-ACC Connectivity (</a:t>
+            </a:r>
+            <a:r>
+              <a:rPr lang="el-GR" sz="2800" dirty="0">
+                <a:latin typeface="Helvetica"/>
+                <a:ea typeface="MS PGothic"/>
+              </a:rPr>
+              <a:t>β) </a:t>
+            </a:r>
+            <a:endParaRPr lang="en-US" sz="2800" dirty="0">
+              <a:latin typeface="Helvetica"/>
+              <a:ea typeface="MS PGothic"/>
+            </a:endParaRPr>
+          </a:p>
+          <a:p>
+            <a:pPr algn="ctr"/>
+            <a:r>
+              <a:rPr lang="en-US" sz="2800" dirty="0">
+                <a:latin typeface="Helvetica"/>
+                <a:ea typeface="MS PGothic"/>
+              </a:rPr>
+              <a:t>Parametric Effect of Fairness</a:t>
+            </a:r>
+            <a:endParaRPr lang="en-US" sz="2800" dirty="0">
+              <a:latin typeface="Helvetica"/>
+            </a:endParaRPr>
+          </a:p>
+        </p:txBody>
+      </p:sp>
+      <p:sp>
+        <p:nvSpPr>
+          <p:cNvPr id="15454" name="TextBox 15453">
+            <a:extLst>
+              <a:ext uri="{FF2B5EF4-FFF2-40B4-BE49-F238E27FC236}">
+                <a16:creationId xmlns:a16="http://schemas.microsoft.com/office/drawing/2014/main" id="{13B2FFDE-8D7C-898B-769D-CAF01351FCBA}"/>
+              </a:ext>
+            </a:extLst>
+          </p:cNvPr>
+          <p:cNvSpPr txBox="1"/>
+          <p:nvPr/>
+        </p:nvSpPr>
+        <p:spPr>
+          <a:xfrm>
+            <a:off x="40013181" y="21477911"/>
+            <a:ext cx="3784646" cy="523220"/>
+          </a:xfrm>
+          <a:prstGeom prst="rect">
+            <a:avLst/>
+          </a:prstGeom>
+          <a:noFill/>
+        </p:spPr>
+        <p:txBody>
+          <a:bodyPr wrap="square">
+            <a:spAutoFit/>
+          </a:bodyPr>
+          <a:lstStyle/>
+          <a:p>
+            <a:pPr algn="ctr"/>
+            <a:r>
+              <a:rPr lang="en-US" sz="2800" dirty="0">
+                <a:latin typeface="Helvetica"/>
+                <a:ea typeface="MS PGothic"/>
+              </a:rPr>
+              <a:t>Composite Reward</a:t>
+            </a:r>
+            <a:endParaRPr lang="en-US" sz="2800" dirty="0">
+              <a:latin typeface="Helvetica"/>
+            </a:endParaRPr>
+          </a:p>
+        </p:txBody>
+      </p:sp>
+      <p:sp>
+        <p:nvSpPr>
+          <p:cNvPr id="15414" name="Rectangle 162">
+            <a:extLst>
+              <a:ext uri="{FF2B5EF4-FFF2-40B4-BE49-F238E27FC236}">
+                <a16:creationId xmlns:a16="http://schemas.microsoft.com/office/drawing/2014/main" id="{25A230EB-5F32-4224-56A1-756BF91CCD15}"/>
+              </a:ext>
+            </a:extLst>
+          </p:cNvPr>
+          <p:cNvSpPr>
+            <a:spLocks noChangeArrowheads="1"/>
+          </p:cNvSpPr>
+          <p:nvPr/>
+        </p:nvSpPr>
+        <p:spPr bwMode="auto">
+          <a:xfrm>
+            <a:off x="30683073" y="14695105"/>
+            <a:ext cx="12967320" cy="9369710"/>
+          </a:xfrm>
+          <a:prstGeom prst="rect">
+            <a:avLst/>
+          </a:prstGeom>
+          <a:noFill/>
+          <a:ln w="76200">
+            <a:solidFill>
+              <a:srgbClr val="C00000"/>
+            </a:solidFill>
+            <a:miter lim="800000"/>
+            <a:headEnd/>
+            <a:tailEnd/>
+          </a:ln>
+          <a:extLst>
+            <a:ext uri="{909E8E84-426E-40DD-AFC4-6F175D3DCCD1}">
+              <a14:hiddenFill xmlns:a14="http://schemas.microsoft.com/office/drawing/2010/main">
+                <a:solidFill>
+                  <a:srgbClr val="FFFFFF"/>
+                </a:solidFill>
+              </a14:hiddenFill>
+            </a:ext>
+          </a:extLst>
+        </p:spPr>
+        <p:txBody>
+          <a:bodyPr wrap="none" lIns="81274" tIns="40638" rIns="81274" bIns="40638" anchor="ctr"/>
+          <a:lstStyle>
+            <a:lvl1pPr>
+              <a:defRPr sz="2400">
+                <a:solidFill>
+                  <a:schemeClr val="tx1"/>
+                </a:solidFill>
+                <a:latin typeface="Helvetica" panose="020B0604020202020204" pitchFamily="34" charset="0"/>
+                <a:ea typeface="MS PGothic" panose="020B0600070205080204" pitchFamily="34" charset="-128"/>
+              </a:defRPr>
+            </a:lvl1pPr>
+            <a:lvl2pPr marL="742950" indent="-285750">
+              <a:defRPr sz="2400">
+                <a:solidFill>
+                  <a:schemeClr val="tx1"/>
+                </a:solidFill>
+                <a:latin typeface="Helvetica" panose="020B0604020202020204" pitchFamily="34" charset="0"/>
+                <a:ea typeface="MS PGothic" panose="020B0600070205080204" pitchFamily="34" charset="-128"/>
+              </a:defRPr>
+            </a:lvl2pPr>
+            <a:lvl3pPr marL="1143000" indent="-228600">
+              <a:defRPr sz="2400">
+                <a:solidFill>
+                  <a:schemeClr val="tx1"/>
+                </a:solidFill>
+                <a:latin typeface="Helvetica" panose="020B0604020202020204" pitchFamily="34" charset="0"/>
+                <a:ea typeface="MS PGothic" panose="020B0600070205080204" pitchFamily="34" charset="-128"/>
+              </a:defRPr>
+            </a:lvl3pPr>
+            <a:lvl4pPr marL="1600200" indent="-228600">
+              <a:defRPr sz="2400">
+                <a:solidFill>
+                  <a:schemeClr val="tx1"/>
+                </a:solidFill>
+                <a:latin typeface="Helvetica" panose="020B0604020202020204" pitchFamily="34" charset="0"/>
+                <a:ea typeface="MS PGothic" panose="020B0600070205080204" pitchFamily="34" charset="-128"/>
+              </a:defRPr>
+            </a:lvl4pPr>
+            <a:lvl5pPr marL="2057400" indent="-228600">
+              <a:defRPr sz="2400">
+                <a:solidFill>
+                  <a:schemeClr val="tx1"/>
+                </a:solidFill>
+                <a:latin typeface="Helvetica" panose="020B0604020202020204" pitchFamily="34" charset="0"/>
+                <a:ea typeface="MS PGothic" panose="020B0600070205080204" pitchFamily="34" charset="-128"/>
+              </a:defRPr>
+            </a:lvl5pPr>
+            <a:lvl6pPr marL="2514600" indent="-228600" eaLnBrk="0" fontAlgn="base" hangingPunct="0">
+              <a:spcBef>
+                <a:spcPct val="0"/>
+              </a:spcBef>
+              <a:spcAft>
+                <a:spcPct val="0"/>
+              </a:spcAft>
+              <a:defRPr sz="2400">
+                <a:solidFill>
+                  <a:schemeClr val="tx1"/>
+                </a:solidFill>
+                <a:latin typeface="Helvetica" panose="020B0604020202020204" pitchFamily="34" charset="0"/>
+                <a:ea typeface="MS PGothic" panose="020B0600070205080204" pitchFamily="34" charset="-128"/>
+              </a:defRPr>
+            </a:lvl6pPr>
+            <a:lvl7pPr marL="2971800" indent="-228600" eaLnBrk="0" fontAlgn="base" hangingPunct="0">
+              <a:spcBef>
+                <a:spcPct val="0"/>
+              </a:spcBef>
+              <a:spcAft>
+                <a:spcPct val="0"/>
+              </a:spcAft>
+              <a:defRPr sz="2400">
+                <a:solidFill>
+                  <a:schemeClr val="tx1"/>
+                </a:solidFill>
+                <a:latin typeface="Helvetica" panose="020B0604020202020204" pitchFamily="34" charset="0"/>
+                <a:ea typeface="MS PGothic" panose="020B0600070205080204" pitchFamily="34" charset="-128"/>
+              </a:defRPr>
+            </a:lvl7pPr>
+            <a:lvl8pPr marL="3429000" indent="-228600" eaLnBrk="0" fontAlgn="base" hangingPunct="0">
+              <a:spcBef>
+                <a:spcPct val="0"/>
+              </a:spcBef>
+              <a:spcAft>
+                <a:spcPct val="0"/>
+              </a:spcAft>
+              <a:defRPr sz="2400">
+                <a:solidFill>
+                  <a:schemeClr val="tx1"/>
+                </a:solidFill>
+                <a:latin typeface="Helvetica" panose="020B0604020202020204" pitchFamily="34" charset="0"/>
+                <a:ea typeface="MS PGothic" panose="020B0600070205080204" pitchFamily="34" charset="-128"/>
+              </a:defRPr>
+            </a:lvl8pPr>
+            <a:lvl9pPr marL="3886200" indent="-228600" eaLnBrk="0" fontAlgn="base" hangingPunct="0">
+              <a:spcBef>
+                <a:spcPct val="0"/>
+              </a:spcBef>
+              <a:spcAft>
+                <a:spcPct val="0"/>
+              </a:spcAft>
+              <a:defRPr sz="2400">
+                <a:solidFill>
+                  <a:schemeClr val="tx1"/>
+                </a:solidFill>
+                <a:latin typeface="Helvetica" panose="020B0604020202020204" pitchFamily="34" charset="0"/>
+                <a:ea typeface="MS PGothic" panose="020B0600070205080204" pitchFamily="34" charset="-128"/>
+              </a:defRPr>
+            </a:lvl9pPr>
+          </a:lstStyle>
+          <a:p>
+            <a:pPr eaLnBrk="1" hangingPunct="1"/>
+            <a:endParaRPr lang="en-US" altLang="en-US" sz="1245">
+              <a:latin typeface="Trebuchet MS" panose="020B0603020202020204" pitchFamily="34" charset="0"/>
+            </a:endParaRPr>
+          </a:p>
+        </p:txBody>
+      </p:sp>
+      <p:sp>
+        <p:nvSpPr>
+          <p:cNvPr id="15429" name="Rounded Rectangle 15428">
+            <a:extLst>
+              <a:ext uri="{FF2B5EF4-FFF2-40B4-BE49-F238E27FC236}">
+                <a16:creationId xmlns:a16="http://schemas.microsoft.com/office/drawing/2014/main" id="{4B7D9A17-B83C-E5E9-1709-3AF83FDD5AD6}"/>
+              </a:ext>
+            </a:extLst>
+          </p:cNvPr>
+          <p:cNvSpPr/>
+          <p:nvPr/>
+        </p:nvSpPr>
+        <p:spPr bwMode="auto">
+          <a:xfrm>
+            <a:off x="631650" y="15031860"/>
+            <a:ext cx="6233543" cy="612410"/>
+          </a:xfrm>
+          <a:prstGeom prst="roundRect">
+            <a:avLst/>
+          </a:prstGeom>
+          <a:solidFill>
+            <a:schemeClr val="accent1"/>
+          </a:solidFill>
+          <a:ln w="50800" cap="flat" cmpd="sng" algn="ctr">
+            <a:solidFill>
+              <a:schemeClr val="tx1"/>
+            </a:solidFill>
+            <a:prstDash val="solid"/>
+            <a:round/>
+            <a:headEnd type="none" w="med" len="med"/>
+            <a:tailEnd type="none" w="med" len="med"/>
+          </a:ln>
+          <a:effectLst/>
+        </p:spPr>
+        <p:txBody>
+          <a:bodyPr vert="horz" wrap="square" lIns="91440" tIns="45720" rIns="91440" bIns="45720" numCol="1" rtlCol="0" anchor="t" anchorCtr="0" compatLnSpc="1">
+            <a:prstTxWarp prst="textNoShape">
+              <a:avLst/>
+            </a:prstTxWarp>
+          </a:bodyPr>
+          <a:lstStyle/>
+          <a:p>
+            <a:pPr defTabSz="4389438" eaLnBrk="1" hangingPunct="1"/>
+            <a:r>
+              <a:rPr lang="en-US" sz="3000" dirty="0"/>
+              <a:t>You are given $8 for the trial. </a:t>
+            </a:r>
+          </a:p>
+          <a:p>
+            <a:pPr marL="0" marR="0" indent="0" algn="l" defTabSz="4389438" rtl="0" eaLnBrk="1" fontAlgn="base" latinLnBrk="0" hangingPunct="1">
+              <a:lnSpc>
+                <a:spcPct val="100000"/>
+              </a:lnSpc>
+              <a:spcBef>
+                <a:spcPct val="0"/>
+              </a:spcBef>
+              <a:spcAft>
+                <a:spcPct val="0"/>
+              </a:spcAft>
+              <a:buClrTx/>
+              <a:buSzTx/>
+              <a:buFontTx/>
+              <a:buNone/>
+              <a:tabLst/>
+            </a:pPr>
+            <a:endParaRPr kumimoji="0" lang="en-US" sz="1800" b="0" i="0" u="none" strike="noStrike" cap="none" normalizeH="0" baseline="0" dirty="0">
+              <a:ln>
+                <a:noFill/>
+              </a:ln>
+              <a:solidFill>
+                <a:schemeClr val="tx1"/>
+              </a:solidFill>
+              <a:effectLst/>
+              <a:latin typeface="Arial" charset="0"/>
+              <a:cs typeface="Arial" charset="0"/>
+            </a:endParaRPr>
+          </a:p>
+        </p:txBody>
+      </p:sp>
+      <p:grpSp>
+        <p:nvGrpSpPr>
+          <p:cNvPr id="15435" name="Group 15434">
+            <a:extLst>
+              <a:ext uri="{FF2B5EF4-FFF2-40B4-BE49-F238E27FC236}">
+                <a16:creationId xmlns:a16="http://schemas.microsoft.com/office/drawing/2014/main" id="{91D64F50-CCC5-FF57-B24F-9D18D2A12681}"/>
+              </a:ext>
+            </a:extLst>
+          </p:cNvPr>
+          <p:cNvGrpSpPr/>
+          <p:nvPr/>
+        </p:nvGrpSpPr>
+        <p:grpSpPr>
+          <a:xfrm>
+            <a:off x="2079425" y="21133835"/>
+            <a:ext cx="3898887" cy="1569660"/>
+            <a:chOff x="2150236" y="20985676"/>
+            <a:chExt cx="3898887" cy="1569660"/>
+          </a:xfrm>
+        </p:grpSpPr>
+        <p:sp>
+          <p:nvSpPr>
+            <p:cNvPr id="52" name="TextBox 51">
+              <a:extLst>
+                <a:ext uri="{FF2B5EF4-FFF2-40B4-BE49-F238E27FC236}">
+                  <a16:creationId xmlns:a16="http://schemas.microsoft.com/office/drawing/2014/main" id="{4707B45F-027B-576B-4808-66F0A5D95489}"/>
+                </a:ext>
+              </a:extLst>
+            </p:cNvPr>
+            <p:cNvSpPr txBox="1"/>
+            <p:nvPr/>
+          </p:nvSpPr>
+          <p:spPr>
+            <a:xfrm>
+              <a:off x="4609305" y="21151595"/>
+              <a:ext cx="1439818" cy="1323439"/>
+            </a:xfrm>
+            <a:prstGeom prst="rect">
+              <a:avLst/>
+            </a:prstGeom>
+            <a:noFill/>
+          </p:spPr>
+          <p:txBody>
+            <a:bodyPr wrap="none" rtlCol="0">
+              <a:spAutoFit/>
+            </a:bodyPr>
+            <a:lstStyle/>
+            <a:p>
+              <a:r>
+                <a:rPr lang="en-US" sz="8000" b="1" dirty="0">
+                  <a:solidFill>
+                    <a:srgbClr val="03DF04"/>
+                  </a:solidFill>
+                </a:rPr>
+                <a:t>X3</a:t>
+              </a:r>
+            </a:p>
+          </p:txBody>
+        </p:sp>
+        <p:sp>
+          <p:nvSpPr>
+            <p:cNvPr id="15433" name="Rounded Rectangle 15432">
+              <a:extLst>
+                <a:ext uri="{FF2B5EF4-FFF2-40B4-BE49-F238E27FC236}">
+                  <a16:creationId xmlns:a16="http://schemas.microsoft.com/office/drawing/2014/main" id="{9D770554-0135-2E8B-9BC3-8228F9631C8A}"/>
+                </a:ext>
+              </a:extLst>
+            </p:cNvPr>
+            <p:cNvSpPr/>
+            <p:nvPr/>
+          </p:nvSpPr>
+          <p:spPr bwMode="auto">
+            <a:xfrm>
+              <a:off x="2150236" y="20985676"/>
+              <a:ext cx="2382793" cy="1569660"/>
+            </a:xfrm>
+            <a:prstGeom prst="roundRect">
+              <a:avLst/>
+            </a:prstGeom>
+            <a:solidFill>
+              <a:schemeClr val="accent1"/>
+            </a:solidFill>
+            <a:ln w="50800" cap="flat" cmpd="sng" algn="ctr">
+              <a:solidFill>
+                <a:schemeClr val="tx1"/>
+              </a:solidFill>
+              <a:prstDash val="solid"/>
+              <a:round/>
+              <a:headEnd type="none" w="med" len="med"/>
+              <a:tailEnd type="none" w="med" len="med"/>
+            </a:ln>
+            <a:effectLst/>
+          </p:spPr>
+          <p:txBody>
+            <a:bodyPr vert="horz" wrap="square" lIns="91440" tIns="45720" rIns="91440" bIns="45720" numCol="1" rtlCol="0" anchor="t" anchorCtr="0" compatLnSpc="1">
+              <a:prstTxWarp prst="textNoShape">
+                <a:avLst/>
+              </a:prstTxWarp>
+            </a:bodyPr>
+            <a:lstStyle/>
+            <a:p>
+              <a:pPr defTabSz="4389438" eaLnBrk="1" hangingPunct="1"/>
+              <a:r>
+                <a:rPr lang="en-US" sz="3000" dirty="0"/>
+                <a:t>The money you  sent is tripled</a:t>
+              </a:r>
+            </a:p>
+            <a:p>
+              <a:pPr marL="0" marR="0" indent="0" algn="l" defTabSz="4389438" rtl="0" eaLnBrk="1" fontAlgn="base" latinLnBrk="0" hangingPunct="1">
+                <a:lnSpc>
+                  <a:spcPct val="100000"/>
+                </a:lnSpc>
+                <a:spcBef>
+                  <a:spcPct val="0"/>
+                </a:spcBef>
+                <a:spcAft>
+                  <a:spcPct val="0"/>
+                </a:spcAft>
+                <a:buClrTx/>
+                <a:buSzTx/>
+                <a:buFontTx/>
+                <a:buNone/>
+                <a:tabLst/>
+              </a:pPr>
+              <a:endParaRPr kumimoji="0" lang="en-US" sz="1800" b="0" i="0" u="none" strike="noStrike" cap="none" normalizeH="0" baseline="0" dirty="0">
+                <a:ln>
+                  <a:noFill/>
+                </a:ln>
+                <a:solidFill>
+                  <a:schemeClr val="tx1"/>
+                </a:solidFill>
+                <a:effectLst/>
+                <a:latin typeface="Arial" charset="0"/>
+                <a:cs typeface="Arial" charset="0"/>
+              </a:endParaRPr>
+            </a:p>
+          </p:txBody>
+        </p:sp>
+      </p:grpSp>
+      <p:grpSp>
+        <p:nvGrpSpPr>
+          <p:cNvPr id="15490" name="Group 15489">
+            <a:extLst>
+              <a:ext uri="{FF2B5EF4-FFF2-40B4-BE49-F238E27FC236}">
+                <a16:creationId xmlns:a16="http://schemas.microsoft.com/office/drawing/2014/main" id="{26CF14B9-FE18-01D5-1A0A-E19BE8376A0A}"/>
+              </a:ext>
+            </a:extLst>
+          </p:cNvPr>
+          <p:cNvGrpSpPr/>
+          <p:nvPr/>
+        </p:nvGrpSpPr>
+        <p:grpSpPr>
+          <a:xfrm>
+            <a:off x="631650" y="18495767"/>
+            <a:ext cx="3370254" cy="2302479"/>
+            <a:chOff x="631650" y="18495767"/>
+            <a:chExt cx="3370254" cy="2302479"/>
+          </a:xfrm>
+        </p:grpSpPr>
+        <p:sp>
+          <p:nvSpPr>
+            <p:cNvPr id="15432" name="Rounded Rectangle 15431">
+              <a:extLst>
+                <a:ext uri="{FF2B5EF4-FFF2-40B4-BE49-F238E27FC236}">
+                  <a16:creationId xmlns:a16="http://schemas.microsoft.com/office/drawing/2014/main" id="{29E5F4B4-9ECB-A12A-6B3F-C0855A0CDE34}"/>
+                </a:ext>
+              </a:extLst>
+            </p:cNvPr>
+            <p:cNvSpPr/>
+            <p:nvPr/>
+          </p:nvSpPr>
+          <p:spPr bwMode="auto">
+            <a:xfrm>
+              <a:off x="631650" y="19228586"/>
+              <a:ext cx="3370254" cy="1569660"/>
+            </a:xfrm>
+            <a:prstGeom prst="roundRect">
+              <a:avLst/>
+            </a:prstGeom>
+            <a:solidFill>
+              <a:schemeClr val="accent1"/>
+            </a:solidFill>
+            <a:ln w="50800" cap="flat" cmpd="sng" algn="ctr">
+              <a:solidFill>
+                <a:schemeClr val="tx1"/>
+              </a:solidFill>
+              <a:prstDash val="solid"/>
+              <a:round/>
+              <a:headEnd type="none" w="med" len="med"/>
+              <a:tailEnd type="none" w="med" len="med"/>
+            </a:ln>
+            <a:effectLst/>
+          </p:spPr>
+          <p:txBody>
+            <a:bodyPr vert="horz" wrap="square" lIns="91440" tIns="45720" rIns="91440" bIns="45720" numCol="1" rtlCol="0" anchor="t" anchorCtr="0" compatLnSpc="1">
+              <a:prstTxWarp prst="textNoShape">
+                <a:avLst/>
+              </a:prstTxWarp>
+            </a:bodyPr>
+            <a:lstStyle/>
+            <a:p>
+              <a:pPr defTabSz="4389438" eaLnBrk="1" hangingPunct="1"/>
+              <a:r>
+                <a:rPr lang="en-US" sz="3000" dirty="0"/>
+                <a:t>You choose an amount to share with your partner.</a:t>
+              </a:r>
+            </a:p>
+            <a:p>
+              <a:pPr marL="0" marR="0" indent="0" algn="l" defTabSz="4389438" rtl="0" eaLnBrk="1" fontAlgn="base" latinLnBrk="0" hangingPunct="1">
+                <a:lnSpc>
+                  <a:spcPct val="100000"/>
+                </a:lnSpc>
+                <a:spcBef>
+                  <a:spcPct val="0"/>
+                </a:spcBef>
+                <a:spcAft>
+                  <a:spcPct val="0"/>
+                </a:spcAft>
+                <a:buClrTx/>
+                <a:buSzTx/>
+                <a:buFontTx/>
+                <a:buNone/>
+                <a:tabLst/>
+              </a:pPr>
+              <a:endParaRPr kumimoji="0" lang="en-US" sz="1800" b="0" i="0" u="none" strike="noStrike" cap="none" normalizeH="0" baseline="0" dirty="0">
+                <a:ln>
+                  <a:noFill/>
+                </a:ln>
+                <a:solidFill>
+                  <a:schemeClr val="tx1"/>
+                </a:solidFill>
+                <a:effectLst/>
+                <a:latin typeface="Arial" charset="0"/>
+                <a:cs typeface="Arial" charset="0"/>
+              </a:endParaRPr>
+            </a:p>
+          </p:txBody>
+        </p:sp>
+        <p:cxnSp>
+          <p:nvCxnSpPr>
+            <p:cNvPr id="15442" name="Elbow Connector 15441">
+              <a:extLst>
+                <a:ext uri="{FF2B5EF4-FFF2-40B4-BE49-F238E27FC236}">
+                  <a16:creationId xmlns:a16="http://schemas.microsoft.com/office/drawing/2014/main" id="{FD357802-D2BB-A2AC-2582-D36E431D92F1}"/>
+                </a:ext>
+              </a:extLst>
+            </p:cNvPr>
+            <p:cNvCxnSpPr>
+              <a:cxnSpLocks/>
+            </p:cNvCxnSpPr>
+            <p:nvPr/>
+          </p:nvCxnSpPr>
+          <p:spPr bwMode="auto">
+            <a:xfrm flipV="1">
+              <a:off x="1252845" y="18495767"/>
+              <a:ext cx="1111214" cy="732821"/>
+            </a:xfrm>
+            <a:prstGeom prst="bentConnector3">
+              <a:avLst>
+                <a:gd name="adj1" fmla="val 1831"/>
+              </a:avLst>
+            </a:prstGeom>
+            <a:solidFill>
+              <a:schemeClr val="accent1"/>
+            </a:solidFill>
+            <a:ln w="50800" cap="flat" cmpd="sng" algn="ctr">
+              <a:solidFill>
+                <a:schemeClr val="tx1"/>
+              </a:solidFill>
+              <a:prstDash val="solid"/>
+              <a:round/>
+              <a:headEnd type="none" w="med" len="med"/>
+              <a:tailEnd type="triangle"/>
+            </a:ln>
+            <a:effectLst/>
+          </p:spPr>
+        </p:cxnSp>
+      </p:grpSp>
+      <p:grpSp>
+        <p:nvGrpSpPr>
+          <p:cNvPr id="15489" name="Group 15488">
+            <a:extLst>
+              <a:ext uri="{FF2B5EF4-FFF2-40B4-BE49-F238E27FC236}">
+                <a16:creationId xmlns:a16="http://schemas.microsoft.com/office/drawing/2014/main" id="{2951BED7-5D33-D9B9-A2B4-2D6D3E26469E}"/>
+              </a:ext>
+            </a:extLst>
+          </p:cNvPr>
+          <p:cNvGrpSpPr/>
+          <p:nvPr/>
+        </p:nvGrpSpPr>
+        <p:grpSpPr>
+          <a:xfrm>
+            <a:off x="741529" y="15748222"/>
+            <a:ext cx="14307083" cy="10069546"/>
+            <a:chOff x="741529" y="15748222"/>
+            <a:chExt cx="14307083" cy="10069546"/>
+          </a:xfrm>
+        </p:grpSpPr>
+        <p:grpSp>
+          <p:nvGrpSpPr>
+            <p:cNvPr id="15428" name="Group 15427">
+              <a:extLst>
+                <a:ext uri="{FF2B5EF4-FFF2-40B4-BE49-F238E27FC236}">
+                  <a16:creationId xmlns:a16="http://schemas.microsoft.com/office/drawing/2014/main" id="{788D9291-9D84-C5C9-22EF-259D72BF4C72}"/>
+                </a:ext>
+              </a:extLst>
+            </p:cNvPr>
+            <p:cNvGrpSpPr/>
+            <p:nvPr/>
+          </p:nvGrpSpPr>
+          <p:grpSpPr>
+            <a:xfrm>
+              <a:off x="2652237" y="15748222"/>
+              <a:ext cx="12396375" cy="10069546"/>
+              <a:chOff x="2781091" y="15729662"/>
+              <a:chExt cx="12396375" cy="10069546"/>
+            </a:xfrm>
+          </p:grpSpPr>
+          <p:pic>
+            <p:nvPicPr>
+              <p:cNvPr id="16" name="Picture 15" descr="A screenshot of a computer&#10;&#10;Description automatically generated">
+                <a:extLst>
+                  <a:ext uri="{FF2B5EF4-FFF2-40B4-BE49-F238E27FC236}">
+                    <a16:creationId xmlns:a16="http://schemas.microsoft.com/office/drawing/2014/main" id="{B07BD813-AE34-D73D-AC53-EFCB279F97D1}"/>
+                  </a:ext>
+                </a:extLst>
+              </p:cNvPr>
+              <p:cNvPicPr>
+                <a:picLocks noChangeAspect="1"/>
+              </p:cNvPicPr>
+              <p:nvPr/>
+            </p:nvPicPr>
+            <p:blipFill>
+              <a:blip r:embed="rId7">
+                <a:extLst>
+                  <a:ext uri="{28A0092B-C50C-407E-A947-70E740481C1C}">
+                    <a14:useLocalDpi xmlns:a14="http://schemas.microsoft.com/office/drawing/2010/main" val="0"/>
+                  </a:ext>
+                </a:extLst>
+              </a:blip>
+              <a:stretch>
+                <a:fillRect/>
+              </a:stretch>
+            </p:blipFill>
+            <p:spPr>
+              <a:xfrm>
+                <a:off x="2781091" y="15729662"/>
+                <a:ext cx="12396375" cy="10069546"/>
+              </a:xfrm>
+              <a:prstGeom prst="rect">
+                <a:avLst/>
+              </a:prstGeom>
+            </p:spPr>
+          </p:pic>
+          <p:grpSp>
+            <p:nvGrpSpPr>
+              <p:cNvPr id="71" name="Group 70">
+                <a:extLst>
+                  <a:ext uri="{FF2B5EF4-FFF2-40B4-BE49-F238E27FC236}">
+                    <a16:creationId xmlns:a16="http://schemas.microsoft.com/office/drawing/2014/main" id="{814CA469-7657-DBE5-12BC-BAA454599468}"/>
+                  </a:ext>
+                </a:extLst>
+              </p:cNvPr>
+              <p:cNvGrpSpPr/>
+              <p:nvPr/>
+            </p:nvGrpSpPr>
+            <p:grpSpPr>
+              <a:xfrm>
+                <a:off x="9652951" y="17772995"/>
+                <a:ext cx="4137746" cy="1716829"/>
+                <a:chOff x="9671298" y="17666601"/>
+                <a:chExt cx="4137746" cy="1716829"/>
+              </a:xfrm>
+            </p:grpSpPr>
+            <p:cxnSp>
+              <p:nvCxnSpPr>
+                <p:cNvPr id="20" name="Connector: Elbow 19">
+                  <a:extLst>
+                    <a:ext uri="{FF2B5EF4-FFF2-40B4-BE49-F238E27FC236}">
+                      <a16:creationId xmlns:a16="http://schemas.microsoft.com/office/drawing/2014/main" id="{4C9C54D6-8639-996D-7EDB-4A5B70577FDF}"/>
+                    </a:ext>
+                  </a:extLst>
+                </p:cNvPr>
+                <p:cNvCxnSpPr>
+                  <a:cxnSpLocks/>
+                </p:cNvCxnSpPr>
+                <p:nvPr/>
+              </p:nvCxnSpPr>
+              <p:spPr bwMode="auto">
+                <a:xfrm rot="16200000" flipH="1">
+                  <a:off x="13057930" y="18587512"/>
+                  <a:ext cx="785486" cy="716743"/>
+                </a:xfrm>
+                <a:prstGeom prst="bentConnector3">
+                  <a:avLst>
+                    <a:gd name="adj1" fmla="val -5434"/>
+                  </a:avLst>
+                </a:prstGeom>
+                <a:solidFill>
+                  <a:schemeClr val="accent1"/>
+                </a:solidFill>
+                <a:ln w="76200" cap="flat" cmpd="sng" algn="ctr">
+                  <a:solidFill>
+                    <a:schemeClr val="tx1"/>
+                  </a:solidFill>
+                  <a:prstDash val="dash"/>
+                  <a:round/>
+                  <a:headEnd type="none" w="med" len="med"/>
+                  <a:tailEnd type="triangle"/>
+                </a:ln>
+                <a:effectLst/>
+              </p:spPr>
+            </p:cxnSp>
+            <p:grpSp>
+              <p:nvGrpSpPr>
+                <p:cNvPr id="65" name="Group 64">
+                  <a:extLst>
+                    <a:ext uri="{FF2B5EF4-FFF2-40B4-BE49-F238E27FC236}">
+                      <a16:creationId xmlns:a16="http://schemas.microsoft.com/office/drawing/2014/main" id="{89055108-BE18-C2C5-0FF5-A55BEBB4A05F}"/>
+                    </a:ext>
+                  </a:extLst>
+                </p:cNvPr>
+                <p:cNvGrpSpPr/>
+                <p:nvPr/>
+              </p:nvGrpSpPr>
+              <p:grpSpPr>
+                <a:xfrm>
+                  <a:off x="9671298" y="17666601"/>
+                  <a:ext cx="3434963" cy="1716829"/>
+                  <a:chOff x="9671298" y="17666601"/>
+                  <a:chExt cx="3434963" cy="1716829"/>
+                </a:xfrm>
+              </p:grpSpPr>
+              <p:sp>
+                <p:nvSpPr>
+                  <p:cNvPr id="8" name="TextBox 7">
+                    <a:extLst>
+                      <a:ext uri="{FF2B5EF4-FFF2-40B4-BE49-F238E27FC236}">
+                        <a16:creationId xmlns:a16="http://schemas.microsoft.com/office/drawing/2014/main" id="{8F94C34F-C114-09E7-7592-2C68A047774A}"/>
+                      </a:ext>
+                    </a:extLst>
+                  </p:cNvPr>
+                  <p:cNvSpPr txBox="1"/>
+                  <p:nvPr/>
+                </p:nvSpPr>
+                <p:spPr>
+                  <a:xfrm>
+                    <a:off x="9671298" y="17740837"/>
+                    <a:ext cx="3434963" cy="1569660"/>
+                  </a:xfrm>
+                  <a:prstGeom prst="rect">
+                    <a:avLst/>
+                  </a:prstGeom>
+                  <a:noFill/>
+                </p:spPr>
+                <p:txBody>
+                  <a:bodyPr rot="0" spcFirstLastPara="0" vertOverflow="overflow" horzOverflow="overflow" vert="horz" wrap="square" lIns="91440" tIns="45720" rIns="91440" bIns="45720" numCol="1" spcCol="0" rtlCol="0" fromWordArt="0" anchor="t" anchorCtr="0" forceAA="0" compatLnSpc="1">
+                    <a:prstTxWarp prst="textNoShape">
+                      <a:avLst/>
+                    </a:prstTxWarp>
+                    <a:spAutoFit/>
+                  </a:bodyPr>
+                  <a:lstStyle/>
+                  <a:p>
+                    <a:pPr algn="ctr"/>
+                    <a:r>
+                      <a:rPr lang="en-US" sz="3200" b="1" dirty="0">
+                        <a:latin typeface="Helvetica"/>
+                        <a:ea typeface="MS PGothic"/>
+                      </a:rPr>
+                      <a:t>Scan the QR code to see the</a:t>
+                    </a:r>
+                    <a:endParaRPr lang="en-US" sz="3200" b="1" dirty="0"/>
+                  </a:p>
+                  <a:p>
+                    <a:pPr algn="ctr"/>
+                    <a:r>
+                      <a:rPr lang="en-US" sz="3200" b="1" u="sng" dirty="0">
+                        <a:latin typeface="Helvetica"/>
+                        <a:ea typeface="MS PGothic"/>
+                      </a:rPr>
+                      <a:t>Pre-registration!</a:t>
+                    </a:r>
+                    <a:endParaRPr lang="en-US" sz="3200" b="1" u="sng" dirty="0"/>
+                  </a:p>
+                </p:txBody>
+              </p:sp>
+              <p:sp>
+                <p:nvSpPr>
+                  <p:cNvPr id="15" name="Rectangle 14">
+                    <a:extLst>
+                      <a:ext uri="{FF2B5EF4-FFF2-40B4-BE49-F238E27FC236}">
+                        <a16:creationId xmlns:a16="http://schemas.microsoft.com/office/drawing/2014/main" id="{353421B0-7681-A37B-CA3F-986E07C1DB77}"/>
+                      </a:ext>
+                    </a:extLst>
+                  </p:cNvPr>
+                  <p:cNvSpPr/>
+                  <p:nvPr/>
+                </p:nvSpPr>
+                <p:spPr bwMode="auto">
+                  <a:xfrm>
+                    <a:off x="9719468" y="17666601"/>
+                    <a:ext cx="3375557" cy="1716829"/>
+                  </a:xfrm>
+                  <a:prstGeom prst="rect">
+                    <a:avLst/>
+                  </a:prstGeom>
+                  <a:noFill/>
+                  <a:ln w="57150" cap="flat" cmpd="sng" algn="ctr">
+                    <a:solidFill>
+                      <a:schemeClr val="tx1"/>
+                    </a:solidFill>
+                    <a:prstDash val="solid"/>
+                    <a:round/>
+                    <a:headEnd type="none" w="med" len="med"/>
+                    <a:tailEnd type="none" w="med" len="med"/>
+                  </a:ln>
+                  <a:effectLst/>
+                </p:spPr>
+                <p:txBody>
+                  <a:bodyPr vert="horz" wrap="square" lIns="91440" tIns="45720" rIns="91440" bIns="45720" numCol="1" rtlCol="0" anchor="t" anchorCtr="0" compatLnSpc="1">
+                    <a:prstTxWarp prst="textNoShape">
+                      <a:avLst/>
+                    </a:prstTxWarp>
+                  </a:bodyPr>
+                  <a:lstStyle/>
+                  <a:p>
+                    <a:pPr marL="0" marR="0" indent="0" algn="l" defTabSz="4389438" rtl="0" eaLnBrk="1" fontAlgn="base" latinLnBrk="0" hangingPunct="1">
+                      <a:lnSpc>
+                        <a:spcPct val="100000"/>
+                      </a:lnSpc>
+                      <a:spcBef>
+                        <a:spcPct val="0"/>
+                      </a:spcBef>
+                      <a:spcAft>
+                        <a:spcPct val="0"/>
+                      </a:spcAft>
+                      <a:buClrTx/>
+                      <a:buSzTx/>
+                      <a:buFontTx/>
+                      <a:buNone/>
+                      <a:tabLst/>
+                    </a:pPr>
+                    <a:endParaRPr kumimoji="0" lang="en-US" sz="1800" b="0" i="0" u="none" strike="noStrike" cap="none" normalizeH="0" baseline="0">
+                      <a:ln>
+                        <a:noFill/>
+                      </a:ln>
+                      <a:solidFill>
+                        <a:schemeClr val="tx1"/>
+                      </a:solidFill>
+                      <a:effectLst/>
+                      <a:latin typeface="Arial" charset="0"/>
+                      <a:cs typeface="Arial" charset="0"/>
+                    </a:endParaRPr>
+                  </a:p>
+                </p:txBody>
+              </p:sp>
+            </p:grpSp>
+          </p:grpSp>
+          <p:pic>
+            <p:nvPicPr>
+              <p:cNvPr id="7" name="Picture 6">
+                <a:extLst>
+                  <a:ext uri="{FF2B5EF4-FFF2-40B4-BE49-F238E27FC236}">
+                    <a16:creationId xmlns:a16="http://schemas.microsoft.com/office/drawing/2014/main" id="{E5B61256-0745-91A9-AD49-FA138651C227}"/>
+                  </a:ext>
+                </a:extLst>
+              </p:cNvPr>
+              <p:cNvPicPr>
+                <a:picLocks noChangeAspect="1"/>
+              </p:cNvPicPr>
+              <p:nvPr/>
+            </p:nvPicPr>
+            <p:blipFill>
+              <a:blip r:embed="rId8"/>
+              <a:stretch>
+                <a:fillRect/>
+              </a:stretch>
+            </p:blipFill>
+            <p:spPr>
+              <a:xfrm>
+                <a:off x="12485319" y="19632612"/>
+                <a:ext cx="2419305" cy="2411132"/>
+              </a:xfrm>
+              <a:prstGeom prst="rect">
+                <a:avLst/>
+              </a:prstGeom>
+            </p:spPr>
+          </p:pic>
+        </p:grpSp>
+        <p:sp>
+          <p:nvSpPr>
+            <p:cNvPr id="15479" name="Rounded Rectangle 15478">
+              <a:extLst>
+                <a:ext uri="{FF2B5EF4-FFF2-40B4-BE49-F238E27FC236}">
+                  <a16:creationId xmlns:a16="http://schemas.microsoft.com/office/drawing/2014/main" id="{07C0CAA6-BAA5-C192-15EA-35D34F993B8C}"/>
+                </a:ext>
+              </a:extLst>
+            </p:cNvPr>
+            <p:cNvSpPr/>
+            <p:nvPr/>
+          </p:nvSpPr>
+          <p:spPr bwMode="auto">
+            <a:xfrm>
+              <a:off x="741529" y="24366169"/>
+              <a:ext cx="3638652" cy="1191968"/>
+            </a:xfrm>
+            <a:prstGeom prst="roundRect">
+              <a:avLst/>
+            </a:prstGeom>
+            <a:solidFill>
+              <a:schemeClr val="accent1"/>
+            </a:solidFill>
+            <a:ln w="50800" cap="flat" cmpd="sng" algn="ctr">
+              <a:solidFill>
+                <a:schemeClr val="tx1"/>
+              </a:solidFill>
+              <a:prstDash val="solid"/>
+              <a:round/>
+              <a:headEnd type="none" w="med" len="med"/>
+              <a:tailEnd type="none" w="med" len="med"/>
+            </a:ln>
+            <a:effectLst/>
+          </p:spPr>
+          <p:txBody>
+            <a:bodyPr vert="horz" wrap="square" lIns="91440" tIns="45720" rIns="91440" bIns="45720" numCol="1" rtlCol="0" anchor="t" anchorCtr="0" compatLnSpc="1">
+              <a:prstTxWarp prst="textNoShape">
+                <a:avLst/>
+              </a:prstTxWarp>
+            </a:bodyPr>
+            <a:lstStyle/>
+            <a:p>
+              <a:pPr defTabSz="4389438" eaLnBrk="1" hangingPunct="1"/>
+              <a:r>
+                <a:rPr lang="en-US" sz="3000" dirty="0"/>
+                <a:t>You see your partner’s response.</a:t>
+              </a:r>
+            </a:p>
+            <a:p>
+              <a:pPr marL="0" marR="0" indent="0" algn="l" defTabSz="4389438" rtl="0" eaLnBrk="1" fontAlgn="base" latinLnBrk="0" hangingPunct="1">
+                <a:lnSpc>
+                  <a:spcPct val="100000"/>
+                </a:lnSpc>
+                <a:spcBef>
+                  <a:spcPct val="0"/>
+                </a:spcBef>
+                <a:spcAft>
+                  <a:spcPct val="0"/>
+                </a:spcAft>
+                <a:buClrTx/>
+                <a:buSzTx/>
+                <a:buFontTx/>
+                <a:buNone/>
+                <a:tabLst/>
+              </a:pPr>
+              <a:endParaRPr kumimoji="0" lang="en-US" sz="1800" b="0" i="0" u="none" strike="noStrike" cap="none" normalizeH="0" baseline="0" dirty="0">
+                <a:ln>
+                  <a:noFill/>
+                </a:ln>
+                <a:solidFill>
+                  <a:schemeClr val="tx1"/>
+                </a:solidFill>
+                <a:effectLst/>
+                <a:latin typeface="Arial" charset="0"/>
+                <a:cs typeface="Arial" charset="0"/>
+              </a:endParaRPr>
+            </a:p>
+          </p:txBody>
+        </p:sp>
+        <p:cxnSp>
+          <p:nvCxnSpPr>
+            <p:cNvPr id="15482" name="Elbow Connector 15481">
+              <a:extLst>
+                <a:ext uri="{FF2B5EF4-FFF2-40B4-BE49-F238E27FC236}">
+                  <a16:creationId xmlns:a16="http://schemas.microsoft.com/office/drawing/2014/main" id="{34530FBC-4A4D-E431-FA44-6FAEC08B2B30}"/>
+                </a:ext>
+              </a:extLst>
+            </p:cNvPr>
+            <p:cNvCxnSpPr>
+              <a:cxnSpLocks/>
+            </p:cNvCxnSpPr>
+            <p:nvPr/>
+          </p:nvCxnSpPr>
+          <p:spPr bwMode="auto">
+            <a:xfrm flipV="1">
+              <a:off x="3531898" y="23865396"/>
+              <a:ext cx="848283" cy="500773"/>
+            </a:xfrm>
+            <a:prstGeom prst="bentConnector3">
+              <a:avLst>
+                <a:gd name="adj1" fmla="val -7841"/>
+              </a:avLst>
+            </a:prstGeom>
+            <a:solidFill>
+              <a:schemeClr val="accent1"/>
+            </a:solidFill>
+            <a:ln w="50800" cap="flat" cmpd="sng" algn="ctr">
+              <a:solidFill>
+                <a:schemeClr val="tx1"/>
+              </a:solidFill>
+              <a:prstDash val="solid"/>
+              <a:round/>
+              <a:headEnd type="none" w="med" len="med"/>
+              <a:tailEnd type="triangle"/>
+            </a:ln>
+            <a:effectLst/>
+          </p:spPr>
+        </p:cxnSp>
+      </p:grpSp>
     </p:spTree>
   </p:cSld>
   <p:clrMapOvr>

--- a/SFN/2023_SFN_trust.pptx
+++ b/SFN/2023_SFN_trust.pptx
@@ -4390,42 +4390,6 @@
           <a:chExt cx="0" cy="0"/>
         </a:xfrm>
       </p:grpSpPr>
-      <p:pic>
-        <p:nvPicPr>
-          <p:cNvPr id="15424" name="Picture 15423" descr="A close-up of a brain&#10;&#10;Description automatically generated">
-            <a:extLst>
-              <a:ext uri="{FF2B5EF4-FFF2-40B4-BE49-F238E27FC236}">
-                <a16:creationId xmlns:a16="http://schemas.microsoft.com/office/drawing/2014/main" id="{CC6419D2-DC29-B910-B6FA-A6DAC7775AD7}"/>
-              </a:ext>
-            </a:extLst>
-          </p:cNvPr>
-          <p:cNvPicPr>
-            <a:picLocks noChangeAspect="1"/>
-          </p:cNvPicPr>
-          <p:nvPr/>
-        </p:nvPicPr>
-        <p:blipFill>
-          <a:blip r:embed="rId3">
-            <a:extLst>
-              <a:ext uri="{28A0092B-C50C-407E-A947-70E740481C1C}">
-                <a14:useLocalDpi xmlns:a14="http://schemas.microsoft.com/office/drawing/2010/main" val="0"/>
-              </a:ext>
-            </a:extLst>
-          </a:blip>
-          <a:stretch>
-            <a:fillRect/>
-          </a:stretch>
-        </p:blipFill>
-        <p:spPr>
-          <a:xfrm>
-            <a:off x="23357979" y="25006432"/>
-            <a:ext cx="6457795" cy="5596080"/>
-          </a:xfrm>
-          <a:prstGeom prst="rect">
-            <a:avLst/>
-          </a:prstGeom>
-        </p:spPr>
-      </p:pic>
       <p:sp>
         <p:nvSpPr>
           <p:cNvPr id="15399" name="Rectangle 15398">
@@ -4502,315 +4466,6 @@
       </p:sp>
       <p:sp>
         <p:nvSpPr>
-          <p:cNvPr id="15362" name="TextBox 189"/>
-          <p:cNvSpPr txBox="1">
-            <a:spLocks noChangeArrowheads="1"/>
-          </p:cNvSpPr>
-          <p:nvPr/>
-        </p:nvSpPr>
-        <p:spPr bwMode="auto">
-          <a:xfrm>
-            <a:off x="515553" y="4761579"/>
-            <a:ext cx="14526988" cy="5016758"/>
-          </a:xfrm>
-          <a:prstGeom prst="rect">
-            <a:avLst/>
-          </a:prstGeom>
-          <a:noFill/>
-          <a:ln>
-            <a:noFill/>
-          </a:ln>
-          <a:extLst>
-            <a:ext uri="{909E8E84-426E-40DD-AFC4-6F175D3DCCD1}">
-              <a14:hiddenFill xmlns:a14="http://schemas.microsoft.com/office/drawing/2010/main">
-                <a:solidFill>
-                  <a:srgbClr val="FFFFFF"/>
-                </a:solidFill>
-              </a14:hiddenFill>
-            </a:ext>
-            <a:ext uri="{91240B29-F687-4F45-9708-019B960494DF}">
-              <a14:hiddenLine xmlns:a14="http://schemas.microsoft.com/office/drawing/2010/main" w="9525">
-                <a:solidFill>
-                  <a:srgbClr val="000000"/>
-                </a:solidFill>
-                <a:miter lim="800000"/>
-                <a:headEnd/>
-                <a:tailEnd/>
-              </a14:hiddenLine>
-            </a:ext>
-          </a:extLst>
-        </p:spPr>
-        <p:txBody>
-          <a:bodyPr wrap="square" lIns="91440" tIns="45720" rIns="91440" bIns="45720" anchor="t">
-            <a:spAutoFit/>
-          </a:bodyPr>
-          <a:lstStyle>
-            <a:lvl1pPr>
-              <a:defRPr sz="2400">
-                <a:solidFill>
-                  <a:schemeClr val="tx1"/>
-                </a:solidFill>
-                <a:latin typeface="Helvetica" panose="020B0604020202020204" pitchFamily="34" charset="0"/>
-                <a:ea typeface="MS PGothic" panose="020B0600070205080204" pitchFamily="34" charset="-128"/>
-              </a:defRPr>
-            </a:lvl1pPr>
-            <a:lvl2pPr marL="742950" indent="-285750">
-              <a:defRPr sz="2400">
-                <a:solidFill>
-                  <a:schemeClr val="tx1"/>
-                </a:solidFill>
-                <a:latin typeface="Helvetica" panose="020B0604020202020204" pitchFamily="34" charset="0"/>
-                <a:ea typeface="MS PGothic" panose="020B0600070205080204" pitchFamily="34" charset="-128"/>
-              </a:defRPr>
-            </a:lvl2pPr>
-            <a:lvl3pPr marL="1143000" indent="-228600">
-              <a:defRPr sz="2400">
-                <a:solidFill>
-                  <a:schemeClr val="tx1"/>
-                </a:solidFill>
-                <a:latin typeface="Helvetica" panose="020B0604020202020204" pitchFamily="34" charset="0"/>
-                <a:ea typeface="MS PGothic" panose="020B0600070205080204" pitchFamily="34" charset="-128"/>
-              </a:defRPr>
-            </a:lvl3pPr>
-            <a:lvl4pPr marL="1600200" indent="-228600">
-              <a:defRPr sz="2400">
-                <a:solidFill>
-                  <a:schemeClr val="tx1"/>
-                </a:solidFill>
-                <a:latin typeface="Helvetica" panose="020B0604020202020204" pitchFamily="34" charset="0"/>
-                <a:ea typeface="MS PGothic" panose="020B0600070205080204" pitchFamily="34" charset="-128"/>
-              </a:defRPr>
-            </a:lvl4pPr>
-            <a:lvl5pPr marL="2057400" indent="-228600">
-              <a:defRPr sz="2400">
-                <a:solidFill>
-                  <a:schemeClr val="tx1"/>
-                </a:solidFill>
-                <a:latin typeface="Helvetica" panose="020B0604020202020204" pitchFamily="34" charset="0"/>
-                <a:ea typeface="MS PGothic" panose="020B0600070205080204" pitchFamily="34" charset="-128"/>
-              </a:defRPr>
-            </a:lvl5pPr>
-            <a:lvl6pPr marL="2514600" indent="-228600" eaLnBrk="0" fontAlgn="base" hangingPunct="0">
-              <a:spcBef>
-                <a:spcPct val="0"/>
-              </a:spcBef>
-              <a:spcAft>
-                <a:spcPct val="0"/>
-              </a:spcAft>
-              <a:defRPr sz="2400">
-                <a:solidFill>
-                  <a:schemeClr val="tx1"/>
-                </a:solidFill>
-                <a:latin typeface="Helvetica" panose="020B0604020202020204" pitchFamily="34" charset="0"/>
-                <a:ea typeface="MS PGothic" panose="020B0600070205080204" pitchFamily="34" charset="-128"/>
-              </a:defRPr>
-            </a:lvl6pPr>
-            <a:lvl7pPr marL="2971800" indent="-228600" eaLnBrk="0" fontAlgn="base" hangingPunct="0">
-              <a:spcBef>
-                <a:spcPct val="0"/>
-              </a:spcBef>
-              <a:spcAft>
-                <a:spcPct val="0"/>
-              </a:spcAft>
-              <a:defRPr sz="2400">
-                <a:solidFill>
-                  <a:schemeClr val="tx1"/>
-                </a:solidFill>
-                <a:latin typeface="Helvetica" panose="020B0604020202020204" pitchFamily="34" charset="0"/>
-                <a:ea typeface="MS PGothic" panose="020B0600070205080204" pitchFamily="34" charset="-128"/>
-              </a:defRPr>
-            </a:lvl7pPr>
-            <a:lvl8pPr marL="3429000" indent="-228600" eaLnBrk="0" fontAlgn="base" hangingPunct="0">
-              <a:spcBef>
-                <a:spcPct val="0"/>
-              </a:spcBef>
-              <a:spcAft>
-                <a:spcPct val="0"/>
-              </a:spcAft>
-              <a:defRPr sz="2400">
-                <a:solidFill>
-                  <a:schemeClr val="tx1"/>
-                </a:solidFill>
-                <a:latin typeface="Helvetica" panose="020B0604020202020204" pitchFamily="34" charset="0"/>
-                <a:ea typeface="MS PGothic" panose="020B0600070205080204" pitchFamily="34" charset="-128"/>
-              </a:defRPr>
-            </a:lvl8pPr>
-            <a:lvl9pPr marL="3886200" indent="-228600" eaLnBrk="0" fontAlgn="base" hangingPunct="0">
-              <a:spcBef>
-                <a:spcPct val="0"/>
-              </a:spcBef>
-              <a:spcAft>
-                <a:spcPct val="0"/>
-              </a:spcAft>
-              <a:defRPr sz="2400">
-                <a:solidFill>
-                  <a:schemeClr val="tx1"/>
-                </a:solidFill>
-                <a:latin typeface="Helvetica" panose="020B0604020202020204" pitchFamily="34" charset="0"/>
-                <a:ea typeface="MS PGothic" panose="020B0600070205080204" pitchFamily="34" charset="-128"/>
-              </a:defRPr>
-            </a:lvl9pPr>
-          </a:lstStyle>
-          <a:p>
-            <a:pPr>
-              <a:spcBef>
-                <a:spcPts val="0"/>
-              </a:spcBef>
-              <a:spcAft>
-                <a:spcPts val="0"/>
-              </a:spcAft>
-              <a:buFont typeface="Arial" panose="020B0604020202020204" pitchFamily="34" charset="0"/>
-              <a:buChar char="•"/>
-            </a:pPr>
-            <a:r>
-              <a:rPr lang="en-US" sz="4000" dirty="0">
-                <a:latin typeface="Helvetica"/>
-                <a:ea typeface="MS PGothic"/>
-                <a:cs typeface="Helvetica"/>
-              </a:rPr>
-              <a:t> </a:t>
-            </a:r>
-            <a:r>
-              <a:rPr lang="en-US" sz="4000" b="0" i="0" dirty="0">
-                <a:solidFill>
-                  <a:srgbClr val="000000"/>
-                </a:solidFill>
-                <a:effectLst/>
-                <a:latin typeface="Helvetica" pitchFamily="2" charset="0"/>
-              </a:rPr>
-              <a:t>Social relationships influence our behaviors and may modulate our neural responses to reward. (</a:t>
-            </a:r>
-            <a:r>
-              <a:rPr lang="en-US" sz="4000" b="0" i="0" dirty="0" err="1">
-                <a:solidFill>
-                  <a:srgbClr val="000000"/>
-                </a:solidFill>
-                <a:effectLst/>
-                <a:latin typeface="Helvetica" pitchFamily="2" charset="0"/>
-              </a:rPr>
-              <a:t>Fareri</a:t>
-            </a:r>
-            <a:r>
-              <a:rPr lang="en-US" sz="4000" b="0" i="0" dirty="0">
-                <a:solidFill>
-                  <a:srgbClr val="000000"/>
-                </a:solidFill>
-                <a:effectLst/>
-                <a:latin typeface="Helvetica" pitchFamily="2" charset="0"/>
-              </a:rPr>
-              <a:t> et al., 2015)</a:t>
-            </a:r>
-            <a:endParaRPr lang="en-US" sz="4000" dirty="0">
-              <a:latin typeface="Helvetica" pitchFamily="2" charset="0"/>
-              <a:ea typeface="MS PGothic"/>
-              <a:cs typeface="Helvetica"/>
-            </a:endParaRPr>
-          </a:p>
-          <a:p>
-            <a:pPr>
-              <a:spcBef>
-                <a:spcPts val="0"/>
-              </a:spcBef>
-              <a:spcAft>
-                <a:spcPts val="0"/>
-              </a:spcAft>
-              <a:buFont typeface="Arial" panose="020B0604020202020204" pitchFamily="34" charset="0"/>
-              <a:buChar char="•"/>
-            </a:pPr>
-            <a:r>
-              <a:rPr lang="en-US" sz="4000" dirty="0">
-                <a:latin typeface="Helvetica"/>
-                <a:ea typeface="MS PGothic"/>
-                <a:cs typeface="Helvetica"/>
-              </a:rPr>
-              <a:t> </a:t>
-            </a:r>
-            <a:r>
-              <a:rPr lang="en-US" sz="4000" dirty="0">
-                <a:solidFill>
-                  <a:srgbClr val="000000"/>
-                </a:solidFill>
-                <a:latin typeface="Helvetica" pitchFamily="2" charset="0"/>
-                <a:ea typeface="MS PGothic"/>
-                <a:cs typeface="Helvetica"/>
-              </a:rPr>
-              <a:t>Th</a:t>
-            </a:r>
-            <a:r>
-              <a:rPr lang="en-US" sz="4000" b="0" i="0" dirty="0">
-                <a:solidFill>
-                  <a:srgbClr val="000000"/>
-                </a:solidFill>
-                <a:effectLst/>
-                <a:latin typeface="Helvetica" pitchFamily="2" charset="0"/>
-              </a:rPr>
-              <a:t>e effect of relationships on behavior and reward activation may change as we age. (</a:t>
-            </a:r>
-            <a:r>
-              <a:rPr lang="en-US" sz="4000" b="0" i="0" dirty="0" err="1">
-                <a:solidFill>
-                  <a:srgbClr val="000000"/>
-                </a:solidFill>
-                <a:effectLst/>
-                <a:latin typeface="Helvetica" pitchFamily="2" charset="0"/>
-              </a:rPr>
-              <a:t>Fareri</a:t>
-            </a:r>
-            <a:r>
-              <a:rPr lang="en-US" sz="4000" b="0" i="0" dirty="0">
-                <a:solidFill>
-                  <a:srgbClr val="000000"/>
-                </a:solidFill>
-                <a:effectLst/>
-                <a:latin typeface="Helvetica" pitchFamily="2" charset="0"/>
-              </a:rPr>
-              <a:t> et al., 2022)</a:t>
-            </a:r>
-          </a:p>
-          <a:p>
-            <a:pPr>
-              <a:spcBef>
-                <a:spcPts val="0"/>
-              </a:spcBef>
-              <a:spcAft>
-                <a:spcPts val="0"/>
-              </a:spcAft>
-            </a:pPr>
-            <a:endParaRPr lang="en-US" sz="4000" dirty="0">
-              <a:latin typeface="Helvetica" pitchFamily="2" charset="0"/>
-              <a:ea typeface="MS PGothic"/>
-              <a:cs typeface="Helvetica"/>
-            </a:endParaRPr>
-          </a:p>
-          <a:p>
-            <a:pPr>
-              <a:spcBef>
-                <a:spcPts val="0"/>
-              </a:spcBef>
-              <a:spcAft>
-                <a:spcPts val="0"/>
-              </a:spcAft>
-            </a:pPr>
-            <a:r>
-              <a:rPr lang="en-US" sz="4000" b="0" i="1" dirty="0">
-                <a:solidFill>
-                  <a:srgbClr val="000000"/>
-                </a:solidFill>
-                <a:effectLst/>
-                <a:latin typeface="Helvetica" pitchFamily="2" charset="0"/>
-              </a:rPr>
-              <a:t>It remains unclear whether age-related differences in responses to trust are associated with maladaptive outcomes such as financial exploitation.</a:t>
-            </a:r>
-            <a:endParaRPr lang="en-US" sz="4000" i="1" dirty="0">
-              <a:latin typeface="Helvetica" pitchFamily="2" charset="0"/>
-              <a:ea typeface="MS PGothic"/>
-              <a:cs typeface="Helvetica"/>
-            </a:endParaRPr>
-          </a:p>
-        </p:txBody>
-      </p:sp>
-      <p:sp>
-        <p:nvSpPr>
           <p:cNvPr id="15365" name="Rectangle 162"/>
           <p:cNvSpPr>
             <a:spLocks noChangeArrowheads="1"/>
@@ -4819,8 +4474,8 @@
         </p:nvSpPr>
         <p:spPr bwMode="auto">
           <a:xfrm>
-            <a:off x="338498" y="12420397"/>
-            <a:ext cx="14710114" cy="20245086"/>
+            <a:off x="162957" y="12488003"/>
+            <a:ext cx="14710114" cy="18312188"/>
           </a:xfrm>
           <a:prstGeom prst="rect">
             <a:avLst/>
@@ -5115,158 +4770,6 @@
       </p:sp>
       <p:sp>
         <p:nvSpPr>
-          <p:cNvPr id="15369" name="Rectangle 162"/>
-          <p:cNvSpPr>
-            <a:spLocks noChangeArrowheads="1"/>
-          </p:cNvSpPr>
-          <p:nvPr/>
-        </p:nvSpPr>
-        <p:spPr bwMode="auto">
-          <a:xfrm>
-            <a:off x="338497" y="4246055"/>
-            <a:ext cx="14720168" cy="7760911"/>
-          </a:xfrm>
-          <a:prstGeom prst="rect">
-            <a:avLst/>
-          </a:prstGeom>
-          <a:noFill/>
-          <a:ln w="76200">
-            <a:solidFill>
-              <a:srgbClr val="C00000"/>
-            </a:solidFill>
-            <a:miter lim="800000"/>
-            <a:headEnd/>
-            <a:tailEnd/>
-          </a:ln>
-          <a:extLst>
-            <a:ext uri="{909E8E84-426E-40DD-AFC4-6F175D3DCCD1}">
-              <a14:hiddenFill xmlns:a14="http://schemas.microsoft.com/office/drawing/2010/main">
-                <a:solidFill>
-                  <a:srgbClr val="FFFFFF"/>
-                </a:solidFill>
-              </a14:hiddenFill>
-            </a:ext>
-          </a:extLst>
-        </p:spPr>
-        <p:txBody>
-          <a:bodyPr wrap="none" lIns="81274" tIns="40638" rIns="81274" bIns="40638" anchor="ctr"/>
-          <a:lstStyle>
-            <a:lvl1pPr>
-              <a:defRPr sz="2400">
-                <a:solidFill>
-                  <a:schemeClr val="tx1"/>
-                </a:solidFill>
-                <a:latin typeface="Helvetica" panose="020B0604020202020204" pitchFamily="34" charset="0"/>
-                <a:ea typeface="MS PGothic" panose="020B0600070205080204" pitchFamily="34" charset="-128"/>
-              </a:defRPr>
-            </a:lvl1pPr>
-            <a:lvl2pPr marL="742950" indent="-285750">
-              <a:defRPr sz="2400">
-                <a:solidFill>
-                  <a:schemeClr val="tx1"/>
-                </a:solidFill>
-                <a:latin typeface="Helvetica" panose="020B0604020202020204" pitchFamily="34" charset="0"/>
-                <a:ea typeface="MS PGothic" panose="020B0600070205080204" pitchFamily="34" charset="-128"/>
-              </a:defRPr>
-            </a:lvl2pPr>
-            <a:lvl3pPr marL="1143000" indent="-228600">
-              <a:defRPr sz="2400">
-                <a:solidFill>
-                  <a:schemeClr val="tx1"/>
-                </a:solidFill>
-                <a:latin typeface="Helvetica" panose="020B0604020202020204" pitchFamily="34" charset="0"/>
-                <a:ea typeface="MS PGothic" panose="020B0600070205080204" pitchFamily="34" charset="-128"/>
-              </a:defRPr>
-            </a:lvl3pPr>
-            <a:lvl4pPr marL="1600200" indent="-228600">
-              <a:defRPr sz="2400">
-                <a:solidFill>
-                  <a:schemeClr val="tx1"/>
-                </a:solidFill>
-                <a:latin typeface="Helvetica" panose="020B0604020202020204" pitchFamily="34" charset="0"/>
-                <a:ea typeface="MS PGothic" panose="020B0600070205080204" pitchFamily="34" charset="-128"/>
-              </a:defRPr>
-            </a:lvl4pPr>
-            <a:lvl5pPr marL="2057400" indent="-228600">
-              <a:defRPr sz="2400">
-                <a:solidFill>
-                  <a:schemeClr val="tx1"/>
-                </a:solidFill>
-                <a:latin typeface="Helvetica" panose="020B0604020202020204" pitchFamily="34" charset="0"/>
-                <a:ea typeface="MS PGothic" panose="020B0600070205080204" pitchFamily="34" charset="-128"/>
-              </a:defRPr>
-            </a:lvl5pPr>
-            <a:lvl6pPr marL="2514600" indent="-228600" eaLnBrk="0" fontAlgn="base" hangingPunct="0">
-              <a:spcBef>
-                <a:spcPct val="0"/>
-              </a:spcBef>
-              <a:spcAft>
-                <a:spcPct val="0"/>
-              </a:spcAft>
-              <a:defRPr sz="2400">
-                <a:solidFill>
-                  <a:schemeClr val="tx1"/>
-                </a:solidFill>
-                <a:latin typeface="Helvetica" panose="020B0604020202020204" pitchFamily="34" charset="0"/>
-                <a:ea typeface="MS PGothic" panose="020B0600070205080204" pitchFamily="34" charset="-128"/>
-              </a:defRPr>
-            </a:lvl6pPr>
-            <a:lvl7pPr marL="2971800" indent="-228600" eaLnBrk="0" fontAlgn="base" hangingPunct="0">
-              <a:spcBef>
-                <a:spcPct val="0"/>
-              </a:spcBef>
-              <a:spcAft>
-                <a:spcPct val="0"/>
-              </a:spcAft>
-              <a:defRPr sz="2400">
-                <a:solidFill>
-                  <a:schemeClr val="tx1"/>
-                </a:solidFill>
-                <a:latin typeface="Helvetica" panose="020B0604020202020204" pitchFamily="34" charset="0"/>
-                <a:ea typeface="MS PGothic" panose="020B0600070205080204" pitchFamily="34" charset="-128"/>
-              </a:defRPr>
-            </a:lvl7pPr>
-            <a:lvl8pPr marL="3429000" indent="-228600" eaLnBrk="0" fontAlgn="base" hangingPunct="0">
-              <a:spcBef>
-                <a:spcPct val="0"/>
-              </a:spcBef>
-              <a:spcAft>
-                <a:spcPct val="0"/>
-              </a:spcAft>
-              <a:defRPr sz="2400">
-                <a:solidFill>
-                  <a:schemeClr val="tx1"/>
-                </a:solidFill>
-                <a:latin typeface="Helvetica" panose="020B0604020202020204" pitchFamily="34" charset="0"/>
-                <a:ea typeface="MS PGothic" panose="020B0600070205080204" pitchFamily="34" charset="-128"/>
-              </a:defRPr>
-            </a:lvl8pPr>
-            <a:lvl9pPr marL="3886200" indent="-228600" eaLnBrk="0" fontAlgn="base" hangingPunct="0">
-              <a:spcBef>
-                <a:spcPct val="0"/>
-              </a:spcBef>
-              <a:spcAft>
-                <a:spcPct val="0"/>
-              </a:spcAft>
-              <a:defRPr sz="2400">
-                <a:solidFill>
-                  <a:schemeClr val="tx1"/>
-                </a:solidFill>
-                <a:latin typeface="Helvetica" panose="020B0604020202020204" pitchFamily="34" charset="0"/>
-                <a:ea typeface="MS PGothic" panose="020B0600070205080204" pitchFamily="34" charset="-128"/>
-              </a:defRPr>
-            </a:lvl9pPr>
-          </a:lstStyle>
-          <a:p>
-            <a:pPr eaLnBrk="1" hangingPunct="1"/>
-            <a:endParaRPr lang="en-US" altLang="en-US" sz="1245">
-              <a:latin typeface="Trebuchet MS" panose="020B0603020202020204" pitchFamily="34" charset="0"/>
-            </a:endParaRPr>
-          </a:p>
-        </p:txBody>
-      </p:sp>
-      <p:sp>
-        <p:nvSpPr>
           <p:cNvPr id="15388" name="TextBox 2"/>
           <p:cNvSpPr txBox="1">
             <a:spLocks noChangeArrowheads="1"/>
@@ -5275,7 +4778,7 @@
         </p:nvSpPr>
         <p:spPr bwMode="auto">
           <a:xfrm>
-            <a:off x="4842671" y="1958662"/>
+            <a:off x="4842671" y="1755462"/>
             <a:ext cx="33932768" cy="1938992"/>
           </a:xfrm>
           <a:prstGeom prst="rect">
@@ -5686,8 +5189,8 @@
         </p:nvSpPr>
         <p:spPr>
           <a:xfrm>
-            <a:off x="4838490" y="925150"/>
-            <a:ext cx="33151930" cy="1353960"/>
+            <a:off x="3880763" y="50008"/>
+            <a:ext cx="36129673" cy="1669368"/>
           </a:xfrm>
           <a:prstGeom prst="rect">
             <a:avLst/>
@@ -5712,7 +5215,7 @@
               </a:spcAft>
             </a:pPr>
             <a:r>
-              <a:rPr lang="en-US" sz="8000" b="1" i="0" dirty="0">
+              <a:rPr lang="en-US" sz="10000" b="1" i="0" dirty="0">
                 <a:solidFill>
                   <a:srgbClr val="000000"/>
                 </a:solidFill>
@@ -5721,164 +5224,12 @@
               </a:rPr>
               <a:t>Examining Age-Related Differences in Neural Responses to Trust</a:t>
             </a:r>
-            <a:endParaRPr lang="en-US" sz="8000" dirty="0">
+            <a:endParaRPr lang="en-US" sz="10000" dirty="0">
               <a:effectLst/>
               <a:latin typeface="Helvetica"/>
               <a:ea typeface="Calibri" panose="020F0502020204030204" pitchFamily="34" charset="0"/>
               <a:cs typeface="Helvetica"/>
             </a:endParaRPr>
-          </a:p>
-        </p:txBody>
-      </p:sp>
-      <p:sp>
-        <p:nvSpPr>
-          <p:cNvPr id="15361" name="Rectangle 200"/>
-          <p:cNvSpPr>
-            <a:spLocks noChangeArrowheads="1"/>
-          </p:cNvSpPr>
-          <p:nvPr/>
-        </p:nvSpPr>
-        <p:spPr bwMode="auto">
-          <a:xfrm>
-            <a:off x="4858205" y="3968278"/>
-            <a:ext cx="4805795" cy="738724"/>
-          </a:xfrm>
-          <a:prstGeom prst="rect">
-            <a:avLst/>
-          </a:prstGeom>
-          <a:solidFill>
-            <a:schemeClr val="bg1"/>
-          </a:solidFill>
-          <a:ln>
-            <a:noFill/>
-          </a:ln>
-        </p:spPr>
-        <p:txBody>
-          <a:bodyPr wrap="square" lIns="81274" tIns="40638" rIns="81274" bIns="40638">
-            <a:spAutoFit/>
-          </a:bodyPr>
-          <a:lstStyle>
-            <a:lvl1pPr defTabSz="5119688">
-              <a:defRPr sz="2400">
-                <a:solidFill>
-                  <a:schemeClr val="tx1"/>
-                </a:solidFill>
-                <a:latin typeface="Helvetica" panose="020B0604020202020204" pitchFamily="34" charset="0"/>
-                <a:ea typeface="MS PGothic" panose="020B0600070205080204" pitchFamily="34" charset="-128"/>
-              </a:defRPr>
-            </a:lvl1pPr>
-            <a:lvl2pPr marL="742950" indent="-285750" defTabSz="5119688">
-              <a:defRPr sz="2400">
-                <a:solidFill>
-                  <a:schemeClr val="tx1"/>
-                </a:solidFill>
-                <a:latin typeface="Helvetica" panose="020B0604020202020204" pitchFamily="34" charset="0"/>
-                <a:ea typeface="MS PGothic" panose="020B0600070205080204" pitchFamily="34" charset="-128"/>
-              </a:defRPr>
-            </a:lvl2pPr>
-            <a:lvl3pPr marL="1143000" indent="-228600" defTabSz="5119688">
-              <a:defRPr sz="2400">
-                <a:solidFill>
-                  <a:schemeClr val="tx1"/>
-                </a:solidFill>
-                <a:latin typeface="Helvetica" panose="020B0604020202020204" pitchFamily="34" charset="0"/>
-                <a:ea typeface="MS PGothic" panose="020B0600070205080204" pitchFamily="34" charset="-128"/>
-              </a:defRPr>
-            </a:lvl3pPr>
-            <a:lvl4pPr marL="1600200" indent="-228600" defTabSz="5119688">
-              <a:defRPr sz="2400">
-                <a:solidFill>
-                  <a:schemeClr val="tx1"/>
-                </a:solidFill>
-                <a:latin typeface="Helvetica" panose="020B0604020202020204" pitchFamily="34" charset="0"/>
-                <a:ea typeface="MS PGothic" panose="020B0600070205080204" pitchFamily="34" charset="-128"/>
-              </a:defRPr>
-            </a:lvl4pPr>
-            <a:lvl5pPr marL="2057400" indent="-228600" defTabSz="5119688">
-              <a:defRPr sz="2400">
-                <a:solidFill>
-                  <a:schemeClr val="tx1"/>
-                </a:solidFill>
-                <a:latin typeface="Helvetica" panose="020B0604020202020204" pitchFamily="34" charset="0"/>
-                <a:ea typeface="MS PGothic" panose="020B0600070205080204" pitchFamily="34" charset="-128"/>
-              </a:defRPr>
-            </a:lvl5pPr>
-            <a:lvl6pPr marL="2514600" indent="-228600" defTabSz="5119688" eaLnBrk="0" fontAlgn="base" hangingPunct="0">
-              <a:spcBef>
-                <a:spcPct val="0"/>
-              </a:spcBef>
-              <a:spcAft>
-                <a:spcPct val="0"/>
-              </a:spcAft>
-              <a:defRPr sz="2400">
-                <a:solidFill>
-                  <a:schemeClr val="tx1"/>
-                </a:solidFill>
-                <a:latin typeface="Helvetica" panose="020B0604020202020204" pitchFamily="34" charset="0"/>
-                <a:ea typeface="MS PGothic" panose="020B0600070205080204" pitchFamily="34" charset="-128"/>
-              </a:defRPr>
-            </a:lvl6pPr>
-            <a:lvl7pPr marL="2971800" indent="-228600" defTabSz="5119688" eaLnBrk="0" fontAlgn="base" hangingPunct="0">
-              <a:spcBef>
-                <a:spcPct val="0"/>
-              </a:spcBef>
-              <a:spcAft>
-                <a:spcPct val="0"/>
-              </a:spcAft>
-              <a:defRPr sz="2400">
-                <a:solidFill>
-                  <a:schemeClr val="tx1"/>
-                </a:solidFill>
-                <a:latin typeface="Helvetica" panose="020B0604020202020204" pitchFamily="34" charset="0"/>
-                <a:ea typeface="MS PGothic" panose="020B0600070205080204" pitchFamily="34" charset="-128"/>
-              </a:defRPr>
-            </a:lvl7pPr>
-            <a:lvl8pPr marL="3429000" indent="-228600" defTabSz="5119688" eaLnBrk="0" fontAlgn="base" hangingPunct="0">
-              <a:spcBef>
-                <a:spcPct val="0"/>
-              </a:spcBef>
-              <a:spcAft>
-                <a:spcPct val="0"/>
-              </a:spcAft>
-              <a:defRPr sz="2400">
-                <a:solidFill>
-                  <a:schemeClr val="tx1"/>
-                </a:solidFill>
-                <a:latin typeface="Helvetica" panose="020B0604020202020204" pitchFamily="34" charset="0"/>
-                <a:ea typeface="MS PGothic" panose="020B0600070205080204" pitchFamily="34" charset="-128"/>
-              </a:defRPr>
-            </a:lvl8pPr>
-            <a:lvl9pPr marL="3886200" indent="-228600" defTabSz="5119688" eaLnBrk="0" fontAlgn="base" hangingPunct="0">
-              <a:spcBef>
-                <a:spcPct val="0"/>
-              </a:spcBef>
-              <a:spcAft>
-                <a:spcPct val="0"/>
-              </a:spcAft>
-              <a:defRPr sz="2400">
-                <a:solidFill>
-                  <a:schemeClr val="tx1"/>
-                </a:solidFill>
-                <a:latin typeface="Helvetica" panose="020B0604020202020204" pitchFamily="34" charset="0"/>
-                <a:ea typeface="MS PGothic" panose="020B0600070205080204" pitchFamily="34" charset="-128"/>
-              </a:defRPr>
-            </a:lvl9pPr>
-          </a:lstStyle>
-          <a:p>
-            <a:pPr algn="ctr">
-              <a:spcBef>
-                <a:spcPct val="50000"/>
-              </a:spcBef>
-            </a:pPr>
-            <a:r>
-              <a:rPr lang="en-US" altLang="en-US" sz="4267" b="1">
-                <a:solidFill>
-                  <a:srgbClr val="C00000"/>
-                </a:solidFill>
-                <a:latin typeface="Trebuchet MS" panose="020B0603020202020204" pitchFamily="34" charset="0"/>
-              </a:rPr>
-              <a:t>1. Introduction</a:t>
-            </a:r>
           </a:p>
         </p:txBody>
       </p:sp>
@@ -6193,7 +5544,7 @@
         <p:spPr>
           <a:xfrm>
             <a:off x="15599737" y="31508836"/>
-            <a:ext cx="14699076" cy="584775"/>
+            <a:ext cx="14699076" cy="1077218"/>
           </a:xfrm>
           <a:prstGeom prst="rect">
             <a:avLst/>
@@ -6207,17 +5558,12 @@
           <a:p>
             <a:pPr algn="ctr"/>
             <a:r>
-              <a:rPr lang="en-US" sz="3200" spc="15" dirty="0">
-                <a:latin typeface="Helvetica"/>
+              <a:rPr lang="en-US" sz="3200" dirty="0">
                 <a:ea typeface="MS PGothic"/>
                 <a:cs typeface="Helvetica"/>
               </a:rPr>
-              <a:t>…</a:t>
+              <a:t>We found that a higher difference in closeness ratings between friends and strangers was associated with an increase in ACC activation</a:t>
             </a:r>
-            <a:endParaRPr lang="en-US" sz="3200" dirty="0">
-              <a:ea typeface="MS PGothic"/>
-              <a:cs typeface="Helvetica"/>
-            </a:endParaRPr>
           </a:p>
         </p:txBody>
       </p:sp>
@@ -6523,7 +5869,7 @@
                 <a:latin typeface="Trebuchet MS"/>
                 <a:ea typeface="MS PGothic"/>
               </a:rPr>
-              <a:t>5. Neural Activation in the ACC is Associated with IOS Scores</a:t>
+              <a:t>5. Neural Activation in the Anterior Cingulate Cortex (ACC) is Associated with IOS Scores</a:t>
             </a:r>
           </a:p>
         </p:txBody>
@@ -7204,49 +6550,6 @@
       </p:sp>
       <p:sp>
         <p:nvSpPr>
-          <p:cNvPr id="25" name="Rectangle 24">
-            <a:extLst>
-              <a:ext uri="{FF2B5EF4-FFF2-40B4-BE49-F238E27FC236}">
-                <a16:creationId xmlns:a16="http://schemas.microsoft.com/office/drawing/2014/main" id="{5AEA1BD0-929B-B248-91B7-4A1AD3CCB35E}"/>
-              </a:ext>
-            </a:extLst>
-          </p:cNvPr>
-          <p:cNvSpPr/>
-          <p:nvPr/>
-        </p:nvSpPr>
-        <p:spPr>
-          <a:xfrm>
-            <a:off x="15426443" y="24805358"/>
-            <a:ext cx="14625853" cy="584775"/>
-          </a:xfrm>
-          <a:prstGeom prst="rect">
-            <a:avLst/>
-          </a:prstGeom>
-        </p:spPr>
-        <p:txBody>
-          <a:bodyPr wrap="square" lIns="91440" tIns="45720" rIns="91440" bIns="45720" anchor="t">
-            <a:spAutoFit/>
-          </a:bodyPr>
-          <a:lstStyle/>
-          <a:p>
-            <a:pPr algn="ctr"/>
-            <a:r>
-              <a:rPr lang="en-US" sz="3200" i="1" dirty="0">
-                <a:latin typeface="Helvetica"/>
-                <a:ea typeface="MS PGothic"/>
-                <a:cs typeface="Helvetica"/>
-              </a:rPr>
-              <a:t>…</a:t>
-            </a:r>
-            <a:endParaRPr lang="en-US" sz="3200" i="1" dirty="0">
-              <a:latin typeface="Helvetica"/>
-              <a:cs typeface="Helvetica"/>
-            </a:endParaRPr>
-          </a:p>
-        </p:txBody>
-      </p:sp>
-      <p:sp>
-        <p:nvSpPr>
           <p:cNvPr id="26" name="Rectangle 25">
             <a:extLst>
               <a:ext uri="{FF2B5EF4-FFF2-40B4-BE49-F238E27FC236}">
@@ -7286,7 +6589,7 @@
                 <a:ea typeface="MS PGothic"/>
                 <a:cs typeface="Helvetica"/>
               </a:rPr>
-              <a:t>We found VS activation for Reciprocate &gt; Defect outcomes</a:t>
+              <a:t>We found Ventral Striatum (VS) activation for Reciprocate &gt; Defect outcomes</a:t>
             </a:r>
             <a:endParaRPr lang="en-US" sz="3200" i="1" dirty="0">
               <a:cs typeface="Helvetica" panose="020B0604020202020204" pitchFamily="34" charset="0"/>
@@ -7328,7 +6631,7 @@
                 <a:latin typeface="Helvetica"/>
                 <a:ea typeface="MS PGothic"/>
               </a:rPr>
-              <a:t>We found increasing activation in the Ventral Stratum (VS) when participants were presented with a reciprocate outcome as opposed to a defect outcome.</a:t>
+              <a:t>We found increasing activation in the VS when participants were presented with a reciprocate outcome as opposed to a defect outcome.</a:t>
             </a:r>
           </a:p>
         </p:txBody>
@@ -7378,281 +6681,803 @@
           </a:p>
         </p:txBody>
       </p:sp>
-      <p:sp>
-        <p:nvSpPr>
-          <p:cNvPr id="66" name="TextBox 65">
+      <p:grpSp>
+        <p:nvGrpSpPr>
+          <p:cNvPr id="15525" name="Group 15524">
             <a:extLst>
               <a:ext uri="{FF2B5EF4-FFF2-40B4-BE49-F238E27FC236}">
-                <a16:creationId xmlns:a16="http://schemas.microsoft.com/office/drawing/2014/main" id="{828EF0BF-392F-46C6-BF23-BF99B2CEA917}"/>
+                <a16:creationId xmlns:a16="http://schemas.microsoft.com/office/drawing/2014/main" id="{495044C5-5185-1E74-1C51-F36E8CA64CBA}"/>
               </a:ext>
             </a:extLst>
           </p:cNvPr>
-          <p:cNvSpPr txBox="1"/>
+          <p:cNvGrpSpPr/>
           <p:nvPr/>
-        </p:nvSpPr>
-        <p:spPr>
+        </p:nvGrpSpPr>
+        <p:grpSpPr>
           <a:xfrm>
-            <a:off x="333765" y="9945451"/>
-            <a:ext cx="14639262" cy="2031325"/>
+            <a:off x="169367" y="3967558"/>
+            <a:ext cx="14831195" cy="8123743"/>
+            <a:chOff x="211346" y="3968278"/>
+            <a:chExt cx="14831195" cy="8123743"/>
           </a:xfrm>
-          <a:prstGeom prst="rect">
-            <a:avLst/>
-          </a:prstGeom>
-          <a:noFill/>
-        </p:spPr>
-        <p:txBody>
-          <a:bodyPr wrap="square" lIns="91440" tIns="45720" rIns="91440" bIns="45720" anchor="t">
-            <a:spAutoFit/>
-          </a:bodyPr>
-          <a:lstStyle/>
-          <a:p>
-            <a:pPr algn="ctr">
-              <a:spcBef>
-                <a:spcPts val="360"/>
-              </a:spcBef>
-              <a:spcAft>
-                <a:spcPts val="0"/>
-              </a:spcAft>
-            </a:pPr>
-            <a:r>
-              <a:rPr lang="en-US" sz="4200" b="1" dirty="0">
-                <a:latin typeface="Helvetica"/>
+        </p:grpSpPr>
+        <p:sp>
+          <p:nvSpPr>
+            <p:cNvPr id="15362" name="TextBox 189"/>
+            <p:cNvSpPr txBox="1">
+              <a:spLocks noChangeArrowheads="1"/>
+            </p:cNvSpPr>
+            <p:nvPr/>
+          </p:nvSpPr>
+          <p:spPr bwMode="auto">
+            <a:xfrm>
+              <a:off x="515553" y="4761579"/>
+              <a:ext cx="14526988" cy="5016758"/>
+            </a:xfrm>
+            <a:prstGeom prst="rect">
+              <a:avLst/>
+            </a:prstGeom>
+            <a:noFill/>
+            <a:ln>
+              <a:noFill/>
+            </a:ln>
+            <a:extLst>
+              <a:ext uri="{909E8E84-426E-40DD-AFC4-6F175D3DCCD1}">
+                <a14:hiddenFill xmlns:a14="http://schemas.microsoft.com/office/drawing/2010/main">
+                  <a:solidFill>
+                    <a:srgbClr val="FFFFFF"/>
+                  </a:solidFill>
+                </a14:hiddenFill>
+              </a:ext>
+              <a:ext uri="{91240B29-F687-4F45-9708-019B960494DF}">
+                <a14:hiddenLine xmlns:a14="http://schemas.microsoft.com/office/drawing/2010/main" w="9525">
+                  <a:solidFill>
+                    <a:srgbClr val="000000"/>
+                  </a:solidFill>
+                  <a:miter lim="800000"/>
+                  <a:headEnd/>
+                  <a:tailEnd/>
+                </a14:hiddenLine>
+              </a:ext>
+            </a:extLst>
+          </p:spPr>
+          <p:txBody>
+            <a:bodyPr wrap="square" lIns="91440" tIns="45720" rIns="91440" bIns="45720" anchor="t">
+              <a:spAutoFit/>
+            </a:bodyPr>
+            <a:lstStyle>
+              <a:lvl1pPr>
+                <a:defRPr sz="2400">
+                  <a:solidFill>
+                    <a:schemeClr val="tx1"/>
+                  </a:solidFill>
+                  <a:latin typeface="Helvetica" panose="020B0604020202020204" pitchFamily="34" charset="0"/>
+                  <a:ea typeface="MS PGothic" panose="020B0600070205080204" pitchFamily="34" charset="-128"/>
+                </a:defRPr>
+              </a:lvl1pPr>
+              <a:lvl2pPr marL="742950" indent="-285750">
+                <a:defRPr sz="2400">
+                  <a:solidFill>
+                    <a:schemeClr val="tx1"/>
+                  </a:solidFill>
+                  <a:latin typeface="Helvetica" panose="020B0604020202020204" pitchFamily="34" charset="0"/>
+                  <a:ea typeface="MS PGothic" panose="020B0600070205080204" pitchFamily="34" charset="-128"/>
+                </a:defRPr>
+              </a:lvl2pPr>
+              <a:lvl3pPr marL="1143000" indent="-228600">
+                <a:defRPr sz="2400">
+                  <a:solidFill>
+                    <a:schemeClr val="tx1"/>
+                  </a:solidFill>
+                  <a:latin typeface="Helvetica" panose="020B0604020202020204" pitchFamily="34" charset="0"/>
+                  <a:ea typeface="MS PGothic" panose="020B0600070205080204" pitchFamily="34" charset="-128"/>
+                </a:defRPr>
+              </a:lvl3pPr>
+              <a:lvl4pPr marL="1600200" indent="-228600">
+                <a:defRPr sz="2400">
+                  <a:solidFill>
+                    <a:schemeClr val="tx1"/>
+                  </a:solidFill>
+                  <a:latin typeface="Helvetica" panose="020B0604020202020204" pitchFamily="34" charset="0"/>
+                  <a:ea typeface="MS PGothic" panose="020B0600070205080204" pitchFamily="34" charset="-128"/>
+                </a:defRPr>
+              </a:lvl4pPr>
+              <a:lvl5pPr marL="2057400" indent="-228600">
+                <a:defRPr sz="2400">
+                  <a:solidFill>
+                    <a:schemeClr val="tx1"/>
+                  </a:solidFill>
+                  <a:latin typeface="Helvetica" panose="020B0604020202020204" pitchFamily="34" charset="0"/>
+                  <a:ea typeface="MS PGothic" panose="020B0600070205080204" pitchFamily="34" charset="-128"/>
+                </a:defRPr>
+              </a:lvl5pPr>
+              <a:lvl6pPr marL="2514600" indent="-228600" eaLnBrk="0" fontAlgn="base" hangingPunct="0">
+                <a:spcBef>
+                  <a:spcPct val="0"/>
+                </a:spcBef>
+                <a:spcAft>
+                  <a:spcPct val="0"/>
+                </a:spcAft>
+                <a:defRPr sz="2400">
+                  <a:solidFill>
+                    <a:schemeClr val="tx1"/>
+                  </a:solidFill>
+                  <a:latin typeface="Helvetica" panose="020B0604020202020204" pitchFamily="34" charset="0"/>
+                  <a:ea typeface="MS PGothic" panose="020B0600070205080204" pitchFamily="34" charset="-128"/>
+                </a:defRPr>
+              </a:lvl6pPr>
+              <a:lvl7pPr marL="2971800" indent="-228600" eaLnBrk="0" fontAlgn="base" hangingPunct="0">
+                <a:spcBef>
+                  <a:spcPct val="0"/>
+                </a:spcBef>
+                <a:spcAft>
+                  <a:spcPct val="0"/>
+                </a:spcAft>
+                <a:defRPr sz="2400">
+                  <a:solidFill>
+                    <a:schemeClr val="tx1"/>
+                  </a:solidFill>
+                  <a:latin typeface="Helvetica" panose="020B0604020202020204" pitchFamily="34" charset="0"/>
+                  <a:ea typeface="MS PGothic" panose="020B0600070205080204" pitchFamily="34" charset="-128"/>
+                </a:defRPr>
+              </a:lvl7pPr>
+              <a:lvl8pPr marL="3429000" indent="-228600" eaLnBrk="0" fontAlgn="base" hangingPunct="0">
+                <a:spcBef>
+                  <a:spcPct val="0"/>
+                </a:spcBef>
+                <a:spcAft>
+                  <a:spcPct val="0"/>
+                </a:spcAft>
+                <a:defRPr sz="2400">
+                  <a:solidFill>
+                    <a:schemeClr val="tx1"/>
+                  </a:solidFill>
+                  <a:latin typeface="Helvetica" panose="020B0604020202020204" pitchFamily="34" charset="0"/>
+                  <a:ea typeface="MS PGothic" panose="020B0600070205080204" pitchFamily="34" charset="-128"/>
+                </a:defRPr>
+              </a:lvl8pPr>
+              <a:lvl9pPr marL="3886200" indent="-228600" eaLnBrk="0" fontAlgn="base" hangingPunct="0">
+                <a:spcBef>
+                  <a:spcPct val="0"/>
+                </a:spcBef>
+                <a:spcAft>
+                  <a:spcPct val="0"/>
+                </a:spcAft>
+                <a:defRPr sz="2400">
+                  <a:solidFill>
+                    <a:schemeClr val="tx1"/>
+                  </a:solidFill>
+                  <a:latin typeface="Helvetica" panose="020B0604020202020204" pitchFamily="34" charset="0"/>
+                  <a:ea typeface="MS PGothic" panose="020B0600070205080204" pitchFamily="34" charset="-128"/>
+                </a:defRPr>
+              </a:lvl9pPr>
+            </a:lstStyle>
+            <a:p>
+              <a:pPr>
+                <a:spcBef>
+                  <a:spcPts val="0"/>
+                </a:spcBef>
+                <a:spcAft>
+                  <a:spcPts val="0"/>
+                </a:spcAft>
+                <a:buFont typeface="Arial" panose="020B0604020202020204" pitchFamily="34" charset="0"/>
+                <a:buChar char="•"/>
+              </a:pPr>
+              <a:r>
+                <a:rPr lang="en-US" sz="4000" dirty="0">
+                  <a:latin typeface="Helvetica"/>
+                  <a:ea typeface="MS PGothic"/>
+                  <a:cs typeface="Helvetica"/>
+                </a:rPr>
+                <a:t> </a:t>
+              </a:r>
+              <a:r>
+                <a:rPr lang="en-US" sz="4000" b="0" i="0" dirty="0">
+                  <a:solidFill>
+                    <a:srgbClr val="000000"/>
+                  </a:solidFill>
+                  <a:effectLst/>
+                  <a:latin typeface="Helvetica" pitchFamily="2" charset="0"/>
+                </a:rPr>
+                <a:t>Social relationships influence our behaviors and may modulate our neural responses to reward. (</a:t>
+              </a:r>
+              <a:r>
+                <a:rPr lang="en-US" sz="4000" b="0" i="0" dirty="0" err="1">
+                  <a:solidFill>
+                    <a:srgbClr val="000000"/>
+                  </a:solidFill>
+                  <a:effectLst/>
+                  <a:latin typeface="Helvetica" pitchFamily="2" charset="0"/>
+                </a:rPr>
+                <a:t>Fareri</a:t>
+              </a:r>
+              <a:r>
+                <a:rPr lang="en-US" sz="4000" b="0" i="0" dirty="0">
+                  <a:solidFill>
+                    <a:srgbClr val="000000"/>
+                  </a:solidFill>
+                  <a:effectLst/>
+                  <a:latin typeface="Helvetica" pitchFamily="2" charset="0"/>
+                </a:rPr>
+                <a:t> et al., 2015)</a:t>
+              </a:r>
+              <a:endParaRPr lang="en-US" sz="4000" dirty="0">
+                <a:latin typeface="Helvetica" pitchFamily="2" charset="0"/>
                 <a:ea typeface="MS PGothic"/>
                 <a:cs typeface="Helvetica"/>
-              </a:rPr>
-              <a:t>We</a:t>
-            </a:r>
-            <a:r>
-              <a:rPr lang="en-US" sz="4200" b="1" i="0" u="none" strike="noStrike" dirty="0">
-                <a:effectLst/>
-                <a:latin typeface="Helvetica"/>
+              </a:endParaRPr>
+            </a:p>
+            <a:p>
+              <a:pPr>
+                <a:spcBef>
+                  <a:spcPts val="0"/>
+                </a:spcBef>
+                <a:spcAft>
+                  <a:spcPts val="0"/>
+                </a:spcAft>
+                <a:buFont typeface="Arial" panose="020B0604020202020204" pitchFamily="34" charset="0"/>
+                <a:buChar char="•"/>
+              </a:pPr>
+              <a:r>
+                <a:rPr lang="en-US" sz="4000" dirty="0">
+                  <a:latin typeface="Helvetica"/>
+                  <a:ea typeface="MS PGothic"/>
+                  <a:cs typeface="Helvetica"/>
+                </a:rPr>
+                <a:t> </a:t>
+              </a:r>
+              <a:r>
+                <a:rPr lang="en-US" sz="4000" dirty="0">
+                  <a:solidFill>
+                    <a:srgbClr val="000000"/>
+                  </a:solidFill>
+                  <a:latin typeface="Helvetica" pitchFamily="2" charset="0"/>
+                  <a:ea typeface="MS PGothic"/>
+                  <a:cs typeface="Helvetica"/>
+                </a:rPr>
+                <a:t>Th</a:t>
+              </a:r>
+              <a:r>
+                <a:rPr lang="en-US" sz="4000" b="0" i="0" dirty="0">
+                  <a:solidFill>
+                    <a:srgbClr val="000000"/>
+                  </a:solidFill>
+                  <a:effectLst/>
+                  <a:latin typeface="Helvetica" pitchFamily="2" charset="0"/>
+                </a:rPr>
+                <a:t>e effect of relationships on behavior and reward activation may change as we age. (</a:t>
+              </a:r>
+              <a:r>
+                <a:rPr lang="en-US" sz="4000" b="0" i="0" dirty="0" err="1">
+                  <a:solidFill>
+                    <a:srgbClr val="000000"/>
+                  </a:solidFill>
+                  <a:effectLst/>
+                  <a:latin typeface="Helvetica" pitchFamily="2" charset="0"/>
+                </a:rPr>
+                <a:t>Fareri</a:t>
+              </a:r>
+              <a:r>
+                <a:rPr lang="en-US" sz="4000" b="0" i="0" dirty="0">
+                  <a:solidFill>
+                    <a:srgbClr val="000000"/>
+                  </a:solidFill>
+                  <a:effectLst/>
+                  <a:latin typeface="Helvetica" pitchFamily="2" charset="0"/>
+                </a:rPr>
+                <a:t> et al., 2022)</a:t>
+              </a:r>
+            </a:p>
+            <a:p>
+              <a:pPr>
+                <a:spcBef>
+                  <a:spcPts val="0"/>
+                </a:spcBef>
+                <a:spcAft>
+                  <a:spcPts val="0"/>
+                </a:spcAft>
+              </a:pPr>
+              <a:endParaRPr lang="en-US" sz="4000" dirty="0">
+                <a:latin typeface="Helvetica" pitchFamily="2" charset="0"/>
                 <a:ea typeface="MS PGothic"/>
                 <a:cs typeface="Helvetica"/>
-              </a:rPr>
-              <a:t> investigated </a:t>
-            </a:r>
-            <a:r>
-              <a:rPr lang="en-US" sz="4200" b="1" dirty="0">
-                <a:latin typeface="Helvetica"/>
+              </a:endParaRPr>
+            </a:p>
+            <a:p>
+              <a:pPr>
+                <a:spcBef>
+                  <a:spcPts val="0"/>
+                </a:spcBef>
+                <a:spcAft>
+                  <a:spcPts val="0"/>
+                </a:spcAft>
+              </a:pPr>
+              <a:r>
+                <a:rPr lang="en-US" sz="4000" b="0" i="1" dirty="0">
+                  <a:solidFill>
+                    <a:srgbClr val="000000"/>
+                  </a:solidFill>
+                  <a:effectLst/>
+                  <a:latin typeface="Helvetica" pitchFamily="2" charset="0"/>
+                </a:rPr>
+                <a:t>It remains unclear whether age-related differences in responses to trust are associated with maladaptive outcomes such as financial exploitation.</a:t>
+              </a:r>
+              <a:endParaRPr lang="en-US" sz="4000" i="1" dirty="0">
+                <a:latin typeface="Helvetica" pitchFamily="2" charset="0"/>
                 <a:ea typeface="MS PGothic"/>
                 <a:cs typeface="Helvetica"/>
-              </a:rPr>
-              <a:t>whether social trust decisions change as we age, and how those changes could be related to financial exploitation.</a:t>
-            </a:r>
-            <a:endParaRPr lang="en-US" sz="4200" b="1" dirty="0">
-              <a:cs typeface="Helvetica"/>
-            </a:endParaRPr>
-          </a:p>
-        </p:txBody>
-      </p:sp>
-      <p:sp>
-        <p:nvSpPr>
-          <p:cNvPr id="35" name="TextBox 34">
+              </a:endParaRPr>
+            </a:p>
+          </p:txBody>
+        </p:sp>
+        <p:sp>
+          <p:nvSpPr>
+            <p:cNvPr id="15369" name="Rectangle 162"/>
+            <p:cNvSpPr>
+              <a:spLocks noChangeArrowheads="1"/>
+            </p:cNvSpPr>
+            <p:nvPr/>
+          </p:nvSpPr>
+          <p:spPr bwMode="auto">
+            <a:xfrm>
+              <a:off x="211346" y="4331110"/>
+              <a:ext cx="14720168" cy="7760911"/>
+            </a:xfrm>
+            <a:prstGeom prst="rect">
+              <a:avLst/>
+            </a:prstGeom>
+            <a:noFill/>
+            <a:ln w="76200">
+              <a:solidFill>
+                <a:srgbClr val="C00000"/>
+              </a:solidFill>
+              <a:miter lim="800000"/>
+              <a:headEnd/>
+              <a:tailEnd/>
+            </a:ln>
+            <a:extLst>
+              <a:ext uri="{909E8E84-426E-40DD-AFC4-6F175D3DCCD1}">
+                <a14:hiddenFill xmlns:a14="http://schemas.microsoft.com/office/drawing/2010/main">
+                  <a:solidFill>
+                    <a:srgbClr val="FFFFFF"/>
+                  </a:solidFill>
+                </a14:hiddenFill>
+              </a:ext>
+            </a:extLst>
+          </p:spPr>
+          <p:txBody>
+            <a:bodyPr wrap="none" lIns="81274" tIns="40638" rIns="81274" bIns="40638" anchor="ctr"/>
+            <a:lstStyle>
+              <a:lvl1pPr>
+                <a:defRPr sz="2400">
+                  <a:solidFill>
+                    <a:schemeClr val="tx1"/>
+                  </a:solidFill>
+                  <a:latin typeface="Helvetica" panose="020B0604020202020204" pitchFamily="34" charset="0"/>
+                  <a:ea typeface="MS PGothic" panose="020B0600070205080204" pitchFamily="34" charset="-128"/>
+                </a:defRPr>
+              </a:lvl1pPr>
+              <a:lvl2pPr marL="742950" indent="-285750">
+                <a:defRPr sz="2400">
+                  <a:solidFill>
+                    <a:schemeClr val="tx1"/>
+                  </a:solidFill>
+                  <a:latin typeface="Helvetica" panose="020B0604020202020204" pitchFamily="34" charset="0"/>
+                  <a:ea typeface="MS PGothic" panose="020B0600070205080204" pitchFamily="34" charset="-128"/>
+                </a:defRPr>
+              </a:lvl2pPr>
+              <a:lvl3pPr marL="1143000" indent="-228600">
+                <a:defRPr sz="2400">
+                  <a:solidFill>
+                    <a:schemeClr val="tx1"/>
+                  </a:solidFill>
+                  <a:latin typeface="Helvetica" panose="020B0604020202020204" pitchFamily="34" charset="0"/>
+                  <a:ea typeface="MS PGothic" panose="020B0600070205080204" pitchFamily="34" charset="-128"/>
+                </a:defRPr>
+              </a:lvl3pPr>
+              <a:lvl4pPr marL="1600200" indent="-228600">
+                <a:defRPr sz="2400">
+                  <a:solidFill>
+                    <a:schemeClr val="tx1"/>
+                  </a:solidFill>
+                  <a:latin typeface="Helvetica" panose="020B0604020202020204" pitchFamily="34" charset="0"/>
+                  <a:ea typeface="MS PGothic" panose="020B0600070205080204" pitchFamily="34" charset="-128"/>
+                </a:defRPr>
+              </a:lvl4pPr>
+              <a:lvl5pPr marL="2057400" indent="-228600">
+                <a:defRPr sz="2400">
+                  <a:solidFill>
+                    <a:schemeClr val="tx1"/>
+                  </a:solidFill>
+                  <a:latin typeface="Helvetica" panose="020B0604020202020204" pitchFamily="34" charset="0"/>
+                  <a:ea typeface="MS PGothic" panose="020B0600070205080204" pitchFamily="34" charset="-128"/>
+                </a:defRPr>
+              </a:lvl5pPr>
+              <a:lvl6pPr marL="2514600" indent="-228600" eaLnBrk="0" fontAlgn="base" hangingPunct="0">
+                <a:spcBef>
+                  <a:spcPct val="0"/>
+                </a:spcBef>
+                <a:spcAft>
+                  <a:spcPct val="0"/>
+                </a:spcAft>
+                <a:defRPr sz="2400">
+                  <a:solidFill>
+                    <a:schemeClr val="tx1"/>
+                  </a:solidFill>
+                  <a:latin typeface="Helvetica" panose="020B0604020202020204" pitchFamily="34" charset="0"/>
+                  <a:ea typeface="MS PGothic" panose="020B0600070205080204" pitchFamily="34" charset="-128"/>
+                </a:defRPr>
+              </a:lvl6pPr>
+              <a:lvl7pPr marL="2971800" indent="-228600" eaLnBrk="0" fontAlgn="base" hangingPunct="0">
+                <a:spcBef>
+                  <a:spcPct val="0"/>
+                </a:spcBef>
+                <a:spcAft>
+                  <a:spcPct val="0"/>
+                </a:spcAft>
+                <a:defRPr sz="2400">
+                  <a:solidFill>
+                    <a:schemeClr val="tx1"/>
+                  </a:solidFill>
+                  <a:latin typeface="Helvetica" panose="020B0604020202020204" pitchFamily="34" charset="0"/>
+                  <a:ea typeface="MS PGothic" panose="020B0600070205080204" pitchFamily="34" charset="-128"/>
+                </a:defRPr>
+              </a:lvl7pPr>
+              <a:lvl8pPr marL="3429000" indent="-228600" eaLnBrk="0" fontAlgn="base" hangingPunct="0">
+                <a:spcBef>
+                  <a:spcPct val="0"/>
+                </a:spcBef>
+                <a:spcAft>
+                  <a:spcPct val="0"/>
+                </a:spcAft>
+                <a:defRPr sz="2400">
+                  <a:solidFill>
+                    <a:schemeClr val="tx1"/>
+                  </a:solidFill>
+                  <a:latin typeface="Helvetica" panose="020B0604020202020204" pitchFamily="34" charset="0"/>
+                  <a:ea typeface="MS PGothic" panose="020B0600070205080204" pitchFamily="34" charset="-128"/>
+                </a:defRPr>
+              </a:lvl8pPr>
+              <a:lvl9pPr marL="3886200" indent="-228600" eaLnBrk="0" fontAlgn="base" hangingPunct="0">
+                <a:spcBef>
+                  <a:spcPct val="0"/>
+                </a:spcBef>
+                <a:spcAft>
+                  <a:spcPct val="0"/>
+                </a:spcAft>
+                <a:defRPr sz="2400">
+                  <a:solidFill>
+                    <a:schemeClr val="tx1"/>
+                  </a:solidFill>
+                  <a:latin typeface="Helvetica" panose="020B0604020202020204" pitchFamily="34" charset="0"/>
+                  <a:ea typeface="MS PGothic" panose="020B0600070205080204" pitchFamily="34" charset="-128"/>
+                </a:defRPr>
+              </a:lvl9pPr>
+            </a:lstStyle>
+            <a:p>
+              <a:pPr eaLnBrk="1" hangingPunct="1"/>
+              <a:endParaRPr lang="en-US" altLang="en-US" sz="1245" dirty="0">
+                <a:latin typeface="Trebuchet MS" panose="020B0603020202020204" pitchFamily="34" charset="0"/>
+              </a:endParaRPr>
+            </a:p>
+          </p:txBody>
+        </p:sp>
+        <p:sp>
+          <p:nvSpPr>
+            <p:cNvPr id="15361" name="Rectangle 200"/>
+            <p:cNvSpPr>
+              <a:spLocks noChangeArrowheads="1"/>
+            </p:cNvSpPr>
+            <p:nvPr/>
+          </p:nvSpPr>
+          <p:spPr bwMode="auto">
+            <a:xfrm>
+              <a:off x="4858205" y="3968278"/>
+              <a:ext cx="4805795" cy="738724"/>
+            </a:xfrm>
+            <a:prstGeom prst="rect">
+              <a:avLst/>
+            </a:prstGeom>
+            <a:solidFill>
+              <a:schemeClr val="bg1"/>
+            </a:solidFill>
+            <a:ln>
+              <a:noFill/>
+            </a:ln>
+          </p:spPr>
+          <p:txBody>
+            <a:bodyPr wrap="square" lIns="81274" tIns="40638" rIns="81274" bIns="40638">
+              <a:spAutoFit/>
+            </a:bodyPr>
+            <a:lstStyle>
+              <a:lvl1pPr defTabSz="5119688">
+                <a:defRPr sz="2400">
+                  <a:solidFill>
+                    <a:schemeClr val="tx1"/>
+                  </a:solidFill>
+                  <a:latin typeface="Helvetica" panose="020B0604020202020204" pitchFamily="34" charset="0"/>
+                  <a:ea typeface="MS PGothic" panose="020B0600070205080204" pitchFamily="34" charset="-128"/>
+                </a:defRPr>
+              </a:lvl1pPr>
+              <a:lvl2pPr marL="742950" indent="-285750" defTabSz="5119688">
+                <a:defRPr sz="2400">
+                  <a:solidFill>
+                    <a:schemeClr val="tx1"/>
+                  </a:solidFill>
+                  <a:latin typeface="Helvetica" panose="020B0604020202020204" pitchFamily="34" charset="0"/>
+                  <a:ea typeface="MS PGothic" panose="020B0600070205080204" pitchFamily="34" charset="-128"/>
+                </a:defRPr>
+              </a:lvl2pPr>
+              <a:lvl3pPr marL="1143000" indent="-228600" defTabSz="5119688">
+                <a:defRPr sz="2400">
+                  <a:solidFill>
+                    <a:schemeClr val="tx1"/>
+                  </a:solidFill>
+                  <a:latin typeface="Helvetica" panose="020B0604020202020204" pitchFamily="34" charset="0"/>
+                  <a:ea typeface="MS PGothic" panose="020B0600070205080204" pitchFamily="34" charset="-128"/>
+                </a:defRPr>
+              </a:lvl3pPr>
+              <a:lvl4pPr marL="1600200" indent="-228600" defTabSz="5119688">
+                <a:defRPr sz="2400">
+                  <a:solidFill>
+                    <a:schemeClr val="tx1"/>
+                  </a:solidFill>
+                  <a:latin typeface="Helvetica" panose="020B0604020202020204" pitchFamily="34" charset="0"/>
+                  <a:ea typeface="MS PGothic" panose="020B0600070205080204" pitchFamily="34" charset="-128"/>
+                </a:defRPr>
+              </a:lvl4pPr>
+              <a:lvl5pPr marL="2057400" indent="-228600" defTabSz="5119688">
+                <a:defRPr sz="2400">
+                  <a:solidFill>
+                    <a:schemeClr val="tx1"/>
+                  </a:solidFill>
+                  <a:latin typeface="Helvetica" panose="020B0604020202020204" pitchFamily="34" charset="0"/>
+                  <a:ea typeface="MS PGothic" panose="020B0600070205080204" pitchFamily="34" charset="-128"/>
+                </a:defRPr>
+              </a:lvl5pPr>
+              <a:lvl6pPr marL="2514600" indent="-228600" defTabSz="5119688" eaLnBrk="0" fontAlgn="base" hangingPunct="0">
+                <a:spcBef>
+                  <a:spcPct val="0"/>
+                </a:spcBef>
+                <a:spcAft>
+                  <a:spcPct val="0"/>
+                </a:spcAft>
+                <a:defRPr sz="2400">
+                  <a:solidFill>
+                    <a:schemeClr val="tx1"/>
+                  </a:solidFill>
+                  <a:latin typeface="Helvetica" panose="020B0604020202020204" pitchFamily="34" charset="0"/>
+                  <a:ea typeface="MS PGothic" panose="020B0600070205080204" pitchFamily="34" charset="-128"/>
+                </a:defRPr>
+              </a:lvl6pPr>
+              <a:lvl7pPr marL="2971800" indent="-228600" defTabSz="5119688" eaLnBrk="0" fontAlgn="base" hangingPunct="0">
+                <a:spcBef>
+                  <a:spcPct val="0"/>
+                </a:spcBef>
+                <a:spcAft>
+                  <a:spcPct val="0"/>
+                </a:spcAft>
+                <a:defRPr sz="2400">
+                  <a:solidFill>
+                    <a:schemeClr val="tx1"/>
+                  </a:solidFill>
+                  <a:latin typeface="Helvetica" panose="020B0604020202020204" pitchFamily="34" charset="0"/>
+                  <a:ea typeface="MS PGothic" panose="020B0600070205080204" pitchFamily="34" charset="-128"/>
+                </a:defRPr>
+              </a:lvl7pPr>
+              <a:lvl8pPr marL="3429000" indent="-228600" defTabSz="5119688" eaLnBrk="0" fontAlgn="base" hangingPunct="0">
+                <a:spcBef>
+                  <a:spcPct val="0"/>
+                </a:spcBef>
+                <a:spcAft>
+                  <a:spcPct val="0"/>
+                </a:spcAft>
+                <a:defRPr sz="2400">
+                  <a:solidFill>
+                    <a:schemeClr val="tx1"/>
+                  </a:solidFill>
+                  <a:latin typeface="Helvetica" panose="020B0604020202020204" pitchFamily="34" charset="0"/>
+                  <a:ea typeface="MS PGothic" panose="020B0600070205080204" pitchFamily="34" charset="-128"/>
+                </a:defRPr>
+              </a:lvl8pPr>
+              <a:lvl9pPr marL="3886200" indent="-228600" defTabSz="5119688" eaLnBrk="0" fontAlgn="base" hangingPunct="0">
+                <a:spcBef>
+                  <a:spcPct val="0"/>
+                </a:spcBef>
+                <a:spcAft>
+                  <a:spcPct val="0"/>
+                </a:spcAft>
+                <a:defRPr sz="2400">
+                  <a:solidFill>
+                    <a:schemeClr val="tx1"/>
+                  </a:solidFill>
+                  <a:latin typeface="Helvetica" panose="020B0604020202020204" pitchFamily="34" charset="0"/>
+                  <a:ea typeface="MS PGothic" panose="020B0600070205080204" pitchFamily="34" charset="-128"/>
+                </a:defRPr>
+              </a:lvl9pPr>
+            </a:lstStyle>
+            <a:p>
+              <a:pPr algn="ctr">
+                <a:spcBef>
+                  <a:spcPct val="50000"/>
+                </a:spcBef>
+              </a:pPr>
+              <a:r>
+                <a:rPr lang="en-US" altLang="en-US" sz="4267" b="1" dirty="0">
+                  <a:solidFill>
+                    <a:srgbClr val="C00000"/>
+                  </a:solidFill>
+                  <a:latin typeface="Trebuchet MS" panose="020B0603020202020204" pitchFamily="34" charset="0"/>
+                </a:rPr>
+                <a:t>1. Introduction</a:t>
+              </a:r>
+            </a:p>
+          </p:txBody>
+        </p:sp>
+        <p:sp>
+          <p:nvSpPr>
+            <p:cNvPr id="66" name="TextBox 65">
+              <a:extLst>
+                <a:ext uri="{FF2B5EF4-FFF2-40B4-BE49-F238E27FC236}">
+                  <a16:creationId xmlns:a16="http://schemas.microsoft.com/office/drawing/2014/main" id="{828EF0BF-392F-46C6-BF23-BF99B2CEA917}"/>
+                </a:ext>
+              </a:extLst>
+            </p:cNvPr>
+            <p:cNvSpPr txBox="1"/>
+            <p:nvPr/>
+          </p:nvSpPr>
+          <p:spPr>
+            <a:xfrm>
+              <a:off x="333765" y="9945451"/>
+              <a:ext cx="14639262" cy="2031325"/>
+            </a:xfrm>
+            <a:prstGeom prst="rect">
+              <a:avLst/>
+            </a:prstGeom>
+            <a:noFill/>
+          </p:spPr>
+          <p:txBody>
+            <a:bodyPr wrap="square" lIns="91440" tIns="45720" rIns="91440" bIns="45720" anchor="t">
+              <a:spAutoFit/>
+            </a:bodyPr>
+            <a:lstStyle/>
+            <a:p>
+              <a:pPr algn="ctr">
+                <a:spcBef>
+                  <a:spcPts val="360"/>
+                </a:spcBef>
+                <a:spcAft>
+                  <a:spcPts val="0"/>
+                </a:spcAft>
+              </a:pPr>
+              <a:r>
+                <a:rPr lang="en-US" sz="4200" b="1" dirty="0">
+                  <a:latin typeface="Helvetica"/>
+                  <a:ea typeface="MS PGothic"/>
+                  <a:cs typeface="Helvetica"/>
+                </a:rPr>
+                <a:t>We</a:t>
+              </a:r>
+              <a:r>
+                <a:rPr lang="en-US" sz="4200" b="1" i="0" u="none" strike="noStrike" dirty="0">
+                  <a:effectLst/>
+                  <a:latin typeface="Helvetica"/>
+                  <a:ea typeface="MS PGothic"/>
+                  <a:cs typeface="Helvetica"/>
+                </a:rPr>
+                <a:t> investigated </a:t>
+              </a:r>
+              <a:r>
+                <a:rPr lang="en-US" sz="4200" b="1" dirty="0">
+                  <a:latin typeface="Helvetica"/>
+                  <a:ea typeface="MS PGothic"/>
+                  <a:cs typeface="Helvetica"/>
+                </a:rPr>
+                <a:t>whether social trust decisions change as we age, and how those changes could be related to financial exploitation.</a:t>
+              </a:r>
+              <a:endParaRPr lang="en-US" sz="4200" b="1" dirty="0">
+                <a:cs typeface="Helvetica"/>
+              </a:endParaRPr>
+            </a:p>
+          </p:txBody>
+        </p:sp>
+      </p:grpSp>
+      <p:grpSp>
+        <p:nvGrpSpPr>
+          <p:cNvPr id="15503" name="Group 15502">
             <a:extLst>
               <a:ext uri="{FF2B5EF4-FFF2-40B4-BE49-F238E27FC236}">
-                <a16:creationId xmlns:a16="http://schemas.microsoft.com/office/drawing/2014/main" id="{D37958DE-5E24-D58C-4A7D-3AB8A936FE13}"/>
+                <a16:creationId xmlns:a16="http://schemas.microsoft.com/office/drawing/2014/main" id="{5FCA49CE-81E7-6F59-66DA-CE0C5F49E6D0}"/>
               </a:ext>
             </a:extLst>
           </p:cNvPr>
-          <p:cNvSpPr txBox="1"/>
+          <p:cNvGrpSpPr/>
           <p:nvPr/>
-        </p:nvSpPr>
-        <p:spPr>
+        </p:nvGrpSpPr>
+        <p:grpSpPr>
           <a:xfrm>
-            <a:off x="21821456" y="15519657"/>
-            <a:ext cx="1133197" cy="584775"/>
+            <a:off x="23573171" y="24842403"/>
+            <a:ext cx="6457795" cy="5596080"/>
+            <a:chOff x="23380200" y="25326205"/>
+            <a:chExt cx="6457795" cy="5596080"/>
           </a:xfrm>
-          <a:prstGeom prst="rect">
-            <a:avLst/>
-          </a:prstGeom>
-          <a:noFill/>
-        </p:spPr>
-        <p:txBody>
-          <a:bodyPr wrap="square">
-            <a:spAutoFit/>
-          </a:bodyPr>
-          <a:lstStyle/>
-          <a:p>
-            <a:r>
-              <a:rPr lang="en-US" sz="3200" b="1" dirty="0">
-                <a:latin typeface="Helvetica"/>
-                <a:ea typeface="MS PGothic"/>
-              </a:rPr>
-              <a:t>VS</a:t>
-            </a:r>
-            <a:endParaRPr lang="en-US" sz="3200" b="1" dirty="0">
-              <a:latin typeface="Helvetica"/>
-            </a:endParaRPr>
-          </a:p>
-        </p:txBody>
-      </p:sp>
-      <p:sp>
-        <p:nvSpPr>
-          <p:cNvPr id="39" name="TextBox 38">
-            <a:extLst>
-              <a:ext uri="{FF2B5EF4-FFF2-40B4-BE49-F238E27FC236}">
-                <a16:creationId xmlns:a16="http://schemas.microsoft.com/office/drawing/2014/main" id="{D99AB7A3-EC66-2E69-D984-AA56725B49BC}"/>
-              </a:ext>
-            </a:extLst>
-          </p:cNvPr>
-          <p:cNvSpPr txBox="1"/>
-          <p:nvPr/>
-        </p:nvSpPr>
-        <p:spPr>
-          <a:xfrm>
-            <a:off x="21094087" y="20438064"/>
-            <a:ext cx="2660825" cy="954107"/>
-          </a:xfrm>
-          <a:prstGeom prst="rect">
-            <a:avLst/>
-          </a:prstGeom>
-          <a:noFill/>
-        </p:spPr>
-        <p:txBody>
-          <a:bodyPr wrap="square" lIns="91440" tIns="45720" rIns="91440" bIns="45720" anchor="t">
-            <a:spAutoFit/>
-          </a:bodyPr>
-          <a:lstStyle/>
-          <a:p>
-            <a:pPr algn="ctr"/>
-            <a:r>
-              <a:rPr lang="en-US" sz="2800" dirty="0">
-                <a:latin typeface="Helvetica"/>
-                <a:ea typeface="MS PGothic"/>
-              </a:rPr>
-              <a:t>Y=9</a:t>
-            </a:r>
-          </a:p>
-          <a:p>
-            <a:pPr algn="ctr"/>
-            <a:endParaRPr lang="en-US" sz="2800" dirty="0">
-              <a:latin typeface="Helvetica"/>
-            </a:endParaRPr>
-          </a:p>
-        </p:txBody>
-      </p:sp>
-      <p:sp>
-        <p:nvSpPr>
-          <p:cNvPr id="50" name="TextBox 49">
-            <a:extLst>
-              <a:ext uri="{FF2B5EF4-FFF2-40B4-BE49-F238E27FC236}">
-                <a16:creationId xmlns:a16="http://schemas.microsoft.com/office/drawing/2014/main" id="{3E5D8420-A794-E6A2-1628-ED1203DBAD11}"/>
-              </a:ext>
-            </a:extLst>
-          </p:cNvPr>
-          <p:cNvSpPr txBox="1"/>
-          <p:nvPr/>
-        </p:nvSpPr>
-        <p:spPr>
-          <a:xfrm>
-            <a:off x="16257885" y="24711152"/>
-            <a:ext cx="1046440" cy="6220601"/>
-          </a:xfrm>
-          <a:prstGeom prst="rect">
-            <a:avLst/>
-          </a:prstGeom>
-          <a:noFill/>
-        </p:spPr>
-        <p:txBody>
-          <a:bodyPr vert="vert270" wrap="square">
-            <a:spAutoFit/>
-          </a:bodyPr>
-          <a:lstStyle/>
-          <a:p>
-            <a:pPr algn="ctr"/>
-            <a:r>
-              <a:rPr lang="en-US" sz="2800" dirty="0">
-                <a:latin typeface="Helvetica"/>
-                <a:ea typeface="MS PGothic"/>
-              </a:rPr>
-              <a:t>VS-</a:t>
-            </a:r>
-            <a:r>
-              <a:rPr lang="en-US" sz="2800" dirty="0" err="1">
-                <a:latin typeface="Helvetica"/>
-                <a:ea typeface="MS PGothic"/>
-              </a:rPr>
-              <a:t>pTPJ</a:t>
-            </a:r>
-            <a:r>
-              <a:rPr lang="en-US" sz="2800" dirty="0">
-                <a:latin typeface="Helvetica"/>
-                <a:ea typeface="MS PGothic"/>
-              </a:rPr>
-              <a:t> Connectivity (</a:t>
-            </a:r>
-            <a:r>
-              <a:rPr lang="el-GR" sz="2800" dirty="0">
-                <a:latin typeface="Helvetica"/>
-                <a:ea typeface="MS PGothic"/>
-              </a:rPr>
-              <a:t>β) </a:t>
-            </a:r>
-            <a:endParaRPr lang="en-US" sz="2800" dirty="0">
-              <a:latin typeface="Helvetica"/>
-              <a:ea typeface="MS PGothic"/>
-            </a:endParaRPr>
-          </a:p>
-          <a:p>
-            <a:pPr algn="ctr"/>
-            <a:r>
-              <a:rPr lang="en-US" sz="2800" dirty="0">
-                <a:latin typeface="Helvetica"/>
-                <a:ea typeface="MS PGothic"/>
-              </a:rPr>
-              <a:t>Parametric Effect of Fairness</a:t>
-            </a:r>
-            <a:endParaRPr lang="en-US" sz="2800" dirty="0">
-              <a:latin typeface="Helvetica"/>
-            </a:endParaRPr>
-          </a:p>
-        </p:txBody>
-      </p:sp>
-      <p:sp>
-        <p:nvSpPr>
-          <p:cNvPr id="80" name="TextBox 79">
-            <a:extLst>
-              <a:ext uri="{FF2B5EF4-FFF2-40B4-BE49-F238E27FC236}">
-                <a16:creationId xmlns:a16="http://schemas.microsoft.com/office/drawing/2014/main" id="{FD72DC14-1E2D-4557-BD08-7DD34FFE9083}"/>
-              </a:ext>
-            </a:extLst>
-          </p:cNvPr>
-          <p:cNvSpPr txBox="1"/>
-          <p:nvPr/>
-        </p:nvSpPr>
-        <p:spPr>
-          <a:xfrm>
-            <a:off x="26561482" y="29968178"/>
-            <a:ext cx="2664868" cy="954107"/>
-          </a:xfrm>
-          <a:prstGeom prst="rect">
-            <a:avLst/>
-          </a:prstGeom>
-          <a:noFill/>
-        </p:spPr>
-        <p:txBody>
-          <a:bodyPr wrap="square" lIns="91440" tIns="45720" rIns="91440" bIns="45720" anchor="t">
-            <a:spAutoFit/>
-          </a:bodyPr>
-          <a:lstStyle/>
-          <a:p>
-            <a:pPr algn="ctr"/>
-            <a:r>
-              <a:rPr lang="en-US" sz="2800" dirty="0">
-                <a:latin typeface="Helvetica"/>
-                <a:ea typeface="MS PGothic"/>
-              </a:rPr>
-              <a:t>X=5</a:t>
-            </a:r>
-          </a:p>
-          <a:p>
-            <a:pPr algn="ctr"/>
-            <a:endParaRPr lang="en-US" sz="2800" dirty="0">
-              <a:latin typeface="Helvetica"/>
-            </a:endParaRPr>
-          </a:p>
-        </p:txBody>
-      </p:sp>
+        </p:grpSpPr>
+        <p:pic>
+          <p:nvPicPr>
+            <p:cNvPr id="15424" name="Picture 15423" descr="A close-up of a brain&#10;&#10;Description automatically generated">
+              <a:extLst>
+                <a:ext uri="{FF2B5EF4-FFF2-40B4-BE49-F238E27FC236}">
+                  <a16:creationId xmlns:a16="http://schemas.microsoft.com/office/drawing/2014/main" id="{CC6419D2-DC29-B910-B6FA-A6DAC7775AD7}"/>
+                </a:ext>
+              </a:extLst>
+            </p:cNvPr>
+            <p:cNvPicPr>
+              <a:picLocks noChangeAspect="1"/>
+            </p:cNvPicPr>
+            <p:nvPr/>
+          </p:nvPicPr>
+          <p:blipFill>
+            <a:blip r:embed="rId3">
+              <a:extLst>
+                <a:ext uri="{28A0092B-C50C-407E-A947-70E740481C1C}">
+                  <a14:useLocalDpi xmlns:a14="http://schemas.microsoft.com/office/drawing/2010/main" val="0"/>
+                </a:ext>
+              </a:extLst>
+            </a:blip>
+            <a:stretch>
+              <a:fillRect/>
+            </a:stretch>
+          </p:blipFill>
+          <p:spPr>
+            <a:xfrm>
+              <a:off x="23380200" y="25326205"/>
+              <a:ext cx="6457795" cy="5596080"/>
+            </a:xfrm>
+            <a:prstGeom prst="rect">
+              <a:avLst/>
+            </a:prstGeom>
+          </p:spPr>
+        </p:pic>
+        <p:sp>
+          <p:nvSpPr>
+            <p:cNvPr id="80" name="TextBox 79">
+              <a:extLst>
+                <a:ext uri="{FF2B5EF4-FFF2-40B4-BE49-F238E27FC236}">
+                  <a16:creationId xmlns:a16="http://schemas.microsoft.com/office/drawing/2014/main" id="{FD72DC14-1E2D-4557-BD08-7DD34FFE9083}"/>
+                </a:ext>
+              </a:extLst>
+            </p:cNvPr>
+            <p:cNvSpPr txBox="1"/>
+            <p:nvPr/>
+          </p:nvSpPr>
+          <p:spPr>
+            <a:xfrm>
+              <a:off x="26561482" y="29968178"/>
+              <a:ext cx="2664868" cy="523220"/>
+            </a:xfrm>
+            <a:prstGeom prst="rect">
+              <a:avLst/>
+            </a:prstGeom>
+            <a:noFill/>
+          </p:spPr>
+          <p:txBody>
+            <a:bodyPr wrap="square" lIns="91440" tIns="45720" rIns="91440" bIns="45720" anchor="t">
+              <a:spAutoFit/>
+            </a:bodyPr>
+            <a:lstStyle/>
+            <a:p>
+              <a:pPr algn="ctr"/>
+              <a:r>
+                <a:rPr lang="en-US" sz="2800" dirty="0">
+                  <a:latin typeface="Helvetica"/>
+                  <a:ea typeface="MS PGothic"/>
+                </a:rPr>
+                <a:t>X=5</a:t>
+              </a:r>
+            </a:p>
+          </p:txBody>
+        </p:sp>
+      </p:grpSp>
       <p:grpSp>
         <p:nvGrpSpPr>
           <p:cNvPr id="15402" name="Group 15401">
@@ -7667,7 +7492,7 @@
         </p:nvGrpSpPr>
         <p:grpSpPr>
           <a:xfrm>
-            <a:off x="724818" y="29192296"/>
+            <a:off x="741991" y="26606768"/>
             <a:ext cx="6854956" cy="2277700"/>
             <a:chOff x="569101" y="26252269"/>
             <a:chExt cx="6854956" cy="2277700"/>
@@ -7811,21 +7636,7 @@
                   <a:effectLst/>
                   <a:latin typeface="Helvetica" pitchFamily="2" charset="0"/>
                 </a:rPr>
-                <a:t>Financial Exploitation Vulnerability Scale</a:t>
-              </a:r>
-              <a:r>
-                <a:rPr lang="en-US" sz="3200" dirty="0">
-                  <a:latin typeface="Calibri" panose="020F0502020204030204" pitchFamily="34" charset="0"/>
-                </a:rPr>
-                <a:t> </a:t>
-              </a:r>
-              <a:r>
-                <a:rPr lang="en-US" sz="3200" dirty="0">
-                  <a:latin typeface="Helvetica"/>
-                  <a:ea typeface="Times New Roman" panose="02020603050405020304" pitchFamily="18" charset="0"/>
-                  <a:cs typeface="Helvetica"/>
-                </a:rPr>
-                <a:t>(Lichtenberg et al., 2020a)</a:t>
+                <a:t>Older Adults Financial Exploitation and Vulnerability Scale.</a:t>
               </a:r>
               <a:endParaRPr lang="en-US" sz="3200" dirty="0">
                 <a:effectLst/>
@@ -7837,45 +7648,6 @@
           </p:txBody>
         </p:sp>
       </p:grpSp>
-      <p:sp>
-        <p:nvSpPr>
-          <p:cNvPr id="15434" name="TextBox 15433">
-            <a:extLst>
-              <a:ext uri="{FF2B5EF4-FFF2-40B4-BE49-F238E27FC236}">
-                <a16:creationId xmlns:a16="http://schemas.microsoft.com/office/drawing/2014/main" id="{F42DD616-45E9-33CA-3CBB-04AC7B550D62}"/>
-              </a:ext>
-            </a:extLst>
-          </p:cNvPr>
-          <p:cNvSpPr txBox="1"/>
-          <p:nvPr/>
-        </p:nvSpPr>
-        <p:spPr>
-          <a:xfrm>
-            <a:off x="37051877" y="6753009"/>
-            <a:ext cx="615553" cy="4368929"/>
-          </a:xfrm>
-          <a:prstGeom prst="rect">
-            <a:avLst/>
-          </a:prstGeom>
-          <a:noFill/>
-        </p:spPr>
-        <p:txBody>
-          <a:bodyPr vert="vert270" wrap="square">
-            <a:spAutoFit/>
-          </a:bodyPr>
-          <a:lstStyle/>
-          <a:p>
-            <a:pPr algn="ctr"/>
-            <a:r>
-              <a:rPr lang="en-US" sz="2800" dirty="0">
-                <a:latin typeface="Helvetica"/>
-                <a:ea typeface="MS PGothic"/>
-              </a:rPr>
-              <a:t>Precuneus Activation</a:t>
-            </a:r>
-          </a:p>
-        </p:txBody>
-      </p:sp>
       <p:grpSp>
         <p:nvGrpSpPr>
           <p:cNvPr id="15426" name="Group 15425">
@@ -7890,7 +7662,7 @@
         </p:nvGrpSpPr>
         <p:grpSpPr>
           <a:xfrm>
-            <a:off x="8164021" y="29079185"/>
+            <a:off x="8030984" y="26218030"/>
             <a:ext cx="6812529" cy="2732092"/>
             <a:chOff x="8015298" y="29141496"/>
             <a:chExt cx="6812529" cy="2732092"/>
@@ -8036,36 +7808,143 @@
           </p:txBody>
         </p:sp>
       </p:grpSp>
-      <p:pic>
-        <p:nvPicPr>
-          <p:cNvPr id="17" name="Picture 16">
+      <p:grpSp>
+        <p:nvGrpSpPr>
+          <p:cNvPr id="15508" name="Group 15507">
             <a:extLst>
               <a:ext uri="{FF2B5EF4-FFF2-40B4-BE49-F238E27FC236}">
-                <a16:creationId xmlns:a16="http://schemas.microsoft.com/office/drawing/2014/main" id="{428FE8E4-EF11-44C2-C242-0D3749E5303B}"/>
+                <a16:creationId xmlns:a16="http://schemas.microsoft.com/office/drawing/2014/main" id="{ACE08C75-5E52-BA85-3BBA-E0BBC55E5D24}"/>
               </a:ext>
             </a:extLst>
           </p:cNvPr>
-          <p:cNvPicPr>
-            <a:picLocks noChangeAspect="1"/>
-          </p:cNvPicPr>
+          <p:cNvGrpSpPr/>
           <p:nvPr/>
-        </p:nvPicPr>
-        <p:blipFill>
-          <a:blip r:embed="rId4"/>
-          <a:stretch>
-            <a:fillRect/>
-          </a:stretch>
-        </p:blipFill>
-        <p:spPr>
+        </p:nvGrpSpPr>
+        <p:grpSpPr>
           <a:xfrm>
-            <a:off x="15705595" y="15406813"/>
-            <a:ext cx="6082076" cy="6071098"/>
+            <a:off x="19981771" y="15435963"/>
+            <a:ext cx="8049317" cy="6071098"/>
+            <a:chOff x="15705595" y="15406813"/>
+            <a:chExt cx="8049317" cy="6071098"/>
           </a:xfrm>
-          <a:prstGeom prst="rect">
-            <a:avLst/>
-          </a:prstGeom>
-        </p:spPr>
-      </p:pic>
+        </p:grpSpPr>
+        <p:sp>
+          <p:nvSpPr>
+            <p:cNvPr id="35" name="TextBox 34">
+              <a:extLst>
+                <a:ext uri="{FF2B5EF4-FFF2-40B4-BE49-F238E27FC236}">
+                  <a16:creationId xmlns:a16="http://schemas.microsoft.com/office/drawing/2014/main" id="{D37958DE-5E24-D58C-4A7D-3AB8A936FE13}"/>
+                </a:ext>
+              </a:extLst>
+            </p:cNvPr>
+            <p:cNvSpPr txBox="1"/>
+            <p:nvPr/>
+          </p:nvSpPr>
+          <p:spPr>
+            <a:xfrm>
+              <a:off x="21821456" y="15519657"/>
+              <a:ext cx="1133197" cy="584775"/>
+            </a:xfrm>
+            <a:prstGeom prst="rect">
+              <a:avLst/>
+            </a:prstGeom>
+            <a:noFill/>
+          </p:spPr>
+          <p:txBody>
+            <a:bodyPr wrap="square">
+              <a:spAutoFit/>
+            </a:bodyPr>
+            <a:lstStyle/>
+            <a:p>
+              <a:r>
+                <a:rPr lang="en-US" sz="3200" b="1" dirty="0">
+                  <a:latin typeface="Helvetica"/>
+                  <a:ea typeface="MS PGothic"/>
+                </a:rPr>
+                <a:t>VS</a:t>
+              </a:r>
+              <a:endParaRPr lang="en-US" sz="3200" b="1" dirty="0">
+                <a:latin typeface="Helvetica"/>
+              </a:endParaRPr>
+            </a:p>
+          </p:txBody>
+        </p:sp>
+        <p:sp>
+          <p:nvSpPr>
+            <p:cNvPr id="39" name="TextBox 38">
+              <a:extLst>
+                <a:ext uri="{FF2B5EF4-FFF2-40B4-BE49-F238E27FC236}">
+                  <a16:creationId xmlns:a16="http://schemas.microsoft.com/office/drawing/2014/main" id="{D99AB7A3-EC66-2E69-D984-AA56725B49BC}"/>
+                </a:ext>
+              </a:extLst>
+            </p:cNvPr>
+            <p:cNvSpPr txBox="1"/>
+            <p:nvPr/>
+          </p:nvSpPr>
+          <p:spPr>
+            <a:xfrm>
+              <a:off x="21094087" y="20438064"/>
+              <a:ext cx="2660825" cy="954107"/>
+            </a:xfrm>
+            <a:prstGeom prst="rect">
+              <a:avLst/>
+            </a:prstGeom>
+            <a:noFill/>
+          </p:spPr>
+          <p:txBody>
+            <a:bodyPr wrap="square" lIns="91440" tIns="45720" rIns="91440" bIns="45720" anchor="t">
+              <a:spAutoFit/>
+            </a:bodyPr>
+            <a:lstStyle/>
+            <a:p>
+              <a:pPr algn="ctr"/>
+              <a:r>
+                <a:rPr lang="en-US" sz="2800" dirty="0">
+                  <a:latin typeface="Helvetica"/>
+                  <a:ea typeface="MS PGothic"/>
+                </a:rPr>
+                <a:t>Y=9</a:t>
+              </a:r>
+            </a:p>
+            <a:p>
+              <a:pPr algn="ctr"/>
+              <a:endParaRPr lang="en-US" sz="2800" dirty="0">
+                <a:latin typeface="Helvetica"/>
+              </a:endParaRPr>
+            </a:p>
+          </p:txBody>
+        </p:sp>
+        <p:pic>
+          <p:nvPicPr>
+            <p:cNvPr id="17" name="Picture 16">
+              <a:extLst>
+                <a:ext uri="{FF2B5EF4-FFF2-40B4-BE49-F238E27FC236}">
+                  <a16:creationId xmlns:a16="http://schemas.microsoft.com/office/drawing/2014/main" id="{428FE8E4-EF11-44C2-C242-0D3749E5303B}"/>
+                </a:ext>
+              </a:extLst>
+            </p:cNvPr>
+            <p:cNvPicPr>
+              <a:picLocks noChangeAspect="1"/>
+            </p:cNvPicPr>
+            <p:nvPr/>
+          </p:nvPicPr>
+          <p:blipFill>
+            <a:blip r:embed="rId4"/>
+            <a:stretch>
+              <a:fillRect/>
+            </a:stretch>
+          </p:blipFill>
+          <p:spPr>
+            <a:xfrm>
+              <a:off x="15705595" y="15406813"/>
+              <a:ext cx="6082076" cy="6071098"/>
+            </a:xfrm>
+            <a:prstGeom prst="rect">
+              <a:avLst/>
+            </a:prstGeom>
+          </p:spPr>
+        </p:pic>
+      </p:grpSp>
       <p:grpSp>
         <p:nvGrpSpPr>
           <p:cNvPr id="84" name="Group 83">
@@ -9564,136 +9443,12 @@
         </p:blipFill>
         <p:spPr>
           <a:xfrm>
-            <a:off x="31495021" y="5969483"/>
+            <a:off x="30965290" y="6030821"/>
             <a:ext cx="4495800" cy="5003800"/>
           </a:xfrm>
           <a:prstGeom prst="rect">
             <a:avLst/>
           </a:prstGeom>
-        </p:spPr>
-      </p:pic>
-      <p:pic>
-        <p:nvPicPr>
-          <p:cNvPr id="15418" name="Picture 15417" descr="A graph with red dots&#10;&#10;Description automatically generated">
-            <a:extLst>
-              <a:ext uri="{FF2B5EF4-FFF2-40B4-BE49-F238E27FC236}">
-                <a16:creationId xmlns:a16="http://schemas.microsoft.com/office/drawing/2014/main" id="{7AE9EF6F-6375-47A1-D536-FAF3F473B789}"/>
-              </a:ext>
-            </a:extLst>
-          </p:cNvPr>
-          <p:cNvPicPr>
-            <a:picLocks noChangeAspect="1"/>
-          </p:cNvPicPr>
-          <p:nvPr/>
-        </p:nvPicPr>
-        <p:blipFill rotWithShape="1">
-          <a:blip r:embed="rId6">
-            <a:extLst>
-              <a:ext uri="{28A0092B-C50C-407E-A947-70E740481C1C}">
-                <a14:useLocalDpi xmlns:a14="http://schemas.microsoft.com/office/drawing/2010/main" val="0"/>
-              </a:ext>
-            </a:extLst>
-          </a:blip>
-          <a:srcRect l="3131"/>
-          <a:stretch/>
-        </p:blipFill>
-        <p:spPr>
-          <a:xfrm>
-            <a:off x="37850303" y="6924524"/>
-            <a:ext cx="5314627" cy="4025900"/>
-          </a:xfrm>
-          <a:prstGeom prst="rect">
-            <a:avLst/>
-          </a:prstGeom>
-        </p:spPr>
-      </p:pic>
-      <p:sp>
-        <p:nvSpPr>
-          <p:cNvPr id="15420" name="TextBox 15419">
-            <a:extLst>
-              <a:ext uri="{FF2B5EF4-FFF2-40B4-BE49-F238E27FC236}">
-                <a16:creationId xmlns:a16="http://schemas.microsoft.com/office/drawing/2014/main" id="{069F462D-BFA5-DA6C-F8A4-6704B438B9AA}"/>
-              </a:ext>
-            </a:extLst>
-          </p:cNvPr>
-          <p:cNvSpPr txBox="1"/>
-          <p:nvPr/>
-        </p:nvSpPr>
-        <p:spPr>
-          <a:xfrm>
-            <a:off x="40013832" y="11300491"/>
-            <a:ext cx="867545" cy="553998"/>
-          </a:xfrm>
-          <a:prstGeom prst="rect">
-            <a:avLst/>
-          </a:prstGeom>
-          <a:noFill/>
-        </p:spPr>
-        <p:txBody>
-          <a:bodyPr wrap="none" rtlCol="0">
-            <a:spAutoFit/>
-          </a:bodyPr>
-          <a:lstStyle/>
-          <a:p>
-            <a:r>
-              <a:rPr lang="en-US" sz="3000" dirty="0"/>
-              <a:t>Age</a:t>
-            </a:r>
-          </a:p>
-        </p:txBody>
-      </p:sp>
-      <p:pic>
-        <p:nvPicPr>
-          <p:cNvPr id="15389" name="Picture 10060"/>
-          <p:cNvPicPr>
-            <a:picLocks noChangeAspect="1" noChangeArrowheads="1"/>
-          </p:cNvPicPr>
-          <p:nvPr/>
-        </p:nvPicPr>
-        <p:blipFill>
-          <a:blip>
-            <a:extLst>
-              <a:ext uri="{28A0092B-C50C-407E-A947-70E740481C1C}">
-                <a14:useLocalDpi xmlns:a14="http://schemas.microsoft.com/office/drawing/2010/main" val="0"/>
-              </a:ext>
-            </a:extLst>
-          </a:blip>
-          <a:srcRect/>
-          <a:stretch>
-            <a:fillRect/>
-          </a:stretch>
-        </p:blipFill>
-        <p:spPr bwMode="auto">
-          <a:xfrm>
-            <a:off x="494755" y="252918"/>
-            <a:ext cx="3037143" cy="3396805"/>
-          </a:xfrm>
-          <a:prstGeom prst="rect">
-            <a:avLst/>
-          </a:prstGeom>
-          <a:noFill/>
-          <a:ln>
-            <a:noFill/>
-          </a:ln>
-          <a:extLst>
-            <a:ext uri="{909E8E84-426E-40DD-AFC4-6F175D3DCCD1}">
-              <a14:hiddenFill xmlns:a14="http://schemas.microsoft.com/office/drawing/2010/main">
-                <a:solidFill>
-                  <a:srgbClr val="FFFFFF"/>
-                </a:solidFill>
-              </a14:hiddenFill>
-            </a:ext>
-            <a:ext uri="{91240B29-F687-4F45-9708-019B960494DF}">
-              <a14:hiddenLine xmlns:a14="http://schemas.microsoft.com/office/drawing/2010/main" w="9525">
-                <a:solidFill>
-                  <a:srgbClr val="000000"/>
-                </a:solidFill>
-                <a:miter lim="800000"/>
-                <a:headEnd/>
-                <a:tailEnd/>
-              </a14:hiddenLine>
-            </a:ext>
-          </a:extLst>
         </p:spPr>
       </p:pic>
       <p:sp>
@@ -9707,7 +9462,7 @@
         <p:spPr bwMode="auto">
           <a:xfrm>
             <a:off x="30676645" y="24531321"/>
-            <a:ext cx="12928282" cy="6994361"/>
+            <a:ext cx="12928282" cy="8153186"/>
           </a:xfrm>
           <a:prstGeom prst="rect">
             <a:avLst/>
@@ -10017,7 +9772,7 @@
         <p:spPr>
           <a:xfrm>
             <a:off x="30912367" y="25351882"/>
-            <a:ext cx="12914399" cy="1374735"/>
+            <a:ext cx="12914399" cy="2708434"/>
           </a:xfrm>
           <a:prstGeom prst="rect">
             <a:avLst/>
@@ -10045,7 +9800,47 @@
                 <a:ea typeface="MS PGothic"/>
                 <a:cs typeface="Helvetica"/>
               </a:rPr>
-              <a:t> .</a:t>
+              <a:t> …</a:t>
+            </a:r>
+          </a:p>
+          <a:p>
+            <a:pPr>
+              <a:spcBef>
+                <a:spcPts val="360"/>
+              </a:spcBef>
+              <a:spcAft>
+                <a:spcPts val="0"/>
+              </a:spcAft>
+              <a:buFont typeface="Arial" panose="020B0604020202020204" pitchFamily="34" charset="0"/>
+              <a:buChar char="•"/>
+            </a:pPr>
+            <a:r>
+              <a:rPr lang="en-US" sz="4000" dirty="0">
+                <a:latin typeface="Helvetica"/>
+                <a:ea typeface="MS PGothic"/>
+                <a:cs typeface="Helvetica"/>
+              </a:rPr>
+              <a:t>…</a:t>
+            </a:r>
+          </a:p>
+          <a:p>
+            <a:pPr>
+              <a:spcBef>
+                <a:spcPts val="360"/>
+              </a:spcBef>
+              <a:spcAft>
+                <a:spcPts val="0"/>
+              </a:spcAft>
+              <a:buFont typeface="Arial" panose="020B0604020202020204" pitchFamily="34" charset="0"/>
+              <a:buChar char="•"/>
+            </a:pPr>
+            <a:r>
+              <a:rPr lang="en-US" sz="4000" dirty="0">
+                <a:latin typeface="Helvetica"/>
+                <a:ea typeface="MS PGothic"/>
+                <a:cs typeface="Helvetica"/>
+              </a:rPr>
+              <a:t>…</a:t>
             </a:r>
           </a:p>
           <a:p>
@@ -10061,211 +9856,6 @@
               <a:latin typeface="Helvetica"/>
               <a:ea typeface="MS PGothic"/>
               <a:cs typeface="Helvetica"/>
-            </a:endParaRPr>
-          </a:p>
-        </p:txBody>
-      </p:sp>
-      <p:pic>
-        <p:nvPicPr>
-          <p:cNvPr id="82" name="Picture 2" descr="Image result for adelphi university">
-            <a:extLst>
-              <a:ext uri="{FF2B5EF4-FFF2-40B4-BE49-F238E27FC236}">
-                <a16:creationId xmlns:a16="http://schemas.microsoft.com/office/drawing/2014/main" id="{28154B0C-9082-4664-BE4E-292BAAFD349C}"/>
-              </a:ext>
-            </a:extLst>
-          </p:cNvPr>
-          <p:cNvPicPr>
-            <a:picLocks noChangeAspect="1" noChangeArrowheads="1"/>
-          </p:cNvPicPr>
-          <p:nvPr/>
-        </p:nvPicPr>
-        <p:blipFill>
-          <a:blip>
-            <a:extLst>
-              <a:ext uri="{28A0092B-C50C-407E-A947-70E740481C1C}">
-                <a14:useLocalDpi xmlns:a14="http://schemas.microsoft.com/office/drawing/2010/main" val="0"/>
-              </a:ext>
-            </a:extLst>
-          </a:blip>
-          <a:srcRect/>
-          <a:stretch>
-            <a:fillRect/>
-          </a:stretch>
-        </p:blipFill>
-        <p:spPr bwMode="auto">
-          <a:xfrm>
-            <a:off x="41331346" y="1633353"/>
-            <a:ext cx="1986759" cy="1986759"/>
-          </a:xfrm>
-          <a:prstGeom prst="rect">
-            <a:avLst/>
-          </a:prstGeom>
-          <a:noFill/>
-          <a:extLst>
-            <a:ext uri="{909E8E84-426E-40DD-AFC4-6F175D3DCCD1}">
-              <a14:hiddenFill xmlns:a14="http://schemas.microsoft.com/office/drawing/2010/main">
-                <a:solidFill>
-                  <a:srgbClr val="FFFFFF"/>
-                </a:solidFill>
-              </a14:hiddenFill>
-            </a:ext>
-          </a:extLst>
-        </p:spPr>
-      </p:pic>
-      <p:sp>
-        <p:nvSpPr>
-          <p:cNvPr id="127" name="Rectangle 54">
-            <a:extLst>
-              <a:ext uri="{FF2B5EF4-FFF2-40B4-BE49-F238E27FC236}">
-                <a16:creationId xmlns:a16="http://schemas.microsoft.com/office/drawing/2014/main" id="{CCC8C574-2C37-4FF8-83CC-02DE2FB92E37}"/>
-              </a:ext>
-            </a:extLst>
-          </p:cNvPr>
-          <p:cNvSpPr>
-            <a:spLocks noChangeArrowheads="1"/>
-          </p:cNvSpPr>
-          <p:nvPr/>
-        </p:nvSpPr>
-        <p:spPr bwMode="auto">
-          <a:xfrm>
-            <a:off x="30667546" y="31846944"/>
-            <a:ext cx="12923262" cy="813380"/>
-          </a:xfrm>
-          <a:prstGeom prst="rect">
-            <a:avLst/>
-          </a:prstGeom>
-          <a:noFill/>
-          <a:ln w="76200">
-            <a:solidFill>
-              <a:srgbClr val="C00000"/>
-            </a:solidFill>
-            <a:miter lim="800000"/>
-            <a:headEnd/>
-            <a:tailEnd/>
-          </a:ln>
-          <a:extLst>
-            <a:ext uri="{909E8E84-426E-40DD-AFC4-6F175D3DCCD1}">
-              <a14:hiddenFill xmlns:a14="http://schemas.microsoft.com/office/drawing/2010/main">
-                <a:solidFill>
-                  <a:srgbClr val="FFFFFF"/>
-                </a:solidFill>
-              </a14:hiddenFill>
-            </a:ext>
-          </a:extLst>
-        </p:spPr>
-        <p:txBody>
-          <a:bodyPr wrap="none" lIns="81274" tIns="40638" rIns="81274" bIns="40638" anchor="ctr"/>
-          <a:lstStyle>
-            <a:lvl1pPr>
-              <a:defRPr sz="2400">
-                <a:solidFill>
-                  <a:schemeClr val="tx1"/>
-                </a:solidFill>
-                <a:latin typeface="Helvetica" panose="020B0604020202020204" pitchFamily="34" charset="0"/>
-                <a:ea typeface="MS PGothic" panose="020B0600070205080204" pitchFamily="34" charset="-128"/>
-              </a:defRPr>
-            </a:lvl1pPr>
-            <a:lvl2pPr marL="742950" indent="-285750">
-              <a:defRPr sz="2400">
-                <a:solidFill>
-                  <a:schemeClr val="tx1"/>
-                </a:solidFill>
-                <a:latin typeface="Helvetica" panose="020B0604020202020204" pitchFamily="34" charset="0"/>
-                <a:ea typeface="MS PGothic" panose="020B0600070205080204" pitchFamily="34" charset="-128"/>
-              </a:defRPr>
-            </a:lvl2pPr>
-            <a:lvl3pPr marL="1143000" indent="-228600">
-              <a:defRPr sz="2400">
-                <a:solidFill>
-                  <a:schemeClr val="tx1"/>
-                </a:solidFill>
-                <a:latin typeface="Helvetica" panose="020B0604020202020204" pitchFamily="34" charset="0"/>
-                <a:ea typeface="MS PGothic" panose="020B0600070205080204" pitchFamily="34" charset="-128"/>
-              </a:defRPr>
-            </a:lvl3pPr>
-            <a:lvl4pPr marL="1600200" indent="-228600">
-              <a:defRPr sz="2400">
-                <a:solidFill>
-                  <a:schemeClr val="tx1"/>
-                </a:solidFill>
-                <a:latin typeface="Helvetica" panose="020B0604020202020204" pitchFamily="34" charset="0"/>
-                <a:ea typeface="MS PGothic" panose="020B0600070205080204" pitchFamily="34" charset="-128"/>
-              </a:defRPr>
-            </a:lvl4pPr>
-            <a:lvl5pPr marL="2057400" indent="-228600">
-              <a:defRPr sz="2400">
-                <a:solidFill>
-                  <a:schemeClr val="tx1"/>
-                </a:solidFill>
-                <a:latin typeface="Helvetica" panose="020B0604020202020204" pitchFamily="34" charset="0"/>
-                <a:ea typeface="MS PGothic" panose="020B0600070205080204" pitchFamily="34" charset="-128"/>
-              </a:defRPr>
-            </a:lvl5pPr>
-            <a:lvl6pPr marL="2514600" indent="-228600" eaLnBrk="0" fontAlgn="base" hangingPunct="0">
-              <a:spcBef>
-                <a:spcPct val="0"/>
-              </a:spcBef>
-              <a:spcAft>
-                <a:spcPct val="0"/>
-              </a:spcAft>
-              <a:defRPr sz="2400">
-                <a:solidFill>
-                  <a:schemeClr val="tx1"/>
-                </a:solidFill>
-                <a:latin typeface="Helvetica" panose="020B0604020202020204" pitchFamily="34" charset="0"/>
-                <a:ea typeface="MS PGothic" panose="020B0600070205080204" pitchFamily="34" charset="-128"/>
-              </a:defRPr>
-            </a:lvl6pPr>
-            <a:lvl7pPr marL="2971800" indent="-228600" eaLnBrk="0" fontAlgn="base" hangingPunct="0">
-              <a:spcBef>
-                <a:spcPct val="0"/>
-              </a:spcBef>
-              <a:spcAft>
-                <a:spcPct val="0"/>
-              </a:spcAft>
-              <a:defRPr sz="2400">
-                <a:solidFill>
-                  <a:schemeClr val="tx1"/>
-                </a:solidFill>
-                <a:latin typeface="Helvetica" panose="020B0604020202020204" pitchFamily="34" charset="0"/>
-                <a:ea typeface="MS PGothic" panose="020B0600070205080204" pitchFamily="34" charset="-128"/>
-              </a:defRPr>
-            </a:lvl7pPr>
-            <a:lvl8pPr marL="3429000" indent="-228600" eaLnBrk="0" fontAlgn="base" hangingPunct="0">
-              <a:spcBef>
-                <a:spcPct val="0"/>
-              </a:spcBef>
-              <a:spcAft>
-                <a:spcPct val="0"/>
-              </a:spcAft>
-              <a:defRPr sz="2400">
-                <a:solidFill>
-                  <a:schemeClr val="tx1"/>
-                </a:solidFill>
-                <a:latin typeface="Helvetica" panose="020B0604020202020204" pitchFamily="34" charset="0"/>
-                <a:ea typeface="MS PGothic" panose="020B0600070205080204" pitchFamily="34" charset="-128"/>
-              </a:defRPr>
-            </a:lvl8pPr>
-            <a:lvl9pPr marL="3886200" indent="-228600" eaLnBrk="0" fontAlgn="base" hangingPunct="0">
-              <a:spcBef>
-                <a:spcPct val="0"/>
-              </a:spcBef>
-              <a:spcAft>
-                <a:spcPct val="0"/>
-              </a:spcAft>
-              <a:defRPr sz="2400">
-                <a:solidFill>
-                  <a:schemeClr val="tx1"/>
-                </a:solidFill>
-                <a:latin typeface="Helvetica" panose="020B0604020202020204" pitchFamily="34" charset="0"/>
-                <a:ea typeface="MS PGothic" panose="020B0600070205080204" pitchFamily="34" charset="-128"/>
-              </a:defRPr>
-            </a:lvl9pPr>
-          </a:lstStyle>
-          <a:p>
-            <a:pPr eaLnBrk="1" hangingPunct="1"/>
-            <a:endParaRPr lang="en-US" altLang="en-US" sz="1245">
-              <a:latin typeface="Trebuchet MS" panose="020B0603020202020204" pitchFamily="34" charset="0"/>
             </a:endParaRPr>
           </a:p>
         </p:txBody>
@@ -10285,7 +9875,7 @@
         <p:spPr>
           <a:xfrm>
             <a:off x="30912367" y="29293095"/>
-            <a:ext cx="12442911" cy="2146231"/>
+            <a:ext cx="12442911" cy="738664"/>
           </a:xfrm>
           <a:prstGeom prst="rect">
             <a:avLst/>
@@ -10312,352 +9902,9 @@
                 <a:ea typeface="MS PGothic"/>
                 <a:cs typeface="Helvetica"/>
               </a:rPr>
-              <a:t>Our findings help to characterize the role of </a:t>
-            </a:r>
-            <a:r>
-              <a:rPr lang="en-US" sz="4200" b="1" dirty="0" err="1">
-                <a:latin typeface="Helvetica"/>
-                <a:ea typeface="MS PGothic"/>
-                <a:cs typeface="Helvetica"/>
-              </a:rPr>
-              <a:t>corticostriatal</a:t>
-            </a:r>
-            <a:r>
-              <a:rPr lang="en-US" sz="4200" b="1" dirty="0">
-                <a:latin typeface="Helvetica"/>
-                <a:ea typeface="MS PGothic"/>
-                <a:cs typeface="Helvetica"/>
-              </a:rPr>
-              <a:t> connectivity in </a:t>
-            </a:r>
-            <a:endParaRPr lang="en-US" sz="4200" dirty="0">
-              <a:cs typeface="Arial"/>
-            </a:endParaRPr>
-          </a:p>
-          <a:p>
-            <a:pPr algn="ctr">
-              <a:spcBef>
-                <a:spcPts val="360"/>
-              </a:spcBef>
-              <a:spcAft>
-                <a:spcPts val="0"/>
-              </a:spcAft>
-            </a:pPr>
-            <a:r>
-              <a:rPr lang="en-US" sz="4200" b="1" dirty="0">
-                <a:latin typeface="Helvetica"/>
-                <a:ea typeface="MS PGothic"/>
-                <a:cs typeface="Helvetica"/>
-              </a:rPr>
-              <a:t>social decision making.</a:t>
+              <a:t>Our findings help to ???</a:t>
             </a:r>
             <a:endParaRPr lang="en-US" sz="4200" dirty="0"/>
-          </a:p>
-        </p:txBody>
-      </p:sp>
-      <p:pic>
-        <p:nvPicPr>
-          <p:cNvPr id="14" name="Picture 13" descr="A logo of a university&#10;&#10;Description automatically generated">
-            <a:extLst>
-              <a:ext uri="{FF2B5EF4-FFF2-40B4-BE49-F238E27FC236}">
-                <a16:creationId xmlns:a16="http://schemas.microsoft.com/office/drawing/2014/main" id="{9F423328-9A02-A5CE-6F48-CAD10A8AF80B}"/>
-              </a:ext>
-            </a:extLst>
-          </p:cNvPr>
-          <p:cNvPicPr>
-            <a:picLocks noChangeAspect="1"/>
-          </p:cNvPicPr>
-          <p:nvPr/>
-        </p:nvPicPr>
-        <p:blipFill>
-          <a:blip>
-            <a:extLst>
-              <a:ext uri="{28A0092B-C50C-407E-A947-70E740481C1C}">
-                <a14:useLocalDpi xmlns:a14="http://schemas.microsoft.com/office/drawing/2010/main" val="0"/>
-              </a:ext>
-            </a:extLst>
-          </a:blip>
-          <a:stretch>
-            <a:fillRect/>
-          </a:stretch>
-        </p:blipFill>
-        <p:spPr>
-          <a:xfrm>
-            <a:off x="39148879" y="321878"/>
-            <a:ext cx="1819284" cy="2067919"/>
-          </a:xfrm>
-          <a:prstGeom prst="rect">
-            <a:avLst/>
-          </a:prstGeom>
-        </p:spPr>
-      </p:pic>
-      <p:sp>
-        <p:nvSpPr>
-          <p:cNvPr id="15415" name="TextBox 86">
-            <a:extLst>
-              <a:ext uri="{FF2B5EF4-FFF2-40B4-BE49-F238E27FC236}">
-                <a16:creationId xmlns:a16="http://schemas.microsoft.com/office/drawing/2014/main" id="{B1E3A897-53DA-649F-39B9-6F4056C35336}"/>
-              </a:ext>
-            </a:extLst>
-          </p:cNvPr>
-          <p:cNvSpPr txBox="1">
-            <a:spLocks noChangeArrowheads="1"/>
-          </p:cNvSpPr>
-          <p:nvPr/>
-        </p:nvSpPr>
-        <p:spPr bwMode="auto">
-          <a:xfrm>
-            <a:off x="31057107" y="14623506"/>
-            <a:ext cx="12355359" cy="749436"/>
-          </a:xfrm>
-          <a:prstGeom prst="rect">
-            <a:avLst/>
-          </a:prstGeom>
-          <a:solidFill>
-            <a:schemeClr val="bg1"/>
-          </a:solidFill>
-          <a:ln>
-            <a:noFill/>
-          </a:ln>
-        </p:spPr>
-        <p:txBody>
-          <a:bodyPr wrap="square" lIns="91440" tIns="45720" rIns="91440" bIns="45720" anchor="t">
-            <a:spAutoFit/>
-          </a:bodyPr>
-          <a:lstStyle>
-            <a:lvl1pPr>
-              <a:defRPr sz="2400">
-                <a:solidFill>
-                  <a:schemeClr val="tx1"/>
-                </a:solidFill>
-                <a:latin typeface="Helvetica" panose="020B0604020202020204" pitchFamily="34" charset="0"/>
-                <a:ea typeface="MS PGothic" panose="020B0600070205080204" pitchFamily="34" charset="-128"/>
-              </a:defRPr>
-            </a:lvl1pPr>
-            <a:lvl2pPr marL="742950" indent="-285750">
-              <a:defRPr sz="2400">
-                <a:solidFill>
-                  <a:schemeClr val="tx1"/>
-                </a:solidFill>
-                <a:latin typeface="Helvetica" panose="020B0604020202020204" pitchFamily="34" charset="0"/>
-                <a:ea typeface="MS PGothic" panose="020B0600070205080204" pitchFamily="34" charset="-128"/>
-              </a:defRPr>
-            </a:lvl2pPr>
-            <a:lvl3pPr marL="1143000" indent="-228600">
-              <a:defRPr sz="2400">
-                <a:solidFill>
-                  <a:schemeClr val="tx1"/>
-                </a:solidFill>
-                <a:latin typeface="Helvetica" panose="020B0604020202020204" pitchFamily="34" charset="0"/>
-                <a:ea typeface="MS PGothic" panose="020B0600070205080204" pitchFamily="34" charset="-128"/>
-              </a:defRPr>
-            </a:lvl3pPr>
-            <a:lvl4pPr marL="1600200" indent="-228600">
-              <a:defRPr sz="2400">
-                <a:solidFill>
-                  <a:schemeClr val="tx1"/>
-                </a:solidFill>
-                <a:latin typeface="Helvetica" panose="020B0604020202020204" pitchFamily="34" charset="0"/>
-                <a:ea typeface="MS PGothic" panose="020B0600070205080204" pitchFamily="34" charset="-128"/>
-              </a:defRPr>
-            </a:lvl4pPr>
-            <a:lvl5pPr marL="2057400" indent="-228600">
-              <a:defRPr sz="2400">
-                <a:solidFill>
-                  <a:schemeClr val="tx1"/>
-                </a:solidFill>
-                <a:latin typeface="Helvetica" panose="020B0604020202020204" pitchFamily="34" charset="0"/>
-                <a:ea typeface="MS PGothic" panose="020B0600070205080204" pitchFamily="34" charset="-128"/>
-              </a:defRPr>
-            </a:lvl5pPr>
-            <a:lvl6pPr marL="2514600" indent="-228600" eaLnBrk="0" fontAlgn="base" hangingPunct="0">
-              <a:spcBef>
-                <a:spcPct val="0"/>
-              </a:spcBef>
-              <a:spcAft>
-                <a:spcPct val="0"/>
-              </a:spcAft>
-              <a:defRPr sz="2400">
-                <a:solidFill>
-                  <a:schemeClr val="tx1"/>
-                </a:solidFill>
-                <a:latin typeface="Helvetica" panose="020B0604020202020204" pitchFamily="34" charset="0"/>
-                <a:ea typeface="MS PGothic" panose="020B0600070205080204" pitchFamily="34" charset="-128"/>
-              </a:defRPr>
-            </a:lvl6pPr>
-            <a:lvl7pPr marL="2971800" indent="-228600" eaLnBrk="0" fontAlgn="base" hangingPunct="0">
-              <a:spcBef>
-                <a:spcPct val="0"/>
-              </a:spcBef>
-              <a:spcAft>
-                <a:spcPct val="0"/>
-              </a:spcAft>
-              <a:defRPr sz="2400">
-                <a:solidFill>
-                  <a:schemeClr val="tx1"/>
-                </a:solidFill>
-                <a:latin typeface="Helvetica" panose="020B0604020202020204" pitchFamily="34" charset="0"/>
-                <a:ea typeface="MS PGothic" panose="020B0600070205080204" pitchFamily="34" charset="-128"/>
-              </a:defRPr>
-            </a:lvl7pPr>
-            <a:lvl8pPr marL="3429000" indent="-228600" eaLnBrk="0" fontAlgn="base" hangingPunct="0">
-              <a:spcBef>
-                <a:spcPct val="0"/>
-              </a:spcBef>
-              <a:spcAft>
-                <a:spcPct val="0"/>
-              </a:spcAft>
-              <a:defRPr sz="2400">
-                <a:solidFill>
-                  <a:schemeClr val="tx1"/>
-                </a:solidFill>
-                <a:latin typeface="Helvetica" panose="020B0604020202020204" pitchFamily="34" charset="0"/>
-                <a:ea typeface="MS PGothic" panose="020B0600070205080204" pitchFamily="34" charset="-128"/>
-              </a:defRPr>
-            </a:lvl8pPr>
-            <a:lvl9pPr marL="3886200" indent="-228600" eaLnBrk="0" fontAlgn="base" hangingPunct="0">
-              <a:spcBef>
-                <a:spcPct val="0"/>
-              </a:spcBef>
-              <a:spcAft>
-                <a:spcPct val="0"/>
-              </a:spcAft>
-              <a:defRPr sz="2400">
-                <a:solidFill>
-                  <a:schemeClr val="tx1"/>
-                </a:solidFill>
-                <a:latin typeface="Helvetica" panose="020B0604020202020204" pitchFamily="34" charset="0"/>
-                <a:ea typeface="MS PGothic" panose="020B0600070205080204" pitchFamily="34" charset="-128"/>
-              </a:defRPr>
-            </a:lvl9pPr>
-          </a:lstStyle>
-          <a:p>
-            <a:pPr algn="ctr"/>
-            <a:r>
-              <a:rPr lang="en-US" altLang="en-US" sz="4270" b="1" dirty="0">
-                <a:solidFill>
-                  <a:srgbClr val="C00000"/>
-                </a:solidFill>
-                <a:latin typeface="Trebuchet MS"/>
-                <a:ea typeface="MS PGothic"/>
-              </a:rPr>
-              <a:t>7. </a:t>
-            </a:r>
-            <a:endParaRPr lang="en-US" altLang="en-US" sz="4270" b="1" dirty="0">
-              <a:solidFill>
-                <a:srgbClr val="C00000"/>
-              </a:solidFill>
-              <a:latin typeface="Trebuchet MS" panose="020B0603020202020204" pitchFamily="34" charset="0"/>
-            </a:endParaRPr>
-          </a:p>
-        </p:txBody>
-      </p:sp>
-      <p:sp>
-        <p:nvSpPr>
-          <p:cNvPr id="15417" name="TextBox 15416">
-            <a:extLst>
-              <a:ext uri="{FF2B5EF4-FFF2-40B4-BE49-F238E27FC236}">
-                <a16:creationId xmlns:a16="http://schemas.microsoft.com/office/drawing/2014/main" id="{67AF8949-755A-E964-685E-DF2A5F35BDE8}"/>
-              </a:ext>
-            </a:extLst>
-          </p:cNvPr>
-          <p:cNvSpPr txBox="1"/>
-          <p:nvPr/>
-        </p:nvSpPr>
-        <p:spPr>
-          <a:xfrm>
-            <a:off x="30805042" y="31928090"/>
-            <a:ext cx="12648270" cy="646331"/>
-          </a:xfrm>
-          <a:prstGeom prst="rect">
-            <a:avLst/>
-          </a:prstGeom>
-          <a:noFill/>
-        </p:spPr>
-        <p:txBody>
-          <a:bodyPr wrap="square">
-            <a:spAutoFit/>
-          </a:bodyPr>
-          <a:lstStyle/>
-          <a:p>
-            <a:r>
-              <a:rPr lang="en-US" sz="1800" i="1"/>
-              <a:t>This study was supported by a grant from the National Institutes of Health (R03-DA046733 (DVS). Contact information for Daniel Sazhin: daniel.sazhin@temple.edu.</a:t>
-            </a:r>
-            <a:r>
-              <a:rPr lang="en-US" sz="1800" b="0" i="0">
-                <a:solidFill>
-                  <a:srgbClr val="000000"/>
-                </a:solidFill>
-                <a:effectLst/>
-                <a:latin typeface="Times New Roman" panose="02020603050405020304" pitchFamily="18" charset="0"/>
-              </a:rPr>
-              <a:t> </a:t>
-            </a:r>
-            <a:endParaRPr lang="en-US" sz="1800" i="1"/>
-          </a:p>
-        </p:txBody>
-      </p:sp>
-      <p:sp>
-        <p:nvSpPr>
-          <p:cNvPr id="15453" name="TextBox 15452">
-            <a:extLst>
-              <a:ext uri="{FF2B5EF4-FFF2-40B4-BE49-F238E27FC236}">
-                <a16:creationId xmlns:a16="http://schemas.microsoft.com/office/drawing/2014/main" id="{54253D06-A27E-D304-5A43-9CE683DD93BC}"/>
-              </a:ext>
-            </a:extLst>
-          </p:cNvPr>
-          <p:cNvSpPr txBox="1"/>
-          <p:nvPr/>
-        </p:nvSpPr>
-        <p:spPr>
-          <a:xfrm>
-            <a:off x="38658757" y="16524759"/>
-            <a:ext cx="1046440" cy="6220601"/>
-          </a:xfrm>
-          <a:prstGeom prst="rect">
-            <a:avLst/>
-          </a:prstGeom>
-          <a:noFill/>
-        </p:spPr>
-        <p:txBody>
-          <a:bodyPr vert="vert270" wrap="square">
-            <a:spAutoFit/>
-          </a:bodyPr>
-          <a:lstStyle/>
-          <a:p>
-            <a:pPr algn="ctr"/>
-            <a:r>
-              <a:rPr lang="en-US" sz="2800" dirty="0">
-                <a:latin typeface="Helvetica"/>
-                <a:ea typeface="MS PGothic"/>
-              </a:rPr>
-              <a:t>VS-ACC Connectivity (</a:t>
-            </a:r>
-            <a:r>
-              <a:rPr lang="el-GR" sz="2800" dirty="0">
-                <a:latin typeface="Helvetica"/>
-                <a:ea typeface="MS PGothic"/>
-              </a:rPr>
-              <a:t>β) </a:t>
-            </a:r>
-            <a:endParaRPr lang="en-US" sz="2800" dirty="0">
-              <a:latin typeface="Helvetica"/>
-              <a:ea typeface="MS PGothic"/>
-            </a:endParaRPr>
-          </a:p>
-          <a:p>
-            <a:pPr algn="ctr"/>
-            <a:r>
-              <a:rPr lang="en-US" sz="2800" dirty="0">
-                <a:latin typeface="Helvetica"/>
-                <a:ea typeface="MS PGothic"/>
-              </a:rPr>
-              <a:t>Parametric Effect of Fairness</a:t>
-            </a:r>
-            <a:endParaRPr lang="en-US" sz="2800" dirty="0">
-              <a:latin typeface="Helvetica"/>
-            </a:endParaRPr>
           </a:p>
         </p:txBody>
       </p:sp>
@@ -10675,7 +9922,7 @@
         </p:nvSpPr>
         <p:spPr>
           <a:xfrm>
-            <a:off x="40013181" y="21477911"/>
+            <a:off x="39306381" y="20682657"/>
             <a:ext cx="3784646" cy="523220"/>
           </a:xfrm>
           <a:prstGeom prst="rect">
@@ -11232,7 +10479,7 @@
         </p:nvGrpSpPr>
         <p:grpSpPr>
           <a:xfrm>
-            <a:off x="741529" y="15748222"/>
+            <a:off x="741529" y="15880810"/>
             <a:ext cx="14307083" cy="10069546"/>
             <a:chOff x="741529" y="15748222"/>
             <a:chExt cx="14307083" cy="10069546"/>
@@ -11273,7 +10520,7 @@
               <p:nvPr/>
             </p:nvPicPr>
             <p:blipFill>
-              <a:blip r:embed="rId7">
+              <a:blip r:embed="rId6">
                 <a:extLst>
                   <a:ext uri="{28A0092B-C50C-407E-A947-70E740481C1C}">
                     <a14:useLocalDpi xmlns:a14="http://schemas.microsoft.com/office/drawing/2010/main" val="0"/>
@@ -11309,9 +10556,9 @@
             <p:grpSpPr>
               <a:xfrm>
                 <a:off x="9652951" y="17772995"/>
-                <a:ext cx="4137746" cy="1716829"/>
+                <a:ext cx="3819225" cy="1953370"/>
                 <a:chOff x="9671298" y="17666601"/>
-                <a:chExt cx="4137746" cy="1716829"/>
+                <a:chExt cx="3819225" cy="1953370"/>
               </a:xfrm>
             </p:grpSpPr>
             <p:cxnSp>
@@ -11330,12 +10577,12 @@
               </p:nvCxnSpPr>
               <p:spPr bwMode="auto">
                 <a:xfrm rot="16200000" flipH="1">
-                  <a:off x="13057930" y="18587512"/>
-                  <a:ext cx="785486" cy="716743"/>
+                  <a:off x="12757996" y="18887445"/>
+                  <a:ext cx="1066831" cy="398222"/>
                 </a:xfrm>
                 <a:prstGeom prst="bentConnector3">
                   <a:avLst>
-                    <a:gd name="adj1" fmla="val -5434"/>
+                    <a:gd name="adj1" fmla="val -750"/>
                   </a:avLst>
                 </a:prstGeom>
                 <a:solidFill>
@@ -11514,14 +10761,14 @@
               <p:nvPr/>
             </p:nvPicPr>
             <p:blipFill>
-              <a:blip r:embed="rId8"/>
+              <a:blip r:embed="rId7"/>
               <a:stretch>
                 <a:fillRect/>
               </a:stretch>
             </p:blipFill>
             <p:spPr>
               <a:xfrm>
-                <a:off x="12485319" y="19632612"/>
+                <a:off x="12246737" y="19903601"/>
                 <a:ext cx="2419305" cy="2411132"/>
               </a:xfrm>
               <a:prstGeom prst="rect">
@@ -11649,6 +10896,1284 @@
           </p:spPr>
         </p:cxnSp>
       </p:grpSp>
+      <p:grpSp>
+        <p:nvGrpSpPr>
+          <p:cNvPr id="15504" name="Group 15503">
+            <a:extLst>
+              <a:ext uri="{FF2B5EF4-FFF2-40B4-BE49-F238E27FC236}">
+                <a16:creationId xmlns:a16="http://schemas.microsoft.com/office/drawing/2014/main" id="{644DC864-CB77-FB1C-CD61-505A98BC9282}"/>
+              </a:ext>
+            </a:extLst>
+          </p:cNvPr>
+          <p:cNvGrpSpPr/>
+          <p:nvPr/>
+        </p:nvGrpSpPr>
+        <p:grpSpPr>
+          <a:xfrm>
+            <a:off x="15451643" y="25162475"/>
+            <a:ext cx="7503010" cy="5479971"/>
+            <a:chOff x="15470883" y="25749188"/>
+            <a:chExt cx="7503010" cy="5479971"/>
+          </a:xfrm>
+        </p:grpSpPr>
+        <p:grpSp>
+          <p:nvGrpSpPr>
+            <p:cNvPr id="15501" name="Group 15500">
+              <a:extLst>
+                <a:ext uri="{FF2B5EF4-FFF2-40B4-BE49-F238E27FC236}">
+                  <a16:creationId xmlns:a16="http://schemas.microsoft.com/office/drawing/2014/main" id="{4EBE445F-826A-9AF7-418D-8850E8E507A0}"/>
+                </a:ext>
+              </a:extLst>
+            </p:cNvPr>
+            <p:cNvGrpSpPr/>
+            <p:nvPr/>
+          </p:nvGrpSpPr>
+          <p:grpSpPr>
+            <a:xfrm>
+              <a:off x="15470883" y="25749188"/>
+              <a:ext cx="7503010" cy="4871119"/>
+              <a:chOff x="15598291" y="25491649"/>
+              <a:chExt cx="7503010" cy="4871119"/>
+            </a:xfrm>
+          </p:grpSpPr>
+          <p:sp>
+            <p:nvSpPr>
+              <p:cNvPr id="15496" name="TextBox 15495">
+                <a:extLst>
+                  <a:ext uri="{FF2B5EF4-FFF2-40B4-BE49-F238E27FC236}">
+                    <a16:creationId xmlns:a16="http://schemas.microsoft.com/office/drawing/2014/main" id="{97F12319-F968-5A70-A870-C2BAE5E8D7F2}"/>
+                  </a:ext>
+                </a:extLst>
+              </p:cNvPr>
+              <p:cNvSpPr txBox="1"/>
+              <p:nvPr/>
+            </p:nvSpPr>
+            <p:spPr>
+              <a:xfrm rot="5400000">
+                <a:off x="16099096" y="29487428"/>
+                <a:ext cx="615553" cy="894559"/>
+              </a:xfrm>
+              <a:prstGeom prst="rect">
+                <a:avLst/>
+              </a:prstGeom>
+              <a:noFill/>
+            </p:spPr>
+            <p:txBody>
+              <a:bodyPr vert="vert270" wrap="square">
+                <a:spAutoFit/>
+              </a:bodyPr>
+              <a:lstStyle/>
+              <a:p>
+                <a:pPr algn="ctr"/>
+                <a:r>
+                  <a:rPr lang="en-US" sz="2000" dirty="0">
+                    <a:latin typeface="Helvetica"/>
+                    <a:ea typeface="MS PGothic"/>
+                  </a:rPr>
+                  <a:t>-500</a:t>
+                </a:r>
+              </a:p>
+            </p:txBody>
+          </p:sp>
+          <p:grpSp>
+            <p:nvGrpSpPr>
+              <p:cNvPr id="15500" name="Group 15499">
+                <a:extLst>
+                  <a:ext uri="{FF2B5EF4-FFF2-40B4-BE49-F238E27FC236}">
+                    <a16:creationId xmlns:a16="http://schemas.microsoft.com/office/drawing/2014/main" id="{5DE2D8B9-CD7D-1452-B68B-1344AA4FF437}"/>
+                  </a:ext>
+                </a:extLst>
+              </p:cNvPr>
+              <p:cNvGrpSpPr/>
+              <p:nvPr/>
+            </p:nvGrpSpPr>
+            <p:grpSpPr>
+              <a:xfrm>
+                <a:off x="15598291" y="25491649"/>
+                <a:ext cx="7503010" cy="4871119"/>
+                <a:chOff x="15598291" y="25491649"/>
+                <a:chExt cx="7503010" cy="4871119"/>
+              </a:xfrm>
+            </p:grpSpPr>
+            <p:sp>
+              <p:nvSpPr>
+                <p:cNvPr id="50" name="TextBox 49">
+                  <a:extLst>
+                    <a:ext uri="{FF2B5EF4-FFF2-40B4-BE49-F238E27FC236}">
+                      <a16:creationId xmlns:a16="http://schemas.microsoft.com/office/drawing/2014/main" id="{3E5D8420-A794-E6A2-1628-ED1203DBAD11}"/>
+                    </a:ext>
+                  </a:extLst>
+                </p:cNvPr>
+                <p:cNvSpPr txBox="1"/>
+                <p:nvPr/>
+              </p:nvSpPr>
+              <p:spPr>
+                <a:xfrm>
+                  <a:off x="15598291" y="25950356"/>
+                  <a:ext cx="615553" cy="3833392"/>
+                </a:xfrm>
+                <a:prstGeom prst="rect">
+                  <a:avLst/>
+                </a:prstGeom>
+                <a:noFill/>
+              </p:spPr>
+              <p:txBody>
+                <a:bodyPr vert="vert270" wrap="square">
+                  <a:spAutoFit/>
+                </a:bodyPr>
+                <a:lstStyle/>
+                <a:p>
+                  <a:pPr algn="ctr"/>
+                  <a:r>
+                    <a:rPr lang="en-US" sz="2800" dirty="0">
+                      <a:latin typeface="Helvetica"/>
+                    </a:rPr>
+                    <a:t>ACC Activation</a:t>
+                  </a:r>
+                </a:p>
+              </p:txBody>
+            </p:sp>
+            <p:grpSp>
+              <p:nvGrpSpPr>
+                <p:cNvPr id="15499" name="Group 15498">
+                  <a:extLst>
+                    <a:ext uri="{FF2B5EF4-FFF2-40B4-BE49-F238E27FC236}">
+                      <a16:creationId xmlns:a16="http://schemas.microsoft.com/office/drawing/2014/main" id="{96FE859C-4C1F-A2C4-A1D3-E89307BFE71C}"/>
+                    </a:ext>
+                  </a:extLst>
+                </p:cNvPr>
+                <p:cNvGrpSpPr/>
+                <p:nvPr/>
+              </p:nvGrpSpPr>
+              <p:grpSpPr>
+                <a:xfrm>
+                  <a:off x="16012786" y="25491649"/>
+                  <a:ext cx="7088515" cy="4871119"/>
+                  <a:chOff x="16012786" y="25491649"/>
+                  <a:chExt cx="7088515" cy="4871119"/>
+                </a:xfrm>
+              </p:grpSpPr>
+              <p:pic>
+                <p:nvPicPr>
+                  <p:cNvPr id="15495" name="Picture 15494" descr="A white background with red dots&#10;&#10;Description automatically generated">
+                    <a:extLst>
+                      <a:ext uri="{FF2B5EF4-FFF2-40B4-BE49-F238E27FC236}">
+                        <a16:creationId xmlns:a16="http://schemas.microsoft.com/office/drawing/2014/main" id="{F821A0E6-FCAD-A479-2153-337980B9048C}"/>
+                      </a:ext>
+                    </a:extLst>
+                  </p:cNvPr>
+                  <p:cNvPicPr>
+                    <a:picLocks noChangeAspect="1"/>
+                  </p:cNvPicPr>
+                  <p:nvPr/>
+                </p:nvPicPr>
+                <p:blipFill rotWithShape="1">
+                  <a:blip r:embed="rId8">
+                    <a:duotone>
+                      <a:prstClr val="black"/>
+                      <a:srgbClr val="D9C3A5">
+                        <a:tint val="50000"/>
+                        <a:satMod val="180000"/>
+                      </a:srgbClr>
+                    </a:duotone>
+                    <a:extLst>
+                      <a:ext uri="{BEBA8EAE-BF5A-486C-A8C5-ECC9F3942E4B}">
+                        <a14:imgProps xmlns:a14="http://schemas.microsoft.com/office/drawing/2010/main">
+                          <a14:imgLayer r:embed="rId9">
+                            <a14:imgEffect>
+                              <a14:colorTemperature colorTemp="9463"/>
+                            </a14:imgEffect>
+                            <a14:imgEffect>
+                              <a14:saturation sat="377000"/>
+                            </a14:imgEffect>
+                          </a14:imgLayer>
+                        </a14:imgProps>
+                      </a:ext>
+                      <a:ext uri="{28A0092B-C50C-407E-A947-70E740481C1C}">
+                        <a14:useLocalDpi xmlns:a14="http://schemas.microsoft.com/office/drawing/2010/main" val="0"/>
+                      </a:ext>
+                    </a:extLst>
+                  </a:blip>
+                  <a:srcRect l="6725" r="12309" b="12526"/>
+                  <a:stretch/>
+                </p:blipFill>
+                <p:spPr>
+                  <a:xfrm>
+                    <a:off x="16872273" y="25491649"/>
+                    <a:ext cx="6229028" cy="4871119"/>
+                  </a:xfrm>
+                  <a:prstGeom prst="rect">
+                    <a:avLst/>
+                  </a:prstGeom>
+                  <a:ln w="50800">
+                    <a:solidFill>
+                      <a:schemeClr val="tx1"/>
+                    </a:solidFill>
+                  </a:ln>
+                </p:spPr>
+              </p:pic>
+              <p:sp>
+                <p:nvSpPr>
+                  <p:cNvPr id="15497" name="TextBox 15496">
+                    <a:extLst>
+                      <a:ext uri="{FF2B5EF4-FFF2-40B4-BE49-F238E27FC236}">
+                        <a16:creationId xmlns:a16="http://schemas.microsoft.com/office/drawing/2014/main" id="{E8D4CB9D-FFD4-3493-3F54-665739D04D07}"/>
+                      </a:ext>
+                    </a:extLst>
+                  </p:cNvPr>
+                  <p:cNvSpPr txBox="1"/>
+                  <p:nvPr/>
+                </p:nvSpPr>
+                <p:spPr>
+                  <a:xfrm rot="5400000">
+                    <a:off x="16213844" y="25459501"/>
+                    <a:ext cx="492443" cy="894559"/>
+                  </a:xfrm>
+                  <a:prstGeom prst="rect">
+                    <a:avLst/>
+                  </a:prstGeom>
+                  <a:noFill/>
+                </p:spPr>
+                <p:txBody>
+                  <a:bodyPr vert="vert270" wrap="square">
+                    <a:spAutoFit/>
+                  </a:bodyPr>
+                  <a:lstStyle/>
+                  <a:p>
+                    <a:pPr algn="ctr"/>
+                    <a:r>
+                      <a:rPr lang="en-US" sz="2000" dirty="0">
+                        <a:latin typeface="Helvetica"/>
+                        <a:ea typeface="MS PGothic"/>
+                      </a:rPr>
+                      <a:t>500</a:t>
+                    </a:r>
+                  </a:p>
+                </p:txBody>
+              </p:sp>
+            </p:grpSp>
+          </p:grpSp>
+          <p:sp>
+            <p:nvSpPr>
+              <p:cNvPr id="15498" name="TextBox 15497">
+                <a:extLst>
+                  <a:ext uri="{FF2B5EF4-FFF2-40B4-BE49-F238E27FC236}">
+                    <a16:creationId xmlns:a16="http://schemas.microsoft.com/office/drawing/2014/main" id="{477A1EE9-E5E5-6824-266B-1635FC9DBB6C}"/>
+                  </a:ext>
+                </a:extLst>
+              </p:cNvPr>
+              <p:cNvSpPr txBox="1"/>
+              <p:nvPr/>
+            </p:nvSpPr>
+            <p:spPr>
+              <a:xfrm rot="5400000">
+                <a:off x="16213844" y="27480909"/>
+                <a:ext cx="492443" cy="894559"/>
+              </a:xfrm>
+              <a:prstGeom prst="rect">
+                <a:avLst/>
+              </a:prstGeom>
+              <a:noFill/>
+            </p:spPr>
+            <p:txBody>
+              <a:bodyPr vert="vert270" wrap="square">
+                <a:spAutoFit/>
+              </a:bodyPr>
+              <a:lstStyle/>
+              <a:p>
+                <a:pPr algn="ctr"/>
+                <a:r>
+                  <a:rPr lang="en-US" sz="2000" dirty="0">
+                    <a:latin typeface="Helvetica"/>
+                    <a:ea typeface="MS PGothic"/>
+                  </a:rPr>
+                  <a:t>0</a:t>
+                </a:r>
+              </a:p>
+            </p:txBody>
+          </p:sp>
+        </p:grpSp>
+        <p:sp>
+          <p:nvSpPr>
+            <p:cNvPr id="15502" name="TextBox 15501">
+              <a:extLst>
+                <a:ext uri="{FF2B5EF4-FFF2-40B4-BE49-F238E27FC236}">
+                  <a16:creationId xmlns:a16="http://schemas.microsoft.com/office/drawing/2014/main" id="{43DB2953-AA93-0F11-DA93-B42076077EAC}"/>
+                </a:ext>
+              </a:extLst>
+            </p:cNvPr>
+            <p:cNvSpPr txBox="1"/>
+            <p:nvPr/>
+          </p:nvSpPr>
+          <p:spPr>
+            <a:xfrm rot="5400000">
+              <a:off x="16647360" y="30664325"/>
+              <a:ext cx="492443" cy="637225"/>
+            </a:xfrm>
+            <a:prstGeom prst="rect">
+              <a:avLst/>
+            </a:prstGeom>
+            <a:noFill/>
+          </p:spPr>
+          <p:txBody>
+            <a:bodyPr vert="vert270" wrap="square">
+              <a:spAutoFit/>
+            </a:bodyPr>
+            <a:lstStyle/>
+            <a:p>
+              <a:pPr algn="ctr"/>
+              <a:r>
+                <a:rPr lang="en-US" sz="2000" dirty="0">
+                  <a:latin typeface="Helvetica"/>
+                  <a:ea typeface="MS PGothic"/>
+                </a:rPr>
+                <a:t>-1</a:t>
+              </a:r>
+            </a:p>
+          </p:txBody>
+        </p:sp>
+      </p:grpSp>
+      <p:sp>
+        <p:nvSpPr>
+          <p:cNvPr id="15505" name="TextBox 15504">
+            <a:extLst>
+              <a:ext uri="{FF2B5EF4-FFF2-40B4-BE49-F238E27FC236}">
+                <a16:creationId xmlns:a16="http://schemas.microsoft.com/office/drawing/2014/main" id="{C7E50644-C212-0221-C878-B75C7841A6FE}"/>
+              </a:ext>
+            </a:extLst>
+          </p:cNvPr>
+          <p:cNvSpPr txBox="1"/>
+          <p:nvPr/>
+        </p:nvSpPr>
+        <p:spPr>
+          <a:xfrm rot="5400000">
+            <a:off x="22478589" y="30047597"/>
+            <a:ext cx="492443" cy="637225"/>
+          </a:xfrm>
+          <a:prstGeom prst="rect">
+            <a:avLst/>
+          </a:prstGeom>
+          <a:noFill/>
+        </p:spPr>
+        <p:txBody>
+          <a:bodyPr vert="vert270" wrap="square">
+            <a:spAutoFit/>
+          </a:bodyPr>
+          <a:lstStyle/>
+          <a:p>
+            <a:pPr algn="ctr"/>
+            <a:r>
+              <a:rPr lang="en-US" sz="2000" dirty="0">
+                <a:latin typeface="Helvetica"/>
+                <a:ea typeface="MS PGothic"/>
+              </a:rPr>
+              <a:t>7</a:t>
+            </a:r>
+          </a:p>
+        </p:txBody>
+      </p:sp>
+      <p:sp>
+        <p:nvSpPr>
+          <p:cNvPr id="15506" name="TextBox 15505">
+            <a:extLst>
+              <a:ext uri="{FF2B5EF4-FFF2-40B4-BE49-F238E27FC236}">
+                <a16:creationId xmlns:a16="http://schemas.microsoft.com/office/drawing/2014/main" id="{F6AA0DD9-AF8A-14EF-EE60-8F981B287B70}"/>
+              </a:ext>
+            </a:extLst>
+          </p:cNvPr>
+          <p:cNvSpPr txBox="1"/>
+          <p:nvPr/>
+        </p:nvSpPr>
+        <p:spPr>
+          <a:xfrm rot="5400000">
+            <a:off x="19500266" y="30009878"/>
+            <a:ext cx="492443" cy="637225"/>
+          </a:xfrm>
+          <a:prstGeom prst="rect">
+            <a:avLst/>
+          </a:prstGeom>
+          <a:noFill/>
+        </p:spPr>
+        <p:txBody>
+          <a:bodyPr vert="vert270" wrap="square">
+            <a:spAutoFit/>
+          </a:bodyPr>
+          <a:lstStyle/>
+          <a:p>
+            <a:pPr algn="ctr"/>
+            <a:r>
+              <a:rPr lang="en-US" sz="2000" dirty="0">
+                <a:latin typeface="Helvetica"/>
+                <a:ea typeface="MS PGothic"/>
+              </a:rPr>
+              <a:t>3</a:t>
+            </a:r>
+          </a:p>
+        </p:txBody>
+      </p:sp>
+      <p:sp>
+        <p:nvSpPr>
+          <p:cNvPr id="15507" name="TextBox 15506">
+            <a:extLst>
+              <a:ext uri="{FF2B5EF4-FFF2-40B4-BE49-F238E27FC236}">
+                <a16:creationId xmlns:a16="http://schemas.microsoft.com/office/drawing/2014/main" id="{AAFE7BAC-F7B5-54A6-6F9D-FC90E9E56E1C}"/>
+              </a:ext>
+            </a:extLst>
+          </p:cNvPr>
+          <p:cNvSpPr txBox="1"/>
+          <p:nvPr/>
+        </p:nvSpPr>
+        <p:spPr>
+          <a:xfrm rot="5400000">
+            <a:off x="19405757" y="27269918"/>
+            <a:ext cx="538609" cy="7047408"/>
+          </a:xfrm>
+          <a:prstGeom prst="rect">
+            <a:avLst/>
+          </a:prstGeom>
+          <a:noFill/>
+        </p:spPr>
+        <p:txBody>
+          <a:bodyPr vert="vert270" wrap="square">
+            <a:spAutoFit/>
+          </a:bodyPr>
+          <a:lstStyle/>
+          <a:p>
+            <a:pPr algn="ctr"/>
+            <a:r>
+              <a:rPr lang="en-US" sz="2300" dirty="0">
+                <a:latin typeface="Helvetica"/>
+              </a:rPr>
+              <a:t>Closeness with Friends - Closeness with Strangers</a:t>
+            </a:r>
+          </a:p>
+        </p:txBody>
+      </p:sp>
+      <p:grpSp>
+        <p:nvGrpSpPr>
+          <p:cNvPr id="15521" name="Group 15520">
+            <a:extLst>
+              <a:ext uri="{FF2B5EF4-FFF2-40B4-BE49-F238E27FC236}">
+                <a16:creationId xmlns:a16="http://schemas.microsoft.com/office/drawing/2014/main" id="{64719E14-F38F-FF1C-E91E-4FC7882FC372}"/>
+              </a:ext>
+            </a:extLst>
+          </p:cNvPr>
+          <p:cNvGrpSpPr/>
+          <p:nvPr/>
+        </p:nvGrpSpPr>
+        <p:grpSpPr>
+          <a:xfrm>
+            <a:off x="35583421" y="5816737"/>
+            <a:ext cx="8287372" cy="6693875"/>
+            <a:chOff x="36784826" y="6632182"/>
+            <a:chExt cx="6753481" cy="5222307"/>
+          </a:xfrm>
+        </p:grpSpPr>
+        <p:sp>
+          <p:nvSpPr>
+            <p:cNvPr id="15434" name="TextBox 15433">
+              <a:extLst>
+                <a:ext uri="{FF2B5EF4-FFF2-40B4-BE49-F238E27FC236}">
+                  <a16:creationId xmlns:a16="http://schemas.microsoft.com/office/drawing/2014/main" id="{F42DD616-45E9-33CA-3CBB-04AC7B550D62}"/>
+                </a:ext>
+              </a:extLst>
+            </p:cNvPr>
+            <p:cNvSpPr txBox="1"/>
+            <p:nvPr/>
+          </p:nvSpPr>
+          <p:spPr>
+            <a:xfrm>
+              <a:off x="36784826" y="6632182"/>
+              <a:ext cx="615553" cy="4368929"/>
+            </a:xfrm>
+            <a:prstGeom prst="rect">
+              <a:avLst/>
+            </a:prstGeom>
+            <a:noFill/>
+          </p:spPr>
+          <p:txBody>
+            <a:bodyPr vert="vert270" wrap="square">
+              <a:spAutoFit/>
+            </a:bodyPr>
+            <a:lstStyle/>
+            <a:p>
+              <a:pPr algn="ctr"/>
+              <a:r>
+                <a:rPr lang="en-US" sz="2800" dirty="0">
+                  <a:latin typeface="Helvetica"/>
+                  <a:ea typeface="MS PGothic"/>
+                </a:rPr>
+                <a:t>Precuneus Activation</a:t>
+              </a:r>
+            </a:p>
+          </p:txBody>
+        </p:sp>
+        <p:pic>
+          <p:nvPicPr>
+            <p:cNvPr id="15418" name="Picture 15417" descr="A graph with red dots&#10;&#10;Description automatically generated">
+              <a:extLst>
+                <a:ext uri="{FF2B5EF4-FFF2-40B4-BE49-F238E27FC236}">
+                  <a16:creationId xmlns:a16="http://schemas.microsoft.com/office/drawing/2014/main" id="{7AE9EF6F-6375-47A1-D536-FAF3F473B789}"/>
+                </a:ext>
+              </a:extLst>
+            </p:cNvPr>
+            <p:cNvPicPr>
+              <a:picLocks noChangeAspect="1"/>
+            </p:cNvPicPr>
+            <p:nvPr/>
+          </p:nvPicPr>
+          <p:blipFill rotWithShape="1">
+            <a:blip r:embed="rId10">
+              <a:extLst>
+                <a:ext uri="{28A0092B-C50C-407E-A947-70E740481C1C}">
+                  <a14:useLocalDpi xmlns:a14="http://schemas.microsoft.com/office/drawing/2010/main" val="0"/>
+                </a:ext>
+              </a:extLst>
+            </a:blip>
+            <a:srcRect l="3131"/>
+            <a:stretch/>
+          </p:blipFill>
+          <p:spPr>
+            <a:xfrm>
+              <a:off x="37850303" y="6924524"/>
+              <a:ext cx="5314627" cy="4025900"/>
+            </a:xfrm>
+            <a:prstGeom prst="rect">
+              <a:avLst/>
+            </a:prstGeom>
+          </p:spPr>
+        </p:pic>
+        <p:sp>
+          <p:nvSpPr>
+            <p:cNvPr id="15420" name="TextBox 15419">
+              <a:extLst>
+                <a:ext uri="{FF2B5EF4-FFF2-40B4-BE49-F238E27FC236}">
+                  <a16:creationId xmlns:a16="http://schemas.microsoft.com/office/drawing/2014/main" id="{069F462D-BFA5-DA6C-F8A4-6704B438B9AA}"/>
+                </a:ext>
+              </a:extLst>
+            </p:cNvPr>
+            <p:cNvSpPr txBox="1"/>
+            <p:nvPr/>
+          </p:nvSpPr>
+          <p:spPr>
+            <a:xfrm>
+              <a:off x="40013832" y="11300491"/>
+              <a:ext cx="867545" cy="553998"/>
+            </a:xfrm>
+            <a:prstGeom prst="rect">
+              <a:avLst/>
+            </a:prstGeom>
+            <a:noFill/>
+          </p:spPr>
+          <p:txBody>
+            <a:bodyPr wrap="none" rtlCol="0">
+              <a:spAutoFit/>
+            </a:bodyPr>
+            <a:lstStyle/>
+            <a:p>
+              <a:r>
+                <a:rPr lang="en-US" sz="3000" dirty="0"/>
+                <a:t>Age</a:t>
+              </a:r>
+            </a:p>
+          </p:txBody>
+        </p:sp>
+        <p:sp>
+          <p:nvSpPr>
+            <p:cNvPr id="15511" name="TextBox 15510">
+              <a:extLst>
+                <a:ext uri="{FF2B5EF4-FFF2-40B4-BE49-F238E27FC236}">
+                  <a16:creationId xmlns:a16="http://schemas.microsoft.com/office/drawing/2014/main" id="{973A9BDE-83AF-A703-4ACB-BD3D64A294A1}"/>
+                </a:ext>
+              </a:extLst>
+            </p:cNvPr>
+            <p:cNvSpPr txBox="1"/>
+            <p:nvPr/>
+          </p:nvSpPr>
+          <p:spPr>
+            <a:xfrm rot="5400000">
+              <a:off x="37377370" y="10243912"/>
+              <a:ext cx="492443" cy="894559"/>
+            </a:xfrm>
+            <a:prstGeom prst="rect">
+              <a:avLst/>
+            </a:prstGeom>
+            <a:noFill/>
+          </p:spPr>
+          <p:txBody>
+            <a:bodyPr vert="vert270" wrap="square">
+              <a:spAutoFit/>
+            </a:bodyPr>
+            <a:lstStyle/>
+            <a:p>
+              <a:pPr algn="ctr"/>
+              <a:r>
+                <a:rPr lang="en-US" sz="2000" dirty="0">
+                  <a:latin typeface="Helvetica"/>
+                  <a:ea typeface="MS PGothic"/>
+                </a:rPr>
+                <a:t>-300</a:t>
+              </a:r>
+            </a:p>
+          </p:txBody>
+        </p:sp>
+        <p:sp>
+          <p:nvSpPr>
+            <p:cNvPr id="15512" name="TextBox 15511">
+              <a:extLst>
+                <a:ext uri="{FF2B5EF4-FFF2-40B4-BE49-F238E27FC236}">
+                  <a16:creationId xmlns:a16="http://schemas.microsoft.com/office/drawing/2014/main" id="{E1070220-5A52-F0E6-B2E9-302B7EA961E1}"/>
+                </a:ext>
+              </a:extLst>
+            </p:cNvPr>
+            <p:cNvSpPr txBox="1"/>
+            <p:nvPr/>
+          </p:nvSpPr>
+          <p:spPr>
+            <a:xfrm rot="5400000">
+              <a:off x="37332998" y="6887202"/>
+              <a:ext cx="492443" cy="894559"/>
+            </a:xfrm>
+            <a:prstGeom prst="rect">
+              <a:avLst/>
+            </a:prstGeom>
+            <a:noFill/>
+          </p:spPr>
+          <p:txBody>
+            <a:bodyPr vert="vert270" wrap="square">
+              <a:spAutoFit/>
+            </a:bodyPr>
+            <a:lstStyle/>
+            <a:p>
+              <a:pPr algn="ctr"/>
+              <a:r>
+                <a:rPr lang="en-US" sz="2000" dirty="0">
+                  <a:latin typeface="Helvetica"/>
+                  <a:ea typeface="MS PGothic"/>
+                </a:rPr>
+                <a:t>500</a:t>
+              </a:r>
+            </a:p>
+          </p:txBody>
+        </p:sp>
+        <p:sp>
+          <p:nvSpPr>
+            <p:cNvPr id="15513" name="TextBox 15512">
+              <a:extLst>
+                <a:ext uri="{FF2B5EF4-FFF2-40B4-BE49-F238E27FC236}">
+                  <a16:creationId xmlns:a16="http://schemas.microsoft.com/office/drawing/2014/main" id="{0F8B9AF0-2622-2A04-F1ED-ED9368F9B986}"/>
+                </a:ext>
+              </a:extLst>
+            </p:cNvPr>
+            <p:cNvSpPr txBox="1"/>
+            <p:nvPr/>
+          </p:nvSpPr>
+          <p:spPr>
+            <a:xfrm rot="5400000">
+              <a:off x="42844806" y="10544726"/>
+              <a:ext cx="492443" cy="894559"/>
+            </a:xfrm>
+            <a:prstGeom prst="rect">
+              <a:avLst/>
+            </a:prstGeom>
+            <a:noFill/>
+          </p:spPr>
+          <p:txBody>
+            <a:bodyPr vert="vert270" wrap="square">
+              <a:spAutoFit/>
+            </a:bodyPr>
+            <a:lstStyle/>
+            <a:p>
+              <a:pPr algn="ctr"/>
+              <a:r>
+                <a:rPr lang="en-US" sz="2000" dirty="0">
+                  <a:latin typeface="Helvetica"/>
+                  <a:ea typeface="MS PGothic"/>
+                </a:rPr>
+                <a:t>73</a:t>
+              </a:r>
+            </a:p>
+          </p:txBody>
+        </p:sp>
+        <p:sp>
+          <p:nvSpPr>
+            <p:cNvPr id="15514" name="TextBox 15513">
+              <a:extLst>
+                <a:ext uri="{FF2B5EF4-FFF2-40B4-BE49-F238E27FC236}">
+                  <a16:creationId xmlns:a16="http://schemas.microsoft.com/office/drawing/2014/main" id="{E60AC3A4-3AE3-AE30-E0E3-896B8FAA10B3}"/>
+                </a:ext>
+              </a:extLst>
+            </p:cNvPr>
+            <p:cNvSpPr txBox="1"/>
+            <p:nvPr/>
+          </p:nvSpPr>
+          <p:spPr>
+            <a:xfrm rot="5400000">
+              <a:off x="38011338" y="10662467"/>
+              <a:ext cx="492443" cy="894559"/>
+            </a:xfrm>
+            <a:prstGeom prst="rect">
+              <a:avLst/>
+            </a:prstGeom>
+            <a:noFill/>
+          </p:spPr>
+          <p:txBody>
+            <a:bodyPr vert="vert270" wrap="square">
+              <a:spAutoFit/>
+            </a:bodyPr>
+            <a:lstStyle/>
+            <a:p>
+              <a:pPr algn="ctr"/>
+              <a:r>
+                <a:rPr lang="en-US" sz="2000" dirty="0">
+                  <a:latin typeface="Helvetica"/>
+                  <a:ea typeface="MS PGothic"/>
+                </a:rPr>
+                <a:t>21</a:t>
+              </a:r>
+            </a:p>
+          </p:txBody>
+        </p:sp>
+      </p:grpSp>
+      <p:sp>
+        <p:nvSpPr>
+          <p:cNvPr id="15516" name="Rectangle 15515">
+            <a:extLst>
+              <a:ext uri="{FF2B5EF4-FFF2-40B4-BE49-F238E27FC236}">
+                <a16:creationId xmlns:a16="http://schemas.microsoft.com/office/drawing/2014/main" id="{69025403-F6D7-C8C4-F5D8-FF27361E4E91}"/>
+              </a:ext>
+            </a:extLst>
+          </p:cNvPr>
+          <p:cNvSpPr/>
+          <p:nvPr/>
+        </p:nvSpPr>
+        <p:spPr>
+          <a:xfrm>
+            <a:off x="31178642" y="12908794"/>
+            <a:ext cx="12293617" cy="584775"/>
+          </a:xfrm>
+          <a:prstGeom prst="rect">
+            <a:avLst/>
+          </a:prstGeom>
+        </p:spPr>
+        <p:txBody>
+          <a:bodyPr wrap="square" lIns="91440" tIns="45720" rIns="91440" bIns="45720" anchor="t">
+            <a:spAutoFit/>
+          </a:bodyPr>
+          <a:lstStyle/>
+          <a:p>
+            <a:pPr algn="ctr"/>
+            <a:r>
+              <a:rPr lang="en-US" sz="3200" dirty="0">
+                <a:ea typeface="MS PGothic"/>
+                <a:cs typeface="Helvetica"/>
+              </a:rPr>
+              <a:t>We found an association between the precuneus and age</a:t>
+            </a:r>
+          </a:p>
+        </p:txBody>
+      </p:sp>
+      <p:pic>
+        <p:nvPicPr>
+          <p:cNvPr id="15519" name="Picture 15518">
+            <a:extLst>
+              <a:ext uri="{FF2B5EF4-FFF2-40B4-BE49-F238E27FC236}">
+                <a16:creationId xmlns:a16="http://schemas.microsoft.com/office/drawing/2014/main" id="{ED5B2D2C-98F6-DF06-D6F2-C1EB7BDB5BB2}"/>
+              </a:ext>
+            </a:extLst>
+          </p:cNvPr>
+          <p:cNvPicPr>
+            <a:picLocks noChangeAspect="1"/>
+          </p:cNvPicPr>
+          <p:nvPr/>
+        </p:nvPicPr>
+        <p:blipFill>
+          <a:blip r:embed="rId11"/>
+          <a:stretch>
+            <a:fillRect/>
+          </a:stretch>
+        </p:blipFill>
+        <p:spPr>
+          <a:xfrm>
+            <a:off x="31354424" y="15485476"/>
+            <a:ext cx="7216034" cy="7151686"/>
+          </a:xfrm>
+          <a:prstGeom prst="rect">
+            <a:avLst/>
+          </a:prstGeom>
+        </p:spPr>
+      </p:pic>
+      <p:sp>
+        <p:nvSpPr>
+          <p:cNvPr id="15520" name="Rectangle 15519">
+            <a:extLst>
+              <a:ext uri="{FF2B5EF4-FFF2-40B4-BE49-F238E27FC236}">
+                <a16:creationId xmlns:a16="http://schemas.microsoft.com/office/drawing/2014/main" id="{93FF6634-0FA7-FD32-F6D8-ADBE0C3DF974}"/>
+              </a:ext>
+            </a:extLst>
+          </p:cNvPr>
+          <p:cNvSpPr/>
+          <p:nvPr/>
+        </p:nvSpPr>
+        <p:spPr>
+          <a:xfrm>
+            <a:off x="31809199" y="22940971"/>
+            <a:ext cx="12293617" cy="1077218"/>
+          </a:xfrm>
+          <a:prstGeom prst="rect">
+            <a:avLst/>
+          </a:prstGeom>
+        </p:spPr>
+        <p:txBody>
+          <a:bodyPr wrap="square" lIns="91440" tIns="45720" rIns="91440" bIns="45720" anchor="t">
+            <a:spAutoFit/>
+          </a:bodyPr>
+          <a:lstStyle/>
+          <a:p>
+            <a:pPr algn="ctr"/>
+            <a:r>
+              <a:rPr lang="en-US" sz="3200" dirty="0">
+                <a:ea typeface="MS PGothic"/>
+                <a:cs typeface="Helvetica"/>
+              </a:rPr>
+              <a:t>We found Orbitofrontal Cortex activation in the three way effects model between IOS, age and OAFEM</a:t>
+            </a:r>
+          </a:p>
+        </p:txBody>
+      </p:sp>
+      <p:grpSp>
+        <p:nvGrpSpPr>
+          <p:cNvPr id="15524" name="Group 15523">
+            <a:extLst>
+              <a:ext uri="{FF2B5EF4-FFF2-40B4-BE49-F238E27FC236}">
+                <a16:creationId xmlns:a16="http://schemas.microsoft.com/office/drawing/2014/main" id="{2BE13E56-51BA-1AA5-3DFC-DFF18406D067}"/>
+              </a:ext>
+            </a:extLst>
+          </p:cNvPr>
+          <p:cNvGrpSpPr/>
+          <p:nvPr/>
+        </p:nvGrpSpPr>
+        <p:grpSpPr>
+          <a:xfrm>
+            <a:off x="175846" y="31162938"/>
+            <a:ext cx="14710114" cy="1521569"/>
+            <a:chOff x="348551" y="31162937"/>
+            <a:chExt cx="14710114" cy="1521569"/>
+          </a:xfrm>
+        </p:grpSpPr>
+        <p:sp>
+          <p:nvSpPr>
+            <p:cNvPr id="15522" name="Rectangle 162">
+              <a:extLst>
+                <a:ext uri="{FF2B5EF4-FFF2-40B4-BE49-F238E27FC236}">
+                  <a16:creationId xmlns:a16="http://schemas.microsoft.com/office/drawing/2014/main" id="{FE02C6A3-84E3-8711-744E-4E036833F418}"/>
+                </a:ext>
+              </a:extLst>
+            </p:cNvPr>
+            <p:cNvSpPr>
+              <a:spLocks noChangeArrowheads="1"/>
+            </p:cNvSpPr>
+            <p:nvPr/>
+          </p:nvSpPr>
+          <p:spPr bwMode="auto">
+            <a:xfrm>
+              <a:off x="348551" y="31162937"/>
+              <a:ext cx="14710114" cy="1521569"/>
+            </a:xfrm>
+            <a:prstGeom prst="rect">
+              <a:avLst/>
+            </a:prstGeom>
+            <a:noFill/>
+            <a:ln w="76200">
+              <a:solidFill>
+                <a:srgbClr val="C00000"/>
+              </a:solidFill>
+              <a:miter lim="800000"/>
+              <a:headEnd/>
+              <a:tailEnd/>
+            </a:ln>
+            <a:extLst>
+              <a:ext uri="{909E8E84-426E-40DD-AFC4-6F175D3DCCD1}">
+                <a14:hiddenFill xmlns:a14="http://schemas.microsoft.com/office/drawing/2010/main">
+                  <a:solidFill>
+                    <a:srgbClr val="FFFFFF"/>
+                  </a:solidFill>
+                </a14:hiddenFill>
+              </a:ext>
+            </a:extLst>
+          </p:spPr>
+          <p:txBody>
+            <a:bodyPr wrap="none" lIns="81274" tIns="40638" rIns="81274" bIns="40638" anchor="ctr"/>
+            <a:lstStyle>
+              <a:lvl1pPr>
+                <a:defRPr sz="2400">
+                  <a:solidFill>
+                    <a:schemeClr val="tx1"/>
+                  </a:solidFill>
+                  <a:latin typeface="Helvetica" panose="020B0604020202020204" pitchFamily="34" charset="0"/>
+                  <a:ea typeface="MS PGothic" panose="020B0600070205080204" pitchFamily="34" charset="-128"/>
+                </a:defRPr>
+              </a:lvl1pPr>
+              <a:lvl2pPr marL="742950" indent="-285750">
+                <a:defRPr sz="2400">
+                  <a:solidFill>
+                    <a:schemeClr val="tx1"/>
+                  </a:solidFill>
+                  <a:latin typeface="Helvetica" panose="020B0604020202020204" pitchFamily="34" charset="0"/>
+                  <a:ea typeface="MS PGothic" panose="020B0600070205080204" pitchFamily="34" charset="-128"/>
+                </a:defRPr>
+              </a:lvl2pPr>
+              <a:lvl3pPr marL="1143000" indent="-228600">
+                <a:defRPr sz="2400">
+                  <a:solidFill>
+                    <a:schemeClr val="tx1"/>
+                  </a:solidFill>
+                  <a:latin typeface="Helvetica" panose="020B0604020202020204" pitchFamily="34" charset="0"/>
+                  <a:ea typeface="MS PGothic" panose="020B0600070205080204" pitchFamily="34" charset="-128"/>
+                </a:defRPr>
+              </a:lvl3pPr>
+              <a:lvl4pPr marL="1600200" indent="-228600">
+                <a:defRPr sz="2400">
+                  <a:solidFill>
+                    <a:schemeClr val="tx1"/>
+                  </a:solidFill>
+                  <a:latin typeface="Helvetica" panose="020B0604020202020204" pitchFamily="34" charset="0"/>
+                  <a:ea typeface="MS PGothic" panose="020B0600070205080204" pitchFamily="34" charset="-128"/>
+                </a:defRPr>
+              </a:lvl4pPr>
+              <a:lvl5pPr marL="2057400" indent="-228600">
+                <a:defRPr sz="2400">
+                  <a:solidFill>
+                    <a:schemeClr val="tx1"/>
+                  </a:solidFill>
+                  <a:latin typeface="Helvetica" panose="020B0604020202020204" pitchFamily="34" charset="0"/>
+                  <a:ea typeface="MS PGothic" panose="020B0600070205080204" pitchFamily="34" charset="-128"/>
+                </a:defRPr>
+              </a:lvl5pPr>
+              <a:lvl6pPr marL="2514600" indent="-228600" eaLnBrk="0" fontAlgn="base" hangingPunct="0">
+                <a:spcBef>
+                  <a:spcPct val="0"/>
+                </a:spcBef>
+                <a:spcAft>
+                  <a:spcPct val="0"/>
+                </a:spcAft>
+                <a:defRPr sz="2400">
+                  <a:solidFill>
+                    <a:schemeClr val="tx1"/>
+                  </a:solidFill>
+                  <a:latin typeface="Helvetica" panose="020B0604020202020204" pitchFamily="34" charset="0"/>
+                  <a:ea typeface="MS PGothic" panose="020B0600070205080204" pitchFamily="34" charset="-128"/>
+                </a:defRPr>
+              </a:lvl6pPr>
+              <a:lvl7pPr marL="2971800" indent="-228600" eaLnBrk="0" fontAlgn="base" hangingPunct="0">
+                <a:spcBef>
+                  <a:spcPct val="0"/>
+                </a:spcBef>
+                <a:spcAft>
+                  <a:spcPct val="0"/>
+                </a:spcAft>
+                <a:defRPr sz="2400">
+                  <a:solidFill>
+                    <a:schemeClr val="tx1"/>
+                  </a:solidFill>
+                  <a:latin typeface="Helvetica" panose="020B0604020202020204" pitchFamily="34" charset="0"/>
+                  <a:ea typeface="MS PGothic" panose="020B0600070205080204" pitchFamily="34" charset="-128"/>
+                </a:defRPr>
+              </a:lvl7pPr>
+              <a:lvl8pPr marL="3429000" indent="-228600" eaLnBrk="0" fontAlgn="base" hangingPunct="0">
+                <a:spcBef>
+                  <a:spcPct val="0"/>
+                </a:spcBef>
+                <a:spcAft>
+                  <a:spcPct val="0"/>
+                </a:spcAft>
+                <a:defRPr sz="2400">
+                  <a:solidFill>
+                    <a:schemeClr val="tx1"/>
+                  </a:solidFill>
+                  <a:latin typeface="Helvetica" panose="020B0604020202020204" pitchFamily="34" charset="0"/>
+                  <a:ea typeface="MS PGothic" panose="020B0600070205080204" pitchFamily="34" charset="-128"/>
+                </a:defRPr>
+              </a:lvl8pPr>
+              <a:lvl9pPr marL="3886200" indent="-228600" eaLnBrk="0" fontAlgn="base" hangingPunct="0">
+                <a:spcBef>
+                  <a:spcPct val="0"/>
+                </a:spcBef>
+                <a:spcAft>
+                  <a:spcPct val="0"/>
+                </a:spcAft>
+                <a:defRPr sz="2400">
+                  <a:solidFill>
+                    <a:schemeClr val="tx1"/>
+                  </a:solidFill>
+                  <a:latin typeface="Helvetica" panose="020B0604020202020204" pitchFamily="34" charset="0"/>
+                  <a:ea typeface="MS PGothic" panose="020B0600070205080204" pitchFamily="34" charset="-128"/>
+                </a:defRPr>
+              </a:lvl9pPr>
+            </a:lstStyle>
+            <a:p>
+              <a:pPr eaLnBrk="1" hangingPunct="1"/>
+              <a:endParaRPr lang="en-US" altLang="en-US" sz="1245">
+                <a:latin typeface="Trebuchet MS" panose="020B0603020202020204" pitchFamily="34" charset="0"/>
+              </a:endParaRPr>
+            </a:p>
+          </p:txBody>
+        </p:sp>
+        <p:sp>
+          <p:nvSpPr>
+            <p:cNvPr id="15523" name="TextBox 15522">
+              <a:extLst>
+                <a:ext uri="{FF2B5EF4-FFF2-40B4-BE49-F238E27FC236}">
+                  <a16:creationId xmlns:a16="http://schemas.microsoft.com/office/drawing/2014/main" id="{D58D20F7-A26B-E2DB-0B9B-4184ACFBEF53}"/>
+                </a:ext>
+              </a:extLst>
+            </p:cNvPr>
+            <p:cNvSpPr txBox="1"/>
+            <p:nvPr/>
+          </p:nvSpPr>
+          <p:spPr>
+            <a:xfrm>
+              <a:off x="515553" y="31367653"/>
+              <a:ext cx="14106747" cy="954107"/>
+            </a:xfrm>
+            <a:prstGeom prst="rect">
+              <a:avLst/>
+            </a:prstGeom>
+            <a:noFill/>
+          </p:spPr>
+          <p:txBody>
+            <a:bodyPr wrap="none" rtlCol="0">
+              <a:spAutoFit/>
+            </a:bodyPr>
+            <a:lstStyle/>
+            <a:p>
+              <a:r>
+                <a:rPr lang="en-US" sz="2800" b="0" i="0" dirty="0">
+                  <a:effectLst/>
+                  <a:highlight>
+                    <a:srgbClr val="D8E3C1"/>
+                  </a:highlight>
+                  <a:latin typeface="Slack-Lato"/>
+                </a:rPr>
+                <a:t>This study was supported by National Institutes of Health grant R01-AG067011 (David V. Smith).</a:t>
+              </a:r>
+              <a:br>
+                <a:rPr lang="en-US" sz="2800" dirty="0">
+                  <a:highlight>
+                    <a:srgbClr val="D8E3C1"/>
+                  </a:highlight>
+                </a:rPr>
+              </a:br>
+              <a:r>
+                <a:rPr lang="en-US" sz="2800" b="0" i="0" dirty="0">
+                  <a:effectLst/>
+                  <a:highlight>
+                    <a:srgbClr val="D8E3C1"/>
+                  </a:highlight>
+                  <a:latin typeface="Slack-Lato"/>
+                </a:rPr>
+                <a:t>Contact information: </a:t>
+              </a:r>
+              <a:r>
+                <a:rPr lang="en-US" sz="2800" b="0" i="0" dirty="0" err="1">
+                  <a:effectLst/>
+                  <a:highlight>
+                    <a:srgbClr val="D8E3C1"/>
+                  </a:highlight>
+                  <a:latin typeface="Slack-Lato"/>
+                </a:rPr>
+                <a:t>Avi.Dachs@temple.edu</a:t>
+              </a:r>
+              <a:r>
+                <a:rPr lang="en-US" sz="2800" b="0" i="0" dirty="0">
+                  <a:effectLst/>
+                  <a:highlight>
+                    <a:srgbClr val="D8E3C1"/>
+                  </a:highlight>
+                  <a:latin typeface="Slack-Lato"/>
+                </a:rPr>
+                <a:t>, </a:t>
+              </a:r>
+              <a:r>
+                <a:rPr lang="en-US" sz="2800" b="0" i="0" dirty="0" err="1">
+                  <a:effectLst/>
+                  <a:highlight>
+                    <a:srgbClr val="D8E3C1"/>
+                  </a:highlight>
+                  <a:latin typeface="Slack-Lato"/>
+                </a:rPr>
+                <a:t>Cooper.sharp@temple.edu</a:t>
+              </a:r>
+              <a:endParaRPr lang="en-US" sz="2800" dirty="0">
+                <a:highlight>
+                  <a:srgbClr val="D8E3C1"/>
+                </a:highlight>
+              </a:endParaRPr>
+            </a:p>
+          </p:txBody>
+        </p:sp>
+      </p:grpSp>
+      <p:sp>
+        <p:nvSpPr>
+          <p:cNvPr id="15415" name="TextBox 86">
+            <a:extLst>
+              <a:ext uri="{FF2B5EF4-FFF2-40B4-BE49-F238E27FC236}">
+                <a16:creationId xmlns:a16="http://schemas.microsoft.com/office/drawing/2014/main" id="{B1E3A897-53DA-649F-39B9-6F4056C35336}"/>
+              </a:ext>
+            </a:extLst>
+          </p:cNvPr>
+          <p:cNvSpPr txBox="1">
+            <a:spLocks noChangeArrowheads="1"/>
+          </p:cNvSpPr>
+          <p:nvPr/>
+        </p:nvSpPr>
+        <p:spPr bwMode="auto">
+          <a:xfrm>
+            <a:off x="33696613" y="14379109"/>
+            <a:ext cx="7345905" cy="749436"/>
+          </a:xfrm>
+          <a:prstGeom prst="rect">
+            <a:avLst/>
+          </a:prstGeom>
+          <a:solidFill>
+            <a:schemeClr val="bg1"/>
+          </a:solidFill>
+          <a:ln>
+            <a:noFill/>
+          </a:ln>
+        </p:spPr>
+        <p:txBody>
+          <a:bodyPr wrap="square" lIns="91440" tIns="45720" rIns="91440" bIns="45720" anchor="t">
+            <a:spAutoFit/>
+          </a:bodyPr>
+          <a:lstStyle>
+            <a:lvl1pPr>
+              <a:defRPr sz="2400">
+                <a:solidFill>
+                  <a:schemeClr val="tx1"/>
+                </a:solidFill>
+                <a:latin typeface="Helvetica" panose="020B0604020202020204" pitchFamily="34" charset="0"/>
+                <a:ea typeface="MS PGothic" panose="020B0600070205080204" pitchFamily="34" charset="-128"/>
+              </a:defRPr>
+            </a:lvl1pPr>
+            <a:lvl2pPr marL="742950" indent="-285750">
+              <a:defRPr sz="2400">
+                <a:solidFill>
+                  <a:schemeClr val="tx1"/>
+                </a:solidFill>
+                <a:latin typeface="Helvetica" panose="020B0604020202020204" pitchFamily="34" charset="0"/>
+                <a:ea typeface="MS PGothic" panose="020B0600070205080204" pitchFamily="34" charset="-128"/>
+              </a:defRPr>
+            </a:lvl2pPr>
+            <a:lvl3pPr marL="1143000" indent="-228600">
+              <a:defRPr sz="2400">
+                <a:solidFill>
+                  <a:schemeClr val="tx1"/>
+                </a:solidFill>
+                <a:latin typeface="Helvetica" panose="020B0604020202020204" pitchFamily="34" charset="0"/>
+                <a:ea typeface="MS PGothic" panose="020B0600070205080204" pitchFamily="34" charset="-128"/>
+              </a:defRPr>
+            </a:lvl3pPr>
+            <a:lvl4pPr marL="1600200" indent="-228600">
+              <a:defRPr sz="2400">
+                <a:solidFill>
+                  <a:schemeClr val="tx1"/>
+                </a:solidFill>
+                <a:latin typeface="Helvetica" panose="020B0604020202020204" pitchFamily="34" charset="0"/>
+                <a:ea typeface="MS PGothic" panose="020B0600070205080204" pitchFamily="34" charset="-128"/>
+              </a:defRPr>
+            </a:lvl4pPr>
+            <a:lvl5pPr marL="2057400" indent="-228600">
+              <a:defRPr sz="2400">
+                <a:solidFill>
+                  <a:schemeClr val="tx1"/>
+                </a:solidFill>
+                <a:latin typeface="Helvetica" panose="020B0604020202020204" pitchFamily="34" charset="0"/>
+                <a:ea typeface="MS PGothic" panose="020B0600070205080204" pitchFamily="34" charset="-128"/>
+              </a:defRPr>
+            </a:lvl5pPr>
+            <a:lvl6pPr marL="2514600" indent="-228600" eaLnBrk="0" fontAlgn="base" hangingPunct="0">
+              <a:spcBef>
+                <a:spcPct val="0"/>
+              </a:spcBef>
+              <a:spcAft>
+                <a:spcPct val="0"/>
+              </a:spcAft>
+              <a:defRPr sz="2400">
+                <a:solidFill>
+                  <a:schemeClr val="tx1"/>
+                </a:solidFill>
+                <a:latin typeface="Helvetica" panose="020B0604020202020204" pitchFamily="34" charset="0"/>
+                <a:ea typeface="MS PGothic" panose="020B0600070205080204" pitchFamily="34" charset="-128"/>
+              </a:defRPr>
+            </a:lvl6pPr>
+            <a:lvl7pPr marL="2971800" indent="-228600" eaLnBrk="0" fontAlgn="base" hangingPunct="0">
+              <a:spcBef>
+                <a:spcPct val="0"/>
+              </a:spcBef>
+              <a:spcAft>
+                <a:spcPct val="0"/>
+              </a:spcAft>
+              <a:defRPr sz="2400">
+                <a:solidFill>
+                  <a:schemeClr val="tx1"/>
+                </a:solidFill>
+                <a:latin typeface="Helvetica" panose="020B0604020202020204" pitchFamily="34" charset="0"/>
+                <a:ea typeface="MS PGothic" panose="020B0600070205080204" pitchFamily="34" charset="-128"/>
+              </a:defRPr>
+            </a:lvl7pPr>
+            <a:lvl8pPr marL="3429000" indent="-228600" eaLnBrk="0" fontAlgn="base" hangingPunct="0">
+              <a:spcBef>
+                <a:spcPct val="0"/>
+              </a:spcBef>
+              <a:spcAft>
+                <a:spcPct val="0"/>
+              </a:spcAft>
+              <a:defRPr sz="2400">
+                <a:solidFill>
+                  <a:schemeClr val="tx1"/>
+                </a:solidFill>
+                <a:latin typeface="Helvetica" panose="020B0604020202020204" pitchFamily="34" charset="0"/>
+                <a:ea typeface="MS PGothic" panose="020B0600070205080204" pitchFamily="34" charset="-128"/>
+              </a:defRPr>
+            </a:lvl8pPr>
+            <a:lvl9pPr marL="3886200" indent="-228600" eaLnBrk="0" fontAlgn="base" hangingPunct="0">
+              <a:spcBef>
+                <a:spcPct val="0"/>
+              </a:spcBef>
+              <a:spcAft>
+                <a:spcPct val="0"/>
+              </a:spcAft>
+              <a:defRPr sz="2400">
+                <a:solidFill>
+                  <a:schemeClr val="tx1"/>
+                </a:solidFill>
+                <a:latin typeface="Helvetica" panose="020B0604020202020204" pitchFamily="34" charset="0"/>
+                <a:ea typeface="MS PGothic" panose="020B0600070205080204" pitchFamily="34" charset="-128"/>
+              </a:defRPr>
+            </a:lvl9pPr>
+          </a:lstStyle>
+          <a:p>
+            <a:pPr algn="ctr"/>
+            <a:r>
+              <a:rPr lang="en-US" altLang="en-US" sz="4270" b="1" dirty="0">
+                <a:solidFill>
+                  <a:srgbClr val="C00000"/>
+                </a:solidFill>
+                <a:latin typeface="Trebuchet MS"/>
+                <a:ea typeface="MS PGothic"/>
+              </a:rPr>
+              <a:t>7. IOS x Age x OAFEM</a:t>
+            </a:r>
+            <a:endParaRPr lang="en-US" altLang="en-US" sz="4270" b="1" dirty="0">
+              <a:solidFill>
+                <a:srgbClr val="C00000"/>
+              </a:solidFill>
+              <a:latin typeface="Trebuchet MS" panose="020B0603020202020204" pitchFamily="34" charset="0"/>
+            </a:endParaRPr>
+          </a:p>
+        </p:txBody>
+      </p:sp>
     </p:spTree>
   </p:cSld>
   <p:clrMapOvr>

--- a/SFN/2023_SFN_trust.pptx
+++ b/SFN/2023_SFN_trust.pptx
@@ -5,14 +5,15 @@
     <p:sldMasterId id="2147483648" r:id="rId3"/>
   </p:sldMasterIdLst>
   <p:notesMasterIdLst>
-    <p:notesMasterId r:id="rId6"/>
+    <p:notesMasterId r:id="rId7"/>
   </p:notesMasterIdLst>
   <p:handoutMasterIdLst>
-    <p:handoutMasterId r:id="rId7"/>
+    <p:handoutMasterId r:id="rId8"/>
   </p:handoutMasterIdLst>
   <p:sldIdLst>
     <p:sldId id="256" r:id="rId4"/>
     <p:sldId id="257" r:id="rId5"/>
+    <p:sldId id="258" r:id="rId6"/>
   </p:sldIdLst>
   <p:sldSz cx="43891200" cy="32918400"/>
   <p:notesSz cx="7023100" cy="9309100"/>
@@ -160,6 +161,12 @@
 </p:presentation>
 </file>
 
+<file path=ppt/authors.xml><?xml version="1.0" encoding="utf-8"?>
+<p188:authorLst xmlns:a="http://schemas.openxmlformats.org/drawingml/2006/main" xmlns:r="http://schemas.openxmlformats.org/officeDocument/2006/relationships" xmlns:p188="http://schemas.microsoft.com/office/powerpoint/2018/8/main">
+  <p188:author id="{65E78F60-8CE4-956A-0128-6E549761F19F}" name="Avi Dachs" initials="AD" userId="S::tur74001@temple.edu::87fc8e61-7f3a-4332-ab39-1fb75fe6e669" providerId="AD"/>
+</p188:authorLst>
+</file>
+
 <file path=ppt/commentAuthors.xml><?xml version="1.0" encoding="utf-8"?>
 <p:cmAuthorLst xmlns:a="http://schemas.openxmlformats.org/drawingml/2006/main" xmlns:r="http://schemas.openxmlformats.org/officeDocument/2006/relationships" xmlns:p="http://schemas.openxmlformats.org/presentationml/2006/main">
   <p:cmAuthor id="1" name="Michelle Chiu" initials="MC" lastIdx="2" clrIdx="0">
@@ -191,6 +198,104 @@
     </p:extLst>
   </p:cmAuthor>
 </p:cmAuthorLst>
+</file>
+
+<file path=ppt/comments/modernComment_100_0.xml><?xml version="1.0" encoding="utf-8"?>
+<p188:cmLst xmlns:a="http://schemas.openxmlformats.org/drawingml/2006/main" xmlns:r="http://schemas.openxmlformats.org/officeDocument/2006/relationships" xmlns:p188="http://schemas.microsoft.com/office/powerpoint/2018/8/main">
+  <p188:cm id="{D23A0D81-1941-D64D-81BB-607D72B1FF1C}" authorId="{65E78F60-8CE4-956A-0128-6E549761F19F}" created="2023-11-07T16:53:51.619">
+    <pc:sldMkLst xmlns:pc="http://schemas.microsoft.com/office/powerpoint/2013/main/command">
+      <pc:docMk/>
+      <pc:sldMk cId="0" sldId="256"/>
+    </pc:sldMkLst>
+    <p188:txBody>
+      <a:bodyPr/>
+      <a:lstStyle/>
+      <a:p>
+        <a:r>
+          <a:rPr lang="en-US"/>
+          <a:t>Emphasize that there are more or less options
+</a:t>
+        </a:r>
+      </a:p>
+    </p188:txBody>
+  </p188:cm>
+  <p188:cm id="{CC48533B-D1C0-A74B-B37A-5080B4ACE579}" authorId="{65E78F60-8CE4-956A-0128-6E549761F19F}" created="2023-11-07T16:55:53.662">
+    <pc:sldMkLst xmlns:pc="http://schemas.microsoft.com/office/powerpoint/2013/main/command">
+      <pc:docMk/>
+      <pc:sldMk cId="0" sldId="256"/>
+    </pc:sldMkLst>
+    <p188:replyLst>
+      <p188:reply id="{F29969D8-7A32-6F4B-8D80-0E35760E3C7D}" authorId="{65E78F60-8CE4-956A-0128-6E549761F19F}" created="2023-11-07T16:56:29.916">
+        <p188:txBody>
+          <a:bodyPr/>
+          <a:lstStyle/>
+          <a:p>
+            <a:r>
+              <a:rPr lang="en-US"/>
+              <a:t>Add scatterplots comparing differences in IOS by age</a:t>
+            </a:r>
+          </a:p>
+        </p188:txBody>
+      </p188:reply>
+    </p188:replyLst>
+    <p188:txBody>
+      <a:bodyPr/>
+      <a:lstStyle/>
+      <a:p>
+        <a:r>
+          <a:rPr lang="en-US"/>
+          <a:t>Instead of IOS, show investment behavior (invest more with friends vs strangers)</a:t>
+        </a:r>
+      </a:p>
+    </p188:txBody>
+  </p188:cm>
+  <p188:cm id="{9DA9D318-9C32-3F46-9432-5D1054A1DBA1}" authorId="{65E78F60-8CE4-956A-0128-6E549761F19F}" created="2023-11-07T17:00:04.995">
+    <pc:sldMkLst xmlns:pc="http://schemas.microsoft.com/office/powerpoint/2013/main/command">
+      <pc:docMk/>
+      <pc:sldMk cId="0" sldId="256"/>
+    </pc:sldMkLst>
+    <p188:replyLst>
+      <p188:reply id="{40BA6E1B-B16C-524E-8F36-7E2B438230AB}" authorId="{65E78F60-8CE4-956A-0128-6E549761F19F}" created="2023-11-07T17:00:35.259">
+        <p188:txBody>
+          <a:bodyPr/>
+          <a:lstStyle/>
+          <a:p>
+            <a:r>
+              <a:rPr lang="en-US"/>
+              <a:t>And then throw IOS in as a covariate</a:t>
+            </a:r>
+          </a:p>
+        </p188:txBody>
+      </p188:reply>
+    </p188:replyLst>
+    <p188:txBody>
+      <a:bodyPr/>
+      <a:lstStyle/>
+      <a:p>
+        <a:r>
+          <a:rPr lang="en-US"/>
+          <a:t>5. run cope (friend-stranger, reciprocate-defect)</a:t>
+        </a:r>
+      </a:p>
+    </p188:txBody>
+  </p188:cm>
+  <p188:cm id="{0C35DB4D-15E2-494A-BA1D-ACBBE90A5B0E}" authorId="{65E78F60-8CE4-956A-0128-6E549761F19F}" created="2023-11-07T17:03:11.920">
+    <pc:sldMkLst xmlns:pc="http://schemas.microsoft.com/office/powerpoint/2013/main/command">
+      <pc:docMk/>
+      <pc:sldMk cId="0" sldId="256"/>
+    </pc:sldMkLst>
+    <p188:txBody>
+      <a:bodyPr/>
+      <a:lstStyle/>
+      <a:p>
+        <a:r>
+          <a:rPr lang="en-US"/>
+          <a:t>4. Scatterplot of VS act and age (f-s)</a:t>
+        </a:r>
+      </a:p>
+    </p188:txBody>
+  </p188:cm>
+</p188:cmLst>
 </file>
 
 <file path=ppt/handoutMasters/handoutMaster1.xml><?xml version="1.0" encoding="utf-8"?>
@@ -4390,80 +4495,242 @@
           <a:chExt cx="0" cy="0"/>
         </a:xfrm>
       </p:grpSpPr>
-      <p:sp>
-        <p:nvSpPr>
-          <p:cNvPr id="15399" name="Rectangle 15398">
+      <p:pic>
+        <p:nvPicPr>
+          <p:cNvPr id="15552" name="Picture 15551" descr="A screenshot of a computer&#10;&#10;Description automatically generated">
             <a:extLst>
               <a:ext uri="{FF2B5EF4-FFF2-40B4-BE49-F238E27FC236}">
-                <a16:creationId xmlns:a16="http://schemas.microsoft.com/office/drawing/2014/main" id="{3F2A222B-AB92-97CD-B2BC-B9C12D404AB1}"/>
+                <a16:creationId xmlns:a16="http://schemas.microsoft.com/office/drawing/2014/main" id="{C441D72E-B9F8-D29B-8CF8-93A49CC4C287}"/>
               </a:ext>
             </a:extLst>
           </p:cNvPr>
-          <p:cNvSpPr/>
+          <p:cNvPicPr>
+            <a:picLocks noChangeAspect="1"/>
+          </p:cNvPicPr>
           <p:nvPr/>
-        </p:nvSpPr>
-        <p:spPr bwMode="auto">
+        </p:nvPicPr>
+        <p:blipFill>
+          <a:blip r:embed="rId4">
+            <a:extLst>
+              <a:ext uri="{28A0092B-C50C-407E-A947-70E740481C1C}">
+                <a14:useLocalDpi xmlns:a14="http://schemas.microsoft.com/office/drawing/2010/main" val="0"/>
+              </a:ext>
+            </a:extLst>
+          </a:blip>
+          <a:stretch>
+            <a:fillRect/>
+          </a:stretch>
+        </p:blipFill>
+        <p:spPr>
           <a:xfrm>
-            <a:off x="15752261" y="4761579"/>
-            <a:ext cx="6497345" cy="7245387"/>
+            <a:off x="3646228" y="16012624"/>
+            <a:ext cx="11025931" cy="10428550"/>
           </a:xfrm>
           <a:prstGeom prst="rect">
             <a:avLst/>
           </a:prstGeom>
-          <a:solidFill>
-            <a:srgbClr val="FAF86D">
-              <a:alpha val="54118"/>
-            </a:srgbClr>
-          </a:solidFill>
-          <a:ln w="50800" cap="flat" cmpd="sng" algn="ctr">
-            <a:solidFill>
-              <a:schemeClr val="tx1"/>
-            </a:solidFill>
-            <a:prstDash val="solid"/>
-            <a:round/>
-            <a:headEnd type="none" w="med" len="med"/>
-            <a:tailEnd type="none" w="med" len="med"/>
-          </a:ln>
-          <a:effectLst/>
         </p:spPr>
-        <p:txBody>
-          <a:bodyPr vert="horz" wrap="square" lIns="91440" tIns="45720" rIns="91440" bIns="45720" numCol="1" rtlCol="0" anchor="t" anchorCtr="0" compatLnSpc="1">
-            <a:prstTxWarp prst="textNoShape">
+      </p:pic>
+      <p:grpSp>
+        <p:nvGrpSpPr>
+          <p:cNvPr id="15428" name="Group 15427">
+            <a:extLst>
+              <a:ext uri="{FF2B5EF4-FFF2-40B4-BE49-F238E27FC236}">
+                <a16:creationId xmlns:a16="http://schemas.microsoft.com/office/drawing/2014/main" id="{788D9291-9D84-C5C9-22EF-259D72BF4C72}"/>
+              </a:ext>
+            </a:extLst>
+          </p:cNvPr>
+          <p:cNvGrpSpPr/>
+          <p:nvPr/>
+        </p:nvGrpSpPr>
+        <p:grpSpPr>
+          <a:xfrm>
+            <a:off x="10524474" y="18375577"/>
+            <a:ext cx="4086526" cy="4565394"/>
+            <a:chOff x="10579516" y="17749339"/>
+            <a:chExt cx="4086526" cy="4565394"/>
+          </a:xfrm>
+        </p:grpSpPr>
+        <p:grpSp>
+          <p:nvGrpSpPr>
+            <p:cNvPr id="65" name="Group 64">
+              <a:extLst>
+                <a:ext uri="{FF2B5EF4-FFF2-40B4-BE49-F238E27FC236}">
+                  <a16:creationId xmlns:a16="http://schemas.microsoft.com/office/drawing/2014/main" id="{89055108-BE18-C2C5-0FF5-A55BEBB4A05F}"/>
+                </a:ext>
+              </a:extLst>
+            </p:cNvPr>
+            <p:cNvGrpSpPr/>
+            <p:nvPr/>
+          </p:nvGrpSpPr>
+          <p:grpSpPr>
+            <a:xfrm>
+              <a:off x="10579516" y="17749339"/>
+              <a:ext cx="3543576" cy="1716829"/>
+              <a:chOff x="10597863" y="17642945"/>
+              <a:chExt cx="3543576" cy="1716829"/>
+            </a:xfrm>
+          </p:grpSpPr>
+          <p:sp>
+            <p:nvSpPr>
+              <p:cNvPr id="15" name="Rectangle 14">
+                <a:extLst>
+                  <a:ext uri="{FF2B5EF4-FFF2-40B4-BE49-F238E27FC236}">
+                    <a16:creationId xmlns:a16="http://schemas.microsoft.com/office/drawing/2014/main" id="{353421B0-7681-A37B-CA3F-986E07C1DB77}"/>
+                  </a:ext>
+                </a:extLst>
+              </p:cNvPr>
+              <p:cNvSpPr/>
+              <p:nvPr/>
+            </p:nvSpPr>
+            <p:spPr bwMode="auto">
+              <a:xfrm>
+                <a:off x="10597863" y="17642945"/>
+                <a:ext cx="3543576" cy="1716829"/>
+              </a:xfrm>
+              <a:prstGeom prst="rect">
+                <a:avLst/>
+              </a:prstGeom>
+              <a:solidFill>
+                <a:srgbClr val="FAF86D">
+                  <a:alpha val="82294"/>
+                </a:srgbClr>
+              </a:solidFill>
+              <a:ln w="57150" cap="flat" cmpd="sng" algn="ctr">
+                <a:solidFill>
+                  <a:schemeClr val="tx1"/>
+                </a:solidFill>
+                <a:prstDash val="solid"/>
+                <a:round/>
+                <a:headEnd type="none" w="med" len="med"/>
+                <a:tailEnd type="none" w="med" len="med"/>
+              </a:ln>
+              <a:effectLst/>
+            </p:spPr>
+            <p:txBody>
+              <a:bodyPr vert="horz" wrap="square" lIns="91440" tIns="45720" rIns="91440" bIns="45720" numCol="1" rtlCol="0" anchor="t" anchorCtr="0" compatLnSpc="1">
+                <a:prstTxWarp prst="textNoShape">
+                  <a:avLst/>
+                </a:prstTxWarp>
+              </a:bodyPr>
+              <a:lstStyle/>
+              <a:p>
+                <a:pPr marL="0" marR="0" indent="0" algn="l" defTabSz="4389438" rtl="0" eaLnBrk="1" fontAlgn="base" latinLnBrk="0" hangingPunct="1">
+                  <a:lnSpc>
+                    <a:spcPct val="100000"/>
+                  </a:lnSpc>
+                  <a:spcBef>
+                    <a:spcPct val="0"/>
+                  </a:spcBef>
+                  <a:spcAft>
+                    <a:spcPct val="0"/>
+                  </a:spcAft>
+                  <a:buClrTx/>
+                  <a:buSzTx/>
+                  <a:buFontTx/>
+                  <a:buNone/>
+                  <a:tabLst/>
+                </a:pPr>
+                <a:endParaRPr kumimoji="0" lang="en-US" sz="1800" b="0" i="0" u="none" strike="noStrike" cap="none" normalizeH="0" baseline="0">
+                  <a:ln>
+                    <a:noFill/>
+                  </a:ln>
+                  <a:solidFill>
+                    <a:schemeClr val="tx1"/>
+                  </a:solidFill>
+                  <a:effectLst/>
+                  <a:latin typeface="Arial" charset="0"/>
+                  <a:cs typeface="Arial" charset="0"/>
+                </a:endParaRPr>
+              </a:p>
+            </p:txBody>
+          </p:sp>
+          <p:sp>
+            <p:nvSpPr>
+              <p:cNvPr id="8" name="TextBox 7">
+                <a:extLst>
+                  <a:ext uri="{FF2B5EF4-FFF2-40B4-BE49-F238E27FC236}">
+                    <a16:creationId xmlns:a16="http://schemas.microsoft.com/office/drawing/2014/main" id="{8F94C34F-C114-09E7-7592-2C68A047774A}"/>
+                  </a:ext>
+                </a:extLst>
+              </p:cNvPr>
+              <p:cNvSpPr txBox="1"/>
+              <p:nvPr/>
+            </p:nvSpPr>
+            <p:spPr>
+              <a:xfrm>
+                <a:off x="10597863" y="17717299"/>
+                <a:ext cx="3386365" cy="1569660"/>
+              </a:xfrm>
+              <a:prstGeom prst="rect">
+                <a:avLst/>
+              </a:prstGeom>
+              <a:noFill/>
+            </p:spPr>
+            <p:txBody>
+              <a:bodyPr rot="0" spcFirstLastPara="0" vertOverflow="overflow" horzOverflow="overflow" vert="horz" wrap="square" lIns="91440" tIns="45720" rIns="91440" bIns="45720" numCol="1" spcCol="0" rtlCol="0" fromWordArt="0" anchor="t" anchorCtr="0" forceAA="0" compatLnSpc="1">
+                <a:prstTxWarp prst="textNoShape">
+                  <a:avLst/>
+                </a:prstTxWarp>
+                <a:spAutoFit/>
+              </a:bodyPr>
+              <a:lstStyle/>
+              <a:p>
+                <a:pPr algn="ctr"/>
+                <a:r>
+                  <a:rPr lang="en-US" sz="3200" b="1" dirty="0">
+                    <a:latin typeface="Helvetica"/>
+                    <a:ea typeface="MS PGothic"/>
+                  </a:rPr>
+                  <a:t>Scan the QR code to see the</a:t>
+                </a:r>
+                <a:endParaRPr lang="en-US" sz="3200" b="1" dirty="0"/>
+              </a:p>
+              <a:p>
+                <a:pPr algn="ctr"/>
+                <a:r>
+                  <a:rPr lang="en-US" sz="3200" b="1" u="sng" dirty="0">
+                    <a:latin typeface="Helvetica"/>
+                    <a:ea typeface="MS PGothic"/>
+                  </a:rPr>
+                  <a:t>Pre-registration!</a:t>
+                </a:r>
+                <a:endParaRPr lang="en-US" sz="3200" b="1" u="sng" dirty="0"/>
+              </a:p>
+            </p:txBody>
+          </p:sp>
+        </p:grpSp>
+        <p:pic>
+          <p:nvPicPr>
+            <p:cNvPr id="7" name="Picture 6">
+              <a:extLst>
+                <a:ext uri="{FF2B5EF4-FFF2-40B4-BE49-F238E27FC236}">
+                  <a16:creationId xmlns:a16="http://schemas.microsoft.com/office/drawing/2014/main" id="{E5B61256-0745-91A9-AD49-FA138651C227}"/>
+                </a:ext>
+              </a:extLst>
+            </p:cNvPr>
+            <p:cNvPicPr>
+              <a:picLocks noChangeAspect="1"/>
+            </p:cNvPicPr>
+            <p:nvPr/>
+          </p:nvPicPr>
+          <p:blipFill>
+            <a:blip r:embed="rId5"/>
+            <a:stretch>
+              <a:fillRect/>
+            </a:stretch>
+          </p:blipFill>
+          <p:spPr>
+            <a:xfrm>
+              <a:off x="12246737" y="19903601"/>
+              <a:ext cx="2419305" cy="2411132"/>
+            </a:xfrm>
+            <a:prstGeom prst="rect">
               <a:avLst/>
-            </a:prstTxWarp>
-          </a:bodyPr>
-          <a:lstStyle/>
-          <a:p>
-            <a:pPr marL="0" marR="0" indent="0" algn="l" defTabSz="4389438" rtl="0" eaLnBrk="1" fontAlgn="base" latinLnBrk="0" hangingPunct="1">
-              <a:lnSpc>
-                <a:spcPct val="100000"/>
-              </a:lnSpc>
-              <a:spcBef>
-                <a:spcPct val="0"/>
-              </a:spcBef>
-              <a:spcAft>
-                <a:spcPct val="0"/>
-              </a:spcAft>
-              <a:buClrTx/>
-              <a:buSzTx/>
-              <a:buFontTx/>
-              <a:buNone/>
-              <a:tabLst/>
-            </a:pPr>
-            <a:endParaRPr kumimoji="0" lang="en-US" sz="1800" b="0" i="0" u="none" strike="noStrike" cap="none" normalizeH="0" baseline="0" dirty="0">
-              <a:ln>
-                <a:noFill/>
-              </a:ln>
-              <a:solidFill>
-                <a:schemeClr val="tx1"/>
-              </a:solidFill>
-              <a:effectLst/>
-              <a:latin typeface="Arial" charset="0"/>
-              <a:cs typeface="Arial" charset="0"/>
-            </a:endParaRPr>
-          </a:p>
-        </p:txBody>
-      </p:sp>
+            </a:prstGeom>
+          </p:spPr>
+        </p:pic>
+      </p:grpSp>
       <p:sp>
         <p:nvSpPr>
           <p:cNvPr id="15365" name="Rectangle 162"/>
@@ -5189,8 +5456,8 @@
         </p:nvSpPr>
         <p:spPr>
           <a:xfrm>
-            <a:off x="3880763" y="50008"/>
-            <a:ext cx="36129673" cy="1669368"/>
+            <a:off x="2079425" y="50008"/>
+            <a:ext cx="40393584" cy="1827103"/>
           </a:xfrm>
           <a:prstGeom prst="rect">
             <a:avLst/>
@@ -5215,7 +5482,7 @@
               </a:spcAft>
             </a:pPr>
             <a:r>
-              <a:rPr lang="en-US" sz="10000" b="1" i="0" dirty="0">
+              <a:rPr lang="en-US" sz="11000" b="1" i="0" dirty="0">
                 <a:solidFill>
                   <a:srgbClr val="000000"/>
                 </a:solidFill>
@@ -5224,7 +5491,7 @@
               </a:rPr>
               <a:t>Examining Age-Related Differences in Neural Responses to Trust</a:t>
             </a:r>
-            <a:endParaRPr lang="en-US" sz="10000" dirty="0">
+            <a:endParaRPr lang="en-US" sz="11000" dirty="0">
               <a:effectLst/>
               <a:latin typeface="Helvetica"/>
               <a:ea typeface="Calibri" panose="020F0502020204030204" pitchFamily="34" charset="0"/>
@@ -5531,351 +5798,6 @@
       </p:sp>
       <p:sp>
         <p:nvSpPr>
-          <p:cNvPr id="83" name="Rectangle 82">
-            <a:extLst>
-              <a:ext uri="{FF2B5EF4-FFF2-40B4-BE49-F238E27FC236}">
-                <a16:creationId xmlns:a16="http://schemas.microsoft.com/office/drawing/2014/main" id="{AF629186-1EF0-4042-8881-0E3C5287458A}"/>
-              </a:ext>
-            </a:extLst>
-          </p:cNvPr>
-          <p:cNvSpPr/>
-          <p:nvPr/>
-        </p:nvSpPr>
-        <p:spPr>
-          <a:xfrm>
-            <a:off x="15599737" y="31508836"/>
-            <a:ext cx="14699076" cy="1077218"/>
-          </a:xfrm>
-          <a:prstGeom prst="rect">
-            <a:avLst/>
-          </a:prstGeom>
-        </p:spPr>
-        <p:txBody>
-          <a:bodyPr wrap="square" lIns="91440" tIns="45720" rIns="91440" bIns="45720" anchor="t">
-            <a:spAutoFit/>
-          </a:bodyPr>
-          <a:lstStyle/>
-          <a:p>
-            <a:pPr algn="ctr"/>
-            <a:r>
-              <a:rPr lang="en-US" sz="3200" dirty="0">
-                <a:ea typeface="MS PGothic"/>
-                <a:cs typeface="Helvetica"/>
-              </a:rPr>
-              <a:t>We found that a higher difference in closeness ratings between friends and strangers was associated with an increase in ACC activation</a:t>
-            </a:r>
-          </a:p>
-        </p:txBody>
-      </p:sp>
-      <p:sp>
-        <p:nvSpPr>
-          <p:cNvPr id="59" name="Rectangle 162"/>
-          <p:cNvSpPr>
-            <a:spLocks noChangeArrowheads="1"/>
-          </p:cNvSpPr>
-          <p:nvPr/>
-        </p:nvSpPr>
-        <p:spPr bwMode="auto">
-          <a:xfrm>
-            <a:off x="15470884" y="23615697"/>
-            <a:ext cx="14827930" cy="9081591"/>
-          </a:xfrm>
-          <a:prstGeom prst="rect">
-            <a:avLst/>
-          </a:prstGeom>
-          <a:noFill/>
-          <a:ln w="76200">
-            <a:solidFill>
-              <a:srgbClr val="C00000"/>
-            </a:solidFill>
-            <a:miter lim="800000"/>
-            <a:headEnd/>
-            <a:tailEnd/>
-          </a:ln>
-          <a:extLst>
-            <a:ext uri="{909E8E84-426E-40DD-AFC4-6F175D3DCCD1}">
-              <a14:hiddenFill xmlns:a14="http://schemas.microsoft.com/office/drawing/2010/main">
-                <a:solidFill>
-                  <a:srgbClr val="FFFFFF"/>
-                </a:solidFill>
-              </a14:hiddenFill>
-            </a:ext>
-          </a:extLst>
-        </p:spPr>
-        <p:txBody>
-          <a:bodyPr wrap="none" lIns="81274" tIns="40638" rIns="81274" bIns="40638" anchor="ctr"/>
-          <a:lstStyle>
-            <a:lvl1pPr>
-              <a:defRPr sz="2400">
-                <a:solidFill>
-                  <a:schemeClr val="tx1"/>
-                </a:solidFill>
-                <a:latin typeface="Helvetica" panose="020B0604020202020204" pitchFamily="34" charset="0"/>
-                <a:ea typeface="MS PGothic" panose="020B0600070205080204" pitchFamily="34" charset="-128"/>
-              </a:defRPr>
-            </a:lvl1pPr>
-            <a:lvl2pPr marL="742950" indent="-285750">
-              <a:defRPr sz="2400">
-                <a:solidFill>
-                  <a:schemeClr val="tx1"/>
-                </a:solidFill>
-                <a:latin typeface="Helvetica" panose="020B0604020202020204" pitchFamily="34" charset="0"/>
-                <a:ea typeface="MS PGothic" panose="020B0600070205080204" pitchFamily="34" charset="-128"/>
-              </a:defRPr>
-            </a:lvl2pPr>
-            <a:lvl3pPr marL="1143000" indent="-228600">
-              <a:defRPr sz="2400">
-                <a:solidFill>
-                  <a:schemeClr val="tx1"/>
-                </a:solidFill>
-                <a:latin typeface="Helvetica" panose="020B0604020202020204" pitchFamily="34" charset="0"/>
-                <a:ea typeface="MS PGothic" panose="020B0600070205080204" pitchFamily="34" charset="-128"/>
-              </a:defRPr>
-            </a:lvl3pPr>
-            <a:lvl4pPr marL="1600200" indent="-228600">
-              <a:defRPr sz="2400">
-                <a:solidFill>
-                  <a:schemeClr val="tx1"/>
-                </a:solidFill>
-                <a:latin typeface="Helvetica" panose="020B0604020202020204" pitchFamily="34" charset="0"/>
-                <a:ea typeface="MS PGothic" panose="020B0600070205080204" pitchFamily="34" charset="-128"/>
-              </a:defRPr>
-            </a:lvl4pPr>
-            <a:lvl5pPr marL="2057400" indent="-228600">
-              <a:defRPr sz="2400">
-                <a:solidFill>
-                  <a:schemeClr val="tx1"/>
-                </a:solidFill>
-                <a:latin typeface="Helvetica" panose="020B0604020202020204" pitchFamily="34" charset="0"/>
-                <a:ea typeface="MS PGothic" panose="020B0600070205080204" pitchFamily="34" charset="-128"/>
-              </a:defRPr>
-            </a:lvl5pPr>
-            <a:lvl6pPr marL="2514600" indent="-228600" eaLnBrk="0" fontAlgn="base" hangingPunct="0">
-              <a:spcBef>
-                <a:spcPct val="0"/>
-              </a:spcBef>
-              <a:spcAft>
-                <a:spcPct val="0"/>
-              </a:spcAft>
-              <a:defRPr sz="2400">
-                <a:solidFill>
-                  <a:schemeClr val="tx1"/>
-                </a:solidFill>
-                <a:latin typeface="Helvetica" panose="020B0604020202020204" pitchFamily="34" charset="0"/>
-                <a:ea typeface="MS PGothic" panose="020B0600070205080204" pitchFamily="34" charset="-128"/>
-              </a:defRPr>
-            </a:lvl6pPr>
-            <a:lvl7pPr marL="2971800" indent="-228600" eaLnBrk="0" fontAlgn="base" hangingPunct="0">
-              <a:spcBef>
-                <a:spcPct val="0"/>
-              </a:spcBef>
-              <a:spcAft>
-                <a:spcPct val="0"/>
-              </a:spcAft>
-              <a:defRPr sz="2400">
-                <a:solidFill>
-                  <a:schemeClr val="tx1"/>
-                </a:solidFill>
-                <a:latin typeface="Helvetica" panose="020B0604020202020204" pitchFamily="34" charset="0"/>
-                <a:ea typeface="MS PGothic" panose="020B0600070205080204" pitchFamily="34" charset="-128"/>
-              </a:defRPr>
-            </a:lvl7pPr>
-            <a:lvl8pPr marL="3429000" indent="-228600" eaLnBrk="0" fontAlgn="base" hangingPunct="0">
-              <a:spcBef>
-                <a:spcPct val="0"/>
-              </a:spcBef>
-              <a:spcAft>
-                <a:spcPct val="0"/>
-              </a:spcAft>
-              <a:defRPr sz="2400">
-                <a:solidFill>
-                  <a:schemeClr val="tx1"/>
-                </a:solidFill>
-                <a:latin typeface="Helvetica" panose="020B0604020202020204" pitchFamily="34" charset="0"/>
-                <a:ea typeface="MS PGothic" panose="020B0600070205080204" pitchFamily="34" charset="-128"/>
-              </a:defRPr>
-            </a:lvl8pPr>
-            <a:lvl9pPr marL="3886200" indent="-228600" eaLnBrk="0" fontAlgn="base" hangingPunct="0">
-              <a:spcBef>
-                <a:spcPct val="0"/>
-              </a:spcBef>
-              <a:spcAft>
-                <a:spcPct val="0"/>
-              </a:spcAft>
-              <a:defRPr sz="2400">
-                <a:solidFill>
-                  <a:schemeClr val="tx1"/>
-                </a:solidFill>
-                <a:latin typeface="Helvetica" panose="020B0604020202020204" pitchFamily="34" charset="0"/>
-                <a:ea typeface="MS PGothic" panose="020B0600070205080204" pitchFamily="34" charset="-128"/>
-              </a:defRPr>
-            </a:lvl9pPr>
-          </a:lstStyle>
-          <a:p>
-            <a:pPr eaLnBrk="1" hangingPunct="1"/>
-            <a:endParaRPr lang="en-US" altLang="en-US" sz="1245" u="sng">
-              <a:latin typeface="Trebuchet MS" panose="020B0603020202020204" pitchFamily="34" charset="0"/>
-            </a:endParaRPr>
-          </a:p>
-        </p:txBody>
-      </p:sp>
-      <p:sp>
-        <p:nvSpPr>
-          <p:cNvPr id="69" name="TextBox 86">
-            <a:extLst>
-              <a:ext uri="{FF2B5EF4-FFF2-40B4-BE49-F238E27FC236}">
-                <a16:creationId xmlns:a16="http://schemas.microsoft.com/office/drawing/2014/main" id="{339DA1BB-33FF-4114-BF82-410123DBAF36}"/>
-              </a:ext>
-            </a:extLst>
-          </p:cNvPr>
-          <p:cNvSpPr txBox="1">
-            <a:spLocks noChangeArrowheads="1"/>
-          </p:cNvSpPr>
-          <p:nvPr/>
-        </p:nvSpPr>
-        <p:spPr bwMode="auto">
-          <a:xfrm>
-            <a:off x="16115146" y="23250026"/>
-            <a:ext cx="13562675" cy="1400383"/>
-          </a:xfrm>
-          <a:prstGeom prst="rect">
-            <a:avLst/>
-          </a:prstGeom>
-          <a:solidFill>
-            <a:schemeClr val="bg1"/>
-          </a:solidFill>
-          <a:ln>
-            <a:noFill/>
-          </a:ln>
-        </p:spPr>
-        <p:txBody>
-          <a:bodyPr wrap="square" lIns="91440" tIns="45720" rIns="91440" bIns="45720" anchor="t">
-            <a:spAutoFit/>
-          </a:bodyPr>
-          <a:lstStyle>
-            <a:lvl1pPr>
-              <a:defRPr sz="2400">
-                <a:solidFill>
-                  <a:schemeClr val="tx1"/>
-                </a:solidFill>
-                <a:latin typeface="Helvetica" panose="020B0604020202020204" pitchFamily="34" charset="0"/>
-                <a:ea typeface="MS PGothic" panose="020B0600070205080204" pitchFamily="34" charset="-128"/>
-              </a:defRPr>
-            </a:lvl1pPr>
-            <a:lvl2pPr marL="742950" indent="-285750">
-              <a:defRPr sz="2400">
-                <a:solidFill>
-                  <a:schemeClr val="tx1"/>
-                </a:solidFill>
-                <a:latin typeface="Helvetica" panose="020B0604020202020204" pitchFamily="34" charset="0"/>
-                <a:ea typeface="MS PGothic" panose="020B0600070205080204" pitchFamily="34" charset="-128"/>
-              </a:defRPr>
-            </a:lvl2pPr>
-            <a:lvl3pPr marL="1143000" indent="-228600">
-              <a:defRPr sz="2400">
-                <a:solidFill>
-                  <a:schemeClr val="tx1"/>
-                </a:solidFill>
-                <a:latin typeface="Helvetica" panose="020B0604020202020204" pitchFamily="34" charset="0"/>
-                <a:ea typeface="MS PGothic" panose="020B0600070205080204" pitchFamily="34" charset="-128"/>
-              </a:defRPr>
-            </a:lvl3pPr>
-            <a:lvl4pPr marL="1600200" indent="-228600">
-              <a:defRPr sz="2400">
-                <a:solidFill>
-                  <a:schemeClr val="tx1"/>
-                </a:solidFill>
-                <a:latin typeface="Helvetica" panose="020B0604020202020204" pitchFamily="34" charset="0"/>
-                <a:ea typeface="MS PGothic" panose="020B0600070205080204" pitchFamily="34" charset="-128"/>
-              </a:defRPr>
-            </a:lvl4pPr>
-            <a:lvl5pPr marL="2057400" indent="-228600">
-              <a:defRPr sz="2400">
-                <a:solidFill>
-                  <a:schemeClr val="tx1"/>
-                </a:solidFill>
-                <a:latin typeface="Helvetica" panose="020B0604020202020204" pitchFamily="34" charset="0"/>
-                <a:ea typeface="MS PGothic" panose="020B0600070205080204" pitchFamily="34" charset="-128"/>
-              </a:defRPr>
-            </a:lvl5pPr>
-            <a:lvl6pPr marL="2514600" indent="-228600" eaLnBrk="0" fontAlgn="base" hangingPunct="0">
-              <a:spcBef>
-                <a:spcPct val="0"/>
-              </a:spcBef>
-              <a:spcAft>
-                <a:spcPct val="0"/>
-              </a:spcAft>
-              <a:defRPr sz="2400">
-                <a:solidFill>
-                  <a:schemeClr val="tx1"/>
-                </a:solidFill>
-                <a:latin typeface="Helvetica" panose="020B0604020202020204" pitchFamily="34" charset="0"/>
-                <a:ea typeface="MS PGothic" panose="020B0600070205080204" pitchFamily="34" charset="-128"/>
-              </a:defRPr>
-            </a:lvl6pPr>
-            <a:lvl7pPr marL="2971800" indent="-228600" eaLnBrk="0" fontAlgn="base" hangingPunct="0">
-              <a:spcBef>
-                <a:spcPct val="0"/>
-              </a:spcBef>
-              <a:spcAft>
-                <a:spcPct val="0"/>
-              </a:spcAft>
-              <a:defRPr sz="2400">
-                <a:solidFill>
-                  <a:schemeClr val="tx1"/>
-                </a:solidFill>
-                <a:latin typeface="Helvetica" panose="020B0604020202020204" pitchFamily="34" charset="0"/>
-                <a:ea typeface="MS PGothic" panose="020B0600070205080204" pitchFamily="34" charset="-128"/>
-              </a:defRPr>
-            </a:lvl7pPr>
-            <a:lvl8pPr marL="3429000" indent="-228600" eaLnBrk="0" fontAlgn="base" hangingPunct="0">
-              <a:spcBef>
-                <a:spcPct val="0"/>
-              </a:spcBef>
-              <a:spcAft>
-                <a:spcPct val="0"/>
-              </a:spcAft>
-              <a:defRPr sz="2400">
-                <a:solidFill>
-                  <a:schemeClr val="tx1"/>
-                </a:solidFill>
-                <a:latin typeface="Helvetica" panose="020B0604020202020204" pitchFamily="34" charset="0"/>
-                <a:ea typeface="MS PGothic" panose="020B0600070205080204" pitchFamily="34" charset="-128"/>
-              </a:defRPr>
-            </a:lvl8pPr>
-            <a:lvl9pPr marL="3886200" indent="-228600" eaLnBrk="0" fontAlgn="base" hangingPunct="0">
-              <a:spcBef>
-                <a:spcPct val="0"/>
-              </a:spcBef>
-              <a:spcAft>
-                <a:spcPct val="0"/>
-              </a:spcAft>
-              <a:defRPr sz="2400">
-                <a:solidFill>
-                  <a:schemeClr val="tx1"/>
-                </a:solidFill>
-                <a:latin typeface="Helvetica" panose="020B0604020202020204" pitchFamily="34" charset="0"/>
-                <a:ea typeface="MS PGothic" panose="020B0600070205080204" pitchFamily="34" charset="-128"/>
-              </a:defRPr>
-            </a:lvl9pPr>
-          </a:lstStyle>
-          <a:p>
-            <a:pPr algn="ctr"/>
-            <a:r>
-              <a:rPr lang="en-US" altLang="en-US" sz="4250" b="1" dirty="0">
-                <a:solidFill>
-                  <a:srgbClr val="C00000"/>
-                </a:solidFill>
-                <a:latin typeface="Trebuchet MS"/>
-                <a:ea typeface="MS PGothic"/>
-              </a:rPr>
-              <a:t>5. Neural Activation in the Anterior Cingulate Cortex (ACC) is Associated with IOS Scores</a:t>
-            </a:r>
-          </a:p>
-        </p:txBody>
-      </p:sp>
-      <p:sp>
-        <p:nvSpPr>
           <p:cNvPr id="13" name="TextBox 12">
             <a:extLst>
               <a:ext uri="{FF2B5EF4-FFF2-40B4-BE49-F238E27FC236}">
@@ -5888,7 +5810,7 @@
         </p:nvSpPr>
         <p:spPr>
           <a:xfrm>
-            <a:off x="631650" y="13229302"/>
+            <a:off x="86681" y="13228864"/>
             <a:ext cx="14016335" cy="1569660"/>
           </a:xfrm>
           <a:prstGeom prst="rect">
@@ -6084,8 +6006,8 @@
         </p:nvSpPr>
         <p:spPr bwMode="auto">
           <a:xfrm>
-            <a:off x="31681341" y="3949848"/>
-            <a:ext cx="10791668" cy="1400383"/>
+            <a:off x="34287424" y="3926011"/>
+            <a:ext cx="5683649" cy="746358"/>
           </a:xfrm>
           <a:prstGeom prst="rect">
             <a:avLst/>
@@ -6218,7 +6140,7 @@
                 <a:latin typeface="Trebuchet MS"/>
                 <a:ea typeface="MS PGothic"/>
               </a:rPr>
-              <a:t>6. Age Related Increase in Precuneus Activation </a:t>
+              <a:t>6. PPI result #1</a:t>
             </a:r>
             <a:endParaRPr lang="en-US" altLang="en-US" sz="4250" b="1" dirty="0">
               <a:solidFill>
@@ -6246,7 +6168,7 @@
         <p:spPr bwMode="auto">
           <a:xfrm>
             <a:off x="15470883" y="14071787"/>
-            <a:ext cx="14827930" cy="9126039"/>
+            <a:ext cx="14827930" cy="18612720"/>
           </a:xfrm>
           <a:prstGeom prst="rect">
             <a:avLst/>
@@ -6537,7 +6459,7 @@
                 <a:latin typeface="Trebuchet MS"/>
                 <a:ea typeface="MS PGothic"/>
               </a:rPr>
-              <a:t>4. Activation during Outcome Phase</a:t>
+              <a:t>4. Ventral Striatal Activation </a:t>
             </a:r>
             <a:endParaRPr lang="en-US" altLang="en-US" sz="4267" b="1" dirty="0">
               <a:solidFill>
@@ -6611,7 +6533,7 @@
         </p:nvSpPr>
         <p:spPr>
           <a:xfrm>
-            <a:off x="15599737" y="21846431"/>
+            <a:off x="15599737" y="22075030"/>
             <a:ext cx="14650695" cy="1077218"/>
           </a:xfrm>
           <a:prstGeom prst="rect">
@@ -6631,7 +6553,7 @@
                 <a:latin typeface="Helvetica"/>
                 <a:ea typeface="MS PGothic"/>
               </a:rPr>
-              <a:t>We found increasing activation in the VS when participants were presented with a reciprocate outcome as opposed to a defect outcome.</a:t>
+              <a:t>We found activation in the VS when participants were presented with a reciprocate outcome as opposed to a defect outcome.</a:t>
             </a:r>
           </a:p>
         </p:txBody>
@@ -7384,102 +7306,6 @@
       </p:grpSp>
       <p:grpSp>
         <p:nvGrpSpPr>
-          <p:cNvPr id="15503" name="Group 15502">
-            <a:extLst>
-              <a:ext uri="{FF2B5EF4-FFF2-40B4-BE49-F238E27FC236}">
-                <a16:creationId xmlns:a16="http://schemas.microsoft.com/office/drawing/2014/main" id="{5FCA49CE-81E7-6F59-66DA-CE0C5F49E6D0}"/>
-              </a:ext>
-            </a:extLst>
-          </p:cNvPr>
-          <p:cNvGrpSpPr/>
-          <p:nvPr/>
-        </p:nvGrpSpPr>
-        <p:grpSpPr>
-          <a:xfrm>
-            <a:off x="23573171" y="24842403"/>
-            <a:ext cx="6457795" cy="5596080"/>
-            <a:chOff x="23380200" y="25326205"/>
-            <a:chExt cx="6457795" cy="5596080"/>
-          </a:xfrm>
-        </p:grpSpPr>
-        <p:pic>
-          <p:nvPicPr>
-            <p:cNvPr id="15424" name="Picture 15423" descr="A close-up of a brain&#10;&#10;Description automatically generated">
-              <a:extLst>
-                <a:ext uri="{FF2B5EF4-FFF2-40B4-BE49-F238E27FC236}">
-                  <a16:creationId xmlns:a16="http://schemas.microsoft.com/office/drawing/2014/main" id="{CC6419D2-DC29-B910-B6FA-A6DAC7775AD7}"/>
-                </a:ext>
-              </a:extLst>
-            </p:cNvPr>
-            <p:cNvPicPr>
-              <a:picLocks noChangeAspect="1"/>
-            </p:cNvPicPr>
-            <p:nvPr/>
-          </p:nvPicPr>
-          <p:blipFill>
-            <a:blip r:embed="rId3">
-              <a:extLst>
-                <a:ext uri="{28A0092B-C50C-407E-A947-70E740481C1C}">
-                  <a14:useLocalDpi xmlns:a14="http://schemas.microsoft.com/office/drawing/2010/main" val="0"/>
-                </a:ext>
-              </a:extLst>
-            </a:blip>
-            <a:stretch>
-              <a:fillRect/>
-            </a:stretch>
-          </p:blipFill>
-          <p:spPr>
-            <a:xfrm>
-              <a:off x="23380200" y="25326205"/>
-              <a:ext cx="6457795" cy="5596080"/>
-            </a:xfrm>
-            <a:prstGeom prst="rect">
-              <a:avLst/>
-            </a:prstGeom>
-          </p:spPr>
-        </p:pic>
-        <p:sp>
-          <p:nvSpPr>
-            <p:cNvPr id="80" name="TextBox 79">
-              <a:extLst>
-                <a:ext uri="{FF2B5EF4-FFF2-40B4-BE49-F238E27FC236}">
-                  <a16:creationId xmlns:a16="http://schemas.microsoft.com/office/drawing/2014/main" id="{FD72DC14-1E2D-4557-BD08-7DD34FFE9083}"/>
-                </a:ext>
-              </a:extLst>
-            </p:cNvPr>
-            <p:cNvSpPr txBox="1"/>
-            <p:nvPr/>
-          </p:nvSpPr>
-          <p:spPr>
-            <a:xfrm>
-              <a:off x="26561482" y="29968178"/>
-              <a:ext cx="2664868" cy="523220"/>
-            </a:xfrm>
-            <a:prstGeom prst="rect">
-              <a:avLst/>
-            </a:prstGeom>
-            <a:noFill/>
-          </p:spPr>
-          <p:txBody>
-            <a:bodyPr wrap="square" lIns="91440" tIns="45720" rIns="91440" bIns="45720" anchor="t">
-              <a:spAutoFit/>
-            </a:bodyPr>
-            <a:lstStyle/>
-            <a:p>
-              <a:pPr algn="ctr"/>
-              <a:r>
-                <a:rPr lang="en-US" sz="2800" dirty="0">
-                  <a:latin typeface="Helvetica"/>
-                  <a:ea typeface="MS PGothic"/>
-                </a:rPr>
-                <a:t>X=5</a:t>
-              </a:r>
-            </a:p>
-          </p:txBody>
-        </p:sp>
-      </p:grpSp>
-      <p:grpSp>
-        <p:nvGrpSpPr>
           <p:cNvPr id="15402" name="Group 15401">
             <a:extLst>
               <a:ext uri="{FF2B5EF4-FFF2-40B4-BE49-F238E27FC236}">
@@ -7492,8 +7318,8 @@
         </p:nvGrpSpPr>
         <p:grpSpPr>
           <a:xfrm>
-            <a:off x="741991" y="26606768"/>
-            <a:ext cx="6854956" cy="2277700"/>
+            <a:off x="798440" y="27974692"/>
+            <a:ext cx="5941540" cy="2277700"/>
             <a:chOff x="569101" y="26252269"/>
             <a:chExt cx="6854956" cy="2277700"/>
           </a:xfrm>
@@ -7582,7 +7408,7 @@
           </p:nvSpPr>
           <p:spPr>
             <a:xfrm>
-              <a:off x="1097130" y="26573709"/>
+              <a:off x="984094" y="26573709"/>
               <a:ext cx="6326927" cy="1569660"/>
             </a:xfrm>
             <a:prstGeom prst="rect">
@@ -7624,12 +7450,20 @@
               </a:r>
               <a:r>
                 <a:rPr lang="en-US" sz="3200" dirty="0">
+                  <a:latin typeface="Helvetica" pitchFamily="2" charset="0"/>
+                  <a:ea typeface="Times New Roman" panose="02020603050405020304" pitchFamily="18" charset="0"/>
+                  <a:cs typeface="Helvetica"/>
+                </a:rPr>
+                <a:t>C</a:t>
+              </a:r>
+              <a:r>
+                <a:rPr lang="en-US" sz="3200" dirty="0">
                   <a:effectLst/>
                   <a:latin typeface="Helvetica" pitchFamily="2" charset="0"/>
                   <a:ea typeface="Times New Roman" panose="02020603050405020304" pitchFamily="18" charset="0"/>
                   <a:cs typeface="Helvetica"/>
                 </a:rPr>
-                <a:t>completed the </a:t>
+                <a:t>ompleted the </a:t>
               </a:r>
               <a:r>
                 <a:rPr lang="en-US" sz="3200" b="0" i="0" dirty="0">
@@ -7662,10 +7496,10 @@
         </p:nvGrpSpPr>
         <p:grpSpPr>
           <a:xfrm>
-            <a:off x="8030984" y="26218030"/>
-            <a:ext cx="6812529" cy="2732092"/>
-            <a:chOff x="8015298" y="29141496"/>
-            <a:chExt cx="6812529" cy="2732092"/>
+            <a:off x="7403615" y="26951422"/>
+            <a:ext cx="7122687" cy="3300970"/>
+            <a:chOff x="7734234" y="28572618"/>
+            <a:chExt cx="7122687" cy="3300970"/>
           </a:xfrm>
         </p:grpSpPr>
         <p:sp>
@@ -7682,8 +7516,8 @@
           </p:nvSpPr>
           <p:spPr bwMode="auto">
             <a:xfrm>
-              <a:off x="8015298" y="29141496"/>
-              <a:ext cx="6652707" cy="2732092"/>
+              <a:off x="7734234" y="28572618"/>
+              <a:ext cx="6933771" cy="3300970"/>
             </a:xfrm>
             <a:prstGeom prst="rect">
               <a:avLst/>
@@ -7724,7 +7558,7 @@
                 <a:buNone/>
                 <a:tabLst/>
               </a:pPr>
-              <a:endParaRPr kumimoji="0" lang="en-US" sz="1800" b="0" i="0" u="none" strike="noStrike" cap="none" normalizeH="0" baseline="0">
+              <a:endParaRPr kumimoji="0" lang="en-US" sz="1800" b="0" i="0" u="none" strike="noStrike" cap="none" normalizeH="0" baseline="0" dirty="0">
                 <a:ln>
                   <a:noFill/>
                 </a:ln>
@@ -7752,7 +7586,7 @@
           </p:nvSpPr>
           <p:spPr>
             <a:xfrm>
-              <a:off x="8051909" y="29301311"/>
+              <a:off x="8081003" y="29021524"/>
               <a:ext cx="6775918" cy="2554545"/>
             </a:xfrm>
             <a:prstGeom prst="rect">
@@ -7822,7 +7656,7 @@
         </p:nvGrpSpPr>
         <p:grpSpPr>
           <a:xfrm>
-            <a:off x="19981771" y="15435963"/>
+            <a:off x="15724394" y="15529972"/>
             <a:ext cx="8049317" cy="6071098"/>
             <a:chOff x="15705595" y="15406813"/>
             <a:chExt cx="8049317" cy="6071098"/>
@@ -7929,7 +7763,7 @@
             <p:nvPr/>
           </p:nvPicPr>
           <p:blipFill>
-            <a:blip r:embed="rId4"/>
+            <a:blip r:embed="rId6"/>
             <a:stretch>
               <a:fillRect/>
             </a:stretch>
@@ -7945,1362 +7779,6 @@
           </p:spPr>
         </p:pic>
       </p:grpSp>
-      <p:grpSp>
-        <p:nvGrpSpPr>
-          <p:cNvPr id="84" name="Group 83">
-            <a:extLst>
-              <a:ext uri="{FF2B5EF4-FFF2-40B4-BE49-F238E27FC236}">
-                <a16:creationId xmlns:a16="http://schemas.microsoft.com/office/drawing/2014/main" id="{F6598829-9A56-37ED-DD15-373A4F64219F}"/>
-              </a:ext>
-            </a:extLst>
-          </p:cNvPr>
-          <p:cNvGrpSpPr/>
-          <p:nvPr/>
-        </p:nvGrpSpPr>
-        <p:grpSpPr>
-          <a:xfrm>
-            <a:off x="16266708" y="5102620"/>
-            <a:ext cx="5346874" cy="6245250"/>
-            <a:chOff x="24606262" y="5087612"/>
-            <a:chExt cx="5346874" cy="6245250"/>
-          </a:xfrm>
-        </p:grpSpPr>
-        <p:grpSp>
-          <p:nvGrpSpPr>
-            <p:cNvPr id="73" name="Group 72">
-              <a:extLst>
-                <a:ext uri="{FF2B5EF4-FFF2-40B4-BE49-F238E27FC236}">
-                  <a16:creationId xmlns:a16="http://schemas.microsoft.com/office/drawing/2014/main" id="{9D0AD672-5D1A-CAD6-160C-701B0E0AC49D}"/>
-                </a:ext>
-              </a:extLst>
-            </p:cNvPr>
-            <p:cNvGrpSpPr/>
-            <p:nvPr/>
-          </p:nvGrpSpPr>
-          <p:grpSpPr>
-            <a:xfrm>
-              <a:off x="24606262" y="5087612"/>
-              <a:ext cx="5346874" cy="2981162"/>
-              <a:chOff x="24230508" y="5420973"/>
-              <a:chExt cx="5346874" cy="2981162"/>
-            </a:xfrm>
-          </p:grpSpPr>
-          <p:sp>
-            <p:nvSpPr>
-              <p:cNvPr id="38" name="Oval 37">
-                <a:extLst>
-                  <a:ext uri="{FF2B5EF4-FFF2-40B4-BE49-F238E27FC236}">
-                    <a16:creationId xmlns:a16="http://schemas.microsoft.com/office/drawing/2014/main" id="{9AB3227B-605C-47B6-D499-E01120A27BC6}"/>
-                  </a:ext>
-                </a:extLst>
-              </p:cNvPr>
-              <p:cNvSpPr/>
-              <p:nvPr/>
-            </p:nvSpPr>
-            <p:spPr bwMode="auto">
-              <a:xfrm>
-                <a:off x="24230508" y="5440590"/>
-                <a:ext cx="2961545" cy="2961545"/>
-              </a:xfrm>
-              <a:prstGeom prst="ellipse">
-                <a:avLst/>
-              </a:prstGeom>
-              <a:noFill/>
-              <a:ln w="50800" cap="flat" cmpd="sng" algn="ctr">
-                <a:solidFill>
-                  <a:schemeClr val="tx1"/>
-                </a:solidFill>
-                <a:prstDash val="solid"/>
-                <a:round/>
-                <a:headEnd type="none" w="med" len="med"/>
-                <a:tailEnd type="none" w="med" len="med"/>
-              </a:ln>
-              <a:effectLst/>
-            </p:spPr>
-            <p:txBody>
-              <a:bodyPr vert="horz" wrap="square" lIns="91440" tIns="45720" rIns="91440" bIns="45720" numCol="1" rtlCol="0" anchor="t" anchorCtr="0" compatLnSpc="1">
-                <a:prstTxWarp prst="textNoShape">
-                  <a:avLst/>
-                </a:prstTxWarp>
-              </a:bodyPr>
-              <a:lstStyle/>
-              <a:p>
-                <a:pPr marL="0" marR="0" indent="0" algn="ctr" defTabSz="4389438" rtl="0" eaLnBrk="1" fontAlgn="base" latinLnBrk="0" hangingPunct="1">
-                  <a:lnSpc>
-                    <a:spcPct val="100000"/>
-                  </a:lnSpc>
-                  <a:spcBef>
-                    <a:spcPct val="0"/>
-                  </a:spcBef>
-                  <a:spcAft>
-                    <a:spcPct val="0"/>
-                  </a:spcAft>
-                  <a:buClrTx/>
-                  <a:buSzTx/>
-                  <a:buFontTx/>
-                  <a:buNone/>
-                  <a:tabLst/>
-                </a:pPr>
-                <a:r>
-                  <a:rPr lang="en-US" sz="3000" dirty="0">
-                    <a:latin typeface="Arial" charset="0"/>
-                    <a:cs typeface="Arial" charset="0"/>
-                  </a:rPr>
-                  <a:t>Other</a:t>
-                </a:r>
-                <a:endParaRPr kumimoji="0" lang="en-US" sz="3000" b="0" i="0" u="none" strike="noStrike" cap="none" normalizeH="0" baseline="0" dirty="0">
-                  <a:ln>
-                    <a:noFill/>
-                  </a:ln>
-                  <a:solidFill>
-                    <a:schemeClr val="tx1"/>
-                  </a:solidFill>
-                  <a:effectLst/>
-                  <a:latin typeface="Arial" charset="0"/>
-                  <a:cs typeface="Arial" charset="0"/>
-                </a:endParaRPr>
-              </a:p>
-            </p:txBody>
-          </p:sp>
-          <p:sp>
-            <p:nvSpPr>
-              <p:cNvPr id="44" name="Oval 43">
-                <a:extLst>
-                  <a:ext uri="{FF2B5EF4-FFF2-40B4-BE49-F238E27FC236}">
-                    <a16:creationId xmlns:a16="http://schemas.microsoft.com/office/drawing/2014/main" id="{38C7AA76-A69B-6790-2AF3-21F88F089433}"/>
-                  </a:ext>
-                </a:extLst>
-              </p:cNvPr>
-              <p:cNvSpPr/>
-              <p:nvPr/>
-            </p:nvSpPr>
-            <p:spPr bwMode="auto">
-              <a:xfrm>
-                <a:off x="26615837" y="5420973"/>
-                <a:ext cx="2961545" cy="2961545"/>
-              </a:xfrm>
-              <a:prstGeom prst="ellipse">
-                <a:avLst/>
-              </a:prstGeom>
-              <a:noFill/>
-              <a:ln w="50800" cap="flat" cmpd="sng" algn="ctr">
-                <a:solidFill>
-                  <a:schemeClr val="tx1"/>
-                </a:solidFill>
-                <a:prstDash val="solid"/>
-                <a:round/>
-                <a:headEnd type="none" w="med" len="med"/>
-                <a:tailEnd type="none" w="med" len="med"/>
-              </a:ln>
-              <a:effectLst/>
-            </p:spPr>
-            <p:txBody>
-              <a:bodyPr vert="horz" wrap="square" lIns="91440" tIns="45720" rIns="91440" bIns="45720" numCol="1" rtlCol="0" anchor="t" anchorCtr="0" compatLnSpc="1">
-                <a:prstTxWarp prst="textNoShape">
-                  <a:avLst/>
-                </a:prstTxWarp>
-              </a:bodyPr>
-              <a:lstStyle/>
-              <a:p>
-                <a:pPr marL="0" marR="0" indent="0" algn="ctr" defTabSz="4389438" rtl="0" eaLnBrk="1" fontAlgn="base" latinLnBrk="0" hangingPunct="1">
-                  <a:lnSpc>
-                    <a:spcPct val="100000"/>
-                  </a:lnSpc>
-                  <a:spcBef>
-                    <a:spcPct val="0"/>
-                  </a:spcBef>
-                  <a:spcAft>
-                    <a:spcPct val="0"/>
-                  </a:spcAft>
-                  <a:buClrTx/>
-                  <a:buSzTx/>
-                  <a:buFontTx/>
-                  <a:buNone/>
-                  <a:tabLst/>
-                </a:pPr>
-                <a:r>
-                  <a:rPr kumimoji="0" lang="en-US" sz="3000" b="0" i="0" u="none" strike="noStrike" cap="none" normalizeH="0" baseline="0" dirty="0">
-                    <a:ln>
-                      <a:noFill/>
-                    </a:ln>
-                    <a:solidFill>
-                      <a:schemeClr val="tx1"/>
-                    </a:solidFill>
-                    <a:effectLst/>
-                    <a:latin typeface="Arial" charset="0"/>
-                    <a:cs typeface="Arial" charset="0"/>
-                  </a:rPr>
-                  <a:t>Self</a:t>
-                </a:r>
-              </a:p>
-            </p:txBody>
-          </p:sp>
-        </p:grpSp>
-        <p:grpSp>
-          <p:nvGrpSpPr>
-            <p:cNvPr id="81" name="Group 80">
-              <a:extLst>
-                <a:ext uri="{FF2B5EF4-FFF2-40B4-BE49-F238E27FC236}">
-                  <a16:creationId xmlns:a16="http://schemas.microsoft.com/office/drawing/2014/main" id="{A502EBA9-4A64-B731-4721-E93BC2C0B38E}"/>
-                </a:ext>
-              </a:extLst>
-            </p:cNvPr>
-            <p:cNvGrpSpPr/>
-            <p:nvPr/>
-          </p:nvGrpSpPr>
-          <p:grpSpPr>
-            <a:xfrm>
-              <a:off x="25411939" y="8348344"/>
-              <a:ext cx="3925091" cy="2984518"/>
-              <a:chOff x="25130667" y="8968962"/>
-              <a:chExt cx="3925091" cy="2984518"/>
-            </a:xfrm>
-          </p:grpSpPr>
-          <p:sp>
-            <p:nvSpPr>
-              <p:cNvPr id="46" name="Oval 45">
-                <a:extLst>
-                  <a:ext uri="{FF2B5EF4-FFF2-40B4-BE49-F238E27FC236}">
-                    <a16:creationId xmlns:a16="http://schemas.microsoft.com/office/drawing/2014/main" id="{73E66EF6-812F-CEC2-83FA-171A41C69916}"/>
-                  </a:ext>
-                </a:extLst>
-              </p:cNvPr>
-              <p:cNvSpPr/>
-              <p:nvPr/>
-            </p:nvSpPr>
-            <p:spPr bwMode="auto">
-              <a:xfrm>
-                <a:off x="25130667" y="8968962"/>
-                <a:ext cx="2961545" cy="2961545"/>
-              </a:xfrm>
-              <a:prstGeom prst="ellipse">
-                <a:avLst/>
-              </a:prstGeom>
-              <a:noFill/>
-              <a:ln w="50800" cap="flat" cmpd="sng" algn="ctr">
-                <a:solidFill>
-                  <a:schemeClr val="tx1"/>
-                </a:solidFill>
-                <a:prstDash val="solid"/>
-                <a:round/>
-                <a:headEnd type="none" w="med" len="med"/>
-                <a:tailEnd type="none" w="med" len="med"/>
-              </a:ln>
-              <a:effectLst/>
-            </p:spPr>
-            <p:txBody>
-              <a:bodyPr vert="horz" wrap="square" lIns="91440" tIns="45720" rIns="91440" bIns="45720" numCol="1" rtlCol="0" anchor="t" anchorCtr="0" compatLnSpc="1">
-                <a:prstTxWarp prst="textNoShape">
-                  <a:avLst/>
-                </a:prstTxWarp>
-              </a:bodyPr>
-              <a:lstStyle/>
-              <a:p>
-                <a:pPr marL="0" marR="0" indent="0" algn="l" defTabSz="4389438" rtl="0" eaLnBrk="1" fontAlgn="base" latinLnBrk="0" hangingPunct="1">
-                  <a:lnSpc>
-                    <a:spcPct val="100000"/>
-                  </a:lnSpc>
-                  <a:spcBef>
-                    <a:spcPct val="0"/>
-                  </a:spcBef>
-                  <a:spcAft>
-                    <a:spcPct val="0"/>
-                  </a:spcAft>
-                  <a:buClrTx/>
-                  <a:buSzTx/>
-                  <a:buFontTx/>
-                  <a:buNone/>
-                  <a:tabLst/>
-                </a:pPr>
-                <a:endParaRPr kumimoji="0" lang="en-US" sz="1800" b="0" i="0" u="none" strike="noStrike" cap="none" normalizeH="0" baseline="0" dirty="0">
-                  <a:ln>
-                    <a:noFill/>
-                  </a:ln>
-                  <a:solidFill>
-                    <a:schemeClr val="tx1"/>
-                  </a:solidFill>
-                  <a:effectLst/>
-                  <a:latin typeface="Arial" charset="0"/>
-                  <a:cs typeface="Arial" charset="0"/>
-                </a:endParaRPr>
-              </a:p>
-            </p:txBody>
-          </p:sp>
-          <p:sp>
-            <p:nvSpPr>
-              <p:cNvPr id="53" name="Oval 52">
-                <a:extLst>
-                  <a:ext uri="{FF2B5EF4-FFF2-40B4-BE49-F238E27FC236}">
-                    <a16:creationId xmlns:a16="http://schemas.microsoft.com/office/drawing/2014/main" id="{B9FF4C20-98BA-72A9-FBA3-ADE2BE7AB857}"/>
-                  </a:ext>
-                </a:extLst>
-              </p:cNvPr>
-              <p:cNvSpPr/>
-              <p:nvPr/>
-            </p:nvSpPr>
-            <p:spPr bwMode="auto">
-              <a:xfrm>
-                <a:off x="26094213" y="8991935"/>
-                <a:ext cx="2961545" cy="2961545"/>
-              </a:xfrm>
-              <a:prstGeom prst="ellipse">
-                <a:avLst/>
-              </a:prstGeom>
-              <a:noFill/>
-              <a:ln w="50800" cap="flat" cmpd="sng" algn="ctr">
-                <a:solidFill>
-                  <a:schemeClr val="tx1"/>
-                </a:solidFill>
-                <a:prstDash val="solid"/>
-                <a:round/>
-                <a:headEnd type="none" w="med" len="med"/>
-                <a:tailEnd type="none" w="med" len="med"/>
-              </a:ln>
-              <a:effectLst/>
-            </p:spPr>
-            <p:txBody>
-              <a:bodyPr vert="horz" wrap="square" lIns="91440" tIns="45720" rIns="91440" bIns="45720" numCol="1" rtlCol="0" anchor="t" anchorCtr="0" compatLnSpc="1">
-                <a:prstTxWarp prst="textNoShape">
-                  <a:avLst/>
-                </a:prstTxWarp>
-              </a:bodyPr>
-              <a:lstStyle/>
-              <a:p>
-                <a:pPr marL="0" marR="0" indent="0" algn="l" defTabSz="4389438" rtl="0" eaLnBrk="1" fontAlgn="base" latinLnBrk="0" hangingPunct="1">
-                  <a:lnSpc>
-                    <a:spcPct val="100000"/>
-                  </a:lnSpc>
-                  <a:spcBef>
-                    <a:spcPct val="0"/>
-                  </a:spcBef>
-                  <a:spcAft>
-                    <a:spcPct val="0"/>
-                  </a:spcAft>
-                  <a:buClrTx/>
-                  <a:buSzTx/>
-                  <a:buFontTx/>
-                  <a:buNone/>
-                  <a:tabLst/>
-                </a:pPr>
-                <a:endParaRPr kumimoji="0" lang="en-US" sz="1800" b="0" i="0" u="none" strike="noStrike" cap="none" normalizeH="0" baseline="0" dirty="0">
-                  <a:ln>
-                    <a:noFill/>
-                  </a:ln>
-                  <a:solidFill>
-                    <a:schemeClr val="tx1"/>
-                  </a:solidFill>
-                  <a:effectLst/>
-                  <a:latin typeface="Arial" charset="0"/>
-                  <a:cs typeface="Arial" charset="0"/>
-                </a:endParaRPr>
-              </a:p>
-            </p:txBody>
-          </p:sp>
-        </p:grpSp>
-      </p:grpSp>
-      <p:grpSp>
-        <p:nvGrpSpPr>
-          <p:cNvPr id="15363" name="Group 15362">
-            <a:extLst>
-              <a:ext uri="{FF2B5EF4-FFF2-40B4-BE49-F238E27FC236}">
-                <a16:creationId xmlns:a16="http://schemas.microsoft.com/office/drawing/2014/main" id="{5342AA36-A614-FA38-AAEB-B01CE5DEE554}"/>
-              </a:ext>
-            </a:extLst>
-          </p:cNvPr>
-          <p:cNvGrpSpPr/>
-          <p:nvPr/>
-        </p:nvGrpSpPr>
-        <p:grpSpPr>
-          <a:xfrm>
-            <a:off x="22892672" y="5355290"/>
-            <a:ext cx="6622052" cy="6167135"/>
-            <a:chOff x="17267302" y="5300010"/>
-            <a:chExt cx="15233772" cy="14187253"/>
-          </a:xfrm>
-        </p:grpSpPr>
-        <p:grpSp>
-          <p:nvGrpSpPr>
-            <p:cNvPr id="15368" name="Group 15367">
-              <a:extLst>
-                <a:ext uri="{FF2B5EF4-FFF2-40B4-BE49-F238E27FC236}">
-                  <a16:creationId xmlns:a16="http://schemas.microsoft.com/office/drawing/2014/main" id="{EF61B636-3DAB-BD36-5E77-AF660B90CB6D}"/>
-                </a:ext>
-              </a:extLst>
-            </p:cNvPr>
-            <p:cNvGrpSpPr/>
-            <p:nvPr/>
-          </p:nvGrpSpPr>
-          <p:grpSpPr>
-            <a:xfrm>
-              <a:off x="17267302" y="5300010"/>
-              <a:ext cx="15233772" cy="14187253"/>
-              <a:chOff x="17267302" y="5300010"/>
-              <a:chExt cx="15233772" cy="14187253"/>
-            </a:xfrm>
-          </p:grpSpPr>
-          <p:grpSp>
-            <p:nvGrpSpPr>
-              <p:cNvPr id="15374" name="Group 15373">
-                <a:extLst>
-                  <a:ext uri="{FF2B5EF4-FFF2-40B4-BE49-F238E27FC236}">
-                    <a16:creationId xmlns:a16="http://schemas.microsoft.com/office/drawing/2014/main" id="{9D074445-318C-EC5C-B299-FABC718AB741}"/>
-                  </a:ext>
-                </a:extLst>
-              </p:cNvPr>
-              <p:cNvGrpSpPr/>
-              <p:nvPr/>
-            </p:nvGrpSpPr>
-            <p:grpSpPr>
-              <a:xfrm>
-                <a:off x="17267302" y="5300010"/>
-                <a:ext cx="15233772" cy="12987990"/>
-                <a:chOff x="17267302" y="5300010"/>
-                <a:chExt cx="15233772" cy="12987990"/>
-              </a:xfrm>
-            </p:grpSpPr>
-            <p:sp>
-              <p:nvSpPr>
-                <p:cNvPr id="15378" name="Rectangle 15377">
-                  <a:extLst>
-                    <a:ext uri="{FF2B5EF4-FFF2-40B4-BE49-F238E27FC236}">
-                      <a16:creationId xmlns:a16="http://schemas.microsoft.com/office/drawing/2014/main" id="{D3C6FA6C-63E2-D9C7-11C3-F549FAE89481}"/>
-                    </a:ext>
-                  </a:extLst>
-                </p:cNvPr>
-                <p:cNvSpPr/>
-                <p:nvPr/>
-              </p:nvSpPr>
-              <p:spPr bwMode="auto">
-                <a:xfrm>
-                  <a:off x="17267302" y="5300010"/>
-                  <a:ext cx="2814638" cy="6500813"/>
-                </a:xfrm>
-                <a:prstGeom prst="rect">
-                  <a:avLst/>
-                </a:prstGeom>
-                <a:solidFill>
-                  <a:schemeClr val="accent1">
-                    <a:lumMod val="50000"/>
-                  </a:schemeClr>
-                </a:solidFill>
-                <a:ln w="50800" cap="flat" cmpd="sng" algn="ctr">
-                  <a:solidFill>
-                    <a:schemeClr val="tx1"/>
-                  </a:solidFill>
-                  <a:prstDash val="solid"/>
-                  <a:round/>
-                  <a:headEnd type="none" w="med" len="med"/>
-                  <a:tailEnd type="none" w="med" len="med"/>
-                </a:ln>
-                <a:effectLst/>
-              </p:spPr>
-              <p:txBody>
-                <a:bodyPr vert="horz" wrap="square" lIns="91440" tIns="45720" rIns="91440" bIns="45720" numCol="1" rtlCol="0" anchor="t" anchorCtr="0" compatLnSpc="1">
-                  <a:prstTxWarp prst="textNoShape">
-                    <a:avLst/>
-                  </a:prstTxWarp>
-                </a:bodyPr>
-                <a:lstStyle/>
-                <a:p>
-                  <a:pPr marL="0" marR="0" indent="0" algn="l" defTabSz="4389438" rtl="0" eaLnBrk="1" fontAlgn="base" latinLnBrk="0" hangingPunct="1">
-                    <a:lnSpc>
-                      <a:spcPct val="100000"/>
-                    </a:lnSpc>
-                    <a:spcBef>
-                      <a:spcPct val="0"/>
-                    </a:spcBef>
-                    <a:spcAft>
-                      <a:spcPct val="0"/>
-                    </a:spcAft>
-                    <a:buClrTx/>
-                    <a:buSzTx/>
-                    <a:buFontTx/>
-                    <a:buNone/>
-                    <a:tabLst/>
-                  </a:pPr>
-                  <a:endParaRPr kumimoji="0" lang="en-US" sz="1800" b="0" i="0" u="none" strike="noStrike" cap="none" normalizeH="0" baseline="0" dirty="0">
-                    <a:ln>
-                      <a:noFill/>
-                    </a:ln>
-                    <a:solidFill>
-                      <a:schemeClr val="tx1"/>
-                    </a:solidFill>
-                    <a:effectLst/>
-                    <a:latin typeface="Arial" charset="0"/>
-                    <a:cs typeface="Arial" charset="0"/>
-                  </a:endParaRPr>
-                </a:p>
-              </p:txBody>
-            </p:sp>
-            <p:sp>
-              <p:nvSpPr>
-                <p:cNvPr id="15379" name="Rectangle 15378">
-                  <a:extLst>
-                    <a:ext uri="{FF2B5EF4-FFF2-40B4-BE49-F238E27FC236}">
-                      <a16:creationId xmlns:a16="http://schemas.microsoft.com/office/drawing/2014/main" id="{82DBA69E-FE31-66D5-1ACE-25BF6D5A8306}"/>
-                    </a:ext>
-                  </a:extLst>
-                </p:cNvPr>
-                <p:cNvSpPr/>
-                <p:nvPr/>
-              </p:nvSpPr>
-              <p:spPr bwMode="auto">
-                <a:xfrm>
-                  <a:off x="23482859" y="16121903"/>
-                  <a:ext cx="2814638" cy="2166097"/>
-                </a:xfrm>
-                <a:prstGeom prst="rect">
-                  <a:avLst/>
-                </a:prstGeom>
-                <a:solidFill>
-                  <a:schemeClr val="accent1">
-                    <a:lumMod val="25000"/>
-                  </a:schemeClr>
-                </a:solidFill>
-                <a:ln w="50800" cap="flat" cmpd="sng" algn="ctr">
-                  <a:solidFill>
-                    <a:schemeClr val="tx1"/>
-                  </a:solidFill>
-                  <a:prstDash val="solid"/>
-                  <a:round/>
-                  <a:headEnd type="none" w="med" len="med"/>
-                  <a:tailEnd type="none" w="med" len="med"/>
-                </a:ln>
-                <a:effectLst/>
-              </p:spPr>
-              <p:txBody>
-                <a:bodyPr vert="horz" wrap="square" lIns="91440" tIns="45720" rIns="91440" bIns="45720" numCol="1" rtlCol="0" anchor="t" anchorCtr="0" compatLnSpc="1">
-                  <a:prstTxWarp prst="textNoShape">
-                    <a:avLst/>
-                  </a:prstTxWarp>
-                </a:bodyPr>
-                <a:lstStyle/>
-                <a:p>
-                  <a:pPr marL="0" marR="0" indent="0" algn="l" defTabSz="4389438" rtl="0" eaLnBrk="1" fontAlgn="base" latinLnBrk="0" hangingPunct="1">
-                    <a:lnSpc>
-                      <a:spcPct val="100000"/>
-                    </a:lnSpc>
-                    <a:spcBef>
-                      <a:spcPct val="0"/>
-                    </a:spcBef>
-                    <a:spcAft>
-                      <a:spcPct val="0"/>
-                    </a:spcAft>
-                    <a:buClrTx/>
-                    <a:buSzTx/>
-                    <a:buFontTx/>
-                    <a:buNone/>
-                    <a:tabLst/>
-                  </a:pPr>
-                  <a:endParaRPr kumimoji="0" lang="en-US" sz="1800" b="0" i="0" u="none" strike="noStrike" cap="none" normalizeH="0" baseline="0" dirty="0">
-                    <a:ln>
-                      <a:noFill/>
-                    </a:ln>
-                    <a:solidFill>
-                      <a:schemeClr val="tx1"/>
-                    </a:solidFill>
-                    <a:effectLst/>
-                    <a:latin typeface="Arial" charset="0"/>
-                    <a:cs typeface="Arial" charset="0"/>
-                  </a:endParaRPr>
-                </a:p>
-              </p:txBody>
-            </p:sp>
-            <p:sp>
-              <p:nvSpPr>
-                <p:cNvPr id="15380" name="Rectangle 15379">
-                  <a:extLst>
-                    <a:ext uri="{FF2B5EF4-FFF2-40B4-BE49-F238E27FC236}">
-                      <a16:creationId xmlns:a16="http://schemas.microsoft.com/office/drawing/2014/main" id="{738FF911-E63F-5D21-C096-62EDAFDCF6D9}"/>
-                    </a:ext>
-                  </a:extLst>
-                </p:cNvPr>
-                <p:cNvSpPr/>
-                <p:nvPr/>
-              </p:nvSpPr>
-              <p:spPr bwMode="auto">
-                <a:xfrm>
-                  <a:off x="29686436" y="16121903"/>
-                  <a:ext cx="2814638" cy="2166097"/>
-                </a:xfrm>
-                <a:prstGeom prst="rect">
-                  <a:avLst/>
-                </a:prstGeom>
-                <a:solidFill>
-                  <a:schemeClr val="accent1">
-                    <a:lumMod val="75000"/>
-                  </a:schemeClr>
-                </a:solidFill>
-                <a:ln w="50800" cap="flat" cmpd="sng" algn="ctr">
-                  <a:solidFill>
-                    <a:schemeClr val="tx1"/>
-                  </a:solidFill>
-                  <a:prstDash val="solid"/>
-                  <a:round/>
-                  <a:headEnd type="none" w="med" len="med"/>
-                  <a:tailEnd type="none" w="med" len="med"/>
-                </a:ln>
-                <a:effectLst/>
-              </p:spPr>
-              <p:txBody>
-                <a:bodyPr vert="horz" wrap="square" lIns="91440" tIns="45720" rIns="91440" bIns="45720" numCol="1" rtlCol="0" anchor="t" anchorCtr="0" compatLnSpc="1">
-                  <a:prstTxWarp prst="textNoShape">
-                    <a:avLst/>
-                  </a:prstTxWarp>
-                </a:bodyPr>
-                <a:lstStyle/>
-                <a:p>
-                  <a:pPr marL="0" marR="0" indent="0" algn="l" defTabSz="4389438" rtl="0" eaLnBrk="1" fontAlgn="base" latinLnBrk="0" hangingPunct="1">
-                    <a:lnSpc>
-                      <a:spcPct val="100000"/>
-                    </a:lnSpc>
-                    <a:spcBef>
-                      <a:spcPct val="0"/>
-                    </a:spcBef>
-                    <a:spcAft>
-                      <a:spcPct val="0"/>
-                    </a:spcAft>
-                    <a:buClrTx/>
-                    <a:buSzTx/>
-                    <a:buFontTx/>
-                    <a:buNone/>
-                    <a:tabLst/>
-                  </a:pPr>
-                  <a:endParaRPr kumimoji="0" lang="en-US" sz="1800" b="0" i="0" u="none" strike="noStrike" cap="none" normalizeH="0" baseline="0" dirty="0">
-                    <a:ln>
-                      <a:noFill/>
-                    </a:ln>
-                    <a:solidFill>
-                      <a:schemeClr val="tx1"/>
-                    </a:solidFill>
-                    <a:effectLst/>
-                    <a:latin typeface="Arial" charset="0"/>
-                    <a:cs typeface="Arial" charset="0"/>
-                  </a:endParaRPr>
-                </a:p>
-              </p:txBody>
-            </p:sp>
-            <p:cxnSp>
-              <p:nvCxnSpPr>
-                <p:cNvPr id="15381" name="Straight Connector 15380">
-                  <a:extLst>
-                    <a:ext uri="{FF2B5EF4-FFF2-40B4-BE49-F238E27FC236}">
-                      <a16:creationId xmlns:a16="http://schemas.microsoft.com/office/drawing/2014/main" id="{A5C14B6B-74F8-907A-F38C-9B44E05A9296}"/>
-                    </a:ext>
-                  </a:extLst>
-                </p:cNvPr>
-                <p:cNvCxnSpPr>
-                  <a:cxnSpLocks/>
-                  <a:stCxn id="15378" idx="2"/>
-                </p:cNvCxnSpPr>
-                <p:nvPr/>
-              </p:nvCxnSpPr>
-              <p:spPr bwMode="auto">
-                <a:xfrm>
-                  <a:off x="18674621" y="11800823"/>
-                  <a:ext cx="0" cy="4306140"/>
-                </a:xfrm>
-                <a:prstGeom prst="line">
-                  <a:avLst/>
-                </a:prstGeom>
-                <a:solidFill>
-                  <a:schemeClr val="accent1"/>
-                </a:solidFill>
-                <a:ln w="50800" cap="flat" cmpd="sng" algn="ctr">
-                  <a:solidFill>
-                    <a:schemeClr val="tx1"/>
-                  </a:solidFill>
-                  <a:prstDash val="dash"/>
-                  <a:round/>
-                  <a:headEnd type="none" w="med" len="med"/>
-                  <a:tailEnd type="none" w="med" len="med"/>
-                </a:ln>
-                <a:effectLst/>
-              </p:spPr>
-            </p:cxnSp>
-            <p:cxnSp>
-              <p:nvCxnSpPr>
-                <p:cNvPr id="15382" name="Straight Connector 15381">
-                  <a:extLst>
-                    <a:ext uri="{FF2B5EF4-FFF2-40B4-BE49-F238E27FC236}">
-                      <a16:creationId xmlns:a16="http://schemas.microsoft.com/office/drawing/2014/main" id="{D38EEA3F-AEFD-B37D-71DF-A268776436C2}"/>
-                    </a:ext>
-                  </a:extLst>
-                </p:cNvPr>
-                <p:cNvCxnSpPr>
-                  <a:cxnSpLocks/>
-                </p:cNvCxnSpPr>
-                <p:nvPr/>
-              </p:nvCxnSpPr>
-              <p:spPr bwMode="auto">
-                <a:xfrm>
-                  <a:off x="24890178" y="13968833"/>
-                  <a:ext cx="0" cy="2153070"/>
-                </a:xfrm>
-                <a:prstGeom prst="line">
-                  <a:avLst/>
-                </a:prstGeom>
-                <a:solidFill>
-                  <a:schemeClr val="accent1"/>
-                </a:solidFill>
-                <a:ln w="50800" cap="flat" cmpd="sng" algn="ctr">
-                  <a:solidFill>
-                    <a:schemeClr val="tx1"/>
-                  </a:solidFill>
-                  <a:prstDash val="dash"/>
-                  <a:round/>
-                  <a:headEnd type="none" w="med" len="med"/>
-                  <a:tailEnd type="none" w="med" len="med"/>
-                </a:ln>
-                <a:effectLst/>
-              </p:spPr>
-            </p:cxnSp>
-            <p:cxnSp>
-              <p:nvCxnSpPr>
-                <p:cNvPr id="15383" name="Straight Connector 15382">
-                  <a:extLst>
-                    <a:ext uri="{FF2B5EF4-FFF2-40B4-BE49-F238E27FC236}">
-                      <a16:creationId xmlns:a16="http://schemas.microsoft.com/office/drawing/2014/main" id="{EED90813-D59C-3A49-5E0A-AA6B93E3E5AB}"/>
-                    </a:ext>
-                  </a:extLst>
-                </p:cNvPr>
-                <p:cNvCxnSpPr>
-                  <a:cxnSpLocks/>
-                </p:cNvCxnSpPr>
-                <p:nvPr/>
-              </p:nvCxnSpPr>
-              <p:spPr bwMode="auto">
-                <a:xfrm>
-                  <a:off x="31104633" y="13968833"/>
-                  <a:ext cx="0" cy="2153070"/>
-                </a:xfrm>
-                <a:prstGeom prst="line">
-                  <a:avLst/>
-                </a:prstGeom>
-                <a:solidFill>
-                  <a:schemeClr val="accent1"/>
-                </a:solidFill>
-                <a:ln w="50800" cap="flat" cmpd="sng" algn="ctr">
-                  <a:solidFill>
-                    <a:schemeClr val="tx1"/>
-                  </a:solidFill>
-                  <a:prstDash val="dash"/>
-                  <a:round/>
-                  <a:headEnd type="none" w="med" len="med"/>
-                  <a:tailEnd type="none" w="med" len="med"/>
-                </a:ln>
-                <a:effectLst/>
-              </p:spPr>
-            </p:cxnSp>
-            <p:cxnSp>
-              <p:nvCxnSpPr>
-                <p:cNvPr id="15384" name="Straight Connector 15383">
-                  <a:extLst>
-                    <a:ext uri="{FF2B5EF4-FFF2-40B4-BE49-F238E27FC236}">
-                      <a16:creationId xmlns:a16="http://schemas.microsoft.com/office/drawing/2014/main" id="{6AE61E0A-E4D7-DF87-9189-E92187D744F5}"/>
-                    </a:ext>
-                  </a:extLst>
-                </p:cNvPr>
-                <p:cNvCxnSpPr/>
-                <p:nvPr/>
-              </p:nvCxnSpPr>
-              <p:spPr bwMode="auto">
-                <a:xfrm>
-                  <a:off x="18010414" y="16121903"/>
-                  <a:ext cx="1306286" cy="0"/>
-                </a:xfrm>
-                <a:prstGeom prst="line">
-                  <a:avLst/>
-                </a:prstGeom>
-                <a:solidFill>
-                  <a:schemeClr val="accent1"/>
-                </a:solidFill>
-                <a:ln w="50800" cap="flat" cmpd="sng" algn="ctr">
-                  <a:solidFill>
-                    <a:schemeClr val="tx1"/>
-                  </a:solidFill>
-                  <a:prstDash val="solid"/>
-                  <a:round/>
-                  <a:headEnd type="none" w="med" len="med"/>
-                  <a:tailEnd type="none" w="med" len="med"/>
-                </a:ln>
-                <a:effectLst/>
-              </p:spPr>
-            </p:cxnSp>
-            <p:cxnSp>
-              <p:nvCxnSpPr>
-                <p:cNvPr id="15386" name="Straight Connector 15385">
-                  <a:extLst>
-                    <a:ext uri="{FF2B5EF4-FFF2-40B4-BE49-F238E27FC236}">
-                      <a16:creationId xmlns:a16="http://schemas.microsoft.com/office/drawing/2014/main" id="{CDBA45C3-8908-8CA9-EDF5-DAFDAC1E2734}"/>
-                    </a:ext>
-                  </a:extLst>
-                </p:cNvPr>
-                <p:cNvCxnSpPr/>
-                <p:nvPr/>
-              </p:nvCxnSpPr>
-              <p:spPr bwMode="auto">
-                <a:xfrm>
-                  <a:off x="24237035" y="13968833"/>
-                  <a:ext cx="1306286" cy="0"/>
-                </a:xfrm>
-                <a:prstGeom prst="line">
-                  <a:avLst/>
-                </a:prstGeom>
-                <a:solidFill>
-                  <a:schemeClr val="accent1"/>
-                </a:solidFill>
-                <a:ln w="50800" cap="flat" cmpd="sng" algn="ctr">
-                  <a:solidFill>
-                    <a:schemeClr val="tx1"/>
-                  </a:solidFill>
-                  <a:prstDash val="solid"/>
-                  <a:round/>
-                  <a:headEnd type="none" w="med" len="med"/>
-                  <a:tailEnd type="none" w="med" len="med"/>
-                </a:ln>
-                <a:effectLst/>
-              </p:spPr>
-            </p:cxnSp>
-            <p:cxnSp>
-              <p:nvCxnSpPr>
-                <p:cNvPr id="15390" name="Straight Connector 15389">
-                  <a:extLst>
-                    <a:ext uri="{FF2B5EF4-FFF2-40B4-BE49-F238E27FC236}">
-                      <a16:creationId xmlns:a16="http://schemas.microsoft.com/office/drawing/2014/main" id="{0300AC7D-06E5-5E4F-0700-D6A7930474C3}"/>
-                    </a:ext>
-                  </a:extLst>
-                </p:cNvPr>
-                <p:cNvCxnSpPr/>
-                <p:nvPr/>
-              </p:nvCxnSpPr>
-              <p:spPr bwMode="auto">
-                <a:xfrm>
-                  <a:off x="30451490" y="13968833"/>
-                  <a:ext cx="1306286" cy="0"/>
-                </a:xfrm>
-                <a:prstGeom prst="line">
-                  <a:avLst/>
-                </a:prstGeom>
-                <a:solidFill>
-                  <a:schemeClr val="accent1"/>
-                </a:solidFill>
-                <a:ln w="50800" cap="flat" cmpd="sng" algn="ctr">
-                  <a:solidFill>
-                    <a:schemeClr val="tx1"/>
-                  </a:solidFill>
-                  <a:prstDash val="solid"/>
-                  <a:round/>
-                  <a:headEnd type="none" w="med" len="med"/>
-                  <a:tailEnd type="none" w="med" len="med"/>
-                </a:ln>
-                <a:effectLst/>
-              </p:spPr>
-            </p:cxnSp>
-            <p:sp>
-              <p:nvSpPr>
-                <p:cNvPr id="15391" name="Multiply 15390">
-                  <a:extLst>
-                    <a:ext uri="{FF2B5EF4-FFF2-40B4-BE49-F238E27FC236}">
-                      <a16:creationId xmlns:a16="http://schemas.microsoft.com/office/drawing/2014/main" id="{7958EA54-9A29-7CA7-7975-8A83FD94016A}"/>
-                    </a:ext>
-                  </a:extLst>
-                </p:cNvPr>
-                <p:cNvSpPr/>
-                <p:nvPr/>
-              </p:nvSpPr>
-              <p:spPr bwMode="auto">
-                <a:xfrm>
-                  <a:off x="30860534" y="11343623"/>
-                  <a:ext cx="457200" cy="457200"/>
-                </a:xfrm>
-                <a:prstGeom prst="mathMultiply">
-                  <a:avLst/>
-                </a:prstGeom>
-                <a:solidFill>
-                  <a:srgbClr val="72BFC5"/>
-                </a:solidFill>
-                <a:ln w="9525" cap="flat" cmpd="sng" algn="ctr">
-                  <a:solidFill>
-                    <a:schemeClr val="tx1"/>
-                  </a:solidFill>
-                  <a:prstDash val="solid"/>
-                  <a:round/>
-                  <a:headEnd type="none" w="med" len="med"/>
-                  <a:tailEnd type="none" w="med" len="med"/>
-                </a:ln>
-                <a:effectLst/>
-              </p:spPr>
-              <p:txBody>
-                <a:bodyPr vert="horz" wrap="square" lIns="91440" tIns="45720" rIns="91440" bIns="45720" numCol="1" rtlCol="0" anchor="t" anchorCtr="0" compatLnSpc="1">
-                  <a:prstTxWarp prst="textNoShape">
-                    <a:avLst/>
-                  </a:prstTxWarp>
-                </a:bodyPr>
-                <a:lstStyle/>
-                <a:p>
-                  <a:pPr marL="0" marR="0" indent="0" algn="l" defTabSz="4389438" rtl="0" eaLnBrk="1" fontAlgn="base" latinLnBrk="0" hangingPunct="1">
-                    <a:lnSpc>
-                      <a:spcPct val="100000"/>
-                    </a:lnSpc>
-                    <a:spcBef>
-                      <a:spcPct val="0"/>
-                    </a:spcBef>
-                    <a:spcAft>
-                      <a:spcPct val="0"/>
-                    </a:spcAft>
-                    <a:buClrTx/>
-                    <a:buSzTx/>
-                    <a:buFontTx/>
-                    <a:buNone/>
-                    <a:tabLst/>
-                  </a:pPr>
-                  <a:endParaRPr kumimoji="0" lang="en-US" sz="1800" b="0" i="0" u="none" strike="noStrike" cap="none" normalizeH="0" baseline="0" dirty="0">
-                    <a:ln>
-                      <a:noFill/>
-                    </a:ln>
-                    <a:solidFill>
-                      <a:schemeClr val="tx1"/>
-                    </a:solidFill>
-                    <a:effectLst/>
-                    <a:latin typeface="Arial" charset="0"/>
-                    <a:cs typeface="Arial" charset="0"/>
-                  </a:endParaRPr>
-                </a:p>
-              </p:txBody>
-            </p:sp>
-            <p:cxnSp>
-              <p:nvCxnSpPr>
-                <p:cNvPr id="15394" name="Straight Connector 15393">
-                  <a:extLst>
-                    <a:ext uri="{FF2B5EF4-FFF2-40B4-BE49-F238E27FC236}">
-                      <a16:creationId xmlns:a16="http://schemas.microsoft.com/office/drawing/2014/main" id="{54674706-B3BE-AE0E-67F6-02AC5532DCFC}"/>
-                    </a:ext>
-                  </a:extLst>
-                </p:cNvPr>
-                <p:cNvCxnSpPr/>
-                <p:nvPr/>
-              </p:nvCxnSpPr>
-              <p:spPr bwMode="auto">
-                <a:xfrm>
-                  <a:off x="17301874" y="9627476"/>
-                  <a:ext cx="2764221" cy="0"/>
-                </a:xfrm>
-                <a:prstGeom prst="line">
-                  <a:avLst/>
-                </a:prstGeom>
-                <a:solidFill>
-                  <a:schemeClr val="accent1"/>
-                </a:solidFill>
-                <a:ln w="101600" cap="flat" cmpd="sng" algn="ctr">
-                  <a:solidFill>
-                    <a:srgbClr val="D54C43"/>
-                  </a:solidFill>
-                  <a:prstDash val="solid"/>
-                  <a:round/>
-                  <a:headEnd type="none" w="med" len="med"/>
-                  <a:tailEnd type="none" w="med" len="med"/>
-                </a:ln>
-                <a:effectLst/>
-              </p:spPr>
-            </p:cxnSp>
-            <p:cxnSp>
-              <p:nvCxnSpPr>
-                <p:cNvPr id="15395" name="Straight Connector 15394">
-                  <a:extLst>
-                    <a:ext uri="{FF2B5EF4-FFF2-40B4-BE49-F238E27FC236}">
-                      <a16:creationId xmlns:a16="http://schemas.microsoft.com/office/drawing/2014/main" id="{E7D53ED5-EB1B-BF5F-67A1-A644E9215197}"/>
-                    </a:ext>
-                  </a:extLst>
-                </p:cNvPr>
-                <p:cNvCxnSpPr/>
-                <p:nvPr/>
-              </p:nvCxnSpPr>
-              <p:spPr bwMode="auto">
-                <a:xfrm>
-                  <a:off x="23513855" y="18210955"/>
-                  <a:ext cx="2764221" cy="0"/>
-                </a:xfrm>
-                <a:prstGeom prst="line">
-                  <a:avLst/>
-                </a:prstGeom>
-                <a:solidFill>
-                  <a:schemeClr val="accent1"/>
-                </a:solidFill>
-                <a:ln w="101600" cap="flat" cmpd="sng" algn="ctr">
-                  <a:solidFill>
-                    <a:srgbClr val="BB423A"/>
-                  </a:solidFill>
-                  <a:prstDash val="solid"/>
-                  <a:round/>
-                  <a:headEnd type="none" w="med" len="med"/>
-                  <a:tailEnd type="none" w="med" len="med"/>
-                </a:ln>
-                <a:effectLst/>
-              </p:spPr>
-            </p:cxnSp>
-            <p:cxnSp>
-              <p:nvCxnSpPr>
-                <p:cNvPr id="15396" name="Straight Connector 15395">
-                  <a:extLst>
-                    <a:ext uri="{FF2B5EF4-FFF2-40B4-BE49-F238E27FC236}">
-                      <a16:creationId xmlns:a16="http://schemas.microsoft.com/office/drawing/2014/main" id="{2E4D4A52-9D38-12EB-42B4-266D1CB829FB}"/>
-                    </a:ext>
-                  </a:extLst>
-                </p:cNvPr>
-                <p:cNvCxnSpPr/>
-                <p:nvPr/>
-              </p:nvCxnSpPr>
-              <p:spPr bwMode="auto">
-                <a:xfrm>
-                  <a:off x="29707024" y="18210954"/>
-                  <a:ext cx="2764221" cy="0"/>
-                </a:xfrm>
-                <a:prstGeom prst="line">
-                  <a:avLst/>
-                </a:prstGeom>
-                <a:solidFill>
-                  <a:schemeClr val="accent1"/>
-                </a:solidFill>
-                <a:ln w="101600" cap="flat" cmpd="sng" algn="ctr">
-                  <a:solidFill>
-                    <a:srgbClr val="EF544A"/>
-                  </a:solidFill>
-                  <a:prstDash val="solid"/>
-                  <a:round/>
-                  <a:headEnd type="none" w="med" len="med"/>
-                  <a:tailEnd type="none" w="med" len="med"/>
-                </a:ln>
-                <a:effectLst/>
-              </p:spPr>
-            </p:cxnSp>
-          </p:grpSp>
-          <p:sp>
-            <p:nvSpPr>
-              <p:cNvPr id="15375" name="TextBox 15374">
-                <a:extLst>
-                  <a:ext uri="{FF2B5EF4-FFF2-40B4-BE49-F238E27FC236}">
-                    <a16:creationId xmlns:a16="http://schemas.microsoft.com/office/drawing/2014/main" id="{0BC64C63-F78A-F04C-FE4C-A4D80531BC92}"/>
-                  </a:ext>
-                </a:extLst>
-              </p:cNvPr>
-              <p:cNvSpPr txBox="1"/>
-              <p:nvPr/>
-            </p:nvSpPr>
-            <p:spPr>
-              <a:xfrm>
-                <a:off x="18047432" y="18801292"/>
-                <a:ext cx="1273104" cy="553998"/>
-              </a:xfrm>
-              <a:prstGeom prst="rect">
-                <a:avLst/>
-              </a:prstGeom>
-              <a:noFill/>
-            </p:spPr>
-            <p:txBody>
-              <a:bodyPr wrap="none" rtlCol="0">
-                <a:spAutoFit/>
-              </a:bodyPr>
-              <a:lstStyle/>
-              <a:p>
-                <a:pPr algn="ctr"/>
-                <a:r>
-                  <a:rPr lang="en-US" sz="3000" dirty="0"/>
-                  <a:t>Friend</a:t>
-                </a:r>
-              </a:p>
-            </p:txBody>
-          </p:sp>
-          <p:sp>
-            <p:nvSpPr>
-              <p:cNvPr id="15376" name="TextBox 15375">
-                <a:extLst>
-                  <a:ext uri="{FF2B5EF4-FFF2-40B4-BE49-F238E27FC236}">
-                    <a16:creationId xmlns:a16="http://schemas.microsoft.com/office/drawing/2014/main" id="{FBEF236D-522B-2628-F975-CA94AF1884DB}"/>
-                  </a:ext>
-                </a:extLst>
-              </p:cNvPr>
-              <p:cNvSpPr txBox="1"/>
-              <p:nvPr/>
-            </p:nvSpPr>
-            <p:spPr>
-              <a:xfrm>
-                <a:off x="24016659" y="18801291"/>
-                <a:ext cx="1657826" cy="553998"/>
-              </a:xfrm>
-              <a:prstGeom prst="rect">
-                <a:avLst/>
-              </a:prstGeom>
-              <a:noFill/>
-            </p:spPr>
-            <p:txBody>
-              <a:bodyPr wrap="none" rtlCol="0">
-                <a:spAutoFit/>
-              </a:bodyPr>
-              <a:lstStyle/>
-              <a:p>
-                <a:pPr algn="ctr"/>
-                <a:r>
-                  <a:rPr lang="en-US" sz="3000" dirty="0"/>
-                  <a:t>Stranger</a:t>
-                </a:r>
-              </a:p>
-            </p:txBody>
-          </p:sp>
-          <p:sp>
-            <p:nvSpPr>
-              <p:cNvPr id="15377" name="TextBox 15376">
-                <a:extLst>
-                  <a:ext uri="{FF2B5EF4-FFF2-40B4-BE49-F238E27FC236}">
-                    <a16:creationId xmlns:a16="http://schemas.microsoft.com/office/drawing/2014/main" id="{CF3C8066-596C-D6E7-00D6-81439E767F87}"/>
-                  </a:ext>
-                </a:extLst>
-              </p:cNvPr>
-              <p:cNvSpPr txBox="1"/>
-              <p:nvPr/>
-            </p:nvSpPr>
-            <p:spPr>
-              <a:xfrm>
-                <a:off x="30153622" y="18933265"/>
-                <a:ext cx="1871025" cy="553998"/>
-              </a:xfrm>
-              <a:prstGeom prst="rect">
-                <a:avLst/>
-              </a:prstGeom>
-              <a:noFill/>
-            </p:spPr>
-            <p:txBody>
-              <a:bodyPr wrap="none" rtlCol="0">
-                <a:spAutoFit/>
-              </a:bodyPr>
-              <a:lstStyle/>
-              <a:p>
-                <a:pPr algn="ctr"/>
-                <a:r>
-                  <a:rPr lang="en-US" sz="3000" dirty="0"/>
-                  <a:t>Computer</a:t>
-                </a:r>
-              </a:p>
-            </p:txBody>
-          </p:sp>
-        </p:grpSp>
-        <p:sp>
-          <p:nvSpPr>
-            <p:cNvPr id="15370" name="Multiply 15369">
-              <a:extLst>
-                <a:ext uri="{FF2B5EF4-FFF2-40B4-BE49-F238E27FC236}">
-                  <a16:creationId xmlns:a16="http://schemas.microsoft.com/office/drawing/2014/main" id="{DA358199-D1DD-7679-4B19-9342C8CB9A71}"/>
-                </a:ext>
-              </a:extLst>
-            </p:cNvPr>
-            <p:cNvSpPr/>
-            <p:nvPr/>
-          </p:nvSpPr>
-          <p:spPr bwMode="auto">
-            <a:xfrm>
-              <a:off x="30860534" y="9433297"/>
-              <a:ext cx="457200" cy="457200"/>
-            </a:xfrm>
-            <a:prstGeom prst="mathMultiply">
-              <a:avLst/>
-            </a:prstGeom>
-            <a:solidFill>
-              <a:srgbClr val="72BFC5"/>
-            </a:solidFill>
-            <a:ln w="9525" cap="flat" cmpd="sng" algn="ctr">
-              <a:solidFill>
-                <a:schemeClr val="tx1"/>
-              </a:solidFill>
-              <a:prstDash val="solid"/>
-              <a:round/>
-              <a:headEnd type="none" w="med" len="med"/>
-              <a:tailEnd type="none" w="med" len="med"/>
-            </a:ln>
-            <a:effectLst/>
-          </p:spPr>
-          <p:txBody>
-            <a:bodyPr vert="horz" wrap="square" lIns="91440" tIns="45720" rIns="91440" bIns="45720" numCol="1" rtlCol="0" anchor="t" anchorCtr="0" compatLnSpc="1">
-              <a:prstTxWarp prst="textNoShape">
-                <a:avLst/>
-              </a:prstTxWarp>
-            </a:bodyPr>
-            <a:lstStyle/>
-            <a:p>
-              <a:pPr marL="0" marR="0" indent="0" algn="l" defTabSz="4389438" rtl="0" eaLnBrk="1" fontAlgn="base" latinLnBrk="0" hangingPunct="1">
-                <a:lnSpc>
-                  <a:spcPct val="100000"/>
-                </a:lnSpc>
-                <a:spcBef>
-                  <a:spcPct val="0"/>
-                </a:spcBef>
-                <a:spcAft>
-                  <a:spcPct val="0"/>
-                </a:spcAft>
-                <a:buClrTx/>
-                <a:buSzTx/>
-                <a:buFontTx/>
-                <a:buNone/>
-                <a:tabLst/>
-              </a:pPr>
-              <a:endParaRPr kumimoji="0" lang="en-US" sz="1800" b="0" i="0" u="none" strike="noStrike" cap="none" normalizeH="0" baseline="0" dirty="0">
-                <a:ln>
-                  <a:noFill/>
-                </a:ln>
-                <a:solidFill>
-                  <a:schemeClr val="tx1"/>
-                </a:solidFill>
-                <a:effectLst/>
-                <a:latin typeface="Arial" charset="0"/>
-                <a:cs typeface="Arial" charset="0"/>
-              </a:endParaRPr>
-            </a:p>
-          </p:txBody>
-        </p:sp>
-        <p:sp>
-          <p:nvSpPr>
-            <p:cNvPr id="15372" name="Multiply 15371">
-              <a:extLst>
-                <a:ext uri="{FF2B5EF4-FFF2-40B4-BE49-F238E27FC236}">
-                  <a16:creationId xmlns:a16="http://schemas.microsoft.com/office/drawing/2014/main" id="{4E9EE586-5835-F885-83DF-014FFC51F3BA}"/>
-                </a:ext>
-              </a:extLst>
-            </p:cNvPr>
-            <p:cNvSpPr/>
-            <p:nvPr/>
-          </p:nvSpPr>
-          <p:spPr bwMode="auto">
-            <a:xfrm>
-              <a:off x="24661578" y="11557807"/>
-              <a:ext cx="457200" cy="457200"/>
-            </a:xfrm>
-            <a:prstGeom prst="mathMultiply">
-              <a:avLst/>
-            </a:prstGeom>
-            <a:solidFill>
-              <a:srgbClr val="1D4647"/>
-            </a:solidFill>
-            <a:ln w="9525" cap="flat" cmpd="sng" algn="ctr">
-              <a:solidFill>
-                <a:schemeClr val="tx1"/>
-              </a:solidFill>
-              <a:prstDash val="solid"/>
-              <a:round/>
-              <a:headEnd type="none" w="med" len="med"/>
-              <a:tailEnd type="none" w="med" len="med"/>
-            </a:ln>
-            <a:effectLst/>
-          </p:spPr>
-          <p:txBody>
-            <a:bodyPr vert="horz" wrap="square" lIns="91440" tIns="45720" rIns="91440" bIns="45720" numCol="1" rtlCol="0" anchor="t" anchorCtr="0" compatLnSpc="1">
-              <a:prstTxWarp prst="textNoShape">
-                <a:avLst/>
-              </a:prstTxWarp>
-            </a:bodyPr>
-            <a:lstStyle/>
-            <a:p>
-              <a:pPr marL="0" marR="0" indent="0" algn="l" defTabSz="4389438" rtl="0" eaLnBrk="1" fontAlgn="base" latinLnBrk="0" hangingPunct="1">
-                <a:lnSpc>
-                  <a:spcPct val="100000"/>
-                </a:lnSpc>
-                <a:spcBef>
-                  <a:spcPct val="0"/>
-                </a:spcBef>
-                <a:spcAft>
-                  <a:spcPct val="0"/>
-                </a:spcAft>
-                <a:buClrTx/>
-                <a:buSzTx/>
-                <a:buFontTx/>
-                <a:buNone/>
-                <a:tabLst/>
-              </a:pPr>
-              <a:endParaRPr kumimoji="0" lang="en-US" sz="1800" b="0" i="0" u="none" strike="noStrike" cap="none" normalizeH="0" baseline="0" dirty="0">
-                <a:ln>
-                  <a:noFill/>
-                </a:ln>
-                <a:solidFill>
-                  <a:schemeClr val="tx1"/>
-                </a:solidFill>
-                <a:effectLst/>
-                <a:latin typeface="Arial" charset="0"/>
-                <a:cs typeface="Arial" charset="0"/>
-              </a:endParaRPr>
-            </a:p>
-          </p:txBody>
-        </p:sp>
-        <p:sp>
-          <p:nvSpPr>
-            <p:cNvPr id="15373" name="Multiply 15372">
-              <a:extLst>
-                <a:ext uri="{FF2B5EF4-FFF2-40B4-BE49-F238E27FC236}">
-                  <a16:creationId xmlns:a16="http://schemas.microsoft.com/office/drawing/2014/main" id="{9592DB17-062F-9AC2-E17E-BCFBD00FD8EC}"/>
-                </a:ext>
-              </a:extLst>
-            </p:cNvPr>
-            <p:cNvSpPr/>
-            <p:nvPr/>
-          </p:nvSpPr>
-          <p:spPr bwMode="auto">
-            <a:xfrm>
-              <a:off x="24661578" y="9433297"/>
-              <a:ext cx="457200" cy="457200"/>
-            </a:xfrm>
-            <a:prstGeom prst="mathMultiply">
-              <a:avLst/>
-            </a:prstGeom>
-            <a:solidFill>
-              <a:srgbClr val="1D4647"/>
-            </a:solidFill>
-            <a:ln w="9525" cap="flat" cmpd="sng" algn="ctr">
-              <a:solidFill>
-                <a:schemeClr val="tx1"/>
-              </a:solidFill>
-              <a:prstDash val="solid"/>
-              <a:round/>
-              <a:headEnd type="none" w="med" len="med"/>
-              <a:tailEnd type="none" w="med" len="med"/>
-            </a:ln>
-            <a:effectLst/>
-          </p:spPr>
-          <p:txBody>
-            <a:bodyPr vert="horz" wrap="square" lIns="91440" tIns="45720" rIns="91440" bIns="45720" numCol="1" rtlCol="0" anchor="t" anchorCtr="0" compatLnSpc="1">
-              <a:prstTxWarp prst="textNoShape">
-                <a:avLst/>
-              </a:prstTxWarp>
-            </a:bodyPr>
-            <a:lstStyle/>
-            <a:p>
-              <a:pPr marL="0" marR="0" indent="0" algn="l" defTabSz="4389438" rtl="0" eaLnBrk="1" fontAlgn="base" latinLnBrk="0" hangingPunct="1">
-                <a:lnSpc>
-                  <a:spcPct val="100000"/>
-                </a:lnSpc>
-                <a:spcBef>
-                  <a:spcPct val="0"/>
-                </a:spcBef>
-                <a:spcAft>
-                  <a:spcPct val="0"/>
-                </a:spcAft>
-                <a:buClrTx/>
-                <a:buSzTx/>
-                <a:buFontTx/>
-                <a:buNone/>
-                <a:tabLst/>
-              </a:pPr>
-              <a:endParaRPr kumimoji="0" lang="en-US" sz="1800" b="0" i="0" u="none" strike="noStrike" cap="none" normalizeH="0" baseline="0" dirty="0">
-                <a:ln>
-                  <a:noFill/>
-                </a:ln>
-                <a:solidFill>
-                  <a:schemeClr val="tx1"/>
-                </a:solidFill>
-                <a:effectLst/>
-                <a:latin typeface="Arial" charset="0"/>
-                <a:cs typeface="Arial" charset="0"/>
-              </a:endParaRPr>
-            </a:p>
-          </p:txBody>
-        </p:sp>
-      </p:grpSp>
       <p:sp>
         <p:nvSpPr>
           <p:cNvPr id="15398" name="TextBox 15397">
@@ -9315,8 +7793,8 @@
         </p:nvSpPr>
         <p:spPr>
           <a:xfrm>
-            <a:off x="16332717" y="12097669"/>
-            <a:ext cx="12598832" cy="1077218"/>
+            <a:off x="16049619" y="12144591"/>
+            <a:ext cx="12586455" cy="1077218"/>
           </a:xfrm>
           <a:prstGeom prst="rect">
             <a:avLst/>
@@ -9335,122 +7813,11 @@
                 <a:latin typeface="Helvetica"/>
                 <a:ea typeface="MS PGothic"/>
               </a:rPr>
-              <a:t>Participants were asked to rate their closeness with the three partners on a 7-point Leichardt scale of overlapping circles </a:t>
+              <a:t>Participants were asked to rate their closeness with the three partners before the task on a 7-point Likert Scale</a:t>
             </a:r>
           </a:p>
         </p:txBody>
       </p:sp>
-      <p:sp>
-        <p:nvSpPr>
-          <p:cNvPr id="15404" name="TextBox 15403">
-            <a:extLst>
-              <a:ext uri="{FF2B5EF4-FFF2-40B4-BE49-F238E27FC236}">
-                <a16:creationId xmlns:a16="http://schemas.microsoft.com/office/drawing/2014/main" id="{BD337C5F-52FF-AD9F-5D33-EBF01D6419CF}"/>
-              </a:ext>
-            </a:extLst>
-          </p:cNvPr>
-          <p:cNvSpPr txBox="1"/>
-          <p:nvPr/>
-        </p:nvSpPr>
-        <p:spPr>
-          <a:xfrm>
-            <a:off x="15906068" y="11363259"/>
-            <a:ext cx="4965130" cy="553998"/>
-          </a:xfrm>
-          <a:prstGeom prst="rect">
-            <a:avLst/>
-          </a:prstGeom>
-          <a:noFill/>
-        </p:spPr>
-        <p:txBody>
-          <a:bodyPr wrap="square" lIns="91440" tIns="45720" rIns="91440" bIns="45720" anchor="t">
-            <a:spAutoFit/>
-          </a:bodyPr>
-          <a:lstStyle/>
-          <a:p>
-            <a:r>
-              <a:rPr lang="en-US" altLang="en-US" sz="1500" dirty="0">
-                <a:latin typeface="Helvetica"/>
-                <a:ea typeface="MS PGothic"/>
-              </a:rPr>
-              <a:t>Kyle M. </a:t>
-            </a:r>
-            <a:r>
-              <a:rPr lang="en-US" altLang="en-US" sz="1500" dirty="0" err="1">
-                <a:latin typeface="Helvetica"/>
-                <a:ea typeface="MS PGothic"/>
-              </a:rPr>
-              <a:t>Woosnam</a:t>
-            </a:r>
-            <a:r>
-              <a:rPr lang="en-US" altLang="en-US" sz="1500" dirty="0">
-                <a:latin typeface="Helvetica"/>
-                <a:ea typeface="MS PGothic"/>
-              </a:rPr>
-              <a:t>,</a:t>
-            </a:r>
-          </a:p>
-          <a:p>
-            <a:r>
-              <a:rPr lang="en-US" altLang="en-US" sz="1500" dirty="0">
-                <a:latin typeface="Helvetica"/>
-                <a:ea typeface="MS PGothic"/>
-              </a:rPr>
-              <a:t>The inclusion of other in the self (</a:t>
-            </a:r>
-            <a:r>
-              <a:rPr lang="en-US" altLang="en-US" sz="1500" dirty="0" err="1">
-                <a:latin typeface="Helvetica"/>
-                <a:ea typeface="MS PGothic"/>
-              </a:rPr>
-              <a:t>ios</a:t>
-            </a:r>
-            <a:r>
-              <a:rPr lang="en-US" altLang="en-US" sz="1500" dirty="0">
-                <a:latin typeface="Helvetica"/>
-                <a:ea typeface="MS PGothic"/>
-              </a:rPr>
-              <a:t>) scale,</a:t>
-            </a:r>
-          </a:p>
-        </p:txBody>
-      </p:sp>
-      <p:pic>
-        <p:nvPicPr>
-          <p:cNvPr id="15406" name="Picture 15405" descr="A brain with red and green arrows&#10;&#10;Description automatically generated">
-            <a:extLst>
-              <a:ext uri="{FF2B5EF4-FFF2-40B4-BE49-F238E27FC236}">
-                <a16:creationId xmlns:a16="http://schemas.microsoft.com/office/drawing/2014/main" id="{E3B38FA0-F543-267E-327B-2987860A8B8B}"/>
-              </a:ext>
-            </a:extLst>
-          </p:cNvPr>
-          <p:cNvPicPr>
-            <a:picLocks noChangeAspect="1"/>
-          </p:cNvPicPr>
-          <p:nvPr/>
-        </p:nvPicPr>
-        <p:blipFill>
-          <a:blip r:embed="rId5">
-            <a:extLst>
-              <a:ext uri="{28A0092B-C50C-407E-A947-70E740481C1C}">
-                <a14:useLocalDpi xmlns:a14="http://schemas.microsoft.com/office/drawing/2010/main" val="0"/>
-              </a:ext>
-            </a:extLst>
-          </a:blip>
-          <a:stretch>
-            <a:fillRect/>
-          </a:stretch>
-        </p:blipFill>
-        <p:spPr>
-          <a:xfrm>
-            <a:off x="30965290" y="6030821"/>
-            <a:ext cx="4495800" cy="5003800"/>
-          </a:xfrm>
-          <a:prstGeom prst="rect">
-            <a:avLst/>
-          </a:prstGeom>
-        </p:spPr>
-      </p:pic>
       <p:sp>
         <p:nvSpPr>
           <p:cNvPr id="15400" name="Rectangle 54"/>
@@ -9820,7 +8187,7 @@
                 <a:ea typeface="MS PGothic"/>
                 <a:cs typeface="Helvetica"/>
               </a:rPr>
-              <a:t>…</a:t>
+              <a:t> …</a:t>
             </a:r>
           </a:p>
           <a:p>
@@ -9840,7 +8207,7 @@
                 <a:ea typeface="MS PGothic"/>
                 <a:cs typeface="Helvetica"/>
               </a:rPr>
-              <a:t>…</a:t>
+              <a:t> …</a:t>
             </a:r>
           </a:p>
           <a:p>
@@ -9905,48 +8272,6 @@
               <a:t>Our findings help to ???</a:t>
             </a:r>
             <a:endParaRPr lang="en-US" sz="4200" dirty="0"/>
-          </a:p>
-        </p:txBody>
-      </p:sp>
-      <p:sp>
-        <p:nvSpPr>
-          <p:cNvPr id="15454" name="TextBox 15453">
-            <a:extLst>
-              <a:ext uri="{FF2B5EF4-FFF2-40B4-BE49-F238E27FC236}">
-                <a16:creationId xmlns:a16="http://schemas.microsoft.com/office/drawing/2014/main" id="{13B2FFDE-8D7C-898B-769D-CAF01351FCBA}"/>
-              </a:ext>
-            </a:extLst>
-          </p:cNvPr>
-          <p:cNvSpPr txBox="1"/>
-          <p:nvPr/>
-        </p:nvSpPr>
-        <p:spPr>
-          <a:xfrm>
-            <a:off x="39306381" y="20682657"/>
-            <a:ext cx="3784646" cy="523220"/>
-          </a:xfrm>
-          <a:prstGeom prst="rect">
-            <a:avLst/>
-          </a:prstGeom>
-          <a:noFill/>
-        </p:spPr>
-        <p:txBody>
-          <a:bodyPr wrap="square">
-            <a:spAutoFit/>
-          </a:bodyPr>
-          <a:lstStyle/>
-          <a:p>
-            <a:pPr algn="ctr"/>
-            <a:r>
-              <a:rPr lang="en-US" sz="2800" dirty="0">
-                <a:latin typeface="Helvetica"/>
-                <a:ea typeface="MS PGothic"/>
-              </a:rPr>
-              <a:t>Composite Reward</a:t>
-            </a:r>
-            <a:endParaRPr lang="en-US" sz="2800" dirty="0">
-              <a:latin typeface="Helvetica"/>
-            </a:endParaRPr>
           </a:p>
         </p:txBody>
       </p:sp>
@@ -10122,8 +8447,8 @@
         </p:nvSpPr>
         <p:spPr bwMode="auto">
           <a:xfrm>
-            <a:off x="631650" y="15031860"/>
-            <a:ext cx="6233543" cy="612410"/>
+            <a:off x="681129" y="15250685"/>
+            <a:ext cx="6101659" cy="707229"/>
           </a:xfrm>
           <a:prstGeom prst="roundRect">
             <a:avLst/>
@@ -10152,8 +8477,16 @@
           <a:p>
             <a:pPr defTabSz="4389438" eaLnBrk="1" hangingPunct="1"/>
             <a:r>
-              <a:rPr lang="en-US" sz="3000" dirty="0"/>
-              <a:t>You are given $8 for the trial. </a:t>
+              <a:rPr lang="en-US" sz="3500" u="sng" dirty="0"/>
+              <a:t>You are given </a:t>
+            </a:r>
+            <a:r>
+              <a:rPr lang="en-US" sz="3500" b="1" u="sng" dirty="0"/>
+              <a:t>$8</a:t>
+            </a:r>
+            <a:r>
+              <a:rPr lang="en-US" sz="3500" u="sng" dirty="0"/>
+              <a:t> for the trial. </a:t>
             </a:r>
           </a:p>
           <a:p>
@@ -10189,10 +8522,10 @@
       </p:sp>
       <p:grpSp>
         <p:nvGrpSpPr>
-          <p:cNvPr id="15435" name="Group 15434">
+          <p:cNvPr id="15592" name="Group 15591">
             <a:extLst>
               <a:ext uri="{FF2B5EF4-FFF2-40B4-BE49-F238E27FC236}">
-                <a16:creationId xmlns:a16="http://schemas.microsoft.com/office/drawing/2014/main" id="{91D64F50-CCC5-FF57-B24F-9D18D2A12681}"/>
+                <a16:creationId xmlns:a16="http://schemas.microsoft.com/office/drawing/2014/main" id="{415B0EBC-8379-F485-6113-E5DF57F87E19}"/>
               </a:ext>
             </a:extLst>
           </p:cNvPr>
@@ -10201,10 +8534,10 @@
         </p:nvGrpSpPr>
         <p:grpSpPr>
           <a:xfrm>
-            <a:off x="2079425" y="21133835"/>
-            <a:ext cx="3898887" cy="1569660"/>
-            <a:chOff x="2150236" y="20985676"/>
-            <a:chExt cx="3898887" cy="1569660"/>
+            <a:off x="2182475" y="21738507"/>
+            <a:ext cx="4667290" cy="1325771"/>
+            <a:chOff x="1804103" y="21738507"/>
+            <a:chExt cx="4667290" cy="1325771"/>
           </a:xfrm>
         </p:grpSpPr>
         <p:sp>
@@ -10221,7 +8554,7 @@
           </p:nvSpPr>
           <p:spPr>
             <a:xfrm>
-              <a:off x="4609305" y="21151595"/>
+              <a:off x="5031575" y="21740839"/>
               <a:ext cx="1439818" cy="1323439"/>
             </a:xfrm>
             <a:prstGeom prst="rect">
@@ -10260,8 +8593,8 @@
           </p:nvSpPr>
           <p:spPr bwMode="auto">
             <a:xfrm>
-              <a:off x="2150236" y="20985676"/>
-              <a:ext cx="2382793" cy="1569660"/>
+              <a:off x="1804103" y="21738507"/>
+              <a:ext cx="2967279" cy="1168944"/>
             </a:xfrm>
             <a:prstGeom prst="roundRect">
               <a:avLst/>
@@ -10340,10 +8673,10 @@
         </p:nvGrpSpPr>
         <p:grpSpPr>
           <a:xfrm>
-            <a:off x="631650" y="18495767"/>
-            <a:ext cx="3370254" cy="2302479"/>
-            <a:chOff x="631650" y="18495767"/>
-            <a:chExt cx="3370254" cy="2302479"/>
+            <a:off x="530502" y="18979791"/>
+            <a:ext cx="4534151" cy="2464546"/>
+            <a:chOff x="533974" y="18532980"/>
+            <a:chExt cx="4534151" cy="2464546"/>
           </a:xfrm>
         </p:grpSpPr>
         <p:sp>
@@ -10360,8 +8693,8 @@
           </p:nvSpPr>
           <p:spPr bwMode="auto">
             <a:xfrm>
-              <a:off x="631650" y="19228586"/>
-              <a:ext cx="3370254" cy="1569660"/>
+              <a:off x="533974" y="19334093"/>
+              <a:ext cx="4534151" cy="1663433"/>
             </a:xfrm>
             <a:prstGeom prst="roundRect">
               <a:avLst/>
@@ -10391,7 +8724,7 @@
               <a:pPr defTabSz="4389438" eaLnBrk="1" hangingPunct="1"/>
               <a:r>
                 <a:rPr lang="en-US" sz="3000" dirty="0"/>
-                <a:t>You choose an amount to share with your partner.</a:t>
+                <a:t>You choose a higher or lower amount to share with your partner.</a:t>
               </a:r>
             </a:p>
             <a:p>
@@ -10441,12 +8774,12 @@
           </p:nvCxnSpPr>
           <p:spPr bwMode="auto">
             <a:xfrm flipV="1">
-              <a:off x="1252845" y="18495767"/>
-              <a:ext cx="1111214" cy="732821"/>
+              <a:off x="2361558" y="18532980"/>
+              <a:ext cx="953880" cy="801113"/>
             </a:xfrm>
             <a:prstGeom prst="bentConnector3">
               <a:avLst>
-                <a:gd name="adj1" fmla="val 1831"/>
+                <a:gd name="adj1" fmla="val -3922"/>
               </a:avLst>
             </a:prstGeom>
             <a:solidFill>
@@ -10467,1282 +8800,6 @@
       </p:grpSp>
       <p:grpSp>
         <p:nvGrpSpPr>
-          <p:cNvPr id="15489" name="Group 15488">
-            <a:extLst>
-              <a:ext uri="{FF2B5EF4-FFF2-40B4-BE49-F238E27FC236}">
-                <a16:creationId xmlns:a16="http://schemas.microsoft.com/office/drawing/2014/main" id="{2951BED7-5D33-D9B9-A2B4-2D6D3E26469E}"/>
-              </a:ext>
-            </a:extLst>
-          </p:cNvPr>
-          <p:cNvGrpSpPr/>
-          <p:nvPr/>
-        </p:nvGrpSpPr>
-        <p:grpSpPr>
-          <a:xfrm>
-            <a:off x="741529" y="15880810"/>
-            <a:ext cx="14307083" cy="10069546"/>
-            <a:chOff x="741529" y="15748222"/>
-            <a:chExt cx="14307083" cy="10069546"/>
-          </a:xfrm>
-        </p:grpSpPr>
-        <p:grpSp>
-          <p:nvGrpSpPr>
-            <p:cNvPr id="15428" name="Group 15427">
-              <a:extLst>
-                <a:ext uri="{FF2B5EF4-FFF2-40B4-BE49-F238E27FC236}">
-                  <a16:creationId xmlns:a16="http://schemas.microsoft.com/office/drawing/2014/main" id="{788D9291-9D84-C5C9-22EF-259D72BF4C72}"/>
-                </a:ext>
-              </a:extLst>
-            </p:cNvPr>
-            <p:cNvGrpSpPr/>
-            <p:nvPr/>
-          </p:nvGrpSpPr>
-          <p:grpSpPr>
-            <a:xfrm>
-              <a:off x="2652237" y="15748222"/>
-              <a:ext cx="12396375" cy="10069546"/>
-              <a:chOff x="2781091" y="15729662"/>
-              <a:chExt cx="12396375" cy="10069546"/>
-            </a:xfrm>
-          </p:grpSpPr>
-          <p:pic>
-            <p:nvPicPr>
-              <p:cNvPr id="16" name="Picture 15" descr="A screenshot of a computer&#10;&#10;Description automatically generated">
-                <a:extLst>
-                  <a:ext uri="{FF2B5EF4-FFF2-40B4-BE49-F238E27FC236}">
-                    <a16:creationId xmlns:a16="http://schemas.microsoft.com/office/drawing/2014/main" id="{B07BD813-AE34-D73D-AC53-EFCB279F97D1}"/>
-                  </a:ext>
-                </a:extLst>
-              </p:cNvPr>
-              <p:cNvPicPr>
-                <a:picLocks noChangeAspect="1"/>
-              </p:cNvPicPr>
-              <p:nvPr/>
-            </p:nvPicPr>
-            <p:blipFill>
-              <a:blip r:embed="rId6">
-                <a:extLst>
-                  <a:ext uri="{28A0092B-C50C-407E-A947-70E740481C1C}">
-                    <a14:useLocalDpi xmlns:a14="http://schemas.microsoft.com/office/drawing/2010/main" val="0"/>
-                  </a:ext>
-                </a:extLst>
-              </a:blip>
-              <a:stretch>
-                <a:fillRect/>
-              </a:stretch>
-            </p:blipFill>
-            <p:spPr>
-              <a:xfrm>
-                <a:off x="2781091" y="15729662"/>
-                <a:ext cx="12396375" cy="10069546"/>
-              </a:xfrm>
-              <a:prstGeom prst="rect">
-                <a:avLst/>
-              </a:prstGeom>
-            </p:spPr>
-          </p:pic>
-          <p:grpSp>
-            <p:nvGrpSpPr>
-              <p:cNvPr id="71" name="Group 70">
-                <a:extLst>
-                  <a:ext uri="{FF2B5EF4-FFF2-40B4-BE49-F238E27FC236}">
-                    <a16:creationId xmlns:a16="http://schemas.microsoft.com/office/drawing/2014/main" id="{814CA469-7657-DBE5-12BC-BAA454599468}"/>
-                  </a:ext>
-                </a:extLst>
-              </p:cNvPr>
-              <p:cNvGrpSpPr/>
-              <p:nvPr/>
-            </p:nvGrpSpPr>
-            <p:grpSpPr>
-              <a:xfrm>
-                <a:off x="9652951" y="17772995"/>
-                <a:ext cx="3819225" cy="1953370"/>
-                <a:chOff x="9671298" y="17666601"/>
-                <a:chExt cx="3819225" cy="1953370"/>
-              </a:xfrm>
-            </p:grpSpPr>
-            <p:cxnSp>
-              <p:nvCxnSpPr>
-                <p:cNvPr id="20" name="Connector: Elbow 19">
-                  <a:extLst>
-                    <a:ext uri="{FF2B5EF4-FFF2-40B4-BE49-F238E27FC236}">
-                      <a16:creationId xmlns:a16="http://schemas.microsoft.com/office/drawing/2014/main" id="{4C9C54D6-8639-996D-7EDB-4A5B70577FDF}"/>
-                    </a:ext>
-                  </a:extLst>
-                </p:cNvPr>
-                <p:cNvCxnSpPr>
-                  <a:cxnSpLocks/>
-                </p:cNvCxnSpPr>
-                <p:nvPr/>
-              </p:nvCxnSpPr>
-              <p:spPr bwMode="auto">
-                <a:xfrm rot="16200000" flipH="1">
-                  <a:off x="12757996" y="18887445"/>
-                  <a:ext cx="1066831" cy="398222"/>
-                </a:xfrm>
-                <a:prstGeom prst="bentConnector3">
-                  <a:avLst>
-                    <a:gd name="adj1" fmla="val -750"/>
-                  </a:avLst>
-                </a:prstGeom>
-                <a:solidFill>
-                  <a:schemeClr val="accent1"/>
-                </a:solidFill>
-                <a:ln w="76200" cap="flat" cmpd="sng" algn="ctr">
-                  <a:solidFill>
-                    <a:schemeClr val="tx1"/>
-                  </a:solidFill>
-                  <a:prstDash val="dash"/>
-                  <a:round/>
-                  <a:headEnd type="none" w="med" len="med"/>
-                  <a:tailEnd type="triangle"/>
-                </a:ln>
-                <a:effectLst/>
-              </p:spPr>
-            </p:cxnSp>
-            <p:grpSp>
-              <p:nvGrpSpPr>
-                <p:cNvPr id="65" name="Group 64">
-                  <a:extLst>
-                    <a:ext uri="{FF2B5EF4-FFF2-40B4-BE49-F238E27FC236}">
-                      <a16:creationId xmlns:a16="http://schemas.microsoft.com/office/drawing/2014/main" id="{89055108-BE18-C2C5-0FF5-A55BEBB4A05F}"/>
-                    </a:ext>
-                  </a:extLst>
-                </p:cNvPr>
-                <p:cNvGrpSpPr/>
-                <p:nvPr/>
-              </p:nvGrpSpPr>
-              <p:grpSpPr>
-                <a:xfrm>
-                  <a:off x="9671298" y="17666601"/>
-                  <a:ext cx="3434963" cy="1716829"/>
-                  <a:chOff x="9671298" y="17666601"/>
-                  <a:chExt cx="3434963" cy="1716829"/>
-                </a:xfrm>
-              </p:grpSpPr>
-              <p:sp>
-                <p:nvSpPr>
-                  <p:cNvPr id="8" name="TextBox 7">
-                    <a:extLst>
-                      <a:ext uri="{FF2B5EF4-FFF2-40B4-BE49-F238E27FC236}">
-                        <a16:creationId xmlns:a16="http://schemas.microsoft.com/office/drawing/2014/main" id="{8F94C34F-C114-09E7-7592-2C68A047774A}"/>
-                      </a:ext>
-                    </a:extLst>
-                  </p:cNvPr>
-                  <p:cNvSpPr txBox="1"/>
-                  <p:nvPr/>
-                </p:nvSpPr>
-                <p:spPr>
-                  <a:xfrm>
-                    <a:off x="9671298" y="17740837"/>
-                    <a:ext cx="3434963" cy="1569660"/>
-                  </a:xfrm>
-                  <a:prstGeom prst="rect">
-                    <a:avLst/>
-                  </a:prstGeom>
-                  <a:noFill/>
-                </p:spPr>
-                <p:txBody>
-                  <a:bodyPr rot="0" spcFirstLastPara="0" vertOverflow="overflow" horzOverflow="overflow" vert="horz" wrap="square" lIns="91440" tIns="45720" rIns="91440" bIns="45720" numCol="1" spcCol="0" rtlCol="0" fromWordArt="0" anchor="t" anchorCtr="0" forceAA="0" compatLnSpc="1">
-                    <a:prstTxWarp prst="textNoShape">
-                      <a:avLst/>
-                    </a:prstTxWarp>
-                    <a:spAutoFit/>
-                  </a:bodyPr>
-                  <a:lstStyle/>
-                  <a:p>
-                    <a:pPr algn="ctr"/>
-                    <a:r>
-                      <a:rPr lang="en-US" sz="3200" b="1" dirty="0">
-                        <a:latin typeface="Helvetica"/>
-                        <a:ea typeface="MS PGothic"/>
-                      </a:rPr>
-                      <a:t>Scan the QR code to see the</a:t>
-                    </a:r>
-                    <a:endParaRPr lang="en-US" sz="3200" b="1" dirty="0"/>
-                  </a:p>
-                  <a:p>
-                    <a:pPr algn="ctr"/>
-                    <a:r>
-                      <a:rPr lang="en-US" sz="3200" b="1" u="sng" dirty="0">
-                        <a:latin typeface="Helvetica"/>
-                        <a:ea typeface="MS PGothic"/>
-                      </a:rPr>
-                      <a:t>Pre-registration!</a:t>
-                    </a:r>
-                    <a:endParaRPr lang="en-US" sz="3200" b="1" u="sng" dirty="0"/>
-                  </a:p>
-                </p:txBody>
-              </p:sp>
-              <p:sp>
-                <p:nvSpPr>
-                  <p:cNvPr id="15" name="Rectangle 14">
-                    <a:extLst>
-                      <a:ext uri="{FF2B5EF4-FFF2-40B4-BE49-F238E27FC236}">
-                        <a16:creationId xmlns:a16="http://schemas.microsoft.com/office/drawing/2014/main" id="{353421B0-7681-A37B-CA3F-986E07C1DB77}"/>
-                      </a:ext>
-                    </a:extLst>
-                  </p:cNvPr>
-                  <p:cNvSpPr/>
-                  <p:nvPr/>
-                </p:nvSpPr>
-                <p:spPr bwMode="auto">
-                  <a:xfrm>
-                    <a:off x="9719468" y="17666601"/>
-                    <a:ext cx="3375557" cy="1716829"/>
-                  </a:xfrm>
-                  <a:prstGeom prst="rect">
-                    <a:avLst/>
-                  </a:prstGeom>
-                  <a:noFill/>
-                  <a:ln w="57150" cap="flat" cmpd="sng" algn="ctr">
-                    <a:solidFill>
-                      <a:schemeClr val="tx1"/>
-                    </a:solidFill>
-                    <a:prstDash val="solid"/>
-                    <a:round/>
-                    <a:headEnd type="none" w="med" len="med"/>
-                    <a:tailEnd type="none" w="med" len="med"/>
-                  </a:ln>
-                  <a:effectLst/>
-                </p:spPr>
-                <p:txBody>
-                  <a:bodyPr vert="horz" wrap="square" lIns="91440" tIns="45720" rIns="91440" bIns="45720" numCol="1" rtlCol="0" anchor="t" anchorCtr="0" compatLnSpc="1">
-                    <a:prstTxWarp prst="textNoShape">
-                      <a:avLst/>
-                    </a:prstTxWarp>
-                  </a:bodyPr>
-                  <a:lstStyle/>
-                  <a:p>
-                    <a:pPr marL="0" marR="0" indent="0" algn="l" defTabSz="4389438" rtl="0" eaLnBrk="1" fontAlgn="base" latinLnBrk="0" hangingPunct="1">
-                      <a:lnSpc>
-                        <a:spcPct val="100000"/>
-                      </a:lnSpc>
-                      <a:spcBef>
-                        <a:spcPct val="0"/>
-                      </a:spcBef>
-                      <a:spcAft>
-                        <a:spcPct val="0"/>
-                      </a:spcAft>
-                      <a:buClrTx/>
-                      <a:buSzTx/>
-                      <a:buFontTx/>
-                      <a:buNone/>
-                      <a:tabLst/>
-                    </a:pPr>
-                    <a:endParaRPr kumimoji="0" lang="en-US" sz="1800" b="0" i="0" u="none" strike="noStrike" cap="none" normalizeH="0" baseline="0">
-                      <a:ln>
-                        <a:noFill/>
-                      </a:ln>
-                      <a:solidFill>
-                        <a:schemeClr val="tx1"/>
-                      </a:solidFill>
-                      <a:effectLst/>
-                      <a:latin typeface="Arial" charset="0"/>
-                      <a:cs typeface="Arial" charset="0"/>
-                    </a:endParaRPr>
-                  </a:p>
-                </p:txBody>
-              </p:sp>
-            </p:grpSp>
-          </p:grpSp>
-          <p:pic>
-            <p:nvPicPr>
-              <p:cNvPr id="7" name="Picture 6">
-                <a:extLst>
-                  <a:ext uri="{FF2B5EF4-FFF2-40B4-BE49-F238E27FC236}">
-                    <a16:creationId xmlns:a16="http://schemas.microsoft.com/office/drawing/2014/main" id="{E5B61256-0745-91A9-AD49-FA138651C227}"/>
-                  </a:ext>
-                </a:extLst>
-              </p:cNvPr>
-              <p:cNvPicPr>
-                <a:picLocks noChangeAspect="1"/>
-              </p:cNvPicPr>
-              <p:nvPr/>
-            </p:nvPicPr>
-            <p:blipFill>
-              <a:blip r:embed="rId7"/>
-              <a:stretch>
-                <a:fillRect/>
-              </a:stretch>
-            </p:blipFill>
-            <p:spPr>
-              <a:xfrm>
-                <a:off x="12246737" y="19903601"/>
-                <a:ext cx="2419305" cy="2411132"/>
-              </a:xfrm>
-              <a:prstGeom prst="rect">
-                <a:avLst/>
-              </a:prstGeom>
-            </p:spPr>
-          </p:pic>
-        </p:grpSp>
-        <p:sp>
-          <p:nvSpPr>
-            <p:cNvPr id="15479" name="Rounded Rectangle 15478">
-              <a:extLst>
-                <a:ext uri="{FF2B5EF4-FFF2-40B4-BE49-F238E27FC236}">
-                  <a16:creationId xmlns:a16="http://schemas.microsoft.com/office/drawing/2014/main" id="{07C0CAA6-BAA5-C192-15EA-35D34F993B8C}"/>
-                </a:ext>
-              </a:extLst>
-            </p:cNvPr>
-            <p:cNvSpPr/>
-            <p:nvPr/>
-          </p:nvSpPr>
-          <p:spPr bwMode="auto">
-            <a:xfrm>
-              <a:off x="741529" y="24366169"/>
-              <a:ext cx="3638652" cy="1191968"/>
-            </a:xfrm>
-            <a:prstGeom prst="roundRect">
-              <a:avLst/>
-            </a:prstGeom>
-            <a:solidFill>
-              <a:schemeClr val="accent1"/>
-            </a:solidFill>
-            <a:ln w="50800" cap="flat" cmpd="sng" algn="ctr">
-              <a:solidFill>
-                <a:schemeClr val="tx1"/>
-              </a:solidFill>
-              <a:prstDash val="solid"/>
-              <a:round/>
-              <a:headEnd type="none" w="med" len="med"/>
-              <a:tailEnd type="none" w="med" len="med"/>
-            </a:ln>
-            <a:effectLst/>
-          </p:spPr>
-          <p:txBody>
-            <a:bodyPr vert="horz" wrap="square" lIns="91440" tIns="45720" rIns="91440" bIns="45720" numCol="1" rtlCol="0" anchor="t" anchorCtr="0" compatLnSpc="1">
-              <a:prstTxWarp prst="textNoShape">
-                <a:avLst/>
-              </a:prstTxWarp>
-            </a:bodyPr>
-            <a:lstStyle/>
-            <a:p>
-              <a:pPr defTabSz="4389438" eaLnBrk="1" hangingPunct="1"/>
-              <a:r>
-                <a:rPr lang="en-US" sz="3000" dirty="0"/>
-                <a:t>You see your partner’s response.</a:t>
-              </a:r>
-            </a:p>
-            <a:p>
-              <a:pPr marL="0" marR="0" indent="0" algn="l" defTabSz="4389438" rtl="0" eaLnBrk="1" fontAlgn="base" latinLnBrk="0" hangingPunct="1">
-                <a:lnSpc>
-                  <a:spcPct val="100000"/>
-                </a:lnSpc>
-                <a:spcBef>
-                  <a:spcPct val="0"/>
-                </a:spcBef>
-                <a:spcAft>
-                  <a:spcPct val="0"/>
-                </a:spcAft>
-                <a:buClrTx/>
-                <a:buSzTx/>
-                <a:buFontTx/>
-                <a:buNone/>
-                <a:tabLst/>
-              </a:pPr>
-              <a:endParaRPr kumimoji="0" lang="en-US" sz="1800" b="0" i="0" u="none" strike="noStrike" cap="none" normalizeH="0" baseline="0" dirty="0">
-                <a:ln>
-                  <a:noFill/>
-                </a:ln>
-                <a:solidFill>
-                  <a:schemeClr val="tx1"/>
-                </a:solidFill>
-                <a:effectLst/>
-                <a:latin typeface="Arial" charset="0"/>
-                <a:cs typeface="Arial" charset="0"/>
-              </a:endParaRPr>
-            </a:p>
-          </p:txBody>
-        </p:sp>
-        <p:cxnSp>
-          <p:nvCxnSpPr>
-            <p:cNvPr id="15482" name="Elbow Connector 15481">
-              <a:extLst>
-                <a:ext uri="{FF2B5EF4-FFF2-40B4-BE49-F238E27FC236}">
-                  <a16:creationId xmlns:a16="http://schemas.microsoft.com/office/drawing/2014/main" id="{34530FBC-4A4D-E431-FA44-6FAEC08B2B30}"/>
-                </a:ext>
-              </a:extLst>
-            </p:cNvPr>
-            <p:cNvCxnSpPr>
-              <a:cxnSpLocks/>
-            </p:cNvCxnSpPr>
-            <p:nvPr/>
-          </p:nvCxnSpPr>
-          <p:spPr bwMode="auto">
-            <a:xfrm flipV="1">
-              <a:off x="3531898" y="23865396"/>
-              <a:ext cx="848283" cy="500773"/>
-            </a:xfrm>
-            <a:prstGeom prst="bentConnector3">
-              <a:avLst>
-                <a:gd name="adj1" fmla="val -7841"/>
-              </a:avLst>
-            </a:prstGeom>
-            <a:solidFill>
-              <a:schemeClr val="accent1"/>
-            </a:solidFill>
-            <a:ln w="50800" cap="flat" cmpd="sng" algn="ctr">
-              <a:solidFill>
-                <a:schemeClr val="tx1"/>
-              </a:solidFill>
-              <a:prstDash val="solid"/>
-              <a:round/>
-              <a:headEnd type="none" w="med" len="med"/>
-              <a:tailEnd type="triangle"/>
-            </a:ln>
-            <a:effectLst/>
-          </p:spPr>
-        </p:cxnSp>
-      </p:grpSp>
-      <p:grpSp>
-        <p:nvGrpSpPr>
-          <p:cNvPr id="15504" name="Group 15503">
-            <a:extLst>
-              <a:ext uri="{FF2B5EF4-FFF2-40B4-BE49-F238E27FC236}">
-                <a16:creationId xmlns:a16="http://schemas.microsoft.com/office/drawing/2014/main" id="{644DC864-CB77-FB1C-CD61-505A98BC9282}"/>
-              </a:ext>
-            </a:extLst>
-          </p:cNvPr>
-          <p:cNvGrpSpPr/>
-          <p:nvPr/>
-        </p:nvGrpSpPr>
-        <p:grpSpPr>
-          <a:xfrm>
-            <a:off x="15451643" y="25162475"/>
-            <a:ext cx="7503010" cy="5479971"/>
-            <a:chOff x="15470883" y="25749188"/>
-            <a:chExt cx="7503010" cy="5479971"/>
-          </a:xfrm>
-        </p:grpSpPr>
-        <p:grpSp>
-          <p:nvGrpSpPr>
-            <p:cNvPr id="15501" name="Group 15500">
-              <a:extLst>
-                <a:ext uri="{FF2B5EF4-FFF2-40B4-BE49-F238E27FC236}">
-                  <a16:creationId xmlns:a16="http://schemas.microsoft.com/office/drawing/2014/main" id="{4EBE445F-826A-9AF7-418D-8850E8E507A0}"/>
-                </a:ext>
-              </a:extLst>
-            </p:cNvPr>
-            <p:cNvGrpSpPr/>
-            <p:nvPr/>
-          </p:nvGrpSpPr>
-          <p:grpSpPr>
-            <a:xfrm>
-              <a:off x="15470883" y="25749188"/>
-              <a:ext cx="7503010" cy="4871119"/>
-              <a:chOff x="15598291" y="25491649"/>
-              <a:chExt cx="7503010" cy="4871119"/>
-            </a:xfrm>
-          </p:grpSpPr>
-          <p:sp>
-            <p:nvSpPr>
-              <p:cNvPr id="15496" name="TextBox 15495">
-                <a:extLst>
-                  <a:ext uri="{FF2B5EF4-FFF2-40B4-BE49-F238E27FC236}">
-                    <a16:creationId xmlns:a16="http://schemas.microsoft.com/office/drawing/2014/main" id="{97F12319-F968-5A70-A870-C2BAE5E8D7F2}"/>
-                  </a:ext>
-                </a:extLst>
-              </p:cNvPr>
-              <p:cNvSpPr txBox="1"/>
-              <p:nvPr/>
-            </p:nvSpPr>
-            <p:spPr>
-              <a:xfrm rot="5400000">
-                <a:off x="16099096" y="29487428"/>
-                <a:ext cx="615553" cy="894559"/>
-              </a:xfrm>
-              <a:prstGeom prst="rect">
-                <a:avLst/>
-              </a:prstGeom>
-              <a:noFill/>
-            </p:spPr>
-            <p:txBody>
-              <a:bodyPr vert="vert270" wrap="square">
-                <a:spAutoFit/>
-              </a:bodyPr>
-              <a:lstStyle/>
-              <a:p>
-                <a:pPr algn="ctr"/>
-                <a:r>
-                  <a:rPr lang="en-US" sz="2000" dirty="0">
-                    <a:latin typeface="Helvetica"/>
-                    <a:ea typeface="MS PGothic"/>
-                  </a:rPr>
-                  <a:t>-500</a:t>
-                </a:r>
-              </a:p>
-            </p:txBody>
-          </p:sp>
-          <p:grpSp>
-            <p:nvGrpSpPr>
-              <p:cNvPr id="15500" name="Group 15499">
-                <a:extLst>
-                  <a:ext uri="{FF2B5EF4-FFF2-40B4-BE49-F238E27FC236}">
-                    <a16:creationId xmlns:a16="http://schemas.microsoft.com/office/drawing/2014/main" id="{5DE2D8B9-CD7D-1452-B68B-1344AA4FF437}"/>
-                  </a:ext>
-                </a:extLst>
-              </p:cNvPr>
-              <p:cNvGrpSpPr/>
-              <p:nvPr/>
-            </p:nvGrpSpPr>
-            <p:grpSpPr>
-              <a:xfrm>
-                <a:off x="15598291" y="25491649"/>
-                <a:ext cx="7503010" cy="4871119"/>
-                <a:chOff x="15598291" y="25491649"/>
-                <a:chExt cx="7503010" cy="4871119"/>
-              </a:xfrm>
-            </p:grpSpPr>
-            <p:sp>
-              <p:nvSpPr>
-                <p:cNvPr id="50" name="TextBox 49">
-                  <a:extLst>
-                    <a:ext uri="{FF2B5EF4-FFF2-40B4-BE49-F238E27FC236}">
-                      <a16:creationId xmlns:a16="http://schemas.microsoft.com/office/drawing/2014/main" id="{3E5D8420-A794-E6A2-1628-ED1203DBAD11}"/>
-                    </a:ext>
-                  </a:extLst>
-                </p:cNvPr>
-                <p:cNvSpPr txBox="1"/>
-                <p:nvPr/>
-              </p:nvSpPr>
-              <p:spPr>
-                <a:xfrm>
-                  <a:off x="15598291" y="25950356"/>
-                  <a:ext cx="615553" cy="3833392"/>
-                </a:xfrm>
-                <a:prstGeom prst="rect">
-                  <a:avLst/>
-                </a:prstGeom>
-                <a:noFill/>
-              </p:spPr>
-              <p:txBody>
-                <a:bodyPr vert="vert270" wrap="square">
-                  <a:spAutoFit/>
-                </a:bodyPr>
-                <a:lstStyle/>
-                <a:p>
-                  <a:pPr algn="ctr"/>
-                  <a:r>
-                    <a:rPr lang="en-US" sz="2800" dirty="0">
-                      <a:latin typeface="Helvetica"/>
-                    </a:rPr>
-                    <a:t>ACC Activation</a:t>
-                  </a:r>
-                </a:p>
-              </p:txBody>
-            </p:sp>
-            <p:grpSp>
-              <p:nvGrpSpPr>
-                <p:cNvPr id="15499" name="Group 15498">
-                  <a:extLst>
-                    <a:ext uri="{FF2B5EF4-FFF2-40B4-BE49-F238E27FC236}">
-                      <a16:creationId xmlns:a16="http://schemas.microsoft.com/office/drawing/2014/main" id="{96FE859C-4C1F-A2C4-A1D3-E89307BFE71C}"/>
-                    </a:ext>
-                  </a:extLst>
-                </p:cNvPr>
-                <p:cNvGrpSpPr/>
-                <p:nvPr/>
-              </p:nvGrpSpPr>
-              <p:grpSpPr>
-                <a:xfrm>
-                  <a:off x="16012786" y="25491649"/>
-                  <a:ext cx="7088515" cy="4871119"/>
-                  <a:chOff x="16012786" y="25491649"/>
-                  <a:chExt cx="7088515" cy="4871119"/>
-                </a:xfrm>
-              </p:grpSpPr>
-              <p:pic>
-                <p:nvPicPr>
-                  <p:cNvPr id="15495" name="Picture 15494" descr="A white background with red dots&#10;&#10;Description automatically generated">
-                    <a:extLst>
-                      <a:ext uri="{FF2B5EF4-FFF2-40B4-BE49-F238E27FC236}">
-                        <a16:creationId xmlns:a16="http://schemas.microsoft.com/office/drawing/2014/main" id="{F821A0E6-FCAD-A479-2153-337980B9048C}"/>
-                      </a:ext>
-                    </a:extLst>
-                  </p:cNvPr>
-                  <p:cNvPicPr>
-                    <a:picLocks noChangeAspect="1"/>
-                  </p:cNvPicPr>
-                  <p:nvPr/>
-                </p:nvPicPr>
-                <p:blipFill rotWithShape="1">
-                  <a:blip r:embed="rId8">
-                    <a:duotone>
-                      <a:prstClr val="black"/>
-                      <a:srgbClr val="D9C3A5">
-                        <a:tint val="50000"/>
-                        <a:satMod val="180000"/>
-                      </a:srgbClr>
-                    </a:duotone>
-                    <a:extLst>
-                      <a:ext uri="{BEBA8EAE-BF5A-486C-A8C5-ECC9F3942E4B}">
-                        <a14:imgProps xmlns:a14="http://schemas.microsoft.com/office/drawing/2010/main">
-                          <a14:imgLayer r:embed="rId9">
-                            <a14:imgEffect>
-                              <a14:colorTemperature colorTemp="9463"/>
-                            </a14:imgEffect>
-                            <a14:imgEffect>
-                              <a14:saturation sat="377000"/>
-                            </a14:imgEffect>
-                          </a14:imgLayer>
-                        </a14:imgProps>
-                      </a:ext>
-                      <a:ext uri="{28A0092B-C50C-407E-A947-70E740481C1C}">
-                        <a14:useLocalDpi xmlns:a14="http://schemas.microsoft.com/office/drawing/2010/main" val="0"/>
-                      </a:ext>
-                    </a:extLst>
-                  </a:blip>
-                  <a:srcRect l="6725" r="12309" b="12526"/>
-                  <a:stretch/>
-                </p:blipFill>
-                <p:spPr>
-                  <a:xfrm>
-                    <a:off x="16872273" y="25491649"/>
-                    <a:ext cx="6229028" cy="4871119"/>
-                  </a:xfrm>
-                  <a:prstGeom prst="rect">
-                    <a:avLst/>
-                  </a:prstGeom>
-                  <a:ln w="50800">
-                    <a:solidFill>
-                      <a:schemeClr val="tx1"/>
-                    </a:solidFill>
-                  </a:ln>
-                </p:spPr>
-              </p:pic>
-              <p:sp>
-                <p:nvSpPr>
-                  <p:cNvPr id="15497" name="TextBox 15496">
-                    <a:extLst>
-                      <a:ext uri="{FF2B5EF4-FFF2-40B4-BE49-F238E27FC236}">
-                        <a16:creationId xmlns:a16="http://schemas.microsoft.com/office/drawing/2014/main" id="{E8D4CB9D-FFD4-3493-3F54-665739D04D07}"/>
-                      </a:ext>
-                    </a:extLst>
-                  </p:cNvPr>
-                  <p:cNvSpPr txBox="1"/>
-                  <p:nvPr/>
-                </p:nvSpPr>
-                <p:spPr>
-                  <a:xfrm rot="5400000">
-                    <a:off x="16213844" y="25459501"/>
-                    <a:ext cx="492443" cy="894559"/>
-                  </a:xfrm>
-                  <a:prstGeom prst="rect">
-                    <a:avLst/>
-                  </a:prstGeom>
-                  <a:noFill/>
-                </p:spPr>
-                <p:txBody>
-                  <a:bodyPr vert="vert270" wrap="square">
-                    <a:spAutoFit/>
-                  </a:bodyPr>
-                  <a:lstStyle/>
-                  <a:p>
-                    <a:pPr algn="ctr"/>
-                    <a:r>
-                      <a:rPr lang="en-US" sz="2000" dirty="0">
-                        <a:latin typeface="Helvetica"/>
-                        <a:ea typeface="MS PGothic"/>
-                      </a:rPr>
-                      <a:t>500</a:t>
-                    </a:r>
-                  </a:p>
-                </p:txBody>
-              </p:sp>
-            </p:grpSp>
-          </p:grpSp>
-          <p:sp>
-            <p:nvSpPr>
-              <p:cNvPr id="15498" name="TextBox 15497">
-                <a:extLst>
-                  <a:ext uri="{FF2B5EF4-FFF2-40B4-BE49-F238E27FC236}">
-                    <a16:creationId xmlns:a16="http://schemas.microsoft.com/office/drawing/2014/main" id="{477A1EE9-E5E5-6824-266B-1635FC9DBB6C}"/>
-                  </a:ext>
-                </a:extLst>
-              </p:cNvPr>
-              <p:cNvSpPr txBox="1"/>
-              <p:nvPr/>
-            </p:nvSpPr>
-            <p:spPr>
-              <a:xfrm rot="5400000">
-                <a:off x="16213844" y="27480909"/>
-                <a:ext cx="492443" cy="894559"/>
-              </a:xfrm>
-              <a:prstGeom prst="rect">
-                <a:avLst/>
-              </a:prstGeom>
-              <a:noFill/>
-            </p:spPr>
-            <p:txBody>
-              <a:bodyPr vert="vert270" wrap="square">
-                <a:spAutoFit/>
-              </a:bodyPr>
-              <a:lstStyle/>
-              <a:p>
-                <a:pPr algn="ctr"/>
-                <a:r>
-                  <a:rPr lang="en-US" sz="2000" dirty="0">
-                    <a:latin typeface="Helvetica"/>
-                    <a:ea typeface="MS PGothic"/>
-                  </a:rPr>
-                  <a:t>0</a:t>
-                </a:r>
-              </a:p>
-            </p:txBody>
-          </p:sp>
-        </p:grpSp>
-        <p:sp>
-          <p:nvSpPr>
-            <p:cNvPr id="15502" name="TextBox 15501">
-              <a:extLst>
-                <a:ext uri="{FF2B5EF4-FFF2-40B4-BE49-F238E27FC236}">
-                  <a16:creationId xmlns:a16="http://schemas.microsoft.com/office/drawing/2014/main" id="{43DB2953-AA93-0F11-DA93-B42076077EAC}"/>
-                </a:ext>
-              </a:extLst>
-            </p:cNvPr>
-            <p:cNvSpPr txBox="1"/>
-            <p:nvPr/>
-          </p:nvSpPr>
-          <p:spPr>
-            <a:xfrm rot="5400000">
-              <a:off x="16647360" y="30664325"/>
-              <a:ext cx="492443" cy="637225"/>
-            </a:xfrm>
-            <a:prstGeom prst="rect">
-              <a:avLst/>
-            </a:prstGeom>
-            <a:noFill/>
-          </p:spPr>
-          <p:txBody>
-            <a:bodyPr vert="vert270" wrap="square">
-              <a:spAutoFit/>
-            </a:bodyPr>
-            <a:lstStyle/>
-            <a:p>
-              <a:pPr algn="ctr"/>
-              <a:r>
-                <a:rPr lang="en-US" sz="2000" dirty="0">
-                  <a:latin typeface="Helvetica"/>
-                  <a:ea typeface="MS PGothic"/>
-                </a:rPr>
-                <a:t>-1</a:t>
-              </a:r>
-            </a:p>
-          </p:txBody>
-        </p:sp>
-      </p:grpSp>
-      <p:sp>
-        <p:nvSpPr>
-          <p:cNvPr id="15505" name="TextBox 15504">
-            <a:extLst>
-              <a:ext uri="{FF2B5EF4-FFF2-40B4-BE49-F238E27FC236}">
-                <a16:creationId xmlns:a16="http://schemas.microsoft.com/office/drawing/2014/main" id="{C7E50644-C212-0221-C878-B75C7841A6FE}"/>
-              </a:ext>
-            </a:extLst>
-          </p:cNvPr>
-          <p:cNvSpPr txBox="1"/>
-          <p:nvPr/>
-        </p:nvSpPr>
-        <p:spPr>
-          <a:xfrm rot="5400000">
-            <a:off x="22478589" y="30047597"/>
-            <a:ext cx="492443" cy="637225"/>
-          </a:xfrm>
-          <a:prstGeom prst="rect">
-            <a:avLst/>
-          </a:prstGeom>
-          <a:noFill/>
-        </p:spPr>
-        <p:txBody>
-          <a:bodyPr vert="vert270" wrap="square">
-            <a:spAutoFit/>
-          </a:bodyPr>
-          <a:lstStyle/>
-          <a:p>
-            <a:pPr algn="ctr"/>
-            <a:r>
-              <a:rPr lang="en-US" sz="2000" dirty="0">
-                <a:latin typeface="Helvetica"/>
-                <a:ea typeface="MS PGothic"/>
-              </a:rPr>
-              <a:t>7</a:t>
-            </a:r>
-          </a:p>
-        </p:txBody>
-      </p:sp>
-      <p:sp>
-        <p:nvSpPr>
-          <p:cNvPr id="15506" name="TextBox 15505">
-            <a:extLst>
-              <a:ext uri="{FF2B5EF4-FFF2-40B4-BE49-F238E27FC236}">
-                <a16:creationId xmlns:a16="http://schemas.microsoft.com/office/drawing/2014/main" id="{F6AA0DD9-AF8A-14EF-EE60-8F981B287B70}"/>
-              </a:ext>
-            </a:extLst>
-          </p:cNvPr>
-          <p:cNvSpPr txBox="1"/>
-          <p:nvPr/>
-        </p:nvSpPr>
-        <p:spPr>
-          <a:xfrm rot="5400000">
-            <a:off x="19500266" y="30009878"/>
-            <a:ext cx="492443" cy="637225"/>
-          </a:xfrm>
-          <a:prstGeom prst="rect">
-            <a:avLst/>
-          </a:prstGeom>
-          <a:noFill/>
-        </p:spPr>
-        <p:txBody>
-          <a:bodyPr vert="vert270" wrap="square">
-            <a:spAutoFit/>
-          </a:bodyPr>
-          <a:lstStyle/>
-          <a:p>
-            <a:pPr algn="ctr"/>
-            <a:r>
-              <a:rPr lang="en-US" sz="2000" dirty="0">
-                <a:latin typeface="Helvetica"/>
-                <a:ea typeface="MS PGothic"/>
-              </a:rPr>
-              <a:t>3</a:t>
-            </a:r>
-          </a:p>
-        </p:txBody>
-      </p:sp>
-      <p:sp>
-        <p:nvSpPr>
-          <p:cNvPr id="15507" name="TextBox 15506">
-            <a:extLst>
-              <a:ext uri="{FF2B5EF4-FFF2-40B4-BE49-F238E27FC236}">
-                <a16:creationId xmlns:a16="http://schemas.microsoft.com/office/drawing/2014/main" id="{AAFE7BAC-F7B5-54A6-6F9D-FC90E9E56E1C}"/>
-              </a:ext>
-            </a:extLst>
-          </p:cNvPr>
-          <p:cNvSpPr txBox="1"/>
-          <p:nvPr/>
-        </p:nvSpPr>
-        <p:spPr>
-          <a:xfrm rot="5400000">
-            <a:off x="19405757" y="27269918"/>
-            <a:ext cx="538609" cy="7047408"/>
-          </a:xfrm>
-          <a:prstGeom prst="rect">
-            <a:avLst/>
-          </a:prstGeom>
-          <a:noFill/>
-        </p:spPr>
-        <p:txBody>
-          <a:bodyPr vert="vert270" wrap="square">
-            <a:spAutoFit/>
-          </a:bodyPr>
-          <a:lstStyle/>
-          <a:p>
-            <a:pPr algn="ctr"/>
-            <a:r>
-              <a:rPr lang="en-US" sz="2300" dirty="0">
-                <a:latin typeface="Helvetica"/>
-              </a:rPr>
-              <a:t>Closeness with Friends - Closeness with Strangers</a:t>
-            </a:r>
-          </a:p>
-        </p:txBody>
-      </p:sp>
-      <p:grpSp>
-        <p:nvGrpSpPr>
-          <p:cNvPr id="15521" name="Group 15520">
-            <a:extLst>
-              <a:ext uri="{FF2B5EF4-FFF2-40B4-BE49-F238E27FC236}">
-                <a16:creationId xmlns:a16="http://schemas.microsoft.com/office/drawing/2014/main" id="{64719E14-F38F-FF1C-E91E-4FC7882FC372}"/>
-              </a:ext>
-            </a:extLst>
-          </p:cNvPr>
-          <p:cNvGrpSpPr/>
-          <p:nvPr/>
-        </p:nvGrpSpPr>
-        <p:grpSpPr>
-          <a:xfrm>
-            <a:off x="35583421" y="5816737"/>
-            <a:ext cx="8287372" cy="6693875"/>
-            <a:chOff x="36784826" y="6632182"/>
-            <a:chExt cx="6753481" cy="5222307"/>
-          </a:xfrm>
-        </p:grpSpPr>
-        <p:sp>
-          <p:nvSpPr>
-            <p:cNvPr id="15434" name="TextBox 15433">
-              <a:extLst>
-                <a:ext uri="{FF2B5EF4-FFF2-40B4-BE49-F238E27FC236}">
-                  <a16:creationId xmlns:a16="http://schemas.microsoft.com/office/drawing/2014/main" id="{F42DD616-45E9-33CA-3CBB-04AC7B550D62}"/>
-                </a:ext>
-              </a:extLst>
-            </p:cNvPr>
-            <p:cNvSpPr txBox="1"/>
-            <p:nvPr/>
-          </p:nvSpPr>
-          <p:spPr>
-            <a:xfrm>
-              <a:off x="36784826" y="6632182"/>
-              <a:ext cx="615553" cy="4368929"/>
-            </a:xfrm>
-            <a:prstGeom prst="rect">
-              <a:avLst/>
-            </a:prstGeom>
-            <a:noFill/>
-          </p:spPr>
-          <p:txBody>
-            <a:bodyPr vert="vert270" wrap="square">
-              <a:spAutoFit/>
-            </a:bodyPr>
-            <a:lstStyle/>
-            <a:p>
-              <a:pPr algn="ctr"/>
-              <a:r>
-                <a:rPr lang="en-US" sz="2800" dirty="0">
-                  <a:latin typeface="Helvetica"/>
-                  <a:ea typeface="MS PGothic"/>
-                </a:rPr>
-                <a:t>Precuneus Activation</a:t>
-              </a:r>
-            </a:p>
-          </p:txBody>
-        </p:sp>
-        <p:pic>
-          <p:nvPicPr>
-            <p:cNvPr id="15418" name="Picture 15417" descr="A graph with red dots&#10;&#10;Description automatically generated">
-              <a:extLst>
-                <a:ext uri="{FF2B5EF4-FFF2-40B4-BE49-F238E27FC236}">
-                  <a16:creationId xmlns:a16="http://schemas.microsoft.com/office/drawing/2014/main" id="{7AE9EF6F-6375-47A1-D536-FAF3F473B789}"/>
-                </a:ext>
-              </a:extLst>
-            </p:cNvPr>
-            <p:cNvPicPr>
-              <a:picLocks noChangeAspect="1"/>
-            </p:cNvPicPr>
-            <p:nvPr/>
-          </p:nvPicPr>
-          <p:blipFill rotWithShape="1">
-            <a:blip r:embed="rId10">
-              <a:extLst>
-                <a:ext uri="{28A0092B-C50C-407E-A947-70E740481C1C}">
-                  <a14:useLocalDpi xmlns:a14="http://schemas.microsoft.com/office/drawing/2010/main" val="0"/>
-                </a:ext>
-              </a:extLst>
-            </a:blip>
-            <a:srcRect l="3131"/>
-            <a:stretch/>
-          </p:blipFill>
-          <p:spPr>
-            <a:xfrm>
-              <a:off x="37850303" y="6924524"/>
-              <a:ext cx="5314627" cy="4025900"/>
-            </a:xfrm>
-            <a:prstGeom prst="rect">
-              <a:avLst/>
-            </a:prstGeom>
-          </p:spPr>
-        </p:pic>
-        <p:sp>
-          <p:nvSpPr>
-            <p:cNvPr id="15420" name="TextBox 15419">
-              <a:extLst>
-                <a:ext uri="{FF2B5EF4-FFF2-40B4-BE49-F238E27FC236}">
-                  <a16:creationId xmlns:a16="http://schemas.microsoft.com/office/drawing/2014/main" id="{069F462D-BFA5-DA6C-F8A4-6704B438B9AA}"/>
-                </a:ext>
-              </a:extLst>
-            </p:cNvPr>
-            <p:cNvSpPr txBox="1"/>
-            <p:nvPr/>
-          </p:nvSpPr>
-          <p:spPr>
-            <a:xfrm>
-              <a:off x="40013832" y="11300491"/>
-              <a:ext cx="867545" cy="553998"/>
-            </a:xfrm>
-            <a:prstGeom prst="rect">
-              <a:avLst/>
-            </a:prstGeom>
-            <a:noFill/>
-          </p:spPr>
-          <p:txBody>
-            <a:bodyPr wrap="none" rtlCol="0">
-              <a:spAutoFit/>
-            </a:bodyPr>
-            <a:lstStyle/>
-            <a:p>
-              <a:r>
-                <a:rPr lang="en-US" sz="3000" dirty="0"/>
-                <a:t>Age</a:t>
-              </a:r>
-            </a:p>
-          </p:txBody>
-        </p:sp>
-        <p:sp>
-          <p:nvSpPr>
-            <p:cNvPr id="15511" name="TextBox 15510">
-              <a:extLst>
-                <a:ext uri="{FF2B5EF4-FFF2-40B4-BE49-F238E27FC236}">
-                  <a16:creationId xmlns:a16="http://schemas.microsoft.com/office/drawing/2014/main" id="{973A9BDE-83AF-A703-4ACB-BD3D64A294A1}"/>
-                </a:ext>
-              </a:extLst>
-            </p:cNvPr>
-            <p:cNvSpPr txBox="1"/>
-            <p:nvPr/>
-          </p:nvSpPr>
-          <p:spPr>
-            <a:xfrm rot="5400000">
-              <a:off x="37377370" y="10243912"/>
-              <a:ext cx="492443" cy="894559"/>
-            </a:xfrm>
-            <a:prstGeom prst="rect">
-              <a:avLst/>
-            </a:prstGeom>
-            <a:noFill/>
-          </p:spPr>
-          <p:txBody>
-            <a:bodyPr vert="vert270" wrap="square">
-              <a:spAutoFit/>
-            </a:bodyPr>
-            <a:lstStyle/>
-            <a:p>
-              <a:pPr algn="ctr"/>
-              <a:r>
-                <a:rPr lang="en-US" sz="2000" dirty="0">
-                  <a:latin typeface="Helvetica"/>
-                  <a:ea typeface="MS PGothic"/>
-                </a:rPr>
-                <a:t>-300</a:t>
-              </a:r>
-            </a:p>
-          </p:txBody>
-        </p:sp>
-        <p:sp>
-          <p:nvSpPr>
-            <p:cNvPr id="15512" name="TextBox 15511">
-              <a:extLst>
-                <a:ext uri="{FF2B5EF4-FFF2-40B4-BE49-F238E27FC236}">
-                  <a16:creationId xmlns:a16="http://schemas.microsoft.com/office/drawing/2014/main" id="{E1070220-5A52-F0E6-B2E9-302B7EA961E1}"/>
-                </a:ext>
-              </a:extLst>
-            </p:cNvPr>
-            <p:cNvSpPr txBox="1"/>
-            <p:nvPr/>
-          </p:nvSpPr>
-          <p:spPr>
-            <a:xfrm rot="5400000">
-              <a:off x="37332998" y="6887202"/>
-              <a:ext cx="492443" cy="894559"/>
-            </a:xfrm>
-            <a:prstGeom prst="rect">
-              <a:avLst/>
-            </a:prstGeom>
-            <a:noFill/>
-          </p:spPr>
-          <p:txBody>
-            <a:bodyPr vert="vert270" wrap="square">
-              <a:spAutoFit/>
-            </a:bodyPr>
-            <a:lstStyle/>
-            <a:p>
-              <a:pPr algn="ctr"/>
-              <a:r>
-                <a:rPr lang="en-US" sz="2000" dirty="0">
-                  <a:latin typeface="Helvetica"/>
-                  <a:ea typeface="MS PGothic"/>
-                </a:rPr>
-                <a:t>500</a:t>
-              </a:r>
-            </a:p>
-          </p:txBody>
-        </p:sp>
-        <p:sp>
-          <p:nvSpPr>
-            <p:cNvPr id="15513" name="TextBox 15512">
-              <a:extLst>
-                <a:ext uri="{FF2B5EF4-FFF2-40B4-BE49-F238E27FC236}">
-                  <a16:creationId xmlns:a16="http://schemas.microsoft.com/office/drawing/2014/main" id="{0F8B9AF0-2622-2A04-F1ED-ED9368F9B986}"/>
-                </a:ext>
-              </a:extLst>
-            </p:cNvPr>
-            <p:cNvSpPr txBox="1"/>
-            <p:nvPr/>
-          </p:nvSpPr>
-          <p:spPr>
-            <a:xfrm rot="5400000">
-              <a:off x="42844806" y="10544726"/>
-              <a:ext cx="492443" cy="894559"/>
-            </a:xfrm>
-            <a:prstGeom prst="rect">
-              <a:avLst/>
-            </a:prstGeom>
-            <a:noFill/>
-          </p:spPr>
-          <p:txBody>
-            <a:bodyPr vert="vert270" wrap="square">
-              <a:spAutoFit/>
-            </a:bodyPr>
-            <a:lstStyle/>
-            <a:p>
-              <a:pPr algn="ctr"/>
-              <a:r>
-                <a:rPr lang="en-US" sz="2000" dirty="0">
-                  <a:latin typeface="Helvetica"/>
-                  <a:ea typeface="MS PGothic"/>
-                </a:rPr>
-                <a:t>73</a:t>
-              </a:r>
-            </a:p>
-          </p:txBody>
-        </p:sp>
-        <p:sp>
-          <p:nvSpPr>
-            <p:cNvPr id="15514" name="TextBox 15513">
-              <a:extLst>
-                <a:ext uri="{FF2B5EF4-FFF2-40B4-BE49-F238E27FC236}">
-                  <a16:creationId xmlns:a16="http://schemas.microsoft.com/office/drawing/2014/main" id="{E60AC3A4-3AE3-AE30-E0E3-896B8FAA10B3}"/>
-                </a:ext>
-              </a:extLst>
-            </p:cNvPr>
-            <p:cNvSpPr txBox="1"/>
-            <p:nvPr/>
-          </p:nvSpPr>
-          <p:spPr>
-            <a:xfrm rot="5400000">
-              <a:off x="38011338" y="10662467"/>
-              <a:ext cx="492443" cy="894559"/>
-            </a:xfrm>
-            <a:prstGeom prst="rect">
-              <a:avLst/>
-            </a:prstGeom>
-            <a:noFill/>
-          </p:spPr>
-          <p:txBody>
-            <a:bodyPr vert="vert270" wrap="square">
-              <a:spAutoFit/>
-            </a:bodyPr>
-            <a:lstStyle/>
-            <a:p>
-              <a:pPr algn="ctr"/>
-              <a:r>
-                <a:rPr lang="en-US" sz="2000" dirty="0">
-                  <a:latin typeface="Helvetica"/>
-                  <a:ea typeface="MS PGothic"/>
-                </a:rPr>
-                <a:t>21</a:t>
-              </a:r>
-            </a:p>
-          </p:txBody>
-        </p:sp>
-      </p:grpSp>
-      <p:sp>
-        <p:nvSpPr>
-          <p:cNvPr id="15516" name="Rectangle 15515">
-            <a:extLst>
-              <a:ext uri="{FF2B5EF4-FFF2-40B4-BE49-F238E27FC236}">
-                <a16:creationId xmlns:a16="http://schemas.microsoft.com/office/drawing/2014/main" id="{69025403-F6D7-C8C4-F5D8-FF27361E4E91}"/>
-              </a:ext>
-            </a:extLst>
-          </p:cNvPr>
-          <p:cNvSpPr/>
-          <p:nvPr/>
-        </p:nvSpPr>
-        <p:spPr>
-          <a:xfrm>
-            <a:off x="31178642" y="12908794"/>
-            <a:ext cx="12293617" cy="584775"/>
-          </a:xfrm>
-          <a:prstGeom prst="rect">
-            <a:avLst/>
-          </a:prstGeom>
-        </p:spPr>
-        <p:txBody>
-          <a:bodyPr wrap="square" lIns="91440" tIns="45720" rIns="91440" bIns="45720" anchor="t">
-            <a:spAutoFit/>
-          </a:bodyPr>
-          <a:lstStyle/>
-          <a:p>
-            <a:pPr algn="ctr"/>
-            <a:r>
-              <a:rPr lang="en-US" sz="3200" dirty="0">
-                <a:ea typeface="MS PGothic"/>
-                <a:cs typeface="Helvetica"/>
-              </a:rPr>
-              <a:t>We found an association between the precuneus and age</a:t>
-            </a:r>
-          </a:p>
-        </p:txBody>
-      </p:sp>
-      <p:pic>
-        <p:nvPicPr>
-          <p:cNvPr id="15519" name="Picture 15518">
-            <a:extLst>
-              <a:ext uri="{FF2B5EF4-FFF2-40B4-BE49-F238E27FC236}">
-                <a16:creationId xmlns:a16="http://schemas.microsoft.com/office/drawing/2014/main" id="{ED5B2D2C-98F6-DF06-D6F2-C1EB7BDB5BB2}"/>
-              </a:ext>
-            </a:extLst>
-          </p:cNvPr>
-          <p:cNvPicPr>
-            <a:picLocks noChangeAspect="1"/>
-          </p:cNvPicPr>
-          <p:nvPr/>
-        </p:nvPicPr>
-        <p:blipFill>
-          <a:blip r:embed="rId11"/>
-          <a:stretch>
-            <a:fillRect/>
-          </a:stretch>
-        </p:blipFill>
-        <p:spPr>
-          <a:xfrm>
-            <a:off x="31354424" y="15485476"/>
-            <a:ext cx="7216034" cy="7151686"/>
-          </a:xfrm>
-          <a:prstGeom prst="rect">
-            <a:avLst/>
-          </a:prstGeom>
-        </p:spPr>
-      </p:pic>
-      <p:sp>
-        <p:nvSpPr>
-          <p:cNvPr id="15520" name="Rectangle 15519">
-            <a:extLst>
-              <a:ext uri="{FF2B5EF4-FFF2-40B4-BE49-F238E27FC236}">
-                <a16:creationId xmlns:a16="http://schemas.microsoft.com/office/drawing/2014/main" id="{93FF6634-0FA7-FD32-F6D8-ADBE0C3DF974}"/>
-              </a:ext>
-            </a:extLst>
-          </p:cNvPr>
-          <p:cNvSpPr/>
-          <p:nvPr/>
-        </p:nvSpPr>
-        <p:spPr>
-          <a:xfrm>
-            <a:off x="31809199" y="22940971"/>
-            <a:ext cx="12293617" cy="1077218"/>
-          </a:xfrm>
-          <a:prstGeom prst="rect">
-            <a:avLst/>
-          </a:prstGeom>
-        </p:spPr>
-        <p:txBody>
-          <a:bodyPr wrap="square" lIns="91440" tIns="45720" rIns="91440" bIns="45720" anchor="t">
-            <a:spAutoFit/>
-          </a:bodyPr>
-          <a:lstStyle/>
-          <a:p>
-            <a:pPr algn="ctr"/>
-            <a:r>
-              <a:rPr lang="en-US" sz="3200" dirty="0">
-                <a:ea typeface="MS PGothic"/>
-                <a:cs typeface="Helvetica"/>
-              </a:rPr>
-              <a:t>We found Orbitofrontal Cortex activation in the three way effects model between IOS, age and OAFEM</a:t>
-            </a:r>
-          </a:p>
-        </p:txBody>
-      </p:sp>
-      <p:grpSp>
-        <p:nvGrpSpPr>
           <p:cNvPr id="15524" name="Group 15523">
             <a:extLst>
               <a:ext uri="{FF2B5EF4-FFF2-40B4-BE49-F238E27FC236}">
@@ -11756,9 +8813,9 @@
         <p:grpSpPr>
           <a:xfrm>
             <a:off x="175846" y="31162938"/>
-            <a:ext cx="14710114" cy="1521569"/>
+            <a:ext cx="14969676" cy="1521569"/>
             <a:chOff x="348551" y="31162937"/>
-            <a:chExt cx="14710114" cy="1521569"/>
+            <a:chExt cx="14969676" cy="1521569"/>
           </a:xfrm>
         </p:grpSpPr>
         <p:sp>
@@ -11933,8 +8990,8 @@
           </p:nvSpPr>
           <p:spPr>
             <a:xfrm>
-              <a:off x="515553" y="31367653"/>
-              <a:ext cx="14106747" cy="954107"/>
+              <a:off x="452491" y="31399184"/>
+              <a:ext cx="14865736" cy="1015663"/>
             </a:xfrm>
             <a:prstGeom prst="rect">
               <a:avLst/>
@@ -11948,24 +9005,24 @@
             <a:lstStyle/>
             <a:p>
               <a:r>
-                <a:rPr lang="en-US" sz="2800" b="0" i="0" dirty="0">
+                <a:rPr lang="en-US" sz="2900" b="0" i="0" dirty="0">
                   <a:effectLst/>
                   <a:highlight>
                     <a:srgbClr val="D8E3C1"/>
                   </a:highlight>
                   <a:latin typeface="Slack-Lato"/>
                 </a:rPr>
-                <a:t>This study was supported by National Institutes of Health grant R01-AG067011 (David V. Smith).</a:t>
+                <a:t>This study was supported by National Institutes of Health grant RF1-AG67011 (David V. Smith).</a:t>
               </a:r>
               <a:br>
-                <a:rPr lang="en-US" sz="2800" dirty="0">
+                <a:rPr lang="en-US" sz="2900" dirty="0">
                   <a:highlight>
                     <a:srgbClr val="D8E3C1"/>
                   </a:highlight>
                 </a:rPr>
               </a:br>
               <a:r>
-                <a:rPr lang="en-US" sz="2800" b="0" i="0" dirty="0">
+                <a:rPr lang="en-US" sz="2900" b="0" i="0" dirty="0">
                   <a:effectLst/>
                   <a:highlight>
                     <a:srgbClr val="D8E3C1"/>
@@ -11975,7 +9032,7 @@
                 <a:t>Contact information: </a:t>
               </a:r>
               <a:r>
-                <a:rPr lang="en-US" sz="2800" b="0" i="0" dirty="0" err="1">
+                <a:rPr lang="en-US" sz="2900" b="0" i="0" dirty="0" err="1">
                   <a:effectLst/>
                   <a:highlight>
                     <a:srgbClr val="D8E3C1"/>
@@ -11985,7 +9042,7 @@
                 <a:t>Avi.Dachs@temple.edu</a:t>
               </a:r>
               <a:r>
-                <a:rPr lang="en-US" sz="2800" b="0" i="0" dirty="0">
+                <a:rPr lang="en-US" sz="2900" b="0" i="0" dirty="0">
                   <a:effectLst/>
                   <a:highlight>
                     <a:srgbClr val="D8E3C1"/>
@@ -11995,16 +9052,16 @@
                 <a:t>, </a:t>
               </a:r>
               <a:r>
-                <a:rPr lang="en-US" sz="2800" b="0" i="0" dirty="0" err="1">
+                <a:rPr lang="en-US" sz="2900" b="0" i="0" dirty="0" err="1">
                   <a:effectLst/>
                   <a:highlight>
                     <a:srgbClr val="D8E3C1"/>
                   </a:highlight>
                   <a:latin typeface="Slack-Lato"/>
                 </a:rPr>
-                <a:t>Cooper.sharp@temple.edu</a:t>
+                <a:t>Cooper.Sharp@temple.edu</a:t>
               </a:r>
-              <a:endParaRPr lang="en-US" sz="2800" dirty="0">
+              <a:endParaRPr lang="en-US" sz="2900" dirty="0">
                 <a:highlight>
                   <a:srgbClr val="D8E3C1"/>
                 </a:highlight>
@@ -12163,7 +9220,7 @@
                 <a:latin typeface="Trebuchet MS"/>
                 <a:ea typeface="MS PGothic"/>
               </a:rPr>
-              <a:t>7. IOS x Age x OAFEM</a:t>
+              <a:t>7. PPI result #2</a:t>
             </a:r>
             <a:endParaRPr lang="en-US" altLang="en-US" sz="4270" b="1" dirty="0">
               <a:solidFill>
@@ -12174,11 +9231,1107 @@
           </a:p>
         </p:txBody>
       </p:sp>
+      <p:grpSp>
+        <p:nvGrpSpPr>
+          <p:cNvPr id="15538" name="Group 15537">
+            <a:extLst>
+              <a:ext uri="{FF2B5EF4-FFF2-40B4-BE49-F238E27FC236}">
+                <a16:creationId xmlns:a16="http://schemas.microsoft.com/office/drawing/2014/main" id="{4ABA81B2-5B67-77D2-5517-08033E19241B}"/>
+              </a:ext>
+            </a:extLst>
+          </p:cNvPr>
+          <p:cNvGrpSpPr/>
+          <p:nvPr/>
+        </p:nvGrpSpPr>
+        <p:grpSpPr>
+          <a:xfrm>
+            <a:off x="1384367" y="16779478"/>
+            <a:ext cx="3578072" cy="1569660"/>
+            <a:chOff x="1368567" y="16273740"/>
+            <a:chExt cx="3578072" cy="1569660"/>
+          </a:xfrm>
+        </p:grpSpPr>
+        <p:sp>
+          <p:nvSpPr>
+            <p:cNvPr id="15528" name="Rounded Rectangle 15527">
+              <a:extLst>
+                <a:ext uri="{FF2B5EF4-FFF2-40B4-BE49-F238E27FC236}">
+                  <a16:creationId xmlns:a16="http://schemas.microsoft.com/office/drawing/2014/main" id="{AD2DBFD4-1DD0-D27D-7CB0-35408A9E32E4}"/>
+                </a:ext>
+              </a:extLst>
+            </p:cNvPr>
+            <p:cNvSpPr/>
+            <p:nvPr/>
+          </p:nvSpPr>
+          <p:spPr bwMode="auto">
+            <a:xfrm>
+              <a:off x="1368567" y="16273740"/>
+              <a:ext cx="1947439" cy="1569660"/>
+            </a:xfrm>
+            <a:prstGeom prst="roundRect">
+              <a:avLst/>
+            </a:prstGeom>
+            <a:solidFill>
+              <a:schemeClr val="accent1"/>
+            </a:solidFill>
+            <a:ln w="50800" cap="flat" cmpd="sng" algn="ctr">
+              <a:solidFill>
+                <a:schemeClr val="tx1"/>
+              </a:solidFill>
+              <a:prstDash val="solid"/>
+              <a:round/>
+              <a:headEnd type="none" w="med" len="med"/>
+              <a:tailEnd type="none" w="med" len="med"/>
+            </a:ln>
+            <a:effectLst/>
+          </p:spPr>
+          <p:txBody>
+            <a:bodyPr vert="horz" wrap="square" lIns="91440" tIns="45720" rIns="91440" bIns="45720" numCol="1" rtlCol="0" anchor="t" anchorCtr="0" compatLnSpc="1">
+              <a:prstTxWarp prst="textNoShape">
+                <a:avLst/>
+              </a:prstTxWarp>
+            </a:bodyPr>
+            <a:lstStyle/>
+            <a:p>
+              <a:pPr defTabSz="4389438" eaLnBrk="1" hangingPunct="1"/>
+              <a:r>
+                <a:rPr lang="en-US" sz="3000" dirty="0"/>
+                <a:t>You are assigned a partner.</a:t>
+              </a:r>
+            </a:p>
+            <a:p>
+              <a:pPr marL="0" marR="0" indent="0" algn="l" defTabSz="4389438" rtl="0" eaLnBrk="1" fontAlgn="base" latinLnBrk="0" hangingPunct="1">
+                <a:lnSpc>
+                  <a:spcPct val="100000"/>
+                </a:lnSpc>
+                <a:spcBef>
+                  <a:spcPct val="0"/>
+                </a:spcBef>
+                <a:spcAft>
+                  <a:spcPct val="0"/>
+                </a:spcAft>
+                <a:buClrTx/>
+                <a:buSzTx/>
+                <a:buFontTx/>
+                <a:buNone/>
+                <a:tabLst/>
+              </a:pPr>
+              <a:endParaRPr kumimoji="0" lang="en-US" sz="1800" b="0" i="0" u="none" strike="noStrike" cap="none" normalizeH="0" baseline="0" dirty="0">
+                <a:ln>
+                  <a:noFill/>
+                </a:ln>
+                <a:solidFill>
+                  <a:schemeClr val="tx1"/>
+                </a:solidFill>
+                <a:effectLst/>
+                <a:latin typeface="Arial" charset="0"/>
+                <a:cs typeface="Arial" charset="0"/>
+              </a:endParaRPr>
+            </a:p>
+          </p:txBody>
+        </p:sp>
+        <p:cxnSp>
+          <p:nvCxnSpPr>
+            <p:cNvPr id="15537" name="Straight Arrow Connector 15536">
+              <a:extLst>
+                <a:ext uri="{FF2B5EF4-FFF2-40B4-BE49-F238E27FC236}">
+                  <a16:creationId xmlns:a16="http://schemas.microsoft.com/office/drawing/2014/main" id="{7A1CFB10-A83A-AA5A-7CB9-EC39B260985E}"/>
+                </a:ext>
+              </a:extLst>
+            </p:cNvPr>
+            <p:cNvCxnSpPr>
+              <a:cxnSpLocks/>
+              <a:stCxn id="15528" idx="3"/>
+            </p:cNvCxnSpPr>
+            <p:nvPr/>
+          </p:nvCxnSpPr>
+          <p:spPr bwMode="auto">
+            <a:xfrm>
+              <a:off x="3316006" y="17058570"/>
+              <a:ext cx="1630633" cy="0"/>
+            </a:xfrm>
+            <a:prstGeom prst="straightConnector1">
+              <a:avLst/>
+            </a:prstGeom>
+            <a:solidFill>
+              <a:schemeClr val="accent1"/>
+            </a:solidFill>
+            <a:ln w="50800" cap="flat" cmpd="sng" algn="ctr">
+              <a:solidFill>
+                <a:schemeClr val="tx1"/>
+              </a:solidFill>
+              <a:prstDash val="solid"/>
+              <a:round/>
+              <a:headEnd type="none" w="med" len="med"/>
+              <a:tailEnd type="triangle"/>
+            </a:ln>
+            <a:effectLst/>
+          </p:spPr>
+        </p:cxnSp>
+      </p:grpSp>
+      <p:sp>
+        <p:nvSpPr>
+          <p:cNvPr id="15542" name="Rounded Rectangle 15541">
+            <a:extLst>
+              <a:ext uri="{FF2B5EF4-FFF2-40B4-BE49-F238E27FC236}">
+                <a16:creationId xmlns:a16="http://schemas.microsoft.com/office/drawing/2014/main" id="{F919F17A-D127-CAD0-86F8-9896BB472FB5}"/>
+              </a:ext>
+            </a:extLst>
+          </p:cNvPr>
+          <p:cNvSpPr/>
+          <p:nvPr/>
+        </p:nvSpPr>
+        <p:spPr bwMode="auto">
+          <a:xfrm>
+            <a:off x="4284198" y="26701556"/>
+            <a:ext cx="2843041" cy="764088"/>
+          </a:xfrm>
+          <a:prstGeom prst="roundRect">
+            <a:avLst/>
+          </a:prstGeom>
+          <a:solidFill>
+            <a:schemeClr val="accent1"/>
+          </a:solidFill>
+          <a:ln w="50800" cap="flat" cmpd="sng" algn="ctr">
+            <a:solidFill>
+              <a:schemeClr val="tx1"/>
+            </a:solidFill>
+            <a:prstDash val="solid"/>
+            <a:round/>
+            <a:headEnd type="none" w="med" len="med"/>
+            <a:tailEnd type="none" w="med" len="med"/>
+          </a:ln>
+          <a:effectLst/>
+        </p:spPr>
+        <p:txBody>
+          <a:bodyPr vert="horz" wrap="square" lIns="91440" tIns="45720" rIns="91440" bIns="45720" numCol="1" rtlCol="0" anchor="t" anchorCtr="0" compatLnSpc="1">
+            <a:prstTxWarp prst="textNoShape">
+              <a:avLst/>
+            </a:prstTxWarp>
+          </a:bodyPr>
+          <a:lstStyle/>
+          <a:p>
+            <a:pPr defTabSz="4389438" eaLnBrk="1" hangingPunct="1"/>
+            <a:r>
+              <a:rPr lang="en-US" sz="4000" u="sng" dirty="0"/>
+              <a:t>End of trial</a:t>
+            </a:r>
+          </a:p>
+          <a:p>
+            <a:pPr marL="0" marR="0" indent="0" algn="l" defTabSz="4389438" rtl="0" eaLnBrk="1" fontAlgn="base" latinLnBrk="0" hangingPunct="1">
+              <a:lnSpc>
+                <a:spcPct val="100000"/>
+              </a:lnSpc>
+              <a:spcBef>
+                <a:spcPct val="0"/>
+              </a:spcBef>
+              <a:spcAft>
+                <a:spcPct val="0"/>
+              </a:spcAft>
+              <a:buClrTx/>
+              <a:buSzTx/>
+              <a:buFontTx/>
+              <a:buNone/>
+              <a:tabLst/>
+            </a:pPr>
+            <a:endParaRPr kumimoji="0" lang="en-US" sz="1800" b="0" i="0" u="none" strike="noStrike" cap="none" normalizeH="0" baseline="0" dirty="0">
+              <a:ln>
+                <a:noFill/>
+              </a:ln>
+              <a:solidFill>
+                <a:schemeClr val="tx1"/>
+              </a:solidFill>
+              <a:effectLst/>
+              <a:latin typeface="Arial" charset="0"/>
+              <a:cs typeface="Arial" charset="0"/>
+            </a:endParaRPr>
+          </a:p>
+        </p:txBody>
+      </p:sp>
+      <p:grpSp>
+        <p:nvGrpSpPr>
+          <p:cNvPr id="15568" name="Group 15567">
+            <a:extLst>
+              <a:ext uri="{FF2B5EF4-FFF2-40B4-BE49-F238E27FC236}">
+                <a16:creationId xmlns:a16="http://schemas.microsoft.com/office/drawing/2014/main" id="{15DD4E5E-824D-8CD0-AEF7-EDA6F18DC3E5}"/>
+              </a:ext>
+            </a:extLst>
+          </p:cNvPr>
+          <p:cNvGrpSpPr/>
+          <p:nvPr/>
+        </p:nvGrpSpPr>
+        <p:grpSpPr>
+          <a:xfrm>
+            <a:off x="15706304" y="4645369"/>
+            <a:ext cx="6309165" cy="7075327"/>
+            <a:chOff x="15750270" y="4673598"/>
+            <a:chExt cx="5084582" cy="5606469"/>
+          </a:xfrm>
+        </p:grpSpPr>
+        <p:pic>
+          <p:nvPicPr>
+            <p:cNvPr id="15564" name="Picture 15563" descr="A graph with blue bars&#10;&#10;Description automatically generated">
+              <a:extLst>
+                <a:ext uri="{FF2B5EF4-FFF2-40B4-BE49-F238E27FC236}">
+                  <a16:creationId xmlns:a16="http://schemas.microsoft.com/office/drawing/2014/main" id="{DB0F843B-3328-E19E-285A-D4405E43DE85}"/>
+                </a:ext>
+              </a:extLst>
+            </p:cNvPr>
+            <p:cNvPicPr>
+              <a:picLocks noChangeAspect="1"/>
+            </p:cNvPicPr>
+            <p:nvPr/>
+          </p:nvPicPr>
+          <p:blipFill rotWithShape="1">
+            <a:blip r:embed="rId7">
+              <a:extLst>
+                <a:ext uri="{28A0092B-C50C-407E-A947-70E740481C1C}">
+                  <a14:useLocalDpi xmlns:a14="http://schemas.microsoft.com/office/drawing/2010/main" val="0"/>
+                </a:ext>
+              </a:extLst>
+            </a:blip>
+            <a:srcRect t="4600" b="9355"/>
+            <a:stretch/>
+          </p:blipFill>
+          <p:spPr>
+            <a:xfrm>
+              <a:off x="15750270" y="4673598"/>
+              <a:ext cx="5084582" cy="5271134"/>
+            </a:xfrm>
+            <a:prstGeom prst="rect">
+              <a:avLst/>
+            </a:prstGeom>
+          </p:spPr>
+        </p:pic>
+        <p:sp>
+          <p:nvSpPr>
+            <p:cNvPr id="15565" name="TextBox 15564">
+              <a:extLst>
+                <a:ext uri="{FF2B5EF4-FFF2-40B4-BE49-F238E27FC236}">
+                  <a16:creationId xmlns:a16="http://schemas.microsoft.com/office/drawing/2014/main" id="{365B860D-9018-7B32-A679-E688302B13FE}"/>
+                </a:ext>
+              </a:extLst>
+            </p:cNvPr>
+            <p:cNvSpPr txBox="1"/>
+            <p:nvPr/>
+          </p:nvSpPr>
+          <p:spPr>
+            <a:xfrm>
+              <a:off x="16502476" y="9962289"/>
+              <a:ext cx="1030571" cy="317778"/>
+            </a:xfrm>
+            <a:prstGeom prst="rect">
+              <a:avLst/>
+            </a:prstGeom>
+            <a:noFill/>
+          </p:spPr>
+          <p:txBody>
+            <a:bodyPr wrap="none" rtlCol="0">
+              <a:spAutoFit/>
+            </a:bodyPr>
+            <a:lstStyle/>
+            <a:p>
+              <a:pPr algn="ctr"/>
+              <a:r>
+                <a:rPr lang="en-US" dirty="0"/>
+                <a:t>Computer</a:t>
+              </a:r>
+            </a:p>
+          </p:txBody>
+        </p:sp>
+        <p:sp>
+          <p:nvSpPr>
+            <p:cNvPr id="15566" name="TextBox 15565">
+              <a:extLst>
+                <a:ext uri="{FF2B5EF4-FFF2-40B4-BE49-F238E27FC236}">
+                  <a16:creationId xmlns:a16="http://schemas.microsoft.com/office/drawing/2014/main" id="{F3DEEAB1-FC82-F27A-2480-B47275269909}"/>
+                </a:ext>
+              </a:extLst>
+            </p:cNvPr>
+            <p:cNvSpPr txBox="1"/>
+            <p:nvPr/>
+          </p:nvSpPr>
+          <p:spPr>
+            <a:xfrm>
+              <a:off x="18111167" y="9962289"/>
+              <a:ext cx="721620" cy="317778"/>
+            </a:xfrm>
+            <a:prstGeom prst="rect">
+              <a:avLst/>
+            </a:prstGeom>
+            <a:noFill/>
+          </p:spPr>
+          <p:txBody>
+            <a:bodyPr wrap="none" rtlCol="0">
+              <a:spAutoFit/>
+            </a:bodyPr>
+            <a:lstStyle/>
+            <a:p>
+              <a:pPr algn="ctr"/>
+              <a:r>
+                <a:rPr lang="en-US" dirty="0"/>
+                <a:t>Friend</a:t>
+              </a:r>
+            </a:p>
+          </p:txBody>
+        </p:sp>
+        <p:sp>
+          <p:nvSpPr>
+            <p:cNvPr id="15567" name="TextBox 15566">
+              <a:extLst>
+                <a:ext uri="{FF2B5EF4-FFF2-40B4-BE49-F238E27FC236}">
+                  <a16:creationId xmlns:a16="http://schemas.microsoft.com/office/drawing/2014/main" id="{4D3F700C-EA10-1411-613F-C7CCDD3031E0}"/>
+                </a:ext>
+              </a:extLst>
+            </p:cNvPr>
+            <p:cNvSpPr txBox="1"/>
+            <p:nvPr/>
+          </p:nvSpPr>
+          <p:spPr>
+            <a:xfrm>
+              <a:off x="19443106" y="9962289"/>
+              <a:ext cx="920232" cy="317778"/>
+            </a:xfrm>
+            <a:prstGeom prst="rect">
+              <a:avLst/>
+            </a:prstGeom>
+            <a:noFill/>
+          </p:spPr>
+          <p:txBody>
+            <a:bodyPr wrap="none" rtlCol="0">
+              <a:spAutoFit/>
+            </a:bodyPr>
+            <a:lstStyle/>
+            <a:p>
+              <a:pPr algn="ctr"/>
+              <a:r>
+                <a:rPr lang="en-US" dirty="0"/>
+                <a:t>Stranger</a:t>
+              </a:r>
+            </a:p>
+          </p:txBody>
+        </p:sp>
+      </p:grpSp>
+      <p:grpSp>
+        <p:nvGrpSpPr>
+          <p:cNvPr id="15570" name="Group 15569">
+            <a:extLst>
+              <a:ext uri="{FF2B5EF4-FFF2-40B4-BE49-F238E27FC236}">
+                <a16:creationId xmlns:a16="http://schemas.microsoft.com/office/drawing/2014/main" id="{C1A47842-8843-10BD-987C-4CF10B4A7000}"/>
+              </a:ext>
+            </a:extLst>
+          </p:cNvPr>
+          <p:cNvGrpSpPr/>
+          <p:nvPr/>
+        </p:nvGrpSpPr>
+        <p:grpSpPr>
+          <a:xfrm>
+            <a:off x="798440" y="24599604"/>
+            <a:ext cx="3189734" cy="2991886"/>
+            <a:chOff x="606454" y="26219689"/>
+            <a:chExt cx="5586954" cy="2277700"/>
+          </a:xfrm>
+        </p:grpSpPr>
+        <p:sp>
+          <p:nvSpPr>
+            <p:cNvPr id="15571" name="Rectangle 15570">
+              <a:extLst>
+                <a:ext uri="{FF2B5EF4-FFF2-40B4-BE49-F238E27FC236}">
+                  <a16:creationId xmlns:a16="http://schemas.microsoft.com/office/drawing/2014/main" id="{1BCA2259-D5DC-FD9D-A1CB-68FAAECB32D0}"/>
+                </a:ext>
+              </a:extLst>
+            </p:cNvPr>
+            <p:cNvSpPr/>
+            <p:nvPr/>
+          </p:nvSpPr>
+          <p:spPr bwMode="auto">
+            <a:xfrm>
+              <a:off x="606454" y="26219689"/>
+              <a:ext cx="5418229" cy="2277700"/>
+            </a:xfrm>
+            <a:prstGeom prst="rect">
+              <a:avLst/>
+            </a:prstGeom>
+            <a:noFill/>
+            <a:ln w="57150" cap="flat" cmpd="sng" algn="ctr">
+              <a:solidFill>
+                <a:schemeClr val="tx1"/>
+              </a:solidFill>
+              <a:prstDash val="solid"/>
+              <a:round/>
+              <a:headEnd type="none" w="med" len="med"/>
+              <a:tailEnd type="none" w="med" len="med"/>
+            </a:ln>
+            <a:effectLst/>
+          </p:spPr>
+          <p:txBody>
+            <a:bodyPr vert="horz" wrap="square" lIns="91440" tIns="45720" rIns="91440" bIns="45720" numCol="1" rtlCol="0" anchor="t" anchorCtr="0" compatLnSpc="1">
+              <a:prstTxWarp prst="textNoShape">
+                <a:avLst/>
+              </a:prstTxWarp>
+            </a:bodyPr>
+            <a:lstStyle/>
+            <a:p>
+              <a:pPr marL="0" marR="0" indent="0" algn="l" defTabSz="4389438" rtl="0" eaLnBrk="1" fontAlgn="base" latinLnBrk="0" hangingPunct="1">
+                <a:lnSpc>
+                  <a:spcPct val="100000"/>
+                </a:lnSpc>
+                <a:spcBef>
+                  <a:spcPct val="0"/>
+                </a:spcBef>
+                <a:spcAft>
+                  <a:spcPct val="0"/>
+                </a:spcAft>
+                <a:buClrTx/>
+                <a:buSzTx/>
+                <a:buFontTx/>
+                <a:buNone/>
+                <a:tabLst/>
+              </a:pPr>
+              <a:endParaRPr kumimoji="0" lang="en-US" sz="1800" b="0" i="0" u="none" strike="noStrike" cap="none" normalizeH="0" baseline="0">
+                <a:ln>
+                  <a:noFill/>
+                </a:ln>
+                <a:solidFill>
+                  <a:schemeClr val="tx1"/>
+                </a:solidFill>
+                <a:effectLst/>
+                <a:latin typeface="Arial" charset="0"/>
+                <a:cs typeface="Arial" charset="0"/>
+              </a:endParaRPr>
+            </a:p>
+          </p:txBody>
+        </p:sp>
+        <p:sp>
+          <p:nvSpPr>
+            <p:cNvPr id="15572" name="TextBox 15571">
+              <a:extLst>
+                <a:ext uri="{FF2B5EF4-FFF2-40B4-BE49-F238E27FC236}">
+                  <a16:creationId xmlns:a16="http://schemas.microsoft.com/office/drawing/2014/main" id="{383C5437-FEBC-DA64-E321-D83A0D87565D}"/>
+                </a:ext>
+              </a:extLst>
+            </p:cNvPr>
+            <p:cNvSpPr txBox="1"/>
+            <p:nvPr/>
+          </p:nvSpPr>
+          <p:spPr>
+            <a:xfrm>
+              <a:off x="1036663" y="26346047"/>
+              <a:ext cx="5156745" cy="1944756"/>
+            </a:xfrm>
+            <a:prstGeom prst="rect">
+              <a:avLst/>
+            </a:prstGeom>
+            <a:noFill/>
+          </p:spPr>
+          <p:txBody>
+            <a:bodyPr wrap="square" lIns="91440" tIns="45720" rIns="91440" bIns="45720" anchor="t">
+              <a:spAutoFit/>
+            </a:bodyPr>
+            <a:lstStyle/>
+            <a:p>
+              <a:r>
+                <a:rPr lang="en-US" sz="3200" dirty="0">
+                  <a:effectLst/>
+                  <a:latin typeface="Helvetica"/>
+                  <a:ea typeface="Times New Roman" panose="02020603050405020304" pitchFamily="18" charset="0"/>
+                  <a:cs typeface="Helvetica"/>
+                </a:rPr>
+                <a:t>N =</a:t>
+              </a:r>
+              <a:r>
+                <a:rPr lang="en-US" sz="3200" dirty="0">
+                  <a:latin typeface="Helvetica"/>
+                  <a:ea typeface="Times New Roman" panose="02020603050405020304" pitchFamily="18" charset="0"/>
+                  <a:cs typeface="Helvetica"/>
+                </a:rPr>
+                <a:t> 62</a:t>
+              </a:r>
+              <a:r>
+                <a:rPr lang="en-US" sz="3200" dirty="0">
+                  <a:effectLst/>
+                  <a:latin typeface="Helvetica"/>
+                  <a:ea typeface="Times New Roman" panose="02020603050405020304" pitchFamily="18" charset="0"/>
+                  <a:cs typeface="Helvetica"/>
+                </a:rPr>
+                <a:t> </a:t>
+              </a:r>
+              <a:r>
+                <a:rPr lang="en-US" sz="3200" dirty="0">
+                  <a:latin typeface="Helvetica" pitchFamily="2" charset="0"/>
+                  <a:ea typeface="Times New Roman" panose="02020603050405020304" pitchFamily="18" charset="0"/>
+                  <a:cs typeface="Helvetica"/>
+                </a:rPr>
+                <a:t>C</a:t>
+              </a:r>
+              <a:r>
+                <a:rPr lang="en-US" sz="3200" dirty="0">
+                  <a:effectLst/>
+                  <a:latin typeface="Helvetica" pitchFamily="2" charset="0"/>
+                  <a:ea typeface="Times New Roman" panose="02020603050405020304" pitchFamily="18" charset="0"/>
+                  <a:cs typeface="Helvetica"/>
+                </a:rPr>
+                <a:t>ompleted the </a:t>
+              </a:r>
+              <a:r>
+                <a:rPr lang="en-US" sz="3200" b="0" i="0" dirty="0">
+                  <a:effectLst/>
+                  <a:latin typeface="Helvetica" pitchFamily="2" charset="0"/>
+                </a:rPr>
+                <a:t>Inclusion of Other in Self Scale.</a:t>
+              </a:r>
+              <a:endParaRPr lang="en-US" sz="3200" dirty="0">
+                <a:effectLst/>
+                <a:latin typeface="Helvetica"/>
+                <a:ea typeface="Times New Roman" panose="02020603050405020304" pitchFamily="18" charset="0"/>
+                <a:cs typeface="Helvetica"/>
+              </a:endParaRPr>
+            </a:p>
+          </p:txBody>
+        </p:sp>
+      </p:grpSp>
+      <p:grpSp>
+        <p:nvGrpSpPr>
+          <p:cNvPr id="15583" name="Group 15582">
+            <a:extLst>
+              <a:ext uri="{FF2B5EF4-FFF2-40B4-BE49-F238E27FC236}">
+                <a16:creationId xmlns:a16="http://schemas.microsoft.com/office/drawing/2014/main" id="{81424957-973F-2BA6-23A6-71C1377BD2AF}"/>
+              </a:ext>
+            </a:extLst>
+          </p:cNvPr>
+          <p:cNvGrpSpPr/>
+          <p:nvPr/>
+        </p:nvGrpSpPr>
+        <p:grpSpPr>
+          <a:xfrm>
+            <a:off x="23069225" y="5328136"/>
+            <a:ext cx="6472299" cy="6595040"/>
+            <a:chOff x="23205210" y="4927197"/>
+            <a:chExt cx="5400682" cy="6202336"/>
+          </a:xfrm>
+        </p:grpSpPr>
+        <p:pic>
+          <p:nvPicPr>
+            <p:cNvPr id="15574" name="Picture 15573" descr="A graph of a line&#10;&#10;Description automatically generated with medium confidence">
+              <a:extLst>
+                <a:ext uri="{FF2B5EF4-FFF2-40B4-BE49-F238E27FC236}">
+                  <a16:creationId xmlns:a16="http://schemas.microsoft.com/office/drawing/2014/main" id="{C54D0E15-DCC7-A19B-7997-13F421CEA2FB}"/>
+                </a:ext>
+              </a:extLst>
+            </p:cNvPr>
+            <p:cNvPicPr>
+              <a:picLocks noChangeAspect="1"/>
+            </p:cNvPicPr>
+            <p:nvPr/>
+          </p:nvPicPr>
+          <p:blipFill rotWithShape="1">
+            <a:blip r:embed="rId8">
+              <a:extLst>
+                <a:ext uri="{28A0092B-C50C-407E-A947-70E740481C1C}">
+                  <a14:useLocalDpi xmlns:a14="http://schemas.microsoft.com/office/drawing/2010/main" val="0"/>
+                </a:ext>
+              </a:extLst>
+            </a:blip>
+            <a:srcRect r="3644" b="9068"/>
+            <a:stretch/>
+          </p:blipFill>
+          <p:spPr>
+            <a:xfrm>
+              <a:off x="24004670" y="4927197"/>
+              <a:ext cx="4601222" cy="5427765"/>
+            </a:xfrm>
+            <a:prstGeom prst="rect">
+              <a:avLst/>
+            </a:prstGeom>
+          </p:spPr>
+        </p:pic>
+        <p:sp>
+          <p:nvSpPr>
+            <p:cNvPr id="15575" name="TextBox 15574">
+              <a:extLst>
+                <a:ext uri="{FF2B5EF4-FFF2-40B4-BE49-F238E27FC236}">
+                  <a16:creationId xmlns:a16="http://schemas.microsoft.com/office/drawing/2014/main" id="{136D78E5-71EA-17ED-91C9-F9CCADA262FF}"/>
+                </a:ext>
+              </a:extLst>
+            </p:cNvPr>
+            <p:cNvSpPr txBox="1"/>
+            <p:nvPr/>
+          </p:nvSpPr>
+          <p:spPr>
+            <a:xfrm rot="16200000">
+              <a:off x="21066163" y="7584362"/>
+              <a:ext cx="4647426" cy="369332"/>
+            </a:xfrm>
+            <a:prstGeom prst="rect">
+              <a:avLst/>
+            </a:prstGeom>
+            <a:noFill/>
+          </p:spPr>
+          <p:txBody>
+            <a:bodyPr wrap="none" rtlCol="0">
+              <a:spAutoFit/>
+            </a:bodyPr>
+            <a:lstStyle/>
+            <a:p>
+              <a:r>
+                <a:rPr lang="en-US" dirty="0"/>
+                <a:t>Sharing with Friend – Sharing with Stranger</a:t>
+              </a:r>
+            </a:p>
+          </p:txBody>
+        </p:sp>
+        <p:sp>
+          <p:nvSpPr>
+            <p:cNvPr id="15576" name="TextBox 15575">
+              <a:extLst>
+                <a:ext uri="{FF2B5EF4-FFF2-40B4-BE49-F238E27FC236}">
+                  <a16:creationId xmlns:a16="http://schemas.microsoft.com/office/drawing/2014/main" id="{7E602785-88A0-0942-659B-9A750B46996F}"/>
+                </a:ext>
+              </a:extLst>
+            </p:cNvPr>
+            <p:cNvSpPr txBox="1"/>
+            <p:nvPr/>
+          </p:nvSpPr>
+          <p:spPr>
+            <a:xfrm>
+              <a:off x="23603500" y="9333929"/>
+              <a:ext cx="389850" cy="369332"/>
+            </a:xfrm>
+            <a:prstGeom prst="rect">
+              <a:avLst/>
+            </a:prstGeom>
+            <a:noFill/>
+          </p:spPr>
+          <p:txBody>
+            <a:bodyPr wrap="none" rtlCol="0">
+              <a:spAutoFit/>
+            </a:bodyPr>
+            <a:lstStyle/>
+            <a:p>
+              <a:r>
+                <a:rPr lang="en-US" dirty="0"/>
+                <a:t>-2</a:t>
+              </a:r>
+            </a:p>
+          </p:txBody>
+        </p:sp>
+        <p:sp>
+          <p:nvSpPr>
+            <p:cNvPr id="15577" name="TextBox 15576">
+              <a:extLst>
+                <a:ext uri="{FF2B5EF4-FFF2-40B4-BE49-F238E27FC236}">
+                  <a16:creationId xmlns:a16="http://schemas.microsoft.com/office/drawing/2014/main" id="{44C014BB-4057-CE6F-8488-5075607DFC5B}"/>
+                </a:ext>
+              </a:extLst>
+            </p:cNvPr>
+            <p:cNvSpPr txBox="1"/>
+            <p:nvPr/>
+          </p:nvSpPr>
+          <p:spPr>
+            <a:xfrm>
+              <a:off x="23684874" y="6124920"/>
+              <a:ext cx="312906" cy="369332"/>
+            </a:xfrm>
+            <a:prstGeom prst="rect">
+              <a:avLst/>
+            </a:prstGeom>
+            <a:noFill/>
+          </p:spPr>
+          <p:txBody>
+            <a:bodyPr wrap="none" rtlCol="0">
+              <a:spAutoFit/>
+            </a:bodyPr>
+            <a:lstStyle/>
+            <a:p>
+              <a:r>
+                <a:rPr lang="en-US" dirty="0"/>
+                <a:t>2</a:t>
+              </a:r>
+            </a:p>
+          </p:txBody>
+        </p:sp>
+        <p:sp>
+          <p:nvSpPr>
+            <p:cNvPr id="15578" name="TextBox 15577">
+              <a:extLst>
+                <a:ext uri="{FF2B5EF4-FFF2-40B4-BE49-F238E27FC236}">
+                  <a16:creationId xmlns:a16="http://schemas.microsoft.com/office/drawing/2014/main" id="{7FC9F9D2-B5EE-482C-7F35-E7345B0CA197}"/>
+                </a:ext>
+              </a:extLst>
+            </p:cNvPr>
+            <p:cNvSpPr txBox="1"/>
+            <p:nvPr/>
+          </p:nvSpPr>
+          <p:spPr>
+            <a:xfrm>
+              <a:off x="23666269" y="7699893"/>
+              <a:ext cx="312906" cy="369332"/>
+            </a:xfrm>
+            <a:prstGeom prst="rect">
+              <a:avLst/>
+            </a:prstGeom>
+            <a:noFill/>
+          </p:spPr>
+          <p:txBody>
+            <a:bodyPr wrap="none" rtlCol="0">
+              <a:spAutoFit/>
+            </a:bodyPr>
+            <a:lstStyle/>
+            <a:p>
+              <a:r>
+                <a:rPr lang="en-US" dirty="0"/>
+                <a:t>0</a:t>
+              </a:r>
+            </a:p>
+          </p:txBody>
+        </p:sp>
+        <p:sp>
+          <p:nvSpPr>
+            <p:cNvPr id="15579" name="TextBox 15578">
+              <a:extLst>
+                <a:ext uri="{FF2B5EF4-FFF2-40B4-BE49-F238E27FC236}">
+                  <a16:creationId xmlns:a16="http://schemas.microsoft.com/office/drawing/2014/main" id="{115532EB-4683-39F0-80DC-27E22F24AA20}"/>
+                </a:ext>
+              </a:extLst>
+            </p:cNvPr>
+            <p:cNvSpPr txBox="1"/>
+            <p:nvPr/>
+          </p:nvSpPr>
+          <p:spPr>
+            <a:xfrm>
+              <a:off x="23984464" y="10392031"/>
+              <a:ext cx="441146" cy="369332"/>
+            </a:xfrm>
+            <a:prstGeom prst="rect">
+              <a:avLst/>
+            </a:prstGeom>
+            <a:noFill/>
+          </p:spPr>
+          <p:txBody>
+            <a:bodyPr wrap="none" rtlCol="0">
+              <a:spAutoFit/>
+            </a:bodyPr>
+            <a:lstStyle/>
+            <a:p>
+              <a:r>
+                <a:rPr lang="en-US" dirty="0"/>
+                <a:t>20</a:t>
+              </a:r>
+            </a:p>
+          </p:txBody>
+        </p:sp>
+        <p:sp>
+          <p:nvSpPr>
+            <p:cNvPr id="15580" name="TextBox 15579">
+              <a:extLst>
+                <a:ext uri="{FF2B5EF4-FFF2-40B4-BE49-F238E27FC236}">
+                  <a16:creationId xmlns:a16="http://schemas.microsoft.com/office/drawing/2014/main" id="{3A319DEB-B897-3E25-DF07-7B459ED170BF}"/>
+                </a:ext>
+              </a:extLst>
+            </p:cNvPr>
+            <p:cNvSpPr txBox="1"/>
+            <p:nvPr/>
+          </p:nvSpPr>
+          <p:spPr>
+            <a:xfrm>
+              <a:off x="25529056" y="10429100"/>
+              <a:ext cx="441146" cy="369332"/>
+            </a:xfrm>
+            <a:prstGeom prst="rect">
+              <a:avLst/>
+            </a:prstGeom>
+            <a:noFill/>
+          </p:spPr>
+          <p:txBody>
+            <a:bodyPr wrap="none" rtlCol="0">
+              <a:spAutoFit/>
+            </a:bodyPr>
+            <a:lstStyle/>
+            <a:p>
+              <a:r>
+                <a:rPr lang="en-US" dirty="0"/>
+                <a:t>40</a:t>
+              </a:r>
+            </a:p>
+          </p:txBody>
+        </p:sp>
+        <p:sp>
+          <p:nvSpPr>
+            <p:cNvPr id="15581" name="TextBox 15580">
+              <a:extLst>
+                <a:ext uri="{FF2B5EF4-FFF2-40B4-BE49-F238E27FC236}">
+                  <a16:creationId xmlns:a16="http://schemas.microsoft.com/office/drawing/2014/main" id="{92207841-AB47-B838-56C4-7A8991CBC082}"/>
+                </a:ext>
+              </a:extLst>
+            </p:cNvPr>
+            <p:cNvSpPr txBox="1"/>
+            <p:nvPr/>
+          </p:nvSpPr>
+          <p:spPr>
+            <a:xfrm>
+              <a:off x="27155348" y="10416605"/>
+              <a:ext cx="441146" cy="369332"/>
+            </a:xfrm>
+            <a:prstGeom prst="rect">
+              <a:avLst/>
+            </a:prstGeom>
+            <a:noFill/>
+          </p:spPr>
+          <p:txBody>
+            <a:bodyPr wrap="none" rtlCol="0">
+              <a:spAutoFit/>
+            </a:bodyPr>
+            <a:lstStyle/>
+            <a:p>
+              <a:r>
+                <a:rPr lang="en-US" dirty="0"/>
+                <a:t>60</a:t>
+              </a:r>
+            </a:p>
+          </p:txBody>
+        </p:sp>
+        <p:sp>
+          <p:nvSpPr>
+            <p:cNvPr id="15582" name="TextBox 15581">
+              <a:extLst>
+                <a:ext uri="{FF2B5EF4-FFF2-40B4-BE49-F238E27FC236}">
+                  <a16:creationId xmlns:a16="http://schemas.microsoft.com/office/drawing/2014/main" id="{3BD77EC1-C3D3-3CE1-B336-0F6F0DC0255C}"/>
+                </a:ext>
+              </a:extLst>
+            </p:cNvPr>
+            <p:cNvSpPr txBox="1"/>
+            <p:nvPr/>
+          </p:nvSpPr>
+          <p:spPr>
+            <a:xfrm>
+              <a:off x="25933780" y="10760201"/>
+              <a:ext cx="595035" cy="369332"/>
+            </a:xfrm>
+            <a:prstGeom prst="rect">
+              <a:avLst/>
+            </a:prstGeom>
+            <a:noFill/>
+          </p:spPr>
+          <p:txBody>
+            <a:bodyPr wrap="none" rtlCol="0">
+              <a:spAutoFit/>
+            </a:bodyPr>
+            <a:lstStyle/>
+            <a:p>
+              <a:r>
+                <a:rPr lang="en-US" dirty="0"/>
+                <a:t>Age</a:t>
+              </a:r>
+            </a:p>
+          </p:txBody>
+        </p:sp>
+      </p:grpSp>
+      <p:grpSp>
+        <p:nvGrpSpPr>
+          <p:cNvPr id="15587" name="Group 15586">
+            <a:extLst>
+              <a:ext uri="{FF2B5EF4-FFF2-40B4-BE49-F238E27FC236}">
+                <a16:creationId xmlns:a16="http://schemas.microsoft.com/office/drawing/2014/main" id="{57BE42D1-D947-A011-A901-F26C21D3FBA6}"/>
+              </a:ext>
+            </a:extLst>
+          </p:cNvPr>
+          <p:cNvGrpSpPr/>
+          <p:nvPr/>
+        </p:nvGrpSpPr>
+        <p:grpSpPr>
+          <a:xfrm>
+            <a:off x="23831562" y="15483235"/>
+            <a:ext cx="4822423" cy="6591794"/>
+            <a:chOff x="23748065" y="15407376"/>
+            <a:chExt cx="5097317" cy="5969000"/>
+          </a:xfrm>
+        </p:grpSpPr>
+        <p:pic>
+          <p:nvPicPr>
+            <p:cNvPr id="15585" name="Picture 15584" descr="A graph with black dots and blue dotted lines&#10;&#10;Description automatically generated">
+              <a:extLst>
+                <a:ext uri="{FF2B5EF4-FFF2-40B4-BE49-F238E27FC236}">
+                  <a16:creationId xmlns:a16="http://schemas.microsoft.com/office/drawing/2014/main" id="{598519B8-9B21-7540-A2A5-828BC7F408F8}"/>
+                </a:ext>
+              </a:extLst>
+            </p:cNvPr>
+            <p:cNvPicPr>
+              <a:picLocks noChangeAspect="1"/>
+            </p:cNvPicPr>
+            <p:nvPr/>
+          </p:nvPicPr>
+          <p:blipFill rotWithShape="1">
+            <a:blip r:embed="rId9">
+              <a:extLst>
+                <a:ext uri="{28A0092B-C50C-407E-A947-70E740481C1C}">
+                  <a14:useLocalDpi xmlns:a14="http://schemas.microsoft.com/office/drawing/2010/main" val="0"/>
+                </a:ext>
+              </a:extLst>
+            </a:blip>
+            <a:srcRect l="4171" r="4414"/>
+            <a:stretch/>
+          </p:blipFill>
+          <p:spPr>
+            <a:xfrm>
+              <a:off x="24027316" y="15407376"/>
+              <a:ext cx="4818066" cy="5969000"/>
+            </a:xfrm>
+            <a:prstGeom prst="rect">
+              <a:avLst/>
+            </a:prstGeom>
+          </p:spPr>
+        </p:pic>
+        <p:sp>
+          <p:nvSpPr>
+            <p:cNvPr id="15586" name="TextBox 15585">
+              <a:extLst>
+                <a:ext uri="{FF2B5EF4-FFF2-40B4-BE49-F238E27FC236}">
+                  <a16:creationId xmlns:a16="http://schemas.microsoft.com/office/drawing/2014/main" id="{A0153BBE-778C-5CAD-D96B-A250B1AF85E3}"/>
+                </a:ext>
+              </a:extLst>
+            </p:cNvPr>
+            <p:cNvSpPr txBox="1"/>
+            <p:nvPr/>
+          </p:nvSpPr>
+          <p:spPr>
+            <a:xfrm rot="16200000">
+              <a:off x="22759974" y="17825166"/>
+              <a:ext cx="2345514" cy="369332"/>
+            </a:xfrm>
+            <a:prstGeom prst="rect">
+              <a:avLst/>
+            </a:prstGeom>
+            <a:noFill/>
+          </p:spPr>
+          <p:txBody>
+            <a:bodyPr wrap="none" rtlCol="0">
+              <a:spAutoFit/>
+            </a:bodyPr>
+            <a:lstStyle/>
+            <a:p>
+              <a:r>
+                <a:rPr lang="en-US" dirty="0"/>
+                <a:t>Reciprocate &gt; Defect</a:t>
+              </a:r>
+            </a:p>
+          </p:txBody>
+        </p:sp>
+      </p:grpSp>
+      <p:pic>
+        <p:nvPicPr>
+          <p:cNvPr id="15589" name="Picture 15588" descr="A graph with black dots&#10;&#10;Description automatically generated">
+            <a:extLst>
+              <a:ext uri="{FF2B5EF4-FFF2-40B4-BE49-F238E27FC236}">
+                <a16:creationId xmlns:a16="http://schemas.microsoft.com/office/drawing/2014/main" id="{4BFEB967-8D3E-4677-F23E-77749588839D}"/>
+              </a:ext>
+            </a:extLst>
+          </p:cNvPr>
+          <p:cNvPicPr>
+            <a:picLocks noChangeAspect="1"/>
+          </p:cNvPicPr>
+          <p:nvPr/>
+        </p:nvPicPr>
+        <p:blipFill rotWithShape="1">
+          <a:blip r:embed="rId10">
+            <a:extLst>
+              <a:ext uri="{28A0092B-C50C-407E-A947-70E740481C1C}">
+                <a14:useLocalDpi xmlns:a14="http://schemas.microsoft.com/office/drawing/2010/main" val="0"/>
+              </a:ext>
+            </a:extLst>
+          </a:blip>
+          <a:srcRect r="4889"/>
+          <a:stretch/>
+        </p:blipFill>
+        <p:spPr>
+          <a:xfrm>
+            <a:off x="17399205" y="23832491"/>
+            <a:ext cx="4818939" cy="6591795"/>
+          </a:xfrm>
+          <a:prstGeom prst="rect">
+            <a:avLst/>
+          </a:prstGeom>
+        </p:spPr>
+      </p:pic>
+      <p:pic>
+        <p:nvPicPr>
+          <p:cNvPr id="15591" name="Picture 15590" descr="A graph with black dots&#10;&#10;Description automatically generated">
+            <a:extLst>
+              <a:ext uri="{FF2B5EF4-FFF2-40B4-BE49-F238E27FC236}">
+                <a16:creationId xmlns:a16="http://schemas.microsoft.com/office/drawing/2014/main" id="{11E209B1-E673-CE6E-75F6-8293649AD060}"/>
+              </a:ext>
+            </a:extLst>
+          </p:cNvPr>
+          <p:cNvPicPr>
+            <a:picLocks noChangeAspect="1"/>
+          </p:cNvPicPr>
+          <p:nvPr/>
+        </p:nvPicPr>
+        <p:blipFill rotWithShape="1">
+          <a:blip r:embed="rId11">
+            <a:extLst>
+              <a:ext uri="{28A0092B-C50C-407E-A947-70E740481C1C}">
+                <a14:useLocalDpi xmlns:a14="http://schemas.microsoft.com/office/drawing/2010/main" val="0"/>
+              </a:ext>
+            </a:extLst>
+          </a:blip>
+          <a:srcRect r="4889"/>
+          <a:stretch/>
+        </p:blipFill>
+        <p:spPr>
+          <a:xfrm>
+            <a:off x="23862249" y="23819109"/>
+            <a:ext cx="4818939" cy="6665769"/>
+          </a:xfrm>
+          <a:prstGeom prst="rect">
+            <a:avLst/>
+          </a:prstGeom>
+        </p:spPr>
+      </p:pic>
+      <p:sp>
+        <p:nvSpPr>
+          <p:cNvPr id="15595" name="TextBox 15594">
+            <a:extLst>
+              <a:ext uri="{FF2B5EF4-FFF2-40B4-BE49-F238E27FC236}">
+                <a16:creationId xmlns:a16="http://schemas.microsoft.com/office/drawing/2014/main" id="{BD0DF8CA-4563-3ED7-8925-AC53B7E7547D}"/>
+              </a:ext>
+            </a:extLst>
+          </p:cNvPr>
+          <p:cNvSpPr txBox="1"/>
+          <p:nvPr/>
+        </p:nvSpPr>
+        <p:spPr>
+          <a:xfrm>
+            <a:off x="18362902" y="31104529"/>
+            <a:ext cx="9855262" cy="553998"/>
+          </a:xfrm>
+          <a:prstGeom prst="rect">
+            <a:avLst/>
+          </a:prstGeom>
+          <a:noFill/>
+        </p:spPr>
+        <p:txBody>
+          <a:bodyPr wrap="none" rtlCol="0">
+            <a:spAutoFit/>
+          </a:bodyPr>
+          <a:lstStyle/>
+          <a:p>
+            <a:r>
+              <a:rPr lang="en-US" sz="3000" dirty="0"/>
+              <a:t>We found that activation in the VS was not related to age</a:t>
+            </a:r>
+          </a:p>
+        </p:txBody>
+      </p:sp>
     </p:spTree>
   </p:cSld>
   <p:clrMapOvr>
     <a:masterClrMapping/>
   </p:clrMapOvr>
+  <p:extLst>
+    <p:ext uri="{6950BFC3-D8DA-4A85-94F7-54DA5524770B}">
+      <p188:commentRel xmlns:p188="http://schemas.microsoft.com/office/powerpoint/2018/8/main" r:id="rId3"/>
+    </p:ext>
+  </p:extLst>
 </p:sld>
 </file>
 
@@ -12213,8 +10366,8 @@
         </p:nvGrpSpPr>
         <p:grpSpPr>
           <a:xfrm>
-            <a:off x="17267302" y="5300010"/>
-            <a:ext cx="15233772" cy="14187253"/>
+            <a:off x="14894830" y="6574861"/>
+            <a:ext cx="7364964" cy="7636639"/>
             <a:chOff x="17267302" y="5300010"/>
             <a:chExt cx="15233772" cy="14187253"/>
           </a:xfrm>
@@ -13202,10 +11355,1129 @@
           </p:txBody>
         </p:sp>
       </p:grpSp>
+      <p:grpSp>
+        <p:nvGrpSpPr>
+          <p:cNvPr id="33" name="Group 32">
+            <a:extLst>
+              <a:ext uri="{FF2B5EF4-FFF2-40B4-BE49-F238E27FC236}">
+                <a16:creationId xmlns:a16="http://schemas.microsoft.com/office/drawing/2014/main" id="{3CB27CAF-4280-AD34-B210-5080F180D2C2}"/>
+              </a:ext>
+            </a:extLst>
+          </p:cNvPr>
+          <p:cNvGrpSpPr/>
+          <p:nvPr/>
+        </p:nvGrpSpPr>
+        <p:grpSpPr>
+          <a:xfrm>
+            <a:off x="3015059" y="6187482"/>
+            <a:ext cx="7765387" cy="8857886"/>
+            <a:chOff x="15752261" y="4761579"/>
+            <a:chExt cx="6351768" cy="7245387"/>
+          </a:xfrm>
+        </p:grpSpPr>
+        <p:grpSp>
+          <p:nvGrpSpPr>
+            <p:cNvPr id="34" name="Group 33">
+              <a:extLst>
+                <a:ext uri="{FF2B5EF4-FFF2-40B4-BE49-F238E27FC236}">
+                  <a16:creationId xmlns:a16="http://schemas.microsoft.com/office/drawing/2014/main" id="{8C781F48-3237-34BE-792E-D00CC6F352EC}"/>
+                </a:ext>
+              </a:extLst>
+            </p:cNvPr>
+            <p:cNvGrpSpPr/>
+            <p:nvPr/>
+          </p:nvGrpSpPr>
+          <p:grpSpPr>
+            <a:xfrm>
+              <a:off x="15752261" y="4761579"/>
+              <a:ext cx="6351768" cy="7245387"/>
+              <a:chOff x="15752261" y="4761579"/>
+              <a:chExt cx="6351768" cy="7245387"/>
+            </a:xfrm>
+          </p:grpSpPr>
+          <p:sp>
+            <p:nvSpPr>
+              <p:cNvPr id="42" name="Rectangle 41">
+                <a:extLst>
+                  <a:ext uri="{FF2B5EF4-FFF2-40B4-BE49-F238E27FC236}">
+                    <a16:creationId xmlns:a16="http://schemas.microsoft.com/office/drawing/2014/main" id="{AFCDB739-B6CA-6A2F-4FF4-2D6158E62F41}"/>
+                  </a:ext>
+                </a:extLst>
+              </p:cNvPr>
+              <p:cNvSpPr/>
+              <p:nvPr/>
+            </p:nvSpPr>
+            <p:spPr bwMode="auto">
+              <a:xfrm>
+                <a:off x="15752261" y="4761579"/>
+                <a:ext cx="6351768" cy="7245387"/>
+              </a:xfrm>
+              <a:prstGeom prst="rect">
+                <a:avLst/>
+              </a:prstGeom>
+              <a:solidFill>
+                <a:srgbClr val="FAF86D">
+                  <a:alpha val="54118"/>
+                </a:srgbClr>
+              </a:solidFill>
+              <a:ln w="50800" cap="flat" cmpd="sng" algn="ctr">
+                <a:solidFill>
+                  <a:schemeClr val="tx1"/>
+                </a:solidFill>
+                <a:prstDash val="solid"/>
+                <a:round/>
+                <a:headEnd type="none" w="med" len="med"/>
+                <a:tailEnd type="none" w="med" len="med"/>
+              </a:ln>
+              <a:effectLst/>
+            </p:spPr>
+            <p:txBody>
+              <a:bodyPr vert="horz" wrap="square" lIns="91440" tIns="45720" rIns="91440" bIns="45720" numCol="1" rtlCol="0" anchor="t" anchorCtr="0" compatLnSpc="1">
+                <a:prstTxWarp prst="textNoShape">
+                  <a:avLst/>
+                </a:prstTxWarp>
+              </a:bodyPr>
+              <a:lstStyle/>
+              <a:p>
+                <a:pPr marL="0" marR="0" indent="0" algn="l" defTabSz="4389438" rtl="0" eaLnBrk="1" fontAlgn="base" latinLnBrk="0" hangingPunct="1">
+                  <a:lnSpc>
+                    <a:spcPct val="100000"/>
+                  </a:lnSpc>
+                  <a:spcBef>
+                    <a:spcPct val="0"/>
+                  </a:spcBef>
+                  <a:spcAft>
+                    <a:spcPct val="0"/>
+                  </a:spcAft>
+                  <a:buClrTx/>
+                  <a:buSzTx/>
+                  <a:buFontTx/>
+                  <a:buNone/>
+                  <a:tabLst/>
+                </a:pPr>
+                <a:endParaRPr kumimoji="0" lang="en-US" sz="1800" b="0" i="0" u="none" strike="noStrike" cap="none" normalizeH="0" baseline="0" dirty="0">
+                  <a:ln>
+                    <a:noFill/>
+                  </a:ln>
+                  <a:solidFill>
+                    <a:schemeClr val="tx1"/>
+                  </a:solidFill>
+                  <a:effectLst/>
+                  <a:latin typeface="Arial" charset="0"/>
+                  <a:cs typeface="Arial" charset="0"/>
+                </a:endParaRPr>
+              </a:p>
+            </p:txBody>
+          </p:sp>
+          <p:sp>
+            <p:nvSpPr>
+              <p:cNvPr id="43" name="TextBox 42">
+                <a:extLst>
+                  <a:ext uri="{FF2B5EF4-FFF2-40B4-BE49-F238E27FC236}">
+                    <a16:creationId xmlns:a16="http://schemas.microsoft.com/office/drawing/2014/main" id="{D8CB1042-C763-7E92-8F91-E80C5111A56D}"/>
+                  </a:ext>
+                </a:extLst>
+              </p:cNvPr>
+              <p:cNvSpPr txBox="1"/>
+              <p:nvPr/>
+            </p:nvSpPr>
+            <p:spPr>
+              <a:xfrm>
+                <a:off x="15906068" y="11363259"/>
+                <a:ext cx="4965131" cy="579022"/>
+              </a:xfrm>
+              <a:prstGeom prst="rect">
+                <a:avLst/>
+              </a:prstGeom>
+              <a:noFill/>
+            </p:spPr>
+            <p:txBody>
+              <a:bodyPr wrap="square" lIns="91440" tIns="45720" rIns="91440" bIns="45720" anchor="t">
+                <a:spAutoFit/>
+              </a:bodyPr>
+              <a:lstStyle/>
+              <a:p>
+                <a:r>
+                  <a:rPr lang="en-US" altLang="en-US" sz="2000" dirty="0">
+                    <a:latin typeface="Helvetica"/>
+                    <a:ea typeface="MS PGothic"/>
+                  </a:rPr>
+                  <a:t>Kyle M. </a:t>
+                </a:r>
+                <a:r>
+                  <a:rPr lang="en-US" altLang="en-US" sz="2000" dirty="0" err="1">
+                    <a:latin typeface="Helvetica"/>
+                    <a:ea typeface="MS PGothic"/>
+                  </a:rPr>
+                  <a:t>Woosnam</a:t>
+                </a:r>
+                <a:r>
+                  <a:rPr lang="en-US" altLang="en-US" sz="2000" dirty="0">
+                    <a:latin typeface="Helvetica"/>
+                    <a:ea typeface="MS PGothic"/>
+                  </a:rPr>
+                  <a:t>,</a:t>
+                </a:r>
+              </a:p>
+              <a:p>
+                <a:r>
+                  <a:rPr lang="en-US" altLang="en-US" sz="2000" dirty="0">
+                    <a:latin typeface="Helvetica"/>
+                    <a:ea typeface="MS PGothic"/>
+                  </a:rPr>
+                  <a:t>The inclusion of other in the self (</a:t>
+                </a:r>
+                <a:r>
+                  <a:rPr lang="en-US" altLang="en-US" sz="2000" dirty="0" err="1">
+                    <a:latin typeface="Helvetica"/>
+                    <a:ea typeface="MS PGothic"/>
+                  </a:rPr>
+                  <a:t>ios</a:t>
+                </a:r>
+                <a:r>
+                  <a:rPr lang="en-US" altLang="en-US" sz="2000" dirty="0">
+                    <a:latin typeface="Helvetica"/>
+                    <a:ea typeface="MS PGothic"/>
+                  </a:rPr>
+                  <a:t>) scale</a:t>
+                </a:r>
+              </a:p>
+            </p:txBody>
+          </p:sp>
+        </p:grpSp>
+        <p:grpSp>
+          <p:nvGrpSpPr>
+            <p:cNvPr id="35" name="Group 34">
+              <a:extLst>
+                <a:ext uri="{FF2B5EF4-FFF2-40B4-BE49-F238E27FC236}">
+                  <a16:creationId xmlns:a16="http://schemas.microsoft.com/office/drawing/2014/main" id="{7D816D11-3FBA-D07E-6B9E-38A2F4EB099B}"/>
+                </a:ext>
+              </a:extLst>
+            </p:cNvPr>
+            <p:cNvGrpSpPr/>
+            <p:nvPr/>
+          </p:nvGrpSpPr>
+          <p:grpSpPr>
+            <a:xfrm>
+              <a:off x="16266708" y="5102620"/>
+              <a:ext cx="5346874" cy="6245250"/>
+              <a:chOff x="24606262" y="5087612"/>
+              <a:chExt cx="5346874" cy="6245250"/>
+            </a:xfrm>
+          </p:grpSpPr>
+          <p:grpSp>
+            <p:nvGrpSpPr>
+              <p:cNvPr id="36" name="Group 35">
+                <a:extLst>
+                  <a:ext uri="{FF2B5EF4-FFF2-40B4-BE49-F238E27FC236}">
+                    <a16:creationId xmlns:a16="http://schemas.microsoft.com/office/drawing/2014/main" id="{6775D2E0-EA68-224B-714D-E08D12FB0BC4}"/>
+                  </a:ext>
+                </a:extLst>
+              </p:cNvPr>
+              <p:cNvGrpSpPr/>
+              <p:nvPr/>
+            </p:nvGrpSpPr>
+            <p:grpSpPr>
+              <a:xfrm>
+                <a:off x="24606262" y="5087612"/>
+                <a:ext cx="5346874" cy="2981162"/>
+                <a:chOff x="24230508" y="5420973"/>
+                <a:chExt cx="5346874" cy="2981162"/>
+              </a:xfrm>
+            </p:grpSpPr>
+            <p:sp>
+              <p:nvSpPr>
+                <p:cNvPr id="40" name="Oval 39">
+                  <a:extLst>
+                    <a:ext uri="{FF2B5EF4-FFF2-40B4-BE49-F238E27FC236}">
+                      <a16:creationId xmlns:a16="http://schemas.microsoft.com/office/drawing/2014/main" id="{F210A4F8-95CD-6B0C-1156-2D603B9862CF}"/>
+                    </a:ext>
+                  </a:extLst>
+                </p:cNvPr>
+                <p:cNvSpPr/>
+                <p:nvPr/>
+              </p:nvSpPr>
+              <p:spPr bwMode="auto">
+                <a:xfrm>
+                  <a:off x="24230508" y="5440590"/>
+                  <a:ext cx="2961545" cy="2961545"/>
+                </a:xfrm>
+                <a:prstGeom prst="ellipse">
+                  <a:avLst/>
+                </a:prstGeom>
+                <a:noFill/>
+                <a:ln w="50800" cap="flat" cmpd="sng" algn="ctr">
+                  <a:solidFill>
+                    <a:schemeClr val="tx1"/>
+                  </a:solidFill>
+                  <a:prstDash val="solid"/>
+                  <a:round/>
+                  <a:headEnd type="none" w="med" len="med"/>
+                  <a:tailEnd type="none" w="med" len="med"/>
+                </a:ln>
+                <a:effectLst/>
+              </p:spPr>
+              <p:txBody>
+                <a:bodyPr vert="horz" wrap="square" lIns="91440" tIns="45720" rIns="91440" bIns="45720" numCol="1" rtlCol="0" anchor="t" anchorCtr="0" compatLnSpc="1">
+                  <a:prstTxWarp prst="textNoShape">
+                    <a:avLst/>
+                  </a:prstTxWarp>
+                </a:bodyPr>
+                <a:lstStyle/>
+                <a:p>
+                  <a:pPr marL="0" marR="0" indent="0" algn="ctr" defTabSz="4389438" rtl="0" eaLnBrk="1" fontAlgn="base" latinLnBrk="0" hangingPunct="1">
+                    <a:lnSpc>
+                      <a:spcPct val="100000"/>
+                    </a:lnSpc>
+                    <a:spcBef>
+                      <a:spcPct val="0"/>
+                    </a:spcBef>
+                    <a:spcAft>
+                      <a:spcPct val="0"/>
+                    </a:spcAft>
+                    <a:buClrTx/>
+                    <a:buSzTx/>
+                    <a:buFontTx/>
+                    <a:buNone/>
+                    <a:tabLst/>
+                  </a:pPr>
+                  <a:r>
+                    <a:rPr lang="en-US" sz="3000" dirty="0">
+                      <a:latin typeface="Arial" charset="0"/>
+                      <a:cs typeface="Arial" charset="0"/>
+                    </a:rPr>
+                    <a:t>Other</a:t>
+                  </a:r>
+                  <a:endParaRPr kumimoji="0" lang="en-US" sz="3000" b="0" i="0" u="none" strike="noStrike" cap="none" normalizeH="0" baseline="0" dirty="0">
+                    <a:ln>
+                      <a:noFill/>
+                    </a:ln>
+                    <a:solidFill>
+                      <a:schemeClr val="tx1"/>
+                    </a:solidFill>
+                    <a:effectLst/>
+                    <a:latin typeface="Arial" charset="0"/>
+                    <a:cs typeface="Arial" charset="0"/>
+                  </a:endParaRPr>
+                </a:p>
+              </p:txBody>
+            </p:sp>
+            <p:sp>
+              <p:nvSpPr>
+                <p:cNvPr id="41" name="Oval 40">
+                  <a:extLst>
+                    <a:ext uri="{FF2B5EF4-FFF2-40B4-BE49-F238E27FC236}">
+                      <a16:creationId xmlns:a16="http://schemas.microsoft.com/office/drawing/2014/main" id="{094E4F7B-794E-48AC-145A-00C8986E4091}"/>
+                    </a:ext>
+                  </a:extLst>
+                </p:cNvPr>
+                <p:cNvSpPr/>
+                <p:nvPr/>
+              </p:nvSpPr>
+              <p:spPr bwMode="auto">
+                <a:xfrm>
+                  <a:off x="26615837" y="5420973"/>
+                  <a:ext cx="2961545" cy="2961545"/>
+                </a:xfrm>
+                <a:prstGeom prst="ellipse">
+                  <a:avLst/>
+                </a:prstGeom>
+                <a:noFill/>
+                <a:ln w="50800" cap="flat" cmpd="sng" algn="ctr">
+                  <a:solidFill>
+                    <a:schemeClr val="tx1"/>
+                  </a:solidFill>
+                  <a:prstDash val="solid"/>
+                  <a:round/>
+                  <a:headEnd type="none" w="med" len="med"/>
+                  <a:tailEnd type="none" w="med" len="med"/>
+                </a:ln>
+                <a:effectLst/>
+              </p:spPr>
+              <p:txBody>
+                <a:bodyPr vert="horz" wrap="square" lIns="91440" tIns="45720" rIns="91440" bIns="45720" numCol="1" rtlCol="0" anchor="t" anchorCtr="0" compatLnSpc="1">
+                  <a:prstTxWarp prst="textNoShape">
+                    <a:avLst/>
+                  </a:prstTxWarp>
+                </a:bodyPr>
+                <a:lstStyle/>
+                <a:p>
+                  <a:pPr marL="0" marR="0" indent="0" algn="ctr" defTabSz="4389438" rtl="0" eaLnBrk="1" fontAlgn="base" latinLnBrk="0" hangingPunct="1">
+                    <a:lnSpc>
+                      <a:spcPct val="100000"/>
+                    </a:lnSpc>
+                    <a:spcBef>
+                      <a:spcPct val="0"/>
+                    </a:spcBef>
+                    <a:spcAft>
+                      <a:spcPct val="0"/>
+                    </a:spcAft>
+                    <a:buClrTx/>
+                    <a:buSzTx/>
+                    <a:buFontTx/>
+                    <a:buNone/>
+                    <a:tabLst/>
+                  </a:pPr>
+                  <a:r>
+                    <a:rPr kumimoji="0" lang="en-US" sz="3000" b="0" i="0" u="none" strike="noStrike" cap="none" normalizeH="0" baseline="0" dirty="0">
+                      <a:ln>
+                        <a:noFill/>
+                      </a:ln>
+                      <a:solidFill>
+                        <a:schemeClr val="tx1"/>
+                      </a:solidFill>
+                      <a:effectLst/>
+                      <a:latin typeface="Arial" charset="0"/>
+                      <a:cs typeface="Arial" charset="0"/>
+                    </a:rPr>
+                    <a:t>Self</a:t>
+                  </a:r>
+                </a:p>
+              </p:txBody>
+            </p:sp>
+          </p:grpSp>
+          <p:grpSp>
+            <p:nvGrpSpPr>
+              <p:cNvPr id="37" name="Group 36">
+                <a:extLst>
+                  <a:ext uri="{FF2B5EF4-FFF2-40B4-BE49-F238E27FC236}">
+                    <a16:creationId xmlns:a16="http://schemas.microsoft.com/office/drawing/2014/main" id="{9954FFDE-545B-AD1D-A25A-59FD7AEFC418}"/>
+                  </a:ext>
+                </a:extLst>
+              </p:cNvPr>
+              <p:cNvGrpSpPr/>
+              <p:nvPr/>
+            </p:nvGrpSpPr>
+            <p:grpSpPr>
+              <a:xfrm>
+                <a:off x="25411939" y="8348344"/>
+                <a:ext cx="3925091" cy="2984518"/>
+                <a:chOff x="25130667" y="8968962"/>
+                <a:chExt cx="3925091" cy="2984518"/>
+              </a:xfrm>
+            </p:grpSpPr>
+            <p:sp>
+              <p:nvSpPr>
+                <p:cNvPr id="38" name="Oval 37">
+                  <a:extLst>
+                    <a:ext uri="{FF2B5EF4-FFF2-40B4-BE49-F238E27FC236}">
+                      <a16:creationId xmlns:a16="http://schemas.microsoft.com/office/drawing/2014/main" id="{BFC73058-CB31-27B0-772A-3BDDA9B99C29}"/>
+                    </a:ext>
+                  </a:extLst>
+                </p:cNvPr>
+                <p:cNvSpPr/>
+                <p:nvPr/>
+              </p:nvSpPr>
+              <p:spPr bwMode="auto">
+                <a:xfrm>
+                  <a:off x="25130667" y="8968962"/>
+                  <a:ext cx="2961545" cy="2961545"/>
+                </a:xfrm>
+                <a:prstGeom prst="ellipse">
+                  <a:avLst/>
+                </a:prstGeom>
+                <a:noFill/>
+                <a:ln w="50800" cap="flat" cmpd="sng" algn="ctr">
+                  <a:solidFill>
+                    <a:schemeClr val="tx1"/>
+                  </a:solidFill>
+                  <a:prstDash val="solid"/>
+                  <a:round/>
+                  <a:headEnd type="none" w="med" len="med"/>
+                  <a:tailEnd type="none" w="med" len="med"/>
+                </a:ln>
+                <a:effectLst/>
+              </p:spPr>
+              <p:txBody>
+                <a:bodyPr vert="horz" wrap="square" lIns="91440" tIns="45720" rIns="91440" bIns="45720" numCol="1" rtlCol="0" anchor="t" anchorCtr="0" compatLnSpc="1">
+                  <a:prstTxWarp prst="textNoShape">
+                    <a:avLst/>
+                  </a:prstTxWarp>
+                </a:bodyPr>
+                <a:lstStyle/>
+                <a:p>
+                  <a:pPr marL="0" marR="0" indent="0" algn="l" defTabSz="4389438" rtl="0" eaLnBrk="1" fontAlgn="base" latinLnBrk="0" hangingPunct="1">
+                    <a:lnSpc>
+                      <a:spcPct val="100000"/>
+                    </a:lnSpc>
+                    <a:spcBef>
+                      <a:spcPct val="0"/>
+                    </a:spcBef>
+                    <a:spcAft>
+                      <a:spcPct val="0"/>
+                    </a:spcAft>
+                    <a:buClrTx/>
+                    <a:buSzTx/>
+                    <a:buFontTx/>
+                    <a:buNone/>
+                    <a:tabLst/>
+                  </a:pPr>
+                  <a:endParaRPr kumimoji="0" lang="en-US" sz="1800" b="0" i="0" u="none" strike="noStrike" cap="none" normalizeH="0" baseline="0" dirty="0">
+                    <a:ln>
+                      <a:noFill/>
+                    </a:ln>
+                    <a:solidFill>
+                      <a:schemeClr val="tx1"/>
+                    </a:solidFill>
+                    <a:effectLst/>
+                    <a:latin typeface="Arial" charset="0"/>
+                    <a:cs typeface="Arial" charset="0"/>
+                  </a:endParaRPr>
+                </a:p>
+              </p:txBody>
+            </p:sp>
+            <p:sp>
+              <p:nvSpPr>
+                <p:cNvPr id="39" name="Oval 38">
+                  <a:extLst>
+                    <a:ext uri="{FF2B5EF4-FFF2-40B4-BE49-F238E27FC236}">
+                      <a16:creationId xmlns:a16="http://schemas.microsoft.com/office/drawing/2014/main" id="{067D4BD0-69C1-6205-729F-359FD089EF50}"/>
+                    </a:ext>
+                  </a:extLst>
+                </p:cNvPr>
+                <p:cNvSpPr/>
+                <p:nvPr/>
+              </p:nvSpPr>
+              <p:spPr bwMode="auto">
+                <a:xfrm>
+                  <a:off x="26094213" y="8991935"/>
+                  <a:ext cx="2961545" cy="2961545"/>
+                </a:xfrm>
+                <a:prstGeom prst="ellipse">
+                  <a:avLst/>
+                </a:prstGeom>
+                <a:noFill/>
+                <a:ln w="50800" cap="flat" cmpd="sng" algn="ctr">
+                  <a:solidFill>
+                    <a:schemeClr val="tx1"/>
+                  </a:solidFill>
+                  <a:prstDash val="solid"/>
+                  <a:round/>
+                  <a:headEnd type="none" w="med" len="med"/>
+                  <a:tailEnd type="none" w="med" len="med"/>
+                </a:ln>
+                <a:effectLst/>
+              </p:spPr>
+              <p:txBody>
+                <a:bodyPr vert="horz" wrap="square" lIns="91440" tIns="45720" rIns="91440" bIns="45720" numCol="1" rtlCol="0" anchor="t" anchorCtr="0" compatLnSpc="1">
+                  <a:prstTxWarp prst="textNoShape">
+                    <a:avLst/>
+                  </a:prstTxWarp>
+                </a:bodyPr>
+                <a:lstStyle/>
+                <a:p>
+                  <a:pPr marL="0" marR="0" indent="0" algn="l" defTabSz="4389438" rtl="0" eaLnBrk="1" fontAlgn="base" latinLnBrk="0" hangingPunct="1">
+                    <a:lnSpc>
+                      <a:spcPct val="100000"/>
+                    </a:lnSpc>
+                    <a:spcBef>
+                      <a:spcPct val="0"/>
+                    </a:spcBef>
+                    <a:spcAft>
+                      <a:spcPct val="0"/>
+                    </a:spcAft>
+                    <a:buClrTx/>
+                    <a:buSzTx/>
+                    <a:buFontTx/>
+                    <a:buNone/>
+                    <a:tabLst/>
+                  </a:pPr>
+                  <a:endParaRPr kumimoji="0" lang="en-US" sz="1800" b="0" i="0" u="none" strike="noStrike" cap="none" normalizeH="0" baseline="0" dirty="0">
+                    <a:ln>
+                      <a:noFill/>
+                    </a:ln>
+                    <a:solidFill>
+                      <a:schemeClr val="tx1"/>
+                    </a:solidFill>
+                    <a:effectLst/>
+                    <a:latin typeface="Arial" charset="0"/>
+                    <a:cs typeface="Arial" charset="0"/>
+                  </a:endParaRPr>
+                </a:p>
+              </p:txBody>
+            </p:sp>
+          </p:grpSp>
+        </p:grpSp>
+      </p:grpSp>
+      <p:pic>
+        <p:nvPicPr>
+          <p:cNvPr id="44" name="Picture 43" descr="A graph with a line and dots&#10;&#10;Description automatically generated">
+            <a:extLst>
+              <a:ext uri="{FF2B5EF4-FFF2-40B4-BE49-F238E27FC236}">
+                <a16:creationId xmlns:a16="http://schemas.microsoft.com/office/drawing/2014/main" id="{5A9B45D2-69CE-45B6-E0FF-63E075F123C8}"/>
+              </a:ext>
+            </a:extLst>
+          </p:cNvPr>
+          <p:cNvPicPr>
+            <a:picLocks noChangeAspect="1"/>
+          </p:cNvPicPr>
+          <p:nvPr/>
+        </p:nvPicPr>
+        <p:blipFill rotWithShape="1">
+          <a:blip r:embed="rId2">
+            <a:extLst>
+              <a:ext uri="{28A0092B-C50C-407E-A947-70E740481C1C}">
+                <a14:useLocalDpi xmlns:a14="http://schemas.microsoft.com/office/drawing/2010/main" val="0"/>
+              </a:ext>
+            </a:extLst>
+          </a:blip>
+          <a:srcRect r="6237"/>
+          <a:stretch/>
+        </p:blipFill>
+        <p:spPr>
+          <a:xfrm>
+            <a:off x="23459712" y="15585535"/>
+            <a:ext cx="5976934" cy="6256269"/>
+          </a:xfrm>
+          <a:prstGeom prst="rect">
+            <a:avLst/>
+          </a:prstGeom>
+        </p:spPr>
+      </p:pic>
+      <p:sp>
+        <p:nvSpPr>
+          <p:cNvPr id="45" name="TextBox 44">
+            <a:extLst>
+              <a:ext uri="{FF2B5EF4-FFF2-40B4-BE49-F238E27FC236}">
+                <a16:creationId xmlns:a16="http://schemas.microsoft.com/office/drawing/2014/main" id="{3101D678-0DF9-DFE7-5AB5-E5E73F160921}"/>
+              </a:ext>
+            </a:extLst>
+          </p:cNvPr>
+          <p:cNvSpPr txBox="1"/>
+          <p:nvPr/>
+        </p:nvSpPr>
+        <p:spPr>
+          <a:xfrm>
+            <a:off x="25431750" y="21945601"/>
+            <a:ext cx="3377848" cy="369332"/>
+          </a:xfrm>
+          <a:prstGeom prst="rect">
+            <a:avLst/>
+          </a:prstGeom>
+          <a:noFill/>
+        </p:spPr>
+        <p:txBody>
+          <a:bodyPr wrap="none" rtlCol="0">
+            <a:spAutoFit/>
+          </a:bodyPr>
+          <a:lstStyle/>
+          <a:p>
+            <a:r>
+              <a:rPr lang="en-US" dirty="0"/>
+              <a:t>VS mask Cope 10, f-s behavior</a:t>
+            </a:r>
+          </a:p>
+        </p:txBody>
+      </p:sp>
     </p:spTree>
     <p:extLst>
       <p:ext uri="{BB962C8B-B14F-4D97-AF65-F5344CB8AC3E}">
         <p14:creationId xmlns:p14="http://schemas.microsoft.com/office/powerpoint/2010/main" val="2447354785"/>
+      </p:ext>
+    </p:extLst>
+  </p:cSld>
+  <p:clrMapOvr>
+    <a:masterClrMapping/>
+  </p:clrMapOvr>
+</p:sld>
+</file>
+
+<file path=ppt/slides/slide3.xml><?xml version="1.0" encoding="utf-8"?>
+<p:sld xmlns:a="http://schemas.openxmlformats.org/drawingml/2006/main" xmlns:r="http://schemas.openxmlformats.org/officeDocument/2006/relationships" xmlns:p="http://schemas.openxmlformats.org/presentationml/2006/main">
+  <p:cSld>
+    <p:spTree>
+      <p:nvGrpSpPr>
+        <p:cNvPr id="1" name=""/>
+        <p:cNvGrpSpPr/>
+        <p:nvPr/>
+      </p:nvGrpSpPr>
+      <p:grpSpPr>
+        <a:xfrm>
+          <a:off x="0" y="0"/>
+          <a:ext cx="0" cy="0"/>
+          <a:chOff x="0" y="0"/>
+          <a:chExt cx="0" cy="0"/>
+        </a:xfrm>
+      </p:grpSpPr>
+      <p:grpSp>
+        <p:nvGrpSpPr>
+          <p:cNvPr id="26" name="Group 25">
+            <a:extLst>
+              <a:ext uri="{FF2B5EF4-FFF2-40B4-BE49-F238E27FC236}">
+                <a16:creationId xmlns:a16="http://schemas.microsoft.com/office/drawing/2014/main" id="{31C0DE81-8A4C-6567-44BB-87FD7E9A051D}"/>
+              </a:ext>
+            </a:extLst>
+          </p:cNvPr>
+          <p:cNvGrpSpPr/>
+          <p:nvPr/>
+        </p:nvGrpSpPr>
+        <p:grpSpPr>
+          <a:xfrm>
+            <a:off x="2001587" y="2646281"/>
+            <a:ext cx="9383122" cy="9072496"/>
+            <a:chOff x="2001587" y="1558326"/>
+            <a:chExt cx="9383122" cy="9072496"/>
+          </a:xfrm>
+        </p:grpSpPr>
+        <p:pic>
+          <p:nvPicPr>
+            <p:cNvPr id="17" name="Picture 16">
+              <a:extLst>
+                <a:ext uri="{FF2B5EF4-FFF2-40B4-BE49-F238E27FC236}">
+                  <a16:creationId xmlns:a16="http://schemas.microsoft.com/office/drawing/2014/main" id="{22522DAF-799F-7CB0-F2A4-DD33CCAA882B}"/>
+                </a:ext>
+              </a:extLst>
+            </p:cNvPr>
+            <p:cNvPicPr>
+              <a:picLocks noChangeAspect="1"/>
+            </p:cNvPicPr>
+            <p:nvPr/>
+          </p:nvPicPr>
+          <p:blipFill>
+            <a:blip r:embed="rId2"/>
+            <a:stretch>
+              <a:fillRect/>
+            </a:stretch>
+          </p:blipFill>
+          <p:spPr>
+            <a:xfrm>
+              <a:off x="2355852" y="1558326"/>
+              <a:ext cx="7480300" cy="8089900"/>
+            </a:xfrm>
+            <a:prstGeom prst="rect">
+              <a:avLst/>
+            </a:prstGeom>
+          </p:spPr>
+        </p:pic>
+        <p:sp>
+          <p:nvSpPr>
+            <p:cNvPr id="18" name="TextBox 17">
+              <a:extLst>
+                <a:ext uri="{FF2B5EF4-FFF2-40B4-BE49-F238E27FC236}">
+                  <a16:creationId xmlns:a16="http://schemas.microsoft.com/office/drawing/2014/main" id="{06001986-6DE9-E7E9-6308-44C8C5897430}"/>
+                </a:ext>
+              </a:extLst>
+            </p:cNvPr>
+            <p:cNvSpPr txBox="1"/>
+            <p:nvPr/>
+          </p:nvSpPr>
+          <p:spPr>
+            <a:xfrm>
+              <a:off x="2001587" y="9922936"/>
+              <a:ext cx="9383122" cy="707886"/>
+            </a:xfrm>
+            <a:prstGeom prst="rect">
+              <a:avLst/>
+            </a:prstGeom>
+            <a:noFill/>
+          </p:spPr>
+          <p:txBody>
+            <a:bodyPr wrap="square" rtlCol="0">
+              <a:spAutoFit/>
+            </a:bodyPr>
+            <a:lstStyle/>
+            <a:p>
+              <a:r>
+                <a:rPr lang="en-US" sz="4000" b="0" i="0" dirty="0">
+                  <a:effectLst/>
+                  <a:latin typeface="Helvetica" pitchFamily="2" charset="0"/>
+                </a:rPr>
+                <a:t>Cope 12, Age model, Group positive</a:t>
+              </a:r>
+              <a:endParaRPr lang="en-US" sz="4000" dirty="0">
+                <a:latin typeface="Helvetica" pitchFamily="2" charset="0"/>
+              </a:endParaRPr>
+            </a:p>
+          </p:txBody>
+        </p:sp>
+      </p:grpSp>
+      <p:sp>
+        <p:nvSpPr>
+          <p:cNvPr id="19" name="TextBox 18">
+            <a:extLst>
+              <a:ext uri="{FF2B5EF4-FFF2-40B4-BE49-F238E27FC236}">
+                <a16:creationId xmlns:a16="http://schemas.microsoft.com/office/drawing/2014/main" id="{CBE74ECB-F834-4055-3258-70B6AD398365}"/>
+              </a:ext>
+            </a:extLst>
+          </p:cNvPr>
+          <p:cNvSpPr txBox="1"/>
+          <p:nvPr/>
+        </p:nvSpPr>
+        <p:spPr>
+          <a:xfrm>
+            <a:off x="1253067" y="591007"/>
+            <a:ext cx="5145961" cy="1323439"/>
+          </a:xfrm>
+          <a:prstGeom prst="rect">
+            <a:avLst/>
+          </a:prstGeom>
+          <a:noFill/>
+        </p:spPr>
+        <p:txBody>
+          <a:bodyPr wrap="none" rtlCol="0">
+            <a:spAutoFit/>
+          </a:bodyPr>
+          <a:lstStyle/>
+          <a:p>
+            <a:r>
+              <a:rPr lang="en-US" sz="8000" dirty="0"/>
+              <a:t>PPI results</a:t>
+            </a:r>
+          </a:p>
+        </p:txBody>
+      </p:sp>
+      <p:grpSp>
+        <p:nvGrpSpPr>
+          <p:cNvPr id="24" name="Group 23">
+            <a:extLst>
+              <a:ext uri="{FF2B5EF4-FFF2-40B4-BE49-F238E27FC236}">
+                <a16:creationId xmlns:a16="http://schemas.microsoft.com/office/drawing/2014/main" id="{47139FF2-D87E-F00E-39F7-11EAFE30801E}"/>
+              </a:ext>
+            </a:extLst>
+          </p:cNvPr>
+          <p:cNvGrpSpPr/>
+          <p:nvPr/>
+        </p:nvGrpSpPr>
+        <p:grpSpPr>
+          <a:xfrm>
+            <a:off x="11625288" y="2646281"/>
+            <a:ext cx="7941533" cy="9072496"/>
+            <a:chOff x="11394672" y="1558326"/>
+            <a:chExt cx="7941533" cy="9072496"/>
+          </a:xfrm>
+        </p:grpSpPr>
+        <p:pic>
+          <p:nvPicPr>
+            <p:cNvPr id="20" name="Picture 19">
+              <a:extLst>
+                <a:ext uri="{FF2B5EF4-FFF2-40B4-BE49-F238E27FC236}">
+                  <a16:creationId xmlns:a16="http://schemas.microsoft.com/office/drawing/2014/main" id="{E5B4CF3F-B845-054A-959C-A031EC342804}"/>
+                </a:ext>
+              </a:extLst>
+            </p:cNvPr>
+            <p:cNvPicPr>
+              <a:picLocks noChangeAspect="1"/>
+            </p:cNvPicPr>
+            <p:nvPr/>
+          </p:nvPicPr>
+          <p:blipFill>
+            <a:blip r:embed="rId3"/>
+            <a:stretch>
+              <a:fillRect/>
+            </a:stretch>
+          </p:blipFill>
+          <p:spPr>
+            <a:xfrm>
+              <a:off x="11394672" y="1558326"/>
+              <a:ext cx="7480300" cy="8089900"/>
+            </a:xfrm>
+            <a:prstGeom prst="rect">
+              <a:avLst/>
+            </a:prstGeom>
+          </p:spPr>
+        </p:pic>
+        <p:sp>
+          <p:nvSpPr>
+            <p:cNvPr id="21" name="TextBox 20">
+              <a:extLst>
+                <a:ext uri="{FF2B5EF4-FFF2-40B4-BE49-F238E27FC236}">
+                  <a16:creationId xmlns:a16="http://schemas.microsoft.com/office/drawing/2014/main" id="{1B4E32A2-5F23-AD97-4095-5B89ACA10E64}"/>
+                </a:ext>
+              </a:extLst>
+            </p:cNvPr>
+            <p:cNvSpPr txBox="1"/>
+            <p:nvPr/>
+          </p:nvSpPr>
+          <p:spPr>
+            <a:xfrm>
+              <a:off x="11394672" y="9922936"/>
+              <a:ext cx="7941533" cy="707886"/>
+            </a:xfrm>
+            <a:prstGeom prst="rect">
+              <a:avLst/>
+            </a:prstGeom>
+            <a:noFill/>
+          </p:spPr>
+          <p:txBody>
+            <a:bodyPr wrap="none" rtlCol="0">
+              <a:spAutoFit/>
+            </a:bodyPr>
+            <a:lstStyle/>
+            <a:p>
+              <a:pPr algn="l"/>
+              <a:r>
+                <a:rPr lang="en-US" sz="4000" b="0" i="0" dirty="0">
+                  <a:effectLst/>
+                  <a:latin typeface="Helvetica" pitchFamily="2" charset="0"/>
+                </a:rPr>
+                <a:t>Cope 16, Age model, Age Positive</a:t>
+              </a:r>
+            </a:p>
+          </p:txBody>
+        </p:sp>
+      </p:grpSp>
+      <p:grpSp>
+        <p:nvGrpSpPr>
+          <p:cNvPr id="25" name="Group 24">
+            <a:extLst>
+              <a:ext uri="{FF2B5EF4-FFF2-40B4-BE49-F238E27FC236}">
+                <a16:creationId xmlns:a16="http://schemas.microsoft.com/office/drawing/2014/main" id="{C8DDFC19-FC31-3774-8807-3C3EF96E9565}"/>
+              </a:ext>
+            </a:extLst>
+          </p:cNvPr>
+          <p:cNvGrpSpPr/>
+          <p:nvPr/>
+        </p:nvGrpSpPr>
+        <p:grpSpPr>
+          <a:xfrm>
+            <a:off x="21945600" y="2646281"/>
+            <a:ext cx="8428076" cy="9177870"/>
+            <a:chOff x="20433492" y="1452952"/>
+            <a:chExt cx="8428076" cy="9177870"/>
+          </a:xfrm>
+        </p:grpSpPr>
+        <p:pic>
+          <p:nvPicPr>
+            <p:cNvPr id="22" name="Picture 21">
+              <a:extLst>
+                <a:ext uri="{FF2B5EF4-FFF2-40B4-BE49-F238E27FC236}">
+                  <a16:creationId xmlns:a16="http://schemas.microsoft.com/office/drawing/2014/main" id="{67E84F56-FBCC-4DE3-7E5B-32B7C3ADA05C}"/>
+                </a:ext>
+              </a:extLst>
+            </p:cNvPr>
+            <p:cNvPicPr>
+              <a:picLocks noChangeAspect="1"/>
+            </p:cNvPicPr>
+            <p:nvPr/>
+          </p:nvPicPr>
+          <p:blipFill>
+            <a:blip r:embed="rId4"/>
+            <a:stretch>
+              <a:fillRect/>
+            </a:stretch>
+          </p:blipFill>
+          <p:spPr>
+            <a:xfrm>
+              <a:off x="20433492" y="1452952"/>
+              <a:ext cx="7480300" cy="8089900"/>
+            </a:xfrm>
+            <a:prstGeom prst="rect">
+              <a:avLst/>
+            </a:prstGeom>
+          </p:spPr>
+        </p:pic>
+        <p:sp>
+          <p:nvSpPr>
+            <p:cNvPr id="23" name="TextBox 22">
+              <a:extLst>
+                <a:ext uri="{FF2B5EF4-FFF2-40B4-BE49-F238E27FC236}">
+                  <a16:creationId xmlns:a16="http://schemas.microsoft.com/office/drawing/2014/main" id="{F8BCD694-E882-A9B9-EE6C-FBF2A1361470}"/>
+                </a:ext>
+              </a:extLst>
+            </p:cNvPr>
+            <p:cNvSpPr txBox="1"/>
+            <p:nvPr/>
+          </p:nvSpPr>
+          <p:spPr>
+            <a:xfrm>
+              <a:off x="20433492" y="9922936"/>
+              <a:ext cx="8428076" cy="707886"/>
+            </a:xfrm>
+            <a:prstGeom prst="rect">
+              <a:avLst/>
+            </a:prstGeom>
+            <a:noFill/>
+          </p:spPr>
+          <p:txBody>
+            <a:bodyPr wrap="none" rtlCol="0">
+              <a:spAutoFit/>
+            </a:bodyPr>
+            <a:lstStyle/>
+            <a:p>
+              <a:r>
+                <a:rPr lang="en-US" sz="4000" dirty="0"/>
+                <a:t>Cope 18, Age model, Group positive</a:t>
+              </a:r>
+            </a:p>
+          </p:txBody>
+        </p:sp>
+      </p:grpSp>
+      <p:grpSp>
+        <p:nvGrpSpPr>
+          <p:cNvPr id="33" name="Group 32">
+            <a:extLst>
+              <a:ext uri="{FF2B5EF4-FFF2-40B4-BE49-F238E27FC236}">
+                <a16:creationId xmlns:a16="http://schemas.microsoft.com/office/drawing/2014/main" id="{DD696CD7-5292-F3A4-E510-5F758D8BD271}"/>
+              </a:ext>
+            </a:extLst>
+          </p:cNvPr>
+          <p:cNvGrpSpPr/>
+          <p:nvPr/>
+        </p:nvGrpSpPr>
+        <p:grpSpPr>
+          <a:xfrm>
+            <a:off x="2001587" y="12780010"/>
+            <a:ext cx="11392029" cy="9551984"/>
+            <a:chOff x="2001587" y="12780010"/>
+            <a:chExt cx="11392029" cy="9551984"/>
+          </a:xfrm>
+        </p:grpSpPr>
+        <p:pic>
+          <p:nvPicPr>
+            <p:cNvPr id="27" name="Picture 26">
+              <a:extLst>
+                <a:ext uri="{FF2B5EF4-FFF2-40B4-BE49-F238E27FC236}">
+                  <a16:creationId xmlns:a16="http://schemas.microsoft.com/office/drawing/2014/main" id="{1D0EE518-C609-7A41-3342-9F84A48761EA}"/>
+                </a:ext>
+              </a:extLst>
+            </p:cNvPr>
+            <p:cNvPicPr>
+              <a:picLocks noChangeAspect="1"/>
+            </p:cNvPicPr>
+            <p:nvPr/>
+          </p:nvPicPr>
+          <p:blipFill>
+            <a:blip r:embed="rId5"/>
+            <a:stretch>
+              <a:fillRect/>
+            </a:stretch>
+          </p:blipFill>
+          <p:spPr>
+            <a:xfrm>
+              <a:off x="2001587" y="12780010"/>
+              <a:ext cx="7480300" cy="8089900"/>
+            </a:xfrm>
+            <a:prstGeom prst="rect">
+              <a:avLst/>
+            </a:prstGeom>
+          </p:spPr>
+        </p:pic>
+        <p:sp>
+          <p:nvSpPr>
+            <p:cNvPr id="29" name="TextBox 28">
+              <a:extLst>
+                <a:ext uri="{FF2B5EF4-FFF2-40B4-BE49-F238E27FC236}">
+                  <a16:creationId xmlns:a16="http://schemas.microsoft.com/office/drawing/2014/main" id="{C8D16C29-F3C7-1783-356F-A3C74F3DBD7D}"/>
+                </a:ext>
+              </a:extLst>
+            </p:cNvPr>
+            <p:cNvSpPr txBox="1"/>
+            <p:nvPr/>
+          </p:nvSpPr>
+          <p:spPr>
+            <a:xfrm>
+              <a:off x="2001587" y="21624108"/>
+              <a:ext cx="11392029" cy="707886"/>
+            </a:xfrm>
+            <a:prstGeom prst="rect">
+              <a:avLst/>
+            </a:prstGeom>
+            <a:noFill/>
+          </p:spPr>
+          <p:txBody>
+            <a:bodyPr wrap="none" rtlCol="0">
+              <a:spAutoFit/>
+            </a:bodyPr>
+            <a:lstStyle/>
+            <a:p>
+              <a:r>
+                <a:rPr lang="en-US" sz="4000" dirty="0"/>
+                <a:t>Cope 18, Model 1 (IOS F-C, Age), Group Positive</a:t>
+              </a:r>
+            </a:p>
+          </p:txBody>
+        </p:sp>
+      </p:grpSp>
+      <p:grpSp>
+        <p:nvGrpSpPr>
+          <p:cNvPr id="34" name="Group 33">
+            <a:extLst>
+              <a:ext uri="{FF2B5EF4-FFF2-40B4-BE49-F238E27FC236}">
+                <a16:creationId xmlns:a16="http://schemas.microsoft.com/office/drawing/2014/main" id="{27C3868E-1F23-6E65-B152-CF6B71F362D1}"/>
+              </a:ext>
+            </a:extLst>
+          </p:cNvPr>
+          <p:cNvGrpSpPr/>
+          <p:nvPr/>
+        </p:nvGrpSpPr>
+        <p:grpSpPr>
+          <a:xfrm>
+            <a:off x="17294226" y="12780010"/>
+            <a:ext cx="11392029" cy="9551984"/>
+            <a:chOff x="15596055" y="12780010"/>
+            <a:chExt cx="11392029" cy="9551984"/>
+          </a:xfrm>
+        </p:grpSpPr>
+        <p:pic>
+          <p:nvPicPr>
+            <p:cNvPr id="30" name="Picture 29">
+              <a:extLst>
+                <a:ext uri="{FF2B5EF4-FFF2-40B4-BE49-F238E27FC236}">
+                  <a16:creationId xmlns:a16="http://schemas.microsoft.com/office/drawing/2014/main" id="{84ADF550-18C6-94EB-A794-CC9D7BA1AC8C}"/>
+                </a:ext>
+              </a:extLst>
+            </p:cNvPr>
+            <p:cNvPicPr>
+              <a:picLocks noChangeAspect="1"/>
+            </p:cNvPicPr>
+            <p:nvPr/>
+          </p:nvPicPr>
+          <p:blipFill>
+            <a:blip r:embed="rId6"/>
+            <a:stretch>
+              <a:fillRect/>
+            </a:stretch>
+          </p:blipFill>
+          <p:spPr>
+            <a:xfrm>
+              <a:off x="15596055" y="12780010"/>
+              <a:ext cx="7480300" cy="8089900"/>
+            </a:xfrm>
+            <a:prstGeom prst="rect">
+              <a:avLst/>
+            </a:prstGeom>
+          </p:spPr>
+        </p:pic>
+        <p:sp>
+          <p:nvSpPr>
+            <p:cNvPr id="31" name="TextBox 30">
+              <a:extLst>
+                <a:ext uri="{FF2B5EF4-FFF2-40B4-BE49-F238E27FC236}">
+                  <a16:creationId xmlns:a16="http://schemas.microsoft.com/office/drawing/2014/main" id="{D8BE2C47-3961-8ADE-C230-2331727AF208}"/>
+                </a:ext>
+              </a:extLst>
+            </p:cNvPr>
+            <p:cNvSpPr txBox="1"/>
+            <p:nvPr/>
+          </p:nvSpPr>
+          <p:spPr>
+            <a:xfrm>
+              <a:off x="15596055" y="21624108"/>
+              <a:ext cx="11392029" cy="707886"/>
+            </a:xfrm>
+            <a:prstGeom prst="rect">
+              <a:avLst/>
+            </a:prstGeom>
+            <a:noFill/>
+          </p:spPr>
+          <p:txBody>
+            <a:bodyPr wrap="none" rtlCol="0">
+              <a:spAutoFit/>
+            </a:bodyPr>
+            <a:lstStyle/>
+            <a:p>
+              <a:r>
+                <a:rPr lang="en-US" sz="4000" dirty="0"/>
+                <a:t>Cope 12, Model 2 (IOS F-S, Age), Group Positive</a:t>
+              </a:r>
+            </a:p>
+          </p:txBody>
+        </p:sp>
+      </p:grpSp>
+    </p:spTree>
+    <p:extLst>
+      <p:ext uri="{BB962C8B-B14F-4D97-AF65-F5344CB8AC3E}">
+        <p14:creationId xmlns:p14="http://schemas.microsoft.com/office/powerpoint/2010/main" val="1612651699"/>
       </p:ext>
     </p:extLst>
   </p:cSld>

--- a/SFN/2023_SFN_trust.pptx
+++ b/SFN/2023_SFN_trust.pptx
@@ -8536,7 +8536,7 @@
         <p:spPr>
           <a:xfrm>
             <a:off x="30912367" y="25351882"/>
-            <a:ext cx="12914399" cy="4606389"/>
+            <a:ext cx="12914399" cy="5068054"/>
           </a:xfrm>
           <a:prstGeom prst="rect">
             <a:avLst/>
@@ -8559,7 +8559,7 @@
               <a:buChar char="•"/>
             </a:pPr>
             <a:r>
-              <a:rPr lang="en-US" sz="4000" dirty="0">
+              <a:rPr lang="en-US" sz="4500" dirty="0">
                 <a:latin typeface="Helvetica"/>
                 <a:ea typeface="MS PGothic"/>
                 <a:cs typeface="Helvetica"/>
@@ -8579,7 +8579,7 @@
               <a:buChar char="•"/>
             </a:pPr>
             <a:r>
-              <a:rPr lang="en-US" sz="4000" dirty="0">
+              <a:rPr lang="en-US" sz="4500" dirty="0">
                 <a:latin typeface="Helvetica"/>
                 <a:ea typeface="MS PGothic"/>
                 <a:cs typeface="Helvetica"/>
@@ -8599,12 +8599,12 @@
               <a:buChar char="•"/>
             </a:pPr>
             <a:r>
-              <a:rPr lang="en-US" sz="4000" dirty="0">
+              <a:rPr lang="en-US" sz="4500" dirty="0">
                 <a:latin typeface="Helvetica"/>
                 <a:ea typeface="MS PGothic"/>
                 <a:cs typeface="Helvetica"/>
               </a:rPr>
-              <a:t> Increase in age was associated with increase in MFG activation</a:t>
+              <a:t> Increase in age was associated with increase in MFG activation </a:t>
             </a:r>
           </a:p>
           <a:p>
@@ -8619,7 +8619,7 @@
               <a:buChar char="•"/>
             </a:pPr>
             <a:r>
-              <a:rPr lang="en-US" sz="4000" dirty="0">
+              <a:rPr lang="en-US" sz="4500" dirty="0">
                 <a:latin typeface="Helvetica"/>
                 <a:ea typeface="MS PGothic"/>
                 <a:cs typeface="Helvetica"/>
@@ -8658,8 +8658,8 @@
         </p:nvSpPr>
         <p:spPr>
           <a:xfrm>
-            <a:off x="30912367" y="29293095"/>
-            <a:ext cx="12442911" cy="1446550"/>
+            <a:off x="30803569" y="30020269"/>
+            <a:ext cx="12442911" cy="1938992"/>
           </a:xfrm>
           <a:prstGeom prst="rect">
             <a:avLst/>
@@ -8673,7 +8673,7 @@
           <a:lstStyle/>
           <a:p>
             <a:r>
-              <a:rPr lang="en-US" sz="4400" dirty="0"/>
+              <a:rPr lang="en-US" sz="6000" dirty="0"/>
               <a:t>Data collection is ongoing. We anticipate tripling our sample size</a:t>
             </a:r>
           </a:p>
@@ -11529,6 +11529,76 @@
             <a:chExt cx="6729801" cy="7219447"/>
           </a:xfrm>
         </p:grpSpPr>
+        <p:sp>
+          <p:nvSpPr>
+            <p:cNvPr id="15730" name="Rectangle 15729">
+              <a:extLst>
+                <a:ext uri="{FF2B5EF4-FFF2-40B4-BE49-F238E27FC236}">
+                  <a16:creationId xmlns:a16="http://schemas.microsoft.com/office/drawing/2014/main" id="{FDF15931-1516-DE49-340B-5A133AA95A93}"/>
+                </a:ext>
+              </a:extLst>
+            </p:cNvPr>
+            <p:cNvSpPr/>
+            <p:nvPr/>
+          </p:nvSpPr>
+          <p:spPr bwMode="auto">
+            <a:xfrm>
+              <a:off x="23923841" y="15957914"/>
+              <a:ext cx="5627696" cy="5591284"/>
+            </a:xfrm>
+            <a:prstGeom prst="rect">
+              <a:avLst/>
+            </a:prstGeom>
+            <a:noFill/>
+            <a:ln w="38100" cap="flat" cmpd="sng" algn="ctr">
+              <a:solidFill>
+                <a:schemeClr val="tx1"/>
+              </a:solidFill>
+              <a:prstDash val="solid"/>
+              <a:round/>
+              <a:headEnd type="none" w="med" len="med"/>
+              <a:tailEnd type="none" w="med" len="med"/>
+            </a:ln>
+            <a:effectLst/>
+          </p:spPr>
+          <p:txBody>
+            <a:bodyPr vert="horz" wrap="square" lIns="91440" tIns="45720" rIns="91440" bIns="45720" numCol="1" rtlCol="0" anchor="t" anchorCtr="0" compatLnSpc="1">
+              <a:prstTxWarp prst="textNoShape">
+                <a:avLst/>
+              </a:prstTxWarp>
+            </a:bodyPr>
+            <a:lstStyle/>
+            <a:p>
+              <a:pPr marL="0" marR="0" indent="0" algn="l" defTabSz="4389438" rtl="0" eaLnBrk="1" fontAlgn="base" latinLnBrk="0" hangingPunct="1">
+                <a:lnSpc>
+                  <a:spcPct val="100000"/>
+                </a:lnSpc>
+                <a:spcBef>
+                  <a:spcPct val="0"/>
+                </a:spcBef>
+                <a:spcAft>
+                  <a:spcPct val="0"/>
+                </a:spcAft>
+                <a:buClrTx/>
+                <a:buSzTx/>
+                <a:buFontTx/>
+                <a:buNone/>
+                <a:tabLst/>
+              </a:pPr>
+              <a:endParaRPr kumimoji="0" lang="en-US" sz="1800" b="0" i="0" u="none" strike="noStrike" cap="none" normalizeH="0" baseline="0">
+                <a:ln>
+                  <a:noFill/>
+                </a:ln>
+                <a:solidFill>
+                  <a:schemeClr val="tx1"/>
+                </a:solidFill>
+                <a:effectLst/>
+                <a:latin typeface="Arial" charset="0"/>
+                <a:cs typeface="Arial" charset="0"/>
+              </a:endParaRPr>
+            </a:p>
+          </p:txBody>
+        </p:sp>
         <p:grpSp>
           <p:nvGrpSpPr>
             <p:cNvPr id="15637" name="Group 15636">
@@ -11819,76 +11889,6 @@
             </p:txBody>
           </p:sp>
         </p:grpSp>
-        <p:sp>
-          <p:nvSpPr>
-            <p:cNvPr id="15730" name="Rectangle 15729">
-              <a:extLst>
-                <a:ext uri="{FF2B5EF4-FFF2-40B4-BE49-F238E27FC236}">
-                  <a16:creationId xmlns:a16="http://schemas.microsoft.com/office/drawing/2014/main" id="{FDF15931-1516-DE49-340B-5A133AA95A93}"/>
-                </a:ext>
-              </a:extLst>
-            </p:cNvPr>
-            <p:cNvSpPr/>
-            <p:nvPr/>
-          </p:nvSpPr>
-          <p:spPr bwMode="auto">
-            <a:xfrm>
-              <a:off x="23923841" y="15957914"/>
-              <a:ext cx="5627696" cy="5591284"/>
-            </a:xfrm>
-            <a:prstGeom prst="rect">
-              <a:avLst/>
-            </a:prstGeom>
-            <a:noFill/>
-            <a:ln w="38100" cap="flat" cmpd="sng" algn="ctr">
-              <a:solidFill>
-                <a:schemeClr val="tx1"/>
-              </a:solidFill>
-              <a:prstDash val="solid"/>
-              <a:round/>
-              <a:headEnd type="none" w="med" len="med"/>
-              <a:tailEnd type="none" w="med" len="med"/>
-            </a:ln>
-            <a:effectLst/>
-          </p:spPr>
-          <p:txBody>
-            <a:bodyPr vert="horz" wrap="square" lIns="91440" tIns="45720" rIns="91440" bIns="45720" numCol="1" rtlCol="0" anchor="t" anchorCtr="0" compatLnSpc="1">
-              <a:prstTxWarp prst="textNoShape">
-                <a:avLst/>
-              </a:prstTxWarp>
-            </a:bodyPr>
-            <a:lstStyle/>
-            <a:p>
-              <a:pPr marL="0" marR="0" indent="0" algn="l" defTabSz="4389438" rtl="0" eaLnBrk="1" fontAlgn="base" latinLnBrk="0" hangingPunct="1">
-                <a:lnSpc>
-                  <a:spcPct val="100000"/>
-                </a:lnSpc>
-                <a:spcBef>
-                  <a:spcPct val="0"/>
-                </a:spcBef>
-                <a:spcAft>
-                  <a:spcPct val="0"/>
-                </a:spcAft>
-                <a:buClrTx/>
-                <a:buSzTx/>
-                <a:buFontTx/>
-                <a:buNone/>
-                <a:tabLst/>
-              </a:pPr>
-              <a:endParaRPr kumimoji="0" lang="en-US" sz="1800" b="0" i="0" u="none" strike="noStrike" cap="none" normalizeH="0" baseline="0">
-                <a:ln>
-                  <a:noFill/>
-                </a:ln>
-                <a:solidFill>
-                  <a:schemeClr val="tx1"/>
-                </a:solidFill>
-                <a:effectLst/>
-                <a:latin typeface="Arial" charset="0"/>
-                <a:cs typeface="Arial" charset="0"/>
-              </a:endParaRPr>
-            </a:p>
-          </p:txBody>
-        </p:sp>
       </p:grpSp>
       <p:grpSp>
         <p:nvGrpSpPr>

--- a/SFN/2023_SFN_trust.pptx
+++ b/SFN/2023_SFN_trust.pptx
@@ -337,7 +337,7 @@
             <a:fld id="{A12439DB-88A9-47CB-8306-24653602898A}" type="datetimeFigureOut">
               <a:rPr lang="en-US" altLang="en-US"/>
               <a:pPr/>
-              <a:t>11/6/23</a:t>
+              <a:t>11/9/23</a:t>
             </a:fld>
             <a:endParaRPr lang="en-US" altLang="en-US"/>
           </a:p>
@@ -4435,837 +4435,6 @@
       </p:grpSpPr>
       <p:grpSp>
         <p:nvGrpSpPr>
-          <p:cNvPr id="15621" name="Group 15620">
-            <a:extLst>
-              <a:ext uri="{FF2B5EF4-FFF2-40B4-BE49-F238E27FC236}">
-                <a16:creationId xmlns:a16="http://schemas.microsoft.com/office/drawing/2014/main" id="{5C45E275-5A15-8C98-B9C5-16C75C23860A}"/>
-              </a:ext>
-            </a:extLst>
-          </p:cNvPr>
-          <p:cNvGrpSpPr/>
-          <p:nvPr/>
-        </p:nvGrpSpPr>
-        <p:grpSpPr>
-          <a:xfrm>
-            <a:off x="3779671" y="16218296"/>
-            <a:ext cx="10697765" cy="10056750"/>
-            <a:chOff x="3779671" y="16218296"/>
-            <a:chExt cx="10697765" cy="10056750"/>
-          </a:xfrm>
-        </p:grpSpPr>
-        <p:grpSp>
-          <p:nvGrpSpPr>
-            <p:cNvPr id="15606" name="Group 15605">
-              <a:extLst>
-                <a:ext uri="{FF2B5EF4-FFF2-40B4-BE49-F238E27FC236}">
-                  <a16:creationId xmlns:a16="http://schemas.microsoft.com/office/drawing/2014/main" id="{B0CC5957-EC01-CDC2-ADAF-5A0141831C57}"/>
-                </a:ext>
-              </a:extLst>
-            </p:cNvPr>
-            <p:cNvGrpSpPr/>
-            <p:nvPr/>
-          </p:nvGrpSpPr>
-          <p:grpSpPr>
-            <a:xfrm>
-              <a:off x="3779671" y="16218296"/>
-              <a:ext cx="10697765" cy="10056750"/>
-              <a:chOff x="18887859" y="360968"/>
-              <a:chExt cx="6543891" cy="6151778"/>
-            </a:xfrm>
-          </p:grpSpPr>
-          <p:pic>
-            <p:nvPicPr>
-              <p:cNvPr id="15607" name="Picture 15606" descr="A green check mark on a grey background&#10;&#10;Description automatically generated">
-                <a:extLst>
-                  <a:ext uri="{FF2B5EF4-FFF2-40B4-BE49-F238E27FC236}">
-                    <a16:creationId xmlns:a16="http://schemas.microsoft.com/office/drawing/2014/main" id="{BFD42068-273C-19B5-B61E-D2752FACB16C}"/>
-                  </a:ext>
-                </a:extLst>
-              </p:cNvPr>
-              <p:cNvPicPr>
-                <a:picLocks noChangeAspect="1"/>
-              </p:cNvPicPr>
-              <p:nvPr/>
-            </p:nvPicPr>
-            <p:blipFill rotWithShape="1">
-              <a:blip r:embed="rId4"/>
-              <a:srcRect l="14791" t="15087" r="12450" b="22936"/>
-              <a:stretch/>
-            </p:blipFill>
-            <p:spPr>
-              <a:xfrm>
-                <a:off x="19244972" y="4622666"/>
-                <a:ext cx="2991981" cy="1890080"/>
-              </a:xfrm>
-              <a:prstGeom prst="rect">
-                <a:avLst/>
-              </a:prstGeom>
-              <a:solidFill>
-                <a:srgbClr val="FFFFFF">
-                  <a:shade val="85000"/>
-                </a:srgbClr>
-              </a:solidFill>
-              <a:ln w="88900" cap="sq">
-                <a:solidFill>
-                  <a:srgbClr val="C00000"/>
-                </a:solidFill>
-                <a:miter lim="800000"/>
-              </a:ln>
-              <a:effectLst>
-                <a:outerShdw blurRad="55000" dist="18000" dir="5400000" algn="tl" rotWithShape="0">
-                  <a:srgbClr val="000000">
-                    <a:alpha val="40000"/>
-                  </a:srgbClr>
-                </a:outerShdw>
-              </a:effectLst>
-              <a:scene3d>
-                <a:camera prst="orthographicFront"/>
-                <a:lightRig rig="twoPt" dir="t">
-                  <a:rot lat="0" lon="0" rev="7200000"/>
-                </a:lightRig>
-              </a:scene3d>
-              <a:sp3d>
-                <a:bevelT w="25400" h="19050"/>
-                <a:contourClr>
-                  <a:srgbClr val="FFFFFF"/>
-                </a:contourClr>
-              </a:sp3d>
-            </p:spPr>
-          </p:pic>
-          <p:pic>
-            <p:nvPicPr>
-              <p:cNvPr id="15608" name="Picture 15607" descr="A computer screen shot&#10;&#10;Description automatically generated">
-                <a:extLst>
-                  <a:ext uri="{FF2B5EF4-FFF2-40B4-BE49-F238E27FC236}">
-                    <a16:creationId xmlns:a16="http://schemas.microsoft.com/office/drawing/2014/main" id="{7AF89E18-68CC-9284-01FB-59B8ECC6A7F3}"/>
-                  </a:ext>
-                </a:extLst>
-              </p:cNvPr>
-              <p:cNvPicPr>
-                <a:picLocks noChangeAspect="1"/>
-              </p:cNvPicPr>
-              <p:nvPr/>
-            </p:nvPicPr>
-            <p:blipFill rotWithShape="1">
-              <a:blip r:embed="rId5"/>
-              <a:srcRect l="17658" t="18357" r="18046" b="25816"/>
-              <a:stretch/>
-            </p:blipFill>
-            <p:spPr>
-              <a:xfrm>
-                <a:off x="22543408" y="4676154"/>
-                <a:ext cx="2888342" cy="1819031"/>
-              </a:xfrm>
-              <a:prstGeom prst="rect">
-                <a:avLst/>
-              </a:prstGeom>
-              <a:solidFill>
-                <a:srgbClr val="FFFFFF">
-                  <a:shade val="85000"/>
-                </a:srgbClr>
-              </a:solidFill>
-              <a:ln w="88900" cap="sq">
-                <a:solidFill>
-                  <a:srgbClr val="C00000"/>
-                </a:solidFill>
-                <a:miter lim="800000"/>
-              </a:ln>
-              <a:effectLst>
-                <a:outerShdw blurRad="55000" dist="18000" dir="5400000" algn="tl" rotWithShape="0">
-                  <a:srgbClr val="000000">
-                    <a:alpha val="40000"/>
-                  </a:srgbClr>
-                </a:outerShdw>
-              </a:effectLst>
-              <a:scene3d>
-                <a:camera prst="orthographicFront"/>
-                <a:lightRig rig="twoPt" dir="t">
-                  <a:rot lat="0" lon="0" rev="7200000"/>
-                </a:lightRig>
-              </a:scene3d>
-              <a:sp3d>
-                <a:bevelT w="25400" h="19050"/>
-                <a:contourClr>
-                  <a:srgbClr val="FFFFFF"/>
-                </a:contourClr>
-              </a:sp3d>
-            </p:spPr>
-          </p:pic>
-          <p:pic>
-            <p:nvPicPr>
-              <p:cNvPr id="15609" name="Picture 15608" descr="A white cross on a gray background&#10;&#10;Description automatically generated">
-                <a:extLst>
-                  <a:ext uri="{FF2B5EF4-FFF2-40B4-BE49-F238E27FC236}">
-                    <a16:creationId xmlns:a16="http://schemas.microsoft.com/office/drawing/2014/main" id="{A316990F-59C7-631E-47E9-456D55904891}"/>
-                  </a:ext>
-                </a:extLst>
-              </p:cNvPr>
-              <p:cNvPicPr>
-                <a:picLocks noChangeAspect="1"/>
-              </p:cNvPicPr>
-              <p:nvPr/>
-            </p:nvPicPr>
-            <p:blipFill rotWithShape="1">
-              <a:blip r:embed="rId6"/>
-              <a:srcRect l="2620" t="7420" r="2620" b="4981"/>
-              <a:stretch/>
-            </p:blipFill>
-            <p:spPr>
-              <a:xfrm>
-                <a:off x="20965957" y="2971697"/>
-                <a:ext cx="2848448" cy="1890080"/>
-              </a:xfrm>
-              <a:prstGeom prst="rect">
-                <a:avLst/>
-              </a:prstGeom>
-              <a:solidFill>
-                <a:srgbClr val="FFFFFF">
-                  <a:shade val="85000"/>
-                </a:srgbClr>
-              </a:solidFill>
-              <a:ln w="88900" cap="sq">
-                <a:solidFill>
-                  <a:srgbClr val="C00000"/>
-                </a:solidFill>
-                <a:miter lim="800000"/>
-              </a:ln>
-              <a:effectLst>
-                <a:outerShdw blurRad="55000" dist="18000" dir="5400000" algn="tl" rotWithShape="0">
-                  <a:srgbClr val="000000">
-                    <a:alpha val="40000"/>
-                  </a:srgbClr>
-                </a:outerShdw>
-              </a:effectLst>
-              <a:scene3d>
-                <a:camera prst="orthographicFront"/>
-                <a:lightRig rig="twoPt" dir="t">
-                  <a:rot lat="0" lon="0" rev="7200000"/>
-                </a:lightRig>
-              </a:scene3d>
-              <a:sp3d>
-                <a:bevelT w="25400" h="19050"/>
-                <a:contourClr>
-                  <a:srgbClr val="FFFFFF"/>
-                </a:contourClr>
-              </a:sp3d>
-            </p:spPr>
-          </p:pic>
-          <p:pic>
-            <p:nvPicPr>
-              <p:cNvPr id="15610" name="Picture 15609" descr="A grey background with white text&#10;&#10;Description automatically generated">
-                <a:extLst>
-                  <a:ext uri="{FF2B5EF4-FFF2-40B4-BE49-F238E27FC236}">
-                    <a16:creationId xmlns:a16="http://schemas.microsoft.com/office/drawing/2014/main" id="{E95A9EFF-122D-C651-FDF5-564B82E90BBA}"/>
-                  </a:ext>
-                </a:extLst>
-              </p:cNvPr>
-              <p:cNvPicPr>
-                <a:picLocks noChangeAspect="1"/>
-              </p:cNvPicPr>
-              <p:nvPr/>
-            </p:nvPicPr>
-            <p:blipFill>
-              <a:blip r:embed="rId7"/>
-              <a:stretch>
-                <a:fillRect/>
-              </a:stretch>
-            </p:blipFill>
-            <p:spPr>
-              <a:xfrm>
-                <a:off x="19926908" y="1639461"/>
-                <a:ext cx="2848448" cy="1943823"/>
-              </a:xfrm>
-              <a:prstGeom prst="rect">
-                <a:avLst/>
-              </a:prstGeom>
-              <a:solidFill>
-                <a:srgbClr val="FFFFFF">
-                  <a:shade val="85000"/>
-                </a:srgbClr>
-              </a:solidFill>
-              <a:ln w="88900" cap="sq">
-                <a:solidFill>
-                  <a:srgbClr val="C00000"/>
-                </a:solidFill>
-                <a:miter lim="800000"/>
-              </a:ln>
-              <a:effectLst>
-                <a:outerShdw blurRad="55000" dist="18000" dir="5400000" algn="tl" rotWithShape="0">
-                  <a:srgbClr val="000000">
-                    <a:alpha val="40000"/>
-                  </a:srgbClr>
-                </a:outerShdw>
-              </a:effectLst>
-              <a:scene3d>
-                <a:camera prst="orthographicFront"/>
-                <a:lightRig rig="twoPt" dir="t">
-                  <a:rot lat="0" lon="0" rev="7200000"/>
-                </a:lightRig>
-              </a:scene3d>
-              <a:sp3d>
-                <a:bevelT w="25400" h="19050"/>
-                <a:contourClr>
-                  <a:srgbClr val="FFFFFF"/>
-                </a:contourClr>
-              </a:sp3d>
-            </p:spPr>
-          </p:pic>
-          <p:pic>
-            <p:nvPicPr>
-              <p:cNvPr id="15611" name="Picture 15610" descr="A computer and a keyboard&#10;&#10;Description automatically generated with medium confidence">
-                <a:extLst>
-                  <a:ext uri="{FF2B5EF4-FFF2-40B4-BE49-F238E27FC236}">
-                    <a16:creationId xmlns:a16="http://schemas.microsoft.com/office/drawing/2014/main" id="{BD10086D-C152-9AEB-CD34-13177C8F6D4A}"/>
-                  </a:ext>
-                </a:extLst>
-              </p:cNvPr>
-              <p:cNvPicPr>
-                <a:picLocks noChangeAspect="1"/>
-              </p:cNvPicPr>
-              <p:nvPr/>
-            </p:nvPicPr>
-            <p:blipFill rotWithShape="1">
-              <a:blip r:embed="rId8"/>
-              <a:srcRect l="2378" t="5420" r="2378" b="9853"/>
-              <a:stretch/>
-            </p:blipFill>
-            <p:spPr>
-              <a:xfrm>
-                <a:off x="18887859" y="360968"/>
-                <a:ext cx="2848448" cy="1919430"/>
-              </a:xfrm>
-              <a:prstGeom prst="rect">
-                <a:avLst/>
-              </a:prstGeom>
-              <a:solidFill>
-                <a:srgbClr val="FFFFFF">
-                  <a:shade val="85000"/>
-                </a:srgbClr>
-              </a:solidFill>
-              <a:ln w="88900" cap="sq">
-                <a:solidFill>
-                  <a:srgbClr val="C00000"/>
-                </a:solidFill>
-                <a:miter lim="800000"/>
-              </a:ln>
-              <a:effectLst>
-                <a:outerShdw blurRad="55000" dist="18000" dir="5400000" algn="tl" rotWithShape="0">
-                  <a:srgbClr val="000000">
-                    <a:alpha val="40000"/>
-                  </a:srgbClr>
-                </a:outerShdw>
-              </a:effectLst>
-              <a:scene3d>
-                <a:camera prst="orthographicFront"/>
-                <a:lightRig rig="twoPt" dir="t">
-                  <a:rot lat="0" lon="0" rev="7200000"/>
-                </a:lightRig>
-              </a:scene3d>
-              <a:sp3d>
-                <a:bevelT w="25400" h="19050"/>
-                <a:contourClr>
-                  <a:srgbClr val="FFFFFF"/>
-                </a:contourClr>
-              </a:sp3d>
-            </p:spPr>
-          </p:pic>
-          <p:grpSp>
-            <p:nvGrpSpPr>
-              <p:cNvPr id="15612" name="Group 15611">
-                <a:extLst>
-                  <a:ext uri="{FF2B5EF4-FFF2-40B4-BE49-F238E27FC236}">
-                    <a16:creationId xmlns:a16="http://schemas.microsoft.com/office/drawing/2014/main" id="{60B2107B-4199-FD0C-4076-CA2B2F109B20}"/>
-                  </a:ext>
-                </a:extLst>
-              </p:cNvPr>
-              <p:cNvGrpSpPr/>
-              <p:nvPr/>
-            </p:nvGrpSpPr>
-            <p:grpSpPr>
-              <a:xfrm>
-                <a:off x="22071524" y="360968"/>
-                <a:ext cx="3360226" cy="995434"/>
-                <a:chOff x="3514264" y="206684"/>
-                <a:chExt cx="3360226" cy="995434"/>
-              </a:xfrm>
-            </p:grpSpPr>
-            <p:pic>
-              <p:nvPicPr>
-                <p:cNvPr id="15613" name="Picture 15612">
-                  <a:extLst>
-                    <a:ext uri="{FF2B5EF4-FFF2-40B4-BE49-F238E27FC236}">
-                      <a16:creationId xmlns:a16="http://schemas.microsoft.com/office/drawing/2014/main" id="{8F1F804F-2F4C-1C69-0ED4-456A517A34F3}"/>
-                    </a:ext>
-                  </a:extLst>
-                </p:cNvPr>
-                <p:cNvPicPr>
-                  <a:picLocks noChangeAspect="1"/>
-                </p:cNvPicPr>
-                <p:nvPr/>
-              </p:nvPicPr>
-              <p:blipFill>
-                <a:blip r:embed="rId9"/>
-                <a:stretch>
-                  <a:fillRect/>
-                </a:stretch>
-              </p:blipFill>
-              <p:spPr>
-                <a:xfrm>
-                  <a:off x="3514264" y="206684"/>
-                  <a:ext cx="1027916" cy="990673"/>
-                </a:xfrm>
-                <a:prstGeom prst="rect">
-                  <a:avLst/>
-                </a:prstGeom>
-                <a:solidFill>
-                  <a:srgbClr val="FFFFFF">
-                    <a:shade val="85000"/>
-                  </a:srgbClr>
-                </a:solidFill>
-                <a:ln w="88900" cap="sq">
-                  <a:solidFill>
-                    <a:srgbClr val="C00000"/>
-                  </a:solidFill>
-                  <a:miter lim="800000"/>
-                </a:ln>
-                <a:effectLst>
-                  <a:outerShdw blurRad="55000" dist="18000" dir="5400000" algn="tl" rotWithShape="0">
-                    <a:srgbClr val="000000">
-                      <a:alpha val="40000"/>
-                    </a:srgbClr>
-                  </a:outerShdw>
-                </a:effectLst>
-                <a:scene3d>
-                  <a:camera prst="orthographicFront"/>
-                  <a:lightRig rig="twoPt" dir="t">
-                    <a:rot lat="0" lon="0" rev="7200000"/>
-                  </a:lightRig>
-                </a:scene3d>
-                <a:sp3d>
-                  <a:bevelT w="25400" h="19050"/>
-                  <a:contourClr>
-                    <a:srgbClr val="FFFFFF"/>
-                  </a:contourClr>
-                </a:sp3d>
-              </p:spPr>
-            </p:pic>
-            <p:pic>
-              <p:nvPicPr>
-                <p:cNvPr id="15614" name="Picture 15613" descr="A grey square with a person's head&#10;&#10;Description automatically generated">
-                  <a:extLst>
-                    <a:ext uri="{FF2B5EF4-FFF2-40B4-BE49-F238E27FC236}">
-                      <a16:creationId xmlns:a16="http://schemas.microsoft.com/office/drawing/2014/main" id="{2172C1AD-5BEC-2CFE-FCB3-472B60E2C225}"/>
-                    </a:ext>
-                  </a:extLst>
-                </p:cNvPr>
-                <p:cNvPicPr>
-                  <a:picLocks noChangeAspect="1"/>
-                </p:cNvPicPr>
-                <p:nvPr/>
-              </p:nvPicPr>
-              <p:blipFill>
-                <a:blip r:embed="rId10"/>
-                <a:stretch>
-                  <a:fillRect/>
-                </a:stretch>
-              </p:blipFill>
-              <p:spPr>
-                <a:xfrm>
-                  <a:off x="4717835" y="206684"/>
-                  <a:ext cx="982991" cy="995434"/>
-                </a:xfrm>
-                <a:prstGeom prst="rect">
-                  <a:avLst/>
-                </a:prstGeom>
-                <a:solidFill>
-                  <a:srgbClr val="FFFFFF">
-                    <a:shade val="85000"/>
-                  </a:srgbClr>
-                </a:solidFill>
-                <a:ln w="88900" cap="sq">
-                  <a:solidFill>
-                    <a:srgbClr val="C00000"/>
-                  </a:solidFill>
-                  <a:miter lim="800000"/>
-                </a:ln>
-                <a:effectLst>
-                  <a:outerShdw blurRad="55000" dist="18000" dir="5400000" algn="tl" rotWithShape="0">
-                    <a:srgbClr val="000000">
-                      <a:alpha val="40000"/>
-                    </a:srgbClr>
-                  </a:outerShdw>
-                </a:effectLst>
-                <a:scene3d>
-                  <a:camera prst="orthographicFront"/>
-                  <a:lightRig rig="twoPt" dir="t">
-                    <a:rot lat="0" lon="0" rev="7200000"/>
-                  </a:lightRig>
-                </a:scene3d>
-                <a:sp3d>
-                  <a:bevelT w="25400" h="19050"/>
-                  <a:contourClr>
-                    <a:srgbClr val="FFFFFF"/>
-                  </a:contourClr>
-                </a:sp3d>
-              </p:spPr>
-            </p:pic>
-            <p:pic>
-              <p:nvPicPr>
-                <p:cNvPr id="15615" name="Picture 15614" descr="A person with a smile on his face&#10;&#10;Description automatically generated">
-                  <a:extLst>
-                    <a:ext uri="{FF2B5EF4-FFF2-40B4-BE49-F238E27FC236}">
-                      <a16:creationId xmlns:a16="http://schemas.microsoft.com/office/drawing/2014/main" id="{7957BC4D-151A-EB1E-5CAE-777FF2B16B20}"/>
-                    </a:ext>
-                  </a:extLst>
-                </p:cNvPr>
-                <p:cNvPicPr>
-                  <a:picLocks noChangeAspect="1"/>
-                </p:cNvPicPr>
-                <p:nvPr/>
-              </p:nvPicPr>
-              <p:blipFill>
-                <a:blip r:embed="rId11"/>
-                <a:stretch>
-                  <a:fillRect/>
-                </a:stretch>
-              </p:blipFill>
-              <p:spPr>
-                <a:xfrm>
-                  <a:off x="5883817" y="206684"/>
-                  <a:ext cx="990673" cy="990673"/>
-                </a:xfrm>
-                <a:prstGeom prst="rect">
-                  <a:avLst/>
-                </a:prstGeom>
-                <a:solidFill>
-                  <a:srgbClr val="FFFFFF">
-                    <a:shade val="85000"/>
-                  </a:srgbClr>
-                </a:solidFill>
-                <a:ln w="88900" cap="sq">
-                  <a:solidFill>
-                    <a:srgbClr val="C00000"/>
-                  </a:solidFill>
-                  <a:miter lim="800000"/>
-                </a:ln>
-                <a:effectLst>
-                  <a:outerShdw blurRad="55000" dist="18000" dir="5400000" algn="tl" rotWithShape="0">
-                    <a:srgbClr val="000000">
-                      <a:alpha val="40000"/>
-                    </a:srgbClr>
-                  </a:outerShdw>
-                </a:effectLst>
-                <a:scene3d>
-                  <a:camera prst="orthographicFront"/>
-                  <a:lightRig rig="twoPt" dir="t">
-                    <a:rot lat="0" lon="0" rev="7200000"/>
-                  </a:lightRig>
-                </a:scene3d>
-                <a:sp3d>
-                  <a:bevelT w="25400" h="19050"/>
-                  <a:contourClr>
-                    <a:srgbClr val="FFFFFF"/>
-                  </a:contourClr>
-                </a:sp3d>
-              </p:spPr>
-            </p:pic>
-          </p:grpSp>
-        </p:grpSp>
-        <p:sp>
-          <p:nvSpPr>
-            <p:cNvPr id="15616" name="Rectangle 15615">
-              <a:extLst>
-                <a:ext uri="{FF2B5EF4-FFF2-40B4-BE49-F238E27FC236}">
-                  <a16:creationId xmlns:a16="http://schemas.microsoft.com/office/drawing/2014/main" id="{946783DC-D597-2C29-6191-5B3893CFCF5D}"/>
-                </a:ext>
-              </a:extLst>
-            </p:cNvPr>
-            <p:cNvSpPr/>
-            <p:nvPr/>
-          </p:nvSpPr>
-          <p:spPr bwMode="auto">
-            <a:xfrm>
-              <a:off x="4019981" y="18563950"/>
-              <a:ext cx="1803026" cy="552682"/>
-            </a:xfrm>
-            <a:prstGeom prst="rect">
-              <a:avLst/>
-            </a:prstGeom>
-            <a:solidFill>
-              <a:srgbClr val="848484"/>
-            </a:solidFill>
-            <a:ln w="9525" cap="flat" cmpd="sng" algn="ctr">
-              <a:noFill/>
-              <a:prstDash val="solid"/>
-              <a:round/>
-              <a:headEnd type="none" w="med" len="med"/>
-              <a:tailEnd type="none" w="med" len="med"/>
-            </a:ln>
-            <a:effectLst/>
-          </p:spPr>
-          <p:txBody>
-            <a:bodyPr vert="horz" wrap="square" lIns="91440" tIns="45720" rIns="91440" bIns="45720" numCol="1" rtlCol="0" anchor="t" anchorCtr="0" compatLnSpc="1">
-              <a:prstTxWarp prst="textNoShape">
-                <a:avLst/>
-              </a:prstTxWarp>
-            </a:bodyPr>
-            <a:lstStyle/>
-            <a:p>
-              <a:pPr marL="0" marR="0" indent="0" algn="l" defTabSz="4389438" rtl="0" eaLnBrk="1" fontAlgn="base" latinLnBrk="0" hangingPunct="1">
-                <a:lnSpc>
-                  <a:spcPct val="100000"/>
-                </a:lnSpc>
-                <a:spcBef>
-                  <a:spcPct val="0"/>
-                </a:spcBef>
-                <a:spcAft>
-                  <a:spcPct val="0"/>
-                </a:spcAft>
-                <a:buClrTx/>
-                <a:buSzTx/>
-                <a:buFontTx/>
-                <a:buNone/>
-                <a:tabLst/>
-              </a:pPr>
-              <a:r>
-                <a:rPr kumimoji="0" lang="en-US" sz="3000" b="0" i="0" u="none" strike="noStrike" cap="none" normalizeH="0" baseline="0" dirty="0">
-                  <a:ln>
-                    <a:noFill/>
-                  </a:ln>
-                  <a:solidFill>
-                    <a:schemeClr val="bg1"/>
-                  </a:solidFill>
-                  <a:effectLst/>
-                  <a:latin typeface="Arial" charset="0"/>
-                  <a:cs typeface="Arial" charset="0"/>
-                </a:rPr>
-                <a:t>Share $8</a:t>
-              </a:r>
-            </a:p>
-          </p:txBody>
-        </p:sp>
-        <p:sp>
-          <p:nvSpPr>
-            <p:cNvPr id="15618" name="Rectangle 15617">
-              <a:extLst>
-                <a:ext uri="{FF2B5EF4-FFF2-40B4-BE49-F238E27FC236}">
-                  <a16:creationId xmlns:a16="http://schemas.microsoft.com/office/drawing/2014/main" id="{C6024063-9D2C-50D8-70B5-FC3D7C6F49F8}"/>
-                </a:ext>
-              </a:extLst>
-            </p:cNvPr>
-            <p:cNvSpPr/>
-            <p:nvPr/>
-          </p:nvSpPr>
-          <p:spPr bwMode="auto">
-            <a:xfrm>
-              <a:off x="6502102" y="18568097"/>
-              <a:ext cx="1803026" cy="552682"/>
-            </a:xfrm>
-            <a:prstGeom prst="rect">
-              <a:avLst/>
-            </a:prstGeom>
-            <a:solidFill>
-              <a:srgbClr val="848484"/>
-            </a:solidFill>
-            <a:ln w="9525" cap="flat" cmpd="sng" algn="ctr">
-              <a:noFill/>
-              <a:prstDash val="solid"/>
-              <a:round/>
-              <a:headEnd type="none" w="med" len="med"/>
-              <a:tailEnd type="none" w="med" len="med"/>
-            </a:ln>
-            <a:effectLst/>
-          </p:spPr>
-          <p:txBody>
-            <a:bodyPr vert="horz" wrap="square" lIns="91440" tIns="45720" rIns="91440" bIns="45720" numCol="1" rtlCol="0" anchor="t" anchorCtr="0" compatLnSpc="1">
-              <a:prstTxWarp prst="textNoShape">
-                <a:avLst/>
-              </a:prstTxWarp>
-            </a:bodyPr>
-            <a:lstStyle/>
-            <a:p>
-              <a:pPr marL="0" marR="0" indent="0" algn="l" defTabSz="4389438" rtl="0" eaLnBrk="1" fontAlgn="base" latinLnBrk="0" hangingPunct="1">
-                <a:lnSpc>
-                  <a:spcPct val="100000"/>
-                </a:lnSpc>
-                <a:spcBef>
-                  <a:spcPct val="0"/>
-                </a:spcBef>
-                <a:spcAft>
-                  <a:spcPct val="0"/>
-                </a:spcAft>
-                <a:buClrTx/>
-                <a:buSzTx/>
-                <a:buFontTx/>
-                <a:buNone/>
-                <a:tabLst/>
-              </a:pPr>
-              <a:r>
-                <a:rPr kumimoji="0" lang="en-US" sz="3000" b="0" i="0" u="none" strike="noStrike" cap="none" normalizeH="0" baseline="0" dirty="0">
-                  <a:ln>
-                    <a:noFill/>
-                  </a:ln>
-                  <a:solidFill>
-                    <a:schemeClr val="bg1"/>
-                  </a:solidFill>
-                  <a:effectLst/>
-                  <a:latin typeface="Arial" charset="0"/>
-                  <a:cs typeface="Arial" charset="0"/>
-                </a:rPr>
-                <a:t>Share $2</a:t>
-              </a:r>
-            </a:p>
-          </p:txBody>
-        </p:sp>
-        <p:sp>
-          <p:nvSpPr>
-            <p:cNvPr id="15619" name="Rectangle 15618">
-              <a:extLst>
-                <a:ext uri="{FF2B5EF4-FFF2-40B4-BE49-F238E27FC236}">
-                  <a16:creationId xmlns:a16="http://schemas.microsoft.com/office/drawing/2014/main" id="{8EBB5886-1680-B3C7-DEC7-CD388B0CA60C}"/>
-                </a:ext>
-              </a:extLst>
-            </p:cNvPr>
-            <p:cNvSpPr/>
-            <p:nvPr/>
-          </p:nvSpPr>
-          <p:spPr bwMode="auto">
-            <a:xfrm>
-              <a:off x="7005674" y="19674283"/>
-              <a:ext cx="1978245" cy="552682"/>
-            </a:xfrm>
-            <a:prstGeom prst="rect">
-              <a:avLst/>
-            </a:prstGeom>
-            <a:solidFill>
-              <a:srgbClr val="848484"/>
-            </a:solidFill>
-            <a:ln w="9525" cap="flat" cmpd="sng" algn="ctr">
-              <a:noFill/>
-              <a:prstDash val="solid"/>
-              <a:round/>
-              <a:headEnd type="none" w="med" len="med"/>
-              <a:tailEnd type="none" w="med" len="med"/>
-            </a:ln>
-            <a:effectLst/>
-          </p:spPr>
-          <p:txBody>
-            <a:bodyPr vert="horz" wrap="square" lIns="91440" tIns="45720" rIns="91440" bIns="45720" numCol="1" rtlCol="0" anchor="t" anchorCtr="0" compatLnSpc="1">
-              <a:prstTxWarp prst="textNoShape">
-                <a:avLst/>
-              </a:prstTxWarp>
-            </a:bodyPr>
-            <a:lstStyle/>
-            <a:p>
-              <a:pPr marL="0" marR="0" indent="0" algn="l" defTabSz="4389438" rtl="0" eaLnBrk="1" fontAlgn="base" latinLnBrk="0" hangingPunct="1">
-                <a:lnSpc>
-                  <a:spcPct val="100000"/>
-                </a:lnSpc>
-                <a:spcBef>
-                  <a:spcPct val="0"/>
-                </a:spcBef>
-                <a:spcAft>
-                  <a:spcPct val="0"/>
-                </a:spcAft>
-                <a:buClrTx/>
-                <a:buSzTx/>
-                <a:buFontTx/>
-                <a:buNone/>
-                <a:tabLst/>
-              </a:pPr>
-              <a:r>
-                <a:rPr kumimoji="0" lang="en-US" sz="3000" b="0" i="0" u="none" strike="noStrike" cap="none" normalizeH="0" baseline="0" dirty="0">
-                  <a:ln>
-                    <a:noFill/>
-                  </a:ln>
-                  <a:solidFill>
-                    <a:schemeClr val="bg1"/>
-                  </a:solidFill>
-                  <a:effectLst/>
-                  <a:latin typeface="Arial" charset="0"/>
-                  <a:cs typeface="Arial" charset="0"/>
-                </a:rPr>
-                <a:t>Loading…</a:t>
-              </a:r>
-            </a:p>
-          </p:txBody>
-        </p:sp>
-        <p:sp>
-          <p:nvSpPr>
-            <p:cNvPr id="15620" name="Rectangle 15619">
-              <a:extLst>
-                <a:ext uri="{FF2B5EF4-FFF2-40B4-BE49-F238E27FC236}">
-                  <a16:creationId xmlns:a16="http://schemas.microsoft.com/office/drawing/2014/main" id="{98A52E85-D70D-5398-4E75-D523A6EBBF49}"/>
-                </a:ext>
-              </a:extLst>
-            </p:cNvPr>
-            <p:cNvSpPr/>
-            <p:nvPr/>
-          </p:nvSpPr>
-          <p:spPr bwMode="auto">
-            <a:xfrm>
-              <a:off x="9139048" y="21549198"/>
-              <a:ext cx="704737" cy="718761"/>
-            </a:xfrm>
-            <a:prstGeom prst="rect">
-              <a:avLst/>
-            </a:prstGeom>
-            <a:solidFill>
-              <a:srgbClr val="848484"/>
-            </a:solidFill>
-            <a:ln w="9525" cap="flat" cmpd="sng" algn="ctr">
-              <a:noFill/>
-              <a:prstDash val="solid"/>
-              <a:round/>
-              <a:headEnd type="none" w="med" len="med"/>
-              <a:tailEnd type="none" w="med" len="med"/>
-            </a:ln>
-            <a:effectLst/>
-          </p:spPr>
-          <p:txBody>
-            <a:bodyPr vert="horz" wrap="square" lIns="91440" tIns="45720" rIns="91440" bIns="45720" numCol="1" rtlCol="0" anchor="t" anchorCtr="0" compatLnSpc="1">
-              <a:prstTxWarp prst="textNoShape">
-                <a:avLst/>
-              </a:prstTxWarp>
-            </a:bodyPr>
-            <a:lstStyle/>
-            <a:p>
-              <a:pPr marL="0" marR="0" indent="0" algn="ctr" defTabSz="4389438" rtl="0" eaLnBrk="1" fontAlgn="base" latinLnBrk="0" hangingPunct="1">
-                <a:lnSpc>
-                  <a:spcPct val="100000"/>
-                </a:lnSpc>
-                <a:spcBef>
-                  <a:spcPct val="0"/>
-                </a:spcBef>
-                <a:spcAft>
-                  <a:spcPct val="0"/>
-                </a:spcAft>
-                <a:buClrTx/>
-                <a:buSzTx/>
-                <a:buFontTx/>
-                <a:buNone/>
-                <a:tabLst/>
-              </a:pPr>
-              <a:r>
-                <a:rPr kumimoji="0" lang="en-US" sz="5000" b="0" i="0" u="none" strike="noStrike" cap="none" normalizeH="0" baseline="0" dirty="0">
-                  <a:ln>
-                    <a:noFill/>
-                  </a:ln>
-                  <a:solidFill>
-                    <a:schemeClr val="bg1"/>
-                  </a:solidFill>
-                  <a:effectLst/>
-                  <a:latin typeface="Arial" charset="0"/>
-                  <a:cs typeface="Arial" charset="0"/>
-                </a:rPr>
-                <a:t>+</a:t>
-              </a:r>
-            </a:p>
-          </p:txBody>
-        </p:sp>
-      </p:grpSp>
-      <p:grpSp>
-        <p:nvGrpSpPr>
           <p:cNvPr id="15428" name="Group 15427">
             <a:extLst>
               <a:ext uri="{FF2B5EF4-FFF2-40B4-BE49-F238E27FC236}">
@@ -5278,10 +4447,10 @@
         </p:nvGrpSpPr>
         <p:grpSpPr>
           <a:xfrm>
-            <a:off x="10524474" y="18375577"/>
-            <a:ext cx="4086526" cy="4565394"/>
-            <a:chOff x="10579516" y="17749339"/>
-            <a:chExt cx="4086526" cy="4565394"/>
+            <a:off x="-12351685" y="24748572"/>
+            <a:ext cx="27124037" cy="5855069"/>
+            <a:chOff x="-13075441" y="16557233"/>
+            <a:chExt cx="27124037" cy="5855069"/>
           </a:xfrm>
         </p:grpSpPr>
         <p:grpSp>
@@ -5298,10 +4467,10 @@
           </p:nvGrpSpPr>
           <p:grpSpPr>
             <a:xfrm>
-              <a:off x="10579516" y="17749339"/>
-              <a:ext cx="3543576" cy="1716829"/>
-              <a:chOff x="10597863" y="17642945"/>
-              <a:chExt cx="3543576" cy="1716829"/>
+              <a:off x="-13075441" y="16557233"/>
+              <a:ext cx="7981099" cy="1956293"/>
+              <a:chOff x="-13057094" y="16450839"/>
+              <a:chExt cx="7981099" cy="1956293"/>
             </a:xfrm>
           </p:grpSpPr>
           <p:sp>
@@ -5318,7 +4487,7 @@
             </p:nvSpPr>
             <p:spPr bwMode="auto">
               <a:xfrm>
-                <a:off x="10597863" y="17642945"/>
+                <a:off x="-13057094" y="16450839"/>
                 <a:ext cx="3543576" cy="1716829"/>
               </a:xfrm>
               <a:prstGeom prst="rect">
@@ -5392,7 +4561,7 @@
             </p:nvSpPr>
             <p:spPr>
               <a:xfrm>
-                <a:off x="10597863" y="17717299"/>
+                <a:off x="-8462360" y="16837472"/>
                 <a:ext cx="3386365" cy="1569660"/>
               </a:xfrm>
               <a:prstGeom prst="rect">
@@ -5448,15 +4617,15 @@
             <p:nvPr/>
           </p:nvPicPr>
           <p:blipFill>
-            <a:blip r:embed="rId12"/>
+            <a:blip r:embed="rId4"/>
             <a:stretch>
               <a:fillRect/>
             </a:stretch>
           </p:blipFill>
           <p:spPr>
             <a:xfrm>
-              <a:off x="12246737" y="19903601"/>
-              <a:ext cx="2419305" cy="2411132"/>
+              <a:off x="11004958" y="19378946"/>
+              <a:ext cx="3043638" cy="3033356"/>
             </a:xfrm>
             <a:prstGeom prst="rect">
               <a:avLst/>
@@ -5627,7 +4796,7 @@
         <p:spPr bwMode="auto">
           <a:xfrm>
             <a:off x="15456311" y="4238464"/>
-            <a:ext cx="14842502" cy="9451143"/>
+            <a:ext cx="14842502" cy="17487949"/>
           </a:xfrm>
           <a:prstGeom prst="rect">
             <a:avLst/>
@@ -6191,8 +5360,8 @@
         </p:nvSpPr>
         <p:spPr>
           <a:xfrm>
-            <a:off x="2302577" y="53433"/>
-            <a:ext cx="40393584" cy="1698222"/>
+            <a:off x="1612263" y="216407"/>
+            <a:ext cx="40393584" cy="1468800"/>
           </a:xfrm>
           <a:prstGeom prst="rect">
             <a:avLst/>
@@ -6217,7 +5386,7 @@
               </a:spcAft>
             </a:pPr>
             <a:r>
-              <a:rPr lang="en-US" sz="10500" b="1" i="0" dirty="0">
+              <a:rPr lang="en-US" sz="9000" b="1" i="0" dirty="0">
                 <a:solidFill>
                   <a:srgbClr val="000000"/>
                 </a:solidFill>
@@ -6226,7 +5395,7 @@
               </a:rPr>
               <a:t>Examining Age-Related Differences in Neural Responses to Trust</a:t>
             </a:r>
-            <a:endParaRPr lang="en-US" sz="10500" dirty="0">
+            <a:endParaRPr lang="en-US" sz="9000" dirty="0">
               <a:effectLst/>
               <a:latin typeface="Trebuchet MS" panose="020B0703020202090204" pitchFamily="34" charset="0"/>
               <a:ea typeface="Calibri" panose="020F0502020204030204" pitchFamily="34" charset="0"/>
@@ -6533,42 +5702,6 @@
       </p:sp>
       <p:sp>
         <p:nvSpPr>
-          <p:cNvPr id="13" name="TextBox 12">
-            <a:extLst>
-              <a:ext uri="{FF2B5EF4-FFF2-40B4-BE49-F238E27FC236}">
-                <a16:creationId xmlns:a16="http://schemas.microsoft.com/office/drawing/2014/main" id="{52042A99-5FFC-0E4E-8C20-72304DDA44FF}"/>
-              </a:ext>
-            </a:extLst>
-          </p:cNvPr>
-          <p:cNvSpPr txBox="1"/>
-          <p:nvPr/>
-        </p:nvSpPr>
-        <p:spPr>
-          <a:xfrm>
-            <a:off x="86681" y="13228864"/>
-            <a:ext cx="14016335" cy="1569660"/>
-          </a:xfrm>
-          <a:prstGeom prst="rect">
-            <a:avLst/>
-          </a:prstGeom>
-          <a:noFill/>
-        </p:spPr>
-        <p:txBody>
-          <a:bodyPr wrap="square" rtlCol="0">
-            <a:spAutoFit/>
-          </a:bodyPr>
-          <a:lstStyle/>
-          <a:p>
-            <a:pPr algn="ctr"/>
-            <a:r>
-              <a:rPr lang="en-US" sz="3200" i="1" dirty="0"/>
-              <a:t>The Ultimatum (UG) and Dictator (DG) Games were used to assess neural and behavioral responses to perceived fairness. We defined strategic behavior as the difference in offers (high vs. low) in the proposer conditions.</a:t>
-            </a:r>
-          </a:p>
-        </p:txBody>
-      </p:sp>
-      <p:sp>
-        <p:nvSpPr>
           <p:cNvPr id="45" name="Rectangle 162">
             <a:extLst>
               <a:ext uri="{FF2B5EF4-FFF2-40B4-BE49-F238E27FC236}">
@@ -6741,8 +5874,8 @@
         </p:nvSpPr>
         <p:spPr bwMode="auto">
           <a:xfrm>
-            <a:off x="34287424" y="3926011"/>
-            <a:ext cx="5683649" cy="746358"/>
+            <a:off x="30943648" y="3872154"/>
+            <a:ext cx="12337509" cy="746358"/>
           </a:xfrm>
           <a:prstGeom prst="rect">
             <a:avLst/>
@@ -6868,16 +6001,16 @@
           <a:p>
             <a:pPr algn="ctr"/>
             <a:r>
-              <a:rPr lang="en-US" altLang="en-US" sz="4250" dirty="0">
+              <a:rPr lang="en-US" altLang="en-US" sz="4250" b="1" dirty="0">
                 <a:solidFill>
                   <a:srgbClr val="C00000"/>
                 </a:solidFill>
                 <a:latin typeface="Trebuchet MS"/>
                 <a:ea typeface="MS PGothic"/>
               </a:rPr>
-              <a:t>6. </a:t>
+              <a:t>5. Age Related Differences in Partner Response </a:t>
             </a:r>
-            <a:endParaRPr lang="en-US" altLang="en-US" sz="4250" dirty="0">
+            <a:endParaRPr lang="en-US" altLang="en-US" sz="4250" b="1" dirty="0">
               <a:solidFill>
                 <a:srgbClr val="C00000"/>
               </a:solidFill>
@@ -6902,8 +6035,8 @@
         </p:nvSpPr>
         <p:spPr bwMode="auto">
           <a:xfrm>
-            <a:off x="15470883" y="14071787"/>
-            <a:ext cx="14827930" cy="18612720"/>
+            <a:off x="15470883" y="22267959"/>
+            <a:ext cx="14827930" cy="10416548"/>
           </a:xfrm>
           <a:prstGeom prst="rect">
             <a:avLst/>
@@ -7060,8 +6193,8 @@
         </p:nvSpPr>
         <p:spPr bwMode="auto">
           <a:xfrm>
-            <a:off x="17792340" y="13743817"/>
-            <a:ext cx="10223153" cy="1400383"/>
+            <a:off x="16469573" y="21922063"/>
+            <a:ext cx="12868688" cy="748988"/>
           </a:xfrm>
           <a:prstGeom prst="rect">
             <a:avLst/>
@@ -7187,70 +6320,14 @@
           <a:p>
             <a:pPr algn="ctr"/>
             <a:r>
-              <a:rPr lang="en-US" altLang="en-US" sz="4250" b="1" dirty="0">
+              <a:rPr lang="en-US" altLang="en-US" sz="4267" b="1" dirty="0">
                 <a:solidFill>
                   <a:srgbClr val="C00000"/>
                 </a:solidFill>
-                <a:latin typeface="Trebuchet MS"/>
-                <a:ea typeface="MS PGothic"/>
+                <a:latin typeface="Trebuchet MS" panose="020B0603020202020204" pitchFamily="34" charset="0"/>
               </a:rPr>
-              <a:t>4. Ventral Striatal Activation Is not Associated with Age </a:t>
+              <a:t>4. Age-Related Differences in Striatal Response? </a:t>
             </a:r>
-            <a:endParaRPr lang="en-US" altLang="en-US" sz="4267" b="1" dirty="0">
-              <a:solidFill>
-                <a:srgbClr val="C00000"/>
-              </a:solidFill>
-              <a:latin typeface="Trebuchet MS" panose="020B0603020202020204" pitchFamily="34" charset="0"/>
-            </a:endParaRPr>
-          </a:p>
-        </p:txBody>
-      </p:sp>
-      <p:sp>
-        <p:nvSpPr>
-          <p:cNvPr id="26" name="Rectangle 25">
-            <a:extLst>
-              <a:ext uri="{FF2B5EF4-FFF2-40B4-BE49-F238E27FC236}">
-                <a16:creationId xmlns:a16="http://schemas.microsoft.com/office/drawing/2014/main" id="{A472AF7A-C3B6-5B44-9093-FB3FB96D32E8}"/>
-              </a:ext>
-            </a:extLst>
-          </p:cNvPr>
-          <p:cNvSpPr/>
-          <p:nvPr/>
-        </p:nvSpPr>
-        <p:spPr>
-          <a:xfrm>
-            <a:off x="15753891" y="15011657"/>
-            <a:ext cx="14650695" cy="584775"/>
-          </a:xfrm>
-          <a:prstGeom prst="rect">
-            <a:avLst/>
-          </a:prstGeom>
-        </p:spPr>
-        <p:txBody>
-          <a:bodyPr wrap="square" lIns="91440" tIns="45720" rIns="91440" bIns="45720" anchor="t">
-            <a:spAutoFit/>
-          </a:bodyPr>
-          <a:lstStyle/>
-          <a:p>
-            <a:pPr>
-              <a:spcBef>
-                <a:spcPts val="0"/>
-              </a:spcBef>
-              <a:spcAft>
-                <a:spcPts val="1200"/>
-              </a:spcAft>
-            </a:pPr>
-            <a:r>
-              <a:rPr lang="en-US" sz="3200" i="1" dirty="0">
-                <a:latin typeface="Helvetica"/>
-                <a:ea typeface="MS PGothic"/>
-                <a:cs typeface="Helvetica"/>
-              </a:rPr>
-              <a:t>We found Ventral Striatum (VS) activation for Reciprocate &gt; Defect outcomes</a:t>
-            </a:r>
-            <a:endParaRPr lang="en-US" sz="3200" i="1" dirty="0">
-              <a:cs typeface="Helvetica" panose="020B0604020202020204" pitchFamily="34" charset="0"/>
-            </a:endParaRPr>
           </a:p>
         </p:txBody>
       </p:sp>
@@ -7268,8 +6345,8 @@
         </p:nvSpPr>
         <p:spPr>
           <a:xfrm>
-            <a:off x="15658143" y="22548386"/>
-            <a:ext cx="14650695" cy="1077218"/>
+            <a:off x="15606227" y="30861297"/>
+            <a:ext cx="14650695" cy="1569660"/>
           </a:xfrm>
           <a:prstGeom prst="rect">
             <a:avLst/>
@@ -7288,7 +6365,7 @@
                 <a:latin typeface="Helvetica"/>
                 <a:ea typeface="MS PGothic"/>
               </a:rPr>
-              <a:t>We found activation in the VS when participants were presented with a reciprocate outcome as opposed to a defect outcome.</a:t>
+              <a:t>We found activation in the VS when participants were presented with a reciprocate outcome as opposed to a defect outcome, however, there was no significant interaction with age.  </a:t>
             </a:r>
           </a:p>
         </p:txBody>
@@ -7633,7 +6710,19 @@
                 <a:spcAft>
                   <a:spcPts val="0"/>
                 </a:spcAft>
+                <a:buFont typeface="Arial" panose="020B0604020202020204" pitchFamily="34" charset="0"/>
+                <a:buChar char="•"/>
               </a:pPr>
+              <a:r>
+                <a:rPr lang="en-US" sz="4000" b="0" dirty="0">
+                  <a:solidFill>
+                    <a:srgbClr val="000000"/>
+                  </a:solidFill>
+                  <a:effectLst/>
+                  <a:latin typeface="Helvetica" pitchFamily="2" charset="0"/>
+                </a:rPr>
+                <a:t> It remains unclear whether age-related differences in responses to trust are associated with maladaptive outcomes such as financial exploitation.</a:t>
+              </a:r>
               <a:endParaRPr lang="en-US" sz="4000" dirty="0">
                 <a:latin typeface="Helvetica" pitchFamily="2" charset="0"/>
                 <a:ea typeface="MS PGothic"/>
@@ -7649,17 +6738,7 @@
                   <a:spcPts val="0"/>
                 </a:spcAft>
               </a:pPr>
-              <a:r>
-                <a:rPr lang="en-US" sz="4000" b="0" i="1" dirty="0">
-                  <a:solidFill>
-                    <a:srgbClr val="000000"/>
-                  </a:solidFill>
-                  <a:effectLst/>
-                  <a:latin typeface="Helvetica" pitchFamily="2" charset="0"/>
-                </a:rPr>
-                <a:t>It remains unclear whether age-related differences in responses to trust are associated with maladaptive outcomes such as financial exploitation.</a:t>
-              </a:r>
-              <a:endParaRPr lang="en-US" sz="4000" i="1" dirty="0">
+              <a:endParaRPr lang="en-US" sz="4000" dirty="0">
                 <a:latin typeface="Helvetica" pitchFamily="2" charset="0"/>
                 <a:ea typeface="MS PGothic"/>
                 <a:cs typeface="Helvetica"/>
@@ -7985,7 +7064,7 @@
           </p:nvSpPr>
           <p:spPr>
             <a:xfrm>
-              <a:off x="333765" y="9945451"/>
+              <a:off x="251798" y="9507352"/>
               <a:ext cx="14639262" cy="2031325"/>
             </a:xfrm>
             <a:prstGeom prst="rect">
@@ -8053,8 +7132,8 @@
         </p:nvGrpSpPr>
         <p:grpSpPr>
           <a:xfrm>
-            <a:off x="16601267" y="16040170"/>
-            <a:ext cx="6012596" cy="5359483"/>
+            <a:off x="15922551" y="24296197"/>
+            <a:ext cx="6012596" cy="5358384"/>
             <a:chOff x="14976740" y="15406812"/>
             <a:chExt cx="6810930" cy="6071098"/>
           </a:xfrm>
@@ -8074,7 +7153,7 @@
             <p:nvPr/>
           </p:nvPicPr>
           <p:blipFill>
-            <a:blip r:embed="rId13"/>
+            <a:blip r:embed="rId5"/>
             <a:stretch>
               <a:fillRect/>
             </a:stretch>
@@ -8178,45 +7257,6 @@
       </p:grpSp>
       <p:sp>
         <p:nvSpPr>
-          <p:cNvPr id="15398" name="TextBox 15397">
-            <a:extLst>
-              <a:ext uri="{FF2B5EF4-FFF2-40B4-BE49-F238E27FC236}">
-                <a16:creationId xmlns:a16="http://schemas.microsoft.com/office/drawing/2014/main" id="{525D5E19-4B3C-AFF6-A95E-21518D8D505D}"/>
-              </a:ext>
-            </a:extLst>
-          </p:cNvPr>
-          <p:cNvSpPr txBox="1"/>
-          <p:nvPr/>
-        </p:nvSpPr>
-        <p:spPr>
-          <a:xfrm>
-            <a:off x="16049619" y="12144591"/>
-            <a:ext cx="12586455" cy="1077218"/>
-          </a:xfrm>
-          <a:prstGeom prst="rect">
-            <a:avLst/>
-          </a:prstGeom>
-          <a:noFill/>
-        </p:spPr>
-        <p:txBody>
-          <a:bodyPr wrap="square" lIns="91440" tIns="45720" rIns="91440" bIns="45720" anchor="t">
-            <a:spAutoFit/>
-          </a:bodyPr>
-          <a:lstStyle/>
-          <a:p>
-            <a:pPr algn="ctr"/>
-            <a:r>
-              <a:rPr lang="en-US" altLang="en-US" sz="3200" dirty="0">
-                <a:latin typeface="Helvetica"/>
-                <a:ea typeface="MS PGothic"/>
-              </a:rPr>
-              <a:t>Participants were asked to rate their closeness with the three partners before the task on a 7-point Likert Scale</a:t>
-            </a:r>
-          </a:p>
-        </p:txBody>
-      </p:sp>
-      <p:sp>
-        <p:nvSpPr>
           <p:cNvPr id="15400" name="Rectangle 54"/>
           <p:cNvSpPr>
             <a:spLocks noChangeArrowheads="1"/>
@@ -8516,7 +7556,7 @@
                 </a:solidFill>
                 <a:latin typeface="Trebuchet MS" panose="020B0603020202020204" pitchFamily="34" charset="0"/>
               </a:rPr>
-              <a:t>7. Conclusions and Future Directions</a:t>
+              <a:t>6. Conclusions and Future Directions</a:t>
             </a:r>
           </a:p>
         </p:txBody>
@@ -8536,7 +7576,7 @@
         <p:spPr>
           <a:xfrm>
             <a:off x="30912367" y="25351882"/>
-            <a:ext cx="12914399" cy="5068054"/>
+            <a:ext cx="12914399" cy="1938992"/>
           </a:xfrm>
           <a:prstGeom prst="rect">
             <a:avLst/>
@@ -8559,491 +7599,16 @@
               <a:buChar char="•"/>
             </a:pPr>
             <a:r>
-              <a:rPr lang="en-US" sz="4500" dirty="0">
+              <a:rPr lang="en-US" sz="4000" dirty="0">
                 <a:latin typeface="Helvetica"/>
                 <a:ea typeface="MS PGothic"/>
                 <a:cs typeface="Helvetica"/>
               </a:rPr>
-              <a:t> Experiencing reciprocation elicited VS activation</a:t>
-            </a:r>
-          </a:p>
-          <a:p>
-            <a:pPr>
-              <a:spcBef>
-                <a:spcPts val="360"/>
-              </a:spcBef>
-              <a:spcAft>
-                <a:spcPts val="0"/>
-              </a:spcAft>
-              <a:buFont typeface="Arial" panose="020B0604020202020204" pitchFamily="34" charset="0"/>
-              <a:buChar char="•"/>
-            </a:pPr>
-            <a:r>
-              <a:rPr lang="en-US" sz="4500" dirty="0">
-                <a:latin typeface="Helvetica"/>
-                <a:ea typeface="MS PGothic"/>
-                <a:cs typeface="Helvetica"/>
-              </a:rPr>
-              <a:t> There were no age related effects in the VS</a:t>
-            </a:r>
-          </a:p>
-          <a:p>
-            <a:pPr>
-              <a:spcBef>
-                <a:spcPts val="360"/>
-              </a:spcBef>
-              <a:spcAft>
-                <a:spcPts val="0"/>
-              </a:spcAft>
-              <a:buFont typeface="Arial" panose="020B0604020202020204" pitchFamily="34" charset="0"/>
-              <a:buChar char="•"/>
-            </a:pPr>
-            <a:r>
-              <a:rPr lang="en-US" sz="4500" dirty="0">
-                <a:latin typeface="Helvetica"/>
-                <a:ea typeface="MS PGothic"/>
-                <a:cs typeface="Helvetica"/>
-              </a:rPr>
-              <a:t> Increase in age was associated with increase in MFG activation </a:t>
-            </a:r>
-          </a:p>
-          <a:p>
-            <a:pPr>
-              <a:spcBef>
-                <a:spcPts val="360"/>
-              </a:spcBef>
-              <a:spcAft>
-                <a:spcPts val="0"/>
-              </a:spcAft>
-              <a:buFont typeface="Arial" panose="020B0604020202020204" pitchFamily="34" charset="0"/>
-              <a:buChar char="•"/>
-            </a:pPr>
-            <a:r>
-              <a:rPr lang="en-US" sz="4500" dirty="0">
-                <a:latin typeface="Helvetica"/>
-                <a:ea typeface="MS PGothic"/>
-                <a:cs typeface="Helvetica"/>
-              </a:rPr>
-              <a:t> Increase in age was associated with decrease in ACC activation</a:t>
-            </a:r>
-          </a:p>
-          <a:p>
-            <a:pPr>
-              <a:spcBef>
-                <a:spcPts val="360"/>
-              </a:spcBef>
-              <a:spcAft>
-                <a:spcPts val="0"/>
-              </a:spcAft>
-            </a:pPr>
-            <a:endParaRPr lang="en-US" sz="4000" b="1" dirty="0">
-              <a:latin typeface="Helvetica"/>
-              <a:ea typeface="MS PGothic"/>
-              <a:cs typeface="Helvetica"/>
-            </a:endParaRPr>
-          </a:p>
-        </p:txBody>
-      </p:sp>
-      <p:sp>
-        <p:nvSpPr>
-          <p:cNvPr id="6" name="TextBox 5">
-            <a:extLst>
-              <a:ext uri="{FF2B5EF4-FFF2-40B4-BE49-F238E27FC236}">
-                <a16:creationId xmlns:a16="http://schemas.microsoft.com/office/drawing/2014/main" id="{70FD3937-717B-30F1-EF0F-1BE3A44A9629}"/>
-              </a:ext>
-            </a:extLst>
-          </p:cNvPr>
-          <p:cNvSpPr txBox="1"/>
-          <p:nvPr/>
-        </p:nvSpPr>
-        <p:spPr>
-          <a:xfrm>
-            <a:off x="30803569" y="30020269"/>
-            <a:ext cx="12442911" cy="1938992"/>
-          </a:xfrm>
-          <a:prstGeom prst="rect">
-            <a:avLst/>
-          </a:prstGeom>
-          <a:noFill/>
-        </p:spPr>
-        <p:txBody>
-          <a:bodyPr wrap="square" lIns="91440" tIns="45720" rIns="91440" bIns="45720" anchor="t">
-            <a:spAutoFit/>
-          </a:bodyPr>
-          <a:lstStyle/>
-          <a:p>
-            <a:r>
-              <a:rPr lang="en-US" sz="6000" dirty="0"/>
-              <a:t>Data collection is ongoing. We anticipate tripling our sample size</a:t>
+              <a:t> Our preliminary results indicate that reciprocation elicited activation in the ventral striatum. Additionally, we find that during the </a:t>
             </a:r>
           </a:p>
         </p:txBody>
       </p:sp>
-      <p:sp>
-        <p:nvSpPr>
-          <p:cNvPr id="15429" name="Rounded Rectangle 15428">
-            <a:extLst>
-              <a:ext uri="{FF2B5EF4-FFF2-40B4-BE49-F238E27FC236}">
-                <a16:creationId xmlns:a16="http://schemas.microsoft.com/office/drawing/2014/main" id="{4B7D9A17-B83C-E5E9-1709-3AF83FDD5AD6}"/>
-              </a:ext>
-            </a:extLst>
-          </p:cNvPr>
-          <p:cNvSpPr/>
-          <p:nvPr/>
-        </p:nvSpPr>
-        <p:spPr bwMode="auto">
-          <a:xfrm>
-            <a:off x="681129" y="15250685"/>
-            <a:ext cx="6101659" cy="707229"/>
-          </a:xfrm>
-          <a:prstGeom prst="roundRect">
-            <a:avLst/>
-          </a:prstGeom>
-          <a:solidFill>
-            <a:schemeClr val="accent1"/>
-          </a:solidFill>
-          <a:ln w="50800" cap="flat" cmpd="sng" algn="ctr">
-            <a:solidFill>
-              <a:schemeClr val="tx1"/>
-            </a:solidFill>
-            <a:prstDash val="solid"/>
-            <a:round/>
-            <a:headEnd type="none" w="med" len="med"/>
-            <a:tailEnd type="none" w="med" len="med"/>
-          </a:ln>
-          <a:effectLst/>
-        </p:spPr>
-        <p:txBody>
-          <a:bodyPr vert="horz" wrap="square" lIns="91440" tIns="45720" rIns="91440" bIns="45720" numCol="1" rtlCol="0" anchor="t" anchorCtr="0" compatLnSpc="1">
-            <a:prstTxWarp prst="textNoShape">
-              <a:avLst/>
-            </a:prstTxWarp>
-          </a:bodyPr>
-          <a:lstStyle/>
-          <a:p>
-            <a:pPr defTabSz="4389438" eaLnBrk="1" hangingPunct="1"/>
-            <a:r>
-              <a:rPr lang="en-US" sz="3500" u="sng" dirty="0"/>
-              <a:t>You are given </a:t>
-            </a:r>
-            <a:r>
-              <a:rPr lang="en-US" sz="3500" b="1" u="sng" dirty="0"/>
-              <a:t>$8</a:t>
-            </a:r>
-            <a:r>
-              <a:rPr lang="en-US" sz="3500" u="sng" dirty="0"/>
-              <a:t> for the trial. </a:t>
-            </a:r>
-          </a:p>
-          <a:p>
-            <a:pPr marL="0" marR="0" indent="0" algn="l" defTabSz="4389438" rtl="0" eaLnBrk="1" fontAlgn="base" latinLnBrk="0" hangingPunct="1">
-              <a:lnSpc>
-                <a:spcPct val="100000"/>
-              </a:lnSpc>
-              <a:spcBef>
-                <a:spcPct val="0"/>
-              </a:spcBef>
-              <a:spcAft>
-                <a:spcPct val="0"/>
-              </a:spcAft>
-              <a:buClrTx/>
-              <a:buSzTx/>
-              <a:buFontTx/>
-              <a:buNone/>
-              <a:tabLst/>
-            </a:pPr>
-            <a:endParaRPr kumimoji="0" lang="en-US" sz="1800" b="0" i="0" u="none" strike="noStrike" cap="none" normalizeH="0" baseline="0" dirty="0">
-              <a:ln>
-                <a:noFill/>
-              </a:ln>
-              <a:solidFill>
-                <a:schemeClr val="tx1"/>
-              </a:solidFill>
-              <a:effectLst/>
-              <a:latin typeface="Arial" charset="0"/>
-              <a:cs typeface="Arial" charset="0"/>
-            </a:endParaRPr>
-          </a:p>
-        </p:txBody>
-      </p:sp>
-      <p:grpSp>
-        <p:nvGrpSpPr>
-          <p:cNvPr id="15592" name="Group 15591">
-            <a:extLst>
-              <a:ext uri="{FF2B5EF4-FFF2-40B4-BE49-F238E27FC236}">
-                <a16:creationId xmlns:a16="http://schemas.microsoft.com/office/drawing/2014/main" id="{415B0EBC-8379-F485-6113-E5DF57F87E19}"/>
-              </a:ext>
-            </a:extLst>
-          </p:cNvPr>
-          <p:cNvGrpSpPr/>
-          <p:nvPr/>
-        </p:nvGrpSpPr>
-        <p:grpSpPr>
-          <a:xfrm>
-            <a:off x="2182475" y="21738507"/>
-            <a:ext cx="4667290" cy="1325771"/>
-            <a:chOff x="1804103" y="21738507"/>
-            <a:chExt cx="4667290" cy="1325771"/>
-          </a:xfrm>
-        </p:grpSpPr>
-        <p:sp>
-          <p:nvSpPr>
-            <p:cNvPr id="52" name="TextBox 51">
-              <a:extLst>
-                <a:ext uri="{FF2B5EF4-FFF2-40B4-BE49-F238E27FC236}">
-                  <a16:creationId xmlns:a16="http://schemas.microsoft.com/office/drawing/2014/main" id="{4707B45F-027B-576B-4808-66F0A5D95489}"/>
-                </a:ext>
-              </a:extLst>
-            </p:cNvPr>
-            <p:cNvSpPr txBox="1"/>
-            <p:nvPr/>
-          </p:nvSpPr>
-          <p:spPr>
-            <a:xfrm>
-              <a:off x="5031575" y="21740839"/>
-              <a:ext cx="1439818" cy="1323439"/>
-            </a:xfrm>
-            <a:prstGeom prst="rect">
-              <a:avLst/>
-            </a:prstGeom>
-            <a:noFill/>
-          </p:spPr>
-          <p:txBody>
-            <a:bodyPr wrap="none" rtlCol="0">
-              <a:spAutoFit/>
-            </a:bodyPr>
-            <a:lstStyle/>
-            <a:p>
-              <a:r>
-                <a:rPr lang="en-US" sz="8000" b="1" dirty="0">
-                  <a:solidFill>
-                    <a:srgbClr val="03DF04"/>
-                  </a:solidFill>
-                </a:rPr>
-                <a:t>X3</a:t>
-              </a:r>
-            </a:p>
-          </p:txBody>
-        </p:sp>
-        <p:sp>
-          <p:nvSpPr>
-            <p:cNvPr id="15433" name="Rounded Rectangle 15432">
-              <a:extLst>
-                <a:ext uri="{FF2B5EF4-FFF2-40B4-BE49-F238E27FC236}">
-                  <a16:creationId xmlns:a16="http://schemas.microsoft.com/office/drawing/2014/main" id="{9D770554-0135-2E8B-9BC3-8228F9631C8A}"/>
-                </a:ext>
-              </a:extLst>
-            </p:cNvPr>
-            <p:cNvSpPr/>
-            <p:nvPr/>
-          </p:nvSpPr>
-          <p:spPr bwMode="auto">
-            <a:xfrm>
-              <a:off x="1804103" y="21738507"/>
-              <a:ext cx="2967279" cy="1168944"/>
-            </a:xfrm>
-            <a:prstGeom prst="roundRect">
-              <a:avLst/>
-            </a:prstGeom>
-            <a:solidFill>
-              <a:schemeClr val="accent1"/>
-            </a:solidFill>
-            <a:ln w="50800" cap="flat" cmpd="sng" algn="ctr">
-              <a:solidFill>
-                <a:schemeClr val="tx1"/>
-              </a:solidFill>
-              <a:prstDash val="solid"/>
-              <a:round/>
-              <a:headEnd type="none" w="med" len="med"/>
-              <a:tailEnd type="none" w="med" len="med"/>
-            </a:ln>
-            <a:effectLst/>
-          </p:spPr>
-          <p:txBody>
-            <a:bodyPr vert="horz" wrap="square" lIns="91440" tIns="45720" rIns="91440" bIns="45720" numCol="1" rtlCol="0" anchor="t" anchorCtr="0" compatLnSpc="1">
-              <a:prstTxWarp prst="textNoShape">
-                <a:avLst/>
-              </a:prstTxWarp>
-            </a:bodyPr>
-            <a:lstStyle/>
-            <a:p>
-              <a:pPr defTabSz="4389438" eaLnBrk="1" hangingPunct="1"/>
-              <a:r>
-                <a:rPr lang="en-US" sz="3000" dirty="0"/>
-                <a:t>The money you  sent is tripled</a:t>
-              </a:r>
-            </a:p>
-            <a:p>
-              <a:pPr marL="0" marR="0" indent="0" algn="l" defTabSz="4389438" rtl="0" eaLnBrk="1" fontAlgn="base" latinLnBrk="0" hangingPunct="1">
-                <a:lnSpc>
-                  <a:spcPct val="100000"/>
-                </a:lnSpc>
-                <a:spcBef>
-                  <a:spcPct val="0"/>
-                </a:spcBef>
-                <a:spcAft>
-                  <a:spcPct val="0"/>
-                </a:spcAft>
-                <a:buClrTx/>
-                <a:buSzTx/>
-                <a:buFontTx/>
-                <a:buNone/>
-                <a:tabLst/>
-              </a:pPr>
-              <a:endParaRPr kumimoji="0" lang="en-US" sz="1800" b="0" i="0" u="none" strike="noStrike" cap="none" normalizeH="0" baseline="0" dirty="0">
-                <a:ln>
-                  <a:noFill/>
-                </a:ln>
-                <a:solidFill>
-                  <a:schemeClr val="tx1"/>
-                </a:solidFill>
-                <a:effectLst/>
-                <a:latin typeface="Arial" charset="0"/>
-                <a:cs typeface="Arial" charset="0"/>
-              </a:endParaRPr>
-            </a:p>
-          </p:txBody>
-        </p:sp>
-      </p:grpSp>
-      <p:grpSp>
-        <p:nvGrpSpPr>
-          <p:cNvPr id="15490" name="Group 15489">
-            <a:extLst>
-              <a:ext uri="{FF2B5EF4-FFF2-40B4-BE49-F238E27FC236}">
-                <a16:creationId xmlns:a16="http://schemas.microsoft.com/office/drawing/2014/main" id="{26CF14B9-FE18-01D5-1A0A-E19BE8376A0A}"/>
-              </a:ext>
-            </a:extLst>
-          </p:cNvPr>
-          <p:cNvGrpSpPr/>
-          <p:nvPr/>
-        </p:nvGrpSpPr>
-        <p:grpSpPr>
-          <a:xfrm>
-            <a:off x="530502" y="18979791"/>
-            <a:ext cx="4534151" cy="2464546"/>
-            <a:chOff x="533974" y="18532980"/>
-            <a:chExt cx="4534151" cy="2464546"/>
-          </a:xfrm>
-        </p:grpSpPr>
-        <p:sp>
-          <p:nvSpPr>
-            <p:cNvPr id="15432" name="Rounded Rectangle 15431">
-              <a:extLst>
-                <a:ext uri="{FF2B5EF4-FFF2-40B4-BE49-F238E27FC236}">
-                  <a16:creationId xmlns:a16="http://schemas.microsoft.com/office/drawing/2014/main" id="{29E5F4B4-9ECB-A12A-6B3F-C0855A0CDE34}"/>
-                </a:ext>
-              </a:extLst>
-            </p:cNvPr>
-            <p:cNvSpPr/>
-            <p:nvPr/>
-          </p:nvSpPr>
-          <p:spPr bwMode="auto">
-            <a:xfrm>
-              <a:off x="533974" y="19334093"/>
-              <a:ext cx="4534151" cy="1663433"/>
-            </a:xfrm>
-            <a:prstGeom prst="roundRect">
-              <a:avLst/>
-            </a:prstGeom>
-            <a:solidFill>
-              <a:schemeClr val="accent1"/>
-            </a:solidFill>
-            <a:ln w="50800" cap="flat" cmpd="sng" algn="ctr">
-              <a:solidFill>
-                <a:schemeClr val="tx1"/>
-              </a:solidFill>
-              <a:prstDash val="solid"/>
-              <a:round/>
-              <a:headEnd type="none" w="med" len="med"/>
-              <a:tailEnd type="none" w="med" len="med"/>
-            </a:ln>
-            <a:effectLst/>
-          </p:spPr>
-          <p:txBody>
-            <a:bodyPr vert="horz" wrap="square" lIns="91440" tIns="45720" rIns="91440" bIns="45720" numCol="1" rtlCol="0" anchor="t" anchorCtr="0" compatLnSpc="1">
-              <a:prstTxWarp prst="textNoShape">
-                <a:avLst/>
-              </a:prstTxWarp>
-            </a:bodyPr>
-            <a:lstStyle/>
-            <a:p>
-              <a:pPr defTabSz="4389438" eaLnBrk="1" hangingPunct="1"/>
-              <a:r>
-                <a:rPr lang="en-US" sz="3000" dirty="0"/>
-                <a:t>You choose a higher or lower amount to share with your partner.</a:t>
-              </a:r>
-            </a:p>
-            <a:p>
-              <a:pPr marL="0" marR="0" indent="0" algn="l" defTabSz="4389438" rtl="0" eaLnBrk="1" fontAlgn="base" latinLnBrk="0" hangingPunct="1">
-                <a:lnSpc>
-                  <a:spcPct val="100000"/>
-                </a:lnSpc>
-                <a:spcBef>
-                  <a:spcPct val="0"/>
-                </a:spcBef>
-                <a:spcAft>
-                  <a:spcPct val="0"/>
-                </a:spcAft>
-                <a:buClrTx/>
-                <a:buSzTx/>
-                <a:buFontTx/>
-                <a:buNone/>
-                <a:tabLst/>
-              </a:pPr>
-              <a:endParaRPr kumimoji="0" lang="en-US" sz="1800" b="0" i="0" u="none" strike="noStrike" cap="none" normalizeH="0" baseline="0" dirty="0">
-                <a:ln>
-                  <a:noFill/>
-                </a:ln>
-                <a:solidFill>
-                  <a:schemeClr val="tx1"/>
-                </a:solidFill>
-                <a:effectLst/>
-                <a:latin typeface="Arial" charset="0"/>
-                <a:cs typeface="Arial" charset="0"/>
-              </a:endParaRPr>
-            </a:p>
-          </p:txBody>
-        </p:sp>
-        <p:cxnSp>
-          <p:nvCxnSpPr>
-            <p:cNvPr id="15442" name="Elbow Connector 15441">
-              <a:extLst>
-                <a:ext uri="{FF2B5EF4-FFF2-40B4-BE49-F238E27FC236}">
-                  <a16:creationId xmlns:a16="http://schemas.microsoft.com/office/drawing/2014/main" id="{FD357802-D2BB-A2AC-2582-D36E431D92F1}"/>
-                </a:ext>
-              </a:extLst>
-            </p:cNvPr>
-            <p:cNvCxnSpPr>
-              <a:cxnSpLocks/>
-            </p:cNvCxnSpPr>
-            <p:nvPr/>
-          </p:nvCxnSpPr>
-          <p:spPr bwMode="auto">
-            <a:xfrm flipV="1">
-              <a:off x="2361558" y="18532980"/>
-              <a:ext cx="953880" cy="801113"/>
-            </a:xfrm>
-            <a:prstGeom prst="bentConnector3">
-              <a:avLst>
-                <a:gd name="adj1" fmla="val -3922"/>
-              </a:avLst>
-            </a:prstGeom>
-            <a:solidFill>
-              <a:schemeClr val="accent1"/>
-            </a:solidFill>
-            <a:ln w="50800" cap="flat" cmpd="sng" algn="ctr">
-              <a:solidFill>
-                <a:schemeClr val="tx1"/>
-              </a:solidFill>
-              <a:prstDash val="solid"/>
-              <a:round/>
-              <a:headEnd type="none" w="med" len="med"/>
-              <a:tailEnd type="triangle"/>
-            </a:ln>
-            <a:effectLst/>
-          </p:spPr>
-        </p:cxnSp>
-      </p:grpSp>
       <p:grpSp>
         <p:nvGrpSpPr>
           <p:cNvPr id="15524" name="Group 15523">
@@ -9058,10 +7623,10 @@
         </p:nvGrpSpPr>
         <p:grpSpPr>
           <a:xfrm>
-            <a:off x="175846" y="31162938"/>
-            <a:ext cx="14969676" cy="1521569"/>
-            <a:chOff x="348551" y="31162937"/>
-            <a:chExt cx="14969676" cy="1521569"/>
+            <a:off x="65312" y="31162938"/>
+            <a:ext cx="14865736" cy="1521569"/>
+            <a:chOff x="238017" y="31162937"/>
+            <a:chExt cx="14865736" cy="1521569"/>
           </a:xfrm>
         </p:grpSpPr>
         <p:sp>
@@ -9236,8 +7801,8 @@
           </p:nvSpPr>
           <p:spPr>
             <a:xfrm>
-              <a:off x="452491" y="31399184"/>
-              <a:ext cx="14865736" cy="1015663"/>
+              <a:off x="238017" y="31517716"/>
+              <a:ext cx="14865736" cy="830997"/>
             </a:xfrm>
             <a:prstGeom prst="rect">
               <a:avLst/>
@@ -9245,294 +7810,59 @@
             <a:noFill/>
           </p:spPr>
           <p:txBody>
-            <a:bodyPr wrap="none" rtlCol="0">
+            <a:bodyPr wrap="square" rtlCol="0">
               <a:spAutoFit/>
             </a:bodyPr>
             <a:lstStyle/>
             <a:p>
+              <a:pPr algn="ctr"/>
               <a:r>
-                <a:rPr lang="en-US" sz="2900" b="0" i="0" dirty="0">
+                <a:rPr lang="en-US" sz="2400" b="0" i="0" dirty="0">
                   <a:effectLst/>
-                  <a:highlight>
-                    <a:srgbClr val="D8E3C1"/>
-                  </a:highlight>
-                  <a:latin typeface="Slack-Lato"/>
+                  <a:latin typeface="Helvetica" pitchFamily="2" charset="0"/>
                 </a:rPr>
                 <a:t>This study was supported by National Institutes of Health grant RF1-AG67011 (David V. Smith).</a:t>
               </a:r>
               <a:br>
-                <a:rPr lang="en-US" sz="2900" dirty="0">
-                  <a:highlight>
-                    <a:srgbClr val="D8E3C1"/>
-                  </a:highlight>
+                <a:rPr lang="en-US" sz="2400" dirty="0">
+                  <a:latin typeface="Helvetica" pitchFamily="2" charset="0"/>
                 </a:rPr>
               </a:br>
               <a:r>
-                <a:rPr lang="en-US" sz="2900" b="0" i="0" dirty="0">
+                <a:rPr lang="en-US" sz="2400" b="0" i="0" dirty="0">
                   <a:effectLst/>
-                  <a:highlight>
-                    <a:srgbClr val="D8E3C1"/>
-                  </a:highlight>
-                  <a:latin typeface="Slack-Lato"/>
+                  <a:latin typeface="Helvetica" pitchFamily="2" charset="0"/>
                 </a:rPr>
                 <a:t>Contact information: </a:t>
               </a:r>
               <a:r>
-                <a:rPr lang="en-US" sz="2900" b="0" i="0" dirty="0" err="1">
+                <a:rPr lang="en-US" sz="2400" b="0" i="0" dirty="0" err="1">
                   <a:effectLst/>
-                  <a:highlight>
-                    <a:srgbClr val="D8E3C1"/>
-                  </a:highlight>
-                  <a:latin typeface="Slack-Lato"/>
+                  <a:latin typeface="Helvetica" pitchFamily="2" charset="0"/>
                 </a:rPr>
                 <a:t>Avi.Dachs@temple.edu</a:t>
               </a:r>
               <a:r>
-                <a:rPr lang="en-US" sz="2900" b="0" i="0" dirty="0">
+                <a:rPr lang="en-US" sz="2400" b="0" i="0" dirty="0">
                   <a:effectLst/>
-                  <a:highlight>
-                    <a:srgbClr val="D8E3C1"/>
-                  </a:highlight>
-                  <a:latin typeface="Slack-Lato"/>
+                  <a:latin typeface="Helvetica" pitchFamily="2" charset="0"/>
                 </a:rPr>
                 <a:t>, </a:t>
               </a:r>
               <a:r>
-                <a:rPr lang="en-US" sz="2900" b="0" i="0" dirty="0" err="1">
+                <a:rPr lang="en-US" sz="2400" b="0" i="0" dirty="0" err="1">
                   <a:effectLst/>
-                  <a:highlight>
-                    <a:srgbClr val="D8E3C1"/>
-                  </a:highlight>
-                  <a:latin typeface="Slack-Lato"/>
+                  <a:latin typeface="Helvetica" pitchFamily="2" charset="0"/>
                 </a:rPr>
                 <a:t>Cooper.Sharp@temple.edu</a:t>
               </a:r>
-              <a:endParaRPr lang="en-US" sz="2900" dirty="0">
-                <a:highlight>
-                  <a:srgbClr val="D8E3C1"/>
-                </a:highlight>
+              <a:endParaRPr lang="en-US" sz="2400" dirty="0">
+                <a:latin typeface="Helvetica" pitchFamily="2" charset="0"/>
               </a:endParaRPr>
             </a:p>
           </p:txBody>
         </p:sp>
       </p:grpSp>
-      <p:grpSp>
-        <p:nvGrpSpPr>
-          <p:cNvPr id="15538" name="Group 15537">
-            <a:extLst>
-              <a:ext uri="{FF2B5EF4-FFF2-40B4-BE49-F238E27FC236}">
-                <a16:creationId xmlns:a16="http://schemas.microsoft.com/office/drawing/2014/main" id="{4ABA81B2-5B67-77D2-5517-08033E19241B}"/>
-              </a:ext>
-            </a:extLst>
-          </p:cNvPr>
-          <p:cNvGrpSpPr/>
-          <p:nvPr/>
-        </p:nvGrpSpPr>
-        <p:grpSpPr>
-          <a:xfrm>
-            <a:off x="1364527" y="17047384"/>
-            <a:ext cx="3578072" cy="1569660"/>
-            <a:chOff x="1398495" y="16644992"/>
-            <a:chExt cx="3578072" cy="1569660"/>
-          </a:xfrm>
-        </p:grpSpPr>
-        <p:sp>
-          <p:nvSpPr>
-            <p:cNvPr id="15528" name="Rounded Rectangle 15527">
-              <a:extLst>
-                <a:ext uri="{FF2B5EF4-FFF2-40B4-BE49-F238E27FC236}">
-                  <a16:creationId xmlns:a16="http://schemas.microsoft.com/office/drawing/2014/main" id="{AD2DBFD4-1DD0-D27D-7CB0-35408A9E32E4}"/>
-                </a:ext>
-              </a:extLst>
-            </p:cNvPr>
-            <p:cNvSpPr/>
-            <p:nvPr/>
-          </p:nvSpPr>
-          <p:spPr bwMode="auto">
-            <a:xfrm>
-              <a:off x="1398495" y="16644992"/>
-              <a:ext cx="1947439" cy="1569660"/>
-            </a:xfrm>
-            <a:prstGeom prst="roundRect">
-              <a:avLst/>
-            </a:prstGeom>
-            <a:solidFill>
-              <a:schemeClr val="accent1"/>
-            </a:solidFill>
-            <a:ln w="50800" cap="flat" cmpd="sng" algn="ctr">
-              <a:solidFill>
-                <a:schemeClr val="tx1"/>
-              </a:solidFill>
-              <a:prstDash val="solid"/>
-              <a:round/>
-              <a:headEnd type="none" w="med" len="med"/>
-              <a:tailEnd type="none" w="med" len="med"/>
-            </a:ln>
-            <a:effectLst/>
-          </p:spPr>
-          <p:txBody>
-            <a:bodyPr vert="horz" wrap="square" lIns="91440" tIns="45720" rIns="91440" bIns="45720" numCol="1" rtlCol="0" anchor="t" anchorCtr="0" compatLnSpc="1">
-              <a:prstTxWarp prst="textNoShape">
-                <a:avLst/>
-              </a:prstTxWarp>
-            </a:bodyPr>
-            <a:lstStyle/>
-            <a:p>
-              <a:pPr defTabSz="4389438" eaLnBrk="1" hangingPunct="1"/>
-              <a:r>
-                <a:rPr lang="en-US" sz="3000" dirty="0"/>
-                <a:t>You are assigned a partner.</a:t>
-              </a:r>
-            </a:p>
-            <a:p>
-              <a:pPr marL="0" marR="0" indent="0" algn="l" defTabSz="4389438" rtl="0" eaLnBrk="1" fontAlgn="base" latinLnBrk="0" hangingPunct="1">
-                <a:lnSpc>
-                  <a:spcPct val="100000"/>
-                </a:lnSpc>
-                <a:spcBef>
-                  <a:spcPct val="0"/>
-                </a:spcBef>
-                <a:spcAft>
-                  <a:spcPct val="0"/>
-                </a:spcAft>
-                <a:buClrTx/>
-                <a:buSzTx/>
-                <a:buFontTx/>
-                <a:buNone/>
-                <a:tabLst/>
-              </a:pPr>
-              <a:endParaRPr kumimoji="0" lang="en-US" sz="1800" b="0" i="0" u="none" strike="noStrike" cap="none" normalizeH="0" baseline="0" dirty="0">
-                <a:ln>
-                  <a:noFill/>
-                </a:ln>
-                <a:solidFill>
-                  <a:schemeClr val="tx1"/>
-                </a:solidFill>
-                <a:effectLst/>
-                <a:latin typeface="Arial" charset="0"/>
-                <a:cs typeface="Arial" charset="0"/>
-              </a:endParaRPr>
-            </a:p>
-          </p:txBody>
-        </p:sp>
-        <p:cxnSp>
-          <p:nvCxnSpPr>
-            <p:cNvPr id="15537" name="Straight Arrow Connector 15536">
-              <a:extLst>
-                <a:ext uri="{FF2B5EF4-FFF2-40B4-BE49-F238E27FC236}">
-                  <a16:creationId xmlns:a16="http://schemas.microsoft.com/office/drawing/2014/main" id="{7A1CFB10-A83A-AA5A-7CB9-EC39B260985E}"/>
-                </a:ext>
-              </a:extLst>
-            </p:cNvPr>
-            <p:cNvCxnSpPr>
-              <a:cxnSpLocks/>
-              <a:stCxn id="15528" idx="3"/>
-            </p:cNvCxnSpPr>
-            <p:nvPr/>
-          </p:nvCxnSpPr>
-          <p:spPr bwMode="auto">
-            <a:xfrm>
-              <a:off x="3345934" y="17429822"/>
-              <a:ext cx="1630633" cy="0"/>
-            </a:xfrm>
-            <a:prstGeom prst="straightConnector1">
-              <a:avLst/>
-            </a:prstGeom>
-            <a:solidFill>
-              <a:schemeClr val="accent1"/>
-            </a:solidFill>
-            <a:ln w="50800" cap="flat" cmpd="sng" algn="ctr">
-              <a:solidFill>
-                <a:schemeClr val="tx1"/>
-              </a:solidFill>
-              <a:prstDash val="solid"/>
-              <a:round/>
-              <a:headEnd type="none" w="med" len="med"/>
-              <a:tailEnd type="triangle"/>
-            </a:ln>
-            <a:effectLst/>
-          </p:spPr>
-        </p:cxnSp>
-      </p:grpSp>
-      <p:sp>
-        <p:nvSpPr>
-          <p:cNvPr id="15542" name="Rounded Rectangle 15541">
-            <a:extLst>
-              <a:ext uri="{FF2B5EF4-FFF2-40B4-BE49-F238E27FC236}">
-                <a16:creationId xmlns:a16="http://schemas.microsoft.com/office/drawing/2014/main" id="{F919F17A-D127-CAD0-86F8-9896BB472FB5}"/>
-              </a:ext>
-            </a:extLst>
-          </p:cNvPr>
-          <p:cNvSpPr/>
-          <p:nvPr/>
-        </p:nvSpPr>
-        <p:spPr bwMode="auto">
-          <a:xfrm>
-            <a:off x="1019445" y="25306099"/>
-            <a:ext cx="2843041" cy="764088"/>
-          </a:xfrm>
-          <a:prstGeom prst="roundRect">
-            <a:avLst/>
-          </a:prstGeom>
-          <a:solidFill>
-            <a:schemeClr val="accent1"/>
-          </a:solidFill>
-          <a:ln w="50800" cap="flat" cmpd="sng" algn="ctr">
-            <a:solidFill>
-              <a:schemeClr val="tx1"/>
-            </a:solidFill>
-            <a:prstDash val="solid"/>
-            <a:round/>
-            <a:headEnd type="none" w="med" len="med"/>
-            <a:tailEnd type="none" w="med" len="med"/>
-          </a:ln>
-          <a:effectLst/>
-        </p:spPr>
-        <p:txBody>
-          <a:bodyPr vert="horz" wrap="square" lIns="91440" tIns="45720" rIns="91440" bIns="45720" numCol="1" rtlCol="0" anchor="t" anchorCtr="0" compatLnSpc="1">
-            <a:prstTxWarp prst="textNoShape">
-              <a:avLst/>
-            </a:prstTxWarp>
-          </a:bodyPr>
-          <a:lstStyle/>
-          <a:p>
-            <a:pPr defTabSz="4389438" eaLnBrk="1" hangingPunct="1"/>
-            <a:r>
-              <a:rPr lang="en-US" sz="4000" u="sng" dirty="0"/>
-              <a:t>End of trial</a:t>
-            </a:r>
-          </a:p>
-          <a:p>
-            <a:pPr marL="0" marR="0" indent="0" algn="l" defTabSz="4389438" rtl="0" eaLnBrk="1" fontAlgn="base" latinLnBrk="0" hangingPunct="1">
-              <a:lnSpc>
-                <a:spcPct val="100000"/>
-              </a:lnSpc>
-              <a:spcBef>
-                <a:spcPct val="0"/>
-              </a:spcBef>
-              <a:spcAft>
-                <a:spcPct val="0"/>
-              </a:spcAft>
-              <a:buClrTx/>
-              <a:buSzTx/>
-              <a:buFontTx/>
-              <a:buNone/>
-              <a:tabLst/>
-            </a:pPr>
-            <a:endParaRPr kumimoji="0" lang="en-US" sz="1800" b="0" i="0" u="none" strike="noStrike" cap="none" normalizeH="0" baseline="0" dirty="0">
-              <a:ln>
-                <a:noFill/>
-              </a:ln>
-              <a:solidFill>
-                <a:schemeClr val="tx1"/>
-              </a:solidFill>
-              <a:effectLst/>
-              <a:latin typeface="Arial" charset="0"/>
-              <a:cs typeface="Arial" charset="0"/>
-            </a:endParaRPr>
-          </a:p>
-        </p:txBody>
-      </p:sp>
       <p:grpSp>
         <p:nvGrpSpPr>
           <p:cNvPr id="15583" name="Group 15582">
@@ -9568,7 +7898,7 @@
             <p:nvPr/>
           </p:nvPicPr>
           <p:blipFill rotWithShape="1">
-            <a:blip r:embed="rId14">
+            <a:blip r:embed="rId6">
               <a:extLst>
                 <a:ext uri="{28A0092B-C50C-407E-A947-70E740481C1C}">
                   <a14:useLocalDpi xmlns:a14="http://schemas.microsoft.com/office/drawing/2010/main" val="0"/>
@@ -9871,135 +8201,6 @@
       </p:grpSp>
       <p:sp>
         <p:nvSpPr>
-          <p:cNvPr id="15595" name="TextBox 15594">
-            <a:extLst>
-              <a:ext uri="{FF2B5EF4-FFF2-40B4-BE49-F238E27FC236}">
-                <a16:creationId xmlns:a16="http://schemas.microsoft.com/office/drawing/2014/main" id="{BD0DF8CA-4563-3ED7-8925-AC53B7E7547D}"/>
-              </a:ext>
-            </a:extLst>
-          </p:cNvPr>
-          <p:cNvSpPr txBox="1"/>
-          <p:nvPr/>
-        </p:nvSpPr>
-        <p:spPr>
-          <a:xfrm>
-            <a:off x="18209595" y="31314065"/>
-            <a:ext cx="9855262" cy="553998"/>
-          </a:xfrm>
-          <a:prstGeom prst="rect">
-            <a:avLst/>
-          </a:prstGeom>
-          <a:noFill/>
-        </p:spPr>
-        <p:txBody>
-          <a:bodyPr wrap="none" rtlCol="0">
-            <a:spAutoFit/>
-          </a:bodyPr>
-          <a:lstStyle/>
-          <a:p>
-            <a:r>
-              <a:rPr lang="en-US" sz="3000" dirty="0"/>
-              <a:t>We found that activation in the VS was not related to age</a:t>
-            </a:r>
-          </a:p>
-        </p:txBody>
-      </p:sp>
-      <p:sp>
-        <p:nvSpPr>
-          <p:cNvPr id="15649" name="TextBox 15648">
-            <a:extLst>
-              <a:ext uri="{FF2B5EF4-FFF2-40B4-BE49-F238E27FC236}">
-                <a16:creationId xmlns:a16="http://schemas.microsoft.com/office/drawing/2014/main" id="{F08B8D4B-A0C5-8C43-1158-1979ABB766DD}"/>
-              </a:ext>
-            </a:extLst>
-          </p:cNvPr>
-          <p:cNvSpPr txBox="1"/>
-          <p:nvPr/>
-        </p:nvSpPr>
-        <p:spPr>
-          <a:xfrm>
-            <a:off x="30959587" y="11196613"/>
-            <a:ext cx="5874695" cy="1323439"/>
-          </a:xfrm>
-          <a:prstGeom prst="rect">
-            <a:avLst/>
-          </a:prstGeom>
-          <a:noFill/>
-        </p:spPr>
-        <p:txBody>
-          <a:bodyPr wrap="square" rtlCol="0">
-            <a:spAutoFit/>
-          </a:bodyPr>
-          <a:lstStyle/>
-          <a:p>
-            <a:pPr algn="l"/>
-            <a:r>
-              <a:rPr lang="en-US" sz="4000" i="0" dirty="0">
-                <a:effectLst/>
-                <a:latin typeface="Helvetica" pitchFamily="2" charset="0"/>
-              </a:rPr>
-              <a:t>IOS(f&gt;c) and Age model </a:t>
-            </a:r>
-          </a:p>
-          <a:p>
-            <a:pPr algn="l"/>
-            <a:r>
-              <a:rPr lang="en-US" sz="4000" i="0" dirty="0">
-                <a:effectLst/>
-                <a:latin typeface="Helvetica" pitchFamily="2" charset="0"/>
-              </a:rPr>
-              <a:t>A</a:t>
-            </a:r>
-            <a:r>
-              <a:rPr lang="en-US" sz="4000" b="0" i="0" dirty="0">
-                <a:effectLst/>
-                <a:latin typeface="Helvetica" pitchFamily="2" charset="0"/>
-              </a:rPr>
-              <a:t>ge Positive</a:t>
-            </a:r>
-          </a:p>
-        </p:txBody>
-      </p:sp>
-      <p:pic>
-        <p:nvPicPr>
-          <p:cNvPr id="15650" name="Graphic 15649">
-            <a:extLst>
-              <a:ext uri="{FF2B5EF4-FFF2-40B4-BE49-F238E27FC236}">
-                <a16:creationId xmlns:a16="http://schemas.microsoft.com/office/drawing/2014/main" id="{A066B4DE-396E-E58D-5D45-BFC7D72F81D7}"/>
-              </a:ext>
-            </a:extLst>
-          </p:cNvPr>
-          <p:cNvPicPr>
-            <a:picLocks noChangeAspect="1"/>
-          </p:cNvPicPr>
-          <p:nvPr/>
-        </p:nvPicPr>
-        <p:blipFill rotWithShape="1">
-          <a:blip r:embed="rId15">
-            <a:extLst>
-              <a:ext uri="{28A0092B-C50C-407E-A947-70E740481C1C}">
-                <a14:useLocalDpi xmlns:a14="http://schemas.microsoft.com/office/drawing/2010/main" val="0"/>
-              </a:ext>
-              <a:ext uri="{96DAC541-7B7A-43D3-8B79-37D633B846F1}">
-                <asvg:svgBlip xmlns:asvg="http://schemas.microsoft.com/office/drawing/2016/SVG/main" r:embed="rId16"/>
-              </a:ext>
-            </a:extLst>
-          </a:blip>
-          <a:srcRect l="10653" b="8997"/>
-          <a:stretch/>
-        </p:blipFill>
-        <p:spPr>
-          <a:xfrm>
-            <a:off x="38145721" y="5920531"/>
-            <a:ext cx="5558180" cy="5870860"/>
-          </a:xfrm>
-          <a:prstGeom prst="rect">
-            <a:avLst/>
-          </a:prstGeom>
-        </p:spPr>
-      </p:pic>
-      <p:sp>
-        <p:nvSpPr>
           <p:cNvPr id="15653" name="TextBox 15652">
             <a:extLst>
               <a:ext uri="{FF2B5EF4-FFF2-40B4-BE49-F238E27FC236}">
@@ -10012,7 +8213,7 @@
         </p:nvSpPr>
         <p:spPr>
           <a:xfrm>
-            <a:off x="30959587" y="22061241"/>
+            <a:off x="43891200" y="12531221"/>
             <a:ext cx="12062344" cy="1015663"/>
           </a:xfrm>
           <a:prstGeom prst="rect">
@@ -10026,13 +8227,20 @@
           </a:bodyPr>
           <a:lstStyle/>
           <a:p>
-            <a:pPr algn="l"/>
+            <a:pPr algn="ctr"/>
+            <a:r>
+              <a:rPr lang="en-US" sz="3000" i="0" dirty="0" err="1">
+                <a:effectLst/>
+                <a:latin typeface="Helvetica" pitchFamily="2" charset="0"/>
+              </a:rPr>
+              <a:t>mPFC</a:t>
+            </a:r>
             <a:r>
               <a:rPr lang="en-US" sz="3000" i="0" dirty="0">
                 <a:effectLst/>
                 <a:latin typeface="Helvetica" pitchFamily="2" charset="0"/>
               </a:rPr>
-              <a:t>We found lower ACC activation in older adults than in younger adults when experiencing friend reciprocation.</a:t>
+              <a:t> activation was negatively correlated with age during friend reciprocation</a:t>
             </a:r>
           </a:p>
         </p:txBody>
@@ -10051,8 +8259,8 @@
         </p:nvSpPr>
         <p:spPr>
           <a:xfrm>
-            <a:off x="414903" y="28659366"/>
-            <a:ext cx="6193767" cy="1631216"/>
+            <a:off x="306661" y="25149656"/>
+            <a:ext cx="9825551" cy="3062377"/>
           </a:xfrm>
           <a:prstGeom prst="rect">
             <a:avLst/>
@@ -10065,8 +8273,9 @@
           </a:bodyPr>
           <a:lstStyle/>
           <a:p>
+            <a:pPr algn="ctr"/>
             <a:r>
-              <a:rPr lang="en-US" sz="2500" dirty="0">
+              <a:rPr lang="en-US" sz="2800" dirty="0">
                 <a:effectLst/>
                 <a:latin typeface="Helvetica"/>
                 <a:ea typeface="Times New Roman" panose="02020603050405020304" pitchFamily="18" charset="0"/>
@@ -10075,7 +8284,7 @@
               <a:t>N =</a:t>
             </a:r>
             <a:r>
-              <a:rPr lang="en-US" sz="2500" dirty="0">
+              <a:rPr lang="en-US" sz="2800" dirty="0">
                 <a:latin typeface="Helvetica"/>
                 <a:ea typeface="Times New Roman" panose="02020603050405020304" pitchFamily="18" charset="0"/>
                 <a:cs typeface="Helvetica"/>
@@ -10083,7 +8292,7 @@
               <a:t> 62</a:t>
             </a:r>
             <a:r>
-              <a:rPr lang="en-US" sz="2500" dirty="0">
+              <a:rPr lang="en-US" sz="2800" dirty="0">
                 <a:effectLst/>
                 <a:latin typeface="Helvetica"/>
                 <a:ea typeface="Times New Roman" panose="02020603050405020304" pitchFamily="18" charset="0"/>
@@ -10092,7 +8301,7 @@
               <a:t> </a:t>
             </a:r>
             <a:r>
-              <a:rPr lang="en-US" sz="2500" dirty="0">
+              <a:rPr lang="en-US" sz="2800" dirty="0">
                 <a:latin typeface="Helvetica" pitchFamily="2" charset="0"/>
                 <a:ea typeface="Times New Roman" panose="02020603050405020304" pitchFamily="18" charset="0"/>
                 <a:cs typeface="Helvetica"/>
@@ -10100,7 +8309,7 @@
               <a:t>C</a:t>
             </a:r>
             <a:r>
-              <a:rPr lang="en-US" sz="2500" dirty="0">
+              <a:rPr lang="en-US" sz="2800" dirty="0">
                 <a:effectLst/>
                 <a:latin typeface="Helvetica" pitchFamily="2" charset="0"/>
                 <a:ea typeface="Times New Roman" panose="02020603050405020304" pitchFamily="18" charset="0"/>
@@ -10109,14 +8318,14 @@
               <a:t>ompleted the </a:t>
             </a:r>
             <a:r>
-              <a:rPr lang="en-US" sz="2500" b="0" i="0" dirty="0">
+              <a:rPr lang="en-US" sz="2800" b="0" i="0" dirty="0">
                 <a:effectLst/>
                 <a:latin typeface="Helvetica" pitchFamily="2" charset="0"/>
               </a:rPr>
               <a:t>Inclusion of Other in Self Scale and </a:t>
             </a:r>
             <a:r>
-              <a:rPr lang="en-US" sz="2500" dirty="0">
+              <a:rPr lang="en-US" sz="2800" dirty="0">
                 <a:effectLst/>
                 <a:latin typeface="Helvetica" pitchFamily="2" charset="0"/>
                 <a:ea typeface="Times New Roman" panose="02020603050405020304" pitchFamily="18" charset="0"/>
@@ -10125,11 +8334,46 @@
               <a:t>the </a:t>
             </a:r>
             <a:r>
-              <a:rPr lang="en-US" sz="2500" b="0" i="0" dirty="0">
+              <a:rPr lang="en-US" sz="2800" b="0" i="0" dirty="0">
                 <a:effectLst/>
                 <a:latin typeface="Helvetica" pitchFamily="2" charset="0"/>
               </a:rPr>
               <a:t>Older Adults Financial Exploitation and Vulnerability Scale.</a:t>
+            </a:r>
+          </a:p>
+          <a:p>
+            <a:pPr algn="ctr"/>
+            <a:endParaRPr lang="en-US" sz="2800" dirty="0">
+              <a:latin typeface="Helvetica" pitchFamily="2" charset="0"/>
+              <a:ea typeface="Times New Roman" panose="02020603050405020304" pitchFamily="18" charset="0"/>
+              <a:cs typeface="Helvetica"/>
+            </a:endParaRPr>
+          </a:p>
+          <a:p>
+            <a:pPr algn="ctr"/>
+            <a:r>
+              <a:rPr lang="en-US" sz="2800" dirty="0">
+                <a:latin typeface="Helvetica"/>
+                <a:ea typeface="MS PGothic"/>
+                <a:cs typeface="Helvetica"/>
+              </a:rPr>
+              <a:t>Whole brain results were </a:t>
+            </a:r>
+            <a:r>
+              <a:rPr lang="en-US" sz="2800" dirty="0" err="1">
+                <a:latin typeface="Helvetica"/>
+                <a:ea typeface="MS PGothic"/>
+                <a:cs typeface="Helvetica"/>
+              </a:rPr>
+              <a:t>thresholded</a:t>
+            </a:r>
+            <a:r>
+              <a:rPr lang="en-US" sz="2800" dirty="0">
+                <a:latin typeface="Helvetica"/>
+                <a:ea typeface="MS PGothic"/>
+                <a:cs typeface="Helvetica"/>
+              </a:rPr>
+              <a:t> at Z &gt; 3.1 and Family Wise Error corrected at p &gt; .05</a:t>
             </a:r>
             <a:endParaRPr lang="en-US" sz="2500" dirty="0">
               <a:effectLst/>
@@ -10139,72 +8383,6 @@
             </a:endParaRPr>
           </a:p>
           <a:p>
-            <a:endParaRPr lang="en-US" sz="2500" dirty="0"/>
-          </a:p>
-        </p:txBody>
-      </p:sp>
-      <p:sp>
-        <p:nvSpPr>
-          <p:cNvPr id="15657" name="TextBox 15656">
-            <a:extLst>
-              <a:ext uri="{FF2B5EF4-FFF2-40B4-BE49-F238E27FC236}">
-                <a16:creationId xmlns:a16="http://schemas.microsoft.com/office/drawing/2014/main" id="{180F090C-FBF8-9911-53C2-94323853C5F8}"/>
-              </a:ext>
-            </a:extLst>
-          </p:cNvPr>
-          <p:cNvSpPr txBox="1"/>
-          <p:nvPr/>
-        </p:nvSpPr>
-        <p:spPr>
-          <a:xfrm>
-            <a:off x="6906322" y="28659366"/>
-            <a:ext cx="7257621" cy="1631216"/>
-          </a:xfrm>
-          <a:prstGeom prst="rect">
-            <a:avLst/>
-          </a:prstGeom>
-          <a:noFill/>
-        </p:spPr>
-        <p:txBody>
-          <a:bodyPr wrap="square" rtlCol="0">
-            <a:spAutoFit/>
-          </a:bodyPr>
-          <a:lstStyle/>
-          <a:p>
-            <a:r>
-              <a:rPr lang="en-US" sz="2500" dirty="0">
-                <a:latin typeface="Helvetica"/>
-                <a:ea typeface="MS PGothic"/>
-                <a:cs typeface="Helvetica"/>
-              </a:rPr>
-              <a:t>Whole brain results were </a:t>
-            </a:r>
-            <a:r>
-              <a:rPr lang="en-US" sz="2500" dirty="0" err="1">
-                <a:latin typeface="Helvetica"/>
-                <a:ea typeface="MS PGothic"/>
-                <a:cs typeface="Helvetica"/>
-              </a:rPr>
-              <a:t>thresholded</a:t>
-            </a:r>
-            <a:r>
-              <a:rPr lang="en-US" sz="2500" dirty="0">
-                <a:latin typeface="Helvetica"/>
-                <a:ea typeface="MS PGothic"/>
-                <a:cs typeface="Helvetica"/>
-              </a:rPr>
-              <a:t> at Z &gt; 3.1 and Family Wise Error corrected at p &gt; .05</a:t>
-            </a:r>
-          </a:p>
-          <a:p>
-            <a:r>
-              <a:rPr lang="en-US" sz="2500" dirty="0">
-                <a:latin typeface="Helvetica"/>
-                <a:ea typeface="MS PGothic"/>
-                <a:cs typeface="Helvetica"/>
-              </a:rPr>
-              <a:t>Masks were extracted from Harvard–Oxford and Mars atlases.</a:t>
-            </a:r>
             <a:endParaRPr lang="en-US" sz="2500" dirty="0"/>
           </a:p>
         </p:txBody>
@@ -10223,8 +8401,8 @@
         </p:nvGrpSpPr>
         <p:grpSpPr>
           <a:xfrm>
-            <a:off x="16354965" y="5047450"/>
-            <a:ext cx="5514207" cy="5891751"/>
+            <a:off x="16034879" y="4731272"/>
+            <a:ext cx="6499677" cy="7043851"/>
             <a:chOff x="16270767" y="4773172"/>
             <a:chExt cx="4112536" cy="4273122"/>
           </a:xfrm>
@@ -10244,13 +8422,13 @@
             <p:nvPr/>
           </p:nvPicPr>
           <p:blipFill rotWithShape="1">
-            <a:blip r:embed="rId17">
+            <a:blip r:embed="rId7">
               <a:extLst>
                 <a:ext uri="{28A0092B-C50C-407E-A947-70E740481C1C}">
                   <a14:useLocalDpi xmlns:a14="http://schemas.microsoft.com/office/drawing/2010/main" val="0"/>
                 </a:ext>
                 <a:ext uri="{96DAC541-7B7A-43D3-8B79-37D633B846F1}">
-                  <asvg:svgBlip xmlns:asvg="http://schemas.microsoft.com/office/drawing/2016/SVG/main" r:embed="rId18"/>
+                  <asvg:svgBlip xmlns:asvg="http://schemas.microsoft.com/office/drawing/2016/SVG/main" r:embed="rId8"/>
                 </a:ext>
               </a:extLst>
             </a:blip>
@@ -10422,7 +8600,7 @@
           </p:nvSpPr>
           <p:spPr>
             <a:xfrm>
-              <a:off x="17903802" y="8664303"/>
+              <a:off x="18105047" y="8664303"/>
               <a:ext cx="1069524" cy="369332"/>
             </a:xfrm>
             <a:prstGeom prst="rect">
@@ -10480,85 +8658,1519 @@
           </p:txBody>
         </p:sp>
       </p:grpSp>
-      <p:sp>
-        <p:nvSpPr>
-          <p:cNvPr id="15667" name="Rounded Rectangle 15666">
+      <p:grpSp>
+        <p:nvGrpSpPr>
+          <p:cNvPr id="3" name="Group 2">
             <a:extLst>
               <a:ext uri="{FF2B5EF4-FFF2-40B4-BE49-F238E27FC236}">
-                <a16:creationId xmlns:a16="http://schemas.microsoft.com/office/drawing/2014/main" id="{A04AF92B-DBCA-68B5-49E1-F021F79663D4}"/>
+                <a16:creationId xmlns:a16="http://schemas.microsoft.com/office/drawing/2014/main" id="{FE925EB6-326B-8343-87E7-5F037676B4C3}"/>
               </a:ext>
             </a:extLst>
           </p:cNvPr>
-          <p:cNvSpPr/>
+          <p:cNvGrpSpPr/>
           <p:nvPr/>
-        </p:nvSpPr>
-        <p:spPr bwMode="auto">
+        </p:nvGrpSpPr>
+        <p:grpSpPr>
           <a:xfrm>
-            <a:off x="882727" y="23499130"/>
-            <a:ext cx="3102910" cy="655177"/>
+            <a:off x="485487" y="13108557"/>
+            <a:ext cx="13946934" cy="10995653"/>
+            <a:chOff x="530502" y="15050793"/>
+            <a:chExt cx="13946934" cy="10995653"/>
           </a:xfrm>
-          <a:prstGeom prst="roundRect">
-            <a:avLst/>
-          </a:prstGeom>
-          <a:solidFill>
-            <a:schemeClr val="accent1"/>
-          </a:solidFill>
-          <a:ln w="50800" cap="flat" cmpd="sng" algn="ctr">
+        </p:grpSpPr>
+        <p:grpSp>
+          <p:nvGrpSpPr>
+            <p:cNvPr id="15621" name="Group 15620">
+              <a:extLst>
+                <a:ext uri="{FF2B5EF4-FFF2-40B4-BE49-F238E27FC236}">
+                  <a16:creationId xmlns:a16="http://schemas.microsoft.com/office/drawing/2014/main" id="{5C45E275-5A15-8C98-B9C5-16C75C23860A}"/>
+                </a:ext>
+              </a:extLst>
+            </p:cNvPr>
+            <p:cNvGrpSpPr/>
+            <p:nvPr/>
+          </p:nvGrpSpPr>
+          <p:grpSpPr>
+            <a:xfrm>
+              <a:off x="3779671" y="15989696"/>
+              <a:ext cx="10697765" cy="10056750"/>
+              <a:chOff x="3779671" y="16218296"/>
+              <a:chExt cx="10697765" cy="10056750"/>
+            </a:xfrm>
+          </p:grpSpPr>
+          <p:grpSp>
+            <p:nvGrpSpPr>
+              <p:cNvPr id="15606" name="Group 15605">
+                <a:extLst>
+                  <a:ext uri="{FF2B5EF4-FFF2-40B4-BE49-F238E27FC236}">
+                    <a16:creationId xmlns:a16="http://schemas.microsoft.com/office/drawing/2014/main" id="{B0CC5957-EC01-CDC2-ADAF-5A0141831C57}"/>
+                  </a:ext>
+                </a:extLst>
+              </p:cNvPr>
+              <p:cNvGrpSpPr/>
+              <p:nvPr/>
+            </p:nvGrpSpPr>
+            <p:grpSpPr>
+              <a:xfrm>
+                <a:off x="3779671" y="16218296"/>
+                <a:ext cx="10697765" cy="10056750"/>
+                <a:chOff x="18887859" y="360968"/>
+                <a:chExt cx="6543891" cy="6151778"/>
+              </a:xfrm>
+            </p:grpSpPr>
+            <p:pic>
+              <p:nvPicPr>
+                <p:cNvPr id="15607" name="Picture 15606" descr="A green check mark on a grey background&#10;&#10;Description automatically generated">
+                  <a:extLst>
+                    <a:ext uri="{FF2B5EF4-FFF2-40B4-BE49-F238E27FC236}">
+                      <a16:creationId xmlns:a16="http://schemas.microsoft.com/office/drawing/2014/main" id="{BFD42068-273C-19B5-B61E-D2752FACB16C}"/>
+                    </a:ext>
+                  </a:extLst>
+                </p:cNvPr>
+                <p:cNvPicPr>
+                  <a:picLocks noChangeAspect="1"/>
+                </p:cNvPicPr>
+                <p:nvPr/>
+              </p:nvPicPr>
+              <p:blipFill rotWithShape="1">
+                <a:blip r:embed="rId9"/>
+                <a:srcRect l="14791" t="15087" r="12450" b="22936"/>
+                <a:stretch/>
+              </p:blipFill>
+              <p:spPr>
+                <a:xfrm>
+                  <a:off x="19244972" y="4622666"/>
+                  <a:ext cx="2991981" cy="1890080"/>
+                </a:xfrm>
+                <a:prstGeom prst="rect">
+                  <a:avLst/>
+                </a:prstGeom>
+                <a:solidFill>
+                  <a:srgbClr val="FFFFFF">
+                    <a:shade val="85000"/>
+                  </a:srgbClr>
+                </a:solidFill>
+                <a:ln w="88900" cap="sq">
+                  <a:solidFill>
+                    <a:srgbClr val="C00000"/>
+                  </a:solidFill>
+                  <a:miter lim="800000"/>
+                </a:ln>
+                <a:effectLst>
+                  <a:outerShdw blurRad="55000" dist="18000" dir="5400000" algn="tl" rotWithShape="0">
+                    <a:srgbClr val="000000">
+                      <a:alpha val="40000"/>
+                    </a:srgbClr>
+                  </a:outerShdw>
+                </a:effectLst>
+                <a:scene3d>
+                  <a:camera prst="orthographicFront"/>
+                  <a:lightRig rig="twoPt" dir="t">
+                    <a:rot lat="0" lon="0" rev="7200000"/>
+                  </a:lightRig>
+                </a:scene3d>
+                <a:sp3d>
+                  <a:bevelT w="25400" h="19050"/>
+                  <a:contourClr>
+                    <a:srgbClr val="FFFFFF"/>
+                  </a:contourClr>
+                </a:sp3d>
+              </p:spPr>
+            </p:pic>
+            <p:pic>
+              <p:nvPicPr>
+                <p:cNvPr id="15608" name="Picture 15607" descr="A computer screen shot&#10;&#10;Description automatically generated">
+                  <a:extLst>
+                    <a:ext uri="{FF2B5EF4-FFF2-40B4-BE49-F238E27FC236}">
+                      <a16:creationId xmlns:a16="http://schemas.microsoft.com/office/drawing/2014/main" id="{7AF89E18-68CC-9284-01FB-59B8ECC6A7F3}"/>
+                    </a:ext>
+                  </a:extLst>
+                </p:cNvPr>
+                <p:cNvPicPr>
+                  <a:picLocks noChangeAspect="1"/>
+                </p:cNvPicPr>
+                <p:nvPr/>
+              </p:nvPicPr>
+              <p:blipFill rotWithShape="1">
+                <a:blip r:embed="rId10"/>
+                <a:srcRect l="17658" t="18357" r="18046" b="25816"/>
+                <a:stretch/>
+              </p:blipFill>
+              <p:spPr>
+                <a:xfrm>
+                  <a:off x="22543408" y="4676154"/>
+                  <a:ext cx="2888342" cy="1819031"/>
+                </a:xfrm>
+                <a:prstGeom prst="rect">
+                  <a:avLst/>
+                </a:prstGeom>
+                <a:solidFill>
+                  <a:srgbClr val="FFFFFF">
+                    <a:shade val="85000"/>
+                  </a:srgbClr>
+                </a:solidFill>
+                <a:ln w="88900" cap="sq">
+                  <a:solidFill>
+                    <a:srgbClr val="C00000"/>
+                  </a:solidFill>
+                  <a:miter lim="800000"/>
+                </a:ln>
+                <a:effectLst>
+                  <a:outerShdw blurRad="55000" dist="18000" dir="5400000" algn="tl" rotWithShape="0">
+                    <a:srgbClr val="000000">
+                      <a:alpha val="40000"/>
+                    </a:srgbClr>
+                  </a:outerShdw>
+                </a:effectLst>
+                <a:scene3d>
+                  <a:camera prst="orthographicFront"/>
+                  <a:lightRig rig="twoPt" dir="t">
+                    <a:rot lat="0" lon="0" rev="7200000"/>
+                  </a:lightRig>
+                </a:scene3d>
+                <a:sp3d>
+                  <a:bevelT w="25400" h="19050"/>
+                  <a:contourClr>
+                    <a:srgbClr val="FFFFFF"/>
+                  </a:contourClr>
+                </a:sp3d>
+              </p:spPr>
+            </p:pic>
+            <p:pic>
+              <p:nvPicPr>
+                <p:cNvPr id="15609" name="Picture 15608" descr="A white cross on a gray background&#10;&#10;Description automatically generated">
+                  <a:extLst>
+                    <a:ext uri="{FF2B5EF4-FFF2-40B4-BE49-F238E27FC236}">
+                      <a16:creationId xmlns:a16="http://schemas.microsoft.com/office/drawing/2014/main" id="{A316990F-59C7-631E-47E9-456D55904891}"/>
+                    </a:ext>
+                  </a:extLst>
+                </p:cNvPr>
+                <p:cNvPicPr>
+                  <a:picLocks noChangeAspect="1"/>
+                </p:cNvPicPr>
+                <p:nvPr/>
+              </p:nvPicPr>
+              <p:blipFill rotWithShape="1">
+                <a:blip r:embed="rId11"/>
+                <a:srcRect l="2620" t="7420" r="2620" b="4981"/>
+                <a:stretch/>
+              </p:blipFill>
+              <p:spPr>
+                <a:xfrm>
+                  <a:off x="20965957" y="2971697"/>
+                  <a:ext cx="2848448" cy="1890080"/>
+                </a:xfrm>
+                <a:prstGeom prst="rect">
+                  <a:avLst/>
+                </a:prstGeom>
+                <a:solidFill>
+                  <a:srgbClr val="FFFFFF">
+                    <a:shade val="85000"/>
+                  </a:srgbClr>
+                </a:solidFill>
+                <a:ln w="88900" cap="sq">
+                  <a:solidFill>
+                    <a:srgbClr val="C00000"/>
+                  </a:solidFill>
+                  <a:miter lim="800000"/>
+                </a:ln>
+                <a:effectLst>
+                  <a:outerShdw blurRad="55000" dist="18000" dir="5400000" algn="tl" rotWithShape="0">
+                    <a:srgbClr val="000000">
+                      <a:alpha val="40000"/>
+                    </a:srgbClr>
+                  </a:outerShdw>
+                </a:effectLst>
+                <a:scene3d>
+                  <a:camera prst="orthographicFront"/>
+                  <a:lightRig rig="twoPt" dir="t">
+                    <a:rot lat="0" lon="0" rev="7200000"/>
+                  </a:lightRig>
+                </a:scene3d>
+                <a:sp3d>
+                  <a:bevelT w="25400" h="19050"/>
+                  <a:contourClr>
+                    <a:srgbClr val="FFFFFF"/>
+                  </a:contourClr>
+                </a:sp3d>
+              </p:spPr>
+            </p:pic>
+            <p:pic>
+              <p:nvPicPr>
+                <p:cNvPr id="15610" name="Picture 15609" descr="A grey background with white text&#10;&#10;Description automatically generated">
+                  <a:extLst>
+                    <a:ext uri="{FF2B5EF4-FFF2-40B4-BE49-F238E27FC236}">
+                      <a16:creationId xmlns:a16="http://schemas.microsoft.com/office/drawing/2014/main" id="{E95A9EFF-122D-C651-FDF5-564B82E90BBA}"/>
+                    </a:ext>
+                  </a:extLst>
+                </p:cNvPr>
+                <p:cNvPicPr>
+                  <a:picLocks noChangeAspect="1"/>
+                </p:cNvPicPr>
+                <p:nvPr/>
+              </p:nvPicPr>
+              <p:blipFill>
+                <a:blip r:embed="rId12"/>
+                <a:stretch>
+                  <a:fillRect/>
+                </a:stretch>
+              </p:blipFill>
+              <p:spPr>
+                <a:xfrm>
+                  <a:off x="19926908" y="1639461"/>
+                  <a:ext cx="2848448" cy="1943823"/>
+                </a:xfrm>
+                <a:prstGeom prst="rect">
+                  <a:avLst/>
+                </a:prstGeom>
+                <a:solidFill>
+                  <a:srgbClr val="FFFFFF">
+                    <a:shade val="85000"/>
+                  </a:srgbClr>
+                </a:solidFill>
+                <a:ln w="88900" cap="sq">
+                  <a:solidFill>
+                    <a:srgbClr val="C00000"/>
+                  </a:solidFill>
+                  <a:miter lim="800000"/>
+                </a:ln>
+                <a:effectLst>
+                  <a:outerShdw blurRad="55000" dist="18000" dir="5400000" algn="tl" rotWithShape="0">
+                    <a:srgbClr val="000000">
+                      <a:alpha val="40000"/>
+                    </a:srgbClr>
+                  </a:outerShdw>
+                </a:effectLst>
+                <a:scene3d>
+                  <a:camera prst="orthographicFront"/>
+                  <a:lightRig rig="twoPt" dir="t">
+                    <a:rot lat="0" lon="0" rev="7200000"/>
+                  </a:lightRig>
+                </a:scene3d>
+                <a:sp3d>
+                  <a:bevelT w="25400" h="19050"/>
+                  <a:contourClr>
+                    <a:srgbClr val="FFFFFF"/>
+                  </a:contourClr>
+                </a:sp3d>
+              </p:spPr>
+            </p:pic>
+            <p:pic>
+              <p:nvPicPr>
+                <p:cNvPr id="15611" name="Picture 15610" descr="A computer and a keyboard&#10;&#10;Description automatically generated with medium confidence">
+                  <a:extLst>
+                    <a:ext uri="{FF2B5EF4-FFF2-40B4-BE49-F238E27FC236}">
+                      <a16:creationId xmlns:a16="http://schemas.microsoft.com/office/drawing/2014/main" id="{BD10086D-C152-9AEB-CD34-13177C8F6D4A}"/>
+                    </a:ext>
+                  </a:extLst>
+                </p:cNvPr>
+                <p:cNvPicPr>
+                  <a:picLocks noChangeAspect="1"/>
+                </p:cNvPicPr>
+                <p:nvPr/>
+              </p:nvPicPr>
+              <p:blipFill rotWithShape="1">
+                <a:blip r:embed="rId13"/>
+                <a:srcRect l="2378" t="5420" r="2378" b="9853"/>
+                <a:stretch/>
+              </p:blipFill>
+              <p:spPr>
+                <a:xfrm>
+                  <a:off x="18887859" y="360968"/>
+                  <a:ext cx="2848448" cy="1919430"/>
+                </a:xfrm>
+                <a:prstGeom prst="rect">
+                  <a:avLst/>
+                </a:prstGeom>
+                <a:solidFill>
+                  <a:srgbClr val="FFFFFF">
+                    <a:shade val="85000"/>
+                  </a:srgbClr>
+                </a:solidFill>
+                <a:ln w="88900" cap="sq">
+                  <a:solidFill>
+                    <a:srgbClr val="C00000"/>
+                  </a:solidFill>
+                  <a:miter lim="800000"/>
+                </a:ln>
+                <a:effectLst>
+                  <a:outerShdw blurRad="55000" dist="18000" dir="5400000" algn="tl" rotWithShape="0">
+                    <a:srgbClr val="000000">
+                      <a:alpha val="40000"/>
+                    </a:srgbClr>
+                  </a:outerShdw>
+                </a:effectLst>
+                <a:scene3d>
+                  <a:camera prst="orthographicFront"/>
+                  <a:lightRig rig="twoPt" dir="t">
+                    <a:rot lat="0" lon="0" rev="7200000"/>
+                  </a:lightRig>
+                </a:scene3d>
+                <a:sp3d>
+                  <a:bevelT w="25400" h="19050"/>
+                  <a:contourClr>
+                    <a:srgbClr val="FFFFFF"/>
+                  </a:contourClr>
+                </a:sp3d>
+              </p:spPr>
+            </p:pic>
+            <p:grpSp>
+              <p:nvGrpSpPr>
+                <p:cNvPr id="15612" name="Group 15611">
+                  <a:extLst>
+                    <a:ext uri="{FF2B5EF4-FFF2-40B4-BE49-F238E27FC236}">
+                      <a16:creationId xmlns:a16="http://schemas.microsoft.com/office/drawing/2014/main" id="{60B2107B-4199-FD0C-4076-CA2B2F109B20}"/>
+                    </a:ext>
+                  </a:extLst>
+                </p:cNvPr>
+                <p:cNvGrpSpPr/>
+                <p:nvPr/>
+              </p:nvGrpSpPr>
+              <p:grpSpPr>
+                <a:xfrm>
+                  <a:off x="22071524" y="360968"/>
+                  <a:ext cx="3360226" cy="995434"/>
+                  <a:chOff x="3514264" y="206684"/>
+                  <a:chExt cx="3360226" cy="995434"/>
+                </a:xfrm>
+              </p:grpSpPr>
+              <p:pic>
+                <p:nvPicPr>
+                  <p:cNvPr id="15613" name="Picture 15612">
+                    <a:extLst>
+                      <a:ext uri="{FF2B5EF4-FFF2-40B4-BE49-F238E27FC236}">
+                        <a16:creationId xmlns:a16="http://schemas.microsoft.com/office/drawing/2014/main" id="{8F1F804F-2F4C-1C69-0ED4-456A517A34F3}"/>
+                      </a:ext>
+                    </a:extLst>
+                  </p:cNvPr>
+                  <p:cNvPicPr>
+                    <a:picLocks noChangeAspect="1"/>
+                  </p:cNvPicPr>
+                  <p:nvPr/>
+                </p:nvPicPr>
+                <p:blipFill>
+                  <a:blip r:embed="rId14"/>
+                  <a:stretch>
+                    <a:fillRect/>
+                  </a:stretch>
+                </p:blipFill>
+                <p:spPr>
+                  <a:xfrm>
+                    <a:off x="3514264" y="206684"/>
+                    <a:ext cx="1027916" cy="990673"/>
+                  </a:xfrm>
+                  <a:prstGeom prst="rect">
+                    <a:avLst/>
+                  </a:prstGeom>
+                  <a:solidFill>
+                    <a:srgbClr val="FFFFFF">
+                      <a:shade val="85000"/>
+                    </a:srgbClr>
+                  </a:solidFill>
+                  <a:ln w="88900" cap="sq">
+                    <a:solidFill>
+                      <a:srgbClr val="C00000"/>
+                    </a:solidFill>
+                    <a:miter lim="800000"/>
+                  </a:ln>
+                  <a:effectLst>
+                    <a:outerShdw blurRad="55000" dist="18000" dir="5400000" algn="tl" rotWithShape="0">
+                      <a:srgbClr val="000000">
+                        <a:alpha val="40000"/>
+                      </a:srgbClr>
+                    </a:outerShdw>
+                  </a:effectLst>
+                  <a:scene3d>
+                    <a:camera prst="orthographicFront"/>
+                    <a:lightRig rig="twoPt" dir="t">
+                      <a:rot lat="0" lon="0" rev="7200000"/>
+                    </a:lightRig>
+                  </a:scene3d>
+                  <a:sp3d>
+                    <a:bevelT w="25400" h="19050"/>
+                    <a:contourClr>
+                      <a:srgbClr val="FFFFFF"/>
+                    </a:contourClr>
+                  </a:sp3d>
+                </p:spPr>
+              </p:pic>
+              <p:pic>
+                <p:nvPicPr>
+                  <p:cNvPr id="15614" name="Picture 15613" descr="A grey square with a person's head&#10;&#10;Description automatically generated">
+                    <a:extLst>
+                      <a:ext uri="{FF2B5EF4-FFF2-40B4-BE49-F238E27FC236}">
+                        <a16:creationId xmlns:a16="http://schemas.microsoft.com/office/drawing/2014/main" id="{2172C1AD-5BEC-2CFE-FCB3-472B60E2C225}"/>
+                      </a:ext>
+                    </a:extLst>
+                  </p:cNvPr>
+                  <p:cNvPicPr>
+                    <a:picLocks noChangeAspect="1"/>
+                  </p:cNvPicPr>
+                  <p:nvPr/>
+                </p:nvPicPr>
+                <p:blipFill>
+                  <a:blip r:embed="rId15"/>
+                  <a:stretch>
+                    <a:fillRect/>
+                  </a:stretch>
+                </p:blipFill>
+                <p:spPr>
+                  <a:xfrm>
+                    <a:off x="4717835" y="206684"/>
+                    <a:ext cx="982991" cy="995434"/>
+                  </a:xfrm>
+                  <a:prstGeom prst="rect">
+                    <a:avLst/>
+                  </a:prstGeom>
+                  <a:solidFill>
+                    <a:srgbClr val="FFFFFF">
+                      <a:shade val="85000"/>
+                    </a:srgbClr>
+                  </a:solidFill>
+                  <a:ln w="88900" cap="sq">
+                    <a:solidFill>
+                      <a:srgbClr val="C00000"/>
+                    </a:solidFill>
+                    <a:miter lim="800000"/>
+                  </a:ln>
+                  <a:effectLst>
+                    <a:outerShdw blurRad="55000" dist="18000" dir="5400000" algn="tl" rotWithShape="0">
+                      <a:srgbClr val="000000">
+                        <a:alpha val="40000"/>
+                      </a:srgbClr>
+                    </a:outerShdw>
+                  </a:effectLst>
+                  <a:scene3d>
+                    <a:camera prst="orthographicFront"/>
+                    <a:lightRig rig="twoPt" dir="t">
+                      <a:rot lat="0" lon="0" rev="7200000"/>
+                    </a:lightRig>
+                  </a:scene3d>
+                  <a:sp3d>
+                    <a:bevelT w="25400" h="19050"/>
+                    <a:contourClr>
+                      <a:srgbClr val="FFFFFF"/>
+                    </a:contourClr>
+                  </a:sp3d>
+                </p:spPr>
+              </p:pic>
+              <p:pic>
+                <p:nvPicPr>
+                  <p:cNvPr id="15615" name="Picture 15614" descr="A person with a smile on his face&#10;&#10;Description automatically generated">
+                    <a:extLst>
+                      <a:ext uri="{FF2B5EF4-FFF2-40B4-BE49-F238E27FC236}">
+                        <a16:creationId xmlns:a16="http://schemas.microsoft.com/office/drawing/2014/main" id="{7957BC4D-151A-EB1E-5CAE-777FF2B16B20}"/>
+                      </a:ext>
+                    </a:extLst>
+                  </p:cNvPr>
+                  <p:cNvPicPr>
+                    <a:picLocks noChangeAspect="1"/>
+                  </p:cNvPicPr>
+                  <p:nvPr/>
+                </p:nvPicPr>
+                <p:blipFill>
+                  <a:blip r:embed="rId16"/>
+                  <a:stretch>
+                    <a:fillRect/>
+                  </a:stretch>
+                </p:blipFill>
+                <p:spPr>
+                  <a:xfrm>
+                    <a:off x="5883817" y="206684"/>
+                    <a:ext cx="990673" cy="990673"/>
+                  </a:xfrm>
+                  <a:prstGeom prst="rect">
+                    <a:avLst/>
+                  </a:prstGeom>
+                  <a:solidFill>
+                    <a:srgbClr val="FFFFFF">
+                      <a:shade val="85000"/>
+                    </a:srgbClr>
+                  </a:solidFill>
+                  <a:ln w="88900" cap="sq">
+                    <a:solidFill>
+                      <a:srgbClr val="C00000"/>
+                    </a:solidFill>
+                    <a:miter lim="800000"/>
+                  </a:ln>
+                  <a:effectLst>
+                    <a:outerShdw blurRad="55000" dist="18000" dir="5400000" algn="tl" rotWithShape="0">
+                      <a:srgbClr val="000000">
+                        <a:alpha val="40000"/>
+                      </a:srgbClr>
+                    </a:outerShdw>
+                  </a:effectLst>
+                  <a:scene3d>
+                    <a:camera prst="orthographicFront"/>
+                    <a:lightRig rig="twoPt" dir="t">
+                      <a:rot lat="0" lon="0" rev="7200000"/>
+                    </a:lightRig>
+                  </a:scene3d>
+                  <a:sp3d>
+                    <a:bevelT w="25400" h="19050"/>
+                    <a:contourClr>
+                      <a:srgbClr val="FFFFFF"/>
+                    </a:contourClr>
+                  </a:sp3d>
+                </p:spPr>
+              </p:pic>
+            </p:grpSp>
+          </p:grpSp>
+          <p:sp>
+            <p:nvSpPr>
+              <p:cNvPr id="15616" name="Rectangle 15615">
+                <a:extLst>
+                  <a:ext uri="{FF2B5EF4-FFF2-40B4-BE49-F238E27FC236}">
+                    <a16:creationId xmlns:a16="http://schemas.microsoft.com/office/drawing/2014/main" id="{946783DC-D597-2C29-6191-5B3893CFCF5D}"/>
+                  </a:ext>
+                </a:extLst>
+              </p:cNvPr>
+              <p:cNvSpPr/>
+              <p:nvPr/>
+            </p:nvSpPr>
+            <p:spPr bwMode="auto">
+              <a:xfrm>
+                <a:off x="4019981" y="18563950"/>
+                <a:ext cx="1803026" cy="552682"/>
+              </a:xfrm>
+              <a:prstGeom prst="rect">
+                <a:avLst/>
+              </a:prstGeom>
+              <a:solidFill>
+                <a:srgbClr val="848484"/>
+              </a:solidFill>
+              <a:ln w="9525" cap="flat" cmpd="sng" algn="ctr">
+                <a:noFill/>
+                <a:prstDash val="solid"/>
+                <a:round/>
+                <a:headEnd type="none" w="med" len="med"/>
+                <a:tailEnd type="none" w="med" len="med"/>
+              </a:ln>
+              <a:effectLst/>
+            </p:spPr>
+            <p:txBody>
+              <a:bodyPr vert="horz" wrap="square" lIns="91440" tIns="45720" rIns="91440" bIns="45720" numCol="1" rtlCol="0" anchor="t" anchorCtr="0" compatLnSpc="1">
+                <a:prstTxWarp prst="textNoShape">
+                  <a:avLst/>
+                </a:prstTxWarp>
+              </a:bodyPr>
+              <a:lstStyle/>
+              <a:p>
+                <a:pPr marL="0" marR="0" indent="0" algn="l" defTabSz="4389438" rtl="0" eaLnBrk="1" fontAlgn="base" latinLnBrk="0" hangingPunct="1">
+                  <a:lnSpc>
+                    <a:spcPct val="100000"/>
+                  </a:lnSpc>
+                  <a:spcBef>
+                    <a:spcPct val="0"/>
+                  </a:spcBef>
+                  <a:spcAft>
+                    <a:spcPct val="0"/>
+                  </a:spcAft>
+                  <a:buClrTx/>
+                  <a:buSzTx/>
+                  <a:buFontTx/>
+                  <a:buNone/>
+                  <a:tabLst/>
+                </a:pPr>
+                <a:r>
+                  <a:rPr kumimoji="0" lang="en-US" sz="3000" b="0" i="0" u="none" strike="noStrike" cap="none" normalizeH="0" baseline="0" dirty="0">
+                    <a:ln>
+                      <a:noFill/>
+                    </a:ln>
+                    <a:solidFill>
+                      <a:schemeClr val="bg1"/>
+                    </a:solidFill>
+                    <a:effectLst/>
+                    <a:latin typeface="Arial" charset="0"/>
+                    <a:cs typeface="Arial" charset="0"/>
+                  </a:rPr>
+                  <a:t>Share $8</a:t>
+                </a:r>
+              </a:p>
+            </p:txBody>
+          </p:sp>
+          <p:sp>
+            <p:nvSpPr>
+              <p:cNvPr id="15618" name="Rectangle 15617">
+                <a:extLst>
+                  <a:ext uri="{FF2B5EF4-FFF2-40B4-BE49-F238E27FC236}">
+                    <a16:creationId xmlns:a16="http://schemas.microsoft.com/office/drawing/2014/main" id="{C6024063-9D2C-50D8-70B5-FC3D7C6F49F8}"/>
+                  </a:ext>
+                </a:extLst>
+              </p:cNvPr>
+              <p:cNvSpPr/>
+              <p:nvPr/>
+            </p:nvSpPr>
+            <p:spPr bwMode="auto">
+              <a:xfrm>
+                <a:off x="6502102" y="18568097"/>
+                <a:ext cx="1803026" cy="552682"/>
+              </a:xfrm>
+              <a:prstGeom prst="rect">
+                <a:avLst/>
+              </a:prstGeom>
+              <a:solidFill>
+                <a:srgbClr val="848484"/>
+              </a:solidFill>
+              <a:ln w="9525" cap="flat" cmpd="sng" algn="ctr">
+                <a:noFill/>
+                <a:prstDash val="solid"/>
+                <a:round/>
+                <a:headEnd type="none" w="med" len="med"/>
+                <a:tailEnd type="none" w="med" len="med"/>
+              </a:ln>
+              <a:effectLst/>
+            </p:spPr>
+            <p:txBody>
+              <a:bodyPr vert="horz" wrap="square" lIns="91440" tIns="45720" rIns="91440" bIns="45720" numCol="1" rtlCol="0" anchor="t" anchorCtr="0" compatLnSpc="1">
+                <a:prstTxWarp prst="textNoShape">
+                  <a:avLst/>
+                </a:prstTxWarp>
+              </a:bodyPr>
+              <a:lstStyle/>
+              <a:p>
+                <a:pPr marL="0" marR="0" indent="0" algn="l" defTabSz="4389438" rtl="0" eaLnBrk="1" fontAlgn="base" latinLnBrk="0" hangingPunct="1">
+                  <a:lnSpc>
+                    <a:spcPct val="100000"/>
+                  </a:lnSpc>
+                  <a:spcBef>
+                    <a:spcPct val="0"/>
+                  </a:spcBef>
+                  <a:spcAft>
+                    <a:spcPct val="0"/>
+                  </a:spcAft>
+                  <a:buClrTx/>
+                  <a:buSzTx/>
+                  <a:buFontTx/>
+                  <a:buNone/>
+                  <a:tabLst/>
+                </a:pPr>
+                <a:r>
+                  <a:rPr kumimoji="0" lang="en-US" sz="3000" b="0" i="0" u="none" strike="noStrike" cap="none" normalizeH="0" baseline="0" dirty="0">
+                    <a:ln>
+                      <a:noFill/>
+                    </a:ln>
+                    <a:solidFill>
+                      <a:schemeClr val="bg1"/>
+                    </a:solidFill>
+                    <a:effectLst/>
+                    <a:latin typeface="Arial" charset="0"/>
+                    <a:cs typeface="Arial" charset="0"/>
+                  </a:rPr>
+                  <a:t>Share $2</a:t>
+                </a:r>
+              </a:p>
+            </p:txBody>
+          </p:sp>
+          <p:sp>
+            <p:nvSpPr>
+              <p:cNvPr id="15619" name="Rectangle 15618">
+                <a:extLst>
+                  <a:ext uri="{FF2B5EF4-FFF2-40B4-BE49-F238E27FC236}">
+                    <a16:creationId xmlns:a16="http://schemas.microsoft.com/office/drawing/2014/main" id="{8EBB5886-1680-B3C7-DEC7-CD388B0CA60C}"/>
+                  </a:ext>
+                </a:extLst>
+              </p:cNvPr>
+              <p:cNvSpPr/>
+              <p:nvPr/>
+            </p:nvSpPr>
+            <p:spPr bwMode="auto">
+              <a:xfrm>
+                <a:off x="7005674" y="19674283"/>
+                <a:ext cx="1978245" cy="552682"/>
+              </a:xfrm>
+              <a:prstGeom prst="rect">
+                <a:avLst/>
+              </a:prstGeom>
+              <a:solidFill>
+                <a:srgbClr val="848484"/>
+              </a:solidFill>
+              <a:ln w="9525" cap="flat" cmpd="sng" algn="ctr">
+                <a:noFill/>
+                <a:prstDash val="solid"/>
+                <a:round/>
+                <a:headEnd type="none" w="med" len="med"/>
+                <a:tailEnd type="none" w="med" len="med"/>
+              </a:ln>
+              <a:effectLst/>
+            </p:spPr>
+            <p:txBody>
+              <a:bodyPr vert="horz" wrap="square" lIns="91440" tIns="45720" rIns="91440" bIns="45720" numCol="1" rtlCol="0" anchor="t" anchorCtr="0" compatLnSpc="1">
+                <a:prstTxWarp prst="textNoShape">
+                  <a:avLst/>
+                </a:prstTxWarp>
+              </a:bodyPr>
+              <a:lstStyle/>
+              <a:p>
+                <a:pPr marL="0" marR="0" indent="0" algn="l" defTabSz="4389438" rtl="0" eaLnBrk="1" fontAlgn="base" latinLnBrk="0" hangingPunct="1">
+                  <a:lnSpc>
+                    <a:spcPct val="100000"/>
+                  </a:lnSpc>
+                  <a:spcBef>
+                    <a:spcPct val="0"/>
+                  </a:spcBef>
+                  <a:spcAft>
+                    <a:spcPct val="0"/>
+                  </a:spcAft>
+                  <a:buClrTx/>
+                  <a:buSzTx/>
+                  <a:buFontTx/>
+                  <a:buNone/>
+                  <a:tabLst/>
+                </a:pPr>
+                <a:r>
+                  <a:rPr kumimoji="0" lang="en-US" sz="3000" b="0" i="0" u="none" strike="noStrike" cap="none" normalizeH="0" baseline="0" dirty="0">
+                    <a:ln>
+                      <a:noFill/>
+                    </a:ln>
+                    <a:solidFill>
+                      <a:schemeClr val="bg1"/>
+                    </a:solidFill>
+                    <a:effectLst/>
+                    <a:latin typeface="Arial" charset="0"/>
+                    <a:cs typeface="Arial" charset="0"/>
+                  </a:rPr>
+                  <a:t>Loading…</a:t>
+                </a:r>
+              </a:p>
+            </p:txBody>
+          </p:sp>
+          <p:sp>
+            <p:nvSpPr>
+              <p:cNvPr id="15620" name="Rectangle 15619">
+                <a:extLst>
+                  <a:ext uri="{FF2B5EF4-FFF2-40B4-BE49-F238E27FC236}">
+                    <a16:creationId xmlns:a16="http://schemas.microsoft.com/office/drawing/2014/main" id="{98A52E85-D70D-5398-4E75-D523A6EBBF49}"/>
+                  </a:ext>
+                </a:extLst>
+              </p:cNvPr>
+              <p:cNvSpPr/>
+              <p:nvPr/>
+            </p:nvSpPr>
+            <p:spPr bwMode="auto">
+              <a:xfrm>
+                <a:off x="9139048" y="21549198"/>
+                <a:ext cx="704737" cy="718761"/>
+              </a:xfrm>
+              <a:prstGeom prst="rect">
+                <a:avLst/>
+              </a:prstGeom>
+              <a:solidFill>
+                <a:srgbClr val="848484"/>
+              </a:solidFill>
+              <a:ln w="9525" cap="flat" cmpd="sng" algn="ctr">
+                <a:noFill/>
+                <a:prstDash val="solid"/>
+                <a:round/>
+                <a:headEnd type="none" w="med" len="med"/>
+                <a:tailEnd type="none" w="med" len="med"/>
+              </a:ln>
+              <a:effectLst/>
+            </p:spPr>
+            <p:txBody>
+              <a:bodyPr vert="horz" wrap="square" lIns="91440" tIns="45720" rIns="91440" bIns="45720" numCol="1" rtlCol="0" anchor="t" anchorCtr="0" compatLnSpc="1">
+                <a:prstTxWarp prst="textNoShape">
+                  <a:avLst/>
+                </a:prstTxWarp>
+              </a:bodyPr>
+              <a:lstStyle/>
+              <a:p>
+                <a:pPr marL="0" marR="0" indent="0" algn="ctr" defTabSz="4389438" rtl="0" eaLnBrk="1" fontAlgn="base" latinLnBrk="0" hangingPunct="1">
+                  <a:lnSpc>
+                    <a:spcPct val="100000"/>
+                  </a:lnSpc>
+                  <a:spcBef>
+                    <a:spcPct val="0"/>
+                  </a:spcBef>
+                  <a:spcAft>
+                    <a:spcPct val="0"/>
+                  </a:spcAft>
+                  <a:buClrTx/>
+                  <a:buSzTx/>
+                  <a:buFontTx/>
+                  <a:buNone/>
+                  <a:tabLst/>
+                </a:pPr>
+                <a:r>
+                  <a:rPr kumimoji="0" lang="en-US" sz="5000" b="0" i="0" u="none" strike="noStrike" cap="none" normalizeH="0" baseline="0" dirty="0">
+                    <a:ln>
+                      <a:noFill/>
+                    </a:ln>
+                    <a:solidFill>
+                      <a:schemeClr val="bg1"/>
+                    </a:solidFill>
+                    <a:effectLst/>
+                    <a:latin typeface="Arial" charset="0"/>
+                    <a:cs typeface="Arial" charset="0"/>
+                  </a:rPr>
+                  <a:t>+</a:t>
+                </a:r>
+              </a:p>
+            </p:txBody>
+          </p:sp>
+        </p:grpSp>
+        <p:sp>
+          <p:nvSpPr>
+            <p:cNvPr id="15429" name="Rounded Rectangle 15428">
+              <a:extLst>
+                <a:ext uri="{FF2B5EF4-FFF2-40B4-BE49-F238E27FC236}">
+                  <a16:creationId xmlns:a16="http://schemas.microsoft.com/office/drawing/2014/main" id="{4B7D9A17-B83C-E5E9-1709-3AF83FDD5AD6}"/>
+                </a:ext>
+              </a:extLst>
+            </p:cNvPr>
+            <p:cNvSpPr/>
+            <p:nvPr/>
+          </p:nvSpPr>
+          <p:spPr bwMode="auto">
+            <a:xfrm>
+              <a:off x="530502" y="15050793"/>
+              <a:ext cx="6101659" cy="707229"/>
+            </a:xfrm>
+            <a:prstGeom prst="roundRect">
+              <a:avLst/>
+            </a:prstGeom>
             <a:solidFill>
-              <a:schemeClr val="tx1"/>
+              <a:schemeClr val="accent1"/>
             </a:solidFill>
-            <a:prstDash val="solid"/>
-            <a:round/>
-            <a:headEnd type="none" w="med" len="med"/>
-            <a:tailEnd type="none" w="med" len="med"/>
-          </a:ln>
-          <a:effectLst/>
-        </p:spPr>
-        <p:txBody>
-          <a:bodyPr vert="horz" wrap="square" lIns="91440" tIns="45720" rIns="91440" bIns="45720" numCol="1" rtlCol="0" anchor="t" anchorCtr="0" compatLnSpc="1">
-            <a:prstTxWarp prst="textNoShape">
-              <a:avLst/>
-            </a:prstTxWarp>
-          </a:bodyPr>
-          <a:lstStyle/>
-          <a:p>
-            <a:pPr defTabSz="4389438" eaLnBrk="1" hangingPunct="1"/>
-            <a:r>
-              <a:rPr lang="en-US" sz="3000" dirty="0"/>
-              <a:t>Outcome Phase</a:t>
-            </a:r>
-          </a:p>
-          <a:p>
-            <a:pPr marL="0" marR="0" indent="0" algn="l" defTabSz="4389438" rtl="0" eaLnBrk="1" fontAlgn="base" latinLnBrk="0" hangingPunct="1">
-              <a:lnSpc>
-                <a:spcPct val="100000"/>
-              </a:lnSpc>
-              <a:spcBef>
-                <a:spcPct val="0"/>
-              </a:spcBef>
-              <a:spcAft>
-                <a:spcPct val="0"/>
-              </a:spcAft>
-              <a:buClrTx/>
-              <a:buSzTx/>
-              <a:buFontTx/>
-              <a:buNone/>
-              <a:tabLst/>
-            </a:pPr>
-            <a:endParaRPr kumimoji="0" lang="en-US" sz="1800" b="0" i="0" u="none" strike="noStrike" cap="none" normalizeH="0" baseline="0" dirty="0">
-              <a:ln>
-                <a:noFill/>
-              </a:ln>
+            <a:ln w="50800" cap="flat" cmpd="sng" algn="ctr">
               <a:solidFill>
                 <a:schemeClr val="tx1"/>
               </a:solidFill>
+              <a:prstDash val="solid"/>
+              <a:round/>
+              <a:headEnd type="none" w="med" len="med"/>
+              <a:tailEnd type="none" w="med" len="med"/>
+            </a:ln>
+            <a:effectLst/>
+          </p:spPr>
+          <p:txBody>
+            <a:bodyPr vert="horz" wrap="square" lIns="91440" tIns="45720" rIns="91440" bIns="45720" numCol="1" rtlCol="0" anchor="t" anchorCtr="0" compatLnSpc="1">
+              <a:prstTxWarp prst="textNoShape">
+                <a:avLst/>
+              </a:prstTxWarp>
+            </a:bodyPr>
+            <a:lstStyle/>
+            <a:p>
+              <a:pPr algn="ctr" defTabSz="4389438" eaLnBrk="1" hangingPunct="1"/>
+              <a:r>
+                <a:rPr lang="en-US" sz="3500" u="sng" dirty="0"/>
+                <a:t>You are given </a:t>
+              </a:r>
+              <a:r>
+                <a:rPr lang="en-US" sz="3500" b="1" u="sng" dirty="0"/>
+                <a:t>$8</a:t>
+              </a:r>
+              <a:r>
+                <a:rPr lang="en-US" sz="3500" u="sng" dirty="0"/>
+                <a:t> for the trial. </a:t>
+              </a:r>
+            </a:p>
+            <a:p>
+              <a:pPr marL="0" marR="0" indent="0" algn="l" defTabSz="4389438" rtl="0" eaLnBrk="1" fontAlgn="base" latinLnBrk="0" hangingPunct="1">
+                <a:lnSpc>
+                  <a:spcPct val="100000"/>
+                </a:lnSpc>
+                <a:spcBef>
+                  <a:spcPct val="0"/>
+                </a:spcBef>
+                <a:spcAft>
+                  <a:spcPct val="0"/>
+                </a:spcAft>
+                <a:buClrTx/>
+                <a:buSzTx/>
+                <a:buFontTx/>
+                <a:buNone/>
+                <a:tabLst/>
+              </a:pPr>
+              <a:endParaRPr kumimoji="0" lang="en-US" sz="1800" b="0" i="0" u="none" strike="noStrike" cap="none" normalizeH="0" baseline="0" dirty="0">
+                <a:ln>
+                  <a:noFill/>
+                </a:ln>
+                <a:solidFill>
+                  <a:schemeClr val="tx1"/>
+                </a:solidFill>
+                <a:effectLst/>
+                <a:latin typeface="Arial" charset="0"/>
+                <a:cs typeface="Arial" charset="0"/>
+              </a:endParaRPr>
+            </a:p>
+          </p:txBody>
+        </p:sp>
+        <p:grpSp>
+          <p:nvGrpSpPr>
+            <p:cNvPr id="15592" name="Group 15591">
+              <a:extLst>
+                <a:ext uri="{FF2B5EF4-FFF2-40B4-BE49-F238E27FC236}">
+                  <a16:creationId xmlns:a16="http://schemas.microsoft.com/office/drawing/2014/main" id="{415B0EBC-8379-F485-6113-E5DF57F87E19}"/>
+                </a:ext>
+              </a:extLst>
+            </p:cNvPr>
+            <p:cNvGrpSpPr/>
+            <p:nvPr/>
+          </p:nvGrpSpPr>
+          <p:grpSpPr>
+            <a:xfrm>
+              <a:off x="1977783" y="21512239"/>
+              <a:ext cx="4758168" cy="1323439"/>
+              <a:chOff x="1599411" y="21740839"/>
+              <a:chExt cx="4758168" cy="1323439"/>
+            </a:xfrm>
+          </p:grpSpPr>
+          <p:sp>
+            <p:nvSpPr>
+              <p:cNvPr id="52" name="TextBox 51">
+                <a:extLst>
+                  <a:ext uri="{FF2B5EF4-FFF2-40B4-BE49-F238E27FC236}">
+                    <a16:creationId xmlns:a16="http://schemas.microsoft.com/office/drawing/2014/main" id="{4707B45F-027B-576B-4808-66F0A5D95489}"/>
+                  </a:ext>
+                </a:extLst>
+              </p:cNvPr>
+              <p:cNvSpPr txBox="1"/>
+              <p:nvPr/>
+            </p:nvSpPr>
+            <p:spPr>
+              <a:xfrm>
+                <a:off x="5031575" y="21740839"/>
+                <a:ext cx="1326004" cy="1323439"/>
+              </a:xfrm>
+              <a:prstGeom prst="rect">
+                <a:avLst/>
+              </a:prstGeom>
+              <a:noFill/>
+            </p:spPr>
+            <p:txBody>
+              <a:bodyPr wrap="none" rtlCol="0">
+                <a:spAutoFit/>
+              </a:bodyPr>
+              <a:lstStyle/>
+              <a:p>
+                <a:r>
+                  <a:rPr lang="en-US" sz="8000" b="1" dirty="0">
+                    <a:solidFill>
+                      <a:srgbClr val="03DF04"/>
+                    </a:solidFill>
+                  </a:rPr>
+                  <a:t>x3</a:t>
+                </a:r>
+              </a:p>
+            </p:txBody>
+          </p:sp>
+          <p:sp>
+            <p:nvSpPr>
+              <p:cNvPr id="15433" name="Rounded Rectangle 15432">
+                <a:extLst>
+                  <a:ext uri="{FF2B5EF4-FFF2-40B4-BE49-F238E27FC236}">
+                    <a16:creationId xmlns:a16="http://schemas.microsoft.com/office/drawing/2014/main" id="{9D770554-0135-2E8B-9BC3-8228F9631C8A}"/>
+                  </a:ext>
+                </a:extLst>
+              </p:cNvPr>
+              <p:cNvSpPr/>
+              <p:nvPr/>
+            </p:nvSpPr>
+            <p:spPr bwMode="auto">
+              <a:xfrm>
+                <a:off x="1599411" y="21817902"/>
+                <a:ext cx="2967279" cy="1168944"/>
+              </a:xfrm>
+              <a:prstGeom prst="roundRect">
+                <a:avLst/>
+              </a:prstGeom>
+              <a:solidFill>
+                <a:schemeClr val="accent1"/>
+              </a:solidFill>
+              <a:ln w="50800" cap="flat" cmpd="sng" algn="ctr">
+                <a:solidFill>
+                  <a:schemeClr val="tx1"/>
+                </a:solidFill>
+                <a:prstDash val="solid"/>
+                <a:round/>
+                <a:headEnd type="none" w="med" len="med"/>
+                <a:tailEnd type="none" w="med" len="med"/>
+              </a:ln>
               <a:effectLst/>
-              <a:latin typeface="Arial" charset="0"/>
-              <a:cs typeface="Arial" charset="0"/>
-            </a:endParaRPr>
-          </a:p>
-        </p:txBody>
-      </p:sp>
+            </p:spPr>
+            <p:txBody>
+              <a:bodyPr vert="horz" wrap="square" lIns="91440" tIns="45720" rIns="91440" bIns="45720" numCol="1" rtlCol="0" anchor="t" anchorCtr="0" compatLnSpc="1">
+                <a:prstTxWarp prst="textNoShape">
+                  <a:avLst/>
+                </a:prstTxWarp>
+              </a:bodyPr>
+              <a:lstStyle/>
+              <a:p>
+                <a:pPr algn="ctr" defTabSz="4389438" eaLnBrk="1" hangingPunct="1"/>
+                <a:r>
+                  <a:rPr lang="en-US" sz="3000" dirty="0"/>
+                  <a:t>The money you  sent is tripled</a:t>
+                </a:r>
+              </a:p>
+              <a:p>
+                <a:pPr marL="0" marR="0" indent="0" algn="l" defTabSz="4389438" rtl="0" eaLnBrk="1" fontAlgn="base" latinLnBrk="0" hangingPunct="1">
+                  <a:lnSpc>
+                    <a:spcPct val="100000"/>
+                  </a:lnSpc>
+                  <a:spcBef>
+                    <a:spcPct val="0"/>
+                  </a:spcBef>
+                  <a:spcAft>
+                    <a:spcPct val="0"/>
+                  </a:spcAft>
+                  <a:buClrTx/>
+                  <a:buSzTx/>
+                  <a:buFontTx/>
+                  <a:buNone/>
+                  <a:tabLst/>
+                </a:pPr>
+                <a:endParaRPr kumimoji="0" lang="en-US" sz="1800" b="0" i="0" u="none" strike="noStrike" cap="none" normalizeH="0" baseline="0" dirty="0">
+                  <a:ln>
+                    <a:noFill/>
+                  </a:ln>
+                  <a:solidFill>
+                    <a:schemeClr val="tx1"/>
+                  </a:solidFill>
+                  <a:effectLst/>
+                  <a:latin typeface="Arial" charset="0"/>
+                  <a:cs typeface="Arial" charset="0"/>
+                </a:endParaRPr>
+              </a:p>
+            </p:txBody>
+          </p:sp>
+        </p:grpSp>
+        <p:grpSp>
+          <p:nvGrpSpPr>
+            <p:cNvPr id="15490" name="Group 15489">
+              <a:extLst>
+                <a:ext uri="{FF2B5EF4-FFF2-40B4-BE49-F238E27FC236}">
+                  <a16:creationId xmlns:a16="http://schemas.microsoft.com/office/drawing/2014/main" id="{26CF14B9-FE18-01D5-1A0A-E19BE8376A0A}"/>
+                </a:ext>
+              </a:extLst>
+            </p:cNvPr>
+            <p:cNvGrpSpPr/>
+            <p:nvPr/>
+          </p:nvGrpSpPr>
+          <p:grpSpPr>
+            <a:xfrm>
+              <a:off x="530502" y="18979791"/>
+              <a:ext cx="4534151" cy="2464546"/>
+              <a:chOff x="533974" y="18532980"/>
+              <a:chExt cx="4534151" cy="2464546"/>
+            </a:xfrm>
+          </p:grpSpPr>
+          <p:sp>
+            <p:nvSpPr>
+              <p:cNvPr id="15432" name="Rounded Rectangle 15431">
+                <a:extLst>
+                  <a:ext uri="{FF2B5EF4-FFF2-40B4-BE49-F238E27FC236}">
+                    <a16:creationId xmlns:a16="http://schemas.microsoft.com/office/drawing/2014/main" id="{29E5F4B4-9ECB-A12A-6B3F-C0855A0CDE34}"/>
+                  </a:ext>
+                </a:extLst>
+              </p:cNvPr>
+              <p:cNvSpPr/>
+              <p:nvPr/>
+            </p:nvSpPr>
+            <p:spPr bwMode="auto">
+              <a:xfrm>
+                <a:off x="533974" y="19334093"/>
+                <a:ext cx="4534151" cy="1663433"/>
+              </a:xfrm>
+              <a:prstGeom prst="roundRect">
+                <a:avLst/>
+              </a:prstGeom>
+              <a:solidFill>
+                <a:schemeClr val="accent1"/>
+              </a:solidFill>
+              <a:ln w="50800" cap="flat" cmpd="sng" algn="ctr">
+                <a:solidFill>
+                  <a:schemeClr val="tx1"/>
+                </a:solidFill>
+                <a:prstDash val="solid"/>
+                <a:round/>
+                <a:headEnd type="none" w="med" len="med"/>
+                <a:tailEnd type="none" w="med" len="med"/>
+              </a:ln>
+              <a:effectLst/>
+            </p:spPr>
+            <p:txBody>
+              <a:bodyPr vert="horz" wrap="square" lIns="91440" tIns="45720" rIns="91440" bIns="45720" numCol="1" rtlCol="0" anchor="t" anchorCtr="0" compatLnSpc="1">
+                <a:prstTxWarp prst="textNoShape">
+                  <a:avLst/>
+                </a:prstTxWarp>
+              </a:bodyPr>
+              <a:lstStyle/>
+              <a:p>
+                <a:pPr algn="ctr" defTabSz="4389438" eaLnBrk="1" hangingPunct="1"/>
+                <a:r>
+                  <a:rPr lang="en-US" sz="3000" dirty="0"/>
+                  <a:t>You choose a higher or lower amount to share with your partner.</a:t>
+                </a:r>
+              </a:p>
+              <a:p>
+                <a:pPr marL="0" marR="0" indent="0" algn="l" defTabSz="4389438" rtl="0" eaLnBrk="1" fontAlgn="base" latinLnBrk="0" hangingPunct="1">
+                  <a:lnSpc>
+                    <a:spcPct val="100000"/>
+                  </a:lnSpc>
+                  <a:spcBef>
+                    <a:spcPct val="0"/>
+                  </a:spcBef>
+                  <a:spcAft>
+                    <a:spcPct val="0"/>
+                  </a:spcAft>
+                  <a:buClrTx/>
+                  <a:buSzTx/>
+                  <a:buFontTx/>
+                  <a:buNone/>
+                  <a:tabLst/>
+                </a:pPr>
+                <a:endParaRPr kumimoji="0" lang="en-US" sz="1800" b="0" i="0" u="none" strike="noStrike" cap="none" normalizeH="0" baseline="0" dirty="0">
+                  <a:ln>
+                    <a:noFill/>
+                  </a:ln>
+                  <a:solidFill>
+                    <a:schemeClr val="tx1"/>
+                  </a:solidFill>
+                  <a:effectLst/>
+                  <a:latin typeface="Arial" charset="0"/>
+                  <a:cs typeface="Arial" charset="0"/>
+                </a:endParaRPr>
+              </a:p>
+            </p:txBody>
+          </p:sp>
+          <p:cxnSp>
+            <p:nvCxnSpPr>
+              <p:cNvPr id="15442" name="Elbow Connector 15441">
+                <a:extLst>
+                  <a:ext uri="{FF2B5EF4-FFF2-40B4-BE49-F238E27FC236}">
+                    <a16:creationId xmlns:a16="http://schemas.microsoft.com/office/drawing/2014/main" id="{FD357802-D2BB-A2AC-2582-D36E431D92F1}"/>
+                  </a:ext>
+                </a:extLst>
+              </p:cNvPr>
+              <p:cNvCxnSpPr>
+                <a:cxnSpLocks/>
+              </p:cNvCxnSpPr>
+              <p:nvPr/>
+            </p:nvCxnSpPr>
+            <p:spPr bwMode="auto">
+              <a:xfrm flipV="1">
+                <a:off x="2361558" y="18532980"/>
+                <a:ext cx="953880" cy="801113"/>
+              </a:xfrm>
+              <a:prstGeom prst="bentConnector3">
+                <a:avLst>
+                  <a:gd name="adj1" fmla="val -3922"/>
+                </a:avLst>
+              </a:prstGeom>
+              <a:solidFill>
+                <a:schemeClr val="accent1"/>
+              </a:solidFill>
+              <a:ln w="50800" cap="flat" cmpd="sng" algn="ctr">
+                <a:solidFill>
+                  <a:schemeClr val="tx1"/>
+                </a:solidFill>
+                <a:prstDash val="solid"/>
+                <a:round/>
+                <a:headEnd type="none" w="med" len="med"/>
+                <a:tailEnd type="triangle"/>
+              </a:ln>
+              <a:effectLst/>
+            </p:spPr>
+          </p:cxnSp>
+        </p:grpSp>
+        <p:grpSp>
+          <p:nvGrpSpPr>
+            <p:cNvPr id="15538" name="Group 15537">
+              <a:extLst>
+                <a:ext uri="{FF2B5EF4-FFF2-40B4-BE49-F238E27FC236}">
+                  <a16:creationId xmlns:a16="http://schemas.microsoft.com/office/drawing/2014/main" id="{4ABA81B2-5B67-77D2-5517-08033E19241B}"/>
+                </a:ext>
+              </a:extLst>
+            </p:cNvPr>
+            <p:cNvGrpSpPr/>
+            <p:nvPr/>
+          </p:nvGrpSpPr>
+          <p:grpSpPr>
+            <a:xfrm>
+              <a:off x="1364527" y="16818784"/>
+              <a:ext cx="3578072" cy="1569660"/>
+              <a:chOff x="1398495" y="16644992"/>
+              <a:chExt cx="3578072" cy="1569660"/>
+            </a:xfrm>
+          </p:grpSpPr>
+          <p:sp>
+            <p:nvSpPr>
+              <p:cNvPr id="15528" name="Rounded Rectangle 15527">
+                <a:extLst>
+                  <a:ext uri="{FF2B5EF4-FFF2-40B4-BE49-F238E27FC236}">
+                    <a16:creationId xmlns:a16="http://schemas.microsoft.com/office/drawing/2014/main" id="{AD2DBFD4-1DD0-D27D-7CB0-35408A9E32E4}"/>
+                  </a:ext>
+                </a:extLst>
+              </p:cNvPr>
+              <p:cNvSpPr/>
+              <p:nvPr/>
+            </p:nvSpPr>
+            <p:spPr bwMode="auto">
+              <a:xfrm>
+                <a:off x="1398495" y="16644992"/>
+                <a:ext cx="1947439" cy="1569660"/>
+              </a:xfrm>
+              <a:prstGeom prst="roundRect">
+                <a:avLst/>
+              </a:prstGeom>
+              <a:solidFill>
+                <a:schemeClr val="accent1"/>
+              </a:solidFill>
+              <a:ln w="50800" cap="flat" cmpd="sng" algn="ctr">
+                <a:solidFill>
+                  <a:schemeClr val="tx1"/>
+                </a:solidFill>
+                <a:prstDash val="solid"/>
+                <a:round/>
+                <a:headEnd type="none" w="med" len="med"/>
+                <a:tailEnd type="none" w="med" len="med"/>
+              </a:ln>
+              <a:effectLst/>
+            </p:spPr>
+            <p:txBody>
+              <a:bodyPr vert="horz" wrap="square" lIns="91440" tIns="45720" rIns="91440" bIns="45720" numCol="1" rtlCol="0" anchor="t" anchorCtr="0" compatLnSpc="1">
+                <a:prstTxWarp prst="textNoShape">
+                  <a:avLst/>
+                </a:prstTxWarp>
+              </a:bodyPr>
+              <a:lstStyle/>
+              <a:p>
+                <a:pPr algn="ctr" defTabSz="4389438" eaLnBrk="1" hangingPunct="1"/>
+                <a:r>
+                  <a:rPr lang="en-US" sz="3000" dirty="0"/>
+                  <a:t>You are assigned a partner.</a:t>
+                </a:r>
+              </a:p>
+              <a:p>
+                <a:pPr marL="0" marR="0" indent="0" algn="l" defTabSz="4389438" rtl="0" eaLnBrk="1" fontAlgn="base" latinLnBrk="0" hangingPunct="1">
+                  <a:lnSpc>
+                    <a:spcPct val="100000"/>
+                  </a:lnSpc>
+                  <a:spcBef>
+                    <a:spcPct val="0"/>
+                  </a:spcBef>
+                  <a:spcAft>
+                    <a:spcPct val="0"/>
+                  </a:spcAft>
+                  <a:buClrTx/>
+                  <a:buSzTx/>
+                  <a:buFontTx/>
+                  <a:buNone/>
+                  <a:tabLst/>
+                </a:pPr>
+                <a:endParaRPr kumimoji="0" lang="en-US" sz="1800" b="0" i="0" u="none" strike="noStrike" cap="none" normalizeH="0" baseline="0" dirty="0">
+                  <a:ln>
+                    <a:noFill/>
+                  </a:ln>
+                  <a:solidFill>
+                    <a:schemeClr val="tx1"/>
+                  </a:solidFill>
+                  <a:effectLst/>
+                  <a:latin typeface="Arial" charset="0"/>
+                  <a:cs typeface="Arial" charset="0"/>
+                </a:endParaRPr>
+              </a:p>
+            </p:txBody>
+          </p:sp>
+          <p:cxnSp>
+            <p:nvCxnSpPr>
+              <p:cNvPr id="15537" name="Straight Arrow Connector 15536">
+                <a:extLst>
+                  <a:ext uri="{FF2B5EF4-FFF2-40B4-BE49-F238E27FC236}">
+                    <a16:creationId xmlns:a16="http://schemas.microsoft.com/office/drawing/2014/main" id="{7A1CFB10-A83A-AA5A-7CB9-EC39B260985E}"/>
+                  </a:ext>
+                </a:extLst>
+              </p:cNvPr>
+              <p:cNvCxnSpPr>
+                <a:cxnSpLocks/>
+                <a:stCxn id="15528" idx="3"/>
+              </p:cNvCxnSpPr>
+              <p:nvPr/>
+            </p:nvCxnSpPr>
+            <p:spPr bwMode="auto">
+              <a:xfrm>
+                <a:off x="3345934" y="17429822"/>
+                <a:ext cx="1630633" cy="0"/>
+              </a:xfrm>
+              <a:prstGeom prst="straightConnector1">
+                <a:avLst/>
+              </a:prstGeom>
+              <a:solidFill>
+                <a:schemeClr val="accent1"/>
+              </a:solidFill>
+              <a:ln w="50800" cap="flat" cmpd="sng" algn="ctr">
+                <a:solidFill>
+                  <a:schemeClr val="tx1"/>
+                </a:solidFill>
+                <a:prstDash val="solid"/>
+                <a:round/>
+                <a:headEnd type="none" w="med" len="med"/>
+                <a:tailEnd type="triangle"/>
+              </a:ln>
+              <a:effectLst/>
+            </p:spPr>
+          </p:cxnSp>
+        </p:grpSp>
+        <p:sp>
+          <p:nvSpPr>
+            <p:cNvPr id="15542" name="Rounded Rectangle 15541">
+              <a:extLst>
+                <a:ext uri="{FF2B5EF4-FFF2-40B4-BE49-F238E27FC236}">
+                  <a16:creationId xmlns:a16="http://schemas.microsoft.com/office/drawing/2014/main" id="{F919F17A-D127-CAD0-86F8-9896BB472FB5}"/>
+                </a:ext>
+              </a:extLst>
+            </p:cNvPr>
+            <p:cNvSpPr/>
+            <p:nvPr/>
+          </p:nvSpPr>
+          <p:spPr bwMode="auto">
+            <a:xfrm>
+              <a:off x="1019445" y="25077499"/>
+              <a:ext cx="2843041" cy="764088"/>
+            </a:xfrm>
+            <a:prstGeom prst="roundRect">
+              <a:avLst/>
+            </a:prstGeom>
+            <a:solidFill>
+              <a:schemeClr val="accent1"/>
+            </a:solidFill>
+            <a:ln w="50800" cap="flat" cmpd="sng" algn="ctr">
+              <a:solidFill>
+                <a:schemeClr val="tx1"/>
+              </a:solidFill>
+              <a:prstDash val="solid"/>
+              <a:round/>
+              <a:headEnd type="none" w="med" len="med"/>
+              <a:tailEnd type="none" w="med" len="med"/>
+            </a:ln>
+            <a:effectLst/>
+          </p:spPr>
+          <p:txBody>
+            <a:bodyPr vert="horz" wrap="square" lIns="91440" tIns="45720" rIns="91440" bIns="45720" numCol="1" rtlCol="0" anchor="t" anchorCtr="0" compatLnSpc="1">
+              <a:prstTxWarp prst="textNoShape">
+                <a:avLst/>
+              </a:prstTxWarp>
+            </a:bodyPr>
+            <a:lstStyle/>
+            <a:p>
+              <a:pPr algn="ctr" defTabSz="4389438" eaLnBrk="1" hangingPunct="1"/>
+              <a:r>
+                <a:rPr lang="en-US" sz="4000" u="sng" dirty="0"/>
+                <a:t>End of trial</a:t>
+              </a:r>
+            </a:p>
+            <a:p>
+              <a:pPr marL="0" marR="0" indent="0" algn="l" defTabSz="4389438" rtl="0" eaLnBrk="1" fontAlgn="base" latinLnBrk="0" hangingPunct="1">
+                <a:lnSpc>
+                  <a:spcPct val="100000"/>
+                </a:lnSpc>
+                <a:spcBef>
+                  <a:spcPct val="0"/>
+                </a:spcBef>
+                <a:spcAft>
+                  <a:spcPct val="0"/>
+                </a:spcAft>
+                <a:buClrTx/>
+                <a:buSzTx/>
+                <a:buFontTx/>
+                <a:buNone/>
+                <a:tabLst/>
+              </a:pPr>
+              <a:endParaRPr kumimoji="0" lang="en-US" sz="1800" b="0" i="0" u="none" strike="noStrike" cap="none" normalizeH="0" baseline="0" dirty="0">
+                <a:ln>
+                  <a:noFill/>
+                </a:ln>
+                <a:solidFill>
+                  <a:schemeClr val="tx1"/>
+                </a:solidFill>
+                <a:effectLst/>
+                <a:latin typeface="Arial" charset="0"/>
+                <a:cs typeface="Arial" charset="0"/>
+              </a:endParaRPr>
+            </a:p>
+          </p:txBody>
+        </p:sp>
+        <p:sp>
+          <p:nvSpPr>
+            <p:cNvPr id="15667" name="Rounded Rectangle 15666">
+              <a:extLst>
+                <a:ext uri="{FF2B5EF4-FFF2-40B4-BE49-F238E27FC236}">
+                  <a16:creationId xmlns:a16="http://schemas.microsoft.com/office/drawing/2014/main" id="{A04AF92B-DBCA-68B5-49E1-F021F79663D4}"/>
+                </a:ext>
+              </a:extLst>
+            </p:cNvPr>
+            <p:cNvSpPr/>
+            <p:nvPr/>
+          </p:nvSpPr>
+          <p:spPr bwMode="auto">
+            <a:xfrm>
+              <a:off x="882727" y="23270530"/>
+              <a:ext cx="3102910" cy="655177"/>
+            </a:xfrm>
+            <a:prstGeom prst="roundRect">
+              <a:avLst/>
+            </a:prstGeom>
+            <a:solidFill>
+              <a:schemeClr val="accent1"/>
+            </a:solidFill>
+            <a:ln w="50800" cap="flat" cmpd="sng" algn="ctr">
+              <a:solidFill>
+                <a:schemeClr val="tx1"/>
+              </a:solidFill>
+              <a:prstDash val="solid"/>
+              <a:round/>
+              <a:headEnd type="none" w="med" len="med"/>
+              <a:tailEnd type="none" w="med" len="med"/>
+            </a:ln>
+            <a:effectLst/>
+          </p:spPr>
+          <p:txBody>
+            <a:bodyPr vert="horz" wrap="square" lIns="91440" tIns="45720" rIns="91440" bIns="45720" numCol="1" rtlCol="0" anchor="t" anchorCtr="0" compatLnSpc="1">
+              <a:prstTxWarp prst="textNoShape">
+                <a:avLst/>
+              </a:prstTxWarp>
+            </a:bodyPr>
+            <a:lstStyle/>
+            <a:p>
+              <a:pPr algn="ctr" defTabSz="4389438" eaLnBrk="1" hangingPunct="1"/>
+              <a:r>
+                <a:rPr lang="en-US" sz="3000" dirty="0"/>
+                <a:t>Outcome Phase</a:t>
+              </a:r>
+            </a:p>
+            <a:p>
+              <a:pPr marL="0" marR="0" indent="0" algn="l" defTabSz="4389438" rtl="0" eaLnBrk="1" fontAlgn="base" latinLnBrk="0" hangingPunct="1">
+                <a:lnSpc>
+                  <a:spcPct val="100000"/>
+                </a:lnSpc>
+                <a:spcBef>
+                  <a:spcPct val="0"/>
+                </a:spcBef>
+                <a:spcAft>
+                  <a:spcPct val="0"/>
+                </a:spcAft>
+                <a:buClrTx/>
+                <a:buSzTx/>
+                <a:buFontTx/>
+                <a:buNone/>
+                <a:tabLst/>
+              </a:pPr>
+              <a:endParaRPr kumimoji="0" lang="en-US" sz="1800" b="0" i="0" u="none" strike="noStrike" cap="none" normalizeH="0" baseline="0" dirty="0">
+                <a:ln>
+                  <a:noFill/>
+                </a:ln>
+                <a:solidFill>
+                  <a:schemeClr val="tx1"/>
+                </a:solidFill>
+                <a:effectLst/>
+                <a:latin typeface="Arial" charset="0"/>
+                <a:cs typeface="Arial" charset="0"/>
+              </a:endParaRPr>
+            </a:p>
+          </p:txBody>
+        </p:sp>
+      </p:grpSp>
       <p:sp>
         <p:nvSpPr>
           <p:cNvPr id="15668" name="Rectangle 15667">
@@ -10573,7 +10185,7 @@
         </p:nvSpPr>
         <p:spPr bwMode="auto">
           <a:xfrm>
-            <a:off x="5259549" y="17607220"/>
+            <a:off x="5104022" y="15429243"/>
             <a:ext cx="1984189" cy="552682"/>
           </a:xfrm>
           <a:prstGeom prst="rect">
@@ -10646,10 +10258,10 @@
         </p:nvGrpSpPr>
         <p:grpSpPr>
           <a:xfrm>
-            <a:off x="30977262" y="15791162"/>
-            <a:ext cx="6023828" cy="5608210"/>
-            <a:chOff x="30686058" y="13981673"/>
-            <a:chExt cx="6377623" cy="5937595"/>
+            <a:off x="30912367" y="15288689"/>
+            <a:ext cx="4003957" cy="3793200"/>
+            <a:chOff x="30175830" y="13427301"/>
+            <a:chExt cx="6887851" cy="7050823"/>
           </a:xfrm>
         </p:grpSpPr>
         <p:pic>
@@ -10667,7 +10279,7 @@
             <p:nvPr/>
           </p:nvPicPr>
           <p:blipFill>
-            <a:blip r:embed="rId19">
+            <a:blip r:embed="rId17">
               <a:extLst>
                 <a:ext uri="{28A0092B-C50C-407E-A947-70E740481C1C}">
                   <a14:useLocalDpi xmlns:a14="http://schemas.microsoft.com/office/drawing/2010/main" val="0"/>
@@ -10702,8 +10314,8 @@
           </p:nvSpPr>
           <p:spPr>
             <a:xfrm>
-              <a:off x="30756135" y="13981673"/>
-              <a:ext cx="1539204" cy="707886"/>
+              <a:off x="30175830" y="13427301"/>
+              <a:ext cx="1827438" cy="987985"/>
             </a:xfrm>
             <a:prstGeom prst="rect">
               <a:avLst/>
@@ -10718,7 +10330,7 @@
             <a:p>
               <a:r>
                 <a:rPr lang="en-US" sz="4000" dirty="0"/>
-                <a:t>X= 83</a:t>
+                <a:t>X= -8</a:t>
               </a:r>
             </a:p>
           </p:txBody>
@@ -10737,8 +10349,8 @@
           </p:nvSpPr>
           <p:spPr>
             <a:xfrm>
-              <a:off x="30741892" y="19334493"/>
-              <a:ext cx="1253639" cy="584775"/>
+              <a:off x="30483851" y="19661963"/>
+              <a:ext cx="2587045" cy="816161"/>
             </a:xfrm>
             <a:prstGeom prst="rect">
               <a:avLst/>
@@ -10752,11 +10364,10 @@
             <a:lstStyle/>
             <a:p>
               <a:r>
-                <a:rPr lang="en-US" sz="3200" b="1" dirty="0">
+                <a:rPr lang="en-US" sz="3200" b="1" dirty="0" err="1">
                   <a:latin typeface="Helvetica"/>
-                  <a:ea typeface="MS PGothic"/>
                 </a:rPr>
-                <a:t>ACC</a:t>
+                <a:t>mPFC</a:t>
               </a:r>
               <a:endParaRPr lang="en-US" sz="3200" b="1" dirty="0">
                 <a:latin typeface="Helvetica"/>
@@ -10779,10 +10390,10 @@
         </p:nvGrpSpPr>
         <p:grpSpPr>
           <a:xfrm>
-            <a:off x="31076145" y="5570652"/>
-            <a:ext cx="5454928" cy="5439206"/>
-            <a:chOff x="30818980" y="4685110"/>
-            <a:chExt cx="6036885" cy="6019486"/>
+            <a:off x="30892788" y="7424174"/>
+            <a:ext cx="3962327" cy="4113783"/>
+            <a:chOff x="30936691" y="4266720"/>
+            <a:chExt cx="5919174" cy="6849738"/>
           </a:xfrm>
         </p:grpSpPr>
         <p:pic>
@@ -10800,7 +10411,7 @@
             <p:nvPr/>
           </p:nvPicPr>
           <p:blipFill>
-            <a:blip r:embed="rId20">
+            <a:blip r:embed="rId18">
               <a:extLst>
                 <a:ext uri="{28A0092B-C50C-407E-A947-70E740481C1C}">
                   <a14:useLocalDpi xmlns:a14="http://schemas.microsoft.com/office/drawing/2010/main" val="0"/>
@@ -10835,7 +10446,7 @@
           </p:nvSpPr>
           <p:spPr>
             <a:xfrm>
-              <a:off x="30818980" y="4685110"/>
+              <a:off x="30952728" y="4266720"/>
               <a:ext cx="1539203" cy="707886"/>
             </a:xfrm>
             <a:prstGeom prst="rect">
@@ -10870,8 +10481,8 @@
           </p:nvSpPr>
           <p:spPr>
             <a:xfrm>
-              <a:off x="31039479" y="10119821"/>
-              <a:ext cx="1253639" cy="584775"/>
+              <a:off x="30936691" y="10239860"/>
+              <a:ext cx="2517094" cy="876598"/>
             </a:xfrm>
             <a:prstGeom prst="rect">
               <a:avLst/>
@@ -10885,11 +10496,10 @@
             <a:lstStyle/>
             <a:p>
               <a:r>
-                <a:rPr lang="en-US" sz="3200" b="1" dirty="0">
+                <a:rPr lang="en-US" sz="3200" b="1" dirty="0" err="1">
                   <a:latin typeface="Helvetica"/>
-                  <a:ea typeface="MS PGothic"/>
                 </a:rPr>
-                <a:t>MFG</a:t>
+                <a:t>dlPFC</a:t>
               </a:r>
               <a:endParaRPr lang="en-US" sz="3200" b="1" dirty="0">
                 <a:latin typeface="Helvetica"/>
@@ -10912,8 +10522,8 @@
         </p:nvSpPr>
         <p:spPr>
           <a:xfrm>
-            <a:off x="30987740" y="4742609"/>
-            <a:ext cx="9097362" cy="1323439"/>
+            <a:off x="31126040" y="5975181"/>
+            <a:ext cx="4272148" cy="1077218"/>
           </a:xfrm>
           <a:prstGeom prst="rect">
             <a:avLst/>
@@ -10921,31 +10531,28 @@
           <a:noFill/>
         </p:spPr>
         <p:txBody>
-          <a:bodyPr wrap="none" rtlCol="0">
+          <a:bodyPr wrap="square" rtlCol="0">
             <a:spAutoFit/>
           </a:bodyPr>
           <a:lstStyle/>
           <a:p>
             <a:r>
-              <a:rPr lang="en-US" sz="4000" b="0" i="0" dirty="0">
+              <a:rPr lang="en-US" sz="3200" b="0" i="0" dirty="0">
                 <a:effectLst/>
                 <a:latin typeface="Helvetica" pitchFamily="2" charset="0"/>
               </a:rPr>
               <a:t>Friend Defecting &gt;</a:t>
             </a:r>
             <a:r>
-              <a:rPr lang="en-US" sz="4000" dirty="0">
+              <a:rPr lang="en-US" sz="3200" dirty="0">
                 <a:latin typeface="Helvetica" pitchFamily="2" charset="0"/>
               </a:rPr>
               <a:t> Computer Defecting</a:t>
             </a:r>
-            <a:endParaRPr lang="en-US" sz="4000" i="0" dirty="0">
+            <a:endParaRPr lang="en-US" sz="3200" i="0" dirty="0">
               <a:effectLst/>
               <a:latin typeface="Helvetica" pitchFamily="2" charset="0"/>
             </a:endParaRPr>
-          </a:p>
-          <a:p>
-            <a:endParaRPr lang="en-US" sz="4000" dirty="0"/>
           </a:p>
         </p:txBody>
       </p:sp>
@@ -10963,8 +10570,8 @@
         </p:nvSpPr>
         <p:spPr>
           <a:xfrm>
-            <a:off x="30990882" y="14863809"/>
-            <a:ext cx="11036996" cy="707886"/>
+            <a:off x="31089809" y="13842164"/>
+            <a:ext cx="4801133" cy="1077218"/>
           </a:xfrm>
           <a:prstGeom prst="rect">
             <a:avLst/>
@@ -10972,504 +10579,25 @@
           <a:noFill/>
         </p:spPr>
         <p:txBody>
-          <a:bodyPr wrap="none" rtlCol="0">
+          <a:bodyPr wrap="square" rtlCol="0">
             <a:spAutoFit/>
           </a:bodyPr>
           <a:lstStyle/>
           <a:p>
             <a:r>
-              <a:rPr lang="en-US" sz="4000" b="0" i="0" dirty="0">
+              <a:rPr lang="en-US" sz="3200" b="0" i="0" dirty="0">
                 <a:effectLst/>
                 <a:latin typeface="Helvetica" pitchFamily="2" charset="0"/>
               </a:rPr>
-              <a:t>Friend Reciprocating &gt; Computer Reciprocating</a:t>
+              <a:t>Friend Reciprocate &gt; Computer Reciprocate</a:t>
             </a:r>
-            <a:endParaRPr lang="en-US" sz="4000" i="0" dirty="0">
+            <a:endParaRPr lang="en-US" sz="3200" i="0" dirty="0">
               <a:effectLst/>
               <a:latin typeface="Helvetica" pitchFamily="2" charset="0"/>
             </a:endParaRPr>
           </a:p>
         </p:txBody>
       </p:sp>
-      <p:sp>
-        <p:nvSpPr>
-          <p:cNvPr id="15711" name="TextBox 15710">
-            <a:extLst>
-              <a:ext uri="{FF2B5EF4-FFF2-40B4-BE49-F238E27FC236}">
-                <a16:creationId xmlns:a16="http://schemas.microsoft.com/office/drawing/2014/main" id="{3F0968C1-C452-1885-6B38-F154CD473A3F}"/>
-              </a:ext>
-            </a:extLst>
-          </p:cNvPr>
-          <p:cNvSpPr txBox="1"/>
-          <p:nvPr/>
-        </p:nvSpPr>
-        <p:spPr>
-          <a:xfrm>
-            <a:off x="37616989" y="6979043"/>
-            <a:ext cx="569387" cy="369332"/>
-          </a:xfrm>
-          <a:prstGeom prst="rect">
-            <a:avLst/>
-          </a:prstGeom>
-          <a:noFill/>
-        </p:spPr>
-        <p:txBody>
-          <a:bodyPr wrap="none" rtlCol="0">
-            <a:spAutoFit/>
-          </a:bodyPr>
-          <a:lstStyle/>
-          <a:p>
-            <a:r>
-              <a:rPr lang="en-US" dirty="0"/>
-              <a:t>200</a:t>
-            </a:r>
-          </a:p>
-        </p:txBody>
-      </p:sp>
-      <p:sp>
-        <p:nvSpPr>
-          <p:cNvPr id="15713" name="TextBox 15712">
-            <a:extLst>
-              <a:ext uri="{FF2B5EF4-FFF2-40B4-BE49-F238E27FC236}">
-                <a16:creationId xmlns:a16="http://schemas.microsoft.com/office/drawing/2014/main" id="{0538FBF6-7909-445F-ACD2-9599FE92C967}"/>
-              </a:ext>
-            </a:extLst>
-          </p:cNvPr>
-          <p:cNvSpPr txBox="1"/>
-          <p:nvPr/>
-        </p:nvSpPr>
-        <p:spPr>
-          <a:xfrm>
-            <a:off x="37564868" y="11337187"/>
-            <a:ext cx="646331" cy="369332"/>
-          </a:xfrm>
-          <a:prstGeom prst="rect">
-            <a:avLst/>
-          </a:prstGeom>
-          <a:noFill/>
-        </p:spPr>
-        <p:txBody>
-          <a:bodyPr wrap="none" rtlCol="0">
-            <a:spAutoFit/>
-          </a:bodyPr>
-          <a:lstStyle/>
-          <a:p>
-            <a:r>
-              <a:rPr lang="en-US" dirty="0"/>
-              <a:t>-300</a:t>
-            </a:r>
-          </a:p>
-        </p:txBody>
-      </p:sp>
-      <p:sp>
-        <p:nvSpPr>
-          <p:cNvPr id="15715" name="TextBox 15714">
-            <a:extLst>
-              <a:ext uri="{FF2B5EF4-FFF2-40B4-BE49-F238E27FC236}">
-                <a16:creationId xmlns:a16="http://schemas.microsoft.com/office/drawing/2014/main" id="{6A186BD7-7E16-8AE4-2E56-FAD05BEC16F6}"/>
-              </a:ext>
-            </a:extLst>
-          </p:cNvPr>
-          <p:cNvSpPr txBox="1"/>
-          <p:nvPr/>
-        </p:nvSpPr>
-        <p:spPr>
-          <a:xfrm rot="16200000">
-            <a:off x="36483567" y="8819300"/>
-            <a:ext cx="2770310" cy="553998"/>
-          </a:xfrm>
-          <a:prstGeom prst="rect">
-            <a:avLst/>
-          </a:prstGeom>
-          <a:noFill/>
-        </p:spPr>
-        <p:txBody>
-          <a:bodyPr wrap="none" rtlCol="0">
-            <a:spAutoFit/>
-          </a:bodyPr>
-          <a:lstStyle/>
-          <a:p>
-            <a:r>
-              <a:rPr lang="en-US" sz="3000" dirty="0"/>
-              <a:t>MFG activation</a:t>
-            </a:r>
-          </a:p>
-        </p:txBody>
-      </p:sp>
-      <p:sp>
-        <p:nvSpPr>
-          <p:cNvPr id="15716" name="TextBox 15715">
-            <a:extLst>
-              <a:ext uri="{FF2B5EF4-FFF2-40B4-BE49-F238E27FC236}">
-                <a16:creationId xmlns:a16="http://schemas.microsoft.com/office/drawing/2014/main" id="{A7B791E9-2592-EA60-AB27-F2DBE3421768}"/>
-              </a:ext>
-            </a:extLst>
-          </p:cNvPr>
-          <p:cNvSpPr txBox="1"/>
-          <p:nvPr/>
-        </p:nvSpPr>
-        <p:spPr>
-          <a:xfrm>
-            <a:off x="38211199" y="11728946"/>
-            <a:ext cx="441146" cy="369332"/>
-          </a:xfrm>
-          <a:prstGeom prst="rect">
-            <a:avLst/>
-          </a:prstGeom>
-          <a:noFill/>
-        </p:spPr>
-        <p:txBody>
-          <a:bodyPr wrap="none" rtlCol="0">
-            <a:spAutoFit/>
-          </a:bodyPr>
-          <a:lstStyle/>
-          <a:p>
-            <a:r>
-              <a:rPr lang="en-US" dirty="0"/>
-              <a:t>20</a:t>
-            </a:r>
-          </a:p>
-        </p:txBody>
-      </p:sp>
-      <p:sp>
-        <p:nvSpPr>
-          <p:cNvPr id="15717" name="TextBox 15716">
-            <a:extLst>
-              <a:ext uri="{FF2B5EF4-FFF2-40B4-BE49-F238E27FC236}">
-                <a16:creationId xmlns:a16="http://schemas.microsoft.com/office/drawing/2014/main" id="{4288430D-B235-E5D2-0E3C-C928486D0544}"/>
-              </a:ext>
-            </a:extLst>
-          </p:cNvPr>
-          <p:cNvSpPr txBox="1"/>
-          <p:nvPr/>
-        </p:nvSpPr>
-        <p:spPr>
-          <a:xfrm>
-            <a:off x="41883268" y="11791390"/>
-            <a:ext cx="441146" cy="369332"/>
-          </a:xfrm>
-          <a:prstGeom prst="rect">
-            <a:avLst/>
-          </a:prstGeom>
-          <a:noFill/>
-        </p:spPr>
-        <p:txBody>
-          <a:bodyPr wrap="none" rtlCol="0">
-            <a:spAutoFit/>
-          </a:bodyPr>
-          <a:lstStyle/>
-          <a:p>
-            <a:r>
-              <a:rPr lang="en-US" dirty="0"/>
-              <a:t>60</a:t>
-            </a:r>
-          </a:p>
-        </p:txBody>
-      </p:sp>
-      <p:sp>
-        <p:nvSpPr>
-          <p:cNvPr id="15718" name="TextBox 15717">
-            <a:extLst>
-              <a:ext uri="{FF2B5EF4-FFF2-40B4-BE49-F238E27FC236}">
-                <a16:creationId xmlns:a16="http://schemas.microsoft.com/office/drawing/2014/main" id="{C5EDCAEC-F972-A2CD-DE27-9E216B9AC130}"/>
-              </a:ext>
-            </a:extLst>
-          </p:cNvPr>
-          <p:cNvSpPr txBox="1"/>
-          <p:nvPr/>
-        </p:nvSpPr>
-        <p:spPr>
-          <a:xfrm>
-            <a:off x="39886352" y="11652166"/>
-            <a:ext cx="1096775" cy="707886"/>
-          </a:xfrm>
-          <a:prstGeom prst="rect">
-            <a:avLst/>
-          </a:prstGeom>
-          <a:noFill/>
-        </p:spPr>
-        <p:txBody>
-          <a:bodyPr wrap="none" rtlCol="0">
-            <a:spAutoFit/>
-          </a:bodyPr>
-          <a:lstStyle/>
-          <a:p>
-            <a:r>
-              <a:rPr lang="en-US" sz="4000" dirty="0"/>
-              <a:t>Age</a:t>
-            </a:r>
-          </a:p>
-        </p:txBody>
-      </p:sp>
-      <p:grpSp>
-        <p:nvGrpSpPr>
-          <p:cNvPr id="15726" name="Group 15725">
-            <a:extLst>
-              <a:ext uri="{FF2B5EF4-FFF2-40B4-BE49-F238E27FC236}">
-                <a16:creationId xmlns:a16="http://schemas.microsoft.com/office/drawing/2014/main" id="{B3430D81-BB79-4C3F-9F94-3445BBB422F8}"/>
-              </a:ext>
-            </a:extLst>
-          </p:cNvPr>
-          <p:cNvGrpSpPr/>
-          <p:nvPr/>
-        </p:nvGrpSpPr>
-        <p:grpSpPr>
-          <a:xfrm>
-            <a:off x="37324753" y="15097157"/>
-            <a:ext cx="5956404" cy="6738219"/>
-            <a:chOff x="37462544" y="15444990"/>
-            <a:chExt cx="5956404" cy="6738219"/>
-          </a:xfrm>
-        </p:grpSpPr>
-        <p:pic>
-          <p:nvPicPr>
-            <p:cNvPr id="15654" name="Graphic 15653">
-              <a:extLst>
-                <a:ext uri="{FF2B5EF4-FFF2-40B4-BE49-F238E27FC236}">
-                  <a16:creationId xmlns:a16="http://schemas.microsoft.com/office/drawing/2014/main" id="{10803621-C472-7ABD-EBF3-5EE9AE8C4D09}"/>
-                </a:ext>
-              </a:extLst>
-            </p:cNvPr>
-            <p:cNvPicPr>
-              <a:picLocks noChangeAspect="1"/>
-            </p:cNvPicPr>
-            <p:nvPr/>
-          </p:nvPicPr>
-          <p:blipFill rotWithShape="1">
-            <a:blip r:embed="rId21">
-              <a:extLst>
-                <a:ext uri="{28A0092B-C50C-407E-A947-70E740481C1C}">
-                  <a14:useLocalDpi xmlns:a14="http://schemas.microsoft.com/office/drawing/2010/main" val="0"/>
-                </a:ext>
-                <a:ext uri="{96DAC541-7B7A-43D3-8B79-37D633B846F1}">
-                  <asvg:svgBlip xmlns:asvg="http://schemas.microsoft.com/office/drawing/2016/SVG/main" r:embed="rId22"/>
-                </a:ext>
-              </a:extLst>
-            </a:blip>
-            <a:srcRect l="12332" r="4359" b="8540"/>
-            <a:stretch/>
-          </p:blipFill>
-          <p:spPr>
-            <a:xfrm>
-              <a:off x="38085758" y="15444990"/>
-              <a:ext cx="5333190" cy="6071802"/>
-            </a:xfrm>
-            <a:prstGeom prst="rect">
-              <a:avLst/>
-            </a:prstGeom>
-          </p:spPr>
-        </p:pic>
-        <p:sp>
-          <p:nvSpPr>
-            <p:cNvPr id="15719" name="TextBox 15718">
-              <a:extLst>
-                <a:ext uri="{FF2B5EF4-FFF2-40B4-BE49-F238E27FC236}">
-                  <a16:creationId xmlns:a16="http://schemas.microsoft.com/office/drawing/2014/main" id="{F04F4CFA-B833-1DD9-86EC-A956DC37137A}"/>
-                </a:ext>
-              </a:extLst>
-            </p:cNvPr>
-            <p:cNvSpPr txBox="1"/>
-            <p:nvPr/>
-          </p:nvSpPr>
-          <p:spPr>
-            <a:xfrm>
-              <a:off x="37516370" y="16909110"/>
-              <a:ext cx="569387" cy="369332"/>
-            </a:xfrm>
-            <a:prstGeom prst="rect">
-              <a:avLst/>
-            </a:prstGeom>
-            <a:noFill/>
-          </p:spPr>
-          <p:txBody>
-            <a:bodyPr wrap="none" rtlCol="0">
-              <a:spAutoFit/>
-            </a:bodyPr>
-            <a:lstStyle/>
-            <a:p>
-              <a:r>
-                <a:rPr lang="en-US" dirty="0"/>
-                <a:t>400</a:t>
-              </a:r>
-            </a:p>
-          </p:txBody>
-        </p:sp>
-        <p:sp>
-          <p:nvSpPr>
-            <p:cNvPr id="15720" name="TextBox 15719">
-              <a:extLst>
-                <a:ext uri="{FF2B5EF4-FFF2-40B4-BE49-F238E27FC236}">
-                  <a16:creationId xmlns:a16="http://schemas.microsoft.com/office/drawing/2014/main" id="{0D17E5B2-CB95-D5BD-E169-9C1854A0AD37}"/>
-                </a:ext>
-              </a:extLst>
-            </p:cNvPr>
-            <p:cNvSpPr txBox="1"/>
-            <p:nvPr/>
-          </p:nvSpPr>
-          <p:spPr>
-            <a:xfrm>
-              <a:off x="37462544" y="20542022"/>
-              <a:ext cx="646331" cy="369332"/>
-            </a:xfrm>
-            <a:prstGeom prst="rect">
-              <a:avLst/>
-            </a:prstGeom>
-            <a:noFill/>
-          </p:spPr>
-          <p:txBody>
-            <a:bodyPr wrap="none" rtlCol="0">
-              <a:spAutoFit/>
-            </a:bodyPr>
-            <a:lstStyle/>
-            <a:p>
-              <a:r>
-                <a:rPr lang="en-US" dirty="0"/>
-                <a:t>-200</a:t>
-              </a:r>
-            </a:p>
-          </p:txBody>
-        </p:sp>
-        <p:sp>
-          <p:nvSpPr>
-            <p:cNvPr id="15721" name="TextBox 15720">
-              <a:extLst>
-                <a:ext uri="{FF2B5EF4-FFF2-40B4-BE49-F238E27FC236}">
-                  <a16:creationId xmlns:a16="http://schemas.microsoft.com/office/drawing/2014/main" id="{81E64089-644A-E436-A434-45AF685F62E1}"/>
-                </a:ext>
-              </a:extLst>
-            </p:cNvPr>
-            <p:cNvSpPr txBox="1"/>
-            <p:nvPr/>
-          </p:nvSpPr>
-          <p:spPr>
-            <a:xfrm rot="16200000">
-              <a:off x="36381836" y="18642457"/>
-              <a:ext cx="2770310" cy="553998"/>
-            </a:xfrm>
-            <a:prstGeom prst="rect">
-              <a:avLst/>
-            </a:prstGeom>
-            <a:noFill/>
-          </p:spPr>
-          <p:txBody>
-            <a:bodyPr wrap="none" rtlCol="0">
-              <a:spAutoFit/>
-            </a:bodyPr>
-            <a:lstStyle/>
-            <a:p>
-              <a:r>
-                <a:rPr lang="en-US" sz="3000" dirty="0"/>
-                <a:t>MFG activation</a:t>
-              </a:r>
-            </a:p>
-          </p:txBody>
-        </p:sp>
-        <p:sp>
-          <p:nvSpPr>
-            <p:cNvPr id="15722" name="TextBox 15721">
-              <a:extLst>
-                <a:ext uri="{FF2B5EF4-FFF2-40B4-BE49-F238E27FC236}">
-                  <a16:creationId xmlns:a16="http://schemas.microsoft.com/office/drawing/2014/main" id="{D6E3B518-3825-F962-6455-6381AEA6B615}"/>
-                </a:ext>
-              </a:extLst>
-            </p:cNvPr>
-            <p:cNvSpPr txBox="1"/>
-            <p:nvPr/>
-          </p:nvSpPr>
-          <p:spPr>
-            <a:xfrm>
-              <a:off x="38109468" y="21552103"/>
-              <a:ext cx="441146" cy="369332"/>
-            </a:xfrm>
-            <a:prstGeom prst="rect">
-              <a:avLst/>
-            </a:prstGeom>
-            <a:noFill/>
-          </p:spPr>
-          <p:txBody>
-            <a:bodyPr wrap="none" rtlCol="0">
-              <a:spAutoFit/>
-            </a:bodyPr>
-            <a:lstStyle/>
-            <a:p>
-              <a:r>
-                <a:rPr lang="en-US" dirty="0"/>
-                <a:t>20</a:t>
-              </a:r>
-            </a:p>
-          </p:txBody>
-        </p:sp>
-        <p:sp>
-          <p:nvSpPr>
-            <p:cNvPr id="15723" name="TextBox 15722">
-              <a:extLst>
-                <a:ext uri="{FF2B5EF4-FFF2-40B4-BE49-F238E27FC236}">
-                  <a16:creationId xmlns:a16="http://schemas.microsoft.com/office/drawing/2014/main" id="{8B001207-DE47-3A09-905A-EBCA2F9F5C56}"/>
-                </a:ext>
-              </a:extLst>
-            </p:cNvPr>
-            <p:cNvSpPr txBox="1"/>
-            <p:nvPr/>
-          </p:nvSpPr>
-          <p:spPr>
-            <a:xfrm>
-              <a:off x="41781537" y="21614547"/>
-              <a:ext cx="441146" cy="369332"/>
-            </a:xfrm>
-            <a:prstGeom prst="rect">
-              <a:avLst/>
-            </a:prstGeom>
-            <a:noFill/>
-          </p:spPr>
-          <p:txBody>
-            <a:bodyPr wrap="none" rtlCol="0">
-              <a:spAutoFit/>
-            </a:bodyPr>
-            <a:lstStyle/>
-            <a:p>
-              <a:r>
-                <a:rPr lang="en-US" dirty="0"/>
-                <a:t>60</a:t>
-              </a:r>
-            </a:p>
-          </p:txBody>
-        </p:sp>
-        <p:sp>
-          <p:nvSpPr>
-            <p:cNvPr id="15724" name="TextBox 15723">
-              <a:extLst>
-                <a:ext uri="{FF2B5EF4-FFF2-40B4-BE49-F238E27FC236}">
-                  <a16:creationId xmlns:a16="http://schemas.microsoft.com/office/drawing/2014/main" id="{A7A779AE-265E-DD6C-9D50-6736DE453C86}"/>
-                </a:ext>
-              </a:extLst>
-            </p:cNvPr>
-            <p:cNvSpPr txBox="1"/>
-            <p:nvPr/>
-          </p:nvSpPr>
-          <p:spPr>
-            <a:xfrm>
-              <a:off x="39784621" y="21475323"/>
-              <a:ext cx="1096775" cy="707886"/>
-            </a:xfrm>
-            <a:prstGeom prst="rect">
-              <a:avLst/>
-            </a:prstGeom>
-            <a:noFill/>
-          </p:spPr>
-          <p:txBody>
-            <a:bodyPr wrap="none" rtlCol="0">
-              <a:spAutoFit/>
-            </a:bodyPr>
-            <a:lstStyle/>
-            <a:p>
-              <a:r>
-                <a:rPr lang="en-US" sz="4000" dirty="0"/>
-                <a:t>Age</a:t>
-              </a:r>
-            </a:p>
-          </p:txBody>
-        </p:sp>
-      </p:grpSp>
       <p:sp>
         <p:nvSpPr>
           <p:cNvPr id="15729" name="TextBox 15728">
@@ -11484,7 +10612,7 @@
         </p:nvSpPr>
         <p:spPr>
           <a:xfrm>
-            <a:off x="30959587" y="12699725"/>
+            <a:off x="43408931" y="11102423"/>
             <a:ext cx="12062344" cy="1015663"/>
           </a:xfrm>
           <a:prstGeom prst="rect">
@@ -11498,7 +10626,7 @@
           </a:bodyPr>
           <a:lstStyle/>
           <a:p>
-            <a:pPr algn="l"/>
+            <a:pPr algn="ctr"/>
             <a:r>
               <a:rPr lang="en-US" sz="3000" i="0" dirty="0">
                 <a:effectLst/>
@@ -11523,82 +10651,12 @@
         </p:nvGrpSpPr>
         <p:grpSpPr>
           <a:xfrm>
-            <a:off x="23053763" y="15328939"/>
-            <a:ext cx="6729801" cy="7219447"/>
+            <a:off x="22227608" y="22377639"/>
+            <a:ext cx="7672050" cy="8491864"/>
             <a:chOff x="23053763" y="15328939"/>
             <a:chExt cx="6729801" cy="7219447"/>
           </a:xfrm>
         </p:grpSpPr>
-        <p:sp>
-          <p:nvSpPr>
-            <p:cNvPr id="15730" name="Rectangle 15729">
-              <a:extLst>
-                <a:ext uri="{FF2B5EF4-FFF2-40B4-BE49-F238E27FC236}">
-                  <a16:creationId xmlns:a16="http://schemas.microsoft.com/office/drawing/2014/main" id="{FDF15931-1516-DE49-340B-5A133AA95A93}"/>
-                </a:ext>
-              </a:extLst>
-            </p:cNvPr>
-            <p:cNvSpPr/>
-            <p:nvPr/>
-          </p:nvSpPr>
-          <p:spPr bwMode="auto">
-            <a:xfrm>
-              <a:off x="23923841" y="15957914"/>
-              <a:ext cx="5627696" cy="5591284"/>
-            </a:xfrm>
-            <a:prstGeom prst="rect">
-              <a:avLst/>
-            </a:prstGeom>
-            <a:noFill/>
-            <a:ln w="38100" cap="flat" cmpd="sng" algn="ctr">
-              <a:solidFill>
-                <a:schemeClr val="tx1"/>
-              </a:solidFill>
-              <a:prstDash val="solid"/>
-              <a:round/>
-              <a:headEnd type="none" w="med" len="med"/>
-              <a:tailEnd type="none" w="med" len="med"/>
-            </a:ln>
-            <a:effectLst/>
-          </p:spPr>
-          <p:txBody>
-            <a:bodyPr vert="horz" wrap="square" lIns="91440" tIns="45720" rIns="91440" bIns="45720" numCol="1" rtlCol="0" anchor="t" anchorCtr="0" compatLnSpc="1">
-              <a:prstTxWarp prst="textNoShape">
-                <a:avLst/>
-              </a:prstTxWarp>
-            </a:bodyPr>
-            <a:lstStyle/>
-            <a:p>
-              <a:pPr marL="0" marR="0" indent="0" algn="l" defTabSz="4389438" rtl="0" eaLnBrk="1" fontAlgn="base" latinLnBrk="0" hangingPunct="1">
-                <a:lnSpc>
-                  <a:spcPct val="100000"/>
-                </a:lnSpc>
-                <a:spcBef>
-                  <a:spcPct val="0"/>
-                </a:spcBef>
-                <a:spcAft>
-                  <a:spcPct val="0"/>
-                </a:spcAft>
-                <a:buClrTx/>
-                <a:buSzTx/>
-                <a:buFontTx/>
-                <a:buNone/>
-                <a:tabLst/>
-              </a:pPr>
-              <a:endParaRPr kumimoji="0" lang="en-US" sz="1800" b="0" i="0" u="none" strike="noStrike" cap="none" normalizeH="0" baseline="0">
-                <a:ln>
-                  <a:noFill/>
-                </a:ln>
-                <a:solidFill>
-                  <a:schemeClr val="tx1"/>
-                </a:solidFill>
-                <a:effectLst/>
-                <a:latin typeface="Arial" charset="0"/>
-                <a:cs typeface="Arial" charset="0"/>
-              </a:endParaRPr>
-            </a:p>
-          </p:txBody>
-        </p:sp>
         <p:grpSp>
           <p:nvGrpSpPr>
             <p:cNvPr id="15637" name="Group 15636">
@@ -11654,13 +10712,13 @@
                 <p:nvPr/>
               </p:nvPicPr>
               <p:blipFill rotWithShape="1">
-                <a:blip r:embed="rId23">
+                <a:blip r:embed="rId19">
                   <a:extLst>
                     <a:ext uri="{28A0092B-C50C-407E-A947-70E740481C1C}">
                       <a14:useLocalDpi xmlns:a14="http://schemas.microsoft.com/office/drawing/2010/main" val="0"/>
                     </a:ext>
                     <a:ext uri="{96DAC541-7B7A-43D3-8B79-37D633B846F1}">
-                      <asvg:svgBlip xmlns:asvg="http://schemas.microsoft.com/office/drawing/2016/SVG/main" r:embed="rId24"/>
+                      <asvg:svgBlip xmlns:asvg="http://schemas.microsoft.com/office/drawing/2016/SVG/main" r:embed="rId20"/>
                     </a:ext>
                   </a:extLst>
                 </a:blip>
@@ -11889,324 +10947,12 @@
             </p:txBody>
           </p:sp>
         </p:grpSp>
-      </p:grpSp>
-      <p:grpSp>
-        <p:nvGrpSpPr>
-          <p:cNvPr id="15735" name="Group 15734">
-            <a:extLst>
-              <a:ext uri="{FF2B5EF4-FFF2-40B4-BE49-F238E27FC236}">
-                <a16:creationId xmlns:a16="http://schemas.microsoft.com/office/drawing/2014/main" id="{26911986-CCEA-2FCE-3DA3-E5B9ED9DE211}"/>
-              </a:ext>
-            </a:extLst>
-          </p:cNvPr>
-          <p:cNvGrpSpPr/>
-          <p:nvPr/>
-        </p:nvGrpSpPr>
-        <p:grpSpPr>
-          <a:xfrm>
-            <a:off x="23087465" y="23975816"/>
-            <a:ext cx="6524991" cy="6955685"/>
-            <a:chOff x="23087465" y="23975816"/>
-            <a:chExt cx="6524991" cy="6955685"/>
-          </a:xfrm>
-        </p:grpSpPr>
-        <p:grpSp>
-          <p:nvGrpSpPr>
-            <p:cNvPr id="15706" name="Group 15705">
+        <p:sp>
+          <p:nvSpPr>
+            <p:cNvPr id="15730" name="Rectangle 15729">
               <a:extLst>
                 <a:ext uri="{FF2B5EF4-FFF2-40B4-BE49-F238E27FC236}">
-                  <a16:creationId xmlns:a16="http://schemas.microsoft.com/office/drawing/2014/main" id="{63D4B78D-7F21-5B28-EC21-6939303B0C92}"/>
-                </a:ext>
-              </a:extLst>
-            </p:cNvPr>
-            <p:cNvGrpSpPr/>
-            <p:nvPr/>
-          </p:nvGrpSpPr>
-          <p:grpSpPr>
-            <a:xfrm>
-              <a:off x="23087465" y="23975816"/>
-              <a:ext cx="6524991" cy="6955685"/>
-              <a:chOff x="23087465" y="23975816"/>
-              <a:chExt cx="6524991" cy="6955685"/>
-            </a:xfrm>
-          </p:grpSpPr>
-          <p:grpSp>
-            <p:nvGrpSpPr>
-              <p:cNvPr id="15703" name="Group 15702">
-                <a:extLst>
-                  <a:ext uri="{FF2B5EF4-FFF2-40B4-BE49-F238E27FC236}">
-                    <a16:creationId xmlns:a16="http://schemas.microsoft.com/office/drawing/2014/main" id="{2795A3AF-A7CF-294E-F9B5-08AB686B1E17}"/>
-                  </a:ext>
-                </a:extLst>
-              </p:cNvPr>
-              <p:cNvGrpSpPr/>
-              <p:nvPr/>
-            </p:nvGrpSpPr>
-            <p:grpSpPr>
-              <a:xfrm>
-                <a:off x="23087465" y="23975816"/>
-                <a:ext cx="6524991" cy="6955685"/>
-                <a:chOff x="23087465" y="23975816"/>
-                <a:chExt cx="6524991" cy="6955685"/>
-              </a:xfrm>
-            </p:grpSpPr>
-            <p:pic>
-              <p:nvPicPr>
-                <p:cNvPr id="15642" name="Graphic 15641">
-                  <a:extLst>
-                    <a:ext uri="{FF2B5EF4-FFF2-40B4-BE49-F238E27FC236}">
-                      <a16:creationId xmlns:a16="http://schemas.microsoft.com/office/drawing/2014/main" id="{38CF2D33-CDB3-BF29-CD2F-1AA0F4A194EC}"/>
-                    </a:ext>
-                  </a:extLst>
-                </p:cNvPr>
-                <p:cNvPicPr>
-                  <a:picLocks noChangeAspect="1"/>
-                </p:cNvPicPr>
-                <p:nvPr/>
-              </p:nvPicPr>
-              <p:blipFill rotWithShape="1">
-                <a:blip r:embed="rId25">
-                  <a:extLst>
-                    <a:ext uri="{28A0092B-C50C-407E-A947-70E740481C1C}">
-                      <a14:useLocalDpi xmlns:a14="http://schemas.microsoft.com/office/drawing/2010/main" val="0"/>
-                    </a:ext>
-                    <a:ext uri="{96DAC541-7B7A-43D3-8B79-37D633B846F1}">
-                      <asvg:svgBlip xmlns:asvg="http://schemas.microsoft.com/office/drawing/2016/SVG/main" r:embed="rId26"/>
-                    </a:ext>
-                  </a:extLst>
-                </a:blip>
-                <a:srcRect l="10991" t="5046" r="3126" b="7756"/>
-                <a:stretch/>
-              </p:blipFill>
-              <p:spPr>
-                <a:xfrm>
-                  <a:off x="23723984" y="23975816"/>
-                  <a:ext cx="5888472" cy="6200049"/>
-                </a:xfrm>
-                <a:prstGeom prst="rect">
-                  <a:avLst/>
-                </a:prstGeom>
-              </p:spPr>
-            </p:pic>
-            <p:sp>
-              <p:nvSpPr>
-                <p:cNvPr id="15697" name="TextBox 15696">
-                  <a:extLst>
-                    <a:ext uri="{FF2B5EF4-FFF2-40B4-BE49-F238E27FC236}">
-                      <a16:creationId xmlns:a16="http://schemas.microsoft.com/office/drawing/2014/main" id="{7E37C853-4C65-27FE-3737-304A023FEAD6}"/>
-                    </a:ext>
-                  </a:extLst>
-                </p:cNvPr>
-                <p:cNvSpPr txBox="1"/>
-                <p:nvPr/>
-              </p:nvSpPr>
-              <p:spPr>
-                <a:xfrm>
-                  <a:off x="25810594" y="30223615"/>
-                  <a:ext cx="1096775" cy="707886"/>
-                </a:xfrm>
-                <a:prstGeom prst="rect">
-                  <a:avLst/>
-                </a:prstGeom>
-                <a:noFill/>
-              </p:spPr>
-              <p:txBody>
-                <a:bodyPr wrap="square" rtlCol="0">
-                  <a:spAutoFit/>
-                </a:bodyPr>
-                <a:lstStyle/>
-                <a:p>
-                  <a:r>
-                    <a:rPr lang="en-US" sz="4000" dirty="0"/>
-                    <a:t>Age</a:t>
-                  </a:r>
-                </a:p>
-              </p:txBody>
-            </p:sp>
-            <p:sp>
-              <p:nvSpPr>
-                <p:cNvPr id="15699" name="TextBox 15698">
-                  <a:extLst>
-                    <a:ext uri="{FF2B5EF4-FFF2-40B4-BE49-F238E27FC236}">
-                      <a16:creationId xmlns:a16="http://schemas.microsoft.com/office/drawing/2014/main" id="{CFC48A4A-F5C7-919B-B216-050A47D2A73D}"/>
-                    </a:ext>
-                  </a:extLst>
-                </p:cNvPr>
-                <p:cNvSpPr txBox="1"/>
-                <p:nvPr/>
-              </p:nvSpPr>
-              <p:spPr>
-                <a:xfrm>
-                  <a:off x="23166754" y="24615337"/>
-                  <a:ext cx="651983" cy="369332"/>
-                </a:xfrm>
-                <a:prstGeom prst="rect">
-                  <a:avLst/>
-                </a:prstGeom>
-                <a:noFill/>
-              </p:spPr>
-              <p:txBody>
-                <a:bodyPr wrap="square" rtlCol="0">
-                  <a:spAutoFit/>
-                </a:bodyPr>
-                <a:lstStyle/>
-                <a:p>
-                  <a:r>
-                    <a:rPr lang="en-US" dirty="0"/>
-                    <a:t>400</a:t>
-                  </a:r>
-                </a:p>
-              </p:txBody>
-            </p:sp>
-            <p:sp>
-              <p:nvSpPr>
-                <p:cNvPr id="15700" name="TextBox 15699">
-                  <a:extLst>
-                    <a:ext uri="{FF2B5EF4-FFF2-40B4-BE49-F238E27FC236}">
-                      <a16:creationId xmlns:a16="http://schemas.microsoft.com/office/drawing/2014/main" id="{0479233A-F219-C4C1-0FAE-4E64BDC40251}"/>
-                    </a:ext>
-                  </a:extLst>
-                </p:cNvPr>
-                <p:cNvSpPr txBox="1"/>
-                <p:nvPr/>
-              </p:nvSpPr>
-              <p:spPr>
-                <a:xfrm>
-                  <a:off x="23087465" y="28711327"/>
-                  <a:ext cx="740088" cy="369332"/>
-                </a:xfrm>
-                <a:prstGeom prst="rect">
-                  <a:avLst/>
-                </a:prstGeom>
-                <a:noFill/>
-              </p:spPr>
-              <p:txBody>
-                <a:bodyPr wrap="square" rtlCol="0">
-                  <a:spAutoFit/>
-                </a:bodyPr>
-                <a:lstStyle/>
-                <a:p>
-                  <a:r>
-                    <a:rPr lang="en-US" dirty="0"/>
-                    <a:t>-200</a:t>
-                  </a:r>
-                </a:p>
-              </p:txBody>
-            </p:sp>
-            <p:sp>
-              <p:nvSpPr>
-                <p:cNvPr id="15701" name="TextBox 15700">
-                  <a:extLst>
-                    <a:ext uri="{FF2B5EF4-FFF2-40B4-BE49-F238E27FC236}">
-                      <a16:creationId xmlns:a16="http://schemas.microsoft.com/office/drawing/2014/main" id="{0037EC62-7BBF-974B-42EC-5B85E16EF20D}"/>
-                    </a:ext>
-                  </a:extLst>
-                </p:cNvPr>
-                <p:cNvSpPr txBox="1"/>
-                <p:nvPr/>
-              </p:nvSpPr>
-              <p:spPr>
-                <a:xfrm>
-                  <a:off x="23822666" y="30181392"/>
-                  <a:ext cx="505139" cy="369332"/>
-                </a:xfrm>
-                <a:prstGeom prst="rect">
-                  <a:avLst/>
-                </a:prstGeom>
-                <a:noFill/>
-              </p:spPr>
-              <p:txBody>
-                <a:bodyPr wrap="square" rtlCol="0">
-                  <a:spAutoFit/>
-                </a:bodyPr>
-                <a:lstStyle/>
-                <a:p>
-                  <a:r>
-                    <a:rPr lang="en-US" dirty="0"/>
-                    <a:t>20</a:t>
-                  </a:r>
-                </a:p>
-              </p:txBody>
-            </p:sp>
-            <p:sp>
-              <p:nvSpPr>
-                <p:cNvPr id="15702" name="TextBox 15701">
-                  <a:extLst>
-                    <a:ext uri="{FF2B5EF4-FFF2-40B4-BE49-F238E27FC236}">
-                      <a16:creationId xmlns:a16="http://schemas.microsoft.com/office/drawing/2014/main" id="{E539492E-CCBD-AEE5-A537-2A1EEB1A9F5C}"/>
-                    </a:ext>
-                  </a:extLst>
-                </p:cNvPr>
-                <p:cNvSpPr txBox="1"/>
-                <p:nvPr/>
-              </p:nvSpPr>
-              <p:spPr>
-                <a:xfrm>
-                  <a:off x="27974735" y="30181392"/>
-                  <a:ext cx="505139" cy="369332"/>
-                </a:xfrm>
-                <a:prstGeom prst="rect">
-                  <a:avLst/>
-                </a:prstGeom>
-                <a:noFill/>
-              </p:spPr>
-              <p:txBody>
-                <a:bodyPr wrap="square" rtlCol="0">
-                  <a:spAutoFit/>
-                </a:bodyPr>
-                <a:lstStyle/>
-                <a:p>
-                  <a:r>
-                    <a:rPr lang="en-US" dirty="0"/>
-                    <a:t>60</a:t>
-                  </a:r>
-                </a:p>
-              </p:txBody>
-            </p:sp>
-          </p:grpSp>
-          <p:sp>
-            <p:nvSpPr>
-              <p:cNvPr id="15705" name="TextBox 15704">
-                <a:extLst>
-                  <a:ext uri="{FF2B5EF4-FFF2-40B4-BE49-F238E27FC236}">
-                    <a16:creationId xmlns:a16="http://schemas.microsoft.com/office/drawing/2014/main" id="{6960A0F0-CDFF-ED60-A579-49BA29A21318}"/>
-                  </a:ext>
-                </a:extLst>
-              </p:cNvPr>
-              <p:cNvSpPr txBox="1"/>
-              <p:nvPr/>
-            </p:nvSpPr>
-            <p:spPr>
-              <a:xfrm rot="16200000">
-                <a:off x="21699109" y="26614219"/>
-                <a:ext cx="3420629" cy="553998"/>
-              </a:xfrm>
-              <a:prstGeom prst="rect">
-                <a:avLst/>
-              </a:prstGeom>
-              <a:noFill/>
-            </p:spPr>
-            <p:txBody>
-              <a:bodyPr wrap="square" rtlCol="0">
-                <a:spAutoFit/>
-              </a:bodyPr>
-              <a:lstStyle/>
-              <a:p>
-                <a:pPr algn="ctr"/>
-                <a:r>
-                  <a:rPr lang="en-US" sz="1500" dirty="0"/>
-                  <a:t>Friend (Reciprocate &gt; Defect) &gt; Computer (Reciprocate &gt; Defect)</a:t>
-                </a:r>
-              </a:p>
-            </p:txBody>
-          </p:sp>
-        </p:grpSp>
-        <p:sp>
-          <p:nvSpPr>
-            <p:cNvPr id="15732" name="Rectangle 15731">
-              <a:extLst>
-                <a:ext uri="{FF2B5EF4-FFF2-40B4-BE49-F238E27FC236}">
-                  <a16:creationId xmlns:a16="http://schemas.microsoft.com/office/drawing/2014/main" id="{DB9E91CB-EB75-75BF-4CD0-32893875A887}"/>
+                  <a16:creationId xmlns:a16="http://schemas.microsoft.com/office/drawing/2014/main" id="{FDF15931-1516-DE49-340B-5A133AA95A93}"/>
                 </a:ext>
               </a:extLst>
             </p:cNvPr>
@@ -12215,8 +10961,8 @@
           </p:nvSpPr>
           <p:spPr bwMode="auto">
             <a:xfrm>
-              <a:off x="23891921" y="24154307"/>
-              <a:ext cx="5627696" cy="5921353"/>
+              <a:off x="23923841" y="15957914"/>
+              <a:ext cx="5627696" cy="5591284"/>
             </a:xfrm>
             <a:prstGeom prst="rect">
               <a:avLst/>
@@ -12274,10 +11020,10 @@
       </p:grpSp>
       <p:grpSp>
         <p:nvGrpSpPr>
-          <p:cNvPr id="15734" name="Group 15733">
+          <p:cNvPr id="2" name="Group 1">
             <a:extLst>
               <a:ext uri="{FF2B5EF4-FFF2-40B4-BE49-F238E27FC236}">
-                <a16:creationId xmlns:a16="http://schemas.microsoft.com/office/drawing/2014/main" id="{D6329C71-02EA-73D7-8FA5-5799213EF5F4}"/>
+                <a16:creationId xmlns:a16="http://schemas.microsoft.com/office/drawing/2014/main" id="{A94EC582-60D1-2B41-B3B4-7BDF0B9C3848}"/>
               </a:ext>
             </a:extLst>
           </p:cNvPr>
@@ -12286,18 +11032,18 @@
         </p:nvGrpSpPr>
         <p:grpSpPr>
           <a:xfrm>
-            <a:off x="16026704" y="24108846"/>
-            <a:ext cx="6532972" cy="6817128"/>
-            <a:chOff x="16026704" y="24108846"/>
-            <a:chExt cx="6532972" cy="6817128"/>
+            <a:off x="35263511" y="11894668"/>
+            <a:ext cx="7923930" cy="8561607"/>
+            <a:chOff x="37324753" y="15097157"/>
+            <a:chExt cx="6030525" cy="6738219"/>
           </a:xfrm>
         </p:grpSpPr>
         <p:grpSp>
           <p:nvGrpSpPr>
-            <p:cNvPr id="15704" name="Group 15703">
+            <p:cNvPr id="15726" name="Group 15725">
               <a:extLst>
                 <a:ext uri="{FF2B5EF4-FFF2-40B4-BE49-F238E27FC236}">
-                  <a16:creationId xmlns:a16="http://schemas.microsoft.com/office/drawing/2014/main" id="{FCD1B93E-6226-3998-93E5-870A1491CB64}"/>
+                  <a16:creationId xmlns:a16="http://schemas.microsoft.com/office/drawing/2014/main" id="{B3430D81-BB79-4C3F-9F94-3445BBB422F8}"/>
                 </a:ext>
               </a:extLst>
             </p:cNvPr>
@@ -12306,18 +11052,18 @@
           </p:nvGrpSpPr>
           <p:grpSpPr>
             <a:xfrm>
-              <a:off x="16026704" y="24108846"/>
-              <a:ext cx="6532972" cy="6817128"/>
-              <a:chOff x="16026704" y="24108846"/>
-              <a:chExt cx="6532972" cy="6817128"/>
+              <a:off x="37324753" y="15097157"/>
+              <a:ext cx="5956404" cy="6738219"/>
+              <a:chOff x="37462544" y="15444990"/>
+              <a:chExt cx="5956404" cy="6738219"/>
             </a:xfrm>
           </p:grpSpPr>
           <p:pic>
             <p:nvPicPr>
-              <p:cNvPr id="15639" name="Graphic 15638">
+              <p:cNvPr id="15654" name="Graphic 15653">
                 <a:extLst>
                   <a:ext uri="{FF2B5EF4-FFF2-40B4-BE49-F238E27FC236}">
-                    <a16:creationId xmlns:a16="http://schemas.microsoft.com/office/drawing/2014/main" id="{D9CF084F-C433-567D-8719-A7C5D7D79D7D}"/>
+                    <a16:creationId xmlns:a16="http://schemas.microsoft.com/office/drawing/2014/main" id="{10803621-C472-7ABD-EBF3-5EE9AE8C4D09}"/>
                   </a:ext>
                 </a:extLst>
               </p:cNvPr>
@@ -12327,23 +11073,23 @@
               <p:nvPr/>
             </p:nvPicPr>
             <p:blipFill rotWithShape="1">
-              <a:blip r:embed="rId27">
+              <a:blip r:embed="rId21">
                 <a:extLst>
                   <a:ext uri="{28A0092B-C50C-407E-A947-70E740481C1C}">
                     <a14:useLocalDpi xmlns:a14="http://schemas.microsoft.com/office/drawing/2010/main" val="0"/>
                   </a:ext>
                   <a:ext uri="{96DAC541-7B7A-43D3-8B79-37D633B846F1}">
-                    <asvg:svgBlip xmlns:asvg="http://schemas.microsoft.com/office/drawing/2016/SVG/main" r:embed="rId28"/>
+                    <asvg:svgBlip xmlns:asvg="http://schemas.microsoft.com/office/drawing/2016/SVG/main" r:embed="rId22"/>
                   </a:ext>
                 </a:extLst>
               </a:blip>
-              <a:srcRect l="10756" t="6660" r="2865" b="7584"/>
+              <a:srcRect l="12332" r="4359" b="8540"/>
               <a:stretch/>
             </p:blipFill>
             <p:spPr>
               <a:xfrm>
-                <a:off x="16651056" y="24108846"/>
-                <a:ext cx="5908620" cy="6083352"/>
+                <a:off x="38085758" y="15444990"/>
+                <a:ext cx="5333190" cy="6071802"/>
               </a:xfrm>
               <a:prstGeom prst="rect">
                 <a:avLst/>
@@ -12352,10 +11098,10 @@
           </p:pic>
           <p:sp>
             <p:nvSpPr>
-              <p:cNvPr id="15687" name="TextBox 15686">
+              <p:cNvPr id="15719" name="TextBox 15718">
                 <a:extLst>
                   <a:ext uri="{FF2B5EF4-FFF2-40B4-BE49-F238E27FC236}">
-                    <a16:creationId xmlns:a16="http://schemas.microsoft.com/office/drawing/2014/main" id="{F662A648-B469-A9E0-776B-0B74000CC056}"/>
+                    <a16:creationId xmlns:a16="http://schemas.microsoft.com/office/drawing/2014/main" id="{F04F4CFA-B833-1DD9-86EC-A956DC37137A}"/>
                   </a:ext>
                 </a:extLst>
               </p:cNvPr>
@@ -12364,79 +11110,8 @@
             </p:nvSpPr>
             <p:spPr>
               <a:xfrm>
-                <a:off x="18654011" y="30218088"/>
-                <a:ext cx="1096775" cy="707886"/>
-              </a:xfrm>
-              <a:prstGeom prst="rect">
-                <a:avLst/>
-              </a:prstGeom>
-              <a:noFill/>
-            </p:spPr>
-            <p:txBody>
-              <a:bodyPr wrap="none" rtlCol="0">
-                <a:spAutoFit/>
-              </a:bodyPr>
-              <a:lstStyle/>
-              <a:p>
-                <a:r>
-                  <a:rPr lang="en-US" sz="4000" dirty="0"/>
-                  <a:t>Age</a:t>
-                </a:r>
-              </a:p>
-            </p:txBody>
-          </p:sp>
-          <p:sp>
-            <p:nvSpPr>
-              <p:cNvPr id="15688" name="TextBox 15687">
-                <a:extLst>
-                  <a:ext uri="{FF2B5EF4-FFF2-40B4-BE49-F238E27FC236}">
-                    <a16:creationId xmlns:a16="http://schemas.microsoft.com/office/drawing/2014/main" id="{17B4D306-3BDE-F46A-B882-1F7E819C5A36}"/>
-                  </a:ext>
-                </a:extLst>
-              </p:cNvPr>
-              <p:cNvSpPr txBox="1"/>
-              <p:nvPr/>
-            </p:nvSpPr>
-            <p:spPr>
-              <a:xfrm rot="16200000">
-                <a:off x="14608848" y="26568394"/>
-                <a:ext cx="3420629" cy="553998"/>
-              </a:xfrm>
-              <a:prstGeom prst="rect">
-                <a:avLst/>
-              </a:prstGeom>
-              <a:noFill/>
-            </p:spPr>
-            <p:txBody>
-              <a:bodyPr wrap="square" rtlCol="0">
-                <a:spAutoFit/>
-              </a:bodyPr>
-              <a:lstStyle/>
-              <a:p>
-                <a:pPr algn="ctr"/>
-                <a:r>
-                  <a:rPr lang="en-US" sz="1500" dirty="0"/>
-                  <a:t>Friend (Reciprocate &gt; Defect) &gt; Stranger (Reciprocate &gt; Defect)</a:t>
-                </a:r>
-              </a:p>
-            </p:txBody>
-          </p:sp>
-          <p:sp>
-            <p:nvSpPr>
-              <p:cNvPr id="15689" name="TextBox 15688">
-                <a:extLst>
-                  <a:ext uri="{FF2B5EF4-FFF2-40B4-BE49-F238E27FC236}">
-                    <a16:creationId xmlns:a16="http://schemas.microsoft.com/office/drawing/2014/main" id="{39181606-99D7-432F-DC98-862BFA6B35E8}"/>
-                  </a:ext>
-                </a:extLst>
-              </p:cNvPr>
-              <p:cNvSpPr txBox="1"/>
-              <p:nvPr/>
-            </p:nvSpPr>
-            <p:spPr>
-              <a:xfrm>
-                <a:off x="16115961" y="24411311"/>
-                <a:ext cx="651983" cy="424006"/>
+                <a:off x="37516370" y="16909110"/>
+                <a:ext cx="569387" cy="369332"/>
               </a:xfrm>
               <a:prstGeom prst="rect">
                 <a:avLst/>
@@ -12458,10 +11133,10 @@
           </p:sp>
           <p:sp>
             <p:nvSpPr>
-              <p:cNvPr id="15690" name="TextBox 15689">
+              <p:cNvPr id="15720" name="TextBox 15719">
                 <a:extLst>
                   <a:ext uri="{FF2B5EF4-FFF2-40B4-BE49-F238E27FC236}">
-                    <a16:creationId xmlns:a16="http://schemas.microsoft.com/office/drawing/2014/main" id="{BA9BD2BF-7849-7A5A-CF46-E64AAA2C3D8A}"/>
+                    <a16:creationId xmlns:a16="http://schemas.microsoft.com/office/drawing/2014/main" id="{0D17E5B2-CB95-D5BD-E169-9C1854A0AD37}"/>
                   </a:ext>
                 </a:extLst>
               </p:cNvPr>
@@ -12470,8 +11145,8 @@
             </p:nvSpPr>
             <p:spPr>
               <a:xfrm>
-                <a:off x="16026704" y="28875791"/>
-                <a:ext cx="740088" cy="424006"/>
+                <a:off x="37462544" y="20542022"/>
+                <a:ext cx="646331" cy="369332"/>
               </a:xfrm>
               <a:prstGeom prst="rect">
                 <a:avLst/>
@@ -12493,10 +11168,49 @@
           </p:sp>
           <p:sp>
             <p:nvSpPr>
-              <p:cNvPr id="15691" name="TextBox 15690">
+              <p:cNvPr id="15721" name="TextBox 15720">
                 <a:extLst>
                   <a:ext uri="{FF2B5EF4-FFF2-40B4-BE49-F238E27FC236}">
-                    <a16:creationId xmlns:a16="http://schemas.microsoft.com/office/drawing/2014/main" id="{1BD0A2A2-41F8-B866-7A17-811920106FC6}"/>
+                    <a16:creationId xmlns:a16="http://schemas.microsoft.com/office/drawing/2014/main" id="{81E64089-644A-E436-A434-45AF685F62E1}"/>
+                  </a:ext>
+                </a:extLst>
+              </p:cNvPr>
+              <p:cNvSpPr txBox="1"/>
+              <p:nvPr/>
+            </p:nvSpPr>
+            <p:spPr>
+              <a:xfrm rot="16200000">
+                <a:off x="36531370" y="18699129"/>
+                <a:ext cx="2471242" cy="440654"/>
+              </a:xfrm>
+              <a:prstGeom prst="rect">
+                <a:avLst/>
+              </a:prstGeom>
+              <a:noFill/>
+            </p:spPr>
+            <p:txBody>
+              <a:bodyPr wrap="none" rtlCol="0">
+                <a:spAutoFit/>
+              </a:bodyPr>
+              <a:lstStyle/>
+              <a:p>
+                <a:r>
+                  <a:rPr lang="en-US" sz="3000" dirty="0" err="1"/>
+                  <a:t>mPFC</a:t>
+                </a:r>
+                <a:r>
+                  <a:rPr lang="en-US" sz="3000" dirty="0"/>
+                  <a:t> activation</a:t>
+                </a:r>
+              </a:p>
+            </p:txBody>
+          </p:sp>
+          <p:sp>
+            <p:nvSpPr>
+              <p:cNvPr id="15722" name="TextBox 15721">
+                <a:extLst>
+                  <a:ext uri="{FF2B5EF4-FFF2-40B4-BE49-F238E27FC236}">
+                    <a16:creationId xmlns:a16="http://schemas.microsoft.com/office/drawing/2014/main" id="{D6E3B518-3825-F962-6455-6381AEA6B615}"/>
                   </a:ext>
                 </a:extLst>
               </p:cNvPr>
@@ -12505,8 +11219,8 @@
             </p:nvSpPr>
             <p:spPr>
               <a:xfrm>
-                <a:off x="16666083" y="30175865"/>
-                <a:ext cx="505139" cy="424006"/>
+                <a:off x="38109468" y="21552103"/>
+                <a:ext cx="441146" cy="369332"/>
               </a:xfrm>
               <a:prstGeom prst="rect">
                 <a:avLst/>
@@ -12528,10 +11242,10 @@
           </p:sp>
           <p:sp>
             <p:nvSpPr>
-              <p:cNvPr id="15692" name="TextBox 15691">
+              <p:cNvPr id="15723" name="TextBox 15722">
                 <a:extLst>
                   <a:ext uri="{FF2B5EF4-FFF2-40B4-BE49-F238E27FC236}">
-                    <a16:creationId xmlns:a16="http://schemas.microsoft.com/office/drawing/2014/main" id="{8B1D7E5E-F4B9-60AA-0137-EE2E8ABD15F8}"/>
+                    <a16:creationId xmlns:a16="http://schemas.microsoft.com/office/drawing/2014/main" id="{8B001207-DE47-3A09-905A-EBCA2F9F5C56}"/>
                   </a:ext>
                 </a:extLst>
               </p:cNvPr>
@@ -12540,8 +11254,8 @@
             </p:nvSpPr>
             <p:spPr>
               <a:xfrm>
-                <a:off x="20818152" y="30175865"/>
-                <a:ext cx="505139" cy="424006"/>
+                <a:off x="41781537" y="21614547"/>
+                <a:ext cx="441146" cy="369332"/>
               </a:xfrm>
               <a:prstGeom prst="rect">
                 <a:avLst/>
@@ -12561,13 +11275,48 @@
               </a:p>
             </p:txBody>
           </p:sp>
+          <p:sp>
+            <p:nvSpPr>
+              <p:cNvPr id="15724" name="TextBox 15723">
+                <a:extLst>
+                  <a:ext uri="{FF2B5EF4-FFF2-40B4-BE49-F238E27FC236}">
+                    <a16:creationId xmlns:a16="http://schemas.microsoft.com/office/drawing/2014/main" id="{A7A779AE-265E-DD6C-9D50-6736DE453C86}"/>
+                  </a:ext>
+                </a:extLst>
+              </p:cNvPr>
+              <p:cNvSpPr txBox="1"/>
+              <p:nvPr/>
+            </p:nvSpPr>
+            <p:spPr>
+              <a:xfrm>
+                <a:off x="39784621" y="21475323"/>
+                <a:ext cx="1096775" cy="707886"/>
+              </a:xfrm>
+              <a:prstGeom prst="rect">
+                <a:avLst/>
+              </a:prstGeom>
+              <a:noFill/>
+            </p:spPr>
+            <p:txBody>
+              <a:bodyPr wrap="none" rtlCol="0">
+                <a:spAutoFit/>
+              </a:bodyPr>
+              <a:lstStyle/>
+              <a:p>
+                <a:r>
+                  <a:rPr lang="en-US" sz="4000" dirty="0"/>
+                  <a:t>Age</a:t>
+                </a:r>
+              </a:p>
+            </p:txBody>
+          </p:sp>
         </p:grpSp>
         <p:sp>
           <p:nvSpPr>
-            <p:cNvPr id="15733" name="Rectangle 15732">
+            <p:cNvPr id="15736" name="Rectangle 15735">
               <a:extLst>
                 <a:ext uri="{FF2B5EF4-FFF2-40B4-BE49-F238E27FC236}">
-                  <a16:creationId xmlns:a16="http://schemas.microsoft.com/office/drawing/2014/main" id="{16C66349-C6D5-5B03-6B55-2EB7D1D282E3}"/>
+                  <a16:creationId xmlns:a16="http://schemas.microsoft.com/office/drawing/2014/main" id="{885157CA-2A93-73F2-A17C-8ACD95507E22}"/>
                 </a:ext>
               </a:extLst>
             </p:cNvPr>
@@ -12576,8 +11325,8 @@
           </p:nvSpPr>
           <p:spPr bwMode="auto">
             <a:xfrm>
-              <a:off x="16871673" y="24149410"/>
-              <a:ext cx="5627696" cy="5921353"/>
+              <a:off x="38024698" y="15618426"/>
+              <a:ext cx="5330580" cy="5411310"/>
             </a:xfrm>
             <a:prstGeom prst="rect">
               <a:avLst/>
@@ -12633,142 +11382,660 @@
           </p:txBody>
         </p:sp>
       </p:grpSp>
+      <p:grpSp>
+        <p:nvGrpSpPr>
+          <p:cNvPr id="4" name="Group 3">
+            <a:extLst>
+              <a:ext uri="{FF2B5EF4-FFF2-40B4-BE49-F238E27FC236}">
+                <a16:creationId xmlns:a16="http://schemas.microsoft.com/office/drawing/2014/main" id="{1655AFED-3947-A740-B235-4AE33711962C}"/>
+              </a:ext>
+            </a:extLst>
+          </p:cNvPr>
+          <p:cNvGrpSpPr/>
+          <p:nvPr/>
+        </p:nvGrpSpPr>
+        <p:grpSpPr>
+          <a:xfrm>
+            <a:off x="35398188" y="4514399"/>
+            <a:ext cx="8025077" cy="7764103"/>
+            <a:chOff x="37564868" y="5920531"/>
+            <a:chExt cx="6139033" cy="6306638"/>
+          </a:xfrm>
+        </p:grpSpPr>
+        <p:sp>
+          <p:nvSpPr>
+            <p:cNvPr id="15711" name="TextBox 15710">
+              <a:extLst>
+                <a:ext uri="{FF2B5EF4-FFF2-40B4-BE49-F238E27FC236}">
+                  <a16:creationId xmlns:a16="http://schemas.microsoft.com/office/drawing/2014/main" id="{3F0968C1-C452-1885-6B38-F154CD473A3F}"/>
+                </a:ext>
+              </a:extLst>
+            </p:cNvPr>
+            <p:cNvSpPr txBox="1"/>
+            <p:nvPr/>
+          </p:nvSpPr>
+          <p:spPr>
+            <a:xfrm>
+              <a:off x="37616989" y="6979043"/>
+              <a:ext cx="569387" cy="369332"/>
+            </a:xfrm>
+            <a:prstGeom prst="rect">
+              <a:avLst/>
+            </a:prstGeom>
+            <a:noFill/>
+          </p:spPr>
+          <p:txBody>
+            <a:bodyPr wrap="none" rtlCol="0">
+              <a:spAutoFit/>
+            </a:bodyPr>
+            <a:lstStyle/>
+            <a:p>
+              <a:r>
+                <a:rPr lang="en-US" dirty="0"/>
+                <a:t>200</a:t>
+              </a:r>
+            </a:p>
+          </p:txBody>
+        </p:sp>
+        <p:sp>
+          <p:nvSpPr>
+            <p:cNvPr id="15713" name="TextBox 15712">
+              <a:extLst>
+                <a:ext uri="{FF2B5EF4-FFF2-40B4-BE49-F238E27FC236}">
+                  <a16:creationId xmlns:a16="http://schemas.microsoft.com/office/drawing/2014/main" id="{0538FBF6-7909-445F-ACD2-9599FE92C967}"/>
+                </a:ext>
+              </a:extLst>
+            </p:cNvPr>
+            <p:cNvSpPr txBox="1"/>
+            <p:nvPr/>
+          </p:nvSpPr>
+          <p:spPr>
+            <a:xfrm>
+              <a:off x="37564868" y="11337187"/>
+              <a:ext cx="646331" cy="369332"/>
+            </a:xfrm>
+            <a:prstGeom prst="rect">
+              <a:avLst/>
+            </a:prstGeom>
+            <a:noFill/>
+          </p:spPr>
+          <p:txBody>
+            <a:bodyPr wrap="none" rtlCol="0">
+              <a:spAutoFit/>
+            </a:bodyPr>
+            <a:lstStyle/>
+            <a:p>
+              <a:r>
+                <a:rPr lang="en-US" dirty="0"/>
+                <a:t>-300</a:t>
+              </a:r>
+            </a:p>
+          </p:txBody>
+        </p:sp>
+        <p:sp>
+          <p:nvSpPr>
+            <p:cNvPr id="15716" name="TextBox 15715">
+              <a:extLst>
+                <a:ext uri="{FF2B5EF4-FFF2-40B4-BE49-F238E27FC236}">
+                  <a16:creationId xmlns:a16="http://schemas.microsoft.com/office/drawing/2014/main" id="{A7B791E9-2592-EA60-AB27-F2DBE3421768}"/>
+                </a:ext>
+              </a:extLst>
+            </p:cNvPr>
+            <p:cNvSpPr txBox="1"/>
+            <p:nvPr/>
+          </p:nvSpPr>
+          <p:spPr>
+            <a:xfrm>
+              <a:off x="38211199" y="11728946"/>
+              <a:ext cx="441146" cy="369332"/>
+            </a:xfrm>
+            <a:prstGeom prst="rect">
+              <a:avLst/>
+            </a:prstGeom>
+            <a:noFill/>
+          </p:spPr>
+          <p:txBody>
+            <a:bodyPr wrap="none" rtlCol="0">
+              <a:spAutoFit/>
+            </a:bodyPr>
+            <a:lstStyle/>
+            <a:p>
+              <a:r>
+                <a:rPr lang="en-US" dirty="0"/>
+                <a:t>20</a:t>
+              </a:r>
+            </a:p>
+          </p:txBody>
+        </p:sp>
+        <p:sp>
+          <p:nvSpPr>
+            <p:cNvPr id="15717" name="TextBox 15716">
+              <a:extLst>
+                <a:ext uri="{FF2B5EF4-FFF2-40B4-BE49-F238E27FC236}">
+                  <a16:creationId xmlns:a16="http://schemas.microsoft.com/office/drawing/2014/main" id="{4288430D-B235-E5D2-0E3C-C928486D0544}"/>
+                </a:ext>
+              </a:extLst>
+            </p:cNvPr>
+            <p:cNvSpPr txBox="1"/>
+            <p:nvPr/>
+          </p:nvSpPr>
+          <p:spPr>
+            <a:xfrm>
+              <a:off x="41883268" y="11791390"/>
+              <a:ext cx="441146" cy="369332"/>
+            </a:xfrm>
+            <a:prstGeom prst="rect">
+              <a:avLst/>
+            </a:prstGeom>
+            <a:noFill/>
+          </p:spPr>
+          <p:txBody>
+            <a:bodyPr wrap="none" rtlCol="0">
+              <a:spAutoFit/>
+            </a:bodyPr>
+            <a:lstStyle/>
+            <a:p>
+              <a:r>
+                <a:rPr lang="en-US" dirty="0"/>
+                <a:t>60</a:t>
+              </a:r>
+            </a:p>
+          </p:txBody>
+        </p:sp>
+        <p:sp>
+          <p:nvSpPr>
+            <p:cNvPr id="15718" name="TextBox 15717">
+              <a:extLst>
+                <a:ext uri="{FF2B5EF4-FFF2-40B4-BE49-F238E27FC236}">
+                  <a16:creationId xmlns:a16="http://schemas.microsoft.com/office/drawing/2014/main" id="{C5EDCAEC-F972-A2CD-DE27-9E216B9AC130}"/>
+                </a:ext>
+              </a:extLst>
+            </p:cNvPr>
+            <p:cNvSpPr txBox="1"/>
+            <p:nvPr/>
+          </p:nvSpPr>
+          <p:spPr>
+            <a:xfrm>
+              <a:off x="39886352" y="11652166"/>
+              <a:ext cx="141316" cy="575003"/>
+            </a:xfrm>
+            <a:prstGeom prst="rect">
+              <a:avLst/>
+            </a:prstGeom>
+            <a:noFill/>
+          </p:spPr>
+          <p:txBody>
+            <a:bodyPr wrap="none" rtlCol="0">
+              <a:spAutoFit/>
+            </a:bodyPr>
+            <a:lstStyle/>
+            <a:p>
+              <a:endParaRPr lang="en-US" sz="4000" dirty="0"/>
+            </a:p>
+          </p:txBody>
+        </p:sp>
+        <p:pic>
+          <p:nvPicPr>
+            <p:cNvPr id="15650" name="Graphic 15649">
+              <a:extLst>
+                <a:ext uri="{FF2B5EF4-FFF2-40B4-BE49-F238E27FC236}">
+                  <a16:creationId xmlns:a16="http://schemas.microsoft.com/office/drawing/2014/main" id="{A066B4DE-396E-E58D-5D45-BFC7D72F81D7}"/>
+                </a:ext>
+              </a:extLst>
+            </p:cNvPr>
+            <p:cNvPicPr>
+              <a:picLocks noChangeAspect="1"/>
+            </p:cNvPicPr>
+            <p:nvPr/>
+          </p:nvPicPr>
+          <p:blipFill rotWithShape="1">
+            <a:blip r:embed="rId23">
+              <a:extLst>
+                <a:ext uri="{28A0092B-C50C-407E-A947-70E740481C1C}">
+                  <a14:useLocalDpi xmlns:a14="http://schemas.microsoft.com/office/drawing/2010/main" val="0"/>
+                </a:ext>
+                <a:ext uri="{96DAC541-7B7A-43D3-8B79-37D633B846F1}">
+                  <asvg:svgBlip xmlns:asvg="http://schemas.microsoft.com/office/drawing/2016/SVG/main" r:embed="rId24"/>
+                </a:ext>
+              </a:extLst>
+            </a:blip>
+            <a:srcRect l="10653" b="8997"/>
+            <a:stretch/>
+          </p:blipFill>
+          <p:spPr>
+            <a:xfrm>
+              <a:off x="38145721" y="5920531"/>
+              <a:ext cx="5558180" cy="5870860"/>
+            </a:xfrm>
+            <a:prstGeom prst="rect">
+              <a:avLst/>
+            </a:prstGeom>
+          </p:spPr>
+        </p:pic>
+        <p:sp>
+          <p:nvSpPr>
+            <p:cNvPr id="15715" name="TextBox 15714">
+              <a:extLst>
+                <a:ext uri="{FF2B5EF4-FFF2-40B4-BE49-F238E27FC236}">
+                  <a16:creationId xmlns:a16="http://schemas.microsoft.com/office/drawing/2014/main" id="{6A186BD7-7E16-8AE4-2E56-FAD05BEC16F6}"/>
+                </a:ext>
+              </a:extLst>
+            </p:cNvPr>
+            <p:cNvSpPr txBox="1"/>
+            <p:nvPr/>
+          </p:nvSpPr>
+          <p:spPr>
+            <a:xfrm rot="16200000">
+              <a:off x="36657648" y="8884400"/>
+              <a:ext cx="2422148" cy="423798"/>
+            </a:xfrm>
+            <a:prstGeom prst="rect">
+              <a:avLst/>
+            </a:prstGeom>
+            <a:noFill/>
+          </p:spPr>
+          <p:txBody>
+            <a:bodyPr wrap="none" rtlCol="0">
+              <a:spAutoFit/>
+            </a:bodyPr>
+            <a:lstStyle/>
+            <a:p>
+              <a:r>
+                <a:rPr lang="en-US" sz="3000" dirty="0" err="1"/>
+                <a:t>dlPFC</a:t>
+              </a:r>
+              <a:r>
+                <a:rPr lang="en-US" sz="3000" dirty="0"/>
+                <a:t> activation</a:t>
+              </a:r>
+            </a:p>
+          </p:txBody>
+        </p:sp>
+        <p:sp>
+          <p:nvSpPr>
+            <p:cNvPr id="15737" name="Rectangle 15736">
+              <a:extLst>
+                <a:ext uri="{FF2B5EF4-FFF2-40B4-BE49-F238E27FC236}">
+                  <a16:creationId xmlns:a16="http://schemas.microsoft.com/office/drawing/2014/main" id="{EEA0696C-64C6-F5A4-E63B-F257E6A68B97}"/>
+                </a:ext>
+              </a:extLst>
+            </p:cNvPr>
+            <p:cNvSpPr/>
+            <p:nvPr/>
+          </p:nvSpPr>
+          <p:spPr bwMode="auto">
+            <a:xfrm>
+              <a:off x="38192920" y="6275932"/>
+              <a:ext cx="5330580" cy="5411310"/>
+            </a:xfrm>
+            <a:prstGeom prst="rect">
+              <a:avLst/>
+            </a:prstGeom>
+            <a:noFill/>
+            <a:ln w="38100" cap="flat" cmpd="sng" algn="ctr">
+              <a:solidFill>
+                <a:schemeClr val="tx1"/>
+              </a:solidFill>
+              <a:prstDash val="solid"/>
+              <a:round/>
+              <a:headEnd type="none" w="med" len="med"/>
+              <a:tailEnd type="none" w="med" len="med"/>
+            </a:ln>
+            <a:effectLst/>
+          </p:spPr>
+          <p:txBody>
+            <a:bodyPr vert="horz" wrap="square" lIns="91440" tIns="45720" rIns="91440" bIns="45720" numCol="1" rtlCol="0" anchor="t" anchorCtr="0" compatLnSpc="1">
+              <a:prstTxWarp prst="textNoShape">
+                <a:avLst/>
+              </a:prstTxWarp>
+            </a:bodyPr>
+            <a:lstStyle/>
+            <a:p>
+              <a:pPr marL="0" marR="0" indent="0" algn="l" defTabSz="4389438" rtl="0" eaLnBrk="1" fontAlgn="base" latinLnBrk="0" hangingPunct="1">
+                <a:lnSpc>
+                  <a:spcPct val="100000"/>
+                </a:lnSpc>
+                <a:spcBef>
+                  <a:spcPct val="0"/>
+                </a:spcBef>
+                <a:spcAft>
+                  <a:spcPct val="0"/>
+                </a:spcAft>
+                <a:buClrTx/>
+                <a:buSzTx/>
+                <a:buFontTx/>
+                <a:buNone/>
+                <a:tabLst/>
+              </a:pPr>
+              <a:endParaRPr kumimoji="0" lang="en-US" sz="1800" b="0" i="0" u="none" strike="noStrike" cap="none" normalizeH="0" baseline="0">
+                <a:ln>
+                  <a:noFill/>
+                </a:ln>
+                <a:solidFill>
+                  <a:schemeClr val="tx1"/>
+                </a:solidFill>
+                <a:effectLst/>
+                <a:latin typeface="Arial" charset="0"/>
+                <a:cs typeface="Arial" charset="0"/>
+              </a:endParaRPr>
+            </a:p>
+          </p:txBody>
+        </p:sp>
+      </p:grpSp>
+      <p:pic>
+        <p:nvPicPr>
+          <p:cNvPr id="1025" name="Picture 1" descr="page1image36299968">
+            <a:extLst>
+              <a:ext uri="{FF2B5EF4-FFF2-40B4-BE49-F238E27FC236}">
+                <a16:creationId xmlns:a16="http://schemas.microsoft.com/office/drawing/2014/main" id="{60035D50-8936-684B-B250-A56C0072CD1D}"/>
+              </a:ext>
+            </a:extLst>
+          </p:cNvPr>
+          <p:cNvPicPr>
+            <a:picLocks noChangeAspect="1" noChangeArrowheads="1"/>
+          </p:cNvPicPr>
+          <p:nvPr/>
+        </p:nvPicPr>
+        <p:blipFill>
+          <a:blip r:embed="rId25">
+            <a:extLst>
+              <a:ext uri="{28A0092B-C50C-407E-A947-70E740481C1C}">
+                <a14:useLocalDpi xmlns:a14="http://schemas.microsoft.com/office/drawing/2010/main" val="0"/>
+              </a:ext>
+            </a:extLst>
+          </a:blip>
+          <a:srcRect/>
+          <a:stretch>
+            <a:fillRect/>
+          </a:stretch>
+        </p:blipFill>
+        <p:spPr bwMode="auto">
+          <a:xfrm>
+            <a:off x="275214" y="487329"/>
+            <a:ext cx="3390900" cy="3390900"/>
+          </a:xfrm>
+          <a:prstGeom prst="rect">
+            <a:avLst/>
+          </a:prstGeom>
+          <a:noFill/>
+          <a:extLst>
+            <a:ext uri="{909E8E84-426E-40DD-AFC4-6F175D3DCCD1}">
+              <a14:hiddenFill xmlns:a14="http://schemas.microsoft.com/office/drawing/2010/main">
+                <a:solidFill>
+                  <a:srgbClr val="FFFFFF"/>
+                </a:solidFill>
+              </a14:hiddenFill>
+            </a:ext>
+          </a:extLst>
+        </p:spPr>
+      </p:pic>
+      <p:pic>
+        <p:nvPicPr>
+          <p:cNvPr id="1026" name="Picture 2" descr="page1image36299968">
+            <a:extLst>
+              <a:ext uri="{FF2B5EF4-FFF2-40B4-BE49-F238E27FC236}">
+                <a16:creationId xmlns:a16="http://schemas.microsoft.com/office/drawing/2014/main" id="{EA3B4680-C131-E644-9965-35912127BB0E}"/>
+              </a:ext>
+            </a:extLst>
+          </p:cNvPr>
+          <p:cNvPicPr>
+            <a:picLocks noChangeAspect="1" noChangeArrowheads="1"/>
+          </p:cNvPicPr>
+          <p:nvPr/>
+        </p:nvPicPr>
+        <p:blipFill>
+          <a:blip r:embed="rId25">
+            <a:extLst>
+              <a:ext uri="{28A0092B-C50C-407E-A947-70E740481C1C}">
+                <a14:useLocalDpi xmlns:a14="http://schemas.microsoft.com/office/drawing/2010/main" val="0"/>
+              </a:ext>
+            </a:extLst>
+          </a:blip>
+          <a:srcRect/>
+          <a:stretch>
+            <a:fillRect/>
+          </a:stretch>
+        </p:blipFill>
+        <p:spPr bwMode="auto">
+          <a:xfrm>
+            <a:off x="40116778" y="592888"/>
+            <a:ext cx="3390900" cy="3390900"/>
+          </a:xfrm>
+          <a:prstGeom prst="rect">
+            <a:avLst/>
+          </a:prstGeom>
+          <a:noFill/>
+          <a:extLst>
+            <a:ext uri="{909E8E84-426E-40DD-AFC4-6F175D3DCCD1}">
+              <a14:hiddenFill xmlns:a14="http://schemas.microsoft.com/office/drawing/2010/main">
+                <a:solidFill>
+                  <a:srgbClr val="FFFFFF"/>
+                </a:solidFill>
+              </a14:hiddenFill>
+            </a:ext>
+          </a:extLst>
+        </p:spPr>
+      </p:pic>
+      <p:pic>
+        <p:nvPicPr>
+          <p:cNvPr id="1027" name="Picture 3" descr="page1image36299744">
+            <a:extLst>
+              <a:ext uri="{FF2B5EF4-FFF2-40B4-BE49-F238E27FC236}">
+                <a16:creationId xmlns:a16="http://schemas.microsoft.com/office/drawing/2014/main" id="{C5462043-3FBA-174F-8046-F6A09633CF1A}"/>
+              </a:ext>
+            </a:extLst>
+          </p:cNvPr>
+          <p:cNvPicPr>
+            <a:picLocks noChangeAspect="1" noChangeArrowheads="1"/>
+          </p:cNvPicPr>
+          <p:nvPr/>
+        </p:nvPicPr>
+        <p:blipFill>
+          <a:blip r:embed="rId26">
+            <a:extLst>
+              <a:ext uri="{28A0092B-C50C-407E-A947-70E740481C1C}">
+                <a14:useLocalDpi xmlns:a14="http://schemas.microsoft.com/office/drawing/2010/main" val="0"/>
+              </a:ext>
+            </a:extLst>
+          </a:blip>
+          <a:srcRect/>
+          <a:stretch>
+            <a:fillRect/>
+          </a:stretch>
+        </p:blipFill>
+        <p:spPr bwMode="auto">
+          <a:xfrm>
+            <a:off x="40225086" y="643380"/>
+            <a:ext cx="3238500" cy="3238500"/>
+          </a:xfrm>
+          <a:prstGeom prst="rect">
+            <a:avLst/>
+          </a:prstGeom>
+          <a:noFill/>
+          <a:extLst>
+            <a:ext uri="{909E8E84-426E-40DD-AFC4-6F175D3DCCD1}">
+              <a14:hiddenFill xmlns:a14="http://schemas.microsoft.com/office/drawing/2010/main">
+                <a:solidFill>
+                  <a:srgbClr val="FFFFFF"/>
+                </a:solidFill>
+              </a14:hiddenFill>
+            </a:ext>
+          </a:extLst>
+        </p:spPr>
+      </p:pic>
+      <p:pic>
+        <p:nvPicPr>
+          <p:cNvPr id="1028" name="Picture 4" descr="page1image52530848">
+            <a:extLst>
+              <a:ext uri="{FF2B5EF4-FFF2-40B4-BE49-F238E27FC236}">
+                <a16:creationId xmlns:a16="http://schemas.microsoft.com/office/drawing/2014/main" id="{B03A8A5E-93A8-8D4C-8490-C8A39AE1B28B}"/>
+              </a:ext>
+            </a:extLst>
+          </p:cNvPr>
+          <p:cNvPicPr>
+            <a:picLocks noChangeAspect="1" noChangeArrowheads="1"/>
+          </p:cNvPicPr>
+          <p:nvPr/>
+        </p:nvPicPr>
+        <p:blipFill>
+          <a:blip r:embed="rId27">
+            <a:extLst>
+              <a:ext uri="{28A0092B-C50C-407E-A947-70E740481C1C}">
+                <a14:useLocalDpi xmlns:a14="http://schemas.microsoft.com/office/drawing/2010/main" val="0"/>
+              </a:ext>
+            </a:extLst>
+          </a:blip>
+          <a:srcRect/>
+          <a:stretch>
+            <a:fillRect/>
+          </a:stretch>
+        </p:blipFill>
+        <p:spPr bwMode="auto">
+          <a:xfrm>
+            <a:off x="40116778" y="592888"/>
+            <a:ext cx="30238700" cy="1016000"/>
+          </a:xfrm>
+          <a:prstGeom prst="rect">
+            <a:avLst/>
+          </a:prstGeom>
+          <a:noFill/>
+          <a:extLst>
+            <a:ext uri="{909E8E84-426E-40DD-AFC4-6F175D3DCCD1}">
+              <a14:hiddenFill xmlns:a14="http://schemas.microsoft.com/office/drawing/2010/main">
+                <a:solidFill>
+                  <a:srgbClr val="FFFFFF"/>
+                </a:solidFill>
+              </a14:hiddenFill>
+            </a:ext>
+          </a:extLst>
+        </p:spPr>
+      </p:pic>
       <p:sp>
         <p:nvSpPr>
-          <p:cNvPr id="15736" name="Rectangle 15735">
+          <p:cNvPr id="155" name="Rectangle 154">
             <a:extLst>
               <a:ext uri="{FF2B5EF4-FFF2-40B4-BE49-F238E27FC236}">
-                <a16:creationId xmlns:a16="http://schemas.microsoft.com/office/drawing/2014/main" id="{885157CA-2A93-73F2-A17C-8ACD95507E22}"/>
+                <a16:creationId xmlns:a16="http://schemas.microsoft.com/office/drawing/2014/main" id="{8F908185-E22F-CB44-8E95-78E9235C0525}"/>
               </a:ext>
             </a:extLst>
           </p:cNvPr>
           <p:cNvSpPr/>
           <p:nvPr/>
         </p:nvSpPr>
-        <p:spPr bwMode="auto">
+        <p:spPr>
           <a:xfrm>
-            <a:off x="38024698" y="15618426"/>
-            <a:ext cx="5330580" cy="5411310"/>
+            <a:off x="30813844" y="20893442"/>
+            <a:ext cx="12914399" cy="3200876"/>
           </a:xfrm>
           <a:prstGeom prst="rect">
             <a:avLst/>
           </a:prstGeom>
-          <a:noFill/>
-          <a:ln w="38100" cap="flat" cmpd="sng" algn="ctr">
-            <a:solidFill>
-              <a:schemeClr val="tx1"/>
-            </a:solidFill>
-            <a:prstDash val="solid"/>
-            <a:round/>
-            <a:headEnd type="none" w="med" len="med"/>
-            <a:tailEnd type="none" w="med" len="med"/>
-          </a:ln>
-          <a:effectLst/>
         </p:spPr>
         <p:txBody>
-          <a:bodyPr vert="horz" wrap="square" lIns="91440" tIns="45720" rIns="91440" bIns="45720" numCol="1" rtlCol="0" anchor="t" anchorCtr="0" compatLnSpc="1">
-            <a:prstTxWarp prst="textNoShape">
-              <a:avLst/>
-            </a:prstTxWarp>
+          <a:bodyPr wrap="square" lIns="91440" tIns="45720" rIns="91440" bIns="45720" anchor="t">
+            <a:spAutoFit/>
           </a:bodyPr>
           <a:lstStyle/>
           <a:p>
-            <a:pPr marL="0" marR="0" indent="0" algn="l" defTabSz="4389438" rtl="0" eaLnBrk="1" fontAlgn="base" latinLnBrk="0" hangingPunct="1">
-              <a:lnSpc>
-                <a:spcPct val="100000"/>
-              </a:lnSpc>
+            <a:pPr marL="457200" indent="-457200">
               <a:spcBef>
-                <a:spcPct val="0"/>
+                <a:spcPts val="360"/>
               </a:spcBef>
               <a:spcAft>
-                <a:spcPct val="0"/>
+                <a:spcPts val="0"/>
               </a:spcAft>
-              <a:buClrTx/>
-              <a:buSzTx/>
-              <a:buFontTx/>
-              <a:buNone/>
-              <a:tabLst/>
+              <a:buFont typeface="Arial" panose="020B0604020202020204" pitchFamily="34" charset="0"/>
+              <a:buChar char="•"/>
             </a:pPr>
-            <a:endParaRPr kumimoji="0" lang="en-US" sz="1800" b="0" i="0" u="none" strike="noStrike" cap="none" normalizeH="0" baseline="0">
-              <a:ln>
-                <a:noFill/>
-              </a:ln>
-              <a:solidFill>
-                <a:schemeClr val="tx1"/>
-              </a:solidFill>
-              <a:effectLst/>
-              <a:latin typeface="Arial" charset="0"/>
-              <a:cs typeface="Arial" charset="0"/>
+            <a:r>
+              <a:rPr lang="en-US" sz="3200" dirty="0">
+                <a:latin typeface="Helvetica"/>
+                <a:ea typeface="MS PGothic"/>
+                <a:cs typeface="Helvetica"/>
+              </a:rPr>
+              <a:t>We found that friend defecting resulted in increased </a:t>
+            </a:r>
+            <a:r>
+              <a:rPr lang="en-US" sz="3200" dirty="0" err="1">
+                <a:latin typeface="Helvetica"/>
+                <a:ea typeface="MS PGothic"/>
+                <a:cs typeface="Helvetica"/>
+              </a:rPr>
+              <a:t>dlPFC</a:t>
+            </a:r>
+            <a:r>
+              <a:rPr lang="en-US" sz="3200" dirty="0">
+                <a:latin typeface="Helvetica"/>
+                <a:ea typeface="MS PGothic"/>
+                <a:cs typeface="Helvetica"/>
+              </a:rPr>
+              <a:t> activation in older adults compared to younger adults. </a:t>
+            </a:r>
+          </a:p>
+          <a:p>
+            <a:pPr>
+              <a:spcBef>
+                <a:spcPts val="360"/>
+              </a:spcBef>
+              <a:spcAft>
+                <a:spcPts val="0"/>
+              </a:spcAft>
+            </a:pPr>
+            <a:endParaRPr lang="en-US" sz="3200" dirty="0">
+              <a:latin typeface="Helvetica"/>
+              <a:ea typeface="MS PGothic"/>
+              <a:cs typeface="Helvetica"/>
             </a:endParaRPr>
           </a:p>
-        </p:txBody>
-      </p:sp>
-      <p:sp>
-        <p:nvSpPr>
-          <p:cNvPr id="15737" name="Rectangle 15736">
-            <a:extLst>
-              <a:ext uri="{FF2B5EF4-FFF2-40B4-BE49-F238E27FC236}">
-                <a16:creationId xmlns:a16="http://schemas.microsoft.com/office/drawing/2014/main" id="{EEA0696C-64C6-F5A4-E63B-F257E6A68B97}"/>
-              </a:ext>
-            </a:extLst>
-          </p:cNvPr>
-          <p:cNvSpPr/>
-          <p:nvPr/>
-        </p:nvSpPr>
-        <p:spPr bwMode="auto">
-          <a:xfrm>
-            <a:off x="38192920" y="6275932"/>
-            <a:ext cx="5330580" cy="5411310"/>
-          </a:xfrm>
-          <a:prstGeom prst="rect">
-            <a:avLst/>
-          </a:prstGeom>
-          <a:noFill/>
-          <a:ln w="38100" cap="flat" cmpd="sng" algn="ctr">
-            <a:solidFill>
-              <a:schemeClr val="tx1"/>
-            </a:solidFill>
-            <a:prstDash val="solid"/>
-            <a:round/>
-            <a:headEnd type="none" w="med" len="med"/>
-            <a:tailEnd type="none" w="med" len="med"/>
-          </a:ln>
-          <a:effectLst/>
-        </p:spPr>
-        <p:txBody>
-          <a:bodyPr vert="horz" wrap="square" lIns="91440" tIns="45720" rIns="91440" bIns="45720" numCol="1" rtlCol="0" anchor="t" anchorCtr="0" compatLnSpc="1">
-            <a:prstTxWarp prst="textNoShape">
-              <a:avLst/>
-            </a:prstTxWarp>
-          </a:bodyPr>
-          <a:lstStyle/>
           <a:p>
-            <a:pPr marL="0" marR="0" indent="0" algn="l" defTabSz="4389438" rtl="0" eaLnBrk="1" fontAlgn="base" latinLnBrk="0" hangingPunct="1">
-              <a:lnSpc>
-                <a:spcPct val="100000"/>
-              </a:lnSpc>
+            <a:pPr marL="457200" indent="-457200">
               <a:spcBef>
-                <a:spcPct val="0"/>
+                <a:spcPts val="360"/>
               </a:spcBef>
               <a:spcAft>
-                <a:spcPct val="0"/>
+                <a:spcPts val="0"/>
               </a:spcAft>
-              <a:buClrTx/>
-              <a:buSzTx/>
-              <a:buFontTx/>
-              <a:buNone/>
-              <a:tabLst/>
+              <a:buFont typeface="Arial" panose="020B0604020202020204" pitchFamily="34" charset="0"/>
+              <a:buChar char="•"/>
             </a:pPr>
-            <a:endParaRPr kumimoji="0" lang="en-US" sz="1800" b="0" i="0" u="none" strike="noStrike" cap="none" normalizeH="0" baseline="0">
-              <a:ln>
-                <a:noFill/>
-              </a:ln>
-              <a:solidFill>
-                <a:schemeClr val="tx1"/>
-              </a:solidFill>
-              <a:effectLst/>
-              <a:latin typeface="Arial" charset="0"/>
-              <a:cs typeface="Arial" charset="0"/>
+            <a:r>
+              <a:rPr lang="en-US" sz="3200" dirty="0">
+                <a:latin typeface="Helvetica"/>
+                <a:ea typeface="MS PGothic"/>
+                <a:cs typeface="Helvetica"/>
+              </a:rPr>
+              <a:t>We also found that friend reciprocating resulted in reduced </a:t>
+            </a:r>
+            <a:r>
+              <a:rPr lang="en-US" sz="3200" dirty="0" err="1">
+                <a:latin typeface="Helvetica"/>
+                <a:ea typeface="MS PGothic"/>
+                <a:cs typeface="Helvetica"/>
+              </a:rPr>
+              <a:t>mPFC</a:t>
+            </a:r>
+            <a:r>
+              <a:rPr lang="en-US" sz="3200" dirty="0">
+                <a:latin typeface="Helvetica"/>
+                <a:ea typeface="MS PGothic"/>
+                <a:cs typeface="Helvetica"/>
+              </a:rPr>
+              <a:t> activation in older adults compared to younger adults.</a:t>
+            </a:r>
+          </a:p>
+          <a:p>
+            <a:pPr algn="ctr">
+              <a:spcBef>
+                <a:spcPts val="360"/>
+              </a:spcBef>
+              <a:spcAft>
+                <a:spcPts val="0"/>
+              </a:spcAft>
+            </a:pPr>
+            <a:endParaRPr lang="en-US" sz="3200" dirty="0">
+              <a:latin typeface="Helvetica"/>
+              <a:ea typeface="MS PGothic"/>
+              <a:cs typeface="Helvetica"/>
             </a:endParaRPr>
           </a:p>
         </p:txBody>
@@ -15044,6 +14311,788 @@
           </a:prstGeom>
         </p:spPr>
       </p:pic>
+      <p:sp>
+        <p:nvSpPr>
+          <p:cNvPr id="4" name="TextBox 3">
+            <a:extLst>
+              <a:ext uri="{FF2B5EF4-FFF2-40B4-BE49-F238E27FC236}">
+                <a16:creationId xmlns:a16="http://schemas.microsoft.com/office/drawing/2014/main" id="{569D788F-1A31-5C44-8566-4F528D1785C4}"/>
+              </a:ext>
+            </a:extLst>
+          </p:cNvPr>
+          <p:cNvSpPr txBox="1"/>
+          <p:nvPr/>
+        </p:nvSpPr>
+        <p:spPr>
+          <a:xfrm>
+            <a:off x="26309510" y="21994513"/>
+            <a:ext cx="12586455" cy="1077218"/>
+          </a:xfrm>
+          <a:prstGeom prst="rect">
+            <a:avLst/>
+          </a:prstGeom>
+          <a:noFill/>
+        </p:spPr>
+        <p:txBody>
+          <a:bodyPr wrap="square" lIns="91440" tIns="45720" rIns="91440" bIns="45720" anchor="t">
+            <a:spAutoFit/>
+          </a:bodyPr>
+          <a:lstStyle/>
+          <a:p>
+            <a:pPr algn="ctr"/>
+            <a:r>
+              <a:rPr lang="en-US" altLang="en-US" sz="3200" dirty="0">
+                <a:latin typeface="Helvetica"/>
+                <a:ea typeface="MS PGothic"/>
+              </a:rPr>
+              <a:t>Participants were asked to rate their closeness with the three partners before the task on a 7-point Likert Scale</a:t>
+            </a:r>
+          </a:p>
+        </p:txBody>
+      </p:sp>
+      <p:grpSp>
+        <p:nvGrpSpPr>
+          <p:cNvPr id="6" name="Group 5">
+            <a:extLst>
+              <a:ext uri="{FF2B5EF4-FFF2-40B4-BE49-F238E27FC236}">
+                <a16:creationId xmlns:a16="http://schemas.microsoft.com/office/drawing/2014/main" id="{8C166C9F-8AFD-5144-B709-C6E7D9C77CF0}"/>
+              </a:ext>
+            </a:extLst>
+          </p:cNvPr>
+          <p:cNvGrpSpPr/>
+          <p:nvPr/>
+        </p:nvGrpSpPr>
+        <p:grpSpPr>
+          <a:xfrm>
+            <a:off x="26566310" y="4480341"/>
+            <a:ext cx="6524991" cy="6955685"/>
+            <a:chOff x="23087465" y="23975816"/>
+            <a:chExt cx="6524991" cy="6955685"/>
+          </a:xfrm>
+        </p:grpSpPr>
+        <p:grpSp>
+          <p:nvGrpSpPr>
+            <p:cNvPr id="7" name="Group 6">
+              <a:extLst>
+                <a:ext uri="{FF2B5EF4-FFF2-40B4-BE49-F238E27FC236}">
+                  <a16:creationId xmlns:a16="http://schemas.microsoft.com/office/drawing/2014/main" id="{933FE7B0-A177-6F40-9F4C-961AE0B6758A}"/>
+                </a:ext>
+              </a:extLst>
+            </p:cNvPr>
+            <p:cNvGrpSpPr/>
+            <p:nvPr/>
+          </p:nvGrpSpPr>
+          <p:grpSpPr>
+            <a:xfrm>
+              <a:off x="23087465" y="23975816"/>
+              <a:ext cx="6524991" cy="6955685"/>
+              <a:chOff x="23087465" y="23975816"/>
+              <a:chExt cx="6524991" cy="6955685"/>
+            </a:xfrm>
+          </p:grpSpPr>
+          <p:grpSp>
+            <p:nvGrpSpPr>
+              <p:cNvPr id="9" name="Group 8">
+                <a:extLst>
+                  <a:ext uri="{FF2B5EF4-FFF2-40B4-BE49-F238E27FC236}">
+                    <a16:creationId xmlns:a16="http://schemas.microsoft.com/office/drawing/2014/main" id="{F7D19EB7-28AC-B744-9ABA-310DAFD29B0A}"/>
+                  </a:ext>
+                </a:extLst>
+              </p:cNvPr>
+              <p:cNvGrpSpPr/>
+              <p:nvPr/>
+            </p:nvGrpSpPr>
+            <p:grpSpPr>
+              <a:xfrm>
+                <a:off x="23087465" y="23975816"/>
+                <a:ext cx="6524991" cy="6955685"/>
+                <a:chOff x="23087465" y="23975816"/>
+                <a:chExt cx="6524991" cy="6955685"/>
+              </a:xfrm>
+            </p:grpSpPr>
+            <p:pic>
+              <p:nvPicPr>
+                <p:cNvPr id="11" name="Graphic 10">
+                  <a:extLst>
+                    <a:ext uri="{FF2B5EF4-FFF2-40B4-BE49-F238E27FC236}">
+                      <a16:creationId xmlns:a16="http://schemas.microsoft.com/office/drawing/2014/main" id="{507378A2-7B75-EB4F-912D-685D66F7F00A}"/>
+                    </a:ext>
+                  </a:extLst>
+                </p:cNvPr>
+                <p:cNvPicPr>
+                  <a:picLocks noChangeAspect="1"/>
+                </p:cNvPicPr>
+                <p:nvPr/>
+              </p:nvPicPr>
+              <p:blipFill rotWithShape="1">
+                <a:blip r:embed="rId6">
+                  <a:extLst>
+                    <a:ext uri="{28A0092B-C50C-407E-A947-70E740481C1C}">
+                      <a14:useLocalDpi xmlns:a14="http://schemas.microsoft.com/office/drawing/2010/main" val="0"/>
+                    </a:ext>
+                    <a:ext uri="{96DAC541-7B7A-43D3-8B79-37D633B846F1}">
+                      <asvg:svgBlip xmlns:asvg="http://schemas.microsoft.com/office/drawing/2016/SVG/main" r:embed="rId7"/>
+                    </a:ext>
+                  </a:extLst>
+                </a:blip>
+                <a:srcRect l="10991" t="5046" r="3126" b="7756"/>
+                <a:stretch/>
+              </p:blipFill>
+              <p:spPr>
+                <a:xfrm>
+                  <a:off x="23723984" y="23975816"/>
+                  <a:ext cx="5888472" cy="6200049"/>
+                </a:xfrm>
+                <a:prstGeom prst="rect">
+                  <a:avLst/>
+                </a:prstGeom>
+              </p:spPr>
+            </p:pic>
+            <p:sp>
+              <p:nvSpPr>
+                <p:cNvPr id="12" name="TextBox 11">
+                  <a:extLst>
+                    <a:ext uri="{FF2B5EF4-FFF2-40B4-BE49-F238E27FC236}">
+                      <a16:creationId xmlns:a16="http://schemas.microsoft.com/office/drawing/2014/main" id="{AF64BED4-0C1E-384C-B252-76748CAC1B6C}"/>
+                    </a:ext>
+                  </a:extLst>
+                </p:cNvPr>
+                <p:cNvSpPr txBox="1"/>
+                <p:nvPr/>
+              </p:nvSpPr>
+              <p:spPr>
+                <a:xfrm>
+                  <a:off x="25810594" y="30223615"/>
+                  <a:ext cx="1096775" cy="707886"/>
+                </a:xfrm>
+                <a:prstGeom prst="rect">
+                  <a:avLst/>
+                </a:prstGeom>
+                <a:noFill/>
+              </p:spPr>
+              <p:txBody>
+                <a:bodyPr wrap="square" rtlCol="0">
+                  <a:spAutoFit/>
+                </a:bodyPr>
+                <a:lstStyle/>
+                <a:p>
+                  <a:r>
+                    <a:rPr lang="en-US" sz="4000" dirty="0"/>
+                    <a:t>Age</a:t>
+                  </a:r>
+                </a:p>
+              </p:txBody>
+            </p:sp>
+            <p:sp>
+              <p:nvSpPr>
+                <p:cNvPr id="13" name="TextBox 12">
+                  <a:extLst>
+                    <a:ext uri="{FF2B5EF4-FFF2-40B4-BE49-F238E27FC236}">
+                      <a16:creationId xmlns:a16="http://schemas.microsoft.com/office/drawing/2014/main" id="{A34BF677-2248-9642-9CB1-6ADE36E56B3C}"/>
+                    </a:ext>
+                  </a:extLst>
+                </p:cNvPr>
+                <p:cNvSpPr txBox="1"/>
+                <p:nvPr/>
+              </p:nvSpPr>
+              <p:spPr>
+                <a:xfrm>
+                  <a:off x="23166754" y="24615337"/>
+                  <a:ext cx="651983" cy="369332"/>
+                </a:xfrm>
+                <a:prstGeom prst="rect">
+                  <a:avLst/>
+                </a:prstGeom>
+                <a:noFill/>
+              </p:spPr>
+              <p:txBody>
+                <a:bodyPr wrap="square" rtlCol="0">
+                  <a:spAutoFit/>
+                </a:bodyPr>
+                <a:lstStyle/>
+                <a:p>
+                  <a:r>
+                    <a:rPr lang="en-US" dirty="0"/>
+                    <a:t>400</a:t>
+                  </a:r>
+                </a:p>
+              </p:txBody>
+            </p:sp>
+            <p:sp>
+              <p:nvSpPr>
+                <p:cNvPr id="14" name="TextBox 13">
+                  <a:extLst>
+                    <a:ext uri="{FF2B5EF4-FFF2-40B4-BE49-F238E27FC236}">
+                      <a16:creationId xmlns:a16="http://schemas.microsoft.com/office/drawing/2014/main" id="{CA2794F8-6A32-D94B-8839-99CAF4032589}"/>
+                    </a:ext>
+                  </a:extLst>
+                </p:cNvPr>
+                <p:cNvSpPr txBox="1"/>
+                <p:nvPr/>
+              </p:nvSpPr>
+              <p:spPr>
+                <a:xfrm>
+                  <a:off x="23087465" y="28711327"/>
+                  <a:ext cx="740088" cy="369332"/>
+                </a:xfrm>
+                <a:prstGeom prst="rect">
+                  <a:avLst/>
+                </a:prstGeom>
+                <a:noFill/>
+              </p:spPr>
+              <p:txBody>
+                <a:bodyPr wrap="square" rtlCol="0">
+                  <a:spAutoFit/>
+                </a:bodyPr>
+                <a:lstStyle/>
+                <a:p>
+                  <a:r>
+                    <a:rPr lang="en-US" dirty="0"/>
+                    <a:t>-200</a:t>
+                  </a:r>
+                </a:p>
+              </p:txBody>
+            </p:sp>
+            <p:sp>
+              <p:nvSpPr>
+                <p:cNvPr id="15" name="TextBox 14">
+                  <a:extLst>
+                    <a:ext uri="{FF2B5EF4-FFF2-40B4-BE49-F238E27FC236}">
+                      <a16:creationId xmlns:a16="http://schemas.microsoft.com/office/drawing/2014/main" id="{672E2E51-16E7-B342-93EF-ABF930710291}"/>
+                    </a:ext>
+                  </a:extLst>
+                </p:cNvPr>
+                <p:cNvSpPr txBox="1"/>
+                <p:nvPr/>
+              </p:nvSpPr>
+              <p:spPr>
+                <a:xfrm>
+                  <a:off x="23822666" y="30181392"/>
+                  <a:ext cx="505139" cy="369332"/>
+                </a:xfrm>
+                <a:prstGeom prst="rect">
+                  <a:avLst/>
+                </a:prstGeom>
+                <a:noFill/>
+              </p:spPr>
+              <p:txBody>
+                <a:bodyPr wrap="square" rtlCol="0">
+                  <a:spAutoFit/>
+                </a:bodyPr>
+                <a:lstStyle/>
+                <a:p>
+                  <a:r>
+                    <a:rPr lang="en-US" dirty="0"/>
+                    <a:t>20</a:t>
+                  </a:r>
+                </a:p>
+              </p:txBody>
+            </p:sp>
+            <p:sp>
+              <p:nvSpPr>
+                <p:cNvPr id="16" name="TextBox 15">
+                  <a:extLst>
+                    <a:ext uri="{FF2B5EF4-FFF2-40B4-BE49-F238E27FC236}">
+                      <a16:creationId xmlns:a16="http://schemas.microsoft.com/office/drawing/2014/main" id="{5E3C9A62-C76F-1041-B055-E2304EC80EB4}"/>
+                    </a:ext>
+                  </a:extLst>
+                </p:cNvPr>
+                <p:cNvSpPr txBox="1"/>
+                <p:nvPr/>
+              </p:nvSpPr>
+              <p:spPr>
+                <a:xfrm>
+                  <a:off x="27974735" y="30181392"/>
+                  <a:ext cx="505139" cy="369332"/>
+                </a:xfrm>
+                <a:prstGeom prst="rect">
+                  <a:avLst/>
+                </a:prstGeom>
+                <a:noFill/>
+              </p:spPr>
+              <p:txBody>
+                <a:bodyPr wrap="square" rtlCol="0">
+                  <a:spAutoFit/>
+                </a:bodyPr>
+                <a:lstStyle/>
+                <a:p>
+                  <a:r>
+                    <a:rPr lang="en-US" dirty="0"/>
+                    <a:t>60</a:t>
+                  </a:r>
+                </a:p>
+              </p:txBody>
+            </p:sp>
+          </p:grpSp>
+          <p:sp>
+            <p:nvSpPr>
+              <p:cNvPr id="10" name="TextBox 9">
+                <a:extLst>
+                  <a:ext uri="{FF2B5EF4-FFF2-40B4-BE49-F238E27FC236}">
+                    <a16:creationId xmlns:a16="http://schemas.microsoft.com/office/drawing/2014/main" id="{0BBA07AC-5E67-7848-9F24-BE968F5514E2}"/>
+                  </a:ext>
+                </a:extLst>
+              </p:cNvPr>
+              <p:cNvSpPr txBox="1"/>
+              <p:nvPr/>
+            </p:nvSpPr>
+            <p:spPr>
+              <a:xfrm rot="16200000">
+                <a:off x="21699109" y="26614219"/>
+                <a:ext cx="3420629" cy="553998"/>
+              </a:xfrm>
+              <a:prstGeom prst="rect">
+                <a:avLst/>
+              </a:prstGeom>
+              <a:noFill/>
+            </p:spPr>
+            <p:txBody>
+              <a:bodyPr wrap="square" rtlCol="0">
+                <a:spAutoFit/>
+              </a:bodyPr>
+              <a:lstStyle/>
+              <a:p>
+                <a:pPr algn="ctr"/>
+                <a:r>
+                  <a:rPr lang="en-US" sz="1500" dirty="0"/>
+                  <a:t>Friend (Reciprocate &gt; Defect) &gt; Computer (Reciprocate &gt; Defect)</a:t>
+                </a:r>
+              </a:p>
+            </p:txBody>
+          </p:sp>
+        </p:grpSp>
+        <p:sp>
+          <p:nvSpPr>
+            <p:cNvPr id="8" name="Rectangle 7">
+              <a:extLst>
+                <a:ext uri="{FF2B5EF4-FFF2-40B4-BE49-F238E27FC236}">
+                  <a16:creationId xmlns:a16="http://schemas.microsoft.com/office/drawing/2014/main" id="{D15CE9A9-886F-5747-B508-B31965E7B11B}"/>
+                </a:ext>
+              </a:extLst>
+            </p:cNvPr>
+            <p:cNvSpPr/>
+            <p:nvPr/>
+          </p:nvSpPr>
+          <p:spPr bwMode="auto">
+            <a:xfrm>
+              <a:off x="23891921" y="24154307"/>
+              <a:ext cx="5627696" cy="5921353"/>
+            </a:xfrm>
+            <a:prstGeom prst="rect">
+              <a:avLst/>
+            </a:prstGeom>
+            <a:noFill/>
+            <a:ln w="38100" cap="flat" cmpd="sng" algn="ctr">
+              <a:solidFill>
+                <a:schemeClr val="tx1"/>
+              </a:solidFill>
+              <a:prstDash val="solid"/>
+              <a:round/>
+              <a:headEnd type="none" w="med" len="med"/>
+              <a:tailEnd type="none" w="med" len="med"/>
+            </a:ln>
+            <a:effectLst/>
+          </p:spPr>
+          <p:txBody>
+            <a:bodyPr vert="horz" wrap="square" lIns="91440" tIns="45720" rIns="91440" bIns="45720" numCol="1" rtlCol="0" anchor="t" anchorCtr="0" compatLnSpc="1">
+              <a:prstTxWarp prst="textNoShape">
+                <a:avLst/>
+              </a:prstTxWarp>
+            </a:bodyPr>
+            <a:lstStyle/>
+            <a:p>
+              <a:pPr marL="0" marR="0" indent="0" algn="l" defTabSz="4389438" rtl="0" eaLnBrk="1" fontAlgn="base" latinLnBrk="0" hangingPunct="1">
+                <a:lnSpc>
+                  <a:spcPct val="100000"/>
+                </a:lnSpc>
+                <a:spcBef>
+                  <a:spcPct val="0"/>
+                </a:spcBef>
+                <a:spcAft>
+                  <a:spcPct val="0"/>
+                </a:spcAft>
+                <a:buClrTx/>
+                <a:buSzTx/>
+                <a:buFontTx/>
+                <a:buNone/>
+                <a:tabLst/>
+              </a:pPr>
+              <a:endParaRPr kumimoji="0" lang="en-US" sz="1800" b="0" i="0" u="none" strike="noStrike" cap="none" normalizeH="0" baseline="0">
+                <a:ln>
+                  <a:noFill/>
+                </a:ln>
+                <a:solidFill>
+                  <a:schemeClr val="tx1"/>
+                </a:solidFill>
+                <a:effectLst/>
+                <a:latin typeface="Arial" charset="0"/>
+                <a:cs typeface="Arial" charset="0"/>
+              </a:endParaRPr>
+            </a:p>
+          </p:txBody>
+        </p:sp>
+      </p:grpSp>
+      <p:grpSp>
+        <p:nvGrpSpPr>
+          <p:cNvPr id="17" name="Group 16">
+            <a:extLst>
+              <a:ext uri="{FF2B5EF4-FFF2-40B4-BE49-F238E27FC236}">
+                <a16:creationId xmlns:a16="http://schemas.microsoft.com/office/drawing/2014/main" id="{1F205221-E6BB-984A-80FC-B768489ECF10}"/>
+              </a:ext>
+            </a:extLst>
+          </p:cNvPr>
+          <p:cNvGrpSpPr/>
+          <p:nvPr/>
+        </p:nvGrpSpPr>
+        <p:grpSpPr>
+          <a:xfrm>
+            <a:off x="27234750" y="13488174"/>
+            <a:ext cx="6532972" cy="6817128"/>
+            <a:chOff x="16026704" y="24108846"/>
+            <a:chExt cx="6532972" cy="6817128"/>
+          </a:xfrm>
+        </p:grpSpPr>
+        <p:grpSp>
+          <p:nvGrpSpPr>
+            <p:cNvPr id="18" name="Group 17">
+              <a:extLst>
+                <a:ext uri="{FF2B5EF4-FFF2-40B4-BE49-F238E27FC236}">
+                  <a16:creationId xmlns:a16="http://schemas.microsoft.com/office/drawing/2014/main" id="{3B0433B2-F60B-4A4E-9F6A-D5A3E2F8F7FF}"/>
+                </a:ext>
+              </a:extLst>
+            </p:cNvPr>
+            <p:cNvGrpSpPr/>
+            <p:nvPr/>
+          </p:nvGrpSpPr>
+          <p:grpSpPr>
+            <a:xfrm>
+              <a:off x="16026704" y="24108846"/>
+              <a:ext cx="6532972" cy="6817128"/>
+              <a:chOff x="16026704" y="24108846"/>
+              <a:chExt cx="6532972" cy="6817128"/>
+            </a:xfrm>
+          </p:grpSpPr>
+          <p:pic>
+            <p:nvPicPr>
+              <p:cNvPr id="20" name="Graphic 19">
+                <a:extLst>
+                  <a:ext uri="{FF2B5EF4-FFF2-40B4-BE49-F238E27FC236}">
+                    <a16:creationId xmlns:a16="http://schemas.microsoft.com/office/drawing/2014/main" id="{CFB3CE83-290B-E54C-965D-A1F022D2AD58}"/>
+                  </a:ext>
+                </a:extLst>
+              </p:cNvPr>
+              <p:cNvPicPr>
+                <a:picLocks noChangeAspect="1"/>
+              </p:cNvPicPr>
+              <p:nvPr/>
+            </p:nvPicPr>
+            <p:blipFill rotWithShape="1">
+              <a:blip r:embed="rId8">
+                <a:extLst>
+                  <a:ext uri="{28A0092B-C50C-407E-A947-70E740481C1C}">
+                    <a14:useLocalDpi xmlns:a14="http://schemas.microsoft.com/office/drawing/2010/main" val="0"/>
+                  </a:ext>
+                  <a:ext uri="{96DAC541-7B7A-43D3-8B79-37D633B846F1}">
+                    <asvg:svgBlip xmlns:asvg="http://schemas.microsoft.com/office/drawing/2016/SVG/main" r:embed="rId9"/>
+                  </a:ext>
+                </a:extLst>
+              </a:blip>
+              <a:srcRect l="10756" t="6660" r="2865" b="7584"/>
+              <a:stretch/>
+            </p:blipFill>
+            <p:spPr>
+              <a:xfrm>
+                <a:off x="16651056" y="24108846"/>
+                <a:ext cx="5908620" cy="6083352"/>
+              </a:xfrm>
+              <a:prstGeom prst="rect">
+                <a:avLst/>
+              </a:prstGeom>
+            </p:spPr>
+          </p:pic>
+          <p:sp>
+            <p:nvSpPr>
+              <p:cNvPr id="21" name="TextBox 20">
+                <a:extLst>
+                  <a:ext uri="{FF2B5EF4-FFF2-40B4-BE49-F238E27FC236}">
+                    <a16:creationId xmlns:a16="http://schemas.microsoft.com/office/drawing/2014/main" id="{89C31EF0-D61A-AC42-80D7-E4C2C70A86DD}"/>
+                  </a:ext>
+                </a:extLst>
+              </p:cNvPr>
+              <p:cNvSpPr txBox="1"/>
+              <p:nvPr/>
+            </p:nvSpPr>
+            <p:spPr>
+              <a:xfrm>
+                <a:off x="18654011" y="30218088"/>
+                <a:ext cx="1096775" cy="707886"/>
+              </a:xfrm>
+              <a:prstGeom prst="rect">
+                <a:avLst/>
+              </a:prstGeom>
+              <a:noFill/>
+            </p:spPr>
+            <p:txBody>
+              <a:bodyPr wrap="none" rtlCol="0">
+                <a:spAutoFit/>
+              </a:bodyPr>
+              <a:lstStyle/>
+              <a:p>
+                <a:r>
+                  <a:rPr lang="en-US" sz="4000" dirty="0"/>
+                  <a:t>Age</a:t>
+                </a:r>
+              </a:p>
+            </p:txBody>
+          </p:sp>
+          <p:sp>
+            <p:nvSpPr>
+              <p:cNvPr id="22" name="TextBox 21">
+                <a:extLst>
+                  <a:ext uri="{FF2B5EF4-FFF2-40B4-BE49-F238E27FC236}">
+                    <a16:creationId xmlns:a16="http://schemas.microsoft.com/office/drawing/2014/main" id="{CABAA111-FF13-5A4A-B69C-A3BEF7F2C2B3}"/>
+                  </a:ext>
+                </a:extLst>
+              </p:cNvPr>
+              <p:cNvSpPr txBox="1"/>
+              <p:nvPr/>
+            </p:nvSpPr>
+            <p:spPr>
+              <a:xfrm rot="16200000">
+                <a:off x="14608848" y="26568394"/>
+                <a:ext cx="3420629" cy="553998"/>
+              </a:xfrm>
+              <a:prstGeom prst="rect">
+                <a:avLst/>
+              </a:prstGeom>
+              <a:noFill/>
+            </p:spPr>
+            <p:txBody>
+              <a:bodyPr wrap="square" rtlCol="0">
+                <a:spAutoFit/>
+              </a:bodyPr>
+              <a:lstStyle/>
+              <a:p>
+                <a:pPr algn="ctr"/>
+                <a:r>
+                  <a:rPr lang="en-US" sz="1500" dirty="0"/>
+                  <a:t>Friend (Reciprocate &gt; Defect) &gt; Stranger (Reciprocate &gt; Defect)</a:t>
+                </a:r>
+              </a:p>
+            </p:txBody>
+          </p:sp>
+          <p:sp>
+            <p:nvSpPr>
+              <p:cNvPr id="23" name="TextBox 22">
+                <a:extLst>
+                  <a:ext uri="{FF2B5EF4-FFF2-40B4-BE49-F238E27FC236}">
+                    <a16:creationId xmlns:a16="http://schemas.microsoft.com/office/drawing/2014/main" id="{46916F5A-8012-EA4D-BA81-C47464F545AD}"/>
+                  </a:ext>
+                </a:extLst>
+              </p:cNvPr>
+              <p:cNvSpPr txBox="1"/>
+              <p:nvPr/>
+            </p:nvSpPr>
+            <p:spPr>
+              <a:xfrm>
+                <a:off x="16115961" y="24411311"/>
+                <a:ext cx="651983" cy="424006"/>
+              </a:xfrm>
+              <a:prstGeom prst="rect">
+                <a:avLst/>
+              </a:prstGeom>
+              <a:noFill/>
+            </p:spPr>
+            <p:txBody>
+              <a:bodyPr wrap="none" rtlCol="0">
+                <a:spAutoFit/>
+              </a:bodyPr>
+              <a:lstStyle/>
+              <a:p>
+                <a:r>
+                  <a:rPr lang="en-US" dirty="0"/>
+                  <a:t>400</a:t>
+                </a:r>
+              </a:p>
+            </p:txBody>
+          </p:sp>
+          <p:sp>
+            <p:nvSpPr>
+              <p:cNvPr id="24" name="TextBox 23">
+                <a:extLst>
+                  <a:ext uri="{FF2B5EF4-FFF2-40B4-BE49-F238E27FC236}">
+                    <a16:creationId xmlns:a16="http://schemas.microsoft.com/office/drawing/2014/main" id="{CDC5619E-A9D2-A346-9083-0B1EA81D8AF9}"/>
+                  </a:ext>
+                </a:extLst>
+              </p:cNvPr>
+              <p:cNvSpPr txBox="1"/>
+              <p:nvPr/>
+            </p:nvSpPr>
+            <p:spPr>
+              <a:xfrm>
+                <a:off x="16026704" y="28875791"/>
+                <a:ext cx="740088" cy="424006"/>
+              </a:xfrm>
+              <a:prstGeom prst="rect">
+                <a:avLst/>
+              </a:prstGeom>
+              <a:noFill/>
+            </p:spPr>
+            <p:txBody>
+              <a:bodyPr wrap="none" rtlCol="0">
+                <a:spAutoFit/>
+              </a:bodyPr>
+              <a:lstStyle/>
+              <a:p>
+                <a:r>
+                  <a:rPr lang="en-US" dirty="0"/>
+                  <a:t>-200</a:t>
+                </a:r>
+              </a:p>
+            </p:txBody>
+          </p:sp>
+          <p:sp>
+            <p:nvSpPr>
+              <p:cNvPr id="25" name="TextBox 24">
+                <a:extLst>
+                  <a:ext uri="{FF2B5EF4-FFF2-40B4-BE49-F238E27FC236}">
+                    <a16:creationId xmlns:a16="http://schemas.microsoft.com/office/drawing/2014/main" id="{2F936398-21FA-9248-BA6E-155315401154}"/>
+                  </a:ext>
+                </a:extLst>
+              </p:cNvPr>
+              <p:cNvSpPr txBox="1"/>
+              <p:nvPr/>
+            </p:nvSpPr>
+            <p:spPr>
+              <a:xfrm>
+                <a:off x="16666083" y="30175865"/>
+                <a:ext cx="505139" cy="424006"/>
+              </a:xfrm>
+              <a:prstGeom prst="rect">
+                <a:avLst/>
+              </a:prstGeom>
+              <a:noFill/>
+            </p:spPr>
+            <p:txBody>
+              <a:bodyPr wrap="none" rtlCol="0">
+                <a:spAutoFit/>
+              </a:bodyPr>
+              <a:lstStyle/>
+              <a:p>
+                <a:r>
+                  <a:rPr lang="en-US" dirty="0"/>
+                  <a:t>20</a:t>
+                </a:r>
+              </a:p>
+            </p:txBody>
+          </p:sp>
+          <p:sp>
+            <p:nvSpPr>
+              <p:cNvPr id="26" name="TextBox 25">
+                <a:extLst>
+                  <a:ext uri="{FF2B5EF4-FFF2-40B4-BE49-F238E27FC236}">
+                    <a16:creationId xmlns:a16="http://schemas.microsoft.com/office/drawing/2014/main" id="{4C84EDFF-F84E-1940-8B80-DC8DAD1049BE}"/>
+                  </a:ext>
+                </a:extLst>
+              </p:cNvPr>
+              <p:cNvSpPr txBox="1"/>
+              <p:nvPr/>
+            </p:nvSpPr>
+            <p:spPr>
+              <a:xfrm>
+                <a:off x="20818152" y="30175865"/>
+                <a:ext cx="505139" cy="424006"/>
+              </a:xfrm>
+              <a:prstGeom prst="rect">
+                <a:avLst/>
+              </a:prstGeom>
+              <a:noFill/>
+            </p:spPr>
+            <p:txBody>
+              <a:bodyPr wrap="none" rtlCol="0">
+                <a:spAutoFit/>
+              </a:bodyPr>
+              <a:lstStyle/>
+              <a:p>
+                <a:r>
+                  <a:rPr lang="en-US" dirty="0"/>
+                  <a:t>60</a:t>
+                </a:r>
+              </a:p>
+            </p:txBody>
+          </p:sp>
+        </p:grpSp>
+        <p:sp>
+          <p:nvSpPr>
+            <p:cNvPr id="19" name="Rectangle 18">
+              <a:extLst>
+                <a:ext uri="{FF2B5EF4-FFF2-40B4-BE49-F238E27FC236}">
+                  <a16:creationId xmlns:a16="http://schemas.microsoft.com/office/drawing/2014/main" id="{47323B76-BAFB-8D40-86EB-D23726D85EA0}"/>
+                </a:ext>
+              </a:extLst>
+            </p:cNvPr>
+            <p:cNvSpPr/>
+            <p:nvPr/>
+          </p:nvSpPr>
+          <p:spPr bwMode="auto">
+            <a:xfrm>
+              <a:off x="16871673" y="24149410"/>
+              <a:ext cx="5627696" cy="5921353"/>
+            </a:xfrm>
+            <a:prstGeom prst="rect">
+              <a:avLst/>
+            </a:prstGeom>
+            <a:noFill/>
+            <a:ln w="38100" cap="flat" cmpd="sng" algn="ctr">
+              <a:solidFill>
+                <a:schemeClr val="tx1"/>
+              </a:solidFill>
+              <a:prstDash val="solid"/>
+              <a:round/>
+              <a:headEnd type="none" w="med" len="med"/>
+              <a:tailEnd type="none" w="med" len="med"/>
+            </a:ln>
+            <a:effectLst/>
+          </p:spPr>
+          <p:txBody>
+            <a:bodyPr vert="horz" wrap="square" lIns="91440" tIns="45720" rIns="91440" bIns="45720" numCol="1" rtlCol="0" anchor="t" anchorCtr="0" compatLnSpc="1">
+              <a:prstTxWarp prst="textNoShape">
+                <a:avLst/>
+              </a:prstTxWarp>
+            </a:bodyPr>
+            <a:lstStyle/>
+            <a:p>
+              <a:pPr marL="0" marR="0" indent="0" algn="l" defTabSz="4389438" rtl="0" eaLnBrk="1" fontAlgn="base" latinLnBrk="0" hangingPunct="1">
+                <a:lnSpc>
+                  <a:spcPct val="100000"/>
+                </a:lnSpc>
+                <a:spcBef>
+                  <a:spcPct val="0"/>
+                </a:spcBef>
+                <a:spcAft>
+                  <a:spcPct val="0"/>
+                </a:spcAft>
+                <a:buClrTx/>
+                <a:buSzTx/>
+                <a:buFontTx/>
+                <a:buNone/>
+                <a:tabLst/>
+              </a:pPr>
+              <a:endParaRPr kumimoji="0" lang="en-US" sz="1800" b="0" i="0" u="none" strike="noStrike" cap="none" normalizeH="0" baseline="0">
+                <a:ln>
+                  <a:noFill/>
+                </a:ln>
+                <a:solidFill>
+                  <a:schemeClr val="tx1"/>
+                </a:solidFill>
+                <a:effectLst/>
+                <a:latin typeface="Arial" charset="0"/>
+                <a:cs typeface="Arial" charset="0"/>
+              </a:endParaRPr>
+            </a:p>
+          </p:txBody>
+        </p:sp>
+      </p:grpSp>
     </p:spTree>
     <p:extLst>
       <p:ext uri="{BB962C8B-B14F-4D97-AF65-F5344CB8AC3E}">
@@ -18189,6 +18238,15 @@
 </file>
 
 <file path=customXml/item1.xml><?xml version="1.0" encoding="utf-8"?>
+<?mso-contentType ?>
+<FormTemplates xmlns="http://schemas.microsoft.com/sharepoint/v3/contenttype/forms">
+  <Display>DocumentLibraryForm</Display>
+  <Edit>DocumentLibraryForm</Edit>
+  <New>DocumentLibraryForm</New>
+</FormTemplates>
+</file>
+
+<file path=customXml/item2.xml><?xml version="1.0" encoding="utf-8"?>
 <ct:contentTypeSchema xmlns:ct="http://schemas.microsoft.com/office/2006/metadata/contentType" xmlns:ma="http://schemas.microsoft.com/office/2006/metadata/properties/metaAttributes" ct:_="" ma:_="" ma:contentTypeName="Document" ma:contentTypeID="0x01010080DE0AC601CE7945A16C28BE7D604718" ma:contentTypeVersion="16" ma:contentTypeDescription="Create a new document." ma:contentTypeScope="" ma:versionID="7200742d51933ad5859751156d985908">
   <xsd:schema xmlns:xsd="http://www.w3.org/2001/XMLSchema" xmlns:xs="http://www.w3.org/2001/XMLSchema" xmlns:p="http://schemas.microsoft.com/office/2006/metadata/properties" xmlns:ns2="068132b6-27af-4cc5-9624-46e0bc309f9c" xmlns:ns3="1ec1d487-840c-40ff-aca1-00ff13008544" targetNamespace="http://schemas.microsoft.com/office/2006/metadata/properties" ma:root="true" ma:fieldsID="ef3bb859774f4d5f12e6e11e5f5551df" ns2:_="" ns3:_="">
     <xsd:import namespace="068132b6-27af-4cc5-9624-46e0bc309f9c"/>
@@ -18431,16 +18489,15 @@
 </ct:contentTypeSchema>
 </file>
 
-<file path=customXml/item2.xml><?xml version="1.0" encoding="utf-8"?>
-<?mso-contentType ?>
-<FormTemplates xmlns="http://schemas.microsoft.com/sharepoint/v3/contenttype/forms">
-  <Display>DocumentLibraryForm</Display>
-  <Edit>DocumentLibraryForm</Edit>
-  <New>DocumentLibraryForm</New>
-</FormTemplates>
+<file path=customXml/itemProps1.xml><?xml version="1.0" encoding="utf-8"?>
+<ds:datastoreItem xmlns:ds="http://schemas.openxmlformats.org/officeDocument/2006/customXml" ds:itemID="{D5CAE7E8-1A3A-4A91-86FB-BA9E1762341A}">
+  <ds:schemaRefs>
+    <ds:schemaRef ds:uri="http://schemas.microsoft.com/sharepoint/v3/contenttype/forms"/>
+  </ds:schemaRefs>
+</ds:datastoreItem>
 </file>
 
-<file path=customXml/itemProps1.xml><?xml version="1.0" encoding="utf-8"?>
+<file path=customXml/itemProps2.xml><?xml version="1.0" encoding="utf-8"?>
 <ds:datastoreItem xmlns:ds="http://schemas.openxmlformats.org/officeDocument/2006/customXml" ds:itemID="{36138A07-987C-4A73-AAED-022482DDD0A4}">
   <ds:schemaRefs>
     <ds:schemaRef ds:uri="068132b6-27af-4cc5-9624-46e0bc309f9c"/>
@@ -18457,12 +18514,4 @@
     <ds:schemaRef ds:uri="http://www.w3.org/2001/XMLSchema"/>
   </ds:schemaRefs>
 </ds:datastoreItem>
-</file>
-
-<file path=customXml/itemProps2.xml><?xml version="1.0" encoding="utf-8"?>
-<ds:datastoreItem xmlns:ds="http://schemas.openxmlformats.org/officeDocument/2006/customXml" ds:itemID="{D5CAE7E8-1A3A-4A91-86FB-BA9E1762341A}">
-  <ds:schemaRefs>
-    <ds:schemaRef ds:uri="http://schemas.microsoft.com/sharepoint/v3/contenttype/forms"/>
-  </ds:schemaRefs>
-</ds:datastoreItem>
 </file>
--- a/SFN/2023_SFN_trust.pptx
+++ b/SFN/2023_SFN_trust.pptx
@@ -4435,10 +4435,10 @@
       </p:grpSpPr>
       <p:grpSp>
         <p:nvGrpSpPr>
-          <p:cNvPr id="15428" name="Group 15427">
+          <p:cNvPr id="36" name="Group 35">
             <a:extLst>
               <a:ext uri="{FF2B5EF4-FFF2-40B4-BE49-F238E27FC236}">
-                <a16:creationId xmlns:a16="http://schemas.microsoft.com/office/drawing/2014/main" id="{788D9291-9D84-C5C9-22EF-259D72BF4C72}"/>
+                <a16:creationId xmlns:a16="http://schemas.microsoft.com/office/drawing/2014/main" id="{BD86F45B-B6EA-D11B-FE87-C7FDF14080C8}"/>
               </a:ext>
             </a:extLst>
           </p:cNvPr>
@@ -4447,192 +4447,171 @@
         </p:nvGrpSpPr>
         <p:grpSpPr>
           <a:xfrm>
-            <a:off x="-12351685" y="24748572"/>
-            <a:ext cx="27124037" cy="5855069"/>
-            <a:chOff x="-13075441" y="16557233"/>
-            <a:chExt cx="27124037" cy="5855069"/>
+            <a:off x="10912317" y="28607914"/>
+            <a:ext cx="3543576" cy="1716829"/>
+            <a:chOff x="11083249" y="26380930"/>
+            <a:chExt cx="3543576" cy="1716829"/>
           </a:xfrm>
         </p:grpSpPr>
-        <p:grpSp>
-          <p:nvGrpSpPr>
-            <p:cNvPr id="65" name="Group 64">
+        <p:sp>
+          <p:nvSpPr>
+            <p:cNvPr id="15" name="Rectangle 14">
               <a:extLst>
                 <a:ext uri="{FF2B5EF4-FFF2-40B4-BE49-F238E27FC236}">
-                  <a16:creationId xmlns:a16="http://schemas.microsoft.com/office/drawing/2014/main" id="{89055108-BE18-C2C5-0FF5-A55BEBB4A05F}"/>
+                  <a16:creationId xmlns:a16="http://schemas.microsoft.com/office/drawing/2014/main" id="{353421B0-7681-A37B-CA3F-986E07C1DB77}"/>
                 </a:ext>
               </a:extLst>
             </p:cNvPr>
-            <p:cNvGrpSpPr/>
+            <p:cNvSpPr/>
             <p:nvPr/>
-          </p:nvGrpSpPr>
-          <p:grpSpPr>
+          </p:nvSpPr>
+          <p:spPr bwMode="auto">
             <a:xfrm>
-              <a:off x="-13075441" y="16557233"/>
-              <a:ext cx="7981099" cy="1956293"/>
-              <a:chOff x="-13057094" y="16450839"/>
-              <a:chExt cx="7981099" cy="1956293"/>
-            </a:xfrm>
-          </p:grpSpPr>
-          <p:sp>
-            <p:nvSpPr>
-              <p:cNvPr id="15" name="Rectangle 14">
-                <a:extLst>
-                  <a:ext uri="{FF2B5EF4-FFF2-40B4-BE49-F238E27FC236}">
-                    <a16:creationId xmlns:a16="http://schemas.microsoft.com/office/drawing/2014/main" id="{353421B0-7681-A37B-CA3F-986E07C1DB77}"/>
-                  </a:ext>
-                </a:extLst>
-              </p:cNvPr>
-              <p:cNvSpPr/>
-              <p:nvPr/>
-            </p:nvSpPr>
-            <p:spPr bwMode="auto">
-              <a:xfrm>
-                <a:off x="-13057094" y="16450839"/>
-                <a:ext cx="3543576" cy="1716829"/>
-              </a:xfrm>
-              <a:prstGeom prst="rect">
-                <a:avLst/>
-              </a:prstGeom>
-              <a:solidFill>
-                <a:srgbClr val="FAF86D">
-                  <a:alpha val="82294"/>
-                </a:srgbClr>
-              </a:solidFill>
-              <a:ln w="57150" cap="flat" cmpd="sng" algn="ctr">
-                <a:solidFill>
-                  <a:schemeClr val="tx1"/>
-                </a:solidFill>
-                <a:prstDash val="solid"/>
-                <a:round/>
-                <a:headEnd type="none" w="med" len="med"/>
-                <a:tailEnd type="none" w="med" len="med"/>
-              </a:ln>
-              <a:effectLst/>
-            </p:spPr>
-            <p:txBody>
-              <a:bodyPr vert="horz" wrap="square" lIns="91440" tIns="45720" rIns="91440" bIns="45720" numCol="1" rtlCol="0" anchor="t" anchorCtr="0" compatLnSpc="1">
-                <a:prstTxWarp prst="textNoShape">
-                  <a:avLst/>
-                </a:prstTxWarp>
-              </a:bodyPr>
-              <a:lstStyle/>
-              <a:p>
-                <a:pPr marL="0" marR="0" indent="0" algn="l" defTabSz="4389438" rtl="0" eaLnBrk="1" fontAlgn="base" latinLnBrk="0" hangingPunct="1">
-                  <a:lnSpc>
-                    <a:spcPct val="100000"/>
-                  </a:lnSpc>
-                  <a:spcBef>
-                    <a:spcPct val="0"/>
-                  </a:spcBef>
-                  <a:spcAft>
-                    <a:spcPct val="0"/>
-                  </a:spcAft>
-                  <a:buClrTx/>
-                  <a:buSzTx/>
-                  <a:buFontTx/>
-                  <a:buNone/>
-                  <a:tabLst/>
-                </a:pPr>
-                <a:endParaRPr kumimoji="0" lang="en-US" sz="1800" b="0" i="0" u="none" strike="noStrike" cap="none" normalizeH="0" baseline="0">
-                  <a:ln>
-                    <a:noFill/>
-                  </a:ln>
-                  <a:solidFill>
-                    <a:schemeClr val="tx1"/>
-                  </a:solidFill>
-                  <a:effectLst/>
-                  <a:latin typeface="Arial" charset="0"/>
-                  <a:cs typeface="Arial" charset="0"/>
-                </a:endParaRPr>
-              </a:p>
-            </p:txBody>
-          </p:sp>
-          <p:sp>
-            <p:nvSpPr>
-              <p:cNvPr id="8" name="TextBox 7">
-                <a:extLst>
-                  <a:ext uri="{FF2B5EF4-FFF2-40B4-BE49-F238E27FC236}">
-                    <a16:creationId xmlns:a16="http://schemas.microsoft.com/office/drawing/2014/main" id="{8F94C34F-C114-09E7-7592-2C68A047774A}"/>
-                  </a:ext>
-                </a:extLst>
-              </p:cNvPr>
-              <p:cNvSpPr txBox="1"/>
-              <p:nvPr/>
-            </p:nvSpPr>
-            <p:spPr>
-              <a:xfrm>
-                <a:off x="-8462360" y="16837472"/>
-                <a:ext cx="3386365" cy="1569660"/>
-              </a:xfrm>
-              <a:prstGeom prst="rect">
-                <a:avLst/>
-              </a:prstGeom>
-              <a:noFill/>
-            </p:spPr>
-            <p:txBody>
-              <a:bodyPr rot="0" spcFirstLastPara="0" vertOverflow="overflow" horzOverflow="overflow" vert="horz" wrap="square" lIns="91440" tIns="45720" rIns="91440" bIns="45720" numCol="1" spcCol="0" rtlCol="0" fromWordArt="0" anchor="t" anchorCtr="0" forceAA="0" compatLnSpc="1">
-                <a:prstTxWarp prst="textNoShape">
-                  <a:avLst/>
-                </a:prstTxWarp>
-                <a:spAutoFit/>
-              </a:bodyPr>
-              <a:lstStyle/>
-              <a:p>
-                <a:pPr algn="ctr"/>
-                <a:r>
-                  <a:rPr lang="en-US" sz="3200" b="1" dirty="0">
-                    <a:latin typeface="Helvetica"/>
-                    <a:ea typeface="MS PGothic"/>
-                  </a:rPr>
-                  <a:t>Scan the QR code to see the</a:t>
-                </a:r>
-                <a:endParaRPr lang="en-US" sz="3200" b="1" dirty="0"/>
-              </a:p>
-              <a:p>
-                <a:pPr algn="ctr"/>
-                <a:r>
-                  <a:rPr lang="en-US" sz="3200" b="1" u="sng" dirty="0">
-                    <a:latin typeface="Helvetica"/>
-                    <a:ea typeface="MS PGothic"/>
-                  </a:rPr>
-                  <a:t>Pre-registration!</a:t>
-                </a:r>
-                <a:endParaRPr lang="en-US" sz="3200" b="1" u="sng" dirty="0"/>
-              </a:p>
-            </p:txBody>
-          </p:sp>
-        </p:grpSp>
-        <p:pic>
-          <p:nvPicPr>
-            <p:cNvPr id="7" name="Picture 6">
-              <a:extLst>
-                <a:ext uri="{FF2B5EF4-FFF2-40B4-BE49-F238E27FC236}">
-                  <a16:creationId xmlns:a16="http://schemas.microsoft.com/office/drawing/2014/main" id="{E5B61256-0745-91A9-AD49-FA138651C227}"/>
-                </a:ext>
-              </a:extLst>
-            </p:cNvPr>
-            <p:cNvPicPr>
-              <a:picLocks noChangeAspect="1"/>
-            </p:cNvPicPr>
-            <p:nvPr/>
-          </p:nvPicPr>
-          <p:blipFill>
-            <a:blip r:embed="rId4"/>
-            <a:stretch>
-              <a:fillRect/>
-            </a:stretch>
-          </p:blipFill>
-          <p:spPr>
-            <a:xfrm>
-              <a:off x="11004958" y="19378946"/>
-              <a:ext cx="3043638" cy="3033356"/>
+              <a:off x="11083249" y="26380930"/>
+              <a:ext cx="3543576" cy="1716829"/>
             </a:xfrm>
             <a:prstGeom prst="rect">
               <a:avLst/>
             </a:prstGeom>
+            <a:solidFill>
+              <a:srgbClr val="FAF86D">
+                <a:alpha val="82294"/>
+              </a:srgbClr>
+            </a:solidFill>
+            <a:ln w="57150" cap="flat" cmpd="sng" algn="ctr">
+              <a:solidFill>
+                <a:schemeClr val="tx1"/>
+              </a:solidFill>
+              <a:prstDash val="solid"/>
+              <a:round/>
+              <a:headEnd type="none" w="med" len="med"/>
+              <a:tailEnd type="none" w="med" len="med"/>
+            </a:ln>
+            <a:effectLst/>
           </p:spPr>
-        </p:pic>
+          <p:txBody>
+            <a:bodyPr vert="horz" wrap="square" lIns="91440" tIns="45720" rIns="91440" bIns="45720" numCol="1" rtlCol="0" anchor="t" anchorCtr="0" compatLnSpc="1">
+              <a:prstTxWarp prst="textNoShape">
+                <a:avLst/>
+              </a:prstTxWarp>
+            </a:bodyPr>
+            <a:lstStyle/>
+            <a:p>
+              <a:pPr marL="0" marR="0" indent="0" algn="l" defTabSz="4389438" rtl="0" eaLnBrk="1" fontAlgn="base" latinLnBrk="0" hangingPunct="1">
+                <a:lnSpc>
+                  <a:spcPct val="100000"/>
+                </a:lnSpc>
+                <a:spcBef>
+                  <a:spcPct val="0"/>
+                </a:spcBef>
+                <a:spcAft>
+                  <a:spcPct val="0"/>
+                </a:spcAft>
+                <a:buClrTx/>
+                <a:buSzTx/>
+                <a:buFontTx/>
+                <a:buNone/>
+                <a:tabLst/>
+              </a:pPr>
+              <a:endParaRPr kumimoji="0" lang="en-US" sz="1800" b="0" i="0" u="none" strike="noStrike" cap="none" normalizeH="0" baseline="0">
+                <a:ln>
+                  <a:noFill/>
+                </a:ln>
+                <a:solidFill>
+                  <a:schemeClr val="tx1"/>
+                </a:solidFill>
+                <a:effectLst/>
+                <a:latin typeface="Arial" charset="0"/>
+                <a:cs typeface="Arial" charset="0"/>
+              </a:endParaRPr>
+            </a:p>
+          </p:txBody>
+        </p:sp>
+        <p:sp>
+          <p:nvSpPr>
+            <p:cNvPr id="8" name="TextBox 7">
+              <a:extLst>
+                <a:ext uri="{FF2B5EF4-FFF2-40B4-BE49-F238E27FC236}">
+                  <a16:creationId xmlns:a16="http://schemas.microsoft.com/office/drawing/2014/main" id="{8F94C34F-C114-09E7-7592-2C68A047774A}"/>
+                </a:ext>
+              </a:extLst>
+            </p:cNvPr>
+            <p:cNvSpPr txBox="1"/>
+            <p:nvPr/>
+          </p:nvSpPr>
+          <p:spPr>
+            <a:xfrm>
+              <a:off x="11186208" y="26454514"/>
+              <a:ext cx="3386365" cy="1569660"/>
+            </a:xfrm>
+            <a:prstGeom prst="rect">
+              <a:avLst/>
+            </a:prstGeom>
+            <a:noFill/>
+          </p:spPr>
+          <p:txBody>
+            <a:bodyPr rot="0" spcFirstLastPara="0" vertOverflow="overflow" horzOverflow="overflow" vert="horz" wrap="square" lIns="91440" tIns="45720" rIns="91440" bIns="45720" numCol="1" spcCol="0" rtlCol="0" fromWordArt="0" anchor="t" anchorCtr="0" forceAA="0" compatLnSpc="1">
+              <a:prstTxWarp prst="textNoShape">
+                <a:avLst/>
+              </a:prstTxWarp>
+              <a:spAutoFit/>
+            </a:bodyPr>
+            <a:lstStyle/>
+            <a:p>
+              <a:pPr algn="ctr"/>
+              <a:r>
+                <a:rPr lang="en-US" sz="3200" b="1" dirty="0">
+                  <a:latin typeface="Helvetica"/>
+                  <a:ea typeface="MS PGothic"/>
+                </a:rPr>
+                <a:t>Scan the QR code to see the</a:t>
+              </a:r>
+              <a:endParaRPr lang="en-US" sz="3200" b="1" dirty="0"/>
+            </a:p>
+            <a:p>
+              <a:pPr algn="ctr"/>
+              <a:r>
+                <a:rPr lang="en-US" sz="3200" b="1" u="sng" dirty="0">
+                  <a:latin typeface="Helvetica"/>
+                  <a:ea typeface="MS PGothic"/>
+                </a:rPr>
+                <a:t>Pre-registration!</a:t>
+              </a:r>
+              <a:endParaRPr lang="en-US" sz="3200" b="1" u="sng" dirty="0"/>
+            </a:p>
+          </p:txBody>
+        </p:sp>
       </p:grpSp>
+      <p:pic>
+        <p:nvPicPr>
+          <p:cNvPr id="7" name="Picture 6">
+            <a:extLst>
+              <a:ext uri="{FF2B5EF4-FFF2-40B4-BE49-F238E27FC236}">
+                <a16:creationId xmlns:a16="http://schemas.microsoft.com/office/drawing/2014/main" id="{E5B61256-0745-91A9-AD49-FA138651C227}"/>
+              </a:ext>
+            </a:extLst>
+          </p:cNvPr>
+          <p:cNvPicPr>
+            <a:picLocks noChangeAspect="1"/>
+          </p:cNvPicPr>
+          <p:nvPr/>
+        </p:nvPicPr>
+        <p:blipFill>
+          <a:blip r:embed="rId4"/>
+          <a:stretch>
+            <a:fillRect/>
+          </a:stretch>
+        </p:blipFill>
+        <p:spPr>
+          <a:xfrm>
+            <a:off x="11507902" y="26012680"/>
+            <a:ext cx="2340933" cy="2333025"/>
+          </a:xfrm>
+          <a:prstGeom prst="rect">
+            <a:avLst/>
+          </a:prstGeom>
+        </p:spPr>
+      </p:pic>
       <p:sp>
         <p:nvSpPr>
           <p:cNvPr id="15365" name="Rectangle 162"/>
@@ -4643,8 +4622,8 @@
         </p:nvSpPr>
         <p:spPr bwMode="auto">
           <a:xfrm>
-            <a:off x="162957" y="12488003"/>
-            <a:ext cx="14710114" cy="18312188"/>
+            <a:off x="162957" y="13516081"/>
+            <a:ext cx="14710114" cy="17284110"/>
           </a:xfrm>
           <a:prstGeom prst="rect">
             <a:avLst/>
@@ -5414,7 +5393,7 @@
         </p:nvSpPr>
         <p:spPr bwMode="auto">
           <a:xfrm>
-            <a:off x="5483063" y="12207796"/>
+            <a:off x="5450339" y="13204012"/>
             <a:ext cx="4095681" cy="748988"/>
           </a:xfrm>
           <a:prstGeom prst="rect">
@@ -6430,7 +6409,7 @@
         <p:grpSpPr>
           <a:xfrm>
             <a:off x="169367" y="3967558"/>
-            <a:ext cx="14831195" cy="8123743"/>
+            <a:ext cx="14831195" cy="9230365"/>
             <a:chOff x="211346" y="3968278"/>
             <a:chExt cx="14831195" cy="8123743"/>
           </a:xfrm>
@@ -7863,342 +7842,6 @@
           </p:txBody>
         </p:sp>
       </p:grpSp>
-      <p:grpSp>
-        <p:nvGrpSpPr>
-          <p:cNvPr id="15583" name="Group 15582">
-            <a:extLst>
-              <a:ext uri="{FF2B5EF4-FFF2-40B4-BE49-F238E27FC236}">
-                <a16:creationId xmlns:a16="http://schemas.microsoft.com/office/drawing/2014/main" id="{81424957-973F-2BA6-23A6-71C1377BD2AF}"/>
-              </a:ext>
-            </a:extLst>
-          </p:cNvPr>
-          <p:cNvGrpSpPr/>
-          <p:nvPr/>
-        </p:nvGrpSpPr>
-        <p:grpSpPr>
-          <a:xfrm>
-            <a:off x="23079238" y="5095222"/>
-            <a:ext cx="6472299" cy="6595040"/>
-            <a:chOff x="23205210" y="4927197"/>
-            <a:chExt cx="5400682" cy="6202336"/>
-          </a:xfrm>
-        </p:grpSpPr>
-        <p:pic>
-          <p:nvPicPr>
-            <p:cNvPr id="15574" name="Picture 15573" descr="A graph of a line&#10;&#10;Description automatically generated with medium confidence">
-              <a:extLst>
-                <a:ext uri="{FF2B5EF4-FFF2-40B4-BE49-F238E27FC236}">
-                  <a16:creationId xmlns:a16="http://schemas.microsoft.com/office/drawing/2014/main" id="{C54D0E15-DCC7-A19B-7997-13F421CEA2FB}"/>
-                </a:ext>
-              </a:extLst>
-            </p:cNvPr>
-            <p:cNvPicPr>
-              <a:picLocks noChangeAspect="1"/>
-            </p:cNvPicPr>
-            <p:nvPr/>
-          </p:nvPicPr>
-          <p:blipFill rotWithShape="1">
-            <a:blip r:embed="rId6">
-              <a:extLst>
-                <a:ext uri="{28A0092B-C50C-407E-A947-70E740481C1C}">
-                  <a14:useLocalDpi xmlns:a14="http://schemas.microsoft.com/office/drawing/2010/main" val="0"/>
-                </a:ext>
-              </a:extLst>
-            </a:blip>
-            <a:srcRect r="3644" b="9068"/>
-            <a:stretch/>
-          </p:blipFill>
-          <p:spPr>
-            <a:xfrm>
-              <a:off x="24004670" y="4927197"/>
-              <a:ext cx="4601222" cy="5427765"/>
-            </a:xfrm>
-            <a:prstGeom prst="rect">
-              <a:avLst/>
-            </a:prstGeom>
-          </p:spPr>
-        </p:pic>
-        <p:sp>
-          <p:nvSpPr>
-            <p:cNvPr id="15575" name="TextBox 15574">
-              <a:extLst>
-                <a:ext uri="{FF2B5EF4-FFF2-40B4-BE49-F238E27FC236}">
-                  <a16:creationId xmlns:a16="http://schemas.microsoft.com/office/drawing/2014/main" id="{136D78E5-71EA-17ED-91C9-F9CCADA262FF}"/>
-                </a:ext>
-              </a:extLst>
-            </p:cNvPr>
-            <p:cNvSpPr txBox="1"/>
-            <p:nvPr/>
-          </p:nvSpPr>
-          <p:spPr>
-            <a:xfrm rot="16200000">
-              <a:off x="21066163" y="7584362"/>
-              <a:ext cx="4647426" cy="369332"/>
-            </a:xfrm>
-            <a:prstGeom prst="rect">
-              <a:avLst/>
-            </a:prstGeom>
-            <a:noFill/>
-          </p:spPr>
-          <p:txBody>
-            <a:bodyPr wrap="none" rtlCol="0">
-              <a:spAutoFit/>
-            </a:bodyPr>
-            <a:lstStyle/>
-            <a:p>
-              <a:r>
-                <a:rPr lang="en-US" dirty="0"/>
-                <a:t>Sharing with Friend – Sharing with Stranger</a:t>
-              </a:r>
-            </a:p>
-          </p:txBody>
-        </p:sp>
-        <p:sp>
-          <p:nvSpPr>
-            <p:cNvPr id="15576" name="TextBox 15575">
-              <a:extLst>
-                <a:ext uri="{FF2B5EF4-FFF2-40B4-BE49-F238E27FC236}">
-                  <a16:creationId xmlns:a16="http://schemas.microsoft.com/office/drawing/2014/main" id="{7E602785-88A0-0942-659B-9A750B46996F}"/>
-                </a:ext>
-              </a:extLst>
-            </p:cNvPr>
-            <p:cNvSpPr txBox="1"/>
-            <p:nvPr/>
-          </p:nvSpPr>
-          <p:spPr>
-            <a:xfrm>
-              <a:off x="23603500" y="9333929"/>
-              <a:ext cx="389850" cy="369332"/>
-            </a:xfrm>
-            <a:prstGeom prst="rect">
-              <a:avLst/>
-            </a:prstGeom>
-            <a:noFill/>
-          </p:spPr>
-          <p:txBody>
-            <a:bodyPr wrap="none" rtlCol="0">
-              <a:spAutoFit/>
-            </a:bodyPr>
-            <a:lstStyle/>
-            <a:p>
-              <a:r>
-                <a:rPr lang="en-US" dirty="0"/>
-                <a:t>-2</a:t>
-              </a:r>
-            </a:p>
-          </p:txBody>
-        </p:sp>
-        <p:sp>
-          <p:nvSpPr>
-            <p:cNvPr id="15577" name="TextBox 15576">
-              <a:extLst>
-                <a:ext uri="{FF2B5EF4-FFF2-40B4-BE49-F238E27FC236}">
-                  <a16:creationId xmlns:a16="http://schemas.microsoft.com/office/drawing/2014/main" id="{44C014BB-4057-CE6F-8488-5075607DFC5B}"/>
-                </a:ext>
-              </a:extLst>
-            </p:cNvPr>
-            <p:cNvSpPr txBox="1"/>
-            <p:nvPr/>
-          </p:nvSpPr>
-          <p:spPr>
-            <a:xfrm>
-              <a:off x="23684874" y="6124920"/>
-              <a:ext cx="312906" cy="369332"/>
-            </a:xfrm>
-            <a:prstGeom prst="rect">
-              <a:avLst/>
-            </a:prstGeom>
-            <a:noFill/>
-          </p:spPr>
-          <p:txBody>
-            <a:bodyPr wrap="none" rtlCol="0">
-              <a:spAutoFit/>
-            </a:bodyPr>
-            <a:lstStyle/>
-            <a:p>
-              <a:r>
-                <a:rPr lang="en-US" dirty="0"/>
-                <a:t>2</a:t>
-              </a:r>
-            </a:p>
-          </p:txBody>
-        </p:sp>
-        <p:sp>
-          <p:nvSpPr>
-            <p:cNvPr id="15578" name="TextBox 15577">
-              <a:extLst>
-                <a:ext uri="{FF2B5EF4-FFF2-40B4-BE49-F238E27FC236}">
-                  <a16:creationId xmlns:a16="http://schemas.microsoft.com/office/drawing/2014/main" id="{7FC9F9D2-B5EE-482C-7F35-E7345B0CA197}"/>
-                </a:ext>
-              </a:extLst>
-            </p:cNvPr>
-            <p:cNvSpPr txBox="1"/>
-            <p:nvPr/>
-          </p:nvSpPr>
-          <p:spPr>
-            <a:xfrm>
-              <a:off x="23666269" y="7699893"/>
-              <a:ext cx="312906" cy="369332"/>
-            </a:xfrm>
-            <a:prstGeom prst="rect">
-              <a:avLst/>
-            </a:prstGeom>
-            <a:noFill/>
-          </p:spPr>
-          <p:txBody>
-            <a:bodyPr wrap="none" rtlCol="0">
-              <a:spAutoFit/>
-            </a:bodyPr>
-            <a:lstStyle/>
-            <a:p>
-              <a:r>
-                <a:rPr lang="en-US" dirty="0"/>
-                <a:t>0</a:t>
-              </a:r>
-            </a:p>
-          </p:txBody>
-        </p:sp>
-        <p:sp>
-          <p:nvSpPr>
-            <p:cNvPr id="15579" name="TextBox 15578">
-              <a:extLst>
-                <a:ext uri="{FF2B5EF4-FFF2-40B4-BE49-F238E27FC236}">
-                  <a16:creationId xmlns:a16="http://schemas.microsoft.com/office/drawing/2014/main" id="{115532EB-4683-39F0-80DC-27E22F24AA20}"/>
-                </a:ext>
-              </a:extLst>
-            </p:cNvPr>
-            <p:cNvSpPr txBox="1"/>
-            <p:nvPr/>
-          </p:nvSpPr>
-          <p:spPr>
-            <a:xfrm>
-              <a:off x="23984464" y="10392031"/>
-              <a:ext cx="441146" cy="369332"/>
-            </a:xfrm>
-            <a:prstGeom prst="rect">
-              <a:avLst/>
-            </a:prstGeom>
-            <a:noFill/>
-          </p:spPr>
-          <p:txBody>
-            <a:bodyPr wrap="none" rtlCol="0">
-              <a:spAutoFit/>
-            </a:bodyPr>
-            <a:lstStyle/>
-            <a:p>
-              <a:r>
-                <a:rPr lang="en-US" dirty="0"/>
-                <a:t>20</a:t>
-              </a:r>
-            </a:p>
-          </p:txBody>
-        </p:sp>
-        <p:sp>
-          <p:nvSpPr>
-            <p:cNvPr id="15580" name="TextBox 15579">
-              <a:extLst>
-                <a:ext uri="{FF2B5EF4-FFF2-40B4-BE49-F238E27FC236}">
-                  <a16:creationId xmlns:a16="http://schemas.microsoft.com/office/drawing/2014/main" id="{3A319DEB-B897-3E25-DF07-7B459ED170BF}"/>
-                </a:ext>
-              </a:extLst>
-            </p:cNvPr>
-            <p:cNvSpPr txBox="1"/>
-            <p:nvPr/>
-          </p:nvSpPr>
-          <p:spPr>
-            <a:xfrm>
-              <a:off x="25529056" y="10429100"/>
-              <a:ext cx="441146" cy="369332"/>
-            </a:xfrm>
-            <a:prstGeom prst="rect">
-              <a:avLst/>
-            </a:prstGeom>
-            <a:noFill/>
-          </p:spPr>
-          <p:txBody>
-            <a:bodyPr wrap="none" rtlCol="0">
-              <a:spAutoFit/>
-            </a:bodyPr>
-            <a:lstStyle/>
-            <a:p>
-              <a:r>
-                <a:rPr lang="en-US" dirty="0"/>
-                <a:t>40</a:t>
-              </a:r>
-            </a:p>
-          </p:txBody>
-        </p:sp>
-        <p:sp>
-          <p:nvSpPr>
-            <p:cNvPr id="15581" name="TextBox 15580">
-              <a:extLst>
-                <a:ext uri="{FF2B5EF4-FFF2-40B4-BE49-F238E27FC236}">
-                  <a16:creationId xmlns:a16="http://schemas.microsoft.com/office/drawing/2014/main" id="{92207841-AB47-B838-56C4-7A8991CBC082}"/>
-                </a:ext>
-              </a:extLst>
-            </p:cNvPr>
-            <p:cNvSpPr txBox="1"/>
-            <p:nvPr/>
-          </p:nvSpPr>
-          <p:spPr>
-            <a:xfrm>
-              <a:off x="27155348" y="10416605"/>
-              <a:ext cx="441146" cy="369332"/>
-            </a:xfrm>
-            <a:prstGeom prst="rect">
-              <a:avLst/>
-            </a:prstGeom>
-            <a:noFill/>
-          </p:spPr>
-          <p:txBody>
-            <a:bodyPr wrap="none" rtlCol="0">
-              <a:spAutoFit/>
-            </a:bodyPr>
-            <a:lstStyle/>
-            <a:p>
-              <a:r>
-                <a:rPr lang="en-US" dirty="0"/>
-                <a:t>60</a:t>
-              </a:r>
-            </a:p>
-          </p:txBody>
-        </p:sp>
-        <p:sp>
-          <p:nvSpPr>
-            <p:cNvPr id="15582" name="TextBox 15581">
-              <a:extLst>
-                <a:ext uri="{FF2B5EF4-FFF2-40B4-BE49-F238E27FC236}">
-                  <a16:creationId xmlns:a16="http://schemas.microsoft.com/office/drawing/2014/main" id="{3BD77EC1-C3D3-3CE1-B336-0F6F0DC0255C}"/>
-                </a:ext>
-              </a:extLst>
-            </p:cNvPr>
-            <p:cNvSpPr txBox="1"/>
-            <p:nvPr/>
-          </p:nvSpPr>
-          <p:spPr>
-            <a:xfrm>
-              <a:off x="25933780" y="10760201"/>
-              <a:ext cx="595035" cy="369332"/>
-            </a:xfrm>
-            <a:prstGeom prst="rect">
-              <a:avLst/>
-            </a:prstGeom>
-            <a:noFill/>
-          </p:spPr>
-          <p:txBody>
-            <a:bodyPr wrap="none" rtlCol="0">
-              <a:spAutoFit/>
-            </a:bodyPr>
-            <a:lstStyle/>
-            <a:p>
-              <a:r>
-                <a:rPr lang="en-US" dirty="0"/>
-                <a:t>Age</a:t>
-              </a:r>
-            </a:p>
-          </p:txBody>
-        </p:sp>
-      </p:grpSp>
       <p:sp>
         <p:nvSpPr>
           <p:cNvPr id="15653" name="TextBox 15652">
@@ -8259,8 +7902,8 @@
         </p:nvSpPr>
         <p:spPr>
           <a:xfrm>
-            <a:off x="306661" y="25149656"/>
-            <a:ext cx="9825551" cy="3062377"/>
+            <a:off x="423843" y="26895455"/>
+            <a:ext cx="9969217" cy="2631490"/>
           </a:xfrm>
           <a:prstGeom prst="rect">
             <a:avLst/>
@@ -8422,13 +8065,13 @@
             <p:nvPr/>
           </p:nvPicPr>
           <p:blipFill rotWithShape="1">
-            <a:blip r:embed="rId7">
+            <a:blip r:embed="rId6">
               <a:extLst>
                 <a:ext uri="{28A0092B-C50C-407E-A947-70E740481C1C}">
                   <a14:useLocalDpi xmlns:a14="http://schemas.microsoft.com/office/drawing/2010/main" val="0"/>
                 </a:ext>
                 <a:ext uri="{96DAC541-7B7A-43D3-8B79-37D633B846F1}">
-                  <asvg:svgBlip xmlns:asvg="http://schemas.microsoft.com/office/drawing/2016/SVG/main" r:embed="rId8"/>
+                  <asvg:svgBlip xmlns:asvg="http://schemas.microsoft.com/office/drawing/2016/SVG/main" r:embed="rId7"/>
                 </a:ext>
               </a:extLst>
             </a:blip>
@@ -8672,7 +8315,7 @@
         </p:nvGrpSpPr>
         <p:grpSpPr>
           <a:xfrm>
-            <a:off x="485487" y="13108557"/>
+            <a:off x="574224" y="14845624"/>
             <a:ext cx="13946934" cy="10995653"/>
             <a:chOff x="530502" y="15050793"/>
             <a:chExt cx="13946934" cy="10995653"/>
@@ -8733,7 +8376,7 @@
                 <p:nvPr/>
               </p:nvPicPr>
               <p:blipFill rotWithShape="1">
-                <a:blip r:embed="rId9"/>
+                <a:blip r:embed="rId8"/>
                 <a:srcRect l="14791" t="15087" r="12450" b="22936"/>
                 <a:stretch/>
               </p:blipFill>
@@ -8792,7 +8435,7 @@
                 <p:nvPr/>
               </p:nvPicPr>
               <p:blipFill rotWithShape="1">
-                <a:blip r:embed="rId10"/>
+                <a:blip r:embed="rId9"/>
                 <a:srcRect l="17658" t="18357" r="18046" b="25816"/>
                 <a:stretch/>
               </p:blipFill>
@@ -8851,7 +8494,7 @@
                 <p:nvPr/>
               </p:nvPicPr>
               <p:blipFill rotWithShape="1">
-                <a:blip r:embed="rId11"/>
+                <a:blip r:embed="rId10"/>
                 <a:srcRect l="2620" t="7420" r="2620" b="4981"/>
                 <a:stretch/>
               </p:blipFill>
@@ -8910,7 +8553,7 @@
                 <p:nvPr/>
               </p:nvPicPr>
               <p:blipFill>
-                <a:blip r:embed="rId12"/>
+                <a:blip r:embed="rId11"/>
                 <a:stretch>
                   <a:fillRect/>
                 </a:stretch>
@@ -8970,7 +8613,7 @@
                 <p:nvPr/>
               </p:nvPicPr>
               <p:blipFill rotWithShape="1">
-                <a:blip r:embed="rId13"/>
+                <a:blip r:embed="rId12"/>
                 <a:srcRect l="2378" t="5420" r="2378" b="9853"/>
                 <a:stretch/>
               </p:blipFill>
@@ -9049,7 +8692,7 @@
                   <p:nvPr/>
                 </p:nvPicPr>
                 <p:blipFill>
-                  <a:blip r:embed="rId14"/>
+                  <a:blip r:embed="rId13"/>
                   <a:stretch>
                     <a:fillRect/>
                   </a:stretch>
@@ -9109,7 +8752,7 @@
                   <p:nvPr/>
                 </p:nvPicPr>
                 <p:blipFill>
-                  <a:blip r:embed="rId15"/>
+                  <a:blip r:embed="rId14"/>
                   <a:stretch>
                     <a:fillRect/>
                   </a:stretch>
@@ -9169,7 +8812,7 @@
                   <p:nvPr/>
                 </p:nvPicPr>
                 <p:blipFill>
-                  <a:blip r:embed="rId16"/>
+                  <a:blip r:embed="rId15"/>
                   <a:stretch>
                     <a:fillRect/>
                   </a:stretch>
@@ -10279,7 +9922,7 @@
             <p:nvPr/>
           </p:nvPicPr>
           <p:blipFill>
-            <a:blip r:embed="rId17">
+            <a:blip r:embed="rId16">
               <a:extLst>
                 <a:ext uri="{28A0092B-C50C-407E-A947-70E740481C1C}">
                   <a14:useLocalDpi xmlns:a14="http://schemas.microsoft.com/office/drawing/2010/main" val="0"/>
@@ -10411,7 +10054,7 @@
             <p:nvPr/>
           </p:nvPicPr>
           <p:blipFill>
-            <a:blip r:embed="rId18">
+            <a:blip r:embed="rId17">
               <a:extLst>
                 <a:ext uri="{28A0092B-C50C-407E-A947-70E740481C1C}">
                   <a14:useLocalDpi xmlns:a14="http://schemas.microsoft.com/office/drawing/2010/main" val="0"/>
@@ -10712,13 +10355,13 @@
                 <p:nvPr/>
               </p:nvPicPr>
               <p:blipFill rotWithShape="1">
-                <a:blip r:embed="rId19">
+                <a:blip r:embed="rId18">
                   <a:extLst>
                     <a:ext uri="{28A0092B-C50C-407E-A947-70E740481C1C}">
                       <a14:useLocalDpi xmlns:a14="http://schemas.microsoft.com/office/drawing/2010/main" val="0"/>
                     </a:ext>
                     <a:ext uri="{96DAC541-7B7A-43D3-8B79-37D633B846F1}">
-                      <asvg:svgBlip xmlns:asvg="http://schemas.microsoft.com/office/drawing/2016/SVG/main" r:embed="rId20"/>
+                      <asvg:svgBlip xmlns:asvg="http://schemas.microsoft.com/office/drawing/2016/SVG/main" r:embed="rId19"/>
                     </a:ext>
                   </a:extLst>
                 </a:blip>
@@ -11073,13 +10716,13 @@
               <p:nvPr/>
             </p:nvPicPr>
             <p:blipFill rotWithShape="1">
-              <a:blip r:embed="rId21">
+              <a:blip r:embed="rId20">
                 <a:extLst>
                   <a:ext uri="{28A0092B-C50C-407E-A947-70E740481C1C}">
                     <a14:useLocalDpi xmlns:a14="http://schemas.microsoft.com/office/drawing/2010/main" val="0"/>
                   </a:ext>
                   <a:ext uri="{96DAC541-7B7A-43D3-8B79-37D633B846F1}">
-                    <asvg:svgBlip xmlns:asvg="http://schemas.microsoft.com/office/drawing/2016/SVG/main" r:embed="rId22"/>
+                    <asvg:svgBlip xmlns:asvg="http://schemas.microsoft.com/office/drawing/2016/SVG/main" r:embed="rId21"/>
                   </a:ext>
                 </a:extLst>
               </a:blip>
@@ -11589,13 +11232,13 @@
             <p:nvPr/>
           </p:nvPicPr>
           <p:blipFill rotWithShape="1">
-            <a:blip r:embed="rId23">
+            <a:blip r:embed="rId22">
               <a:extLst>
                 <a:ext uri="{28A0092B-C50C-407E-A947-70E740481C1C}">
                   <a14:useLocalDpi xmlns:a14="http://schemas.microsoft.com/office/drawing/2010/main" val="0"/>
                 </a:ext>
                 <a:ext uri="{96DAC541-7B7A-43D3-8B79-37D633B846F1}">
-                  <asvg:svgBlip xmlns:asvg="http://schemas.microsoft.com/office/drawing/2016/SVG/main" r:embed="rId24"/>
+                  <asvg:svgBlip xmlns:asvg="http://schemas.microsoft.com/office/drawing/2016/SVG/main" r:embed="rId23"/>
                 </a:ext>
               </a:extLst>
             </a:blip>
@@ -11737,7 +11380,7 @@
           <p:nvPr/>
         </p:nvPicPr>
         <p:blipFill>
-          <a:blip r:embed="rId25">
+          <a:blip r:embed="rId24">
             <a:extLst>
               <a:ext uri="{28A0092B-C50C-407E-A947-70E740481C1C}">
                 <a14:useLocalDpi xmlns:a14="http://schemas.microsoft.com/office/drawing/2010/main" val="0"/>
@@ -11784,7 +11427,7 @@
           <p:nvPr/>
         </p:nvPicPr>
         <p:blipFill>
-          <a:blip r:embed="rId25">
+          <a:blip r:embed="rId24">
             <a:extLst>
               <a:ext uri="{28A0092B-C50C-407E-A947-70E740481C1C}">
                 <a14:useLocalDpi xmlns:a14="http://schemas.microsoft.com/office/drawing/2010/main" val="0"/>
@@ -11831,7 +11474,7 @@
           <p:nvPr/>
         </p:nvPicPr>
         <p:blipFill>
-          <a:blip r:embed="rId26">
+          <a:blip r:embed="rId25">
             <a:extLst>
               <a:ext uri="{28A0092B-C50C-407E-A947-70E740481C1C}">
                 <a14:useLocalDpi xmlns:a14="http://schemas.microsoft.com/office/drawing/2010/main" val="0"/>
@@ -11878,7 +11521,7 @@
           <p:nvPr/>
         </p:nvPicPr>
         <p:blipFill>
-          <a:blip r:embed="rId27">
+          <a:blip r:embed="rId26">
             <a:extLst>
               <a:ext uri="{28A0092B-C50C-407E-A947-70E740481C1C}">
                 <a14:useLocalDpi xmlns:a14="http://schemas.microsoft.com/office/drawing/2010/main" val="0"/>
@@ -12040,6 +11683,866 @@
           </a:p>
         </p:txBody>
       </p:sp>
+      <p:grpSp>
+        <p:nvGrpSpPr>
+          <p:cNvPr id="32" name="Group 31">
+            <a:extLst>
+              <a:ext uri="{FF2B5EF4-FFF2-40B4-BE49-F238E27FC236}">
+                <a16:creationId xmlns:a16="http://schemas.microsoft.com/office/drawing/2014/main" id="{9EB1F679-B03D-7ABA-4916-B7FDEEB0D1A4}"/>
+              </a:ext>
+            </a:extLst>
+          </p:cNvPr>
+          <p:cNvGrpSpPr/>
+          <p:nvPr/>
+        </p:nvGrpSpPr>
+        <p:grpSpPr>
+          <a:xfrm>
+            <a:off x="23148115" y="5384800"/>
+            <a:ext cx="6758936" cy="6609771"/>
+            <a:chOff x="23148115" y="5384800"/>
+            <a:chExt cx="6758936" cy="6609771"/>
+          </a:xfrm>
+        </p:grpSpPr>
+        <p:pic>
+          <p:nvPicPr>
+            <p:cNvPr id="11" name="Graphic 10">
+              <a:extLst>
+                <a:ext uri="{FF2B5EF4-FFF2-40B4-BE49-F238E27FC236}">
+                  <a16:creationId xmlns:a16="http://schemas.microsoft.com/office/drawing/2014/main" id="{B46F0626-1999-AF24-21F0-FAE5DF9DEC26}"/>
+                </a:ext>
+              </a:extLst>
+            </p:cNvPr>
+            <p:cNvPicPr>
+              <a:picLocks noChangeAspect="1"/>
+            </p:cNvPicPr>
+            <p:nvPr/>
+          </p:nvPicPr>
+          <p:blipFill rotWithShape="1">
+            <a:blip r:embed="rId27">
+              <a:extLst>
+                <a:ext uri="{28A0092B-C50C-407E-A947-70E740481C1C}">
+                  <a14:useLocalDpi xmlns:a14="http://schemas.microsoft.com/office/drawing/2010/main" val="0"/>
+                </a:ext>
+                <a:ext uri="{96DAC541-7B7A-43D3-8B79-37D633B846F1}">
+                  <asvg:svgBlip xmlns:asvg="http://schemas.microsoft.com/office/drawing/2016/SVG/main" r:embed="rId28"/>
+                </a:ext>
+              </a:extLst>
+            </a:blip>
+            <a:srcRect l="8522" t="6842" r="2180" b="9488"/>
+            <a:stretch/>
+          </p:blipFill>
+          <p:spPr>
+            <a:xfrm>
+              <a:off x="23745788" y="5384800"/>
+              <a:ext cx="6161263" cy="5986876"/>
+            </a:xfrm>
+            <a:prstGeom prst="rect">
+              <a:avLst/>
+            </a:prstGeom>
+          </p:spPr>
+        </p:pic>
+        <p:sp>
+          <p:nvSpPr>
+            <p:cNvPr id="12" name="TextBox 11">
+              <a:extLst>
+                <a:ext uri="{FF2B5EF4-FFF2-40B4-BE49-F238E27FC236}">
+                  <a16:creationId xmlns:a16="http://schemas.microsoft.com/office/drawing/2014/main" id="{95E4488D-320E-3C93-EC8D-7C3BAA78FA30}"/>
+                </a:ext>
+              </a:extLst>
+            </p:cNvPr>
+            <p:cNvSpPr txBox="1"/>
+            <p:nvPr/>
+          </p:nvSpPr>
+          <p:spPr>
+            <a:xfrm rot="16200000">
+              <a:off x="21388338" y="7970314"/>
+              <a:ext cx="4073551" cy="553998"/>
+            </a:xfrm>
+            <a:prstGeom prst="rect">
+              <a:avLst/>
+            </a:prstGeom>
+            <a:noFill/>
+          </p:spPr>
+          <p:txBody>
+            <a:bodyPr wrap="none" rtlCol="0">
+              <a:spAutoFit/>
+            </a:bodyPr>
+            <a:lstStyle/>
+            <a:p>
+              <a:r>
+                <a:rPr lang="en-US" sz="3000" dirty="0"/>
+                <a:t>IOS Friend - Computer</a:t>
+              </a:r>
+            </a:p>
+          </p:txBody>
+        </p:sp>
+        <p:sp>
+          <p:nvSpPr>
+            <p:cNvPr id="13" name="TextBox 12">
+              <a:extLst>
+                <a:ext uri="{FF2B5EF4-FFF2-40B4-BE49-F238E27FC236}">
+                  <a16:creationId xmlns:a16="http://schemas.microsoft.com/office/drawing/2014/main" id="{F8B9CE20-98EC-DB3B-E27B-D3E16039CA7B}"/>
+                </a:ext>
+              </a:extLst>
+            </p:cNvPr>
+            <p:cNvSpPr txBox="1"/>
+            <p:nvPr/>
+          </p:nvSpPr>
+          <p:spPr>
+            <a:xfrm>
+              <a:off x="26458500" y="11440573"/>
+              <a:ext cx="867545" cy="553998"/>
+            </a:xfrm>
+            <a:prstGeom prst="rect">
+              <a:avLst/>
+            </a:prstGeom>
+            <a:noFill/>
+          </p:spPr>
+          <p:txBody>
+            <a:bodyPr wrap="none" rtlCol="0">
+              <a:spAutoFit/>
+            </a:bodyPr>
+            <a:lstStyle/>
+            <a:p>
+              <a:r>
+                <a:rPr lang="en-US" sz="3000" dirty="0"/>
+                <a:t>Age</a:t>
+              </a:r>
+            </a:p>
+          </p:txBody>
+        </p:sp>
+        <p:sp>
+          <p:nvSpPr>
+            <p:cNvPr id="16" name="TextBox 15">
+              <a:extLst>
+                <a:ext uri="{FF2B5EF4-FFF2-40B4-BE49-F238E27FC236}">
+                  <a16:creationId xmlns:a16="http://schemas.microsoft.com/office/drawing/2014/main" id="{02F055F7-F4AD-16D6-0DC4-090889B5AC94}"/>
+                </a:ext>
+              </a:extLst>
+            </p:cNvPr>
+            <p:cNvSpPr txBox="1"/>
+            <p:nvPr/>
+          </p:nvSpPr>
+          <p:spPr>
+            <a:xfrm>
+              <a:off x="23201591" y="10960780"/>
+              <a:ext cx="389850" cy="369332"/>
+            </a:xfrm>
+            <a:prstGeom prst="rect">
+              <a:avLst/>
+            </a:prstGeom>
+            <a:noFill/>
+          </p:spPr>
+          <p:txBody>
+            <a:bodyPr wrap="none" rtlCol="0">
+              <a:spAutoFit/>
+            </a:bodyPr>
+            <a:lstStyle/>
+            <a:p>
+              <a:r>
+                <a:rPr lang="en-US" dirty="0"/>
+                <a:t>-2</a:t>
+              </a:r>
+            </a:p>
+          </p:txBody>
+        </p:sp>
+        <p:sp>
+          <p:nvSpPr>
+            <p:cNvPr id="18" name="TextBox 17">
+              <a:extLst>
+                <a:ext uri="{FF2B5EF4-FFF2-40B4-BE49-F238E27FC236}">
+                  <a16:creationId xmlns:a16="http://schemas.microsoft.com/office/drawing/2014/main" id="{C9F335FD-74A6-0034-2C62-5E101F9EF9FA}"/>
+                </a:ext>
+              </a:extLst>
+            </p:cNvPr>
+            <p:cNvSpPr txBox="1"/>
+            <p:nvPr/>
+          </p:nvSpPr>
+          <p:spPr>
+            <a:xfrm>
+              <a:off x="23315993" y="5536168"/>
+              <a:ext cx="312906" cy="369332"/>
+            </a:xfrm>
+            <a:prstGeom prst="rect">
+              <a:avLst/>
+            </a:prstGeom>
+            <a:noFill/>
+          </p:spPr>
+          <p:txBody>
+            <a:bodyPr wrap="none" rtlCol="0">
+              <a:spAutoFit/>
+            </a:bodyPr>
+            <a:lstStyle/>
+            <a:p>
+              <a:r>
+                <a:rPr lang="en-US" dirty="0"/>
+                <a:t>6</a:t>
+              </a:r>
+            </a:p>
+          </p:txBody>
+        </p:sp>
+        <p:sp>
+          <p:nvSpPr>
+            <p:cNvPr id="19" name="TextBox 18">
+              <a:extLst>
+                <a:ext uri="{FF2B5EF4-FFF2-40B4-BE49-F238E27FC236}">
+                  <a16:creationId xmlns:a16="http://schemas.microsoft.com/office/drawing/2014/main" id="{E2A872D9-BAA2-926E-8BF6-557B36359A89}"/>
+                </a:ext>
+              </a:extLst>
+            </p:cNvPr>
+            <p:cNvSpPr txBox="1"/>
+            <p:nvPr/>
+          </p:nvSpPr>
+          <p:spPr>
+            <a:xfrm>
+              <a:off x="23772582" y="11480474"/>
+              <a:ext cx="441146" cy="369332"/>
+            </a:xfrm>
+            <a:prstGeom prst="rect">
+              <a:avLst/>
+            </a:prstGeom>
+            <a:noFill/>
+          </p:spPr>
+          <p:txBody>
+            <a:bodyPr wrap="none" rtlCol="0">
+              <a:spAutoFit/>
+            </a:bodyPr>
+            <a:lstStyle/>
+            <a:p>
+              <a:r>
+                <a:rPr lang="en-US" dirty="0"/>
+                <a:t>20</a:t>
+              </a:r>
+            </a:p>
+          </p:txBody>
+        </p:sp>
+        <p:sp>
+          <p:nvSpPr>
+            <p:cNvPr id="20" name="TextBox 19">
+              <a:extLst>
+                <a:ext uri="{FF2B5EF4-FFF2-40B4-BE49-F238E27FC236}">
+                  <a16:creationId xmlns:a16="http://schemas.microsoft.com/office/drawing/2014/main" id="{FB7890C1-56FC-BC07-26D2-E3906F91A2E1}"/>
+                </a:ext>
+              </a:extLst>
+            </p:cNvPr>
+            <p:cNvSpPr txBox="1"/>
+            <p:nvPr/>
+          </p:nvSpPr>
+          <p:spPr>
+            <a:xfrm>
+              <a:off x="29136171" y="11480474"/>
+              <a:ext cx="441146" cy="369332"/>
+            </a:xfrm>
+            <a:prstGeom prst="rect">
+              <a:avLst/>
+            </a:prstGeom>
+            <a:noFill/>
+          </p:spPr>
+          <p:txBody>
+            <a:bodyPr wrap="none" rtlCol="0">
+              <a:spAutoFit/>
+            </a:bodyPr>
+            <a:lstStyle/>
+            <a:p>
+              <a:r>
+                <a:rPr lang="en-US" dirty="0"/>
+                <a:t>70</a:t>
+              </a:r>
+            </a:p>
+          </p:txBody>
+        </p:sp>
+      </p:grpSp>
+      <p:grpSp>
+        <p:nvGrpSpPr>
+          <p:cNvPr id="30" name="Group 29">
+            <a:extLst>
+              <a:ext uri="{FF2B5EF4-FFF2-40B4-BE49-F238E27FC236}">
+                <a16:creationId xmlns:a16="http://schemas.microsoft.com/office/drawing/2014/main" id="{3F1414F7-3E57-76CD-1C5A-70BE29BA366D}"/>
+              </a:ext>
+            </a:extLst>
+          </p:cNvPr>
+          <p:cNvGrpSpPr/>
+          <p:nvPr/>
+        </p:nvGrpSpPr>
+        <p:grpSpPr>
+          <a:xfrm>
+            <a:off x="15661774" y="13131455"/>
+            <a:ext cx="6737168" cy="6699112"/>
+            <a:chOff x="15911046" y="13078023"/>
+            <a:chExt cx="6737168" cy="6699112"/>
+          </a:xfrm>
+        </p:grpSpPr>
+        <p:pic>
+          <p:nvPicPr>
+            <p:cNvPr id="9" name="Graphic 8">
+              <a:extLst>
+                <a:ext uri="{FF2B5EF4-FFF2-40B4-BE49-F238E27FC236}">
+                  <a16:creationId xmlns:a16="http://schemas.microsoft.com/office/drawing/2014/main" id="{282843A3-A752-B35C-D565-E19252213ACA}"/>
+                </a:ext>
+              </a:extLst>
+            </p:cNvPr>
+            <p:cNvPicPr>
+              <a:picLocks noChangeAspect="1"/>
+            </p:cNvPicPr>
+            <p:nvPr/>
+          </p:nvPicPr>
+          <p:blipFill rotWithShape="1">
+            <a:blip r:embed="rId29">
+              <a:extLst>
+                <a:ext uri="{28A0092B-C50C-407E-A947-70E740481C1C}">
+                  <a14:useLocalDpi xmlns:a14="http://schemas.microsoft.com/office/drawing/2010/main" val="0"/>
+                </a:ext>
+                <a:ext uri="{96DAC541-7B7A-43D3-8B79-37D633B846F1}">
+                  <asvg:svgBlip xmlns:asvg="http://schemas.microsoft.com/office/drawing/2016/SVG/main" r:embed="rId30"/>
+                </a:ext>
+              </a:extLst>
+            </a:blip>
+            <a:srcRect l="9868" t="6783" r="2069" b="8627"/>
+            <a:stretch/>
+          </p:blipFill>
+          <p:spPr>
+            <a:xfrm>
+              <a:off x="16500268" y="13078023"/>
+              <a:ext cx="6147946" cy="6124247"/>
+            </a:xfrm>
+            <a:prstGeom prst="rect">
+              <a:avLst/>
+            </a:prstGeom>
+          </p:spPr>
+        </p:pic>
+        <p:sp>
+          <p:nvSpPr>
+            <p:cNvPr id="21" name="TextBox 20">
+              <a:extLst>
+                <a:ext uri="{FF2B5EF4-FFF2-40B4-BE49-F238E27FC236}">
+                  <a16:creationId xmlns:a16="http://schemas.microsoft.com/office/drawing/2014/main" id="{49D692A7-4FAE-7F86-3669-63E5EB7B73B4}"/>
+                </a:ext>
+              </a:extLst>
+            </p:cNvPr>
+            <p:cNvSpPr txBox="1"/>
+            <p:nvPr/>
+          </p:nvSpPr>
+          <p:spPr>
+            <a:xfrm>
+              <a:off x="16059122" y="13297224"/>
+              <a:ext cx="441146" cy="369332"/>
+            </a:xfrm>
+            <a:prstGeom prst="rect">
+              <a:avLst/>
+            </a:prstGeom>
+            <a:noFill/>
+          </p:spPr>
+          <p:txBody>
+            <a:bodyPr wrap="none" rtlCol="0">
+              <a:spAutoFit/>
+            </a:bodyPr>
+            <a:lstStyle/>
+            <a:p>
+              <a:r>
+                <a:rPr lang="en-US" dirty="0"/>
+                <a:t>35</a:t>
+              </a:r>
+            </a:p>
+          </p:txBody>
+        </p:sp>
+        <p:sp>
+          <p:nvSpPr>
+            <p:cNvPr id="22" name="TextBox 21">
+              <a:extLst>
+                <a:ext uri="{FF2B5EF4-FFF2-40B4-BE49-F238E27FC236}">
+                  <a16:creationId xmlns:a16="http://schemas.microsoft.com/office/drawing/2014/main" id="{EC6D13B2-263D-82AD-D27A-9146F541402C}"/>
+                </a:ext>
+              </a:extLst>
+            </p:cNvPr>
+            <p:cNvSpPr txBox="1"/>
+            <p:nvPr/>
+          </p:nvSpPr>
+          <p:spPr>
+            <a:xfrm>
+              <a:off x="16147265" y="18712557"/>
+              <a:ext cx="312906" cy="369332"/>
+            </a:xfrm>
+            <a:prstGeom prst="rect">
+              <a:avLst/>
+            </a:prstGeom>
+            <a:noFill/>
+          </p:spPr>
+          <p:txBody>
+            <a:bodyPr wrap="none" rtlCol="0">
+              <a:spAutoFit/>
+            </a:bodyPr>
+            <a:lstStyle/>
+            <a:p>
+              <a:r>
+                <a:rPr lang="en-US" dirty="0"/>
+                <a:t>0</a:t>
+              </a:r>
+            </a:p>
+          </p:txBody>
+        </p:sp>
+        <p:sp>
+          <p:nvSpPr>
+            <p:cNvPr id="23" name="TextBox 22">
+              <a:extLst>
+                <a:ext uri="{FF2B5EF4-FFF2-40B4-BE49-F238E27FC236}">
+                  <a16:creationId xmlns:a16="http://schemas.microsoft.com/office/drawing/2014/main" id="{AB573673-D070-01BC-38C0-015CC202624E}"/>
+                </a:ext>
+              </a:extLst>
+            </p:cNvPr>
+            <p:cNvSpPr txBox="1"/>
+            <p:nvPr/>
+          </p:nvSpPr>
+          <p:spPr>
+            <a:xfrm rot="16200000">
+              <a:off x="15411230" y="15931050"/>
+              <a:ext cx="1553630" cy="553998"/>
+            </a:xfrm>
+            <a:prstGeom prst="rect">
+              <a:avLst/>
+            </a:prstGeom>
+            <a:noFill/>
+          </p:spPr>
+          <p:txBody>
+            <a:bodyPr wrap="none" rtlCol="0">
+              <a:spAutoFit/>
+            </a:bodyPr>
+            <a:lstStyle/>
+            <a:p>
+              <a:r>
+                <a:rPr lang="en-US" sz="3000" dirty="0"/>
+                <a:t>OAFEM</a:t>
+              </a:r>
+            </a:p>
+          </p:txBody>
+        </p:sp>
+        <p:sp>
+          <p:nvSpPr>
+            <p:cNvPr id="24" name="TextBox 23">
+              <a:extLst>
+                <a:ext uri="{FF2B5EF4-FFF2-40B4-BE49-F238E27FC236}">
+                  <a16:creationId xmlns:a16="http://schemas.microsoft.com/office/drawing/2014/main" id="{9BA56891-1EA7-63D6-781A-F4B314CA5404}"/>
+                </a:ext>
+              </a:extLst>
+            </p:cNvPr>
+            <p:cNvSpPr txBox="1"/>
+            <p:nvPr/>
+          </p:nvSpPr>
+          <p:spPr>
+            <a:xfrm>
+              <a:off x="19201039" y="19223137"/>
+              <a:ext cx="867545" cy="553998"/>
+            </a:xfrm>
+            <a:prstGeom prst="rect">
+              <a:avLst/>
+            </a:prstGeom>
+            <a:noFill/>
+          </p:spPr>
+          <p:txBody>
+            <a:bodyPr wrap="none" rtlCol="0">
+              <a:spAutoFit/>
+            </a:bodyPr>
+            <a:lstStyle/>
+            <a:p>
+              <a:r>
+                <a:rPr lang="en-US" sz="3000" dirty="0"/>
+                <a:t>Age</a:t>
+              </a:r>
+            </a:p>
+          </p:txBody>
+        </p:sp>
+        <p:sp>
+          <p:nvSpPr>
+            <p:cNvPr id="25" name="TextBox 24">
+              <a:extLst>
+                <a:ext uri="{FF2B5EF4-FFF2-40B4-BE49-F238E27FC236}">
+                  <a16:creationId xmlns:a16="http://schemas.microsoft.com/office/drawing/2014/main" id="{E1D0DA85-42B5-2604-1257-444398E49E78}"/>
+                </a:ext>
+              </a:extLst>
+            </p:cNvPr>
+            <p:cNvSpPr txBox="1"/>
+            <p:nvPr/>
+          </p:nvSpPr>
+          <p:spPr>
+            <a:xfrm>
+              <a:off x="16515121" y="19263038"/>
+              <a:ext cx="441146" cy="369332"/>
+            </a:xfrm>
+            <a:prstGeom prst="rect">
+              <a:avLst/>
+            </a:prstGeom>
+            <a:noFill/>
+          </p:spPr>
+          <p:txBody>
+            <a:bodyPr wrap="none" rtlCol="0">
+              <a:spAutoFit/>
+            </a:bodyPr>
+            <a:lstStyle/>
+            <a:p>
+              <a:r>
+                <a:rPr lang="en-US" dirty="0"/>
+                <a:t>20</a:t>
+              </a:r>
+            </a:p>
+          </p:txBody>
+        </p:sp>
+        <p:sp>
+          <p:nvSpPr>
+            <p:cNvPr id="26" name="TextBox 25">
+              <a:extLst>
+                <a:ext uri="{FF2B5EF4-FFF2-40B4-BE49-F238E27FC236}">
+                  <a16:creationId xmlns:a16="http://schemas.microsoft.com/office/drawing/2014/main" id="{6809160B-2F6C-BA84-02F1-D80F287E78AE}"/>
+                </a:ext>
+              </a:extLst>
+            </p:cNvPr>
+            <p:cNvSpPr txBox="1"/>
+            <p:nvPr/>
+          </p:nvSpPr>
+          <p:spPr>
+            <a:xfrm>
+              <a:off x="21878710" y="19263038"/>
+              <a:ext cx="441146" cy="369332"/>
+            </a:xfrm>
+            <a:prstGeom prst="rect">
+              <a:avLst/>
+            </a:prstGeom>
+            <a:noFill/>
+          </p:spPr>
+          <p:txBody>
+            <a:bodyPr wrap="none" rtlCol="0">
+              <a:spAutoFit/>
+            </a:bodyPr>
+            <a:lstStyle/>
+            <a:p>
+              <a:r>
+                <a:rPr lang="en-US" dirty="0"/>
+                <a:t>70</a:t>
+              </a:r>
+            </a:p>
+          </p:txBody>
+        </p:sp>
+      </p:grpSp>
+      <p:grpSp>
+        <p:nvGrpSpPr>
+          <p:cNvPr id="31" name="Group 30">
+            <a:extLst>
+              <a:ext uri="{FF2B5EF4-FFF2-40B4-BE49-F238E27FC236}">
+                <a16:creationId xmlns:a16="http://schemas.microsoft.com/office/drawing/2014/main" id="{4BDD7E15-33CB-E293-2CA9-95B8CCDF48ED}"/>
+              </a:ext>
+            </a:extLst>
+          </p:cNvPr>
+          <p:cNvGrpSpPr/>
+          <p:nvPr/>
+        </p:nvGrpSpPr>
+        <p:grpSpPr>
+          <a:xfrm>
+            <a:off x="23056612" y="13074616"/>
+            <a:ext cx="6850435" cy="6849449"/>
+            <a:chOff x="23056612" y="13074616"/>
+            <a:chExt cx="6850435" cy="6849449"/>
+          </a:xfrm>
+        </p:grpSpPr>
+        <p:grpSp>
+          <p:nvGrpSpPr>
+            <p:cNvPr id="15583" name="Group 15582">
+              <a:extLst>
+                <a:ext uri="{FF2B5EF4-FFF2-40B4-BE49-F238E27FC236}">
+                  <a16:creationId xmlns:a16="http://schemas.microsoft.com/office/drawing/2014/main" id="{81424957-973F-2BA6-23A6-71C1377BD2AF}"/>
+                </a:ext>
+              </a:extLst>
+            </p:cNvPr>
+            <p:cNvGrpSpPr/>
+            <p:nvPr/>
+          </p:nvGrpSpPr>
+          <p:grpSpPr>
+            <a:xfrm>
+              <a:off x="23056612" y="13074616"/>
+              <a:ext cx="6850435" cy="6786447"/>
+              <a:chOff x="23252603" y="4927197"/>
+              <a:chExt cx="5353289" cy="5834166"/>
+            </a:xfrm>
+          </p:grpSpPr>
+          <p:pic>
+            <p:nvPicPr>
+              <p:cNvPr id="15574" name="Picture 15573" descr="A graph of a line&#10;&#10;Description automatically generated with medium confidence">
+                <a:extLst>
+                  <a:ext uri="{FF2B5EF4-FFF2-40B4-BE49-F238E27FC236}">
+                    <a16:creationId xmlns:a16="http://schemas.microsoft.com/office/drawing/2014/main" id="{C54D0E15-DCC7-A19B-7997-13F421CEA2FB}"/>
+                  </a:ext>
+                </a:extLst>
+              </p:cNvPr>
+              <p:cNvPicPr>
+                <a:picLocks noChangeAspect="1"/>
+              </p:cNvPicPr>
+              <p:nvPr/>
+            </p:nvPicPr>
+            <p:blipFill rotWithShape="1">
+              <a:blip r:embed="rId31">
+                <a:extLst>
+                  <a:ext uri="{28A0092B-C50C-407E-A947-70E740481C1C}">
+                    <a14:useLocalDpi xmlns:a14="http://schemas.microsoft.com/office/drawing/2010/main" val="0"/>
+                  </a:ext>
+                </a:extLst>
+              </a:blip>
+              <a:srcRect r="3644" b="9068"/>
+              <a:stretch/>
+            </p:blipFill>
+            <p:spPr>
+              <a:xfrm>
+                <a:off x="24004670" y="4927197"/>
+                <a:ext cx="4601222" cy="5427765"/>
+              </a:xfrm>
+              <a:prstGeom prst="rect">
+                <a:avLst/>
+              </a:prstGeom>
+            </p:spPr>
+          </p:pic>
+          <p:sp>
+            <p:nvSpPr>
+              <p:cNvPr id="15575" name="TextBox 15574">
+                <a:extLst>
+                  <a:ext uri="{FF2B5EF4-FFF2-40B4-BE49-F238E27FC236}">
+                    <a16:creationId xmlns:a16="http://schemas.microsoft.com/office/drawing/2014/main" id="{136D78E5-71EA-17ED-91C9-F9CCADA262FF}"/>
+                  </a:ext>
+                </a:extLst>
+              </p:cNvPr>
+              <p:cNvSpPr txBox="1"/>
+              <p:nvPr/>
+            </p:nvSpPr>
+            <p:spPr>
+              <a:xfrm rot="16200000">
+                <a:off x="20819591" y="7575196"/>
+                <a:ext cx="5298947" cy="432923"/>
+              </a:xfrm>
+              <a:prstGeom prst="rect">
+                <a:avLst/>
+              </a:prstGeom>
+              <a:noFill/>
+            </p:spPr>
+            <p:txBody>
+              <a:bodyPr wrap="none" rtlCol="0">
+                <a:spAutoFit/>
+              </a:bodyPr>
+              <a:lstStyle/>
+              <a:p>
+                <a:r>
+                  <a:rPr lang="en-US" sz="3000" dirty="0"/>
+                  <a:t>Sharing with Friend –With Stranger</a:t>
+                </a:r>
+              </a:p>
+            </p:txBody>
+          </p:sp>
+          <p:sp>
+            <p:nvSpPr>
+              <p:cNvPr id="15576" name="TextBox 15575">
+                <a:extLst>
+                  <a:ext uri="{FF2B5EF4-FFF2-40B4-BE49-F238E27FC236}">
+                    <a16:creationId xmlns:a16="http://schemas.microsoft.com/office/drawing/2014/main" id="{7E602785-88A0-0942-659B-9A750B46996F}"/>
+                  </a:ext>
+                </a:extLst>
+              </p:cNvPr>
+              <p:cNvSpPr txBox="1"/>
+              <p:nvPr/>
+            </p:nvSpPr>
+            <p:spPr>
+              <a:xfrm>
+                <a:off x="23603500" y="9333929"/>
+                <a:ext cx="389850" cy="369332"/>
+              </a:xfrm>
+              <a:prstGeom prst="rect">
+                <a:avLst/>
+              </a:prstGeom>
+              <a:noFill/>
+            </p:spPr>
+            <p:txBody>
+              <a:bodyPr wrap="none" rtlCol="0">
+                <a:spAutoFit/>
+              </a:bodyPr>
+              <a:lstStyle/>
+              <a:p>
+                <a:r>
+                  <a:rPr lang="en-US" dirty="0"/>
+                  <a:t>-2</a:t>
+                </a:r>
+              </a:p>
+            </p:txBody>
+          </p:sp>
+          <p:sp>
+            <p:nvSpPr>
+              <p:cNvPr id="15577" name="TextBox 15576">
+                <a:extLst>
+                  <a:ext uri="{FF2B5EF4-FFF2-40B4-BE49-F238E27FC236}">
+                    <a16:creationId xmlns:a16="http://schemas.microsoft.com/office/drawing/2014/main" id="{44C014BB-4057-CE6F-8488-5075607DFC5B}"/>
+                  </a:ext>
+                </a:extLst>
+              </p:cNvPr>
+              <p:cNvSpPr txBox="1"/>
+              <p:nvPr/>
+            </p:nvSpPr>
+            <p:spPr>
+              <a:xfrm>
+                <a:off x="23684874" y="6124920"/>
+                <a:ext cx="312906" cy="369332"/>
+              </a:xfrm>
+              <a:prstGeom prst="rect">
+                <a:avLst/>
+              </a:prstGeom>
+              <a:noFill/>
+            </p:spPr>
+            <p:txBody>
+              <a:bodyPr wrap="none" rtlCol="0">
+                <a:spAutoFit/>
+              </a:bodyPr>
+              <a:lstStyle/>
+              <a:p>
+                <a:r>
+                  <a:rPr lang="en-US" dirty="0"/>
+                  <a:t>2</a:t>
+                </a:r>
+              </a:p>
+            </p:txBody>
+          </p:sp>
+          <p:sp>
+            <p:nvSpPr>
+              <p:cNvPr id="15578" name="TextBox 15577">
+                <a:extLst>
+                  <a:ext uri="{FF2B5EF4-FFF2-40B4-BE49-F238E27FC236}">
+                    <a16:creationId xmlns:a16="http://schemas.microsoft.com/office/drawing/2014/main" id="{7FC9F9D2-B5EE-482C-7F35-E7345B0CA197}"/>
+                  </a:ext>
+                </a:extLst>
+              </p:cNvPr>
+              <p:cNvSpPr txBox="1"/>
+              <p:nvPr/>
+            </p:nvSpPr>
+            <p:spPr>
+              <a:xfrm>
+                <a:off x="23666269" y="7699893"/>
+                <a:ext cx="312906" cy="369332"/>
+              </a:xfrm>
+              <a:prstGeom prst="rect">
+                <a:avLst/>
+              </a:prstGeom>
+              <a:noFill/>
+            </p:spPr>
+            <p:txBody>
+              <a:bodyPr wrap="none" rtlCol="0">
+                <a:spAutoFit/>
+              </a:bodyPr>
+              <a:lstStyle/>
+              <a:p>
+                <a:r>
+                  <a:rPr lang="en-US" dirty="0"/>
+                  <a:t>0</a:t>
+                </a:r>
+              </a:p>
+            </p:txBody>
+          </p:sp>
+          <p:sp>
+            <p:nvSpPr>
+              <p:cNvPr id="15579" name="TextBox 15578">
+                <a:extLst>
+                  <a:ext uri="{FF2B5EF4-FFF2-40B4-BE49-F238E27FC236}">
+                    <a16:creationId xmlns:a16="http://schemas.microsoft.com/office/drawing/2014/main" id="{115532EB-4683-39F0-80DC-27E22F24AA20}"/>
+                  </a:ext>
+                </a:extLst>
+              </p:cNvPr>
+              <p:cNvSpPr txBox="1"/>
+              <p:nvPr/>
+            </p:nvSpPr>
+            <p:spPr>
+              <a:xfrm>
+                <a:off x="23984464" y="10392031"/>
+                <a:ext cx="441146" cy="369332"/>
+              </a:xfrm>
+              <a:prstGeom prst="rect">
+                <a:avLst/>
+              </a:prstGeom>
+              <a:noFill/>
+            </p:spPr>
+            <p:txBody>
+              <a:bodyPr wrap="none" rtlCol="0">
+                <a:spAutoFit/>
+              </a:bodyPr>
+              <a:lstStyle/>
+              <a:p>
+                <a:r>
+                  <a:rPr lang="en-US" dirty="0"/>
+                  <a:t>20</a:t>
+                </a:r>
+              </a:p>
+            </p:txBody>
+          </p:sp>
+        </p:grpSp>
+        <p:sp>
+          <p:nvSpPr>
+            <p:cNvPr id="27" name="TextBox 26">
+              <a:extLst>
+                <a:ext uri="{FF2B5EF4-FFF2-40B4-BE49-F238E27FC236}">
+                  <a16:creationId xmlns:a16="http://schemas.microsoft.com/office/drawing/2014/main" id="{B971FA06-90F6-38D8-E376-EAC7F8F86D37}"/>
+                </a:ext>
+              </a:extLst>
+            </p:cNvPr>
+            <p:cNvSpPr txBox="1"/>
+            <p:nvPr/>
+          </p:nvSpPr>
+          <p:spPr>
+            <a:xfrm>
+              <a:off x="26534606" y="19370067"/>
+              <a:ext cx="867545" cy="553998"/>
+            </a:xfrm>
+            <a:prstGeom prst="rect">
+              <a:avLst/>
+            </a:prstGeom>
+            <a:noFill/>
+          </p:spPr>
+          <p:txBody>
+            <a:bodyPr wrap="none" rtlCol="0">
+              <a:spAutoFit/>
+            </a:bodyPr>
+            <a:lstStyle/>
+            <a:p>
+              <a:r>
+                <a:rPr lang="en-US" sz="3000" dirty="0"/>
+                <a:t>Age</a:t>
+              </a:r>
+            </a:p>
+          </p:txBody>
+        </p:sp>
+        <p:sp>
+          <p:nvSpPr>
+            <p:cNvPr id="29" name="TextBox 28">
+              <a:extLst>
+                <a:ext uri="{FF2B5EF4-FFF2-40B4-BE49-F238E27FC236}">
+                  <a16:creationId xmlns:a16="http://schemas.microsoft.com/office/drawing/2014/main" id="{ECA8551F-72DA-08BF-83FF-D876E48BD6C0}"/>
+                </a:ext>
+              </a:extLst>
+            </p:cNvPr>
+            <p:cNvSpPr txBox="1"/>
+            <p:nvPr/>
+          </p:nvSpPr>
+          <p:spPr>
+            <a:xfrm>
+              <a:off x="29379086" y="19390085"/>
+              <a:ext cx="441146" cy="369332"/>
+            </a:xfrm>
+            <a:prstGeom prst="rect">
+              <a:avLst/>
+            </a:prstGeom>
+            <a:noFill/>
+          </p:spPr>
+          <p:txBody>
+            <a:bodyPr wrap="none" rtlCol="0">
+              <a:spAutoFit/>
+            </a:bodyPr>
+            <a:lstStyle/>
+            <a:p>
+              <a:r>
+                <a:rPr lang="en-US" dirty="0"/>
+                <a:t>70</a:t>
+              </a:r>
+            </a:p>
+          </p:txBody>
+        </p:sp>
+      </p:grpSp>
     </p:spTree>
   </p:cSld>
   <p:clrMapOvr>
@@ -18238,15 +18741,6 @@
 </file>
 
 <file path=customXml/item1.xml><?xml version="1.0" encoding="utf-8"?>
-<?mso-contentType ?>
-<FormTemplates xmlns="http://schemas.microsoft.com/sharepoint/v3/contenttype/forms">
-  <Display>DocumentLibraryForm</Display>
-  <Edit>DocumentLibraryForm</Edit>
-  <New>DocumentLibraryForm</New>
-</FormTemplates>
-</file>
-
-<file path=customXml/item2.xml><?xml version="1.0" encoding="utf-8"?>
 <ct:contentTypeSchema xmlns:ct="http://schemas.microsoft.com/office/2006/metadata/contentType" xmlns:ma="http://schemas.microsoft.com/office/2006/metadata/properties/metaAttributes" ct:_="" ma:_="" ma:contentTypeName="Document" ma:contentTypeID="0x01010080DE0AC601CE7945A16C28BE7D604718" ma:contentTypeVersion="16" ma:contentTypeDescription="Create a new document." ma:contentTypeScope="" ma:versionID="7200742d51933ad5859751156d985908">
   <xsd:schema xmlns:xsd="http://www.w3.org/2001/XMLSchema" xmlns:xs="http://www.w3.org/2001/XMLSchema" xmlns:p="http://schemas.microsoft.com/office/2006/metadata/properties" xmlns:ns2="068132b6-27af-4cc5-9624-46e0bc309f9c" xmlns:ns3="1ec1d487-840c-40ff-aca1-00ff13008544" targetNamespace="http://schemas.microsoft.com/office/2006/metadata/properties" ma:root="true" ma:fieldsID="ef3bb859774f4d5f12e6e11e5f5551df" ns2:_="" ns3:_="">
     <xsd:import namespace="068132b6-27af-4cc5-9624-46e0bc309f9c"/>
@@ -18489,15 +18983,16 @@
 </ct:contentTypeSchema>
 </file>
 
-<file path=customXml/itemProps1.xml><?xml version="1.0" encoding="utf-8"?>
-<ds:datastoreItem xmlns:ds="http://schemas.openxmlformats.org/officeDocument/2006/customXml" ds:itemID="{D5CAE7E8-1A3A-4A91-86FB-BA9E1762341A}">
-  <ds:schemaRefs>
-    <ds:schemaRef ds:uri="http://schemas.microsoft.com/sharepoint/v3/contenttype/forms"/>
-  </ds:schemaRefs>
-</ds:datastoreItem>
+<file path=customXml/item2.xml><?xml version="1.0" encoding="utf-8"?>
+<?mso-contentType ?>
+<FormTemplates xmlns="http://schemas.microsoft.com/sharepoint/v3/contenttype/forms">
+  <Display>DocumentLibraryForm</Display>
+  <Edit>DocumentLibraryForm</Edit>
+  <New>DocumentLibraryForm</New>
+</FormTemplates>
 </file>
 
-<file path=customXml/itemProps2.xml><?xml version="1.0" encoding="utf-8"?>
+<file path=customXml/itemProps1.xml><?xml version="1.0" encoding="utf-8"?>
 <ds:datastoreItem xmlns:ds="http://schemas.openxmlformats.org/officeDocument/2006/customXml" ds:itemID="{36138A07-987C-4A73-AAED-022482DDD0A4}">
   <ds:schemaRefs>
     <ds:schemaRef ds:uri="068132b6-27af-4cc5-9624-46e0bc309f9c"/>
@@ -18514,4 +19009,12 @@
     <ds:schemaRef ds:uri="http://www.w3.org/2001/XMLSchema"/>
   </ds:schemaRefs>
 </ds:datastoreItem>
+</file>
+
+<file path=customXml/itemProps2.xml><?xml version="1.0" encoding="utf-8"?>
+<ds:datastoreItem xmlns:ds="http://schemas.openxmlformats.org/officeDocument/2006/customXml" ds:itemID="{D5CAE7E8-1A3A-4A91-86FB-BA9E1762341A}">
+  <ds:schemaRefs>
+    <ds:schemaRef ds:uri="http://schemas.microsoft.com/sharepoint/v3/contenttype/forms"/>
+  </ds:schemaRefs>
+</ds:datastoreItem>
 </file>
--- a/SFN/2023_SFN_trust.pptx
+++ b/SFN/2023_SFN_trust.pptx
@@ -7402,7 +7402,7 @@
         </p:nvSpPr>
         <p:spPr bwMode="auto">
           <a:xfrm>
-            <a:off x="32230620" y="24371337"/>
+            <a:off x="32230620" y="24261609"/>
             <a:ext cx="9797258" cy="748988"/>
           </a:xfrm>
           <a:prstGeom prst="rect">
@@ -7554,8 +7554,8 @@
         </p:nvSpPr>
         <p:spPr>
           <a:xfrm>
-            <a:off x="30912367" y="25351882"/>
-            <a:ext cx="12914399" cy="1938992"/>
+            <a:off x="30912368" y="25095850"/>
+            <a:ext cx="12496564" cy="6401753"/>
           </a:xfrm>
           <a:prstGeom prst="rect">
             <a:avLst/>
@@ -7583,8 +7583,137 @@
                 <a:ea typeface="MS PGothic"/>
                 <a:cs typeface="Helvetica"/>
               </a:rPr>
-              <a:t> Our preliminary results indicate that reciprocation elicited activation in the ventral striatum. Additionally, we find that during the </a:t>
+              <a:t> Our preliminary results indicate that </a:t>
             </a:r>
+            <a:r>
+              <a:rPr lang="en-US" sz="4000" b="1" dirty="0">
+                <a:latin typeface="Helvetica"/>
+                <a:ea typeface="MS PGothic"/>
+                <a:cs typeface="Helvetica"/>
+              </a:rPr>
+              <a:t>reciprocation elicited activation in the ventral striatum</a:t>
+            </a:r>
+            <a:r>
+              <a:rPr lang="en-US" sz="4000" dirty="0">
+                <a:latin typeface="Helvetica"/>
+                <a:ea typeface="MS PGothic"/>
+                <a:cs typeface="Helvetica"/>
+              </a:rPr>
+              <a:t>.</a:t>
+            </a:r>
+          </a:p>
+          <a:p>
+            <a:pPr>
+              <a:spcBef>
+                <a:spcPts val="360"/>
+              </a:spcBef>
+              <a:spcAft>
+                <a:spcPts val="0"/>
+              </a:spcAft>
+              <a:buFont typeface="Arial" panose="020B0604020202020204" pitchFamily="34" charset="0"/>
+              <a:buChar char="•"/>
+            </a:pPr>
+            <a:r>
+              <a:rPr lang="en-US" sz="4000" dirty="0">
+                <a:latin typeface="Helvetica"/>
+                <a:ea typeface="MS PGothic"/>
+                <a:cs typeface="Helvetica"/>
+              </a:rPr>
+              <a:t> Additionally, we find that the </a:t>
+            </a:r>
+            <a:r>
+              <a:rPr lang="en-US" sz="4000" b="1" dirty="0" err="1">
+                <a:latin typeface="Helvetica"/>
+                <a:ea typeface="MS PGothic"/>
+                <a:cs typeface="Helvetica"/>
+              </a:rPr>
+              <a:t>dlPFC</a:t>
+            </a:r>
+            <a:r>
+              <a:rPr lang="en-US" sz="4000" dirty="0">
+                <a:latin typeface="Helvetica"/>
+                <a:ea typeface="MS PGothic"/>
+                <a:cs typeface="Helvetica"/>
+              </a:rPr>
+              <a:t> and </a:t>
+            </a:r>
+            <a:r>
+              <a:rPr lang="en-US" sz="4000" b="1" dirty="0" err="1">
+                <a:latin typeface="Helvetica"/>
+                <a:ea typeface="MS PGothic"/>
+                <a:cs typeface="Helvetica"/>
+              </a:rPr>
+              <a:t>mPFC</a:t>
+            </a:r>
+            <a:r>
+              <a:rPr lang="en-US" sz="4000" dirty="0">
+                <a:latin typeface="Helvetica"/>
+                <a:ea typeface="MS PGothic"/>
+                <a:cs typeface="Helvetica"/>
+              </a:rPr>
+              <a:t> activation </a:t>
+            </a:r>
+            <a:r>
+              <a:rPr lang="en-US" sz="4000" b="1" dirty="0">
+                <a:latin typeface="Helvetica"/>
+                <a:ea typeface="MS PGothic"/>
+                <a:cs typeface="Helvetica"/>
+              </a:rPr>
+              <a:t>differs between older and younger adults relative to social context. </a:t>
+            </a:r>
+          </a:p>
+          <a:p>
+            <a:pPr>
+              <a:spcBef>
+                <a:spcPts val="360"/>
+              </a:spcBef>
+              <a:spcAft>
+                <a:spcPts val="0"/>
+              </a:spcAft>
+              <a:buFont typeface="Arial" panose="020B0604020202020204" pitchFamily="34" charset="0"/>
+              <a:buChar char="•"/>
+            </a:pPr>
+            <a:r>
+              <a:rPr lang="en-US" sz="4000" b="1" dirty="0">
+                <a:latin typeface="Helvetica"/>
+                <a:ea typeface="MS PGothic"/>
+                <a:cs typeface="Helvetica"/>
+              </a:rPr>
+              <a:t> </a:t>
+            </a:r>
+          </a:p>
+          <a:p>
+            <a:pPr>
+              <a:spcBef>
+                <a:spcPts val="360"/>
+              </a:spcBef>
+              <a:spcAft>
+                <a:spcPts val="0"/>
+              </a:spcAft>
+              <a:buFont typeface="Arial" panose="020B0604020202020204" pitchFamily="34" charset="0"/>
+              <a:buChar char="•"/>
+            </a:pPr>
+            <a:r>
+              <a:rPr lang="en-US" sz="4000" b="1" dirty="0">
+                <a:latin typeface="Helvetica"/>
+                <a:ea typeface="MS PGothic"/>
+                <a:cs typeface="Helvetica"/>
+              </a:rPr>
+              <a:t> </a:t>
+            </a:r>
+            <a:r>
+              <a:rPr lang="en-US" sz="4000" dirty="0">
+                <a:latin typeface="Helvetica"/>
+                <a:ea typeface="MS PGothic"/>
+                <a:cs typeface="Helvetica"/>
+              </a:rPr>
+              <a:t>Future analyses will further examine age-related differences in neural responses to monetary outcomes relative to social context and risk of financial exploitation. </a:t>
+            </a:r>
+            <a:endParaRPr lang="en-US" sz="4000" b="1" dirty="0">
+              <a:latin typeface="Helvetica"/>
+              <a:ea typeface="MS PGothic"/>
+              <a:cs typeface="Helvetica"/>
+            </a:endParaRPr>
           </a:p>
         </p:txBody>
       </p:sp>
@@ -7780,8 +7909,8 @@
           </p:nvSpPr>
           <p:spPr>
             <a:xfrm>
-              <a:off x="238017" y="31517716"/>
-              <a:ext cx="14865736" cy="830997"/>
+              <a:off x="238017" y="31376129"/>
+              <a:ext cx="14865736" cy="1077218"/>
             </a:xfrm>
             <a:prstGeom prst="rect">
               <a:avLst/>
@@ -7796,98 +7925,52 @@
             <a:p>
               <a:pPr algn="ctr"/>
               <a:r>
-                <a:rPr lang="en-US" sz="2400" b="0" i="0" dirty="0">
+                <a:rPr lang="en-US" sz="3200" b="0" i="0" dirty="0">
                   <a:effectLst/>
                   <a:latin typeface="Helvetica" pitchFamily="2" charset="0"/>
                 </a:rPr>
-                <a:t>This study was supported by National Institutes of Health grant RF1-AG67011 (David V. Smith).</a:t>
+                <a:t>This study was supported by NIH grant RF1-AG67011 (David V. Smith).</a:t>
               </a:r>
               <a:br>
-                <a:rPr lang="en-US" sz="2400" dirty="0">
+                <a:rPr lang="en-US" sz="3200" dirty="0">
                   <a:latin typeface="Helvetica" pitchFamily="2" charset="0"/>
                 </a:rPr>
               </a:br>
               <a:r>
-                <a:rPr lang="en-US" sz="2400" b="0" i="0" dirty="0">
+                <a:rPr lang="en-US" sz="3200" b="0" i="0" dirty="0">
                   <a:effectLst/>
                   <a:latin typeface="Helvetica" pitchFamily="2" charset="0"/>
                 </a:rPr>
                 <a:t>Contact information: </a:t>
               </a:r>
               <a:r>
-                <a:rPr lang="en-US" sz="2400" b="0" i="0" dirty="0" err="1">
+                <a:rPr lang="en-US" sz="3200" b="0" i="0" dirty="0" err="1">
                   <a:effectLst/>
                   <a:latin typeface="Helvetica" pitchFamily="2" charset="0"/>
                 </a:rPr>
                 <a:t>Avi.Dachs@temple.edu</a:t>
               </a:r>
               <a:r>
-                <a:rPr lang="en-US" sz="2400" b="0" i="0" dirty="0">
+                <a:rPr lang="en-US" sz="3200" b="0" i="0" dirty="0">
                   <a:effectLst/>
                   <a:latin typeface="Helvetica" pitchFamily="2" charset="0"/>
                 </a:rPr>
                 <a:t>, </a:t>
               </a:r>
               <a:r>
-                <a:rPr lang="en-US" sz="2400" b="0" i="0" dirty="0" err="1">
+                <a:rPr lang="en-US" sz="3200" b="0" i="0" dirty="0" err="1">
                   <a:effectLst/>
                   <a:latin typeface="Helvetica" pitchFamily="2" charset="0"/>
                 </a:rPr>
                 <a:t>Cooper.Sharp@temple.edu</a:t>
               </a:r>
-              <a:endParaRPr lang="en-US" sz="2400" dirty="0">
+              <a:endParaRPr lang="en-US" sz="3200" dirty="0">
                 <a:latin typeface="Helvetica" pitchFamily="2" charset="0"/>
               </a:endParaRPr>
             </a:p>
           </p:txBody>
         </p:sp>
       </p:grpSp>
-      <p:sp>
-        <p:nvSpPr>
-          <p:cNvPr id="15653" name="TextBox 15652">
-            <a:extLst>
-              <a:ext uri="{FF2B5EF4-FFF2-40B4-BE49-F238E27FC236}">
-                <a16:creationId xmlns:a16="http://schemas.microsoft.com/office/drawing/2014/main" id="{9597D04E-EB1A-89FD-82CC-B188103B2A2D}"/>
-              </a:ext>
-            </a:extLst>
-          </p:cNvPr>
-          <p:cNvSpPr txBox="1"/>
-          <p:nvPr/>
-        </p:nvSpPr>
-        <p:spPr>
-          <a:xfrm>
-            <a:off x="43891200" y="12531221"/>
-            <a:ext cx="12062344" cy="1015663"/>
-          </a:xfrm>
-          <a:prstGeom prst="rect">
-            <a:avLst/>
-          </a:prstGeom>
-          <a:noFill/>
-        </p:spPr>
-        <p:txBody>
-          <a:bodyPr wrap="square" rtlCol="0">
-            <a:spAutoFit/>
-          </a:bodyPr>
-          <a:lstStyle/>
-          <a:p>
-            <a:pPr algn="ctr"/>
-            <a:r>
-              <a:rPr lang="en-US" sz="3000" i="0" dirty="0" err="1">
-                <a:effectLst/>
-                <a:latin typeface="Helvetica" pitchFamily="2" charset="0"/>
-              </a:rPr>
-              <a:t>mPFC</a:t>
-            </a:r>
-            <a:r>
-              <a:rPr lang="en-US" sz="3000" i="0" dirty="0">
-                <a:effectLst/>
-                <a:latin typeface="Helvetica" pitchFamily="2" charset="0"/>
-              </a:rPr>
-              <a:t> activation was negatively correlated with age during friend reciprocation</a:t>
-            </a:r>
-          </a:p>
-        </p:txBody>
-      </p:sp>
       <p:sp>
         <p:nvSpPr>
           <p:cNvPr id="15656" name="TextBox 15655">
@@ -9828,7 +9911,7 @@
         </p:nvSpPr>
         <p:spPr bwMode="auto">
           <a:xfrm>
-            <a:off x="5104022" y="15429243"/>
+            <a:off x="5250937" y="17041236"/>
             <a:ext cx="1984189" cy="552682"/>
           </a:xfrm>
           <a:prstGeom prst="rect">
@@ -10238,45 +10321,6 @@
               <a:effectLst/>
               <a:latin typeface="Helvetica" pitchFamily="2" charset="0"/>
             </a:endParaRPr>
-          </a:p>
-        </p:txBody>
-      </p:sp>
-      <p:sp>
-        <p:nvSpPr>
-          <p:cNvPr id="15729" name="TextBox 15728">
-            <a:extLst>
-              <a:ext uri="{FF2B5EF4-FFF2-40B4-BE49-F238E27FC236}">
-                <a16:creationId xmlns:a16="http://schemas.microsoft.com/office/drawing/2014/main" id="{9C4B6981-AC7F-0DBE-5162-C0039C526C7C}"/>
-              </a:ext>
-            </a:extLst>
-          </p:cNvPr>
-          <p:cNvSpPr txBox="1"/>
-          <p:nvPr/>
-        </p:nvSpPr>
-        <p:spPr>
-          <a:xfrm>
-            <a:off x="43408931" y="11102423"/>
-            <a:ext cx="12062344" cy="1015663"/>
-          </a:xfrm>
-          <a:prstGeom prst="rect">
-            <a:avLst/>
-          </a:prstGeom>
-          <a:noFill/>
-        </p:spPr>
-        <p:txBody>
-          <a:bodyPr wrap="square" rtlCol="0">
-            <a:spAutoFit/>
-          </a:bodyPr>
-          <a:lstStyle/>
-          <a:p>
-            <a:pPr algn="ctr"/>
-            <a:r>
-              <a:rPr lang="en-US" sz="3000" i="0" dirty="0">
-                <a:effectLst/>
-                <a:latin typeface="Helvetica" pitchFamily="2" charset="0"/>
-              </a:rPr>
-              <a:t>We found greater MFG activation in older adults than in younger adults when experiencing friend defecting.</a:t>
-            </a:r>
           </a:p>
         </p:txBody>
       </p:sp>
@@ -18741,6 +18785,15 @@
 </file>
 
 <file path=customXml/item1.xml><?xml version="1.0" encoding="utf-8"?>
+<?mso-contentType ?>
+<FormTemplates xmlns="http://schemas.microsoft.com/sharepoint/v3/contenttype/forms">
+  <Display>DocumentLibraryForm</Display>
+  <Edit>DocumentLibraryForm</Edit>
+  <New>DocumentLibraryForm</New>
+</FormTemplates>
+</file>
+
+<file path=customXml/item2.xml><?xml version="1.0" encoding="utf-8"?>
 <ct:contentTypeSchema xmlns:ct="http://schemas.microsoft.com/office/2006/metadata/contentType" xmlns:ma="http://schemas.microsoft.com/office/2006/metadata/properties/metaAttributes" ct:_="" ma:_="" ma:contentTypeName="Document" ma:contentTypeID="0x01010080DE0AC601CE7945A16C28BE7D604718" ma:contentTypeVersion="16" ma:contentTypeDescription="Create a new document." ma:contentTypeScope="" ma:versionID="7200742d51933ad5859751156d985908">
   <xsd:schema xmlns:xsd="http://www.w3.org/2001/XMLSchema" xmlns:xs="http://www.w3.org/2001/XMLSchema" xmlns:p="http://schemas.microsoft.com/office/2006/metadata/properties" xmlns:ns2="068132b6-27af-4cc5-9624-46e0bc309f9c" xmlns:ns3="1ec1d487-840c-40ff-aca1-00ff13008544" targetNamespace="http://schemas.microsoft.com/office/2006/metadata/properties" ma:root="true" ma:fieldsID="ef3bb859774f4d5f12e6e11e5f5551df" ns2:_="" ns3:_="">
     <xsd:import namespace="068132b6-27af-4cc5-9624-46e0bc309f9c"/>
@@ -18983,16 +19036,15 @@
 </ct:contentTypeSchema>
 </file>
 
-<file path=customXml/item2.xml><?xml version="1.0" encoding="utf-8"?>
-<?mso-contentType ?>
-<FormTemplates xmlns="http://schemas.microsoft.com/sharepoint/v3/contenttype/forms">
-  <Display>DocumentLibraryForm</Display>
-  <Edit>DocumentLibraryForm</Edit>
-  <New>DocumentLibraryForm</New>
-</FormTemplates>
+<file path=customXml/itemProps1.xml><?xml version="1.0" encoding="utf-8"?>
+<ds:datastoreItem xmlns:ds="http://schemas.openxmlformats.org/officeDocument/2006/customXml" ds:itemID="{D5CAE7E8-1A3A-4A91-86FB-BA9E1762341A}">
+  <ds:schemaRefs>
+    <ds:schemaRef ds:uri="http://schemas.microsoft.com/sharepoint/v3/contenttype/forms"/>
+  </ds:schemaRefs>
+</ds:datastoreItem>
 </file>
 
-<file path=customXml/itemProps1.xml><?xml version="1.0" encoding="utf-8"?>
+<file path=customXml/itemProps2.xml><?xml version="1.0" encoding="utf-8"?>
 <ds:datastoreItem xmlns:ds="http://schemas.openxmlformats.org/officeDocument/2006/customXml" ds:itemID="{36138A07-987C-4A73-AAED-022482DDD0A4}">
   <ds:schemaRefs>
     <ds:schemaRef ds:uri="068132b6-27af-4cc5-9624-46e0bc309f9c"/>
@@ -19009,12 +19061,4 @@
     <ds:schemaRef ds:uri="http://www.w3.org/2001/XMLSchema"/>
   </ds:schemaRefs>
 </ds:datastoreItem>
-</file>
-
-<file path=customXml/itemProps2.xml><?xml version="1.0" encoding="utf-8"?>
-<ds:datastoreItem xmlns:ds="http://schemas.openxmlformats.org/officeDocument/2006/customXml" ds:itemID="{D5CAE7E8-1A3A-4A91-86FB-BA9E1762341A}">
-  <ds:schemaRefs>
-    <ds:schemaRef ds:uri="http://schemas.microsoft.com/sharepoint/v3/contenttype/forms"/>
-  </ds:schemaRefs>
-</ds:datastoreItem>
 </file>
--- a/SFN/2023_SFN_trust.pptx
+++ b/SFN/2023_SFN_trust.pptx
@@ -11741,50 +11741,12 @@
         </p:nvGrpSpPr>
         <p:grpSpPr>
           <a:xfrm>
-            <a:off x="23148115" y="5384800"/>
-            <a:ext cx="6758936" cy="6609771"/>
-            <a:chOff x="23148115" y="5384800"/>
-            <a:chExt cx="6758936" cy="6609771"/>
+            <a:off x="23148115" y="5536168"/>
+            <a:ext cx="6429202" cy="6458403"/>
+            <a:chOff x="23148115" y="5536168"/>
+            <a:chExt cx="6429202" cy="6458403"/>
           </a:xfrm>
         </p:grpSpPr>
-        <p:pic>
-          <p:nvPicPr>
-            <p:cNvPr id="11" name="Graphic 10">
-              <a:extLst>
-                <a:ext uri="{FF2B5EF4-FFF2-40B4-BE49-F238E27FC236}">
-                  <a16:creationId xmlns:a16="http://schemas.microsoft.com/office/drawing/2014/main" id="{B46F0626-1999-AF24-21F0-FAE5DF9DEC26}"/>
-                </a:ext>
-              </a:extLst>
-            </p:cNvPr>
-            <p:cNvPicPr>
-              <a:picLocks noChangeAspect="1"/>
-            </p:cNvPicPr>
-            <p:nvPr/>
-          </p:nvPicPr>
-          <p:blipFill rotWithShape="1">
-            <a:blip r:embed="rId27">
-              <a:extLst>
-                <a:ext uri="{28A0092B-C50C-407E-A947-70E740481C1C}">
-                  <a14:useLocalDpi xmlns:a14="http://schemas.microsoft.com/office/drawing/2010/main" val="0"/>
-                </a:ext>
-                <a:ext uri="{96DAC541-7B7A-43D3-8B79-37D633B846F1}">
-                  <asvg:svgBlip xmlns:asvg="http://schemas.microsoft.com/office/drawing/2016/SVG/main" r:embed="rId28"/>
-                </a:ext>
-              </a:extLst>
-            </a:blip>
-            <a:srcRect l="8522" t="6842" r="2180" b="9488"/>
-            <a:stretch/>
-          </p:blipFill>
-          <p:spPr>
-            <a:xfrm>
-              <a:off x="23745788" y="5384800"/>
-              <a:ext cx="6161263" cy="5986876"/>
-            </a:xfrm>
-            <a:prstGeom prst="rect">
-              <a:avLst/>
-            </a:prstGeom>
-          </p:spPr>
-        </p:pic>
         <p:sp>
           <p:nvSpPr>
             <p:cNvPr id="12" name="TextBox 11">
@@ -11996,12 +11958,50 @@
           </p:txBody>
         </p:sp>
       </p:grpSp>
+      <p:pic>
+        <p:nvPicPr>
+          <p:cNvPr id="10" name="Graphic 9">
+            <a:extLst>
+              <a:ext uri="{FF2B5EF4-FFF2-40B4-BE49-F238E27FC236}">
+                <a16:creationId xmlns:a16="http://schemas.microsoft.com/office/drawing/2014/main" id="{12C2420C-269D-5FD9-9793-4E8BAE4F2032}"/>
+              </a:ext>
+            </a:extLst>
+          </p:cNvPr>
+          <p:cNvPicPr>
+            <a:picLocks noChangeAspect="1"/>
+          </p:cNvPicPr>
+          <p:nvPr/>
+        </p:nvPicPr>
+        <p:blipFill rotWithShape="1">
+          <a:blip r:embed="rId27">
+            <a:extLst>
+              <a:ext uri="{28A0092B-C50C-407E-A947-70E740481C1C}">
+                <a14:useLocalDpi xmlns:a14="http://schemas.microsoft.com/office/drawing/2010/main" val="0"/>
+              </a:ext>
+              <a:ext uri="{96DAC541-7B7A-43D3-8B79-37D633B846F1}">
+                <asvg:svgBlip xmlns:asvg="http://schemas.microsoft.com/office/drawing/2016/SVG/main" r:embed="rId28"/>
+              </a:ext>
+            </a:extLst>
+          </a:blip>
+          <a:srcRect l="14834" t="11264" r="3835" b="16585"/>
+          <a:stretch/>
+        </p:blipFill>
+        <p:spPr>
+          <a:xfrm>
+            <a:off x="23673037" y="5663992"/>
+            <a:ext cx="6460448" cy="5523032"/>
+          </a:xfrm>
+          <a:prstGeom prst="rect">
+            <a:avLst/>
+          </a:prstGeom>
+        </p:spPr>
+      </p:pic>
       <p:grpSp>
         <p:nvGrpSpPr>
-          <p:cNvPr id="30" name="Group 29">
+          <p:cNvPr id="37" name="Group 36">
             <a:extLst>
               <a:ext uri="{FF2B5EF4-FFF2-40B4-BE49-F238E27FC236}">
-                <a16:creationId xmlns:a16="http://schemas.microsoft.com/office/drawing/2014/main" id="{3F1414F7-3E57-76CD-1C5A-70BE29BA366D}"/>
+                <a16:creationId xmlns:a16="http://schemas.microsoft.com/office/drawing/2014/main" id="{4A3383C0-EB4E-3413-FBA5-F6CDEFBB9A01}"/>
               </a:ext>
             </a:extLst>
           </p:cNvPr>
@@ -12010,287 +12010,18 @@
         </p:nvGrpSpPr>
         <p:grpSpPr>
           <a:xfrm>
-            <a:off x="15661774" y="13131455"/>
-            <a:ext cx="6737168" cy="6699112"/>
-            <a:chOff x="15911046" y="13078023"/>
-            <a:chExt cx="6737168" cy="6699112"/>
-          </a:xfrm>
-        </p:grpSpPr>
-        <p:pic>
-          <p:nvPicPr>
-            <p:cNvPr id="9" name="Graphic 8">
-              <a:extLst>
-                <a:ext uri="{FF2B5EF4-FFF2-40B4-BE49-F238E27FC236}">
-                  <a16:creationId xmlns:a16="http://schemas.microsoft.com/office/drawing/2014/main" id="{282843A3-A752-B35C-D565-E19252213ACA}"/>
-                </a:ext>
-              </a:extLst>
-            </p:cNvPr>
-            <p:cNvPicPr>
-              <a:picLocks noChangeAspect="1"/>
-            </p:cNvPicPr>
-            <p:nvPr/>
-          </p:nvPicPr>
-          <p:blipFill rotWithShape="1">
-            <a:blip r:embed="rId29">
-              <a:extLst>
-                <a:ext uri="{28A0092B-C50C-407E-A947-70E740481C1C}">
-                  <a14:useLocalDpi xmlns:a14="http://schemas.microsoft.com/office/drawing/2010/main" val="0"/>
-                </a:ext>
-                <a:ext uri="{96DAC541-7B7A-43D3-8B79-37D633B846F1}">
-                  <asvg:svgBlip xmlns:asvg="http://schemas.microsoft.com/office/drawing/2016/SVG/main" r:embed="rId30"/>
-                </a:ext>
-              </a:extLst>
-            </a:blip>
-            <a:srcRect l="9868" t="6783" r="2069" b="8627"/>
-            <a:stretch/>
-          </p:blipFill>
-          <p:spPr>
-            <a:xfrm>
-              <a:off x="16500268" y="13078023"/>
-              <a:ext cx="6147946" cy="6124247"/>
-            </a:xfrm>
-            <a:prstGeom prst="rect">
-              <a:avLst/>
-            </a:prstGeom>
-          </p:spPr>
-        </p:pic>
-        <p:sp>
-          <p:nvSpPr>
-            <p:cNvPr id="21" name="TextBox 20">
-              <a:extLst>
-                <a:ext uri="{FF2B5EF4-FFF2-40B4-BE49-F238E27FC236}">
-                  <a16:creationId xmlns:a16="http://schemas.microsoft.com/office/drawing/2014/main" id="{49D692A7-4FAE-7F86-3669-63E5EB7B73B4}"/>
-                </a:ext>
-              </a:extLst>
-            </p:cNvPr>
-            <p:cNvSpPr txBox="1"/>
-            <p:nvPr/>
-          </p:nvSpPr>
-          <p:spPr>
-            <a:xfrm>
-              <a:off x="16059122" y="13297224"/>
-              <a:ext cx="441146" cy="369332"/>
-            </a:xfrm>
-            <a:prstGeom prst="rect">
-              <a:avLst/>
-            </a:prstGeom>
-            <a:noFill/>
-          </p:spPr>
-          <p:txBody>
-            <a:bodyPr wrap="none" rtlCol="0">
-              <a:spAutoFit/>
-            </a:bodyPr>
-            <a:lstStyle/>
-            <a:p>
-              <a:r>
-                <a:rPr lang="en-US" dirty="0"/>
-                <a:t>35</a:t>
-              </a:r>
-            </a:p>
-          </p:txBody>
-        </p:sp>
-        <p:sp>
-          <p:nvSpPr>
-            <p:cNvPr id="22" name="TextBox 21">
-              <a:extLst>
-                <a:ext uri="{FF2B5EF4-FFF2-40B4-BE49-F238E27FC236}">
-                  <a16:creationId xmlns:a16="http://schemas.microsoft.com/office/drawing/2014/main" id="{EC6D13B2-263D-82AD-D27A-9146F541402C}"/>
-                </a:ext>
-              </a:extLst>
-            </p:cNvPr>
-            <p:cNvSpPr txBox="1"/>
-            <p:nvPr/>
-          </p:nvSpPr>
-          <p:spPr>
-            <a:xfrm>
-              <a:off x="16147265" y="18712557"/>
-              <a:ext cx="312906" cy="369332"/>
-            </a:xfrm>
-            <a:prstGeom prst="rect">
-              <a:avLst/>
-            </a:prstGeom>
-            <a:noFill/>
-          </p:spPr>
-          <p:txBody>
-            <a:bodyPr wrap="none" rtlCol="0">
-              <a:spAutoFit/>
-            </a:bodyPr>
-            <a:lstStyle/>
-            <a:p>
-              <a:r>
-                <a:rPr lang="en-US" dirty="0"/>
-                <a:t>0</a:t>
-              </a:r>
-            </a:p>
-          </p:txBody>
-        </p:sp>
-        <p:sp>
-          <p:nvSpPr>
-            <p:cNvPr id="23" name="TextBox 22">
-              <a:extLst>
-                <a:ext uri="{FF2B5EF4-FFF2-40B4-BE49-F238E27FC236}">
-                  <a16:creationId xmlns:a16="http://schemas.microsoft.com/office/drawing/2014/main" id="{AB573673-D070-01BC-38C0-015CC202624E}"/>
-                </a:ext>
-              </a:extLst>
-            </p:cNvPr>
-            <p:cNvSpPr txBox="1"/>
-            <p:nvPr/>
-          </p:nvSpPr>
-          <p:spPr>
-            <a:xfrm rot="16200000">
-              <a:off x="15411230" y="15931050"/>
-              <a:ext cx="1553630" cy="553998"/>
-            </a:xfrm>
-            <a:prstGeom prst="rect">
-              <a:avLst/>
-            </a:prstGeom>
-            <a:noFill/>
-          </p:spPr>
-          <p:txBody>
-            <a:bodyPr wrap="none" rtlCol="0">
-              <a:spAutoFit/>
-            </a:bodyPr>
-            <a:lstStyle/>
-            <a:p>
-              <a:r>
-                <a:rPr lang="en-US" sz="3000" dirty="0"/>
-                <a:t>OAFEM</a:t>
-              </a:r>
-            </a:p>
-          </p:txBody>
-        </p:sp>
-        <p:sp>
-          <p:nvSpPr>
-            <p:cNvPr id="24" name="TextBox 23">
-              <a:extLst>
-                <a:ext uri="{FF2B5EF4-FFF2-40B4-BE49-F238E27FC236}">
-                  <a16:creationId xmlns:a16="http://schemas.microsoft.com/office/drawing/2014/main" id="{9BA56891-1EA7-63D6-781A-F4B314CA5404}"/>
-                </a:ext>
-              </a:extLst>
-            </p:cNvPr>
-            <p:cNvSpPr txBox="1"/>
-            <p:nvPr/>
-          </p:nvSpPr>
-          <p:spPr>
-            <a:xfrm>
-              <a:off x="19201039" y="19223137"/>
-              <a:ext cx="867545" cy="553998"/>
-            </a:xfrm>
-            <a:prstGeom prst="rect">
-              <a:avLst/>
-            </a:prstGeom>
-            <a:noFill/>
-          </p:spPr>
-          <p:txBody>
-            <a:bodyPr wrap="none" rtlCol="0">
-              <a:spAutoFit/>
-            </a:bodyPr>
-            <a:lstStyle/>
-            <a:p>
-              <a:r>
-                <a:rPr lang="en-US" sz="3000" dirty="0"/>
-                <a:t>Age</a:t>
-              </a:r>
-            </a:p>
-          </p:txBody>
-        </p:sp>
-        <p:sp>
-          <p:nvSpPr>
-            <p:cNvPr id="25" name="TextBox 24">
-              <a:extLst>
-                <a:ext uri="{FF2B5EF4-FFF2-40B4-BE49-F238E27FC236}">
-                  <a16:creationId xmlns:a16="http://schemas.microsoft.com/office/drawing/2014/main" id="{E1D0DA85-42B5-2604-1257-444398E49E78}"/>
-                </a:ext>
-              </a:extLst>
-            </p:cNvPr>
-            <p:cNvSpPr txBox="1"/>
-            <p:nvPr/>
-          </p:nvSpPr>
-          <p:spPr>
-            <a:xfrm>
-              <a:off x="16515121" y="19263038"/>
-              <a:ext cx="441146" cy="369332"/>
-            </a:xfrm>
-            <a:prstGeom prst="rect">
-              <a:avLst/>
-            </a:prstGeom>
-            <a:noFill/>
-          </p:spPr>
-          <p:txBody>
-            <a:bodyPr wrap="none" rtlCol="0">
-              <a:spAutoFit/>
-            </a:bodyPr>
-            <a:lstStyle/>
-            <a:p>
-              <a:r>
-                <a:rPr lang="en-US" dirty="0"/>
-                <a:t>20</a:t>
-              </a:r>
-            </a:p>
-          </p:txBody>
-        </p:sp>
-        <p:sp>
-          <p:nvSpPr>
-            <p:cNvPr id="26" name="TextBox 25">
-              <a:extLst>
-                <a:ext uri="{FF2B5EF4-FFF2-40B4-BE49-F238E27FC236}">
-                  <a16:creationId xmlns:a16="http://schemas.microsoft.com/office/drawing/2014/main" id="{6809160B-2F6C-BA84-02F1-D80F287E78AE}"/>
-                </a:ext>
-              </a:extLst>
-            </p:cNvPr>
-            <p:cNvSpPr txBox="1"/>
-            <p:nvPr/>
-          </p:nvSpPr>
-          <p:spPr>
-            <a:xfrm>
-              <a:off x="21878710" y="19263038"/>
-              <a:ext cx="441146" cy="369332"/>
-            </a:xfrm>
-            <a:prstGeom prst="rect">
-              <a:avLst/>
-            </a:prstGeom>
-            <a:noFill/>
-          </p:spPr>
-          <p:txBody>
-            <a:bodyPr wrap="none" rtlCol="0">
-              <a:spAutoFit/>
-            </a:bodyPr>
-            <a:lstStyle/>
-            <a:p>
-              <a:r>
-                <a:rPr lang="en-US" dirty="0"/>
-                <a:t>70</a:t>
-              </a:r>
-            </a:p>
-          </p:txBody>
-        </p:sp>
-      </p:grpSp>
-      <p:grpSp>
-        <p:nvGrpSpPr>
-          <p:cNvPr id="31" name="Group 30">
-            <a:extLst>
-              <a:ext uri="{FF2B5EF4-FFF2-40B4-BE49-F238E27FC236}">
-                <a16:creationId xmlns:a16="http://schemas.microsoft.com/office/drawing/2014/main" id="{4BDD7E15-33CB-E293-2CA9-95B8CCDF48ED}"/>
-              </a:ext>
-            </a:extLst>
-          </p:cNvPr>
-          <p:cNvGrpSpPr/>
-          <p:nvPr/>
-        </p:nvGrpSpPr>
-        <p:grpSpPr>
-          <a:xfrm>
-            <a:off x="23056612" y="13074616"/>
-            <a:ext cx="6850435" cy="6849449"/>
-            <a:chOff x="23056612" y="13074616"/>
-            <a:chExt cx="6850435" cy="6849449"/>
+            <a:off x="15661774" y="13400269"/>
+            <a:ext cx="6794637" cy="6330548"/>
+            <a:chOff x="15661774" y="13350656"/>
+            <a:chExt cx="6781931" cy="6479911"/>
           </a:xfrm>
         </p:grpSpPr>
         <p:grpSp>
           <p:nvGrpSpPr>
-            <p:cNvPr id="15583" name="Group 15582">
+            <p:cNvPr id="30" name="Group 29">
               <a:extLst>
                 <a:ext uri="{FF2B5EF4-FFF2-40B4-BE49-F238E27FC236}">
-                  <a16:creationId xmlns:a16="http://schemas.microsoft.com/office/drawing/2014/main" id="{81424957-973F-2BA6-23A6-71C1377BD2AF}"/>
+                  <a16:creationId xmlns:a16="http://schemas.microsoft.com/office/drawing/2014/main" id="{3F1414F7-3E57-76CD-1C5A-70BE29BA366D}"/>
                 </a:ext>
               </a:extLst>
             </p:cNvPr>
@@ -12299,88 +12030,18 @@
           </p:nvGrpSpPr>
           <p:grpSpPr>
             <a:xfrm>
-              <a:off x="23056612" y="13074616"/>
-              <a:ext cx="6850435" cy="6786447"/>
-              <a:chOff x="23252603" y="4927197"/>
-              <a:chExt cx="5353289" cy="5834166"/>
+              <a:off x="15661774" y="13350656"/>
+              <a:ext cx="6408810" cy="6479911"/>
+              <a:chOff x="15911046" y="13297224"/>
+              <a:chExt cx="6408810" cy="6479911"/>
             </a:xfrm>
           </p:grpSpPr>
-          <p:pic>
-            <p:nvPicPr>
-              <p:cNvPr id="15574" name="Picture 15573" descr="A graph of a line&#10;&#10;Description automatically generated with medium confidence">
+          <p:sp>
+            <p:nvSpPr>
+              <p:cNvPr id="21" name="TextBox 20">
                 <a:extLst>
                   <a:ext uri="{FF2B5EF4-FFF2-40B4-BE49-F238E27FC236}">
-                    <a16:creationId xmlns:a16="http://schemas.microsoft.com/office/drawing/2014/main" id="{C54D0E15-DCC7-A19B-7997-13F421CEA2FB}"/>
-                  </a:ext>
-                </a:extLst>
-              </p:cNvPr>
-              <p:cNvPicPr>
-                <a:picLocks noChangeAspect="1"/>
-              </p:cNvPicPr>
-              <p:nvPr/>
-            </p:nvPicPr>
-            <p:blipFill rotWithShape="1">
-              <a:blip r:embed="rId31">
-                <a:extLst>
-                  <a:ext uri="{28A0092B-C50C-407E-A947-70E740481C1C}">
-                    <a14:useLocalDpi xmlns:a14="http://schemas.microsoft.com/office/drawing/2010/main" val="0"/>
-                  </a:ext>
-                </a:extLst>
-              </a:blip>
-              <a:srcRect r="3644" b="9068"/>
-              <a:stretch/>
-            </p:blipFill>
-            <p:spPr>
-              <a:xfrm>
-                <a:off x="24004670" y="4927197"/>
-                <a:ext cx="4601222" cy="5427765"/>
-              </a:xfrm>
-              <a:prstGeom prst="rect">
-                <a:avLst/>
-              </a:prstGeom>
-            </p:spPr>
-          </p:pic>
-          <p:sp>
-            <p:nvSpPr>
-              <p:cNvPr id="15575" name="TextBox 15574">
-                <a:extLst>
-                  <a:ext uri="{FF2B5EF4-FFF2-40B4-BE49-F238E27FC236}">
-                    <a16:creationId xmlns:a16="http://schemas.microsoft.com/office/drawing/2014/main" id="{136D78E5-71EA-17ED-91C9-F9CCADA262FF}"/>
-                  </a:ext>
-                </a:extLst>
-              </p:cNvPr>
-              <p:cNvSpPr txBox="1"/>
-              <p:nvPr/>
-            </p:nvSpPr>
-            <p:spPr>
-              <a:xfrm rot="16200000">
-                <a:off x="20819591" y="7575196"/>
-                <a:ext cx="5298947" cy="432923"/>
-              </a:xfrm>
-              <a:prstGeom prst="rect">
-                <a:avLst/>
-              </a:prstGeom>
-              <a:noFill/>
-            </p:spPr>
-            <p:txBody>
-              <a:bodyPr wrap="none" rtlCol="0">
-                <a:spAutoFit/>
-              </a:bodyPr>
-              <a:lstStyle/>
-              <a:p>
-                <a:r>
-                  <a:rPr lang="en-US" sz="3000" dirty="0"/>
-                  <a:t>Sharing with Friend –With Stranger</a:t>
-                </a:r>
-              </a:p>
-            </p:txBody>
-          </p:sp>
-          <p:sp>
-            <p:nvSpPr>
-              <p:cNvPr id="15576" name="TextBox 15575">
-                <a:extLst>
-                  <a:ext uri="{FF2B5EF4-FFF2-40B4-BE49-F238E27FC236}">
-                    <a16:creationId xmlns:a16="http://schemas.microsoft.com/office/drawing/2014/main" id="{7E602785-88A0-0942-659B-9A750B46996F}"/>
+                    <a16:creationId xmlns:a16="http://schemas.microsoft.com/office/drawing/2014/main" id="{49D692A7-4FAE-7F86-3669-63E5EB7B73B4}"/>
                   </a:ext>
                 </a:extLst>
               </p:cNvPr>
@@ -12389,8 +12050,8 @@
             </p:nvSpPr>
             <p:spPr>
               <a:xfrm>
-                <a:off x="23603500" y="9333929"/>
-                <a:ext cx="389850" cy="369332"/>
+                <a:off x="16059122" y="13297224"/>
+                <a:ext cx="441146" cy="369332"/>
               </a:xfrm>
               <a:prstGeom prst="rect">
                 <a:avLst/>
@@ -12405,17 +12066,17 @@
               <a:p>
                 <a:r>
                   <a:rPr lang="en-US" dirty="0"/>
-                  <a:t>-2</a:t>
+                  <a:t>35</a:t>
                 </a:r>
               </a:p>
             </p:txBody>
           </p:sp>
           <p:sp>
             <p:nvSpPr>
-              <p:cNvPr id="15577" name="TextBox 15576">
+              <p:cNvPr id="22" name="TextBox 21">
                 <a:extLst>
                   <a:ext uri="{FF2B5EF4-FFF2-40B4-BE49-F238E27FC236}">
-                    <a16:creationId xmlns:a16="http://schemas.microsoft.com/office/drawing/2014/main" id="{44C014BB-4057-CE6F-8488-5075607DFC5B}"/>
+                    <a16:creationId xmlns:a16="http://schemas.microsoft.com/office/drawing/2014/main" id="{EC6D13B2-263D-82AD-D27A-9146F541402C}"/>
                   </a:ext>
                 </a:extLst>
               </p:cNvPr>
@@ -12424,42 +12085,7 @@
             </p:nvSpPr>
             <p:spPr>
               <a:xfrm>
-                <a:off x="23684874" y="6124920"/>
-                <a:ext cx="312906" cy="369332"/>
-              </a:xfrm>
-              <a:prstGeom prst="rect">
-                <a:avLst/>
-              </a:prstGeom>
-              <a:noFill/>
-            </p:spPr>
-            <p:txBody>
-              <a:bodyPr wrap="none" rtlCol="0">
-                <a:spAutoFit/>
-              </a:bodyPr>
-              <a:lstStyle/>
-              <a:p>
-                <a:r>
-                  <a:rPr lang="en-US" dirty="0"/>
-                  <a:t>2</a:t>
-                </a:r>
-              </a:p>
-            </p:txBody>
-          </p:sp>
-          <p:sp>
-            <p:nvSpPr>
-              <p:cNvPr id="15578" name="TextBox 15577">
-                <a:extLst>
-                  <a:ext uri="{FF2B5EF4-FFF2-40B4-BE49-F238E27FC236}">
-                    <a16:creationId xmlns:a16="http://schemas.microsoft.com/office/drawing/2014/main" id="{7FC9F9D2-B5EE-482C-7F35-E7345B0CA197}"/>
-                  </a:ext>
-                </a:extLst>
-              </p:cNvPr>
-              <p:cNvSpPr txBox="1"/>
-              <p:nvPr/>
-            </p:nvSpPr>
-            <p:spPr>
-              <a:xfrm>
-                <a:off x="23666269" y="7699893"/>
+                <a:off x="16147265" y="18712557"/>
                 <a:ext cx="312906" cy="369332"/>
               </a:xfrm>
               <a:prstGeom prst="rect">
@@ -12482,10 +12108,45 @@
           </p:sp>
           <p:sp>
             <p:nvSpPr>
-              <p:cNvPr id="15579" name="TextBox 15578">
+              <p:cNvPr id="23" name="TextBox 22">
                 <a:extLst>
                   <a:ext uri="{FF2B5EF4-FFF2-40B4-BE49-F238E27FC236}">
-                    <a16:creationId xmlns:a16="http://schemas.microsoft.com/office/drawing/2014/main" id="{115532EB-4683-39F0-80DC-27E22F24AA20}"/>
+                    <a16:creationId xmlns:a16="http://schemas.microsoft.com/office/drawing/2014/main" id="{AB573673-D070-01BC-38C0-015CC202624E}"/>
+                  </a:ext>
+                </a:extLst>
+              </p:cNvPr>
+              <p:cNvSpPr txBox="1"/>
+              <p:nvPr/>
+            </p:nvSpPr>
+            <p:spPr>
+              <a:xfrm rot="16200000">
+                <a:off x="15411230" y="15931050"/>
+                <a:ext cx="1553630" cy="553998"/>
+              </a:xfrm>
+              <a:prstGeom prst="rect">
+                <a:avLst/>
+              </a:prstGeom>
+              <a:noFill/>
+            </p:spPr>
+            <p:txBody>
+              <a:bodyPr wrap="none" rtlCol="0">
+                <a:spAutoFit/>
+              </a:bodyPr>
+              <a:lstStyle/>
+              <a:p>
+                <a:r>
+                  <a:rPr lang="en-US" sz="3000" dirty="0"/>
+                  <a:t>OAFEM</a:t>
+                </a:r>
+              </a:p>
+            </p:txBody>
+          </p:sp>
+          <p:sp>
+            <p:nvSpPr>
+              <p:cNvPr id="24" name="TextBox 23">
+                <a:extLst>
+                  <a:ext uri="{FF2B5EF4-FFF2-40B4-BE49-F238E27FC236}">
+                    <a16:creationId xmlns:a16="http://schemas.microsoft.com/office/drawing/2014/main" id="{9BA56891-1EA7-63D6-781A-F4B314CA5404}"/>
                   </a:ext>
                 </a:extLst>
               </p:cNvPr>
@@ -12494,7 +12155,42 @@
             </p:nvSpPr>
             <p:spPr>
               <a:xfrm>
-                <a:off x="23984464" y="10392031"/>
+                <a:off x="19201039" y="19223137"/>
+                <a:ext cx="867545" cy="553998"/>
+              </a:xfrm>
+              <a:prstGeom prst="rect">
+                <a:avLst/>
+              </a:prstGeom>
+              <a:noFill/>
+            </p:spPr>
+            <p:txBody>
+              <a:bodyPr wrap="none" rtlCol="0">
+                <a:spAutoFit/>
+              </a:bodyPr>
+              <a:lstStyle/>
+              <a:p>
+                <a:r>
+                  <a:rPr lang="en-US" sz="3000" dirty="0"/>
+                  <a:t>Age</a:t>
+                </a:r>
+              </a:p>
+            </p:txBody>
+          </p:sp>
+          <p:sp>
+            <p:nvSpPr>
+              <p:cNvPr id="25" name="TextBox 24">
+                <a:extLst>
+                  <a:ext uri="{FF2B5EF4-FFF2-40B4-BE49-F238E27FC236}">
+                    <a16:creationId xmlns:a16="http://schemas.microsoft.com/office/drawing/2014/main" id="{E1D0DA85-42B5-2604-1257-444398E49E78}"/>
+                  </a:ext>
+                </a:extLst>
+              </p:cNvPr>
+              <p:cNvSpPr txBox="1"/>
+              <p:nvPr/>
+            </p:nvSpPr>
+            <p:spPr>
+              <a:xfrm>
+                <a:off x="16515121" y="19263038"/>
                 <a:ext cx="441146" cy="369332"/>
               </a:xfrm>
               <a:prstGeom prst="rect">
@@ -12515,77 +12211,426 @@
               </a:p>
             </p:txBody>
           </p:sp>
+          <p:sp>
+            <p:nvSpPr>
+              <p:cNvPr id="26" name="TextBox 25">
+                <a:extLst>
+                  <a:ext uri="{FF2B5EF4-FFF2-40B4-BE49-F238E27FC236}">
+                    <a16:creationId xmlns:a16="http://schemas.microsoft.com/office/drawing/2014/main" id="{6809160B-2F6C-BA84-02F1-D80F287E78AE}"/>
+                  </a:ext>
+                </a:extLst>
+              </p:cNvPr>
+              <p:cNvSpPr txBox="1"/>
+              <p:nvPr/>
+            </p:nvSpPr>
+            <p:spPr>
+              <a:xfrm>
+                <a:off x="21878710" y="19263038"/>
+                <a:ext cx="441146" cy="369332"/>
+              </a:xfrm>
+              <a:prstGeom prst="rect">
+                <a:avLst/>
+              </a:prstGeom>
+              <a:noFill/>
+            </p:spPr>
+            <p:txBody>
+              <a:bodyPr wrap="none" rtlCol="0">
+                <a:spAutoFit/>
+              </a:bodyPr>
+              <a:lstStyle/>
+              <a:p>
+                <a:r>
+                  <a:rPr lang="en-US" dirty="0"/>
+                  <a:t>70</a:t>
+                </a:r>
+              </a:p>
+            </p:txBody>
+          </p:sp>
         </p:grpSp>
-        <p:sp>
-          <p:nvSpPr>
-            <p:cNvPr id="27" name="TextBox 26">
+        <p:pic>
+          <p:nvPicPr>
+            <p:cNvPr id="34" name="Graphic 33">
               <a:extLst>
                 <a:ext uri="{FF2B5EF4-FFF2-40B4-BE49-F238E27FC236}">
-                  <a16:creationId xmlns:a16="http://schemas.microsoft.com/office/drawing/2014/main" id="{B971FA06-90F6-38D8-E376-EAC7F8F86D37}"/>
+                  <a16:creationId xmlns:a16="http://schemas.microsoft.com/office/drawing/2014/main" id="{1A809AB7-5523-3F9D-6316-37B2E6495105}"/>
                 </a:ext>
               </a:extLst>
             </p:cNvPr>
-            <p:cNvSpPr txBox="1"/>
+            <p:cNvPicPr>
+              <a:picLocks noChangeAspect="1"/>
+            </p:cNvPicPr>
             <p:nvPr/>
-          </p:nvSpPr>
+          </p:nvPicPr>
+          <p:blipFill rotWithShape="1">
+            <a:blip r:embed="rId29">
+              <a:extLst>
+                <a:ext uri="{28A0092B-C50C-407E-A947-70E740481C1C}">
+                  <a14:useLocalDpi xmlns:a14="http://schemas.microsoft.com/office/drawing/2010/main" val="0"/>
+                </a:ext>
+                <a:ext uri="{96DAC541-7B7A-43D3-8B79-37D633B846F1}">
+                  <asvg:svgBlip xmlns:asvg="http://schemas.microsoft.com/office/drawing/2016/SVG/main" r:embed="rId30"/>
+                </a:ext>
+              </a:extLst>
+            </a:blip>
+            <a:srcRect l="14908" t="13111" r="4415" b="16123"/>
+            <a:stretch/>
+          </p:blipFill>
           <p:spPr>
             <a:xfrm>
-              <a:off x="26534606" y="19370067"/>
-              <a:ext cx="867545" cy="553998"/>
+              <a:off x="16243525" y="13558987"/>
+              <a:ext cx="6200180" cy="5460849"/>
             </a:xfrm>
             <a:prstGeom prst="rect">
               <a:avLst/>
             </a:prstGeom>
-            <a:noFill/>
           </p:spPr>
-          <p:txBody>
-            <a:bodyPr wrap="none" rtlCol="0">
-              <a:spAutoFit/>
-            </a:bodyPr>
-            <a:lstStyle/>
-            <a:p>
-              <a:r>
-                <a:rPr lang="en-US" sz="3000" dirty="0"/>
-                <a:t>Age</a:t>
-              </a:r>
-            </a:p>
-          </p:txBody>
-        </p:sp>
-        <p:sp>
-          <p:nvSpPr>
-            <p:cNvPr id="29" name="TextBox 28">
+        </p:pic>
+      </p:grpSp>
+      <p:grpSp>
+        <p:nvGrpSpPr>
+          <p:cNvPr id="43" name="Group 42">
+            <a:extLst>
+              <a:ext uri="{FF2B5EF4-FFF2-40B4-BE49-F238E27FC236}">
+                <a16:creationId xmlns:a16="http://schemas.microsoft.com/office/drawing/2014/main" id="{9B558AD3-6D79-9D59-B5C7-87060424114B}"/>
+              </a:ext>
+            </a:extLst>
+          </p:cNvPr>
+          <p:cNvGrpSpPr/>
+          <p:nvPr/>
+        </p:nvGrpSpPr>
+        <p:grpSpPr>
+          <a:xfrm>
+            <a:off x="23056612" y="13459237"/>
+            <a:ext cx="6867126" cy="6464828"/>
+            <a:chOff x="23056611" y="13324694"/>
+            <a:chExt cx="7155559" cy="6599371"/>
+          </a:xfrm>
+        </p:grpSpPr>
+        <p:grpSp>
+          <p:nvGrpSpPr>
+            <p:cNvPr id="31" name="Group 30">
               <a:extLst>
                 <a:ext uri="{FF2B5EF4-FFF2-40B4-BE49-F238E27FC236}">
-                  <a16:creationId xmlns:a16="http://schemas.microsoft.com/office/drawing/2014/main" id="{ECA8551F-72DA-08BF-83FF-D876E48BD6C0}"/>
+                  <a16:creationId xmlns:a16="http://schemas.microsoft.com/office/drawing/2014/main" id="{4BDD7E15-33CB-E293-2CA9-95B8CCDF48ED}"/>
                 </a:ext>
               </a:extLst>
             </p:cNvPr>
-            <p:cNvSpPr txBox="1"/>
+            <p:cNvGrpSpPr/>
             <p:nvPr/>
-          </p:nvSpPr>
+          </p:nvGrpSpPr>
+          <p:grpSpPr>
+            <a:xfrm>
+              <a:off x="23056611" y="13324694"/>
+              <a:ext cx="6763621" cy="6599371"/>
+              <a:chOff x="23056611" y="13324694"/>
+              <a:chExt cx="6763621" cy="6599371"/>
+            </a:xfrm>
+          </p:grpSpPr>
+          <p:grpSp>
+            <p:nvGrpSpPr>
+              <p:cNvPr id="15583" name="Group 15582">
+                <a:extLst>
+                  <a:ext uri="{FF2B5EF4-FFF2-40B4-BE49-F238E27FC236}">
+                    <a16:creationId xmlns:a16="http://schemas.microsoft.com/office/drawing/2014/main" id="{81424957-973F-2BA6-23A6-71C1377BD2AF}"/>
+                  </a:ext>
+                </a:extLst>
+              </p:cNvPr>
+              <p:cNvGrpSpPr/>
+              <p:nvPr/>
+            </p:nvGrpSpPr>
+            <p:grpSpPr>
+              <a:xfrm>
+                <a:off x="23056611" y="13324694"/>
+                <a:ext cx="1501060" cy="6536369"/>
+                <a:chOff x="23252603" y="5142184"/>
+                <a:chExt cx="1173007" cy="5619179"/>
+              </a:xfrm>
+            </p:grpSpPr>
+            <p:sp>
+              <p:nvSpPr>
+                <p:cNvPr id="15575" name="TextBox 15574">
+                  <a:extLst>
+                    <a:ext uri="{FF2B5EF4-FFF2-40B4-BE49-F238E27FC236}">
+                      <a16:creationId xmlns:a16="http://schemas.microsoft.com/office/drawing/2014/main" id="{136D78E5-71EA-17ED-91C9-F9CCADA262FF}"/>
+                    </a:ext>
+                  </a:extLst>
+                </p:cNvPr>
+                <p:cNvSpPr txBox="1"/>
+                <p:nvPr/>
+              </p:nvSpPr>
+              <p:spPr>
+                <a:xfrm rot="16200000">
+                  <a:off x="20819591" y="7575196"/>
+                  <a:ext cx="5298947" cy="432923"/>
+                </a:xfrm>
+                <a:prstGeom prst="rect">
+                  <a:avLst/>
+                </a:prstGeom>
+                <a:noFill/>
+              </p:spPr>
+              <p:txBody>
+                <a:bodyPr wrap="none" rtlCol="0">
+                  <a:spAutoFit/>
+                </a:bodyPr>
+                <a:lstStyle/>
+                <a:p>
+                  <a:r>
+                    <a:rPr lang="en-US" sz="3000" dirty="0"/>
+                    <a:t>Sharing with Friend –With Stranger</a:t>
+                  </a:r>
+                </a:p>
+              </p:txBody>
+            </p:sp>
+            <p:sp>
+              <p:nvSpPr>
+                <p:cNvPr id="15576" name="TextBox 15575">
+                  <a:extLst>
+                    <a:ext uri="{FF2B5EF4-FFF2-40B4-BE49-F238E27FC236}">
+                      <a16:creationId xmlns:a16="http://schemas.microsoft.com/office/drawing/2014/main" id="{7E602785-88A0-0942-659B-9A750B46996F}"/>
+                    </a:ext>
+                  </a:extLst>
+                </p:cNvPr>
+                <p:cNvSpPr txBox="1"/>
+                <p:nvPr/>
+              </p:nvSpPr>
+              <p:spPr>
+                <a:xfrm>
+                  <a:off x="23603500" y="9333929"/>
+                  <a:ext cx="389850" cy="369332"/>
+                </a:xfrm>
+                <a:prstGeom prst="rect">
+                  <a:avLst/>
+                </a:prstGeom>
+                <a:noFill/>
+              </p:spPr>
+              <p:txBody>
+                <a:bodyPr wrap="none" rtlCol="0">
+                  <a:spAutoFit/>
+                </a:bodyPr>
+                <a:lstStyle/>
+                <a:p>
+                  <a:r>
+                    <a:rPr lang="en-US" dirty="0"/>
+                    <a:t>-2</a:t>
+                  </a:r>
+                </a:p>
+              </p:txBody>
+            </p:sp>
+            <p:sp>
+              <p:nvSpPr>
+                <p:cNvPr id="15577" name="TextBox 15576">
+                  <a:extLst>
+                    <a:ext uri="{FF2B5EF4-FFF2-40B4-BE49-F238E27FC236}">
+                      <a16:creationId xmlns:a16="http://schemas.microsoft.com/office/drawing/2014/main" id="{44C014BB-4057-CE6F-8488-5075607DFC5B}"/>
+                    </a:ext>
+                  </a:extLst>
+                </p:cNvPr>
+                <p:cNvSpPr txBox="1"/>
+                <p:nvPr/>
+              </p:nvSpPr>
+              <p:spPr>
+                <a:xfrm>
+                  <a:off x="23684874" y="6124920"/>
+                  <a:ext cx="312906" cy="369332"/>
+                </a:xfrm>
+                <a:prstGeom prst="rect">
+                  <a:avLst/>
+                </a:prstGeom>
+                <a:noFill/>
+              </p:spPr>
+              <p:txBody>
+                <a:bodyPr wrap="none" rtlCol="0">
+                  <a:spAutoFit/>
+                </a:bodyPr>
+                <a:lstStyle/>
+                <a:p>
+                  <a:r>
+                    <a:rPr lang="en-US" dirty="0"/>
+                    <a:t>2</a:t>
+                  </a:r>
+                </a:p>
+              </p:txBody>
+            </p:sp>
+            <p:sp>
+              <p:nvSpPr>
+                <p:cNvPr id="15578" name="TextBox 15577">
+                  <a:extLst>
+                    <a:ext uri="{FF2B5EF4-FFF2-40B4-BE49-F238E27FC236}">
+                      <a16:creationId xmlns:a16="http://schemas.microsoft.com/office/drawing/2014/main" id="{7FC9F9D2-B5EE-482C-7F35-E7345B0CA197}"/>
+                    </a:ext>
+                  </a:extLst>
+                </p:cNvPr>
+                <p:cNvSpPr txBox="1"/>
+                <p:nvPr/>
+              </p:nvSpPr>
+              <p:spPr>
+                <a:xfrm>
+                  <a:off x="23666269" y="7699893"/>
+                  <a:ext cx="312906" cy="369332"/>
+                </a:xfrm>
+                <a:prstGeom prst="rect">
+                  <a:avLst/>
+                </a:prstGeom>
+                <a:noFill/>
+              </p:spPr>
+              <p:txBody>
+                <a:bodyPr wrap="none" rtlCol="0">
+                  <a:spAutoFit/>
+                </a:bodyPr>
+                <a:lstStyle/>
+                <a:p>
+                  <a:r>
+                    <a:rPr lang="en-US" dirty="0"/>
+                    <a:t>0</a:t>
+                  </a:r>
+                </a:p>
+              </p:txBody>
+            </p:sp>
+            <p:sp>
+              <p:nvSpPr>
+                <p:cNvPr id="15579" name="TextBox 15578">
+                  <a:extLst>
+                    <a:ext uri="{FF2B5EF4-FFF2-40B4-BE49-F238E27FC236}">
+                      <a16:creationId xmlns:a16="http://schemas.microsoft.com/office/drawing/2014/main" id="{115532EB-4683-39F0-80DC-27E22F24AA20}"/>
+                    </a:ext>
+                  </a:extLst>
+                </p:cNvPr>
+                <p:cNvSpPr txBox="1"/>
+                <p:nvPr/>
+              </p:nvSpPr>
+              <p:spPr>
+                <a:xfrm>
+                  <a:off x="23984464" y="10392031"/>
+                  <a:ext cx="441146" cy="369332"/>
+                </a:xfrm>
+                <a:prstGeom prst="rect">
+                  <a:avLst/>
+                </a:prstGeom>
+                <a:noFill/>
+              </p:spPr>
+              <p:txBody>
+                <a:bodyPr wrap="none" rtlCol="0">
+                  <a:spAutoFit/>
+                </a:bodyPr>
+                <a:lstStyle/>
+                <a:p>
+                  <a:r>
+                    <a:rPr lang="en-US" dirty="0"/>
+                    <a:t>20</a:t>
+                  </a:r>
+                </a:p>
+              </p:txBody>
+            </p:sp>
+          </p:grpSp>
+          <p:sp>
+            <p:nvSpPr>
+              <p:cNvPr id="27" name="TextBox 26">
+                <a:extLst>
+                  <a:ext uri="{FF2B5EF4-FFF2-40B4-BE49-F238E27FC236}">
+                    <a16:creationId xmlns:a16="http://schemas.microsoft.com/office/drawing/2014/main" id="{B971FA06-90F6-38D8-E376-EAC7F8F86D37}"/>
+                  </a:ext>
+                </a:extLst>
+              </p:cNvPr>
+              <p:cNvSpPr txBox="1"/>
+              <p:nvPr/>
+            </p:nvSpPr>
+            <p:spPr>
+              <a:xfrm>
+                <a:off x="26534606" y="19370067"/>
+                <a:ext cx="867545" cy="553998"/>
+              </a:xfrm>
+              <a:prstGeom prst="rect">
+                <a:avLst/>
+              </a:prstGeom>
+              <a:noFill/>
+            </p:spPr>
+            <p:txBody>
+              <a:bodyPr wrap="none" rtlCol="0">
+                <a:spAutoFit/>
+              </a:bodyPr>
+              <a:lstStyle/>
+              <a:p>
+                <a:r>
+                  <a:rPr lang="en-US" sz="3000" dirty="0"/>
+                  <a:t>Age</a:t>
+                </a:r>
+              </a:p>
+            </p:txBody>
+          </p:sp>
+          <p:sp>
+            <p:nvSpPr>
+              <p:cNvPr id="29" name="TextBox 28">
+                <a:extLst>
+                  <a:ext uri="{FF2B5EF4-FFF2-40B4-BE49-F238E27FC236}">
+                    <a16:creationId xmlns:a16="http://schemas.microsoft.com/office/drawing/2014/main" id="{ECA8551F-72DA-08BF-83FF-D876E48BD6C0}"/>
+                  </a:ext>
+                </a:extLst>
+              </p:cNvPr>
+              <p:cNvSpPr txBox="1"/>
+              <p:nvPr/>
+            </p:nvSpPr>
+            <p:spPr>
+              <a:xfrm>
+                <a:off x="29379086" y="19390085"/>
+                <a:ext cx="441146" cy="369332"/>
+              </a:xfrm>
+              <a:prstGeom prst="rect">
+                <a:avLst/>
+              </a:prstGeom>
+              <a:noFill/>
+            </p:spPr>
+            <p:txBody>
+              <a:bodyPr wrap="none" rtlCol="0">
+                <a:spAutoFit/>
+              </a:bodyPr>
+              <a:lstStyle/>
+              <a:p>
+                <a:r>
+                  <a:rPr lang="en-US" dirty="0"/>
+                  <a:t>70</a:t>
+                </a:r>
+              </a:p>
+            </p:txBody>
+          </p:sp>
+        </p:grpSp>
+        <p:pic>
+          <p:nvPicPr>
+            <p:cNvPr id="42" name="Graphic 41">
+              <a:extLst>
+                <a:ext uri="{FF2B5EF4-FFF2-40B4-BE49-F238E27FC236}">
+                  <a16:creationId xmlns:a16="http://schemas.microsoft.com/office/drawing/2014/main" id="{4A483E63-A410-7026-10D0-0FAC305E54B3}"/>
+                </a:ext>
+              </a:extLst>
+            </p:cNvPr>
+            <p:cNvPicPr>
+              <a:picLocks noChangeAspect="1"/>
+            </p:cNvPicPr>
+            <p:nvPr/>
+          </p:nvPicPr>
+          <p:blipFill rotWithShape="1">
+            <a:blip r:embed="rId31">
+              <a:extLst>
+                <a:ext uri="{28A0092B-C50C-407E-A947-70E740481C1C}">
+                  <a14:useLocalDpi xmlns:a14="http://schemas.microsoft.com/office/drawing/2010/main" val="0"/>
+                </a:ext>
+                <a:ext uri="{96DAC541-7B7A-43D3-8B79-37D633B846F1}">
+                  <asvg:svgBlip xmlns:asvg="http://schemas.microsoft.com/office/drawing/2016/SVG/main" r:embed="rId32"/>
+                </a:ext>
+              </a:extLst>
+            </a:blip>
+            <a:srcRect l="15691" t="11081" r="4694" b="15428"/>
+            <a:stretch/>
+          </p:blipFill>
           <p:spPr>
             <a:xfrm>
-              <a:off x="29379086" y="19390085"/>
-              <a:ext cx="441146" cy="369332"/>
+              <a:off x="23952013" y="13459237"/>
+              <a:ext cx="6260157" cy="5568490"/>
             </a:xfrm>
             <a:prstGeom prst="rect">
               <a:avLst/>
             </a:prstGeom>
-            <a:noFill/>
           </p:spPr>
-          <p:txBody>
-            <a:bodyPr wrap="none" rtlCol="0">
-              <a:spAutoFit/>
-            </a:bodyPr>
-            <a:lstStyle/>
-            <a:p>
-              <a:r>
-                <a:rPr lang="en-US" dirty="0"/>
-                <a:t>70</a:t>
-              </a:r>
-            </a:p>
-          </p:txBody>
-        </p:sp>
+        </p:pic>
       </p:grpSp>
     </p:spTree>
   </p:cSld>

--- a/SFN/2023_SFN_trust.pptx
+++ b/SFN/2023_SFN_trust.pptx
@@ -10338,10 +10338,10 @@
         </p:nvGrpSpPr>
         <p:grpSpPr>
           <a:xfrm>
-            <a:off x="22227608" y="22377639"/>
-            <a:ext cx="7672050" cy="8491864"/>
-            <a:chOff x="23053763" y="15328939"/>
-            <a:chExt cx="6729801" cy="7219447"/>
+            <a:off x="22124222" y="22377639"/>
+            <a:ext cx="7775433" cy="8491864"/>
+            <a:chOff x="22963078" y="15328939"/>
+            <a:chExt cx="6820488" cy="7219447"/>
           </a:xfrm>
         </p:grpSpPr>
         <p:grpSp>
@@ -10358,10 +10358,10 @@
           </p:nvGrpSpPr>
           <p:grpSpPr>
             <a:xfrm>
-              <a:off x="23053763" y="15328939"/>
-              <a:ext cx="6729801" cy="7219447"/>
-              <a:chOff x="23611670" y="15386915"/>
-              <a:chExt cx="5877242" cy="6288526"/>
+              <a:off x="22963078" y="15328939"/>
+              <a:ext cx="6820488" cy="7219447"/>
+              <a:chOff x="23532472" y="15386915"/>
+              <a:chExt cx="5956440" cy="6288526"/>
             </a:xfrm>
           </p:grpSpPr>
           <p:grpSp>
@@ -10507,8 +10507,8 @@
             </p:nvSpPr>
             <p:spPr>
               <a:xfrm>
-                <a:off x="23666606" y="16454726"/>
-                <a:ext cx="569387" cy="369332"/>
+                <a:off x="23532472" y="16411504"/>
+                <a:ext cx="601964" cy="387463"/>
               </a:xfrm>
               <a:prstGeom prst="rect">
                 <a:avLst/>
@@ -10522,7 +10522,7 @@
               <a:lstStyle/>
               <a:p>
                 <a:r>
-                  <a:rPr lang="en-US" dirty="0"/>
+                  <a:rPr lang="en-US" sz="2800" dirty="0"/>
                   <a:t>400</a:t>
                 </a:r>
               </a:p>
@@ -10543,7 +10543,7 @@
             <p:spPr>
               <a:xfrm>
                 <a:off x="23611670" y="20489922"/>
-                <a:ext cx="646331" cy="369332"/>
+                <a:ext cx="694062" cy="387463"/>
               </a:xfrm>
               <a:prstGeom prst="rect">
                 <a:avLst/>
@@ -10557,7 +10557,7 @@
               <a:lstStyle/>
               <a:p>
                 <a:r>
-                  <a:rPr lang="en-US" dirty="0"/>
+                  <a:rPr lang="en-US" sz="2800" dirty="0"/>
                   <a:t>-200</a:t>
                 </a:r>
               </a:p>
@@ -10578,7 +10578,7 @@
             <p:spPr>
               <a:xfrm>
                 <a:off x="24150950" y="21022056"/>
-                <a:ext cx="441146" cy="369332"/>
+                <a:ext cx="448464" cy="387463"/>
               </a:xfrm>
               <a:prstGeom prst="rect">
                 <a:avLst/>
@@ -10592,7 +10592,7 @@
               <a:lstStyle/>
               <a:p>
                 <a:r>
-                  <a:rPr lang="en-US" dirty="0"/>
+                  <a:rPr lang="en-US" sz="2800" dirty="0"/>
                   <a:t>20</a:t>
                 </a:r>
               </a:p>
@@ -10613,7 +10613,7 @@
             <p:spPr>
               <a:xfrm>
                 <a:off x="27777018" y="21022056"/>
-                <a:ext cx="441146" cy="369332"/>
+                <a:ext cx="448464" cy="387463"/>
               </a:xfrm>
               <a:prstGeom prst="rect">
                 <a:avLst/>
@@ -10627,7 +10627,7 @@
               <a:lstStyle/>
               <a:p>
                 <a:r>
-                  <a:rPr lang="en-US" dirty="0"/>
+                  <a:rPr lang="en-US" sz="2800" dirty="0"/>
                   <a:t>60</a:t>
                 </a:r>
               </a:p>
@@ -10798,7 +10798,7 @@
             <p:spPr>
               <a:xfrm>
                 <a:off x="37516370" y="16909110"/>
-                <a:ext cx="569387" cy="369332"/>
+                <a:ext cx="598030" cy="411788"/>
               </a:xfrm>
               <a:prstGeom prst="rect">
                 <a:avLst/>
@@ -10812,7 +10812,7 @@
               <a:lstStyle/>
               <a:p>
                 <a:r>
-                  <a:rPr lang="en-US" dirty="0"/>
+                  <a:rPr lang="en-US" sz="2800" dirty="0"/>
                   <a:t>400</a:t>
                 </a:r>
               </a:p>
@@ -10833,7 +10833,7 @@
             <p:spPr>
               <a:xfrm>
                 <a:off x="37462544" y="20542022"/>
-                <a:ext cx="646331" cy="369332"/>
+                <a:ext cx="689526" cy="411788"/>
               </a:xfrm>
               <a:prstGeom prst="rect">
                 <a:avLst/>
@@ -10847,7 +10847,7 @@
               <a:lstStyle/>
               <a:p>
                 <a:r>
-                  <a:rPr lang="en-US" dirty="0"/>
+                  <a:rPr lang="en-US" sz="2800" dirty="0"/>
                   <a:t>-200</a:t>
                 </a:r>
               </a:p>
@@ -10907,7 +10907,7 @@
             <p:spPr>
               <a:xfrm>
                 <a:off x="38109468" y="21552103"/>
-                <a:ext cx="441146" cy="369332"/>
+                <a:ext cx="445533" cy="411788"/>
               </a:xfrm>
               <a:prstGeom prst="rect">
                 <a:avLst/>
@@ -10921,7 +10921,7 @@
               <a:lstStyle/>
               <a:p>
                 <a:r>
-                  <a:rPr lang="en-US" dirty="0"/>
+                  <a:rPr lang="en-US" sz="2800" dirty="0"/>
                   <a:t>20</a:t>
                 </a:r>
               </a:p>
@@ -10942,7 +10942,7 @@
             <p:spPr>
               <a:xfrm>
                 <a:off x="41781537" y="21614547"/>
-                <a:ext cx="441146" cy="369332"/>
+                <a:ext cx="445533" cy="411788"/>
               </a:xfrm>
               <a:prstGeom prst="rect">
                 <a:avLst/>
@@ -10956,7 +10956,7 @@
               <a:lstStyle/>
               <a:p>
                 <a:r>
-                  <a:rPr lang="en-US" dirty="0"/>
+                  <a:rPr lang="en-US" sz="2800" dirty="0"/>
                   <a:t>60</a:t>
                 </a:r>
               </a:p>
@@ -11104,7 +11104,7 @@
           <p:spPr>
             <a:xfrm>
               <a:off x="37616989" y="6979043"/>
-              <a:ext cx="569387" cy="369332"/>
+              <a:ext cx="601117" cy="425002"/>
             </a:xfrm>
             <a:prstGeom prst="rect">
               <a:avLst/>
@@ -11118,7 +11118,7 @@
             <a:lstStyle/>
             <a:p>
               <a:r>
-                <a:rPr lang="en-US" dirty="0"/>
+                <a:rPr lang="en-US" sz="2800" dirty="0"/>
                 <a:t>200</a:t>
               </a:r>
             </a:p>
@@ -11139,7 +11139,7 @@
           <p:spPr>
             <a:xfrm>
               <a:off x="37564868" y="11337187"/>
-              <a:ext cx="646331" cy="369332"/>
+              <a:ext cx="693086" cy="425002"/>
             </a:xfrm>
             <a:prstGeom prst="rect">
               <a:avLst/>
@@ -11153,7 +11153,7 @@
             <a:lstStyle/>
             <a:p>
               <a:r>
-                <a:rPr lang="en-US" dirty="0"/>
+                <a:rPr lang="en-US" sz="2800" dirty="0"/>
                 <a:t>-300</a:t>
               </a:r>
             </a:p>
@@ -11174,7 +11174,7 @@
           <p:spPr>
             <a:xfrm>
               <a:off x="38211199" y="11728946"/>
-              <a:ext cx="441146" cy="369332"/>
+              <a:ext cx="447833" cy="425002"/>
             </a:xfrm>
             <a:prstGeom prst="rect">
               <a:avLst/>
@@ -11188,7 +11188,7 @@
             <a:lstStyle/>
             <a:p>
               <a:r>
-                <a:rPr lang="en-US" dirty="0"/>
+                <a:rPr lang="en-US" sz="2800" dirty="0"/>
                 <a:t>20</a:t>
               </a:r>
             </a:p>
@@ -11209,7 +11209,7 @@
           <p:spPr>
             <a:xfrm>
               <a:off x="41883268" y="11791390"/>
-              <a:ext cx="441146" cy="369332"/>
+              <a:ext cx="447833" cy="425002"/>
             </a:xfrm>
             <a:prstGeom prst="rect">
               <a:avLst/>
@@ -11223,7 +11223,7 @@
             <a:lstStyle/>
             <a:p>
               <a:r>
-                <a:rPr lang="en-US" dirty="0"/>
+                <a:rPr lang="en-US" sz="2800" dirty="0"/>
                 <a:t>60</a:t>
               </a:r>
             </a:p>
@@ -11741,10 +11741,10 @@
         </p:nvGrpSpPr>
         <p:grpSpPr>
           <a:xfrm>
-            <a:off x="23148115" y="5536168"/>
-            <a:ext cx="6429202" cy="6458403"/>
-            <a:chOff x="23148115" y="5536168"/>
-            <a:chExt cx="6429202" cy="6458403"/>
+            <a:off x="23148115" y="5669169"/>
+            <a:ext cx="6689848" cy="6035275"/>
+            <a:chOff x="23148115" y="5669169"/>
+            <a:chExt cx="6689848" cy="6035275"/>
           </a:xfrm>
         </p:grpSpPr>
         <p:sp>
@@ -11796,7 +11796,7 @@
           </p:nvSpPr>
           <p:spPr>
             <a:xfrm>
-              <a:off x="26458500" y="11440573"/>
+              <a:off x="26458500" y="11124695"/>
               <a:ext cx="867545" cy="553998"/>
             </a:xfrm>
             <a:prstGeom prst="rect">
@@ -11831,8 +11831,8 @@
           </p:nvSpPr>
           <p:spPr>
             <a:xfrm>
-              <a:off x="23201591" y="10960780"/>
-              <a:ext cx="389850" cy="369332"/>
+              <a:off x="23168341" y="10761280"/>
+              <a:ext cx="505267" cy="523220"/>
             </a:xfrm>
             <a:prstGeom prst="rect">
               <a:avLst/>
@@ -11846,7 +11846,7 @@
             <a:lstStyle/>
             <a:p>
               <a:r>
-                <a:rPr lang="en-US" dirty="0"/>
+                <a:rPr lang="en-US" sz="2800" dirty="0"/>
                 <a:t>-2</a:t>
               </a:r>
             </a:p>
@@ -11866,8 +11866,8 @@
           </p:nvSpPr>
           <p:spPr>
             <a:xfrm>
-              <a:off x="23315993" y="5536168"/>
-              <a:ext cx="312906" cy="369332"/>
+              <a:off x="23382493" y="5669169"/>
+              <a:ext cx="385042" cy="523220"/>
             </a:xfrm>
             <a:prstGeom prst="rect">
               <a:avLst/>
@@ -11881,7 +11881,7 @@
             <a:lstStyle/>
             <a:p>
               <a:r>
-                <a:rPr lang="en-US" dirty="0"/>
+                <a:rPr lang="en-US" sz="2800" dirty="0"/>
                 <a:t>6</a:t>
               </a:r>
             </a:p>
@@ -11901,8 +11901,8 @@
           </p:nvSpPr>
           <p:spPr>
             <a:xfrm>
-              <a:off x="23772582" y="11480474"/>
-              <a:ext cx="441146" cy="369332"/>
+              <a:off x="23473332" y="11181224"/>
+              <a:ext cx="585417" cy="523220"/>
             </a:xfrm>
             <a:prstGeom prst="rect">
               <a:avLst/>
@@ -11916,7 +11916,7 @@
             <a:lstStyle/>
             <a:p>
               <a:r>
-                <a:rPr lang="en-US" dirty="0"/>
+                <a:rPr lang="en-US" sz="2800" dirty="0"/>
                 <a:t>20</a:t>
               </a:r>
             </a:p>
@@ -11936,8 +11936,8 @@
           </p:nvSpPr>
           <p:spPr>
             <a:xfrm>
-              <a:off x="29136171" y="11480474"/>
-              <a:ext cx="441146" cy="369332"/>
+              <a:off x="29252546" y="11147974"/>
+              <a:ext cx="585417" cy="523220"/>
             </a:xfrm>
             <a:prstGeom prst="rect">
               <a:avLst/>
@@ -11951,7 +11951,7 @@
             <a:lstStyle/>
             <a:p>
               <a:r>
-                <a:rPr lang="en-US" dirty="0"/>
+                <a:rPr lang="en-US" sz="2800" dirty="0"/>
                 <a:t>70</a:t>
               </a:r>
             </a:p>
@@ -12010,10 +12010,10 @@
         </p:nvGrpSpPr>
         <p:grpSpPr>
           <a:xfrm>
-            <a:off x="15661774" y="13400269"/>
-            <a:ext cx="6794637" cy="6330548"/>
-            <a:chOff x="15661774" y="13350656"/>
-            <a:chExt cx="6781931" cy="6479911"/>
+            <a:off x="15661773" y="13603786"/>
+            <a:ext cx="6919486" cy="5929306"/>
+            <a:chOff x="15661774" y="13558986"/>
+            <a:chExt cx="6906547" cy="6069205"/>
           </a:xfrm>
         </p:grpSpPr>
         <p:grpSp>
@@ -12030,10 +12030,10 @@
           </p:nvGrpSpPr>
           <p:grpSpPr>
             <a:xfrm>
-              <a:off x="15661774" y="13350656"/>
-              <a:ext cx="6408810" cy="6479911"/>
-              <a:chOff x="15911046" y="13297224"/>
-              <a:chExt cx="6408810" cy="6479911"/>
+              <a:off x="15661774" y="13571887"/>
+              <a:ext cx="6773997" cy="6056304"/>
+              <a:chOff x="15911046" y="13518455"/>
+              <a:chExt cx="6773997" cy="6056304"/>
             </a:xfrm>
           </p:grpSpPr>
           <p:sp>
@@ -12050,8 +12050,8 @@
             </p:nvSpPr>
             <p:spPr>
               <a:xfrm>
-                <a:off x="16059122" y="13297224"/>
-                <a:ext cx="441146" cy="369332"/>
+                <a:off x="15959557" y="13518455"/>
+                <a:ext cx="584322" cy="535565"/>
               </a:xfrm>
               <a:prstGeom prst="rect">
                 <a:avLst/>
@@ -12065,7 +12065,7 @@
               <a:lstStyle/>
               <a:p>
                 <a:r>
-                  <a:rPr lang="en-US" dirty="0"/>
+                  <a:rPr lang="en-US" sz="2800" dirty="0"/>
                   <a:t>35</a:t>
                 </a:r>
               </a:p>
@@ -12085,8 +12085,8 @@
             </p:nvSpPr>
             <p:spPr>
               <a:xfrm>
-                <a:off x="16147265" y="18712557"/>
-                <a:ext cx="312906" cy="369332"/>
+                <a:off x="16163859" y="18593433"/>
+                <a:ext cx="384322" cy="535565"/>
               </a:xfrm>
               <a:prstGeom prst="rect">
                 <a:avLst/>
@@ -12100,7 +12100,7 @@
               <a:lstStyle/>
               <a:p>
                 <a:r>
-                  <a:rPr lang="en-US" dirty="0"/>
+                  <a:rPr lang="en-US" sz="2800" dirty="0"/>
                   <a:t>0</a:t>
                 </a:r>
               </a:p>
@@ -12155,7 +12155,7 @@
             </p:nvSpPr>
             <p:spPr>
               <a:xfrm>
-                <a:off x="19201039" y="19223137"/>
+                <a:off x="19201039" y="19020761"/>
                 <a:ext cx="867545" cy="553998"/>
               </a:xfrm>
               <a:prstGeom prst="rect">
@@ -12190,8 +12190,8 @@
             </p:nvSpPr>
             <p:spPr>
               <a:xfrm>
-                <a:off x="16515121" y="19263038"/>
-                <a:ext cx="441146" cy="369332"/>
+                <a:off x="16382370" y="19025256"/>
+                <a:ext cx="584322" cy="535565"/>
               </a:xfrm>
               <a:prstGeom prst="rect">
                 <a:avLst/>
@@ -12205,7 +12205,7 @@
               <a:lstStyle/>
               <a:p>
                 <a:r>
-                  <a:rPr lang="en-US" dirty="0"/>
+                  <a:rPr lang="en-US" sz="2800" dirty="0"/>
                   <a:t>20</a:t>
                 </a:r>
               </a:p>
@@ -12225,8 +12225,8 @@
             </p:nvSpPr>
             <p:spPr>
               <a:xfrm>
-                <a:off x="21878710" y="19263038"/>
-                <a:ext cx="441146" cy="369332"/>
+                <a:off x="22100721" y="19026172"/>
+                <a:ext cx="584322" cy="535565"/>
               </a:xfrm>
               <a:prstGeom prst="rect">
                 <a:avLst/>
@@ -12240,7 +12240,7 @@
               <a:lstStyle/>
               <a:p>
                 <a:r>
-                  <a:rPr lang="en-US" dirty="0"/>
+                  <a:rPr lang="en-US" sz="2800" dirty="0"/>
                   <a:t>70</a:t>
                 </a:r>
               </a:p>
@@ -12277,8 +12277,8 @@
           </p:blipFill>
           <p:spPr>
             <a:xfrm>
-              <a:off x="16243525" y="13558987"/>
-              <a:ext cx="6200180" cy="5460849"/>
+              <a:off x="16243525" y="13558986"/>
+              <a:ext cx="6324796" cy="5570606"/>
             </a:xfrm>
             <a:prstGeom prst="rect">
               <a:avLst/>
@@ -12300,10 +12300,10 @@
         </p:nvGrpSpPr>
         <p:grpSpPr>
           <a:xfrm>
-            <a:off x="23056612" y="13459237"/>
-            <a:ext cx="6867126" cy="6464828"/>
-            <a:chOff x="23056611" y="13324694"/>
-            <a:chExt cx="7155559" cy="6599371"/>
+            <a:off x="22990138" y="13459226"/>
+            <a:ext cx="6933598" cy="6118831"/>
+            <a:chOff x="22987347" y="13324694"/>
+            <a:chExt cx="7224823" cy="6246177"/>
           </a:xfrm>
         </p:grpSpPr>
         <p:grpSp>
@@ -12320,10 +12320,10 @@
           </p:nvGrpSpPr>
           <p:grpSpPr>
             <a:xfrm>
-              <a:off x="23056611" y="13324694"/>
-              <a:ext cx="6763621" cy="6599371"/>
-              <a:chOff x="23056611" y="13324694"/>
-              <a:chExt cx="6763621" cy="6599371"/>
+              <a:off x="22987347" y="13324694"/>
+              <a:ext cx="7043889" cy="6246177"/>
+              <a:chOff x="22987347" y="13324694"/>
+              <a:chExt cx="7043889" cy="6246177"/>
             </a:xfrm>
           </p:grpSpPr>
           <p:grpSp>
@@ -12340,10 +12340,10 @@
             </p:nvGrpSpPr>
             <p:grpSpPr>
               <a:xfrm>
-                <a:off x="23056611" y="13324694"/>
-                <a:ext cx="1501060" cy="6536369"/>
-                <a:chOff x="23252603" y="5142184"/>
-                <a:chExt cx="1173007" cy="5619179"/>
+                <a:off x="22987347" y="13324694"/>
+                <a:ext cx="1390631" cy="6163871"/>
+                <a:chOff x="23198455" y="5142184"/>
+                <a:chExt cx="1086711" cy="5298947"/>
               </a:xfrm>
             </p:grpSpPr>
             <p:sp>
@@ -12360,7 +12360,7 @@
               </p:nvSpPr>
               <p:spPr>
                 <a:xfrm rot="16200000">
-                  <a:off x="20819591" y="7575196"/>
+                  <a:off x="20765443" y="7575196"/>
                   <a:ext cx="5298947" cy="432923"/>
                 </a:xfrm>
                 <a:prstGeom prst="rect">
@@ -12395,8 +12395,8 @@
               </p:nvSpPr>
               <p:spPr>
                 <a:xfrm>
-                  <a:off x="23603500" y="9333929"/>
-                  <a:ext cx="389850" cy="369332"/>
+                  <a:off x="23603500" y="9027547"/>
+                  <a:ext cx="411426" cy="459162"/>
                 </a:xfrm>
                 <a:prstGeom prst="rect">
                   <a:avLst/>
@@ -12410,7 +12410,7 @@
                 <a:lstStyle/>
                 <a:p>
                   <a:r>
-                    <a:rPr lang="en-US" dirty="0"/>
+                    <a:rPr lang="en-US" sz="2800" dirty="0"/>
                     <a:t>-2</a:t>
                   </a:r>
                 </a:p>
@@ -12430,8 +12430,8 @@
               </p:nvSpPr>
               <p:spPr>
                 <a:xfrm>
-                  <a:off x="23684874" y="6124920"/>
-                  <a:ext cx="312906" cy="369332"/>
+                  <a:off x="23684874" y="6227047"/>
+                  <a:ext cx="313530" cy="459162"/>
                 </a:xfrm>
                 <a:prstGeom prst="rect">
                   <a:avLst/>
@@ -12445,7 +12445,7 @@
                 <a:lstStyle/>
                 <a:p>
                   <a:r>
-                    <a:rPr lang="en-US" dirty="0"/>
+                    <a:rPr lang="en-US" sz="2800" dirty="0"/>
                     <a:t>2</a:t>
                   </a:r>
                 </a:p>
@@ -12465,8 +12465,8 @@
               </p:nvSpPr>
               <p:spPr>
                 <a:xfrm>
-                  <a:off x="23666269" y="7699893"/>
-                  <a:ext cx="312906" cy="369332"/>
+                  <a:off x="23666269" y="7641535"/>
+                  <a:ext cx="313530" cy="459162"/>
                 </a:xfrm>
                 <a:prstGeom prst="rect">
                   <a:avLst/>
@@ -12480,7 +12480,7 @@
                 <a:lstStyle/>
                 <a:p>
                   <a:r>
-                    <a:rPr lang="en-US" dirty="0"/>
+                    <a:rPr lang="en-US" sz="2800" dirty="0"/>
                     <a:t>0</a:t>
                   </a:r>
                 </a:p>
@@ -12500,8 +12500,8 @@
               </p:nvSpPr>
               <p:spPr>
                 <a:xfrm>
-                  <a:off x="23984464" y="10392031"/>
-                  <a:ext cx="441146" cy="369332"/>
+                  <a:off x="23808476" y="9971676"/>
+                  <a:ext cx="476690" cy="459162"/>
                 </a:xfrm>
                 <a:prstGeom prst="rect">
                   <a:avLst/>
@@ -12515,7 +12515,7 @@
                 <a:lstStyle/>
                 <a:p>
                   <a:r>
-                    <a:rPr lang="en-US" dirty="0"/>
+                    <a:rPr lang="en-US" sz="2800" dirty="0"/>
                     <a:t>20</a:t>
                   </a:r>
                 </a:p>
@@ -12536,8 +12536,8 @@
             </p:nvSpPr>
             <p:spPr>
               <a:xfrm>
-                <a:off x="26534606" y="19370067"/>
-                <a:ext cx="867545" cy="553998"/>
+                <a:off x="26534606" y="19016872"/>
+                <a:ext cx="867545" cy="553999"/>
               </a:xfrm>
               <a:prstGeom prst="rect">
                 <a:avLst/>
@@ -12571,8 +12571,8 @@
             </p:nvSpPr>
             <p:spPr>
               <a:xfrm>
-                <a:off x="29379086" y="19390085"/>
-                <a:ext cx="441146" cy="369332"/>
+                <a:off x="29421230" y="18968549"/>
+                <a:ext cx="610006" cy="534109"/>
               </a:xfrm>
               <a:prstGeom prst="rect">
                 <a:avLst/>
@@ -12586,7 +12586,7 @@
               <a:lstStyle/>
               <a:p>
                 <a:r>
-                  <a:rPr lang="en-US" dirty="0"/>
+                  <a:rPr lang="en-US" sz="2800" dirty="0"/>
                   <a:t>70</a:t>
                 </a:r>
               </a:p>
@@ -18830,15 +18830,6 @@
 </file>
 
 <file path=customXml/item1.xml><?xml version="1.0" encoding="utf-8"?>
-<?mso-contentType ?>
-<FormTemplates xmlns="http://schemas.microsoft.com/sharepoint/v3/contenttype/forms">
-  <Display>DocumentLibraryForm</Display>
-  <Edit>DocumentLibraryForm</Edit>
-  <New>DocumentLibraryForm</New>
-</FormTemplates>
-</file>
-
-<file path=customXml/item2.xml><?xml version="1.0" encoding="utf-8"?>
 <ct:contentTypeSchema xmlns:ct="http://schemas.microsoft.com/office/2006/metadata/contentType" xmlns:ma="http://schemas.microsoft.com/office/2006/metadata/properties/metaAttributes" ct:_="" ma:_="" ma:contentTypeName="Document" ma:contentTypeID="0x01010080DE0AC601CE7945A16C28BE7D604718" ma:contentTypeVersion="16" ma:contentTypeDescription="Create a new document." ma:contentTypeScope="" ma:versionID="7200742d51933ad5859751156d985908">
   <xsd:schema xmlns:xsd="http://www.w3.org/2001/XMLSchema" xmlns:xs="http://www.w3.org/2001/XMLSchema" xmlns:p="http://schemas.microsoft.com/office/2006/metadata/properties" xmlns:ns2="068132b6-27af-4cc5-9624-46e0bc309f9c" xmlns:ns3="1ec1d487-840c-40ff-aca1-00ff13008544" targetNamespace="http://schemas.microsoft.com/office/2006/metadata/properties" ma:root="true" ma:fieldsID="ef3bb859774f4d5f12e6e11e5f5551df" ns2:_="" ns3:_="">
     <xsd:import namespace="068132b6-27af-4cc5-9624-46e0bc309f9c"/>
@@ -19081,15 +19072,16 @@
 </ct:contentTypeSchema>
 </file>
 
-<file path=customXml/itemProps1.xml><?xml version="1.0" encoding="utf-8"?>
-<ds:datastoreItem xmlns:ds="http://schemas.openxmlformats.org/officeDocument/2006/customXml" ds:itemID="{D5CAE7E8-1A3A-4A91-86FB-BA9E1762341A}">
-  <ds:schemaRefs>
-    <ds:schemaRef ds:uri="http://schemas.microsoft.com/sharepoint/v3/contenttype/forms"/>
-  </ds:schemaRefs>
-</ds:datastoreItem>
+<file path=customXml/item2.xml><?xml version="1.0" encoding="utf-8"?>
+<?mso-contentType ?>
+<FormTemplates xmlns="http://schemas.microsoft.com/sharepoint/v3/contenttype/forms">
+  <Display>DocumentLibraryForm</Display>
+  <Edit>DocumentLibraryForm</Edit>
+  <New>DocumentLibraryForm</New>
+</FormTemplates>
 </file>
 
-<file path=customXml/itemProps2.xml><?xml version="1.0" encoding="utf-8"?>
+<file path=customXml/itemProps1.xml><?xml version="1.0" encoding="utf-8"?>
 <ds:datastoreItem xmlns:ds="http://schemas.openxmlformats.org/officeDocument/2006/customXml" ds:itemID="{36138A07-987C-4A73-AAED-022482DDD0A4}">
   <ds:schemaRefs>
     <ds:schemaRef ds:uri="068132b6-27af-4cc5-9624-46e0bc309f9c"/>
@@ -19106,4 +19098,12 @@
     <ds:schemaRef ds:uri="http://www.w3.org/2001/XMLSchema"/>
   </ds:schemaRefs>
 </ds:datastoreItem>
+</file>
+
+<file path=customXml/itemProps2.xml><?xml version="1.0" encoding="utf-8"?>
+<ds:datastoreItem xmlns:ds="http://schemas.openxmlformats.org/officeDocument/2006/customXml" ds:itemID="{D5CAE7E8-1A3A-4A91-86FB-BA9E1762341A}">
+  <ds:schemaRefs>
+    <ds:schemaRef ds:uri="http://schemas.microsoft.com/sharepoint/v3/contenttype/forms"/>
+  </ds:schemaRefs>
+</ds:datastoreItem>
 </file>
--- a/SFN/2023_SFN_trust.pptx
+++ b/SFN/2023_SFN_trust.pptx
@@ -7670,17 +7670,12 @@
               <a:spcAft>
                 <a:spcPts val="0"/>
               </a:spcAft>
-              <a:buFont typeface="Arial" panose="020B0604020202020204" pitchFamily="34" charset="0"/>
-              <a:buChar char="•"/>
             </a:pPr>
-            <a:r>
-              <a:rPr lang="en-US" sz="4000" b="1" dirty="0">
-                <a:latin typeface="Helvetica"/>
-                <a:ea typeface="MS PGothic"/>
-                <a:cs typeface="Helvetica"/>
-              </a:rPr>
-              <a:t> </a:t>
-            </a:r>
+            <a:endParaRPr lang="en-US" sz="4000" b="1" dirty="0">
+              <a:latin typeface="Helvetica"/>
+              <a:ea typeface="MS PGothic"/>
+              <a:cs typeface="Helvetica"/>
+            </a:endParaRPr>
           </a:p>
           <a:p>
             <a:pPr>
@@ -10326,10 +10321,10 @@
       </p:sp>
       <p:grpSp>
         <p:nvGrpSpPr>
-          <p:cNvPr id="15731" name="Group 15730">
+          <p:cNvPr id="15637" name="Group 15636">
             <a:extLst>
               <a:ext uri="{FF2B5EF4-FFF2-40B4-BE49-F238E27FC236}">
-                <a16:creationId xmlns:a16="http://schemas.microsoft.com/office/drawing/2014/main" id="{06155C43-338B-1F84-917E-F663403BFB29}"/>
+                <a16:creationId xmlns:a16="http://schemas.microsoft.com/office/drawing/2014/main" id="{3A2B419D-DEB8-5DE4-6994-E09E435EDE6A}"/>
               </a:ext>
             </a:extLst>
           </p:cNvPr>
@@ -10338,18 +10333,18 @@
         </p:nvGrpSpPr>
         <p:grpSpPr>
           <a:xfrm>
-            <a:off x="22124222" y="22377639"/>
-            <a:ext cx="7775433" cy="8491864"/>
-            <a:chOff x="22963078" y="15328939"/>
-            <a:chExt cx="6820488" cy="7219447"/>
+            <a:off x="22124221" y="23761217"/>
+            <a:ext cx="6126173" cy="7108285"/>
+            <a:chOff x="23532472" y="16411504"/>
+            <a:chExt cx="4693010" cy="5263937"/>
           </a:xfrm>
         </p:grpSpPr>
         <p:grpSp>
           <p:nvGrpSpPr>
-            <p:cNvPr id="15637" name="Group 15636">
+            <p:cNvPr id="15627" name="Group 15626">
               <a:extLst>
                 <a:ext uri="{FF2B5EF4-FFF2-40B4-BE49-F238E27FC236}">
-                  <a16:creationId xmlns:a16="http://schemas.microsoft.com/office/drawing/2014/main" id="{3A2B419D-DEB8-5DE4-6994-E09E435EDE6A}"/>
+                  <a16:creationId xmlns:a16="http://schemas.microsoft.com/office/drawing/2014/main" id="{06AA4FCA-34DA-E471-770A-8C935B50E788}"/>
                 </a:ext>
               </a:extLst>
             </p:cNvPr>
@@ -10358,147 +10353,18 @@
           </p:nvGrpSpPr>
           <p:grpSpPr>
             <a:xfrm>
-              <a:off x="22963078" y="15328939"/>
-              <a:ext cx="6820488" cy="7219447"/>
-              <a:chOff x="23532472" y="15386915"/>
-              <a:chExt cx="5956440" cy="6288526"/>
+              <a:off x="23684560" y="16939790"/>
+              <a:ext cx="3160310" cy="4735651"/>
+              <a:chOff x="23684560" y="16939790"/>
+              <a:chExt cx="3160310" cy="4735651"/>
             </a:xfrm>
           </p:grpSpPr>
-          <p:grpSp>
-            <p:nvGrpSpPr>
-              <p:cNvPr id="15627" name="Group 15626">
+          <p:sp>
+            <p:nvSpPr>
+              <p:cNvPr id="15625" name="TextBox 15624">
                 <a:extLst>
                   <a:ext uri="{FF2B5EF4-FFF2-40B4-BE49-F238E27FC236}">
-                    <a16:creationId xmlns:a16="http://schemas.microsoft.com/office/drawing/2014/main" id="{06AA4FCA-34DA-E471-770A-8C935B50E788}"/>
-                  </a:ext>
-                </a:extLst>
-              </p:cNvPr>
-              <p:cNvGrpSpPr/>
-              <p:nvPr/>
-            </p:nvGrpSpPr>
-            <p:grpSpPr>
-              <a:xfrm>
-                <a:off x="23684560" y="15386915"/>
-                <a:ext cx="5804352" cy="6288526"/>
-                <a:chOff x="23684560" y="15386915"/>
-                <a:chExt cx="5804352" cy="6288526"/>
-              </a:xfrm>
-            </p:grpSpPr>
-            <p:pic>
-              <p:nvPicPr>
-                <p:cNvPr id="15623" name="Graphic 15622">
-                  <a:extLst>
-                    <a:ext uri="{FF2B5EF4-FFF2-40B4-BE49-F238E27FC236}">
-                      <a16:creationId xmlns:a16="http://schemas.microsoft.com/office/drawing/2014/main" id="{D58E3C64-D70B-D4DC-2B91-07C64E19369D}"/>
-                    </a:ext>
-                  </a:extLst>
-                </p:cNvPr>
-                <p:cNvPicPr>
-                  <a:picLocks noChangeAspect="1"/>
-                </p:cNvPicPr>
-                <p:nvPr/>
-              </p:nvPicPr>
-              <p:blipFill rotWithShape="1">
-                <a:blip r:embed="rId18">
-                  <a:extLst>
-                    <a:ext uri="{28A0092B-C50C-407E-A947-70E740481C1C}">
-                      <a14:useLocalDpi xmlns:a14="http://schemas.microsoft.com/office/drawing/2010/main" val="0"/>
-                    </a:ext>
-                    <a:ext uri="{96DAC541-7B7A-43D3-8B79-37D633B846F1}">
-                      <asvg:svgBlip xmlns:asvg="http://schemas.microsoft.com/office/drawing/2016/SVG/main" r:embed="rId19"/>
-                    </a:ext>
-                  </a:extLst>
-                </a:blip>
-                <a:srcRect l="10234" b="7938"/>
-                <a:stretch/>
-              </p:blipFill>
-              <p:spPr>
-                <a:xfrm>
-                  <a:off x="24165170" y="15386915"/>
-                  <a:ext cx="5323742" cy="5662134"/>
-                </a:xfrm>
-                <a:prstGeom prst="rect">
-                  <a:avLst/>
-                </a:prstGeom>
-              </p:spPr>
-            </p:pic>
-            <p:sp>
-              <p:nvSpPr>
-                <p:cNvPr id="15625" name="TextBox 15624">
-                  <a:extLst>
-                    <a:ext uri="{FF2B5EF4-FFF2-40B4-BE49-F238E27FC236}">
-                      <a16:creationId xmlns:a16="http://schemas.microsoft.com/office/drawing/2014/main" id="{7328C975-6B3E-4A8B-7D28-2CBF3C3AA243}"/>
-                    </a:ext>
-                  </a:extLst>
-                </p:cNvPr>
-                <p:cNvSpPr txBox="1"/>
-                <p:nvPr/>
-              </p:nvSpPr>
-              <p:spPr>
-                <a:xfrm>
-                  <a:off x="25887039" y="21058834"/>
-                  <a:ext cx="957831" cy="616607"/>
-                </a:xfrm>
-                <a:prstGeom prst="rect">
-                  <a:avLst/>
-                </a:prstGeom>
-                <a:noFill/>
-              </p:spPr>
-              <p:txBody>
-                <a:bodyPr wrap="none" rtlCol="0">
-                  <a:spAutoFit/>
-                </a:bodyPr>
-                <a:lstStyle/>
-                <a:p>
-                  <a:r>
-                    <a:rPr lang="en-US" sz="4000" dirty="0"/>
-                    <a:t>Age</a:t>
-                  </a:r>
-                </a:p>
-              </p:txBody>
-            </p:sp>
-            <p:sp>
-              <p:nvSpPr>
-                <p:cNvPr id="15626" name="TextBox 15625">
-                  <a:extLst>
-                    <a:ext uri="{FF2B5EF4-FFF2-40B4-BE49-F238E27FC236}">
-                      <a16:creationId xmlns:a16="http://schemas.microsoft.com/office/drawing/2014/main" id="{0741CC01-E666-6FF6-4DCF-5C0AEA54A228}"/>
-                    </a:ext>
-                  </a:extLst>
-                </p:cNvPr>
-                <p:cNvSpPr txBox="1"/>
-                <p:nvPr/>
-              </p:nvSpPr>
-              <p:spPr>
-                <a:xfrm rot="16200000">
-                  <a:off x="22278692" y="18345658"/>
-                  <a:ext cx="3295551" cy="483815"/>
-                </a:xfrm>
-                <a:prstGeom prst="rect">
-                  <a:avLst/>
-                </a:prstGeom>
-                <a:noFill/>
-              </p:spPr>
-              <p:txBody>
-                <a:bodyPr wrap="none" rtlCol="0">
-                  <a:spAutoFit/>
-                </a:bodyPr>
-                <a:lstStyle/>
-                <a:p>
-                  <a:r>
-                    <a:rPr lang="en-US" sz="3000" dirty="0"/>
-                    <a:t>Reciprocate &gt; Defect</a:t>
-                  </a:r>
-                </a:p>
-              </p:txBody>
-            </p:sp>
-          </p:grpSp>
-          <p:sp>
-            <p:nvSpPr>
-              <p:cNvPr id="15632" name="TextBox 15631">
-                <a:extLst>
-                  <a:ext uri="{FF2B5EF4-FFF2-40B4-BE49-F238E27FC236}">
-                    <a16:creationId xmlns:a16="http://schemas.microsoft.com/office/drawing/2014/main" id="{DB5643A6-0963-1889-743A-BE329E7DFA26}"/>
+                    <a16:creationId xmlns:a16="http://schemas.microsoft.com/office/drawing/2014/main" id="{7328C975-6B3E-4A8B-7D28-2CBF3C3AA243}"/>
                   </a:ext>
                 </a:extLst>
               </p:cNvPr>
@@ -10507,477 +10373,8 @@
             </p:nvSpPr>
             <p:spPr>
               <a:xfrm>
-                <a:off x="23532472" y="16411504"/>
-                <a:ext cx="601964" cy="387463"/>
-              </a:xfrm>
-              <a:prstGeom prst="rect">
-                <a:avLst/>
-              </a:prstGeom>
-              <a:noFill/>
-            </p:spPr>
-            <p:txBody>
-              <a:bodyPr wrap="none" rtlCol="0">
-                <a:spAutoFit/>
-              </a:bodyPr>
-              <a:lstStyle/>
-              <a:p>
-                <a:r>
-                  <a:rPr lang="en-US" sz="2800" dirty="0"/>
-                  <a:t>400</a:t>
-                </a:r>
-              </a:p>
-            </p:txBody>
-          </p:sp>
-          <p:sp>
-            <p:nvSpPr>
-              <p:cNvPr id="15633" name="TextBox 15632">
-                <a:extLst>
-                  <a:ext uri="{FF2B5EF4-FFF2-40B4-BE49-F238E27FC236}">
-                    <a16:creationId xmlns:a16="http://schemas.microsoft.com/office/drawing/2014/main" id="{F005320C-94E9-2CF4-6842-98DA1FA46221}"/>
-                  </a:ext>
-                </a:extLst>
-              </p:cNvPr>
-              <p:cNvSpPr txBox="1"/>
-              <p:nvPr/>
-            </p:nvSpPr>
-            <p:spPr>
-              <a:xfrm>
-                <a:off x="23611670" y="20489922"/>
-                <a:ext cx="694062" cy="387463"/>
-              </a:xfrm>
-              <a:prstGeom prst="rect">
-                <a:avLst/>
-              </a:prstGeom>
-              <a:noFill/>
-            </p:spPr>
-            <p:txBody>
-              <a:bodyPr wrap="none" rtlCol="0">
-                <a:spAutoFit/>
-              </a:bodyPr>
-              <a:lstStyle/>
-              <a:p>
-                <a:r>
-                  <a:rPr lang="en-US" sz="2800" dirty="0"/>
-                  <a:t>-200</a:t>
-                </a:r>
-              </a:p>
-            </p:txBody>
-          </p:sp>
-          <p:sp>
-            <p:nvSpPr>
-              <p:cNvPr id="15634" name="TextBox 15633">
-                <a:extLst>
-                  <a:ext uri="{FF2B5EF4-FFF2-40B4-BE49-F238E27FC236}">
-                    <a16:creationId xmlns:a16="http://schemas.microsoft.com/office/drawing/2014/main" id="{E721D839-B7EC-B05A-38DA-D9704D0EBA2E}"/>
-                  </a:ext>
-                </a:extLst>
-              </p:cNvPr>
-              <p:cNvSpPr txBox="1"/>
-              <p:nvPr/>
-            </p:nvSpPr>
-            <p:spPr>
-              <a:xfrm>
-                <a:off x="24150950" y="21022056"/>
-                <a:ext cx="448464" cy="387463"/>
-              </a:xfrm>
-              <a:prstGeom prst="rect">
-                <a:avLst/>
-              </a:prstGeom>
-              <a:noFill/>
-            </p:spPr>
-            <p:txBody>
-              <a:bodyPr wrap="none" rtlCol="0">
-                <a:spAutoFit/>
-              </a:bodyPr>
-              <a:lstStyle/>
-              <a:p>
-                <a:r>
-                  <a:rPr lang="en-US" sz="2800" dirty="0"/>
-                  <a:t>20</a:t>
-                </a:r>
-              </a:p>
-            </p:txBody>
-          </p:sp>
-          <p:sp>
-            <p:nvSpPr>
-              <p:cNvPr id="15635" name="TextBox 15634">
-                <a:extLst>
-                  <a:ext uri="{FF2B5EF4-FFF2-40B4-BE49-F238E27FC236}">
-                    <a16:creationId xmlns:a16="http://schemas.microsoft.com/office/drawing/2014/main" id="{61C5ED5A-0A65-9C1A-0AC3-7712D59B3795}"/>
-                  </a:ext>
-                </a:extLst>
-              </p:cNvPr>
-              <p:cNvSpPr txBox="1"/>
-              <p:nvPr/>
-            </p:nvSpPr>
-            <p:spPr>
-              <a:xfrm>
-                <a:off x="27777018" y="21022056"/>
-                <a:ext cx="448464" cy="387463"/>
-              </a:xfrm>
-              <a:prstGeom prst="rect">
-                <a:avLst/>
-              </a:prstGeom>
-              <a:noFill/>
-            </p:spPr>
-            <p:txBody>
-              <a:bodyPr wrap="none" rtlCol="0">
-                <a:spAutoFit/>
-              </a:bodyPr>
-              <a:lstStyle/>
-              <a:p>
-                <a:r>
-                  <a:rPr lang="en-US" sz="2800" dirty="0"/>
-                  <a:t>60</a:t>
-                </a:r>
-              </a:p>
-            </p:txBody>
-          </p:sp>
-        </p:grpSp>
-        <p:sp>
-          <p:nvSpPr>
-            <p:cNvPr id="15730" name="Rectangle 15729">
-              <a:extLst>
-                <a:ext uri="{FF2B5EF4-FFF2-40B4-BE49-F238E27FC236}">
-                  <a16:creationId xmlns:a16="http://schemas.microsoft.com/office/drawing/2014/main" id="{FDF15931-1516-DE49-340B-5A133AA95A93}"/>
-                </a:ext>
-              </a:extLst>
-            </p:cNvPr>
-            <p:cNvSpPr/>
-            <p:nvPr/>
-          </p:nvSpPr>
-          <p:spPr bwMode="auto">
-            <a:xfrm>
-              <a:off x="23923841" y="15957914"/>
-              <a:ext cx="5627696" cy="5591284"/>
-            </a:xfrm>
-            <a:prstGeom prst="rect">
-              <a:avLst/>
-            </a:prstGeom>
-            <a:noFill/>
-            <a:ln w="38100" cap="flat" cmpd="sng" algn="ctr">
-              <a:solidFill>
-                <a:schemeClr val="tx1"/>
-              </a:solidFill>
-              <a:prstDash val="solid"/>
-              <a:round/>
-              <a:headEnd type="none" w="med" len="med"/>
-              <a:tailEnd type="none" w="med" len="med"/>
-            </a:ln>
-            <a:effectLst/>
-          </p:spPr>
-          <p:txBody>
-            <a:bodyPr vert="horz" wrap="square" lIns="91440" tIns="45720" rIns="91440" bIns="45720" numCol="1" rtlCol="0" anchor="t" anchorCtr="0" compatLnSpc="1">
-              <a:prstTxWarp prst="textNoShape">
-                <a:avLst/>
-              </a:prstTxWarp>
-            </a:bodyPr>
-            <a:lstStyle/>
-            <a:p>
-              <a:pPr marL="0" marR="0" indent="0" algn="l" defTabSz="4389438" rtl="0" eaLnBrk="1" fontAlgn="base" latinLnBrk="0" hangingPunct="1">
-                <a:lnSpc>
-                  <a:spcPct val="100000"/>
-                </a:lnSpc>
-                <a:spcBef>
-                  <a:spcPct val="0"/>
-                </a:spcBef>
-                <a:spcAft>
-                  <a:spcPct val="0"/>
-                </a:spcAft>
-                <a:buClrTx/>
-                <a:buSzTx/>
-                <a:buFontTx/>
-                <a:buNone/>
-                <a:tabLst/>
-              </a:pPr>
-              <a:endParaRPr kumimoji="0" lang="en-US" sz="1800" b="0" i="0" u="none" strike="noStrike" cap="none" normalizeH="0" baseline="0">
-                <a:ln>
-                  <a:noFill/>
-                </a:ln>
-                <a:solidFill>
-                  <a:schemeClr val="tx1"/>
-                </a:solidFill>
-                <a:effectLst/>
-                <a:latin typeface="Arial" charset="0"/>
-                <a:cs typeface="Arial" charset="0"/>
-              </a:endParaRPr>
-            </a:p>
-          </p:txBody>
-        </p:sp>
-      </p:grpSp>
-      <p:grpSp>
-        <p:nvGrpSpPr>
-          <p:cNvPr id="2" name="Group 1">
-            <a:extLst>
-              <a:ext uri="{FF2B5EF4-FFF2-40B4-BE49-F238E27FC236}">
-                <a16:creationId xmlns:a16="http://schemas.microsoft.com/office/drawing/2014/main" id="{A94EC582-60D1-2B41-B3B4-7BDF0B9C3848}"/>
-              </a:ext>
-            </a:extLst>
-          </p:cNvPr>
-          <p:cNvGrpSpPr/>
-          <p:nvPr/>
-        </p:nvGrpSpPr>
-        <p:grpSpPr>
-          <a:xfrm>
-            <a:off x="35263511" y="11894668"/>
-            <a:ext cx="7923930" cy="8561607"/>
-            <a:chOff x="37324753" y="15097157"/>
-            <a:chExt cx="6030525" cy="6738219"/>
-          </a:xfrm>
-        </p:grpSpPr>
-        <p:grpSp>
-          <p:nvGrpSpPr>
-            <p:cNvPr id="15726" name="Group 15725">
-              <a:extLst>
-                <a:ext uri="{FF2B5EF4-FFF2-40B4-BE49-F238E27FC236}">
-                  <a16:creationId xmlns:a16="http://schemas.microsoft.com/office/drawing/2014/main" id="{B3430D81-BB79-4C3F-9F94-3445BBB422F8}"/>
-                </a:ext>
-              </a:extLst>
-            </p:cNvPr>
-            <p:cNvGrpSpPr/>
-            <p:nvPr/>
-          </p:nvGrpSpPr>
-          <p:grpSpPr>
-            <a:xfrm>
-              <a:off x="37324753" y="15097157"/>
-              <a:ext cx="5956404" cy="6738219"/>
-              <a:chOff x="37462544" y="15444990"/>
-              <a:chExt cx="5956404" cy="6738219"/>
-            </a:xfrm>
-          </p:grpSpPr>
-          <p:pic>
-            <p:nvPicPr>
-              <p:cNvPr id="15654" name="Graphic 15653">
-                <a:extLst>
-                  <a:ext uri="{FF2B5EF4-FFF2-40B4-BE49-F238E27FC236}">
-                    <a16:creationId xmlns:a16="http://schemas.microsoft.com/office/drawing/2014/main" id="{10803621-C472-7ABD-EBF3-5EE9AE8C4D09}"/>
-                  </a:ext>
-                </a:extLst>
-              </p:cNvPr>
-              <p:cNvPicPr>
-                <a:picLocks noChangeAspect="1"/>
-              </p:cNvPicPr>
-              <p:nvPr/>
-            </p:nvPicPr>
-            <p:blipFill rotWithShape="1">
-              <a:blip r:embed="rId20">
-                <a:extLst>
-                  <a:ext uri="{28A0092B-C50C-407E-A947-70E740481C1C}">
-                    <a14:useLocalDpi xmlns:a14="http://schemas.microsoft.com/office/drawing/2010/main" val="0"/>
-                  </a:ext>
-                  <a:ext uri="{96DAC541-7B7A-43D3-8B79-37D633B846F1}">
-                    <asvg:svgBlip xmlns:asvg="http://schemas.microsoft.com/office/drawing/2016/SVG/main" r:embed="rId21"/>
-                  </a:ext>
-                </a:extLst>
-              </a:blip>
-              <a:srcRect l="12332" r="4359" b="8540"/>
-              <a:stretch/>
-            </p:blipFill>
-            <p:spPr>
-              <a:xfrm>
-                <a:off x="38085758" y="15444990"/>
-                <a:ext cx="5333190" cy="6071802"/>
-              </a:xfrm>
-              <a:prstGeom prst="rect">
-                <a:avLst/>
-              </a:prstGeom>
-            </p:spPr>
-          </p:pic>
-          <p:sp>
-            <p:nvSpPr>
-              <p:cNvPr id="15719" name="TextBox 15718">
-                <a:extLst>
-                  <a:ext uri="{FF2B5EF4-FFF2-40B4-BE49-F238E27FC236}">
-                    <a16:creationId xmlns:a16="http://schemas.microsoft.com/office/drawing/2014/main" id="{F04F4CFA-B833-1DD9-86EC-A956DC37137A}"/>
-                  </a:ext>
-                </a:extLst>
-              </p:cNvPr>
-              <p:cNvSpPr txBox="1"/>
-              <p:nvPr/>
-            </p:nvSpPr>
-            <p:spPr>
-              <a:xfrm>
-                <a:off x="37516370" y="16909110"/>
-                <a:ext cx="598030" cy="411788"/>
-              </a:xfrm>
-              <a:prstGeom prst="rect">
-                <a:avLst/>
-              </a:prstGeom>
-              <a:noFill/>
-            </p:spPr>
-            <p:txBody>
-              <a:bodyPr wrap="none" rtlCol="0">
-                <a:spAutoFit/>
-              </a:bodyPr>
-              <a:lstStyle/>
-              <a:p>
-                <a:r>
-                  <a:rPr lang="en-US" sz="2800" dirty="0"/>
-                  <a:t>400</a:t>
-                </a:r>
-              </a:p>
-            </p:txBody>
-          </p:sp>
-          <p:sp>
-            <p:nvSpPr>
-              <p:cNvPr id="15720" name="TextBox 15719">
-                <a:extLst>
-                  <a:ext uri="{FF2B5EF4-FFF2-40B4-BE49-F238E27FC236}">
-                    <a16:creationId xmlns:a16="http://schemas.microsoft.com/office/drawing/2014/main" id="{0D17E5B2-CB95-D5BD-E169-9C1854A0AD37}"/>
-                  </a:ext>
-                </a:extLst>
-              </p:cNvPr>
-              <p:cNvSpPr txBox="1"/>
-              <p:nvPr/>
-            </p:nvSpPr>
-            <p:spPr>
-              <a:xfrm>
-                <a:off x="37462544" y="20542022"/>
-                <a:ext cx="689526" cy="411788"/>
-              </a:xfrm>
-              <a:prstGeom prst="rect">
-                <a:avLst/>
-              </a:prstGeom>
-              <a:noFill/>
-            </p:spPr>
-            <p:txBody>
-              <a:bodyPr wrap="none" rtlCol="0">
-                <a:spAutoFit/>
-              </a:bodyPr>
-              <a:lstStyle/>
-              <a:p>
-                <a:r>
-                  <a:rPr lang="en-US" sz="2800" dirty="0"/>
-                  <a:t>-200</a:t>
-                </a:r>
-              </a:p>
-            </p:txBody>
-          </p:sp>
-          <p:sp>
-            <p:nvSpPr>
-              <p:cNvPr id="15721" name="TextBox 15720">
-                <a:extLst>
-                  <a:ext uri="{FF2B5EF4-FFF2-40B4-BE49-F238E27FC236}">
-                    <a16:creationId xmlns:a16="http://schemas.microsoft.com/office/drawing/2014/main" id="{81E64089-644A-E436-A434-45AF685F62E1}"/>
-                  </a:ext>
-                </a:extLst>
-              </p:cNvPr>
-              <p:cNvSpPr txBox="1"/>
-              <p:nvPr/>
-            </p:nvSpPr>
-            <p:spPr>
-              <a:xfrm rot="16200000">
-                <a:off x="36531370" y="18699129"/>
-                <a:ext cx="2471242" cy="440654"/>
-              </a:xfrm>
-              <a:prstGeom prst="rect">
-                <a:avLst/>
-              </a:prstGeom>
-              <a:noFill/>
-            </p:spPr>
-            <p:txBody>
-              <a:bodyPr wrap="none" rtlCol="0">
-                <a:spAutoFit/>
-              </a:bodyPr>
-              <a:lstStyle/>
-              <a:p>
-                <a:r>
-                  <a:rPr lang="en-US" sz="3000" dirty="0" err="1"/>
-                  <a:t>mPFC</a:t>
-                </a:r>
-                <a:r>
-                  <a:rPr lang="en-US" sz="3000" dirty="0"/>
-                  <a:t> activation</a:t>
-                </a:r>
-              </a:p>
-            </p:txBody>
-          </p:sp>
-          <p:sp>
-            <p:nvSpPr>
-              <p:cNvPr id="15722" name="TextBox 15721">
-                <a:extLst>
-                  <a:ext uri="{FF2B5EF4-FFF2-40B4-BE49-F238E27FC236}">
-                    <a16:creationId xmlns:a16="http://schemas.microsoft.com/office/drawing/2014/main" id="{D6E3B518-3825-F962-6455-6381AEA6B615}"/>
-                  </a:ext>
-                </a:extLst>
-              </p:cNvPr>
-              <p:cNvSpPr txBox="1"/>
-              <p:nvPr/>
-            </p:nvSpPr>
-            <p:spPr>
-              <a:xfrm>
-                <a:off x="38109468" y="21552103"/>
-                <a:ext cx="445533" cy="411788"/>
-              </a:xfrm>
-              <a:prstGeom prst="rect">
-                <a:avLst/>
-              </a:prstGeom>
-              <a:noFill/>
-            </p:spPr>
-            <p:txBody>
-              <a:bodyPr wrap="none" rtlCol="0">
-                <a:spAutoFit/>
-              </a:bodyPr>
-              <a:lstStyle/>
-              <a:p>
-                <a:r>
-                  <a:rPr lang="en-US" sz="2800" dirty="0"/>
-                  <a:t>20</a:t>
-                </a:r>
-              </a:p>
-            </p:txBody>
-          </p:sp>
-          <p:sp>
-            <p:nvSpPr>
-              <p:cNvPr id="15723" name="TextBox 15722">
-                <a:extLst>
-                  <a:ext uri="{FF2B5EF4-FFF2-40B4-BE49-F238E27FC236}">
-                    <a16:creationId xmlns:a16="http://schemas.microsoft.com/office/drawing/2014/main" id="{8B001207-DE47-3A09-905A-EBCA2F9F5C56}"/>
-                  </a:ext>
-                </a:extLst>
-              </p:cNvPr>
-              <p:cNvSpPr txBox="1"/>
-              <p:nvPr/>
-            </p:nvSpPr>
-            <p:spPr>
-              <a:xfrm>
-                <a:off x="41781537" y="21614547"/>
-                <a:ext cx="445533" cy="411788"/>
-              </a:xfrm>
-              <a:prstGeom prst="rect">
-                <a:avLst/>
-              </a:prstGeom>
-              <a:noFill/>
-            </p:spPr>
-            <p:txBody>
-              <a:bodyPr wrap="none" rtlCol="0">
-                <a:spAutoFit/>
-              </a:bodyPr>
-              <a:lstStyle/>
-              <a:p>
-                <a:r>
-                  <a:rPr lang="en-US" sz="2800" dirty="0"/>
-                  <a:t>60</a:t>
-                </a:r>
-              </a:p>
-            </p:txBody>
-          </p:sp>
-          <p:sp>
-            <p:nvSpPr>
-              <p:cNvPr id="15724" name="TextBox 15723">
-                <a:extLst>
-                  <a:ext uri="{FF2B5EF4-FFF2-40B4-BE49-F238E27FC236}">
-                    <a16:creationId xmlns:a16="http://schemas.microsoft.com/office/drawing/2014/main" id="{A7A779AE-265E-DD6C-9D50-6736DE453C86}"/>
-                  </a:ext>
-                </a:extLst>
-              </p:cNvPr>
-              <p:cNvSpPr txBox="1"/>
-              <p:nvPr/>
-            </p:nvSpPr>
-            <p:spPr>
-              <a:xfrm>
-                <a:off x="39784621" y="21475323"/>
-                <a:ext cx="1096775" cy="707886"/>
+                <a:off x="25887039" y="21058834"/>
+                <a:ext cx="957831" cy="616607"/>
               </a:xfrm>
               <a:prstGeom prst="rect">
                 <a:avLst/>
@@ -10997,74 +10394,414 @@
               </a:p>
             </p:txBody>
           </p:sp>
+          <p:sp>
+            <p:nvSpPr>
+              <p:cNvPr id="15626" name="TextBox 15625">
+                <a:extLst>
+                  <a:ext uri="{FF2B5EF4-FFF2-40B4-BE49-F238E27FC236}">
+                    <a16:creationId xmlns:a16="http://schemas.microsoft.com/office/drawing/2014/main" id="{0741CC01-E666-6FF6-4DCF-5C0AEA54A228}"/>
+                  </a:ext>
+                </a:extLst>
+              </p:cNvPr>
+              <p:cNvSpPr txBox="1"/>
+              <p:nvPr/>
+            </p:nvSpPr>
+            <p:spPr>
+              <a:xfrm rot="16200000">
+                <a:off x="22278692" y="18345658"/>
+                <a:ext cx="3295551" cy="483815"/>
+              </a:xfrm>
+              <a:prstGeom prst="rect">
+                <a:avLst/>
+              </a:prstGeom>
+              <a:noFill/>
+            </p:spPr>
+            <p:txBody>
+              <a:bodyPr wrap="none" rtlCol="0">
+                <a:spAutoFit/>
+              </a:bodyPr>
+              <a:lstStyle/>
+              <a:p>
+                <a:r>
+                  <a:rPr lang="en-US" sz="3000" dirty="0"/>
+                  <a:t>Reciprocate &gt; Defect</a:t>
+                </a:r>
+              </a:p>
+            </p:txBody>
+          </p:sp>
         </p:grpSp>
         <p:sp>
           <p:nvSpPr>
-            <p:cNvPr id="15736" name="Rectangle 15735">
+            <p:cNvPr id="15632" name="TextBox 15631">
               <a:extLst>
                 <a:ext uri="{FF2B5EF4-FFF2-40B4-BE49-F238E27FC236}">
-                  <a16:creationId xmlns:a16="http://schemas.microsoft.com/office/drawing/2014/main" id="{885157CA-2A93-73F2-A17C-8ACD95507E22}"/>
+                  <a16:creationId xmlns:a16="http://schemas.microsoft.com/office/drawing/2014/main" id="{DB5643A6-0963-1889-743A-BE329E7DFA26}"/>
                 </a:ext>
               </a:extLst>
             </p:cNvPr>
-            <p:cNvSpPr/>
+            <p:cNvSpPr txBox="1"/>
             <p:nvPr/>
           </p:nvSpPr>
-          <p:spPr bwMode="auto">
+          <p:spPr>
             <a:xfrm>
-              <a:off x="38024698" y="15618426"/>
-              <a:ext cx="5330580" cy="5411310"/>
+              <a:off x="23532472" y="16411504"/>
+              <a:ext cx="601964" cy="387463"/>
             </a:xfrm>
             <a:prstGeom prst="rect">
               <a:avLst/>
             </a:prstGeom>
             <a:noFill/>
-            <a:ln w="38100" cap="flat" cmpd="sng" algn="ctr">
-              <a:solidFill>
-                <a:schemeClr val="tx1"/>
-              </a:solidFill>
-              <a:prstDash val="solid"/>
-              <a:round/>
-              <a:headEnd type="none" w="med" len="med"/>
-              <a:tailEnd type="none" w="med" len="med"/>
-            </a:ln>
-            <a:effectLst/>
           </p:spPr>
           <p:txBody>
-            <a:bodyPr vert="horz" wrap="square" lIns="91440" tIns="45720" rIns="91440" bIns="45720" numCol="1" rtlCol="0" anchor="t" anchorCtr="0" compatLnSpc="1">
-              <a:prstTxWarp prst="textNoShape">
-                <a:avLst/>
-              </a:prstTxWarp>
+            <a:bodyPr wrap="none" rtlCol="0">
+              <a:spAutoFit/>
             </a:bodyPr>
             <a:lstStyle/>
             <a:p>
-              <a:pPr marL="0" marR="0" indent="0" algn="l" defTabSz="4389438" rtl="0" eaLnBrk="1" fontAlgn="base" latinLnBrk="0" hangingPunct="1">
-                <a:lnSpc>
-                  <a:spcPct val="100000"/>
-                </a:lnSpc>
-                <a:spcBef>
-                  <a:spcPct val="0"/>
-                </a:spcBef>
-                <a:spcAft>
-                  <a:spcPct val="0"/>
-                </a:spcAft>
-                <a:buClrTx/>
-                <a:buSzTx/>
-                <a:buFontTx/>
-                <a:buNone/>
-                <a:tabLst/>
-              </a:pPr>
-              <a:endParaRPr kumimoji="0" lang="en-US" sz="1800" b="0" i="0" u="none" strike="noStrike" cap="none" normalizeH="0" baseline="0">
-                <a:ln>
-                  <a:noFill/>
-                </a:ln>
-                <a:solidFill>
-                  <a:schemeClr val="tx1"/>
-                </a:solidFill>
-                <a:effectLst/>
-                <a:latin typeface="Arial" charset="0"/>
-                <a:cs typeface="Arial" charset="0"/>
-              </a:endParaRPr>
+              <a:r>
+                <a:rPr lang="en-US" sz="2800" dirty="0"/>
+                <a:t>400</a:t>
+              </a:r>
+            </a:p>
+          </p:txBody>
+        </p:sp>
+        <p:sp>
+          <p:nvSpPr>
+            <p:cNvPr id="15633" name="TextBox 15632">
+              <a:extLst>
+                <a:ext uri="{FF2B5EF4-FFF2-40B4-BE49-F238E27FC236}">
+                  <a16:creationId xmlns:a16="http://schemas.microsoft.com/office/drawing/2014/main" id="{F005320C-94E9-2CF4-6842-98DA1FA46221}"/>
+                </a:ext>
+              </a:extLst>
+            </p:cNvPr>
+            <p:cNvSpPr txBox="1"/>
+            <p:nvPr/>
+          </p:nvSpPr>
+          <p:spPr>
+            <a:xfrm>
+              <a:off x="23611670" y="20489922"/>
+              <a:ext cx="694062" cy="387463"/>
+            </a:xfrm>
+            <a:prstGeom prst="rect">
+              <a:avLst/>
+            </a:prstGeom>
+            <a:noFill/>
+          </p:spPr>
+          <p:txBody>
+            <a:bodyPr wrap="none" rtlCol="0">
+              <a:spAutoFit/>
+            </a:bodyPr>
+            <a:lstStyle/>
+            <a:p>
+              <a:r>
+                <a:rPr lang="en-US" sz="2800" dirty="0"/>
+                <a:t>-200</a:t>
+              </a:r>
+            </a:p>
+          </p:txBody>
+        </p:sp>
+        <p:sp>
+          <p:nvSpPr>
+            <p:cNvPr id="15634" name="TextBox 15633">
+              <a:extLst>
+                <a:ext uri="{FF2B5EF4-FFF2-40B4-BE49-F238E27FC236}">
+                  <a16:creationId xmlns:a16="http://schemas.microsoft.com/office/drawing/2014/main" id="{E721D839-B7EC-B05A-38DA-D9704D0EBA2E}"/>
+                </a:ext>
+              </a:extLst>
+            </p:cNvPr>
+            <p:cNvSpPr txBox="1"/>
+            <p:nvPr/>
+          </p:nvSpPr>
+          <p:spPr>
+            <a:xfrm>
+              <a:off x="24150950" y="21022056"/>
+              <a:ext cx="448464" cy="387463"/>
+            </a:xfrm>
+            <a:prstGeom prst="rect">
+              <a:avLst/>
+            </a:prstGeom>
+            <a:noFill/>
+          </p:spPr>
+          <p:txBody>
+            <a:bodyPr wrap="none" rtlCol="0">
+              <a:spAutoFit/>
+            </a:bodyPr>
+            <a:lstStyle/>
+            <a:p>
+              <a:r>
+                <a:rPr lang="en-US" sz="2800" dirty="0"/>
+                <a:t>20</a:t>
+              </a:r>
+            </a:p>
+          </p:txBody>
+        </p:sp>
+        <p:sp>
+          <p:nvSpPr>
+            <p:cNvPr id="15635" name="TextBox 15634">
+              <a:extLst>
+                <a:ext uri="{FF2B5EF4-FFF2-40B4-BE49-F238E27FC236}">
+                  <a16:creationId xmlns:a16="http://schemas.microsoft.com/office/drawing/2014/main" id="{61C5ED5A-0A65-9C1A-0AC3-7712D59B3795}"/>
+                </a:ext>
+              </a:extLst>
+            </p:cNvPr>
+            <p:cNvSpPr txBox="1"/>
+            <p:nvPr/>
+          </p:nvSpPr>
+          <p:spPr>
+            <a:xfrm>
+              <a:off x="27777018" y="21022056"/>
+              <a:ext cx="448464" cy="387463"/>
+            </a:xfrm>
+            <a:prstGeom prst="rect">
+              <a:avLst/>
+            </a:prstGeom>
+            <a:noFill/>
+          </p:spPr>
+          <p:txBody>
+            <a:bodyPr wrap="none" rtlCol="0">
+              <a:spAutoFit/>
+            </a:bodyPr>
+            <a:lstStyle/>
+            <a:p>
+              <a:r>
+                <a:rPr lang="en-US" sz="2800" dirty="0"/>
+                <a:t>60</a:t>
+              </a:r>
+            </a:p>
+          </p:txBody>
+        </p:sp>
+      </p:grpSp>
+      <p:grpSp>
+        <p:nvGrpSpPr>
+          <p:cNvPr id="15726" name="Group 15725">
+            <a:extLst>
+              <a:ext uri="{FF2B5EF4-FFF2-40B4-BE49-F238E27FC236}">
+                <a16:creationId xmlns:a16="http://schemas.microsoft.com/office/drawing/2014/main" id="{B3430D81-BB79-4C3F-9F94-3445BBB422F8}"/>
+              </a:ext>
+            </a:extLst>
+          </p:cNvPr>
+          <p:cNvGrpSpPr/>
+          <p:nvPr/>
+        </p:nvGrpSpPr>
+        <p:grpSpPr>
+          <a:xfrm>
+            <a:off x="35263511" y="13754984"/>
+            <a:ext cx="6764367" cy="6581465"/>
+            <a:chOff x="37462544" y="16909110"/>
+            <a:chExt cx="5148037" cy="5179793"/>
+          </a:xfrm>
+        </p:grpSpPr>
+        <p:sp>
+          <p:nvSpPr>
+            <p:cNvPr id="15719" name="TextBox 15718">
+              <a:extLst>
+                <a:ext uri="{FF2B5EF4-FFF2-40B4-BE49-F238E27FC236}">
+                  <a16:creationId xmlns:a16="http://schemas.microsoft.com/office/drawing/2014/main" id="{F04F4CFA-B833-1DD9-86EC-A956DC37137A}"/>
+                </a:ext>
+              </a:extLst>
+            </p:cNvPr>
+            <p:cNvSpPr txBox="1"/>
+            <p:nvPr/>
+          </p:nvSpPr>
+          <p:spPr>
+            <a:xfrm>
+              <a:off x="37516370" y="16909110"/>
+              <a:ext cx="598030" cy="411788"/>
+            </a:xfrm>
+            <a:prstGeom prst="rect">
+              <a:avLst/>
+            </a:prstGeom>
+            <a:noFill/>
+          </p:spPr>
+          <p:txBody>
+            <a:bodyPr wrap="none" rtlCol="0">
+              <a:spAutoFit/>
+            </a:bodyPr>
+            <a:lstStyle/>
+            <a:p>
+              <a:r>
+                <a:rPr lang="en-US" sz="2800" dirty="0"/>
+                <a:t>400</a:t>
+              </a:r>
+            </a:p>
+          </p:txBody>
+        </p:sp>
+        <p:sp>
+          <p:nvSpPr>
+            <p:cNvPr id="15720" name="TextBox 15719">
+              <a:extLst>
+                <a:ext uri="{FF2B5EF4-FFF2-40B4-BE49-F238E27FC236}">
+                  <a16:creationId xmlns:a16="http://schemas.microsoft.com/office/drawing/2014/main" id="{0D17E5B2-CB95-D5BD-E169-9C1854A0AD37}"/>
+                </a:ext>
+              </a:extLst>
+            </p:cNvPr>
+            <p:cNvSpPr txBox="1"/>
+            <p:nvPr/>
+          </p:nvSpPr>
+          <p:spPr>
+            <a:xfrm>
+              <a:off x="37462544" y="20542022"/>
+              <a:ext cx="689526" cy="411788"/>
+            </a:xfrm>
+            <a:prstGeom prst="rect">
+              <a:avLst/>
+            </a:prstGeom>
+            <a:noFill/>
+          </p:spPr>
+          <p:txBody>
+            <a:bodyPr wrap="none" rtlCol="0">
+              <a:spAutoFit/>
+            </a:bodyPr>
+            <a:lstStyle/>
+            <a:p>
+              <a:r>
+                <a:rPr lang="en-US" sz="2800" dirty="0"/>
+                <a:t>-200</a:t>
+              </a:r>
+            </a:p>
+          </p:txBody>
+        </p:sp>
+        <p:sp>
+          <p:nvSpPr>
+            <p:cNvPr id="15721" name="TextBox 15720">
+              <a:extLst>
+                <a:ext uri="{FF2B5EF4-FFF2-40B4-BE49-F238E27FC236}">
+                  <a16:creationId xmlns:a16="http://schemas.microsoft.com/office/drawing/2014/main" id="{81E64089-644A-E436-A434-45AF685F62E1}"/>
+                </a:ext>
+              </a:extLst>
+            </p:cNvPr>
+            <p:cNvSpPr txBox="1"/>
+            <p:nvPr/>
+          </p:nvSpPr>
+          <p:spPr>
+            <a:xfrm rot="16200000">
+              <a:off x="36531370" y="18699129"/>
+              <a:ext cx="2471242" cy="440654"/>
+            </a:xfrm>
+            <a:prstGeom prst="rect">
+              <a:avLst/>
+            </a:prstGeom>
+            <a:noFill/>
+          </p:spPr>
+          <p:txBody>
+            <a:bodyPr wrap="none" rtlCol="0">
+              <a:spAutoFit/>
+            </a:bodyPr>
+            <a:lstStyle/>
+            <a:p>
+              <a:r>
+                <a:rPr lang="en-US" sz="3000" dirty="0" err="1"/>
+                <a:t>mPFC</a:t>
+              </a:r>
+              <a:r>
+                <a:rPr lang="en-US" sz="3000" dirty="0"/>
+                <a:t> activation</a:t>
+              </a:r>
+            </a:p>
+          </p:txBody>
+        </p:sp>
+        <p:sp>
+          <p:nvSpPr>
+            <p:cNvPr id="15722" name="TextBox 15721">
+              <a:extLst>
+                <a:ext uri="{FF2B5EF4-FFF2-40B4-BE49-F238E27FC236}">
+                  <a16:creationId xmlns:a16="http://schemas.microsoft.com/office/drawing/2014/main" id="{D6E3B518-3825-F962-6455-6381AEA6B615}"/>
+                </a:ext>
+              </a:extLst>
+            </p:cNvPr>
+            <p:cNvSpPr txBox="1"/>
+            <p:nvPr/>
+          </p:nvSpPr>
+          <p:spPr>
+            <a:xfrm>
+              <a:off x="38109468" y="21552103"/>
+              <a:ext cx="445533" cy="411788"/>
+            </a:xfrm>
+            <a:prstGeom prst="rect">
+              <a:avLst/>
+            </a:prstGeom>
+            <a:noFill/>
+          </p:spPr>
+          <p:txBody>
+            <a:bodyPr wrap="none" rtlCol="0">
+              <a:spAutoFit/>
+            </a:bodyPr>
+            <a:lstStyle/>
+            <a:p>
+              <a:r>
+                <a:rPr lang="en-US" sz="2800" dirty="0"/>
+                <a:t>20</a:t>
+              </a:r>
+            </a:p>
+          </p:txBody>
+        </p:sp>
+        <p:sp>
+          <p:nvSpPr>
+            <p:cNvPr id="15723" name="TextBox 15722">
+              <a:extLst>
+                <a:ext uri="{FF2B5EF4-FFF2-40B4-BE49-F238E27FC236}">
+                  <a16:creationId xmlns:a16="http://schemas.microsoft.com/office/drawing/2014/main" id="{8B001207-DE47-3A09-905A-EBCA2F9F5C56}"/>
+                </a:ext>
+              </a:extLst>
+            </p:cNvPr>
+            <p:cNvSpPr txBox="1"/>
+            <p:nvPr/>
+          </p:nvSpPr>
+          <p:spPr>
+            <a:xfrm>
+              <a:off x="42165048" y="21461542"/>
+              <a:ext cx="445533" cy="411788"/>
+            </a:xfrm>
+            <a:prstGeom prst="rect">
+              <a:avLst/>
+            </a:prstGeom>
+            <a:noFill/>
+          </p:spPr>
+          <p:txBody>
+            <a:bodyPr wrap="none" rtlCol="0">
+              <a:spAutoFit/>
+            </a:bodyPr>
+            <a:lstStyle/>
+            <a:p>
+              <a:r>
+                <a:rPr lang="en-US" sz="2800" dirty="0"/>
+                <a:t>70</a:t>
+              </a:r>
+            </a:p>
+          </p:txBody>
+        </p:sp>
+        <p:sp>
+          <p:nvSpPr>
+            <p:cNvPr id="15724" name="TextBox 15723">
+              <a:extLst>
+                <a:ext uri="{FF2B5EF4-FFF2-40B4-BE49-F238E27FC236}">
+                  <a16:creationId xmlns:a16="http://schemas.microsoft.com/office/drawing/2014/main" id="{A7A779AE-265E-DD6C-9D50-6736DE453C86}"/>
+                </a:ext>
+              </a:extLst>
+            </p:cNvPr>
+            <p:cNvSpPr txBox="1"/>
+            <p:nvPr/>
+          </p:nvSpPr>
+          <p:spPr>
+            <a:xfrm>
+              <a:off x="39987911" y="21381017"/>
+              <a:ext cx="1096775" cy="707886"/>
+            </a:xfrm>
+            <a:prstGeom prst="rect">
+              <a:avLst/>
+            </a:prstGeom>
+            <a:noFill/>
+          </p:spPr>
+          <p:txBody>
+            <a:bodyPr wrap="none" rtlCol="0">
+              <a:spAutoFit/>
+            </a:bodyPr>
+            <a:lstStyle/>
+            <a:p>
+              <a:r>
+                <a:rPr lang="en-US" sz="4000" dirty="0"/>
+                <a:t>Age</a:t>
+              </a:r>
             </a:p>
           </p:txBody>
         </p:sp>
@@ -11083,10 +10820,10 @@
         </p:nvGrpSpPr>
         <p:grpSpPr>
           <a:xfrm>
-            <a:off x="35398188" y="4514399"/>
-            <a:ext cx="8025077" cy="7764103"/>
-            <a:chOff x="37564868" y="5920531"/>
-            <a:chExt cx="6139033" cy="6306638"/>
+            <a:off x="35398192" y="5817533"/>
+            <a:ext cx="6887588" cy="6463045"/>
+            <a:chOff x="37564868" y="6979043"/>
+            <a:chExt cx="5268875" cy="5249812"/>
           </a:xfrm>
         </p:grpSpPr>
         <p:sp>
@@ -11208,7 +10945,7 @@
           </p:nvSpPr>
           <p:spPr>
             <a:xfrm>
-              <a:off x="41883268" y="11791390"/>
+              <a:off x="42385910" y="11803853"/>
               <a:ext cx="447833" cy="425002"/>
             </a:xfrm>
             <a:prstGeom prst="rect">
@@ -11224,7 +10961,7 @@
             <a:p>
               <a:r>
                 <a:rPr lang="en-US" sz="2800" dirty="0"/>
-                <a:t>60</a:t>
+                <a:t>70</a:t>
               </a:r>
             </a:p>
           </p:txBody>
@@ -11261,44 +10998,6 @@
             </a:p>
           </p:txBody>
         </p:sp>
-        <p:pic>
-          <p:nvPicPr>
-            <p:cNvPr id="15650" name="Graphic 15649">
-              <a:extLst>
-                <a:ext uri="{FF2B5EF4-FFF2-40B4-BE49-F238E27FC236}">
-                  <a16:creationId xmlns:a16="http://schemas.microsoft.com/office/drawing/2014/main" id="{A066B4DE-396E-E58D-5D45-BFC7D72F81D7}"/>
-                </a:ext>
-              </a:extLst>
-            </p:cNvPr>
-            <p:cNvPicPr>
-              <a:picLocks noChangeAspect="1"/>
-            </p:cNvPicPr>
-            <p:nvPr/>
-          </p:nvPicPr>
-          <p:blipFill rotWithShape="1">
-            <a:blip r:embed="rId22">
-              <a:extLst>
-                <a:ext uri="{28A0092B-C50C-407E-A947-70E740481C1C}">
-                  <a14:useLocalDpi xmlns:a14="http://schemas.microsoft.com/office/drawing/2010/main" val="0"/>
-                </a:ext>
-                <a:ext uri="{96DAC541-7B7A-43D3-8B79-37D633B846F1}">
-                  <asvg:svgBlip xmlns:asvg="http://schemas.microsoft.com/office/drawing/2016/SVG/main" r:embed="rId23"/>
-                </a:ext>
-              </a:extLst>
-            </a:blip>
-            <a:srcRect l="10653" b="8997"/>
-            <a:stretch/>
-          </p:blipFill>
-          <p:spPr>
-            <a:xfrm>
-              <a:off x="38145721" y="5920531"/>
-              <a:ext cx="5558180" cy="5870860"/>
-            </a:xfrm>
-            <a:prstGeom prst="rect">
-              <a:avLst/>
-            </a:prstGeom>
-          </p:spPr>
-        </p:pic>
         <p:sp>
           <p:nvSpPr>
             <p:cNvPr id="15715" name="TextBox 15714">
@@ -11338,76 +11037,6 @@
             </a:p>
           </p:txBody>
         </p:sp>
-        <p:sp>
-          <p:nvSpPr>
-            <p:cNvPr id="15737" name="Rectangle 15736">
-              <a:extLst>
-                <a:ext uri="{FF2B5EF4-FFF2-40B4-BE49-F238E27FC236}">
-                  <a16:creationId xmlns:a16="http://schemas.microsoft.com/office/drawing/2014/main" id="{EEA0696C-64C6-F5A4-E63B-F257E6A68B97}"/>
-                </a:ext>
-              </a:extLst>
-            </p:cNvPr>
-            <p:cNvSpPr/>
-            <p:nvPr/>
-          </p:nvSpPr>
-          <p:spPr bwMode="auto">
-            <a:xfrm>
-              <a:off x="38192920" y="6275932"/>
-              <a:ext cx="5330580" cy="5411310"/>
-            </a:xfrm>
-            <a:prstGeom prst="rect">
-              <a:avLst/>
-            </a:prstGeom>
-            <a:noFill/>
-            <a:ln w="38100" cap="flat" cmpd="sng" algn="ctr">
-              <a:solidFill>
-                <a:schemeClr val="tx1"/>
-              </a:solidFill>
-              <a:prstDash val="solid"/>
-              <a:round/>
-              <a:headEnd type="none" w="med" len="med"/>
-              <a:tailEnd type="none" w="med" len="med"/>
-            </a:ln>
-            <a:effectLst/>
-          </p:spPr>
-          <p:txBody>
-            <a:bodyPr vert="horz" wrap="square" lIns="91440" tIns="45720" rIns="91440" bIns="45720" numCol="1" rtlCol="0" anchor="t" anchorCtr="0" compatLnSpc="1">
-              <a:prstTxWarp prst="textNoShape">
-                <a:avLst/>
-              </a:prstTxWarp>
-            </a:bodyPr>
-            <a:lstStyle/>
-            <a:p>
-              <a:pPr marL="0" marR="0" indent="0" algn="l" defTabSz="4389438" rtl="0" eaLnBrk="1" fontAlgn="base" latinLnBrk="0" hangingPunct="1">
-                <a:lnSpc>
-                  <a:spcPct val="100000"/>
-                </a:lnSpc>
-                <a:spcBef>
-                  <a:spcPct val="0"/>
-                </a:spcBef>
-                <a:spcAft>
-                  <a:spcPct val="0"/>
-                </a:spcAft>
-                <a:buClrTx/>
-                <a:buSzTx/>
-                <a:buFontTx/>
-                <a:buNone/>
-                <a:tabLst/>
-              </a:pPr>
-              <a:endParaRPr kumimoji="0" lang="en-US" sz="1800" b="0" i="0" u="none" strike="noStrike" cap="none" normalizeH="0" baseline="0">
-                <a:ln>
-                  <a:noFill/>
-                </a:ln>
-                <a:solidFill>
-                  <a:schemeClr val="tx1"/>
-                </a:solidFill>
-                <a:effectLst/>
-                <a:latin typeface="Arial" charset="0"/>
-                <a:cs typeface="Arial" charset="0"/>
-              </a:endParaRPr>
-            </a:p>
-          </p:txBody>
-        </p:sp>
       </p:grpSp>
       <p:pic>
         <p:nvPicPr>
@@ -11424,7 +11053,7 @@
           <p:nvPr/>
         </p:nvPicPr>
         <p:blipFill>
-          <a:blip r:embed="rId24">
+          <a:blip r:embed="rId18">
             <a:extLst>
               <a:ext uri="{28A0092B-C50C-407E-A947-70E740481C1C}">
                 <a14:useLocalDpi xmlns:a14="http://schemas.microsoft.com/office/drawing/2010/main" val="0"/>
@@ -11471,7 +11100,7 @@
           <p:nvPr/>
         </p:nvPicPr>
         <p:blipFill>
-          <a:blip r:embed="rId24">
+          <a:blip r:embed="rId18">
             <a:extLst>
               <a:ext uri="{28A0092B-C50C-407E-A947-70E740481C1C}">
                 <a14:useLocalDpi xmlns:a14="http://schemas.microsoft.com/office/drawing/2010/main" val="0"/>
@@ -11518,7 +11147,7 @@
           <p:nvPr/>
         </p:nvPicPr>
         <p:blipFill>
-          <a:blip r:embed="rId25">
+          <a:blip r:embed="rId19">
             <a:extLst>
               <a:ext uri="{28A0092B-C50C-407E-A947-70E740481C1C}">
                 <a14:useLocalDpi xmlns:a14="http://schemas.microsoft.com/office/drawing/2010/main" val="0"/>
@@ -11565,7 +11194,7 @@
           <p:nvPr/>
         </p:nvPicPr>
         <p:blipFill>
-          <a:blip r:embed="rId26">
+          <a:blip r:embed="rId20">
             <a:extLst>
               <a:ext uri="{28A0092B-C50C-407E-A947-70E740481C1C}">
                 <a14:useLocalDpi xmlns:a14="http://schemas.microsoft.com/office/drawing/2010/main" val="0"/>
@@ -11973,13 +11602,13 @@
           <p:nvPr/>
         </p:nvPicPr>
         <p:blipFill rotWithShape="1">
-          <a:blip r:embed="rId27">
+          <a:blip r:embed="rId21">
             <a:extLst>
               <a:ext uri="{28A0092B-C50C-407E-A947-70E740481C1C}">
                 <a14:useLocalDpi xmlns:a14="http://schemas.microsoft.com/office/drawing/2010/main" val="0"/>
               </a:ext>
               <a:ext uri="{96DAC541-7B7A-43D3-8B79-37D633B846F1}">
-                <asvg:svgBlip xmlns:asvg="http://schemas.microsoft.com/office/drawing/2016/SVG/main" r:embed="rId28"/>
+                <asvg:svgBlip xmlns:asvg="http://schemas.microsoft.com/office/drawing/2016/SVG/main" r:embed="rId22"/>
               </a:ext>
             </a:extLst>
           </a:blip>
@@ -12011,9 +11640,9 @@
         <p:grpSpPr>
           <a:xfrm>
             <a:off x="15661773" y="13603786"/>
-            <a:ext cx="6919486" cy="5929306"/>
+            <a:ext cx="6786687" cy="5929306"/>
             <a:chOff x="15661774" y="13558986"/>
-            <a:chExt cx="6906547" cy="6069205"/>
+            <a:chExt cx="6773997" cy="6069205"/>
           </a:xfrm>
         </p:grpSpPr>
         <p:grpSp>
@@ -12262,23 +11891,23 @@
             <p:nvPr/>
           </p:nvPicPr>
           <p:blipFill rotWithShape="1">
-            <a:blip r:embed="rId29">
+            <a:blip r:embed="rId23">
               <a:extLst>
                 <a:ext uri="{28A0092B-C50C-407E-A947-70E740481C1C}">
                   <a14:useLocalDpi xmlns:a14="http://schemas.microsoft.com/office/drawing/2010/main" val="0"/>
                 </a:ext>
                 <a:ext uri="{96DAC541-7B7A-43D3-8B79-37D633B846F1}">
-                  <asvg:svgBlip xmlns:asvg="http://schemas.microsoft.com/office/drawing/2016/SVG/main" r:embed="rId30"/>
+                  <asvg:svgBlip xmlns:asvg="http://schemas.microsoft.com/office/drawing/2016/SVG/main" r:embed="rId24"/>
                 </a:ext>
               </a:extLst>
             </a:blip>
-            <a:srcRect l="14908" t="13111" r="4415" b="16123"/>
+            <a:srcRect l="15526" t="13111" r="4415" b="16123"/>
             <a:stretch/>
           </p:blipFill>
           <p:spPr>
             <a:xfrm>
-              <a:off x="16243525" y="13558986"/>
-              <a:ext cx="6324796" cy="5570606"/>
+              <a:off x="16334560" y="13558986"/>
+              <a:ext cx="6010236" cy="5570606"/>
             </a:xfrm>
             <a:prstGeom prst="rect">
               <a:avLst/>
@@ -12608,13 +12237,13 @@
             <p:nvPr/>
           </p:nvPicPr>
           <p:blipFill rotWithShape="1">
-            <a:blip r:embed="rId31">
+            <a:blip r:embed="rId25">
               <a:extLst>
                 <a:ext uri="{28A0092B-C50C-407E-A947-70E740481C1C}">
                   <a14:useLocalDpi xmlns:a14="http://schemas.microsoft.com/office/drawing/2010/main" val="0"/>
                 </a:ext>
                 <a:ext uri="{96DAC541-7B7A-43D3-8B79-37D633B846F1}">
-                  <asvg:svgBlip xmlns:asvg="http://schemas.microsoft.com/office/drawing/2016/SVG/main" r:embed="rId32"/>
+                  <asvg:svgBlip xmlns:asvg="http://schemas.microsoft.com/office/drawing/2016/SVG/main" r:embed="rId26"/>
                 </a:ext>
               </a:extLst>
             </a:blip>
@@ -12632,6 +12261,120 @@
           </p:spPr>
         </p:pic>
       </p:grpSp>
+      <p:pic>
+        <p:nvPicPr>
+          <p:cNvPr id="14" name="Graphic 13">
+            <a:extLst>
+              <a:ext uri="{FF2B5EF4-FFF2-40B4-BE49-F238E27FC236}">
+                <a16:creationId xmlns:a16="http://schemas.microsoft.com/office/drawing/2014/main" id="{0DBA9C41-5EEA-0E79-D93D-F2C5795C3DCD}"/>
+              </a:ext>
+            </a:extLst>
+          </p:cNvPr>
+          <p:cNvPicPr>
+            <a:picLocks noChangeAspect="1"/>
+          </p:cNvPicPr>
+          <p:nvPr/>
+        </p:nvPicPr>
+        <p:blipFill rotWithShape="1">
+          <a:blip r:embed="rId27">
+            <a:extLst>
+              <a:ext uri="{28A0092B-C50C-407E-A947-70E740481C1C}">
+                <a14:useLocalDpi xmlns:a14="http://schemas.microsoft.com/office/drawing/2010/main" val="0"/>
+              </a:ext>
+              <a:ext uri="{96DAC541-7B7A-43D3-8B79-37D633B846F1}">
+                <asvg:svgBlip xmlns:asvg="http://schemas.microsoft.com/office/drawing/2016/SVG/main" r:embed="rId28"/>
+              </a:ext>
+            </a:extLst>
+          </a:blip>
+          <a:srcRect l="18562" t="11969" r="3825" b="15026"/>
+          <a:stretch/>
+        </p:blipFill>
+        <p:spPr>
+          <a:xfrm>
+            <a:off x="23160827" y="23793039"/>
+            <a:ext cx="6466501" cy="5861542"/>
+          </a:xfrm>
+          <a:prstGeom prst="rect">
+            <a:avLst/>
+          </a:prstGeom>
+        </p:spPr>
+      </p:pic>
+      <p:pic>
+        <p:nvPicPr>
+          <p:cNvPr id="33" name="Graphic 32">
+            <a:extLst>
+              <a:ext uri="{FF2B5EF4-FFF2-40B4-BE49-F238E27FC236}">
+                <a16:creationId xmlns:a16="http://schemas.microsoft.com/office/drawing/2014/main" id="{6675D385-CC29-7E91-4E7F-87D48DE5C9A4}"/>
+              </a:ext>
+            </a:extLst>
+          </p:cNvPr>
+          <p:cNvPicPr>
+            <a:picLocks noChangeAspect="1"/>
+          </p:cNvPicPr>
+          <p:nvPr/>
+        </p:nvPicPr>
+        <p:blipFill rotWithShape="1">
+          <a:blip r:embed="rId29">
+            <a:extLst>
+              <a:ext uri="{28A0092B-C50C-407E-A947-70E740481C1C}">
+                <a14:useLocalDpi xmlns:a14="http://schemas.microsoft.com/office/drawing/2010/main" val="0"/>
+              </a:ext>
+              <a:ext uri="{96DAC541-7B7A-43D3-8B79-37D633B846F1}">
+                <asvg:svgBlip xmlns:asvg="http://schemas.microsoft.com/office/drawing/2016/SVG/main" r:embed="rId30"/>
+              </a:ext>
+            </a:extLst>
+          </a:blip>
+          <a:srcRect l="18919" t="11022" r="2620" b="15715"/>
+          <a:stretch/>
+        </p:blipFill>
+        <p:spPr>
+          <a:xfrm>
+            <a:off x="36133103" y="5701660"/>
+            <a:ext cx="6627629" cy="5963480"/>
+          </a:xfrm>
+          <a:prstGeom prst="rect">
+            <a:avLst/>
+          </a:prstGeom>
+        </p:spPr>
+      </p:pic>
+      <p:pic>
+        <p:nvPicPr>
+          <p:cNvPr id="40" name="Graphic 39">
+            <a:extLst>
+              <a:ext uri="{FF2B5EF4-FFF2-40B4-BE49-F238E27FC236}">
+                <a16:creationId xmlns:a16="http://schemas.microsoft.com/office/drawing/2014/main" id="{41694A69-FEA8-BBFE-413A-1817DD4A1775}"/>
+              </a:ext>
+            </a:extLst>
+          </p:cNvPr>
+          <p:cNvPicPr>
+            <a:picLocks noChangeAspect="1"/>
+          </p:cNvPicPr>
+          <p:nvPr/>
+        </p:nvPicPr>
+        <p:blipFill rotWithShape="1">
+          <a:blip r:embed="rId31">
+            <a:extLst>
+              <a:ext uri="{28A0092B-C50C-407E-A947-70E740481C1C}">
+                <a14:useLocalDpi xmlns:a14="http://schemas.microsoft.com/office/drawing/2010/main" val="0"/>
+              </a:ext>
+              <a:ext uri="{96DAC541-7B7A-43D3-8B79-37D633B846F1}">
+                <asvg:svgBlip xmlns:asvg="http://schemas.microsoft.com/office/drawing/2016/SVG/main" r:embed="rId32"/>
+              </a:ext>
+            </a:extLst>
+          </a:blip>
+          <a:srcRect l="18942" t="11890" r="2700" b="15431"/>
+          <a:stretch/>
+        </p:blipFill>
+        <p:spPr>
+          <a:xfrm>
+            <a:off x="36252115" y="13880865"/>
+            <a:ext cx="6114905" cy="5465499"/>
+          </a:xfrm>
+          <a:prstGeom prst="rect">
+            <a:avLst/>
+          </a:prstGeom>
+        </p:spPr>
+      </p:pic>
     </p:spTree>
   </p:cSld>
   <p:clrMapOvr>
@@ -18830,6 +18573,15 @@
 </file>
 
 <file path=customXml/item1.xml><?xml version="1.0" encoding="utf-8"?>
+<?mso-contentType ?>
+<FormTemplates xmlns="http://schemas.microsoft.com/sharepoint/v3/contenttype/forms">
+  <Display>DocumentLibraryForm</Display>
+  <Edit>DocumentLibraryForm</Edit>
+  <New>DocumentLibraryForm</New>
+</FormTemplates>
+</file>
+
+<file path=customXml/item2.xml><?xml version="1.0" encoding="utf-8"?>
 <ct:contentTypeSchema xmlns:ct="http://schemas.microsoft.com/office/2006/metadata/contentType" xmlns:ma="http://schemas.microsoft.com/office/2006/metadata/properties/metaAttributes" ct:_="" ma:_="" ma:contentTypeName="Document" ma:contentTypeID="0x01010080DE0AC601CE7945A16C28BE7D604718" ma:contentTypeVersion="16" ma:contentTypeDescription="Create a new document." ma:contentTypeScope="" ma:versionID="7200742d51933ad5859751156d985908">
   <xsd:schema xmlns:xsd="http://www.w3.org/2001/XMLSchema" xmlns:xs="http://www.w3.org/2001/XMLSchema" xmlns:p="http://schemas.microsoft.com/office/2006/metadata/properties" xmlns:ns2="068132b6-27af-4cc5-9624-46e0bc309f9c" xmlns:ns3="1ec1d487-840c-40ff-aca1-00ff13008544" targetNamespace="http://schemas.microsoft.com/office/2006/metadata/properties" ma:root="true" ma:fieldsID="ef3bb859774f4d5f12e6e11e5f5551df" ns2:_="" ns3:_="">
     <xsd:import namespace="068132b6-27af-4cc5-9624-46e0bc309f9c"/>
@@ -19072,16 +18824,15 @@
 </ct:contentTypeSchema>
 </file>
 
-<file path=customXml/item2.xml><?xml version="1.0" encoding="utf-8"?>
-<?mso-contentType ?>
-<FormTemplates xmlns="http://schemas.microsoft.com/sharepoint/v3/contenttype/forms">
-  <Display>DocumentLibraryForm</Display>
-  <Edit>DocumentLibraryForm</Edit>
-  <New>DocumentLibraryForm</New>
-</FormTemplates>
+<file path=customXml/itemProps1.xml><?xml version="1.0" encoding="utf-8"?>
+<ds:datastoreItem xmlns:ds="http://schemas.openxmlformats.org/officeDocument/2006/customXml" ds:itemID="{D5CAE7E8-1A3A-4A91-86FB-BA9E1762341A}">
+  <ds:schemaRefs>
+    <ds:schemaRef ds:uri="http://schemas.microsoft.com/sharepoint/v3/contenttype/forms"/>
+  </ds:schemaRefs>
+</ds:datastoreItem>
 </file>
 
-<file path=customXml/itemProps1.xml><?xml version="1.0" encoding="utf-8"?>
+<file path=customXml/itemProps2.xml><?xml version="1.0" encoding="utf-8"?>
 <ds:datastoreItem xmlns:ds="http://schemas.openxmlformats.org/officeDocument/2006/customXml" ds:itemID="{36138A07-987C-4A73-AAED-022482DDD0A4}">
   <ds:schemaRefs>
     <ds:schemaRef ds:uri="068132b6-27af-4cc5-9624-46e0bc309f9c"/>
@@ -19098,12 +18849,4 @@
     <ds:schemaRef ds:uri="http://www.w3.org/2001/XMLSchema"/>
   </ds:schemaRefs>
 </ds:datastoreItem>
-</file>
-
-<file path=customXml/itemProps2.xml><?xml version="1.0" encoding="utf-8"?>
-<ds:datastoreItem xmlns:ds="http://schemas.openxmlformats.org/officeDocument/2006/customXml" ds:itemID="{D5CAE7E8-1A3A-4A91-86FB-BA9E1762341A}">
-  <ds:schemaRefs>
-    <ds:schemaRef ds:uri="http://schemas.microsoft.com/sharepoint/v3/contenttype/forms"/>
-  </ds:schemaRefs>
-</ds:datastoreItem>
 </file>
--- a/SFN/2023_SFN_trust.pptx
+++ b/SFN/2023_SFN_trust.pptx
@@ -5541,8 +5541,8 @@
         </p:nvSpPr>
         <p:spPr bwMode="auto">
           <a:xfrm>
-            <a:off x="15671037" y="3834958"/>
-            <a:ext cx="14465760" cy="748988"/>
+            <a:off x="18499855" y="3920818"/>
+            <a:ext cx="9336971" cy="748988"/>
           </a:xfrm>
           <a:prstGeom prst="rect">
             <a:avLst/>
@@ -5674,7 +5674,7 @@
                 </a:solidFill>
                 <a:latin typeface="Trebuchet MS" panose="020B0603020202020204" pitchFamily="34" charset="0"/>
               </a:rPr>
-              <a:t>3. Subjects Are Closer With Friends than With Strangers</a:t>
+              <a:t>3. Age Related Behavioral Effects</a:t>
             </a:r>
           </a:p>
         </p:txBody>
@@ -7111,10 +7111,10 @@
         </p:nvGrpSpPr>
         <p:grpSpPr>
           <a:xfrm>
-            <a:off x="15922551" y="24296197"/>
-            <a:ext cx="6012596" cy="5358384"/>
-            <a:chOff x="14976740" y="15406812"/>
-            <a:chExt cx="6810930" cy="6071098"/>
+            <a:off x="15915060" y="24296198"/>
+            <a:ext cx="6020086" cy="6220157"/>
+            <a:chOff x="14968255" y="15406812"/>
+            <a:chExt cx="6819415" cy="7047494"/>
           </a:xfrm>
         </p:grpSpPr>
         <p:pic>
@@ -7161,8 +7161,8 @@
           </p:nvSpPr>
           <p:spPr>
             <a:xfrm>
-              <a:off x="14986107" y="20885189"/>
-              <a:ext cx="1133197" cy="584775"/>
+              <a:off x="14968255" y="21477908"/>
+              <a:ext cx="2635746" cy="976398"/>
             </a:xfrm>
             <a:prstGeom prst="rect">
               <a:avLst/>
@@ -7176,11 +7176,20 @@
             <a:lstStyle/>
             <a:p>
               <a:r>
+                <a:rPr lang="en-US" dirty="0">
+                  <a:latin typeface="Helvetica"/>
+                  <a:ea typeface="MS PGothic"/>
+                </a:rPr>
+                <a:t>Ventral Striatum</a:t>
+              </a:r>
+            </a:p>
+            <a:p>
+              <a:r>
                 <a:rPr lang="en-US" sz="3200" b="1" dirty="0">
                   <a:latin typeface="Helvetica"/>
                   <a:ea typeface="MS PGothic"/>
                 </a:rPr>
-                <a:t>VS</a:t>
+                <a:t>(VS)</a:t>
               </a:r>
               <a:endParaRPr lang="en-US" sz="3200" b="1" dirty="0">
                 <a:latin typeface="Helvetica"/>
@@ -7981,7 +7990,7 @@
         <p:spPr>
           <a:xfrm>
             <a:off x="423843" y="26895455"/>
-            <a:ext cx="9969217" cy="2631490"/>
+            <a:ext cx="10236647" cy="3062377"/>
           </a:xfrm>
           <a:prstGeom prst="rect">
             <a:avLst/>
@@ -8043,7 +8052,7 @@
                 <a:effectLst/>
                 <a:latin typeface="Helvetica" pitchFamily="2" charset="0"/>
               </a:rPr>
-              <a:t>Inclusion of Other in Self Scale and </a:t>
+              <a:t>Inclusion of Other in Self Scale (IOS) and </a:t>
             </a:r>
             <a:r>
               <a:rPr lang="en-US" sz="2800" dirty="0">
@@ -8059,8 +8068,16 @@
                 <a:effectLst/>
                 <a:latin typeface="Helvetica" pitchFamily="2" charset="0"/>
               </a:rPr>
-              <a:t>Older Adults Financial Exploitation and Vulnerability Scale.</a:t>
+              <a:t>Older Adults Financial Exploitation Measure (OAFEM).</a:t>
             </a:r>
+          </a:p>
+          <a:p>
+            <a:pPr algn="ctr"/>
+            <a:endParaRPr lang="en-US" sz="2800" dirty="0">
+              <a:latin typeface="Helvetica" pitchFamily="2" charset="0"/>
+              <a:ea typeface="Times New Roman" panose="02020603050405020304" pitchFamily="18" charset="0"/>
+              <a:cs typeface="Helvetica"/>
+            </a:endParaRPr>
           </a:p>
           <a:p>
             <a:pPr algn="ctr"/>
@@ -8197,41 +8214,6 @@
               <a:r>
                 <a:rPr lang="en-US" dirty="0"/>
                 <a:t>0</a:t>
-              </a:r>
-            </a:p>
-          </p:txBody>
-        </p:sp>
-        <p:sp>
-          <p:nvSpPr>
-            <p:cNvPr id="15661" name="TextBox 15660">
-              <a:extLst>
-                <a:ext uri="{FF2B5EF4-FFF2-40B4-BE49-F238E27FC236}">
-                  <a16:creationId xmlns:a16="http://schemas.microsoft.com/office/drawing/2014/main" id="{617C1651-3CCF-B80A-1012-2C16CC7ED704}"/>
-                </a:ext>
-              </a:extLst>
-            </p:cNvPr>
-            <p:cNvSpPr txBox="1"/>
-            <p:nvPr/>
-          </p:nvSpPr>
-          <p:spPr>
-            <a:xfrm>
-              <a:off x="16288042" y="7069297"/>
-              <a:ext cx="312906" cy="369332"/>
-            </a:xfrm>
-            <a:prstGeom prst="rect">
-              <a:avLst/>
-            </a:prstGeom>
-            <a:noFill/>
-          </p:spPr>
-          <p:txBody>
-            <a:bodyPr wrap="none" rtlCol="0">
-              <a:spAutoFit/>
-            </a:bodyPr>
-            <a:lstStyle/>
-            <a:p>
-              <a:r>
-                <a:rPr lang="en-US" dirty="0"/>
-                <a:t>2</a:t>
               </a:r>
             </a:p>
           </p:txBody>
@@ -9979,10 +9961,10 @@
         </p:nvGrpSpPr>
         <p:grpSpPr>
           <a:xfrm>
-            <a:off x="30912367" y="15288689"/>
-            <a:ext cx="4003957" cy="3793200"/>
+            <a:off x="30912367" y="15288687"/>
+            <a:ext cx="4003957" cy="4215896"/>
             <a:chOff x="30175830" y="13427301"/>
-            <a:chExt cx="6887851" cy="7050823"/>
+            <a:chExt cx="6887851" cy="7836533"/>
           </a:xfrm>
         </p:grpSpPr>
         <p:pic>
@@ -10071,7 +10053,7 @@
           <p:spPr>
             <a:xfrm>
               <a:off x="30483851" y="19661963"/>
-              <a:ext cx="2587045" cy="816161"/>
+              <a:ext cx="5622818" cy="1601871"/>
             </a:xfrm>
             <a:prstGeom prst="rect">
               <a:avLst/>
@@ -10085,14 +10067,31 @@
             <a:lstStyle/>
             <a:p>
               <a:r>
+                <a:rPr lang="en-US" dirty="0">
+                  <a:latin typeface="Helvetica"/>
+                </a:rPr>
+                <a:t>Medial Prefrontal Cortex</a:t>
+              </a:r>
+            </a:p>
+            <a:p>
+              <a:r>
+                <a:rPr lang="en-US" sz="3200" b="1" dirty="0">
+                  <a:latin typeface="Helvetica"/>
+                </a:rPr>
+                <a:t>(</a:t>
+              </a:r>
+              <a:r>
                 <a:rPr lang="en-US" sz="3200" b="1" dirty="0" err="1">
                   <a:latin typeface="Helvetica"/>
                 </a:rPr>
                 <a:t>mPFC</a:t>
               </a:r>
-              <a:endParaRPr lang="en-US" sz="3200" b="1" dirty="0">
-                <a:latin typeface="Helvetica"/>
-              </a:endParaRPr>
+              <a:r>
+                <a:rPr lang="en-US" sz="3200" b="1" dirty="0">
+                  <a:latin typeface="Helvetica"/>
+                </a:rPr>
+                <a:t>)</a:t>
+              </a:r>
             </a:p>
           </p:txBody>
         </p:sp>
@@ -10111,10 +10110,10 @@
         </p:nvGrpSpPr>
         <p:grpSpPr>
           <a:xfrm>
-            <a:off x="30892788" y="7424174"/>
-            <a:ext cx="3962327" cy="4113783"/>
-            <a:chOff x="30936691" y="4266720"/>
-            <a:chExt cx="5919174" cy="6849738"/>
+            <a:off x="30903522" y="7424174"/>
+            <a:ext cx="4158601" cy="4608107"/>
+            <a:chOff x="30952728" y="4266720"/>
+            <a:chExt cx="6212381" cy="7672821"/>
           </a:xfrm>
         </p:grpSpPr>
         <p:pic>
@@ -10202,8 +10201,8 @@
           </p:nvSpPr>
           <p:spPr>
             <a:xfrm>
-              <a:off x="30936691" y="10239860"/>
-              <a:ext cx="2517094" cy="876598"/>
+              <a:off x="31154497" y="10453379"/>
+              <a:ext cx="6010612" cy="1486162"/>
             </a:xfrm>
             <a:prstGeom prst="rect">
               <a:avLst/>
@@ -10217,14 +10216,31 @@
             <a:lstStyle/>
             <a:p>
               <a:r>
+                <a:rPr lang="en-US" sz="2000" dirty="0">
+                  <a:latin typeface="Helvetica"/>
+                </a:rPr>
+                <a:t>Dorsolateral Prefrontal Cortex</a:t>
+              </a:r>
+            </a:p>
+            <a:p>
+              <a:r>
+                <a:rPr lang="en-US" sz="3200" b="1" dirty="0">
+                  <a:latin typeface="Helvetica"/>
+                </a:rPr>
+                <a:t>(</a:t>
+              </a:r>
+              <a:r>
                 <a:rPr lang="en-US" sz="3200" b="1" dirty="0" err="1">
                   <a:latin typeface="Helvetica"/>
                 </a:rPr>
                 <a:t>dlPFC</a:t>
               </a:r>
-              <a:endParaRPr lang="en-US" sz="3200" b="1" dirty="0">
-                <a:latin typeface="Helvetica"/>
-              </a:endParaRPr>
+              <a:r>
+                <a:rPr lang="en-US" sz="3200" b="1" dirty="0">
+                  <a:latin typeface="Helvetica"/>
+                </a:rPr>
+                <a:t>)</a:t>
+              </a:r>
             </a:p>
           </p:txBody>
         </p:sp>
@@ -10353,10 +10369,10 @@
           </p:nvGrpSpPr>
           <p:grpSpPr>
             <a:xfrm>
-              <a:off x="23684560" y="16939790"/>
-              <a:ext cx="3160310" cy="4735651"/>
-              <a:chOff x="23684560" y="16939790"/>
-              <a:chExt cx="3160310" cy="4735651"/>
+              <a:off x="23697980" y="17116394"/>
+              <a:ext cx="3146890" cy="4559047"/>
+              <a:chOff x="23697980" y="17116394"/>
+              <a:chExt cx="3146890" cy="4559047"/>
             </a:xfrm>
           </p:grpSpPr>
           <p:sp>
@@ -10408,8 +10424,8 @@
             </p:nvSpPr>
             <p:spPr>
               <a:xfrm rot="16200000">
-                <a:off x="22278692" y="18345658"/>
-                <a:ext cx="3295551" cy="483815"/>
+                <a:off x="22492430" y="18321944"/>
+                <a:ext cx="2835495" cy="424395"/>
               </a:xfrm>
               <a:prstGeom prst="rect">
                 <a:avLst/>
@@ -10417,7 +10433,7 @@
               <a:noFill/>
             </p:spPr>
             <p:txBody>
-              <a:bodyPr wrap="none" rtlCol="0">
+              <a:bodyPr wrap="square" rtlCol="0">
                 <a:spAutoFit/>
               </a:bodyPr>
               <a:lstStyle/>
@@ -11929,10 +11945,10 @@
         </p:nvGrpSpPr>
         <p:grpSpPr>
           <a:xfrm>
-            <a:off x="22990138" y="13459226"/>
-            <a:ext cx="6933598" cy="6118831"/>
+            <a:off x="22990137" y="13459226"/>
+            <a:ext cx="6912332" cy="6118831"/>
             <a:chOff x="22987347" y="13324694"/>
-            <a:chExt cx="7224823" cy="6246177"/>
+            <a:chExt cx="7202664" cy="6246177"/>
           </a:xfrm>
         </p:grpSpPr>
         <p:grpSp>
@@ -12252,7 +12268,7 @@
           </p:blipFill>
           <p:spPr>
             <a:xfrm>
-              <a:off x="23952013" y="13459237"/>
+              <a:off x="23929854" y="13415822"/>
               <a:ext cx="6260157" cy="5568490"/>
             </a:xfrm>
             <a:prstGeom prst="rect">
@@ -12375,6 +12391,113 @@
           </a:prstGeom>
         </p:spPr>
       </p:pic>
+      <p:sp>
+        <p:nvSpPr>
+          <p:cNvPr id="44" name="TextBox 43">
+            <a:extLst>
+              <a:ext uri="{FF2B5EF4-FFF2-40B4-BE49-F238E27FC236}">
+                <a16:creationId xmlns:a16="http://schemas.microsoft.com/office/drawing/2014/main" id="{10C1E3FB-BD99-75D9-FE95-CD17FE3F9F8B}"/>
+              </a:ext>
+            </a:extLst>
+          </p:cNvPr>
+          <p:cNvSpPr txBox="1"/>
+          <p:nvPr/>
+        </p:nvSpPr>
+        <p:spPr>
+          <a:xfrm rot="16200000">
+            <a:off x="15237985" y="8187916"/>
+            <a:ext cx="1976823" cy="553998"/>
+          </a:xfrm>
+          <a:prstGeom prst="rect">
+            <a:avLst/>
+          </a:prstGeom>
+          <a:noFill/>
+        </p:spPr>
+        <p:txBody>
+          <a:bodyPr wrap="none" rtlCol="0">
+            <a:spAutoFit/>
+          </a:bodyPr>
+          <a:lstStyle/>
+          <a:p>
+            <a:r>
+              <a:rPr lang="en-US" sz="3000" dirty="0"/>
+              <a:t>Closeness</a:t>
+            </a:r>
+          </a:p>
+        </p:txBody>
+      </p:sp>
+      <p:sp>
+        <p:nvSpPr>
+          <p:cNvPr id="46" name="TextBox 45">
+            <a:extLst>
+              <a:ext uri="{FF2B5EF4-FFF2-40B4-BE49-F238E27FC236}">
+                <a16:creationId xmlns:a16="http://schemas.microsoft.com/office/drawing/2014/main" id="{DEB3996D-43E6-5107-11EC-81DFCBC56FB1}"/>
+              </a:ext>
+            </a:extLst>
+          </p:cNvPr>
+          <p:cNvSpPr txBox="1"/>
+          <p:nvPr/>
+        </p:nvSpPr>
+        <p:spPr>
+          <a:xfrm>
+            <a:off x="16565973" y="11908447"/>
+            <a:ext cx="13078862" cy="1077218"/>
+          </a:xfrm>
+          <a:prstGeom prst="rect">
+            <a:avLst/>
+          </a:prstGeom>
+          <a:noFill/>
+        </p:spPr>
+        <p:txBody>
+          <a:bodyPr wrap="square" rtlCol="0">
+            <a:spAutoFit/>
+          </a:bodyPr>
+          <a:lstStyle/>
+          <a:p>
+            <a:pPr algn="ctr"/>
+            <a:r>
+              <a:rPr lang="en-US" sz="3200" dirty="0"/>
+              <a:t>Participants are closer with their friend than with the stranger and computer partners, however there is no effect of age on their closeness</a:t>
+            </a:r>
+          </a:p>
+        </p:txBody>
+      </p:sp>
+      <p:sp>
+        <p:nvSpPr>
+          <p:cNvPr id="47" name="TextBox 46">
+            <a:extLst>
+              <a:ext uri="{FF2B5EF4-FFF2-40B4-BE49-F238E27FC236}">
+                <a16:creationId xmlns:a16="http://schemas.microsoft.com/office/drawing/2014/main" id="{F713D170-7C43-2B32-EA3A-BFDCA0EDB3A8}"/>
+              </a:ext>
+            </a:extLst>
+          </p:cNvPr>
+          <p:cNvSpPr txBox="1"/>
+          <p:nvPr/>
+        </p:nvSpPr>
+        <p:spPr>
+          <a:xfrm>
+            <a:off x="17565515" y="19992104"/>
+            <a:ext cx="10624094" cy="1015663"/>
+          </a:xfrm>
+          <a:prstGeom prst="rect">
+            <a:avLst/>
+          </a:prstGeom>
+          <a:noFill/>
+        </p:spPr>
+        <p:txBody>
+          <a:bodyPr wrap="square" rtlCol="0">
+            <a:spAutoFit/>
+          </a:bodyPr>
+          <a:lstStyle/>
+          <a:p>
+            <a:pPr algn="ctr"/>
+            <a:r>
+              <a:rPr lang="en-US" sz="3000" dirty="0"/>
+              <a:t>We found no age-related effects across financial exploitation measures or investment behavior</a:t>
+            </a:r>
+          </a:p>
+        </p:txBody>
+      </p:sp>
     </p:spTree>
   </p:cSld>
   <p:clrMapOvr>

--- a/SFN/2023_SFN_trust.pptx
+++ b/SFN/2023_SFN_trust.pptx
@@ -12856,8 +12856,8 @@
         </p:nvGrpSpPr>
         <p:grpSpPr>
           <a:xfrm>
-            <a:off x="10912317" y="28607914"/>
-            <a:ext cx="3543576" cy="1716829"/>
+            <a:off x="12078302" y="29152243"/>
+            <a:ext cx="2276038" cy="1215276"/>
             <a:chOff x="11083249" y="26380930"/>
             <a:chExt cx="3543576" cy="1716829"/>
           </a:xfrm>
@@ -12951,7 +12951,7 @@
           <p:spPr>
             <a:xfrm>
               <a:off x="11186208" y="26454514"/>
-              <a:ext cx="3386365" cy="1569660"/>
+              <a:ext cx="3386365" cy="475748"/>
             </a:xfrm>
             <a:prstGeom prst="rect">
               <a:avLst/>
@@ -12969,24 +12969,24 @@
             <a:p>
               <a:pPr algn="ctr"/>
               <a:r>
-                <a:rPr lang="en-US" sz="3200" b="1" dirty="0">
+                <a:rPr lang="en-US" sz="2000" b="1" dirty="0">
                   <a:latin typeface="Helvetica"/>
                   <a:ea typeface="MS PGothic"/>
                 </a:rPr>
                 <a:t>Scan the QR code to see the</a:t>
               </a:r>
-              <a:endParaRPr lang="en-US" sz="3200" b="1" dirty="0"/>
+              <a:endParaRPr lang="en-US" sz="2000" b="1" dirty="0"/>
             </a:p>
             <a:p>
               <a:pPr algn="ctr"/>
               <a:r>
-                <a:rPr lang="en-US" sz="3200" b="1" dirty="0">
+                <a:rPr lang="en-US" sz="2000" b="1" dirty="0">
                   <a:latin typeface="Helvetica"/>
                   <a:ea typeface="MS PGothic"/>
                 </a:rPr>
                 <a:t>Pre-registration!</a:t>
               </a:r>
-              <a:endParaRPr lang="en-US" sz="3200" b="1" dirty="0"/>
+              <a:endParaRPr lang="en-US" sz="2000" b="1" dirty="0"/>
             </a:p>
           </p:txBody>
         </p:sp>
@@ -13013,7 +13013,7 @@
         </p:blipFill>
         <p:spPr>
           <a:xfrm>
-            <a:off x="11507902" y="26012680"/>
+            <a:off x="12039403" y="26237378"/>
             <a:ext cx="2340933" cy="2333025"/>
           </a:xfrm>
           <a:prstGeom prst="rect">
@@ -13812,8 +13812,8 @@
         </p:nvSpPr>
         <p:spPr>
           <a:xfrm>
-            <a:off x="15472636" y="30409771"/>
-            <a:ext cx="14650695" cy="1569660"/>
+            <a:off x="15511210" y="30424481"/>
+            <a:ext cx="14212155" cy="2062103"/>
           </a:xfrm>
           <a:prstGeom prst="rect">
             <a:avLst/>
@@ -13832,7 +13832,7 @@
                 <a:latin typeface="Helvetica"/>
                 <a:ea typeface="MS PGothic"/>
               </a:rPr>
-              <a:t>We found activation in the VS when participants were presented with a reciprocate outcome as opposed to a defect outcome, however, there was no significant interaction with age.  </a:t>
+              <a:t>We found activation in the ventral striatum (VS) when participants were presented with a reciprocate outcome as opposed to a defect outcome, however, there was no significant association with age for any condition (Friend &gt; Stranger and Friend &gt; Computer).  </a:t>
             </a:r>
           </a:p>
         </p:txBody>
@@ -13896,10 +13896,10 @@
         </p:nvGrpSpPr>
         <p:grpSpPr>
           <a:xfrm>
-            <a:off x="16139778" y="23993605"/>
-            <a:ext cx="5301753" cy="5349637"/>
-            <a:chOff x="14804687" y="15406812"/>
-            <a:chExt cx="6982983" cy="7047494"/>
+            <a:off x="16012194" y="23993603"/>
+            <a:ext cx="5429343" cy="5001859"/>
+            <a:chOff x="14636639" y="15406812"/>
+            <a:chExt cx="7151031" cy="6589340"/>
           </a:xfrm>
         </p:grpSpPr>
         <p:pic>
@@ -13946,8 +13946,8 @@
           </p:nvSpPr>
           <p:spPr>
             <a:xfrm>
-              <a:off x="14968255" y="21477908"/>
-              <a:ext cx="2635746" cy="976398"/>
+              <a:off x="15108298" y="21225782"/>
+              <a:ext cx="1193324" cy="770370"/>
             </a:xfrm>
             <a:prstGeom prst="rect">
               <a:avLst/>
@@ -13961,20 +13961,11 @@
             <a:lstStyle/>
             <a:p>
               <a:r>
-                <a:rPr lang="en-US" dirty="0">
-                  <a:latin typeface="Helvetica"/>
-                  <a:ea typeface="MS PGothic"/>
-                </a:rPr>
-                <a:t>Ventral Striatum</a:t>
-              </a:r>
-            </a:p>
-            <a:p>
-              <a:r>
                 <a:rPr lang="en-US" sz="3200" b="1" dirty="0">
                   <a:latin typeface="Helvetica"/>
                   <a:ea typeface="MS PGothic"/>
                 </a:rPr>
-                <a:t>(VS)</a:t>
+                <a:t>VS</a:t>
               </a:r>
               <a:endParaRPr lang="en-US" sz="3200" b="1" dirty="0">
                 <a:latin typeface="Helvetica"/>
@@ -13996,8 +13987,8 @@
           </p:nvSpPr>
           <p:spPr>
             <a:xfrm>
-              <a:off x="14804687" y="15690148"/>
-              <a:ext cx="2222101" cy="1500194"/>
+              <a:off x="14636639" y="15690148"/>
+              <a:ext cx="2222101" cy="1500193"/>
             </a:xfrm>
             <a:prstGeom prst="rect">
               <a:avLst/>
@@ -14352,8 +14343,8 @@
         </p:nvSpPr>
         <p:spPr>
           <a:xfrm>
-            <a:off x="30912368" y="25095850"/>
-            <a:ext cx="12496564" cy="7068602"/>
+            <a:off x="30892503" y="25333818"/>
+            <a:ext cx="12496564" cy="6453049"/>
           </a:xfrm>
           <a:prstGeom prst="rect">
             <a:avLst/>
@@ -14432,7 +14423,7 @@
                 <a:ea typeface="MS PGothic"/>
                 <a:cs typeface="Helvetica"/>
               </a:rPr>
-              <a:t> Additionally, we find that the </a:t>
+              <a:t> Additionally, we find that activation of the </a:t>
             </a:r>
             <a:r>
               <a:rPr lang="en-US" sz="4000" b="1" dirty="0" err="1">
@@ -14443,12 +14434,20 @@
               <a:t>dlPFC</a:t>
             </a:r>
             <a:r>
+              <a:rPr lang="en-US" sz="4000" b="1" dirty="0">
+                <a:latin typeface="Helvetica"/>
+                <a:ea typeface="MS PGothic"/>
+                <a:cs typeface="Helvetica"/>
+              </a:rPr>
+              <a:t> increased, </a:t>
+            </a:r>
+            <a:r>
               <a:rPr lang="en-US" sz="4000" dirty="0">
                 <a:latin typeface="Helvetica"/>
                 <a:ea typeface="MS PGothic"/>
                 <a:cs typeface="Helvetica"/>
               </a:rPr>
-              <a:t> and </a:t>
+              <a:t>and </a:t>
             </a:r>
             <a:r>
               <a:rPr lang="en-US" sz="4000" b="1" dirty="0" err="1">
@@ -14464,7 +14463,7 @@
                 <a:ea typeface="MS PGothic"/>
                 <a:cs typeface="Helvetica"/>
               </a:rPr>
-              <a:t> activation </a:t>
+              <a:t> </a:t>
             </a:r>
             <a:r>
               <a:rPr lang="en-US" sz="4000" b="1" dirty="0">
@@ -14472,7 +14471,7 @@
                 <a:ea typeface="MS PGothic"/>
                 <a:cs typeface="Helvetica"/>
               </a:rPr>
-              <a:t>differs between older and younger adults </a:t>
+              <a:t>decreased,</a:t>
             </a:r>
             <a:r>
               <a:rPr lang="en-US" sz="4000" dirty="0">
@@ -14480,7 +14479,23 @@
                 <a:ea typeface="MS PGothic"/>
                 <a:cs typeface="Helvetica"/>
               </a:rPr>
-              <a:t>relative to social context. </a:t>
+              <a:t> during the processing of social outcomes </a:t>
+            </a:r>
+            <a:r>
+              <a:rPr lang="en-US" sz="4000" b="1" dirty="0">
+                <a:latin typeface="Helvetica"/>
+                <a:ea typeface="MS PGothic"/>
+                <a:cs typeface="Helvetica"/>
+              </a:rPr>
+              <a:t>as a function of age</a:t>
+            </a:r>
+            <a:r>
+              <a:rPr lang="en-US" sz="4000" dirty="0">
+                <a:latin typeface="Helvetica"/>
+                <a:ea typeface="MS PGothic"/>
+                <a:cs typeface="Helvetica"/>
+              </a:rPr>
+              <a:t>. </a:t>
             </a:r>
           </a:p>
           <a:p>
@@ -14523,7 +14538,7 @@
                 <a:ea typeface="MS PGothic"/>
                 <a:cs typeface="Helvetica"/>
               </a:rPr>
-              <a:t>Future analyses will further examine age-related differences in neural responses to monetary outcomes relative to social context and risk of financial exploitation. </a:t>
+              <a:t>Future analyses will examine how neural and behavioral responses to trust are associated with risk for financial exploitation. </a:t>
             </a:r>
             <a:endParaRPr lang="en-US" sz="4000" b="1" dirty="0">
               <a:latin typeface="Helvetica"/>
@@ -14543,7 +14558,7 @@
         </p:nvSpPr>
         <p:spPr bwMode="auto">
           <a:xfrm>
-            <a:off x="473574" y="4727572"/>
+            <a:off x="283673" y="4727486"/>
             <a:ext cx="14526988" cy="6247864"/>
           </a:xfrm>
           <a:prstGeom prst="rect">
@@ -14711,7 +14726,7 @@
                 <a:effectLst/>
                 <a:latin typeface="Helvetica" pitchFamily="2" charset="0"/>
               </a:rPr>
-              <a:t>Social relationships influence our behaviors and may modulate our neural responses to reward. (</a:t>
+              <a:t>Social relationships influence our behaviors and modulate our neural responses to reward (</a:t>
             </a:r>
             <a:r>
               <a:rPr lang="en-US" sz="4000" b="0" i="0" dirty="0" err="1">
@@ -14731,7 +14746,7 @@
                 <a:effectLst/>
                 <a:latin typeface="Helvetica" pitchFamily="2" charset="0"/>
               </a:rPr>
-              <a:t> et al., 2015)</a:t>
+              <a:t> et al., 2015).</a:t>
             </a:r>
           </a:p>
           <a:p>
@@ -14789,7 +14804,7 @@
                 <a:effectLst/>
                 <a:latin typeface="Helvetica" pitchFamily="2" charset="0"/>
               </a:rPr>
-              <a:t>e effect of relationships on behavior and reward activation may change as we age. (</a:t>
+              <a:t>e effect of relationships on behavior and reward activation change as we age (</a:t>
             </a:r>
             <a:r>
               <a:rPr lang="en-US" sz="4000" b="0" i="0" dirty="0" err="1">
@@ -14809,7 +14824,7 @@
                 <a:effectLst/>
                 <a:latin typeface="Helvetica" pitchFamily="2" charset="0"/>
               </a:rPr>
-              <a:t> et al., 2022)</a:t>
+              <a:t> et al., 2022).</a:t>
             </a:r>
           </a:p>
           <a:p>
@@ -15493,8 +15508,8 @@
         </p:nvSpPr>
         <p:spPr>
           <a:xfrm>
-            <a:off x="423843" y="26895455"/>
-            <a:ext cx="10236647" cy="3431709"/>
+            <a:off x="348830" y="26164352"/>
+            <a:ext cx="11690573" cy="4909036"/>
           </a:xfrm>
           <a:prstGeom prst="rect">
             <a:avLst/>
@@ -15507,40 +15522,18 @@
           </a:bodyPr>
           <a:lstStyle/>
           <a:p>
-            <a:pPr algn="ctr"/>
-            <a:r>
-              <a:rPr lang="en-US" sz="3200" dirty="0">
-                <a:effectLst/>
-                <a:latin typeface="Helvetica"/>
-                <a:ea typeface="Times New Roman" panose="02020603050405020304" pitchFamily="18" charset="0"/>
-                <a:cs typeface="Helvetica"/>
-              </a:rPr>
-              <a:t>N =</a:t>
-            </a:r>
+            <a:pPr algn="ctr">
+              <a:spcAft>
+                <a:spcPts val="15"/>
+              </a:spcAft>
+            </a:pPr>
             <a:r>
               <a:rPr lang="en-US" sz="3200" dirty="0">
                 <a:latin typeface="Helvetica"/>
                 <a:ea typeface="Times New Roman" panose="02020603050405020304" pitchFamily="18" charset="0"/>
                 <a:cs typeface="Helvetica"/>
               </a:rPr>
-              <a:t> 62</a:t>
-            </a:r>
-            <a:r>
-              <a:rPr lang="en-US" sz="3200" dirty="0">
-                <a:effectLst/>
-                <a:latin typeface="Helvetica"/>
-                <a:ea typeface="Times New Roman" panose="02020603050405020304" pitchFamily="18" charset="0"/>
-                <a:cs typeface="Helvetica"/>
-              </a:rPr>
-              <a:t> </a:t>
-            </a:r>
-            <a:r>
-              <a:rPr lang="en-US" sz="3200" dirty="0">
-                <a:latin typeface="Helvetica" pitchFamily="2" charset="0"/>
-                <a:ea typeface="Times New Roman" panose="02020603050405020304" pitchFamily="18" charset="0"/>
-                <a:cs typeface="Helvetica"/>
-              </a:rPr>
-              <a:t>C</a:t>
+              <a:t>We used</a:t>
             </a:r>
             <a:r>
               <a:rPr lang="en-US" sz="3200" dirty="0">
@@ -15549,7 +15542,7 @@
                 <a:ea typeface="Times New Roman" panose="02020603050405020304" pitchFamily="18" charset="0"/>
                 <a:cs typeface="Helvetica"/>
               </a:rPr>
-              <a:t>ompleted the </a:t>
+              <a:t> the </a:t>
             </a:r>
             <a:r>
               <a:rPr lang="en-US" sz="3200" b="0" i="0" dirty="0">
@@ -15572,11 +15565,15 @@
                 <a:effectLst/>
                 <a:latin typeface="Helvetica" pitchFamily="2" charset="0"/>
               </a:rPr>
-              <a:t>Older Adults Financial Exploitation Measure (OAFEM).</a:t>
+              <a:t>Older Adults Financial Exploitation Measure (OAFEM) to measure closeness ratings and risk for financial exploitation.</a:t>
             </a:r>
           </a:p>
           <a:p>
-            <a:pPr algn="ctr"/>
+            <a:pPr algn="ctr">
+              <a:spcAft>
+                <a:spcPts val="15"/>
+              </a:spcAft>
+            </a:pPr>
             <a:endParaRPr lang="en-US" sz="3200" dirty="0">
               <a:latin typeface="Helvetica" pitchFamily="2" charset="0"/>
               <a:ea typeface="Times New Roman" panose="02020603050405020304" pitchFamily="18" charset="0"/>
@@ -15584,7 +15581,11 @@
             </a:endParaRPr>
           </a:p>
           <a:p>
-            <a:pPr algn="ctr"/>
+            <a:pPr algn="ctr">
+              <a:spcAft>
+                <a:spcPts val="15"/>
+              </a:spcAft>
+            </a:pPr>
             <a:r>
               <a:rPr lang="en-US" sz="3200" dirty="0">
                 <a:latin typeface="Helvetica"/>
@@ -15608,6 +15609,52 @@
                 <a:cs typeface="Helvetica"/>
               </a:rPr>
               <a:t> at Z &gt; 3.1 and Family Wise Error corrected at p &gt; .05</a:t>
+            </a:r>
+          </a:p>
+          <a:p>
+            <a:pPr algn="ctr">
+              <a:spcAft>
+                <a:spcPts val="15"/>
+              </a:spcAft>
+            </a:pPr>
+            <a:endParaRPr lang="en-US" sz="3200" dirty="0">
+              <a:latin typeface="Helvetica"/>
+              <a:ea typeface="MS PGothic"/>
+              <a:cs typeface="Helvetica"/>
+            </a:endParaRPr>
+          </a:p>
+          <a:p>
+            <a:pPr algn="ctr">
+              <a:spcAft>
+                <a:spcPts val="15"/>
+              </a:spcAft>
+            </a:pPr>
+            <a:r>
+              <a:rPr lang="en-US" sz="3200" dirty="0">
+                <a:effectLst/>
+                <a:latin typeface="Helvetica"/>
+                <a:ea typeface="MS PGothic"/>
+                <a:cs typeface="Helvetica"/>
+              </a:rPr>
+              <a:t>fMRI data were preprocessed with </a:t>
+            </a:r>
+            <a:r>
+              <a:rPr lang="en-US" sz="3200" dirty="0" err="1">
+                <a:effectLst/>
+                <a:latin typeface="Helvetica"/>
+                <a:ea typeface="MS PGothic"/>
+                <a:cs typeface="Helvetica"/>
+              </a:rPr>
+              <a:t>fMRIprep</a:t>
+            </a:r>
+            <a:r>
+              <a:rPr lang="en-US" sz="3200" dirty="0">
+                <a:effectLst/>
+                <a:latin typeface="Helvetica"/>
+                <a:ea typeface="MS PGothic"/>
+                <a:cs typeface="Helvetica"/>
+              </a:rPr>
+              <a:t> and statistical analyses were performed using FSL</a:t>
             </a:r>
             <a:endParaRPr lang="en-US" sz="3200" dirty="0">
               <a:effectLst/>
@@ -15763,8 +15810,8 @@
           </p:nvSpPr>
           <p:spPr>
             <a:xfrm>
-              <a:off x="16838470" y="8664303"/>
-              <a:ext cx="838691" cy="369332"/>
+              <a:off x="16897735" y="8562924"/>
+              <a:ext cx="805531" cy="336081"/>
             </a:xfrm>
             <a:prstGeom prst="rect">
               <a:avLst/>
@@ -15779,7 +15826,7 @@
             <a:p>
               <a:pPr algn="ctr"/>
               <a:r>
-                <a:rPr lang="en-US" dirty="0"/>
+                <a:rPr lang="en-US" sz="3000" dirty="0"/>
                 <a:t>Friend</a:t>
               </a:r>
             </a:p>
@@ -15799,8 +15846,8 @@
           </p:nvSpPr>
           <p:spPr>
             <a:xfrm>
-              <a:off x="18105047" y="8664303"/>
-              <a:ext cx="1069524" cy="369332"/>
+              <a:off x="17943587" y="8561101"/>
+              <a:ext cx="1048955" cy="336081"/>
             </a:xfrm>
             <a:prstGeom prst="rect">
               <a:avLst/>
@@ -15814,7 +15861,7 @@
             <a:lstStyle/>
             <a:p>
               <a:r>
-                <a:rPr lang="en-US" dirty="0"/>
+                <a:rPr lang="en-US" sz="3000" dirty="0"/>
                 <a:t>Stranger</a:t>
               </a:r>
             </a:p>
@@ -15834,8 +15881,8 @@
           </p:nvSpPr>
           <p:spPr>
             <a:xfrm>
-              <a:off x="19079432" y="8666185"/>
-              <a:ext cx="1197764" cy="369332"/>
+              <a:off x="19099843" y="8562985"/>
+              <a:ext cx="1183852" cy="336081"/>
             </a:xfrm>
             <a:prstGeom prst="rect">
               <a:avLst/>
@@ -15850,7 +15897,7 @@
             <a:p>
               <a:pPr algn="ctr"/>
               <a:r>
-                <a:rPr lang="en-US" dirty="0"/>
+                <a:rPr lang="en-US" sz="3000" dirty="0"/>
                 <a:t>Computer</a:t>
               </a:r>
             </a:p>
@@ -15859,10 +15906,10 @@
       </p:grpSp>
       <p:grpSp>
         <p:nvGrpSpPr>
-          <p:cNvPr id="3" name="Group 2">
+          <p:cNvPr id="6" name="Group 5">
             <a:extLst>
               <a:ext uri="{FF2B5EF4-FFF2-40B4-BE49-F238E27FC236}">
-                <a16:creationId xmlns:a16="http://schemas.microsoft.com/office/drawing/2014/main" id="{FE925EB6-326B-8343-87E7-5F037676B4C3}"/>
+                <a16:creationId xmlns:a16="http://schemas.microsoft.com/office/drawing/2014/main" id="{38C18AD7-82F0-2340-9AF5-4FA312159648}"/>
               </a:ext>
             </a:extLst>
           </p:cNvPr>
@@ -15871,18 +15918,18 @@
         </p:nvGrpSpPr>
         <p:grpSpPr>
           <a:xfrm>
-            <a:off x="574224" y="14845624"/>
-            <a:ext cx="13946934" cy="10995653"/>
-            <a:chOff x="530502" y="15050793"/>
-            <a:chExt cx="13946934" cy="10995653"/>
+            <a:off x="597367" y="16568871"/>
+            <a:ext cx="13063327" cy="9292257"/>
+            <a:chOff x="572915" y="16098706"/>
+            <a:chExt cx="13946934" cy="10056750"/>
           </a:xfrm>
         </p:grpSpPr>
         <p:grpSp>
           <p:nvGrpSpPr>
-            <p:cNvPr id="15621" name="Group 15620">
+            <p:cNvPr id="3" name="Group 2">
               <a:extLst>
                 <a:ext uri="{FF2B5EF4-FFF2-40B4-BE49-F238E27FC236}">
-                  <a16:creationId xmlns:a16="http://schemas.microsoft.com/office/drawing/2014/main" id="{5C45E275-5A15-8C98-B9C5-16C75C23860A}"/>
+                  <a16:creationId xmlns:a16="http://schemas.microsoft.com/office/drawing/2014/main" id="{FE925EB6-326B-8343-87E7-5F037676B4C3}"/>
                 </a:ext>
               </a:extLst>
             </p:cNvPr>
@@ -15891,18 +15938,18 @@
           </p:nvGrpSpPr>
           <p:grpSpPr>
             <a:xfrm>
-              <a:off x="3779671" y="15989696"/>
-              <a:ext cx="10697765" cy="10056750"/>
-              <a:chOff x="3779671" y="16218296"/>
-              <a:chExt cx="10697765" cy="10056750"/>
+              <a:off x="572915" y="16098706"/>
+              <a:ext cx="13946934" cy="10056750"/>
+              <a:chOff x="530502" y="15989696"/>
+              <a:chExt cx="13946934" cy="10056750"/>
             </a:xfrm>
           </p:grpSpPr>
           <p:grpSp>
             <p:nvGrpSpPr>
-              <p:cNvPr id="15606" name="Group 15605">
+              <p:cNvPr id="15621" name="Group 15620">
                 <a:extLst>
                   <a:ext uri="{FF2B5EF4-FFF2-40B4-BE49-F238E27FC236}">
-                    <a16:creationId xmlns:a16="http://schemas.microsoft.com/office/drawing/2014/main" id="{B0CC5957-EC01-CDC2-ADAF-5A0141831C57}"/>
+                    <a16:creationId xmlns:a16="http://schemas.microsoft.com/office/drawing/2014/main" id="{5C45E275-5A15-8C98-B9C5-16C75C23860A}"/>
                   </a:ext>
                 </a:extLst>
               </p:cNvPr>
@@ -15911,314 +15958,18 @@
             </p:nvGrpSpPr>
             <p:grpSpPr>
               <a:xfrm>
-                <a:off x="3779671" y="16218296"/>
+                <a:off x="3779671" y="15989696"/>
                 <a:ext cx="10697765" cy="10056750"/>
-                <a:chOff x="18887859" y="360968"/>
-                <a:chExt cx="6543891" cy="6151778"/>
+                <a:chOff x="3779671" y="16218296"/>
+                <a:chExt cx="10697765" cy="10056750"/>
               </a:xfrm>
             </p:grpSpPr>
-            <p:pic>
-              <p:nvPicPr>
-                <p:cNvPr id="15607" name="Picture 15606" descr="A green check mark on a grey background&#10;&#10;Description automatically generated">
+            <p:grpSp>
+              <p:nvGrpSpPr>
+                <p:cNvPr id="15606" name="Group 15605">
                   <a:extLst>
                     <a:ext uri="{FF2B5EF4-FFF2-40B4-BE49-F238E27FC236}">
-                      <a16:creationId xmlns:a16="http://schemas.microsoft.com/office/drawing/2014/main" id="{BFD42068-273C-19B5-B61E-D2752FACB16C}"/>
-                    </a:ext>
-                  </a:extLst>
-                </p:cNvPr>
-                <p:cNvPicPr>
-                  <a:picLocks noChangeAspect="1"/>
-                </p:cNvPicPr>
-                <p:nvPr/>
-              </p:nvPicPr>
-              <p:blipFill rotWithShape="1">
-                <a:blip r:embed="rId7"/>
-                <a:srcRect l="14791" t="15087" r="12450" b="22936"/>
-                <a:stretch/>
-              </p:blipFill>
-              <p:spPr>
-                <a:xfrm>
-                  <a:off x="19244972" y="4622666"/>
-                  <a:ext cx="2991981" cy="1890080"/>
-                </a:xfrm>
-                <a:prstGeom prst="rect">
-                  <a:avLst/>
-                </a:prstGeom>
-                <a:solidFill>
-                  <a:srgbClr val="FFFFFF">
-                    <a:shade val="85000"/>
-                  </a:srgbClr>
-                </a:solidFill>
-                <a:ln w="88900" cap="sq">
-                  <a:solidFill>
-                    <a:srgbClr val="C00000"/>
-                  </a:solidFill>
-                  <a:miter lim="800000"/>
-                </a:ln>
-                <a:effectLst>
-                  <a:outerShdw blurRad="55000" dist="18000" dir="5400000" algn="tl" rotWithShape="0">
-                    <a:srgbClr val="000000">
-                      <a:alpha val="40000"/>
-                    </a:srgbClr>
-                  </a:outerShdw>
-                </a:effectLst>
-                <a:scene3d>
-                  <a:camera prst="orthographicFront"/>
-                  <a:lightRig rig="twoPt" dir="t">
-                    <a:rot lat="0" lon="0" rev="7200000"/>
-                  </a:lightRig>
-                </a:scene3d>
-                <a:sp3d>
-                  <a:bevelT w="25400" h="19050"/>
-                  <a:contourClr>
-                    <a:srgbClr val="FFFFFF"/>
-                  </a:contourClr>
-                </a:sp3d>
-              </p:spPr>
-            </p:pic>
-            <p:pic>
-              <p:nvPicPr>
-                <p:cNvPr id="15608" name="Picture 15607" descr="A computer screen shot&#10;&#10;Description automatically generated">
-                  <a:extLst>
-                    <a:ext uri="{FF2B5EF4-FFF2-40B4-BE49-F238E27FC236}">
-                      <a16:creationId xmlns:a16="http://schemas.microsoft.com/office/drawing/2014/main" id="{7AF89E18-68CC-9284-01FB-59B8ECC6A7F3}"/>
-                    </a:ext>
-                  </a:extLst>
-                </p:cNvPr>
-                <p:cNvPicPr>
-                  <a:picLocks noChangeAspect="1"/>
-                </p:cNvPicPr>
-                <p:nvPr/>
-              </p:nvPicPr>
-              <p:blipFill rotWithShape="1">
-                <a:blip r:embed="rId8"/>
-                <a:srcRect l="17658" t="18357" r="18046" b="25816"/>
-                <a:stretch/>
-              </p:blipFill>
-              <p:spPr>
-                <a:xfrm>
-                  <a:off x="22543408" y="4676154"/>
-                  <a:ext cx="2888342" cy="1819031"/>
-                </a:xfrm>
-                <a:prstGeom prst="rect">
-                  <a:avLst/>
-                </a:prstGeom>
-                <a:solidFill>
-                  <a:srgbClr val="FFFFFF">
-                    <a:shade val="85000"/>
-                  </a:srgbClr>
-                </a:solidFill>
-                <a:ln w="88900" cap="sq">
-                  <a:solidFill>
-                    <a:srgbClr val="C00000"/>
-                  </a:solidFill>
-                  <a:miter lim="800000"/>
-                </a:ln>
-                <a:effectLst>
-                  <a:outerShdw blurRad="55000" dist="18000" dir="5400000" algn="tl" rotWithShape="0">
-                    <a:srgbClr val="000000">
-                      <a:alpha val="40000"/>
-                    </a:srgbClr>
-                  </a:outerShdw>
-                </a:effectLst>
-                <a:scene3d>
-                  <a:camera prst="orthographicFront"/>
-                  <a:lightRig rig="twoPt" dir="t">
-                    <a:rot lat="0" lon="0" rev="7200000"/>
-                  </a:lightRig>
-                </a:scene3d>
-                <a:sp3d>
-                  <a:bevelT w="25400" h="19050"/>
-                  <a:contourClr>
-                    <a:srgbClr val="FFFFFF"/>
-                  </a:contourClr>
-                </a:sp3d>
-              </p:spPr>
-            </p:pic>
-            <p:pic>
-              <p:nvPicPr>
-                <p:cNvPr id="15609" name="Picture 15608" descr="A white cross on a gray background&#10;&#10;Description automatically generated">
-                  <a:extLst>
-                    <a:ext uri="{FF2B5EF4-FFF2-40B4-BE49-F238E27FC236}">
-                      <a16:creationId xmlns:a16="http://schemas.microsoft.com/office/drawing/2014/main" id="{A316990F-59C7-631E-47E9-456D55904891}"/>
-                    </a:ext>
-                  </a:extLst>
-                </p:cNvPr>
-                <p:cNvPicPr>
-                  <a:picLocks noChangeAspect="1"/>
-                </p:cNvPicPr>
-                <p:nvPr/>
-              </p:nvPicPr>
-              <p:blipFill rotWithShape="1">
-                <a:blip r:embed="rId9"/>
-                <a:srcRect l="2620" t="7420" r="2620" b="4981"/>
-                <a:stretch/>
-              </p:blipFill>
-              <p:spPr>
-                <a:xfrm>
-                  <a:off x="20965957" y="2971697"/>
-                  <a:ext cx="2848448" cy="1890080"/>
-                </a:xfrm>
-                <a:prstGeom prst="rect">
-                  <a:avLst/>
-                </a:prstGeom>
-                <a:solidFill>
-                  <a:srgbClr val="FFFFFF">
-                    <a:shade val="85000"/>
-                  </a:srgbClr>
-                </a:solidFill>
-                <a:ln w="88900" cap="sq">
-                  <a:solidFill>
-                    <a:srgbClr val="C00000"/>
-                  </a:solidFill>
-                  <a:miter lim="800000"/>
-                </a:ln>
-                <a:effectLst>
-                  <a:outerShdw blurRad="55000" dist="18000" dir="5400000" algn="tl" rotWithShape="0">
-                    <a:srgbClr val="000000">
-                      <a:alpha val="40000"/>
-                    </a:srgbClr>
-                  </a:outerShdw>
-                </a:effectLst>
-                <a:scene3d>
-                  <a:camera prst="orthographicFront"/>
-                  <a:lightRig rig="twoPt" dir="t">
-                    <a:rot lat="0" lon="0" rev="7200000"/>
-                  </a:lightRig>
-                </a:scene3d>
-                <a:sp3d>
-                  <a:bevelT w="25400" h="19050"/>
-                  <a:contourClr>
-                    <a:srgbClr val="FFFFFF"/>
-                  </a:contourClr>
-                </a:sp3d>
-              </p:spPr>
-            </p:pic>
-            <p:pic>
-              <p:nvPicPr>
-                <p:cNvPr id="15610" name="Picture 15609" descr="A grey background with white text&#10;&#10;Description automatically generated">
-                  <a:extLst>
-                    <a:ext uri="{FF2B5EF4-FFF2-40B4-BE49-F238E27FC236}">
-                      <a16:creationId xmlns:a16="http://schemas.microsoft.com/office/drawing/2014/main" id="{E95A9EFF-122D-C651-FDF5-564B82E90BBA}"/>
-                    </a:ext>
-                  </a:extLst>
-                </p:cNvPr>
-                <p:cNvPicPr>
-                  <a:picLocks noChangeAspect="1"/>
-                </p:cNvPicPr>
-                <p:nvPr/>
-              </p:nvPicPr>
-              <p:blipFill>
-                <a:blip r:embed="rId10"/>
-                <a:stretch>
-                  <a:fillRect/>
-                </a:stretch>
-              </p:blipFill>
-              <p:spPr>
-                <a:xfrm>
-                  <a:off x="19926908" y="1639461"/>
-                  <a:ext cx="2848448" cy="1943823"/>
-                </a:xfrm>
-                <a:prstGeom prst="rect">
-                  <a:avLst/>
-                </a:prstGeom>
-                <a:solidFill>
-                  <a:srgbClr val="FFFFFF">
-                    <a:shade val="85000"/>
-                  </a:srgbClr>
-                </a:solidFill>
-                <a:ln w="88900" cap="sq">
-                  <a:solidFill>
-                    <a:srgbClr val="C00000"/>
-                  </a:solidFill>
-                  <a:miter lim="800000"/>
-                </a:ln>
-                <a:effectLst>
-                  <a:outerShdw blurRad="55000" dist="18000" dir="5400000" algn="tl" rotWithShape="0">
-                    <a:srgbClr val="000000">
-                      <a:alpha val="40000"/>
-                    </a:srgbClr>
-                  </a:outerShdw>
-                </a:effectLst>
-                <a:scene3d>
-                  <a:camera prst="orthographicFront"/>
-                  <a:lightRig rig="twoPt" dir="t">
-                    <a:rot lat="0" lon="0" rev="7200000"/>
-                  </a:lightRig>
-                </a:scene3d>
-                <a:sp3d>
-                  <a:bevelT w="25400" h="19050"/>
-                  <a:contourClr>
-                    <a:srgbClr val="FFFFFF"/>
-                  </a:contourClr>
-                </a:sp3d>
-              </p:spPr>
-            </p:pic>
-            <p:pic>
-              <p:nvPicPr>
-                <p:cNvPr id="15611" name="Picture 15610" descr="A computer and a keyboard&#10;&#10;Description automatically generated with medium confidence">
-                  <a:extLst>
-                    <a:ext uri="{FF2B5EF4-FFF2-40B4-BE49-F238E27FC236}">
-                      <a16:creationId xmlns:a16="http://schemas.microsoft.com/office/drawing/2014/main" id="{BD10086D-C152-9AEB-CD34-13177C8F6D4A}"/>
-                    </a:ext>
-                  </a:extLst>
-                </p:cNvPr>
-                <p:cNvPicPr>
-                  <a:picLocks noChangeAspect="1"/>
-                </p:cNvPicPr>
-                <p:nvPr/>
-              </p:nvPicPr>
-              <p:blipFill rotWithShape="1">
-                <a:blip r:embed="rId11"/>
-                <a:srcRect l="2378" t="5420" r="2378" b="9853"/>
-                <a:stretch/>
-              </p:blipFill>
-              <p:spPr>
-                <a:xfrm>
-                  <a:off x="18887859" y="360968"/>
-                  <a:ext cx="2848448" cy="1919430"/>
-                </a:xfrm>
-                <a:prstGeom prst="rect">
-                  <a:avLst/>
-                </a:prstGeom>
-                <a:solidFill>
-                  <a:srgbClr val="FFFFFF">
-                    <a:shade val="85000"/>
-                  </a:srgbClr>
-                </a:solidFill>
-                <a:ln w="88900" cap="sq">
-                  <a:solidFill>
-                    <a:srgbClr val="C00000"/>
-                  </a:solidFill>
-                  <a:miter lim="800000"/>
-                </a:ln>
-                <a:effectLst>
-                  <a:outerShdw blurRad="55000" dist="18000" dir="5400000" algn="tl" rotWithShape="0">
-                    <a:srgbClr val="000000">
-                      <a:alpha val="40000"/>
-                    </a:srgbClr>
-                  </a:outerShdw>
-                </a:effectLst>
-                <a:scene3d>
-                  <a:camera prst="orthographicFront"/>
-                  <a:lightRig rig="twoPt" dir="t">
-                    <a:rot lat="0" lon="0" rev="7200000"/>
-                  </a:lightRig>
-                </a:scene3d>
-                <a:sp3d>
-                  <a:bevelT w="25400" h="19050"/>
-                  <a:contourClr>
-                    <a:srgbClr val="FFFFFF"/>
-                  </a:contourClr>
-                </a:sp3d>
-              </p:spPr>
-            </p:pic>
-            <p:grpSp>
-              <p:nvGrpSpPr>
-                <p:cNvPr id="15612" name="Group 15611">
-                  <a:extLst>
-                    <a:ext uri="{FF2B5EF4-FFF2-40B4-BE49-F238E27FC236}">
-                      <a16:creationId xmlns:a16="http://schemas.microsoft.com/office/drawing/2014/main" id="{60B2107B-4199-FD0C-4076-CA2B2F109B20}"/>
+                      <a16:creationId xmlns:a16="http://schemas.microsoft.com/office/drawing/2014/main" id="{B0CC5957-EC01-CDC2-ADAF-5A0141831C57}"/>
                     </a:ext>
                   </a:extLst>
                 </p:cNvPr>
@@ -16227,18 +15978,18 @@
               </p:nvGrpSpPr>
               <p:grpSpPr>
                 <a:xfrm>
-                  <a:off x="22071524" y="360968"/>
-                  <a:ext cx="3360226" cy="995434"/>
-                  <a:chOff x="3514264" y="206684"/>
-                  <a:chExt cx="3360226" cy="995434"/>
+                  <a:off x="3779671" y="16218296"/>
+                  <a:ext cx="10697765" cy="10056750"/>
+                  <a:chOff x="18887859" y="360968"/>
+                  <a:chExt cx="6543891" cy="6151778"/>
                 </a:xfrm>
               </p:grpSpPr>
               <p:pic>
                 <p:nvPicPr>
-                  <p:cNvPr id="15613" name="Picture 15612">
+                  <p:cNvPr id="15607" name="Picture 15606" descr="A green check mark on a grey background&#10;&#10;Description automatically generated">
                     <a:extLst>
                       <a:ext uri="{FF2B5EF4-FFF2-40B4-BE49-F238E27FC236}">
-                        <a16:creationId xmlns:a16="http://schemas.microsoft.com/office/drawing/2014/main" id="{8F1F804F-2F4C-1C69-0ED4-456A517A34F3}"/>
+                        <a16:creationId xmlns:a16="http://schemas.microsoft.com/office/drawing/2014/main" id="{BFD42068-273C-19B5-B61E-D2752FACB16C}"/>
                       </a:ext>
                     </a:extLst>
                   </p:cNvPr>
@@ -16247,16 +15998,15 @@
                   </p:cNvPicPr>
                   <p:nvPr/>
                 </p:nvPicPr>
-                <p:blipFill>
-                  <a:blip r:embed="rId12"/>
-                  <a:stretch>
-                    <a:fillRect/>
-                  </a:stretch>
+                <p:blipFill rotWithShape="1">
+                  <a:blip r:embed="rId7"/>
+                  <a:srcRect l="14791" t="15087" r="12450" b="22936"/>
+                  <a:stretch/>
                 </p:blipFill>
                 <p:spPr>
                   <a:xfrm>
-                    <a:off x="3514264" y="206684"/>
-                    <a:ext cx="1027916" cy="990673"/>
+                    <a:off x="19244972" y="4622666"/>
+                    <a:ext cx="2991981" cy="1890080"/>
                   </a:xfrm>
                   <a:prstGeom prst="rect">
                     <a:avLst/>
@@ -16295,10 +16045,10 @@
               </p:pic>
               <p:pic>
                 <p:nvPicPr>
-                  <p:cNvPr id="15614" name="Picture 15613" descr="A grey square with a person's head&#10;&#10;Description automatically generated">
+                  <p:cNvPr id="15608" name="Picture 15607" descr="A computer screen shot&#10;&#10;Description automatically generated">
                     <a:extLst>
                       <a:ext uri="{FF2B5EF4-FFF2-40B4-BE49-F238E27FC236}">
-                        <a16:creationId xmlns:a16="http://schemas.microsoft.com/office/drawing/2014/main" id="{2172C1AD-5BEC-2CFE-FCB3-472B60E2C225}"/>
+                        <a16:creationId xmlns:a16="http://schemas.microsoft.com/office/drawing/2014/main" id="{7AF89E18-68CC-9284-01FB-59B8ECC6A7F3}"/>
                       </a:ext>
                     </a:extLst>
                   </p:cNvPr>
@@ -16307,16 +16057,15 @@
                   </p:cNvPicPr>
                   <p:nvPr/>
                 </p:nvPicPr>
-                <p:blipFill>
-                  <a:blip r:embed="rId13"/>
-                  <a:stretch>
-                    <a:fillRect/>
-                  </a:stretch>
+                <p:blipFill rotWithShape="1">
+                  <a:blip r:embed="rId8"/>
+                  <a:srcRect l="17658" t="18357" r="18046" b="25816"/>
+                  <a:stretch/>
                 </p:blipFill>
                 <p:spPr>
                   <a:xfrm>
-                    <a:off x="4717835" y="206684"/>
-                    <a:ext cx="982991" cy="995434"/>
+                    <a:off x="22543408" y="4676154"/>
+                    <a:ext cx="2888342" cy="1819031"/>
                   </a:xfrm>
                   <a:prstGeom prst="rect">
                     <a:avLst/>
@@ -16355,10 +16104,10 @@
               </p:pic>
               <p:pic>
                 <p:nvPicPr>
-                  <p:cNvPr id="15615" name="Picture 15614" descr="A person with a smile on his face&#10;&#10;Description automatically generated">
+                  <p:cNvPr id="15609" name="Picture 15608" descr="A white cross on a gray background&#10;&#10;Description automatically generated">
                     <a:extLst>
                       <a:ext uri="{FF2B5EF4-FFF2-40B4-BE49-F238E27FC236}">
-                        <a16:creationId xmlns:a16="http://schemas.microsoft.com/office/drawing/2014/main" id="{7957BC4D-151A-EB1E-5CAE-777FF2B16B20}"/>
+                        <a16:creationId xmlns:a16="http://schemas.microsoft.com/office/drawing/2014/main" id="{A316990F-59C7-631E-47E9-456D55904891}"/>
                       </a:ext>
                     </a:extLst>
                   </p:cNvPr>
@@ -16367,16 +16116,15 @@
                   </p:cNvPicPr>
                   <p:nvPr/>
                 </p:nvPicPr>
-                <p:blipFill>
-                  <a:blip r:embed="rId14"/>
-                  <a:stretch>
-                    <a:fillRect/>
-                  </a:stretch>
+                <p:blipFill rotWithShape="1">
+                  <a:blip r:embed="rId9"/>
+                  <a:srcRect l="2620" t="7420" r="2620" b="4981"/>
+                  <a:stretch/>
                 </p:blipFill>
                 <p:spPr>
                   <a:xfrm>
-                    <a:off x="5883817" y="206684"/>
-                    <a:ext cx="990673" cy="990673"/>
+                    <a:off x="20965957" y="2971697"/>
+                    <a:ext cx="2848448" cy="1890080"/>
                   </a:xfrm>
                   <a:prstGeom prst="rect">
                     <a:avLst/>
@@ -16413,14 +16161,1042 @@
                   </a:sp3d>
                 </p:spPr>
               </p:pic>
+              <p:pic>
+                <p:nvPicPr>
+                  <p:cNvPr id="15610" name="Picture 15609" descr="A grey background with white text&#10;&#10;Description automatically generated">
+                    <a:extLst>
+                      <a:ext uri="{FF2B5EF4-FFF2-40B4-BE49-F238E27FC236}">
+                        <a16:creationId xmlns:a16="http://schemas.microsoft.com/office/drawing/2014/main" id="{E95A9EFF-122D-C651-FDF5-564B82E90BBA}"/>
+                      </a:ext>
+                    </a:extLst>
+                  </p:cNvPr>
+                  <p:cNvPicPr>
+                    <a:picLocks noChangeAspect="1"/>
+                  </p:cNvPicPr>
+                  <p:nvPr/>
+                </p:nvPicPr>
+                <p:blipFill>
+                  <a:blip r:embed="rId10"/>
+                  <a:stretch>
+                    <a:fillRect/>
+                  </a:stretch>
+                </p:blipFill>
+                <p:spPr>
+                  <a:xfrm>
+                    <a:off x="19926908" y="1639461"/>
+                    <a:ext cx="2848448" cy="1943823"/>
+                  </a:xfrm>
+                  <a:prstGeom prst="rect">
+                    <a:avLst/>
+                  </a:prstGeom>
+                  <a:solidFill>
+                    <a:srgbClr val="FFFFFF">
+                      <a:shade val="85000"/>
+                    </a:srgbClr>
+                  </a:solidFill>
+                  <a:ln w="88900" cap="sq">
+                    <a:solidFill>
+                      <a:srgbClr val="C00000"/>
+                    </a:solidFill>
+                    <a:miter lim="800000"/>
+                  </a:ln>
+                  <a:effectLst>
+                    <a:outerShdw blurRad="55000" dist="18000" dir="5400000" algn="tl" rotWithShape="0">
+                      <a:srgbClr val="000000">
+                        <a:alpha val="40000"/>
+                      </a:srgbClr>
+                    </a:outerShdw>
+                  </a:effectLst>
+                  <a:scene3d>
+                    <a:camera prst="orthographicFront"/>
+                    <a:lightRig rig="twoPt" dir="t">
+                      <a:rot lat="0" lon="0" rev="7200000"/>
+                    </a:lightRig>
+                  </a:scene3d>
+                  <a:sp3d>
+                    <a:bevelT w="25400" h="19050"/>
+                    <a:contourClr>
+                      <a:srgbClr val="FFFFFF"/>
+                    </a:contourClr>
+                  </a:sp3d>
+                </p:spPr>
+              </p:pic>
+              <p:pic>
+                <p:nvPicPr>
+                  <p:cNvPr id="15611" name="Picture 15610" descr="A computer and a keyboard&#10;&#10;Description automatically generated with medium confidence">
+                    <a:extLst>
+                      <a:ext uri="{FF2B5EF4-FFF2-40B4-BE49-F238E27FC236}">
+                        <a16:creationId xmlns:a16="http://schemas.microsoft.com/office/drawing/2014/main" id="{BD10086D-C152-9AEB-CD34-13177C8F6D4A}"/>
+                      </a:ext>
+                    </a:extLst>
+                  </p:cNvPr>
+                  <p:cNvPicPr>
+                    <a:picLocks noChangeAspect="1"/>
+                  </p:cNvPicPr>
+                  <p:nvPr/>
+                </p:nvPicPr>
+                <p:blipFill rotWithShape="1">
+                  <a:blip r:embed="rId11"/>
+                  <a:srcRect l="2378" t="5420" r="2378" b="9853"/>
+                  <a:stretch/>
+                </p:blipFill>
+                <p:spPr>
+                  <a:xfrm>
+                    <a:off x="18887859" y="360968"/>
+                    <a:ext cx="2848448" cy="1919430"/>
+                  </a:xfrm>
+                  <a:prstGeom prst="rect">
+                    <a:avLst/>
+                  </a:prstGeom>
+                  <a:solidFill>
+                    <a:srgbClr val="FFFFFF">
+                      <a:shade val="85000"/>
+                    </a:srgbClr>
+                  </a:solidFill>
+                  <a:ln w="88900" cap="sq">
+                    <a:solidFill>
+                      <a:srgbClr val="C00000"/>
+                    </a:solidFill>
+                    <a:miter lim="800000"/>
+                  </a:ln>
+                  <a:effectLst>
+                    <a:outerShdw blurRad="55000" dist="18000" dir="5400000" algn="tl" rotWithShape="0">
+                      <a:srgbClr val="000000">
+                        <a:alpha val="40000"/>
+                      </a:srgbClr>
+                    </a:outerShdw>
+                  </a:effectLst>
+                  <a:scene3d>
+                    <a:camera prst="orthographicFront"/>
+                    <a:lightRig rig="twoPt" dir="t">
+                      <a:rot lat="0" lon="0" rev="7200000"/>
+                    </a:lightRig>
+                  </a:scene3d>
+                  <a:sp3d>
+                    <a:bevelT w="25400" h="19050"/>
+                    <a:contourClr>
+                      <a:srgbClr val="FFFFFF"/>
+                    </a:contourClr>
+                  </a:sp3d>
+                </p:spPr>
+              </p:pic>
+              <p:grpSp>
+                <p:nvGrpSpPr>
+                  <p:cNvPr id="15612" name="Group 15611">
+                    <a:extLst>
+                      <a:ext uri="{FF2B5EF4-FFF2-40B4-BE49-F238E27FC236}">
+                        <a16:creationId xmlns:a16="http://schemas.microsoft.com/office/drawing/2014/main" id="{60B2107B-4199-FD0C-4076-CA2B2F109B20}"/>
+                      </a:ext>
+                    </a:extLst>
+                  </p:cNvPr>
+                  <p:cNvGrpSpPr/>
+                  <p:nvPr/>
+                </p:nvGrpSpPr>
+                <p:grpSpPr>
+                  <a:xfrm>
+                    <a:off x="22071524" y="360968"/>
+                    <a:ext cx="3360226" cy="995434"/>
+                    <a:chOff x="3514264" y="206684"/>
+                    <a:chExt cx="3360226" cy="995434"/>
+                  </a:xfrm>
+                </p:grpSpPr>
+                <p:pic>
+                  <p:nvPicPr>
+                    <p:cNvPr id="15613" name="Picture 15612">
+                      <a:extLst>
+                        <a:ext uri="{FF2B5EF4-FFF2-40B4-BE49-F238E27FC236}">
+                          <a16:creationId xmlns:a16="http://schemas.microsoft.com/office/drawing/2014/main" id="{8F1F804F-2F4C-1C69-0ED4-456A517A34F3}"/>
+                        </a:ext>
+                      </a:extLst>
+                    </p:cNvPr>
+                    <p:cNvPicPr>
+                      <a:picLocks noChangeAspect="1"/>
+                    </p:cNvPicPr>
+                    <p:nvPr/>
+                  </p:nvPicPr>
+                  <p:blipFill>
+                    <a:blip r:embed="rId12"/>
+                    <a:stretch>
+                      <a:fillRect/>
+                    </a:stretch>
+                  </p:blipFill>
+                  <p:spPr>
+                    <a:xfrm>
+                      <a:off x="3514264" y="206684"/>
+                      <a:ext cx="1027916" cy="990673"/>
+                    </a:xfrm>
+                    <a:prstGeom prst="rect">
+                      <a:avLst/>
+                    </a:prstGeom>
+                    <a:solidFill>
+                      <a:srgbClr val="FFFFFF">
+                        <a:shade val="85000"/>
+                      </a:srgbClr>
+                    </a:solidFill>
+                    <a:ln w="88900" cap="sq">
+                      <a:solidFill>
+                        <a:srgbClr val="C00000"/>
+                      </a:solidFill>
+                      <a:miter lim="800000"/>
+                    </a:ln>
+                    <a:effectLst>
+                      <a:outerShdw blurRad="55000" dist="18000" dir="5400000" algn="tl" rotWithShape="0">
+                        <a:srgbClr val="000000">
+                          <a:alpha val="40000"/>
+                        </a:srgbClr>
+                      </a:outerShdw>
+                    </a:effectLst>
+                    <a:scene3d>
+                      <a:camera prst="orthographicFront"/>
+                      <a:lightRig rig="twoPt" dir="t">
+                        <a:rot lat="0" lon="0" rev="7200000"/>
+                      </a:lightRig>
+                    </a:scene3d>
+                    <a:sp3d>
+                      <a:bevelT w="25400" h="19050"/>
+                      <a:contourClr>
+                        <a:srgbClr val="FFFFFF"/>
+                      </a:contourClr>
+                    </a:sp3d>
+                  </p:spPr>
+                </p:pic>
+                <p:pic>
+                  <p:nvPicPr>
+                    <p:cNvPr id="15614" name="Picture 15613" descr="A grey square with a person's head&#10;&#10;Description automatically generated">
+                      <a:extLst>
+                        <a:ext uri="{FF2B5EF4-FFF2-40B4-BE49-F238E27FC236}">
+                          <a16:creationId xmlns:a16="http://schemas.microsoft.com/office/drawing/2014/main" id="{2172C1AD-5BEC-2CFE-FCB3-472B60E2C225}"/>
+                        </a:ext>
+                      </a:extLst>
+                    </p:cNvPr>
+                    <p:cNvPicPr>
+                      <a:picLocks noChangeAspect="1"/>
+                    </p:cNvPicPr>
+                    <p:nvPr/>
+                  </p:nvPicPr>
+                  <p:blipFill>
+                    <a:blip r:embed="rId13"/>
+                    <a:stretch>
+                      <a:fillRect/>
+                    </a:stretch>
+                  </p:blipFill>
+                  <p:spPr>
+                    <a:xfrm>
+                      <a:off x="4717835" y="206684"/>
+                      <a:ext cx="982991" cy="995434"/>
+                    </a:xfrm>
+                    <a:prstGeom prst="rect">
+                      <a:avLst/>
+                    </a:prstGeom>
+                    <a:solidFill>
+                      <a:srgbClr val="FFFFFF">
+                        <a:shade val="85000"/>
+                      </a:srgbClr>
+                    </a:solidFill>
+                    <a:ln w="88900" cap="sq">
+                      <a:solidFill>
+                        <a:srgbClr val="C00000"/>
+                      </a:solidFill>
+                      <a:miter lim="800000"/>
+                    </a:ln>
+                    <a:effectLst>
+                      <a:outerShdw blurRad="55000" dist="18000" dir="5400000" algn="tl" rotWithShape="0">
+                        <a:srgbClr val="000000">
+                          <a:alpha val="40000"/>
+                        </a:srgbClr>
+                      </a:outerShdw>
+                    </a:effectLst>
+                    <a:scene3d>
+                      <a:camera prst="orthographicFront"/>
+                      <a:lightRig rig="twoPt" dir="t">
+                        <a:rot lat="0" lon="0" rev="7200000"/>
+                      </a:lightRig>
+                    </a:scene3d>
+                    <a:sp3d>
+                      <a:bevelT w="25400" h="19050"/>
+                      <a:contourClr>
+                        <a:srgbClr val="FFFFFF"/>
+                      </a:contourClr>
+                    </a:sp3d>
+                  </p:spPr>
+                </p:pic>
+                <p:pic>
+                  <p:nvPicPr>
+                    <p:cNvPr id="15615" name="Picture 15614" descr="A person with a smile on his face&#10;&#10;Description automatically generated">
+                      <a:extLst>
+                        <a:ext uri="{FF2B5EF4-FFF2-40B4-BE49-F238E27FC236}">
+                          <a16:creationId xmlns:a16="http://schemas.microsoft.com/office/drawing/2014/main" id="{7957BC4D-151A-EB1E-5CAE-777FF2B16B20}"/>
+                        </a:ext>
+                      </a:extLst>
+                    </p:cNvPr>
+                    <p:cNvPicPr>
+                      <a:picLocks noChangeAspect="1"/>
+                    </p:cNvPicPr>
+                    <p:nvPr/>
+                  </p:nvPicPr>
+                  <p:blipFill>
+                    <a:blip r:embed="rId14"/>
+                    <a:stretch>
+                      <a:fillRect/>
+                    </a:stretch>
+                  </p:blipFill>
+                  <p:spPr>
+                    <a:xfrm>
+                      <a:off x="5883817" y="206684"/>
+                      <a:ext cx="990673" cy="990673"/>
+                    </a:xfrm>
+                    <a:prstGeom prst="rect">
+                      <a:avLst/>
+                    </a:prstGeom>
+                    <a:solidFill>
+                      <a:srgbClr val="FFFFFF">
+                        <a:shade val="85000"/>
+                      </a:srgbClr>
+                    </a:solidFill>
+                    <a:ln w="88900" cap="sq">
+                      <a:solidFill>
+                        <a:srgbClr val="C00000"/>
+                      </a:solidFill>
+                      <a:miter lim="800000"/>
+                    </a:ln>
+                    <a:effectLst>
+                      <a:outerShdw blurRad="55000" dist="18000" dir="5400000" algn="tl" rotWithShape="0">
+                        <a:srgbClr val="000000">
+                          <a:alpha val="40000"/>
+                        </a:srgbClr>
+                      </a:outerShdw>
+                    </a:effectLst>
+                    <a:scene3d>
+                      <a:camera prst="orthographicFront"/>
+                      <a:lightRig rig="twoPt" dir="t">
+                        <a:rot lat="0" lon="0" rev="7200000"/>
+                      </a:lightRig>
+                    </a:scene3d>
+                    <a:sp3d>
+                      <a:bevelT w="25400" h="19050"/>
+                      <a:contourClr>
+                        <a:srgbClr val="FFFFFF"/>
+                      </a:contourClr>
+                    </a:sp3d>
+                  </p:spPr>
+                </p:pic>
+              </p:grpSp>
             </p:grpSp>
+            <p:sp>
+              <p:nvSpPr>
+                <p:cNvPr id="15616" name="Rectangle 15615">
+                  <a:extLst>
+                    <a:ext uri="{FF2B5EF4-FFF2-40B4-BE49-F238E27FC236}">
+                      <a16:creationId xmlns:a16="http://schemas.microsoft.com/office/drawing/2014/main" id="{946783DC-D597-2C29-6191-5B3893CFCF5D}"/>
+                    </a:ext>
+                  </a:extLst>
+                </p:cNvPr>
+                <p:cNvSpPr/>
+                <p:nvPr/>
+              </p:nvSpPr>
+              <p:spPr bwMode="auto">
+                <a:xfrm>
+                  <a:off x="4071341" y="18677659"/>
+                  <a:ext cx="2147590" cy="340451"/>
+                </a:xfrm>
+                <a:prstGeom prst="rect">
+                  <a:avLst/>
+                </a:prstGeom>
+                <a:solidFill>
+                  <a:srgbClr val="848484"/>
+                </a:solidFill>
+                <a:ln w="9525" cap="flat" cmpd="sng" algn="ctr">
+                  <a:noFill/>
+                  <a:prstDash val="solid"/>
+                  <a:round/>
+                  <a:headEnd type="none" w="med" len="med"/>
+                  <a:tailEnd type="none" w="med" len="med"/>
+                </a:ln>
+                <a:effectLst/>
+              </p:spPr>
+              <p:txBody>
+                <a:bodyPr vert="horz" wrap="square" lIns="91440" tIns="45720" rIns="91440" bIns="45720" numCol="1" rtlCol="0" anchor="t" anchorCtr="0" compatLnSpc="1">
+                  <a:prstTxWarp prst="textNoShape">
+                    <a:avLst/>
+                  </a:prstTxWarp>
+                </a:bodyPr>
+                <a:lstStyle/>
+                <a:p>
+                  <a:pPr marL="0" marR="0" indent="0" algn="l" defTabSz="4389438" rtl="0" eaLnBrk="1" fontAlgn="base" latinLnBrk="0" hangingPunct="1">
+                    <a:lnSpc>
+                      <a:spcPct val="100000"/>
+                    </a:lnSpc>
+                    <a:spcBef>
+                      <a:spcPct val="0"/>
+                    </a:spcBef>
+                    <a:spcAft>
+                      <a:spcPct val="0"/>
+                    </a:spcAft>
+                    <a:buClrTx/>
+                    <a:buSzTx/>
+                    <a:buFontTx/>
+                    <a:buNone/>
+                    <a:tabLst/>
+                  </a:pPr>
+                  <a:r>
+                    <a:rPr kumimoji="0" lang="en-US" sz="3000" b="0" i="0" u="none" strike="noStrike" cap="none" normalizeH="0" baseline="0" dirty="0">
+                      <a:ln>
+                        <a:noFill/>
+                      </a:ln>
+                      <a:solidFill>
+                        <a:schemeClr val="bg1"/>
+                      </a:solidFill>
+                      <a:effectLst/>
+                      <a:latin typeface="Arial" charset="0"/>
+                      <a:cs typeface="Arial" charset="0"/>
+                    </a:rPr>
+                    <a:t>Share $8</a:t>
+                  </a:r>
+                </a:p>
+              </p:txBody>
+            </p:sp>
+            <p:sp>
+              <p:nvSpPr>
+                <p:cNvPr id="15618" name="Rectangle 15617">
+                  <a:extLst>
+                    <a:ext uri="{FF2B5EF4-FFF2-40B4-BE49-F238E27FC236}">
+                      <a16:creationId xmlns:a16="http://schemas.microsoft.com/office/drawing/2014/main" id="{C6024063-9D2C-50D8-70B5-FC3D7C6F49F8}"/>
+                    </a:ext>
+                  </a:extLst>
+                </p:cNvPr>
+                <p:cNvSpPr/>
+                <p:nvPr/>
+              </p:nvSpPr>
+              <p:spPr bwMode="auto">
+                <a:xfrm>
+                  <a:off x="6320475" y="18660155"/>
+                  <a:ext cx="1942901" cy="552682"/>
+                </a:xfrm>
+                <a:prstGeom prst="rect">
+                  <a:avLst/>
+                </a:prstGeom>
+                <a:solidFill>
+                  <a:srgbClr val="848484"/>
+                </a:solidFill>
+                <a:ln w="9525" cap="flat" cmpd="sng" algn="ctr">
+                  <a:noFill/>
+                  <a:prstDash val="solid"/>
+                  <a:round/>
+                  <a:headEnd type="none" w="med" len="med"/>
+                  <a:tailEnd type="none" w="med" len="med"/>
+                </a:ln>
+                <a:effectLst/>
+              </p:spPr>
+              <p:txBody>
+                <a:bodyPr vert="horz" wrap="square" lIns="91440" tIns="45720" rIns="91440" bIns="45720" numCol="1" rtlCol="0" anchor="t" anchorCtr="0" compatLnSpc="1">
+                  <a:prstTxWarp prst="textNoShape">
+                    <a:avLst/>
+                  </a:prstTxWarp>
+                </a:bodyPr>
+                <a:lstStyle/>
+                <a:p>
+                  <a:pPr marL="0" marR="0" indent="0" algn="l" defTabSz="4389438" rtl="0" eaLnBrk="1" fontAlgn="base" latinLnBrk="0" hangingPunct="1">
+                    <a:lnSpc>
+                      <a:spcPct val="100000"/>
+                    </a:lnSpc>
+                    <a:spcBef>
+                      <a:spcPct val="0"/>
+                    </a:spcBef>
+                    <a:spcAft>
+                      <a:spcPct val="0"/>
+                    </a:spcAft>
+                    <a:buClrTx/>
+                    <a:buSzTx/>
+                    <a:buFontTx/>
+                    <a:buNone/>
+                    <a:tabLst/>
+                  </a:pPr>
+                  <a:r>
+                    <a:rPr kumimoji="0" lang="en-US" sz="3000" b="0" i="0" u="none" strike="noStrike" cap="none" normalizeH="0" baseline="0" dirty="0">
+                      <a:ln>
+                        <a:noFill/>
+                      </a:ln>
+                      <a:solidFill>
+                        <a:schemeClr val="bg1"/>
+                      </a:solidFill>
+                      <a:effectLst/>
+                      <a:latin typeface="Arial" charset="0"/>
+                      <a:cs typeface="Arial" charset="0"/>
+                    </a:rPr>
+                    <a:t>Share $2</a:t>
+                  </a:r>
+                </a:p>
+              </p:txBody>
+            </p:sp>
+            <p:sp>
+              <p:nvSpPr>
+                <p:cNvPr id="15619" name="Rectangle 15618">
+                  <a:extLst>
+                    <a:ext uri="{FF2B5EF4-FFF2-40B4-BE49-F238E27FC236}">
+                      <a16:creationId xmlns:a16="http://schemas.microsoft.com/office/drawing/2014/main" id="{8EBB5886-1680-B3C7-DEC7-CD388B0CA60C}"/>
+                    </a:ext>
+                  </a:extLst>
+                </p:cNvPr>
+                <p:cNvSpPr/>
+                <p:nvPr/>
+              </p:nvSpPr>
+              <p:spPr bwMode="auto">
+                <a:xfrm>
+                  <a:off x="6772254" y="19789015"/>
+                  <a:ext cx="2503191" cy="552682"/>
+                </a:xfrm>
+                <a:prstGeom prst="rect">
+                  <a:avLst/>
+                </a:prstGeom>
+                <a:solidFill>
+                  <a:srgbClr val="848484"/>
+                </a:solidFill>
+                <a:ln w="9525" cap="flat" cmpd="sng" algn="ctr">
+                  <a:noFill/>
+                  <a:prstDash val="solid"/>
+                  <a:round/>
+                  <a:headEnd type="none" w="med" len="med"/>
+                  <a:tailEnd type="none" w="med" len="med"/>
+                </a:ln>
+                <a:effectLst/>
+              </p:spPr>
+              <p:txBody>
+                <a:bodyPr vert="horz" wrap="square" lIns="91440" tIns="45720" rIns="91440" bIns="45720" numCol="1" rtlCol="0" anchor="t" anchorCtr="0" compatLnSpc="1">
+                  <a:prstTxWarp prst="textNoShape">
+                    <a:avLst/>
+                  </a:prstTxWarp>
+                </a:bodyPr>
+                <a:lstStyle/>
+                <a:p>
+                  <a:pPr marL="0" marR="0" indent="0" algn="l" defTabSz="4389438" rtl="0" eaLnBrk="1" fontAlgn="base" latinLnBrk="0" hangingPunct="1">
+                    <a:lnSpc>
+                      <a:spcPct val="100000"/>
+                    </a:lnSpc>
+                    <a:spcBef>
+                      <a:spcPct val="0"/>
+                    </a:spcBef>
+                    <a:spcAft>
+                      <a:spcPct val="0"/>
+                    </a:spcAft>
+                    <a:buClrTx/>
+                    <a:buSzTx/>
+                    <a:buFontTx/>
+                    <a:buNone/>
+                    <a:tabLst/>
+                  </a:pPr>
+                  <a:r>
+                    <a:rPr kumimoji="0" lang="en-US" sz="3000" b="0" i="0" u="none" strike="noStrike" cap="none" normalizeH="0" baseline="0" dirty="0">
+                      <a:ln>
+                        <a:noFill/>
+                      </a:ln>
+                      <a:solidFill>
+                        <a:schemeClr val="bg1"/>
+                      </a:solidFill>
+                      <a:effectLst/>
+                      <a:latin typeface="Arial" charset="0"/>
+                      <a:cs typeface="Arial" charset="0"/>
+                    </a:rPr>
+                    <a:t>Loading…</a:t>
+                  </a:r>
+                </a:p>
+              </p:txBody>
+            </p:sp>
+            <p:sp>
+              <p:nvSpPr>
+                <p:cNvPr id="15620" name="Rectangle 15619">
+                  <a:extLst>
+                    <a:ext uri="{FF2B5EF4-FFF2-40B4-BE49-F238E27FC236}">
+                      <a16:creationId xmlns:a16="http://schemas.microsoft.com/office/drawing/2014/main" id="{98A52E85-D70D-5398-4E75-D523A6EBBF49}"/>
+                    </a:ext>
+                  </a:extLst>
+                </p:cNvPr>
+                <p:cNvSpPr/>
+                <p:nvPr/>
+              </p:nvSpPr>
+              <p:spPr bwMode="auto">
+                <a:xfrm>
+                  <a:off x="9139048" y="21549198"/>
+                  <a:ext cx="704737" cy="718761"/>
+                </a:xfrm>
+                <a:prstGeom prst="rect">
+                  <a:avLst/>
+                </a:prstGeom>
+                <a:solidFill>
+                  <a:srgbClr val="848484"/>
+                </a:solidFill>
+                <a:ln w="9525" cap="flat" cmpd="sng" algn="ctr">
+                  <a:noFill/>
+                  <a:prstDash val="solid"/>
+                  <a:round/>
+                  <a:headEnd type="none" w="med" len="med"/>
+                  <a:tailEnd type="none" w="med" len="med"/>
+                </a:ln>
+                <a:effectLst/>
+              </p:spPr>
+              <p:txBody>
+                <a:bodyPr vert="horz" wrap="square" lIns="91440" tIns="45720" rIns="91440" bIns="45720" numCol="1" rtlCol="0" anchor="t" anchorCtr="0" compatLnSpc="1">
+                  <a:prstTxWarp prst="textNoShape">
+                    <a:avLst/>
+                  </a:prstTxWarp>
+                </a:bodyPr>
+                <a:lstStyle/>
+                <a:p>
+                  <a:pPr marL="0" marR="0" indent="0" algn="ctr" defTabSz="4389438" rtl="0" eaLnBrk="1" fontAlgn="base" latinLnBrk="0" hangingPunct="1">
+                    <a:lnSpc>
+                      <a:spcPct val="100000"/>
+                    </a:lnSpc>
+                    <a:spcBef>
+                      <a:spcPct val="0"/>
+                    </a:spcBef>
+                    <a:spcAft>
+                      <a:spcPct val="0"/>
+                    </a:spcAft>
+                    <a:buClrTx/>
+                    <a:buSzTx/>
+                    <a:buFontTx/>
+                    <a:buNone/>
+                    <a:tabLst/>
+                  </a:pPr>
+                  <a:r>
+                    <a:rPr kumimoji="0" lang="en-US" sz="5000" b="0" i="0" u="none" strike="noStrike" cap="none" normalizeH="0" baseline="0" dirty="0">
+                      <a:ln>
+                        <a:noFill/>
+                      </a:ln>
+                      <a:solidFill>
+                        <a:schemeClr val="bg1"/>
+                      </a:solidFill>
+                      <a:effectLst/>
+                      <a:latin typeface="Arial" charset="0"/>
+                      <a:cs typeface="Arial" charset="0"/>
+                    </a:rPr>
+                    <a:t>+</a:t>
+                  </a:r>
+                </a:p>
+              </p:txBody>
+            </p:sp>
+          </p:grpSp>
+          <p:grpSp>
+            <p:nvGrpSpPr>
+              <p:cNvPr id="15592" name="Group 15591">
+                <a:extLst>
+                  <a:ext uri="{FF2B5EF4-FFF2-40B4-BE49-F238E27FC236}">
+                    <a16:creationId xmlns:a16="http://schemas.microsoft.com/office/drawing/2014/main" id="{415B0EBC-8379-F485-6113-E5DF57F87E19}"/>
+                  </a:ext>
+                </a:extLst>
+              </p:cNvPr>
+              <p:cNvGrpSpPr/>
+              <p:nvPr/>
+            </p:nvGrpSpPr>
+            <p:grpSpPr>
+              <a:xfrm>
+                <a:off x="1532700" y="21512239"/>
+                <a:ext cx="5203251" cy="1323439"/>
+                <a:chOff x="1154328" y="21740839"/>
+                <a:chExt cx="5203251" cy="1323439"/>
+              </a:xfrm>
+            </p:grpSpPr>
+            <p:sp>
+              <p:nvSpPr>
+                <p:cNvPr id="52" name="TextBox 51">
+                  <a:extLst>
+                    <a:ext uri="{FF2B5EF4-FFF2-40B4-BE49-F238E27FC236}">
+                      <a16:creationId xmlns:a16="http://schemas.microsoft.com/office/drawing/2014/main" id="{4707B45F-027B-576B-4808-66F0A5D95489}"/>
+                    </a:ext>
+                  </a:extLst>
+                </p:cNvPr>
+                <p:cNvSpPr txBox="1"/>
+                <p:nvPr/>
+              </p:nvSpPr>
+              <p:spPr>
+                <a:xfrm>
+                  <a:off x="5031575" y="21740839"/>
+                  <a:ext cx="1326004" cy="1323439"/>
+                </a:xfrm>
+                <a:prstGeom prst="rect">
+                  <a:avLst/>
+                </a:prstGeom>
+                <a:noFill/>
+              </p:spPr>
+              <p:txBody>
+                <a:bodyPr wrap="none" rtlCol="0">
+                  <a:spAutoFit/>
+                </a:bodyPr>
+                <a:lstStyle/>
+                <a:p>
+                  <a:r>
+                    <a:rPr lang="en-US" sz="8000" b="1" dirty="0">
+                      <a:solidFill>
+                        <a:srgbClr val="03DF04"/>
+                      </a:solidFill>
+                    </a:rPr>
+                    <a:t>x3</a:t>
+                  </a:r>
+                </a:p>
+              </p:txBody>
+            </p:sp>
+            <p:sp>
+              <p:nvSpPr>
+                <p:cNvPr id="15433" name="Rounded Rectangle 15432">
+                  <a:extLst>
+                    <a:ext uri="{FF2B5EF4-FFF2-40B4-BE49-F238E27FC236}">
+                      <a16:creationId xmlns:a16="http://schemas.microsoft.com/office/drawing/2014/main" id="{9D770554-0135-2E8B-9BC3-8228F9631C8A}"/>
+                    </a:ext>
+                  </a:extLst>
+                </p:cNvPr>
+                <p:cNvSpPr/>
+                <p:nvPr/>
+              </p:nvSpPr>
+              <p:spPr bwMode="auto">
+                <a:xfrm>
+                  <a:off x="1154328" y="21817902"/>
+                  <a:ext cx="3412362" cy="1168944"/>
+                </a:xfrm>
+                <a:prstGeom prst="roundRect">
+                  <a:avLst/>
+                </a:prstGeom>
+                <a:solidFill>
+                  <a:schemeClr val="accent1"/>
+                </a:solidFill>
+                <a:ln w="50800" cap="flat" cmpd="sng" algn="ctr">
+                  <a:solidFill>
+                    <a:schemeClr val="tx1"/>
+                  </a:solidFill>
+                  <a:prstDash val="solid"/>
+                  <a:round/>
+                  <a:headEnd type="none" w="med" len="med"/>
+                  <a:tailEnd type="none" w="med" len="med"/>
+                </a:ln>
+                <a:effectLst/>
+              </p:spPr>
+              <p:txBody>
+                <a:bodyPr vert="horz" wrap="square" lIns="91440" tIns="45720" rIns="91440" bIns="45720" numCol="1" rtlCol="0" anchor="t" anchorCtr="0" compatLnSpc="1">
+                  <a:prstTxWarp prst="textNoShape">
+                    <a:avLst/>
+                  </a:prstTxWarp>
+                </a:bodyPr>
+                <a:lstStyle/>
+                <a:p>
+                  <a:pPr algn="ctr" defTabSz="4389438" eaLnBrk="1" hangingPunct="1"/>
+                  <a:r>
+                    <a:rPr lang="en-US" sz="3000" dirty="0"/>
+                    <a:t>The money you  sent is tripled</a:t>
+                  </a:r>
+                </a:p>
+                <a:p>
+                  <a:pPr marL="0" marR="0" indent="0" algn="l" defTabSz="4389438" rtl="0" eaLnBrk="1" fontAlgn="base" latinLnBrk="0" hangingPunct="1">
+                    <a:lnSpc>
+                      <a:spcPct val="100000"/>
+                    </a:lnSpc>
+                    <a:spcBef>
+                      <a:spcPct val="0"/>
+                    </a:spcBef>
+                    <a:spcAft>
+                      <a:spcPct val="0"/>
+                    </a:spcAft>
+                    <a:buClrTx/>
+                    <a:buSzTx/>
+                    <a:buFontTx/>
+                    <a:buNone/>
+                    <a:tabLst/>
+                  </a:pPr>
+                  <a:endParaRPr kumimoji="0" lang="en-US" sz="1800" b="0" i="0" u="none" strike="noStrike" cap="none" normalizeH="0" baseline="0" dirty="0">
+                    <a:ln>
+                      <a:noFill/>
+                    </a:ln>
+                    <a:solidFill>
+                      <a:schemeClr val="tx1"/>
+                    </a:solidFill>
+                    <a:effectLst/>
+                    <a:latin typeface="Arial" charset="0"/>
+                    <a:cs typeface="Arial" charset="0"/>
+                  </a:endParaRPr>
+                </a:p>
+              </p:txBody>
+            </p:sp>
+          </p:grpSp>
+          <p:grpSp>
+            <p:nvGrpSpPr>
+              <p:cNvPr id="15490" name="Group 15489">
+                <a:extLst>
+                  <a:ext uri="{FF2B5EF4-FFF2-40B4-BE49-F238E27FC236}">
+                    <a16:creationId xmlns:a16="http://schemas.microsoft.com/office/drawing/2014/main" id="{26CF14B9-FE18-01D5-1A0A-E19BE8376A0A}"/>
+                  </a:ext>
+                </a:extLst>
+              </p:cNvPr>
+              <p:cNvGrpSpPr/>
+              <p:nvPr/>
+            </p:nvGrpSpPr>
+            <p:grpSpPr>
+              <a:xfrm>
+                <a:off x="530502" y="18979791"/>
+                <a:ext cx="4534151" cy="2464546"/>
+                <a:chOff x="533974" y="18532980"/>
+                <a:chExt cx="4534151" cy="2464546"/>
+              </a:xfrm>
+            </p:grpSpPr>
+            <p:sp>
+              <p:nvSpPr>
+                <p:cNvPr id="15432" name="Rounded Rectangle 15431">
+                  <a:extLst>
+                    <a:ext uri="{FF2B5EF4-FFF2-40B4-BE49-F238E27FC236}">
+                      <a16:creationId xmlns:a16="http://schemas.microsoft.com/office/drawing/2014/main" id="{29E5F4B4-9ECB-A12A-6B3F-C0855A0CDE34}"/>
+                    </a:ext>
+                  </a:extLst>
+                </p:cNvPr>
+                <p:cNvSpPr/>
+                <p:nvPr/>
+              </p:nvSpPr>
+              <p:spPr bwMode="auto">
+                <a:xfrm>
+                  <a:off x="533974" y="19334093"/>
+                  <a:ext cx="4534151" cy="1663433"/>
+                </a:xfrm>
+                <a:prstGeom prst="roundRect">
+                  <a:avLst/>
+                </a:prstGeom>
+                <a:solidFill>
+                  <a:schemeClr val="accent1"/>
+                </a:solidFill>
+                <a:ln w="50800" cap="flat" cmpd="sng" algn="ctr">
+                  <a:solidFill>
+                    <a:schemeClr val="tx1"/>
+                  </a:solidFill>
+                  <a:prstDash val="solid"/>
+                  <a:round/>
+                  <a:headEnd type="none" w="med" len="med"/>
+                  <a:tailEnd type="none" w="med" len="med"/>
+                </a:ln>
+                <a:effectLst/>
+              </p:spPr>
+              <p:txBody>
+                <a:bodyPr vert="horz" wrap="square" lIns="91440" tIns="45720" rIns="91440" bIns="45720" numCol="1" rtlCol="0" anchor="t" anchorCtr="0" compatLnSpc="1">
+                  <a:prstTxWarp prst="textNoShape">
+                    <a:avLst/>
+                  </a:prstTxWarp>
+                </a:bodyPr>
+                <a:lstStyle/>
+                <a:p>
+                  <a:pPr algn="ctr" defTabSz="4389438" eaLnBrk="1" hangingPunct="1"/>
+                  <a:r>
+                    <a:rPr lang="en-US" sz="3000" dirty="0"/>
+                    <a:t>You choose a higher or lower amount to share with your partner.</a:t>
+                  </a:r>
+                </a:p>
+                <a:p>
+                  <a:pPr marL="0" marR="0" indent="0" algn="l" defTabSz="4389438" rtl="0" eaLnBrk="1" fontAlgn="base" latinLnBrk="0" hangingPunct="1">
+                    <a:lnSpc>
+                      <a:spcPct val="100000"/>
+                    </a:lnSpc>
+                    <a:spcBef>
+                      <a:spcPct val="0"/>
+                    </a:spcBef>
+                    <a:spcAft>
+                      <a:spcPct val="0"/>
+                    </a:spcAft>
+                    <a:buClrTx/>
+                    <a:buSzTx/>
+                    <a:buFontTx/>
+                    <a:buNone/>
+                    <a:tabLst/>
+                  </a:pPr>
+                  <a:endParaRPr kumimoji="0" lang="en-US" sz="1800" b="0" i="0" u="none" strike="noStrike" cap="none" normalizeH="0" baseline="0" dirty="0">
+                    <a:ln>
+                      <a:noFill/>
+                    </a:ln>
+                    <a:solidFill>
+                      <a:schemeClr val="tx1"/>
+                    </a:solidFill>
+                    <a:effectLst/>
+                    <a:latin typeface="Arial" charset="0"/>
+                    <a:cs typeface="Arial" charset="0"/>
+                  </a:endParaRPr>
+                </a:p>
+              </p:txBody>
+            </p:sp>
+            <p:cxnSp>
+              <p:nvCxnSpPr>
+                <p:cNvPr id="15442" name="Elbow Connector 15441">
+                  <a:extLst>
+                    <a:ext uri="{FF2B5EF4-FFF2-40B4-BE49-F238E27FC236}">
+                      <a16:creationId xmlns:a16="http://schemas.microsoft.com/office/drawing/2014/main" id="{FD357802-D2BB-A2AC-2582-D36E431D92F1}"/>
+                    </a:ext>
+                  </a:extLst>
+                </p:cNvPr>
+                <p:cNvCxnSpPr>
+                  <a:cxnSpLocks/>
+                </p:cNvCxnSpPr>
+                <p:nvPr/>
+              </p:nvCxnSpPr>
+              <p:spPr bwMode="auto">
+                <a:xfrm flipV="1">
+                  <a:off x="2361558" y="18532980"/>
+                  <a:ext cx="953880" cy="801113"/>
+                </a:xfrm>
+                <a:prstGeom prst="bentConnector3">
+                  <a:avLst>
+                    <a:gd name="adj1" fmla="val -3922"/>
+                  </a:avLst>
+                </a:prstGeom>
+                <a:solidFill>
+                  <a:schemeClr val="accent1"/>
+                </a:solidFill>
+                <a:ln w="50800" cap="flat" cmpd="sng" algn="ctr">
+                  <a:solidFill>
+                    <a:schemeClr val="tx1"/>
+                  </a:solidFill>
+                  <a:prstDash val="solid"/>
+                  <a:round/>
+                  <a:headEnd type="none" w="med" len="med"/>
+                  <a:tailEnd type="triangle"/>
+                </a:ln>
+                <a:effectLst/>
+              </p:spPr>
+            </p:cxnSp>
+          </p:grpSp>
+          <p:grpSp>
+            <p:nvGrpSpPr>
+              <p:cNvPr id="15538" name="Group 15537">
+                <a:extLst>
+                  <a:ext uri="{FF2B5EF4-FFF2-40B4-BE49-F238E27FC236}">
+                    <a16:creationId xmlns:a16="http://schemas.microsoft.com/office/drawing/2014/main" id="{4ABA81B2-5B67-77D2-5517-08033E19241B}"/>
+                  </a:ext>
+                </a:extLst>
+              </p:cNvPr>
+              <p:cNvGrpSpPr/>
+              <p:nvPr/>
+            </p:nvGrpSpPr>
+            <p:grpSpPr>
+              <a:xfrm>
+                <a:off x="795814" y="16818784"/>
+                <a:ext cx="4146785" cy="1569660"/>
+                <a:chOff x="829782" y="16644992"/>
+                <a:chExt cx="4146785" cy="1569660"/>
+              </a:xfrm>
+            </p:grpSpPr>
+            <p:sp>
+              <p:nvSpPr>
+                <p:cNvPr id="15528" name="Rounded Rectangle 15527">
+                  <a:extLst>
+                    <a:ext uri="{FF2B5EF4-FFF2-40B4-BE49-F238E27FC236}">
+                      <a16:creationId xmlns:a16="http://schemas.microsoft.com/office/drawing/2014/main" id="{AD2DBFD4-1DD0-D27D-7CB0-35408A9E32E4}"/>
+                    </a:ext>
+                  </a:extLst>
+                </p:cNvPr>
+                <p:cNvSpPr/>
+                <p:nvPr/>
+              </p:nvSpPr>
+              <p:spPr bwMode="auto">
+                <a:xfrm>
+                  <a:off x="829782" y="16644992"/>
+                  <a:ext cx="2516152" cy="1569660"/>
+                </a:xfrm>
+                <a:prstGeom prst="roundRect">
+                  <a:avLst/>
+                </a:prstGeom>
+                <a:solidFill>
+                  <a:schemeClr val="accent1"/>
+                </a:solidFill>
+                <a:ln w="50800" cap="flat" cmpd="sng" algn="ctr">
+                  <a:solidFill>
+                    <a:schemeClr val="tx1"/>
+                  </a:solidFill>
+                  <a:prstDash val="solid"/>
+                  <a:round/>
+                  <a:headEnd type="none" w="med" len="med"/>
+                  <a:tailEnd type="none" w="med" len="med"/>
+                </a:ln>
+                <a:effectLst/>
+              </p:spPr>
+              <p:txBody>
+                <a:bodyPr vert="horz" wrap="square" lIns="91440" tIns="45720" rIns="91440" bIns="45720" numCol="1" rtlCol="0" anchor="t" anchorCtr="0" compatLnSpc="1">
+                  <a:prstTxWarp prst="textNoShape">
+                    <a:avLst/>
+                  </a:prstTxWarp>
+                </a:bodyPr>
+                <a:lstStyle/>
+                <a:p>
+                  <a:pPr algn="ctr" defTabSz="4389438" eaLnBrk="1" hangingPunct="1"/>
+                  <a:r>
+                    <a:rPr lang="en-US" sz="3000" dirty="0"/>
+                    <a:t>You are assigned a partner.</a:t>
+                  </a:r>
+                </a:p>
+                <a:p>
+                  <a:pPr marL="0" marR="0" indent="0" algn="l" defTabSz="4389438" rtl="0" eaLnBrk="1" fontAlgn="base" latinLnBrk="0" hangingPunct="1">
+                    <a:lnSpc>
+                      <a:spcPct val="100000"/>
+                    </a:lnSpc>
+                    <a:spcBef>
+                      <a:spcPct val="0"/>
+                    </a:spcBef>
+                    <a:spcAft>
+                      <a:spcPct val="0"/>
+                    </a:spcAft>
+                    <a:buClrTx/>
+                    <a:buSzTx/>
+                    <a:buFontTx/>
+                    <a:buNone/>
+                    <a:tabLst/>
+                  </a:pPr>
+                  <a:endParaRPr kumimoji="0" lang="en-US" sz="1800" b="0" i="0" u="none" strike="noStrike" cap="none" normalizeH="0" baseline="0" dirty="0">
+                    <a:ln>
+                      <a:noFill/>
+                    </a:ln>
+                    <a:solidFill>
+                      <a:schemeClr val="tx1"/>
+                    </a:solidFill>
+                    <a:effectLst/>
+                    <a:latin typeface="Arial" charset="0"/>
+                    <a:cs typeface="Arial" charset="0"/>
+                  </a:endParaRPr>
+                </a:p>
+              </p:txBody>
+            </p:sp>
+            <p:cxnSp>
+              <p:nvCxnSpPr>
+                <p:cNvPr id="15537" name="Straight Arrow Connector 15536">
+                  <a:extLst>
+                    <a:ext uri="{FF2B5EF4-FFF2-40B4-BE49-F238E27FC236}">
+                      <a16:creationId xmlns:a16="http://schemas.microsoft.com/office/drawing/2014/main" id="{7A1CFB10-A83A-AA5A-7CB9-EC39B260985E}"/>
+                    </a:ext>
+                  </a:extLst>
+                </p:cNvPr>
+                <p:cNvCxnSpPr>
+                  <a:cxnSpLocks/>
+                  <a:stCxn id="15528" idx="3"/>
+                </p:cNvCxnSpPr>
+                <p:nvPr/>
+              </p:nvCxnSpPr>
+              <p:spPr bwMode="auto">
+                <a:xfrm>
+                  <a:off x="3345934" y="17429822"/>
+                  <a:ext cx="1630633" cy="0"/>
+                </a:xfrm>
+                <a:prstGeom prst="straightConnector1">
+                  <a:avLst/>
+                </a:prstGeom>
+                <a:solidFill>
+                  <a:schemeClr val="accent1"/>
+                </a:solidFill>
+                <a:ln w="50800" cap="flat" cmpd="sng" algn="ctr">
+                  <a:solidFill>
+                    <a:schemeClr val="tx1"/>
+                  </a:solidFill>
+                  <a:prstDash val="solid"/>
+                  <a:round/>
+                  <a:headEnd type="none" w="med" len="med"/>
+                  <a:tailEnd type="triangle"/>
+                </a:ln>
+                <a:effectLst/>
+              </p:spPr>
+            </p:cxnSp>
           </p:grpSp>
           <p:sp>
             <p:nvSpPr>
-              <p:cNvPr id="15616" name="Rectangle 15615">
+              <p:cNvPr id="15542" name="Rounded Rectangle 15541">
                 <a:extLst>
                   <a:ext uri="{FF2B5EF4-FFF2-40B4-BE49-F238E27FC236}">
-                    <a16:creationId xmlns:a16="http://schemas.microsoft.com/office/drawing/2014/main" id="{946783DC-D597-2C29-6191-5B3893CFCF5D}"/>
+                    <a16:creationId xmlns:a16="http://schemas.microsoft.com/office/drawing/2014/main" id="{F919F17A-D127-CAD0-86F8-9896BB472FB5}"/>
                   </a:ext>
                 </a:extLst>
               </p:cNvPr>
@@ -16429,17 +17205,19 @@
             </p:nvSpPr>
             <p:spPr bwMode="auto">
               <a:xfrm>
-                <a:off x="4019981" y="18563950"/>
-                <a:ext cx="1803026" cy="552682"/>
+                <a:off x="1019445" y="25077499"/>
+                <a:ext cx="2843041" cy="764088"/>
               </a:xfrm>
-              <a:prstGeom prst="rect">
+              <a:prstGeom prst="roundRect">
                 <a:avLst/>
               </a:prstGeom>
               <a:solidFill>
-                <a:srgbClr val="848484"/>
+                <a:schemeClr val="accent1"/>
               </a:solidFill>
-              <a:ln w="9525" cap="flat" cmpd="sng" algn="ctr">
-                <a:noFill/>
+              <a:ln w="50800" cap="flat" cmpd="sng" algn="ctr">
+                <a:solidFill>
+                  <a:schemeClr val="tx1"/>
+                </a:solidFill>
                 <a:prstDash val="solid"/>
                 <a:round/>
                 <a:headEnd type="none" w="med" len="med"/>
@@ -16454,6 +17232,13 @@
                 </a:prstTxWarp>
               </a:bodyPr>
               <a:lstStyle/>
+              <a:p>
+                <a:pPr algn="ctr" defTabSz="4389438" eaLnBrk="1" hangingPunct="1"/>
+                <a:r>
+                  <a:rPr lang="en-US" sz="3500" dirty="0"/>
+                  <a:t>End of trial</a:t>
+                </a:r>
+              </a:p>
               <a:p>
                 <a:pPr marL="0" marR="0" indent="0" algn="l" defTabSz="4389438" rtl="0" eaLnBrk="1" fontAlgn="base" latinLnBrk="0" hangingPunct="1">
                   <a:lnSpc>
@@ -16471,29 +17256,26 @@
                   <a:buNone/>
                   <a:tabLst/>
                 </a:pPr>
-                <a:r>
-                  <a:rPr kumimoji="0" lang="en-US" sz="3000" b="0" i="0" u="none" strike="noStrike" cap="none" normalizeH="0" baseline="0" dirty="0">
-                    <a:ln>
-                      <a:noFill/>
-                    </a:ln>
-                    <a:solidFill>
-                      <a:schemeClr val="bg1"/>
-                    </a:solidFill>
-                    <a:effectLst/>
-                    <a:latin typeface="Arial" charset="0"/>
-                    <a:cs typeface="Arial" charset="0"/>
-                  </a:rPr>
-                  <a:t>Share $8</a:t>
-                </a:r>
+                <a:endParaRPr kumimoji="0" lang="en-US" sz="1800" b="0" i="0" u="none" strike="noStrike" cap="none" normalizeH="0" baseline="0" dirty="0">
+                  <a:ln>
+                    <a:noFill/>
+                  </a:ln>
+                  <a:solidFill>
+                    <a:schemeClr val="tx1"/>
+                  </a:solidFill>
+                  <a:effectLst/>
+                  <a:latin typeface="Arial" charset="0"/>
+                  <a:cs typeface="Arial" charset="0"/>
+                </a:endParaRPr>
               </a:p>
             </p:txBody>
           </p:sp>
           <p:sp>
             <p:nvSpPr>
-              <p:cNvPr id="15618" name="Rectangle 15617">
+              <p:cNvPr id="15667" name="Rounded Rectangle 15666">
                 <a:extLst>
                   <a:ext uri="{FF2B5EF4-FFF2-40B4-BE49-F238E27FC236}">
-                    <a16:creationId xmlns:a16="http://schemas.microsoft.com/office/drawing/2014/main" id="{C6024063-9D2C-50D8-70B5-FC3D7C6F49F8}"/>
+                    <a16:creationId xmlns:a16="http://schemas.microsoft.com/office/drawing/2014/main" id="{A04AF92B-DBCA-68B5-49E1-F021F79663D4}"/>
                   </a:ext>
                 </a:extLst>
               </p:cNvPr>
@@ -16502,374 +17284,8 @@
             </p:nvSpPr>
             <p:spPr bwMode="auto">
               <a:xfrm>
-                <a:off x="6502102" y="18568097"/>
-                <a:ext cx="1803026" cy="552682"/>
-              </a:xfrm>
-              <a:prstGeom prst="rect">
-                <a:avLst/>
-              </a:prstGeom>
-              <a:solidFill>
-                <a:srgbClr val="848484"/>
-              </a:solidFill>
-              <a:ln w="9525" cap="flat" cmpd="sng" algn="ctr">
-                <a:noFill/>
-                <a:prstDash val="solid"/>
-                <a:round/>
-                <a:headEnd type="none" w="med" len="med"/>
-                <a:tailEnd type="none" w="med" len="med"/>
-              </a:ln>
-              <a:effectLst/>
-            </p:spPr>
-            <p:txBody>
-              <a:bodyPr vert="horz" wrap="square" lIns="91440" tIns="45720" rIns="91440" bIns="45720" numCol="1" rtlCol="0" anchor="t" anchorCtr="0" compatLnSpc="1">
-                <a:prstTxWarp prst="textNoShape">
-                  <a:avLst/>
-                </a:prstTxWarp>
-              </a:bodyPr>
-              <a:lstStyle/>
-              <a:p>
-                <a:pPr marL="0" marR="0" indent="0" algn="l" defTabSz="4389438" rtl="0" eaLnBrk="1" fontAlgn="base" latinLnBrk="0" hangingPunct="1">
-                  <a:lnSpc>
-                    <a:spcPct val="100000"/>
-                  </a:lnSpc>
-                  <a:spcBef>
-                    <a:spcPct val="0"/>
-                  </a:spcBef>
-                  <a:spcAft>
-                    <a:spcPct val="0"/>
-                  </a:spcAft>
-                  <a:buClrTx/>
-                  <a:buSzTx/>
-                  <a:buFontTx/>
-                  <a:buNone/>
-                  <a:tabLst/>
-                </a:pPr>
-                <a:r>
-                  <a:rPr kumimoji="0" lang="en-US" sz="3000" b="0" i="0" u="none" strike="noStrike" cap="none" normalizeH="0" baseline="0" dirty="0">
-                    <a:ln>
-                      <a:noFill/>
-                    </a:ln>
-                    <a:solidFill>
-                      <a:schemeClr val="bg1"/>
-                    </a:solidFill>
-                    <a:effectLst/>
-                    <a:latin typeface="Arial" charset="0"/>
-                    <a:cs typeface="Arial" charset="0"/>
-                  </a:rPr>
-                  <a:t>Share $2</a:t>
-                </a:r>
-              </a:p>
-            </p:txBody>
-          </p:sp>
-          <p:sp>
-            <p:nvSpPr>
-              <p:cNvPr id="15619" name="Rectangle 15618">
-                <a:extLst>
-                  <a:ext uri="{FF2B5EF4-FFF2-40B4-BE49-F238E27FC236}">
-                    <a16:creationId xmlns:a16="http://schemas.microsoft.com/office/drawing/2014/main" id="{8EBB5886-1680-B3C7-DEC7-CD388B0CA60C}"/>
-                  </a:ext>
-                </a:extLst>
-              </p:cNvPr>
-              <p:cNvSpPr/>
-              <p:nvPr/>
-            </p:nvSpPr>
-            <p:spPr bwMode="auto">
-              <a:xfrm>
-                <a:off x="7005674" y="19674283"/>
-                <a:ext cx="1978245" cy="552682"/>
-              </a:xfrm>
-              <a:prstGeom prst="rect">
-                <a:avLst/>
-              </a:prstGeom>
-              <a:solidFill>
-                <a:srgbClr val="848484"/>
-              </a:solidFill>
-              <a:ln w="9525" cap="flat" cmpd="sng" algn="ctr">
-                <a:noFill/>
-                <a:prstDash val="solid"/>
-                <a:round/>
-                <a:headEnd type="none" w="med" len="med"/>
-                <a:tailEnd type="none" w="med" len="med"/>
-              </a:ln>
-              <a:effectLst/>
-            </p:spPr>
-            <p:txBody>
-              <a:bodyPr vert="horz" wrap="square" lIns="91440" tIns="45720" rIns="91440" bIns="45720" numCol="1" rtlCol="0" anchor="t" anchorCtr="0" compatLnSpc="1">
-                <a:prstTxWarp prst="textNoShape">
-                  <a:avLst/>
-                </a:prstTxWarp>
-              </a:bodyPr>
-              <a:lstStyle/>
-              <a:p>
-                <a:pPr marL="0" marR="0" indent="0" algn="l" defTabSz="4389438" rtl="0" eaLnBrk="1" fontAlgn="base" latinLnBrk="0" hangingPunct="1">
-                  <a:lnSpc>
-                    <a:spcPct val="100000"/>
-                  </a:lnSpc>
-                  <a:spcBef>
-                    <a:spcPct val="0"/>
-                  </a:spcBef>
-                  <a:spcAft>
-                    <a:spcPct val="0"/>
-                  </a:spcAft>
-                  <a:buClrTx/>
-                  <a:buSzTx/>
-                  <a:buFontTx/>
-                  <a:buNone/>
-                  <a:tabLst/>
-                </a:pPr>
-                <a:r>
-                  <a:rPr kumimoji="0" lang="en-US" sz="3000" b="0" i="0" u="none" strike="noStrike" cap="none" normalizeH="0" baseline="0" dirty="0">
-                    <a:ln>
-                      <a:noFill/>
-                    </a:ln>
-                    <a:solidFill>
-                      <a:schemeClr val="bg1"/>
-                    </a:solidFill>
-                    <a:effectLst/>
-                    <a:latin typeface="Arial" charset="0"/>
-                    <a:cs typeface="Arial" charset="0"/>
-                  </a:rPr>
-                  <a:t>Loading…</a:t>
-                </a:r>
-              </a:p>
-            </p:txBody>
-          </p:sp>
-          <p:sp>
-            <p:nvSpPr>
-              <p:cNvPr id="15620" name="Rectangle 15619">
-                <a:extLst>
-                  <a:ext uri="{FF2B5EF4-FFF2-40B4-BE49-F238E27FC236}">
-                    <a16:creationId xmlns:a16="http://schemas.microsoft.com/office/drawing/2014/main" id="{98A52E85-D70D-5398-4E75-D523A6EBBF49}"/>
-                  </a:ext>
-                </a:extLst>
-              </p:cNvPr>
-              <p:cNvSpPr/>
-              <p:nvPr/>
-            </p:nvSpPr>
-            <p:spPr bwMode="auto">
-              <a:xfrm>
-                <a:off x="9139048" y="21549198"/>
-                <a:ext cx="704737" cy="718761"/>
-              </a:xfrm>
-              <a:prstGeom prst="rect">
-                <a:avLst/>
-              </a:prstGeom>
-              <a:solidFill>
-                <a:srgbClr val="848484"/>
-              </a:solidFill>
-              <a:ln w="9525" cap="flat" cmpd="sng" algn="ctr">
-                <a:noFill/>
-                <a:prstDash val="solid"/>
-                <a:round/>
-                <a:headEnd type="none" w="med" len="med"/>
-                <a:tailEnd type="none" w="med" len="med"/>
-              </a:ln>
-              <a:effectLst/>
-            </p:spPr>
-            <p:txBody>
-              <a:bodyPr vert="horz" wrap="square" lIns="91440" tIns="45720" rIns="91440" bIns="45720" numCol="1" rtlCol="0" anchor="t" anchorCtr="0" compatLnSpc="1">
-                <a:prstTxWarp prst="textNoShape">
-                  <a:avLst/>
-                </a:prstTxWarp>
-              </a:bodyPr>
-              <a:lstStyle/>
-              <a:p>
-                <a:pPr marL="0" marR="0" indent="0" algn="ctr" defTabSz="4389438" rtl="0" eaLnBrk="1" fontAlgn="base" latinLnBrk="0" hangingPunct="1">
-                  <a:lnSpc>
-                    <a:spcPct val="100000"/>
-                  </a:lnSpc>
-                  <a:spcBef>
-                    <a:spcPct val="0"/>
-                  </a:spcBef>
-                  <a:spcAft>
-                    <a:spcPct val="0"/>
-                  </a:spcAft>
-                  <a:buClrTx/>
-                  <a:buSzTx/>
-                  <a:buFontTx/>
-                  <a:buNone/>
-                  <a:tabLst/>
-                </a:pPr>
-                <a:r>
-                  <a:rPr kumimoji="0" lang="en-US" sz="5000" b="0" i="0" u="none" strike="noStrike" cap="none" normalizeH="0" baseline="0" dirty="0">
-                    <a:ln>
-                      <a:noFill/>
-                    </a:ln>
-                    <a:solidFill>
-                      <a:schemeClr val="bg1"/>
-                    </a:solidFill>
-                    <a:effectLst/>
-                    <a:latin typeface="Arial" charset="0"/>
-                    <a:cs typeface="Arial" charset="0"/>
-                  </a:rPr>
-                  <a:t>+</a:t>
-                </a:r>
-              </a:p>
-            </p:txBody>
-          </p:sp>
-        </p:grpSp>
-        <p:sp>
-          <p:nvSpPr>
-            <p:cNvPr id="15429" name="Rounded Rectangle 15428">
-              <a:extLst>
-                <a:ext uri="{FF2B5EF4-FFF2-40B4-BE49-F238E27FC236}">
-                  <a16:creationId xmlns:a16="http://schemas.microsoft.com/office/drawing/2014/main" id="{4B7D9A17-B83C-E5E9-1709-3AF83FDD5AD6}"/>
-                </a:ext>
-              </a:extLst>
-            </p:cNvPr>
-            <p:cNvSpPr/>
-            <p:nvPr/>
-          </p:nvSpPr>
-          <p:spPr bwMode="auto">
-            <a:xfrm>
-              <a:off x="530502" y="15050793"/>
-              <a:ext cx="6101659" cy="707229"/>
-            </a:xfrm>
-            <a:prstGeom prst="roundRect">
-              <a:avLst/>
-            </a:prstGeom>
-            <a:solidFill>
-              <a:schemeClr val="accent1"/>
-            </a:solidFill>
-            <a:ln w="50800" cap="flat" cmpd="sng" algn="ctr">
-              <a:solidFill>
-                <a:schemeClr val="tx1"/>
-              </a:solidFill>
-              <a:prstDash val="solid"/>
-              <a:round/>
-              <a:headEnd type="none" w="med" len="med"/>
-              <a:tailEnd type="none" w="med" len="med"/>
-            </a:ln>
-            <a:effectLst/>
-          </p:spPr>
-          <p:txBody>
-            <a:bodyPr vert="horz" wrap="square" lIns="91440" tIns="45720" rIns="91440" bIns="45720" numCol="1" rtlCol="0" anchor="t" anchorCtr="0" compatLnSpc="1">
-              <a:prstTxWarp prst="textNoShape">
-                <a:avLst/>
-              </a:prstTxWarp>
-            </a:bodyPr>
-            <a:lstStyle/>
-            <a:p>
-              <a:pPr algn="ctr" defTabSz="4389438" eaLnBrk="1" hangingPunct="1"/>
-              <a:r>
-                <a:rPr lang="en-US" sz="3500" dirty="0"/>
-                <a:t>You are given </a:t>
-              </a:r>
-              <a:r>
-                <a:rPr lang="en-US" sz="3500" b="1" dirty="0"/>
-                <a:t>$8</a:t>
-              </a:r>
-              <a:r>
-                <a:rPr lang="en-US" sz="3500" dirty="0"/>
-                <a:t> for the trial. </a:t>
-              </a:r>
-            </a:p>
-            <a:p>
-              <a:pPr marL="0" marR="0" indent="0" algn="l" defTabSz="4389438" rtl="0" eaLnBrk="1" fontAlgn="base" latinLnBrk="0" hangingPunct="1">
-                <a:lnSpc>
-                  <a:spcPct val="100000"/>
-                </a:lnSpc>
-                <a:spcBef>
-                  <a:spcPct val="0"/>
-                </a:spcBef>
-                <a:spcAft>
-                  <a:spcPct val="0"/>
-                </a:spcAft>
-                <a:buClrTx/>
-                <a:buSzTx/>
-                <a:buFontTx/>
-                <a:buNone/>
-                <a:tabLst/>
-              </a:pPr>
-              <a:endParaRPr kumimoji="0" lang="en-US" sz="1800" b="0" i="0" u="none" strike="noStrike" cap="none" normalizeH="0" baseline="0" dirty="0">
-                <a:ln>
-                  <a:noFill/>
-                </a:ln>
-                <a:solidFill>
-                  <a:schemeClr val="tx1"/>
-                </a:solidFill>
-                <a:effectLst/>
-                <a:latin typeface="Arial" charset="0"/>
-                <a:cs typeface="Arial" charset="0"/>
-              </a:endParaRPr>
-            </a:p>
-          </p:txBody>
-        </p:sp>
-        <p:grpSp>
-          <p:nvGrpSpPr>
-            <p:cNvPr id="15592" name="Group 15591">
-              <a:extLst>
-                <a:ext uri="{FF2B5EF4-FFF2-40B4-BE49-F238E27FC236}">
-                  <a16:creationId xmlns:a16="http://schemas.microsoft.com/office/drawing/2014/main" id="{415B0EBC-8379-F485-6113-E5DF57F87E19}"/>
-                </a:ext>
-              </a:extLst>
-            </p:cNvPr>
-            <p:cNvGrpSpPr/>
-            <p:nvPr/>
-          </p:nvGrpSpPr>
-          <p:grpSpPr>
-            <a:xfrm>
-              <a:off x="1977783" y="21512239"/>
-              <a:ext cx="4758168" cy="1323439"/>
-              <a:chOff x="1599411" y="21740839"/>
-              <a:chExt cx="4758168" cy="1323439"/>
-            </a:xfrm>
-          </p:grpSpPr>
-          <p:sp>
-            <p:nvSpPr>
-              <p:cNvPr id="52" name="TextBox 51">
-                <a:extLst>
-                  <a:ext uri="{FF2B5EF4-FFF2-40B4-BE49-F238E27FC236}">
-                    <a16:creationId xmlns:a16="http://schemas.microsoft.com/office/drawing/2014/main" id="{4707B45F-027B-576B-4808-66F0A5D95489}"/>
-                  </a:ext>
-                </a:extLst>
-              </p:cNvPr>
-              <p:cNvSpPr txBox="1"/>
-              <p:nvPr/>
-            </p:nvSpPr>
-            <p:spPr>
-              <a:xfrm>
-                <a:off x="5031575" y="21740839"/>
-                <a:ext cx="1326004" cy="1323439"/>
-              </a:xfrm>
-              <a:prstGeom prst="rect">
-                <a:avLst/>
-              </a:prstGeom>
-              <a:noFill/>
-            </p:spPr>
-            <p:txBody>
-              <a:bodyPr wrap="none" rtlCol="0">
-                <a:spAutoFit/>
-              </a:bodyPr>
-              <a:lstStyle/>
-              <a:p>
-                <a:r>
-                  <a:rPr lang="en-US" sz="8000" b="1" dirty="0">
-                    <a:solidFill>
-                      <a:srgbClr val="03DF04"/>
-                    </a:solidFill>
-                  </a:rPr>
-                  <a:t>x3</a:t>
-                </a:r>
-              </a:p>
-            </p:txBody>
-          </p:sp>
-          <p:sp>
-            <p:nvSpPr>
-              <p:cNvPr id="15433" name="Rounded Rectangle 15432">
-                <a:extLst>
-                  <a:ext uri="{FF2B5EF4-FFF2-40B4-BE49-F238E27FC236}">
-                    <a16:creationId xmlns:a16="http://schemas.microsoft.com/office/drawing/2014/main" id="{9D770554-0135-2E8B-9BC3-8228F9631C8A}"/>
-                  </a:ext>
-                </a:extLst>
-              </p:cNvPr>
-              <p:cNvSpPr/>
-              <p:nvPr/>
-            </p:nvSpPr>
-            <p:spPr bwMode="auto">
-              <a:xfrm>
-                <a:off x="1599411" y="21817902"/>
-                <a:ext cx="2967279" cy="1168944"/>
+                <a:off x="530502" y="23379694"/>
+                <a:ext cx="3455135" cy="546012"/>
               </a:xfrm>
               <a:prstGeom prst="roundRect">
                 <a:avLst/>
@@ -16899,7 +17315,7 @@
                 <a:pPr algn="ctr" defTabSz="4389438" eaLnBrk="1" hangingPunct="1"/>
                 <a:r>
                   <a:rPr lang="en-US" sz="3000" dirty="0"/>
-                  <a:t>The money you  sent is tripled</a:t>
+                  <a:t>Outcome Phase</a:t>
                 </a:r>
               </a:p>
               <a:p>
@@ -16934,289 +17350,12 @@
             </p:txBody>
           </p:sp>
         </p:grpSp>
-        <p:grpSp>
-          <p:nvGrpSpPr>
-            <p:cNvPr id="15490" name="Group 15489">
+        <p:sp>
+          <p:nvSpPr>
+            <p:cNvPr id="15668" name="Rectangle 15667">
               <a:extLst>
                 <a:ext uri="{FF2B5EF4-FFF2-40B4-BE49-F238E27FC236}">
-                  <a16:creationId xmlns:a16="http://schemas.microsoft.com/office/drawing/2014/main" id="{26CF14B9-FE18-01D5-1A0A-E19BE8376A0A}"/>
-                </a:ext>
-              </a:extLst>
-            </p:cNvPr>
-            <p:cNvGrpSpPr/>
-            <p:nvPr/>
-          </p:nvGrpSpPr>
-          <p:grpSpPr>
-            <a:xfrm>
-              <a:off x="530502" y="18979791"/>
-              <a:ext cx="4534151" cy="2464546"/>
-              <a:chOff x="533974" y="18532980"/>
-              <a:chExt cx="4534151" cy="2464546"/>
-            </a:xfrm>
-          </p:grpSpPr>
-          <p:sp>
-            <p:nvSpPr>
-              <p:cNvPr id="15432" name="Rounded Rectangle 15431">
-                <a:extLst>
-                  <a:ext uri="{FF2B5EF4-FFF2-40B4-BE49-F238E27FC236}">
-                    <a16:creationId xmlns:a16="http://schemas.microsoft.com/office/drawing/2014/main" id="{29E5F4B4-9ECB-A12A-6B3F-C0855A0CDE34}"/>
-                  </a:ext>
-                </a:extLst>
-              </p:cNvPr>
-              <p:cNvSpPr/>
-              <p:nvPr/>
-            </p:nvSpPr>
-            <p:spPr bwMode="auto">
-              <a:xfrm>
-                <a:off x="533974" y="19334093"/>
-                <a:ext cx="4534151" cy="1663433"/>
-              </a:xfrm>
-              <a:prstGeom prst="roundRect">
-                <a:avLst/>
-              </a:prstGeom>
-              <a:solidFill>
-                <a:schemeClr val="accent1"/>
-              </a:solidFill>
-              <a:ln w="50800" cap="flat" cmpd="sng" algn="ctr">
-                <a:solidFill>
-                  <a:schemeClr val="tx1"/>
-                </a:solidFill>
-                <a:prstDash val="solid"/>
-                <a:round/>
-                <a:headEnd type="none" w="med" len="med"/>
-                <a:tailEnd type="none" w="med" len="med"/>
-              </a:ln>
-              <a:effectLst/>
-            </p:spPr>
-            <p:txBody>
-              <a:bodyPr vert="horz" wrap="square" lIns="91440" tIns="45720" rIns="91440" bIns="45720" numCol="1" rtlCol="0" anchor="t" anchorCtr="0" compatLnSpc="1">
-                <a:prstTxWarp prst="textNoShape">
-                  <a:avLst/>
-                </a:prstTxWarp>
-              </a:bodyPr>
-              <a:lstStyle/>
-              <a:p>
-                <a:pPr algn="ctr" defTabSz="4389438" eaLnBrk="1" hangingPunct="1"/>
-                <a:r>
-                  <a:rPr lang="en-US" sz="3000" dirty="0"/>
-                  <a:t>You choose a higher or lower amount to share with your partner.</a:t>
-                </a:r>
-              </a:p>
-              <a:p>
-                <a:pPr marL="0" marR="0" indent="0" algn="l" defTabSz="4389438" rtl="0" eaLnBrk="1" fontAlgn="base" latinLnBrk="0" hangingPunct="1">
-                  <a:lnSpc>
-                    <a:spcPct val="100000"/>
-                  </a:lnSpc>
-                  <a:spcBef>
-                    <a:spcPct val="0"/>
-                  </a:spcBef>
-                  <a:spcAft>
-                    <a:spcPct val="0"/>
-                  </a:spcAft>
-                  <a:buClrTx/>
-                  <a:buSzTx/>
-                  <a:buFontTx/>
-                  <a:buNone/>
-                  <a:tabLst/>
-                </a:pPr>
-                <a:endParaRPr kumimoji="0" lang="en-US" sz="1800" b="0" i="0" u="none" strike="noStrike" cap="none" normalizeH="0" baseline="0" dirty="0">
-                  <a:ln>
-                    <a:noFill/>
-                  </a:ln>
-                  <a:solidFill>
-                    <a:schemeClr val="tx1"/>
-                  </a:solidFill>
-                  <a:effectLst/>
-                  <a:latin typeface="Arial" charset="0"/>
-                  <a:cs typeface="Arial" charset="0"/>
-                </a:endParaRPr>
-              </a:p>
-            </p:txBody>
-          </p:sp>
-          <p:cxnSp>
-            <p:nvCxnSpPr>
-              <p:cNvPr id="15442" name="Elbow Connector 15441">
-                <a:extLst>
-                  <a:ext uri="{FF2B5EF4-FFF2-40B4-BE49-F238E27FC236}">
-                    <a16:creationId xmlns:a16="http://schemas.microsoft.com/office/drawing/2014/main" id="{FD357802-D2BB-A2AC-2582-D36E431D92F1}"/>
-                  </a:ext>
-                </a:extLst>
-              </p:cNvPr>
-              <p:cNvCxnSpPr>
-                <a:cxnSpLocks/>
-              </p:cNvCxnSpPr>
-              <p:nvPr/>
-            </p:nvCxnSpPr>
-            <p:spPr bwMode="auto">
-              <a:xfrm flipV="1">
-                <a:off x="2361558" y="18532980"/>
-                <a:ext cx="953880" cy="801113"/>
-              </a:xfrm>
-              <a:prstGeom prst="bentConnector3">
-                <a:avLst>
-                  <a:gd name="adj1" fmla="val -3922"/>
-                </a:avLst>
-              </a:prstGeom>
-              <a:solidFill>
-                <a:schemeClr val="accent1"/>
-              </a:solidFill>
-              <a:ln w="50800" cap="flat" cmpd="sng" algn="ctr">
-                <a:solidFill>
-                  <a:schemeClr val="tx1"/>
-                </a:solidFill>
-                <a:prstDash val="solid"/>
-                <a:round/>
-                <a:headEnd type="none" w="med" len="med"/>
-                <a:tailEnd type="triangle"/>
-              </a:ln>
-              <a:effectLst/>
-            </p:spPr>
-          </p:cxnSp>
-        </p:grpSp>
-        <p:grpSp>
-          <p:nvGrpSpPr>
-            <p:cNvPr id="15538" name="Group 15537">
-              <a:extLst>
-                <a:ext uri="{FF2B5EF4-FFF2-40B4-BE49-F238E27FC236}">
-                  <a16:creationId xmlns:a16="http://schemas.microsoft.com/office/drawing/2014/main" id="{4ABA81B2-5B67-77D2-5517-08033E19241B}"/>
-                </a:ext>
-              </a:extLst>
-            </p:cNvPr>
-            <p:cNvGrpSpPr/>
-            <p:nvPr/>
-          </p:nvGrpSpPr>
-          <p:grpSpPr>
-            <a:xfrm>
-              <a:off x="1364527" y="16818784"/>
-              <a:ext cx="3578072" cy="1569660"/>
-              <a:chOff x="1398495" y="16644992"/>
-              <a:chExt cx="3578072" cy="1569660"/>
-            </a:xfrm>
-          </p:grpSpPr>
-          <p:sp>
-            <p:nvSpPr>
-              <p:cNvPr id="15528" name="Rounded Rectangle 15527">
-                <a:extLst>
-                  <a:ext uri="{FF2B5EF4-FFF2-40B4-BE49-F238E27FC236}">
-                    <a16:creationId xmlns:a16="http://schemas.microsoft.com/office/drawing/2014/main" id="{AD2DBFD4-1DD0-D27D-7CB0-35408A9E32E4}"/>
-                  </a:ext>
-                </a:extLst>
-              </p:cNvPr>
-              <p:cNvSpPr/>
-              <p:nvPr/>
-            </p:nvSpPr>
-            <p:spPr bwMode="auto">
-              <a:xfrm>
-                <a:off x="1398495" y="16644992"/>
-                <a:ext cx="1947439" cy="1569660"/>
-              </a:xfrm>
-              <a:prstGeom prst="roundRect">
-                <a:avLst/>
-              </a:prstGeom>
-              <a:solidFill>
-                <a:schemeClr val="accent1"/>
-              </a:solidFill>
-              <a:ln w="50800" cap="flat" cmpd="sng" algn="ctr">
-                <a:solidFill>
-                  <a:schemeClr val="tx1"/>
-                </a:solidFill>
-                <a:prstDash val="solid"/>
-                <a:round/>
-                <a:headEnd type="none" w="med" len="med"/>
-                <a:tailEnd type="none" w="med" len="med"/>
-              </a:ln>
-              <a:effectLst/>
-            </p:spPr>
-            <p:txBody>
-              <a:bodyPr vert="horz" wrap="square" lIns="91440" tIns="45720" rIns="91440" bIns="45720" numCol="1" rtlCol="0" anchor="t" anchorCtr="0" compatLnSpc="1">
-                <a:prstTxWarp prst="textNoShape">
-                  <a:avLst/>
-                </a:prstTxWarp>
-              </a:bodyPr>
-              <a:lstStyle/>
-              <a:p>
-                <a:pPr algn="ctr" defTabSz="4389438" eaLnBrk="1" hangingPunct="1"/>
-                <a:r>
-                  <a:rPr lang="en-US" sz="3000" dirty="0"/>
-                  <a:t>You are assigned a partner.</a:t>
-                </a:r>
-              </a:p>
-              <a:p>
-                <a:pPr marL="0" marR="0" indent="0" algn="l" defTabSz="4389438" rtl="0" eaLnBrk="1" fontAlgn="base" latinLnBrk="0" hangingPunct="1">
-                  <a:lnSpc>
-                    <a:spcPct val="100000"/>
-                  </a:lnSpc>
-                  <a:spcBef>
-                    <a:spcPct val="0"/>
-                  </a:spcBef>
-                  <a:spcAft>
-                    <a:spcPct val="0"/>
-                  </a:spcAft>
-                  <a:buClrTx/>
-                  <a:buSzTx/>
-                  <a:buFontTx/>
-                  <a:buNone/>
-                  <a:tabLst/>
-                </a:pPr>
-                <a:endParaRPr kumimoji="0" lang="en-US" sz="1800" b="0" i="0" u="none" strike="noStrike" cap="none" normalizeH="0" baseline="0" dirty="0">
-                  <a:ln>
-                    <a:noFill/>
-                  </a:ln>
-                  <a:solidFill>
-                    <a:schemeClr val="tx1"/>
-                  </a:solidFill>
-                  <a:effectLst/>
-                  <a:latin typeface="Arial" charset="0"/>
-                  <a:cs typeface="Arial" charset="0"/>
-                </a:endParaRPr>
-              </a:p>
-            </p:txBody>
-          </p:sp>
-          <p:cxnSp>
-            <p:nvCxnSpPr>
-              <p:cNvPr id="15537" name="Straight Arrow Connector 15536">
-                <a:extLst>
-                  <a:ext uri="{FF2B5EF4-FFF2-40B4-BE49-F238E27FC236}">
-                    <a16:creationId xmlns:a16="http://schemas.microsoft.com/office/drawing/2014/main" id="{7A1CFB10-A83A-AA5A-7CB9-EC39B260985E}"/>
-                  </a:ext>
-                </a:extLst>
-              </p:cNvPr>
-              <p:cNvCxnSpPr>
-                <a:cxnSpLocks/>
-                <a:stCxn id="15528" idx="3"/>
-              </p:cNvCxnSpPr>
-              <p:nvPr/>
-            </p:nvCxnSpPr>
-            <p:spPr bwMode="auto">
-              <a:xfrm>
-                <a:off x="3345934" y="17429822"/>
-                <a:ext cx="1630633" cy="0"/>
-              </a:xfrm>
-              <a:prstGeom prst="straightConnector1">
-                <a:avLst/>
-              </a:prstGeom>
-              <a:solidFill>
-                <a:schemeClr val="accent1"/>
-              </a:solidFill>
-              <a:ln w="50800" cap="flat" cmpd="sng" algn="ctr">
-                <a:solidFill>
-                  <a:schemeClr val="tx1"/>
-                </a:solidFill>
-                <a:prstDash val="solid"/>
-                <a:round/>
-                <a:headEnd type="none" w="med" len="med"/>
-                <a:tailEnd type="triangle"/>
-              </a:ln>
-              <a:effectLst/>
-            </p:spPr>
-          </p:cxnSp>
-        </p:grpSp>
-        <p:sp>
-          <p:nvSpPr>
-            <p:cNvPr id="15542" name="Rounded Rectangle 15541">
-              <a:extLst>
-                <a:ext uri="{FF2B5EF4-FFF2-40B4-BE49-F238E27FC236}">
-                  <a16:creationId xmlns:a16="http://schemas.microsoft.com/office/drawing/2014/main" id="{F919F17A-D127-CAD0-86F8-9896BB472FB5}"/>
+                  <a16:creationId xmlns:a16="http://schemas.microsoft.com/office/drawing/2014/main" id="{313395CF-F0BD-08A4-741C-0E58C7C64F02}"/>
                 </a:ext>
               </a:extLst>
             </p:cNvPr>
@@ -17225,19 +17364,17 @@
           </p:nvSpPr>
           <p:spPr bwMode="auto">
             <a:xfrm>
-              <a:off x="1019445" y="25077499"/>
-              <a:ext cx="2843041" cy="764088"/>
+              <a:off x="5210967" y="17385583"/>
+              <a:ext cx="1984189" cy="552682"/>
             </a:xfrm>
-            <a:prstGeom prst="roundRect">
+            <a:prstGeom prst="rect">
               <a:avLst/>
             </a:prstGeom>
             <a:solidFill>
-              <a:schemeClr val="accent1"/>
+              <a:srgbClr val="848484"/>
             </a:solidFill>
-            <a:ln w="50800" cap="flat" cmpd="sng" algn="ctr">
-              <a:solidFill>
-                <a:schemeClr val="tx1"/>
-              </a:solidFill>
+            <a:ln w="9525" cap="flat" cmpd="sng" algn="ctr">
+              <a:noFill/>
               <a:prstDash val="solid"/>
               <a:round/>
               <a:headEnd type="none" w="med" len="med"/>
@@ -17252,13 +17389,6 @@
               </a:prstTxWarp>
             </a:bodyPr>
             <a:lstStyle/>
-            <a:p>
-              <a:pPr algn="ctr" defTabSz="4389438" eaLnBrk="1" hangingPunct="1"/>
-              <a:r>
-                <a:rPr lang="en-US" sz="3500" dirty="0"/>
-                <a:t>End of trial</a:t>
-              </a:r>
-            </a:p>
             <a:p>
               <a:pPr marL="0" marR="0" indent="0" algn="l" defTabSz="4389438" rtl="0" eaLnBrk="1" fontAlgn="base" latinLnBrk="0" hangingPunct="1">
                 <a:lnSpc>
@@ -17276,370 +17406,24 @@
                 <a:buNone/>
                 <a:tabLst/>
               </a:pPr>
-              <a:endParaRPr kumimoji="0" lang="en-US" sz="1800" b="0" i="0" u="none" strike="noStrike" cap="none" normalizeH="0" baseline="0" dirty="0">
-                <a:ln>
-                  <a:noFill/>
-                </a:ln>
-                <a:solidFill>
-                  <a:schemeClr val="tx1"/>
-                </a:solidFill>
-                <a:effectLst/>
-                <a:latin typeface="Arial" charset="0"/>
-                <a:cs typeface="Arial" charset="0"/>
-              </a:endParaRPr>
-            </a:p>
-          </p:txBody>
-        </p:sp>
-        <p:sp>
-          <p:nvSpPr>
-            <p:cNvPr id="15667" name="Rounded Rectangle 15666">
-              <a:extLst>
-                <a:ext uri="{FF2B5EF4-FFF2-40B4-BE49-F238E27FC236}">
-                  <a16:creationId xmlns:a16="http://schemas.microsoft.com/office/drawing/2014/main" id="{A04AF92B-DBCA-68B5-49E1-F021F79663D4}"/>
-                </a:ext>
-              </a:extLst>
-            </p:cNvPr>
-            <p:cNvSpPr/>
-            <p:nvPr/>
-          </p:nvSpPr>
-          <p:spPr bwMode="auto">
-            <a:xfrm>
-              <a:off x="882727" y="23270530"/>
-              <a:ext cx="3102910" cy="655177"/>
-            </a:xfrm>
-            <a:prstGeom prst="roundRect">
-              <a:avLst/>
-            </a:prstGeom>
-            <a:solidFill>
-              <a:schemeClr val="accent1"/>
-            </a:solidFill>
-            <a:ln w="50800" cap="flat" cmpd="sng" algn="ctr">
-              <a:solidFill>
-                <a:schemeClr val="tx1"/>
-              </a:solidFill>
-              <a:prstDash val="solid"/>
-              <a:round/>
-              <a:headEnd type="none" w="med" len="med"/>
-              <a:tailEnd type="none" w="med" len="med"/>
-            </a:ln>
-            <a:effectLst/>
-          </p:spPr>
-          <p:txBody>
-            <a:bodyPr vert="horz" wrap="square" lIns="91440" tIns="45720" rIns="91440" bIns="45720" numCol="1" rtlCol="0" anchor="t" anchorCtr="0" compatLnSpc="1">
-              <a:prstTxWarp prst="textNoShape">
-                <a:avLst/>
-              </a:prstTxWarp>
-            </a:bodyPr>
-            <a:lstStyle/>
-            <a:p>
-              <a:pPr algn="ctr" defTabSz="4389438" eaLnBrk="1" hangingPunct="1"/>
               <a:r>
-                <a:rPr lang="en-US" sz="3000" dirty="0"/>
-                <a:t>Outcome Phase</a:t>
-              </a:r>
-            </a:p>
-            <a:p>
-              <a:pPr marL="0" marR="0" indent="0" algn="l" defTabSz="4389438" rtl="0" eaLnBrk="1" fontAlgn="base" latinLnBrk="0" hangingPunct="1">
-                <a:lnSpc>
-                  <a:spcPct val="100000"/>
-                </a:lnSpc>
-                <a:spcBef>
-                  <a:spcPct val="0"/>
-                </a:spcBef>
-                <a:spcAft>
-                  <a:spcPct val="0"/>
-                </a:spcAft>
-                <a:buClrTx/>
-                <a:buSzTx/>
-                <a:buFontTx/>
-                <a:buNone/>
-                <a:tabLst/>
-              </a:pPr>
-              <a:endParaRPr kumimoji="0" lang="en-US" sz="1800" b="0" i="0" u="none" strike="noStrike" cap="none" normalizeH="0" baseline="0" dirty="0">
-                <a:ln>
-                  <a:noFill/>
-                </a:ln>
-                <a:solidFill>
-                  <a:schemeClr val="tx1"/>
-                </a:solidFill>
-                <a:effectLst/>
-                <a:latin typeface="Arial" charset="0"/>
-                <a:cs typeface="Arial" charset="0"/>
-              </a:endParaRPr>
-            </a:p>
-          </p:txBody>
-        </p:sp>
-      </p:grpSp>
-      <p:sp>
-        <p:nvSpPr>
-          <p:cNvPr id="15668" name="Rectangle 15667">
-            <a:extLst>
-              <a:ext uri="{FF2B5EF4-FFF2-40B4-BE49-F238E27FC236}">
-                <a16:creationId xmlns:a16="http://schemas.microsoft.com/office/drawing/2014/main" id="{313395CF-F0BD-08A4-741C-0E58C7C64F02}"/>
-              </a:ext>
-            </a:extLst>
-          </p:cNvPr>
-          <p:cNvSpPr/>
-          <p:nvPr/>
-        </p:nvSpPr>
-        <p:spPr bwMode="auto">
-          <a:xfrm>
-            <a:off x="5250937" y="17041236"/>
-            <a:ext cx="1984189" cy="552682"/>
-          </a:xfrm>
-          <a:prstGeom prst="rect">
-            <a:avLst/>
-          </a:prstGeom>
-          <a:solidFill>
-            <a:srgbClr val="848484"/>
-          </a:solidFill>
-          <a:ln w="9525" cap="flat" cmpd="sng" algn="ctr">
-            <a:noFill/>
-            <a:prstDash val="solid"/>
-            <a:round/>
-            <a:headEnd type="none" w="med" len="med"/>
-            <a:tailEnd type="none" w="med" len="med"/>
-          </a:ln>
-          <a:effectLst/>
-        </p:spPr>
-        <p:txBody>
-          <a:bodyPr vert="horz" wrap="square" lIns="91440" tIns="45720" rIns="91440" bIns="45720" numCol="1" rtlCol="0" anchor="t" anchorCtr="0" compatLnSpc="1">
-            <a:prstTxWarp prst="textNoShape">
-              <a:avLst/>
-            </a:prstTxWarp>
-          </a:bodyPr>
-          <a:lstStyle/>
-          <a:p>
-            <a:pPr marL="0" marR="0" indent="0" algn="l" defTabSz="4389438" rtl="0" eaLnBrk="1" fontAlgn="base" latinLnBrk="0" hangingPunct="1">
-              <a:lnSpc>
-                <a:spcPct val="100000"/>
-              </a:lnSpc>
-              <a:spcBef>
-                <a:spcPct val="0"/>
-              </a:spcBef>
-              <a:spcAft>
-                <a:spcPct val="0"/>
-              </a:spcAft>
-              <a:buClrTx/>
-              <a:buSzTx/>
-              <a:buFontTx/>
-              <a:buNone/>
-              <a:tabLst/>
-            </a:pPr>
-            <a:r>
-              <a:rPr kumimoji="0" lang="en-US" sz="3000" b="0" i="0" u="none" strike="noStrike" cap="none" normalizeH="0" baseline="0" dirty="0">
-                <a:ln>
-                  <a:noFill/>
-                </a:ln>
-                <a:solidFill>
-                  <a:schemeClr val="bg1"/>
-                </a:solidFill>
-                <a:effectLst/>
-                <a:latin typeface="Arial" charset="0"/>
-                <a:cs typeface="Arial" charset="0"/>
-              </a:rPr>
-              <a:t>Computer</a:t>
-            </a:r>
-          </a:p>
-        </p:txBody>
-      </p:sp>
-      <p:grpSp>
-        <p:nvGrpSpPr>
-          <p:cNvPr id="15708" name="Group 15707">
-            <a:extLst>
-              <a:ext uri="{FF2B5EF4-FFF2-40B4-BE49-F238E27FC236}">
-                <a16:creationId xmlns:a16="http://schemas.microsoft.com/office/drawing/2014/main" id="{F3365FFA-9BF5-9EF3-928F-677A1E435CFE}"/>
-              </a:ext>
-            </a:extLst>
-          </p:cNvPr>
-          <p:cNvGrpSpPr/>
-          <p:nvPr/>
-        </p:nvGrpSpPr>
-        <p:grpSpPr>
-          <a:xfrm>
-            <a:off x="30903522" y="7424174"/>
-            <a:ext cx="4158601" cy="4608107"/>
-            <a:chOff x="30952728" y="4266720"/>
-            <a:chExt cx="6212381" cy="7672821"/>
-          </a:xfrm>
-        </p:grpSpPr>
-        <p:pic>
-          <p:nvPicPr>
-            <p:cNvPr id="15670" name="Picture 15669" descr="A brain with a red spot&#10;&#10;Description automatically generated">
-              <a:extLst>
-                <a:ext uri="{FF2B5EF4-FFF2-40B4-BE49-F238E27FC236}">
-                  <a16:creationId xmlns:a16="http://schemas.microsoft.com/office/drawing/2014/main" id="{BA2FE39D-46B1-0722-481F-CB4E6283E65E}"/>
-                </a:ext>
-              </a:extLst>
-            </p:cNvPr>
-            <p:cNvPicPr>
-              <a:picLocks noChangeAspect="1"/>
-            </p:cNvPicPr>
-            <p:nvPr/>
-          </p:nvPicPr>
-          <p:blipFill>
-            <a:blip r:embed="rId15">
-              <a:extLst>
-                <a:ext uri="{28A0092B-C50C-407E-A947-70E740481C1C}">
-                  <a14:useLocalDpi xmlns:a14="http://schemas.microsoft.com/office/drawing/2010/main" val="0"/>
-                </a:ext>
-              </a:extLst>
-            </a:blip>
-            <a:stretch>
-              <a:fillRect/>
-            </a:stretch>
-          </p:blipFill>
-          <p:spPr>
-            <a:xfrm>
-              <a:off x="31172216" y="5328136"/>
-              <a:ext cx="5683649" cy="4771937"/>
-            </a:xfrm>
-            <a:prstGeom prst="rect">
-              <a:avLst/>
-            </a:prstGeom>
-          </p:spPr>
-        </p:pic>
-        <p:sp>
-          <p:nvSpPr>
-            <p:cNvPr id="15674" name="TextBox 15673">
-              <a:extLst>
-                <a:ext uri="{FF2B5EF4-FFF2-40B4-BE49-F238E27FC236}">
-                  <a16:creationId xmlns:a16="http://schemas.microsoft.com/office/drawing/2014/main" id="{6D1FEF78-5231-7339-DB44-5A31EBAD6F9E}"/>
-                </a:ext>
-              </a:extLst>
-            </p:cNvPr>
-            <p:cNvSpPr txBox="1"/>
-            <p:nvPr/>
-          </p:nvSpPr>
-          <p:spPr>
-            <a:xfrm>
-              <a:off x="30952728" y="4266720"/>
-              <a:ext cx="1539203" cy="707886"/>
-            </a:xfrm>
-            <a:prstGeom prst="rect">
-              <a:avLst/>
-            </a:prstGeom>
-            <a:noFill/>
-          </p:spPr>
-          <p:txBody>
-            <a:bodyPr wrap="none" rtlCol="0">
-              <a:spAutoFit/>
-            </a:bodyPr>
-            <a:lstStyle/>
-            <a:p>
-              <a:r>
-                <a:rPr lang="en-US" sz="4000" dirty="0"/>
-                <a:t>X= 52</a:t>
-              </a:r>
-            </a:p>
-          </p:txBody>
-        </p:sp>
-        <p:sp>
-          <p:nvSpPr>
-            <p:cNvPr id="15680" name="TextBox 15679">
-              <a:extLst>
-                <a:ext uri="{FF2B5EF4-FFF2-40B4-BE49-F238E27FC236}">
-                  <a16:creationId xmlns:a16="http://schemas.microsoft.com/office/drawing/2014/main" id="{0FE2F447-254E-923E-162C-DC99AACAFC55}"/>
-                </a:ext>
-              </a:extLst>
-            </p:cNvPr>
-            <p:cNvSpPr txBox="1"/>
-            <p:nvPr/>
-          </p:nvSpPr>
-          <p:spPr>
-            <a:xfrm>
-              <a:off x="31154497" y="10453379"/>
-              <a:ext cx="6010612" cy="1486162"/>
-            </a:xfrm>
-            <a:prstGeom prst="rect">
-              <a:avLst/>
-            </a:prstGeom>
-            <a:noFill/>
-          </p:spPr>
-          <p:txBody>
-            <a:bodyPr wrap="square">
-              <a:spAutoFit/>
-            </a:bodyPr>
-            <a:lstStyle/>
-            <a:p>
-              <a:r>
-                <a:rPr lang="en-US" sz="2000" dirty="0">
-                  <a:latin typeface="Helvetica"/>
+                <a:rPr kumimoji="0" lang="en-US" sz="3000" b="0" i="0" u="none" strike="noStrike" cap="none" normalizeH="0" baseline="0" dirty="0">
+                  <a:ln>
+                    <a:noFill/>
+                  </a:ln>
+                  <a:solidFill>
+                    <a:schemeClr val="bg1"/>
+                  </a:solidFill>
+                  <a:effectLst/>
+                  <a:latin typeface="Arial" charset="0"/>
+                  <a:cs typeface="Arial" charset="0"/>
                 </a:rPr>
-                <a:t>Dorsolateral Prefrontal Cortex</a:t>
-              </a:r>
-            </a:p>
-            <a:p>
-              <a:r>
-                <a:rPr lang="en-US" sz="3200" b="1" dirty="0">
-                  <a:latin typeface="Helvetica"/>
-                </a:rPr>
-                <a:t>(</a:t>
-              </a:r>
-              <a:r>
-                <a:rPr lang="en-US" sz="3200" b="1" dirty="0" err="1">
-                  <a:latin typeface="Helvetica"/>
-                </a:rPr>
-                <a:t>dlPFC</a:t>
-              </a:r>
-              <a:r>
-                <a:rPr lang="en-US" sz="3200" b="1" dirty="0">
-                  <a:latin typeface="Helvetica"/>
-                </a:rPr>
-                <a:t>)</a:t>
+                <a:t>Computer</a:t>
               </a:r>
             </a:p>
           </p:txBody>
         </p:sp>
       </p:grpSp>
-      <p:sp>
-        <p:nvSpPr>
-          <p:cNvPr id="15707" name="TextBox 15706">
-            <a:extLst>
-              <a:ext uri="{FF2B5EF4-FFF2-40B4-BE49-F238E27FC236}">
-                <a16:creationId xmlns:a16="http://schemas.microsoft.com/office/drawing/2014/main" id="{0830B512-1237-C170-3104-978D2CC18E8D}"/>
-              </a:ext>
-            </a:extLst>
-          </p:cNvPr>
-          <p:cNvSpPr txBox="1"/>
-          <p:nvPr/>
-        </p:nvSpPr>
-        <p:spPr>
-          <a:xfrm>
-            <a:off x="31126040" y="5975181"/>
-            <a:ext cx="4272148" cy="1077218"/>
-          </a:xfrm>
-          <a:prstGeom prst="rect">
-            <a:avLst/>
-          </a:prstGeom>
-          <a:noFill/>
-        </p:spPr>
-        <p:txBody>
-          <a:bodyPr wrap="square" rtlCol="0">
-            <a:spAutoFit/>
-          </a:bodyPr>
-          <a:lstStyle/>
-          <a:p>
-            <a:r>
-              <a:rPr lang="en-US" sz="3200" b="0" i="0" dirty="0">
-                <a:effectLst/>
-                <a:latin typeface="Helvetica" pitchFamily="2" charset="0"/>
-              </a:rPr>
-              <a:t>Friend Defecting &gt;</a:t>
-            </a:r>
-            <a:r>
-              <a:rPr lang="en-US" sz="3200" dirty="0">
-                <a:latin typeface="Helvetica" pitchFamily="2" charset="0"/>
-              </a:rPr>
-              <a:t> Computer Defecting</a:t>
-            </a:r>
-            <a:endParaRPr lang="en-US" sz="3200" i="0" dirty="0">
-              <a:effectLst/>
-              <a:latin typeface="Helvetica" pitchFamily="2" charset="0"/>
-            </a:endParaRPr>
-          </a:p>
-        </p:txBody>
-      </p:sp>
       <p:grpSp>
         <p:nvGrpSpPr>
           <p:cNvPr id="15637" name="Group 15636">
@@ -17654,10 +17438,10 @@
         </p:nvGrpSpPr>
         <p:grpSpPr>
           <a:xfrm>
-            <a:off x="22279873" y="23179900"/>
-            <a:ext cx="7100482" cy="6722925"/>
-            <a:chOff x="23651698" y="15981033"/>
-            <a:chExt cx="5439385" cy="4978568"/>
+            <a:off x="22103183" y="23179902"/>
+            <a:ext cx="7277183" cy="6638191"/>
+            <a:chOff x="23516336" y="15981033"/>
+            <a:chExt cx="5574747" cy="4915819"/>
           </a:xfrm>
         </p:grpSpPr>
         <p:grpSp>
@@ -17674,10 +17458,10 @@
           </p:nvGrpSpPr>
           <p:grpSpPr>
             <a:xfrm>
-              <a:off x="23697980" y="17116394"/>
-              <a:ext cx="3687265" cy="3843207"/>
-              <a:chOff x="23697980" y="17116394"/>
-              <a:chExt cx="3687265" cy="3843207"/>
+              <a:off x="23516336" y="16721772"/>
+              <a:ext cx="3469498" cy="4175080"/>
+              <a:chOff x="23516336" y="16721772"/>
+              <a:chExt cx="3469498" cy="4175080"/>
             </a:xfrm>
           </p:grpSpPr>
           <p:sp>
@@ -17694,8 +17478,8 @@
             </p:nvSpPr>
             <p:spPr>
               <a:xfrm>
-                <a:off x="26427414" y="20342994"/>
-                <a:ext cx="957831" cy="616607"/>
+                <a:off x="26321244" y="20486597"/>
+                <a:ext cx="664590" cy="410255"/>
               </a:xfrm>
               <a:prstGeom prst="rect">
                 <a:avLst/>
@@ -17709,7 +17493,7 @@
               <a:lstStyle/>
               <a:p>
                 <a:r>
-                  <a:rPr lang="en-US" sz="4000" dirty="0"/>
+                  <a:rPr lang="en-US" sz="3000" dirty="0"/>
                   <a:t>Age</a:t>
                 </a:r>
               </a:p>
@@ -17729,8 +17513,8 @@
             </p:nvSpPr>
             <p:spPr>
               <a:xfrm rot="16200000">
-                <a:off x="22492430" y="18321944"/>
-                <a:ext cx="2835495" cy="424395"/>
+                <a:off x="22259180" y="17978928"/>
+                <a:ext cx="2938707" cy="424395"/>
               </a:xfrm>
               <a:prstGeom prst="rect">
                 <a:avLst/>
@@ -17894,10 +17678,10 @@
       </p:grpSp>
       <p:grpSp>
         <p:nvGrpSpPr>
-          <p:cNvPr id="4" name="Group 3">
+          <p:cNvPr id="38" name="Group 37">
             <a:extLst>
               <a:ext uri="{FF2B5EF4-FFF2-40B4-BE49-F238E27FC236}">
-                <a16:creationId xmlns:a16="http://schemas.microsoft.com/office/drawing/2014/main" id="{1655AFED-3947-A740-B235-4AE33711962C}"/>
+                <a16:creationId xmlns:a16="http://schemas.microsoft.com/office/drawing/2014/main" id="{7D2FE0E2-6053-4146-B370-FB37B649225A}"/>
               </a:ext>
             </a:extLst>
           </p:cNvPr>
@@ -17906,18 +17690,150 @@
         </p:nvGrpSpPr>
         <p:grpSpPr>
           <a:xfrm>
-            <a:off x="35398172" y="5929252"/>
-            <a:ext cx="7128218" cy="6349248"/>
-            <a:chOff x="37564868" y="7069792"/>
-            <a:chExt cx="5452955" cy="5157377"/>
+            <a:off x="31053369" y="6779852"/>
+            <a:ext cx="11558081" cy="6349248"/>
+            <a:chOff x="30968309" y="6482142"/>
+            <a:chExt cx="11558081" cy="6349248"/>
           </a:xfrm>
         </p:grpSpPr>
+        <p:grpSp>
+          <p:nvGrpSpPr>
+            <p:cNvPr id="15708" name="Group 15707">
+              <a:extLst>
+                <a:ext uri="{FF2B5EF4-FFF2-40B4-BE49-F238E27FC236}">
+                  <a16:creationId xmlns:a16="http://schemas.microsoft.com/office/drawing/2014/main" id="{F3365FFA-9BF5-9EF3-928F-677A1E435CFE}"/>
+                </a:ext>
+              </a:extLst>
+            </p:cNvPr>
+            <p:cNvGrpSpPr/>
+            <p:nvPr/>
+          </p:nvGrpSpPr>
+          <p:grpSpPr>
+            <a:xfrm>
+              <a:off x="30968309" y="8084700"/>
+              <a:ext cx="4158601" cy="4300330"/>
+              <a:chOff x="30952728" y="4266720"/>
+              <a:chExt cx="6212381" cy="7160350"/>
+            </a:xfrm>
+          </p:grpSpPr>
+          <p:pic>
+            <p:nvPicPr>
+              <p:cNvPr id="15670" name="Picture 15669" descr="A brain with a red spot&#10;&#10;Description automatically generated">
+                <a:extLst>
+                  <a:ext uri="{FF2B5EF4-FFF2-40B4-BE49-F238E27FC236}">
+                    <a16:creationId xmlns:a16="http://schemas.microsoft.com/office/drawing/2014/main" id="{BA2FE39D-46B1-0722-481F-CB4E6283E65E}"/>
+                  </a:ext>
+                </a:extLst>
+              </p:cNvPr>
+              <p:cNvPicPr>
+                <a:picLocks noChangeAspect="1"/>
+              </p:cNvPicPr>
+              <p:nvPr/>
+            </p:nvPicPr>
+            <p:blipFill>
+              <a:blip r:embed="rId15">
+                <a:extLst>
+                  <a:ext uri="{28A0092B-C50C-407E-A947-70E740481C1C}">
+                    <a14:useLocalDpi xmlns:a14="http://schemas.microsoft.com/office/drawing/2010/main" val="0"/>
+                  </a:ext>
+                </a:extLst>
+              </a:blip>
+              <a:stretch>
+                <a:fillRect/>
+              </a:stretch>
+            </p:blipFill>
+            <p:spPr>
+              <a:xfrm>
+                <a:off x="31172216" y="5328136"/>
+                <a:ext cx="5683649" cy="4771937"/>
+              </a:xfrm>
+              <a:prstGeom prst="rect">
+                <a:avLst/>
+              </a:prstGeom>
+            </p:spPr>
+          </p:pic>
+          <p:sp>
+            <p:nvSpPr>
+              <p:cNvPr id="15674" name="TextBox 15673">
+                <a:extLst>
+                  <a:ext uri="{FF2B5EF4-FFF2-40B4-BE49-F238E27FC236}">
+                    <a16:creationId xmlns:a16="http://schemas.microsoft.com/office/drawing/2014/main" id="{6D1FEF78-5231-7339-DB44-5A31EBAD6F9E}"/>
+                  </a:ext>
+                </a:extLst>
+              </p:cNvPr>
+              <p:cNvSpPr txBox="1"/>
+              <p:nvPr/>
+            </p:nvSpPr>
+            <p:spPr>
+              <a:xfrm>
+                <a:off x="30952728" y="4266720"/>
+                <a:ext cx="1539203" cy="707886"/>
+              </a:xfrm>
+              <a:prstGeom prst="rect">
+                <a:avLst/>
+              </a:prstGeom>
+              <a:noFill/>
+            </p:spPr>
+            <p:txBody>
+              <a:bodyPr wrap="none" rtlCol="0">
+                <a:spAutoFit/>
+              </a:bodyPr>
+              <a:lstStyle/>
+              <a:p>
+                <a:r>
+                  <a:rPr lang="en-US" sz="4000" dirty="0"/>
+                  <a:t>X= 52</a:t>
+                </a:r>
+              </a:p>
+            </p:txBody>
+          </p:sp>
+          <p:sp>
+            <p:nvSpPr>
+              <p:cNvPr id="15680" name="TextBox 15679">
+                <a:extLst>
+                  <a:ext uri="{FF2B5EF4-FFF2-40B4-BE49-F238E27FC236}">
+                    <a16:creationId xmlns:a16="http://schemas.microsoft.com/office/drawing/2014/main" id="{0FE2F447-254E-923E-162C-DC99AACAFC55}"/>
+                  </a:ext>
+                </a:extLst>
+              </p:cNvPr>
+              <p:cNvSpPr txBox="1"/>
+              <p:nvPr/>
+            </p:nvSpPr>
+            <p:spPr>
+              <a:xfrm>
+                <a:off x="31154497" y="10453379"/>
+                <a:ext cx="6010612" cy="973691"/>
+              </a:xfrm>
+              <a:prstGeom prst="rect">
+                <a:avLst/>
+              </a:prstGeom>
+              <a:noFill/>
+            </p:spPr>
+            <p:txBody>
+              <a:bodyPr wrap="square">
+                <a:spAutoFit/>
+              </a:bodyPr>
+              <a:lstStyle/>
+              <a:p>
+                <a:r>
+                  <a:rPr lang="en-US" sz="3200" b="1" dirty="0" err="1">
+                    <a:latin typeface="Helvetica"/>
+                  </a:rPr>
+                  <a:t>dlPFC</a:t>
+                </a:r>
+                <a:endParaRPr lang="en-US" sz="3200" b="1" dirty="0">
+                  <a:latin typeface="Helvetica"/>
+                </a:endParaRPr>
+              </a:p>
+            </p:txBody>
+          </p:sp>
+        </p:grpSp>
         <p:sp>
           <p:nvSpPr>
-            <p:cNvPr id="15711" name="TextBox 15710">
+            <p:cNvPr id="15707" name="TextBox 15706">
               <a:extLst>
                 <a:ext uri="{FF2B5EF4-FFF2-40B4-BE49-F238E27FC236}">
-                  <a16:creationId xmlns:a16="http://schemas.microsoft.com/office/drawing/2014/main" id="{3F0968C1-C452-1885-6B38-F154CD473A3F}"/>
+                  <a16:creationId xmlns:a16="http://schemas.microsoft.com/office/drawing/2014/main" id="{0830B512-1237-C170-3104-978D2CC18E8D}"/>
                 </a:ext>
               </a:extLst>
             </p:cNvPr>
@@ -17926,8 +17842,8 @@
           </p:nvSpPr>
           <p:spPr>
             <a:xfrm>
-              <a:off x="37622248" y="7069792"/>
-              <a:ext cx="601117" cy="425002"/>
+              <a:off x="31126040" y="6528071"/>
+              <a:ext cx="4272148" cy="1077218"/>
             </a:xfrm>
             <a:prstGeom prst="rect">
               <a:avLst/>
@@ -17935,194 +17851,263 @@
             <a:noFill/>
           </p:spPr>
           <p:txBody>
-            <a:bodyPr wrap="none" rtlCol="0">
+            <a:bodyPr wrap="square" rtlCol="0">
               <a:spAutoFit/>
             </a:bodyPr>
             <a:lstStyle/>
             <a:p>
               <a:r>
-                <a:rPr lang="en-US" sz="2800" dirty="0"/>
-                <a:t>200</a:t>
+                <a:rPr lang="en-US" sz="3200" b="0" i="0" dirty="0">
+                  <a:effectLst/>
+                  <a:latin typeface="Helvetica" pitchFamily="2" charset="0"/>
+                </a:rPr>
+                <a:t>Friend Defecting &gt;</a:t>
               </a:r>
+              <a:r>
+                <a:rPr lang="en-US" sz="3200" dirty="0">
+                  <a:latin typeface="Helvetica" pitchFamily="2" charset="0"/>
+                </a:rPr>
+                <a:t> Computer Defecting</a:t>
+              </a:r>
+              <a:endParaRPr lang="en-US" sz="3200" i="0" dirty="0">
+                <a:effectLst/>
+                <a:latin typeface="Helvetica" pitchFamily="2" charset="0"/>
+              </a:endParaRPr>
             </a:p>
           </p:txBody>
         </p:sp>
-        <p:sp>
-          <p:nvSpPr>
-            <p:cNvPr id="15713" name="TextBox 15712">
+        <p:grpSp>
+          <p:nvGrpSpPr>
+            <p:cNvPr id="4" name="Group 3">
               <a:extLst>
                 <a:ext uri="{FF2B5EF4-FFF2-40B4-BE49-F238E27FC236}">
-                  <a16:creationId xmlns:a16="http://schemas.microsoft.com/office/drawing/2014/main" id="{0538FBF6-7909-445F-ACD2-9599FE92C967}"/>
+                  <a16:creationId xmlns:a16="http://schemas.microsoft.com/office/drawing/2014/main" id="{1655AFED-3947-A740-B235-4AE33711962C}"/>
                 </a:ext>
               </a:extLst>
             </p:cNvPr>
-            <p:cNvSpPr txBox="1"/>
+            <p:cNvGrpSpPr/>
             <p:nvPr/>
-          </p:nvSpPr>
-          <p:spPr>
+          </p:nvGrpSpPr>
+          <p:grpSpPr>
             <a:xfrm>
-              <a:off x="37564868" y="11337187"/>
-              <a:ext cx="693086" cy="425002"/>
+              <a:off x="35398172" y="6482142"/>
+              <a:ext cx="7128218" cy="6349248"/>
+              <a:chOff x="37564868" y="7069792"/>
+              <a:chExt cx="5452955" cy="5157377"/>
             </a:xfrm>
-            <a:prstGeom prst="rect">
-              <a:avLst/>
-            </a:prstGeom>
-            <a:noFill/>
-          </p:spPr>
-          <p:txBody>
-            <a:bodyPr wrap="none" rtlCol="0">
-              <a:spAutoFit/>
-            </a:bodyPr>
-            <a:lstStyle/>
-            <a:p>
-              <a:r>
-                <a:rPr lang="en-US" sz="2800" dirty="0"/>
-                <a:t>-300</a:t>
-              </a:r>
-            </a:p>
-          </p:txBody>
-        </p:sp>
-        <p:sp>
-          <p:nvSpPr>
-            <p:cNvPr id="15716" name="TextBox 15715">
-              <a:extLst>
-                <a:ext uri="{FF2B5EF4-FFF2-40B4-BE49-F238E27FC236}">
-                  <a16:creationId xmlns:a16="http://schemas.microsoft.com/office/drawing/2014/main" id="{A7B791E9-2592-EA60-AB27-F2DBE3421768}"/>
-                </a:ext>
-              </a:extLst>
-            </p:cNvPr>
-            <p:cNvSpPr txBox="1"/>
-            <p:nvPr/>
-          </p:nvSpPr>
-          <p:spPr>
-            <a:xfrm>
-              <a:off x="38211199" y="11728946"/>
-              <a:ext cx="447833" cy="425002"/>
-            </a:xfrm>
-            <a:prstGeom prst="rect">
-              <a:avLst/>
-            </a:prstGeom>
-            <a:noFill/>
-          </p:spPr>
-          <p:txBody>
-            <a:bodyPr wrap="none" rtlCol="0">
-              <a:spAutoFit/>
-            </a:bodyPr>
-            <a:lstStyle/>
-            <a:p>
-              <a:r>
-                <a:rPr lang="en-US" sz="2800" dirty="0"/>
-                <a:t>20</a:t>
-              </a:r>
-            </a:p>
-          </p:txBody>
-        </p:sp>
-        <p:sp>
-          <p:nvSpPr>
-            <p:cNvPr id="15717" name="TextBox 15716">
-              <a:extLst>
-                <a:ext uri="{FF2B5EF4-FFF2-40B4-BE49-F238E27FC236}">
-                  <a16:creationId xmlns:a16="http://schemas.microsoft.com/office/drawing/2014/main" id="{4288430D-B235-E5D2-0E3C-C928486D0544}"/>
-                </a:ext>
-              </a:extLst>
-            </p:cNvPr>
-            <p:cNvSpPr txBox="1"/>
-            <p:nvPr/>
-          </p:nvSpPr>
-          <p:spPr>
-            <a:xfrm>
-              <a:off x="42569990" y="11706123"/>
-              <a:ext cx="447833" cy="425002"/>
-            </a:xfrm>
-            <a:prstGeom prst="rect">
-              <a:avLst/>
-            </a:prstGeom>
-            <a:noFill/>
-          </p:spPr>
-          <p:txBody>
-            <a:bodyPr wrap="none" rtlCol="0">
-              <a:spAutoFit/>
-            </a:bodyPr>
-            <a:lstStyle/>
-            <a:p>
-              <a:r>
-                <a:rPr lang="en-US" sz="2800" dirty="0"/>
-                <a:t>70</a:t>
-              </a:r>
-            </a:p>
-          </p:txBody>
-        </p:sp>
-        <p:sp>
-          <p:nvSpPr>
-            <p:cNvPr id="15718" name="TextBox 15717">
-              <a:extLst>
-                <a:ext uri="{FF2B5EF4-FFF2-40B4-BE49-F238E27FC236}">
-                  <a16:creationId xmlns:a16="http://schemas.microsoft.com/office/drawing/2014/main" id="{C5EDCAEC-F972-A2CD-DE27-9E216B9AC130}"/>
-                </a:ext>
-              </a:extLst>
-            </p:cNvPr>
-            <p:cNvSpPr txBox="1"/>
-            <p:nvPr/>
-          </p:nvSpPr>
-          <p:spPr>
-            <a:xfrm>
-              <a:off x="39886352" y="11652166"/>
-              <a:ext cx="141316" cy="575003"/>
-            </a:xfrm>
-            <a:prstGeom prst="rect">
-              <a:avLst/>
-            </a:prstGeom>
-            <a:noFill/>
-          </p:spPr>
-          <p:txBody>
-            <a:bodyPr wrap="none" rtlCol="0">
-              <a:spAutoFit/>
-            </a:bodyPr>
-            <a:lstStyle/>
-            <a:p>
-              <a:endParaRPr lang="en-US" sz="4000" dirty="0"/>
-            </a:p>
-          </p:txBody>
-        </p:sp>
-        <p:sp>
-          <p:nvSpPr>
-            <p:cNvPr id="15715" name="TextBox 15714">
-              <a:extLst>
-                <a:ext uri="{FF2B5EF4-FFF2-40B4-BE49-F238E27FC236}">
-                  <a16:creationId xmlns:a16="http://schemas.microsoft.com/office/drawing/2014/main" id="{6A186BD7-7E16-8AE4-2E56-FAD05BEC16F6}"/>
-                </a:ext>
-              </a:extLst>
-            </p:cNvPr>
-            <p:cNvSpPr txBox="1"/>
-            <p:nvPr/>
-          </p:nvSpPr>
-          <p:spPr>
-            <a:xfrm rot="16200000">
-              <a:off x="36657648" y="8884400"/>
-              <a:ext cx="2422148" cy="423798"/>
-            </a:xfrm>
-            <a:prstGeom prst="rect">
-              <a:avLst/>
-            </a:prstGeom>
-            <a:noFill/>
-          </p:spPr>
-          <p:txBody>
-            <a:bodyPr wrap="none" rtlCol="0">
-              <a:spAutoFit/>
-            </a:bodyPr>
-            <a:lstStyle/>
-            <a:p>
-              <a:r>
-                <a:rPr lang="en-US" sz="3000" dirty="0" err="1"/>
-                <a:t>dlPFC</a:t>
-              </a:r>
-              <a:r>
-                <a:rPr lang="en-US" sz="3000" dirty="0"/>
-                <a:t> activation</a:t>
-              </a:r>
-            </a:p>
-          </p:txBody>
-        </p:sp>
+          </p:grpSpPr>
+          <p:sp>
+            <p:nvSpPr>
+              <p:cNvPr id="15711" name="TextBox 15710">
+                <a:extLst>
+                  <a:ext uri="{FF2B5EF4-FFF2-40B4-BE49-F238E27FC236}">
+                    <a16:creationId xmlns:a16="http://schemas.microsoft.com/office/drawing/2014/main" id="{3F0968C1-C452-1885-6B38-F154CD473A3F}"/>
+                  </a:ext>
+                </a:extLst>
+              </p:cNvPr>
+              <p:cNvSpPr txBox="1"/>
+              <p:nvPr/>
+            </p:nvSpPr>
+            <p:spPr>
+              <a:xfrm>
+                <a:off x="37622248" y="7069792"/>
+                <a:ext cx="601117" cy="425002"/>
+              </a:xfrm>
+              <a:prstGeom prst="rect">
+                <a:avLst/>
+              </a:prstGeom>
+              <a:noFill/>
+            </p:spPr>
+            <p:txBody>
+              <a:bodyPr wrap="none" rtlCol="0">
+                <a:spAutoFit/>
+              </a:bodyPr>
+              <a:lstStyle/>
+              <a:p>
+                <a:r>
+                  <a:rPr lang="en-US" sz="2800" dirty="0"/>
+                  <a:t>200</a:t>
+                </a:r>
+              </a:p>
+            </p:txBody>
+          </p:sp>
+          <p:sp>
+            <p:nvSpPr>
+              <p:cNvPr id="15713" name="TextBox 15712">
+                <a:extLst>
+                  <a:ext uri="{FF2B5EF4-FFF2-40B4-BE49-F238E27FC236}">
+                    <a16:creationId xmlns:a16="http://schemas.microsoft.com/office/drawing/2014/main" id="{0538FBF6-7909-445F-ACD2-9599FE92C967}"/>
+                  </a:ext>
+                </a:extLst>
+              </p:cNvPr>
+              <p:cNvSpPr txBox="1"/>
+              <p:nvPr/>
+            </p:nvSpPr>
+            <p:spPr>
+              <a:xfrm>
+                <a:off x="37564868" y="11337187"/>
+                <a:ext cx="693086" cy="425002"/>
+              </a:xfrm>
+              <a:prstGeom prst="rect">
+                <a:avLst/>
+              </a:prstGeom>
+              <a:noFill/>
+            </p:spPr>
+            <p:txBody>
+              <a:bodyPr wrap="none" rtlCol="0">
+                <a:spAutoFit/>
+              </a:bodyPr>
+              <a:lstStyle/>
+              <a:p>
+                <a:r>
+                  <a:rPr lang="en-US" sz="2800" dirty="0"/>
+                  <a:t>-300</a:t>
+                </a:r>
+              </a:p>
+            </p:txBody>
+          </p:sp>
+          <p:sp>
+            <p:nvSpPr>
+              <p:cNvPr id="15716" name="TextBox 15715">
+                <a:extLst>
+                  <a:ext uri="{FF2B5EF4-FFF2-40B4-BE49-F238E27FC236}">
+                    <a16:creationId xmlns:a16="http://schemas.microsoft.com/office/drawing/2014/main" id="{A7B791E9-2592-EA60-AB27-F2DBE3421768}"/>
+                  </a:ext>
+                </a:extLst>
+              </p:cNvPr>
+              <p:cNvSpPr txBox="1"/>
+              <p:nvPr/>
+            </p:nvSpPr>
+            <p:spPr>
+              <a:xfrm>
+                <a:off x="38211199" y="11728946"/>
+                <a:ext cx="447833" cy="425002"/>
+              </a:xfrm>
+              <a:prstGeom prst="rect">
+                <a:avLst/>
+              </a:prstGeom>
+              <a:noFill/>
+            </p:spPr>
+            <p:txBody>
+              <a:bodyPr wrap="none" rtlCol="0">
+                <a:spAutoFit/>
+              </a:bodyPr>
+              <a:lstStyle/>
+              <a:p>
+                <a:r>
+                  <a:rPr lang="en-US" sz="2800" dirty="0"/>
+                  <a:t>20</a:t>
+                </a:r>
+              </a:p>
+            </p:txBody>
+          </p:sp>
+          <p:sp>
+            <p:nvSpPr>
+              <p:cNvPr id="15717" name="TextBox 15716">
+                <a:extLst>
+                  <a:ext uri="{FF2B5EF4-FFF2-40B4-BE49-F238E27FC236}">
+                    <a16:creationId xmlns:a16="http://schemas.microsoft.com/office/drawing/2014/main" id="{4288430D-B235-E5D2-0E3C-C928486D0544}"/>
+                  </a:ext>
+                </a:extLst>
+              </p:cNvPr>
+              <p:cNvSpPr txBox="1"/>
+              <p:nvPr/>
+            </p:nvSpPr>
+            <p:spPr>
+              <a:xfrm>
+                <a:off x="42569990" y="11706123"/>
+                <a:ext cx="447833" cy="425002"/>
+              </a:xfrm>
+              <a:prstGeom prst="rect">
+                <a:avLst/>
+              </a:prstGeom>
+              <a:noFill/>
+            </p:spPr>
+            <p:txBody>
+              <a:bodyPr wrap="none" rtlCol="0">
+                <a:spAutoFit/>
+              </a:bodyPr>
+              <a:lstStyle/>
+              <a:p>
+                <a:r>
+                  <a:rPr lang="en-US" sz="2800" dirty="0"/>
+                  <a:t>70</a:t>
+                </a:r>
+              </a:p>
+            </p:txBody>
+          </p:sp>
+          <p:sp>
+            <p:nvSpPr>
+              <p:cNvPr id="15718" name="TextBox 15717">
+                <a:extLst>
+                  <a:ext uri="{FF2B5EF4-FFF2-40B4-BE49-F238E27FC236}">
+                    <a16:creationId xmlns:a16="http://schemas.microsoft.com/office/drawing/2014/main" id="{C5EDCAEC-F972-A2CD-DE27-9E216B9AC130}"/>
+                  </a:ext>
+                </a:extLst>
+              </p:cNvPr>
+              <p:cNvSpPr txBox="1"/>
+              <p:nvPr/>
+            </p:nvSpPr>
+            <p:spPr>
+              <a:xfrm>
+                <a:off x="39886352" y="11652166"/>
+                <a:ext cx="141316" cy="575003"/>
+              </a:xfrm>
+              <a:prstGeom prst="rect">
+                <a:avLst/>
+              </a:prstGeom>
+              <a:noFill/>
+            </p:spPr>
+            <p:txBody>
+              <a:bodyPr wrap="none" rtlCol="0">
+                <a:spAutoFit/>
+              </a:bodyPr>
+              <a:lstStyle/>
+              <a:p>
+                <a:endParaRPr lang="en-US" sz="4000" dirty="0"/>
+              </a:p>
+            </p:txBody>
+          </p:sp>
+          <p:sp>
+            <p:nvSpPr>
+              <p:cNvPr id="15715" name="TextBox 15714">
+                <a:extLst>
+                  <a:ext uri="{FF2B5EF4-FFF2-40B4-BE49-F238E27FC236}">
+                    <a16:creationId xmlns:a16="http://schemas.microsoft.com/office/drawing/2014/main" id="{6A186BD7-7E16-8AE4-2E56-FAD05BEC16F6}"/>
+                  </a:ext>
+                </a:extLst>
+              </p:cNvPr>
+              <p:cNvSpPr txBox="1"/>
+              <p:nvPr/>
+            </p:nvSpPr>
+            <p:spPr>
+              <a:xfrm rot="16200000">
+                <a:off x="36657648" y="8884400"/>
+                <a:ext cx="2422148" cy="423798"/>
+              </a:xfrm>
+              <a:prstGeom prst="rect">
+                <a:avLst/>
+              </a:prstGeom>
+              <a:noFill/>
+            </p:spPr>
+            <p:txBody>
+              <a:bodyPr wrap="none" rtlCol="0">
+                <a:spAutoFit/>
+              </a:bodyPr>
+              <a:lstStyle/>
+              <a:p>
+                <a:r>
+                  <a:rPr lang="en-US" sz="3000" dirty="0" err="1"/>
+                  <a:t>dlPFC</a:t>
+                </a:r>
+                <a:r>
+                  <a:rPr lang="en-US" sz="3000" dirty="0"/>
+                  <a:t> activation</a:t>
+                </a:r>
+              </a:p>
+            </p:txBody>
+          </p:sp>
+        </p:grpSp>
       </p:grpSp>
       <p:pic>
         <p:nvPicPr>
@@ -18279,8 +18264,8 @@
         </p:nvSpPr>
         <p:spPr>
           <a:xfrm>
-            <a:off x="30701558" y="20419705"/>
-            <a:ext cx="12914399" cy="3200876"/>
+            <a:off x="30683586" y="20292534"/>
+            <a:ext cx="12914399" cy="4185761"/>
           </a:xfrm>
           <a:prstGeom prst="rect">
             <a:avLst/>
@@ -18306,7 +18291,7 @@
                 <a:ea typeface="MS PGothic"/>
                 <a:cs typeface="Helvetica"/>
               </a:rPr>
-              <a:t>We found that friend defecting resulted in increased </a:t>
+              <a:t>We found that friend defecting resulted in increased dorsolateral prefrontal cortex (</a:t>
             </a:r>
             <a:r>
               <a:rPr lang="en-US" sz="3200" b="1" dirty="0" err="1">
@@ -18315,6 +18300,14 @@
                 <a:cs typeface="Helvetica"/>
               </a:rPr>
               <a:t>dlPFC</a:t>
+            </a:r>
+            <a:r>
+              <a:rPr lang="en-US" sz="3200" b="1" dirty="0">
+                <a:latin typeface="Helvetica"/>
+                <a:ea typeface="MS PGothic"/>
+                <a:cs typeface="Helvetica"/>
+              </a:rPr>
+              <a:t>)</a:t>
             </a:r>
             <a:r>
               <a:rPr lang="en-US" sz="3200" dirty="0">
@@ -18355,7 +18348,7 @@
                 <a:ea typeface="MS PGothic"/>
                 <a:cs typeface="Helvetica"/>
               </a:rPr>
-              <a:t>We also found that friend reciprocating resulted in reduced </a:t>
+              <a:t>We also found that friend reciprocating resulted in reduced medial prefrontal cortex (</a:t>
             </a:r>
             <a:r>
               <a:rPr lang="en-US" sz="3200" b="1" dirty="0" err="1">
@@ -18364,6 +18357,14 @@
                 <a:cs typeface="Helvetica"/>
               </a:rPr>
               <a:t>mPFC</a:t>
+            </a:r>
+            <a:r>
+              <a:rPr lang="en-US" sz="3200" b="1" dirty="0">
+                <a:latin typeface="Helvetica"/>
+                <a:ea typeface="MS PGothic"/>
+                <a:cs typeface="Helvetica"/>
+              </a:rPr>
+              <a:t>)</a:t>
             </a:r>
             <a:r>
               <a:rPr lang="en-US" sz="3200" dirty="0">
@@ -19385,7 +19386,7 @@
         </p:blipFill>
         <p:spPr>
           <a:xfrm>
-            <a:off x="36325224" y="5727924"/>
+            <a:off x="36346489" y="6514729"/>
             <a:ext cx="6554939" cy="5963480"/>
           </a:xfrm>
           <a:prstGeom prst="rect">
@@ -19407,7 +19408,7 @@
         </p:nvGrpSpPr>
         <p:grpSpPr>
           <a:xfrm>
-            <a:off x="31064767" y="13043782"/>
+            <a:off x="31064767" y="13596672"/>
             <a:ext cx="11815396" cy="6632263"/>
             <a:chOff x="30912367" y="13704182"/>
             <a:chExt cx="11623275" cy="6632263"/>
@@ -19427,10 +19428,10 @@
           </p:nvGrpSpPr>
           <p:grpSpPr>
             <a:xfrm>
-              <a:off x="30912367" y="15288687"/>
-              <a:ext cx="4003957" cy="4456527"/>
+              <a:off x="30912367" y="15288689"/>
+              <a:ext cx="4003957" cy="4057010"/>
               <a:chOff x="30175830" y="13427301"/>
-              <a:chExt cx="6887851" cy="8283820"/>
+              <a:chExt cx="6887851" cy="7541194"/>
             </a:xfrm>
           </p:grpSpPr>
           <p:pic>
@@ -19518,8 +19519,8 @@
             </p:nvSpPr>
             <p:spPr>
               <a:xfrm>
-                <a:off x="30483850" y="20109250"/>
-                <a:ext cx="5622817" cy="1601871"/>
+                <a:off x="30481077" y="19881512"/>
+                <a:ext cx="5622817" cy="1086983"/>
               </a:xfrm>
               <a:prstGeom prst="rect">
                 <a:avLst/>
@@ -19533,31 +19534,14 @@
               <a:lstStyle/>
               <a:p>
                 <a:r>
-                  <a:rPr lang="en-US" dirty="0">
-                    <a:latin typeface="Helvetica"/>
-                  </a:rPr>
-                  <a:t>Medial Prefrontal Cortex</a:t>
-                </a:r>
-              </a:p>
-              <a:p>
-                <a:r>
-                  <a:rPr lang="en-US" sz="3200" b="1" dirty="0">
-                    <a:latin typeface="Helvetica"/>
-                  </a:rPr>
-                  <a:t>(</a:t>
-                </a:r>
-                <a:r>
                   <a:rPr lang="en-US" sz="3200" b="1" dirty="0" err="1">
                     <a:latin typeface="Helvetica"/>
                   </a:rPr>
                   <a:t>mPFC</a:t>
                 </a:r>
-                <a:r>
-                  <a:rPr lang="en-US" sz="3200" b="1" dirty="0">
-                    <a:latin typeface="Helvetica"/>
-                  </a:rPr>
-                  <a:t>)</a:t>
-                </a:r>
+                <a:endParaRPr lang="en-US" sz="3200" b="1" dirty="0">
+                  <a:latin typeface="Helvetica"/>
+                </a:endParaRPr>
               </a:p>
             </p:txBody>
           </p:sp>
@@ -19963,8 +19947,8 @@
         </p:nvSpPr>
         <p:spPr>
           <a:xfrm>
-            <a:off x="17565515" y="19992104"/>
-            <a:ext cx="10624094" cy="1015663"/>
+            <a:off x="16952163" y="20057868"/>
+            <a:ext cx="12119276" cy="1077218"/>
           </a:xfrm>
           <a:prstGeom prst="rect">
             <a:avLst/>
@@ -19979,7 +19963,7 @@
           <a:p>
             <a:pPr algn="ctr"/>
             <a:r>
-              <a:rPr lang="en-US" sz="3000" dirty="0"/>
+              <a:rPr lang="en-US" sz="3200" dirty="0"/>
               <a:t>We found no age-related effects across financial exploitation measures or investment behavior</a:t>
             </a:r>
           </a:p>
@@ -20313,7 +20297,7 @@
         </p:nvSpPr>
         <p:spPr bwMode="auto">
           <a:xfrm>
-            <a:off x="18499855" y="3920818"/>
+            <a:off x="18223410" y="3920818"/>
             <a:ext cx="9336971" cy="748988"/>
           </a:xfrm>
           <a:prstGeom prst="rect">
@@ -20446,7 +20430,7 @@
                 </a:solidFill>
                 <a:latin typeface="Trebuchet MS" panose="020B0603020202020204" pitchFamily="34" charset="0"/>
               </a:rPr>
-              <a:t>3. Age Related Behavioral Effects</a:t>
+              <a:t>3. Age-Related Behavioral Effects</a:t>
             </a:r>
           </a:p>
         </p:txBody>
@@ -20468,7 +20452,7 @@
         <p:spPr bwMode="auto">
           <a:xfrm>
             <a:off x="30943648" y="3872154"/>
-            <a:ext cx="12337509" cy="746358"/>
+            <a:ext cx="12337509" cy="1400383"/>
           </a:xfrm>
           <a:prstGeom prst="rect">
             <a:avLst/>
@@ -20601,7 +20585,7 @@
                 <a:latin typeface="Trebuchet MS"/>
                 <a:ea typeface="MS PGothic"/>
               </a:rPr>
-              <a:t>5. Age Related Differences in Partner Response </a:t>
+              <a:t>5. Whole Brain Analyses of Neural Responses to Social Outcomes</a:t>
             </a:r>
             <a:endParaRPr lang="en-US" altLang="en-US" sz="4250" b="1" dirty="0">
               <a:solidFill>
@@ -20916,6 +20900,81 @@
                 <a:latin typeface="Trebuchet MS" panose="020B0603020202020204" pitchFamily="34" charset="0"/>
               </a:rPr>
               <a:t>6. Conclusions and Future Directions</a:t>
+            </a:r>
+          </a:p>
+        </p:txBody>
+      </p:sp>
+      <p:sp>
+        <p:nvSpPr>
+          <p:cNvPr id="142" name="TextBox 141">
+            <a:extLst>
+              <a:ext uri="{FF2B5EF4-FFF2-40B4-BE49-F238E27FC236}">
+                <a16:creationId xmlns:a16="http://schemas.microsoft.com/office/drawing/2014/main" id="{8DA2ABEA-DC63-DB4B-9E64-20A700C207F0}"/>
+              </a:ext>
+            </a:extLst>
+          </p:cNvPr>
+          <p:cNvSpPr txBox="1"/>
+          <p:nvPr/>
+        </p:nvSpPr>
+        <p:spPr>
+          <a:xfrm>
+            <a:off x="197691" y="13947099"/>
+            <a:ext cx="14650695" cy="2554545"/>
+          </a:xfrm>
+          <a:prstGeom prst="rect">
+            <a:avLst/>
+          </a:prstGeom>
+          <a:noFill/>
+        </p:spPr>
+        <p:txBody>
+          <a:bodyPr wrap="square" lIns="91440" tIns="45720" rIns="91440" bIns="45720" anchor="t">
+            <a:spAutoFit/>
+          </a:bodyPr>
+          <a:lstStyle/>
+          <a:p>
+            <a:pPr algn="ctr"/>
+            <a:r>
+              <a:rPr lang="en-US" altLang="en-US" sz="3200" dirty="0">
+                <a:latin typeface="Helvetica"/>
+                <a:ea typeface="MS PGothic"/>
+              </a:rPr>
+              <a:t>Participants (N = 62) completed a trust task with three partners: a computer, a stranger, and their chosen friend. They are given $8 each round and must share one of two pre-determined amounts. That amount is then tripled, and they are shown whether their partner reciprocated half of the total, or defected and kept it all to themselves.</a:t>
+            </a:r>
+          </a:p>
+        </p:txBody>
+      </p:sp>
+      <p:sp>
+        <p:nvSpPr>
+          <p:cNvPr id="11" name="TextBox 10">
+            <a:extLst>
+              <a:ext uri="{FF2B5EF4-FFF2-40B4-BE49-F238E27FC236}">
+                <a16:creationId xmlns:a16="http://schemas.microsoft.com/office/drawing/2014/main" id="{95DE763B-F4EB-754D-A139-C1319AD540CE}"/>
+              </a:ext>
+            </a:extLst>
+          </p:cNvPr>
+          <p:cNvSpPr txBox="1"/>
+          <p:nvPr/>
+        </p:nvSpPr>
+        <p:spPr>
+          <a:xfrm>
+            <a:off x="30903167" y="5316911"/>
+            <a:ext cx="12036015" cy="1077218"/>
+          </a:xfrm>
+          <a:prstGeom prst="rect">
+            <a:avLst/>
+          </a:prstGeom>
+          <a:noFill/>
+        </p:spPr>
+        <p:txBody>
+          <a:bodyPr wrap="square" rtlCol="0">
+            <a:spAutoFit/>
+          </a:bodyPr>
+          <a:lstStyle/>
+          <a:p>
+            <a:pPr algn="ctr"/>
+            <a:r>
+              <a:rPr lang="en-US" sz="3200" dirty="0"/>
+              <a:t>To investigate if age-related effects were present elsewhere, we conducted a set of whole brain analyses.</a:t>
             </a:r>
           </a:p>
         </p:txBody>

--- a/SFN/2023_SFN_trust.pptx
+++ b/SFN/2023_SFN_trust.pptx
@@ -20979,6 +20979,146 @@
           </a:p>
         </p:txBody>
       </p:sp>
+      <p:sp>
+        <p:nvSpPr>
+          <p:cNvPr id="48" name="TextBox 47">
+            <a:extLst>
+              <a:ext uri="{FF2B5EF4-FFF2-40B4-BE49-F238E27FC236}">
+                <a16:creationId xmlns:a16="http://schemas.microsoft.com/office/drawing/2014/main" id="{5AD48B72-79AA-2C4A-8106-FEE9B29510DB}"/>
+              </a:ext>
+            </a:extLst>
+          </p:cNvPr>
+          <p:cNvSpPr txBox="1"/>
+          <p:nvPr/>
+        </p:nvSpPr>
+        <p:spPr>
+          <a:xfrm>
+            <a:off x="20959218" y="13113800"/>
+            <a:ext cx="1932677" cy="523220"/>
+          </a:xfrm>
+          <a:prstGeom prst="rect">
+            <a:avLst/>
+          </a:prstGeom>
+          <a:noFill/>
+        </p:spPr>
+        <p:txBody>
+          <a:bodyPr wrap="square" rtlCol="0">
+            <a:spAutoFit/>
+          </a:bodyPr>
+          <a:lstStyle/>
+          <a:p>
+            <a:r>
+              <a:rPr lang="en-US" sz="2800" i="1" dirty="0"/>
+              <a:t>R = -.21</a:t>
+            </a:r>
+          </a:p>
+        </p:txBody>
+      </p:sp>
+      <p:sp>
+        <p:nvSpPr>
+          <p:cNvPr id="153" name="TextBox 152">
+            <a:extLst>
+              <a:ext uri="{FF2B5EF4-FFF2-40B4-BE49-F238E27FC236}">
+                <a16:creationId xmlns:a16="http://schemas.microsoft.com/office/drawing/2014/main" id="{2A617A1E-C1F1-794A-A807-BBC21A37CDED}"/>
+              </a:ext>
+            </a:extLst>
+          </p:cNvPr>
+          <p:cNvSpPr txBox="1"/>
+          <p:nvPr/>
+        </p:nvSpPr>
+        <p:spPr>
+          <a:xfrm>
+            <a:off x="28609845" y="5241364"/>
+            <a:ext cx="1932677" cy="523220"/>
+          </a:xfrm>
+          <a:prstGeom prst="rect">
+            <a:avLst/>
+          </a:prstGeom>
+          <a:noFill/>
+        </p:spPr>
+        <p:txBody>
+          <a:bodyPr wrap="square" rtlCol="0">
+            <a:spAutoFit/>
+          </a:bodyPr>
+          <a:lstStyle/>
+          <a:p>
+            <a:r>
+              <a:rPr lang="en-US" sz="2800" i="1" dirty="0"/>
+              <a:t>R = -.03</a:t>
+            </a:r>
+          </a:p>
+        </p:txBody>
+      </p:sp>
+      <p:sp>
+        <p:nvSpPr>
+          <p:cNvPr id="154" name="TextBox 153">
+            <a:extLst>
+              <a:ext uri="{FF2B5EF4-FFF2-40B4-BE49-F238E27FC236}">
+                <a16:creationId xmlns:a16="http://schemas.microsoft.com/office/drawing/2014/main" id="{199A54FF-CFDA-AA4D-9B63-2C0BC38C1F8A}"/>
+              </a:ext>
+            </a:extLst>
+          </p:cNvPr>
+          <p:cNvSpPr txBox="1"/>
+          <p:nvPr/>
+        </p:nvSpPr>
+        <p:spPr>
+          <a:xfrm>
+            <a:off x="28527431" y="13109233"/>
+            <a:ext cx="1932677" cy="523220"/>
+          </a:xfrm>
+          <a:prstGeom prst="rect">
+            <a:avLst/>
+          </a:prstGeom>
+          <a:noFill/>
+        </p:spPr>
+        <p:txBody>
+          <a:bodyPr wrap="square" rtlCol="0">
+            <a:spAutoFit/>
+          </a:bodyPr>
+          <a:lstStyle/>
+          <a:p>
+            <a:r>
+              <a:rPr lang="en-US" sz="2800" i="1" dirty="0"/>
+              <a:t>R = -.</a:t>
+            </a:r>
+          </a:p>
+        </p:txBody>
+      </p:sp>
+      <p:sp>
+        <p:nvSpPr>
+          <p:cNvPr id="156" name="TextBox 155">
+            <a:extLst>
+              <a:ext uri="{FF2B5EF4-FFF2-40B4-BE49-F238E27FC236}">
+                <a16:creationId xmlns:a16="http://schemas.microsoft.com/office/drawing/2014/main" id="{8129937F-2145-7F4C-8C15-2C0DF8142096}"/>
+              </a:ext>
+            </a:extLst>
+          </p:cNvPr>
+          <p:cNvSpPr txBox="1"/>
+          <p:nvPr/>
+        </p:nvSpPr>
+        <p:spPr>
+          <a:xfrm>
+            <a:off x="38860917" y="12421214"/>
+            <a:ext cx="1464950" cy="899443"/>
+          </a:xfrm>
+          <a:prstGeom prst="rect">
+            <a:avLst/>
+          </a:prstGeom>
+          <a:noFill/>
+        </p:spPr>
+        <p:txBody>
+          <a:bodyPr wrap="none" rtlCol="0">
+            <a:spAutoFit/>
+          </a:bodyPr>
+          <a:lstStyle/>
+          <a:p>
+            <a:r>
+              <a:rPr lang="en-US" sz="4000" dirty="0"/>
+              <a:t>Age</a:t>
+            </a:r>
+          </a:p>
+        </p:txBody>
+      </p:sp>
     </p:spTree>
     <p:extLst>
       <p:ext uri="{BB962C8B-B14F-4D97-AF65-F5344CB8AC3E}">

--- a/SFN/2023_SFN_trust.pptx
+++ b/SFN/2023_SFN_trust.pptx
@@ -12856,7 +12856,7 @@
         </p:nvGrpSpPr>
         <p:grpSpPr>
           <a:xfrm>
-            <a:off x="12078302" y="29152243"/>
+            <a:off x="12078302" y="28890985"/>
             <a:ext cx="2276038" cy="1215276"/>
             <a:chOff x="11083249" y="26380930"/>
             <a:chExt cx="3543576" cy="1716829"/>
@@ -13013,7 +13013,7 @@
         </p:blipFill>
         <p:spPr>
           <a:xfrm>
-            <a:off x="12039403" y="26237378"/>
+            <a:off x="12039403" y="25932577"/>
             <a:ext cx="2340933" cy="2333025"/>
           </a:xfrm>
           <a:prstGeom prst="rect">
@@ -13812,7 +13812,7 @@
         </p:nvSpPr>
         <p:spPr>
           <a:xfrm>
-            <a:off x="15511210" y="30424481"/>
+            <a:off x="15511210" y="30206766"/>
             <a:ext cx="14212155" cy="2062103"/>
           </a:xfrm>
           <a:prstGeom prst="rect">
@@ -13896,10 +13896,10 @@
         </p:nvGrpSpPr>
         <p:grpSpPr>
           <a:xfrm>
-            <a:off x="16012194" y="23993603"/>
-            <a:ext cx="5429343" cy="5001859"/>
+            <a:off x="16012194" y="23993601"/>
+            <a:ext cx="5429343" cy="4910419"/>
             <a:chOff x="14636639" y="15406812"/>
-            <a:chExt cx="7151031" cy="6589340"/>
+            <a:chExt cx="7151031" cy="6468880"/>
           </a:xfrm>
         </p:grpSpPr>
         <p:pic>
@@ -13946,7 +13946,7 @@
           </p:nvSpPr>
           <p:spPr>
             <a:xfrm>
-              <a:off x="15108298" y="21225782"/>
+              <a:off x="15228734" y="21105322"/>
               <a:ext cx="1193324" cy="770370"/>
             </a:xfrm>
             <a:prstGeom prst="rect">
@@ -13961,13 +13961,13 @@
             <a:lstStyle/>
             <a:p>
               <a:r>
-                <a:rPr lang="en-US" sz="3200" b="1" dirty="0">
+                <a:rPr lang="en-US" sz="3200" dirty="0">
                   <a:latin typeface="Helvetica"/>
                   <a:ea typeface="MS PGothic"/>
                 </a:rPr>
                 <a:t>VS</a:t>
               </a:r>
-              <a:endParaRPr lang="en-US" sz="3200" b="1" dirty="0">
+              <a:endParaRPr lang="en-US" sz="3200" dirty="0">
                 <a:latin typeface="Helvetica"/>
               </a:endParaRPr>
             </a:p>
@@ -13988,7 +13988,7 @@
           <p:spPr>
             <a:xfrm>
               <a:off x="14636639" y="15690148"/>
-              <a:ext cx="2222101" cy="1500193"/>
+              <a:ext cx="2222101" cy="1338012"/>
             </a:xfrm>
             <a:prstGeom prst="rect">
               <a:avLst/>
@@ -14003,11 +14003,11 @@
             <a:p>
               <a:pPr algn="ctr"/>
               <a:r>
-                <a:rPr lang="en-US" sz="4000" dirty="0">
+                <a:rPr lang="en-US" sz="3200" dirty="0">
                   <a:latin typeface="Helvetica"/>
                   <a:ea typeface="MS PGothic"/>
                 </a:rPr>
-                <a:t>Y=9</a:t>
+                <a:t>Y= 9</a:t>
               </a:r>
             </a:p>
             <a:p>
@@ -14824,7 +14824,7 @@
                 <a:effectLst/>
                 <a:latin typeface="Helvetica" pitchFamily="2" charset="0"/>
               </a:rPr>
-              <a:t> et al., 2022).</a:t>
+              <a:t> et al., 2022; Cassidy et al., 2020).</a:t>
             </a:r>
           </a:p>
           <a:p>
@@ -15508,7 +15508,7 @@
         </p:nvSpPr>
         <p:spPr>
           <a:xfrm>
-            <a:off x="348830" y="26164352"/>
+            <a:off x="348830" y="25816008"/>
             <a:ext cx="11690573" cy="4909036"/>
           </a:xfrm>
           <a:prstGeom prst="rect">
@@ -15918,7 +15918,7 @@
         </p:nvGrpSpPr>
         <p:grpSpPr>
           <a:xfrm>
-            <a:off x="597367" y="16568871"/>
+            <a:off x="597367" y="15567382"/>
             <a:ext cx="13063327" cy="9292257"/>
             <a:chOff x="572915" y="16098706"/>
             <a:chExt cx="13946934" cy="10056750"/>
@@ -17690,10 +17690,10 @@
         </p:nvGrpSpPr>
         <p:grpSpPr>
           <a:xfrm>
-            <a:off x="31053369" y="6779852"/>
-            <a:ext cx="11558081" cy="6349248"/>
-            <a:chOff x="30968309" y="6482142"/>
-            <a:chExt cx="11558081" cy="6349248"/>
+            <a:off x="31025829" y="7128196"/>
+            <a:ext cx="11585621" cy="6349248"/>
+            <a:chOff x="30940769" y="6482142"/>
+            <a:chExt cx="11585621" cy="6349248"/>
           </a:xfrm>
         </p:grpSpPr>
         <p:grpSp>
@@ -17767,7 +17767,7 @@
             <p:spPr>
               <a:xfrm>
                 <a:off x="30952728" y="4266720"/>
-                <a:ext cx="1539203" cy="707886"/>
+                <a:ext cx="1894661" cy="973691"/>
               </a:xfrm>
               <a:prstGeom prst="rect">
                 <a:avLst/>
@@ -17781,7 +17781,7 @@
               <a:lstStyle/>
               <a:p>
                 <a:r>
-                  <a:rPr lang="en-US" sz="4000" dirty="0"/>
+                  <a:rPr lang="en-US" sz="3200" dirty="0"/>
                   <a:t>X= 52</a:t>
                 </a:r>
               </a:p>
@@ -17816,12 +17816,12 @@
               <a:lstStyle/>
               <a:p>
                 <a:r>
-                  <a:rPr lang="en-US" sz="3200" b="1" dirty="0" err="1">
+                  <a:rPr lang="en-US" sz="3200" dirty="0" err="1">
                     <a:latin typeface="Helvetica"/>
                   </a:rPr>
                   <a:t>dlPFC</a:t>
                 </a:r>
-                <a:endParaRPr lang="en-US" sz="3200" b="1" dirty="0">
+                <a:endParaRPr lang="en-US" sz="3200" dirty="0">
                   <a:latin typeface="Helvetica"/>
                 </a:endParaRPr>
               </a:p>
@@ -17842,8 +17842,8 @@
           </p:nvSpPr>
           <p:spPr>
             <a:xfrm>
-              <a:off x="31126040" y="6528071"/>
-              <a:ext cx="4272148" cy="1077218"/>
+              <a:off x="30940769" y="6984044"/>
+              <a:ext cx="4272148" cy="954107"/>
             </a:xfrm>
             <a:prstGeom prst="rect">
               <a:avLst/>
@@ -17857,19 +17857,19 @@
             <a:lstStyle/>
             <a:p>
               <a:r>
-                <a:rPr lang="en-US" sz="3200" b="0" i="0" dirty="0">
+                <a:rPr lang="en-US" sz="2800" b="0" i="0" dirty="0">
                   <a:effectLst/>
                   <a:latin typeface="Helvetica" pitchFamily="2" charset="0"/>
                 </a:rPr>
                 <a:t>Friend Defecting &gt;</a:t>
               </a:r>
               <a:r>
-                <a:rPr lang="en-US" sz="3200" dirty="0">
+                <a:rPr lang="en-US" sz="2800" dirty="0">
                   <a:latin typeface="Helvetica" pitchFamily="2" charset="0"/>
                 </a:rPr>
                 <a:t> Computer Defecting</a:t>
               </a:r>
-              <a:endParaRPr lang="en-US" sz="3200" i="0" dirty="0">
+              <a:endParaRPr lang="en-US" sz="2800" i="0" dirty="0">
                 <a:effectLst/>
                 <a:latin typeface="Helvetica" pitchFamily="2" charset="0"/>
               </a:endParaRPr>
@@ -18250,148 +18250,6 @@
           </a:extLst>
         </p:spPr>
       </p:pic>
-      <p:sp>
-        <p:nvSpPr>
-          <p:cNvPr id="155" name="Rectangle 154">
-            <a:extLst>
-              <a:ext uri="{FF2B5EF4-FFF2-40B4-BE49-F238E27FC236}">
-                <a16:creationId xmlns:a16="http://schemas.microsoft.com/office/drawing/2014/main" id="{8F908185-E22F-CB44-8E95-78E9235C0525}"/>
-              </a:ext>
-            </a:extLst>
-          </p:cNvPr>
-          <p:cNvSpPr/>
-          <p:nvPr/>
-        </p:nvSpPr>
-        <p:spPr>
-          <a:xfrm>
-            <a:off x="30683586" y="20292534"/>
-            <a:ext cx="12914399" cy="4185761"/>
-          </a:xfrm>
-          <a:prstGeom prst="rect">
-            <a:avLst/>
-          </a:prstGeom>
-        </p:spPr>
-        <p:txBody>
-          <a:bodyPr wrap="square" lIns="91440" tIns="45720" rIns="91440" bIns="45720" anchor="t">
-            <a:spAutoFit/>
-          </a:bodyPr>
-          <a:lstStyle/>
-          <a:p>
-            <a:pPr algn="ctr">
-              <a:spcBef>
-                <a:spcPts val="360"/>
-              </a:spcBef>
-              <a:spcAft>
-                <a:spcPts val="0"/>
-              </a:spcAft>
-            </a:pPr>
-            <a:r>
-              <a:rPr lang="en-US" sz="3200" dirty="0">
-                <a:latin typeface="Helvetica"/>
-                <a:ea typeface="MS PGothic"/>
-                <a:cs typeface="Helvetica"/>
-              </a:rPr>
-              <a:t>We found that friend defecting resulted in increased dorsolateral prefrontal cortex (</a:t>
-            </a:r>
-            <a:r>
-              <a:rPr lang="en-US" sz="3200" b="1" dirty="0" err="1">
-                <a:latin typeface="Helvetica"/>
-                <a:ea typeface="MS PGothic"/>
-                <a:cs typeface="Helvetica"/>
-              </a:rPr>
-              <a:t>dlPFC</a:t>
-            </a:r>
-            <a:r>
-              <a:rPr lang="en-US" sz="3200" b="1" dirty="0">
-                <a:latin typeface="Helvetica"/>
-                <a:ea typeface="MS PGothic"/>
-                <a:cs typeface="Helvetica"/>
-              </a:rPr>
-              <a:t>)</a:t>
-            </a:r>
-            <a:r>
-              <a:rPr lang="en-US" sz="3200" dirty="0">
-                <a:latin typeface="Helvetica"/>
-                <a:ea typeface="MS PGothic"/>
-                <a:cs typeface="Helvetica"/>
-              </a:rPr>
-              <a:t> activation in older adults compared to younger adults. </a:t>
-            </a:r>
-          </a:p>
-          <a:p>
-            <a:pPr algn="ctr">
-              <a:spcBef>
-                <a:spcPts val="360"/>
-              </a:spcBef>
-              <a:spcAft>
-                <a:spcPts val="0"/>
-              </a:spcAft>
-            </a:pPr>
-            <a:endParaRPr lang="en-US" sz="3200" dirty="0">
-              <a:latin typeface="Helvetica"/>
-              <a:ea typeface="MS PGothic"/>
-              <a:cs typeface="Helvetica"/>
-            </a:endParaRPr>
-          </a:p>
-          <a:p>
-            <a:pPr algn="ctr">
-              <a:spcBef>
-                <a:spcPts val="360"/>
-              </a:spcBef>
-              <a:spcAft>
-                <a:spcPts val="0"/>
-              </a:spcAft>
-            </a:pPr>
-            <a:r>
-              <a:rPr lang="en-US" sz="3200" dirty="0">
-                <a:latin typeface="Helvetica"/>
-                <a:ea typeface="MS PGothic"/>
-                <a:cs typeface="Helvetica"/>
-              </a:rPr>
-              <a:t>We also found that friend reciprocating resulted in reduced medial prefrontal cortex (</a:t>
-            </a:r>
-            <a:r>
-              <a:rPr lang="en-US" sz="3200" b="1" dirty="0" err="1">
-                <a:latin typeface="Helvetica"/>
-                <a:ea typeface="MS PGothic"/>
-                <a:cs typeface="Helvetica"/>
-              </a:rPr>
-              <a:t>mPFC</a:t>
-            </a:r>
-            <a:r>
-              <a:rPr lang="en-US" sz="3200" b="1" dirty="0">
-                <a:latin typeface="Helvetica"/>
-                <a:ea typeface="MS PGothic"/>
-                <a:cs typeface="Helvetica"/>
-              </a:rPr>
-              <a:t>)</a:t>
-            </a:r>
-            <a:r>
-              <a:rPr lang="en-US" sz="3200" dirty="0">
-                <a:latin typeface="Helvetica"/>
-                <a:ea typeface="MS PGothic"/>
-                <a:cs typeface="Helvetica"/>
-              </a:rPr>
-              <a:t> activation in older adults compared to younger adults.</a:t>
-            </a:r>
-          </a:p>
-          <a:p>
-            <a:pPr algn="ctr">
-              <a:spcBef>
-                <a:spcPts val="360"/>
-              </a:spcBef>
-              <a:spcAft>
-                <a:spcPts val="0"/>
-              </a:spcAft>
-            </a:pPr>
-            <a:endParaRPr lang="en-US" sz="3200" dirty="0">
-              <a:latin typeface="Helvetica"/>
-              <a:ea typeface="MS PGothic"/>
-              <a:cs typeface="Helvetica"/>
-            </a:endParaRPr>
-          </a:p>
-        </p:txBody>
-      </p:sp>
       <p:grpSp>
         <p:nvGrpSpPr>
           <p:cNvPr id="28" name="Group 27">
@@ -18696,7 +18554,7 @@
         </p:nvGrpSpPr>
         <p:grpSpPr>
           <a:xfrm>
-            <a:off x="15661773" y="13603786"/>
+            <a:off x="15661773" y="14039216"/>
             <a:ext cx="6786687" cy="5929306"/>
             <a:chOff x="15661774" y="13558986"/>
             <a:chExt cx="6773997" cy="6069205"/>
@@ -18986,7 +18844,7 @@
         </p:nvGrpSpPr>
         <p:grpSpPr>
           <a:xfrm>
-            <a:off x="22990136" y="13459226"/>
+            <a:off x="22990136" y="13938199"/>
             <a:ext cx="6912332" cy="6118831"/>
             <a:chOff x="22987347" y="13324694"/>
             <a:chExt cx="7202664" cy="6246177"/>
@@ -19386,7 +19244,7 @@
         </p:blipFill>
         <p:spPr>
           <a:xfrm>
-            <a:off x="36346489" y="6514729"/>
+            <a:off x="36346489" y="6863073"/>
             <a:ext cx="6554939" cy="5963480"/>
           </a:xfrm>
           <a:prstGeom prst="rect">
@@ -19394,6 +19252,98 @@
           </a:prstGeom>
         </p:spPr>
       </p:pic>
+      <p:sp>
+        <p:nvSpPr>
+          <p:cNvPr id="155" name="Rectangle 154">
+            <a:extLst>
+              <a:ext uri="{FF2B5EF4-FFF2-40B4-BE49-F238E27FC236}">
+                <a16:creationId xmlns:a16="http://schemas.microsoft.com/office/drawing/2014/main" id="{8F908185-E22F-CB44-8E95-78E9235C0525}"/>
+              </a:ext>
+            </a:extLst>
+          </p:cNvPr>
+          <p:cNvSpPr/>
+          <p:nvPr/>
+        </p:nvSpPr>
+        <p:spPr>
+          <a:xfrm>
+            <a:off x="30683585" y="21572364"/>
+            <a:ext cx="12914399" cy="2657138"/>
+          </a:xfrm>
+          <a:prstGeom prst="rect">
+            <a:avLst/>
+          </a:prstGeom>
+        </p:spPr>
+        <p:txBody>
+          <a:bodyPr wrap="square" lIns="91440" tIns="45720" rIns="91440" bIns="45720" anchor="t">
+            <a:spAutoFit/>
+          </a:bodyPr>
+          <a:lstStyle/>
+          <a:p>
+            <a:pPr algn="ctr">
+              <a:spcBef>
+                <a:spcPts val="360"/>
+              </a:spcBef>
+              <a:spcAft>
+                <a:spcPts val="0"/>
+              </a:spcAft>
+            </a:pPr>
+            <a:endParaRPr lang="en-US" sz="3200" dirty="0">
+              <a:latin typeface="Helvetica"/>
+              <a:ea typeface="MS PGothic"/>
+              <a:cs typeface="Helvetica"/>
+            </a:endParaRPr>
+          </a:p>
+          <a:p>
+            <a:pPr algn="ctr">
+              <a:spcBef>
+                <a:spcPts val="360"/>
+              </a:spcBef>
+              <a:spcAft>
+                <a:spcPts val="0"/>
+              </a:spcAft>
+            </a:pPr>
+            <a:r>
+              <a:rPr lang="en-US" sz="3200" dirty="0">
+                <a:latin typeface="Helvetica"/>
+                <a:ea typeface="MS PGothic"/>
+                <a:cs typeface="Helvetica"/>
+              </a:rPr>
+              <a:t>We also found that friend reciprocating resulted in reduced medial prefrontal cortex (</a:t>
+            </a:r>
+            <a:r>
+              <a:rPr lang="en-US" sz="3200" dirty="0" err="1">
+                <a:latin typeface="Helvetica"/>
+                <a:ea typeface="MS PGothic"/>
+                <a:cs typeface="Helvetica"/>
+              </a:rPr>
+              <a:t>mPFC</a:t>
+            </a:r>
+            <a:r>
+              <a:rPr lang="en-US" sz="3200" dirty="0">
+                <a:latin typeface="Helvetica"/>
+                <a:ea typeface="MS PGothic"/>
+                <a:cs typeface="Helvetica"/>
+              </a:rPr>
+              <a:t>) activation in older adults compared to younger adults.</a:t>
+            </a:r>
+          </a:p>
+          <a:p>
+            <a:pPr algn="ctr">
+              <a:spcBef>
+                <a:spcPts val="360"/>
+              </a:spcBef>
+              <a:spcAft>
+                <a:spcPts val="0"/>
+              </a:spcAft>
+            </a:pPr>
+            <a:endParaRPr lang="en-US" sz="3200" dirty="0">
+              <a:latin typeface="Helvetica"/>
+              <a:ea typeface="MS PGothic"/>
+              <a:cs typeface="Helvetica"/>
+            </a:endParaRPr>
+          </a:p>
+        </p:txBody>
+      </p:sp>
       <p:grpSp>
         <p:nvGrpSpPr>
           <p:cNvPr id="2" name="Group 1">
@@ -19408,10 +19358,10 @@
         </p:nvGrpSpPr>
         <p:grpSpPr>
           <a:xfrm>
-            <a:off x="31064767" y="13596672"/>
-            <a:ext cx="11815396" cy="6632263"/>
-            <a:chOff x="30912367" y="13704182"/>
-            <a:chExt cx="11623275" cy="6632263"/>
+            <a:off x="31013968" y="15562632"/>
+            <a:ext cx="11866195" cy="6632263"/>
+            <a:chOff x="30862394" y="13704182"/>
+            <a:chExt cx="11673248" cy="6632263"/>
           </a:xfrm>
         </p:grpSpPr>
         <p:grpSp>
@@ -19485,7 +19435,7 @@
             <p:spPr>
               <a:xfrm>
                 <a:off x="30175830" y="13427301"/>
-                <a:ext cx="1827438" cy="987985"/>
+                <a:ext cx="1991698" cy="1086983"/>
               </a:xfrm>
               <a:prstGeom prst="rect">
                 <a:avLst/>
@@ -19499,7 +19449,7 @@
               <a:lstStyle/>
               <a:p>
                 <a:r>
-                  <a:rPr lang="en-US" sz="4000" dirty="0"/>
+                  <a:rPr lang="en-US" sz="3200" dirty="0"/>
                   <a:t>X= -8</a:t>
                 </a:r>
               </a:p>
@@ -19534,12 +19484,12 @@
               <a:lstStyle/>
               <a:p>
                 <a:r>
-                  <a:rPr lang="en-US" sz="3200" b="1" dirty="0" err="1">
+                  <a:rPr lang="en-US" sz="3200" dirty="0" err="1">
                     <a:latin typeface="Helvetica"/>
                   </a:rPr>
                   <a:t>mPFC</a:t>
                 </a:r>
-                <a:endParaRPr lang="en-US" sz="3200" b="1" dirty="0">
+                <a:endParaRPr lang="en-US" sz="3200" dirty="0">
                   <a:latin typeface="Helvetica"/>
                 </a:endParaRPr>
               </a:p>
@@ -19560,8 +19510,8 @@
           </p:nvSpPr>
           <p:spPr>
             <a:xfrm>
-              <a:off x="31089809" y="13842164"/>
-              <a:ext cx="4801133" cy="1077218"/>
+              <a:off x="30862394" y="14253639"/>
+              <a:ext cx="4801133" cy="954107"/>
             </a:xfrm>
             <a:prstGeom prst="rect">
               <a:avLst/>
@@ -19575,13 +19525,13 @@
             <a:lstStyle/>
             <a:p>
               <a:r>
-                <a:rPr lang="en-US" sz="3200" b="0" i="0" dirty="0">
+                <a:rPr lang="en-US" sz="2800" b="0" i="0" dirty="0">
                   <a:effectLst/>
                   <a:latin typeface="Helvetica" pitchFamily="2" charset="0"/>
                 </a:rPr>
                 <a:t>Friend Reciprocate &gt; Computer Reciprocate</a:t>
               </a:r>
-              <a:endParaRPr lang="en-US" sz="3200" i="0" dirty="0">
+              <a:endParaRPr lang="en-US" sz="2800" i="0" dirty="0">
                 <a:effectLst/>
                 <a:latin typeface="Helvetica" pitchFamily="2" charset="0"/>
               </a:endParaRPr>
@@ -20918,8 +20868,8 @@
         </p:nvSpPr>
         <p:spPr>
           <a:xfrm>
-            <a:off x="197691" y="13947099"/>
-            <a:ext cx="14650695" cy="2554545"/>
+            <a:off x="197691" y="14078256"/>
+            <a:ext cx="14650695" cy="1077218"/>
           </a:xfrm>
           <a:prstGeom prst="rect">
             <a:avLst/>
@@ -20938,7 +20888,7 @@
                 <a:latin typeface="Helvetica"/>
                 <a:ea typeface="MS PGothic"/>
               </a:rPr>
-              <a:t>Participants (N = 62) completed a trust task with three partners: a computer, a stranger, and their chosen friend. They are given $8 each round and must share one of two pre-determined amounts. That amount is then tripled, and they are shown whether their partner reciprocated half of the total, or defected and kept it all to themselves.</a:t>
+              <a:t>Participants (N = 62) completed a trust task with three partners: a computer, a stranger, and their chosen friend. </a:t>
             </a:r>
           </a:p>
         </p:txBody>
@@ -20957,7 +20907,7 @@
         </p:nvSpPr>
         <p:spPr>
           <a:xfrm>
-            <a:off x="30903167" y="5316911"/>
+            <a:off x="30903167" y="5403997"/>
             <a:ext cx="12036015" cy="1077218"/>
           </a:xfrm>
           <a:prstGeom prst="rect">
@@ -20993,7 +20943,7 @@
         </p:nvSpPr>
         <p:spPr>
           <a:xfrm>
-            <a:off x="20959218" y="13113800"/>
+            <a:off x="20959218" y="13549230"/>
             <a:ext cx="1932677" cy="523220"/>
           </a:xfrm>
           <a:prstGeom prst="rect">
@@ -21063,7 +21013,7 @@
         </p:nvSpPr>
         <p:spPr>
           <a:xfrm>
-            <a:off x="28527431" y="13109233"/>
+            <a:off x="28570974" y="13544663"/>
             <a:ext cx="1932677" cy="523220"/>
           </a:xfrm>
           <a:prstGeom prst="rect">
@@ -21098,7 +21048,7 @@
         </p:nvSpPr>
         <p:spPr>
           <a:xfrm>
-            <a:off x="38860917" y="12421214"/>
+            <a:off x="38860917" y="12726015"/>
             <a:ext cx="1464950" cy="899443"/>
           </a:xfrm>
           <a:prstGeom prst="rect">
@@ -21116,6 +21066,65 @@
               <a:rPr lang="en-US" sz="4000" dirty="0"/>
               <a:t>Age</a:t>
             </a:r>
+          </a:p>
+        </p:txBody>
+      </p:sp>
+      <p:sp>
+        <p:nvSpPr>
+          <p:cNvPr id="41" name="TextBox 40">
+            <a:extLst>
+              <a:ext uri="{FF2B5EF4-FFF2-40B4-BE49-F238E27FC236}">
+                <a16:creationId xmlns:a16="http://schemas.microsoft.com/office/drawing/2014/main" id="{F59315D9-38A0-3949-8197-E825D70ED72C}"/>
+              </a:ext>
+            </a:extLst>
+          </p:cNvPr>
+          <p:cNvSpPr txBox="1"/>
+          <p:nvPr/>
+        </p:nvSpPr>
+        <p:spPr>
+          <a:xfrm>
+            <a:off x="31554291" y="13490343"/>
+            <a:ext cx="10820852" cy="1846659"/>
+          </a:xfrm>
+          <a:prstGeom prst="rect">
+            <a:avLst/>
+          </a:prstGeom>
+          <a:noFill/>
+        </p:spPr>
+        <p:txBody>
+          <a:bodyPr wrap="square" rtlCol="0">
+            <a:spAutoFit/>
+          </a:bodyPr>
+          <a:lstStyle/>
+          <a:p>
+            <a:pPr algn="ctr"/>
+            <a:r>
+              <a:rPr lang="en-US" sz="3200" dirty="0">
+                <a:latin typeface="Helvetica"/>
+                <a:ea typeface="MS PGothic"/>
+                <a:cs typeface="Helvetica"/>
+              </a:rPr>
+              <a:t>We found that friend defecting resulted in increased dorsolateral prefrontal cortex (</a:t>
+            </a:r>
+            <a:r>
+              <a:rPr lang="en-US" sz="3200" dirty="0" err="1">
+                <a:latin typeface="Helvetica"/>
+                <a:ea typeface="MS PGothic"/>
+                <a:cs typeface="Helvetica"/>
+              </a:rPr>
+              <a:t>dlPFC</a:t>
+            </a:r>
+            <a:r>
+              <a:rPr lang="en-US" sz="3200" dirty="0">
+                <a:latin typeface="Helvetica"/>
+                <a:ea typeface="MS PGothic"/>
+                <a:cs typeface="Helvetica"/>
+              </a:rPr>
+              <a:t>) activation in older adults compared to younger adults. </a:t>
+            </a:r>
+          </a:p>
+          <a:p>
+            <a:endParaRPr lang="en-US" dirty="0"/>
           </a:p>
         </p:txBody>
       </p:sp>
@@ -29482,6 +29491,15 @@
 </file>
 
 <file path=customXml/item1.xml><?xml version="1.0" encoding="utf-8"?>
+<?mso-contentType ?>
+<FormTemplates xmlns="http://schemas.microsoft.com/sharepoint/v3/contenttype/forms">
+  <Display>DocumentLibraryForm</Display>
+  <Edit>DocumentLibraryForm</Edit>
+  <New>DocumentLibraryForm</New>
+</FormTemplates>
+</file>
+
+<file path=customXml/item2.xml><?xml version="1.0" encoding="utf-8"?>
 <ct:contentTypeSchema xmlns:ct="http://schemas.microsoft.com/office/2006/metadata/contentType" xmlns:ma="http://schemas.microsoft.com/office/2006/metadata/properties/metaAttributes" ct:_="" ma:_="" ma:contentTypeName="Document" ma:contentTypeID="0x01010080DE0AC601CE7945A16C28BE7D604718" ma:contentTypeVersion="16" ma:contentTypeDescription="Create a new document." ma:contentTypeScope="" ma:versionID="7200742d51933ad5859751156d985908">
   <xsd:schema xmlns:xsd="http://www.w3.org/2001/XMLSchema" xmlns:xs="http://www.w3.org/2001/XMLSchema" xmlns:p="http://schemas.microsoft.com/office/2006/metadata/properties" xmlns:ns2="068132b6-27af-4cc5-9624-46e0bc309f9c" xmlns:ns3="1ec1d487-840c-40ff-aca1-00ff13008544" targetNamespace="http://schemas.microsoft.com/office/2006/metadata/properties" ma:root="true" ma:fieldsID="ef3bb859774f4d5f12e6e11e5f5551df" ns2:_="" ns3:_="">
     <xsd:import namespace="068132b6-27af-4cc5-9624-46e0bc309f9c"/>
@@ -29724,16 +29742,15 @@
 </ct:contentTypeSchema>
 </file>
 
-<file path=customXml/item2.xml><?xml version="1.0" encoding="utf-8"?>
-<?mso-contentType ?>
-<FormTemplates xmlns="http://schemas.microsoft.com/sharepoint/v3/contenttype/forms">
-  <Display>DocumentLibraryForm</Display>
-  <Edit>DocumentLibraryForm</Edit>
-  <New>DocumentLibraryForm</New>
-</FormTemplates>
+<file path=customXml/itemProps1.xml><?xml version="1.0" encoding="utf-8"?>
+<ds:datastoreItem xmlns:ds="http://schemas.openxmlformats.org/officeDocument/2006/customXml" ds:itemID="{D5CAE7E8-1A3A-4A91-86FB-BA9E1762341A}">
+  <ds:schemaRefs>
+    <ds:schemaRef ds:uri="http://schemas.microsoft.com/sharepoint/v3/contenttype/forms"/>
+  </ds:schemaRefs>
+</ds:datastoreItem>
 </file>
 
-<file path=customXml/itemProps1.xml><?xml version="1.0" encoding="utf-8"?>
+<file path=customXml/itemProps2.xml><?xml version="1.0" encoding="utf-8"?>
 <ds:datastoreItem xmlns:ds="http://schemas.openxmlformats.org/officeDocument/2006/customXml" ds:itemID="{36138A07-987C-4A73-AAED-022482DDD0A4}">
   <ds:schemaRefs>
     <ds:schemaRef ds:uri="068132b6-27af-4cc5-9624-46e0bc309f9c"/>
@@ -29750,12 +29767,4 @@
     <ds:schemaRef ds:uri="http://www.w3.org/2001/XMLSchema"/>
   </ds:schemaRefs>
 </ds:datastoreItem>
-</file>
-
-<file path=customXml/itemProps2.xml><?xml version="1.0" encoding="utf-8"?>
-<ds:datastoreItem xmlns:ds="http://schemas.openxmlformats.org/officeDocument/2006/customXml" ds:itemID="{D5CAE7E8-1A3A-4A91-86FB-BA9E1762341A}">
-  <ds:schemaRefs>
-    <ds:schemaRef ds:uri="http://schemas.microsoft.com/sharepoint/v3/contenttype/forms"/>
-  </ds:schemaRefs>
-</ds:datastoreItem>
 </file>
--- a/SFN/2023_SFN_trust.pptx
+++ b/SFN/2023_SFN_trust.pptx
@@ -13896,7 +13896,7 @@
         </p:nvGrpSpPr>
         <p:grpSpPr>
           <a:xfrm>
-            <a:off x="16012194" y="23993601"/>
+            <a:off x="15576764" y="23993601"/>
             <a:ext cx="5429343" cy="4910419"/>
             <a:chOff x="14636639" y="15406812"/>
             <a:chExt cx="7151031" cy="6468880"/>
@@ -17438,7 +17438,7 @@
         </p:nvGrpSpPr>
         <p:grpSpPr>
           <a:xfrm>
-            <a:off x="22103183" y="23179902"/>
+            <a:off x="21667753" y="23179902"/>
             <a:ext cx="7277183" cy="6638191"/>
             <a:chOff x="23516336" y="15981033"/>
             <a:chExt cx="5574747" cy="4915819"/>
@@ -19206,7 +19206,7 @@
         </p:blipFill>
         <p:spPr>
           <a:xfrm>
-            <a:off x="23186588" y="23295687"/>
+            <a:off x="22751158" y="23295687"/>
             <a:ext cx="6466501" cy="5861542"/>
           </a:xfrm>
           <a:prstGeom prst="rect">

--- a/SFN/2023_SFN_trust.pptx
+++ b/SFN/2023_SFN_trust.pptx
@@ -18138,7 +18138,7 @@
         </p:blipFill>
         <p:spPr bwMode="auto">
           <a:xfrm>
-            <a:off x="251151" y="294825"/>
+            <a:off x="76979" y="120653"/>
             <a:ext cx="3390900" cy="3390900"/>
           </a:xfrm>
           <a:prstGeom prst="rect">
@@ -20380,7 +20380,7 @@
                 </a:solidFill>
                 <a:latin typeface="Trebuchet MS" panose="020B0603020202020204" pitchFamily="34" charset="0"/>
               </a:rPr>
-              <a:t>3. Age-Related Behavioral Effects</a:t>
+              <a:t>3. Age-Related Behavioral Effects?</a:t>
             </a:r>
           </a:p>
         </p:txBody>

--- a/SFN/2023_SFN_trust.pptx
+++ b/SFN/2023_SFN_trust.pptx
@@ -5,16 +5,17 @@
     <p:sldMasterId id="2147483648" r:id="rId3"/>
   </p:sldMasterIdLst>
   <p:notesMasterIdLst>
-    <p:notesMasterId r:id="rId8"/>
+    <p:notesMasterId r:id="rId9"/>
   </p:notesMasterIdLst>
   <p:handoutMasterIdLst>
-    <p:handoutMasterId r:id="rId9"/>
+    <p:handoutMasterId r:id="rId10"/>
   </p:handoutMasterIdLst>
   <p:sldIdLst>
     <p:sldId id="263" r:id="rId4"/>
     <p:sldId id="262" r:id="rId5"/>
-    <p:sldId id="260" r:id="rId6"/>
-    <p:sldId id="261" r:id="rId7"/>
+    <p:sldId id="264" r:id="rId6"/>
+    <p:sldId id="260" r:id="rId7"/>
+    <p:sldId id="261" r:id="rId8"/>
   </p:sldIdLst>
   <p:sldSz cx="43891200" cy="32918400"/>
   <p:notesSz cx="7023100" cy="9309100"/>
@@ -7231,242 +7232,6 @@
       </p:sp>
       <p:grpSp>
         <p:nvGrpSpPr>
-          <p:cNvPr id="15666" name="Group 15665">
-            <a:extLst>
-              <a:ext uri="{FF2B5EF4-FFF2-40B4-BE49-F238E27FC236}">
-                <a16:creationId xmlns:a16="http://schemas.microsoft.com/office/drawing/2014/main" id="{F4499BAD-2B87-B075-89D7-E684EC5B1F7C}"/>
-              </a:ext>
-            </a:extLst>
-          </p:cNvPr>
-          <p:cNvGrpSpPr/>
-          <p:nvPr/>
-        </p:nvGrpSpPr>
-        <p:grpSpPr>
-          <a:xfrm>
-            <a:off x="16034879" y="4731272"/>
-            <a:ext cx="6499677" cy="7043851"/>
-            <a:chOff x="16270767" y="4773172"/>
-            <a:chExt cx="4112536" cy="4273122"/>
-          </a:xfrm>
-        </p:grpSpPr>
-        <p:pic>
-          <p:nvPicPr>
-            <p:cNvPr id="15659" name="Graphic 15658">
-              <a:extLst>
-                <a:ext uri="{FF2B5EF4-FFF2-40B4-BE49-F238E27FC236}">
-                  <a16:creationId xmlns:a16="http://schemas.microsoft.com/office/drawing/2014/main" id="{6D9E2B1C-10CC-F9D6-3D33-17375F7BFB84}"/>
-                </a:ext>
-              </a:extLst>
-            </p:cNvPr>
-            <p:cNvPicPr>
-              <a:picLocks noChangeAspect="1"/>
-            </p:cNvPicPr>
-            <p:nvPr/>
-          </p:nvPicPr>
-          <p:blipFill rotWithShape="1">
-            <a:blip r:embed="rId5">
-              <a:extLst>
-                <a:ext uri="{28A0092B-C50C-407E-A947-70E740481C1C}">
-                  <a14:useLocalDpi xmlns:a14="http://schemas.microsoft.com/office/drawing/2010/main" val="0"/>
-                </a:ext>
-                <a:ext uri="{96DAC541-7B7A-43D3-8B79-37D633B846F1}">
-                  <asvg:svgBlip xmlns:asvg="http://schemas.microsoft.com/office/drawing/2016/SVG/main" r:embed="rId6"/>
-                </a:ext>
-              </a:extLst>
-            </a:blip>
-            <a:srcRect l="8667"/>
-            <a:stretch/>
-          </p:blipFill>
-          <p:spPr>
-            <a:xfrm>
-              <a:off x="16619952" y="4773172"/>
-              <a:ext cx="3763351" cy="4273122"/>
-            </a:xfrm>
-            <a:prstGeom prst="rect">
-              <a:avLst/>
-            </a:prstGeom>
-          </p:spPr>
-        </p:pic>
-        <p:sp>
-          <p:nvSpPr>
-            <p:cNvPr id="15660" name="TextBox 15659">
-              <a:extLst>
-                <a:ext uri="{FF2B5EF4-FFF2-40B4-BE49-F238E27FC236}">
-                  <a16:creationId xmlns:a16="http://schemas.microsoft.com/office/drawing/2014/main" id="{0766629E-BCF3-6556-AF99-A6859175E636}"/>
-                </a:ext>
-              </a:extLst>
-            </p:cNvPr>
-            <p:cNvSpPr txBox="1"/>
-            <p:nvPr/>
-          </p:nvSpPr>
-          <p:spPr>
-            <a:xfrm>
-              <a:off x="16270767" y="8330236"/>
-              <a:ext cx="243627" cy="317409"/>
-            </a:xfrm>
-            <a:prstGeom prst="rect">
-              <a:avLst/>
-            </a:prstGeom>
-            <a:noFill/>
-          </p:spPr>
-          <p:txBody>
-            <a:bodyPr wrap="none" rtlCol="0">
-              <a:spAutoFit/>
-            </a:bodyPr>
-            <a:lstStyle/>
-            <a:p>
-              <a:r>
-                <a:rPr lang="en-US" sz="2800" dirty="0"/>
-                <a:t>0</a:t>
-              </a:r>
-            </a:p>
-          </p:txBody>
-        </p:sp>
-        <p:sp>
-          <p:nvSpPr>
-            <p:cNvPr id="15662" name="TextBox 15661">
-              <a:extLst>
-                <a:ext uri="{FF2B5EF4-FFF2-40B4-BE49-F238E27FC236}">
-                  <a16:creationId xmlns:a16="http://schemas.microsoft.com/office/drawing/2014/main" id="{4DC189FA-5EF4-8645-EFD2-F4AA0CF414D9}"/>
-                </a:ext>
-              </a:extLst>
-            </p:cNvPr>
-            <p:cNvSpPr txBox="1"/>
-            <p:nvPr/>
-          </p:nvSpPr>
-          <p:spPr>
-            <a:xfrm>
-              <a:off x="16286106" y="5815933"/>
-              <a:ext cx="243627" cy="317409"/>
-            </a:xfrm>
-            <a:prstGeom prst="rect">
-              <a:avLst/>
-            </a:prstGeom>
-            <a:noFill/>
-          </p:spPr>
-          <p:txBody>
-            <a:bodyPr wrap="none" rtlCol="0">
-              <a:spAutoFit/>
-            </a:bodyPr>
-            <a:lstStyle/>
-            <a:p>
-              <a:r>
-                <a:rPr lang="en-US" sz="2800" dirty="0"/>
-                <a:t>4</a:t>
-              </a:r>
-            </a:p>
-          </p:txBody>
-        </p:sp>
-        <p:sp>
-          <p:nvSpPr>
-            <p:cNvPr id="15663" name="TextBox 15662">
-              <a:extLst>
-                <a:ext uri="{FF2B5EF4-FFF2-40B4-BE49-F238E27FC236}">
-                  <a16:creationId xmlns:a16="http://schemas.microsoft.com/office/drawing/2014/main" id="{FEBA7C19-438A-8BB9-F286-7161582091EA}"/>
-                </a:ext>
-              </a:extLst>
-            </p:cNvPr>
-            <p:cNvSpPr txBox="1"/>
-            <p:nvPr/>
-          </p:nvSpPr>
-          <p:spPr>
-            <a:xfrm>
-              <a:off x="16897735" y="8562924"/>
-              <a:ext cx="805531" cy="336081"/>
-            </a:xfrm>
-            <a:prstGeom prst="rect">
-              <a:avLst/>
-            </a:prstGeom>
-            <a:noFill/>
-          </p:spPr>
-          <p:txBody>
-            <a:bodyPr wrap="none" rtlCol="0">
-              <a:spAutoFit/>
-            </a:bodyPr>
-            <a:lstStyle/>
-            <a:p>
-              <a:pPr algn="ctr"/>
-              <a:r>
-                <a:rPr lang="en-US" sz="3000" dirty="0"/>
-                <a:t>Friend</a:t>
-              </a:r>
-            </a:p>
-          </p:txBody>
-        </p:sp>
-        <p:sp>
-          <p:nvSpPr>
-            <p:cNvPr id="15664" name="TextBox 15663">
-              <a:extLst>
-                <a:ext uri="{FF2B5EF4-FFF2-40B4-BE49-F238E27FC236}">
-                  <a16:creationId xmlns:a16="http://schemas.microsoft.com/office/drawing/2014/main" id="{D1FDC6B6-A877-379F-C9B2-8D6C71CA3AC6}"/>
-                </a:ext>
-              </a:extLst>
-            </p:cNvPr>
-            <p:cNvSpPr txBox="1"/>
-            <p:nvPr/>
-          </p:nvSpPr>
-          <p:spPr>
-            <a:xfrm>
-              <a:off x="17943587" y="8561101"/>
-              <a:ext cx="1048955" cy="336081"/>
-            </a:xfrm>
-            <a:prstGeom prst="rect">
-              <a:avLst/>
-            </a:prstGeom>
-            <a:noFill/>
-          </p:spPr>
-          <p:txBody>
-            <a:bodyPr wrap="none" rtlCol="0">
-              <a:spAutoFit/>
-            </a:bodyPr>
-            <a:lstStyle/>
-            <a:p>
-              <a:r>
-                <a:rPr lang="en-US" sz="3000" dirty="0"/>
-                <a:t>Stranger</a:t>
-              </a:r>
-            </a:p>
-          </p:txBody>
-        </p:sp>
-        <p:sp>
-          <p:nvSpPr>
-            <p:cNvPr id="15665" name="TextBox 15664">
-              <a:extLst>
-                <a:ext uri="{FF2B5EF4-FFF2-40B4-BE49-F238E27FC236}">
-                  <a16:creationId xmlns:a16="http://schemas.microsoft.com/office/drawing/2014/main" id="{0D79EDF9-8FFC-03A5-0959-5F4339B2A174}"/>
-                </a:ext>
-              </a:extLst>
-            </p:cNvPr>
-            <p:cNvSpPr txBox="1"/>
-            <p:nvPr/>
-          </p:nvSpPr>
-          <p:spPr>
-            <a:xfrm>
-              <a:off x="19099843" y="8562985"/>
-              <a:ext cx="1183852" cy="336081"/>
-            </a:xfrm>
-            <a:prstGeom prst="rect">
-              <a:avLst/>
-            </a:prstGeom>
-            <a:noFill/>
-          </p:spPr>
-          <p:txBody>
-            <a:bodyPr wrap="none" rtlCol="0">
-              <a:spAutoFit/>
-            </a:bodyPr>
-            <a:lstStyle/>
-            <a:p>
-              <a:pPr algn="ctr"/>
-              <a:r>
-                <a:rPr lang="en-US" sz="3000" dirty="0"/>
-                <a:t>Computer</a:t>
-              </a:r>
-            </a:p>
-          </p:txBody>
-        </p:sp>
-      </p:grpSp>
-      <p:grpSp>
-        <p:nvGrpSpPr>
           <p:cNvPr id="6" name="Group 5">
             <a:extLst>
               <a:ext uri="{FF2B5EF4-FFF2-40B4-BE49-F238E27FC236}">
@@ -7560,7 +7325,7 @@
                   <p:nvPr/>
                 </p:nvPicPr>
                 <p:blipFill rotWithShape="1">
-                  <a:blip r:embed="rId7"/>
+                  <a:blip r:embed="rId5"/>
                   <a:srcRect l="14791" t="15087" r="12450" b="22936"/>
                   <a:stretch/>
                 </p:blipFill>
@@ -7619,7 +7384,7 @@
                   <p:nvPr/>
                 </p:nvPicPr>
                 <p:blipFill rotWithShape="1">
-                  <a:blip r:embed="rId8"/>
+                  <a:blip r:embed="rId6"/>
                   <a:srcRect l="17658" t="18357" r="18046" b="25816"/>
                   <a:stretch/>
                 </p:blipFill>
@@ -7678,7 +7443,7 @@
                   <p:nvPr/>
                 </p:nvPicPr>
                 <p:blipFill rotWithShape="1">
-                  <a:blip r:embed="rId9"/>
+                  <a:blip r:embed="rId7"/>
                   <a:srcRect l="2620" t="7420" r="2620" b="4981"/>
                   <a:stretch/>
                 </p:blipFill>
@@ -7737,7 +7502,7 @@
                   <p:nvPr/>
                 </p:nvPicPr>
                 <p:blipFill>
-                  <a:blip r:embed="rId10"/>
+                  <a:blip r:embed="rId8"/>
                   <a:stretch>
                     <a:fillRect/>
                   </a:stretch>
@@ -7797,7 +7562,7 @@
                   <p:nvPr/>
                 </p:nvPicPr>
                 <p:blipFill rotWithShape="1">
-                  <a:blip r:embed="rId11"/>
+                  <a:blip r:embed="rId9"/>
                   <a:srcRect l="2378" t="5420" r="2378" b="9853"/>
                   <a:stretch/>
                 </p:blipFill>
@@ -7876,7 +7641,7 @@
                     <p:nvPr/>
                   </p:nvPicPr>
                   <p:blipFill>
-                    <a:blip r:embed="rId12"/>
+                    <a:blip r:embed="rId10"/>
                     <a:stretch>
                       <a:fillRect/>
                     </a:stretch>
@@ -7936,7 +7701,7 @@
                     <p:nvPr/>
                   </p:nvPicPr>
                   <p:blipFill>
-                    <a:blip r:embed="rId13"/>
+                    <a:blip r:embed="rId11"/>
                     <a:stretch>
                       <a:fillRect/>
                     </a:stretch>
@@ -7996,7 +7761,7 @@
                     <p:nvPr/>
                   </p:nvPicPr>
                   <p:blipFill>
-                    <a:blip r:embed="rId14"/>
+                    <a:blip r:embed="rId12"/>
                     <a:stretch>
                       <a:fillRect/>
                     </a:stretch>
@@ -9292,7 +9057,7 @@
               <p:nvPr/>
             </p:nvPicPr>
             <p:blipFill>
-              <a:blip r:embed="rId15">
+              <a:blip r:embed="rId13">
                 <a:extLst>
                   <a:ext uri="{28A0092B-C50C-407E-A947-70E740481C1C}">
                     <a14:useLocalDpi xmlns:a14="http://schemas.microsoft.com/office/drawing/2010/main" val="0"/>
@@ -9685,7 +9450,7 @@
           <p:nvPr/>
         </p:nvPicPr>
         <p:blipFill>
-          <a:blip r:embed="rId16">
+          <a:blip r:embed="rId14">
             <a:extLst>
               <a:ext uri="{28A0092B-C50C-407E-A947-70E740481C1C}">
                 <a14:useLocalDpi xmlns:a14="http://schemas.microsoft.com/office/drawing/2010/main" val="0"/>
@@ -9732,7 +9497,7 @@
           <p:nvPr/>
         </p:nvPicPr>
         <p:blipFill>
-          <a:blip r:embed="rId17">
+          <a:blip r:embed="rId15">
             <a:extLst>
               <a:ext uri="{28A0092B-C50C-407E-A947-70E740481C1C}">
                 <a14:useLocalDpi xmlns:a14="http://schemas.microsoft.com/office/drawing/2010/main" val="0"/>
@@ -9779,7 +9544,7 @@
           <p:nvPr/>
         </p:nvPicPr>
         <p:blipFill>
-          <a:blip r:embed="rId18">
+          <a:blip r:embed="rId16">
             <a:extLst>
               <a:ext uri="{28A0092B-C50C-407E-A947-70E740481C1C}">
                 <a14:useLocalDpi xmlns:a14="http://schemas.microsoft.com/office/drawing/2010/main" val="0"/>
@@ -10077,13 +9842,13 @@
             <p:nvPr/>
           </p:nvPicPr>
           <p:blipFill rotWithShape="1">
-            <a:blip r:embed="rId19">
+            <a:blip r:embed="rId17">
               <a:extLst>
                 <a:ext uri="{28A0092B-C50C-407E-A947-70E740481C1C}">
                   <a14:useLocalDpi xmlns:a14="http://schemas.microsoft.com/office/drawing/2010/main" val="0"/>
                 </a:ext>
                 <a:ext uri="{96DAC541-7B7A-43D3-8B79-37D633B846F1}">
-                  <asvg:svgBlip xmlns:asvg="http://schemas.microsoft.com/office/drawing/2016/SVG/main" r:embed="rId20"/>
+                  <asvg:svgBlip xmlns:asvg="http://schemas.microsoft.com/office/drawing/2016/SVG/main" r:embed="rId18"/>
                 </a:ext>
               </a:extLst>
             </a:blip>
@@ -10367,13 +10132,13 @@
             <p:nvPr/>
           </p:nvPicPr>
           <p:blipFill rotWithShape="1">
-            <a:blip r:embed="rId21">
+            <a:blip r:embed="rId19">
               <a:extLst>
                 <a:ext uri="{28A0092B-C50C-407E-A947-70E740481C1C}">
                   <a14:useLocalDpi xmlns:a14="http://schemas.microsoft.com/office/drawing/2010/main" val="0"/>
                 </a:ext>
                 <a:ext uri="{96DAC541-7B7A-43D3-8B79-37D633B846F1}">
-                  <asvg:svgBlip xmlns:asvg="http://schemas.microsoft.com/office/drawing/2016/SVG/main" r:embed="rId22"/>
+                  <asvg:svgBlip xmlns:asvg="http://schemas.microsoft.com/office/drawing/2016/SVG/main" r:embed="rId20"/>
                 </a:ext>
               </a:extLst>
             </a:blip>
@@ -10405,10 +10170,10 @@
         </p:nvGrpSpPr>
         <p:grpSpPr>
           <a:xfrm>
-            <a:off x="22990136" y="13938199"/>
-            <a:ext cx="6912332" cy="6118831"/>
-            <a:chOff x="22987347" y="13324694"/>
-            <a:chExt cx="7202664" cy="6246177"/>
+            <a:off x="22955854" y="13938199"/>
+            <a:ext cx="6946614" cy="6118831"/>
+            <a:chOff x="22951625" y="13324694"/>
+            <a:chExt cx="7238386" cy="6246177"/>
           </a:xfrm>
         </p:grpSpPr>
         <p:grpSp>
@@ -10425,10 +10190,10 @@
           </p:nvGrpSpPr>
           <p:grpSpPr>
             <a:xfrm>
-              <a:off x="22987347" y="13324694"/>
-              <a:ext cx="6975844" cy="6246177"/>
-              <a:chOff x="22987347" y="13324694"/>
-              <a:chExt cx="6975844" cy="6246177"/>
+              <a:off x="22951625" y="13324694"/>
+              <a:ext cx="7011566" cy="6246177"/>
+              <a:chOff x="22951625" y="13324694"/>
+              <a:chExt cx="7011566" cy="6246177"/>
             </a:xfrm>
           </p:grpSpPr>
           <p:grpSp>
@@ -10445,10 +10210,10 @@
             </p:nvGrpSpPr>
             <p:grpSpPr>
               <a:xfrm>
-                <a:off x="22987347" y="13324694"/>
-                <a:ext cx="1390631" cy="6163871"/>
-                <a:chOff x="23198455" y="5142184"/>
-                <a:chExt cx="1086711" cy="5298947"/>
+                <a:off x="22951625" y="13324694"/>
+                <a:ext cx="1426361" cy="6163871"/>
+                <a:chOff x="23170534" y="5142184"/>
+                <a:chExt cx="1114632" cy="5298947"/>
               </a:xfrm>
             </p:grpSpPr>
             <p:sp>
@@ -10465,7 +10230,7 @@
               </p:nvSpPr>
               <p:spPr>
                 <a:xfrm rot="16200000">
-                  <a:off x="20765443" y="7575196"/>
+                  <a:off x="20737522" y="7575196"/>
                   <a:ext cx="5298947" cy="432923"/>
                 </a:xfrm>
                 <a:prstGeom prst="rect">
@@ -10713,13 +10478,13 @@
             <p:nvPr/>
           </p:nvPicPr>
           <p:blipFill rotWithShape="1">
-            <a:blip r:embed="rId23">
+            <a:blip r:embed="rId21">
               <a:extLst>
                 <a:ext uri="{28A0092B-C50C-407E-A947-70E740481C1C}">
                   <a14:useLocalDpi xmlns:a14="http://schemas.microsoft.com/office/drawing/2010/main" val="0"/>
                 </a:ext>
                 <a:ext uri="{96DAC541-7B7A-43D3-8B79-37D633B846F1}">
-                  <asvg:svgBlip xmlns:asvg="http://schemas.microsoft.com/office/drawing/2016/SVG/main" r:embed="rId24"/>
+                  <asvg:svgBlip xmlns:asvg="http://schemas.microsoft.com/office/drawing/2016/SVG/main" r:embed="rId22"/>
                 </a:ext>
               </a:extLst>
             </a:blip>
@@ -10752,13 +10517,13 @@
           <p:nvPr/>
         </p:nvPicPr>
         <p:blipFill rotWithShape="1">
-          <a:blip r:embed="rId25">
+          <a:blip r:embed="rId23">
             <a:extLst>
               <a:ext uri="{28A0092B-C50C-407E-A947-70E740481C1C}">
                 <a14:useLocalDpi xmlns:a14="http://schemas.microsoft.com/office/drawing/2010/main" val="0"/>
               </a:ext>
               <a:ext uri="{96DAC541-7B7A-43D3-8B79-37D633B846F1}">
-                <asvg:svgBlip xmlns:asvg="http://schemas.microsoft.com/office/drawing/2016/SVG/main" r:embed="rId26"/>
+                <asvg:svgBlip xmlns:asvg="http://schemas.microsoft.com/office/drawing/2016/SVG/main" r:embed="rId24"/>
               </a:ext>
             </a:extLst>
           </a:blip>
@@ -10790,13 +10555,13 @@
           <p:nvPr/>
         </p:nvPicPr>
         <p:blipFill rotWithShape="1">
-          <a:blip r:embed="rId27">
+          <a:blip r:embed="rId25">
             <a:extLst>
               <a:ext uri="{28A0092B-C50C-407E-A947-70E740481C1C}">
                 <a14:useLocalDpi xmlns:a14="http://schemas.microsoft.com/office/drawing/2010/main" val="0"/>
               </a:ext>
               <a:ext uri="{96DAC541-7B7A-43D3-8B79-37D633B846F1}">
-                <asvg:svgBlip xmlns:asvg="http://schemas.microsoft.com/office/drawing/2016/SVG/main" r:embed="rId28"/>
+                <asvg:svgBlip xmlns:asvg="http://schemas.microsoft.com/office/drawing/2016/SVG/main" r:embed="rId26"/>
               </a:ext>
             </a:extLst>
           </a:blip>
@@ -10960,7 +10725,7 @@
               <p:nvPr/>
             </p:nvPicPr>
             <p:blipFill>
-              <a:blip r:embed="rId29">
+              <a:blip r:embed="rId27">
                 <a:extLst>
                   <a:ext uri="{28A0092B-C50C-407E-A947-70E740481C1C}">
                     <a14:useLocalDpi xmlns:a14="http://schemas.microsoft.com/office/drawing/2010/main" val="0"/>
@@ -11349,13 +11114,13 @@
             <p:nvPr/>
           </p:nvPicPr>
           <p:blipFill rotWithShape="1">
-            <a:blip r:embed="rId30">
+            <a:blip r:embed="rId28">
               <a:extLst>
                 <a:ext uri="{28A0092B-C50C-407E-A947-70E740481C1C}">
                   <a14:useLocalDpi xmlns:a14="http://schemas.microsoft.com/office/drawing/2010/main" val="0"/>
                 </a:ext>
                 <a:ext uri="{96DAC541-7B7A-43D3-8B79-37D633B846F1}">
-                  <asvg:svgBlip xmlns:asvg="http://schemas.microsoft.com/office/drawing/2016/SVG/main" r:embed="rId31"/>
+                  <asvg:svgBlip xmlns:asvg="http://schemas.microsoft.com/office/drawing/2016/SVG/main" r:embed="rId29"/>
                 </a:ext>
               </a:extLst>
             </a:blip>
@@ -11373,41 +11138,6 @@
           </p:spPr>
         </p:pic>
       </p:grpSp>
-      <p:sp>
-        <p:nvSpPr>
-          <p:cNvPr id="44" name="TextBox 43">
-            <a:extLst>
-              <a:ext uri="{FF2B5EF4-FFF2-40B4-BE49-F238E27FC236}">
-                <a16:creationId xmlns:a16="http://schemas.microsoft.com/office/drawing/2014/main" id="{10C1E3FB-BD99-75D9-FE95-CD17FE3F9F8B}"/>
-              </a:ext>
-            </a:extLst>
-          </p:cNvPr>
-          <p:cNvSpPr txBox="1"/>
-          <p:nvPr/>
-        </p:nvSpPr>
-        <p:spPr>
-          <a:xfrm rot="16200000">
-            <a:off x="14901103" y="8163853"/>
-            <a:ext cx="1976823" cy="553998"/>
-          </a:xfrm>
-          <a:prstGeom prst="rect">
-            <a:avLst/>
-          </a:prstGeom>
-          <a:noFill/>
-        </p:spPr>
-        <p:txBody>
-          <a:bodyPr wrap="none" rtlCol="0">
-            <a:spAutoFit/>
-          </a:bodyPr>
-          <a:lstStyle/>
-          <a:p>
-            <a:r>
-              <a:rPr lang="en-US" sz="3000" dirty="0"/>
-              <a:t>Closeness</a:t>
-            </a:r>
-          </a:p>
-        </p:txBody>
-      </p:sp>
       <p:sp>
         <p:nvSpPr>
           <p:cNvPr id="46" name="TextBox 45">
@@ -12504,7 +12234,7 @@
         </p:nvSpPr>
         <p:spPr>
           <a:xfrm>
-            <a:off x="20959218" y="13549230"/>
+            <a:off x="20973506" y="13620670"/>
             <a:ext cx="1932677" cy="523220"/>
           </a:xfrm>
           <a:prstGeom prst="rect">
@@ -12539,7 +12269,7 @@
         </p:nvSpPr>
         <p:spPr>
           <a:xfrm>
-            <a:off x="28609845" y="5241364"/>
+            <a:off x="28598415" y="5241364"/>
             <a:ext cx="1932677" cy="523220"/>
           </a:xfrm>
           <a:prstGeom prst="rect">
@@ -12574,7 +12304,7 @@
         </p:nvSpPr>
         <p:spPr>
           <a:xfrm>
-            <a:off x="28570974" y="13544663"/>
+            <a:off x="28279896" y="13590309"/>
             <a:ext cx="1932677" cy="523220"/>
           </a:xfrm>
           <a:prstGeom prst="rect">
@@ -12590,7 +12320,7 @@
           <a:p>
             <a:r>
               <a:rPr lang="en-US" sz="2800" i="1" dirty="0"/>
-              <a:t>R = -.</a:t>
+              <a:t>R = -0.09</a:t>
             </a:r>
           </a:p>
         </p:txBody>
@@ -12689,6 +12419,1328 @@
           </a:p>
         </p:txBody>
       </p:sp>
+      <p:grpSp>
+        <p:nvGrpSpPr>
+          <p:cNvPr id="15705" name="Group 15704">
+            <a:extLst>
+              <a:ext uri="{FF2B5EF4-FFF2-40B4-BE49-F238E27FC236}">
+                <a16:creationId xmlns:a16="http://schemas.microsoft.com/office/drawing/2014/main" id="{B315F0CF-5757-721B-6FDA-3CDF8B65C4FC}"/>
+              </a:ext>
+            </a:extLst>
+          </p:cNvPr>
+          <p:cNvGrpSpPr/>
+          <p:nvPr/>
+        </p:nvGrpSpPr>
+        <p:grpSpPr>
+          <a:xfrm>
+            <a:off x="15693029" y="5633407"/>
+            <a:ext cx="6831019" cy="6045286"/>
+            <a:chOff x="15693029" y="5633407"/>
+            <a:chExt cx="6831019" cy="6045286"/>
+          </a:xfrm>
+        </p:grpSpPr>
+        <p:grpSp>
+          <p:nvGrpSpPr>
+            <p:cNvPr id="15694" name="Group 15693">
+              <a:extLst>
+                <a:ext uri="{FF2B5EF4-FFF2-40B4-BE49-F238E27FC236}">
+                  <a16:creationId xmlns:a16="http://schemas.microsoft.com/office/drawing/2014/main" id="{5055852D-9D38-8AD6-DEF6-61182430B0FF}"/>
+                </a:ext>
+              </a:extLst>
+            </p:cNvPr>
+            <p:cNvGrpSpPr/>
+            <p:nvPr/>
+          </p:nvGrpSpPr>
+          <p:grpSpPr>
+            <a:xfrm>
+              <a:off x="16753920" y="5633407"/>
+              <a:ext cx="5770128" cy="5560255"/>
+              <a:chOff x="1421938" y="14767343"/>
+              <a:chExt cx="5770128" cy="5560255"/>
+            </a:xfrm>
+          </p:grpSpPr>
+          <p:sp>
+            <p:nvSpPr>
+              <p:cNvPr id="15695" name="Rectangle 15694">
+                <a:extLst>
+                  <a:ext uri="{FF2B5EF4-FFF2-40B4-BE49-F238E27FC236}">
+                    <a16:creationId xmlns:a16="http://schemas.microsoft.com/office/drawing/2014/main" id="{59245EF6-EA65-4213-1DFF-5690FF2BCBB1}"/>
+                  </a:ext>
+                </a:extLst>
+              </p:cNvPr>
+              <p:cNvSpPr/>
+              <p:nvPr/>
+            </p:nvSpPr>
+            <p:spPr bwMode="auto">
+              <a:xfrm>
+                <a:off x="1421941" y="14767343"/>
+                <a:ext cx="5762869" cy="5560255"/>
+              </a:xfrm>
+              <a:prstGeom prst="rect">
+                <a:avLst/>
+              </a:prstGeom>
+              <a:solidFill>
+                <a:srgbClr val="EAEBEB"/>
+              </a:solidFill>
+              <a:ln w="9525" cap="flat" cmpd="sng" algn="ctr">
+                <a:noFill/>
+                <a:prstDash val="solid"/>
+                <a:round/>
+                <a:headEnd type="none" w="med" len="med"/>
+                <a:tailEnd type="none" w="med" len="med"/>
+              </a:ln>
+              <a:effectLst/>
+            </p:spPr>
+            <p:txBody>
+              <a:bodyPr vert="horz" wrap="square" lIns="91440" tIns="45720" rIns="91440" bIns="45720" numCol="1" rtlCol="0" anchor="t" anchorCtr="0" compatLnSpc="1">
+                <a:prstTxWarp prst="textNoShape">
+                  <a:avLst/>
+                </a:prstTxWarp>
+              </a:bodyPr>
+              <a:lstStyle/>
+              <a:p>
+                <a:pPr marL="0" marR="0" indent="0" algn="l" defTabSz="4389438" rtl="0" eaLnBrk="1" fontAlgn="base" latinLnBrk="0" hangingPunct="1">
+                  <a:lnSpc>
+                    <a:spcPct val="100000"/>
+                  </a:lnSpc>
+                  <a:spcBef>
+                    <a:spcPct val="0"/>
+                  </a:spcBef>
+                  <a:spcAft>
+                    <a:spcPct val="0"/>
+                  </a:spcAft>
+                  <a:buClrTx/>
+                  <a:buSzTx/>
+                  <a:buFontTx/>
+                  <a:buNone/>
+                  <a:tabLst/>
+                </a:pPr>
+                <a:endParaRPr kumimoji="0" lang="en-US" sz="1800" b="0" i="0" u="none" strike="noStrike" cap="none" normalizeH="0" baseline="0" dirty="0">
+                  <a:ln>
+                    <a:noFill/>
+                  </a:ln>
+                  <a:solidFill>
+                    <a:schemeClr val="tx1"/>
+                  </a:solidFill>
+                  <a:effectLst/>
+                  <a:latin typeface="Arial" charset="0"/>
+                  <a:cs typeface="Arial" charset="0"/>
+                </a:endParaRPr>
+              </a:p>
+            </p:txBody>
+          </p:sp>
+          <p:cxnSp>
+            <p:nvCxnSpPr>
+              <p:cNvPr id="15696" name="Straight Connector 15695">
+                <a:extLst>
+                  <a:ext uri="{FF2B5EF4-FFF2-40B4-BE49-F238E27FC236}">
+                    <a16:creationId xmlns:a16="http://schemas.microsoft.com/office/drawing/2014/main" id="{1F326A97-0889-F757-F9AC-A1939B026E6B}"/>
+                  </a:ext>
+                </a:extLst>
+              </p:cNvPr>
+              <p:cNvCxnSpPr/>
+              <p:nvPr/>
+            </p:nvCxnSpPr>
+            <p:spPr bwMode="auto">
+              <a:xfrm flipH="1">
+                <a:off x="4303375" y="14775666"/>
+                <a:ext cx="14515" cy="5551932"/>
+              </a:xfrm>
+              <a:prstGeom prst="line">
+                <a:avLst/>
+              </a:prstGeom>
+              <a:solidFill>
+                <a:schemeClr val="accent1"/>
+              </a:solidFill>
+              <a:ln w="25400" cap="flat" cmpd="sng" algn="ctr">
+                <a:solidFill>
+                  <a:schemeClr val="accent3"/>
+                </a:solidFill>
+                <a:prstDash val="solid"/>
+                <a:round/>
+                <a:headEnd type="none" w="med" len="med"/>
+                <a:tailEnd type="none" w="med" len="med"/>
+              </a:ln>
+              <a:effectLst/>
+            </p:spPr>
+          </p:cxnSp>
+          <p:cxnSp>
+            <p:nvCxnSpPr>
+              <p:cNvPr id="15697" name="Straight Connector 15696">
+                <a:extLst>
+                  <a:ext uri="{FF2B5EF4-FFF2-40B4-BE49-F238E27FC236}">
+                    <a16:creationId xmlns:a16="http://schemas.microsoft.com/office/drawing/2014/main" id="{318119A5-70BB-53DE-82A9-9A5AAEBA7808}"/>
+                  </a:ext>
+                </a:extLst>
+              </p:cNvPr>
+              <p:cNvCxnSpPr/>
+              <p:nvPr/>
+            </p:nvCxnSpPr>
+            <p:spPr bwMode="auto">
+              <a:xfrm flipH="1">
+                <a:off x="2840886" y="14771504"/>
+                <a:ext cx="14515" cy="5551932"/>
+              </a:xfrm>
+              <a:prstGeom prst="line">
+                <a:avLst/>
+              </a:prstGeom>
+              <a:solidFill>
+                <a:schemeClr val="accent1"/>
+              </a:solidFill>
+              <a:ln w="25400" cap="flat" cmpd="sng" algn="ctr">
+                <a:solidFill>
+                  <a:schemeClr val="accent3"/>
+                </a:solidFill>
+                <a:prstDash val="solid"/>
+                <a:round/>
+                <a:headEnd type="none" w="med" len="med"/>
+                <a:tailEnd type="none" w="med" len="med"/>
+              </a:ln>
+              <a:effectLst/>
+            </p:spPr>
+          </p:cxnSp>
+          <p:cxnSp>
+            <p:nvCxnSpPr>
+              <p:cNvPr id="15698" name="Straight Connector 15697">
+                <a:extLst>
+                  <a:ext uri="{FF2B5EF4-FFF2-40B4-BE49-F238E27FC236}">
+                    <a16:creationId xmlns:a16="http://schemas.microsoft.com/office/drawing/2014/main" id="{10C3C3A8-1BF5-3756-F475-F40BC5CEF4EC}"/>
+                  </a:ext>
+                </a:extLst>
+              </p:cNvPr>
+              <p:cNvCxnSpPr/>
+              <p:nvPr/>
+            </p:nvCxnSpPr>
+            <p:spPr bwMode="auto">
+              <a:xfrm flipH="1">
+                <a:off x="5722320" y="14767343"/>
+                <a:ext cx="14515" cy="5551932"/>
+              </a:xfrm>
+              <a:prstGeom prst="line">
+                <a:avLst/>
+              </a:prstGeom>
+              <a:solidFill>
+                <a:schemeClr val="accent1"/>
+              </a:solidFill>
+              <a:ln w="25400" cap="flat" cmpd="sng" algn="ctr">
+                <a:solidFill>
+                  <a:schemeClr val="accent3"/>
+                </a:solidFill>
+                <a:prstDash val="solid"/>
+                <a:round/>
+                <a:headEnd type="none" w="med" len="med"/>
+                <a:tailEnd type="none" w="med" len="med"/>
+              </a:ln>
+              <a:effectLst/>
+            </p:spPr>
+          </p:cxnSp>
+          <p:cxnSp>
+            <p:nvCxnSpPr>
+              <p:cNvPr id="15699" name="Straight Connector 15698">
+                <a:extLst>
+                  <a:ext uri="{FF2B5EF4-FFF2-40B4-BE49-F238E27FC236}">
+                    <a16:creationId xmlns:a16="http://schemas.microsoft.com/office/drawing/2014/main" id="{957E6B38-B9EE-99EE-54C6-E275A0014537}"/>
+                  </a:ext>
+                </a:extLst>
+              </p:cNvPr>
+              <p:cNvCxnSpPr>
+                <a:stCxn id="15695" idx="1"/>
+                <a:endCxn id="15695" idx="3"/>
+              </p:cNvCxnSpPr>
+              <p:nvPr/>
+            </p:nvCxnSpPr>
+            <p:spPr bwMode="auto">
+              <a:xfrm>
+                <a:off x="1421941" y="17547471"/>
+                <a:ext cx="5762869" cy="0"/>
+              </a:xfrm>
+              <a:prstGeom prst="line">
+                <a:avLst/>
+              </a:prstGeom>
+              <a:solidFill>
+                <a:schemeClr val="accent1"/>
+              </a:solidFill>
+              <a:ln w="25400" cap="flat" cmpd="sng" algn="ctr">
+                <a:solidFill>
+                  <a:schemeClr val="accent3"/>
+                </a:solidFill>
+                <a:prstDash val="solid"/>
+                <a:round/>
+                <a:headEnd type="none" w="med" len="med"/>
+                <a:tailEnd type="none" w="med" len="med"/>
+              </a:ln>
+              <a:effectLst/>
+            </p:spPr>
+          </p:cxnSp>
+          <p:cxnSp>
+            <p:nvCxnSpPr>
+              <p:cNvPr id="15700" name="Straight Connector 15699">
+                <a:extLst>
+                  <a:ext uri="{FF2B5EF4-FFF2-40B4-BE49-F238E27FC236}">
+                    <a16:creationId xmlns:a16="http://schemas.microsoft.com/office/drawing/2014/main" id="{1ADEF486-D1AE-3205-D856-B51DA49A5860}"/>
+                  </a:ext>
+                </a:extLst>
+              </p:cNvPr>
+              <p:cNvCxnSpPr/>
+              <p:nvPr/>
+            </p:nvCxnSpPr>
+            <p:spPr bwMode="auto">
+              <a:xfrm>
+                <a:off x="1421940" y="18803458"/>
+                <a:ext cx="5762869" cy="0"/>
+              </a:xfrm>
+              <a:prstGeom prst="line">
+                <a:avLst/>
+              </a:prstGeom>
+              <a:solidFill>
+                <a:schemeClr val="accent1"/>
+              </a:solidFill>
+              <a:ln w="25400" cap="flat" cmpd="sng" algn="ctr">
+                <a:solidFill>
+                  <a:schemeClr val="accent3"/>
+                </a:solidFill>
+                <a:prstDash val="solid"/>
+                <a:round/>
+                <a:headEnd type="none" w="med" len="med"/>
+                <a:tailEnd type="none" w="med" len="med"/>
+              </a:ln>
+              <a:effectLst/>
+            </p:spPr>
+          </p:cxnSp>
+          <p:cxnSp>
+            <p:nvCxnSpPr>
+              <p:cNvPr id="15701" name="Straight Connector 15700">
+                <a:extLst>
+                  <a:ext uri="{FF2B5EF4-FFF2-40B4-BE49-F238E27FC236}">
+                    <a16:creationId xmlns:a16="http://schemas.microsoft.com/office/drawing/2014/main" id="{2DF8FE5D-6599-B3FA-0149-297191C471D1}"/>
+                  </a:ext>
+                </a:extLst>
+              </p:cNvPr>
+              <p:cNvCxnSpPr/>
+              <p:nvPr/>
+            </p:nvCxnSpPr>
+            <p:spPr bwMode="auto">
+              <a:xfrm>
+                <a:off x="1429197" y="16328272"/>
+                <a:ext cx="5762869" cy="0"/>
+              </a:xfrm>
+              <a:prstGeom prst="line">
+                <a:avLst/>
+              </a:prstGeom>
+              <a:solidFill>
+                <a:schemeClr val="accent1"/>
+              </a:solidFill>
+              <a:ln w="25400" cap="flat" cmpd="sng" algn="ctr">
+                <a:solidFill>
+                  <a:schemeClr val="accent3"/>
+                </a:solidFill>
+                <a:prstDash val="solid"/>
+                <a:round/>
+                <a:headEnd type="none" w="med" len="med"/>
+                <a:tailEnd type="none" w="med" len="med"/>
+              </a:ln>
+              <a:effectLst/>
+            </p:spPr>
+          </p:cxnSp>
+          <p:cxnSp>
+            <p:nvCxnSpPr>
+              <p:cNvPr id="15702" name="Straight Connector 15701">
+                <a:extLst>
+                  <a:ext uri="{FF2B5EF4-FFF2-40B4-BE49-F238E27FC236}">
+                    <a16:creationId xmlns:a16="http://schemas.microsoft.com/office/drawing/2014/main" id="{EC14FBC0-C7F4-8654-EFD8-CCFF96ED3CCB}"/>
+                  </a:ext>
+                </a:extLst>
+              </p:cNvPr>
+              <p:cNvCxnSpPr/>
+              <p:nvPr/>
+            </p:nvCxnSpPr>
+            <p:spPr bwMode="auto">
+              <a:xfrm>
+                <a:off x="1421939" y="20048934"/>
+                <a:ext cx="5762869" cy="0"/>
+              </a:xfrm>
+              <a:prstGeom prst="line">
+                <a:avLst/>
+              </a:prstGeom>
+              <a:solidFill>
+                <a:schemeClr val="accent1"/>
+              </a:solidFill>
+              <a:ln w="25400" cap="flat" cmpd="sng" algn="ctr">
+                <a:solidFill>
+                  <a:schemeClr val="accent3"/>
+                </a:solidFill>
+                <a:prstDash val="solid"/>
+                <a:round/>
+                <a:headEnd type="none" w="med" len="med"/>
+                <a:tailEnd type="none" w="med" len="med"/>
+              </a:ln>
+              <a:effectLst/>
+            </p:spPr>
+          </p:cxnSp>
+          <p:cxnSp>
+            <p:nvCxnSpPr>
+              <p:cNvPr id="15703" name="Straight Connector 15702">
+                <a:extLst>
+                  <a:ext uri="{FF2B5EF4-FFF2-40B4-BE49-F238E27FC236}">
+                    <a16:creationId xmlns:a16="http://schemas.microsoft.com/office/drawing/2014/main" id="{594244E0-1BD5-0B30-441B-104DF3B61537}"/>
+                  </a:ext>
+                </a:extLst>
+              </p:cNvPr>
+              <p:cNvCxnSpPr/>
+              <p:nvPr/>
+            </p:nvCxnSpPr>
+            <p:spPr bwMode="auto">
+              <a:xfrm>
+                <a:off x="1421938" y="15088052"/>
+                <a:ext cx="5762869" cy="0"/>
+              </a:xfrm>
+              <a:prstGeom prst="line">
+                <a:avLst/>
+              </a:prstGeom>
+              <a:solidFill>
+                <a:schemeClr val="accent1"/>
+              </a:solidFill>
+              <a:ln w="25400" cap="flat" cmpd="sng" algn="ctr">
+                <a:solidFill>
+                  <a:schemeClr val="accent3"/>
+                </a:solidFill>
+                <a:prstDash val="solid"/>
+                <a:round/>
+                <a:headEnd type="none" w="med" len="med"/>
+                <a:tailEnd type="none" w="med" len="med"/>
+              </a:ln>
+              <a:effectLst/>
+            </p:spPr>
+          </p:cxnSp>
+        </p:grpSp>
+        <p:grpSp>
+          <p:nvGrpSpPr>
+            <p:cNvPr id="15686" name="Group 15685">
+              <a:extLst>
+                <a:ext uri="{FF2B5EF4-FFF2-40B4-BE49-F238E27FC236}">
+                  <a16:creationId xmlns:a16="http://schemas.microsoft.com/office/drawing/2014/main" id="{ED126016-F777-1072-6221-FC940E4C8421}"/>
+                </a:ext>
+              </a:extLst>
+            </p:cNvPr>
+            <p:cNvGrpSpPr/>
+            <p:nvPr/>
+          </p:nvGrpSpPr>
+          <p:grpSpPr>
+            <a:xfrm>
+              <a:off x="15693029" y="6238462"/>
+              <a:ext cx="6764612" cy="5440231"/>
+              <a:chOff x="15670877" y="5930781"/>
+              <a:chExt cx="6764612" cy="5440231"/>
+            </a:xfrm>
+          </p:grpSpPr>
+          <p:sp>
+            <p:nvSpPr>
+              <p:cNvPr id="44" name="TextBox 43">
+                <a:extLst>
+                  <a:ext uri="{FF2B5EF4-FFF2-40B4-BE49-F238E27FC236}">
+                    <a16:creationId xmlns:a16="http://schemas.microsoft.com/office/drawing/2014/main" id="{10C1E3FB-BD99-75D9-FE95-CD17FE3F9F8B}"/>
+                  </a:ext>
+                </a:extLst>
+              </p:cNvPr>
+              <p:cNvSpPr txBox="1"/>
+              <p:nvPr/>
+            </p:nvSpPr>
+            <p:spPr>
+              <a:xfrm rot="16200000">
+                <a:off x="14959464" y="8002434"/>
+                <a:ext cx="1976823" cy="553998"/>
+              </a:xfrm>
+              <a:prstGeom prst="rect">
+                <a:avLst/>
+              </a:prstGeom>
+              <a:noFill/>
+            </p:spPr>
+            <p:txBody>
+              <a:bodyPr wrap="none" rtlCol="0">
+                <a:spAutoFit/>
+              </a:bodyPr>
+              <a:lstStyle/>
+              <a:p>
+                <a:r>
+                  <a:rPr lang="en-US" sz="3000" dirty="0"/>
+                  <a:t>Closeness</a:t>
+                </a:r>
+              </a:p>
+            </p:txBody>
+          </p:sp>
+          <p:grpSp>
+            <p:nvGrpSpPr>
+              <p:cNvPr id="15685" name="Group 15684">
+                <a:extLst>
+                  <a:ext uri="{FF2B5EF4-FFF2-40B4-BE49-F238E27FC236}">
+                    <a16:creationId xmlns:a16="http://schemas.microsoft.com/office/drawing/2014/main" id="{F69E9B06-6DD1-AE5C-F052-C96A7F7CB40F}"/>
+                  </a:ext>
+                </a:extLst>
+              </p:cNvPr>
+              <p:cNvGrpSpPr/>
+              <p:nvPr/>
+            </p:nvGrpSpPr>
+            <p:grpSpPr>
+              <a:xfrm>
+                <a:off x="16093240" y="5930781"/>
+                <a:ext cx="6342249" cy="5440231"/>
+                <a:chOff x="16093240" y="5930781"/>
+                <a:chExt cx="6342249" cy="5440231"/>
+              </a:xfrm>
+            </p:grpSpPr>
+            <p:grpSp>
+              <p:nvGrpSpPr>
+                <p:cNvPr id="15666" name="Group 15665">
+                  <a:extLst>
+                    <a:ext uri="{FF2B5EF4-FFF2-40B4-BE49-F238E27FC236}">
+                      <a16:creationId xmlns:a16="http://schemas.microsoft.com/office/drawing/2014/main" id="{F4499BAD-2B87-B075-89D7-E684EC5B1F7C}"/>
+                    </a:ext>
+                  </a:extLst>
+                </p:cNvPr>
+                <p:cNvGrpSpPr/>
+                <p:nvPr/>
+              </p:nvGrpSpPr>
+              <p:grpSpPr>
+                <a:xfrm>
+                  <a:off x="16093240" y="6288749"/>
+                  <a:ext cx="6342249" cy="5082263"/>
+                  <a:chOff x="16307695" y="5718009"/>
+                  <a:chExt cx="4012927" cy="3083133"/>
+                </a:xfrm>
+              </p:grpSpPr>
+              <p:sp>
+                <p:nvSpPr>
+                  <p:cNvPr id="15660" name="TextBox 15659">
+                    <a:extLst>
+                      <a:ext uri="{FF2B5EF4-FFF2-40B4-BE49-F238E27FC236}">
+                        <a16:creationId xmlns:a16="http://schemas.microsoft.com/office/drawing/2014/main" id="{0766629E-BCF3-6556-AF99-A6859175E636}"/>
+                      </a:ext>
+                    </a:extLst>
+                  </p:cNvPr>
+                  <p:cNvSpPr txBox="1"/>
+                  <p:nvPr/>
+                </p:nvSpPr>
+                <p:spPr>
+                  <a:xfrm>
+                    <a:off x="16307695" y="8232313"/>
+                    <a:ext cx="243627" cy="317409"/>
+                  </a:xfrm>
+                  <a:prstGeom prst="rect">
+                    <a:avLst/>
+                  </a:prstGeom>
+                  <a:noFill/>
+                </p:spPr>
+                <p:txBody>
+                  <a:bodyPr wrap="none" rtlCol="0">
+                    <a:spAutoFit/>
+                  </a:bodyPr>
+                  <a:lstStyle/>
+                  <a:p>
+                    <a:r>
+                      <a:rPr lang="en-US" sz="2800" dirty="0"/>
+                      <a:t>0</a:t>
+                    </a:r>
+                  </a:p>
+                </p:txBody>
+              </p:sp>
+              <p:sp>
+                <p:nvSpPr>
+                  <p:cNvPr id="15662" name="TextBox 15661">
+                    <a:extLst>
+                      <a:ext uri="{FF2B5EF4-FFF2-40B4-BE49-F238E27FC236}">
+                        <a16:creationId xmlns:a16="http://schemas.microsoft.com/office/drawing/2014/main" id="{4DC189FA-5EF4-8645-EFD2-F4AA0CF414D9}"/>
+                      </a:ext>
+                    </a:extLst>
+                  </p:cNvPr>
+                  <p:cNvSpPr txBox="1"/>
+                  <p:nvPr/>
+                </p:nvSpPr>
+                <p:spPr>
+                  <a:xfrm>
+                    <a:off x="16323035" y="5718009"/>
+                    <a:ext cx="243627" cy="317409"/>
+                  </a:xfrm>
+                  <a:prstGeom prst="rect">
+                    <a:avLst/>
+                  </a:prstGeom>
+                  <a:noFill/>
+                </p:spPr>
+                <p:txBody>
+                  <a:bodyPr wrap="none" rtlCol="0">
+                    <a:spAutoFit/>
+                  </a:bodyPr>
+                  <a:lstStyle/>
+                  <a:p>
+                    <a:r>
+                      <a:rPr lang="en-US" sz="2800" dirty="0"/>
+                      <a:t>4</a:t>
+                    </a:r>
+                  </a:p>
+                </p:txBody>
+              </p:sp>
+              <p:sp>
+                <p:nvSpPr>
+                  <p:cNvPr id="15663" name="TextBox 15662">
+                    <a:extLst>
+                      <a:ext uri="{FF2B5EF4-FFF2-40B4-BE49-F238E27FC236}">
+                        <a16:creationId xmlns:a16="http://schemas.microsoft.com/office/drawing/2014/main" id="{FEBA7C19-438A-8BB9-F286-7161582091EA}"/>
+                      </a:ext>
+                    </a:extLst>
+                  </p:cNvPr>
+                  <p:cNvSpPr txBox="1"/>
+                  <p:nvPr/>
+                </p:nvSpPr>
+                <p:spPr>
+                  <a:xfrm>
+                    <a:off x="16934663" y="8465001"/>
+                    <a:ext cx="805531" cy="336081"/>
+                  </a:xfrm>
+                  <a:prstGeom prst="rect">
+                    <a:avLst/>
+                  </a:prstGeom>
+                  <a:noFill/>
+                </p:spPr>
+                <p:txBody>
+                  <a:bodyPr wrap="none" rtlCol="0">
+                    <a:spAutoFit/>
+                  </a:bodyPr>
+                  <a:lstStyle/>
+                  <a:p>
+                    <a:pPr algn="ctr"/>
+                    <a:r>
+                      <a:rPr lang="en-US" sz="3000" dirty="0"/>
+                      <a:t>Friend</a:t>
+                    </a:r>
+                  </a:p>
+                </p:txBody>
+              </p:sp>
+              <p:sp>
+                <p:nvSpPr>
+                  <p:cNvPr id="15664" name="TextBox 15663">
+                    <a:extLst>
+                      <a:ext uri="{FF2B5EF4-FFF2-40B4-BE49-F238E27FC236}">
+                        <a16:creationId xmlns:a16="http://schemas.microsoft.com/office/drawing/2014/main" id="{D1FDC6B6-A877-379F-C9B2-8D6C71CA3AC6}"/>
+                      </a:ext>
+                    </a:extLst>
+                  </p:cNvPr>
+                  <p:cNvSpPr txBox="1"/>
+                  <p:nvPr/>
+                </p:nvSpPr>
+                <p:spPr>
+                  <a:xfrm>
+                    <a:off x="18022351" y="8460397"/>
+                    <a:ext cx="1048955" cy="336081"/>
+                  </a:xfrm>
+                  <a:prstGeom prst="rect">
+                    <a:avLst/>
+                  </a:prstGeom>
+                  <a:noFill/>
+                </p:spPr>
+                <p:txBody>
+                  <a:bodyPr wrap="none" rtlCol="0">
+                    <a:spAutoFit/>
+                  </a:bodyPr>
+                  <a:lstStyle/>
+                  <a:p>
+                    <a:r>
+                      <a:rPr lang="en-US" sz="3000" dirty="0"/>
+                      <a:t>Stranger</a:t>
+                    </a:r>
+                  </a:p>
+                </p:txBody>
+              </p:sp>
+              <p:sp>
+                <p:nvSpPr>
+                  <p:cNvPr id="15665" name="TextBox 15664">
+                    <a:extLst>
+                      <a:ext uri="{FF2B5EF4-FFF2-40B4-BE49-F238E27FC236}">
+                        <a16:creationId xmlns:a16="http://schemas.microsoft.com/office/drawing/2014/main" id="{0D79EDF9-8FFC-03A5-0959-5F4339B2A174}"/>
+                      </a:ext>
+                    </a:extLst>
+                  </p:cNvPr>
+                  <p:cNvSpPr txBox="1"/>
+                  <p:nvPr/>
+                </p:nvSpPr>
+                <p:spPr>
+                  <a:xfrm>
+                    <a:off x="19136770" y="8465061"/>
+                    <a:ext cx="1183852" cy="336081"/>
+                  </a:xfrm>
+                  <a:prstGeom prst="rect">
+                    <a:avLst/>
+                  </a:prstGeom>
+                  <a:noFill/>
+                </p:spPr>
+                <p:txBody>
+                  <a:bodyPr wrap="none" rtlCol="0">
+                    <a:spAutoFit/>
+                  </a:bodyPr>
+                  <a:lstStyle/>
+                  <a:p>
+                    <a:pPr algn="ctr"/>
+                    <a:r>
+                      <a:rPr lang="en-US" sz="3000" dirty="0"/>
+                      <a:t>Computer</a:t>
+                    </a:r>
+                  </a:p>
+                </p:txBody>
+              </p:sp>
+            </p:grpSp>
+            <p:grpSp>
+              <p:nvGrpSpPr>
+                <p:cNvPr id="9" name="Group 8">
+                  <a:extLst>
+                    <a:ext uri="{FF2B5EF4-FFF2-40B4-BE49-F238E27FC236}">
+                      <a16:creationId xmlns:a16="http://schemas.microsoft.com/office/drawing/2014/main" id="{451527B6-A02F-7C50-BE7D-EF3CA2D82851}"/>
+                    </a:ext>
+                  </a:extLst>
+                </p:cNvPr>
+                <p:cNvGrpSpPr/>
+                <p:nvPr/>
+              </p:nvGrpSpPr>
+              <p:grpSpPr>
+                <a:xfrm>
+                  <a:off x="17478242" y="5930781"/>
+                  <a:ext cx="4174099" cy="4956803"/>
+                  <a:chOff x="35245965" y="10130725"/>
+                  <a:chExt cx="4594165" cy="5455637"/>
+                </a:xfrm>
+              </p:grpSpPr>
+              <p:sp>
+                <p:nvSpPr>
+                  <p:cNvPr id="49" name="Rectangle 48">
+                    <a:extLst>
+                      <a:ext uri="{FF2B5EF4-FFF2-40B4-BE49-F238E27FC236}">
+                        <a16:creationId xmlns:a16="http://schemas.microsoft.com/office/drawing/2014/main" id="{15A25FF5-81AC-06F1-BC36-DB83CAD59508}"/>
+                      </a:ext>
+                    </a:extLst>
+                  </p:cNvPr>
+                  <p:cNvSpPr/>
+                  <p:nvPr/>
+                </p:nvSpPr>
+                <p:spPr bwMode="auto">
+                  <a:xfrm>
+                    <a:off x="35245965" y="10341032"/>
+                    <a:ext cx="914400" cy="5245330"/>
+                  </a:xfrm>
+                  <a:prstGeom prst="rect">
+                    <a:avLst/>
+                  </a:prstGeom>
+                  <a:solidFill>
+                    <a:schemeClr val="accent1"/>
+                  </a:solidFill>
+                  <a:ln w="9525" cap="flat" cmpd="sng" algn="ctr">
+                    <a:noFill/>
+                    <a:prstDash val="solid"/>
+                    <a:round/>
+                    <a:headEnd type="none" w="med" len="med"/>
+                    <a:tailEnd type="none" w="med" len="med"/>
+                  </a:ln>
+                  <a:effectLst/>
+                </p:spPr>
+                <p:txBody>
+                  <a:bodyPr vert="horz" wrap="square" lIns="91440" tIns="45720" rIns="91440" bIns="45720" numCol="1" rtlCol="0" anchor="t" anchorCtr="0" compatLnSpc="1">
+                    <a:prstTxWarp prst="textNoShape">
+                      <a:avLst/>
+                    </a:prstTxWarp>
+                  </a:bodyPr>
+                  <a:lstStyle/>
+                  <a:p>
+                    <a:pPr marL="0" marR="0" indent="0" algn="l" defTabSz="4389438" rtl="0" eaLnBrk="1" fontAlgn="base" latinLnBrk="0" hangingPunct="1">
+                      <a:lnSpc>
+                        <a:spcPct val="100000"/>
+                      </a:lnSpc>
+                      <a:spcBef>
+                        <a:spcPct val="0"/>
+                      </a:spcBef>
+                      <a:spcAft>
+                        <a:spcPct val="0"/>
+                      </a:spcAft>
+                      <a:buClrTx/>
+                      <a:buSzTx/>
+                      <a:buFontTx/>
+                      <a:buNone/>
+                      <a:tabLst/>
+                    </a:pPr>
+                    <a:endParaRPr kumimoji="0" lang="en-US" sz="1800" b="0" i="0" u="none" strike="noStrike" cap="none" normalizeH="0" baseline="0">
+                      <a:ln>
+                        <a:noFill/>
+                      </a:ln>
+                      <a:solidFill>
+                        <a:schemeClr val="tx1"/>
+                      </a:solidFill>
+                      <a:effectLst/>
+                      <a:latin typeface="Arial" charset="0"/>
+                      <a:cs typeface="Arial" charset="0"/>
+                    </a:endParaRPr>
+                  </a:p>
+                </p:txBody>
+              </p:sp>
+              <p:sp>
+                <p:nvSpPr>
+                  <p:cNvPr id="50" name="Rectangle 49">
+                    <a:extLst>
+                      <a:ext uri="{FF2B5EF4-FFF2-40B4-BE49-F238E27FC236}">
+                        <a16:creationId xmlns:a16="http://schemas.microsoft.com/office/drawing/2014/main" id="{E562E75E-69FD-32B9-DA52-8CFDD4BA6E30}"/>
+                      </a:ext>
+                    </a:extLst>
+                  </p:cNvPr>
+                  <p:cNvSpPr/>
+                  <p:nvPr/>
+                </p:nvSpPr>
+                <p:spPr bwMode="auto">
+                  <a:xfrm>
+                    <a:off x="37085847" y="13716000"/>
+                    <a:ext cx="914400" cy="1859437"/>
+                  </a:xfrm>
+                  <a:prstGeom prst="rect">
+                    <a:avLst/>
+                  </a:prstGeom>
+                  <a:solidFill>
+                    <a:srgbClr val="72BFC6"/>
+                  </a:solidFill>
+                  <a:ln w="9525" cap="flat" cmpd="sng" algn="ctr">
+                    <a:noFill/>
+                    <a:prstDash val="solid"/>
+                    <a:round/>
+                    <a:headEnd type="none" w="med" len="med"/>
+                    <a:tailEnd type="none" w="med" len="med"/>
+                  </a:ln>
+                  <a:effectLst/>
+                </p:spPr>
+                <p:txBody>
+                  <a:bodyPr vert="horz" wrap="square" lIns="91440" tIns="45720" rIns="91440" bIns="45720" numCol="1" rtlCol="0" anchor="t" anchorCtr="0" compatLnSpc="1">
+                    <a:prstTxWarp prst="textNoShape">
+                      <a:avLst/>
+                    </a:prstTxWarp>
+                  </a:bodyPr>
+                  <a:lstStyle/>
+                  <a:p>
+                    <a:pPr marL="0" marR="0" indent="0" algn="l" defTabSz="4389438" rtl="0" eaLnBrk="1" fontAlgn="base" latinLnBrk="0" hangingPunct="1">
+                      <a:lnSpc>
+                        <a:spcPct val="100000"/>
+                      </a:lnSpc>
+                      <a:spcBef>
+                        <a:spcPct val="0"/>
+                      </a:spcBef>
+                      <a:spcAft>
+                        <a:spcPct val="0"/>
+                      </a:spcAft>
+                      <a:buClrTx/>
+                      <a:buSzTx/>
+                      <a:buFontTx/>
+                      <a:buNone/>
+                      <a:tabLst/>
+                    </a:pPr>
+                    <a:endParaRPr kumimoji="0" lang="en-US" sz="1800" b="0" i="0" u="none" strike="noStrike" cap="none" normalizeH="0" baseline="0">
+                      <a:ln>
+                        <a:noFill/>
+                      </a:ln>
+                      <a:solidFill>
+                        <a:schemeClr val="tx1"/>
+                      </a:solidFill>
+                      <a:effectLst/>
+                      <a:latin typeface="Arial" charset="0"/>
+                      <a:cs typeface="Arial" charset="0"/>
+                    </a:endParaRPr>
+                  </a:p>
+                </p:txBody>
+              </p:sp>
+              <p:sp>
+                <p:nvSpPr>
+                  <p:cNvPr id="51" name="Rectangle 50">
+                    <a:extLst>
+                      <a:ext uri="{FF2B5EF4-FFF2-40B4-BE49-F238E27FC236}">
+                        <a16:creationId xmlns:a16="http://schemas.microsoft.com/office/drawing/2014/main" id="{4528B3B9-AEEA-D1A4-0F7D-9568094B7BBF}"/>
+                      </a:ext>
+                    </a:extLst>
+                  </p:cNvPr>
+                  <p:cNvSpPr/>
+                  <p:nvPr/>
+                </p:nvSpPr>
+                <p:spPr bwMode="auto">
+                  <a:xfrm>
+                    <a:off x="38925730" y="13716000"/>
+                    <a:ext cx="914400" cy="1859437"/>
+                  </a:xfrm>
+                  <a:prstGeom prst="rect">
+                    <a:avLst/>
+                  </a:prstGeom>
+                  <a:solidFill>
+                    <a:srgbClr val="3C8C94"/>
+                  </a:solidFill>
+                  <a:ln w="9525" cap="flat" cmpd="sng" algn="ctr">
+                    <a:noFill/>
+                    <a:prstDash val="solid"/>
+                    <a:round/>
+                    <a:headEnd type="none" w="med" len="med"/>
+                    <a:tailEnd type="none" w="med" len="med"/>
+                  </a:ln>
+                  <a:effectLst/>
+                </p:spPr>
+                <p:txBody>
+                  <a:bodyPr vert="horz" wrap="square" lIns="91440" tIns="45720" rIns="91440" bIns="45720" numCol="1" rtlCol="0" anchor="t" anchorCtr="0" compatLnSpc="1">
+                    <a:prstTxWarp prst="textNoShape">
+                      <a:avLst/>
+                    </a:prstTxWarp>
+                  </a:bodyPr>
+                  <a:lstStyle/>
+                  <a:p>
+                    <a:pPr marL="0" marR="0" indent="0" algn="l" defTabSz="4389438" rtl="0" eaLnBrk="1" fontAlgn="base" latinLnBrk="0" hangingPunct="1">
+                      <a:lnSpc>
+                        <a:spcPct val="100000"/>
+                      </a:lnSpc>
+                      <a:spcBef>
+                        <a:spcPct val="0"/>
+                      </a:spcBef>
+                      <a:spcAft>
+                        <a:spcPct val="0"/>
+                      </a:spcAft>
+                      <a:buClrTx/>
+                      <a:buSzTx/>
+                      <a:buFontTx/>
+                      <a:buNone/>
+                      <a:tabLst/>
+                    </a:pPr>
+                    <a:endParaRPr kumimoji="0" lang="en-US" sz="1800" b="0" i="0" u="none" strike="noStrike" cap="none" normalizeH="0" baseline="0">
+                      <a:ln>
+                        <a:noFill/>
+                      </a:ln>
+                      <a:solidFill>
+                        <a:schemeClr val="tx1"/>
+                      </a:solidFill>
+                      <a:effectLst/>
+                      <a:latin typeface="Arial" charset="0"/>
+                      <a:cs typeface="Arial" charset="0"/>
+                    </a:endParaRPr>
+                  </a:p>
+                </p:txBody>
+              </p:sp>
+              <p:grpSp>
+                <p:nvGrpSpPr>
+                  <p:cNvPr id="53" name="Group 52">
+                    <a:extLst>
+                      <a:ext uri="{FF2B5EF4-FFF2-40B4-BE49-F238E27FC236}">
+                        <a16:creationId xmlns:a16="http://schemas.microsoft.com/office/drawing/2014/main" id="{E70E275C-F7FC-6193-D2BC-A588C1C4AA37}"/>
+                      </a:ext>
+                    </a:extLst>
+                  </p:cNvPr>
+                  <p:cNvGrpSpPr/>
+                  <p:nvPr/>
+                </p:nvGrpSpPr>
+                <p:grpSpPr>
+                  <a:xfrm>
+                    <a:off x="35522114" y="10130725"/>
+                    <a:ext cx="351296" cy="423621"/>
+                    <a:chOff x="35522114" y="10130725"/>
+                    <a:chExt cx="351296" cy="423621"/>
+                  </a:xfrm>
+                </p:grpSpPr>
+                <p:cxnSp>
+                  <p:nvCxnSpPr>
+                    <p:cNvPr id="63" name="Straight Connector 62">
+                      <a:extLst>
+                        <a:ext uri="{FF2B5EF4-FFF2-40B4-BE49-F238E27FC236}">
+                          <a16:creationId xmlns:a16="http://schemas.microsoft.com/office/drawing/2014/main" id="{9CF5B435-CE5C-BA28-F65C-12061DC5B489}"/>
+                        </a:ext>
+                      </a:extLst>
+                    </p:cNvPr>
+                    <p:cNvCxnSpPr>
+                      <a:cxnSpLocks/>
+                    </p:cNvCxnSpPr>
+                    <p:nvPr/>
+                  </p:nvCxnSpPr>
+                  <p:spPr bwMode="auto">
+                    <a:xfrm>
+                      <a:off x="35697998" y="10130725"/>
+                      <a:ext cx="0" cy="423621"/>
+                    </a:xfrm>
+                    <a:prstGeom prst="line">
+                      <a:avLst/>
+                    </a:prstGeom>
+                    <a:solidFill>
+                      <a:schemeClr val="accent1"/>
+                    </a:solidFill>
+                    <a:ln w="19050" cap="flat" cmpd="sng" algn="ctr">
+                      <a:solidFill>
+                        <a:schemeClr val="tx1"/>
+                      </a:solidFill>
+                      <a:prstDash val="solid"/>
+                      <a:round/>
+                      <a:headEnd type="none" w="med" len="med"/>
+                      <a:tailEnd type="none" w="med" len="med"/>
+                    </a:ln>
+                    <a:effectLst/>
+                  </p:spPr>
+                </p:cxnSp>
+                <p:cxnSp>
+                  <p:nvCxnSpPr>
+                    <p:cNvPr id="15681" name="Straight Connector 15680">
+                      <a:extLst>
+                        <a:ext uri="{FF2B5EF4-FFF2-40B4-BE49-F238E27FC236}">
+                          <a16:creationId xmlns:a16="http://schemas.microsoft.com/office/drawing/2014/main" id="{BEA6FFBB-9D35-354B-3AC6-E8A8F85B63E1}"/>
+                        </a:ext>
+                      </a:extLst>
+                    </p:cNvPr>
+                    <p:cNvCxnSpPr/>
+                    <p:nvPr/>
+                  </p:nvCxnSpPr>
+                  <p:spPr bwMode="auto">
+                    <a:xfrm>
+                      <a:off x="35522115" y="10130725"/>
+                      <a:ext cx="351295" cy="0"/>
+                    </a:xfrm>
+                    <a:prstGeom prst="line">
+                      <a:avLst/>
+                    </a:prstGeom>
+                    <a:solidFill>
+                      <a:schemeClr val="accent1"/>
+                    </a:solidFill>
+                    <a:ln w="19050" cap="flat" cmpd="sng" algn="ctr">
+                      <a:solidFill>
+                        <a:schemeClr val="tx1"/>
+                      </a:solidFill>
+                      <a:prstDash val="solid"/>
+                      <a:round/>
+                      <a:headEnd type="none" w="med" len="med"/>
+                      <a:tailEnd type="none" w="med" len="med"/>
+                    </a:ln>
+                    <a:effectLst/>
+                  </p:spPr>
+                </p:cxnSp>
+                <p:cxnSp>
+                  <p:nvCxnSpPr>
+                    <p:cNvPr id="15682" name="Straight Connector 15681">
+                      <a:extLst>
+                        <a:ext uri="{FF2B5EF4-FFF2-40B4-BE49-F238E27FC236}">
+                          <a16:creationId xmlns:a16="http://schemas.microsoft.com/office/drawing/2014/main" id="{5C2B39A8-E98F-C573-D650-2D9B21FAC8D9}"/>
+                        </a:ext>
+                      </a:extLst>
+                    </p:cNvPr>
+                    <p:cNvCxnSpPr/>
+                    <p:nvPr/>
+                  </p:nvCxnSpPr>
+                  <p:spPr bwMode="auto">
+                    <a:xfrm>
+                      <a:off x="35522114" y="10554346"/>
+                      <a:ext cx="351295" cy="0"/>
+                    </a:xfrm>
+                    <a:prstGeom prst="line">
+                      <a:avLst/>
+                    </a:prstGeom>
+                    <a:solidFill>
+                      <a:schemeClr val="accent1"/>
+                    </a:solidFill>
+                    <a:ln w="19050" cap="flat" cmpd="sng" algn="ctr">
+                      <a:solidFill>
+                        <a:schemeClr val="tx1"/>
+                      </a:solidFill>
+                      <a:prstDash val="solid"/>
+                      <a:round/>
+                      <a:headEnd type="none" w="med" len="med"/>
+                      <a:tailEnd type="none" w="med" len="med"/>
+                    </a:ln>
+                    <a:effectLst/>
+                  </p:spPr>
+                </p:cxnSp>
+              </p:grpSp>
+              <p:grpSp>
+                <p:nvGrpSpPr>
+                  <p:cNvPr id="54" name="Group 53">
+                    <a:extLst>
+                      <a:ext uri="{FF2B5EF4-FFF2-40B4-BE49-F238E27FC236}">
+                        <a16:creationId xmlns:a16="http://schemas.microsoft.com/office/drawing/2014/main" id="{968BAFCC-52D9-BFB9-CC07-A3696B041520}"/>
+                      </a:ext>
+                    </a:extLst>
+                  </p:cNvPr>
+                  <p:cNvGrpSpPr/>
+                  <p:nvPr/>
+                </p:nvGrpSpPr>
+                <p:grpSpPr>
+                  <a:xfrm>
+                    <a:off x="37367399" y="13504189"/>
+                    <a:ext cx="351296" cy="423621"/>
+                    <a:chOff x="35522114" y="10130725"/>
+                    <a:chExt cx="351296" cy="423621"/>
+                  </a:xfrm>
+                </p:grpSpPr>
+                <p:cxnSp>
+                  <p:nvCxnSpPr>
+                    <p:cNvPr id="60" name="Straight Connector 59">
+                      <a:extLst>
+                        <a:ext uri="{FF2B5EF4-FFF2-40B4-BE49-F238E27FC236}">
+                          <a16:creationId xmlns:a16="http://schemas.microsoft.com/office/drawing/2014/main" id="{749B3F97-30F0-6794-696B-E661B4B3BA94}"/>
+                        </a:ext>
+                      </a:extLst>
+                    </p:cNvPr>
+                    <p:cNvCxnSpPr>
+                      <a:cxnSpLocks/>
+                    </p:cNvCxnSpPr>
+                    <p:nvPr/>
+                  </p:nvCxnSpPr>
+                  <p:spPr bwMode="auto">
+                    <a:xfrm>
+                      <a:off x="35697998" y="10130725"/>
+                      <a:ext cx="0" cy="423621"/>
+                    </a:xfrm>
+                    <a:prstGeom prst="line">
+                      <a:avLst/>
+                    </a:prstGeom>
+                    <a:solidFill>
+                      <a:schemeClr val="accent1"/>
+                    </a:solidFill>
+                    <a:ln w="19050" cap="flat" cmpd="sng" algn="ctr">
+                      <a:solidFill>
+                        <a:schemeClr val="tx1"/>
+                      </a:solidFill>
+                      <a:prstDash val="solid"/>
+                      <a:round/>
+                      <a:headEnd type="none" w="med" len="med"/>
+                      <a:tailEnd type="none" w="med" len="med"/>
+                    </a:ln>
+                    <a:effectLst/>
+                  </p:spPr>
+                </p:cxnSp>
+                <p:cxnSp>
+                  <p:nvCxnSpPr>
+                    <p:cNvPr id="61" name="Straight Connector 60">
+                      <a:extLst>
+                        <a:ext uri="{FF2B5EF4-FFF2-40B4-BE49-F238E27FC236}">
+                          <a16:creationId xmlns:a16="http://schemas.microsoft.com/office/drawing/2014/main" id="{0340D7E1-5C88-15E7-0532-E190399621A6}"/>
+                        </a:ext>
+                      </a:extLst>
+                    </p:cNvPr>
+                    <p:cNvCxnSpPr/>
+                    <p:nvPr/>
+                  </p:nvCxnSpPr>
+                  <p:spPr bwMode="auto">
+                    <a:xfrm>
+                      <a:off x="35522115" y="10130725"/>
+                      <a:ext cx="351295" cy="0"/>
+                    </a:xfrm>
+                    <a:prstGeom prst="line">
+                      <a:avLst/>
+                    </a:prstGeom>
+                    <a:solidFill>
+                      <a:schemeClr val="accent1"/>
+                    </a:solidFill>
+                    <a:ln w="19050" cap="flat" cmpd="sng" algn="ctr">
+                      <a:solidFill>
+                        <a:schemeClr val="tx1"/>
+                      </a:solidFill>
+                      <a:prstDash val="solid"/>
+                      <a:round/>
+                      <a:headEnd type="none" w="med" len="med"/>
+                      <a:tailEnd type="none" w="med" len="med"/>
+                    </a:ln>
+                    <a:effectLst/>
+                  </p:spPr>
+                </p:cxnSp>
+                <p:cxnSp>
+                  <p:nvCxnSpPr>
+                    <p:cNvPr id="62" name="Straight Connector 61">
+                      <a:extLst>
+                        <a:ext uri="{FF2B5EF4-FFF2-40B4-BE49-F238E27FC236}">
+                          <a16:creationId xmlns:a16="http://schemas.microsoft.com/office/drawing/2014/main" id="{7F959E90-D232-A788-EBD7-D8540E0E969F}"/>
+                        </a:ext>
+                      </a:extLst>
+                    </p:cNvPr>
+                    <p:cNvCxnSpPr/>
+                    <p:nvPr/>
+                  </p:nvCxnSpPr>
+                  <p:spPr bwMode="auto">
+                    <a:xfrm>
+                      <a:off x="35522114" y="10554346"/>
+                      <a:ext cx="351295" cy="0"/>
+                    </a:xfrm>
+                    <a:prstGeom prst="line">
+                      <a:avLst/>
+                    </a:prstGeom>
+                    <a:solidFill>
+                      <a:schemeClr val="accent1"/>
+                    </a:solidFill>
+                    <a:ln w="19050" cap="flat" cmpd="sng" algn="ctr">
+                      <a:solidFill>
+                        <a:schemeClr val="tx1"/>
+                      </a:solidFill>
+                      <a:prstDash val="solid"/>
+                      <a:round/>
+                      <a:headEnd type="none" w="med" len="med"/>
+                      <a:tailEnd type="none" w="med" len="med"/>
+                    </a:ln>
+                    <a:effectLst/>
+                  </p:spPr>
+                </p:cxnSp>
+              </p:grpSp>
+              <p:grpSp>
+                <p:nvGrpSpPr>
+                  <p:cNvPr id="55" name="Group 54">
+                    <a:extLst>
+                      <a:ext uri="{FF2B5EF4-FFF2-40B4-BE49-F238E27FC236}">
+                        <a16:creationId xmlns:a16="http://schemas.microsoft.com/office/drawing/2014/main" id="{083FCD46-2613-2829-B84B-4421FD99A2AF}"/>
+                      </a:ext>
+                    </a:extLst>
+                  </p:cNvPr>
+                  <p:cNvGrpSpPr/>
+                  <p:nvPr/>
+                </p:nvGrpSpPr>
+                <p:grpSpPr>
+                  <a:xfrm>
+                    <a:off x="39207283" y="13504188"/>
+                    <a:ext cx="351296" cy="423621"/>
+                    <a:chOff x="35522114" y="10130725"/>
+                    <a:chExt cx="351296" cy="423621"/>
+                  </a:xfrm>
+                </p:grpSpPr>
+                <p:cxnSp>
+                  <p:nvCxnSpPr>
+                    <p:cNvPr id="57" name="Straight Connector 56">
+                      <a:extLst>
+                        <a:ext uri="{FF2B5EF4-FFF2-40B4-BE49-F238E27FC236}">
+                          <a16:creationId xmlns:a16="http://schemas.microsoft.com/office/drawing/2014/main" id="{DA16309C-2410-022D-0276-EB3CFD6D5CA8}"/>
+                        </a:ext>
+                      </a:extLst>
+                    </p:cNvPr>
+                    <p:cNvCxnSpPr>
+                      <a:cxnSpLocks/>
+                    </p:cNvCxnSpPr>
+                    <p:nvPr/>
+                  </p:nvCxnSpPr>
+                  <p:spPr bwMode="auto">
+                    <a:xfrm>
+                      <a:off x="35697998" y="10130725"/>
+                      <a:ext cx="0" cy="423621"/>
+                    </a:xfrm>
+                    <a:prstGeom prst="line">
+                      <a:avLst/>
+                    </a:prstGeom>
+                    <a:solidFill>
+                      <a:schemeClr val="accent1"/>
+                    </a:solidFill>
+                    <a:ln w="19050" cap="flat" cmpd="sng" algn="ctr">
+                      <a:solidFill>
+                        <a:schemeClr val="tx1"/>
+                      </a:solidFill>
+                      <a:prstDash val="solid"/>
+                      <a:round/>
+                      <a:headEnd type="none" w="med" len="med"/>
+                      <a:tailEnd type="none" w="med" len="med"/>
+                    </a:ln>
+                    <a:effectLst/>
+                  </p:spPr>
+                </p:cxnSp>
+                <p:cxnSp>
+                  <p:nvCxnSpPr>
+                    <p:cNvPr id="58" name="Straight Connector 57">
+                      <a:extLst>
+                        <a:ext uri="{FF2B5EF4-FFF2-40B4-BE49-F238E27FC236}">
+                          <a16:creationId xmlns:a16="http://schemas.microsoft.com/office/drawing/2014/main" id="{5B96560F-9416-EAF2-0E4F-4E8C90F317E8}"/>
+                        </a:ext>
+                      </a:extLst>
+                    </p:cNvPr>
+                    <p:cNvCxnSpPr/>
+                    <p:nvPr/>
+                  </p:nvCxnSpPr>
+                  <p:spPr bwMode="auto">
+                    <a:xfrm>
+                      <a:off x="35522115" y="10130725"/>
+                      <a:ext cx="351295" cy="0"/>
+                    </a:xfrm>
+                    <a:prstGeom prst="line">
+                      <a:avLst/>
+                    </a:prstGeom>
+                    <a:solidFill>
+                      <a:schemeClr val="accent1"/>
+                    </a:solidFill>
+                    <a:ln w="19050" cap="flat" cmpd="sng" algn="ctr">
+                      <a:solidFill>
+                        <a:schemeClr val="tx1"/>
+                      </a:solidFill>
+                      <a:prstDash val="solid"/>
+                      <a:round/>
+                      <a:headEnd type="none" w="med" len="med"/>
+                      <a:tailEnd type="none" w="med" len="med"/>
+                    </a:ln>
+                    <a:effectLst/>
+                  </p:spPr>
+                </p:cxnSp>
+                <p:cxnSp>
+                  <p:nvCxnSpPr>
+                    <p:cNvPr id="59" name="Straight Connector 58">
+                      <a:extLst>
+                        <a:ext uri="{FF2B5EF4-FFF2-40B4-BE49-F238E27FC236}">
+                          <a16:creationId xmlns:a16="http://schemas.microsoft.com/office/drawing/2014/main" id="{8DBCB99F-AF0E-1B7D-06FC-2CE1F0FBD87F}"/>
+                        </a:ext>
+                      </a:extLst>
+                    </p:cNvPr>
+                    <p:cNvCxnSpPr/>
+                    <p:nvPr/>
+                  </p:nvCxnSpPr>
+                  <p:spPr bwMode="auto">
+                    <a:xfrm>
+                      <a:off x="35522114" y="10554346"/>
+                      <a:ext cx="351295" cy="0"/>
+                    </a:xfrm>
+                    <a:prstGeom prst="line">
+                      <a:avLst/>
+                    </a:prstGeom>
+                    <a:solidFill>
+                      <a:schemeClr val="accent1"/>
+                    </a:solidFill>
+                    <a:ln w="19050" cap="flat" cmpd="sng" algn="ctr">
+                      <a:solidFill>
+                        <a:schemeClr val="tx1"/>
+                      </a:solidFill>
+                      <a:prstDash val="solid"/>
+                      <a:round/>
+                      <a:headEnd type="none" w="med" len="med"/>
+                      <a:tailEnd type="none" w="med" len="med"/>
+                    </a:ln>
+                    <a:effectLst/>
+                  </p:spPr>
+                </p:cxnSp>
+              </p:grpSp>
+            </p:grpSp>
+          </p:grpSp>
+        </p:grpSp>
+      </p:grpSp>
+      <p:cxnSp>
+        <p:nvCxnSpPr>
+          <p:cNvPr id="15712" name="Straight Connector 15711">
+            <a:extLst>
+              <a:ext uri="{FF2B5EF4-FFF2-40B4-BE49-F238E27FC236}">
+                <a16:creationId xmlns:a16="http://schemas.microsoft.com/office/drawing/2014/main" id="{4BBAB568-052E-34B5-544B-C63905197C01}"/>
+              </a:ext>
+            </a:extLst>
+          </p:cNvPr>
+          <p:cNvCxnSpPr>
+            <a:cxnSpLocks/>
+          </p:cNvCxnSpPr>
+          <p:nvPr/>
+        </p:nvCxnSpPr>
+        <p:spPr bwMode="auto">
+          <a:xfrm>
+            <a:off x="16761179" y="11181224"/>
+            <a:ext cx="5755610" cy="0"/>
+          </a:xfrm>
+          <a:prstGeom prst="line">
+            <a:avLst/>
+          </a:prstGeom>
+          <a:solidFill>
+            <a:schemeClr val="accent1"/>
+          </a:solidFill>
+          <a:ln w="9525" cap="flat" cmpd="sng" algn="ctr">
+            <a:solidFill>
+              <a:schemeClr val="tx1"/>
+            </a:solidFill>
+            <a:prstDash val="solid"/>
+            <a:round/>
+            <a:headEnd type="none" w="med" len="med"/>
+            <a:tailEnd type="none" w="med" len="med"/>
+          </a:ln>
+          <a:effectLst/>
+        </p:spPr>
+      </p:cxnSp>
     </p:spTree>
     <p:extLst>
       <p:ext uri="{BB962C8B-B14F-4D97-AF65-F5344CB8AC3E}">
@@ -14854,6 +15906,995 @@
           </p:pic>
         </p:grpSp>
       </p:grpSp>
+      <p:grpSp>
+        <p:nvGrpSpPr>
+          <p:cNvPr id="68" name="Group 67">
+            <a:extLst>
+              <a:ext uri="{FF2B5EF4-FFF2-40B4-BE49-F238E27FC236}">
+                <a16:creationId xmlns:a16="http://schemas.microsoft.com/office/drawing/2014/main" id="{528FCC7C-6755-8F55-4C3F-4AD8749A8074}"/>
+              </a:ext>
+            </a:extLst>
+          </p:cNvPr>
+          <p:cNvGrpSpPr/>
+          <p:nvPr/>
+        </p:nvGrpSpPr>
+        <p:grpSpPr>
+          <a:xfrm>
+            <a:off x="15013924" y="12119306"/>
+            <a:ext cx="4594166" cy="5455639"/>
+            <a:chOff x="35245964" y="10130725"/>
+            <a:chExt cx="4594166" cy="5455639"/>
+          </a:xfrm>
+        </p:grpSpPr>
+        <p:sp>
+          <p:nvSpPr>
+            <p:cNvPr id="6" name="Rectangle 5">
+              <a:extLst>
+                <a:ext uri="{FF2B5EF4-FFF2-40B4-BE49-F238E27FC236}">
+                  <a16:creationId xmlns:a16="http://schemas.microsoft.com/office/drawing/2014/main" id="{CECEAC77-0B26-1854-0835-68A245732429}"/>
+                </a:ext>
+              </a:extLst>
+            </p:cNvPr>
+            <p:cNvSpPr/>
+            <p:nvPr/>
+          </p:nvSpPr>
+          <p:spPr bwMode="auto">
+            <a:xfrm>
+              <a:off x="35245964" y="10341033"/>
+              <a:ext cx="914400" cy="5245331"/>
+            </a:xfrm>
+            <a:prstGeom prst="rect">
+              <a:avLst/>
+            </a:prstGeom>
+            <a:solidFill>
+              <a:srgbClr val="3C8C94"/>
+            </a:solidFill>
+            <a:ln w="9525" cap="flat" cmpd="sng" algn="ctr">
+              <a:noFill/>
+              <a:prstDash val="solid"/>
+              <a:round/>
+              <a:headEnd type="none" w="med" len="med"/>
+              <a:tailEnd type="none" w="med" len="med"/>
+            </a:ln>
+            <a:effectLst/>
+          </p:spPr>
+          <p:txBody>
+            <a:bodyPr vert="horz" wrap="square" lIns="91440" tIns="45720" rIns="91440" bIns="45720" numCol="1" rtlCol="0" anchor="t" anchorCtr="0" compatLnSpc="1">
+              <a:prstTxWarp prst="textNoShape">
+                <a:avLst/>
+              </a:prstTxWarp>
+            </a:bodyPr>
+            <a:lstStyle/>
+            <a:p>
+              <a:pPr marL="0" marR="0" indent="0" algn="l" defTabSz="4389438" rtl="0" eaLnBrk="1" fontAlgn="base" latinLnBrk="0" hangingPunct="1">
+                <a:lnSpc>
+                  <a:spcPct val="100000"/>
+                </a:lnSpc>
+                <a:spcBef>
+                  <a:spcPct val="0"/>
+                </a:spcBef>
+                <a:spcAft>
+                  <a:spcPct val="0"/>
+                </a:spcAft>
+                <a:buClrTx/>
+                <a:buSzTx/>
+                <a:buFontTx/>
+                <a:buNone/>
+                <a:tabLst/>
+              </a:pPr>
+              <a:endParaRPr kumimoji="0" lang="en-US" sz="1800" b="0" i="0" u="none" strike="noStrike" cap="none" normalizeH="0" baseline="0">
+                <a:ln>
+                  <a:noFill/>
+                </a:ln>
+                <a:solidFill>
+                  <a:schemeClr val="tx1"/>
+                </a:solidFill>
+                <a:effectLst/>
+                <a:latin typeface="Arial" charset="0"/>
+                <a:cs typeface="Arial" charset="0"/>
+              </a:endParaRPr>
+            </a:p>
+          </p:txBody>
+        </p:sp>
+        <p:sp>
+          <p:nvSpPr>
+            <p:cNvPr id="8" name="Rectangle 7">
+              <a:extLst>
+                <a:ext uri="{FF2B5EF4-FFF2-40B4-BE49-F238E27FC236}">
+                  <a16:creationId xmlns:a16="http://schemas.microsoft.com/office/drawing/2014/main" id="{1B2453FC-0F32-F09C-D33F-9CF35C97F575}"/>
+                </a:ext>
+              </a:extLst>
+            </p:cNvPr>
+            <p:cNvSpPr/>
+            <p:nvPr/>
+          </p:nvSpPr>
+          <p:spPr bwMode="auto">
+            <a:xfrm>
+              <a:off x="37085847" y="13716000"/>
+              <a:ext cx="914400" cy="1859437"/>
+            </a:xfrm>
+            <a:prstGeom prst="rect">
+              <a:avLst/>
+            </a:prstGeom>
+            <a:solidFill>
+              <a:srgbClr val="72BFC6"/>
+            </a:solidFill>
+            <a:ln w="9525" cap="flat" cmpd="sng" algn="ctr">
+              <a:noFill/>
+              <a:prstDash val="solid"/>
+              <a:round/>
+              <a:headEnd type="none" w="med" len="med"/>
+              <a:tailEnd type="none" w="med" len="med"/>
+            </a:ln>
+            <a:effectLst/>
+          </p:spPr>
+          <p:txBody>
+            <a:bodyPr vert="horz" wrap="square" lIns="91440" tIns="45720" rIns="91440" bIns="45720" numCol="1" rtlCol="0" anchor="t" anchorCtr="0" compatLnSpc="1">
+              <a:prstTxWarp prst="textNoShape">
+                <a:avLst/>
+              </a:prstTxWarp>
+            </a:bodyPr>
+            <a:lstStyle/>
+            <a:p>
+              <a:pPr marL="0" marR="0" indent="0" algn="l" defTabSz="4389438" rtl="0" eaLnBrk="1" fontAlgn="base" latinLnBrk="0" hangingPunct="1">
+                <a:lnSpc>
+                  <a:spcPct val="100000"/>
+                </a:lnSpc>
+                <a:spcBef>
+                  <a:spcPct val="0"/>
+                </a:spcBef>
+                <a:spcAft>
+                  <a:spcPct val="0"/>
+                </a:spcAft>
+                <a:buClrTx/>
+                <a:buSzTx/>
+                <a:buFontTx/>
+                <a:buNone/>
+                <a:tabLst/>
+              </a:pPr>
+              <a:endParaRPr kumimoji="0" lang="en-US" sz="1800" b="0" i="0" u="none" strike="noStrike" cap="none" normalizeH="0" baseline="0">
+                <a:ln>
+                  <a:noFill/>
+                </a:ln>
+                <a:solidFill>
+                  <a:schemeClr val="tx1"/>
+                </a:solidFill>
+                <a:effectLst/>
+                <a:latin typeface="Arial" charset="0"/>
+                <a:cs typeface="Arial" charset="0"/>
+              </a:endParaRPr>
+            </a:p>
+          </p:txBody>
+        </p:sp>
+        <p:sp>
+          <p:nvSpPr>
+            <p:cNvPr id="10" name="Rectangle 9">
+              <a:extLst>
+                <a:ext uri="{FF2B5EF4-FFF2-40B4-BE49-F238E27FC236}">
+                  <a16:creationId xmlns:a16="http://schemas.microsoft.com/office/drawing/2014/main" id="{AB05EE92-0D6D-24D5-3C18-F4E42B7DF8FA}"/>
+                </a:ext>
+              </a:extLst>
+            </p:cNvPr>
+            <p:cNvSpPr/>
+            <p:nvPr/>
+          </p:nvSpPr>
+          <p:spPr bwMode="auto">
+            <a:xfrm>
+              <a:off x="38925730" y="13716000"/>
+              <a:ext cx="914400" cy="1859437"/>
+            </a:xfrm>
+            <a:prstGeom prst="rect">
+              <a:avLst/>
+            </a:prstGeom>
+            <a:solidFill>
+              <a:schemeClr val="accent1"/>
+            </a:solidFill>
+            <a:ln w="9525" cap="flat" cmpd="sng" algn="ctr">
+              <a:noFill/>
+              <a:prstDash val="solid"/>
+              <a:round/>
+              <a:headEnd type="none" w="med" len="med"/>
+              <a:tailEnd type="none" w="med" len="med"/>
+            </a:ln>
+            <a:effectLst/>
+          </p:spPr>
+          <p:txBody>
+            <a:bodyPr vert="horz" wrap="square" lIns="91440" tIns="45720" rIns="91440" bIns="45720" numCol="1" rtlCol="0" anchor="t" anchorCtr="0" compatLnSpc="1">
+              <a:prstTxWarp prst="textNoShape">
+                <a:avLst/>
+              </a:prstTxWarp>
+            </a:bodyPr>
+            <a:lstStyle/>
+            <a:p>
+              <a:pPr marL="0" marR="0" indent="0" algn="l" defTabSz="4389438" rtl="0" eaLnBrk="1" fontAlgn="base" latinLnBrk="0" hangingPunct="1">
+                <a:lnSpc>
+                  <a:spcPct val="100000"/>
+                </a:lnSpc>
+                <a:spcBef>
+                  <a:spcPct val="0"/>
+                </a:spcBef>
+                <a:spcAft>
+                  <a:spcPct val="0"/>
+                </a:spcAft>
+                <a:buClrTx/>
+                <a:buSzTx/>
+                <a:buFontTx/>
+                <a:buNone/>
+                <a:tabLst/>
+              </a:pPr>
+              <a:endParaRPr kumimoji="0" lang="en-US" sz="1800" b="0" i="0" u="none" strike="noStrike" cap="none" normalizeH="0" baseline="0">
+                <a:ln>
+                  <a:noFill/>
+                </a:ln>
+                <a:solidFill>
+                  <a:schemeClr val="tx1"/>
+                </a:solidFill>
+                <a:effectLst/>
+                <a:latin typeface="Arial" charset="0"/>
+                <a:cs typeface="Arial" charset="0"/>
+              </a:endParaRPr>
+            </a:p>
+          </p:txBody>
+        </p:sp>
+        <p:grpSp>
+          <p:nvGrpSpPr>
+            <p:cNvPr id="59" name="Group 58">
+              <a:extLst>
+                <a:ext uri="{FF2B5EF4-FFF2-40B4-BE49-F238E27FC236}">
+                  <a16:creationId xmlns:a16="http://schemas.microsoft.com/office/drawing/2014/main" id="{12C94823-F8B7-BD70-9443-6E0864B4040E}"/>
+                </a:ext>
+              </a:extLst>
+            </p:cNvPr>
+            <p:cNvGrpSpPr/>
+            <p:nvPr/>
+          </p:nvGrpSpPr>
+          <p:grpSpPr>
+            <a:xfrm>
+              <a:off x="35522114" y="10130725"/>
+              <a:ext cx="351296" cy="423621"/>
+              <a:chOff x="35522114" y="10130725"/>
+              <a:chExt cx="351296" cy="423621"/>
+            </a:xfrm>
+          </p:grpSpPr>
+          <p:cxnSp>
+            <p:nvCxnSpPr>
+              <p:cNvPr id="16" name="Straight Connector 15">
+                <a:extLst>
+                  <a:ext uri="{FF2B5EF4-FFF2-40B4-BE49-F238E27FC236}">
+                    <a16:creationId xmlns:a16="http://schemas.microsoft.com/office/drawing/2014/main" id="{1D09282A-B515-4EE1-BDDF-AE42CA67AFBB}"/>
+                  </a:ext>
+                </a:extLst>
+              </p:cNvPr>
+              <p:cNvCxnSpPr>
+                <a:cxnSpLocks/>
+              </p:cNvCxnSpPr>
+              <p:nvPr/>
+            </p:nvCxnSpPr>
+            <p:spPr bwMode="auto">
+              <a:xfrm>
+                <a:off x="35697998" y="10130725"/>
+                <a:ext cx="0" cy="423621"/>
+              </a:xfrm>
+              <a:prstGeom prst="line">
+                <a:avLst/>
+              </a:prstGeom>
+              <a:solidFill>
+                <a:schemeClr val="accent1"/>
+              </a:solidFill>
+              <a:ln w="19050" cap="flat" cmpd="sng" algn="ctr">
+                <a:solidFill>
+                  <a:schemeClr val="tx1"/>
+                </a:solidFill>
+                <a:prstDash val="solid"/>
+                <a:round/>
+                <a:headEnd type="none" w="med" len="med"/>
+                <a:tailEnd type="none" w="med" len="med"/>
+              </a:ln>
+              <a:effectLst/>
+            </p:spPr>
+          </p:cxnSp>
+          <p:cxnSp>
+            <p:nvCxnSpPr>
+              <p:cNvPr id="57" name="Straight Connector 56">
+                <a:extLst>
+                  <a:ext uri="{FF2B5EF4-FFF2-40B4-BE49-F238E27FC236}">
+                    <a16:creationId xmlns:a16="http://schemas.microsoft.com/office/drawing/2014/main" id="{A156E826-50BD-B379-62AE-36A813651248}"/>
+                  </a:ext>
+                </a:extLst>
+              </p:cNvPr>
+              <p:cNvCxnSpPr/>
+              <p:nvPr/>
+            </p:nvCxnSpPr>
+            <p:spPr bwMode="auto">
+              <a:xfrm>
+                <a:off x="35522115" y="10130725"/>
+                <a:ext cx="351295" cy="0"/>
+              </a:xfrm>
+              <a:prstGeom prst="line">
+                <a:avLst/>
+              </a:prstGeom>
+              <a:solidFill>
+                <a:schemeClr val="accent1"/>
+              </a:solidFill>
+              <a:ln w="19050" cap="flat" cmpd="sng" algn="ctr">
+                <a:solidFill>
+                  <a:schemeClr val="tx1"/>
+                </a:solidFill>
+                <a:prstDash val="solid"/>
+                <a:round/>
+                <a:headEnd type="none" w="med" len="med"/>
+                <a:tailEnd type="none" w="med" len="med"/>
+              </a:ln>
+              <a:effectLst/>
+            </p:spPr>
+          </p:cxnSp>
+          <p:cxnSp>
+            <p:nvCxnSpPr>
+              <p:cNvPr id="58" name="Straight Connector 57">
+                <a:extLst>
+                  <a:ext uri="{FF2B5EF4-FFF2-40B4-BE49-F238E27FC236}">
+                    <a16:creationId xmlns:a16="http://schemas.microsoft.com/office/drawing/2014/main" id="{8B32D49D-083F-EDC8-35E2-12D77B21AD8D}"/>
+                  </a:ext>
+                </a:extLst>
+              </p:cNvPr>
+              <p:cNvCxnSpPr/>
+              <p:nvPr/>
+            </p:nvCxnSpPr>
+            <p:spPr bwMode="auto">
+              <a:xfrm>
+                <a:off x="35522114" y="10554346"/>
+                <a:ext cx="351295" cy="0"/>
+              </a:xfrm>
+              <a:prstGeom prst="line">
+                <a:avLst/>
+              </a:prstGeom>
+              <a:solidFill>
+                <a:schemeClr val="accent1"/>
+              </a:solidFill>
+              <a:ln w="19050" cap="flat" cmpd="sng" algn="ctr">
+                <a:solidFill>
+                  <a:schemeClr val="tx1"/>
+                </a:solidFill>
+                <a:prstDash val="solid"/>
+                <a:round/>
+                <a:headEnd type="none" w="med" len="med"/>
+                <a:tailEnd type="none" w="med" len="med"/>
+              </a:ln>
+              <a:effectLst/>
+            </p:spPr>
+          </p:cxnSp>
+        </p:grpSp>
+        <p:grpSp>
+          <p:nvGrpSpPr>
+            <p:cNvPr id="60" name="Group 59">
+              <a:extLst>
+                <a:ext uri="{FF2B5EF4-FFF2-40B4-BE49-F238E27FC236}">
+                  <a16:creationId xmlns:a16="http://schemas.microsoft.com/office/drawing/2014/main" id="{2545418C-55A1-D407-C68A-8D6C8579D69B}"/>
+                </a:ext>
+              </a:extLst>
+            </p:cNvPr>
+            <p:cNvGrpSpPr/>
+            <p:nvPr/>
+          </p:nvGrpSpPr>
+          <p:grpSpPr>
+            <a:xfrm>
+              <a:off x="37367399" y="13504189"/>
+              <a:ext cx="351296" cy="423621"/>
+              <a:chOff x="35522114" y="10130725"/>
+              <a:chExt cx="351296" cy="423621"/>
+            </a:xfrm>
+          </p:grpSpPr>
+          <p:cxnSp>
+            <p:nvCxnSpPr>
+              <p:cNvPr id="61" name="Straight Connector 60">
+                <a:extLst>
+                  <a:ext uri="{FF2B5EF4-FFF2-40B4-BE49-F238E27FC236}">
+                    <a16:creationId xmlns:a16="http://schemas.microsoft.com/office/drawing/2014/main" id="{5372E455-C99E-6522-5C21-053FE29FB28E}"/>
+                  </a:ext>
+                </a:extLst>
+              </p:cNvPr>
+              <p:cNvCxnSpPr>
+                <a:cxnSpLocks/>
+              </p:cNvCxnSpPr>
+              <p:nvPr/>
+            </p:nvCxnSpPr>
+            <p:spPr bwMode="auto">
+              <a:xfrm>
+                <a:off x="35697998" y="10130725"/>
+                <a:ext cx="0" cy="423621"/>
+              </a:xfrm>
+              <a:prstGeom prst="line">
+                <a:avLst/>
+              </a:prstGeom>
+              <a:solidFill>
+                <a:schemeClr val="accent1"/>
+              </a:solidFill>
+              <a:ln w="19050" cap="flat" cmpd="sng" algn="ctr">
+                <a:solidFill>
+                  <a:schemeClr val="tx1"/>
+                </a:solidFill>
+                <a:prstDash val="solid"/>
+                <a:round/>
+                <a:headEnd type="none" w="med" len="med"/>
+                <a:tailEnd type="none" w="med" len="med"/>
+              </a:ln>
+              <a:effectLst/>
+            </p:spPr>
+          </p:cxnSp>
+          <p:cxnSp>
+            <p:nvCxnSpPr>
+              <p:cNvPr id="62" name="Straight Connector 61">
+                <a:extLst>
+                  <a:ext uri="{FF2B5EF4-FFF2-40B4-BE49-F238E27FC236}">
+                    <a16:creationId xmlns:a16="http://schemas.microsoft.com/office/drawing/2014/main" id="{8BFC4EBF-0978-F826-349C-0E7972C254F4}"/>
+                  </a:ext>
+                </a:extLst>
+              </p:cNvPr>
+              <p:cNvCxnSpPr/>
+              <p:nvPr/>
+            </p:nvCxnSpPr>
+            <p:spPr bwMode="auto">
+              <a:xfrm>
+                <a:off x="35522115" y="10130725"/>
+                <a:ext cx="351295" cy="0"/>
+              </a:xfrm>
+              <a:prstGeom prst="line">
+                <a:avLst/>
+              </a:prstGeom>
+              <a:solidFill>
+                <a:schemeClr val="accent1"/>
+              </a:solidFill>
+              <a:ln w="19050" cap="flat" cmpd="sng" algn="ctr">
+                <a:solidFill>
+                  <a:schemeClr val="tx1"/>
+                </a:solidFill>
+                <a:prstDash val="solid"/>
+                <a:round/>
+                <a:headEnd type="none" w="med" len="med"/>
+                <a:tailEnd type="none" w="med" len="med"/>
+              </a:ln>
+              <a:effectLst/>
+            </p:spPr>
+          </p:cxnSp>
+          <p:cxnSp>
+            <p:nvCxnSpPr>
+              <p:cNvPr id="63" name="Straight Connector 62">
+                <a:extLst>
+                  <a:ext uri="{FF2B5EF4-FFF2-40B4-BE49-F238E27FC236}">
+                    <a16:creationId xmlns:a16="http://schemas.microsoft.com/office/drawing/2014/main" id="{5C748ACA-A449-130C-EC6B-9C598C3F9F8F}"/>
+                  </a:ext>
+                </a:extLst>
+              </p:cNvPr>
+              <p:cNvCxnSpPr/>
+              <p:nvPr/>
+            </p:nvCxnSpPr>
+            <p:spPr bwMode="auto">
+              <a:xfrm>
+                <a:off x="35522114" y="10554346"/>
+                <a:ext cx="351295" cy="0"/>
+              </a:xfrm>
+              <a:prstGeom prst="line">
+                <a:avLst/>
+              </a:prstGeom>
+              <a:solidFill>
+                <a:schemeClr val="accent1"/>
+              </a:solidFill>
+              <a:ln w="19050" cap="flat" cmpd="sng" algn="ctr">
+                <a:solidFill>
+                  <a:schemeClr val="tx1"/>
+                </a:solidFill>
+                <a:prstDash val="solid"/>
+                <a:round/>
+                <a:headEnd type="none" w="med" len="med"/>
+                <a:tailEnd type="none" w="med" len="med"/>
+              </a:ln>
+              <a:effectLst/>
+            </p:spPr>
+          </p:cxnSp>
+        </p:grpSp>
+        <p:grpSp>
+          <p:nvGrpSpPr>
+            <p:cNvPr id="64" name="Group 63">
+              <a:extLst>
+                <a:ext uri="{FF2B5EF4-FFF2-40B4-BE49-F238E27FC236}">
+                  <a16:creationId xmlns:a16="http://schemas.microsoft.com/office/drawing/2014/main" id="{ABD76B3B-0A73-E05E-DB39-CCFE628F01BD}"/>
+                </a:ext>
+              </a:extLst>
+            </p:cNvPr>
+            <p:cNvGrpSpPr/>
+            <p:nvPr/>
+          </p:nvGrpSpPr>
+          <p:grpSpPr>
+            <a:xfrm>
+              <a:off x="39207283" y="13504188"/>
+              <a:ext cx="351296" cy="423621"/>
+              <a:chOff x="35522114" y="10130725"/>
+              <a:chExt cx="351296" cy="423621"/>
+            </a:xfrm>
+          </p:grpSpPr>
+          <p:cxnSp>
+            <p:nvCxnSpPr>
+              <p:cNvPr id="65" name="Straight Connector 64">
+                <a:extLst>
+                  <a:ext uri="{FF2B5EF4-FFF2-40B4-BE49-F238E27FC236}">
+                    <a16:creationId xmlns:a16="http://schemas.microsoft.com/office/drawing/2014/main" id="{076CF0D3-AD0A-1AFF-143B-19B5E2288867}"/>
+                  </a:ext>
+                </a:extLst>
+              </p:cNvPr>
+              <p:cNvCxnSpPr>
+                <a:cxnSpLocks/>
+              </p:cNvCxnSpPr>
+              <p:nvPr/>
+            </p:nvCxnSpPr>
+            <p:spPr bwMode="auto">
+              <a:xfrm>
+                <a:off x="35697998" y="10130725"/>
+                <a:ext cx="0" cy="423621"/>
+              </a:xfrm>
+              <a:prstGeom prst="line">
+                <a:avLst/>
+              </a:prstGeom>
+              <a:solidFill>
+                <a:schemeClr val="accent1"/>
+              </a:solidFill>
+              <a:ln w="19050" cap="flat" cmpd="sng" algn="ctr">
+                <a:solidFill>
+                  <a:schemeClr val="tx1"/>
+                </a:solidFill>
+                <a:prstDash val="solid"/>
+                <a:round/>
+                <a:headEnd type="none" w="med" len="med"/>
+                <a:tailEnd type="none" w="med" len="med"/>
+              </a:ln>
+              <a:effectLst/>
+            </p:spPr>
+          </p:cxnSp>
+          <p:cxnSp>
+            <p:nvCxnSpPr>
+              <p:cNvPr id="66" name="Straight Connector 65">
+                <a:extLst>
+                  <a:ext uri="{FF2B5EF4-FFF2-40B4-BE49-F238E27FC236}">
+                    <a16:creationId xmlns:a16="http://schemas.microsoft.com/office/drawing/2014/main" id="{786827D3-1F61-686E-46B2-665C8E4C9D54}"/>
+                  </a:ext>
+                </a:extLst>
+              </p:cNvPr>
+              <p:cNvCxnSpPr/>
+              <p:nvPr/>
+            </p:nvCxnSpPr>
+            <p:spPr bwMode="auto">
+              <a:xfrm>
+                <a:off x="35522115" y="10130725"/>
+                <a:ext cx="351295" cy="0"/>
+              </a:xfrm>
+              <a:prstGeom prst="line">
+                <a:avLst/>
+              </a:prstGeom>
+              <a:solidFill>
+                <a:schemeClr val="accent1"/>
+              </a:solidFill>
+              <a:ln w="19050" cap="flat" cmpd="sng" algn="ctr">
+                <a:solidFill>
+                  <a:schemeClr val="tx1"/>
+                </a:solidFill>
+                <a:prstDash val="solid"/>
+                <a:round/>
+                <a:headEnd type="none" w="med" len="med"/>
+                <a:tailEnd type="none" w="med" len="med"/>
+              </a:ln>
+              <a:effectLst/>
+            </p:spPr>
+          </p:cxnSp>
+          <p:cxnSp>
+            <p:nvCxnSpPr>
+              <p:cNvPr id="67" name="Straight Connector 66">
+                <a:extLst>
+                  <a:ext uri="{FF2B5EF4-FFF2-40B4-BE49-F238E27FC236}">
+                    <a16:creationId xmlns:a16="http://schemas.microsoft.com/office/drawing/2014/main" id="{6D572BB6-024D-AAAB-4885-44452A80C9F5}"/>
+                  </a:ext>
+                </a:extLst>
+              </p:cNvPr>
+              <p:cNvCxnSpPr/>
+              <p:nvPr/>
+            </p:nvCxnSpPr>
+            <p:spPr bwMode="auto">
+              <a:xfrm>
+                <a:off x="35522114" y="10554346"/>
+                <a:ext cx="351295" cy="0"/>
+              </a:xfrm>
+              <a:prstGeom prst="line">
+                <a:avLst/>
+              </a:prstGeom>
+              <a:solidFill>
+                <a:schemeClr val="accent1"/>
+              </a:solidFill>
+              <a:ln w="19050" cap="flat" cmpd="sng" algn="ctr">
+                <a:solidFill>
+                  <a:schemeClr val="tx1"/>
+                </a:solidFill>
+                <a:prstDash val="solid"/>
+                <a:round/>
+                <a:headEnd type="none" w="med" len="med"/>
+                <a:tailEnd type="none" w="med" len="med"/>
+              </a:ln>
+              <a:effectLst/>
+            </p:spPr>
+          </p:cxnSp>
+        </p:grpSp>
+      </p:grpSp>
+      <p:grpSp>
+        <p:nvGrpSpPr>
+          <p:cNvPr id="71" name="Group 70">
+            <a:extLst>
+              <a:ext uri="{FF2B5EF4-FFF2-40B4-BE49-F238E27FC236}">
+                <a16:creationId xmlns:a16="http://schemas.microsoft.com/office/drawing/2014/main" id="{7134CAF9-8C55-C08E-0820-45E82172F285}"/>
+              </a:ext>
+            </a:extLst>
+          </p:cNvPr>
+          <p:cNvGrpSpPr/>
+          <p:nvPr/>
+        </p:nvGrpSpPr>
+        <p:grpSpPr>
+          <a:xfrm>
+            <a:off x="1421938" y="14767343"/>
+            <a:ext cx="5770128" cy="5560255"/>
+            <a:chOff x="1421938" y="14767343"/>
+            <a:chExt cx="5770128" cy="5560255"/>
+          </a:xfrm>
+        </p:grpSpPr>
+        <p:sp>
+          <p:nvSpPr>
+            <p:cNvPr id="72" name="Rectangle 71">
+              <a:extLst>
+                <a:ext uri="{FF2B5EF4-FFF2-40B4-BE49-F238E27FC236}">
+                  <a16:creationId xmlns:a16="http://schemas.microsoft.com/office/drawing/2014/main" id="{8692C001-552E-A0BF-EAF0-D9D03AC630FD}"/>
+                </a:ext>
+              </a:extLst>
+            </p:cNvPr>
+            <p:cNvSpPr/>
+            <p:nvPr/>
+          </p:nvSpPr>
+          <p:spPr bwMode="auto">
+            <a:xfrm>
+              <a:off x="1421941" y="14767343"/>
+              <a:ext cx="5762869" cy="5560255"/>
+            </a:xfrm>
+            <a:prstGeom prst="rect">
+              <a:avLst/>
+            </a:prstGeom>
+            <a:solidFill>
+              <a:srgbClr val="EBEBEB"/>
+            </a:solidFill>
+            <a:ln w="9525" cap="flat" cmpd="sng" algn="ctr">
+              <a:noFill/>
+              <a:prstDash val="solid"/>
+              <a:round/>
+              <a:headEnd type="none" w="med" len="med"/>
+              <a:tailEnd type="none" w="med" len="med"/>
+            </a:ln>
+            <a:effectLst/>
+          </p:spPr>
+          <p:txBody>
+            <a:bodyPr vert="horz" wrap="square" lIns="91440" tIns="45720" rIns="91440" bIns="45720" numCol="1" rtlCol="0" anchor="t" anchorCtr="0" compatLnSpc="1">
+              <a:prstTxWarp prst="textNoShape">
+                <a:avLst/>
+              </a:prstTxWarp>
+            </a:bodyPr>
+            <a:lstStyle/>
+            <a:p>
+              <a:pPr marL="0" marR="0" indent="0" algn="l" defTabSz="4389438" rtl="0" eaLnBrk="1" fontAlgn="base" latinLnBrk="0" hangingPunct="1">
+                <a:lnSpc>
+                  <a:spcPct val="100000"/>
+                </a:lnSpc>
+                <a:spcBef>
+                  <a:spcPct val="0"/>
+                </a:spcBef>
+                <a:spcAft>
+                  <a:spcPct val="0"/>
+                </a:spcAft>
+                <a:buClrTx/>
+                <a:buSzTx/>
+                <a:buFontTx/>
+                <a:buNone/>
+                <a:tabLst/>
+              </a:pPr>
+              <a:endParaRPr kumimoji="0" lang="en-US" sz="1800" b="0" i="0" u="none" strike="noStrike" cap="none" normalizeH="0" baseline="0" dirty="0">
+                <a:ln>
+                  <a:noFill/>
+                </a:ln>
+                <a:solidFill>
+                  <a:schemeClr val="tx1"/>
+                </a:solidFill>
+                <a:effectLst/>
+                <a:latin typeface="Arial" charset="0"/>
+                <a:cs typeface="Arial" charset="0"/>
+              </a:endParaRPr>
+            </a:p>
+          </p:txBody>
+        </p:sp>
+        <p:cxnSp>
+          <p:nvCxnSpPr>
+            <p:cNvPr id="73" name="Straight Connector 72">
+              <a:extLst>
+                <a:ext uri="{FF2B5EF4-FFF2-40B4-BE49-F238E27FC236}">
+                  <a16:creationId xmlns:a16="http://schemas.microsoft.com/office/drawing/2014/main" id="{892797BA-F206-B816-0D24-23740277F523}"/>
+                </a:ext>
+              </a:extLst>
+            </p:cNvPr>
+            <p:cNvCxnSpPr/>
+            <p:nvPr/>
+          </p:nvCxnSpPr>
+          <p:spPr bwMode="auto">
+            <a:xfrm flipH="1">
+              <a:off x="4303375" y="14775666"/>
+              <a:ext cx="14515" cy="5551932"/>
+            </a:xfrm>
+            <a:prstGeom prst="line">
+              <a:avLst/>
+            </a:prstGeom>
+            <a:solidFill>
+              <a:schemeClr val="accent1"/>
+            </a:solidFill>
+            <a:ln w="25400" cap="flat" cmpd="sng" algn="ctr">
+              <a:solidFill>
+                <a:schemeClr val="accent3"/>
+              </a:solidFill>
+              <a:prstDash val="solid"/>
+              <a:round/>
+              <a:headEnd type="none" w="med" len="med"/>
+              <a:tailEnd type="none" w="med" len="med"/>
+            </a:ln>
+            <a:effectLst/>
+          </p:spPr>
+        </p:cxnSp>
+        <p:cxnSp>
+          <p:nvCxnSpPr>
+            <p:cNvPr id="74" name="Straight Connector 73">
+              <a:extLst>
+                <a:ext uri="{FF2B5EF4-FFF2-40B4-BE49-F238E27FC236}">
+                  <a16:creationId xmlns:a16="http://schemas.microsoft.com/office/drawing/2014/main" id="{126CDECF-345E-D128-8967-4E340409A8D4}"/>
+                </a:ext>
+              </a:extLst>
+            </p:cNvPr>
+            <p:cNvCxnSpPr/>
+            <p:nvPr/>
+          </p:nvCxnSpPr>
+          <p:spPr bwMode="auto">
+            <a:xfrm flipH="1">
+              <a:off x="2840886" y="14771504"/>
+              <a:ext cx="14515" cy="5551932"/>
+            </a:xfrm>
+            <a:prstGeom prst="line">
+              <a:avLst/>
+            </a:prstGeom>
+            <a:solidFill>
+              <a:schemeClr val="accent1"/>
+            </a:solidFill>
+            <a:ln w="25400" cap="flat" cmpd="sng" algn="ctr">
+              <a:solidFill>
+                <a:schemeClr val="accent3"/>
+              </a:solidFill>
+              <a:prstDash val="solid"/>
+              <a:round/>
+              <a:headEnd type="none" w="med" len="med"/>
+              <a:tailEnd type="none" w="med" len="med"/>
+            </a:ln>
+            <a:effectLst/>
+          </p:spPr>
+        </p:cxnSp>
+        <p:cxnSp>
+          <p:nvCxnSpPr>
+            <p:cNvPr id="75" name="Straight Connector 74">
+              <a:extLst>
+                <a:ext uri="{FF2B5EF4-FFF2-40B4-BE49-F238E27FC236}">
+                  <a16:creationId xmlns:a16="http://schemas.microsoft.com/office/drawing/2014/main" id="{156F0576-3F33-7771-B61D-8B72E7C18AAE}"/>
+                </a:ext>
+              </a:extLst>
+            </p:cNvPr>
+            <p:cNvCxnSpPr/>
+            <p:nvPr/>
+          </p:nvCxnSpPr>
+          <p:spPr bwMode="auto">
+            <a:xfrm flipH="1">
+              <a:off x="5722320" y="14767343"/>
+              <a:ext cx="14515" cy="5551932"/>
+            </a:xfrm>
+            <a:prstGeom prst="line">
+              <a:avLst/>
+            </a:prstGeom>
+            <a:solidFill>
+              <a:schemeClr val="accent1"/>
+            </a:solidFill>
+            <a:ln w="25400" cap="flat" cmpd="sng" algn="ctr">
+              <a:solidFill>
+                <a:schemeClr val="accent3"/>
+              </a:solidFill>
+              <a:prstDash val="solid"/>
+              <a:round/>
+              <a:headEnd type="none" w="med" len="med"/>
+              <a:tailEnd type="none" w="med" len="med"/>
+            </a:ln>
+            <a:effectLst/>
+          </p:spPr>
+        </p:cxnSp>
+        <p:cxnSp>
+          <p:nvCxnSpPr>
+            <p:cNvPr id="76" name="Straight Connector 75">
+              <a:extLst>
+                <a:ext uri="{FF2B5EF4-FFF2-40B4-BE49-F238E27FC236}">
+                  <a16:creationId xmlns:a16="http://schemas.microsoft.com/office/drawing/2014/main" id="{B3535D1D-4108-CA34-F032-77C2E850B187}"/>
+                </a:ext>
+              </a:extLst>
+            </p:cNvPr>
+            <p:cNvCxnSpPr>
+              <a:stCxn id="72" idx="1"/>
+              <a:endCxn id="72" idx="3"/>
+            </p:cNvCxnSpPr>
+            <p:nvPr/>
+          </p:nvCxnSpPr>
+          <p:spPr bwMode="auto">
+            <a:xfrm>
+              <a:off x="1421941" y="17547471"/>
+              <a:ext cx="5762869" cy="0"/>
+            </a:xfrm>
+            <a:prstGeom prst="line">
+              <a:avLst/>
+            </a:prstGeom>
+            <a:solidFill>
+              <a:schemeClr val="accent1"/>
+            </a:solidFill>
+            <a:ln w="25400" cap="flat" cmpd="sng" algn="ctr">
+              <a:solidFill>
+                <a:schemeClr val="accent3"/>
+              </a:solidFill>
+              <a:prstDash val="solid"/>
+              <a:round/>
+              <a:headEnd type="none" w="med" len="med"/>
+              <a:tailEnd type="none" w="med" len="med"/>
+            </a:ln>
+            <a:effectLst/>
+          </p:spPr>
+        </p:cxnSp>
+        <p:cxnSp>
+          <p:nvCxnSpPr>
+            <p:cNvPr id="77" name="Straight Connector 76">
+              <a:extLst>
+                <a:ext uri="{FF2B5EF4-FFF2-40B4-BE49-F238E27FC236}">
+                  <a16:creationId xmlns:a16="http://schemas.microsoft.com/office/drawing/2014/main" id="{AF52D305-65CB-CEC1-9A60-BDDF5CF5B795}"/>
+                </a:ext>
+              </a:extLst>
+            </p:cNvPr>
+            <p:cNvCxnSpPr/>
+            <p:nvPr/>
+          </p:nvCxnSpPr>
+          <p:spPr bwMode="auto">
+            <a:xfrm>
+              <a:off x="1421940" y="18803458"/>
+              <a:ext cx="5762869" cy="0"/>
+            </a:xfrm>
+            <a:prstGeom prst="line">
+              <a:avLst/>
+            </a:prstGeom>
+            <a:solidFill>
+              <a:schemeClr val="accent1"/>
+            </a:solidFill>
+            <a:ln w="25400" cap="flat" cmpd="sng" algn="ctr">
+              <a:solidFill>
+                <a:schemeClr val="accent3"/>
+              </a:solidFill>
+              <a:prstDash val="solid"/>
+              <a:round/>
+              <a:headEnd type="none" w="med" len="med"/>
+              <a:tailEnd type="none" w="med" len="med"/>
+            </a:ln>
+            <a:effectLst/>
+          </p:spPr>
+        </p:cxnSp>
+        <p:cxnSp>
+          <p:nvCxnSpPr>
+            <p:cNvPr id="78" name="Straight Connector 77">
+              <a:extLst>
+                <a:ext uri="{FF2B5EF4-FFF2-40B4-BE49-F238E27FC236}">
+                  <a16:creationId xmlns:a16="http://schemas.microsoft.com/office/drawing/2014/main" id="{5D2F51D8-3D1A-6B2C-5FA6-27B779344ACC}"/>
+                </a:ext>
+              </a:extLst>
+            </p:cNvPr>
+            <p:cNvCxnSpPr/>
+            <p:nvPr/>
+          </p:nvCxnSpPr>
+          <p:spPr bwMode="auto">
+            <a:xfrm>
+              <a:off x="1429197" y="16328272"/>
+              <a:ext cx="5762869" cy="0"/>
+            </a:xfrm>
+            <a:prstGeom prst="line">
+              <a:avLst/>
+            </a:prstGeom>
+            <a:solidFill>
+              <a:schemeClr val="accent1"/>
+            </a:solidFill>
+            <a:ln w="25400" cap="flat" cmpd="sng" algn="ctr">
+              <a:solidFill>
+                <a:schemeClr val="accent3"/>
+              </a:solidFill>
+              <a:prstDash val="solid"/>
+              <a:round/>
+              <a:headEnd type="none" w="med" len="med"/>
+              <a:tailEnd type="none" w="med" len="med"/>
+            </a:ln>
+            <a:effectLst/>
+          </p:spPr>
+        </p:cxnSp>
+        <p:cxnSp>
+          <p:nvCxnSpPr>
+            <p:cNvPr id="79" name="Straight Connector 78">
+              <a:extLst>
+                <a:ext uri="{FF2B5EF4-FFF2-40B4-BE49-F238E27FC236}">
+                  <a16:creationId xmlns:a16="http://schemas.microsoft.com/office/drawing/2014/main" id="{88EF8ECA-4A75-8119-7C89-03A8BC4A6CEB}"/>
+                </a:ext>
+              </a:extLst>
+            </p:cNvPr>
+            <p:cNvCxnSpPr/>
+            <p:nvPr/>
+          </p:nvCxnSpPr>
+          <p:spPr bwMode="auto">
+            <a:xfrm>
+              <a:off x="1421939" y="20048934"/>
+              <a:ext cx="5762869" cy="0"/>
+            </a:xfrm>
+            <a:prstGeom prst="line">
+              <a:avLst/>
+            </a:prstGeom>
+            <a:solidFill>
+              <a:schemeClr val="accent1"/>
+            </a:solidFill>
+            <a:ln w="25400" cap="flat" cmpd="sng" algn="ctr">
+              <a:solidFill>
+                <a:schemeClr val="accent3"/>
+              </a:solidFill>
+              <a:prstDash val="solid"/>
+              <a:round/>
+              <a:headEnd type="none" w="med" len="med"/>
+              <a:tailEnd type="none" w="med" len="med"/>
+            </a:ln>
+            <a:effectLst/>
+          </p:spPr>
+        </p:cxnSp>
+        <p:cxnSp>
+          <p:nvCxnSpPr>
+            <p:cNvPr id="80" name="Straight Connector 79">
+              <a:extLst>
+                <a:ext uri="{FF2B5EF4-FFF2-40B4-BE49-F238E27FC236}">
+                  <a16:creationId xmlns:a16="http://schemas.microsoft.com/office/drawing/2014/main" id="{59BAF877-694B-9CFF-5728-FB72909E61AD}"/>
+                </a:ext>
+              </a:extLst>
+            </p:cNvPr>
+            <p:cNvCxnSpPr/>
+            <p:nvPr/>
+          </p:nvCxnSpPr>
+          <p:spPr bwMode="auto">
+            <a:xfrm>
+              <a:off x="1421938" y="15088052"/>
+              <a:ext cx="5762869" cy="0"/>
+            </a:xfrm>
+            <a:prstGeom prst="line">
+              <a:avLst/>
+            </a:prstGeom>
+            <a:solidFill>
+              <a:schemeClr val="accent1"/>
+            </a:solidFill>
+            <a:ln w="25400" cap="flat" cmpd="sng" algn="ctr">
+              <a:solidFill>
+                <a:schemeClr val="accent3"/>
+              </a:solidFill>
+              <a:prstDash val="solid"/>
+              <a:round/>
+              <a:headEnd type="none" w="med" len="med"/>
+              <a:tailEnd type="none" w="med" len="med"/>
+            </a:ln>
+            <a:effectLst/>
+          </p:spPr>
+        </p:cxnSp>
+      </p:grpSp>
     </p:spTree>
     <p:extLst>
       <p:ext uri="{BB962C8B-B14F-4D97-AF65-F5344CB8AC3E}">
@@ -14868,6 +16909,410 @@
 </file>
 
 <file path=ppt/slides/slide3.xml><?xml version="1.0" encoding="utf-8"?>
+<p:sld xmlns:a="http://schemas.openxmlformats.org/drawingml/2006/main" xmlns:r="http://schemas.openxmlformats.org/officeDocument/2006/relationships" xmlns:p="http://schemas.openxmlformats.org/presentationml/2006/main">
+  <p:cSld>
+    <p:spTree>
+      <p:nvGrpSpPr>
+        <p:cNvPr id="1" name=""/>
+        <p:cNvGrpSpPr/>
+        <p:nvPr/>
+      </p:nvGrpSpPr>
+      <p:grpSpPr>
+        <a:xfrm>
+          <a:off x="0" y="0"/>
+          <a:ext cx="0" cy="0"/>
+          <a:chOff x="0" y="0"/>
+          <a:chExt cx="0" cy="0"/>
+        </a:xfrm>
+      </p:grpSpPr>
+      <p:grpSp>
+        <p:nvGrpSpPr>
+          <p:cNvPr id="12" name="Group 11">
+            <a:extLst>
+              <a:ext uri="{FF2B5EF4-FFF2-40B4-BE49-F238E27FC236}">
+                <a16:creationId xmlns:a16="http://schemas.microsoft.com/office/drawing/2014/main" id="{87FEA0B6-0A74-0C0F-3FB1-0EAD7701882D}"/>
+              </a:ext>
+            </a:extLst>
+          </p:cNvPr>
+          <p:cNvGrpSpPr/>
+          <p:nvPr/>
+        </p:nvGrpSpPr>
+        <p:grpSpPr>
+          <a:xfrm>
+            <a:off x="1421938" y="14767343"/>
+            <a:ext cx="5770128" cy="5560255"/>
+            <a:chOff x="1421938" y="14767343"/>
+            <a:chExt cx="5770128" cy="5560255"/>
+          </a:xfrm>
+        </p:grpSpPr>
+        <p:sp>
+          <p:nvSpPr>
+            <p:cNvPr id="2" name="Rectangle 1">
+              <a:extLst>
+                <a:ext uri="{FF2B5EF4-FFF2-40B4-BE49-F238E27FC236}">
+                  <a16:creationId xmlns:a16="http://schemas.microsoft.com/office/drawing/2014/main" id="{D3C061F5-8F54-E2FF-255D-66D2D0F76517}"/>
+                </a:ext>
+              </a:extLst>
+            </p:cNvPr>
+            <p:cNvSpPr/>
+            <p:nvPr/>
+          </p:nvSpPr>
+          <p:spPr bwMode="auto">
+            <a:xfrm>
+              <a:off x="1421941" y="14767343"/>
+              <a:ext cx="5762869" cy="5560255"/>
+            </a:xfrm>
+            <a:prstGeom prst="rect">
+              <a:avLst/>
+            </a:prstGeom>
+            <a:solidFill>
+              <a:srgbClr val="EBEBEB"/>
+            </a:solidFill>
+            <a:ln w="9525" cap="flat" cmpd="sng" algn="ctr">
+              <a:noFill/>
+              <a:prstDash val="solid"/>
+              <a:round/>
+              <a:headEnd type="none" w="med" len="med"/>
+              <a:tailEnd type="none" w="med" len="med"/>
+            </a:ln>
+            <a:effectLst/>
+          </p:spPr>
+          <p:txBody>
+            <a:bodyPr vert="horz" wrap="square" lIns="91440" tIns="45720" rIns="91440" bIns="45720" numCol="1" rtlCol="0" anchor="t" anchorCtr="0" compatLnSpc="1">
+              <a:prstTxWarp prst="textNoShape">
+                <a:avLst/>
+              </a:prstTxWarp>
+            </a:bodyPr>
+            <a:lstStyle/>
+            <a:p>
+              <a:pPr marL="0" marR="0" indent="0" algn="l" defTabSz="4389438" rtl="0" eaLnBrk="1" fontAlgn="base" latinLnBrk="0" hangingPunct="1">
+                <a:lnSpc>
+                  <a:spcPct val="100000"/>
+                </a:lnSpc>
+                <a:spcBef>
+                  <a:spcPct val="0"/>
+                </a:spcBef>
+                <a:spcAft>
+                  <a:spcPct val="0"/>
+                </a:spcAft>
+                <a:buClrTx/>
+                <a:buSzTx/>
+                <a:buFontTx/>
+                <a:buNone/>
+                <a:tabLst/>
+              </a:pPr>
+              <a:endParaRPr kumimoji="0" lang="en-US" sz="1800" b="0" i="0" u="none" strike="noStrike" cap="none" normalizeH="0" baseline="0" dirty="0">
+                <a:ln>
+                  <a:noFill/>
+                </a:ln>
+                <a:solidFill>
+                  <a:schemeClr val="tx1"/>
+                </a:solidFill>
+                <a:effectLst/>
+                <a:latin typeface="Arial" charset="0"/>
+                <a:cs typeface="Arial" charset="0"/>
+              </a:endParaRPr>
+            </a:p>
+          </p:txBody>
+        </p:sp>
+        <p:cxnSp>
+          <p:nvCxnSpPr>
+            <p:cNvPr id="3" name="Straight Connector 2">
+              <a:extLst>
+                <a:ext uri="{FF2B5EF4-FFF2-40B4-BE49-F238E27FC236}">
+                  <a16:creationId xmlns:a16="http://schemas.microsoft.com/office/drawing/2014/main" id="{8D042BA7-5F5A-36F0-850A-C2577060B749}"/>
+                </a:ext>
+              </a:extLst>
+            </p:cNvPr>
+            <p:cNvCxnSpPr/>
+            <p:nvPr/>
+          </p:nvCxnSpPr>
+          <p:spPr bwMode="auto">
+            <a:xfrm flipH="1">
+              <a:off x="4303375" y="14775666"/>
+              <a:ext cx="14515" cy="5551932"/>
+            </a:xfrm>
+            <a:prstGeom prst="line">
+              <a:avLst/>
+            </a:prstGeom>
+            <a:solidFill>
+              <a:schemeClr val="accent1"/>
+            </a:solidFill>
+            <a:ln w="25400" cap="flat" cmpd="sng" algn="ctr">
+              <a:solidFill>
+                <a:schemeClr val="accent3"/>
+              </a:solidFill>
+              <a:prstDash val="solid"/>
+              <a:round/>
+              <a:headEnd type="none" w="med" len="med"/>
+              <a:tailEnd type="none" w="med" len="med"/>
+            </a:ln>
+            <a:effectLst/>
+          </p:spPr>
+        </p:cxnSp>
+        <p:cxnSp>
+          <p:nvCxnSpPr>
+            <p:cNvPr id="4" name="Straight Connector 3">
+              <a:extLst>
+                <a:ext uri="{FF2B5EF4-FFF2-40B4-BE49-F238E27FC236}">
+                  <a16:creationId xmlns:a16="http://schemas.microsoft.com/office/drawing/2014/main" id="{15FD1E44-CFDC-B758-7022-A454002AE588}"/>
+                </a:ext>
+              </a:extLst>
+            </p:cNvPr>
+            <p:cNvCxnSpPr/>
+            <p:nvPr/>
+          </p:nvCxnSpPr>
+          <p:spPr bwMode="auto">
+            <a:xfrm flipH="1">
+              <a:off x="2840886" y="14771504"/>
+              <a:ext cx="14515" cy="5551932"/>
+            </a:xfrm>
+            <a:prstGeom prst="line">
+              <a:avLst/>
+            </a:prstGeom>
+            <a:solidFill>
+              <a:schemeClr val="accent1"/>
+            </a:solidFill>
+            <a:ln w="25400" cap="flat" cmpd="sng" algn="ctr">
+              <a:solidFill>
+                <a:schemeClr val="accent3"/>
+              </a:solidFill>
+              <a:prstDash val="solid"/>
+              <a:round/>
+              <a:headEnd type="none" w="med" len="med"/>
+              <a:tailEnd type="none" w="med" len="med"/>
+            </a:ln>
+            <a:effectLst/>
+          </p:spPr>
+        </p:cxnSp>
+        <p:cxnSp>
+          <p:nvCxnSpPr>
+            <p:cNvPr id="5" name="Straight Connector 4">
+              <a:extLst>
+                <a:ext uri="{FF2B5EF4-FFF2-40B4-BE49-F238E27FC236}">
+                  <a16:creationId xmlns:a16="http://schemas.microsoft.com/office/drawing/2014/main" id="{2CADB742-0CDC-DC37-ED5C-2B377B62CEF5}"/>
+                </a:ext>
+              </a:extLst>
+            </p:cNvPr>
+            <p:cNvCxnSpPr/>
+            <p:nvPr/>
+          </p:nvCxnSpPr>
+          <p:spPr bwMode="auto">
+            <a:xfrm flipH="1">
+              <a:off x="5722320" y="14767343"/>
+              <a:ext cx="14515" cy="5551932"/>
+            </a:xfrm>
+            <a:prstGeom prst="line">
+              <a:avLst/>
+            </a:prstGeom>
+            <a:solidFill>
+              <a:schemeClr val="accent1"/>
+            </a:solidFill>
+            <a:ln w="25400" cap="flat" cmpd="sng" algn="ctr">
+              <a:solidFill>
+                <a:schemeClr val="accent3"/>
+              </a:solidFill>
+              <a:prstDash val="solid"/>
+              <a:round/>
+              <a:headEnd type="none" w="med" len="med"/>
+              <a:tailEnd type="none" w="med" len="med"/>
+            </a:ln>
+            <a:effectLst/>
+          </p:spPr>
+        </p:cxnSp>
+        <p:cxnSp>
+          <p:nvCxnSpPr>
+            <p:cNvPr id="7" name="Straight Connector 6">
+              <a:extLst>
+                <a:ext uri="{FF2B5EF4-FFF2-40B4-BE49-F238E27FC236}">
+                  <a16:creationId xmlns:a16="http://schemas.microsoft.com/office/drawing/2014/main" id="{D5418E4F-BB4E-52E4-446B-B4C3A71E88D0}"/>
+                </a:ext>
+              </a:extLst>
+            </p:cNvPr>
+            <p:cNvCxnSpPr>
+              <a:stCxn id="2" idx="1"/>
+              <a:endCxn id="2" idx="3"/>
+            </p:cNvCxnSpPr>
+            <p:nvPr/>
+          </p:nvCxnSpPr>
+          <p:spPr bwMode="auto">
+            <a:xfrm>
+              <a:off x="1421941" y="17547471"/>
+              <a:ext cx="5762869" cy="0"/>
+            </a:xfrm>
+            <a:prstGeom prst="line">
+              <a:avLst/>
+            </a:prstGeom>
+            <a:solidFill>
+              <a:schemeClr val="accent1"/>
+            </a:solidFill>
+            <a:ln w="25400" cap="flat" cmpd="sng" algn="ctr">
+              <a:solidFill>
+                <a:schemeClr val="accent3"/>
+              </a:solidFill>
+              <a:prstDash val="solid"/>
+              <a:round/>
+              <a:headEnd type="none" w="med" len="med"/>
+              <a:tailEnd type="none" w="med" len="med"/>
+            </a:ln>
+            <a:effectLst/>
+          </p:spPr>
+        </p:cxnSp>
+        <p:cxnSp>
+          <p:nvCxnSpPr>
+            <p:cNvPr id="8" name="Straight Connector 7">
+              <a:extLst>
+                <a:ext uri="{FF2B5EF4-FFF2-40B4-BE49-F238E27FC236}">
+                  <a16:creationId xmlns:a16="http://schemas.microsoft.com/office/drawing/2014/main" id="{C5D41D7D-E264-B1C2-07CB-937C70260BA2}"/>
+                </a:ext>
+              </a:extLst>
+            </p:cNvPr>
+            <p:cNvCxnSpPr/>
+            <p:nvPr/>
+          </p:nvCxnSpPr>
+          <p:spPr bwMode="auto">
+            <a:xfrm>
+              <a:off x="1421940" y="18803458"/>
+              <a:ext cx="5762869" cy="0"/>
+            </a:xfrm>
+            <a:prstGeom prst="line">
+              <a:avLst/>
+            </a:prstGeom>
+            <a:solidFill>
+              <a:schemeClr val="accent1"/>
+            </a:solidFill>
+            <a:ln w="25400" cap="flat" cmpd="sng" algn="ctr">
+              <a:solidFill>
+                <a:schemeClr val="accent3"/>
+              </a:solidFill>
+              <a:prstDash val="solid"/>
+              <a:round/>
+              <a:headEnd type="none" w="med" len="med"/>
+              <a:tailEnd type="none" w="med" len="med"/>
+            </a:ln>
+            <a:effectLst/>
+          </p:spPr>
+        </p:cxnSp>
+        <p:cxnSp>
+          <p:nvCxnSpPr>
+            <p:cNvPr id="9" name="Straight Connector 8">
+              <a:extLst>
+                <a:ext uri="{FF2B5EF4-FFF2-40B4-BE49-F238E27FC236}">
+                  <a16:creationId xmlns:a16="http://schemas.microsoft.com/office/drawing/2014/main" id="{E351987E-C902-D4BC-BEB6-8721F79F23DE}"/>
+                </a:ext>
+              </a:extLst>
+            </p:cNvPr>
+            <p:cNvCxnSpPr/>
+            <p:nvPr/>
+          </p:nvCxnSpPr>
+          <p:spPr bwMode="auto">
+            <a:xfrm>
+              <a:off x="1429197" y="16328272"/>
+              <a:ext cx="5762869" cy="0"/>
+            </a:xfrm>
+            <a:prstGeom prst="line">
+              <a:avLst/>
+            </a:prstGeom>
+            <a:solidFill>
+              <a:schemeClr val="accent1"/>
+            </a:solidFill>
+            <a:ln w="25400" cap="flat" cmpd="sng" algn="ctr">
+              <a:solidFill>
+                <a:schemeClr val="accent3"/>
+              </a:solidFill>
+              <a:prstDash val="solid"/>
+              <a:round/>
+              <a:headEnd type="none" w="med" len="med"/>
+              <a:tailEnd type="none" w="med" len="med"/>
+            </a:ln>
+            <a:effectLst/>
+          </p:spPr>
+        </p:cxnSp>
+        <p:cxnSp>
+          <p:nvCxnSpPr>
+            <p:cNvPr id="10" name="Straight Connector 9">
+              <a:extLst>
+                <a:ext uri="{FF2B5EF4-FFF2-40B4-BE49-F238E27FC236}">
+                  <a16:creationId xmlns:a16="http://schemas.microsoft.com/office/drawing/2014/main" id="{692C0EB5-3BE9-C9EB-E949-8240C7DC36CE}"/>
+                </a:ext>
+              </a:extLst>
+            </p:cNvPr>
+            <p:cNvCxnSpPr/>
+            <p:nvPr/>
+          </p:nvCxnSpPr>
+          <p:spPr bwMode="auto">
+            <a:xfrm>
+              <a:off x="1421939" y="20048934"/>
+              <a:ext cx="5762869" cy="0"/>
+            </a:xfrm>
+            <a:prstGeom prst="line">
+              <a:avLst/>
+            </a:prstGeom>
+            <a:solidFill>
+              <a:schemeClr val="accent1"/>
+            </a:solidFill>
+            <a:ln w="25400" cap="flat" cmpd="sng" algn="ctr">
+              <a:solidFill>
+                <a:schemeClr val="accent3"/>
+              </a:solidFill>
+              <a:prstDash val="solid"/>
+              <a:round/>
+              <a:headEnd type="none" w="med" len="med"/>
+              <a:tailEnd type="none" w="med" len="med"/>
+            </a:ln>
+            <a:effectLst/>
+          </p:spPr>
+        </p:cxnSp>
+        <p:cxnSp>
+          <p:nvCxnSpPr>
+            <p:cNvPr id="11" name="Straight Connector 10">
+              <a:extLst>
+                <a:ext uri="{FF2B5EF4-FFF2-40B4-BE49-F238E27FC236}">
+                  <a16:creationId xmlns:a16="http://schemas.microsoft.com/office/drawing/2014/main" id="{A71399DB-660C-6CE2-8B67-DA2660ACD78E}"/>
+                </a:ext>
+              </a:extLst>
+            </p:cNvPr>
+            <p:cNvCxnSpPr/>
+            <p:nvPr/>
+          </p:nvCxnSpPr>
+          <p:spPr bwMode="auto">
+            <a:xfrm>
+              <a:off x="1421938" y="15088052"/>
+              <a:ext cx="5762869" cy="0"/>
+            </a:xfrm>
+            <a:prstGeom prst="line">
+              <a:avLst/>
+            </a:prstGeom>
+            <a:solidFill>
+              <a:schemeClr val="accent1"/>
+            </a:solidFill>
+            <a:ln w="25400" cap="flat" cmpd="sng" algn="ctr">
+              <a:solidFill>
+                <a:schemeClr val="accent3"/>
+              </a:solidFill>
+              <a:prstDash val="solid"/>
+              <a:round/>
+              <a:headEnd type="none" w="med" len="med"/>
+              <a:tailEnd type="none" w="med" len="med"/>
+            </a:ln>
+            <a:effectLst/>
+          </p:spPr>
+        </p:cxnSp>
+      </p:grpSp>
+    </p:spTree>
+    <p:extLst>
+      <p:ext uri="{BB962C8B-B14F-4D97-AF65-F5344CB8AC3E}">
+        <p14:creationId xmlns:p14="http://schemas.microsoft.com/office/powerpoint/2010/main" val="2478095206"/>
+      </p:ext>
+    </p:extLst>
+  </p:cSld>
+  <p:clrMapOvr>
+    <a:masterClrMapping/>
+  </p:clrMapOvr>
+</p:sld>
+</file>
+
+<file path=ppt/slides/slide4.xml><?xml version="1.0" encoding="utf-8"?>
 <p:sld xmlns:a="http://schemas.openxmlformats.org/drawingml/2006/main" xmlns:r="http://schemas.openxmlformats.org/officeDocument/2006/relationships" xmlns:p="http://schemas.openxmlformats.org/presentationml/2006/main">
   <p:cSld>
     <p:spTree>
@@ -15755,7 +18200,7 @@
 </p:sld>
 </file>
 
-<file path=ppt/slides/slide4.xml><?xml version="1.0" encoding="utf-8"?>
+<file path=ppt/slides/slide5.xml><?xml version="1.0" encoding="utf-8"?>
 <p:sld xmlns:a="http://schemas.openxmlformats.org/drawingml/2006/main" xmlns:r="http://schemas.openxmlformats.org/officeDocument/2006/relationships" xmlns:p="http://schemas.openxmlformats.org/presentationml/2006/main">
   <p:cSld>
     <p:spTree>

--- a/SFN/2023_SFN_trust.pptx
+++ b/SFN/2023_SFN_trust.pptx
@@ -12434,9 +12434,9 @@
         <p:grpSpPr>
           <a:xfrm>
             <a:off x="15693029" y="5633407"/>
-            <a:ext cx="6831019" cy="6045286"/>
+            <a:ext cx="6831019" cy="6073863"/>
             <a:chOff x="15693029" y="5633407"/>
-            <a:chExt cx="6831019" cy="6045286"/>
+            <a:chExt cx="6831019" cy="6073863"/>
           </a:xfrm>
         </p:grpSpPr>
         <p:grpSp>
@@ -12828,9 +12828,9 @@
           <p:grpSpPr>
             <a:xfrm>
               <a:off x="15693029" y="6238462"/>
-              <a:ext cx="6764612" cy="5440231"/>
+              <a:ext cx="6636023" cy="5468808"/>
               <a:chOff x="15670877" y="5930781"/>
-              <a:chExt cx="6764612" cy="5440231"/>
+              <a:chExt cx="6636023" cy="5468808"/>
             </a:xfrm>
           </p:grpSpPr>
           <p:sp>
@@ -12882,10 +12882,10 @@
             </p:nvGrpSpPr>
             <p:grpSpPr>
               <a:xfrm>
-                <a:off x="16093240" y="5930781"/>
-                <a:ext cx="6342249" cy="5440231"/>
-                <a:chOff x="16093240" y="5930781"/>
-                <a:chExt cx="6342249" cy="5440231"/>
+                <a:off x="16093244" y="5930781"/>
+                <a:ext cx="6213656" cy="5468808"/>
+                <a:chOff x="16093244" y="5930781"/>
+                <a:chExt cx="6213656" cy="5468808"/>
               </a:xfrm>
             </p:grpSpPr>
             <p:grpSp>
@@ -12902,10 +12902,10 @@
               </p:nvGrpSpPr>
               <p:grpSpPr>
                 <a:xfrm>
-                  <a:off x="16093240" y="6288749"/>
-                  <a:ext cx="6342249" cy="5082263"/>
+                  <a:off x="16093244" y="6288749"/>
+                  <a:ext cx="6213656" cy="5110840"/>
                   <a:chOff x="16307695" y="5718009"/>
-                  <a:chExt cx="4012927" cy="3083133"/>
+                  <a:chExt cx="3931562" cy="3100469"/>
                 </a:xfrm>
               </p:grpSpPr>
               <p:sp>
@@ -12992,7 +12992,7 @@
                 </p:nvSpPr>
                 <p:spPr>
                   <a:xfrm>
-                    <a:off x="16934663" y="8465001"/>
+                    <a:off x="16997948" y="8482337"/>
                     <a:ext cx="805531" cy="336081"/>
                   </a:xfrm>
                   <a:prstGeom prst="rect">
@@ -13028,7 +13028,7 @@
                 </p:nvSpPr>
                 <p:spPr>
                   <a:xfrm>
-                    <a:off x="18022351" y="8460397"/>
+                    <a:off x="17986188" y="8477732"/>
                     <a:ext cx="1048955" cy="336081"/>
                   </a:xfrm>
                   <a:prstGeom prst="rect">
@@ -13063,7 +13063,7 @@
                 </p:nvSpPr>
                 <p:spPr>
                   <a:xfrm>
-                    <a:off x="19136770" y="8465061"/>
+                    <a:off x="19055405" y="8482397"/>
                     <a:ext cx="1183852" cy="336081"/>
                   </a:xfrm>
                   <a:prstGeom prst="rect">
@@ -13720,7 +13720,7 @@
         </p:nvCxnSpPr>
         <p:spPr bwMode="auto">
           <a:xfrm>
-            <a:off x="16761179" y="11181224"/>
+            <a:off x="16754740" y="11187663"/>
             <a:ext cx="5755610" cy="0"/>
           </a:xfrm>
           <a:prstGeom prst="line">
